--- a/SPONSOR_CONTENT_REPORT.pptx
+++ b/SPONSOR_CONTENT_REPORT.pptx
@@ -3322,7 +3322,7 @@
                 </a:solidFill>
                 <a:latin typeface="Helvetica Neue"/>
               </a:rPr>
-              <a:t>Reporting window: Jun 8 → 2026-07-24</a:t>
+              <a:t>Reporting window: Jun 8 → 2026-07-27</a:t>
             </a:r>
           </a:p>
         </p:txBody>
@@ -3744,7 +3744,7 @@
                 </a:solidFill>
                 <a:latin typeface="Georgia"/>
               </a:rPr>
-              <a:t>25,952</a:t>
+              <a:t>26,406</a:t>
             </a:r>
           </a:p>
         </p:txBody>
@@ -3778,7 +3778,7 @@
                 </a:solidFill>
                 <a:latin typeface="Helvetica Neue"/>
               </a:rPr>
-              <a:t>37 posts · 872 likes</a:t>
+              <a:t>37 posts · 888 likes</a:t>
             </a:r>
           </a:p>
         </p:txBody>
@@ -3812,7 +3812,7 @@
                 </a:solidFill>
                 <a:latin typeface="Helvetica Neue"/>
               </a:rPr>
-              <a:t>701 average views per post</a:t>
+              <a:t>714 average views per post</a:t>
             </a:r>
           </a:p>
         </p:txBody>
@@ -4280,7 +4280,7 @@
                 </a:solidFill>
                 <a:latin typeface="Helvetica Neue"/>
               </a:rPr>
-              <a:t>#3  ·  FB  ·  1,641 views</a:t>
+              <a:t>#3  ·  FB  ·  1,788 views</a:t>
             </a:r>
           </a:p>
         </p:txBody>
@@ -4746,7 +4746,7 @@
                 </a:solidFill>
                 <a:latin typeface="Georgia"/>
               </a:rPr>
-              <a:t>7,314</a:t>
+              <a:t>7,336</a:t>
             </a:r>
           </a:p>
         </p:txBody>
@@ -4780,7 +4780,7 @@
                 </a:solidFill>
                 <a:latin typeface="Helvetica Neue"/>
               </a:rPr>
-              <a:t>6 posts · 134 likes</a:t>
+              <a:t>6 posts · 133 likes</a:t>
             </a:r>
           </a:p>
         </p:txBody>
@@ -4814,7 +4814,7 @@
                 </a:solidFill>
                 <a:latin typeface="Helvetica Neue"/>
               </a:rPr>
-              <a:t>1,219 average views per post</a:t>
+              <a:t>1,223 average views per post</a:t>
             </a:r>
           </a:p>
         </p:txBody>
@@ -5282,7 +5282,7 @@
                 </a:solidFill>
                 <a:latin typeface="Helvetica Neue"/>
               </a:rPr>
-              <a:t>#3  ·  FB  ·  799 views</a:t>
+              <a:t>#3  ·  FB  ·  812 views</a:t>
             </a:r>
           </a:p>
         </p:txBody>
@@ -6750,7 +6750,7 @@
                 </a:solidFill>
                 <a:latin typeface="Georgia"/>
               </a:rPr>
-              <a:t>1,105</a:t>
+              <a:t>1,111</a:t>
             </a:r>
           </a:p>
         </p:txBody>
@@ -6818,7 +6818,7 @@
                 </a:solidFill>
                 <a:latin typeface="Helvetica Neue"/>
               </a:rPr>
-              <a:t>552 average views per post</a:t>
+              <a:t>556 average views per post</a:t>
             </a:r>
           </a:p>
         </p:txBody>
@@ -7130,7 +7130,7 @@
                 </a:solidFill>
                 <a:latin typeface="Helvetica Neue"/>
               </a:rPr>
-              <a:t>#2  ·  TT  ·  406 views</a:t>
+              <a:t>#2  ·  TT  ·  412 views</a:t>
             </a:r>
           </a:p>
         </p:txBody>
@@ -8500,7 +8500,7 @@
                 </a:solidFill>
                 <a:latin typeface="Helvetica Neue"/>
               </a:rPr>
-              <a:t>2,578 avg views/post   ·   27 posts   ·   69,605 total</a:t>
+              <a:t>2,578 avg views/post   ·   27 posts   ·   69,609 total</a:t>
             </a:r>
           </a:p>
         </p:txBody>
@@ -8792,7 +8792,7 @@
                 </a:solidFill>
                 <a:latin typeface="Helvetica Neue"/>
               </a:rPr>
-              <a:t>1,514 avg views/post   ·   101 posts   ·   152,900 total</a:t>
+              <a:t>1,577 avg views/post   ·   101 posts   ·   159,293 total</a:t>
             </a:r>
           </a:p>
         </p:txBody>
@@ -8860,7 +8860,7 @@
                 </a:solidFill>
                 <a:latin typeface="Helvetica Neue"/>
               </a:rPr>
-              <a:t>29,200 views — Get ready! Round One is taking over the old Sears at Stonewood Mall. T</a:t>
+              <a:t>33,400 views — Combat jobs aren't for everyone. See how your MOS determines deploymen</a:t>
             </a:r>
           </a:p>
         </p:txBody>
@@ -10711,7 +10711,7 @@
                 </a:solidFill>
                 <a:latin typeface="Helvetica Neue"/>
               </a:rPr>
-              <a:t>69,605 views · 27 posts</a:t>
+              <a:t>69,609 views · 27 posts</a:t>
             </a:r>
           </a:p>
         </p:txBody>
@@ -10759,7 +10759,7 @@
         <p:spPr>
           <a:xfrm>
             <a:off x="4114800" y="2548682"/>
-            <a:ext cx="5532032" cy="143810"/>
+            <a:ext cx="5553063" cy="143810"/>
           </a:xfrm>
           <a:prstGeom prst="rect">
             <a:avLst/>
@@ -10802,7 +10802,7 @@
         </p:nvSpPr>
         <p:spPr>
           <a:xfrm>
-            <a:off x="9738272" y="2466386"/>
+            <a:off x="9759303" y="2466386"/>
             <a:ext cx="2286000" cy="344978"/>
           </a:xfrm>
           <a:prstGeom prst="rect">
@@ -10823,7 +10823,7 @@
                 </a:solidFill>
                 <a:latin typeface="Helvetica Neue"/>
               </a:rPr>
-              <a:t>61,927 views · 23 posts</a:t>
+              <a:t>62,166 views · 23 posts</a:t>
             </a:r>
           </a:p>
         </p:txBody>
@@ -10871,7 +10871,7 @@
         <p:spPr>
           <a:xfrm>
             <a:off x="4114800" y="2893660"/>
-            <a:ext cx="4068871" cy="143810"/>
+            <a:ext cx="4070424" cy="143810"/>
           </a:xfrm>
           <a:prstGeom prst="rect">
             <a:avLst/>
@@ -10914,7 +10914,7 @@
         </p:nvSpPr>
         <p:spPr>
           <a:xfrm>
-            <a:off x="8275111" y="2811364"/>
+            <a:off x="8276664" y="2811364"/>
             <a:ext cx="2286000" cy="344978"/>
           </a:xfrm>
           <a:prstGeom prst="rect">
@@ -10935,7 +10935,7 @@
                 </a:solidFill>
                 <a:latin typeface="Helvetica Neue"/>
               </a:rPr>
-              <a:t>45,548 views · 13 posts</a:t>
+              <a:t>45,568 views · 13 posts</a:t>
             </a:r>
           </a:p>
         </p:txBody>
@@ -10983,7 +10983,7 @@
         <p:spPr>
           <a:xfrm>
             <a:off x="4114800" y="3238638"/>
-            <a:ext cx="3494470" cy="143810"/>
+            <a:ext cx="3802713" cy="143810"/>
           </a:xfrm>
           <a:prstGeom prst="rect">
             <a:avLst/>
@@ -11026,7 +11026,7 @@
         </p:nvSpPr>
         <p:spPr>
           <a:xfrm>
-            <a:off x="7700710" y="3156342"/>
+            <a:off x="8008953" y="3156342"/>
             <a:ext cx="2286000" cy="344978"/>
           </a:xfrm>
           <a:prstGeom prst="rect">
@@ -11047,7 +11047,7 @@
                 </a:solidFill>
                 <a:latin typeface="Helvetica Neue"/>
               </a:rPr>
-              <a:t>39,118 views · 69 posts</a:t>
+              <a:t>42,571 views · 75 posts</a:t>
             </a:r>
           </a:p>
         </p:txBody>
@@ -11095,7 +11095,7 @@
         <p:spPr>
           <a:xfrm>
             <a:off x="4114800" y="3583616"/>
-            <a:ext cx="3370567" cy="143810"/>
+            <a:ext cx="3411195" cy="143810"/>
           </a:xfrm>
           <a:prstGeom prst="rect">
             <a:avLst/>
@@ -11138,7 +11138,7 @@
         </p:nvSpPr>
         <p:spPr>
           <a:xfrm>
-            <a:off x="7576807" y="3501320"/>
+            <a:off x="7617435" y="3501320"/>
             <a:ext cx="2286000" cy="344978"/>
           </a:xfrm>
           <a:prstGeom prst="rect">
@@ -11159,7 +11159,7 @@
                 </a:solidFill>
                 <a:latin typeface="Helvetica Neue"/>
               </a:rPr>
-              <a:t>37,731 views · 30 posts</a:t>
+              <a:t>38,188 views · 30 posts</a:t>
             </a:r>
           </a:p>
         </p:txBody>
@@ -11207,7 +11207,7 @@
         <p:spPr>
           <a:xfrm>
             <a:off x="4114800" y="3928594"/>
-            <a:ext cx="2886390" cy="143810"/>
+            <a:ext cx="3372160" cy="143810"/>
           </a:xfrm>
           <a:prstGeom prst="rect">
             <a:avLst/>
@@ -11250,7 +11250,7 @@
         </p:nvSpPr>
         <p:spPr>
           <a:xfrm>
-            <a:off x="7092630" y="3846298"/>
+            <a:off x="7578400" y="3846298"/>
             <a:ext cx="2286000" cy="344978"/>
           </a:xfrm>
           <a:prstGeom prst="rect">
@@ -11271,7 +11271,7 @@
                 </a:solidFill>
                 <a:latin typeface="Helvetica Neue"/>
               </a:rPr>
-              <a:t>32,311 views · 8 posts</a:t>
+              <a:t>37,751 views · 8 posts</a:t>
             </a:r>
           </a:p>
         </p:txBody>
@@ -11319,7 +11319,7 @@
         <p:spPr>
           <a:xfrm>
             <a:off x="4114800" y="4273573"/>
-            <a:ext cx="2358530" cy="143810"/>
+            <a:ext cx="2382870" cy="143810"/>
           </a:xfrm>
           <a:prstGeom prst="rect">
             <a:avLst/>
@@ -11362,7 +11362,7 @@
         </p:nvSpPr>
         <p:spPr>
           <a:xfrm>
-            <a:off x="6564770" y="4191277"/>
+            <a:off x="6589110" y="4191277"/>
             <a:ext cx="2286000" cy="344978"/>
           </a:xfrm>
           <a:prstGeom prst="rect">
@@ -11383,7 +11383,7 @@
                 </a:solidFill>
                 <a:latin typeface="Helvetica Neue"/>
               </a:rPr>
-              <a:t>26,402 views · 36 posts</a:t>
+              <a:t>26,676 views · 36 posts</a:t>
             </a:r>
           </a:p>
         </p:txBody>
@@ -11431,7 +11431,7 @@
         <p:spPr>
           <a:xfrm>
             <a:off x="4114800" y="4618551"/>
-            <a:ext cx="2318331" cy="143810"/>
+            <a:ext cx="2358752" cy="143810"/>
           </a:xfrm>
           <a:prstGeom prst="rect">
             <a:avLst/>
@@ -11474,7 +11474,7 @@
         </p:nvSpPr>
         <p:spPr>
           <a:xfrm>
-            <a:off x="6524571" y="4536255"/>
+            <a:off x="6564992" y="4536255"/>
             <a:ext cx="2286000" cy="344978"/>
           </a:xfrm>
           <a:prstGeom prst="rect">
@@ -11495,7 +11495,7 @@
                 </a:solidFill>
                 <a:latin typeface="Helvetica Neue"/>
               </a:rPr>
-              <a:t>25,952 views · 37 posts</a:t>
+              <a:t>26,406 views · 37 posts</a:t>
             </a:r>
           </a:p>
         </p:txBody>
@@ -11543,7 +11543,7 @@
         <p:spPr>
           <a:xfrm>
             <a:off x="4114800" y="4963529"/>
-            <a:ext cx="653370" cy="143810"/>
+            <a:ext cx="655298" cy="143810"/>
           </a:xfrm>
           <a:prstGeom prst="rect">
             <a:avLst/>
@@ -11586,7 +11586,7 @@
         </p:nvSpPr>
         <p:spPr>
           <a:xfrm>
-            <a:off x="4859610" y="4881233"/>
+            <a:off x="4861538" y="4881233"/>
             <a:ext cx="2286000" cy="344978"/>
           </a:xfrm>
           <a:prstGeom prst="rect">
@@ -11607,7 +11607,7 @@
                 </a:solidFill>
                 <a:latin typeface="Helvetica Neue"/>
               </a:rPr>
-              <a:t>7,314 views · 6 posts</a:t>
+              <a:t>7,336 views · 6 posts</a:t>
             </a:r>
           </a:p>
         </p:txBody>
@@ -11655,7 +11655,7 @@
         <p:spPr>
           <a:xfrm>
             <a:off x="4114800" y="5308507"/>
-            <a:ext cx="361256" cy="143810"/>
+            <a:ext cx="361235" cy="143810"/>
           </a:xfrm>
           <a:prstGeom prst="rect">
             <a:avLst/>
@@ -11698,7 +11698,7 @@
         </p:nvSpPr>
         <p:spPr>
           <a:xfrm>
-            <a:off x="4567496" y="5226211"/>
+            <a:off x="4567475" y="5226211"/>
             <a:ext cx="2286000" cy="344978"/>
           </a:xfrm>
           <a:prstGeom prst="rect">
@@ -11767,7 +11767,7 @@
         <p:spPr>
           <a:xfrm>
             <a:off x="4114800" y="5653485"/>
-            <a:ext cx="98711" cy="143810"/>
+            <a:ext cx="99241" cy="143810"/>
           </a:xfrm>
           <a:prstGeom prst="rect">
             <a:avLst/>
@@ -11810,7 +11810,7 @@
         </p:nvSpPr>
         <p:spPr>
           <a:xfrm>
-            <a:off x="4304951" y="5571189"/>
+            <a:off x="4305481" y="5571189"/>
             <a:ext cx="2286000" cy="344978"/>
           </a:xfrm>
           <a:prstGeom prst="rect">
@@ -11831,7 +11831,7 @@
                 </a:solidFill>
                 <a:latin typeface="Helvetica Neue"/>
               </a:rPr>
-              <a:t>1,105 views · 2 posts</a:t>
+              <a:t>1,111 views · 2 posts</a:t>
             </a:r>
           </a:p>
         </p:txBody>
@@ -12185,7 +12185,7 @@
                 </a:solidFill>
                 <a:latin typeface="Georgia"/>
               </a:rPr>
-              <a:t>69,605</a:t>
+              <a:t>69,609</a:t>
             </a:r>
           </a:p>
         </p:txBody>
@@ -13187,7 +13187,7 @@
                 </a:solidFill>
                 <a:latin typeface="Georgia"/>
               </a:rPr>
-              <a:t>61,927</a:t>
+              <a:t>62,166</a:t>
             </a:r>
           </a:p>
         </p:txBody>
@@ -13255,7 +13255,7 @@
                 </a:solidFill>
                 <a:latin typeface="Helvetica Neue"/>
               </a:rPr>
-              <a:t>2,692 average views per post</a:t>
+              <a:t>2,703 average views per post</a:t>
             </a:r>
           </a:p>
         </p:txBody>
@@ -14189,7 +14189,7 @@
                 </a:solidFill>
                 <a:latin typeface="Georgia"/>
               </a:rPr>
-              <a:t>45,548</a:t>
+              <a:t>45,568</a:t>
             </a:r>
           </a:p>
         </p:txBody>
@@ -14223,7 +14223,7 @@
                 </a:solidFill>
                 <a:latin typeface="Helvetica Neue"/>
               </a:rPr>
-              <a:t>13 posts · 2,817 likes</a:t>
+              <a:t>13 posts · 2,816 likes</a:t>
             </a:r>
           </a:p>
         </p:txBody>
@@ -14257,7 +14257,7 @@
                 </a:solidFill>
                 <a:latin typeface="Helvetica Neue"/>
               </a:rPr>
-              <a:t>3,504 average views per post</a:t>
+              <a:t>3,505 average views per post</a:t>
             </a:r>
           </a:p>
         </p:txBody>
@@ -15191,7 +15191,7 @@
                 </a:solidFill>
                 <a:latin typeface="Georgia"/>
               </a:rPr>
-              <a:t>39,118</a:t>
+              <a:t>42,571</a:t>
             </a:r>
           </a:p>
         </p:txBody>
@@ -15225,7 +15225,7 @@
                 </a:solidFill>
                 <a:latin typeface="Helvetica Neue"/>
               </a:rPr>
-              <a:t>69 posts · 1,567 likes</a:t>
+              <a:t>75 posts · 1,652 likes</a:t>
             </a:r>
           </a:p>
         </p:txBody>
@@ -15259,7 +15259,7 @@
                 </a:solidFill>
                 <a:latin typeface="Helvetica Neue"/>
               </a:rPr>
-              <a:t>567 average views per post</a:t>
+              <a:t>568 average views per post</a:t>
             </a:r>
           </a:p>
         </p:txBody>
@@ -15415,7 +15415,7 @@
                 </a:solidFill>
                 <a:latin typeface="Helvetica Neue"/>
               </a:rPr>
-              <a:t>#1  ·  TT  ·  7,360 views</a:t>
+              <a:t>#1  ·  TT  ·  7,698 views</a:t>
             </a:r>
           </a:p>
         </p:txBody>
@@ -16193,7 +16193,7 @@
                 </a:solidFill>
                 <a:latin typeface="Georgia"/>
               </a:rPr>
-              <a:t>37,731</a:t>
+              <a:t>38,188</a:t>
             </a:r>
           </a:p>
         </p:txBody>
@@ -16227,7 +16227,7 @@
                 </a:solidFill>
                 <a:latin typeface="Helvetica Neue"/>
               </a:rPr>
-              <a:t>30 posts · 1,451 likes</a:t>
+              <a:t>30 posts · 1,459 likes</a:t>
             </a:r>
           </a:p>
         </p:txBody>
@@ -16261,7 +16261,7 @@
                 </a:solidFill>
                 <a:latin typeface="Helvetica Neue"/>
               </a:rPr>
-              <a:t>1,258 average views per post</a:t>
+              <a:t>1,273 average views per post</a:t>
             </a:r>
           </a:p>
         </p:txBody>
@@ -17195,7 +17195,7 @@
                 </a:solidFill>
                 <a:latin typeface="Georgia"/>
               </a:rPr>
-              <a:t>32,311</a:t>
+              <a:t>37,751</a:t>
             </a:r>
           </a:p>
         </p:txBody>
@@ -17229,7 +17229,7 @@
                 </a:solidFill>
                 <a:latin typeface="Helvetica Neue"/>
               </a:rPr>
-              <a:t>8 posts · 1,857 likes</a:t>
+              <a:t>8 posts · 2,279 likes</a:t>
             </a:r>
           </a:p>
         </p:txBody>
@@ -17263,7 +17263,7 @@
                 </a:solidFill>
                 <a:latin typeface="Helvetica Neue"/>
               </a:rPr>
-              <a:t>4,039 average views per post</a:t>
+              <a:t>4,719 average views per post</a:t>
             </a:r>
           </a:p>
         </p:txBody>
@@ -17419,7 +17419,7 @@
                 </a:solidFill>
                 <a:latin typeface="Helvetica Neue"/>
               </a:rPr>
-              <a:t>#1  ·  TT  ·  28,000 views</a:t>
+              <a:t>#1  ·  TT  ·  33,400 views</a:t>
             </a:r>
           </a:p>
         </p:txBody>
@@ -17731,7 +17731,7 @@
                 </a:solidFill>
                 <a:latin typeface="Helvetica Neue"/>
               </a:rPr>
-              <a:t>#3  ·  TT  ·  942 views</a:t>
+              <a:t>#3  ·  TT  ·  982 views</a:t>
             </a:r>
           </a:p>
         </p:txBody>
@@ -18197,7 +18197,7 @@
                 </a:solidFill>
                 <a:latin typeface="Georgia"/>
               </a:rPr>
-              <a:t>26,402</a:t>
+              <a:t>26,676</a:t>
             </a:r>
           </a:p>
         </p:txBody>
@@ -18265,7 +18265,7 @@
                 </a:solidFill>
                 <a:latin typeface="Helvetica Neue"/>
               </a:rPr>
-              <a:t>733 average views per post</a:t>
+              <a:t>741 average views per post</a:t>
             </a:r>
           </a:p>
         </p:txBody>

--- a/SPONSOR_CONTENT_REPORT.pptx
+++ b/SPONSOR_CONTENT_REPORT.pptx
@@ -3327,7 +3327,7 @@
                 </a:solidFill>
                 <a:latin typeface="Helvetica Neue"/>
               </a:rPr>
-              <a:t>Reporting window: Jun 8 → 2026-08-10</a:t>
+              <a:t>Reporting window: Jun 8 → 2026-08-12</a:t>
             </a:r>
           </a:p>
         </p:txBody>
@@ -3783,7 +3783,7 @@
                 </a:solidFill>
                 <a:latin typeface="Georgia"/>
               </a:rPr>
-              <a:t>7,381</a:t>
+              <a:t>7,384</a:t>
             </a:r>
           </a:p>
         </p:txBody>
@@ -3851,7 +3851,7 @@
                 </a:solidFill>
                 <a:latin typeface="Helvetica Neue"/>
               </a:rPr>
-              <a:t>1,230 average views per post</a:t>
+              <a:t>1,231 average views per post</a:t>
             </a:r>
           </a:p>
         </p:txBody>
@@ -4949,7 +4949,7 @@
                 </a:solidFill>
                 <a:latin typeface="Helvetica Neue"/>
               </a:rPr>
-              <a:t>34,073 views · 48 posts · 710 avg</a:t>
+              <a:t>38,647 views · 50 posts · 773 avg</a:t>
             </a:r>
           </a:p>
         </p:txBody>
@@ -5031,7 +5031,7 @@
         <p:spPr>
           <a:xfrm>
             <a:off x="4206240" y="2720339"/>
-            <a:ext cx="5331515" cy="274320"/>
+            <a:ext cx="4709258" cy="274320"/>
           </a:xfrm>
           <a:prstGeom prst="rect">
             <a:avLst/>
@@ -5074,7 +5074,7 @@
         </p:nvSpPr>
         <p:spPr>
           <a:xfrm>
-            <a:off x="9629195" y="2651759"/>
+            <a:off x="9006938" y="2651759"/>
             <a:ext cx="2286000" cy="251460"/>
           </a:xfrm>
           <a:prstGeom prst="rect">
@@ -5095,7 +5095,7 @@
                 </a:solidFill>
                 <a:latin typeface="Helvetica Neue"/>
               </a:rPr>
-              <a:t>30,101 views · 42 posts · 717 avg</a:t>
+              <a:t>30,157 views · 42 posts · 718 avg</a:t>
             </a:r>
           </a:p>
         </p:txBody>
@@ -5108,7 +5108,7 @@
         </p:nvSpPr>
         <p:spPr>
           <a:xfrm>
-            <a:off x="9629195" y="2857499"/>
+            <a:off x="9006938" y="2857499"/>
             <a:ext cx="4572000" cy="251460"/>
           </a:xfrm>
           <a:prstGeom prst="rect">
@@ -5177,7 +5177,7 @@
         <p:spPr>
           <a:xfrm>
             <a:off x="4206240" y="3223260"/>
-            <a:ext cx="1356568" cy="274320"/>
+            <a:ext cx="1196014" cy="274320"/>
           </a:xfrm>
           <a:prstGeom prst="rect">
             <a:avLst/>
@@ -5220,7 +5220,7 @@
         </p:nvSpPr>
         <p:spPr>
           <a:xfrm>
-            <a:off x="5654248" y="3154679"/>
+            <a:off x="5493694" y="3154679"/>
             <a:ext cx="2286000" cy="251460"/>
           </a:xfrm>
           <a:prstGeom prst="rect">
@@ -5254,7 +5254,7 @@
         </p:nvSpPr>
         <p:spPr>
           <a:xfrm>
-            <a:off x="5654248" y="3360420"/>
+            <a:off x="5493694" y="3360420"/>
             <a:ext cx="4572000" cy="251460"/>
           </a:xfrm>
           <a:prstGeom prst="rect">
@@ -5323,7 +5323,7 @@
         <p:spPr>
           <a:xfrm>
             <a:off x="4206240" y="3726180"/>
-            <a:ext cx="788010" cy="274320"/>
+            <a:ext cx="899626" cy="274320"/>
           </a:xfrm>
           <a:prstGeom prst="rect">
             <a:avLst/>
@@ -5366,7 +5366,7 @@
         </p:nvSpPr>
         <p:spPr>
           <a:xfrm>
-            <a:off x="5085690" y="3657600"/>
+            <a:off x="5197306" y="3657600"/>
             <a:ext cx="2286000" cy="251460"/>
           </a:xfrm>
           <a:prstGeom prst="rect">
@@ -5387,7 +5387,7 @@
                 </a:solidFill>
                 <a:latin typeface="Helvetica Neue"/>
               </a:rPr>
-              <a:t>4,449 views · 10 posts · 445 avg</a:t>
+              <a:t>5,761 views · 13 posts · 443 avg</a:t>
             </a:r>
           </a:p>
         </p:txBody>
@@ -5400,7 +5400,7 @@
         </p:nvSpPr>
         <p:spPr>
           <a:xfrm>
-            <a:off x="5085690" y="3863340"/>
+            <a:off x="5197306" y="3863340"/>
             <a:ext cx="4572000" cy="251460"/>
           </a:xfrm>
           <a:prstGeom prst="rect">
@@ -5469,7 +5469,7 @@
         <p:spPr>
           <a:xfrm>
             <a:off x="4206240" y="4229100"/>
-            <a:ext cx="716276" cy="274320"/>
+            <a:ext cx="631503" cy="274320"/>
           </a:xfrm>
           <a:prstGeom prst="rect">
             <a:avLst/>
@@ -5512,7 +5512,7 @@
         </p:nvSpPr>
         <p:spPr>
           <a:xfrm>
-            <a:off x="5013956" y="4160520"/>
+            <a:off x="4929183" y="4160520"/>
             <a:ext cx="2286000" cy="251460"/>
           </a:xfrm>
           <a:prstGeom prst="rect">
@@ -5546,7 +5546,7 @@
         </p:nvSpPr>
         <p:spPr>
           <a:xfrm>
-            <a:off x="5013956" y="4366260"/>
+            <a:off x="4929183" y="4366260"/>
             <a:ext cx="4572000" cy="251460"/>
           </a:xfrm>
           <a:prstGeom prst="rect">
@@ -5955,7 +5955,7 @@
                 </a:solidFill>
                 <a:latin typeface="Georgia"/>
               </a:rPr>
-              <a:t>34,073</a:t>
+              <a:t>38,647</a:t>
             </a:r>
           </a:p>
         </p:txBody>
@@ -5989,7 +5989,7 @@
                 </a:solidFill>
                 <a:latin typeface="Helvetica Neue"/>
               </a:rPr>
-              <a:t>48 posts · 650 likes</a:t>
+              <a:t>50 posts · 778 likes</a:t>
             </a:r>
           </a:p>
         </p:txBody>
@@ -6023,7 +6023,7 @@
                 </a:solidFill>
                 <a:latin typeface="Helvetica Neue"/>
               </a:rPr>
-              <a:t>710 average views per post</a:t>
+              <a:t>773 average views per post</a:t>
             </a:r>
           </a:p>
         </p:txBody>
@@ -6179,7 +6179,7 @@
                 </a:solidFill>
                 <a:latin typeface="Helvetica Neue"/>
               </a:rPr>
-              <a:t>#1  ·  IG  ·  2,848 views</a:t>
+              <a:t>#1  ·  TT  ·  2,932 views</a:t>
             </a:r>
           </a:p>
         </p:txBody>
@@ -6213,7 +6213,7 @@
                 </a:solidFill>
                 <a:latin typeface="Helvetica Neue"/>
               </a:rPr>
-              <a:t>Responded to your yapping, Downey! This one's to answer the last two shows. Wouldn't have </a:t>
+              <a:t>Downey is a built-out city, but Sacramento requires us to build 6,100 new homes. Local off</a:t>
             </a:r>
           </a:p>
         </p:txBody>
@@ -6335,7 +6335,7 @@
                 </a:solidFill>
                 <a:latin typeface="Helvetica Neue"/>
               </a:rPr>
-              <a:t>#2  ·  TT  ·  2,205 views</a:t>
+              <a:t>#2  ·  IG  ·  2,848 views</a:t>
             </a:r>
           </a:p>
         </p:txBody>
@@ -6369,7 +6369,7 @@
                 </a:solidFill>
                 <a:latin typeface="Helvetica Neue"/>
               </a:rPr>
-              <a:t>Responding to your yapping, Downey! Big things are happening. This is...</a:t>
+              <a:t>Responded to your yapping, Downey! This one's to answer the last two shows. Wouldn't have </a:t>
             </a:r>
           </a:p>
         </p:txBody>
@@ -6491,7 +6491,7 @@
                 </a:solidFill>
                 <a:latin typeface="Helvetica Neue"/>
               </a:rPr>
-              <a:t>#3  ·  FB  ·  2,013 views</a:t>
+              <a:t>#3  ·  TT  ·  2,205 views</a:t>
             </a:r>
           </a:p>
         </p:txBody>
@@ -6525,7 +6525,7 @@
                 </a:solidFill>
                 <a:latin typeface="Helvetica Neue"/>
               </a:rPr>
-              <a:t>A proposed 145-unit residential condominium project on 6.1 acres is raising concerns among</a:t>
+              <a:t>Responding to your yapping, Downey! Big things are happening. This is...</a:t>
             </a:r>
           </a:p>
         </p:txBody>
@@ -6991,7 +6991,7 @@
                 </a:solidFill>
                 <a:latin typeface="Georgia"/>
               </a:rPr>
-              <a:t>30,101</a:t>
+              <a:t>30,157</a:t>
             </a:r>
           </a:p>
         </p:txBody>
@@ -7025,7 +7025,7 @@
                 </a:solidFill>
                 <a:latin typeface="Helvetica Neue"/>
               </a:rPr>
-              <a:t>42 posts · 629 likes</a:t>
+              <a:t>42 posts · 630 likes</a:t>
             </a:r>
           </a:p>
         </p:txBody>
@@ -7059,7 +7059,7 @@
                 </a:solidFill>
                 <a:latin typeface="Helvetica Neue"/>
               </a:rPr>
-              <a:t>717 average views per post</a:t>
+              <a:t>718 average views per post</a:t>
             </a:r>
           </a:p>
         </p:txBody>
@@ -9063,7 +9063,7 @@
                 </a:solidFill>
                 <a:latin typeface="Georgia"/>
               </a:rPr>
-              <a:t>4,449</a:t>
+              <a:t>5,761</a:t>
             </a:r>
           </a:p>
         </p:txBody>
@@ -9097,7 +9097,7 @@
                 </a:solidFill>
                 <a:latin typeface="Helvetica Neue"/>
               </a:rPr>
-              <a:t>10 posts · 56 likes</a:t>
+              <a:t>13 posts · 71 likes</a:t>
             </a:r>
           </a:p>
         </p:txBody>
@@ -9131,7 +9131,7 @@
                 </a:solidFill>
                 <a:latin typeface="Helvetica Neue"/>
               </a:rPr>
-              <a:t>445 average views per post</a:t>
+              <a:t>443 average views per post</a:t>
             </a:r>
           </a:p>
         </p:txBody>
@@ -9599,7 +9599,7 @@
                 </a:solidFill>
                 <a:latin typeface="Helvetica Neue"/>
               </a:rPr>
-              <a:t>#3  ·  IG  ·  461 views</a:t>
+              <a:t>#3  ·  IG  ·  463 views</a:t>
             </a:r>
           </a:p>
         </p:txBody>
@@ -9633,7 +9633,7 @@
                 </a:solidFill>
                 <a:latin typeface="Helvetica Neue"/>
               </a:rPr>
-              <a:t>California's billionaire tax? It might cost us more than it makes. Proposed 5% tax could d</a:t>
+              <a:t>California's planning commission is in a bind. State laws like SB 9, AB 1893, and SB 79 ar</a:t>
             </a:r>
           </a:p>
         </p:txBody>
@@ -11495,7 +11495,7 @@
                 </a:solidFill>
                 <a:latin typeface="Georgia"/>
               </a:rPr>
-              <a:t>88,095 views</a:t>
+              <a:t>88,897 views</a:t>
             </a:r>
           </a:p>
         </p:txBody>
@@ -11529,7 +11529,7 @@
                 </a:solidFill>
                 <a:latin typeface="Helvetica Neue"/>
               </a:rPr>
-              <a:t>56 posts · 1,573 avg views/post</a:t>
+              <a:t>56 posts · 1,587 avg views/post</a:t>
             </a:r>
           </a:p>
         </p:txBody>
@@ -11855,7 +11855,7 @@
                 </a:solidFill>
                 <a:latin typeface="Georgia"/>
               </a:rPr>
-              <a:t>61,577 views</a:t>
+              <a:t>62,175 views</a:t>
             </a:r>
           </a:p>
         </p:txBody>
@@ -11889,7 +11889,7 @@
                 </a:solidFill>
                 <a:latin typeface="Helvetica Neue"/>
               </a:rPr>
-              <a:t>20 posts · 3,079 avg views/post</a:t>
+              <a:t>20 posts · 3,109 avg views/post</a:t>
             </a:r>
           </a:p>
         </p:txBody>
@@ -14483,7 +14483,7 @@
                 </a:solidFill>
                 <a:latin typeface="Helvetica Neue"/>
               </a:rPr>
-              <a:t>1,285 avg views/post   ·   147 posts   ·   188,929 total</a:t>
+              <a:t>1,304 avg views/post   ·   149 posts   ·   194,308 total</a:t>
             </a:r>
           </a:p>
         </p:txBody>
@@ -16402,7 +16402,7 @@
                 </a:solidFill>
                 <a:latin typeface="Helvetica Neue"/>
               </a:rPr>
-              <a:t>88,095 views · 56 posts</a:t>
+              <a:t>88,897 views · 56 posts</a:t>
             </a:r>
           </a:p>
         </p:txBody>
@@ -16450,7 +16450,7 @@
         <p:spPr>
           <a:xfrm>
             <a:off x="4114800" y="2476968"/>
-            <a:ext cx="5636324" cy="128016"/>
+            <a:ext cx="5585475" cy="128016"/>
           </a:xfrm>
           <a:prstGeom prst="rect">
             <a:avLst/>
@@ -16493,7 +16493,7 @@
         </p:nvSpPr>
         <p:spPr>
           <a:xfrm>
-            <a:off x="9842564" y="2413312"/>
+            <a:off x="9791715" y="2413312"/>
             <a:ext cx="2286000" cy="291904"/>
           </a:xfrm>
           <a:prstGeom prst="rect">
@@ -16562,7 +16562,7 @@
         <p:spPr>
           <a:xfrm>
             <a:off x="4114800" y="2768873"/>
-            <a:ext cx="4346226" cy="128016"/>
+            <a:ext cx="4348843" cy="128016"/>
           </a:xfrm>
           <a:prstGeom prst="rect">
             <a:avLst/>
@@ -16605,7 +16605,7 @@
         </p:nvSpPr>
         <p:spPr>
           <a:xfrm>
-            <a:off x="8552466" y="2705217"/>
+            <a:off x="8555083" y="2705217"/>
             <a:ext cx="2286000" cy="291904"/>
           </a:xfrm>
           <a:prstGeom prst="rect">
@@ -16626,7 +16626,7 @@
                 </a:solidFill>
                 <a:latin typeface="Helvetica Neue"/>
               </a:rPr>
-              <a:t>61,577 views · 20 posts</a:t>
+              <a:t>62,175 views · 20 posts</a:t>
             </a:r>
           </a:p>
         </p:txBody>
@@ -16674,7 +16674,7 @@
         <p:spPr>
           <a:xfrm>
             <a:off x="4114800" y="3060778"/>
-            <a:ext cx="4319688" cy="128016"/>
+            <a:ext cx="4280717" cy="128016"/>
           </a:xfrm>
           <a:prstGeom prst="rect">
             <a:avLst/>
@@ -16717,7 +16717,7 @@
         </p:nvSpPr>
         <p:spPr>
           <a:xfrm>
-            <a:off x="8525928" y="2997121"/>
+            <a:off x="8486957" y="2997121"/>
             <a:ext cx="2286000" cy="291904"/>
           </a:xfrm>
           <a:prstGeom prst="rect">
@@ -16786,7 +16786,7 @@
         <p:spPr>
           <a:xfrm>
             <a:off x="4114800" y="3352682"/>
-            <a:ext cx="3365137" cy="128016"/>
+            <a:ext cx="3334778" cy="128016"/>
           </a:xfrm>
           <a:prstGeom prst="rect">
             <a:avLst/>
@@ -16829,7 +16829,7 @@
         </p:nvSpPr>
         <p:spPr>
           <a:xfrm>
-            <a:off x="7571377" y="3289026"/>
+            <a:off x="7541018" y="3289026"/>
             <a:ext cx="2286000" cy="291904"/>
           </a:xfrm>
           <a:prstGeom prst="rect">
@@ -16898,7 +16898,7 @@
         <p:spPr>
           <a:xfrm>
             <a:off x="4114800" y="3644587"/>
-            <a:ext cx="2404939" cy="128016"/>
+            <a:ext cx="2703172" cy="128016"/>
           </a:xfrm>
           <a:prstGeom prst="rect">
             <a:avLst/>
@@ -16941,7 +16941,7 @@
         </p:nvSpPr>
         <p:spPr>
           <a:xfrm>
-            <a:off x="6611179" y="3580931"/>
+            <a:off x="6909412" y="3580931"/>
             <a:ext cx="2286000" cy="291904"/>
           </a:xfrm>
           <a:prstGeom prst="rect">
@@ -16962,7 +16962,7 @@
                 </a:solidFill>
                 <a:latin typeface="Helvetica Neue"/>
               </a:rPr>
-              <a:t>34,073 views · 48 posts</a:t>
+              <a:t>38,647 views · 50 posts</a:t>
             </a:r>
           </a:p>
         </p:txBody>
@@ -17010,7 +17010,7 @@
         <p:spPr>
           <a:xfrm>
             <a:off x="4114800" y="3936491"/>
-            <a:ext cx="2124588" cy="128016"/>
+            <a:ext cx="2109337" cy="128016"/>
           </a:xfrm>
           <a:prstGeom prst="rect">
             <a:avLst/>
@@ -17053,7 +17053,7 @@
         </p:nvSpPr>
         <p:spPr>
           <a:xfrm>
-            <a:off x="6330828" y="3872835"/>
+            <a:off x="6315577" y="3872835"/>
             <a:ext cx="2286000" cy="291904"/>
           </a:xfrm>
           <a:prstGeom prst="rect">
@@ -17074,7 +17074,7 @@
                 </a:solidFill>
                 <a:latin typeface="Helvetica Neue"/>
               </a:rPr>
-              <a:t>30,101 views · 42 posts</a:t>
+              <a:t>30,157 views · 42 posts</a:t>
             </a:r>
           </a:p>
         </p:txBody>
@@ -17122,7 +17122,7 @@
         <p:spPr>
           <a:xfrm>
             <a:off x="4114800" y="4228396"/>
-            <a:ext cx="1577648" cy="128016"/>
+            <a:ext cx="1914190" cy="128016"/>
           </a:xfrm>
           <a:prstGeom prst="rect">
             <a:avLst/>
@@ -17165,7 +17165,7 @@
         </p:nvSpPr>
         <p:spPr>
           <a:xfrm>
-            <a:off x="5783888" y="4164740"/>
+            <a:off x="6120430" y="4164740"/>
             <a:ext cx="2286000" cy="291904"/>
           </a:xfrm>
           <a:prstGeom prst="rect">
@@ -17186,7 +17186,7 @@
                 </a:solidFill>
                 <a:latin typeface="Helvetica Neue"/>
               </a:rPr>
-              <a:t>22,352 views · 46 posts</a:t>
+              <a:t>27,367 views · 54 posts</a:t>
             </a:r>
           </a:p>
         </p:txBody>
@@ -17234,7 +17234,7 @@
         <p:spPr>
           <a:xfrm>
             <a:off x="4114800" y="4520301"/>
-            <a:ext cx="540587" cy="128016"/>
+            <a:ext cx="535710" cy="128016"/>
           </a:xfrm>
           <a:prstGeom prst="rect">
             <a:avLst/>
@@ -17277,7 +17277,7 @@
         </p:nvSpPr>
         <p:spPr>
           <a:xfrm>
-            <a:off x="4746827" y="4456644"/>
+            <a:off x="4741950" y="4456644"/>
             <a:ext cx="2286000" cy="291904"/>
           </a:xfrm>
           <a:prstGeom prst="rect">
@@ -17346,7 +17346,7 @@
         <p:spPr>
           <a:xfrm>
             <a:off x="4114800" y="4812205"/>
-            <a:ext cx="520965" cy="128016"/>
+            <a:ext cx="516475" cy="128016"/>
           </a:xfrm>
           <a:prstGeom prst="rect">
             <a:avLst/>
@@ -17389,7 +17389,7 @@
         </p:nvSpPr>
         <p:spPr>
           <a:xfrm>
-            <a:off x="4727205" y="4748549"/>
+            <a:off x="4722715" y="4748549"/>
             <a:ext cx="2286000" cy="291904"/>
           </a:xfrm>
           <a:prstGeom prst="rect">
@@ -17410,7 +17410,7 @@
                 </a:solidFill>
                 <a:latin typeface="Helvetica Neue"/>
               </a:rPr>
-              <a:t>7,381 views · 6 posts</a:t>
+              <a:t>7,384 views · 6 posts</a:t>
             </a:r>
           </a:p>
         </p:txBody>
@@ -17458,7 +17458,7 @@
         <p:spPr>
           <a:xfrm>
             <a:off x="4114800" y="5104110"/>
-            <a:ext cx="314019" cy="128016"/>
+            <a:ext cx="402954" cy="128016"/>
           </a:xfrm>
           <a:prstGeom prst="rect">
             <a:avLst/>
@@ -17501,7 +17501,7 @@
         </p:nvSpPr>
         <p:spPr>
           <a:xfrm>
-            <a:off x="4520259" y="5040454"/>
+            <a:off x="4609194" y="5040454"/>
             <a:ext cx="2286000" cy="291904"/>
           </a:xfrm>
           <a:prstGeom prst="rect">
@@ -17522,7 +17522,7 @@
                 </a:solidFill>
                 <a:latin typeface="Helvetica Neue"/>
               </a:rPr>
-              <a:t>4,449 views · 10 posts</a:t>
+              <a:t>5,761 views · 13 posts</a:t>
             </a:r>
           </a:p>
         </p:txBody>
@@ -17570,7 +17570,7 @@
         <p:spPr>
           <a:xfrm>
             <a:off x="4114800" y="5396015"/>
-            <a:ext cx="285433" cy="128016"/>
+            <a:ext cx="282858" cy="128016"/>
           </a:xfrm>
           <a:prstGeom prst="rect">
             <a:avLst/>
@@ -17613,7 +17613,7 @@
         </p:nvSpPr>
         <p:spPr>
           <a:xfrm>
-            <a:off x="4491673" y="5332358"/>
+            <a:off x="4489098" y="5332358"/>
             <a:ext cx="2286000" cy="291904"/>
           </a:xfrm>
           <a:prstGeom prst="rect">
@@ -17682,7 +17682,7 @@
         <p:spPr>
           <a:xfrm>
             <a:off x="4114800" y="5687919"/>
-            <a:ext cx="78416" cy="128016"/>
+            <a:ext cx="77709" cy="128016"/>
           </a:xfrm>
           <a:prstGeom prst="rect">
             <a:avLst/>
@@ -17725,7 +17725,7 @@
         </p:nvSpPr>
         <p:spPr>
           <a:xfrm>
-            <a:off x="4284656" y="5624263"/>
+            <a:off x="4283949" y="5624263"/>
             <a:ext cx="2286000" cy="291904"/>
           </a:xfrm>
           <a:prstGeom prst="rect">
@@ -18342,7 +18342,7 @@
                 </a:solidFill>
                 <a:latin typeface="Georgia"/>
               </a:rPr>
-              <a:t>88,095</a:t>
+              <a:t>88,897</a:t>
             </a:r>
           </a:p>
         </p:txBody>
@@ -18376,7 +18376,7 @@
                 </a:solidFill>
                 <a:latin typeface="Helvetica Neue"/>
               </a:rPr>
-              <a:t>56 posts · 2,826 likes</a:t>
+              <a:t>56 posts · 2,849 likes</a:t>
             </a:r>
           </a:p>
         </p:txBody>
@@ -18410,7 +18410,7 @@
                 </a:solidFill>
                 <a:latin typeface="Helvetica Neue"/>
               </a:rPr>
-              <a:t>1,573 average views per post</a:t>
+              <a:t>1,587 average views per post</a:t>
             </a:r>
           </a:p>
         </p:txBody>
@@ -18722,7 +18722,7 @@
                 </a:solidFill>
                 <a:latin typeface="Helvetica Neue"/>
               </a:rPr>
-              <a:t>#2  ·  TT  ·  8,253 views</a:t>
+              <a:t>#2  ·  TT  ·  8,352 views</a:t>
             </a:r>
           </a:p>
         </p:txBody>
@@ -18878,7 +18878,7 @@
                 </a:solidFill>
                 <a:latin typeface="Helvetica Neue"/>
               </a:rPr>
-              <a:t>#3  ·  IG  ·  4,748 views</a:t>
+              <a:t>#3  ·  FB  ·  4,929 views</a:t>
             </a:r>
           </a:p>
         </p:txBody>
@@ -18912,7 +18912,7 @@
                 </a:solidFill>
                 <a:latin typeface="Helvetica Neue"/>
               </a:rPr>
-              <a:t>Found an amazing pastrami sandwich at Pop's Wings! Toasted bread, tender pastrami, and swe</a:t>
+              <a:t>Discover My Home, a beloved Chinese restaurant in Downey. Their Mongolian beef, dumplings,</a:t>
             </a:r>
           </a:p>
         </p:txBody>
@@ -20414,7 +20414,7 @@
                 </a:solidFill>
                 <a:latin typeface="Georgia"/>
               </a:rPr>
-              <a:t>61,577</a:t>
+              <a:t>62,175</a:t>
             </a:r>
           </a:p>
         </p:txBody>
@@ -20448,7 +20448,7 @@
                 </a:solidFill>
                 <a:latin typeface="Helvetica Neue"/>
               </a:rPr>
-              <a:t>20 posts · 3,108 likes</a:t>
+              <a:t>20 posts · 3,168 likes</a:t>
             </a:r>
           </a:p>
         </p:txBody>
@@ -20482,7 +20482,7 @@
                 </a:solidFill>
                 <a:latin typeface="Helvetica Neue"/>
               </a:rPr>
-              <a:t>3,079 average views per post</a:t>
+              <a:t>3,109 average views per post</a:t>
             </a:r>
           </a:p>
         </p:txBody>
@@ -20638,7 +20638,7 @@
                 </a:solidFill>
                 <a:latin typeface="Helvetica Neue"/>
               </a:rPr>
-              <a:t>#1  ·  TT  ·  37,400 views</a:t>
+              <a:t>#1  ·  TT  ·  37,900 views</a:t>
             </a:r>
           </a:p>
         </p:txBody>
@@ -20794,7 +20794,7 @@
                 </a:solidFill>
                 <a:latin typeface="Helvetica Neue"/>
               </a:rPr>
-              <a:t>#2  ·  IG  ·  5,132 views</a:t>
+              <a:t>#2  ·  IG  ·  5,139 views</a:t>
             </a:r>
           </a:p>
         </p:txBody>

--- a/SPONSOR_CONTENT_REPORT.pptx
+++ b/SPONSOR_CONTENT_REPORT.pptx
@@ -3327,7 +3327,7 @@
                 </a:solidFill>
                 <a:latin typeface="Helvetica Neue"/>
               </a:rPr>
-              <a:t>Reporting window: Jun 8 → 2026-08-12</a:t>
+              <a:t>Reporting window: Jun 8 → 2026-08-14</a:t>
             </a:r>
           </a:p>
         </p:txBody>
@@ -4949,7 +4949,7 @@
                 </a:solidFill>
                 <a:latin typeface="Helvetica Neue"/>
               </a:rPr>
-              <a:t>38,647 views · 50 posts · 773 avg</a:t>
+              <a:t>38,857 views · 50 posts · 777 avg</a:t>
             </a:r>
           </a:p>
         </p:txBody>
@@ -5031,7 +5031,7 @@
         <p:spPr>
           <a:xfrm>
             <a:off x="4206240" y="2720339"/>
-            <a:ext cx="4709258" cy="274320"/>
+            <a:ext cx="4964459" cy="274320"/>
           </a:xfrm>
           <a:prstGeom prst="rect">
             <a:avLst/>
@@ -5074,7 +5074,7 @@
         </p:nvSpPr>
         <p:spPr>
           <a:xfrm>
-            <a:off x="9006938" y="2651759"/>
+            <a:off x="9262139" y="2651759"/>
             <a:ext cx="2286000" cy="251460"/>
           </a:xfrm>
           <a:prstGeom prst="rect">
@@ -5095,7 +5095,7 @@
                 </a:solidFill>
                 <a:latin typeface="Helvetica Neue"/>
               </a:rPr>
-              <a:t>30,157 views · 42 posts · 718 avg</a:t>
+              <a:t>31,964 views · 46 posts · 695 avg</a:t>
             </a:r>
           </a:p>
         </p:txBody>
@@ -5108,7 +5108,7 @@
         </p:nvSpPr>
         <p:spPr>
           <a:xfrm>
-            <a:off x="9006938" y="2857499"/>
+            <a:off x="9262139" y="2857499"/>
             <a:ext cx="4572000" cy="251460"/>
           </a:xfrm>
           <a:prstGeom prst="rect">
@@ -5177,7 +5177,7 @@
         <p:spPr>
           <a:xfrm>
             <a:off x="4206240" y="3223260"/>
-            <a:ext cx="1196014" cy="274320"/>
+            <a:ext cx="1189550" cy="274320"/>
           </a:xfrm>
           <a:prstGeom prst="rect">
             <a:avLst/>
@@ -5220,7 +5220,7 @@
         </p:nvSpPr>
         <p:spPr>
           <a:xfrm>
-            <a:off x="5493694" y="3154679"/>
+            <a:off x="5487230" y="3154679"/>
             <a:ext cx="2286000" cy="251460"/>
           </a:xfrm>
           <a:prstGeom prst="rect">
@@ -5254,7 +5254,7 @@
         </p:nvSpPr>
         <p:spPr>
           <a:xfrm>
-            <a:off x="5493694" y="3360420"/>
+            <a:off x="5487230" y="3360420"/>
             <a:ext cx="4572000" cy="251460"/>
           </a:xfrm>
           <a:prstGeom prst="rect">
@@ -5323,7 +5323,7 @@
         <p:spPr>
           <a:xfrm>
             <a:off x="4206240" y="3726180"/>
-            <a:ext cx="899626" cy="274320"/>
+            <a:ext cx="931418" cy="274320"/>
           </a:xfrm>
           <a:prstGeom prst="rect">
             <a:avLst/>
@@ -5366,7 +5366,7 @@
         </p:nvSpPr>
         <p:spPr>
           <a:xfrm>
-            <a:off x="5197306" y="3657600"/>
+            <a:off x="5229098" y="3657600"/>
             <a:ext cx="2286000" cy="251460"/>
           </a:xfrm>
           <a:prstGeom prst="rect">
@@ -5387,7 +5387,7 @@
                 </a:solidFill>
                 <a:latin typeface="Helvetica Neue"/>
               </a:rPr>
-              <a:t>5,761 views · 13 posts · 443 avg</a:t>
+              <a:t>5,997 views · 13 posts · 461 avg</a:t>
             </a:r>
           </a:p>
         </p:txBody>
@@ -5400,7 +5400,7 @@
         </p:nvSpPr>
         <p:spPr>
           <a:xfrm>
-            <a:off x="5197306" y="3863340"/>
+            <a:off x="5229098" y="3863340"/>
             <a:ext cx="4572000" cy="251460"/>
           </a:xfrm>
           <a:prstGeom prst="rect">
@@ -5469,7 +5469,7 @@
         <p:spPr>
           <a:xfrm>
             <a:off x="4206240" y="4229100"/>
-            <a:ext cx="631503" cy="274320"/>
+            <a:ext cx="628090" cy="274320"/>
           </a:xfrm>
           <a:prstGeom prst="rect">
             <a:avLst/>
@@ -5512,7 +5512,7 @@
         </p:nvSpPr>
         <p:spPr>
           <a:xfrm>
-            <a:off x="4929183" y="4160520"/>
+            <a:off x="4925770" y="4160520"/>
             <a:ext cx="2286000" cy="251460"/>
           </a:xfrm>
           <a:prstGeom prst="rect">
@@ -5546,7 +5546,7 @@
         </p:nvSpPr>
         <p:spPr>
           <a:xfrm>
-            <a:off x="4929183" y="4366260"/>
+            <a:off x="4925770" y="4366260"/>
             <a:ext cx="4572000" cy="251460"/>
           </a:xfrm>
           <a:prstGeom prst="rect">
@@ -5955,7 +5955,7 @@
                 </a:solidFill>
                 <a:latin typeface="Georgia"/>
               </a:rPr>
-              <a:t>38,647</a:t>
+              <a:t>38,857</a:t>
             </a:r>
           </a:p>
         </p:txBody>
@@ -5989,7 +5989,7 @@
                 </a:solidFill>
                 <a:latin typeface="Helvetica Neue"/>
               </a:rPr>
-              <a:t>50 posts · 778 likes</a:t>
+              <a:t>50 posts · 781 likes</a:t>
             </a:r>
           </a:p>
         </p:txBody>
@@ -6023,7 +6023,7 @@
                 </a:solidFill>
                 <a:latin typeface="Helvetica Neue"/>
               </a:rPr>
-              <a:t>773 average views per post</a:t>
+              <a:t>777 average views per post</a:t>
             </a:r>
           </a:p>
         </p:txBody>
@@ -6991,7 +6991,7 @@
                 </a:solidFill>
                 <a:latin typeface="Georgia"/>
               </a:rPr>
-              <a:t>30,157</a:t>
+              <a:t>31,964</a:t>
             </a:r>
           </a:p>
         </p:txBody>
@@ -7025,7 +7025,7 @@
                 </a:solidFill>
                 <a:latin typeface="Helvetica Neue"/>
               </a:rPr>
-              <a:t>42 posts · 630 likes</a:t>
+              <a:t>46 posts · 644 likes</a:t>
             </a:r>
           </a:p>
         </p:txBody>
@@ -7059,7 +7059,7 @@
                 </a:solidFill>
                 <a:latin typeface="Helvetica Neue"/>
               </a:rPr>
-              <a:t>718 average views per post</a:t>
+              <a:t>695 average views per post</a:t>
             </a:r>
           </a:p>
         </p:txBody>
@@ -9063,7 +9063,7 @@
                 </a:solidFill>
                 <a:latin typeface="Georgia"/>
               </a:rPr>
-              <a:t>5,761</a:t>
+              <a:t>5,997</a:t>
             </a:r>
           </a:p>
         </p:txBody>
@@ -9097,7 +9097,7 @@
                 </a:solidFill>
                 <a:latin typeface="Helvetica Neue"/>
               </a:rPr>
-              <a:t>13 posts · 71 likes</a:t>
+              <a:t>13 posts · 75 likes</a:t>
             </a:r>
           </a:p>
         </p:txBody>
@@ -9131,7 +9131,7 @@
                 </a:solidFill>
                 <a:latin typeface="Helvetica Neue"/>
               </a:rPr>
-              <a:t>443 average views per post</a:t>
+              <a:t>461 average views per post</a:t>
             </a:r>
           </a:p>
         </p:txBody>
@@ -9599,7 +9599,7 @@
                 </a:solidFill>
                 <a:latin typeface="Helvetica Neue"/>
               </a:rPr>
-              <a:t>#3  ·  IG  ·  463 views</a:t>
+              <a:t>#3  ·  IG  ·  571 views</a:t>
             </a:r>
           </a:p>
         </p:txBody>
@@ -11495,7 +11495,7 @@
                 </a:solidFill>
                 <a:latin typeface="Georgia"/>
               </a:rPr>
-              <a:t>88,897 views</a:t>
+              <a:t>89,000 views</a:t>
             </a:r>
           </a:p>
         </p:txBody>
@@ -11529,7 +11529,7 @@
                 </a:solidFill>
                 <a:latin typeface="Helvetica Neue"/>
               </a:rPr>
-              <a:t>56 posts · 1,587 avg views/post</a:t>
+              <a:t>56 posts · 1,589 avg views/post</a:t>
             </a:r>
           </a:p>
         </p:txBody>
@@ -11855,7 +11855,7 @@
                 </a:solidFill>
                 <a:latin typeface="Georgia"/>
               </a:rPr>
-              <a:t>62,175 views</a:t>
+              <a:t>62,185 views</a:t>
             </a:r>
           </a:p>
         </p:txBody>
@@ -14483,7 +14483,7 @@
                 </a:solidFill>
                 <a:latin typeface="Helvetica Neue"/>
               </a:rPr>
-              <a:t>1,304 avg views/post   ·   149 posts   ·   194,308 total</a:t>
+              <a:t>1,306 avg views/post   ·   149 posts   ·   194,621 total</a:t>
             </a:r>
           </a:p>
         </p:txBody>
@@ -16402,7 +16402,7 @@
                 </a:solidFill>
                 <a:latin typeface="Helvetica Neue"/>
               </a:rPr>
-              <a:t>88,897 views · 56 posts</a:t>
+              <a:t>89,000 views · 56 posts</a:t>
             </a:r>
           </a:p>
         </p:txBody>
@@ -16450,7 +16450,7 @@
         <p:spPr>
           <a:xfrm>
             <a:off x="4114800" y="2476968"/>
-            <a:ext cx="5585475" cy="128016"/>
+            <a:ext cx="5579011" cy="128016"/>
           </a:xfrm>
           <a:prstGeom prst="rect">
             <a:avLst/>
@@ -16493,7 +16493,7 @@
         </p:nvSpPr>
         <p:spPr>
           <a:xfrm>
-            <a:off x="9791715" y="2413312"/>
+            <a:off x="9785251" y="2413312"/>
             <a:ext cx="2286000" cy="291904"/>
           </a:xfrm>
           <a:prstGeom prst="rect">
@@ -16562,7 +16562,7 @@
         <p:spPr>
           <a:xfrm>
             <a:off x="4114800" y="2768873"/>
-            <a:ext cx="4348843" cy="128016"/>
+            <a:ext cx="4344509" cy="128016"/>
           </a:xfrm>
           <a:prstGeom prst="rect">
             <a:avLst/>
@@ -16605,7 +16605,7 @@
         </p:nvSpPr>
         <p:spPr>
           <a:xfrm>
-            <a:off x="8555083" y="2705217"/>
+            <a:off x="8550749" y="2705217"/>
             <a:ext cx="2286000" cy="291904"/>
           </a:xfrm>
           <a:prstGeom prst="rect">
@@ -16626,7 +16626,7 @@
                 </a:solidFill>
                 <a:latin typeface="Helvetica Neue"/>
               </a:rPr>
-              <a:t>62,175 views · 20 posts</a:t>
+              <a:t>62,185 views · 20 posts</a:t>
             </a:r>
           </a:p>
         </p:txBody>
@@ -16674,7 +16674,7 @@
         <p:spPr>
           <a:xfrm>
             <a:off x="4114800" y="3060778"/>
-            <a:ext cx="4280717" cy="128016"/>
+            <a:ext cx="4275763" cy="128016"/>
           </a:xfrm>
           <a:prstGeom prst="rect">
             <a:avLst/>
@@ -16717,7 +16717,7 @@
         </p:nvSpPr>
         <p:spPr>
           <a:xfrm>
-            <a:off x="8486957" y="2997121"/>
+            <a:off x="8482003" y="2997121"/>
             <a:ext cx="2286000" cy="291904"/>
           </a:xfrm>
           <a:prstGeom prst="rect">
@@ -16786,7 +16786,7 @@
         <p:spPr>
           <a:xfrm>
             <a:off x="4114800" y="3352682"/>
-            <a:ext cx="3334778" cy="128016"/>
+            <a:ext cx="3330918" cy="128016"/>
           </a:xfrm>
           <a:prstGeom prst="rect">
             <a:avLst/>
@@ -16829,7 +16829,7 @@
         </p:nvSpPr>
         <p:spPr>
           <a:xfrm>
-            <a:off x="7541018" y="3289026"/>
+            <a:off x="7537158" y="3289026"/>
             <a:ext cx="2286000" cy="291904"/>
           </a:xfrm>
           <a:prstGeom prst="rect">
@@ -16898,7 +16898,7 @@
         <p:spPr>
           <a:xfrm>
             <a:off x="4114800" y="3644587"/>
-            <a:ext cx="2703172" cy="128016"/>
+            <a:ext cx="2714715" cy="128016"/>
           </a:xfrm>
           <a:prstGeom prst="rect">
             <a:avLst/>
@@ -16941,7 +16941,7 @@
         </p:nvSpPr>
         <p:spPr>
           <a:xfrm>
-            <a:off x="6909412" y="3580931"/>
+            <a:off x="6920955" y="3580931"/>
             <a:ext cx="2286000" cy="291904"/>
           </a:xfrm>
           <a:prstGeom prst="rect">
@@ -16962,7 +16962,7 @@
                 </a:solidFill>
                 <a:latin typeface="Helvetica Neue"/>
               </a:rPr>
-              <a:t>38,647 views · 50 posts</a:t>
+              <a:t>38,857 views · 50 posts</a:t>
             </a:r>
           </a:p>
         </p:txBody>
@@ -17010,7 +17010,7 @@
         <p:spPr>
           <a:xfrm>
             <a:off x="4114800" y="3936491"/>
-            <a:ext cx="2109337" cy="128016"/>
+            <a:ext cx="2233141" cy="128016"/>
           </a:xfrm>
           <a:prstGeom prst="rect">
             <a:avLst/>
@@ -17053,7 +17053,7 @@
         </p:nvSpPr>
         <p:spPr>
           <a:xfrm>
-            <a:off x="6315577" y="3872835"/>
+            <a:off x="6439381" y="3872835"/>
             <a:ext cx="2286000" cy="291904"/>
           </a:xfrm>
           <a:prstGeom prst="rect">
@@ -17074,7 +17074,7 @@
                 </a:solidFill>
                 <a:latin typeface="Helvetica Neue"/>
               </a:rPr>
-              <a:t>30,157 views · 42 posts</a:t>
+              <a:t>31,964 views · 46 posts</a:t>
             </a:r>
           </a:p>
         </p:txBody>
@@ -17122,7 +17122,7 @@
         <p:spPr>
           <a:xfrm>
             <a:off x="4114800" y="4228396"/>
-            <a:ext cx="1914190" cy="128016"/>
+            <a:ext cx="2196602" cy="128016"/>
           </a:xfrm>
           <a:prstGeom prst="rect">
             <a:avLst/>
@@ -17165,7 +17165,7 @@
         </p:nvSpPr>
         <p:spPr>
           <a:xfrm>
-            <a:off x="6120430" y="4164740"/>
+            <a:off x="6402842" y="4164740"/>
             <a:ext cx="2286000" cy="291904"/>
           </a:xfrm>
           <a:prstGeom prst="rect">
@@ -17186,7 +17186,7 @@
                 </a:solidFill>
                 <a:latin typeface="Helvetica Neue"/>
               </a:rPr>
-              <a:t>27,367 views · 54 posts</a:t>
+              <a:t>31,441 views · 61 posts</a:t>
             </a:r>
           </a:p>
         </p:txBody>
@@ -17234,7 +17234,7 @@
         <p:spPr>
           <a:xfrm>
             <a:off x="4114800" y="4520301"/>
-            <a:ext cx="535710" cy="128016"/>
+            <a:ext cx="535090" cy="128016"/>
           </a:xfrm>
           <a:prstGeom prst="rect">
             <a:avLst/>
@@ -17277,7 +17277,7 @@
         </p:nvSpPr>
         <p:spPr>
           <a:xfrm>
-            <a:off x="4741950" y="4456644"/>
+            <a:off x="4741330" y="4456644"/>
             <a:ext cx="2286000" cy="291904"/>
           </a:xfrm>
           <a:prstGeom prst="rect">
@@ -17346,7 +17346,7 @@
         <p:spPr>
           <a:xfrm>
             <a:off x="4114800" y="4812205"/>
-            <a:ext cx="516475" cy="128016"/>
+            <a:ext cx="515877" cy="128016"/>
           </a:xfrm>
           <a:prstGeom prst="rect">
             <a:avLst/>
@@ -17389,7 +17389,7 @@
         </p:nvSpPr>
         <p:spPr>
           <a:xfrm>
-            <a:off x="4722715" y="4748549"/>
+            <a:off x="4722117" y="4748549"/>
             <a:ext cx="2286000" cy="291904"/>
           </a:xfrm>
           <a:prstGeom prst="rect">
@@ -17458,7 +17458,7 @@
         <p:spPr>
           <a:xfrm>
             <a:off x="4114800" y="5104110"/>
-            <a:ext cx="402954" cy="128016"/>
+            <a:ext cx="418976" cy="128016"/>
           </a:xfrm>
           <a:prstGeom prst="rect">
             <a:avLst/>
@@ -17501,7 +17501,7 @@
         </p:nvSpPr>
         <p:spPr>
           <a:xfrm>
-            <a:off x="4609194" y="5040454"/>
+            <a:off x="4625216" y="5040454"/>
             <a:ext cx="2286000" cy="291904"/>
           </a:xfrm>
           <a:prstGeom prst="rect">
@@ -17522,7 +17522,7 @@
                 </a:solidFill>
                 <a:latin typeface="Helvetica Neue"/>
               </a:rPr>
-              <a:t>5,761 views · 13 posts</a:t>
+              <a:t>5,997 views · 13 posts</a:t>
             </a:r>
           </a:p>
         </p:txBody>
@@ -17570,7 +17570,7 @@
         <p:spPr>
           <a:xfrm>
             <a:off x="4114800" y="5396015"/>
-            <a:ext cx="282858" cy="128016"/>
+            <a:ext cx="282531" cy="128016"/>
           </a:xfrm>
           <a:prstGeom prst="rect">
             <a:avLst/>
@@ -17613,7 +17613,7 @@
         </p:nvSpPr>
         <p:spPr>
           <a:xfrm>
-            <a:off x="4489098" y="5332358"/>
+            <a:off x="4488771" y="5332358"/>
             <a:ext cx="2286000" cy="291904"/>
           </a:xfrm>
           <a:prstGeom prst="rect">
@@ -17682,7 +17682,7 @@
         <p:spPr>
           <a:xfrm>
             <a:off x="4114800" y="5687919"/>
-            <a:ext cx="77709" cy="128016"/>
+            <a:ext cx="77619" cy="128016"/>
           </a:xfrm>
           <a:prstGeom prst="rect">
             <a:avLst/>
@@ -17725,7 +17725,7 @@
         </p:nvSpPr>
         <p:spPr>
           <a:xfrm>
-            <a:off x="4283949" y="5624263"/>
+            <a:off x="4283859" y="5624263"/>
             <a:ext cx="2286000" cy="291904"/>
           </a:xfrm>
           <a:prstGeom prst="rect">
@@ -18342,7 +18342,7 @@
                 </a:solidFill>
                 <a:latin typeface="Georgia"/>
               </a:rPr>
-              <a:t>88,897</a:t>
+              <a:t>89,000</a:t>
             </a:r>
           </a:p>
         </p:txBody>
@@ -18410,7 +18410,7 @@
                 </a:solidFill>
                 <a:latin typeface="Helvetica Neue"/>
               </a:rPr>
-              <a:t>1,587 average views per post</a:t>
+              <a:t>1,589 average views per post</a:t>
             </a:r>
           </a:p>
         </p:txBody>
@@ -18878,7 +18878,7 @@
                 </a:solidFill>
                 <a:latin typeface="Helvetica Neue"/>
               </a:rPr>
-              <a:t>#3  ·  FB  ·  4,929 views</a:t>
+              <a:t>#3  ·  FB  ·  4,962 views</a:t>
             </a:r>
           </a:p>
         </p:txBody>
@@ -20414,7 +20414,7 @@
                 </a:solidFill>
                 <a:latin typeface="Georgia"/>
               </a:rPr>
-              <a:t>62,175</a:t>
+              <a:t>62,185</a:t>
             </a:r>
           </a:p>
         </p:txBody>

--- a/SPONSOR_CONTENT_REPORT.pptx
+++ b/SPONSOR_CONTENT_REPORT.pptx
@@ -3327,7 +3327,7 @@
                 </a:solidFill>
                 <a:latin typeface="Helvetica Neue"/>
               </a:rPr>
-              <a:t>Reporting window: Jun 8 → 2026-08-14</a:t>
+              <a:t>Reporting window: Jun 8 → 2026-08-17</a:t>
             </a:r>
           </a:p>
         </p:txBody>
@@ -4949,7 +4949,7 @@
                 </a:solidFill>
                 <a:latin typeface="Helvetica Neue"/>
               </a:rPr>
-              <a:t>38,857 views · 50 posts · 777 avg</a:t>
+              <a:t>39,693 views · 52 posts · 763 avg</a:t>
             </a:r>
           </a:p>
         </p:txBody>
@@ -5031,7 +5031,7 @@
         <p:spPr>
           <a:xfrm>
             <a:off x="4206240" y="2720339"/>
-            <a:ext cx="4964459" cy="274320"/>
+            <a:ext cx="4893501" cy="274320"/>
           </a:xfrm>
           <a:prstGeom prst="rect">
             <a:avLst/>
@@ -5074,7 +5074,7 @@
         </p:nvSpPr>
         <p:spPr>
           <a:xfrm>
-            <a:off x="9262139" y="2651759"/>
+            <a:off x="9191181" y="2651759"/>
             <a:ext cx="2286000" cy="251460"/>
           </a:xfrm>
           <a:prstGeom prst="rect">
@@ -5095,7 +5095,7 @@
                 </a:solidFill>
                 <a:latin typeface="Helvetica Neue"/>
               </a:rPr>
-              <a:t>31,964 views · 46 posts · 695 avg</a:t>
+              <a:t>32,185 views · 47 posts · 685 avg</a:t>
             </a:r>
           </a:p>
         </p:txBody>
@@ -5108,7 +5108,7 @@
         </p:nvSpPr>
         <p:spPr>
           <a:xfrm>
-            <a:off x="9262139" y="2857499"/>
+            <a:off x="9191181" y="2857499"/>
             <a:ext cx="4572000" cy="251460"/>
           </a:xfrm>
           <a:prstGeom prst="rect">
@@ -5177,7 +5177,7 @@
         <p:spPr>
           <a:xfrm>
             <a:off x="4206240" y="3223260"/>
-            <a:ext cx="1189550" cy="274320"/>
+            <a:ext cx="1164496" cy="274320"/>
           </a:xfrm>
           <a:prstGeom prst="rect">
             <a:avLst/>
@@ -5220,7 +5220,7 @@
         </p:nvSpPr>
         <p:spPr>
           <a:xfrm>
-            <a:off x="5487230" y="3154679"/>
+            <a:off x="5462176" y="3154679"/>
             <a:ext cx="2286000" cy="251460"/>
           </a:xfrm>
           <a:prstGeom prst="rect">
@@ -5254,7 +5254,7 @@
         </p:nvSpPr>
         <p:spPr>
           <a:xfrm>
-            <a:off x="5487230" y="3360420"/>
+            <a:off x="5462176" y="3360420"/>
             <a:ext cx="4572000" cy="251460"/>
           </a:xfrm>
           <a:prstGeom prst="rect">
@@ -5323,7 +5323,7 @@
         <p:spPr>
           <a:xfrm>
             <a:off x="4206240" y="3726180"/>
-            <a:ext cx="931418" cy="274320"/>
+            <a:ext cx="926549" cy="274320"/>
           </a:xfrm>
           <a:prstGeom prst="rect">
             <a:avLst/>
@@ -5366,7 +5366,7 @@
         </p:nvSpPr>
         <p:spPr>
           <a:xfrm>
-            <a:off x="5229098" y="3657600"/>
+            <a:off x="5224229" y="3657600"/>
             <a:ext cx="2286000" cy="251460"/>
           </a:xfrm>
           <a:prstGeom prst="rect">
@@ -5387,7 +5387,7 @@
                 </a:solidFill>
                 <a:latin typeface="Helvetica Neue"/>
               </a:rPr>
-              <a:t>5,997 views · 13 posts · 461 avg</a:t>
+              <a:t>6,094 views · 13 posts · 469 avg</a:t>
             </a:r>
           </a:p>
         </p:txBody>
@@ -5400,7 +5400,7 @@
         </p:nvSpPr>
         <p:spPr>
           <a:xfrm>
-            <a:off x="5229098" y="3863340"/>
+            <a:off x="5224229" y="3863340"/>
             <a:ext cx="4572000" cy="251460"/>
           </a:xfrm>
           <a:prstGeom prst="rect">
@@ -5469,7 +5469,7 @@
         <p:spPr>
           <a:xfrm>
             <a:off x="4206240" y="4229100"/>
-            <a:ext cx="628090" cy="274320"/>
+            <a:ext cx="614861" cy="274320"/>
           </a:xfrm>
           <a:prstGeom prst="rect">
             <a:avLst/>
@@ -5512,7 +5512,7 @@
         </p:nvSpPr>
         <p:spPr>
           <a:xfrm>
-            <a:off x="4925770" y="4160520"/>
+            <a:off x="4912541" y="4160520"/>
             <a:ext cx="2286000" cy="251460"/>
           </a:xfrm>
           <a:prstGeom prst="rect">
@@ -5546,7 +5546,7 @@
         </p:nvSpPr>
         <p:spPr>
           <a:xfrm>
-            <a:off x="4925770" y="4366260"/>
+            <a:off x="4912541" y="4366260"/>
             <a:ext cx="4572000" cy="251460"/>
           </a:xfrm>
           <a:prstGeom prst="rect">
@@ -5955,7 +5955,7 @@
                 </a:solidFill>
                 <a:latin typeface="Georgia"/>
               </a:rPr>
-              <a:t>38,857</a:t>
+              <a:t>39,693</a:t>
             </a:r>
           </a:p>
         </p:txBody>
@@ -5989,7 +5989,7 @@
                 </a:solidFill>
                 <a:latin typeface="Helvetica Neue"/>
               </a:rPr>
-              <a:t>50 posts · 781 likes</a:t>
+              <a:t>52 posts · 807 likes</a:t>
             </a:r>
           </a:p>
         </p:txBody>
@@ -6023,7 +6023,7 @@
                 </a:solidFill>
                 <a:latin typeface="Helvetica Neue"/>
               </a:rPr>
-              <a:t>777 average views per post</a:t>
+              <a:t>763 average views per post</a:t>
             </a:r>
           </a:p>
         </p:txBody>
@@ -6179,7 +6179,7 @@
                 </a:solidFill>
                 <a:latin typeface="Helvetica Neue"/>
               </a:rPr>
-              <a:t>#1  ·  TT  ·  2,932 views</a:t>
+              <a:t>#1  ·  TT  ·  3,221 views</a:t>
             </a:r>
           </a:p>
         </p:txBody>
@@ -6991,7 +6991,7 @@
                 </a:solidFill>
                 <a:latin typeface="Georgia"/>
               </a:rPr>
-              <a:t>31,964</a:t>
+              <a:t>32,185</a:t>
             </a:r>
           </a:p>
         </p:txBody>
@@ -7025,7 +7025,7 @@
                 </a:solidFill>
                 <a:latin typeface="Helvetica Neue"/>
               </a:rPr>
-              <a:t>46 posts · 644 likes</a:t>
+              <a:t>47 posts · 649 likes</a:t>
             </a:r>
           </a:p>
         </p:txBody>
@@ -7059,7 +7059,7 @@
                 </a:solidFill>
                 <a:latin typeface="Helvetica Neue"/>
               </a:rPr>
-              <a:t>695 average views per post</a:t>
+              <a:t>685 average views per post</a:t>
             </a:r>
           </a:p>
         </p:txBody>
@@ -7527,7 +7527,7 @@
                 </a:solidFill>
                 <a:latin typeface="Helvetica Neue"/>
               </a:rPr>
-              <a:t>#3  ·  IG  ·  1,999 views</a:t>
+              <a:t>#3  ·  TT  ·  2,042 views</a:t>
             </a:r>
           </a:p>
         </p:txBody>
@@ -7561,7 +7561,7 @@
                 </a:solidFill>
                 <a:latin typeface="Helvetica Neue"/>
               </a:rPr>
-              <a:t>A council member fined $13,000 for unreported campaign contributions. It's public record. </a:t>
+              <a:t>Downey Pizza Company's pastrami pizza is a legendary secret! Used to order it during counc</a:t>
             </a:r>
           </a:p>
         </p:txBody>
@@ -9063,7 +9063,7 @@
                 </a:solidFill>
                 <a:latin typeface="Georgia"/>
               </a:rPr>
-              <a:t>5,997</a:t>
+              <a:t>6,094</a:t>
             </a:r>
           </a:p>
         </p:txBody>
@@ -9097,7 +9097,7 @@
                 </a:solidFill>
                 <a:latin typeface="Helvetica Neue"/>
               </a:rPr>
-              <a:t>13 posts · 75 likes</a:t>
+              <a:t>13 posts · 77 likes</a:t>
             </a:r>
           </a:p>
         </p:txBody>
@@ -9131,7 +9131,7 @@
                 </a:solidFill>
                 <a:latin typeface="Helvetica Neue"/>
               </a:rPr>
-              <a:t>461 average views per post</a:t>
+              <a:t>469 average views per post</a:t>
             </a:r>
           </a:p>
         </p:txBody>
@@ -9599,7 +9599,7 @@
                 </a:solidFill>
                 <a:latin typeface="Helvetica Neue"/>
               </a:rPr>
-              <a:t>#3  ·  IG  ·  571 views</a:t>
+              <a:t>#3  ·  IG  ·  604 views</a:t>
             </a:r>
           </a:p>
         </p:txBody>
@@ -11495,7 +11495,7 @@
                 </a:solidFill>
                 <a:latin typeface="Georgia"/>
               </a:rPr>
-              <a:t>89,000 views</a:t>
+              <a:t>89,637 views</a:t>
             </a:r>
           </a:p>
         </p:txBody>
@@ -11529,7 +11529,7 @@
                 </a:solidFill>
                 <a:latin typeface="Helvetica Neue"/>
               </a:rPr>
-              <a:t>56 posts · 1,589 avg views/post</a:t>
+              <a:t>56 posts · 1,601 avg views/post</a:t>
             </a:r>
           </a:p>
         </p:txBody>
@@ -11855,7 +11855,7 @@
                 </a:solidFill>
                 <a:latin typeface="Georgia"/>
               </a:rPr>
-              <a:t>62,185 views</a:t>
+              <a:t>62,380 views</a:t>
             </a:r>
           </a:p>
         </p:txBody>
@@ -11889,7 +11889,7 @@
                 </a:solidFill>
                 <a:latin typeface="Helvetica Neue"/>
               </a:rPr>
-              <a:t>20 posts · 3,109 avg views/post</a:t>
+              <a:t>20 posts · 3,119 avg views/post</a:t>
             </a:r>
           </a:p>
         </p:txBody>
@@ -14483,7 +14483,7 @@
                 </a:solidFill>
                 <a:latin typeface="Helvetica Neue"/>
               </a:rPr>
-              <a:t>1,306 avg views/post   ·   149 posts   ·   194,621 total</a:t>
+              <a:t>1,299 avg views/post   ·   151 posts   ·   196,094 total</a:t>
             </a:r>
           </a:p>
         </p:txBody>
@@ -16402,7 +16402,7 @@
                 </a:solidFill>
                 <a:latin typeface="Helvetica Neue"/>
               </a:rPr>
-              <a:t>89,000 views · 56 posts</a:t>
+              <a:t>89,637 views · 56 posts</a:t>
             </a:r>
           </a:p>
         </p:txBody>
@@ -16450,7 +16450,7 @@
         <p:spPr>
           <a:xfrm>
             <a:off x="4114800" y="2476968"/>
-            <a:ext cx="5579011" cy="128016"/>
+            <a:ext cx="5539364" cy="128016"/>
           </a:xfrm>
           <a:prstGeom prst="rect">
             <a:avLst/>
@@ -16493,7 +16493,7 @@
         </p:nvSpPr>
         <p:spPr>
           <a:xfrm>
-            <a:off x="9785251" y="2413312"/>
+            <a:off x="9745604" y="2413312"/>
             <a:ext cx="2286000" cy="291904"/>
           </a:xfrm>
           <a:prstGeom prst="rect">
@@ -16562,7 +16562,7 @@
         <p:spPr>
           <a:xfrm>
             <a:off x="4114800" y="2768873"/>
-            <a:ext cx="4344509" cy="128016"/>
+            <a:ext cx="4327162" cy="128016"/>
           </a:xfrm>
           <a:prstGeom prst="rect">
             <a:avLst/>
@@ -16605,7 +16605,7 @@
         </p:nvSpPr>
         <p:spPr>
           <a:xfrm>
-            <a:off x="8550749" y="2705217"/>
+            <a:off x="8533402" y="2705217"/>
             <a:ext cx="2286000" cy="291904"/>
           </a:xfrm>
           <a:prstGeom prst="rect">
@@ -16626,7 +16626,7 @@
                 </a:solidFill>
                 <a:latin typeface="Helvetica Neue"/>
               </a:rPr>
-              <a:t>62,185 views · 20 posts</a:t>
+              <a:t>62,380 views · 20 posts</a:t>
             </a:r>
           </a:p>
         </p:txBody>
@@ -16674,7 +16674,7 @@
         <p:spPr>
           <a:xfrm>
             <a:off x="4114800" y="3060778"/>
-            <a:ext cx="4275763" cy="128016"/>
+            <a:ext cx="4245377" cy="128016"/>
           </a:xfrm>
           <a:prstGeom prst="rect">
             <a:avLst/>
@@ -16717,7 +16717,7 @@
         </p:nvSpPr>
         <p:spPr>
           <a:xfrm>
-            <a:off x="8482003" y="2997121"/>
+            <a:off x="8451617" y="2997121"/>
             <a:ext cx="2286000" cy="291904"/>
           </a:xfrm>
           <a:prstGeom prst="rect">
@@ -16786,7 +16786,7 @@
         <p:spPr>
           <a:xfrm>
             <a:off x="4114800" y="3352682"/>
-            <a:ext cx="3330918" cy="128016"/>
+            <a:ext cx="3307247" cy="128016"/>
           </a:xfrm>
           <a:prstGeom prst="rect">
             <a:avLst/>
@@ -16829,7 +16829,7 @@
         </p:nvSpPr>
         <p:spPr>
           <a:xfrm>
-            <a:off x="7537158" y="3289026"/>
+            <a:off x="7513487" y="3289026"/>
             <a:ext cx="2286000" cy="291904"/>
           </a:xfrm>
           <a:prstGeom prst="rect">
@@ -16898,7 +16898,7 @@
         <p:spPr>
           <a:xfrm>
             <a:off x="4114800" y="3644587"/>
-            <a:ext cx="2714715" cy="128016"/>
+            <a:ext cx="2753415" cy="128016"/>
           </a:xfrm>
           <a:prstGeom prst="rect">
             <a:avLst/>
@@ -16941,7 +16941,7 @@
         </p:nvSpPr>
         <p:spPr>
           <a:xfrm>
-            <a:off x="6920955" y="3580931"/>
+            <a:off x="6959655" y="3580931"/>
             <a:ext cx="2286000" cy="291904"/>
           </a:xfrm>
           <a:prstGeom prst="rect">
@@ -16962,7 +16962,7 @@
                 </a:solidFill>
                 <a:latin typeface="Helvetica Neue"/>
               </a:rPr>
-              <a:t>38,857 views · 50 posts</a:t>
+              <a:t>39,693 views · 52 posts</a:t>
             </a:r>
           </a:p>
         </p:txBody>
@@ -16996,7 +16996,7 @@
                 </a:solidFill>
                 <a:latin typeface="Helvetica Neue"/>
               </a:rPr>
-              <a:t>Elections &amp; Judicial</a:t>
+              <a:t>Other / Uncategorized</a:t>
             </a:r>
           </a:p>
         </p:txBody>
@@ -17010,7 +17010,119 @@
         <p:spPr>
           <a:xfrm>
             <a:off x="4114800" y="3936491"/>
-            <a:ext cx="2233141" cy="128016"/>
+            <a:ext cx="2503413" cy="128016"/>
+          </a:xfrm>
+          <a:prstGeom prst="rect">
+            <a:avLst/>
+          </a:prstGeom>
+          <a:solidFill>
+            <a:srgbClr val="6B7082"/>
+          </a:solidFill>
+          <a:ln>
+            <a:noFill/>
+          </a:ln>
+          <a:effectLst/>
+        </p:spPr>
+        <p:style>
+          <a:lnRef idx="1">
+            <a:schemeClr val="accent1"/>
+          </a:lnRef>
+          <a:fillRef idx="3">
+            <a:schemeClr val="accent1"/>
+          </a:fillRef>
+          <a:effectRef idx="2">
+            <a:schemeClr val="accent1"/>
+          </a:effectRef>
+          <a:fontRef idx="minor">
+            <a:schemeClr val="lt1"/>
+          </a:fontRef>
+        </p:style>
+        <p:txBody>
+          <a:bodyPr rtlCol="0" anchor="ctr"/>
+          <a:lstStyle/>
+          <a:p>
+            <a:pPr algn="ctr"/>
+          </a:p>
+        </p:txBody>
+      </p:sp>
+      <p:sp>
+        <p:nvSpPr>
+          <p:cNvPr id="26" name="TextBox 25"/>
+          <p:cNvSpPr txBox="1"/>
+          <p:nvPr/>
+        </p:nvSpPr>
+        <p:spPr>
+          <a:xfrm>
+            <a:off x="6709653" y="3872835"/>
+            <a:ext cx="2286000" cy="291904"/>
+          </a:xfrm>
+          <a:prstGeom prst="rect">
+            <a:avLst/>
+          </a:prstGeom>
+          <a:noFill/>
+        </p:spPr>
+        <p:txBody>
+          <a:bodyPr wrap="square" lIns="0" rIns="0" tIns="0" bIns="0">
+            <a:spAutoFit/>
+          </a:bodyPr>
+          <a:lstStyle/>
+          <a:p>
+            <a:r>
+              <a:rPr sz="900" b="0">
+                <a:solidFill>
+                  <a:srgbClr val="6B7082"/>
+                </a:solidFill>
+                <a:latin typeface="Helvetica Neue"/>
+              </a:rPr>
+              <a:t>36,089 views · 70 posts</a:t>
+            </a:r>
+          </a:p>
+        </p:txBody>
+      </p:sp>
+      <p:sp>
+        <p:nvSpPr>
+          <p:cNvPr id="27" name="TextBox 26"/>
+          <p:cNvSpPr txBox="1"/>
+          <p:nvPr/>
+        </p:nvSpPr>
+        <p:spPr>
+          <a:xfrm>
+            <a:off x="731520" y="4164740"/>
+            <a:ext cx="3200400" cy="291904"/>
+          </a:xfrm>
+          <a:prstGeom prst="rect">
+            <a:avLst/>
+          </a:prstGeom>
+          <a:noFill/>
+        </p:spPr>
+        <p:txBody>
+          <a:bodyPr wrap="square" lIns="0" rIns="0" tIns="0" bIns="0">
+            <a:spAutoFit/>
+          </a:bodyPr>
+          <a:lstStyle/>
+          <a:p>
+            <a:r>
+              <a:rPr sz="1100" b="1">
+                <a:solidFill>
+                  <a:srgbClr val="141833"/>
+                </a:solidFill>
+                <a:latin typeface="Helvetica Neue"/>
+              </a:rPr>
+              <a:t>Elections &amp; Judicial</a:t>
+            </a:r>
+          </a:p>
+        </p:txBody>
+      </p:sp>
+      <p:sp>
+        <p:nvSpPr>
+          <p:cNvPr id="28" name="Rectangle 27"/>
+          <p:cNvSpPr/>
+          <p:nvPr/>
+        </p:nvSpPr>
+        <p:spPr>
+          <a:xfrm>
+            <a:off x="4114800" y="4228396"/>
+            <a:ext cx="2232602" cy="128016"/>
           </a:xfrm>
           <a:prstGeom prst="rect">
             <a:avLst/>
@@ -17047,13 +17159,13 @@
       </p:sp>
       <p:sp>
         <p:nvSpPr>
-          <p:cNvPr id="26" name="TextBox 25"/>
-          <p:cNvSpPr txBox="1"/>
-          <p:nvPr/>
-        </p:nvSpPr>
-        <p:spPr>
-          <a:xfrm>
-            <a:off x="6439381" y="3872835"/>
+          <p:cNvPr id="29" name="TextBox 28"/>
+          <p:cNvSpPr txBox="1"/>
+          <p:nvPr/>
+        </p:nvSpPr>
+        <p:spPr>
+          <a:xfrm>
+            <a:off x="6438842" y="4164740"/>
             <a:ext cx="2286000" cy="291904"/>
           </a:xfrm>
           <a:prstGeom prst="rect">
@@ -17074,119 +17186,7 @@
                 </a:solidFill>
                 <a:latin typeface="Helvetica Neue"/>
               </a:rPr>
-              <a:t>31,964 views · 46 posts</a:t>
-            </a:r>
-          </a:p>
-        </p:txBody>
-      </p:sp>
-      <p:sp>
-        <p:nvSpPr>
-          <p:cNvPr id="27" name="TextBox 26"/>
-          <p:cNvSpPr txBox="1"/>
-          <p:nvPr/>
-        </p:nvSpPr>
-        <p:spPr>
-          <a:xfrm>
-            <a:off x="731520" y="4164740"/>
-            <a:ext cx="3200400" cy="291904"/>
-          </a:xfrm>
-          <a:prstGeom prst="rect">
-            <a:avLst/>
-          </a:prstGeom>
-          <a:noFill/>
-        </p:spPr>
-        <p:txBody>
-          <a:bodyPr wrap="square" lIns="0" rIns="0" tIns="0" bIns="0">
-            <a:spAutoFit/>
-          </a:bodyPr>
-          <a:lstStyle/>
-          <a:p>
-            <a:r>
-              <a:rPr sz="1100" b="1">
-                <a:solidFill>
-                  <a:srgbClr val="141833"/>
-                </a:solidFill>
-                <a:latin typeface="Helvetica Neue"/>
-              </a:rPr>
-              <a:t>Other / Uncategorized</a:t>
-            </a:r>
-          </a:p>
-        </p:txBody>
-      </p:sp>
-      <p:sp>
-        <p:nvSpPr>
-          <p:cNvPr id="28" name="Rectangle 27"/>
-          <p:cNvSpPr/>
-          <p:nvPr/>
-        </p:nvSpPr>
-        <p:spPr>
-          <a:xfrm>
-            <a:off x="4114800" y="4228396"/>
-            <a:ext cx="2196602" cy="128016"/>
-          </a:xfrm>
-          <a:prstGeom prst="rect">
-            <a:avLst/>
-          </a:prstGeom>
-          <a:solidFill>
-            <a:srgbClr val="6B7082"/>
-          </a:solidFill>
-          <a:ln>
-            <a:noFill/>
-          </a:ln>
-          <a:effectLst/>
-        </p:spPr>
-        <p:style>
-          <a:lnRef idx="1">
-            <a:schemeClr val="accent1"/>
-          </a:lnRef>
-          <a:fillRef idx="3">
-            <a:schemeClr val="accent1"/>
-          </a:fillRef>
-          <a:effectRef idx="2">
-            <a:schemeClr val="accent1"/>
-          </a:effectRef>
-          <a:fontRef idx="minor">
-            <a:schemeClr val="lt1"/>
-          </a:fontRef>
-        </p:style>
-        <p:txBody>
-          <a:bodyPr rtlCol="0" anchor="ctr"/>
-          <a:lstStyle/>
-          <a:p>
-            <a:pPr algn="ctr"/>
-          </a:p>
-        </p:txBody>
-      </p:sp>
-      <p:sp>
-        <p:nvSpPr>
-          <p:cNvPr id="29" name="TextBox 28"/>
-          <p:cNvSpPr txBox="1"/>
-          <p:nvPr/>
-        </p:nvSpPr>
-        <p:spPr>
-          <a:xfrm>
-            <a:off x="6402842" y="4164740"/>
-            <a:ext cx="2286000" cy="291904"/>
-          </a:xfrm>
-          <a:prstGeom prst="rect">
-            <a:avLst/>
-          </a:prstGeom>
-          <a:noFill/>
-        </p:spPr>
-        <p:txBody>
-          <a:bodyPr wrap="square" lIns="0" rIns="0" tIns="0" bIns="0">
-            <a:spAutoFit/>
-          </a:bodyPr>
-          <a:lstStyle/>
-          <a:p>
-            <a:r>
-              <a:rPr sz="900" b="0">
-                <a:solidFill>
-                  <a:srgbClr val="6B7082"/>
-                </a:solidFill>
-                <a:latin typeface="Helvetica Neue"/>
-              </a:rPr>
-              <a:t>31,441 views · 61 posts</a:t>
+              <a:t>32,185 views · 47 posts</a:t>
             </a:r>
           </a:p>
         </p:txBody>
@@ -17234,7 +17234,7 @@
         <p:spPr>
           <a:xfrm>
             <a:off x="4114800" y="4520301"/>
-            <a:ext cx="535090" cy="128016"/>
+            <a:ext cx="531287" cy="128016"/>
           </a:xfrm>
           <a:prstGeom prst="rect">
             <a:avLst/>
@@ -17277,7 +17277,7 @@
         </p:nvSpPr>
         <p:spPr>
           <a:xfrm>
-            <a:off x="4741330" y="4456644"/>
+            <a:off x="4737527" y="4456644"/>
             <a:ext cx="2286000" cy="291904"/>
           </a:xfrm>
           <a:prstGeom prst="rect">
@@ -17346,7 +17346,7 @@
         <p:spPr>
           <a:xfrm>
             <a:off x="4114800" y="4812205"/>
-            <a:ext cx="515877" cy="128016"/>
+            <a:ext cx="512211" cy="128016"/>
           </a:xfrm>
           <a:prstGeom prst="rect">
             <a:avLst/>
@@ -17389,7 +17389,7 @@
         </p:nvSpPr>
         <p:spPr>
           <a:xfrm>
-            <a:off x="4722117" y="4748549"/>
+            <a:off x="4718451" y="4748549"/>
             <a:ext cx="2286000" cy="291904"/>
           </a:xfrm>
           <a:prstGeom prst="rect">
@@ -17458,7 +17458,7 @@
         <p:spPr>
           <a:xfrm>
             <a:off x="4114800" y="5104110"/>
-            <a:ext cx="418976" cy="128016"/>
+            <a:ext cx="422727" cy="128016"/>
           </a:xfrm>
           <a:prstGeom prst="rect">
             <a:avLst/>
@@ -17501,7 +17501,7 @@
         </p:nvSpPr>
         <p:spPr>
           <a:xfrm>
-            <a:off x="4625216" y="5040454"/>
+            <a:off x="4628967" y="5040454"/>
             <a:ext cx="2286000" cy="291904"/>
           </a:xfrm>
           <a:prstGeom prst="rect">
@@ -17522,7 +17522,7 @@
                 </a:solidFill>
                 <a:latin typeface="Helvetica Neue"/>
               </a:rPr>
-              <a:t>5,997 views · 13 posts</a:t>
+              <a:t>6,094 views · 13 posts</a:t>
             </a:r>
           </a:p>
         </p:txBody>
@@ -17570,7 +17570,7 @@
         <p:spPr>
           <a:xfrm>
             <a:off x="4114800" y="5396015"/>
-            <a:ext cx="282531" cy="128016"/>
+            <a:ext cx="280523" cy="128016"/>
           </a:xfrm>
           <a:prstGeom prst="rect">
             <a:avLst/>
@@ -17613,7 +17613,7 @@
         </p:nvSpPr>
         <p:spPr>
           <a:xfrm>
-            <a:off x="4488771" y="5332358"/>
+            <a:off x="4486763" y="5332358"/>
             <a:ext cx="2286000" cy="291904"/>
           </a:xfrm>
           <a:prstGeom prst="rect">
@@ -17682,7 +17682,7 @@
         <p:spPr>
           <a:xfrm>
             <a:off x="4114800" y="5687919"/>
-            <a:ext cx="77619" cy="128016"/>
+            <a:ext cx="77067" cy="128016"/>
           </a:xfrm>
           <a:prstGeom prst="rect">
             <a:avLst/>
@@ -17725,7 +17725,7 @@
         </p:nvSpPr>
         <p:spPr>
           <a:xfrm>
-            <a:off x="4283859" y="5624263"/>
+            <a:off x="4283307" y="5624263"/>
             <a:ext cx="2286000" cy="291904"/>
           </a:xfrm>
           <a:prstGeom prst="rect">
@@ -18342,7 +18342,7 @@
                 </a:solidFill>
                 <a:latin typeface="Georgia"/>
               </a:rPr>
-              <a:t>89,000</a:t>
+              <a:t>89,637</a:t>
             </a:r>
           </a:p>
         </p:txBody>
@@ -18376,7 +18376,7 @@
                 </a:solidFill>
                 <a:latin typeface="Helvetica Neue"/>
               </a:rPr>
-              <a:t>56 posts · 2,849 likes</a:t>
+              <a:t>56 posts · 2,874 likes</a:t>
             </a:r>
           </a:p>
         </p:txBody>
@@ -18410,7 +18410,7 @@
                 </a:solidFill>
                 <a:latin typeface="Helvetica Neue"/>
               </a:rPr>
-              <a:t>1,589 average views per post</a:t>
+              <a:t>1,601 average views per post</a:t>
             </a:r>
           </a:p>
         </p:txBody>
@@ -18878,7 +18878,7 @@
                 </a:solidFill>
                 <a:latin typeface="Helvetica Neue"/>
               </a:rPr>
-              <a:t>#3  ·  FB  ·  4,962 views</a:t>
+              <a:t>#3  ·  FB  ·  4,983 views</a:t>
             </a:r>
           </a:p>
         </p:txBody>
@@ -20414,7 +20414,7 @@
                 </a:solidFill>
                 <a:latin typeface="Georgia"/>
               </a:rPr>
-              <a:t>62,185</a:t>
+              <a:t>62,380</a:t>
             </a:r>
           </a:p>
         </p:txBody>
@@ -20448,7 +20448,7 @@
                 </a:solidFill>
                 <a:latin typeface="Helvetica Neue"/>
               </a:rPr>
-              <a:t>20 posts · 3,168 likes</a:t>
+              <a:t>20 posts · 3,169 likes</a:t>
             </a:r>
           </a:p>
         </p:txBody>
@@ -20482,7 +20482,7 @@
                 </a:solidFill>
                 <a:latin typeface="Helvetica Neue"/>
               </a:rPr>
-              <a:t>3,109 average views per post</a:t>
+              <a:t>3,119 average views per post</a:t>
             </a:r>
           </a:p>
         </p:txBody>

--- a/SPONSOR_CONTENT_REPORT.pptx
+++ b/SPONSOR_CONTENT_REPORT.pptx
@@ -3327,7 +3327,7 @@
                 </a:solidFill>
                 <a:latin typeface="Helvetica Neue"/>
               </a:rPr>
-              <a:t>Reporting window: Jun 8 → 2026-08-17</a:t>
+              <a:t>Reporting window: Jun 8 → 2026-08-19</a:t>
             </a:r>
           </a:p>
         </p:txBody>
@@ -4949,7 +4949,7 @@
                 </a:solidFill>
                 <a:latin typeface="Helvetica Neue"/>
               </a:rPr>
-              <a:t>39,693 views · 52 posts · 763 avg</a:t>
+              <a:t>39,886 views · 52 posts · 767 avg</a:t>
             </a:r>
           </a:p>
         </p:txBody>
@@ -5031,7 +5031,7 @@
         <p:spPr>
           <a:xfrm>
             <a:off x="4206240" y="2720339"/>
-            <a:ext cx="4893501" cy="274320"/>
+            <a:ext cx="4892821" cy="274320"/>
           </a:xfrm>
           <a:prstGeom prst="rect">
             <a:avLst/>
@@ -5074,7 +5074,7 @@
         </p:nvSpPr>
         <p:spPr>
           <a:xfrm>
-            <a:off x="9191181" y="2651759"/>
+            <a:off x="9190501" y="2651759"/>
             <a:ext cx="2286000" cy="251460"/>
           </a:xfrm>
           <a:prstGeom prst="rect">
@@ -5095,7 +5095,7 @@
                 </a:solidFill>
                 <a:latin typeface="Helvetica Neue"/>
               </a:rPr>
-              <a:t>32,185 views · 47 posts · 685 avg</a:t>
+              <a:t>32,337 views · 47 posts · 688 avg</a:t>
             </a:r>
           </a:p>
         </p:txBody>
@@ -5108,7 +5108,7 @@
         </p:nvSpPr>
         <p:spPr>
           <a:xfrm>
-            <a:off x="9191181" y="2857499"/>
+            <a:off x="9190501" y="2857499"/>
             <a:ext cx="4572000" cy="251460"/>
           </a:xfrm>
           <a:prstGeom prst="rect">
@@ -5177,7 +5177,7 @@
         <p:spPr>
           <a:xfrm>
             <a:off x="4206240" y="3223260"/>
-            <a:ext cx="1164496" cy="274320"/>
+            <a:ext cx="1158862" cy="274320"/>
           </a:xfrm>
           <a:prstGeom prst="rect">
             <a:avLst/>
@@ -5220,7 +5220,7 @@
         </p:nvSpPr>
         <p:spPr>
           <a:xfrm>
-            <a:off x="5462176" y="3154679"/>
+            <a:off x="5456542" y="3154679"/>
             <a:ext cx="2286000" cy="251460"/>
           </a:xfrm>
           <a:prstGeom prst="rect">
@@ -5254,7 +5254,7 @@
         </p:nvSpPr>
         <p:spPr>
           <a:xfrm>
-            <a:off x="5462176" y="3360420"/>
+            <a:off x="5456542" y="3360420"/>
             <a:ext cx="4572000" cy="251460"/>
           </a:xfrm>
           <a:prstGeom prst="rect">
@@ -5323,7 +5323,7 @@
         <p:spPr>
           <a:xfrm>
             <a:off x="4206240" y="3726180"/>
-            <a:ext cx="926549" cy="274320"/>
+            <a:ext cx="929480" cy="274320"/>
           </a:xfrm>
           <a:prstGeom prst="rect">
             <a:avLst/>
@@ -5366,7 +5366,7 @@
         </p:nvSpPr>
         <p:spPr>
           <a:xfrm>
-            <a:off x="5224229" y="3657600"/>
+            <a:off x="5227160" y="3657600"/>
             <a:ext cx="2286000" cy="251460"/>
           </a:xfrm>
           <a:prstGeom prst="rect">
@@ -5387,7 +5387,7 @@
                 </a:solidFill>
                 <a:latin typeface="Helvetica Neue"/>
               </a:rPr>
-              <a:t>6,094 views · 13 posts · 469 avg</a:t>
+              <a:t>6,143 views · 13 posts · 473 avg</a:t>
             </a:r>
           </a:p>
         </p:txBody>
@@ -5400,7 +5400,7 @@
         </p:nvSpPr>
         <p:spPr>
           <a:xfrm>
-            <a:off x="5224229" y="3863340"/>
+            <a:off x="5227160" y="3863340"/>
             <a:ext cx="4572000" cy="251460"/>
           </a:xfrm>
           <a:prstGeom prst="rect">
@@ -5469,7 +5469,7 @@
         <p:spPr>
           <a:xfrm>
             <a:off x="4206240" y="4229100"/>
-            <a:ext cx="614861" cy="274320"/>
+            <a:ext cx="611886" cy="274320"/>
           </a:xfrm>
           <a:prstGeom prst="rect">
             <a:avLst/>
@@ -5512,7 +5512,7 @@
         </p:nvSpPr>
         <p:spPr>
           <a:xfrm>
-            <a:off x="4912541" y="4160520"/>
+            <a:off x="4909566" y="4160520"/>
             <a:ext cx="2286000" cy="251460"/>
           </a:xfrm>
           <a:prstGeom prst="rect">
@@ -5546,7 +5546,7 @@
         </p:nvSpPr>
         <p:spPr>
           <a:xfrm>
-            <a:off x="4912541" y="4366260"/>
+            <a:off x="4909566" y="4366260"/>
             <a:ext cx="4572000" cy="251460"/>
           </a:xfrm>
           <a:prstGeom prst="rect">
@@ -5955,7 +5955,7 @@
                 </a:solidFill>
                 <a:latin typeface="Georgia"/>
               </a:rPr>
-              <a:t>39,693</a:t>
+              <a:t>39,886</a:t>
             </a:r>
           </a:p>
         </p:txBody>
@@ -5989,7 +5989,7 @@
                 </a:solidFill>
                 <a:latin typeface="Helvetica Neue"/>
               </a:rPr>
-              <a:t>52 posts · 807 likes</a:t>
+              <a:t>52 posts · 813 likes</a:t>
             </a:r>
           </a:p>
         </p:txBody>
@@ -6023,7 +6023,7 @@
                 </a:solidFill>
                 <a:latin typeface="Helvetica Neue"/>
               </a:rPr>
-              <a:t>763 average views per post</a:t>
+              <a:t>767 average views per post</a:t>
             </a:r>
           </a:p>
         </p:txBody>
@@ -6179,7 +6179,7 @@
                 </a:solidFill>
                 <a:latin typeface="Helvetica Neue"/>
               </a:rPr>
-              <a:t>#1  ·  TT  ·  3,221 views</a:t>
+              <a:t>#1  ·  TT  ·  3,297 views</a:t>
             </a:r>
           </a:p>
         </p:txBody>
@@ -6491,7 +6491,7 @@
                 </a:solidFill>
                 <a:latin typeface="Helvetica Neue"/>
               </a:rPr>
-              <a:t>#3  ·  TT  ·  2,205 views</a:t>
+              <a:t>#3  ·  FB  ·  2,208 views</a:t>
             </a:r>
           </a:p>
         </p:txBody>
@@ -6525,7 +6525,7 @@
                 </a:solidFill>
                 <a:latin typeface="Helvetica Neue"/>
               </a:rPr>
-              <a:t>Responding to your yapping, Downey! Big things are happening. This is...</a:t>
+              <a:t>A proposed 145-unit residential condominium project on 6.1 acres is raising concerns among</a:t>
             </a:r>
           </a:p>
         </p:txBody>
@@ -6991,7 +6991,7 @@
                 </a:solidFill>
                 <a:latin typeface="Georgia"/>
               </a:rPr>
-              <a:t>32,185</a:t>
+              <a:t>32,337</a:t>
             </a:r>
           </a:p>
         </p:txBody>
@@ -7025,7 +7025,7 @@
                 </a:solidFill>
                 <a:latin typeface="Helvetica Neue"/>
               </a:rPr>
-              <a:t>47 posts · 649 likes</a:t>
+              <a:t>47 posts · 650 likes</a:t>
             </a:r>
           </a:p>
         </p:txBody>
@@ -7059,7 +7059,7 @@
                 </a:solidFill>
                 <a:latin typeface="Helvetica Neue"/>
               </a:rPr>
-              <a:t>685 average views per post</a:t>
+              <a:t>688 average views per post</a:t>
             </a:r>
           </a:p>
         </p:txBody>
@@ -7527,7 +7527,7 @@
                 </a:solidFill>
                 <a:latin typeface="Helvetica Neue"/>
               </a:rPr>
-              <a:t>#3  ·  TT  ·  2,042 views</a:t>
+              <a:t>#3  ·  TT  ·  2,075 views</a:t>
             </a:r>
           </a:p>
         </p:txBody>
@@ -9063,7 +9063,7 @@
                 </a:solidFill>
                 <a:latin typeface="Georgia"/>
               </a:rPr>
-              <a:t>6,094</a:t>
+              <a:t>6,143</a:t>
             </a:r>
           </a:p>
         </p:txBody>
@@ -9131,7 +9131,7 @@
                 </a:solidFill>
                 <a:latin typeface="Helvetica Neue"/>
               </a:rPr>
-              <a:t>469 average views per post</a:t>
+              <a:t>473 average views per post</a:t>
             </a:r>
           </a:p>
         </p:txBody>
@@ -9599,7 +9599,7 @@
                 </a:solidFill>
                 <a:latin typeface="Helvetica Neue"/>
               </a:rPr>
-              <a:t>#3  ·  IG  ·  604 views</a:t>
+              <a:t>#3  ·  IG  ·  637 views</a:t>
             </a:r>
           </a:p>
         </p:txBody>
@@ -11495,7 +11495,7 @@
                 </a:solidFill>
                 <a:latin typeface="Georgia"/>
               </a:rPr>
-              <a:t>89,637 views</a:t>
+              <a:t>90,269 views</a:t>
             </a:r>
           </a:p>
         </p:txBody>
@@ -11529,7 +11529,7 @@
                 </a:solidFill>
                 <a:latin typeface="Helvetica Neue"/>
               </a:rPr>
-              <a:t>56 posts · 1,601 avg views/post</a:t>
+              <a:t>57 posts · 1,584 avg views/post</a:t>
             </a:r>
           </a:p>
         </p:txBody>
@@ -11855,7 +11855,7 @@
                 </a:solidFill>
                 <a:latin typeface="Georgia"/>
               </a:rPr>
-              <a:t>62,380 views</a:t>
+              <a:t>62,524 views</a:t>
             </a:r>
           </a:p>
         </p:txBody>
@@ -11889,7 +11889,7 @@
                 </a:solidFill>
                 <a:latin typeface="Helvetica Neue"/>
               </a:rPr>
-              <a:t>20 posts · 3,119 avg views/post</a:t>
+              <a:t>20 posts · 3,126 avg views/post</a:t>
             </a:r>
           </a:p>
         </p:txBody>
@@ -14483,7 +14483,7 @@
                 </a:solidFill>
                 <a:latin typeface="Helvetica Neue"/>
               </a:rPr>
-              <a:t>1,299 avg views/post   ·   151 posts   ·   196,094 total</a:t>
+              <a:t>1,296 avg views/post   ·   152 posts   ·   196,919 total</a:t>
             </a:r>
           </a:p>
         </p:txBody>
@@ -16402,7 +16402,7 @@
                 </a:solidFill>
                 <a:latin typeface="Helvetica Neue"/>
               </a:rPr>
-              <a:t>89,637 views · 56 posts</a:t>
+              <a:t>90,269 views · 57 posts</a:t>
             </a:r>
           </a:p>
         </p:txBody>
@@ -16450,7 +16450,7 @@
         <p:spPr>
           <a:xfrm>
             <a:off x="4114800" y="2476968"/>
-            <a:ext cx="5539364" cy="128016"/>
+            <a:ext cx="5500581" cy="128016"/>
           </a:xfrm>
           <a:prstGeom prst="rect">
             <a:avLst/>
@@ -16493,7 +16493,7 @@
         </p:nvSpPr>
         <p:spPr>
           <a:xfrm>
-            <a:off x="9745604" y="2413312"/>
+            <a:off x="9706821" y="2413312"/>
             <a:ext cx="2286000" cy="291904"/>
           </a:xfrm>
           <a:prstGeom prst="rect">
@@ -16562,7 +16562,7 @@
         <p:spPr>
           <a:xfrm>
             <a:off x="4114800" y="2768873"/>
-            <a:ext cx="4327162" cy="128016"/>
+            <a:ext cx="4306785" cy="128016"/>
           </a:xfrm>
           <a:prstGeom prst="rect">
             <a:avLst/>
@@ -16605,7 +16605,7 @@
         </p:nvSpPr>
         <p:spPr>
           <a:xfrm>
-            <a:off x="8533402" y="2705217"/>
+            <a:off x="8513025" y="2705217"/>
             <a:ext cx="2286000" cy="291904"/>
           </a:xfrm>
           <a:prstGeom prst="rect">
@@ -16626,7 +16626,7 @@
                 </a:solidFill>
                 <a:latin typeface="Helvetica Neue"/>
               </a:rPr>
-              <a:t>62,380 views · 20 posts</a:t>
+              <a:t>62,524 views · 20 posts</a:t>
             </a:r>
           </a:p>
         </p:txBody>
@@ -16674,7 +16674,7 @@
         <p:spPr>
           <a:xfrm>
             <a:off x="4114800" y="3060778"/>
-            <a:ext cx="4245377" cy="128016"/>
+            <a:ext cx="4215654" cy="128016"/>
           </a:xfrm>
           <a:prstGeom prst="rect">
             <a:avLst/>
@@ -16717,7 +16717,7 @@
         </p:nvSpPr>
         <p:spPr>
           <a:xfrm>
-            <a:off x="8451617" y="2997121"/>
+            <a:off x="8421894" y="2997121"/>
             <a:ext cx="2286000" cy="291904"/>
           </a:xfrm>
           <a:prstGeom prst="rect">
@@ -16786,7 +16786,7 @@
         <p:spPr>
           <a:xfrm>
             <a:off x="4114800" y="3352682"/>
-            <a:ext cx="3307247" cy="128016"/>
+            <a:ext cx="3284092" cy="128016"/>
           </a:xfrm>
           <a:prstGeom prst="rect">
             <a:avLst/>
@@ -16829,7 +16829,7 @@
         </p:nvSpPr>
         <p:spPr>
           <a:xfrm>
-            <a:off x="7513487" y="3289026"/>
+            <a:off x="7490332" y="3289026"/>
             <a:ext cx="2286000" cy="291904"/>
           </a:xfrm>
           <a:prstGeom prst="rect">
@@ -16884,7 +16884,7 @@
                 </a:solidFill>
                 <a:latin typeface="Helvetica Neue"/>
               </a:rPr>
-              <a:t>Community &amp; Culture</a:t>
+              <a:t>Other / Uncategorized</a:t>
             </a:r>
           </a:p>
         </p:txBody>
@@ -16898,7 +16898,119 @@
         <p:spPr>
           <a:xfrm>
             <a:off x="4114800" y="3644587"/>
-            <a:ext cx="2753415" cy="128016"/>
+            <a:ext cx="2904965" cy="128016"/>
+          </a:xfrm>
+          <a:prstGeom prst="rect">
+            <a:avLst/>
+          </a:prstGeom>
+          <a:solidFill>
+            <a:srgbClr val="6B7082"/>
+          </a:solidFill>
+          <a:ln>
+            <a:noFill/>
+          </a:ln>
+          <a:effectLst/>
+        </p:spPr>
+        <p:style>
+          <a:lnRef idx="1">
+            <a:schemeClr val="accent1"/>
+          </a:lnRef>
+          <a:fillRef idx="3">
+            <a:schemeClr val="accent1"/>
+          </a:fillRef>
+          <a:effectRef idx="2">
+            <a:schemeClr val="accent1"/>
+          </a:effectRef>
+          <a:fontRef idx="minor">
+            <a:schemeClr val="lt1"/>
+          </a:fontRef>
+        </p:style>
+        <p:txBody>
+          <a:bodyPr rtlCol="0" anchor="ctr"/>
+          <a:lstStyle/>
+          <a:p>
+            <a:pPr algn="ctr"/>
+          </a:p>
+        </p:txBody>
+      </p:sp>
+      <p:sp>
+        <p:nvSpPr>
+          <p:cNvPr id="23" name="TextBox 22"/>
+          <p:cNvSpPr txBox="1"/>
+          <p:nvPr/>
+        </p:nvSpPr>
+        <p:spPr>
+          <a:xfrm>
+            <a:off x="7111205" y="3580931"/>
+            <a:ext cx="2286000" cy="291904"/>
+          </a:xfrm>
+          <a:prstGeom prst="rect">
+            <a:avLst/>
+          </a:prstGeom>
+          <a:noFill/>
+        </p:spPr>
+        <p:txBody>
+          <a:bodyPr wrap="square" lIns="0" rIns="0" tIns="0" bIns="0">
+            <a:spAutoFit/>
+          </a:bodyPr>
+          <a:lstStyle/>
+          <a:p>
+            <a:r>
+              <a:rPr sz="900" b="0">
+                <a:solidFill>
+                  <a:srgbClr val="6B7082"/>
+                </a:solidFill>
+                <a:latin typeface="Helvetica Neue"/>
+              </a:rPr>
+              <a:t>42,173 views · 82 posts</a:t>
+            </a:r>
+          </a:p>
+        </p:txBody>
+      </p:sp>
+      <p:sp>
+        <p:nvSpPr>
+          <p:cNvPr id="24" name="TextBox 23"/>
+          <p:cNvSpPr txBox="1"/>
+          <p:nvPr/>
+        </p:nvSpPr>
+        <p:spPr>
+          <a:xfrm>
+            <a:off x="731520" y="3872835"/>
+            <a:ext cx="3200400" cy="291904"/>
+          </a:xfrm>
+          <a:prstGeom prst="rect">
+            <a:avLst/>
+          </a:prstGeom>
+          <a:noFill/>
+        </p:spPr>
+        <p:txBody>
+          <a:bodyPr wrap="square" lIns="0" rIns="0" tIns="0" bIns="0">
+            <a:spAutoFit/>
+          </a:bodyPr>
+          <a:lstStyle/>
+          <a:p>
+            <a:r>
+              <a:rPr sz="1100" b="1">
+                <a:solidFill>
+                  <a:srgbClr val="141833"/>
+                </a:solidFill>
+                <a:latin typeface="Helvetica Neue"/>
+              </a:rPr>
+              <a:t>Community &amp; Culture</a:t>
+            </a:r>
+          </a:p>
+        </p:txBody>
+      </p:sp>
+      <p:sp>
+        <p:nvSpPr>
+          <p:cNvPr id="25" name="Rectangle 24"/>
+          <p:cNvSpPr/>
+          <p:nvPr/>
+        </p:nvSpPr>
+        <p:spPr>
+          <a:xfrm>
+            <a:off x="4114800" y="3936491"/>
+            <a:ext cx="2747432" cy="128016"/>
           </a:xfrm>
           <a:prstGeom prst="rect">
             <a:avLst/>
@@ -16935,13 +17047,13 @@
       </p:sp>
       <p:sp>
         <p:nvSpPr>
-          <p:cNvPr id="23" name="TextBox 22"/>
-          <p:cNvSpPr txBox="1"/>
-          <p:nvPr/>
-        </p:nvSpPr>
-        <p:spPr>
-          <a:xfrm>
-            <a:off x="6959655" y="3580931"/>
+          <p:cNvPr id="26" name="TextBox 25"/>
+          <p:cNvSpPr txBox="1"/>
+          <p:nvPr/>
+        </p:nvSpPr>
+        <p:spPr>
+          <a:xfrm>
+            <a:off x="6953672" y="3872835"/>
             <a:ext cx="2286000" cy="291904"/>
           </a:xfrm>
           <a:prstGeom prst="rect">
@@ -16962,119 +17074,7 @@
                 </a:solidFill>
                 <a:latin typeface="Helvetica Neue"/>
               </a:rPr>
-              <a:t>39,693 views · 52 posts</a:t>
-            </a:r>
-          </a:p>
-        </p:txBody>
-      </p:sp>
-      <p:sp>
-        <p:nvSpPr>
-          <p:cNvPr id="24" name="TextBox 23"/>
-          <p:cNvSpPr txBox="1"/>
-          <p:nvPr/>
-        </p:nvSpPr>
-        <p:spPr>
-          <a:xfrm>
-            <a:off x="731520" y="3872835"/>
-            <a:ext cx="3200400" cy="291904"/>
-          </a:xfrm>
-          <a:prstGeom prst="rect">
-            <a:avLst/>
-          </a:prstGeom>
-          <a:noFill/>
-        </p:spPr>
-        <p:txBody>
-          <a:bodyPr wrap="square" lIns="0" rIns="0" tIns="0" bIns="0">
-            <a:spAutoFit/>
-          </a:bodyPr>
-          <a:lstStyle/>
-          <a:p>
-            <a:r>
-              <a:rPr sz="1100" b="1">
-                <a:solidFill>
-                  <a:srgbClr val="141833"/>
-                </a:solidFill>
-                <a:latin typeface="Helvetica Neue"/>
-              </a:rPr>
-              <a:t>Other / Uncategorized</a:t>
-            </a:r>
-          </a:p>
-        </p:txBody>
-      </p:sp>
-      <p:sp>
-        <p:nvSpPr>
-          <p:cNvPr id="25" name="Rectangle 24"/>
-          <p:cNvSpPr/>
-          <p:nvPr/>
-        </p:nvSpPr>
-        <p:spPr>
-          <a:xfrm>
-            <a:off x="4114800" y="3936491"/>
-            <a:ext cx="2503413" cy="128016"/>
-          </a:xfrm>
-          <a:prstGeom prst="rect">
-            <a:avLst/>
-          </a:prstGeom>
-          <a:solidFill>
-            <a:srgbClr val="6B7082"/>
-          </a:solidFill>
-          <a:ln>
-            <a:noFill/>
-          </a:ln>
-          <a:effectLst/>
-        </p:spPr>
-        <p:style>
-          <a:lnRef idx="1">
-            <a:schemeClr val="accent1"/>
-          </a:lnRef>
-          <a:fillRef idx="3">
-            <a:schemeClr val="accent1"/>
-          </a:fillRef>
-          <a:effectRef idx="2">
-            <a:schemeClr val="accent1"/>
-          </a:effectRef>
-          <a:fontRef idx="minor">
-            <a:schemeClr val="lt1"/>
-          </a:fontRef>
-        </p:style>
-        <p:txBody>
-          <a:bodyPr rtlCol="0" anchor="ctr"/>
-          <a:lstStyle/>
-          <a:p>
-            <a:pPr algn="ctr"/>
-          </a:p>
-        </p:txBody>
-      </p:sp>
-      <p:sp>
-        <p:nvSpPr>
-          <p:cNvPr id="26" name="TextBox 25"/>
-          <p:cNvSpPr txBox="1"/>
-          <p:nvPr/>
-        </p:nvSpPr>
-        <p:spPr>
-          <a:xfrm>
-            <a:off x="6709653" y="3872835"/>
-            <a:ext cx="2286000" cy="291904"/>
-          </a:xfrm>
-          <a:prstGeom prst="rect">
-            <a:avLst/>
-          </a:prstGeom>
-          <a:noFill/>
-        </p:spPr>
-        <p:txBody>
-          <a:bodyPr wrap="square" lIns="0" rIns="0" tIns="0" bIns="0">
-            <a:spAutoFit/>
-          </a:bodyPr>
-          <a:lstStyle/>
-          <a:p>
-            <a:r>
-              <a:rPr sz="900" b="0">
-                <a:solidFill>
-                  <a:srgbClr val="6B7082"/>
-                </a:solidFill>
-                <a:latin typeface="Helvetica Neue"/>
-              </a:rPr>
-              <a:t>36,089 views · 70 posts</a:t>
+              <a:t>39,886 views · 52 posts</a:t>
             </a:r>
           </a:p>
         </p:txBody>
@@ -17122,7 +17122,7 @@
         <p:spPr>
           <a:xfrm>
             <a:off x="4114800" y="4228396"/>
-            <a:ext cx="2232602" cy="128016"/>
+            <a:ext cx="2227441" cy="128016"/>
           </a:xfrm>
           <a:prstGeom prst="rect">
             <a:avLst/>
@@ -17165,7 +17165,7 @@
         </p:nvSpPr>
         <p:spPr>
           <a:xfrm>
-            <a:off x="6438842" y="4164740"/>
+            <a:off x="6433681" y="4164740"/>
             <a:ext cx="2286000" cy="291904"/>
           </a:xfrm>
           <a:prstGeom prst="rect">
@@ -17186,7 +17186,7 @@
                 </a:solidFill>
                 <a:latin typeface="Helvetica Neue"/>
               </a:rPr>
-              <a:t>32,185 views · 47 posts</a:t>
+              <a:t>32,337 views · 47 posts</a:t>
             </a:r>
           </a:p>
         </p:txBody>
@@ -17234,7 +17234,7 @@
         <p:spPr>
           <a:xfrm>
             <a:off x="4114800" y="4520301"/>
-            <a:ext cx="531287" cy="128016"/>
+            <a:ext cx="527568" cy="128016"/>
           </a:xfrm>
           <a:prstGeom prst="rect">
             <a:avLst/>
@@ -17277,7 +17277,7 @@
         </p:nvSpPr>
         <p:spPr>
           <a:xfrm>
-            <a:off x="4737527" y="4456644"/>
+            <a:off x="4733808" y="4456644"/>
             <a:ext cx="2286000" cy="291904"/>
           </a:xfrm>
           <a:prstGeom prst="rect">
@@ -17346,7 +17346,7 @@
         <p:spPr>
           <a:xfrm>
             <a:off x="4114800" y="4812205"/>
-            <a:ext cx="512211" cy="128016"/>
+            <a:ext cx="508625" cy="128016"/>
           </a:xfrm>
           <a:prstGeom prst="rect">
             <a:avLst/>
@@ -17389,7 +17389,7 @@
         </p:nvSpPr>
         <p:spPr>
           <a:xfrm>
-            <a:off x="4718451" y="4748549"/>
+            <a:off x="4714865" y="4748549"/>
             <a:ext cx="2286000" cy="291904"/>
           </a:xfrm>
           <a:prstGeom prst="rect">
@@ -17458,7 +17458,7 @@
         <p:spPr>
           <a:xfrm>
             <a:off x="4114800" y="5104110"/>
-            <a:ext cx="422727" cy="128016"/>
+            <a:ext cx="423142" cy="128016"/>
           </a:xfrm>
           <a:prstGeom prst="rect">
             <a:avLst/>
@@ -17501,7 +17501,7 @@
         </p:nvSpPr>
         <p:spPr>
           <a:xfrm>
-            <a:off x="4628967" y="5040454"/>
+            <a:off x="4629382" y="5040454"/>
             <a:ext cx="2286000" cy="291904"/>
           </a:xfrm>
           <a:prstGeom prst="rect">
@@ -17522,7 +17522,7 @@
                 </a:solidFill>
                 <a:latin typeface="Helvetica Neue"/>
               </a:rPr>
-              <a:t>6,094 views · 13 posts</a:t>
+              <a:t>6,143 views · 13 posts</a:t>
             </a:r>
           </a:p>
         </p:txBody>
@@ -17570,7 +17570,7 @@
         <p:spPr>
           <a:xfrm>
             <a:off x="4114800" y="5396015"/>
-            <a:ext cx="280523" cy="128016"/>
+            <a:ext cx="278559" cy="128016"/>
           </a:xfrm>
           <a:prstGeom prst="rect">
             <a:avLst/>
@@ -17613,7 +17613,7 @@
         </p:nvSpPr>
         <p:spPr>
           <a:xfrm>
-            <a:off x="4486763" y="5332358"/>
+            <a:off x="4484799" y="5332358"/>
             <a:ext cx="2286000" cy="291904"/>
           </a:xfrm>
           <a:prstGeom prst="rect">
@@ -17682,7 +17682,7 @@
         <p:spPr>
           <a:xfrm>
             <a:off x="4114800" y="5687919"/>
-            <a:ext cx="77067" cy="128016"/>
+            <a:ext cx="76528" cy="128016"/>
           </a:xfrm>
           <a:prstGeom prst="rect">
             <a:avLst/>
@@ -17725,7 +17725,7 @@
         </p:nvSpPr>
         <p:spPr>
           <a:xfrm>
-            <a:off x="4283307" y="5624263"/>
+            <a:off x="4282768" y="5624263"/>
             <a:ext cx="2286000" cy="291904"/>
           </a:xfrm>
           <a:prstGeom prst="rect">
@@ -18342,7 +18342,7 @@
                 </a:solidFill>
                 <a:latin typeface="Georgia"/>
               </a:rPr>
-              <a:t>89,637</a:t>
+              <a:t>90,269</a:t>
             </a:r>
           </a:p>
         </p:txBody>
@@ -18376,7 +18376,7 @@
                 </a:solidFill>
                 <a:latin typeface="Helvetica Neue"/>
               </a:rPr>
-              <a:t>56 posts · 2,874 likes</a:t>
+              <a:t>57 posts · 2,921 likes</a:t>
             </a:r>
           </a:p>
         </p:txBody>
@@ -18410,7 +18410,7 @@
                 </a:solidFill>
                 <a:latin typeface="Helvetica Neue"/>
               </a:rPr>
-              <a:t>1,601 average views per post</a:t>
+              <a:t>1,584 average views per post</a:t>
             </a:r>
           </a:p>
         </p:txBody>
@@ -18878,7 +18878,7 @@
                 </a:solidFill>
                 <a:latin typeface="Helvetica Neue"/>
               </a:rPr>
-              <a:t>#3  ·  FB  ·  4,983 views</a:t>
+              <a:t>#3  ·  FB  ·  4,999 views</a:t>
             </a:r>
           </a:p>
         </p:txBody>
@@ -20414,7 +20414,7 @@
                 </a:solidFill>
                 <a:latin typeface="Georgia"/>
               </a:rPr>
-              <a:t>62,380</a:t>
+              <a:t>62,524</a:t>
             </a:r>
           </a:p>
         </p:txBody>
@@ -20448,7 +20448,7 @@
                 </a:solidFill>
                 <a:latin typeface="Helvetica Neue"/>
               </a:rPr>
-              <a:t>20 posts · 3,169 likes</a:t>
+              <a:t>20 posts · 3,174 likes</a:t>
             </a:r>
           </a:p>
         </p:txBody>
@@ -20482,7 +20482,7 @@
                 </a:solidFill>
                 <a:latin typeface="Helvetica Neue"/>
               </a:rPr>
-              <a:t>3,119 average views per post</a:t>
+              <a:t>3,126 average views per post</a:t>
             </a:r>
           </a:p>
         </p:txBody>

--- a/SPONSOR_CONTENT_REPORT.pptx
+++ b/SPONSOR_CONTENT_REPORT.pptx
@@ -3327,7 +3327,7 @@
                 </a:solidFill>
                 <a:latin typeface="Helvetica Neue"/>
               </a:rPr>
-              <a:t>Reporting window: Jun 8 → 2026-08-19</a:t>
+              <a:t>Reporting window: Jun 8 → 2026-08-21</a:t>
             </a:r>
           </a:p>
         </p:txBody>
@@ -4885,7 +4885,7 @@
         <p:spPr>
           <a:xfrm>
             <a:off x="4206240" y="2217420"/>
-            <a:ext cx="6035040" cy="274320"/>
+            <a:ext cx="6035039" cy="274320"/>
           </a:xfrm>
           <a:prstGeom prst="rect">
             <a:avLst/>
@@ -4949,7 +4949,7 @@
                 </a:solidFill>
                 <a:latin typeface="Helvetica Neue"/>
               </a:rPr>
-              <a:t>39,886 views · 52 posts · 767 avg</a:t>
+              <a:t>40,024 views · 52 posts · 770 avg</a:t>
             </a:r>
           </a:p>
         </p:txBody>
@@ -5031,7 +5031,7 @@
         <p:spPr>
           <a:xfrm>
             <a:off x="4206240" y="2720339"/>
-            <a:ext cx="4892821" cy="274320"/>
+            <a:ext cx="4880475" cy="274320"/>
           </a:xfrm>
           <a:prstGeom prst="rect">
             <a:avLst/>
@@ -5074,7 +5074,7 @@
         </p:nvSpPr>
         <p:spPr>
           <a:xfrm>
-            <a:off x="9190501" y="2651759"/>
+            <a:off x="9178155" y="2651759"/>
             <a:ext cx="2286000" cy="251460"/>
           </a:xfrm>
           <a:prstGeom prst="rect">
@@ -5095,7 +5095,7 @@
                 </a:solidFill>
                 <a:latin typeface="Helvetica Neue"/>
               </a:rPr>
-              <a:t>32,337 views · 47 posts · 688 avg</a:t>
+              <a:t>32,367 views · 48 posts · 674 avg</a:t>
             </a:r>
           </a:p>
         </p:txBody>
@@ -5108,7 +5108,7 @@
         </p:nvSpPr>
         <p:spPr>
           <a:xfrm>
-            <a:off x="9190501" y="2857499"/>
+            <a:off x="9178155" y="2857499"/>
             <a:ext cx="4572000" cy="251460"/>
           </a:xfrm>
           <a:prstGeom prst="rect">
@@ -5177,7 +5177,7 @@
         <p:spPr>
           <a:xfrm>
             <a:off x="4206240" y="3223260"/>
-            <a:ext cx="1158862" cy="274320"/>
+            <a:ext cx="1154866" cy="274320"/>
           </a:xfrm>
           <a:prstGeom prst="rect">
             <a:avLst/>
@@ -5220,7 +5220,7 @@
         </p:nvSpPr>
         <p:spPr>
           <a:xfrm>
-            <a:off x="5456542" y="3154679"/>
+            <a:off x="5452546" y="3154679"/>
             <a:ext cx="2286000" cy="251460"/>
           </a:xfrm>
           <a:prstGeom prst="rect">
@@ -5254,7 +5254,7 @@
         </p:nvSpPr>
         <p:spPr>
           <a:xfrm>
-            <a:off x="5456542" y="3360420"/>
+            <a:off x="5452546" y="3360420"/>
             <a:ext cx="4572000" cy="251460"/>
           </a:xfrm>
           <a:prstGeom prst="rect">
@@ -5323,7 +5323,7 @@
         <p:spPr>
           <a:xfrm>
             <a:off x="4206240" y="3726180"/>
-            <a:ext cx="929480" cy="274320"/>
+            <a:ext cx="929140" cy="274320"/>
           </a:xfrm>
           <a:prstGeom prst="rect">
             <a:avLst/>
@@ -5366,7 +5366,7 @@
         </p:nvSpPr>
         <p:spPr>
           <a:xfrm>
-            <a:off x="5227160" y="3657600"/>
+            <a:off x="5226820" y="3657600"/>
             <a:ext cx="2286000" cy="251460"/>
           </a:xfrm>
           <a:prstGeom prst="rect">
@@ -5387,7 +5387,7 @@
                 </a:solidFill>
                 <a:latin typeface="Helvetica Neue"/>
               </a:rPr>
-              <a:t>6,143 views · 13 posts · 473 avg</a:t>
+              <a:t>6,162 views · 13 posts · 474 avg</a:t>
             </a:r>
           </a:p>
         </p:txBody>
@@ -5400,7 +5400,7 @@
         </p:nvSpPr>
         <p:spPr>
           <a:xfrm>
-            <a:off x="5227160" y="3863340"/>
+            <a:off x="5226820" y="3863340"/>
             <a:ext cx="4572000" cy="251460"/>
           </a:xfrm>
           <a:prstGeom prst="rect">
@@ -5469,7 +5469,7 @@
         <p:spPr>
           <a:xfrm>
             <a:off x="4206240" y="4229100"/>
-            <a:ext cx="611886" cy="274320"/>
+            <a:ext cx="609776" cy="274320"/>
           </a:xfrm>
           <a:prstGeom prst="rect">
             <a:avLst/>
@@ -5512,7 +5512,7 @@
         </p:nvSpPr>
         <p:spPr>
           <a:xfrm>
-            <a:off x="4909566" y="4160520"/>
+            <a:off x="4907456" y="4160520"/>
             <a:ext cx="2286000" cy="251460"/>
           </a:xfrm>
           <a:prstGeom prst="rect">
@@ -5546,7 +5546,7 @@
         </p:nvSpPr>
         <p:spPr>
           <a:xfrm>
-            <a:off x="4909566" y="4366260"/>
+            <a:off x="4907456" y="4366260"/>
             <a:ext cx="4572000" cy="251460"/>
           </a:xfrm>
           <a:prstGeom prst="rect">
@@ -5955,7 +5955,7 @@
                 </a:solidFill>
                 <a:latin typeface="Georgia"/>
               </a:rPr>
-              <a:t>39,886</a:t>
+              <a:t>40,024</a:t>
             </a:r>
           </a:p>
         </p:txBody>
@@ -5989,7 +5989,7 @@
                 </a:solidFill>
                 <a:latin typeface="Helvetica Neue"/>
               </a:rPr>
-              <a:t>52 posts · 813 likes</a:t>
+              <a:t>52 posts · 817 likes</a:t>
             </a:r>
           </a:p>
         </p:txBody>
@@ -6023,7 +6023,7 @@
                 </a:solidFill>
                 <a:latin typeface="Helvetica Neue"/>
               </a:rPr>
-              <a:t>767 average views per post</a:t>
+              <a:t>770 average views per post</a:t>
             </a:r>
           </a:p>
         </p:txBody>
@@ -6179,7 +6179,7 @@
                 </a:solidFill>
                 <a:latin typeface="Helvetica Neue"/>
               </a:rPr>
-              <a:t>#1  ·  TT  ·  3,297 views</a:t>
+              <a:t>#1  ·  TT  ·  3,370 views</a:t>
             </a:r>
           </a:p>
         </p:txBody>
@@ -6491,7 +6491,7 @@
                 </a:solidFill>
                 <a:latin typeface="Helvetica Neue"/>
               </a:rPr>
-              <a:t>#3  ·  FB  ·  2,208 views</a:t>
+              <a:t>#3  ·  FB  ·  2,220 views</a:t>
             </a:r>
           </a:p>
         </p:txBody>
@@ -6991,7 +6991,7 @@
                 </a:solidFill>
                 <a:latin typeface="Georgia"/>
               </a:rPr>
-              <a:t>32,337</a:t>
+              <a:t>32,367</a:t>
             </a:r>
           </a:p>
         </p:txBody>
@@ -7025,7 +7025,7 @@
                 </a:solidFill>
                 <a:latin typeface="Helvetica Neue"/>
               </a:rPr>
-              <a:t>47 posts · 650 likes</a:t>
+              <a:t>48 posts · 651 likes</a:t>
             </a:r>
           </a:p>
         </p:txBody>
@@ -7059,7 +7059,7 @@
                 </a:solidFill>
                 <a:latin typeface="Helvetica Neue"/>
               </a:rPr>
-              <a:t>688 average views per post</a:t>
+              <a:t>674 average views per post</a:t>
             </a:r>
           </a:p>
         </p:txBody>
@@ -9063,7 +9063,7 @@
                 </a:solidFill>
                 <a:latin typeface="Georgia"/>
               </a:rPr>
-              <a:t>6,143</a:t>
+              <a:t>6,162</a:t>
             </a:r>
           </a:p>
         </p:txBody>
@@ -9131,7 +9131,7 @@
                 </a:solidFill>
                 <a:latin typeface="Helvetica Neue"/>
               </a:rPr>
-              <a:t>473 average views per post</a:t>
+              <a:t>474 average views per post</a:t>
             </a:r>
           </a:p>
         </p:txBody>
@@ -9599,7 +9599,7 @@
                 </a:solidFill>
                 <a:latin typeface="Helvetica Neue"/>
               </a:rPr>
-              <a:t>#3  ·  IG  ·  637 views</a:t>
+              <a:t>#3  ·  IG  ·  644 views</a:t>
             </a:r>
           </a:p>
         </p:txBody>
@@ -11495,7 +11495,7 @@
                 </a:solidFill>
                 <a:latin typeface="Georgia"/>
               </a:rPr>
-              <a:t>90,269 views</a:t>
+              <a:t>92,492 views</a:t>
             </a:r>
           </a:p>
         </p:txBody>
@@ -11529,7 +11529,7 @@
                 </a:solidFill>
                 <a:latin typeface="Helvetica Neue"/>
               </a:rPr>
-              <a:t>57 posts · 1,584 avg views/post</a:t>
+              <a:t>60 posts · 1,542 avg views/post</a:t>
             </a:r>
           </a:p>
         </p:txBody>
@@ -11855,7 +11855,7 @@
                 </a:solidFill>
                 <a:latin typeface="Georgia"/>
               </a:rPr>
-              <a:t>62,524 views</a:t>
+              <a:t>62,525 views</a:t>
             </a:r>
           </a:p>
         </p:txBody>
@@ -14483,7 +14483,7 @@
                 </a:solidFill>
                 <a:latin typeface="Helvetica Neue"/>
               </a:rPr>
-              <a:t>1,296 avg views/post   ·   152 posts   ·   196,919 total</a:t>
+              <a:t>1,286 avg views/post   ·   155 posts   ·   199,280 total</a:t>
             </a:r>
           </a:p>
         </p:txBody>
@@ -16402,7 +16402,7 @@
                 </a:solidFill>
                 <a:latin typeface="Helvetica Neue"/>
               </a:rPr>
-              <a:t>90,269 views · 57 posts</a:t>
+              <a:t>92,492 views · 60 posts</a:t>
             </a:r>
           </a:p>
         </p:txBody>
@@ -16450,7 +16450,7 @@
         <p:spPr>
           <a:xfrm>
             <a:off x="4114800" y="2476968"/>
-            <a:ext cx="5500581" cy="128016"/>
+            <a:ext cx="5368377" cy="128016"/>
           </a:xfrm>
           <a:prstGeom prst="rect">
             <a:avLst/>
@@ -16493,7 +16493,7 @@
         </p:nvSpPr>
         <p:spPr>
           <a:xfrm>
-            <a:off x="9706821" y="2413312"/>
+            <a:off x="9574617" y="2413312"/>
             <a:ext cx="2286000" cy="291904"/>
           </a:xfrm>
           <a:prstGeom prst="rect">
@@ -16562,7 +16562,7 @@
         <p:spPr>
           <a:xfrm>
             <a:off x="4114800" y="2768873"/>
-            <a:ext cx="4306785" cy="128016"/>
+            <a:ext cx="4203341" cy="128016"/>
           </a:xfrm>
           <a:prstGeom prst="rect">
             <a:avLst/>
@@ -16605,7 +16605,7 @@
         </p:nvSpPr>
         <p:spPr>
           <a:xfrm>
-            <a:off x="8513025" y="2705217"/>
+            <a:off x="8409581" y="2705217"/>
             <a:ext cx="2286000" cy="291904"/>
           </a:xfrm>
           <a:prstGeom prst="rect">
@@ -16626,7 +16626,7 @@
                 </a:solidFill>
                 <a:latin typeface="Helvetica Neue"/>
               </a:rPr>
-              <a:t>62,524 views · 20 posts</a:t>
+              <a:t>62,525 views · 20 posts</a:t>
             </a:r>
           </a:p>
         </p:txBody>
@@ -16674,7 +16674,7 @@
         <p:spPr>
           <a:xfrm>
             <a:off x="4114800" y="3060778"/>
-            <a:ext cx="4215654" cy="128016"/>
+            <a:ext cx="4114333" cy="128016"/>
           </a:xfrm>
           <a:prstGeom prst="rect">
             <a:avLst/>
@@ -16717,7 +16717,7 @@
         </p:nvSpPr>
         <p:spPr>
           <a:xfrm>
-            <a:off x="8421894" y="2997121"/>
+            <a:off x="8320573" y="2997121"/>
             <a:ext cx="2286000" cy="291904"/>
           </a:xfrm>
           <a:prstGeom prst="rect">
@@ -16786,7 +16786,7 @@
         <p:spPr>
           <a:xfrm>
             <a:off x="4114800" y="3352682"/>
-            <a:ext cx="3284092" cy="128016"/>
+            <a:ext cx="3205161" cy="128016"/>
           </a:xfrm>
           <a:prstGeom prst="rect">
             <a:avLst/>
@@ -16829,7 +16829,7 @@
         </p:nvSpPr>
         <p:spPr>
           <a:xfrm>
-            <a:off x="7490332" y="3289026"/>
+            <a:off x="7411401" y="3289026"/>
             <a:ext cx="2286000" cy="291904"/>
           </a:xfrm>
           <a:prstGeom prst="rect">
@@ -16898,7 +16898,7 @@
         <p:spPr>
           <a:xfrm>
             <a:off x="4114800" y="3644587"/>
-            <a:ext cx="2904965" cy="128016"/>
+            <a:ext cx="3186136" cy="128016"/>
           </a:xfrm>
           <a:prstGeom prst="rect">
             <a:avLst/>
@@ -16941,7 +16941,7 @@
         </p:nvSpPr>
         <p:spPr>
           <a:xfrm>
-            <a:off x="7111205" y="3580931"/>
+            <a:off x="7392376" y="3580931"/>
             <a:ext cx="2286000" cy="291904"/>
           </a:xfrm>
           <a:prstGeom prst="rect">
@@ -16962,7 +16962,7 @@
                 </a:solidFill>
                 <a:latin typeface="Helvetica Neue"/>
               </a:rPr>
-              <a:t>42,173 views · 82 posts</a:t>
+              <a:t>47,394 views · 96 posts</a:t>
             </a:r>
           </a:p>
         </p:txBody>
@@ -17010,7 +17010,7 @@
         <p:spPr>
           <a:xfrm>
             <a:off x="4114800" y="3936491"/>
-            <a:ext cx="2747432" cy="128016"/>
+            <a:ext cx="2690676" cy="128016"/>
           </a:xfrm>
           <a:prstGeom prst="rect">
             <a:avLst/>
@@ -17053,7 +17053,7 @@
         </p:nvSpPr>
         <p:spPr>
           <a:xfrm>
-            <a:off x="6953672" y="3872835"/>
+            <a:off x="6896916" y="3872835"/>
             <a:ext cx="2286000" cy="291904"/>
           </a:xfrm>
           <a:prstGeom prst="rect">
@@ -17074,7 +17074,7 @@
                 </a:solidFill>
                 <a:latin typeface="Helvetica Neue"/>
               </a:rPr>
-              <a:t>39,886 views · 52 posts</a:t>
+              <a:t>40,024 views · 52 posts</a:t>
             </a:r>
           </a:p>
         </p:txBody>
@@ -17122,7 +17122,7 @@
         <p:spPr>
           <a:xfrm>
             <a:off x="4114800" y="4228396"/>
-            <a:ext cx="2227441" cy="128016"/>
+            <a:ext cx="2175922" cy="128016"/>
           </a:xfrm>
           <a:prstGeom prst="rect">
             <a:avLst/>
@@ -17165,7 +17165,7 @@
         </p:nvSpPr>
         <p:spPr>
           <a:xfrm>
-            <a:off x="6433681" y="4164740"/>
+            <a:off x="6382162" y="4164740"/>
             <a:ext cx="2286000" cy="291904"/>
           </a:xfrm>
           <a:prstGeom prst="rect">
@@ -17186,7 +17186,7 @@
                 </a:solidFill>
                 <a:latin typeface="Helvetica Neue"/>
               </a:rPr>
-              <a:t>32,337 views · 47 posts</a:t>
+              <a:t>32,367 views · 48 posts</a:t>
             </a:r>
           </a:p>
         </p:txBody>
@@ -17234,7 +17234,7 @@
         <p:spPr>
           <a:xfrm>
             <a:off x="4114800" y="4520301"/>
-            <a:ext cx="527568" cy="128016"/>
+            <a:ext cx="514888" cy="128016"/>
           </a:xfrm>
           <a:prstGeom prst="rect">
             <a:avLst/>
@@ -17277,7 +17277,7 @@
         </p:nvSpPr>
         <p:spPr>
           <a:xfrm>
-            <a:off x="4733808" y="4456644"/>
+            <a:off x="4721128" y="4456644"/>
             <a:ext cx="2286000" cy="291904"/>
           </a:xfrm>
           <a:prstGeom prst="rect">
@@ -17346,7 +17346,7 @@
         <p:spPr>
           <a:xfrm>
             <a:off x="4114800" y="4812205"/>
-            <a:ext cx="508625" cy="128016"/>
+            <a:ext cx="496400" cy="128016"/>
           </a:xfrm>
           <a:prstGeom prst="rect">
             <a:avLst/>
@@ -17389,7 +17389,7 @@
         </p:nvSpPr>
         <p:spPr>
           <a:xfrm>
-            <a:off x="4714865" y="4748549"/>
+            <a:off x="4702640" y="4748549"/>
             <a:ext cx="2286000" cy="291904"/>
           </a:xfrm>
           <a:prstGeom prst="rect">
@@ -17458,7 +17458,7 @@
         <p:spPr>
           <a:xfrm>
             <a:off x="4114800" y="5104110"/>
-            <a:ext cx="423142" cy="128016"/>
+            <a:ext cx="414250" cy="128016"/>
           </a:xfrm>
           <a:prstGeom prst="rect">
             <a:avLst/>
@@ -17501,7 +17501,7 @@
         </p:nvSpPr>
         <p:spPr>
           <a:xfrm>
-            <a:off x="4629382" y="5040454"/>
+            <a:off x="4620490" y="5040454"/>
             <a:ext cx="2286000" cy="291904"/>
           </a:xfrm>
           <a:prstGeom prst="rect">
@@ -17522,7 +17522,7 @@
                 </a:solidFill>
                 <a:latin typeface="Helvetica Neue"/>
               </a:rPr>
-              <a:t>6,143 views · 13 posts</a:t>
+              <a:t>6,162 views · 13 posts</a:t>
             </a:r>
           </a:p>
         </p:txBody>
@@ -17570,7 +17570,7 @@
         <p:spPr>
           <a:xfrm>
             <a:off x="4114800" y="5396015"/>
-            <a:ext cx="278559" cy="128016"/>
+            <a:ext cx="271864" cy="128016"/>
           </a:xfrm>
           <a:prstGeom prst="rect">
             <a:avLst/>
@@ -17613,7 +17613,7 @@
         </p:nvSpPr>
         <p:spPr>
           <a:xfrm>
-            <a:off x="4484799" y="5332358"/>
+            <a:off x="4478104" y="5332358"/>
             <a:ext cx="2286000" cy="291904"/>
           </a:xfrm>
           <a:prstGeom prst="rect">
@@ -17682,7 +17682,7 @@
         <p:spPr>
           <a:xfrm>
             <a:off x="4114800" y="5687919"/>
-            <a:ext cx="76528" cy="128016"/>
+            <a:ext cx="74688" cy="128016"/>
           </a:xfrm>
           <a:prstGeom prst="rect">
             <a:avLst/>
@@ -17725,7 +17725,7 @@
         </p:nvSpPr>
         <p:spPr>
           <a:xfrm>
-            <a:off x="4282768" y="5624263"/>
+            <a:off x="4280928" y="5624263"/>
             <a:ext cx="2286000" cy="291904"/>
           </a:xfrm>
           <a:prstGeom prst="rect">
@@ -18342,7 +18342,7 @@
                 </a:solidFill>
                 <a:latin typeface="Georgia"/>
               </a:rPr>
-              <a:t>90,269</a:t>
+              <a:t>92,492</a:t>
             </a:r>
           </a:p>
         </p:txBody>
@@ -18376,7 +18376,7 @@
                 </a:solidFill>
                 <a:latin typeface="Helvetica Neue"/>
               </a:rPr>
-              <a:t>57 posts · 2,921 likes</a:t>
+              <a:t>60 posts · 2,990 likes</a:t>
             </a:r>
           </a:p>
         </p:txBody>
@@ -18410,7 +18410,7 @@
                 </a:solidFill>
                 <a:latin typeface="Helvetica Neue"/>
               </a:rPr>
-              <a:t>1,584 average views per post</a:t>
+              <a:t>1,542 average views per post</a:t>
             </a:r>
           </a:p>
         </p:txBody>
@@ -20414,7 +20414,7 @@
                 </a:solidFill>
                 <a:latin typeface="Georgia"/>
               </a:rPr>
-              <a:t>62,524</a:t>
+              <a:t>62,525</a:t>
             </a:r>
           </a:p>
         </p:txBody>

--- a/SPONSOR_CONTENT_REPORT.pptx
+++ b/SPONSOR_CONTENT_REPORT.pptx
@@ -3327,7 +3327,7 @@
                 </a:solidFill>
                 <a:latin typeface="Helvetica Neue"/>
               </a:rPr>
-              <a:t>Reporting window: Jun 8 → 2026-08-21</a:t>
+              <a:t>Reporting window: Jun 8 → 2026-08-24</a:t>
             </a:r>
           </a:p>
         </p:txBody>
@@ -3783,7 +3783,7 @@
                 </a:solidFill>
                 <a:latin typeface="Georgia"/>
               </a:rPr>
-              <a:t>7,384</a:t>
+              <a:t>7,385</a:t>
             </a:r>
           </a:p>
         </p:txBody>
@@ -4885,7 +4885,7 @@
         <p:spPr>
           <a:xfrm>
             <a:off x="4206240" y="2217420"/>
-            <a:ext cx="6035039" cy="274320"/>
+            <a:ext cx="6035040" cy="274320"/>
           </a:xfrm>
           <a:prstGeom prst="rect">
             <a:avLst/>
@@ -4949,7 +4949,7 @@
                 </a:solidFill>
                 <a:latin typeface="Helvetica Neue"/>
               </a:rPr>
-              <a:t>40,024 views · 52 posts · 770 avg</a:t>
+              <a:t>40,158 views · 52 posts · 772 avg</a:t>
             </a:r>
           </a:p>
         </p:txBody>
@@ -5031,7 +5031,7 @@
         <p:spPr>
           <a:xfrm>
             <a:off x="4206240" y="2720339"/>
-            <a:ext cx="4880475" cy="274320"/>
+            <a:ext cx="4972693" cy="274320"/>
           </a:xfrm>
           <a:prstGeom prst="rect">
             <a:avLst/>
@@ -5074,7 +5074,7 @@
         </p:nvSpPr>
         <p:spPr>
           <a:xfrm>
-            <a:off x="9178155" y="2651759"/>
+            <a:off x="9270373" y="2651759"/>
             <a:ext cx="2286000" cy="251460"/>
           </a:xfrm>
           <a:prstGeom prst="rect">
@@ -5095,7 +5095,7 @@
                 </a:solidFill>
                 <a:latin typeface="Helvetica Neue"/>
               </a:rPr>
-              <a:t>32,367 views · 48 posts · 674 avg</a:t>
+              <a:t>33,089 views · 51 posts · 649 avg</a:t>
             </a:r>
           </a:p>
         </p:txBody>
@@ -5108,7 +5108,7 @@
         </p:nvSpPr>
         <p:spPr>
           <a:xfrm>
-            <a:off x="9178155" y="2857499"/>
+            <a:off x="9270373" y="2857499"/>
             <a:ext cx="4572000" cy="251460"/>
           </a:xfrm>
           <a:prstGeom prst="rect">
@@ -5177,7 +5177,7 @@
         <p:spPr>
           <a:xfrm>
             <a:off x="4206240" y="3223260"/>
-            <a:ext cx="1154866" cy="274320"/>
+            <a:ext cx="1151012" cy="274320"/>
           </a:xfrm>
           <a:prstGeom prst="rect">
             <a:avLst/>
@@ -5220,7 +5220,7 @@
         </p:nvSpPr>
         <p:spPr>
           <a:xfrm>
-            <a:off x="5452546" y="3154679"/>
+            <a:off x="5448692" y="3154679"/>
             <a:ext cx="2286000" cy="251460"/>
           </a:xfrm>
           <a:prstGeom prst="rect">
@@ -5254,7 +5254,7 @@
         </p:nvSpPr>
         <p:spPr>
           <a:xfrm>
-            <a:off x="5452546" y="3360420"/>
+            <a:off x="5448692" y="3360420"/>
             <a:ext cx="4572000" cy="251460"/>
           </a:xfrm>
           <a:prstGeom prst="rect">
@@ -5323,7 +5323,7 @@
         <p:spPr>
           <a:xfrm>
             <a:off x="4206240" y="3726180"/>
-            <a:ext cx="929140" cy="274320"/>
+            <a:ext cx="928895" cy="274320"/>
           </a:xfrm>
           <a:prstGeom prst="rect">
             <a:avLst/>
@@ -5366,7 +5366,7 @@
         </p:nvSpPr>
         <p:spPr>
           <a:xfrm>
-            <a:off x="5226820" y="3657600"/>
+            <a:off x="5226575" y="3657600"/>
             <a:ext cx="2286000" cy="251460"/>
           </a:xfrm>
           <a:prstGeom prst="rect">
@@ -5387,7 +5387,7 @@
                 </a:solidFill>
                 <a:latin typeface="Helvetica Neue"/>
               </a:rPr>
-              <a:t>6,162 views · 13 posts · 474 avg</a:t>
+              <a:t>6,181 views · 13 posts · 475 avg</a:t>
             </a:r>
           </a:p>
         </p:txBody>
@@ -5400,7 +5400,7 @@
         </p:nvSpPr>
         <p:spPr>
           <a:xfrm>
-            <a:off x="5226820" y="3863340"/>
+            <a:off x="5226575" y="3863340"/>
             <a:ext cx="4572000" cy="251460"/>
           </a:xfrm>
           <a:prstGeom prst="rect">
@@ -5469,7 +5469,7 @@
         <p:spPr>
           <a:xfrm>
             <a:off x="4206240" y="4229100"/>
-            <a:ext cx="609776" cy="274320"/>
+            <a:ext cx="607741" cy="274320"/>
           </a:xfrm>
           <a:prstGeom prst="rect">
             <a:avLst/>
@@ -5512,7 +5512,7 @@
         </p:nvSpPr>
         <p:spPr>
           <a:xfrm>
-            <a:off x="4907456" y="4160520"/>
+            <a:off x="4905421" y="4160520"/>
             <a:ext cx="2286000" cy="251460"/>
           </a:xfrm>
           <a:prstGeom prst="rect">
@@ -5546,7 +5546,7 @@
         </p:nvSpPr>
         <p:spPr>
           <a:xfrm>
-            <a:off x="4907456" y="4366260"/>
+            <a:off x="4905421" y="4366260"/>
             <a:ext cx="4572000" cy="251460"/>
           </a:xfrm>
           <a:prstGeom prst="rect">
@@ -5955,7 +5955,7 @@
                 </a:solidFill>
                 <a:latin typeface="Georgia"/>
               </a:rPr>
-              <a:t>40,024</a:t>
+              <a:t>40,158</a:t>
             </a:r>
           </a:p>
         </p:txBody>
@@ -5989,7 +5989,7 @@
                 </a:solidFill>
                 <a:latin typeface="Helvetica Neue"/>
               </a:rPr>
-              <a:t>52 posts · 817 likes</a:t>
+              <a:t>52 posts · 822 likes</a:t>
             </a:r>
           </a:p>
         </p:txBody>
@@ -6023,7 +6023,7 @@
                 </a:solidFill>
                 <a:latin typeface="Helvetica Neue"/>
               </a:rPr>
-              <a:t>770 average views per post</a:t>
+              <a:t>772 average views per post</a:t>
             </a:r>
           </a:p>
         </p:txBody>
@@ -6179,7 +6179,7 @@
                 </a:solidFill>
                 <a:latin typeface="Helvetica Neue"/>
               </a:rPr>
-              <a:t>#1  ·  TT  ·  3,370 views</a:t>
+              <a:t>#1  ·  TT  ·  3,470 views</a:t>
             </a:r>
           </a:p>
         </p:txBody>
@@ -6491,7 +6491,7 @@
                 </a:solidFill>
                 <a:latin typeface="Helvetica Neue"/>
               </a:rPr>
-              <a:t>#3  ·  FB  ·  2,220 views</a:t>
+              <a:t>#3  ·  FB  ·  2,225 views</a:t>
             </a:r>
           </a:p>
         </p:txBody>
@@ -6991,7 +6991,7 @@
                 </a:solidFill>
                 <a:latin typeface="Georgia"/>
               </a:rPr>
-              <a:t>32,367</a:t>
+              <a:t>33,089</a:t>
             </a:r>
           </a:p>
         </p:txBody>
@@ -7025,7 +7025,7 @@
                 </a:solidFill>
                 <a:latin typeface="Helvetica Neue"/>
               </a:rPr>
-              <a:t>48 posts · 651 likes</a:t>
+              <a:t>51 posts · 656 likes</a:t>
             </a:r>
           </a:p>
         </p:txBody>
@@ -7059,7 +7059,7 @@
                 </a:solidFill>
                 <a:latin typeface="Helvetica Neue"/>
               </a:rPr>
-              <a:t>674 average views per post</a:t>
+              <a:t>649 average views per post</a:t>
             </a:r>
           </a:p>
         </p:txBody>
@@ -9063,7 +9063,7 @@
                 </a:solidFill>
                 <a:latin typeface="Georgia"/>
               </a:rPr>
-              <a:t>6,162</a:t>
+              <a:t>6,181</a:t>
             </a:r>
           </a:p>
         </p:txBody>
@@ -9131,7 +9131,7 @@
                 </a:solidFill>
                 <a:latin typeface="Helvetica Neue"/>
               </a:rPr>
-              <a:t>474 average views per post</a:t>
+              <a:t>475 average views per post</a:t>
             </a:r>
           </a:p>
         </p:txBody>
@@ -9599,7 +9599,7 @@
                 </a:solidFill>
                 <a:latin typeface="Helvetica Neue"/>
               </a:rPr>
-              <a:t>#3  ·  IG  ·  644 views</a:t>
+              <a:t>#3  ·  IG  ·  655 views</a:t>
             </a:r>
           </a:p>
         </p:txBody>
@@ -11495,7 +11495,7 @@
                 </a:solidFill>
                 <a:latin typeface="Georgia"/>
               </a:rPr>
-              <a:t>92,492 views</a:t>
+              <a:t>92,692 views</a:t>
             </a:r>
           </a:p>
         </p:txBody>
@@ -11529,7 +11529,7 @@
                 </a:solidFill>
                 <a:latin typeface="Helvetica Neue"/>
               </a:rPr>
-              <a:t>60 posts · 1,542 avg views/post</a:t>
+              <a:t>60 posts · 1,545 avg views/post</a:t>
             </a:r>
           </a:p>
         </p:txBody>
@@ -11855,7 +11855,7 @@
                 </a:solidFill>
                 <a:latin typeface="Georgia"/>
               </a:rPr>
-              <a:t>62,525 views</a:t>
+              <a:t>62,526 views</a:t>
             </a:r>
           </a:p>
         </p:txBody>
@@ -14483,7 +14483,7 @@
                 </a:solidFill>
                 <a:latin typeface="Helvetica Neue"/>
               </a:rPr>
-              <a:t>1,286 avg views/post   ·   155 posts   ·   199,280 total</a:t>
+              <a:t>1,288 avg views/post   ·   155 posts   ·   199,615 total</a:t>
             </a:r>
           </a:p>
         </p:txBody>
@@ -16402,7 +16402,7 @@
                 </a:solidFill>
                 <a:latin typeface="Helvetica Neue"/>
               </a:rPr>
-              <a:t>92,492 views · 60 posts</a:t>
+              <a:t>92,692 views · 60 posts</a:t>
             </a:r>
           </a:p>
         </p:txBody>
@@ -16450,7 +16450,7 @@
         <p:spPr>
           <a:xfrm>
             <a:off x="4114800" y="2476968"/>
-            <a:ext cx="5368377" cy="128016"/>
+            <a:ext cx="5356794" cy="128016"/>
           </a:xfrm>
           <a:prstGeom prst="rect">
             <a:avLst/>
@@ -16493,7 +16493,7 @@
         </p:nvSpPr>
         <p:spPr>
           <a:xfrm>
-            <a:off x="9574617" y="2413312"/>
+            <a:off x="9563034" y="2413312"/>
             <a:ext cx="2286000" cy="291904"/>
           </a:xfrm>
           <a:prstGeom prst="rect">
@@ -16562,7 +16562,7 @@
         <p:spPr>
           <a:xfrm>
             <a:off x="4114800" y="2768873"/>
-            <a:ext cx="4203341" cy="128016"/>
+            <a:ext cx="4194338" cy="128016"/>
           </a:xfrm>
           <a:prstGeom prst="rect">
             <a:avLst/>
@@ -16605,7 +16605,7 @@
         </p:nvSpPr>
         <p:spPr>
           <a:xfrm>
-            <a:off x="8409581" y="2705217"/>
+            <a:off x="8400578" y="2705217"/>
             <a:ext cx="2286000" cy="291904"/>
           </a:xfrm>
           <a:prstGeom prst="rect">
@@ -16626,7 +16626,7 @@
                 </a:solidFill>
                 <a:latin typeface="Helvetica Neue"/>
               </a:rPr>
-              <a:t>62,525 views · 20 posts</a:t>
+              <a:t>62,526 views · 20 posts</a:t>
             </a:r>
           </a:p>
         </p:txBody>
@@ -16674,7 +16674,7 @@
         <p:spPr>
           <a:xfrm>
             <a:off x="4114800" y="3060778"/>
-            <a:ext cx="4114333" cy="128016"/>
+            <a:ext cx="4105455" cy="128016"/>
           </a:xfrm>
           <a:prstGeom prst="rect">
             <a:avLst/>
@@ -16717,7 +16717,7 @@
         </p:nvSpPr>
         <p:spPr>
           <a:xfrm>
-            <a:off x="8320573" y="2997121"/>
+            <a:off x="8311695" y="2997121"/>
             <a:ext cx="2286000" cy="291904"/>
           </a:xfrm>
           <a:prstGeom prst="rect">
@@ -16772,7 +16772,7 @@
                 </a:solidFill>
                 <a:latin typeface="Helvetica Neue"/>
               </a:rPr>
-              <a:t>Downtown Development</a:t>
+              <a:t>Other / Uncategorized</a:t>
             </a:r>
           </a:p>
         </p:txBody>
@@ -16786,7 +16786,119 @@
         <p:spPr>
           <a:xfrm>
             <a:off x="4114800" y="3352682"/>
-            <a:ext cx="3205161" cy="128016"/>
+            <a:ext cx="3292897" cy="128016"/>
+          </a:xfrm>
+          <a:prstGeom prst="rect">
+            <a:avLst/>
+          </a:prstGeom>
+          <a:solidFill>
+            <a:srgbClr val="6B7082"/>
+          </a:solidFill>
+          <a:ln>
+            <a:noFill/>
+          </a:ln>
+          <a:effectLst/>
+        </p:spPr>
+        <p:style>
+          <a:lnRef idx="1">
+            <a:schemeClr val="accent1"/>
+          </a:lnRef>
+          <a:fillRef idx="3">
+            <a:schemeClr val="accent1"/>
+          </a:fillRef>
+          <a:effectRef idx="2">
+            <a:schemeClr val="accent1"/>
+          </a:effectRef>
+          <a:fontRef idx="minor">
+            <a:schemeClr val="lt1"/>
+          </a:fontRef>
+        </p:style>
+        <p:txBody>
+          <a:bodyPr rtlCol="0" anchor="ctr"/>
+          <a:lstStyle/>
+          <a:p>
+            <a:pPr algn="ctr"/>
+          </a:p>
+        </p:txBody>
+      </p:sp>
+      <p:sp>
+        <p:nvSpPr>
+          <p:cNvPr id="20" name="TextBox 19"/>
+          <p:cNvSpPr txBox="1"/>
+          <p:nvPr/>
+        </p:nvSpPr>
+        <p:spPr>
+          <a:xfrm>
+            <a:off x="7499137" y="3289026"/>
+            <a:ext cx="2286000" cy="291904"/>
+          </a:xfrm>
+          <a:prstGeom prst="rect">
+            <a:avLst/>
+          </a:prstGeom>
+          <a:noFill/>
+        </p:spPr>
+        <p:txBody>
+          <a:bodyPr wrap="square" lIns="0" rIns="0" tIns="0" bIns="0">
+            <a:spAutoFit/>
+          </a:bodyPr>
+          <a:lstStyle/>
+          <a:p>
+            <a:r>
+              <a:rPr sz="900" b="0">
+                <a:solidFill>
+                  <a:srgbClr val="6B7082"/>
+                </a:solidFill>
+                <a:latin typeface="Helvetica Neue"/>
+              </a:rPr>
+              <a:t>49,088 views · 99 posts</a:t>
+            </a:r>
+          </a:p>
+        </p:txBody>
+      </p:sp>
+      <p:sp>
+        <p:nvSpPr>
+          <p:cNvPr id="21" name="TextBox 20"/>
+          <p:cNvSpPr txBox="1"/>
+          <p:nvPr/>
+        </p:nvSpPr>
+        <p:spPr>
+          <a:xfrm>
+            <a:off x="731520" y="3580931"/>
+            <a:ext cx="3200400" cy="291904"/>
+          </a:xfrm>
+          <a:prstGeom prst="rect">
+            <a:avLst/>
+          </a:prstGeom>
+          <a:noFill/>
+        </p:spPr>
+        <p:txBody>
+          <a:bodyPr wrap="square" lIns="0" rIns="0" tIns="0" bIns="0">
+            <a:spAutoFit/>
+          </a:bodyPr>
+          <a:lstStyle/>
+          <a:p>
+            <a:r>
+              <a:rPr sz="1100" b="1">
+                <a:solidFill>
+                  <a:srgbClr val="141833"/>
+                </a:solidFill>
+                <a:latin typeface="Helvetica Neue"/>
+              </a:rPr>
+              <a:t>Downtown Development</a:t>
+            </a:r>
+          </a:p>
+        </p:txBody>
+      </p:sp>
+      <p:sp>
+        <p:nvSpPr>
+          <p:cNvPr id="22" name="Rectangle 21"/>
+          <p:cNvSpPr/>
+          <p:nvPr/>
+        </p:nvSpPr>
+        <p:spPr>
+          <a:xfrm>
+            <a:off x="4114800" y="3644587"/>
+            <a:ext cx="3198245" cy="128016"/>
           </a:xfrm>
           <a:prstGeom prst="rect">
             <a:avLst/>
@@ -16823,13 +16935,13 @@
       </p:sp>
       <p:sp>
         <p:nvSpPr>
-          <p:cNvPr id="20" name="TextBox 19"/>
-          <p:cNvSpPr txBox="1"/>
-          <p:nvPr/>
-        </p:nvSpPr>
-        <p:spPr>
-          <a:xfrm>
-            <a:off x="7411401" y="3289026"/>
+          <p:cNvPr id="23" name="TextBox 22"/>
+          <p:cNvSpPr txBox="1"/>
+          <p:nvPr/>
+        </p:nvSpPr>
+        <p:spPr>
+          <a:xfrm>
+            <a:off x="7404485" y="3580931"/>
             <a:ext cx="2286000" cy="291904"/>
           </a:xfrm>
           <a:prstGeom prst="rect">
@@ -16851,118 +16963,6 @@
                 <a:latin typeface="Helvetica Neue"/>
               </a:rPr>
               <a:t>47,677 views · 16 posts</a:t>
-            </a:r>
-          </a:p>
-        </p:txBody>
-      </p:sp>
-      <p:sp>
-        <p:nvSpPr>
-          <p:cNvPr id="21" name="TextBox 20"/>
-          <p:cNvSpPr txBox="1"/>
-          <p:nvPr/>
-        </p:nvSpPr>
-        <p:spPr>
-          <a:xfrm>
-            <a:off x="731520" y="3580931"/>
-            <a:ext cx="3200400" cy="291904"/>
-          </a:xfrm>
-          <a:prstGeom prst="rect">
-            <a:avLst/>
-          </a:prstGeom>
-          <a:noFill/>
-        </p:spPr>
-        <p:txBody>
-          <a:bodyPr wrap="square" lIns="0" rIns="0" tIns="0" bIns="0">
-            <a:spAutoFit/>
-          </a:bodyPr>
-          <a:lstStyle/>
-          <a:p>
-            <a:r>
-              <a:rPr sz="1100" b="1">
-                <a:solidFill>
-                  <a:srgbClr val="141833"/>
-                </a:solidFill>
-                <a:latin typeface="Helvetica Neue"/>
-              </a:rPr>
-              <a:t>Other / Uncategorized</a:t>
-            </a:r>
-          </a:p>
-        </p:txBody>
-      </p:sp>
-      <p:sp>
-        <p:nvSpPr>
-          <p:cNvPr id="22" name="Rectangle 21"/>
-          <p:cNvSpPr/>
-          <p:nvPr/>
-        </p:nvSpPr>
-        <p:spPr>
-          <a:xfrm>
-            <a:off x="4114800" y="3644587"/>
-            <a:ext cx="3186136" cy="128016"/>
-          </a:xfrm>
-          <a:prstGeom prst="rect">
-            <a:avLst/>
-          </a:prstGeom>
-          <a:solidFill>
-            <a:srgbClr val="6B7082"/>
-          </a:solidFill>
-          <a:ln>
-            <a:noFill/>
-          </a:ln>
-          <a:effectLst/>
-        </p:spPr>
-        <p:style>
-          <a:lnRef idx="1">
-            <a:schemeClr val="accent1"/>
-          </a:lnRef>
-          <a:fillRef idx="3">
-            <a:schemeClr val="accent1"/>
-          </a:fillRef>
-          <a:effectRef idx="2">
-            <a:schemeClr val="accent1"/>
-          </a:effectRef>
-          <a:fontRef idx="minor">
-            <a:schemeClr val="lt1"/>
-          </a:fontRef>
-        </p:style>
-        <p:txBody>
-          <a:bodyPr rtlCol="0" anchor="ctr"/>
-          <a:lstStyle/>
-          <a:p>
-            <a:pPr algn="ctr"/>
-          </a:p>
-        </p:txBody>
-      </p:sp>
-      <p:sp>
-        <p:nvSpPr>
-          <p:cNvPr id="23" name="TextBox 22"/>
-          <p:cNvSpPr txBox="1"/>
-          <p:nvPr/>
-        </p:nvSpPr>
-        <p:spPr>
-          <a:xfrm>
-            <a:off x="7392376" y="3580931"/>
-            <a:ext cx="2286000" cy="291904"/>
-          </a:xfrm>
-          <a:prstGeom prst="rect">
-            <a:avLst/>
-          </a:prstGeom>
-          <a:noFill/>
-        </p:spPr>
-        <p:txBody>
-          <a:bodyPr wrap="square" lIns="0" rIns="0" tIns="0" bIns="0">
-            <a:spAutoFit/>
-          </a:bodyPr>
-          <a:lstStyle/>
-          <a:p>
-            <a:r>
-              <a:rPr sz="900" b="0">
-                <a:solidFill>
-                  <a:srgbClr val="6B7082"/>
-                </a:solidFill>
-                <a:latin typeface="Helvetica Neue"/>
-              </a:rPr>
-              <a:t>47,394 views · 96 posts</a:t>
             </a:r>
           </a:p>
         </p:txBody>
@@ -17010,7 +17010,7 @@
         <p:spPr>
           <a:xfrm>
             <a:off x="4114800" y="3936491"/>
-            <a:ext cx="2690676" cy="128016"/>
+            <a:ext cx="2693859" cy="128016"/>
           </a:xfrm>
           <a:prstGeom prst="rect">
             <a:avLst/>
@@ -17053,7 +17053,7 @@
         </p:nvSpPr>
         <p:spPr>
           <a:xfrm>
-            <a:off x="6896916" y="3872835"/>
+            <a:off x="6900099" y="3872835"/>
             <a:ext cx="2286000" cy="291904"/>
           </a:xfrm>
           <a:prstGeom prst="rect">
@@ -17074,7 +17074,7 @@
                 </a:solidFill>
                 <a:latin typeface="Helvetica Neue"/>
               </a:rPr>
-              <a:t>40,024 views · 52 posts</a:t>
+              <a:t>40,158 views · 52 posts</a:t>
             </a:r>
           </a:p>
         </p:txBody>
@@ -17122,7 +17122,7 @@
         <p:spPr>
           <a:xfrm>
             <a:off x="4114800" y="4228396"/>
-            <a:ext cx="2175922" cy="128016"/>
+            <a:ext cx="2219660" cy="128016"/>
           </a:xfrm>
           <a:prstGeom prst="rect">
             <a:avLst/>
@@ -17165,7 +17165,7 @@
         </p:nvSpPr>
         <p:spPr>
           <a:xfrm>
-            <a:off x="6382162" y="4164740"/>
+            <a:off x="6425900" y="4164740"/>
             <a:ext cx="2286000" cy="291904"/>
           </a:xfrm>
           <a:prstGeom prst="rect">
@@ -17186,7 +17186,7 @@
                 </a:solidFill>
                 <a:latin typeface="Helvetica Neue"/>
               </a:rPr>
-              <a:t>32,367 views · 48 posts</a:t>
+              <a:t>33,089 views · 51 posts</a:t>
             </a:r>
           </a:p>
         </p:txBody>
@@ -17234,7 +17234,7 @@
         <p:spPr>
           <a:xfrm>
             <a:off x="4114800" y="4520301"/>
-            <a:ext cx="514888" cy="128016"/>
+            <a:ext cx="513777" cy="128016"/>
           </a:xfrm>
           <a:prstGeom prst="rect">
             <a:avLst/>
@@ -17277,7 +17277,7 @@
         </p:nvSpPr>
         <p:spPr>
           <a:xfrm>
-            <a:off x="4721128" y="4456644"/>
+            <a:off x="4720017" y="4456644"/>
             <a:ext cx="2286000" cy="291904"/>
           </a:xfrm>
           <a:prstGeom prst="rect">
@@ -17346,7 +17346,7 @@
         <p:spPr>
           <a:xfrm>
             <a:off x="4114800" y="4812205"/>
-            <a:ext cx="496400" cy="128016"/>
+            <a:ext cx="495397" cy="128016"/>
           </a:xfrm>
           <a:prstGeom prst="rect">
             <a:avLst/>
@@ -17389,7 +17389,7 @@
         </p:nvSpPr>
         <p:spPr>
           <a:xfrm>
-            <a:off x="4702640" y="4748549"/>
+            <a:off x="4701637" y="4748549"/>
             <a:ext cx="2286000" cy="291904"/>
           </a:xfrm>
           <a:prstGeom prst="rect">
@@ -17410,7 +17410,7 @@
                 </a:solidFill>
                 <a:latin typeface="Helvetica Neue"/>
               </a:rPr>
-              <a:t>7,384 views · 6 posts</a:t>
+              <a:t>7,385 views · 6 posts</a:t>
             </a:r>
           </a:p>
         </p:txBody>
@@ -17458,7 +17458,7 @@
         <p:spPr>
           <a:xfrm>
             <a:off x="4114800" y="5104110"/>
-            <a:ext cx="414250" cy="128016"/>
+            <a:ext cx="414630" cy="128016"/>
           </a:xfrm>
           <a:prstGeom prst="rect">
             <a:avLst/>
@@ -17501,7 +17501,7 @@
         </p:nvSpPr>
         <p:spPr>
           <a:xfrm>
-            <a:off x="4620490" y="5040454"/>
+            <a:off x="4620870" y="5040454"/>
             <a:ext cx="2286000" cy="291904"/>
           </a:xfrm>
           <a:prstGeom prst="rect">
@@ -17522,7 +17522,7 @@
                 </a:solidFill>
                 <a:latin typeface="Helvetica Neue"/>
               </a:rPr>
-              <a:t>6,162 views · 13 posts</a:t>
+              <a:t>6,181 views · 13 posts</a:t>
             </a:r>
           </a:p>
         </p:txBody>
@@ -17570,7 +17570,7 @@
         <p:spPr>
           <a:xfrm>
             <a:off x="4114800" y="5396015"/>
-            <a:ext cx="271864" cy="128016"/>
+            <a:ext cx="271277" cy="128016"/>
           </a:xfrm>
           <a:prstGeom prst="rect">
             <a:avLst/>
@@ -17613,7 +17613,7 @@
         </p:nvSpPr>
         <p:spPr>
           <a:xfrm>
-            <a:off x="4478104" y="5332358"/>
+            <a:off x="4477517" y="5332358"/>
             <a:ext cx="2286000" cy="291904"/>
           </a:xfrm>
           <a:prstGeom prst="rect">
@@ -17682,7 +17682,7 @@
         <p:spPr>
           <a:xfrm>
             <a:off x="4114800" y="5687919"/>
-            <a:ext cx="74688" cy="128016"/>
+            <a:ext cx="74527" cy="128016"/>
           </a:xfrm>
           <a:prstGeom prst="rect">
             <a:avLst/>
@@ -17725,7 +17725,7 @@
         </p:nvSpPr>
         <p:spPr>
           <a:xfrm>
-            <a:off x="4280928" y="5624263"/>
+            <a:off x="4280767" y="5624263"/>
             <a:ext cx="2286000" cy="291904"/>
           </a:xfrm>
           <a:prstGeom prst="rect">
@@ -18342,7 +18342,7 @@
                 </a:solidFill>
                 <a:latin typeface="Georgia"/>
               </a:rPr>
-              <a:t>92,492</a:t>
+              <a:t>92,692</a:t>
             </a:r>
           </a:p>
         </p:txBody>
@@ -18376,7 +18376,7 @@
                 </a:solidFill>
                 <a:latin typeface="Helvetica Neue"/>
               </a:rPr>
-              <a:t>60 posts · 2,990 likes</a:t>
+              <a:t>60 posts · 2,997 likes</a:t>
             </a:r>
           </a:p>
         </p:txBody>
@@ -18410,7 +18410,7 @@
                 </a:solidFill>
                 <a:latin typeface="Helvetica Neue"/>
               </a:rPr>
-              <a:t>1,542 average views per post</a:t>
+              <a:t>1,545 average views per post</a:t>
             </a:r>
           </a:p>
         </p:txBody>
@@ -20414,7 +20414,7 @@
                 </a:solidFill>
                 <a:latin typeface="Georgia"/>
               </a:rPr>
-              <a:t>62,525</a:t>
+              <a:t>62,526</a:t>
             </a:r>
           </a:p>
         </p:txBody>

--- a/SPONSOR_CONTENT_REPORT.pptx
+++ b/SPONSOR_CONTENT_REPORT.pptx
@@ -3327,7 +3327,7 @@
                 </a:solidFill>
                 <a:latin typeface="Helvetica Neue"/>
               </a:rPr>
-              <a:t>Reporting window: Jun 8 → 2026-08-24</a:t>
+              <a:t>Reporting window: Jun 8 → 2026-08-26</a:t>
             </a:r>
           </a:p>
         </p:txBody>
@@ -3783,7 +3783,7 @@
                 </a:solidFill>
                 <a:latin typeface="Georgia"/>
               </a:rPr>
-              <a:t>7,385</a:t>
+              <a:t>7,386</a:t>
             </a:r>
           </a:p>
         </p:txBody>
@@ -4949,7 +4949,7 @@
                 </a:solidFill>
                 <a:latin typeface="Helvetica Neue"/>
               </a:rPr>
-              <a:t>40,158 views · 52 posts · 772 avg</a:t>
+              <a:t>40,213 views · 52 posts · 773 avg</a:t>
             </a:r>
           </a:p>
         </p:txBody>
@@ -5031,7 +5031,7 @@
         <p:spPr>
           <a:xfrm>
             <a:off x="4206240" y="2720339"/>
-            <a:ext cx="4972693" cy="274320"/>
+            <a:ext cx="5290959" cy="274320"/>
           </a:xfrm>
           <a:prstGeom prst="rect">
             <a:avLst/>
@@ -5074,7 +5074,7 @@
         </p:nvSpPr>
         <p:spPr>
           <a:xfrm>
-            <a:off x="9270373" y="2651759"/>
+            <a:off x="9588639" y="2651759"/>
             <a:ext cx="2286000" cy="251460"/>
           </a:xfrm>
           <a:prstGeom prst="rect">
@@ -5095,7 +5095,7 @@
                 </a:solidFill>
                 <a:latin typeface="Helvetica Neue"/>
               </a:rPr>
-              <a:t>33,089 views · 51 posts · 649 avg</a:t>
+              <a:t>35,255 views · 58 posts · 608 avg</a:t>
             </a:r>
           </a:p>
         </p:txBody>
@@ -5108,7 +5108,7 @@
         </p:nvSpPr>
         <p:spPr>
           <a:xfrm>
-            <a:off x="9270373" y="2857499"/>
+            <a:off x="9588639" y="2857499"/>
             <a:ext cx="4572000" cy="251460"/>
           </a:xfrm>
           <a:prstGeom prst="rect">
@@ -5177,7 +5177,7 @@
         <p:spPr>
           <a:xfrm>
             <a:off x="4206240" y="3223260"/>
-            <a:ext cx="1151012" cy="274320"/>
+            <a:ext cx="1149438" cy="274320"/>
           </a:xfrm>
           <a:prstGeom prst="rect">
             <a:avLst/>
@@ -5220,7 +5220,7 @@
         </p:nvSpPr>
         <p:spPr>
           <a:xfrm>
-            <a:off x="5448692" y="3154679"/>
+            <a:off x="5447118" y="3154679"/>
             <a:ext cx="2286000" cy="251460"/>
           </a:xfrm>
           <a:prstGeom prst="rect">
@@ -5254,7 +5254,7 @@
         </p:nvSpPr>
         <p:spPr>
           <a:xfrm>
-            <a:off x="5448692" y="3360420"/>
+            <a:off x="5447118" y="3360420"/>
             <a:ext cx="4572000" cy="251460"/>
           </a:xfrm>
           <a:prstGeom prst="rect">
@@ -5323,7 +5323,7 @@
         <p:spPr>
           <a:xfrm>
             <a:off x="4206240" y="3726180"/>
-            <a:ext cx="928895" cy="274320"/>
+            <a:ext cx="929275" cy="274320"/>
           </a:xfrm>
           <a:prstGeom prst="rect">
             <a:avLst/>
@@ -5366,7 +5366,7 @@
         </p:nvSpPr>
         <p:spPr>
           <a:xfrm>
-            <a:off x="5226575" y="3657600"/>
+            <a:off x="5226955" y="3657600"/>
             <a:ext cx="2286000" cy="251460"/>
           </a:xfrm>
           <a:prstGeom prst="rect">
@@ -5387,7 +5387,7 @@
                 </a:solidFill>
                 <a:latin typeface="Helvetica Neue"/>
               </a:rPr>
-              <a:t>6,181 views · 13 posts · 475 avg</a:t>
+              <a:t>6,192 views · 13 posts · 476 avg</a:t>
             </a:r>
           </a:p>
         </p:txBody>
@@ -5400,7 +5400,7 @@
         </p:nvSpPr>
         <p:spPr>
           <a:xfrm>
-            <a:off x="5226575" y="3863340"/>
+            <a:off x="5226955" y="3863340"/>
             <a:ext cx="4572000" cy="251460"/>
           </a:xfrm>
           <a:prstGeom prst="rect">
@@ -5469,7 +5469,7 @@
         <p:spPr>
           <a:xfrm>
             <a:off x="4206240" y="4229100"/>
-            <a:ext cx="607741" cy="274320"/>
+            <a:ext cx="606910" cy="274320"/>
           </a:xfrm>
           <a:prstGeom prst="rect">
             <a:avLst/>
@@ -5512,7 +5512,7 @@
         </p:nvSpPr>
         <p:spPr>
           <a:xfrm>
-            <a:off x="4905421" y="4160520"/>
+            <a:off x="4904590" y="4160520"/>
             <a:ext cx="2286000" cy="251460"/>
           </a:xfrm>
           <a:prstGeom prst="rect">
@@ -5546,7 +5546,7 @@
         </p:nvSpPr>
         <p:spPr>
           <a:xfrm>
-            <a:off x="4905421" y="4366260"/>
+            <a:off x="4904590" y="4366260"/>
             <a:ext cx="4572000" cy="251460"/>
           </a:xfrm>
           <a:prstGeom prst="rect">
@@ -5955,7 +5955,7 @@
                 </a:solidFill>
                 <a:latin typeface="Georgia"/>
               </a:rPr>
-              <a:t>40,158</a:t>
+              <a:t>40,213</a:t>
             </a:r>
           </a:p>
         </p:txBody>
@@ -5989,7 +5989,7 @@
                 </a:solidFill>
                 <a:latin typeface="Helvetica Neue"/>
               </a:rPr>
-              <a:t>52 posts · 822 likes</a:t>
+              <a:t>52 posts · 824 likes</a:t>
             </a:r>
           </a:p>
         </p:txBody>
@@ -6023,7 +6023,7 @@
                 </a:solidFill>
                 <a:latin typeface="Helvetica Neue"/>
               </a:rPr>
-              <a:t>772 average views per post</a:t>
+              <a:t>773 average views per post</a:t>
             </a:r>
           </a:p>
         </p:txBody>
@@ -6179,7 +6179,7 @@
                 </a:solidFill>
                 <a:latin typeface="Helvetica Neue"/>
               </a:rPr>
-              <a:t>#1  ·  TT  ·  3,470 views</a:t>
+              <a:t>#1  ·  TT  ·  3,519 views</a:t>
             </a:r>
           </a:p>
         </p:txBody>
@@ -6991,7 +6991,7 @@
                 </a:solidFill>
                 <a:latin typeface="Georgia"/>
               </a:rPr>
-              <a:t>33,089</a:t>
+              <a:t>35,255</a:t>
             </a:r>
           </a:p>
         </p:txBody>
@@ -7025,7 +7025,7 @@
                 </a:solidFill>
                 <a:latin typeface="Helvetica Neue"/>
               </a:rPr>
-              <a:t>51 posts · 656 likes</a:t>
+              <a:t>58 posts · 763 likes</a:t>
             </a:r>
           </a:p>
         </p:txBody>
@@ -7059,7 +7059,7 @@
                 </a:solidFill>
                 <a:latin typeface="Helvetica Neue"/>
               </a:rPr>
-              <a:t>649 average views per post</a:t>
+              <a:t>608 average views per post</a:t>
             </a:r>
           </a:p>
         </p:txBody>
@@ -9063,7 +9063,7 @@
                 </a:solidFill>
                 <a:latin typeface="Georgia"/>
               </a:rPr>
-              <a:t>6,181</a:t>
+              <a:t>6,192</a:t>
             </a:r>
           </a:p>
         </p:txBody>
@@ -9131,7 +9131,7 @@
                 </a:solidFill>
                 <a:latin typeface="Helvetica Neue"/>
               </a:rPr>
-              <a:t>475 average views per post</a:t>
+              <a:t>476 average views per post</a:t>
             </a:r>
           </a:p>
         </p:txBody>
@@ -9599,7 +9599,7 @@
                 </a:solidFill>
                 <a:latin typeface="Helvetica Neue"/>
               </a:rPr>
-              <a:t>#3  ·  IG  ·  655 views</a:t>
+              <a:t>#3  ·  IG  ·  665 views</a:t>
             </a:r>
           </a:p>
         </p:txBody>
@@ -11495,7 +11495,7 @@
                 </a:solidFill>
                 <a:latin typeface="Georgia"/>
               </a:rPr>
-              <a:t>92,692 views</a:t>
+              <a:t>92,714 views</a:t>
             </a:r>
           </a:p>
         </p:txBody>
@@ -11855,7 +11855,7 @@
                 </a:solidFill>
                 <a:latin typeface="Georgia"/>
               </a:rPr>
-              <a:t>62,526 views</a:t>
+              <a:t>62,527 views</a:t>
             </a:r>
           </a:p>
         </p:txBody>
@@ -14483,7 +14483,7 @@
                 </a:solidFill>
                 <a:latin typeface="Helvetica Neue"/>
               </a:rPr>
-              <a:t>1,288 avg views/post   ·   155 posts   ·   199,615 total</a:t>
+              <a:t>1,288 avg views/post   ·   155 posts   ·   199,693 total</a:t>
             </a:r>
           </a:p>
         </p:txBody>
@@ -16402,7 +16402,7 @@
                 </a:solidFill>
                 <a:latin typeface="Helvetica Neue"/>
               </a:rPr>
-              <a:t>92,692 views · 60 posts</a:t>
+              <a:t>92,714 views · 60 posts</a:t>
             </a:r>
           </a:p>
         </p:txBody>
@@ -16450,7 +16450,7 @@
         <p:spPr>
           <a:xfrm>
             <a:off x="4114800" y="2476968"/>
-            <a:ext cx="5356794" cy="128016"/>
+            <a:ext cx="5355523" cy="128016"/>
           </a:xfrm>
           <a:prstGeom prst="rect">
             <a:avLst/>
@@ -16493,7 +16493,7 @@
         </p:nvSpPr>
         <p:spPr>
           <a:xfrm>
-            <a:off x="9563034" y="2413312"/>
+            <a:off x="9561763" y="2413312"/>
             <a:ext cx="2286000" cy="291904"/>
           </a:xfrm>
           <a:prstGeom prst="rect">
@@ -16562,7 +16562,7 @@
         <p:spPr>
           <a:xfrm>
             <a:off x="4114800" y="2768873"/>
-            <a:ext cx="4194338" cy="128016"/>
+            <a:ext cx="4193410" cy="128016"/>
           </a:xfrm>
           <a:prstGeom prst="rect">
             <a:avLst/>
@@ -16605,7 +16605,7 @@
         </p:nvSpPr>
         <p:spPr>
           <a:xfrm>
-            <a:off x="8400578" y="2705217"/>
+            <a:off x="8399650" y="2705217"/>
             <a:ext cx="2286000" cy="291904"/>
           </a:xfrm>
           <a:prstGeom prst="rect">
@@ -16626,7 +16626,7 @@
                 </a:solidFill>
                 <a:latin typeface="Helvetica Neue"/>
               </a:rPr>
-              <a:t>62,526 views · 20 posts</a:t>
+              <a:t>62,527 views · 20 posts</a:t>
             </a:r>
           </a:p>
         </p:txBody>
@@ -16674,7 +16674,7 @@
         <p:spPr>
           <a:xfrm>
             <a:off x="4114800" y="3060778"/>
-            <a:ext cx="4105455" cy="128016"/>
+            <a:ext cx="4104481" cy="128016"/>
           </a:xfrm>
           <a:prstGeom prst="rect">
             <a:avLst/>
@@ -16717,7 +16717,7 @@
         </p:nvSpPr>
         <p:spPr>
           <a:xfrm>
-            <a:off x="8311695" y="2997121"/>
+            <a:off x="8310721" y="2997121"/>
             <a:ext cx="2286000" cy="291904"/>
           </a:xfrm>
           <a:prstGeom prst="rect">
@@ -16786,7 +16786,7 @@
         <p:spPr>
           <a:xfrm>
             <a:off x="4114800" y="3352682"/>
-            <a:ext cx="3292897" cy="128016"/>
+            <a:ext cx="3411761" cy="128016"/>
           </a:xfrm>
           <a:prstGeom prst="rect">
             <a:avLst/>
@@ -16829,7 +16829,7 @@
         </p:nvSpPr>
         <p:spPr>
           <a:xfrm>
-            <a:off x="7499137" y="3289026"/>
+            <a:off x="7618001" y="3289026"/>
             <a:ext cx="2286000" cy="291904"/>
           </a:xfrm>
           <a:prstGeom prst="rect">
@@ -16850,7 +16850,7 @@
                 </a:solidFill>
                 <a:latin typeface="Helvetica Neue"/>
               </a:rPr>
-              <a:t>49,088 views · 99 posts</a:t>
+              <a:t>50,872 views · 105 posts</a:t>
             </a:r>
           </a:p>
         </p:txBody>
@@ -16898,7 +16898,7 @@
         <p:spPr>
           <a:xfrm>
             <a:off x="4114800" y="3644587"/>
-            <a:ext cx="3198245" cy="128016"/>
+            <a:ext cx="3197486" cy="128016"/>
           </a:xfrm>
           <a:prstGeom prst="rect">
             <a:avLst/>
@@ -16941,7 +16941,7 @@
         </p:nvSpPr>
         <p:spPr>
           <a:xfrm>
-            <a:off x="7404485" y="3580931"/>
+            <a:off x="7403726" y="3580931"/>
             <a:ext cx="2286000" cy="291904"/>
           </a:xfrm>
           <a:prstGeom prst="rect">
@@ -17010,7 +17010,7 @@
         <p:spPr>
           <a:xfrm>
             <a:off x="4114800" y="3936491"/>
-            <a:ext cx="2693859" cy="128016"/>
+            <a:ext cx="2696908" cy="128016"/>
           </a:xfrm>
           <a:prstGeom prst="rect">
             <a:avLst/>
@@ -17053,7 +17053,7 @@
         </p:nvSpPr>
         <p:spPr>
           <a:xfrm>
-            <a:off x="6900099" y="3872835"/>
+            <a:off x="6903148" y="3872835"/>
             <a:ext cx="2286000" cy="291904"/>
           </a:xfrm>
           <a:prstGeom prst="rect">
@@ -17074,7 +17074,7 @@
                 </a:solidFill>
                 <a:latin typeface="Helvetica Neue"/>
               </a:rPr>
-              <a:t>40,158 views · 52 posts</a:t>
+              <a:t>40,213 views · 52 posts</a:t>
             </a:r>
           </a:p>
         </p:txBody>
@@ -17122,7 +17122,7 @@
         <p:spPr>
           <a:xfrm>
             <a:off x="4114800" y="4228396"/>
-            <a:ext cx="2219660" cy="128016"/>
+            <a:ext cx="2364397" cy="128016"/>
           </a:xfrm>
           <a:prstGeom prst="rect">
             <a:avLst/>
@@ -17165,7 +17165,7 @@
         </p:nvSpPr>
         <p:spPr>
           <a:xfrm>
-            <a:off x="6425900" y="4164740"/>
+            <a:off x="6570637" y="4164740"/>
             <a:ext cx="2286000" cy="291904"/>
           </a:xfrm>
           <a:prstGeom prst="rect">
@@ -17186,7 +17186,7 @@
                 </a:solidFill>
                 <a:latin typeface="Helvetica Neue"/>
               </a:rPr>
-              <a:t>33,089 views · 51 posts</a:t>
+              <a:t>35,255 views · 58 posts</a:t>
             </a:r>
           </a:p>
         </p:txBody>
@@ -17234,7 +17234,7 @@
         <p:spPr>
           <a:xfrm>
             <a:off x="4114800" y="4520301"/>
-            <a:ext cx="513777" cy="128016"/>
+            <a:ext cx="513655" cy="128016"/>
           </a:xfrm>
           <a:prstGeom prst="rect">
             <a:avLst/>
@@ -17277,7 +17277,7 @@
         </p:nvSpPr>
         <p:spPr>
           <a:xfrm>
-            <a:off x="4720017" y="4456644"/>
+            <a:off x="4719895" y="4456644"/>
             <a:ext cx="2286000" cy="291904"/>
           </a:xfrm>
           <a:prstGeom prst="rect">
@@ -17346,7 +17346,7 @@
         <p:spPr>
           <a:xfrm>
             <a:off x="4114800" y="4812205"/>
-            <a:ext cx="495397" cy="128016"/>
+            <a:ext cx="495346" cy="128016"/>
           </a:xfrm>
           <a:prstGeom prst="rect">
             <a:avLst/>
@@ -17389,7 +17389,7 @@
         </p:nvSpPr>
         <p:spPr>
           <a:xfrm>
-            <a:off x="4701637" y="4748549"/>
+            <a:off x="4701586" y="4748549"/>
             <a:ext cx="2286000" cy="291904"/>
           </a:xfrm>
           <a:prstGeom prst="rect">
@@ -17410,7 +17410,7 @@
                 </a:solidFill>
                 <a:latin typeface="Helvetica Neue"/>
               </a:rPr>
-              <a:t>7,385 views · 6 posts</a:t>
+              <a:t>7,386 views · 6 posts</a:t>
             </a:r>
           </a:p>
         </p:txBody>
@@ -17458,7 +17458,7 @@
         <p:spPr>
           <a:xfrm>
             <a:off x="4114800" y="5104110"/>
-            <a:ext cx="414630" cy="128016"/>
+            <a:ext cx="415270" cy="128016"/>
           </a:xfrm>
           <a:prstGeom prst="rect">
             <a:avLst/>
@@ -17501,7 +17501,7 @@
         </p:nvSpPr>
         <p:spPr>
           <a:xfrm>
-            <a:off x="4620870" y="5040454"/>
+            <a:off x="4621510" y="5040454"/>
             <a:ext cx="2286000" cy="291904"/>
           </a:xfrm>
           <a:prstGeom prst="rect">
@@ -17522,7 +17522,7 @@
                 </a:solidFill>
                 <a:latin typeface="Helvetica Neue"/>
               </a:rPr>
-              <a:t>6,181 views · 13 posts</a:t>
+              <a:t>6,192 views · 13 posts</a:t>
             </a:r>
           </a:p>
         </p:txBody>
@@ -17570,7 +17570,7 @@
         <p:spPr>
           <a:xfrm>
             <a:off x="4114800" y="5396015"/>
-            <a:ext cx="271277" cy="128016"/>
+            <a:ext cx="271213" cy="128016"/>
           </a:xfrm>
           <a:prstGeom prst="rect">
             <a:avLst/>
@@ -17613,7 +17613,7 @@
         </p:nvSpPr>
         <p:spPr>
           <a:xfrm>
-            <a:off x="4477517" y="5332358"/>
+            <a:off x="4477453" y="5332358"/>
             <a:ext cx="2286000" cy="291904"/>
           </a:xfrm>
           <a:prstGeom prst="rect">
@@ -17682,7 +17682,7 @@
         <p:spPr>
           <a:xfrm>
             <a:off x="4114800" y="5687919"/>
-            <a:ext cx="74527" cy="128016"/>
+            <a:ext cx="74509" cy="128016"/>
           </a:xfrm>
           <a:prstGeom prst="rect">
             <a:avLst/>
@@ -17725,7 +17725,7 @@
         </p:nvSpPr>
         <p:spPr>
           <a:xfrm>
-            <a:off x="4280767" y="5624263"/>
+            <a:off x="4280749" y="5624263"/>
             <a:ext cx="2286000" cy="291904"/>
           </a:xfrm>
           <a:prstGeom prst="rect">
@@ -18342,7 +18342,7 @@
                 </a:solidFill>
                 <a:latin typeface="Georgia"/>
               </a:rPr>
-              <a:t>92,692</a:t>
+              <a:t>92,714</a:t>
             </a:r>
           </a:p>
         </p:txBody>
@@ -20414,7 +20414,7 @@
                 </a:solidFill>
                 <a:latin typeface="Georgia"/>
               </a:rPr>
-              <a:t>62,526</a:t>
+              <a:t>62,527</a:t>
             </a:r>
           </a:p>
         </p:txBody>

--- a/SPONSOR_CONTENT_REPORT.pptx
+++ b/SPONSOR_CONTENT_REPORT.pptx
@@ -3327,7 +3327,7 @@
                 </a:solidFill>
                 <a:latin typeface="Helvetica Neue"/>
               </a:rPr>
-              <a:t>Reporting window: Jun 8 → 2026-08-26</a:t>
+              <a:t>Reporting window: Jun 8 → 2026-09-04</a:t>
             </a:r>
           </a:p>
         </p:txBody>
@@ -3783,7 +3783,7 @@
                 </a:solidFill>
                 <a:latin typeface="Georgia"/>
               </a:rPr>
-              <a:t>7,386</a:t>
+              <a:t>8,221</a:t>
             </a:r>
           </a:p>
         </p:txBody>
@@ -3817,7 +3817,7 @@
                 </a:solidFill>
                 <a:latin typeface="Helvetica Neue"/>
               </a:rPr>
-              <a:t>6 posts · 133 likes</a:t>
+              <a:t>8 posts · 140 likes</a:t>
             </a:r>
           </a:p>
         </p:txBody>
@@ -3851,7 +3851,7 @@
                 </a:solidFill>
                 <a:latin typeface="Helvetica Neue"/>
               </a:rPr>
-              <a:t>1,231 average views per post</a:t>
+              <a:t>1,028 average views per post</a:t>
             </a:r>
           </a:p>
         </p:txBody>
@@ -4871,7 +4871,7 @@
                 </a:solidFill>
                 <a:latin typeface="Helvetica Neue"/>
               </a:rPr>
-              <a:t>Community &amp; Culture</a:t>
+              <a:t>Elections &amp; Judicial</a:t>
             </a:r>
           </a:p>
         </p:txBody>
@@ -4886,6 +4886,152 @@
           <a:xfrm>
             <a:off x="4206240" y="2217420"/>
             <a:ext cx="6035040" cy="274320"/>
+          </a:xfrm>
+          <a:prstGeom prst="rect">
+            <a:avLst/>
+          </a:prstGeom>
+          <a:solidFill>
+            <a:srgbClr val="2F3C7E"/>
+          </a:solidFill>
+          <a:ln>
+            <a:noFill/>
+          </a:ln>
+          <a:effectLst/>
+        </p:spPr>
+        <p:style>
+          <a:lnRef idx="1">
+            <a:schemeClr val="accent1"/>
+          </a:lnRef>
+          <a:fillRef idx="3">
+            <a:schemeClr val="accent1"/>
+          </a:fillRef>
+          <a:effectRef idx="2">
+            <a:schemeClr val="accent1"/>
+          </a:effectRef>
+          <a:fontRef idx="minor">
+            <a:schemeClr val="lt1"/>
+          </a:fontRef>
+        </p:style>
+        <p:txBody>
+          <a:bodyPr rtlCol="0" anchor="ctr"/>
+          <a:lstStyle/>
+          <a:p>
+            <a:pPr algn="ctr"/>
+          </a:p>
+        </p:txBody>
+      </p:sp>
+      <p:sp>
+        <p:nvSpPr>
+          <p:cNvPr id="8" name="TextBox 7"/>
+          <p:cNvSpPr txBox="1"/>
+          <p:nvPr/>
+        </p:nvSpPr>
+        <p:spPr>
+          <a:xfrm>
+            <a:off x="10332719" y="2148839"/>
+            <a:ext cx="2286000" cy="251460"/>
+          </a:xfrm>
+          <a:prstGeom prst="rect">
+            <a:avLst/>
+          </a:prstGeom>
+          <a:noFill/>
+        </p:spPr>
+        <p:txBody>
+          <a:bodyPr wrap="square" lIns="0" rIns="0" tIns="0" bIns="0">
+            <a:spAutoFit/>
+          </a:bodyPr>
+          <a:lstStyle/>
+          <a:p>
+            <a:r>
+              <a:rPr sz="900" b="0">
+                <a:solidFill>
+                  <a:srgbClr val="6B7082"/>
+                </a:solidFill>
+                <a:latin typeface="Helvetica Neue"/>
+              </a:rPr>
+              <a:t>46,138 views · 76 posts · 607 avg</a:t>
+            </a:r>
+          </a:p>
+        </p:txBody>
+      </p:sp>
+      <p:sp>
+        <p:nvSpPr>
+          <p:cNvPr id="9" name="TextBox 8"/>
+          <p:cNvSpPr txBox="1"/>
+          <p:nvPr/>
+        </p:nvSpPr>
+        <p:spPr>
+          <a:xfrm>
+            <a:off x="10332719" y="2354579"/>
+            <a:ext cx="4572000" cy="251460"/>
+          </a:xfrm>
+          <a:prstGeom prst="rect">
+            <a:avLst/>
+          </a:prstGeom>
+          <a:noFill/>
+        </p:spPr>
+        <p:txBody>
+          <a:bodyPr wrap="square" lIns="0" rIns="0" tIns="0" bIns="0">
+            <a:spAutoFit/>
+          </a:bodyPr>
+          <a:lstStyle/>
+          <a:p>
+            <a:r>
+              <a:rPr sz="800" b="0">
+                <a:solidFill>
+                  <a:srgbClr val="6B7082"/>
+                </a:solidFill>
+                <a:latin typeface="Helvetica Neue"/>
+              </a:rPr>
+              <a:t>Slow-burn policy · Middle (40-55) + Older (55+) engaged voters</a:t>
+            </a:r>
+          </a:p>
+        </p:txBody>
+      </p:sp>
+      <p:sp>
+        <p:nvSpPr>
+          <p:cNvPr id="10" name="TextBox 9"/>
+          <p:cNvSpPr txBox="1"/>
+          <p:nvPr/>
+        </p:nvSpPr>
+        <p:spPr>
+          <a:xfrm>
+            <a:off x="731520" y="2651759"/>
+            <a:ext cx="3200400" cy="502920"/>
+          </a:xfrm>
+          <a:prstGeom prst="rect">
+            <a:avLst/>
+          </a:prstGeom>
+          <a:noFill/>
+        </p:spPr>
+        <p:txBody>
+          <a:bodyPr wrap="square" lIns="0" rIns="0" tIns="0" bIns="0">
+            <a:spAutoFit/>
+          </a:bodyPr>
+          <a:lstStyle/>
+          <a:p>
+            <a:r>
+              <a:rPr sz="1200" b="1">
+                <a:solidFill>
+                  <a:srgbClr val="141833"/>
+                </a:solidFill>
+                <a:latin typeface="Helvetica Neue"/>
+              </a:rPr>
+              <a:t>Community &amp; Culture</a:t>
+            </a:r>
+          </a:p>
+        </p:txBody>
+      </p:sp>
+      <p:sp>
+        <p:nvSpPr>
+          <p:cNvPr id="11" name="Rectangle 10"/>
+          <p:cNvSpPr/>
+          <p:nvPr/>
+        </p:nvSpPr>
+        <p:spPr>
+          <a:xfrm>
+            <a:off x="4206240" y="2720339"/>
+            <a:ext cx="5260156" cy="274320"/>
           </a:xfrm>
           <a:prstGeom prst="rect">
             <a:avLst/>
@@ -4922,13 +5068,13 @@
       </p:sp>
       <p:sp>
         <p:nvSpPr>
-          <p:cNvPr id="8" name="TextBox 7"/>
-          <p:cNvSpPr txBox="1"/>
-          <p:nvPr/>
-        </p:nvSpPr>
-        <p:spPr>
-          <a:xfrm>
-            <a:off x="10332719" y="2148839"/>
+          <p:cNvPr id="12" name="TextBox 11"/>
+          <p:cNvSpPr txBox="1"/>
+          <p:nvPr/>
+        </p:nvSpPr>
+        <p:spPr>
+          <a:xfrm>
+            <a:off x="9557836" y="2651759"/>
             <a:ext cx="2286000" cy="251460"/>
           </a:xfrm>
           <a:prstGeom prst="rect">
@@ -4949,20 +5095,20 @@
                 </a:solidFill>
                 <a:latin typeface="Helvetica Neue"/>
               </a:rPr>
-              <a:t>40,213 views · 52 posts · 773 avg</a:t>
-            </a:r>
-          </a:p>
-        </p:txBody>
-      </p:sp>
-      <p:sp>
-        <p:nvSpPr>
-          <p:cNvPr id="9" name="TextBox 8"/>
-          <p:cNvSpPr txBox="1"/>
-          <p:nvPr/>
-        </p:nvSpPr>
-        <p:spPr>
-          <a:xfrm>
-            <a:off x="10332719" y="2354579"/>
+              <a:t>40,214 views · 52 posts · 773 avg</a:t>
+            </a:r>
+          </a:p>
+        </p:txBody>
+      </p:sp>
+      <p:sp>
+        <p:nvSpPr>
+          <p:cNvPr id="13" name="TextBox 12"/>
+          <p:cNvSpPr txBox="1"/>
+          <p:nvPr/>
+        </p:nvSpPr>
+        <p:spPr>
+          <a:xfrm>
+            <a:off x="9557836" y="2857499"/>
             <a:ext cx="4572000" cy="251460"/>
           </a:xfrm>
           <a:prstGeom prst="rect">
@@ -4990,13 +5136,13 @@
       </p:sp>
       <p:sp>
         <p:nvSpPr>
-          <p:cNvPr id="10" name="TextBox 9"/>
-          <p:cNvSpPr txBox="1"/>
-          <p:nvPr/>
-        </p:nvSpPr>
-        <p:spPr>
-          <a:xfrm>
-            <a:off x="731520" y="2651759"/>
+          <p:cNvPr id="14" name="TextBox 13"/>
+          <p:cNvSpPr txBox="1"/>
+          <p:nvPr/>
+        </p:nvSpPr>
+        <p:spPr>
+          <a:xfrm>
+            <a:off x="731520" y="3154679"/>
             <a:ext cx="3200400" cy="502920"/>
           </a:xfrm>
           <a:prstGeom prst="rect">
@@ -5017,21 +5163,313 @@
                 </a:solidFill>
                 <a:latin typeface="Helvetica Neue"/>
               </a:rPr>
-              <a:t>Elections &amp; Judicial</a:t>
-            </a:r>
-          </a:p>
-        </p:txBody>
-      </p:sp>
-      <p:sp>
-        <p:nvSpPr>
-          <p:cNvPr id="11" name="Rectangle 10"/>
+              <a:t>American Pride</a:t>
+            </a:r>
+          </a:p>
+        </p:txBody>
+      </p:sp>
+      <p:sp>
+        <p:nvSpPr>
+          <p:cNvPr id="15" name="Rectangle 14"/>
           <p:cNvSpPr/>
           <p:nvPr/>
         </p:nvSpPr>
         <p:spPr>
           <a:xfrm>
-            <a:off x="4206240" y="2720339"/>
-            <a:ext cx="5290959" cy="274320"/>
+            <a:off x="4206240" y="3223260"/>
+            <a:ext cx="1011900" cy="274320"/>
+          </a:xfrm>
+          <a:prstGeom prst="rect">
+            <a:avLst/>
+          </a:prstGeom>
+          <a:solidFill>
+            <a:srgbClr val="990011"/>
+          </a:solidFill>
+          <a:ln>
+            <a:noFill/>
+          </a:ln>
+          <a:effectLst/>
+        </p:spPr>
+        <p:style>
+          <a:lnRef idx="1">
+            <a:schemeClr val="accent1"/>
+          </a:lnRef>
+          <a:fillRef idx="3">
+            <a:schemeClr val="accent1"/>
+          </a:fillRef>
+          <a:effectRef idx="2">
+            <a:schemeClr val="accent1"/>
+          </a:effectRef>
+          <a:fontRef idx="minor">
+            <a:schemeClr val="lt1"/>
+          </a:fontRef>
+        </p:style>
+        <p:txBody>
+          <a:bodyPr rtlCol="0" anchor="ctr"/>
+          <a:lstStyle/>
+          <a:p>
+            <a:pPr algn="ctr"/>
+          </a:p>
+        </p:txBody>
+      </p:sp>
+      <p:sp>
+        <p:nvSpPr>
+          <p:cNvPr id="16" name="TextBox 15"/>
+          <p:cNvSpPr txBox="1"/>
+          <p:nvPr/>
+        </p:nvSpPr>
+        <p:spPr>
+          <a:xfrm>
+            <a:off x="5309580" y="3154679"/>
+            <a:ext cx="2286000" cy="251460"/>
+          </a:xfrm>
+          <a:prstGeom prst="rect">
+            <a:avLst/>
+          </a:prstGeom>
+          <a:noFill/>
+        </p:spPr>
+        <p:txBody>
+          <a:bodyPr wrap="square" lIns="0" rIns="0" tIns="0" bIns="0">
+            <a:spAutoFit/>
+          </a:bodyPr>
+          <a:lstStyle/>
+          <a:p>
+            <a:r>
+              <a:rPr sz="900" b="0">
+                <a:solidFill>
+                  <a:srgbClr val="6B7082"/>
+                </a:solidFill>
+                <a:latin typeface="Helvetica Neue"/>
+              </a:rPr>
+              <a:t>7,736 views · 15 posts · 516 avg</a:t>
+            </a:r>
+          </a:p>
+        </p:txBody>
+      </p:sp>
+      <p:sp>
+        <p:nvSpPr>
+          <p:cNvPr id="17" name="TextBox 16"/>
+          <p:cNvSpPr txBox="1"/>
+          <p:nvPr/>
+        </p:nvSpPr>
+        <p:spPr>
+          <a:xfrm>
+            <a:off x="5309580" y="3360420"/>
+            <a:ext cx="4572000" cy="251460"/>
+          </a:xfrm>
+          <a:prstGeom prst="rect">
+            <a:avLst/>
+          </a:prstGeom>
+          <a:noFill/>
+        </p:spPr>
+        <p:txBody>
+          <a:bodyPr wrap="square" lIns="0" rIns="0" tIns="0" bIns="0">
+            <a:spAutoFit/>
+          </a:bodyPr>
+          <a:lstStyle/>
+          <a:p>
+            <a:r>
+              <a:rPr sz="800" b="0">
+                <a:solidFill>
+                  <a:srgbClr val="6B7082"/>
+                </a:solidFill>
+                <a:latin typeface="Helvetica Neue"/>
+              </a:rPr>
+              <a:t>Traditional / patriotic · Older (55+), values-driven</a:t>
+            </a:r>
+          </a:p>
+        </p:txBody>
+      </p:sp>
+      <p:sp>
+        <p:nvSpPr>
+          <p:cNvPr id="18" name="TextBox 17"/>
+          <p:cNvSpPr txBox="1"/>
+          <p:nvPr/>
+        </p:nvSpPr>
+        <p:spPr>
+          <a:xfrm>
+            <a:off x="731520" y="3657600"/>
+            <a:ext cx="3200400" cy="502920"/>
+          </a:xfrm>
+          <a:prstGeom prst="rect">
+            <a:avLst/>
+          </a:prstGeom>
+          <a:noFill/>
+        </p:spPr>
+        <p:txBody>
+          <a:bodyPr wrap="square" lIns="0" rIns="0" tIns="0" bIns="0">
+            <a:spAutoFit/>
+          </a:bodyPr>
+          <a:lstStyle/>
+          <a:p>
+            <a:r>
+              <a:rPr sz="1200" b="1">
+                <a:solidFill>
+                  <a:srgbClr val="141833"/>
+                </a:solidFill>
+                <a:latin typeface="Helvetica Neue"/>
+              </a:rPr>
+              <a:t>Political Individual Highlights</a:t>
+            </a:r>
+          </a:p>
+        </p:txBody>
+      </p:sp>
+      <p:sp>
+        <p:nvSpPr>
+          <p:cNvPr id="19" name="Rectangle 18"/>
+          <p:cNvSpPr/>
+          <p:nvPr/>
+        </p:nvSpPr>
+        <p:spPr>
+          <a:xfrm>
+            <a:off x="4206240" y="3726180"/>
+            <a:ext cx="822627" cy="274320"/>
+          </a:xfrm>
+          <a:prstGeom prst="rect">
+            <a:avLst/>
+          </a:prstGeom>
+          <a:solidFill>
+            <a:srgbClr val="2E86AB"/>
+          </a:solidFill>
+          <a:ln>
+            <a:noFill/>
+          </a:ln>
+          <a:effectLst/>
+        </p:spPr>
+        <p:style>
+          <a:lnRef idx="1">
+            <a:schemeClr val="accent1"/>
+          </a:lnRef>
+          <a:fillRef idx="3">
+            <a:schemeClr val="accent1"/>
+          </a:fillRef>
+          <a:effectRef idx="2">
+            <a:schemeClr val="accent1"/>
+          </a:effectRef>
+          <a:fontRef idx="minor">
+            <a:schemeClr val="lt1"/>
+          </a:fontRef>
+        </p:style>
+        <p:txBody>
+          <a:bodyPr rtlCol="0" anchor="ctr"/>
+          <a:lstStyle/>
+          <a:p>
+            <a:pPr algn="ctr"/>
+          </a:p>
+        </p:txBody>
+      </p:sp>
+      <p:sp>
+        <p:nvSpPr>
+          <p:cNvPr id="20" name="TextBox 19"/>
+          <p:cNvSpPr txBox="1"/>
+          <p:nvPr/>
+        </p:nvSpPr>
+        <p:spPr>
+          <a:xfrm>
+            <a:off x="5120307" y="3657600"/>
+            <a:ext cx="2286000" cy="251460"/>
+          </a:xfrm>
+          <a:prstGeom prst="rect">
+            <a:avLst/>
+          </a:prstGeom>
+          <a:noFill/>
+        </p:spPr>
+        <p:txBody>
+          <a:bodyPr wrap="square" lIns="0" rIns="0" tIns="0" bIns="0">
+            <a:spAutoFit/>
+          </a:bodyPr>
+          <a:lstStyle/>
+          <a:p>
+            <a:r>
+              <a:rPr sz="900" b="0">
+                <a:solidFill>
+                  <a:srgbClr val="6B7082"/>
+                </a:solidFill>
+                <a:latin typeface="Helvetica Neue"/>
+              </a:rPr>
+              <a:t>6,289 views · 9 posts · 699 avg</a:t>
+            </a:r>
+          </a:p>
+        </p:txBody>
+      </p:sp>
+      <p:sp>
+        <p:nvSpPr>
+          <p:cNvPr id="21" name="TextBox 20"/>
+          <p:cNvSpPr txBox="1"/>
+          <p:nvPr/>
+        </p:nvSpPr>
+        <p:spPr>
+          <a:xfrm>
+            <a:off x="5120307" y="3863340"/>
+            <a:ext cx="4572000" cy="251460"/>
+          </a:xfrm>
+          <a:prstGeom prst="rect">
+            <a:avLst/>
+          </a:prstGeom>
+          <a:noFill/>
+        </p:spPr>
+        <p:txBody>
+          <a:bodyPr wrap="square" lIns="0" rIns="0" tIns="0" bIns="0">
+            <a:spAutoFit/>
+          </a:bodyPr>
+          <a:lstStyle/>
+          <a:p>
+            <a:r>
+              <a:rPr sz="800" b="0">
+                <a:solidFill>
+                  <a:srgbClr val="6B7082"/>
+                </a:solidFill>
+                <a:latin typeface="Helvetica Neue"/>
+              </a:rPr>
+              <a:t>Personal profile · Broad (voters, campaign-season readers)</a:t>
+            </a:r>
+          </a:p>
+        </p:txBody>
+      </p:sp>
+      <p:sp>
+        <p:nvSpPr>
+          <p:cNvPr id="22" name="TextBox 21"/>
+          <p:cNvSpPr txBox="1"/>
+          <p:nvPr/>
+        </p:nvSpPr>
+        <p:spPr>
+          <a:xfrm>
+            <a:off x="731520" y="4160520"/>
+            <a:ext cx="3200400" cy="502920"/>
+          </a:xfrm>
+          <a:prstGeom prst="rect">
+            <a:avLst/>
+          </a:prstGeom>
+          <a:noFill/>
+        </p:spPr>
+        <p:txBody>
+          <a:bodyPr wrap="square" lIns="0" rIns="0" tIns="0" bIns="0">
+            <a:spAutoFit/>
+          </a:bodyPr>
+          <a:lstStyle/>
+          <a:p>
+            <a:r>
+              <a:rPr sz="1200" b="1">
+                <a:solidFill>
+                  <a:srgbClr val="141833"/>
+                </a:solidFill>
+                <a:latin typeface="Helvetica Neue"/>
+              </a:rPr>
+              <a:t>Legislation &amp; Policy Watch</a:t>
+            </a:r>
+          </a:p>
+        </p:txBody>
+      </p:sp>
+      <p:sp>
+        <p:nvSpPr>
+          <p:cNvPr id="23" name="Rectangle 22"/>
+          <p:cNvSpPr/>
+          <p:nvPr/>
+        </p:nvSpPr>
+        <p:spPr>
+          <a:xfrm>
+            <a:off x="4206240" y="4229100"/>
+            <a:ext cx="809939" cy="274320"/>
           </a:xfrm>
           <a:prstGeom prst="rect">
             <a:avLst/>
@@ -5068,13 +5506,13 @@
       </p:sp>
       <p:sp>
         <p:nvSpPr>
-          <p:cNvPr id="12" name="TextBox 11"/>
-          <p:cNvSpPr txBox="1"/>
-          <p:nvPr/>
-        </p:nvSpPr>
-        <p:spPr>
-          <a:xfrm>
-            <a:off x="9588639" y="2651759"/>
+          <p:cNvPr id="24" name="TextBox 23"/>
+          <p:cNvSpPr txBox="1"/>
+          <p:nvPr/>
+        </p:nvSpPr>
+        <p:spPr>
+          <a:xfrm>
+            <a:off x="5107619" y="4160520"/>
             <a:ext cx="2286000" cy="251460"/>
           </a:xfrm>
           <a:prstGeom prst="rect">
@@ -5095,20 +5533,20 @@
                 </a:solidFill>
                 <a:latin typeface="Helvetica Neue"/>
               </a:rPr>
-              <a:t>35,255 views · 58 posts · 608 avg</a:t>
-            </a:r>
-          </a:p>
-        </p:txBody>
-      </p:sp>
-      <p:sp>
-        <p:nvSpPr>
-          <p:cNvPr id="13" name="TextBox 12"/>
-          <p:cNvSpPr txBox="1"/>
-          <p:nvPr/>
-        </p:nvSpPr>
-        <p:spPr>
-          <a:xfrm>
-            <a:off x="9588639" y="2857499"/>
+              <a:t>6,192 views · 13 posts · 476 avg</a:t>
+            </a:r>
+          </a:p>
+        </p:txBody>
+      </p:sp>
+      <p:sp>
+        <p:nvSpPr>
+          <p:cNvPr id="25" name="TextBox 24"/>
+          <p:cNvSpPr txBox="1"/>
+          <p:nvPr/>
+        </p:nvSpPr>
+        <p:spPr>
+          <a:xfrm>
+            <a:off x="5107619" y="4366260"/>
             <a:ext cx="4572000" cy="251460"/>
           </a:xfrm>
           <a:prstGeom prst="rect">
@@ -5129,445 +5567,7 @@
                 </a:solidFill>
                 <a:latin typeface="Helvetica Neue"/>
               </a:rPr>
-              <a:t>Slow-burn policy · Middle (40-55) + Older (55+) engaged voters</a:t>
-            </a:r>
-          </a:p>
-        </p:txBody>
-      </p:sp>
-      <p:sp>
-        <p:nvSpPr>
-          <p:cNvPr id="14" name="TextBox 13"/>
-          <p:cNvSpPr txBox="1"/>
-          <p:nvPr/>
-        </p:nvSpPr>
-        <p:spPr>
-          <a:xfrm>
-            <a:off x="731520" y="3154679"/>
-            <a:ext cx="3200400" cy="502920"/>
-          </a:xfrm>
-          <a:prstGeom prst="rect">
-            <a:avLst/>
-          </a:prstGeom>
-          <a:noFill/>
-        </p:spPr>
-        <p:txBody>
-          <a:bodyPr wrap="square" lIns="0" rIns="0" tIns="0" bIns="0">
-            <a:spAutoFit/>
-          </a:bodyPr>
-          <a:lstStyle/>
-          <a:p>
-            <a:r>
-              <a:rPr sz="1200" b="1">
-                <a:solidFill>
-                  <a:srgbClr val="141833"/>
-                </a:solidFill>
-                <a:latin typeface="Helvetica Neue"/>
-              </a:rPr>
-              <a:t>American Pride</a:t>
-            </a:r>
-          </a:p>
-        </p:txBody>
-      </p:sp>
-      <p:sp>
-        <p:nvSpPr>
-          <p:cNvPr id="15" name="Rectangle 14"/>
-          <p:cNvSpPr/>
-          <p:nvPr/>
-        </p:nvSpPr>
-        <p:spPr>
-          <a:xfrm>
-            <a:off x="4206240" y="3223260"/>
-            <a:ext cx="1149438" cy="274320"/>
-          </a:xfrm>
-          <a:prstGeom prst="rect">
-            <a:avLst/>
-          </a:prstGeom>
-          <a:solidFill>
-            <a:srgbClr val="990011"/>
-          </a:solidFill>
-          <a:ln>
-            <a:noFill/>
-          </a:ln>
-          <a:effectLst/>
-        </p:spPr>
-        <p:style>
-          <a:lnRef idx="1">
-            <a:schemeClr val="accent1"/>
-          </a:lnRef>
-          <a:fillRef idx="3">
-            <a:schemeClr val="accent1"/>
-          </a:fillRef>
-          <a:effectRef idx="2">
-            <a:schemeClr val="accent1"/>
-          </a:effectRef>
-          <a:fontRef idx="minor">
-            <a:schemeClr val="lt1"/>
-          </a:fontRef>
-        </p:style>
-        <p:txBody>
-          <a:bodyPr rtlCol="0" anchor="ctr"/>
-          <a:lstStyle/>
-          <a:p>
-            <a:pPr algn="ctr"/>
-          </a:p>
-        </p:txBody>
-      </p:sp>
-      <p:sp>
-        <p:nvSpPr>
-          <p:cNvPr id="16" name="TextBox 15"/>
-          <p:cNvSpPr txBox="1"/>
-          <p:nvPr/>
-        </p:nvSpPr>
-        <p:spPr>
-          <a:xfrm>
-            <a:off x="5447118" y="3154679"/>
-            <a:ext cx="2286000" cy="251460"/>
-          </a:xfrm>
-          <a:prstGeom prst="rect">
-            <a:avLst/>
-          </a:prstGeom>
-          <a:noFill/>
-        </p:spPr>
-        <p:txBody>
-          <a:bodyPr wrap="square" lIns="0" rIns="0" tIns="0" bIns="0">
-            <a:spAutoFit/>
-          </a:bodyPr>
-          <a:lstStyle/>
-          <a:p>
-            <a:r>
-              <a:rPr sz="900" b="0">
-                <a:solidFill>
-                  <a:srgbClr val="6B7082"/>
-                </a:solidFill>
-                <a:latin typeface="Helvetica Neue"/>
-              </a:rPr>
-              <a:t>7,659 views · 14 posts · 547 avg</a:t>
-            </a:r>
-          </a:p>
-        </p:txBody>
-      </p:sp>
-      <p:sp>
-        <p:nvSpPr>
-          <p:cNvPr id="17" name="TextBox 16"/>
-          <p:cNvSpPr txBox="1"/>
-          <p:nvPr/>
-        </p:nvSpPr>
-        <p:spPr>
-          <a:xfrm>
-            <a:off x="5447118" y="3360420"/>
-            <a:ext cx="4572000" cy="251460"/>
-          </a:xfrm>
-          <a:prstGeom prst="rect">
-            <a:avLst/>
-          </a:prstGeom>
-          <a:noFill/>
-        </p:spPr>
-        <p:txBody>
-          <a:bodyPr wrap="square" lIns="0" rIns="0" tIns="0" bIns="0">
-            <a:spAutoFit/>
-          </a:bodyPr>
-          <a:lstStyle/>
-          <a:p>
-            <a:r>
-              <a:rPr sz="800" b="0">
-                <a:solidFill>
-                  <a:srgbClr val="6B7082"/>
-                </a:solidFill>
-                <a:latin typeface="Helvetica Neue"/>
-              </a:rPr>
-              <a:t>Traditional / patriotic · Older (55+), values-driven</a:t>
-            </a:r>
-          </a:p>
-        </p:txBody>
-      </p:sp>
-      <p:sp>
-        <p:nvSpPr>
-          <p:cNvPr id="18" name="TextBox 17"/>
-          <p:cNvSpPr txBox="1"/>
-          <p:nvPr/>
-        </p:nvSpPr>
-        <p:spPr>
-          <a:xfrm>
-            <a:off x="731520" y="3657600"/>
-            <a:ext cx="3200400" cy="502920"/>
-          </a:xfrm>
-          <a:prstGeom prst="rect">
-            <a:avLst/>
-          </a:prstGeom>
-          <a:noFill/>
-        </p:spPr>
-        <p:txBody>
-          <a:bodyPr wrap="square" lIns="0" rIns="0" tIns="0" bIns="0">
-            <a:spAutoFit/>
-          </a:bodyPr>
-          <a:lstStyle/>
-          <a:p>
-            <a:r>
-              <a:rPr sz="1200" b="1">
-                <a:solidFill>
-                  <a:srgbClr val="141833"/>
-                </a:solidFill>
-                <a:latin typeface="Helvetica Neue"/>
-              </a:rPr>
-              <a:t>Legislation &amp; Policy Watch</a:t>
-            </a:r>
-          </a:p>
-        </p:txBody>
-      </p:sp>
-      <p:sp>
-        <p:nvSpPr>
-          <p:cNvPr id="19" name="Rectangle 18"/>
-          <p:cNvSpPr/>
-          <p:nvPr/>
-        </p:nvSpPr>
-        <p:spPr>
-          <a:xfrm>
-            <a:off x="4206240" y="3726180"/>
-            <a:ext cx="929275" cy="274320"/>
-          </a:xfrm>
-          <a:prstGeom prst="rect">
-            <a:avLst/>
-          </a:prstGeom>
-          <a:solidFill>
-            <a:srgbClr val="2F3C7E"/>
-          </a:solidFill>
-          <a:ln>
-            <a:noFill/>
-          </a:ln>
-          <a:effectLst/>
-        </p:spPr>
-        <p:style>
-          <a:lnRef idx="1">
-            <a:schemeClr val="accent1"/>
-          </a:lnRef>
-          <a:fillRef idx="3">
-            <a:schemeClr val="accent1"/>
-          </a:fillRef>
-          <a:effectRef idx="2">
-            <a:schemeClr val="accent1"/>
-          </a:effectRef>
-          <a:fontRef idx="minor">
-            <a:schemeClr val="lt1"/>
-          </a:fontRef>
-        </p:style>
-        <p:txBody>
-          <a:bodyPr rtlCol="0" anchor="ctr"/>
-          <a:lstStyle/>
-          <a:p>
-            <a:pPr algn="ctr"/>
-          </a:p>
-        </p:txBody>
-      </p:sp>
-      <p:sp>
-        <p:nvSpPr>
-          <p:cNvPr id="20" name="TextBox 19"/>
-          <p:cNvSpPr txBox="1"/>
-          <p:nvPr/>
-        </p:nvSpPr>
-        <p:spPr>
-          <a:xfrm>
-            <a:off x="5226955" y="3657600"/>
-            <a:ext cx="2286000" cy="251460"/>
-          </a:xfrm>
-          <a:prstGeom prst="rect">
-            <a:avLst/>
-          </a:prstGeom>
-          <a:noFill/>
-        </p:spPr>
-        <p:txBody>
-          <a:bodyPr wrap="square" lIns="0" rIns="0" tIns="0" bIns="0">
-            <a:spAutoFit/>
-          </a:bodyPr>
-          <a:lstStyle/>
-          <a:p>
-            <a:r>
-              <a:rPr sz="900" b="0">
-                <a:solidFill>
-                  <a:srgbClr val="6B7082"/>
-                </a:solidFill>
-                <a:latin typeface="Helvetica Neue"/>
-              </a:rPr>
-              <a:t>6,192 views · 13 posts · 476 avg</a:t>
-            </a:r>
-          </a:p>
-        </p:txBody>
-      </p:sp>
-      <p:sp>
-        <p:nvSpPr>
-          <p:cNvPr id="21" name="TextBox 20"/>
-          <p:cNvSpPr txBox="1"/>
-          <p:nvPr/>
-        </p:nvSpPr>
-        <p:spPr>
-          <a:xfrm>
-            <a:off x="5226955" y="3863340"/>
-            <a:ext cx="4572000" cy="251460"/>
-          </a:xfrm>
-          <a:prstGeom prst="rect">
-            <a:avLst/>
-          </a:prstGeom>
-          <a:noFill/>
-        </p:spPr>
-        <p:txBody>
-          <a:bodyPr wrap="square" lIns="0" rIns="0" tIns="0" bIns="0">
-            <a:spAutoFit/>
-          </a:bodyPr>
-          <a:lstStyle/>
-          <a:p>
-            <a:r>
-              <a:rPr sz="800" b="0">
-                <a:solidFill>
-                  <a:srgbClr val="6B7082"/>
-                </a:solidFill>
-                <a:latin typeface="Helvetica Neue"/>
-              </a:rPr>
               <a:t>Slow-burn policy · Older (55+), civic-engaged</a:t>
-            </a:r>
-          </a:p>
-        </p:txBody>
-      </p:sp>
-      <p:sp>
-        <p:nvSpPr>
-          <p:cNvPr id="22" name="TextBox 21"/>
-          <p:cNvSpPr txBox="1"/>
-          <p:nvPr/>
-        </p:nvSpPr>
-        <p:spPr>
-          <a:xfrm>
-            <a:off x="731520" y="4160520"/>
-            <a:ext cx="3200400" cy="502920"/>
-          </a:xfrm>
-          <a:prstGeom prst="rect">
-            <a:avLst/>
-          </a:prstGeom>
-          <a:noFill/>
-        </p:spPr>
-        <p:txBody>
-          <a:bodyPr wrap="square" lIns="0" rIns="0" tIns="0" bIns="0">
-            <a:spAutoFit/>
-          </a:bodyPr>
-          <a:lstStyle/>
-          <a:p>
-            <a:r>
-              <a:rPr sz="1200" b="1">
-                <a:solidFill>
-                  <a:srgbClr val="141833"/>
-                </a:solidFill>
-                <a:latin typeface="Helvetica Neue"/>
-              </a:rPr>
-              <a:t>Political Individual Highlights</a:t>
-            </a:r>
-          </a:p>
-        </p:txBody>
-      </p:sp>
-      <p:sp>
-        <p:nvSpPr>
-          <p:cNvPr id="23" name="Rectangle 22"/>
-          <p:cNvSpPr/>
-          <p:nvPr/>
-        </p:nvSpPr>
-        <p:spPr>
-          <a:xfrm>
-            <a:off x="4206240" y="4229100"/>
-            <a:ext cx="606910" cy="274320"/>
-          </a:xfrm>
-          <a:prstGeom prst="rect">
-            <a:avLst/>
-          </a:prstGeom>
-          <a:solidFill>
-            <a:srgbClr val="2E86AB"/>
-          </a:solidFill>
-          <a:ln>
-            <a:noFill/>
-          </a:ln>
-          <a:effectLst/>
-        </p:spPr>
-        <p:style>
-          <a:lnRef idx="1">
-            <a:schemeClr val="accent1"/>
-          </a:lnRef>
-          <a:fillRef idx="3">
-            <a:schemeClr val="accent1"/>
-          </a:fillRef>
-          <a:effectRef idx="2">
-            <a:schemeClr val="accent1"/>
-          </a:effectRef>
-          <a:fontRef idx="minor">
-            <a:schemeClr val="lt1"/>
-          </a:fontRef>
-        </p:style>
-        <p:txBody>
-          <a:bodyPr rtlCol="0" anchor="ctr"/>
-          <a:lstStyle/>
-          <a:p>
-            <a:pPr algn="ctr"/>
-          </a:p>
-        </p:txBody>
-      </p:sp>
-      <p:sp>
-        <p:nvSpPr>
-          <p:cNvPr id="24" name="TextBox 23"/>
-          <p:cNvSpPr txBox="1"/>
-          <p:nvPr/>
-        </p:nvSpPr>
-        <p:spPr>
-          <a:xfrm>
-            <a:off x="4904590" y="4160520"/>
-            <a:ext cx="2286000" cy="251460"/>
-          </a:xfrm>
-          <a:prstGeom prst="rect">
-            <a:avLst/>
-          </a:prstGeom>
-          <a:noFill/>
-        </p:spPr>
-        <p:txBody>
-          <a:bodyPr wrap="square" lIns="0" rIns="0" tIns="0" bIns="0">
-            <a:spAutoFit/>
-          </a:bodyPr>
-          <a:lstStyle/>
-          <a:p>
-            <a:r>
-              <a:rPr sz="900" b="0">
-                <a:solidFill>
-                  <a:srgbClr val="6B7082"/>
-                </a:solidFill>
-                <a:latin typeface="Helvetica Neue"/>
-              </a:rPr>
-              <a:t>4,044 views · 7 posts · 578 avg</a:t>
-            </a:r>
-          </a:p>
-        </p:txBody>
-      </p:sp>
-      <p:sp>
-        <p:nvSpPr>
-          <p:cNvPr id="25" name="TextBox 24"/>
-          <p:cNvSpPr txBox="1"/>
-          <p:nvPr/>
-        </p:nvSpPr>
-        <p:spPr>
-          <a:xfrm>
-            <a:off x="4904590" y="4366260"/>
-            <a:ext cx="4572000" cy="251460"/>
-          </a:xfrm>
-          <a:prstGeom prst="rect">
-            <a:avLst/>
-          </a:prstGeom>
-          <a:noFill/>
-        </p:spPr>
-        <p:txBody>
-          <a:bodyPr wrap="square" lIns="0" rIns="0" tIns="0" bIns="0">
-            <a:spAutoFit/>
-          </a:bodyPr>
-          <a:lstStyle/>
-          <a:p>
-            <a:r>
-              <a:rPr sz="800" b="0">
-                <a:solidFill>
-                  <a:srgbClr val="6B7082"/>
-                </a:solidFill>
-                <a:latin typeface="Helvetica Neue"/>
-              </a:rPr>
-              <a:t>Personal profile · Broad (voters, campaign-season readers)</a:t>
             </a:r>
           </a:p>
         </p:txBody>
@@ -5731,7 +5731,7 @@
                 </a:solidFill>
                 <a:latin typeface="Georgia"/>
               </a:rPr>
-              <a:t>Community &amp; Culture</a:t>
+              <a:t>Elections &amp; Judicial</a:t>
             </a:r>
           </a:p>
         </p:txBody>
@@ -5765,7 +5765,7 @@
                 </a:solidFill>
                 <a:latin typeface="Helvetica Neue"/>
               </a:rPr>
-              <a:t>Local color, events, pageantry, personal growth, city life.</a:t>
+              <a:t>Coverage of campaigns, courts, and local government.</a:t>
             </a:r>
           </a:p>
         </p:txBody>
@@ -5795,11 +5795,11 @@
             <a:r>
               <a:rPr sz="900" b="1">
                 <a:solidFill>
-                  <a:srgbClr val="141833"/>
-                </a:solidFill>
-                <a:latin typeface="Helvetica Neue"/>
-              </a:rPr>
-              <a:t>AUDIENCE (theoretical): Local color · Broad, 30+</a:t>
+                  <a:srgbClr val="2F3C7E"/>
+                </a:solidFill>
+                <a:latin typeface="Helvetica Neue"/>
+              </a:rPr>
+              <a:t>AUDIENCE (theoretical): Slow-burn policy · Middle (40-55) + Older (55+) engaged voters</a:t>
             </a:r>
           </a:p>
         </p:txBody>
@@ -5863,7 +5863,7 @@
             <a:avLst/>
           </a:prstGeom>
           <a:solidFill>
-            <a:srgbClr val="141833"/>
+            <a:srgbClr val="2F3C7E"/>
           </a:solidFill>
           <a:ln>
             <a:noFill/>
@@ -5917,7 +5917,7 @@
             <a:r>
               <a:rPr sz="1100" b="1">
                 <a:solidFill>
-                  <a:srgbClr val="141833"/>
+                  <a:srgbClr val="2F3C7E"/>
                 </a:solidFill>
                 <a:latin typeface="Helvetica Neue"/>
               </a:rPr>
@@ -5955,7 +5955,7 @@
                 </a:solidFill>
                 <a:latin typeface="Georgia"/>
               </a:rPr>
-              <a:t>40,213</a:t>
+              <a:t>46,138</a:t>
             </a:r>
           </a:p>
         </p:txBody>
@@ -5989,7 +5989,7 @@
                 </a:solidFill>
                 <a:latin typeface="Helvetica Neue"/>
               </a:rPr>
-              <a:t>52 posts · 824 likes</a:t>
+              <a:t>76 posts · 1,222 likes</a:t>
             </a:r>
           </a:p>
         </p:txBody>
@@ -6023,7 +6023,7 @@
                 </a:solidFill>
                 <a:latin typeface="Helvetica Neue"/>
               </a:rPr>
-              <a:t>773 average views per post</a:t>
+              <a:t>607 average views per post</a:t>
             </a:r>
           </a:p>
         </p:txBody>
@@ -6053,7 +6053,7 @@
             <a:r>
               <a:rPr sz="1100" b="1">
                 <a:solidFill>
-                  <a:srgbClr val="141833"/>
+                  <a:srgbClr val="2F3C7E"/>
                 </a:solidFill>
                 <a:latin typeface="Helvetica Neue"/>
               </a:rPr>
@@ -6121,7 +6121,7 @@
             <a:avLst/>
           </a:prstGeom>
           <a:solidFill>
-            <a:srgbClr val="141833"/>
+            <a:srgbClr val="2F3C7E"/>
           </a:solidFill>
           <a:ln>
             <a:noFill/>
@@ -6175,11 +6175,11 @@
             <a:r>
               <a:rPr sz="1000" b="1">
                 <a:solidFill>
-                  <a:srgbClr val="141833"/>
-                </a:solidFill>
-                <a:latin typeface="Helvetica Neue"/>
-              </a:rPr>
-              <a:t>#1  ·  TT  ·  3,519 views</a:t>
+                  <a:srgbClr val="2F3C7E"/>
+                </a:solidFill>
+                <a:latin typeface="Helvetica Neue"/>
+              </a:rPr>
+              <a:t>#1  ·  FB  ·  5,812 views</a:t>
             </a:r>
           </a:p>
         </p:txBody>
@@ -6213,7 +6213,7 @@
                 </a:solidFill>
                 <a:latin typeface="Helvetica Neue"/>
               </a:rPr>
-              <a:t>Downey is a built-out city, but Sacramento requires us to build 6,100 new homes. Local off</a:t>
+              <a:t>Tensions flared at the city council meeting as a woman repeatedly defied the mayor's reque</a:t>
             </a:r>
           </a:p>
         </p:txBody>
@@ -6277,7 +6277,7 @@
             <a:avLst/>
           </a:prstGeom>
           <a:solidFill>
-            <a:srgbClr val="141833"/>
+            <a:srgbClr val="2F3C7E"/>
           </a:solidFill>
           <a:ln>
             <a:noFill/>
@@ -6331,11 +6331,11 @@
             <a:r>
               <a:rPr sz="1000" b="1">
                 <a:solidFill>
-                  <a:srgbClr val="141833"/>
-                </a:solidFill>
-                <a:latin typeface="Helvetica Neue"/>
-              </a:rPr>
-              <a:t>#2  ·  IG  ·  2,848 views</a:t>
+                  <a:srgbClr val="2F3C7E"/>
+                </a:solidFill>
+                <a:latin typeface="Helvetica Neue"/>
+              </a:rPr>
+              <a:t>#2  ·  IG  ·  3,742 views</a:t>
             </a:r>
           </a:p>
         </p:txBody>
@@ -6369,7 +6369,7 @@
                 </a:solidFill>
                 <a:latin typeface="Helvetica Neue"/>
               </a:rPr>
-              <a:t>Responded to your yapping, Downey! This one's to answer the last two shows. Wouldn't have </a:t>
+              <a:t>A candidate's DSA membership raises questions about their loyalties. Pledging to 'co-gover</a:t>
             </a:r>
           </a:p>
         </p:txBody>
@@ -6433,7 +6433,7 @@
             <a:avLst/>
           </a:prstGeom>
           <a:solidFill>
-            <a:srgbClr val="141833"/>
+            <a:srgbClr val="2F3C7E"/>
           </a:solidFill>
           <a:ln>
             <a:noFill/>
@@ -6487,11 +6487,11 @@
             <a:r>
               <a:rPr sz="1000" b="1">
                 <a:solidFill>
-                  <a:srgbClr val="141833"/>
-                </a:solidFill>
-                <a:latin typeface="Helvetica Neue"/>
-              </a:rPr>
-              <a:t>#3  ·  FB  ·  2,225 views</a:t>
+                  <a:srgbClr val="2F3C7E"/>
+                </a:solidFill>
+                <a:latin typeface="Helvetica Neue"/>
+              </a:rPr>
+              <a:t>#3  ·  IG  ·  3,200 views</a:t>
             </a:r>
           </a:p>
         </p:txBody>
@@ -6525,7 +6525,7 @@
                 </a:solidFill>
                 <a:latin typeface="Helvetica Neue"/>
               </a:rPr>
-              <a:t>A proposed 145-unit residential condominium project on 6.1 acres is raising concerns among</a:t>
+              <a:t>Lifelong Democrat, moderate. Focused on helping Downey, not politics. Endorsed by both par</a:t>
             </a:r>
           </a:p>
         </p:txBody>
@@ -6599,7 +6599,7 @@
             <a:r>
               <a:rPr sz="1000" b="1">
                 <a:solidFill>
-                  <a:srgbClr val="141833"/>
+                  <a:srgbClr val="2F3C7E"/>
                 </a:solidFill>
                 <a:latin typeface="Helvetica Neue"/>
               </a:rPr>
@@ -6767,7 +6767,7 @@
                 </a:solidFill>
                 <a:latin typeface="Georgia"/>
               </a:rPr>
-              <a:t>Elections &amp; Judicial</a:t>
+              <a:t>Community &amp; Culture</a:t>
             </a:r>
           </a:p>
         </p:txBody>
@@ -6801,7 +6801,7 @@
                 </a:solidFill>
                 <a:latin typeface="Helvetica Neue"/>
               </a:rPr>
-              <a:t>Coverage of campaigns, courts, and local government.</a:t>
+              <a:t>Local color, events, pageantry, personal growth, city life.</a:t>
             </a:r>
           </a:p>
         </p:txBody>
@@ -6831,11 +6831,11 @@
             <a:r>
               <a:rPr sz="900" b="1">
                 <a:solidFill>
-                  <a:srgbClr val="2F3C7E"/>
-                </a:solidFill>
-                <a:latin typeface="Helvetica Neue"/>
-              </a:rPr>
-              <a:t>AUDIENCE (theoretical): Slow-burn policy · Middle (40-55) + Older (55+) engaged voters</a:t>
+                  <a:srgbClr val="141833"/>
+                </a:solidFill>
+                <a:latin typeface="Helvetica Neue"/>
+              </a:rPr>
+              <a:t>AUDIENCE (theoretical): Local color · Broad, 30+</a:t>
             </a:r>
           </a:p>
         </p:txBody>
@@ -6899,7 +6899,7 @@
             <a:avLst/>
           </a:prstGeom>
           <a:solidFill>
-            <a:srgbClr val="2F3C7E"/>
+            <a:srgbClr val="141833"/>
           </a:solidFill>
           <a:ln>
             <a:noFill/>
@@ -6953,7 +6953,7 @@
             <a:r>
               <a:rPr sz="1100" b="1">
                 <a:solidFill>
-                  <a:srgbClr val="2F3C7E"/>
+                  <a:srgbClr val="141833"/>
                 </a:solidFill>
                 <a:latin typeface="Helvetica Neue"/>
               </a:rPr>
@@ -6991,7 +6991,7 @@
                 </a:solidFill>
                 <a:latin typeface="Georgia"/>
               </a:rPr>
-              <a:t>35,255</a:t>
+              <a:t>40,214</a:t>
             </a:r>
           </a:p>
         </p:txBody>
@@ -7025,7 +7025,7 @@
                 </a:solidFill>
                 <a:latin typeface="Helvetica Neue"/>
               </a:rPr>
-              <a:t>58 posts · 763 likes</a:t>
+              <a:t>52 posts · 824 likes</a:t>
             </a:r>
           </a:p>
         </p:txBody>
@@ -7059,7 +7059,7 @@
                 </a:solidFill>
                 <a:latin typeface="Helvetica Neue"/>
               </a:rPr>
-              <a:t>608 average views per post</a:t>
+              <a:t>773 average views per post</a:t>
             </a:r>
           </a:p>
         </p:txBody>
@@ -7089,7 +7089,7 @@
             <a:r>
               <a:rPr sz="1100" b="1">
                 <a:solidFill>
-                  <a:srgbClr val="2F3C7E"/>
+                  <a:srgbClr val="141833"/>
                 </a:solidFill>
                 <a:latin typeface="Helvetica Neue"/>
               </a:rPr>
@@ -7157,7 +7157,7 @@
             <a:avLst/>
           </a:prstGeom>
           <a:solidFill>
-            <a:srgbClr val="2F3C7E"/>
+            <a:srgbClr val="141833"/>
           </a:solidFill>
           <a:ln>
             <a:noFill/>
@@ -7211,11 +7211,11 @@
             <a:r>
               <a:rPr sz="1000" b="1">
                 <a:solidFill>
-                  <a:srgbClr val="2F3C7E"/>
-                </a:solidFill>
-                <a:latin typeface="Helvetica Neue"/>
-              </a:rPr>
-              <a:t>#1  ·  FB  ·  5,812 views</a:t>
+                  <a:srgbClr val="141833"/>
+                </a:solidFill>
+                <a:latin typeface="Helvetica Neue"/>
+              </a:rPr>
+              <a:t>#1  ·  TT  ·  3,520 views</a:t>
             </a:r>
           </a:p>
         </p:txBody>
@@ -7249,7 +7249,7 @@
                 </a:solidFill>
                 <a:latin typeface="Helvetica Neue"/>
               </a:rPr>
-              <a:t>Tensions flared at the city council meeting as a woman repeatedly defied the mayor's reque</a:t>
+              <a:t>Downey is a built-out city, but Sacramento requires us to build 6,100 new homes. Local off</a:t>
             </a:r>
           </a:p>
         </p:txBody>
@@ -7313,7 +7313,7 @@
             <a:avLst/>
           </a:prstGeom>
           <a:solidFill>
-            <a:srgbClr val="2F3C7E"/>
+            <a:srgbClr val="141833"/>
           </a:solidFill>
           <a:ln>
             <a:noFill/>
@@ -7367,11 +7367,11 @@
             <a:r>
               <a:rPr sz="1000" b="1">
                 <a:solidFill>
-                  <a:srgbClr val="2F3C7E"/>
-                </a:solidFill>
-                <a:latin typeface="Helvetica Neue"/>
-              </a:rPr>
-              <a:t>#2  ·  IG  ·  3,200 views</a:t>
+                  <a:srgbClr val="141833"/>
+                </a:solidFill>
+                <a:latin typeface="Helvetica Neue"/>
+              </a:rPr>
+              <a:t>#2  ·  IG  ·  2,848 views</a:t>
             </a:r>
           </a:p>
         </p:txBody>
@@ -7405,7 +7405,7 @@
                 </a:solidFill>
                 <a:latin typeface="Helvetica Neue"/>
               </a:rPr>
-              <a:t>Lifelong Democrat, moderate. Focused on helping Downey, not politics. Endorsed by both par</a:t>
+              <a:t>Responded to your yapping, Downey! This one's to answer the last two shows. Wouldn't have </a:t>
             </a:r>
           </a:p>
         </p:txBody>
@@ -7469,7 +7469,7 @@
             <a:avLst/>
           </a:prstGeom>
           <a:solidFill>
-            <a:srgbClr val="2F3C7E"/>
+            <a:srgbClr val="141833"/>
           </a:solidFill>
           <a:ln>
             <a:noFill/>
@@ -7523,11 +7523,11 @@
             <a:r>
               <a:rPr sz="1000" b="1">
                 <a:solidFill>
-                  <a:srgbClr val="2F3C7E"/>
-                </a:solidFill>
-                <a:latin typeface="Helvetica Neue"/>
-              </a:rPr>
-              <a:t>#3  ·  TT  ·  2,075 views</a:t>
+                  <a:srgbClr val="141833"/>
+                </a:solidFill>
+                <a:latin typeface="Helvetica Neue"/>
+              </a:rPr>
+              <a:t>#3  ·  FB  ·  2,225 views</a:t>
             </a:r>
           </a:p>
         </p:txBody>
@@ -7561,7 +7561,7 @@
                 </a:solidFill>
                 <a:latin typeface="Helvetica Neue"/>
               </a:rPr>
-              <a:t>Downey Pizza Company's pastrami pizza is a legendary secret! Used to order it during counc</a:t>
+              <a:t>A proposed 145-unit residential condominium project on 6.1 acres is raising concerns among</a:t>
             </a:r>
           </a:p>
         </p:txBody>
@@ -7635,7 +7635,7 @@
             <a:r>
               <a:rPr sz="1000" b="1">
                 <a:solidFill>
-                  <a:srgbClr val="2F3C7E"/>
+                  <a:srgbClr val="141833"/>
                 </a:solidFill>
                 <a:latin typeface="Helvetica Neue"/>
               </a:rPr>
@@ -8027,7 +8027,7 @@
                 </a:solidFill>
                 <a:latin typeface="Georgia"/>
               </a:rPr>
-              <a:t>7,659</a:t>
+              <a:t>7,736</a:t>
             </a:r>
           </a:p>
         </p:txBody>
@@ -8061,7 +8061,7 @@
                 </a:solidFill>
                 <a:latin typeface="Helvetica Neue"/>
               </a:rPr>
-              <a:t>14 posts · 113 likes</a:t>
+              <a:t>15 posts · 113 likes</a:t>
             </a:r>
           </a:p>
         </p:txBody>
@@ -8095,7 +8095,7 @@
                 </a:solidFill>
                 <a:latin typeface="Helvetica Neue"/>
               </a:rPr>
-              <a:t>547 average views per post</a:t>
+              <a:t>516 average views per post</a:t>
             </a:r>
           </a:p>
         </p:txBody>
@@ -8839,7 +8839,7 @@
                 </a:solidFill>
                 <a:latin typeface="Georgia"/>
               </a:rPr>
-              <a:t>Legislation &amp; Policy Watch</a:t>
+              <a:t>Political Individual Highlights</a:t>
             </a:r>
           </a:p>
         </p:txBody>
@@ -8873,7 +8873,7 @@
                 </a:solidFill>
                 <a:latin typeface="Helvetica Neue"/>
               </a:rPr>
-              <a:t>CA bills, propositions, HOA fights, wealth tax — policy commentary independent of candidates.</a:t>
+              <a:t>Candidate/elected personality profiles — Carrie Uva, Hector Sosa. Not scandal-driven.</a:t>
             </a:r>
           </a:p>
         </p:txBody>
@@ -8903,11 +8903,11 @@
             <a:r>
               <a:rPr sz="900" b="1">
                 <a:solidFill>
-                  <a:srgbClr val="2F3C7E"/>
-                </a:solidFill>
-                <a:latin typeface="Helvetica Neue"/>
-              </a:rPr>
-              <a:t>AUDIENCE (theoretical): Slow-burn policy · Older (55+), civic-engaged</a:t>
+                  <a:srgbClr val="2E86AB"/>
+                </a:solidFill>
+                <a:latin typeface="Helvetica Neue"/>
+              </a:rPr>
+              <a:t>AUDIENCE (theoretical): Personal profile · Broad (voters, campaign-season readers)</a:t>
             </a:r>
           </a:p>
         </p:txBody>
@@ -8971,7 +8971,7 @@
             <a:avLst/>
           </a:prstGeom>
           <a:solidFill>
-            <a:srgbClr val="2F3C7E"/>
+            <a:srgbClr val="2E86AB"/>
           </a:solidFill>
           <a:ln>
             <a:noFill/>
@@ -9025,7 +9025,7 @@
             <a:r>
               <a:rPr sz="1100" b="1">
                 <a:solidFill>
-                  <a:srgbClr val="2F3C7E"/>
+                  <a:srgbClr val="2E86AB"/>
                 </a:solidFill>
                 <a:latin typeface="Helvetica Neue"/>
               </a:rPr>
@@ -9063,7 +9063,7 @@
                 </a:solidFill>
                 <a:latin typeface="Georgia"/>
               </a:rPr>
-              <a:t>6,192</a:t>
+              <a:t>6,289</a:t>
             </a:r>
           </a:p>
         </p:txBody>
@@ -9097,7 +9097,7 @@
                 </a:solidFill>
                 <a:latin typeface="Helvetica Neue"/>
               </a:rPr>
-              <a:t>13 posts · 77 likes</a:t>
+              <a:t>9 posts · 209 likes</a:t>
             </a:r>
           </a:p>
         </p:txBody>
@@ -9131,7 +9131,7 @@
                 </a:solidFill>
                 <a:latin typeface="Helvetica Neue"/>
               </a:rPr>
-              <a:t>476 average views per post</a:t>
+              <a:t>699 average views per post</a:t>
             </a:r>
           </a:p>
         </p:txBody>
@@ -9161,7 +9161,7 @@
             <a:r>
               <a:rPr sz="1100" b="1">
                 <a:solidFill>
-                  <a:srgbClr val="2F3C7E"/>
+                  <a:srgbClr val="2E86AB"/>
                 </a:solidFill>
                 <a:latin typeface="Helvetica Neue"/>
               </a:rPr>
@@ -9229,7 +9229,7 @@
             <a:avLst/>
           </a:prstGeom>
           <a:solidFill>
-            <a:srgbClr val="2F3C7E"/>
+            <a:srgbClr val="2E86AB"/>
           </a:solidFill>
           <a:ln>
             <a:noFill/>
@@ -9283,11 +9283,11 @@
             <a:r>
               <a:rPr sz="1000" b="1">
                 <a:solidFill>
-                  <a:srgbClr val="2F3C7E"/>
-                </a:solidFill>
-                <a:latin typeface="Helvetica Neue"/>
-              </a:rPr>
-              <a:t>#1  ·  FB  ·  726 views</a:t>
+                  <a:srgbClr val="2E86AB"/>
+                </a:solidFill>
+                <a:latin typeface="Helvetica Neue"/>
+              </a:rPr>
+              <a:t>#1  ·  FB  ·  2,245 views</a:t>
             </a:r>
           </a:p>
         </p:txBody>
@@ -9321,7 +9321,7 @@
                 </a:solidFill>
                 <a:latin typeface="Helvetica Neue"/>
               </a:rPr>
-              <a:t>Assembly Bill 1821 raises concerns about public records requests. While cities face costs </a:t>
+              <a:t>The Newsom administration and Rob Bonta's lawsuit against the federal government has been </a:t>
             </a:r>
           </a:p>
         </p:txBody>
@@ -9385,7 +9385,7 @@
             <a:avLst/>
           </a:prstGeom>
           <a:solidFill>
-            <a:srgbClr val="2F3C7E"/>
+            <a:srgbClr val="2E86AB"/>
           </a:solidFill>
           <a:ln>
             <a:noFill/>
@@ -9439,11 +9439,11 @@
             <a:r>
               <a:rPr sz="1000" b="1">
                 <a:solidFill>
-                  <a:srgbClr val="2F3C7E"/>
-                </a:solidFill>
-                <a:latin typeface="Helvetica Neue"/>
-              </a:rPr>
-              <a:t>#2  ·  FB  ·  683 views</a:t>
+                  <a:srgbClr val="2E86AB"/>
+                </a:solidFill>
+                <a:latin typeface="Helvetica Neue"/>
+              </a:rPr>
+              <a:t>#2  ·  FB  ·  965 views</a:t>
             </a:r>
           </a:p>
         </p:txBody>
@@ -9477,7 +9477,7 @@
                 </a:solidFill>
                 <a:latin typeface="Helvetica Neue"/>
               </a:rPr>
-              <a:t>Two significant legislative wins for HOAs and condo buyers. We successfully opposed a bill</a:t>
+              <a:t>Carrie's reputation for helping seniors with wills and trusts is outstanding. Many speak o</a:t>
             </a:r>
           </a:p>
         </p:txBody>
@@ -9541,7 +9541,7 @@
             <a:avLst/>
           </a:prstGeom>
           <a:solidFill>
-            <a:srgbClr val="2F3C7E"/>
+            <a:srgbClr val="2E86AB"/>
           </a:solidFill>
           <a:ln>
             <a:noFill/>
@@ -9595,11 +9595,11 @@
             <a:r>
               <a:rPr sz="1000" b="1">
                 <a:solidFill>
-                  <a:srgbClr val="2F3C7E"/>
-                </a:solidFill>
-                <a:latin typeface="Helvetica Neue"/>
-              </a:rPr>
-              <a:t>#3  ·  IG  ·  665 views</a:t>
+                  <a:srgbClr val="2E86AB"/>
+                </a:solidFill>
+                <a:latin typeface="Helvetica Neue"/>
+              </a:rPr>
+              <a:t>#3  ·  IG  ·  802 views</a:t>
             </a:r>
           </a:p>
         </p:txBody>
@@ -9633,7 +9633,7 @@
                 </a:solidFill>
                 <a:latin typeface="Helvetica Neue"/>
               </a:rPr>
-              <a:t>California's planning commission is in a bind. State laws like SB 9, AB 1893, and SB 79 ar</a:t>
+              <a:t>Carrie, you're known for helping seniors with wills and trusts. It's more than a business;</a:t>
             </a:r>
           </a:p>
         </p:txBody>
@@ -9707,7 +9707,7 @@
             <a:r>
               <a:rPr sz="1000" b="1">
                 <a:solidFill>
-                  <a:srgbClr val="2F3C7E"/>
+                  <a:srgbClr val="2E86AB"/>
                 </a:solidFill>
                 <a:latin typeface="Helvetica Neue"/>
               </a:rPr>
@@ -9875,7 +9875,7 @@
                 </a:solidFill>
                 <a:latin typeface="Georgia"/>
               </a:rPr>
-              <a:t>Political Individual Highlights</a:t>
+              <a:t>Legislation &amp; Policy Watch</a:t>
             </a:r>
           </a:p>
         </p:txBody>
@@ -9909,7 +9909,7 @@
                 </a:solidFill>
                 <a:latin typeface="Helvetica Neue"/>
               </a:rPr>
-              <a:t>Candidate/elected personality profiles — Carrie Uva, Hector Sosa. Not scandal-driven.</a:t>
+              <a:t>CA bills, propositions, HOA fights, wealth tax — policy commentary independent of candidates.</a:t>
             </a:r>
           </a:p>
         </p:txBody>
@@ -9939,11 +9939,11 @@
             <a:r>
               <a:rPr sz="900" b="1">
                 <a:solidFill>
-                  <a:srgbClr val="2E86AB"/>
-                </a:solidFill>
-                <a:latin typeface="Helvetica Neue"/>
-              </a:rPr>
-              <a:t>AUDIENCE (theoretical): Personal profile · Broad (voters, campaign-season readers)</a:t>
+                  <a:srgbClr val="2F3C7E"/>
+                </a:solidFill>
+                <a:latin typeface="Helvetica Neue"/>
+              </a:rPr>
+              <a:t>AUDIENCE (theoretical): Slow-burn policy · Older (55+), civic-engaged</a:t>
             </a:r>
           </a:p>
         </p:txBody>
@@ -10007,7 +10007,7 @@
             <a:avLst/>
           </a:prstGeom>
           <a:solidFill>
-            <a:srgbClr val="2E86AB"/>
+            <a:srgbClr val="2F3C7E"/>
           </a:solidFill>
           <a:ln>
             <a:noFill/>
@@ -10061,7 +10061,7 @@
             <a:r>
               <a:rPr sz="1100" b="1">
                 <a:solidFill>
-                  <a:srgbClr val="2E86AB"/>
+                  <a:srgbClr val="2F3C7E"/>
                 </a:solidFill>
                 <a:latin typeface="Helvetica Neue"/>
               </a:rPr>
@@ -10099,7 +10099,7 @@
                 </a:solidFill>
                 <a:latin typeface="Georgia"/>
               </a:rPr>
-              <a:t>4,044</a:t>
+              <a:t>6,192</a:t>
             </a:r>
           </a:p>
         </p:txBody>
@@ -10133,7 +10133,7 @@
                 </a:solidFill>
                 <a:latin typeface="Helvetica Neue"/>
               </a:rPr>
-              <a:t>7 posts · 58 likes</a:t>
+              <a:t>13 posts · 77 likes</a:t>
             </a:r>
           </a:p>
         </p:txBody>
@@ -10167,7 +10167,7 @@
                 </a:solidFill>
                 <a:latin typeface="Helvetica Neue"/>
               </a:rPr>
-              <a:t>578 average views per post</a:t>
+              <a:t>476 average views per post</a:t>
             </a:r>
           </a:p>
         </p:txBody>
@@ -10197,7 +10197,7 @@
             <a:r>
               <a:rPr sz="1100" b="1">
                 <a:solidFill>
-                  <a:srgbClr val="2E86AB"/>
+                  <a:srgbClr val="2F3C7E"/>
                 </a:solidFill>
                 <a:latin typeface="Helvetica Neue"/>
               </a:rPr>
@@ -10265,7 +10265,7 @@
             <a:avLst/>
           </a:prstGeom>
           <a:solidFill>
-            <a:srgbClr val="2E86AB"/>
+            <a:srgbClr val="2F3C7E"/>
           </a:solidFill>
           <a:ln>
             <a:noFill/>
@@ -10319,11 +10319,11 @@
             <a:r>
               <a:rPr sz="1000" b="1">
                 <a:solidFill>
-                  <a:srgbClr val="2E86AB"/>
-                </a:solidFill>
-                <a:latin typeface="Helvetica Neue"/>
-              </a:rPr>
-              <a:t>#1  ·  FB  ·  965 views</a:t>
+                  <a:srgbClr val="2F3C7E"/>
+                </a:solidFill>
+                <a:latin typeface="Helvetica Neue"/>
+              </a:rPr>
+              <a:t>#1  ·  FB  ·  726 views</a:t>
             </a:r>
           </a:p>
         </p:txBody>
@@ -10357,7 +10357,7 @@
                 </a:solidFill>
                 <a:latin typeface="Helvetica Neue"/>
               </a:rPr>
-              <a:t>Carrie's reputation for helping seniors with wills and trusts is outstanding. Many speak o</a:t>
+              <a:t>Assembly Bill 1821 raises concerns about public records requests. While cities face costs </a:t>
             </a:r>
           </a:p>
         </p:txBody>
@@ -10421,7 +10421,7 @@
             <a:avLst/>
           </a:prstGeom>
           <a:solidFill>
-            <a:srgbClr val="2E86AB"/>
+            <a:srgbClr val="2F3C7E"/>
           </a:solidFill>
           <a:ln>
             <a:noFill/>
@@ -10475,11 +10475,11 @@
             <a:r>
               <a:rPr sz="1000" b="1">
                 <a:solidFill>
-                  <a:srgbClr val="2E86AB"/>
-                </a:solidFill>
-                <a:latin typeface="Helvetica Neue"/>
-              </a:rPr>
-              <a:t>#2  ·  IG  ·  802 views</a:t>
+                  <a:srgbClr val="2F3C7E"/>
+                </a:solidFill>
+                <a:latin typeface="Helvetica Neue"/>
+              </a:rPr>
+              <a:t>#2  ·  FB  ·  683 views</a:t>
             </a:r>
           </a:p>
         </p:txBody>
@@ -10513,7 +10513,7 @@
                 </a:solidFill>
                 <a:latin typeface="Helvetica Neue"/>
               </a:rPr>
-              <a:t>Carrie, you're known for helping seniors with wills and trusts. It's more than a business;</a:t>
+              <a:t>Two significant legislative wins for HOAs and condo buyers. We successfully opposed a bill</a:t>
             </a:r>
           </a:p>
         </p:txBody>
@@ -10577,7 +10577,7 @@
             <a:avLst/>
           </a:prstGeom>
           <a:solidFill>
-            <a:srgbClr val="2E86AB"/>
+            <a:srgbClr val="2F3C7E"/>
           </a:solidFill>
           <a:ln>
             <a:noFill/>
@@ -10631,11 +10631,11 @@
             <a:r>
               <a:rPr sz="1000" b="1">
                 <a:solidFill>
-                  <a:srgbClr val="2E86AB"/>
-                </a:solidFill>
-                <a:latin typeface="Helvetica Neue"/>
-              </a:rPr>
-              <a:t>#3  ·  FB  ·  604 views</a:t>
+                  <a:srgbClr val="2F3C7E"/>
+                </a:solidFill>
+                <a:latin typeface="Helvetica Neue"/>
+              </a:rPr>
+              <a:t>#3  ·  IG  ·  665 views</a:t>
             </a:r>
           </a:p>
         </p:txBody>
@@ -10669,7 +10669,7 @@
                 </a:solidFill>
                 <a:latin typeface="Helvetica Neue"/>
               </a:rPr>
-              <a:t>Carrie Uva shares her commitment to public safety, quality of life, maintaining a balanced</a:t>
+              <a:t>California's planning commission is in a bind. State laws like SB 9, AB 1893, and SB 79 ar</a:t>
             </a:r>
           </a:p>
         </p:txBody>
@@ -10743,7 +10743,7 @@
             <a:r>
               <a:rPr sz="1000" b="1">
                 <a:solidFill>
-                  <a:srgbClr val="2E86AB"/>
+                  <a:srgbClr val="2F3C7E"/>
                 </a:solidFill>
                 <a:latin typeface="Helvetica Neue"/>
               </a:rPr>
@@ -11495,7 +11495,7 @@
                 </a:solidFill>
                 <a:latin typeface="Georgia"/>
               </a:rPr>
-              <a:t>92,714 views</a:t>
+              <a:t>92,787 views</a:t>
             </a:r>
           </a:p>
         </p:txBody>
@@ -11529,7 +11529,7 @@
                 </a:solidFill>
                 <a:latin typeface="Helvetica Neue"/>
               </a:rPr>
-              <a:t>60 posts · 1,545 avg views/post</a:t>
+              <a:t>60 posts · 1,546 avg views/post</a:t>
             </a:r>
           </a:p>
         </p:txBody>
@@ -11855,7 +11855,7 @@
                 </a:solidFill>
                 <a:latin typeface="Georgia"/>
               </a:rPr>
-              <a:t>62,527 views</a:t>
+              <a:t>62,533 views</a:t>
             </a:r>
           </a:p>
         </p:txBody>
@@ -11889,7 +11889,7 @@
                 </a:solidFill>
                 <a:latin typeface="Helvetica Neue"/>
               </a:rPr>
-              <a:t>20 posts · 3,126 avg views/post</a:t>
+              <a:t>20 posts · 3,127 avg views/post</a:t>
             </a:r>
           </a:p>
         </p:txBody>
@@ -14483,7 +14483,7 @@
                 </a:solidFill>
                 <a:latin typeface="Helvetica Neue"/>
               </a:rPr>
-              <a:t>1,288 avg views/post   ·   155 posts   ·   199,693 total</a:t>
+              <a:t>1,268 avg views/post   ·   160 posts   ·   202,924 total</a:t>
             </a:r>
           </a:p>
         </p:txBody>
@@ -16402,7 +16402,7 @@
                 </a:solidFill>
                 <a:latin typeface="Helvetica Neue"/>
               </a:rPr>
-              <a:t>92,714 views · 60 posts</a:t>
+              <a:t>92,787 views · 60 posts</a:t>
             </a:r>
           </a:p>
         </p:txBody>
@@ -16450,7 +16450,7 @@
         <p:spPr>
           <a:xfrm>
             <a:off x="4114800" y="2476968"/>
-            <a:ext cx="5355523" cy="128016"/>
+            <a:ext cx="5351310" cy="128016"/>
           </a:xfrm>
           <a:prstGeom prst="rect">
             <a:avLst/>
@@ -16493,7 +16493,7 @@
         </p:nvSpPr>
         <p:spPr>
           <a:xfrm>
-            <a:off x="9561763" y="2413312"/>
+            <a:off x="9557550" y="2413312"/>
             <a:ext cx="2286000" cy="291904"/>
           </a:xfrm>
           <a:prstGeom prst="rect">
@@ -16548,7 +16548,7 @@
                 </a:solidFill>
                 <a:latin typeface="Helvetica Neue"/>
               </a:rPr>
-              <a:t>Military Service</a:t>
+              <a:t>Other / Uncategorized</a:t>
             </a:r>
           </a:p>
         </p:txBody>
@@ -16562,7 +16562,119 @@
         <p:spPr>
           <a:xfrm>
             <a:off x="4114800" y="2768873"/>
-            <a:ext cx="4193410" cy="128016"/>
+            <a:ext cx="4238025" cy="128016"/>
+          </a:xfrm>
+          <a:prstGeom prst="rect">
+            <a:avLst/>
+          </a:prstGeom>
+          <a:solidFill>
+            <a:srgbClr val="6B7082"/>
+          </a:solidFill>
+          <a:ln>
+            <a:noFill/>
+          </a:ln>
+          <a:effectLst/>
+        </p:spPr>
+        <p:style>
+          <a:lnRef idx="1">
+            <a:schemeClr val="accent1"/>
+          </a:lnRef>
+          <a:fillRef idx="3">
+            <a:schemeClr val="accent1"/>
+          </a:fillRef>
+          <a:effectRef idx="2">
+            <a:schemeClr val="accent1"/>
+          </a:effectRef>
+          <a:fontRef idx="minor">
+            <a:schemeClr val="lt1"/>
+          </a:fontRef>
+        </p:style>
+        <p:txBody>
+          <a:bodyPr rtlCol="0" anchor="ctr"/>
+          <a:lstStyle/>
+          <a:p>
+            <a:pPr algn="ctr"/>
+          </a:p>
+        </p:txBody>
+      </p:sp>
+      <p:sp>
+        <p:nvSpPr>
+          <p:cNvPr id="14" name="TextBox 13"/>
+          <p:cNvSpPr txBox="1"/>
+          <p:nvPr/>
+        </p:nvSpPr>
+        <p:spPr>
+          <a:xfrm>
+            <a:off x="8444265" y="2705217"/>
+            <a:ext cx="2286000" cy="291904"/>
+          </a:xfrm>
+          <a:prstGeom prst="rect">
+            <a:avLst/>
+          </a:prstGeom>
+          <a:noFill/>
+        </p:spPr>
+        <p:txBody>
+          <a:bodyPr wrap="square" lIns="0" rIns="0" tIns="0" bIns="0">
+            <a:spAutoFit/>
+          </a:bodyPr>
+          <a:lstStyle/>
+          <a:p>
+            <a:r>
+              <a:rPr sz="900" b="0">
+                <a:solidFill>
+                  <a:srgbClr val="6B7082"/>
+                </a:solidFill>
+                <a:latin typeface="Helvetica Neue"/>
+              </a:rPr>
+              <a:t>63,242 views · 134 posts</a:t>
+            </a:r>
+          </a:p>
+        </p:txBody>
+      </p:sp>
+      <p:sp>
+        <p:nvSpPr>
+          <p:cNvPr id="15" name="TextBox 14"/>
+          <p:cNvSpPr txBox="1"/>
+          <p:nvPr/>
+        </p:nvSpPr>
+        <p:spPr>
+          <a:xfrm>
+            <a:off x="731520" y="2997121"/>
+            <a:ext cx="3200400" cy="291904"/>
+          </a:xfrm>
+          <a:prstGeom prst="rect">
+            <a:avLst/>
+          </a:prstGeom>
+          <a:noFill/>
+        </p:spPr>
+        <p:txBody>
+          <a:bodyPr wrap="square" lIns="0" rIns="0" tIns="0" bIns="0">
+            <a:spAutoFit/>
+          </a:bodyPr>
+          <a:lstStyle/>
+          <a:p>
+            <a:r>
+              <a:rPr sz="1100" b="1">
+                <a:solidFill>
+                  <a:srgbClr val="141833"/>
+                </a:solidFill>
+                <a:latin typeface="Helvetica Neue"/>
+              </a:rPr>
+              <a:t>Military Service</a:t>
+            </a:r>
+          </a:p>
+        </p:txBody>
+      </p:sp>
+      <p:sp>
+        <p:nvSpPr>
+          <p:cNvPr id="16" name="Rectangle 15"/>
+          <p:cNvSpPr/>
+          <p:nvPr/>
+        </p:nvSpPr>
+        <p:spPr>
+          <a:xfrm>
+            <a:off x="4114800" y="3060778"/>
+            <a:ext cx="4190513" cy="128016"/>
           </a:xfrm>
           <a:prstGeom prst="rect">
             <a:avLst/>
@@ -16599,13 +16711,13 @@
       </p:sp>
       <p:sp>
         <p:nvSpPr>
-          <p:cNvPr id="14" name="TextBox 13"/>
-          <p:cNvSpPr txBox="1"/>
-          <p:nvPr/>
-        </p:nvSpPr>
-        <p:spPr>
-          <a:xfrm>
-            <a:off x="8399650" y="2705217"/>
+          <p:cNvPr id="17" name="TextBox 16"/>
+          <p:cNvSpPr txBox="1"/>
+          <p:nvPr/>
+        </p:nvSpPr>
+        <p:spPr>
+          <a:xfrm>
+            <a:off x="8396753" y="2997121"/>
             <a:ext cx="2286000" cy="291904"/>
           </a:xfrm>
           <a:prstGeom prst="rect">
@@ -16626,20 +16738,20 @@
                 </a:solidFill>
                 <a:latin typeface="Helvetica Neue"/>
               </a:rPr>
-              <a:t>62,527 views · 20 posts</a:t>
-            </a:r>
-          </a:p>
-        </p:txBody>
-      </p:sp>
-      <p:sp>
-        <p:nvSpPr>
-          <p:cNvPr id="15" name="TextBox 14"/>
-          <p:cNvSpPr txBox="1"/>
-          <p:nvPr/>
-        </p:nvSpPr>
-        <p:spPr>
-          <a:xfrm>
-            <a:off x="731520" y="2997121"/>
+              <a:t>62,533 views · 20 posts</a:t>
+            </a:r>
+          </a:p>
+        </p:txBody>
+      </p:sp>
+      <p:sp>
+        <p:nvSpPr>
+          <p:cNvPr id="18" name="TextBox 17"/>
+          <p:cNvSpPr txBox="1"/>
+          <p:nvPr/>
+        </p:nvSpPr>
+        <p:spPr>
+          <a:xfrm>
+            <a:off x="731520" y="3289026"/>
             <a:ext cx="3200400" cy="291904"/>
           </a:xfrm>
           <a:prstGeom prst="rect">
@@ -16667,14 +16779,14 @@
       </p:sp>
       <p:sp>
         <p:nvSpPr>
-          <p:cNvPr id="16" name="Rectangle 15"/>
+          <p:cNvPr id="19" name="Rectangle 18"/>
           <p:cNvSpPr/>
           <p:nvPr/>
         </p:nvSpPr>
         <p:spPr>
           <a:xfrm>
-            <a:off x="4114800" y="3060778"/>
-            <a:ext cx="4104481" cy="128016"/>
+            <a:off x="4114800" y="3352682"/>
+            <a:ext cx="4101252" cy="128016"/>
           </a:xfrm>
           <a:prstGeom prst="rect">
             <a:avLst/>
@@ -16711,13 +16823,13 @@
       </p:sp>
       <p:sp>
         <p:nvSpPr>
-          <p:cNvPr id="17" name="TextBox 16"/>
-          <p:cNvSpPr txBox="1"/>
-          <p:nvPr/>
-        </p:nvSpPr>
-        <p:spPr>
-          <a:xfrm>
-            <a:off x="8310721" y="2997121"/>
+          <p:cNvPr id="20" name="TextBox 19"/>
+          <p:cNvSpPr txBox="1"/>
+          <p:nvPr/>
+        </p:nvSpPr>
+        <p:spPr>
+          <a:xfrm>
+            <a:off x="8307492" y="3289026"/>
             <a:ext cx="2286000" cy="291904"/>
           </a:xfrm>
           <a:prstGeom prst="rect">
@@ -16739,118 +16851,6 @@
                 <a:latin typeface="Helvetica Neue"/>
               </a:rPr>
               <a:t>61,201 views · 21 posts</a:t>
-            </a:r>
-          </a:p>
-        </p:txBody>
-      </p:sp>
-      <p:sp>
-        <p:nvSpPr>
-          <p:cNvPr id="18" name="TextBox 17"/>
-          <p:cNvSpPr txBox="1"/>
-          <p:nvPr/>
-        </p:nvSpPr>
-        <p:spPr>
-          <a:xfrm>
-            <a:off x="731520" y="3289026"/>
-            <a:ext cx="3200400" cy="291904"/>
-          </a:xfrm>
-          <a:prstGeom prst="rect">
-            <a:avLst/>
-          </a:prstGeom>
-          <a:noFill/>
-        </p:spPr>
-        <p:txBody>
-          <a:bodyPr wrap="square" lIns="0" rIns="0" tIns="0" bIns="0">
-            <a:spAutoFit/>
-          </a:bodyPr>
-          <a:lstStyle/>
-          <a:p>
-            <a:r>
-              <a:rPr sz="1100" b="1">
-                <a:solidFill>
-                  <a:srgbClr val="141833"/>
-                </a:solidFill>
-                <a:latin typeface="Helvetica Neue"/>
-              </a:rPr>
-              <a:t>Other / Uncategorized</a:t>
-            </a:r>
-          </a:p>
-        </p:txBody>
-      </p:sp>
-      <p:sp>
-        <p:nvSpPr>
-          <p:cNvPr id="19" name="Rectangle 18"/>
-          <p:cNvSpPr/>
-          <p:nvPr/>
-        </p:nvSpPr>
-        <p:spPr>
-          <a:xfrm>
-            <a:off x="4114800" y="3352682"/>
-            <a:ext cx="3411761" cy="128016"/>
-          </a:xfrm>
-          <a:prstGeom prst="rect">
-            <a:avLst/>
-          </a:prstGeom>
-          <a:solidFill>
-            <a:srgbClr val="6B7082"/>
-          </a:solidFill>
-          <a:ln>
-            <a:noFill/>
-          </a:ln>
-          <a:effectLst/>
-        </p:spPr>
-        <p:style>
-          <a:lnRef idx="1">
-            <a:schemeClr val="accent1"/>
-          </a:lnRef>
-          <a:fillRef idx="3">
-            <a:schemeClr val="accent1"/>
-          </a:fillRef>
-          <a:effectRef idx="2">
-            <a:schemeClr val="accent1"/>
-          </a:effectRef>
-          <a:fontRef idx="minor">
-            <a:schemeClr val="lt1"/>
-          </a:fontRef>
-        </p:style>
-        <p:txBody>
-          <a:bodyPr rtlCol="0" anchor="ctr"/>
-          <a:lstStyle/>
-          <a:p>
-            <a:pPr algn="ctr"/>
-          </a:p>
-        </p:txBody>
-      </p:sp>
-      <p:sp>
-        <p:nvSpPr>
-          <p:cNvPr id="20" name="TextBox 19"/>
-          <p:cNvSpPr txBox="1"/>
-          <p:nvPr/>
-        </p:nvSpPr>
-        <p:spPr>
-          <a:xfrm>
-            <a:off x="7618001" y="3289026"/>
-            <a:ext cx="2286000" cy="291904"/>
-          </a:xfrm>
-          <a:prstGeom prst="rect">
-            <a:avLst/>
-          </a:prstGeom>
-          <a:noFill/>
-        </p:spPr>
-        <p:txBody>
-          <a:bodyPr wrap="square" lIns="0" rIns="0" tIns="0" bIns="0">
-            <a:spAutoFit/>
-          </a:bodyPr>
-          <a:lstStyle/>
-          <a:p>
-            <a:r>
-              <a:rPr sz="900" b="0">
-                <a:solidFill>
-                  <a:srgbClr val="6B7082"/>
-                </a:solidFill>
-                <a:latin typeface="Helvetica Neue"/>
-              </a:rPr>
-              <a:t>50,872 views · 105 posts</a:t>
             </a:r>
           </a:p>
         </p:txBody>
@@ -16898,7 +16898,7 @@
         <p:spPr>
           <a:xfrm>
             <a:off x="4114800" y="3644587"/>
-            <a:ext cx="3197486" cy="128016"/>
+            <a:ext cx="3194970" cy="128016"/>
           </a:xfrm>
           <a:prstGeom prst="rect">
             <a:avLst/>
@@ -16941,7 +16941,7 @@
         </p:nvSpPr>
         <p:spPr>
           <a:xfrm>
-            <a:off x="7403726" y="3580931"/>
+            <a:off x="7401210" y="3580931"/>
             <a:ext cx="2286000" cy="291904"/>
           </a:xfrm>
           <a:prstGeom prst="rect">
@@ -16996,7 +16996,7 @@
                 </a:solidFill>
                 <a:latin typeface="Helvetica Neue"/>
               </a:rPr>
-              <a:t>Community &amp; Culture</a:t>
+              <a:t>Elections &amp; Judicial</a:t>
             </a:r>
           </a:p>
         </p:txBody>
@@ -17010,7 +17010,119 @@
         <p:spPr>
           <a:xfrm>
             <a:off x="4114800" y="3936491"/>
-            <a:ext cx="2696908" cy="128016"/>
+            <a:ext cx="3091838" cy="128016"/>
+          </a:xfrm>
+          <a:prstGeom prst="rect">
+            <a:avLst/>
+          </a:prstGeom>
+          <a:solidFill>
+            <a:srgbClr val="2F3C7E"/>
+          </a:solidFill>
+          <a:ln>
+            <a:noFill/>
+          </a:ln>
+          <a:effectLst/>
+        </p:spPr>
+        <p:style>
+          <a:lnRef idx="1">
+            <a:schemeClr val="accent1"/>
+          </a:lnRef>
+          <a:fillRef idx="3">
+            <a:schemeClr val="accent1"/>
+          </a:fillRef>
+          <a:effectRef idx="2">
+            <a:schemeClr val="accent1"/>
+          </a:effectRef>
+          <a:fontRef idx="minor">
+            <a:schemeClr val="lt1"/>
+          </a:fontRef>
+        </p:style>
+        <p:txBody>
+          <a:bodyPr rtlCol="0" anchor="ctr"/>
+          <a:lstStyle/>
+          <a:p>
+            <a:pPr algn="ctr"/>
+          </a:p>
+        </p:txBody>
+      </p:sp>
+      <p:sp>
+        <p:nvSpPr>
+          <p:cNvPr id="26" name="TextBox 25"/>
+          <p:cNvSpPr txBox="1"/>
+          <p:nvPr/>
+        </p:nvSpPr>
+        <p:spPr>
+          <a:xfrm>
+            <a:off x="7298078" y="3872835"/>
+            <a:ext cx="2286000" cy="291904"/>
+          </a:xfrm>
+          <a:prstGeom prst="rect">
+            <a:avLst/>
+          </a:prstGeom>
+          <a:noFill/>
+        </p:spPr>
+        <p:txBody>
+          <a:bodyPr wrap="square" lIns="0" rIns="0" tIns="0" bIns="0">
+            <a:spAutoFit/>
+          </a:bodyPr>
+          <a:lstStyle/>
+          <a:p>
+            <a:r>
+              <a:rPr sz="900" b="0">
+                <a:solidFill>
+                  <a:srgbClr val="6B7082"/>
+                </a:solidFill>
+                <a:latin typeface="Helvetica Neue"/>
+              </a:rPr>
+              <a:t>46,138 views · 76 posts</a:t>
+            </a:r>
+          </a:p>
+        </p:txBody>
+      </p:sp>
+      <p:sp>
+        <p:nvSpPr>
+          <p:cNvPr id="27" name="TextBox 26"/>
+          <p:cNvSpPr txBox="1"/>
+          <p:nvPr/>
+        </p:nvSpPr>
+        <p:spPr>
+          <a:xfrm>
+            <a:off x="731520" y="4164740"/>
+            <a:ext cx="3200400" cy="291904"/>
+          </a:xfrm>
+          <a:prstGeom prst="rect">
+            <a:avLst/>
+          </a:prstGeom>
+          <a:noFill/>
+        </p:spPr>
+        <p:txBody>
+          <a:bodyPr wrap="square" lIns="0" rIns="0" tIns="0" bIns="0">
+            <a:spAutoFit/>
+          </a:bodyPr>
+          <a:lstStyle/>
+          <a:p>
+            <a:r>
+              <a:rPr sz="1100" b="1">
+                <a:solidFill>
+                  <a:srgbClr val="141833"/>
+                </a:solidFill>
+                <a:latin typeface="Helvetica Neue"/>
+              </a:rPr>
+              <a:t>Community &amp; Culture</a:t>
+            </a:r>
+          </a:p>
+        </p:txBody>
+      </p:sp>
+      <p:sp>
+        <p:nvSpPr>
+          <p:cNvPr id="28" name="Rectangle 27"/>
+          <p:cNvSpPr/>
+          <p:nvPr/>
+        </p:nvSpPr>
+        <p:spPr>
+          <a:xfrm>
+            <a:off x="4114800" y="4228396"/>
+            <a:ext cx="2694854" cy="128016"/>
           </a:xfrm>
           <a:prstGeom prst="rect">
             <a:avLst/>
@@ -17047,13 +17159,13 @@
       </p:sp>
       <p:sp>
         <p:nvSpPr>
-          <p:cNvPr id="26" name="TextBox 25"/>
-          <p:cNvSpPr txBox="1"/>
-          <p:nvPr/>
-        </p:nvSpPr>
-        <p:spPr>
-          <a:xfrm>
-            <a:off x="6903148" y="3872835"/>
+          <p:cNvPr id="29" name="TextBox 28"/>
+          <p:cNvSpPr txBox="1"/>
+          <p:nvPr/>
+        </p:nvSpPr>
+        <p:spPr>
+          <a:xfrm>
+            <a:off x="6901094" y="4164740"/>
             <a:ext cx="2286000" cy="291904"/>
           </a:xfrm>
           <a:prstGeom prst="rect">
@@ -17074,20 +17186,20 @@
                 </a:solidFill>
                 <a:latin typeface="Helvetica Neue"/>
               </a:rPr>
-              <a:t>40,213 views · 52 posts</a:t>
-            </a:r>
-          </a:p>
-        </p:txBody>
-      </p:sp>
-      <p:sp>
-        <p:nvSpPr>
-          <p:cNvPr id="27" name="TextBox 26"/>
-          <p:cNvSpPr txBox="1"/>
-          <p:nvPr/>
-        </p:nvSpPr>
-        <p:spPr>
-          <a:xfrm>
-            <a:off x="731520" y="4164740"/>
+              <a:t>40,214 views · 52 posts</a:t>
+            </a:r>
+          </a:p>
+        </p:txBody>
+      </p:sp>
+      <p:sp>
+        <p:nvSpPr>
+          <p:cNvPr id="30" name="TextBox 29"/>
+          <p:cNvSpPr txBox="1"/>
+          <p:nvPr/>
+        </p:nvSpPr>
+        <p:spPr>
+          <a:xfrm>
+            <a:off x="731520" y="4456644"/>
             <a:ext cx="3200400" cy="291904"/>
           </a:xfrm>
           <a:prstGeom prst="rect">
@@ -17108,21 +17220,357 @@
                 </a:solidFill>
                 <a:latin typeface="Helvetica Neue"/>
               </a:rPr>
-              <a:t>Elections &amp; Judicial</a:t>
-            </a:r>
-          </a:p>
-        </p:txBody>
-      </p:sp>
-      <p:sp>
-        <p:nvSpPr>
-          <p:cNvPr id="28" name="Rectangle 27"/>
+              <a:t>Resident Highlights</a:t>
+            </a:r>
+          </a:p>
+        </p:txBody>
+      </p:sp>
+      <p:sp>
+        <p:nvSpPr>
+          <p:cNvPr id="31" name="Rectangle 30"/>
           <p:cNvSpPr/>
           <p:nvPr/>
         </p:nvSpPr>
         <p:spPr>
           <a:xfrm>
-            <a:off x="4114800" y="4228396"/>
-            <a:ext cx="2364397" cy="128016"/>
+            <a:off x="4114800" y="4520301"/>
+            <a:ext cx="550912" cy="128016"/>
+          </a:xfrm>
+          <a:prstGeom prst="rect">
+            <a:avLst/>
+          </a:prstGeom>
+          <a:solidFill>
+            <a:srgbClr val="1B7A43"/>
+          </a:solidFill>
+          <a:ln>
+            <a:noFill/>
+          </a:ln>
+          <a:effectLst/>
+        </p:spPr>
+        <p:style>
+          <a:lnRef idx="1">
+            <a:schemeClr val="accent1"/>
+          </a:lnRef>
+          <a:fillRef idx="3">
+            <a:schemeClr val="accent1"/>
+          </a:fillRef>
+          <a:effectRef idx="2">
+            <a:schemeClr val="accent1"/>
+          </a:effectRef>
+          <a:fontRef idx="minor">
+            <a:schemeClr val="lt1"/>
+          </a:fontRef>
+        </p:style>
+        <p:txBody>
+          <a:bodyPr rtlCol="0" anchor="ctr"/>
+          <a:lstStyle/>
+          <a:p>
+            <a:pPr algn="ctr"/>
+          </a:p>
+        </p:txBody>
+      </p:sp>
+      <p:sp>
+        <p:nvSpPr>
+          <p:cNvPr id="32" name="TextBox 31"/>
+          <p:cNvSpPr txBox="1"/>
+          <p:nvPr/>
+        </p:nvSpPr>
+        <p:spPr>
+          <a:xfrm>
+            <a:off x="4757152" y="4456644"/>
+            <a:ext cx="2286000" cy="291904"/>
+          </a:xfrm>
+          <a:prstGeom prst="rect">
+            <a:avLst/>
+          </a:prstGeom>
+          <a:noFill/>
+        </p:spPr>
+        <p:txBody>
+          <a:bodyPr wrap="square" lIns="0" rIns="0" tIns="0" bIns="0">
+            <a:spAutoFit/>
+          </a:bodyPr>
+          <a:lstStyle/>
+          <a:p>
+            <a:r>
+              <a:rPr sz="900" b="0">
+                <a:solidFill>
+                  <a:srgbClr val="6B7082"/>
+                </a:solidFill>
+                <a:latin typeface="Helvetica Neue"/>
+              </a:rPr>
+              <a:t>8,221 views · 8 posts</a:t>
+            </a:r>
+          </a:p>
+        </p:txBody>
+      </p:sp>
+      <p:sp>
+        <p:nvSpPr>
+          <p:cNvPr id="33" name="TextBox 32"/>
+          <p:cNvSpPr txBox="1"/>
+          <p:nvPr/>
+        </p:nvSpPr>
+        <p:spPr>
+          <a:xfrm>
+            <a:off x="731520" y="4748549"/>
+            <a:ext cx="3200400" cy="291904"/>
+          </a:xfrm>
+          <a:prstGeom prst="rect">
+            <a:avLst/>
+          </a:prstGeom>
+          <a:noFill/>
+        </p:spPr>
+        <p:txBody>
+          <a:bodyPr wrap="square" lIns="0" rIns="0" tIns="0" bIns="0">
+            <a:spAutoFit/>
+          </a:bodyPr>
+          <a:lstStyle/>
+          <a:p>
+            <a:r>
+              <a:rPr sz="1100" b="1">
+                <a:solidFill>
+                  <a:srgbClr val="141833"/>
+                </a:solidFill>
+                <a:latin typeface="Helvetica Neue"/>
+              </a:rPr>
+              <a:t>American Pride</a:t>
+            </a:r>
+          </a:p>
+        </p:txBody>
+      </p:sp>
+      <p:sp>
+        <p:nvSpPr>
+          <p:cNvPr id="34" name="Rectangle 33"/>
+          <p:cNvSpPr/>
+          <p:nvPr/>
+        </p:nvSpPr>
+        <p:spPr>
+          <a:xfrm>
+            <a:off x="4114800" y="4812205"/>
+            <a:ext cx="518411" cy="128016"/>
+          </a:xfrm>
+          <a:prstGeom prst="rect">
+            <a:avLst/>
+          </a:prstGeom>
+          <a:solidFill>
+            <a:srgbClr val="990011"/>
+          </a:solidFill>
+          <a:ln>
+            <a:noFill/>
+          </a:ln>
+          <a:effectLst/>
+        </p:spPr>
+        <p:style>
+          <a:lnRef idx="1">
+            <a:schemeClr val="accent1"/>
+          </a:lnRef>
+          <a:fillRef idx="3">
+            <a:schemeClr val="accent1"/>
+          </a:fillRef>
+          <a:effectRef idx="2">
+            <a:schemeClr val="accent1"/>
+          </a:effectRef>
+          <a:fontRef idx="minor">
+            <a:schemeClr val="lt1"/>
+          </a:fontRef>
+        </p:style>
+        <p:txBody>
+          <a:bodyPr rtlCol="0" anchor="ctr"/>
+          <a:lstStyle/>
+          <a:p>
+            <a:pPr algn="ctr"/>
+          </a:p>
+        </p:txBody>
+      </p:sp>
+      <p:sp>
+        <p:nvSpPr>
+          <p:cNvPr id="35" name="TextBox 34"/>
+          <p:cNvSpPr txBox="1"/>
+          <p:nvPr/>
+        </p:nvSpPr>
+        <p:spPr>
+          <a:xfrm>
+            <a:off x="4724651" y="4748549"/>
+            <a:ext cx="2286000" cy="291904"/>
+          </a:xfrm>
+          <a:prstGeom prst="rect">
+            <a:avLst/>
+          </a:prstGeom>
+          <a:noFill/>
+        </p:spPr>
+        <p:txBody>
+          <a:bodyPr wrap="square" lIns="0" rIns="0" tIns="0" bIns="0">
+            <a:spAutoFit/>
+          </a:bodyPr>
+          <a:lstStyle/>
+          <a:p>
+            <a:r>
+              <a:rPr sz="900" b="0">
+                <a:solidFill>
+                  <a:srgbClr val="6B7082"/>
+                </a:solidFill>
+                <a:latin typeface="Helvetica Neue"/>
+              </a:rPr>
+              <a:t>7,736 views · 15 posts</a:t>
+            </a:r>
+          </a:p>
+        </p:txBody>
+      </p:sp>
+      <p:sp>
+        <p:nvSpPr>
+          <p:cNvPr id="36" name="TextBox 35"/>
+          <p:cNvSpPr txBox="1"/>
+          <p:nvPr/>
+        </p:nvSpPr>
+        <p:spPr>
+          <a:xfrm>
+            <a:off x="731520" y="5040454"/>
+            <a:ext cx="3200400" cy="291904"/>
+          </a:xfrm>
+          <a:prstGeom prst="rect">
+            <a:avLst/>
+          </a:prstGeom>
+          <a:noFill/>
+        </p:spPr>
+        <p:txBody>
+          <a:bodyPr wrap="square" lIns="0" rIns="0" tIns="0" bIns="0">
+            <a:spAutoFit/>
+          </a:bodyPr>
+          <a:lstStyle/>
+          <a:p>
+            <a:r>
+              <a:rPr sz="1100" b="1">
+                <a:solidFill>
+                  <a:srgbClr val="141833"/>
+                </a:solidFill>
+                <a:latin typeface="Helvetica Neue"/>
+              </a:rPr>
+              <a:t>Political Individual Highlights</a:t>
+            </a:r>
+          </a:p>
+        </p:txBody>
+      </p:sp>
+      <p:sp>
+        <p:nvSpPr>
+          <p:cNvPr id="37" name="Rectangle 36"/>
+          <p:cNvSpPr/>
+          <p:nvPr/>
+        </p:nvSpPr>
+        <p:spPr>
+          <a:xfrm>
+            <a:off x="4114800" y="5104110"/>
+            <a:ext cx="421443" cy="128016"/>
+          </a:xfrm>
+          <a:prstGeom prst="rect">
+            <a:avLst/>
+          </a:prstGeom>
+          <a:solidFill>
+            <a:srgbClr val="2E86AB"/>
+          </a:solidFill>
+          <a:ln>
+            <a:noFill/>
+          </a:ln>
+          <a:effectLst/>
+        </p:spPr>
+        <p:style>
+          <a:lnRef idx="1">
+            <a:schemeClr val="accent1"/>
+          </a:lnRef>
+          <a:fillRef idx="3">
+            <a:schemeClr val="accent1"/>
+          </a:fillRef>
+          <a:effectRef idx="2">
+            <a:schemeClr val="accent1"/>
+          </a:effectRef>
+          <a:fontRef idx="minor">
+            <a:schemeClr val="lt1"/>
+          </a:fontRef>
+        </p:style>
+        <p:txBody>
+          <a:bodyPr rtlCol="0" anchor="ctr"/>
+          <a:lstStyle/>
+          <a:p>
+            <a:pPr algn="ctr"/>
+          </a:p>
+        </p:txBody>
+      </p:sp>
+      <p:sp>
+        <p:nvSpPr>
+          <p:cNvPr id="38" name="TextBox 37"/>
+          <p:cNvSpPr txBox="1"/>
+          <p:nvPr/>
+        </p:nvSpPr>
+        <p:spPr>
+          <a:xfrm>
+            <a:off x="4627683" y="5040454"/>
+            <a:ext cx="2286000" cy="291904"/>
+          </a:xfrm>
+          <a:prstGeom prst="rect">
+            <a:avLst/>
+          </a:prstGeom>
+          <a:noFill/>
+        </p:spPr>
+        <p:txBody>
+          <a:bodyPr wrap="square" lIns="0" rIns="0" tIns="0" bIns="0">
+            <a:spAutoFit/>
+          </a:bodyPr>
+          <a:lstStyle/>
+          <a:p>
+            <a:r>
+              <a:rPr sz="900" b="0">
+                <a:solidFill>
+                  <a:srgbClr val="6B7082"/>
+                </a:solidFill>
+                <a:latin typeface="Helvetica Neue"/>
+              </a:rPr>
+              <a:t>6,289 views · 9 posts</a:t>
+            </a:r>
+          </a:p>
+        </p:txBody>
+      </p:sp>
+      <p:sp>
+        <p:nvSpPr>
+          <p:cNvPr id="39" name="TextBox 38"/>
+          <p:cNvSpPr txBox="1"/>
+          <p:nvPr/>
+        </p:nvSpPr>
+        <p:spPr>
+          <a:xfrm>
+            <a:off x="731520" y="5332358"/>
+            <a:ext cx="3200400" cy="291904"/>
+          </a:xfrm>
+          <a:prstGeom prst="rect">
+            <a:avLst/>
+          </a:prstGeom>
+          <a:noFill/>
+        </p:spPr>
+        <p:txBody>
+          <a:bodyPr wrap="square" lIns="0" rIns="0" tIns="0" bIns="0">
+            <a:spAutoFit/>
+          </a:bodyPr>
+          <a:lstStyle/>
+          <a:p>
+            <a:r>
+              <a:rPr sz="1100" b="1">
+                <a:solidFill>
+                  <a:srgbClr val="141833"/>
+                </a:solidFill>
+                <a:latin typeface="Helvetica Neue"/>
+              </a:rPr>
+              <a:t>Legislation &amp; Policy Watch</a:t>
+            </a:r>
+          </a:p>
+        </p:txBody>
+      </p:sp>
+      <p:sp>
+        <p:nvSpPr>
+          <p:cNvPr id="40" name="Rectangle 39"/>
+          <p:cNvSpPr/>
+          <p:nvPr/>
+        </p:nvSpPr>
+        <p:spPr>
+          <a:xfrm>
+            <a:off x="4114800" y="5396015"/>
+            <a:ext cx="414943" cy="128016"/>
           </a:xfrm>
           <a:prstGeom prst="rect">
             <a:avLst/>
@@ -17159,13 +17607,13 @@
       </p:sp>
       <p:sp>
         <p:nvSpPr>
-          <p:cNvPr id="29" name="TextBox 28"/>
-          <p:cNvSpPr txBox="1"/>
-          <p:nvPr/>
-        </p:nvSpPr>
-        <p:spPr>
-          <a:xfrm>
-            <a:off x="6570637" y="4164740"/>
+          <p:cNvPr id="41" name="TextBox 40"/>
+          <p:cNvSpPr txBox="1"/>
+          <p:nvPr/>
+        </p:nvSpPr>
+        <p:spPr>
+          <a:xfrm>
+            <a:off x="4621183" y="5332358"/>
             <a:ext cx="2286000" cy="291904"/>
           </a:xfrm>
           <a:prstGeom prst="rect">
@@ -17186,455 +17634,7 @@
                 </a:solidFill>
                 <a:latin typeface="Helvetica Neue"/>
               </a:rPr>
-              <a:t>35,255 views · 58 posts</a:t>
-            </a:r>
-          </a:p>
-        </p:txBody>
-      </p:sp>
-      <p:sp>
-        <p:nvSpPr>
-          <p:cNvPr id="30" name="TextBox 29"/>
-          <p:cNvSpPr txBox="1"/>
-          <p:nvPr/>
-        </p:nvSpPr>
-        <p:spPr>
-          <a:xfrm>
-            <a:off x="731520" y="4456644"/>
-            <a:ext cx="3200400" cy="291904"/>
-          </a:xfrm>
-          <a:prstGeom prst="rect">
-            <a:avLst/>
-          </a:prstGeom>
-          <a:noFill/>
-        </p:spPr>
-        <p:txBody>
-          <a:bodyPr wrap="square" lIns="0" rIns="0" tIns="0" bIns="0">
-            <a:spAutoFit/>
-          </a:bodyPr>
-          <a:lstStyle/>
-          <a:p>
-            <a:r>
-              <a:rPr sz="1100" b="1">
-                <a:solidFill>
-                  <a:srgbClr val="141833"/>
-                </a:solidFill>
-                <a:latin typeface="Helvetica Neue"/>
-              </a:rPr>
-              <a:t>American Pride</a:t>
-            </a:r>
-          </a:p>
-        </p:txBody>
-      </p:sp>
-      <p:sp>
-        <p:nvSpPr>
-          <p:cNvPr id="31" name="Rectangle 30"/>
-          <p:cNvSpPr/>
-          <p:nvPr/>
-        </p:nvSpPr>
-        <p:spPr>
-          <a:xfrm>
-            <a:off x="4114800" y="4520301"/>
-            <a:ext cx="513655" cy="128016"/>
-          </a:xfrm>
-          <a:prstGeom prst="rect">
-            <a:avLst/>
-          </a:prstGeom>
-          <a:solidFill>
-            <a:srgbClr val="990011"/>
-          </a:solidFill>
-          <a:ln>
-            <a:noFill/>
-          </a:ln>
-          <a:effectLst/>
-        </p:spPr>
-        <p:style>
-          <a:lnRef idx="1">
-            <a:schemeClr val="accent1"/>
-          </a:lnRef>
-          <a:fillRef idx="3">
-            <a:schemeClr val="accent1"/>
-          </a:fillRef>
-          <a:effectRef idx="2">
-            <a:schemeClr val="accent1"/>
-          </a:effectRef>
-          <a:fontRef idx="minor">
-            <a:schemeClr val="lt1"/>
-          </a:fontRef>
-        </p:style>
-        <p:txBody>
-          <a:bodyPr rtlCol="0" anchor="ctr"/>
-          <a:lstStyle/>
-          <a:p>
-            <a:pPr algn="ctr"/>
-          </a:p>
-        </p:txBody>
-      </p:sp>
-      <p:sp>
-        <p:nvSpPr>
-          <p:cNvPr id="32" name="TextBox 31"/>
-          <p:cNvSpPr txBox="1"/>
-          <p:nvPr/>
-        </p:nvSpPr>
-        <p:spPr>
-          <a:xfrm>
-            <a:off x="4719895" y="4456644"/>
-            <a:ext cx="2286000" cy="291904"/>
-          </a:xfrm>
-          <a:prstGeom prst="rect">
-            <a:avLst/>
-          </a:prstGeom>
-          <a:noFill/>
-        </p:spPr>
-        <p:txBody>
-          <a:bodyPr wrap="square" lIns="0" rIns="0" tIns="0" bIns="0">
-            <a:spAutoFit/>
-          </a:bodyPr>
-          <a:lstStyle/>
-          <a:p>
-            <a:r>
-              <a:rPr sz="900" b="0">
-                <a:solidFill>
-                  <a:srgbClr val="6B7082"/>
-                </a:solidFill>
-                <a:latin typeface="Helvetica Neue"/>
-              </a:rPr>
-              <a:t>7,659 views · 14 posts</a:t>
-            </a:r>
-          </a:p>
-        </p:txBody>
-      </p:sp>
-      <p:sp>
-        <p:nvSpPr>
-          <p:cNvPr id="33" name="TextBox 32"/>
-          <p:cNvSpPr txBox="1"/>
-          <p:nvPr/>
-        </p:nvSpPr>
-        <p:spPr>
-          <a:xfrm>
-            <a:off x="731520" y="4748549"/>
-            <a:ext cx="3200400" cy="291904"/>
-          </a:xfrm>
-          <a:prstGeom prst="rect">
-            <a:avLst/>
-          </a:prstGeom>
-          <a:noFill/>
-        </p:spPr>
-        <p:txBody>
-          <a:bodyPr wrap="square" lIns="0" rIns="0" tIns="0" bIns="0">
-            <a:spAutoFit/>
-          </a:bodyPr>
-          <a:lstStyle/>
-          <a:p>
-            <a:r>
-              <a:rPr sz="1100" b="1">
-                <a:solidFill>
-                  <a:srgbClr val="141833"/>
-                </a:solidFill>
-                <a:latin typeface="Helvetica Neue"/>
-              </a:rPr>
-              <a:t>Resident Highlights</a:t>
-            </a:r>
-          </a:p>
-        </p:txBody>
-      </p:sp>
-      <p:sp>
-        <p:nvSpPr>
-          <p:cNvPr id="34" name="Rectangle 33"/>
-          <p:cNvSpPr/>
-          <p:nvPr/>
-        </p:nvSpPr>
-        <p:spPr>
-          <a:xfrm>
-            <a:off x="4114800" y="4812205"/>
-            <a:ext cx="495346" cy="128016"/>
-          </a:xfrm>
-          <a:prstGeom prst="rect">
-            <a:avLst/>
-          </a:prstGeom>
-          <a:solidFill>
-            <a:srgbClr val="1B7A43"/>
-          </a:solidFill>
-          <a:ln>
-            <a:noFill/>
-          </a:ln>
-          <a:effectLst/>
-        </p:spPr>
-        <p:style>
-          <a:lnRef idx="1">
-            <a:schemeClr val="accent1"/>
-          </a:lnRef>
-          <a:fillRef idx="3">
-            <a:schemeClr val="accent1"/>
-          </a:fillRef>
-          <a:effectRef idx="2">
-            <a:schemeClr val="accent1"/>
-          </a:effectRef>
-          <a:fontRef idx="minor">
-            <a:schemeClr val="lt1"/>
-          </a:fontRef>
-        </p:style>
-        <p:txBody>
-          <a:bodyPr rtlCol="0" anchor="ctr"/>
-          <a:lstStyle/>
-          <a:p>
-            <a:pPr algn="ctr"/>
-          </a:p>
-        </p:txBody>
-      </p:sp>
-      <p:sp>
-        <p:nvSpPr>
-          <p:cNvPr id="35" name="TextBox 34"/>
-          <p:cNvSpPr txBox="1"/>
-          <p:nvPr/>
-        </p:nvSpPr>
-        <p:spPr>
-          <a:xfrm>
-            <a:off x="4701586" y="4748549"/>
-            <a:ext cx="2286000" cy="291904"/>
-          </a:xfrm>
-          <a:prstGeom prst="rect">
-            <a:avLst/>
-          </a:prstGeom>
-          <a:noFill/>
-        </p:spPr>
-        <p:txBody>
-          <a:bodyPr wrap="square" lIns="0" rIns="0" tIns="0" bIns="0">
-            <a:spAutoFit/>
-          </a:bodyPr>
-          <a:lstStyle/>
-          <a:p>
-            <a:r>
-              <a:rPr sz="900" b="0">
-                <a:solidFill>
-                  <a:srgbClr val="6B7082"/>
-                </a:solidFill>
-                <a:latin typeface="Helvetica Neue"/>
-              </a:rPr>
-              <a:t>7,386 views · 6 posts</a:t>
-            </a:r>
-          </a:p>
-        </p:txBody>
-      </p:sp>
-      <p:sp>
-        <p:nvSpPr>
-          <p:cNvPr id="36" name="TextBox 35"/>
-          <p:cNvSpPr txBox="1"/>
-          <p:nvPr/>
-        </p:nvSpPr>
-        <p:spPr>
-          <a:xfrm>
-            <a:off x="731520" y="5040454"/>
-            <a:ext cx="3200400" cy="291904"/>
-          </a:xfrm>
-          <a:prstGeom prst="rect">
-            <a:avLst/>
-          </a:prstGeom>
-          <a:noFill/>
-        </p:spPr>
-        <p:txBody>
-          <a:bodyPr wrap="square" lIns="0" rIns="0" tIns="0" bIns="0">
-            <a:spAutoFit/>
-          </a:bodyPr>
-          <a:lstStyle/>
-          <a:p>
-            <a:r>
-              <a:rPr sz="1100" b="1">
-                <a:solidFill>
-                  <a:srgbClr val="141833"/>
-                </a:solidFill>
-                <a:latin typeface="Helvetica Neue"/>
-              </a:rPr>
-              <a:t>Legislation &amp; Policy Watch</a:t>
-            </a:r>
-          </a:p>
-        </p:txBody>
-      </p:sp>
-      <p:sp>
-        <p:nvSpPr>
-          <p:cNvPr id="37" name="Rectangle 36"/>
-          <p:cNvSpPr/>
-          <p:nvPr/>
-        </p:nvSpPr>
-        <p:spPr>
-          <a:xfrm>
-            <a:off x="4114800" y="5104110"/>
-            <a:ext cx="415270" cy="128016"/>
-          </a:xfrm>
-          <a:prstGeom prst="rect">
-            <a:avLst/>
-          </a:prstGeom>
-          <a:solidFill>
-            <a:srgbClr val="2F3C7E"/>
-          </a:solidFill>
-          <a:ln>
-            <a:noFill/>
-          </a:ln>
-          <a:effectLst/>
-        </p:spPr>
-        <p:style>
-          <a:lnRef idx="1">
-            <a:schemeClr val="accent1"/>
-          </a:lnRef>
-          <a:fillRef idx="3">
-            <a:schemeClr val="accent1"/>
-          </a:fillRef>
-          <a:effectRef idx="2">
-            <a:schemeClr val="accent1"/>
-          </a:effectRef>
-          <a:fontRef idx="minor">
-            <a:schemeClr val="lt1"/>
-          </a:fontRef>
-        </p:style>
-        <p:txBody>
-          <a:bodyPr rtlCol="0" anchor="ctr"/>
-          <a:lstStyle/>
-          <a:p>
-            <a:pPr algn="ctr"/>
-          </a:p>
-        </p:txBody>
-      </p:sp>
-      <p:sp>
-        <p:nvSpPr>
-          <p:cNvPr id="38" name="TextBox 37"/>
-          <p:cNvSpPr txBox="1"/>
-          <p:nvPr/>
-        </p:nvSpPr>
-        <p:spPr>
-          <a:xfrm>
-            <a:off x="4621510" y="5040454"/>
-            <a:ext cx="2286000" cy="291904"/>
-          </a:xfrm>
-          <a:prstGeom prst="rect">
-            <a:avLst/>
-          </a:prstGeom>
-          <a:noFill/>
-        </p:spPr>
-        <p:txBody>
-          <a:bodyPr wrap="square" lIns="0" rIns="0" tIns="0" bIns="0">
-            <a:spAutoFit/>
-          </a:bodyPr>
-          <a:lstStyle/>
-          <a:p>
-            <a:r>
-              <a:rPr sz="900" b="0">
-                <a:solidFill>
-                  <a:srgbClr val="6B7082"/>
-                </a:solidFill>
-                <a:latin typeface="Helvetica Neue"/>
-              </a:rPr>
               <a:t>6,192 views · 13 posts</a:t>
-            </a:r>
-          </a:p>
-        </p:txBody>
-      </p:sp>
-      <p:sp>
-        <p:nvSpPr>
-          <p:cNvPr id="39" name="TextBox 38"/>
-          <p:cNvSpPr txBox="1"/>
-          <p:nvPr/>
-        </p:nvSpPr>
-        <p:spPr>
-          <a:xfrm>
-            <a:off x="731520" y="5332358"/>
-            <a:ext cx="3200400" cy="291904"/>
-          </a:xfrm>
-          <a:prstGeom prst="rect">
-            <a:avLst/>
-          </a:prstGeom>
-          <a:noFill/>
-        </p:spPr>
-        <p:txBody>
-          <a:bodyPr wrap="square" lIns="0" rIns="0" tIns="0" bIns="0">
-            <a:spAutoFit/>
-          </a:bodyPr>
-          <a:lstStyle/>
-          <a:p>
-            <a:r>
-              <a:rPr sz="1100" b="1">
-                <a:solidFill>
-                  <a:srgbClr val="141833"/>
-                </a:solidFill>
-                <a:latin typeface="Helvetica Neue"/>
-              </a:rPr>
-              <a:t>Political Individual Highlights</a:t>
-            </a:r>
-          </a:p>
-        </p:txBody>
-      </p:sp>
-      <p:sp>
-        <p:nvSpPr>
-          <p:cNvPr id="40" name="Rectangle 39"/>
-          <p:cNvSpPr/>
-          <p:nvPr/>
-        </p:nvSpPr>
-        <p:spPr>
-          <a:xfrm>
-            <a:off x="4114800" y="5396015"/>
-            <a:ext cx="271213" cy="128016"/>
-          </a:xfrm>
-          <a:prstGeom prst="rect">
-            <a:avLst/>
-          </a:prstGeom>
-          <a:solidFill>
-            <a:srgbClr val="2E86AB"/>
-          </a:solidFill>
-          <a:ln>
-            <a:noFill/>
-          </a:ln>
-          <a:effectLst/>
-        </p:spPr>
-        <p:style>
-          <a:lnRef idx="1">
-            <a:schemeClr val="accent1"/>
-          </a:lnRef>
-          <a:fillRef idx="3">
-            <a:schemeClr val="accent1"/>
-          </a:fillRef>
-          <a:effectRef idx="2">
-            <a:schemeClr val="accent1"/>
-          </a:effectRef>
-          <a:fontRef idx="minor">
-            <a:schemeClr val="lt1"/>
-          </a:fontRef>
-        </p:style>
-        <p:txBody>
-          <a:bodyPr rtlCol="0" anchor="ctr"/>
-          <a:lstStyle/>
-          <a:p>
-            <a:pPr algn="ctr"/>
-          </a:p>
-        </p:txBody>
-      </p:sp>
-      <p:sp>
-        <p:nvSpPr>
-          <p:cNvPr id="41" name="TextBox 40"/>
-          <p:cNvSpPr txBox="1"/>
-          <p:nvPr/>
-        </p:nvSpPr>
-        <p:spPr>
-          <a:xfrm>
-            <a:off x="4477453" y="5332358"/>
-            <a:ext cx="2286000" cy="291904"/>
-          </a:xfrm>
-          <a:prstGeom prst="rect">
-            <a:avLst/>
-          </a:prstGeom>
-          <a:noFill/>
-        </p:spPr>
-        <p:txBody>
-          <a:bodyPr wrap="square" lIns="0" rIns="0" tIns="0" bIns="0">
-            <a:spAutoFit/>
-          </a:bodyPr>
-          <a:lstStyle/>
-          <a:p>
-            <a:r>
-              <a:rPr sz="900" b="0">
-                <a:solidFill>
-                  <a:srgbClr val="6B7082"/>
-                </a:solidFill>
-                <a:latin typeface="Helvetica Neue"/>
-              </a:rPr>
-              <a:t>4,044 views · 7 posts</a:t>
             </a:r>
           </a:p>
         </p:txBody>
@@ -17682,7 +17682,7 @@
         <p:spPr>
           <a:xfrm>
             <a:off x="4114800" y="5687919"/>
-            <a:ext cx="74509" cy="128016"/>
+            <a:ext cx="74451" cy="128016"/>
           </a:xfrm>
           <a:prstGeom prst="rect">
             <a:avLst/>
@@ -17725,7 +17725,7 @@
         </p:nvSpPr>
         <p:spPr>
           <a:xfrm>
-            <a:off x="4280749" y="5624263"/>
+            <a:off x="4280691" y="5624263"/>
             <a:ext cx="2286000" cy="291904"/>
           </a:xfrm>
           <a:prstGeom prst="rect">
@@ -18342,7 +18342,7 @@
                 </a:solidFill>
                 <a:latin typeface="Georgia"/>
               </a:rPr>
-              <a:t>92,714</a:t>
+              <a:t>92,787</a:t>
             </a:r>
           </a:p>
         </p:txBody>
@@ -18376,7 +18376,7 @@
                 </a:solidFill>
                 <a:latin typeface="Helvetica Neue"/>
               </a:rPr>
-              <a:t>60 posts · 2,997 likes</a:t>
+              <a:t>60 posts · 2,999 likes</a:t>
             </a:r>
           </a:p>
         </p:txBody>
@@ -18410,7 +18410,7 @@
                 </a:solidFill>
                 <a:latin typeface="Helvetica Neue"/>
               </a:rPr>
-              <a:t>1,545 average views per post</a:t>
+              <a:t>1,546 average views per post</a:t>
             </a:r>
           </a:p>
         </p:txBody>
@@ -20414,7 +20414,7 @@
                 </a:solidFill>
                 <a:latin typeface="Georgia"/>
               </a:rPr>
-              <a:t>62,527</a:t>
+              <a:t>62,533</a:t>
             </a:r>
           </a:p>
         </p:txBody>
@@ -20482,7 +20482,7 @@
                 </a:solidFill>
                 <a:latin typeface="Helvetica Neue"/>
               </a:rPr>
-              <a:t>3,126 average views per post</a:t>
+              <a:t>3,127 average views per post</a:t>
             </a:r>
           </a:p>
         </p:txBody>

--- a/SPONSOR_CONTENT_REPORT.pptx
+++ b/SPONSOR_CONTENT_REPORT.pptx
@@ -3327,7 +3327,7 @@
                 </a:solidFill>
                 <a:latin typeface="Helvetica Neue"/>
               </a:rPr>
-              <a:t>Reporting window: Jun 8 → 2026-09-04</a:t>
+              <a:t>Reporting window: Jun 8 → 2026-09-07</a:t>
             </a:r>
           </a:p>
         </p:txBody>
@@ -3783,7 +3783,7 @@
                 </a:solidFill>
                 <a:latin typeface="Georgia"/>
               </a:rPr>
-              <a:t>8,221</a:t>
+              <a:t>8,232</a:t>
             </a:r>
           </a:p>
         </p:txBody>
@@ -3851,7 +3851,7 @@
                 </a:solidFill>
                 <a:latin typeface="Helvetica Neue"/>
               </a:rPr>
-              <a:t>1,028 average views per post</a:t>
+              <a:t>1,029 average views per post</a:t>
             </a:r>
           </a:p>
         </p:txBody>
@@ -4949,7 +4949,7 @@
                 </a:solidFill>
                 <a:latin typeface="Helvetica Neue"/>
               </a:rPr>
-              <a:t>46,138 views · 76 posts · 607 avg</a:t>
+              <a:t>46,544 views · 76 posts · 612 avg</a:t>
             </a:r>
           </a:p>
         </p:txBody>
@@ -5031,7 +5031,7 @@
         <p:spPr>
           <a:xfrm>
             <a:off x="4206240" y="2720339"/>
-            <a:ext cx="5260156" cy="274320"/>
+            <a:ext cx="5214272" cy="274320"/>
           </a:xfrm>
           <a:prstGeom prst="rect">
             <a:avLst/>
@@ -5074,7 +5074,7 @@
         </p:nvSpPr>
         <p:spPr>
           <a:xfrm>
-            <a:off x="9557836" y="2651759"/>
+            <a:off x="9511952" y="2651759"/>
             <a:ext cx="2286000" cy="251460"/>
           </a:xfrm>
           <a:prstGeom prst="rect">
@@ -5108,7 +5108,7 @@
         </p:nvSpPr>
         <p:spPr>
           <a:xfrm>
-            <a:off x="9557836" y="2857499"/>
+            <a:off x="9511952" y="2857499"/>
             <a:ext cx="4572000" cy="251460"/>
           </a:xfrm>
           <a:prstGeom prst="rect">
@@ -5177,7 +5177,7 @@
         <p:spPr>
           <a:xfrm>
             <a:off x="4206240" y="3223260"/>
-            <a:ext cx="1011900" cy="274320"/>
+            <a:ext cx="1003851" cy="274320"/>
           </a:xfrm>
           <a:prstGeom prst="rect">
             <a:avLst/>
@@ -5220,7 +5220,7 @@
         </p:nvSpPr>
         <p:spPr>
           <a:xfrm>
-            <a:off x="5309580" y="3154679"/>
+            <a:off x="5301531" y="3154679"/>
             <a:ext cx="2286000" cy="251460"/>
           </a:xfrm>
           <a:prstGeom prst="rect">
@@ -5241,7 +5241,7 @@
                 </a:solidFill>
                 <a:latin typeface="Helvetica Neue"/>
               </a:rPr>
-              <a:t>7,736 views · 15 posts · 516 avg</a:t>
+              <a:t>7,742 views · 15 posts · 516 avg</a:t>
             </a:r>
           </a:p>
         </p:txBody>
@@ -5254,7 +5254,7 @@
         </p:nvSpPr>
         <p:spPr>
           <a:xfrm>
-            <a:off x="5309580" y="3360420"/>
+            <a:off x="5301531" y="3360420"/>
             <a:ext cx="4572000" cy="251460"/>
           </a:xfrm>
           <a:prstGeom prst="rect">
@@ -5323,7 +5323,7 @@
         <p:spPr>
           <a:xfrm>
             <a:off x="4206240" y="3726180"/>
-            <a:ext cx="822627" cy="274320"/>
+            <a:ext cx="815969" cy="274320"/>
           </a:xfrm>
           <a:prstGeom prst="rect">
             <a:avLst/>
@@ -5366,7 +5366,7 @@
         </p:nvSpPr>
         <p:spPr>
           <a:xfrm>
-            <a:off x="5120307" y="3657600"/>
+            <a:off x="5113649" y="3657600"/>
             <a:ext cx="2286000" cy="251460"/>
           </a:xfrm>
           <a:prstGeom prst="rect">
@@ -5387,7 +5387,7 @@
                 </a:solidFill>
                 <a:latin typeface="Helvetica Neue"/>
               </a:rPr>
-              <a:t>6,289 views · 9 posts · 699 avg</a:t>
+              <a:t>6,293 views · 9 posts · 699 avg</a:t>
             </a:r>
           </a:p>
         </p:txBody>
@@ -5400,7 +5400,7 @@
         </p:nvSpPr>
         <p:spPr>
           <a:xfrm>
-            <a:off x="5120307" y="3863340"/>
+            <a:off x="5113649" y="3863340"/>
             <a:ext cx="4572000" cy="251460"/>
           </a:xfrm>
           <a:prstGeom prst="rect">
@@ -5469,7 +5469,7 @@
         <p:spPr>
           <a:xfrm>
             <a:off x="4206240" y="4229100"/>
-            <a:ext cx="809939" cy="274320"/>
+            <a:ext cx="802874" cy="274320"/>
           </a:xfrm>
           <a:prstGeom prst="rect">
             <a:avLst/>
@@ -5512,7 +5512,7 @@
         </p:nvSpPr>
         <p:spPr>
           <a:xfrm>
-            <a:off x="5107619" y="4160520"/>
+            <a:off x="5100554" y="4160520"/>
             <a:ext cx="2286000" cy="251460"/>
           </a:xfrm>
           <a:prstGeom prst="rect">
@@ -5546,7 +5546,7 @@
         </p:nvSpPr>
         <p:spPr>
           <a:xfrm>
-            <a:off x="5107619" y="4366260"/>
+            <a:off x="5100554" y="4366260"/>
             <a:ext cx="4572000" cy="251460"/>
           </a:xfrm>
           <a:prstGeom prst="rect">
@@ -5955,7 +5955,7 @@
                 </a:solidFill>
                 <a:latin typeface="Georgia"/>
               </a:rPr>
-              <a:t>46,138</a:t>
+              <a:t>46,544</a:t>
             </a:r>
           </a:p>
         </p:txBody>
@@ -5989,7 +5989,7 @@
                 </a:solidFill>
                 <a:latin typeface="Helvetica Neue"/>
               </a:rPr>
-              <a:t>76 posts · 1,222 likes</a:t>
+              <a:t>76 posts · 1,234 likes</a:t>
             </a:r>
           </a:p>
         </p:txBody>
@@ -6023,7 +6023,7 @@
                 </a:solidFill>
                 <a:latin typeface="Helvetica Neue"/>
               </a:rPr>
-              <a:t>607 average views per post</a:t>
+              <a:t>612 average views per post</a:t>
             </a:r>
           </a:p>
         </p:txBody>
@@ -6335,7 +6335,7 @@
                 </a:solidFill>
                 <a:latin typeface="Helvetica Neue"/>
               </a:rPr>
-              <a:t>#2  ·  IG  ·  3,742 views</a:t>
+              <a:t>#2  ·  IG  ·  3,870 views</a:t>
             </a:r>
           </a:p>
         </p:txBody>
@@ -8027,7 +8027,7 @@
                 </a:solidFill>
                 <a:latin typeface="Georgia"/>
               </a:rPr>
-              <a:t>7,736</a:t>
+              <a:t>7,742</a:t>
             </a:r>
           </a:p>
         </p:txBody>
@@ -9063,7 +9063,7 @@
                 </a:solidFill>
                 <a:latin typeface="Georgia"/>
               </a:rPr>
-              <a:t>6,289</a:t>
+              <a:t>6,293</a:t>
             </a:r>
           </a:p>
         </p:txBody>
@@ -9097,7 +9097,7 @@
                 </a:solidFill>
                 <a:latin typeface="Helvetica Neue"/>
               </a:rPr>
-              <a:t>9 posts · 209 likes</a:t>
+              <a:t>9 posts · 211 likes</a:t>
             </a:r>
           </a:p>
         </p:txBody>
@@ -9287,7 +9287,7 @@
                 </a:solidFill>
                 <a:latin typeface="Helvetica Neue"/>
               </a:rPr>
-              <a:t>#1  ·  FB  ·  2,245 views</a:t>
+              <a:t>#1  ·  FB  ·  2,249 views</a:t>
             </a:r>
           </a:p>
         </p:txBody>
@@ -11495,7 +11495,7 @@
                 </a:solidFill>
                 <a:latin typeface="Georgia"/>
               </a:rPr>
-              <a:t>92,787 views</a:t>
+              <a:t>93,657 views</a:t>
             </a:r>
           </a:p>
         </p:txBody>
@@ -11529,7 +11529,7 @@
                 </a:solidFill>
                 <a:latin typeface="Helvetica Neue"/>
               </a:rPr>
-              <a:t>60 posts · 1,546 avg views/post</a:t>
+              <a:t>61 posts · 1,535 avg views/post</a:t>
             </a:r>
           </a:p>
         </p:txBody>
@@ -11855,7 +11855,7 @@
                 </a:solidFill>
                 <a:latin typeface="Georgia"/>
               </a:rPr>
-              <a:t>62,533 views</a:t>
+              <a:t>62,534 views</a:t>
             </a:r>
           </a:p>
         </p:txBody>
@@ -14191,7 +14191,7 @@
                 </a:solidFill>
                 <a:latin typeface="Helvetica Neue"/>
               </a:rPr>
-              <a:t>2,420 avg views/post   ·   33 posts   ·   79,855 total</a:t>
+              <a:t>2,420 avg views/post   ·   33 posts   ·   79,856 total</a:t>
             </a:r>
           </a:p>
         </p:txBody>
@@ -14483,7 +14483,7 @@
                 </a:solidFill>
                 <a:latin typeface="Helvetica Neue"/>
               </a:rPr>
-              <a:t>1,268 avg views/post   ·   160 posts   ·   202,924 total</a:t>
+              <a:t>1,266 avg views/post   ·   161 posts   ·   203,815 total</a:t>
             </a:r>
           </a:p>
         </p:txBody>
@@ -16402,7 +16402,7 @@
                 </a:solidFill>
                 <a:latin typeface="Helvetica Neue"/>
               </a:rPr>
-              <a:t>92,787 views · 60 posts</a:t>
+              <a:t>93,657 views · 61 posts</a:t>
             </a:r>
           </a:p>
         </p:txBody>
@@ -16450,7 +16450,7 @@
         <p:spPr>
           <a:xfrm>
             <a:off x="4114800" y="2476968"/>
-            <a:ext cx="5351310" cy="128016"/>
+            <a:ext cx="5301666" cy="128016"/>
           </a:xfrm>
           <a:prstGeom prst="rect">
             <a:avLst/>
@@ -16493,7 +16493,7 @@
         </p:nvSpPr>
         <p:spPr>
           <a:xfrm>
-            <a:off x="9557550" y="2413312"/>
+            <a:off x="9507906" y="2413312"/>
             <a:ext cx="2286000" cy="291904"/>
           </a:xfrm>
           <a:prstGeom prst="rect">
@@ -16514,7 +16514,7 @@
                 </a:solidFill>
                 <a:latin typeface="Helvetica Neue"/>
               </a:rPr>
-              <a:t>79,855 views · 33 posts</a:t>
+              <a:t>79,856 views · 33 posts</a:t>
             </a:r>
           </a:p>
         </p:txBody>
@@ -16562,7 +16562,7 @@
         <p:spPr>
           <a:xfrm>
             <a:off x="4114800" y="2768873"/>
-            <a:ext cx="4238025" cy="128016"/>
+            <a:ext cx="4627738" cy="128016"/>
           </a:xfrm>
           <a:prstGeom prst="rect">
             <a:avLst/>
@@ -16605,7 +16605,7 @@
         </p:nvSpPr>
         <p:spPr>
           <a:xfrm>
-            <a:off x="8444265" y="2705217"/>
+            <a:off x="8833978" y="2705217"/>
             <a:ext cx="2286000" cy="291904"/>
           </a:xfrm>
           <a:prstGeom prst="rect">
@@ -16626,7 +16626,7 @@
                 </a:solidFill>
                 <a:latin typeface="Helvetica Neue"/>
               </a:rPr>
-              <a:t>63,242 views · 134 posts</a:t>
+              <a:t>69,705 views · 136 posts</a:t>
             </a:r>
           </a:p>
         </p:txBody>
@@ -16674,7 +16674,7 @@
         <p:spPr>
           <a:xfrm>
             <a:off x="4114800" y="3060778"/>
-            <a:ext cx="4190513" cy="128016"/>
+            <a:ext cx="4151653" cy="128016"/>
           </a:xfrm>
           <a:prstGeom prst="rect">
             <a:avLst/>
@@ -16717,7 +16717,7 @@
         </p:nvSpPr>
         <p:spPr>
           <a:xfrm>
-            <a:off x="8396753" y="2997121"/>
+            <a:off x="8357893" y="2997121"/>
             <a:ext cx="2286000" cy="291904"/>
           </a:xfrm>
           <a:prstGeom prst="rect">
@@ -16738,7 +16738,7 @@
                 </a:solidFill>
                 <a:latin typeface="Helvetica Neue"/>
               </a:rPr>
-              <a:t>62,533 views · 20 posts</a:t>
+              <a:t>62,534 views · 20 posts</a:t>
             </a:r>
           </a:p>
         </p:txBody>
@@ -16786,7 +16786,7 @@
         <p:spPr>
           <a:xfrm>
             <a:off x="4114800" y="3352682"/>
-            <a:ext cx="4101252" cy="128016"/>
+            <a:ext cx="4063155" cy="128016"/>
           </a:xfrm>
           <a:prstGeom prst="rect">
             <a:avLst/>
@@ -16829,7 +16829,7 @@
         </p:nvSpPr>
         <p:spPr>
           <a:xfrm>
-            <a:off x="8307492" y="3289026"/>
+            <a:off x="8269395" y="3289026"/>
             <a:ext cx="2286000" cy="291904"/>
           </a:xfrm>
           <a:prstGeom prst="rect">
@@ -16898,7 +16898,7 @@
         <p:spPr>
           <a:xfrm>
             <a:off x="4114800" y="3644587"/>
-            <a:ext cx="3194970" cy="128016"/>
+            <a:ext cx="3165292" cy="128016"/>
           </a:xfrm>
           <a:prstGeom prst="rect">
             <a:avLst/>
@@ -16941,7 +16941,7 @@
         </p:nvSpPr>
         <p:spPr>
           <a:xfrm>
-            <a:off x="7401210" y="3580931"/>
+            <a:off x="7371532" y="3580931"/>
             <a:ext cx="2286000" cy="291904"/>
           </a:xfrm>
           <a:prstGeom prst="rect">
@@ -17010,7 +17010,7 @@
         <p:spPr>
           <a:xfrm>
             <a:off x="4114800" y="3936491"/>
-            <a:ext cx="3091838" cy="128016"/>
+            <a:ext cx="3090071" cy="128016"/>
           </a:xfrm>
           <a:prstGeom prst="rect">
             <a:avLst/>
@@ -17053,7 +17053,7 @@
         </p:nvSpPr>
         <p:spPr>
           <a:xfrm>
-            <a:off x="7298078" y="3872835"/>
+            <a:off x="7296311" y="3872835"/>
             <a:ext cx="2286000" cy="291904"/>
           </a:xfrm>
           <a:prstGeom prst="rect">
@@ -17074,7 +17074,7 @@
                 </a:solidFill>
                 <a:latin typeface="Helvetica Neue"/>
               </a:rPr>
-              <a:t>46,138 views · 76 posts</a:t>
+              <a:t>46,544 views · 76 posts</a:t>
             </a:r>
           </a:p>
         </p:txBody>
@@ -17122,7 +17122,7 @@
         <p:spPr>
           <a:xfrm>
             <a:off x="4114800" y="4228396"/>
-            <a:ext cx="2694854" cy="128016"/>
+            <a:ext cx="2669821" cy="128016"/>
           </a:xfrm>
           <a:prstGeom prst="rect">
             <a:avLst/>
@@ -17165,7 +17165,7 @@
         </p:nvSpPr>
         <p:spPr>
           <a:xfrm>
-            <a:off x="6901094" y="4164740"/>
+            <a:off x="6876061" y="4164740"/>
             <a:ext cx="2286000" cy="291904"/>
           </a:xfrm>
           <a:prstGeom prst="rect">
@@ -17234,7 +17234,7 @@
         <p:spPr>
           <a:xfrm>
             <a:off x="4114800" y="4520301"/>
-            <a:ext cx="550912" cy="128016"/>
+            <a:ext cx="546525" cy="128016"/>
           </a:xfrm>
           <a:prstGeom prst="rect">
             <a:avLst/>
@@ -17277,7 +17277,7 @@
         </p:nvSpPr>
         <p:spPr>
           <a:xfrm>
-            <a:off x="4757152" y="4456644"/>
+            <a:off x="4752765" y="4456644"/>
             <a:ext cx="2286000" cy="291904"/>
           </a:xfrm>
           <a:prstGeom prst="rect">
@@ -17298,7 +17298,7 @@
                 </a:solidFill>
                 <a:latin typeface="Helvetica Neue"/>
               </a:rPr>
-              <a:t>8,221 views · 8 posts</a:t>
+              <a:t>8,232 views · 8 posts</a:t>
             </a:r>
           </a:p>
         </p:txBody>
@@ -17346,7 +17346,7 @@
         <p:spPr>
           <a:xfrm>
             <a:off x="4114800" y="4812205"/>
-            <a:ext cx="518411" cy="128016"/>
+            <a:ext cx="513994" cy="128016"/>
           </a:xfrm>
           <a:prstGeom prst="rect">
             <a:avLst/>
@@ -17389,7 +17389,7 @@
         </p:nvSpPr>
         <p:spPr>
           <a:xfrm>
-            <a:off x="4724651" y="4748549"/>
+            <a:off x="4720234" y="4748549"/>
             <a:ext cx="2286000" cy="291904"/>
           </a:xfrm>
           <a:prstGeom prst="rect">
@@ -17410,7 +17410,7 @@
                 </a:solidFill>
                 <a:latin typeface="Helvetica Neue"/>
               </a:rPr>
-              <a:t>7,736 views · 15 posts</a:t>
+              <a:t>7,742 views · 15 posts</a:t>
             </a:r>
           </a:p>
         </p:txBody>
@@ -17458,7 +17458,7 @@
         <p:spPr>
           <a:xfrm>
             <a:off x="4114800" y="5104110"/>
-            <a:ext cx="421443" cy="128016"/>
+            <a:ext cx="417794" cy="128016"/>
           </a:xfrm>
           <a:prstGeom prst="rect">
             <a:avLst/>
@@ -17501,7 +17501,7 @@
         </p:nvSpPr>
         <p:spPr>
           <a:xfrm>
-            <a:off x="4627683" y="5040454"/>
+            <a:off x="4624034" y="5040454"/>
             <a:ext cx="2286000" cy="291904"/>
           </a:xfrm>
           <a:prstGeom prst="rect">
@@ -17522,7 +17522,7 @@
                 </a:solidFill>
                 <a:latin typeface="Helvetica Neue"/>
               </a:rPr>
-              <a:t>6,289 views · 9 posts</a:t>
+              <a:t>6,293 views · 9 posts</a:t>
             </a:r>
           </a:p>
         </p:txBody>
@@ -17570,7 +17570,7 @@
         <p:spPr>
           <a:xfrm>
             <a:off x="4114800" y="5396015"/>
-            <a:ext cx="414943" cy="128016"/>
+            <a:ext cx="411088" cy="128016"/>
           </a:xfrm>
           <a:prstGeom prst="rect">
             <a:avLst/>
@@ -17613,7 +17613,7 @@
         </p:nvSpPr>
         <p:spPr>
           <a:xfrm>
-            <a:off x="4621183" y="5332358"/>
+            <a:off x="4617328" y="5332358"/>
             <a:ext cx="2286000" cy="291904"/>
           </a:xfrm>
           <a:prstGeom prst="rect">
@@ -17682,7 +17682,7 @@
         <p:spPr>
           <a:xfrm>
             <a:off x="4114800" y="5687919"/>
-            <a:ext cx="74451" cy="128016"/>
+            <a:ext cx="73759" cy="128016"/>
           </a:xfrm>
           <a:prstGeom prst="rect">
             <a:avLst/>
@@ -17725,7 +17725,7 @@
         </p:nvSpPr>
         <p:spPr>
           <a:xfrm>
-            <a:off x="4280691" y="5624263"/>
+            <a:off x="4279999" y="5624263"/>
             <a:ext cx="2286000" cy="291904"/>
           </a:xfrm>
           <a:prstGeom prst="rect">
@@ -18342,7 +18342,7 @@
                 </a:solidFill>
                 <a:latin typeface="Georgia"/>
               </a:rPr>
-              <a:t>92,787</a:t>
+              <a:t>93,657</a:t>
             </a:r>
           </a:p>
         </p:txBody>
@@ -18376,7 +18376,7 @@
                 </a:solidFill>
                 <a:latin typeface="Helvetica Neue"/>
               </a:rPr>
-              <a:t>60 posts · 2,999 likes</a:t>
+              <a:t>61 posts · 3,030 likes</a:t>
             </a:r>
           </a:p>
         </p:txBody>
@@ -18410,7 +18410,7 @@
                 </a:solidFill>
                 <a:latin typeface="Helvetica Neue"/>
               </a:rPr>
-              <a:t>1,546 average views per post</a:t>
+              <a:t>1,535 average views per post</a:t>
             </a:r>
           </a:p>
         </p:txBody>
@@ -19378,7 +19378,7 @@
                 </a:solidFill>
                 <a:latin typeface="Georgia"/>
               </a:rPr>
-              <a:t>79,855</a:t>
+              <a:t>79,856</a:t>
             </a:r>
           </a:p>
         </p:txBody>
@@ -20414,7 +20414,7 @@
                 </a:solidFill>
                 <a:latin typeface="Georgia"/>
               </a:rPr>
-              <a:t>62,533</a:t>
+              <a:t>62,534</a:t>
             </a:r>
           </a:p>
         </p:txBody>

--- a/SPONSOR_CONTENT_REPORT.pptx
+++ b/SPONSOR_CONTENT_REPORT.pptx
@@ -3327,7 +3327,7 @@
                 </a:solidFill>
                 <a:latin typeface="Helvetica Neue"/>
               </a:rPr>
-              <a:t>Reporting window: Jun 8 → 2026-09-07</a:t>
+              <a:t>Reporting window: Jun 8 → 2026-09-09</a:t>
             </a:r>
           </a:p>
         </p:txBody>
@@ -3783,7 +3783,7 @@
                 </a:solidFill>
                 <a:latin typeface="Georgia"/>
               </a:rPr>
-              <a:t>8,232</a:t>
+              <a:t>8,235</a:t>
             </a:r>
           </a:p>
         </p:txBody>
@@ -4949,7 +4949,7 @@
                 </a:solidFill>
                 <a:latin typeface="Helvetica Neue"/>
               </a:rPr>
-              <a:t>46,544 views · 76 posts · 612 avg</a:t>
+              <a:t>47,704 views · 79 posts · 604 avg</a:t>
             </a:r>
           </a:p>
         </p:txBody>
@@ -5031,7 +5031,7 @@
         <p:spPr>
           <a:xfrm>
             <a:off x="4206240" y="2720339"/>
-            <a:ext cx="5214272" cy="274320"/>
+            <a:ext cx="5087479" cy="274320"/>
           </a:xfrm>
           <a:prstGeom prst="rect">
             <a:avLst/>
@@ -5074,7 +5074,7 @@
         </p:nvSpPr>
         <p:spPr>
           <a:xfrm>
-            <a:off x="9511952" y="2651759"/>
+            <a:off x="9385159" y="2651759"/>
             <a:ext cx="2286000" cy="251460"/>
           </a:xfrm>
           <a:prstGeom prst="rect">
@@ -5108,7 +5108,7 @@
         </p:nvSpPr>
         <p:spPr>
           <a:xfrm>
-            <a:off x="9511952" y="2857499"/>
+            <a:off x="9385159" y="2857499"/>
             <a:ext cx="4572000" cy="251460"/>
           </a:xfrm>
           <a:prstGeom prst="rect">
@@ -5177,7 +5177,7 @@
         <p:spPr>
           <a:xfrm>
             <a:off x="4206240" y="3223260"/>
-            <a:ext cx="1003851" cy="274320"/>
+            <a:ext cx="980453" cy="274320"/>
           </a:xfrm>
           <a:prstGeom prst="rect">
             <a:avLst/>
@@ -5220,7 +5220,7 @@
         </p:nvSpPr>
         <p:spPr>
           <a:xfrm>
-            <a:off x="5301531" y="3154679"/>
+            <a:off x="5278133" y="3154679"/>
             <a:ext cx="2286000" cy="251460"/>
           </a:xfrm>
           <a:prstGeom prst="rect">
@@ -5241,7 +5241,7 @@
                 </a:solidFill>
                 <a:latin typeface="Helvetica Neue"/>
               </a:rPr>
-              <a:t>7,742 views · 15 posts · 516 avg</a:t>
+              <a:t>7,750 views · 15 posts · 517 avg</a:t>
             </a:r>
           </a:p>
         </p:txBody>
@@ -5254,7 +5254,7 @@
         </p:nvSpPr>
         <p:spPr>
           <a:xfrm>
-            <a:off x="5301531" y="3360420"/>
+            <a:off x="5278133" y="3360420"/>
             <a:ext cx="4572000" cy="251460"/>
           </a:xfrm>
           <a:prstGeom prst="rect">
@@ -5323,7 +5323,7 @@
         <p:spPr>
           <a:xfrm>
             <a:off x="4206240" y="3726180"/>
-            <a:ext cx="815969" cy="274320"/>
+            <a:ext cx="808526" cy="274320"/>
           </a:xfrm>
           <a:prstGeom prst="rect">
             <a:avLst/>
@@ -5366,7 +5366,7 @@
         </p:nvSpPr>
         <p:spPr>
           <a:xfrm>
-            <a:off x="5113649" y="3657600"/>
+            <a:off x="5106206" y="3657600"/>
             <a:ext cx="2286000" cy="251460"/>
           </a:xfrm>
           <a:prstGeom prst="rect">
@@ -5387,7 +5387,7 @@
                 </a:solidFill>
                 <a:latin typeface="Helvetica Neue"/>
               </a:rPr>
-              <a:t>6,293 views · 9 posts · 699 avg</a:t>
+              <a:t>6,391 views · 11 posts · 581 avg</a:t>
             </a:r>
           </a:p>
         </p:txBody>
@@ -5400,7 +5400,7 @@
         </p:nvSpPr>
         <p:spPr>
           <a:xfrm>
-            <a:off x="5113649" y="3863340"/>
+            <a:off x="5106206" y="3863340"/>
             <a:ext cx="4572000" cy="251460"/>
           </a:xfrm>
           <a:prstGeom prst="rect">
@@ -5469,7 +5469,7 @@
         <p:spPr>
           <a:xfrm>
             <a:off x="4206240" y="4229100"/>
-            <a:ext cx="802874" cy="274320"/>
+            <a:ext cx="783350" cy="274320"/>
           </a:xfrm>
           <a:prstGeom prst="rect">
             <a:avLst/>
@@ -5512,7 +5512,7 @@
         </p:nvSpPr>
         <p:spPr>
           <a:xfrm>
-            <a:off x="5100554" y="4160520"/>
+            <a:off x="5081030" y="4160520"/>
             <a:ext cx="2286000" cy="251460"/>
           </a:xfrm>
           <a:prstGeom prst="rect">
@@ -5546,7 +5546,7 @@
         </p:nvSpPr>
         <p:spPr>
           <a:xfrm>
-            <a:off x="5100554" y="4366260"/>
+            <a:off x="5081030" y="4366260"/>
             <a:ext cx="4572000" cy="251460"/>
           </a:xfrm>
           <a:prstGeom prst="rect">
@@ -5955,7 +5955,7 @@
                 </a:solidFill>
                 <a:latin typeface="Georgia"/>
               </a:rPr>
-              <a:t>46,544</a:t>
+              <a:t>47,704</a:t>
             </a:r>
           </a:p>
         </p:txBody>
@@ -5989,7 +5989,7 @@
                 </a:solidFill>
                 <a:latin typeface="Helvetica Neue"/>
               </a:rPr>
-              <a:t>76 posts · 1,234 likes</a:t>
+              <a:t>79 posts · 1,279 likes</a:t>
             </a:r>
           </a:p>
         </p:txBody>
@@ -6023,7 +6023,7 @@
                 </a:solidFill>
                 <a:latin typeface="Helvetica Neue"/>
               </a:rPr>
-              <a:t>612 average views per post</a:t>
+              <a:t>604 average views per post</a:t>
             </a:r>
           </a:p>
         </p:txBody>
@@ -6335,7 +6335,7 @@
                 </a:solidFill>
                 <a:latin typeface="Helvetica Neue"/>
               </a:rPr>
-              <a:t>#2  ·  IG  ·  3,870 views</a:t>
+              <a:t>#2  ·  IG  ·  3,922 views</a:t>
             </a:r>
           </a:p>
         </p:txBody>
@@ -8027,7 +8027,7 @@
                 </a:solidFill>
                 <a:latin typeface="Georgia"/>
               </a:rPr>
-              <a:t>7,742</a:t>
+              <a:t>7,750</a:t>
             </a:r>
           </a:p>
         </p:txBody>
@@ -8095,7 +8095,7 @@
                 </a:solidFill>
                 <a:latin typeface="Helvetica Neue"/>
               </a:rPr>
-              <a:t>516 average views per post</a:t>
+              <a:t>517 average views per post</a:t>
             </a:r>
           </a:p>
         </p:txBody>
@@ -9063,7 +9063,7 @@
                 </a:solidFill>
                 <a:latin typeface="Georgia"/>
               </a:rPr>
-              <a:t>6,293</a:t>
+              <a:t>6,391</a:t>
             </a:r>
           </a:p>
         </p:txBody>
@@ -9097,7 +9097,7 @@
                 </a:solidFill>
                 <a:latin typeface="Helvetica Neue"/>
               </a:rPr>
-              <a:t>9 posts · 211 likes</a:t>
+              <a:t>11 posts · 220 likes</a:t>
             </a:r>
           </a:p>
         </p:txBody>
@@ -9131,7 +9131,7 @@
                 </a:solidFill>
                 <a:latin typeface="Helvetica Neue"/>
               </a:rPr>
-              <a:t>699 average views per post</a:t>
+              <a:t>581 average views per post</a:t>
             </a:r>
           </a:p>
         </p:txBody>
@@ -9287,7 +9287,7 @@
                 </a:solidFill>
                 <a:latin typeface="Helvetica Neue"/>
               </a:rPr>
-              <a:t>#1  ·  FB  ·  2,249 views</a:t>
+              <a:t>#1  ·  FB  ·  2,251 views</a:t>
             </a:r>
           </a:p>
         </p:txBody>
@@ -11495,7 +11495,7 @@
                 </a:solidFill>
                 <a:latin typeface="Georgia"/>
               </a:rPr>
-              <a:t>93,657 views</a:t>
+              <a:t>93,713 views</a:t>
             </a:r>
           </a:p>
         </p:txBody>
@@ -11529,7 +11529,7 @@
                 </a:solidFill>
                 <a:latin typeface="Helvetica Neue"/>
               </a:rPr>
-              <a:t>61 posts · 1,535 avg views/post</a:t>
+              <a:t>61 posts · 1,536 avg views/post</a:t>
             </a:r>
           </a:p>
         </p:txBody>
@@ -14191,7 +14191,7 @@
                 </a:solidFill>
                 <a:latin typeface="Helvetica Neue"/>
               </a:rPr>
-              <a:t>2,420 avg views/post   ·   33 posts   ·   79,856 total</a:t>
+              <a:t>2,420 avg views/post   ·   33 posts   ·   79,857 total</a:t>
             </a:r>
           </a:p>
         </p:txBody>
@@ -14483,7 +14483,7 @@
                 </a:solidFill>
                 <a:latin typeface="Helvetica Neue"/>
               </a:rPr>
-              <a:t>1,266 avg views/post   ·   161 posts   ·   203,815 total</a:t>
+              <a:t>1,251 avg views/post   ·   163 posts   ·   203,980 total</a:t>
             </a:r>
           </a:p>
         </p:txBody>
@@ -16402,7 +16402,7 @@
                 </a:solidFill>
                 <a:latin typeface="Helvetica Neue"/>
               </a:rPr>
-              <a:t>93,657 views · 61 posts</a:t>
+              <a:t>93,713 views · 61 posts</a:t>
             </a:r>
           </a:p>
         </p:txBody>
@@ -16450,7 +16450,7 @@
         <p:spPr>
           <a:xfrm>
             <a:off x="4114800" y="2476968"/>
-            <a:ext cx="5301666" cy="128016"/>
+            <a:ext cx="5298565" cy="128016"/>
           </a:xfrm>
           <a:prstGeom prst="rect">
             <a:avLst/>
@@ -16493,7 +16493,7 @@
         </p:nvSpPr>
         <p:spPr>
           <a:xfrm>
-            <a:off x="9507906" y="2413312"/>
+            <a:off x="9504805" y="2413312"/>
             <a:ext cx="2286000" cy="291904"/>
           </a:xfrm>
           <a:prstGeom prst="rect">
@@ -16514,7 +16514,7 @@
                 </a:solidFill>
                 <a:latin typeface="Helvetica Neue"/>
               </a:rPr>
-              <a:t>79,856 views · 33 posts</a:t>
+              <a:t>79,857 views · 33 posts</a:t>
             </a:r>
           </a:p>
         </p:txBody>
@@ -16562,7 +16562,7 @@
         <p:spPr>
           <a:xfrm>
             <a:off x="4114800" y="2768873"/>
-            <a:ext cx="4627738" cy="128016"/>
+            <a:ext cx="4847446" cy="128016"/>
           </a:xfrm>
           <a:prstGeom prst="rect">
             <a:avLst/>
@@ -16605,7 +16605,7 @@
         </p:nvSpPr>
         <p:spPr>
           <a:xfrm>
-            <a:off x="8833978" y="2705217"/>
+            <a:off x="9053686" y="2705217"/>
             <a:ext cx="2286000" cy="291904"/>
           </a:xfrm>
           <a:prstGeom prst="rect">
@@ -16626,7 +16626,7 @@
                 </a:solidFill>
                 <a:latin typeface="Helvetica Neue"/>
               </a:rPr>
-              <a:t>69,705 views · 136 posts</a:t>
+              <a:t>73,058 views · 139 posts</a:t>
             </a:r>
           </a:p>
         </p:txBody>
@@ -16660,7 +16660,7 @@
                 </a:solidFill>
                 <a:latin typeface="Helvetica Neue"/>
               </a:rPr>
-              <a:t>Military Service</a:t>
+              <a:t>FIFA / World Cup</a:t>
             </a:r>
           </a:p>
         </p:txBody>
@@ -16674,7 +16674,119 @@
         <p:spPr>
           <a:xfrm>
             <a:off x="4114800" y="3060778"/>
-            <a:ext cx="4151653" cy="128016"/>
+            <a:ext cx="4153219" cy="128016"/>
+          </a:xfrm>
+          <a:prstGeom prst="rect">
+            <a:avLst/>
+          </a:prstGeom>
+          <a:solidFill>
+            <a:srgbClr val="6B7082"/>
+          </a:solidFill>
+          <a:ln>
+            <a:noFill/>
+          </a:ln>
+          <a:effectLst/>
+        </p:spPr>
+        <p:style>
+          <a:lnRef idx="1">
+            <a:schemeClr val="accent1"/>
+          </a:lnRef>
+          <a:fillRef idx="3">
+            <a:schemeClr val="accent1"/>
+          </a:fillRef>
+          <a:effectRef idx="2">
+            <a:schemeClr val="accent1"/>
+          </a:effectRef>
+          <a:fontRef idx="minor">
+            <a:schemeClr val="lt1"/>
+          </a:fontRef>
+        </p:style>
+        <p:txBody>
+          <a:bodyPr rtlCol="0" anchor="ctr"/>
+          <a:lstStyle/>
+          <a:p>
+            <a:pPr algn="ctr"/>
+          </a:p>
+        </p:txBody>
+      </p:sp>
+      <p:sp>
+        <p:nvSpPr>
+          <p:cNvPr id="17" name="TextBox 16"/>
+          <p:cNvSpPr txBox="1"/>
+          <p:nvPr/>
+        </p:nvSpPr>
+        <p:spPr>
+          <a:xfrm>
+            <a:off x="8359459" y="2997121"/>
+            <a:ext cx="2286000" cy="291904"/>
+          </a:xfrm>
+          <a:prstGeom prst="rect">
+            <a:avLst/>
+          </a:prstGeom>
+          <a:noFill/>
+        </p:spPr>
+        <p:txBody>
+          <a:bodyPr wrap="square" lIns="0" rIns="0" tIns="0" bIns="0">
+            <a:spAutoFit/>
+          </a:bodyPr>
+          <a:lstStyle/>
+          <a:p>
+            <a:r>
+              <a:rPr sz="900" b="0">
+                <a:solidFill>
+                  <a:srgbClr val="6B7082"/>
+                </a:solidFill>
+                <a:latin typeface="Helvetica Neue"/>
+              </a:rPr>
+              <a:t>62,595 views · 24 posts</a:t>
+            </a:r>
+          </a:p>
+        </p:txBody>
+      </p:sp>
+      <p:sp>
+        <p:nvSpPr>
+          <p:cNvPr id="18" name="TextBox 17"/>
+          <p:cNvSpPr txBox="1"/>
+          <p:nvPr/>
+        </p:nvSpPr>
+        <p:spPr>
+          <a:xfrm>
+            <a:off x="731520" y="3289026"/>
+            <a:ext cx="3200400" cy="291904"/>
+          </a:xfrm>
+          <a:prstGeom prst="rect">
+            <a:avLst/>
+          </a:prstGeom>
+          <a:noFill/>
+        </p:spPr>
+        <p:txBody>
+          <a:bodyPr wrap="square" lIns="0" rIns="0" tIns="0" bIns="0">
+            <a:spAutoFit/>
+          </a:bodyPr>
+          <a:lstStyle/>
+          <a:p>
+            <a:r>
+              <a:rPr sz="1100" b="1">
+                <a:solidFill>
+                  <a:srgbClr val="141833"/>
+                </a:solidFill>
+                <a:latin typeface="Helvetica Neue"/>
+              </a:rPr>
+              <a:t>Military Service</a:t>
+            </a:r>
+          </a:p>
+        </p:txBody>
+      </p:sp>
+      <p:sp>
+        <p:nvSpPr>
+          <p:cNvPr id="19" name="Rectangle 18"/>
+          <p:cNvSpPr/>
+          <p:nvPr/>
+        </p:nvSpPr>
+        <p:spPr>
+          <a:xfrm>
+            <a:off x="4114800" y="3352682"/>
+            <a:ext cx="4149172" cy="128016"/>
           </a:xfrm>
           <a:prstGeom prst="rect">
             <a:avLst/>
@@ -16711,13 +16823,13 @@
       </p:sp>
       <p:sp>
         <p:nvSpPr>
-          <p:cNvPr id="17" name="TextBox 16"/>
-          <p:cNvSpPr txBox="1"/>
-          <p:nvPr/>
-        </p:nvSpPr>
-        <p:spPr>
-          <a:xfrm>
-            <a:off x="8357893" y="2997121"/>
+          <p:cNvPr id="20" name="TextBox 19"/>
+          <p:cNvSpPr txBox="1"/>
+          <p:nvPr/>
+        </p:nvSpPr>
+        <p:spPr>
+          <a:xfrm>
+            <a:off x="8355412" y="3289026"/>
             <a:ext cx="2286000" cy="291904"/>
           </a:xfrm>
           <a:prstGeom prst="rect">
@@ -16745,13 +16857,13 @@
       </p:sp>
       <p:sp>
         <p:nvSpPr>
-          <p:cNvPr id="18" name="TextBox 17"/>
-          <p:cNvSpPr txBox="1"/>
-          <p:nvPr/>
-        </p:nvSpPr>
-        <p:spPr>
-          <a:xfrm>
-            <a:off x="731520" y="3289026"/>
+          <p:cNvPr id="21" name="TextBox 20"/>
+          <p:cNvSpPr txBox="1"/>
+          <p:nvPr/>
+        </p:nvSpPr>
+        <p:spPr>
+          <a:xfrm>
+            <a:off x="731520" y="3580931"/>
             <a:ext cx="3200400" cy="291904"/>
           </a:xfrm>
           <a:prstGeom prst="rect">
@@ -16772,27 +16884,27 @@
                 </a:solidFill>
                 <a:latin typeface="Helvetica Neue"/>
               </a:rPr>
-              <a:t>FIFA / World Cup</a:t>
-            </a:r>
-          </a:p>
-        </p:txBody>
-      </p:sp>
-      <p:sp>
-        <p:nvSpPr>
-          <p:cNvPr id="19" name="Rectangle 18"/>
+              <a:t>Elections &amp; Judicial</a:t>
+            </a:r>
+          </a:p>
+        </p:txBody>
+      </p:sp>
+      <p:sp>
+        <p:nvSpPr>
+          <p:cNvPr id="22" name="Rectangle 21"/>
           <p:cNvSpPr/>
           <p:nvPr/>
         </p:nvSpPr>
         <p:spPr>
           <a:xfrm>
-            <a:off x="4114800" y="3352682"/>
-            <a:ext cx="4063155" cy="128016"/>
+            <a:off x="4114800" y="3644587"/>
+            <a:ext cx="3165192" cy="128016"/>
           </a:xfrm>
           <a:prstGeom prst="rect">
             <a:avLst/>
           </a:prstGeom>
           <a:solidFill>
-            <a:srgbClr val="6B7082"/>
+            <a:srgbClr val="2F3C7E"/>
           </a:solidFill>
           <a:ln>
             <a:noFill/>
@@ -16823,13 +16935,13 @@
       </p:sp>
       <p:sp>
         <p:nvSpPr>
-          <p:cNvPr id="20" name="TextBox 19"/>
-          <p:cNvSpPr txBox="1"/>
-          <p:nvPr/>
-        </p:nvSpPr>
-        <p:spPr>
-          <a:xfrm>
-            <a:off x="8269395" y="3289026"/>
+          <p:cNvPr id="23" name="TextBox 22"/>
+          <p:cNvSpPr txBox="1"/>
+          <p:nvPr/>
+        </p:nvSpPr>
+        <p:spPr>
+          <a:xfrm>
+            <a:off x="7371432" y="3580931"/>
             <a:ext cx="2286000" cy="291904"/>
           </a:xfrm>
           <a:prstGeom prst="rect">
@@ -16850,20 +16962,20 @@
                 </a:solidFill>
                 <a:latin typeface="Helvetica Neue"/>
               </a:rPr>
-              <a:t>61,201 views · 21 posts</a:t>
-            </a:r>
-          </a:p>
-        </p:txBody>
-      </p:sp>
-      <p:sp>
-        <p:nvSpPr>
-          <p:cNvPr id="21" name="TextBox 20"/>
-          <p:cNvSpPr txBox="1"/>
-          <p:nvPr/>
-        </p:nvSpPr>
-        <p:spPr>
-          <a:xfrm>
-            <a:off x="731520" y="3580931"/>
+              <a:t>47,704 views · 79 posts</a:t>
+            </a:r>
+          </a:p>
+        </p:txBody>
+      </p:sp>
+      <p:sp>
+        <p:nvSpPr>
+          <p:cNvPr id="24" name="TextBox 23"/>
+          <p:cNvSpPr txBox="1"/>
+          <p:nvPr/>
+        </p:nvSpPr>
+        <p:spPr>
+          <a:xfrm>
+            <a:off x="731520" y="3872835"/>
             <a:ext cx="3200400" cy="291904"/>
           </a:xfrm>
           <a:prstGeom prst="rect">
@@ -16891,14 +17003,14 @@
       </p:sp>
       <p:sp>
         <p:nvSpPr>
-          <p:cNvPr id="22" name="Rectangle 21"/>
+          <p:cNvPr id="25" name="Rectangle 24"/>
           <p:cNvSpPr/>
           <p:nvPr/>
         </p:nvSpPr>
         <p:spPr>
           <a:xfrm>
-            <a:off x="4114800" y="3644587"/>
-            <a:ext cx="3165292" cy="128016"/>
+            <a:off x="4114800" y="3936491"/>
+            <a:ext cx="3163400" cy="128016"/>
           </a:xfrm>
           <a:prstGeom prst="rect">
             <a:avLst/>
@@ -16935,13 +17047,13 @@
       </p:sp>
       <p:sp>
         <p:nvSpPr>
-          <p:cNvPr id="23" name="TextBox 22"/>
-          <p:cNvSpPr txBox="1"/>
-          <p:nvPr/>
-        </p:nvSpPr>
-        <p:spPr>
-          <a:xfrm>
-            <a:off x="7371532" y="3580931"/>
+          <p:cNvPr id="26" name="TextBox 25"/>
+          <p:cNvSpPr txBox="1"/>
+          <p:nvPr/>
+        </p:nvSpPr>
+        <p:spPr>
+          <a:xfrm>
+            <a:off x="7369640" y="3872835"/>
             <a:ext cx="2286000" cy="291904"/>
           </a:xfrm>
           <a:prstGeom prst="rect">
@@ -16969,13 +17081,13 @@
       </p:sp>
       <p:sp>
         <p:nvSpPr>
-          <p:cNvPr id="24" name="TextBox 23"/>
-          <p:cNvSpPr txBox="1"/>
-          <p:nvPr/>
-        </p:nvSpPr>
-        <p:spPr>
-          <a:xfrm>
-            <a:off x="731520" y="3872835"/>
+          <p:cNvPr id="27" name="TextBox 26"/>
+          <p:cNvSpPr txBox="1"/>
+          <p:nvPr/>
+        </p:nvSpPr>
+        <p:spPr>
+          <a:xfrm>
+            <a:off x="731520" y="4164740"/>
             <a:ext cx="3200400" cy="291904"/>
           </a:xfrm>
           <a:prstGeom prst="rect">
@@ -16996,21 +17108,469 @@
                 </a:solidFill>
                 <a:latin typeface="Helvetica Neue"/>
               </a:rPr>
-              <a:t>Elections &amp; Judicial</a:t>
-            </a:r>
-          </a:p>
-        </p:txBody>
-      </p:sp>
-      <p:sp>
-        <p:nvSpPr>
-          <p:cNvPr id="25" name="Rectangle 24"/>
+              <a:t>Community &amp; Culture</a:t>
+            </a:r>
+          </a:p>
+        </p:txBody>
+      </p:sp>
+      <p:sp>
+        <p:nvSpPr>
+          <p:cNvPr id="28" name="Rectangle 27"/>
           <p:cNvSpPr/>
           <p:nvPr/>
         </p:nvSpPr>
         <p:spPr>
           <a:xfrm>
-            <a:off x="4114800" y="3936491"/>
-            <a:ext cx="3090071" cy="128016"/>
+            <a:off x="4114800" y="4228396"/>
+            <a:ext cx="2668225" cy="128016"/>
+          </a:xfrm>
+          <a:prstGeom prst="rect">
+            <a:avLst/>
+          </a:prstGeom>
+          <a:solidFill>
+            <a:srgbClr val="141833"/>
+          </a:solidFill>
+          <a:ln>
+            <a:noFill/>
+          </a:ln>
+          <a:effectLst/>
+        </p:spPr>
+        <p:style>
+          <a:lnRef idx="1">
+            <a:schemeClr val="accent1"/>
+          </a:lnRef>
+          <a:fillRef idx="3">
+            <a:schemeClr val="accent1"/>
+          </a:fillRef>
+          <a:effectRef idx="2">
+            <a:schemeClr val="accent1"/>
+          </a:effectRef>
+          <a:fontRef idx="minor">
+            <a:schemeClr val="lt1"/>
+          </a:fontRef>
+        </p:style>
+        <p:txBody>
+          <a:bodyPr rtlCol="0" anchor="ctr"/>
+          <a:lstStyle/>
+          <a:p>
+            <a:pPr algn="ctr"/>
+          </a:p>
+        </p:txBody>
+      </p:sp>
+      <p:sp>
+        <p:nvSpPr>
+          <p:cNvPr id="29" name="TextBox 28"/>
+          <p:cNvSpPr txBox="1"/>
+          <p:nvPr/>
+        </p:nvSpPr>
+        <p:spPr>
+          <a:xfrm>
+            <a:off x="6874465" y="4164740"/>
+            <a:ext cx="2286000" cy="291904"/>
+          </a:xfrm>
+          <a:prstGeom prst="rect">
+            <a:avLst/>
+          </a:prstGeom>
+          <a:noFill/>
+        </p:spPr>
+        <p:txBody>
+          <a:bodyPr wrap="square" lIns="0" rIns="0" tIns="0" bIns="0">
+            <a:spAutoFit/>
+          </a:bodyPr>
+          <a:lstStyle/>
+          <a:p>
+            <a:r>
+              <a:rPr sz="900" b="0">
+                <a:solidFill>
+                  <a:srgbClr val="6B7082"/>
+                </a:solidFill>
+                <a:latin typeface="Helvetica Neue"/>
+              </a:rPr>
+              <a:t>40,214 views · 52 posts</a:t>
+            </a:r>
+          </a:p>
+        </p:txBody>
+      </p:sp>
+      <p:sp>
+        <p:nvSpPr>
+          <p:cNvPr id="30" name="TextBox 29"/>
+          <p:cNvSpPr txBox="1"/>
+          <p:nvPr/>
+        </p:nvSpPr>
+        <p:spPr>
+          <a:xfrm>
+            <a:off x="731520" y="4456644"/>
+            <a:ext cx="3200400" cy="291904"/>
+          </a:xfrm>
+          <a:prstGeom prst="rect">
+            <a:avLst/>
+          </a:prstGeom>
+          <a:noFill/>
+        </p:spPr>
+        <p:txBody>
+          <a:bodyPr wrap="square" lIns="0" rIns="0" tIns="0" bIns="0">
+            <a:spAutoFit/>
+          </a:bodyPr>
+          <a:lstStyle/>
+          <a:p>
+            <a:r>
+              <a:rPr sz="1100" b="1">
+                <a:solidFill>
+                  <a:srgbClr val="141833"/>
+                </a:solidFill>
+                <a:latin typeface="Helvetica Neue"/>
+              </a:rPr>
+              <a:t>Resident Highlights</a:t>
+            </a:r>
+          </a:p>
+        </p:txBody>
+      </p:sp>
+      <p:sp>
+        <p:nvSpPr>
+          <p:cNvPr id="31" name="Rectangle 30"/>
+          <p:cNvSpPr/>
+          <p:nvPr/>
+        </p:nvSpPr>
+        <p:spPr>
+          <a:xfrm>
+            <a:off x="4114800" y="4520301"/>
+            <a:ext cx="546397" cy="128016"/>
+          </a:xfrm>
+          <a:prstGeom prst="rect">
+            <a:avLst/>
+          </a:prstGeom>
+          <a:solidFill>
+            <a:srgbClr val="1B7A43"/>
+          </a:solidFill>
+          <a:ln>
+            <a:noFill/>
+          </a:ln>
+          <a:effectLst/>
+        </p:spPr>
+        <p:style>
+          <a:lnRef idx="1">
+            <a:schemeClr val="accent1"/>
+          </a:lnRef>
+          <a:fillRef idx="3">
+            <a:schemeClr val="accent1"/>
+          </a:fillRef>
+          <a:effectRef idx="2">
+            <a:schemeClr val="accent1"/>
+          </a:effectRef>
+          <a:fontRef idx="minor">
+            <a:schemeClr val="lt1"/>
+          </a:fontRef>
+        </p:style>
+        <p:txBody>
+          <a:bodyPr rtlCol="0" anchor="ctr"/>
+          <a:lstStyle/>
+          <a:p>
+            <a:pPr algn="ctr"/>
+          </a:p>
+        </p:txBody>
+      </p:sp>
+      <p:sp>
+        <p:nvSpPr>
+          <p:cNvPr id="32" name="TextBox 31"/>
+          <p:cNvSpPr txBox="1"/>
+          <p:nvPr/>
+        </p:nvSpPr>
+        <p:spPr>
+          <a:xfrm>
+            <a:off x="4752637" y="4456644"/>
+            <a:ext cx="2286000" cy="291904"/>
+          </a:xfrm>
+          <a:prstGeom prst="rect">
+            <a:avLst/>
+          </a:prstGeom>
+          <a:noFill/>
+        </p:spPr>
+        <p:txBody>
+          <a:bodyPr wrap="square" lIns="0" rIns="0" tIns="0" bIns="0">
+            <a:spAutoFit/>
+          </a:bodyPr>
+          <a:lstStyle/>
+          <a:p>
+            <a:r>
+              <a:rPr sz="900" b="0">
+                <a:solidFill>
+                  <a:srgbClr val="6B7082"/>
+                </a:solidFill>
+                <a:latin typeface="Helvetica Neue"/>
+              </a:rPr>
+              <a:t>8,235 views · 8 posts</a:t>
+            </a:r>
+          </a:p>
+        </p:txBody>
+      </p:sp>
+      <p:sp>
+        <p:nvSpPr>
+          <p:cNvPr id="33" name="TextBox 32"/>
+          <p:cNvSpPr txBox="1"/>
+          <p:nvPr/>
+        </p:nvSpPr>
+        <p:spPr>
+          <a:xfrm>
+            <a:off x="731520" y="4748549"/>
+            <a:ext cx="3200400" cy="291904"/>
+          </a:xfrm>
+          <a:prstGeom prst="rect">
+            <a:avLst/>
+          </a:prstGeom>
+          <a:noFill/>
+        </p:spPr>
+        <p:txBody>
+          <a:bodyPr wrap="square" lIns="0" rIns="0" tIns="0" bIns="0">
+            <a:spAutoFit/>
+          </a:bodyPr>
+          <a:lstStyle/>
+          <a:p>
+            <a:r>
+              <a:rPr sz="1100" b="1">
+                <a:solidFill>
+                  <a:srgbClr val="141833"/>
+                </a:solidFill>
+                <a:latin typeface="Helvetica Neue"/>
+              </a:rPr>
+              <a:t>American Pride</a:t>
+            </a:r>
+          </a:p>
+        </p:txBody>
+      </p:sp>
+      <p:sp>
+        <p:nvSpPr>
+          <p:cNvPr id="34" name="Rectangle 33"/>
+          <p:cNvSpPr/>
+          <p:nvPr/>
+        </p:nvSpPr>
+        <p:spPr>
+          <a:xfrm>
+            <a:off x="4114800" y="4812205"/>
+            <a:ext cx="514217" cy="128016"/>
+          </a:xfrm>
+          <a:prstGeom prst="rect">
+            <a:avLst/>
+          </a:prstGeom>
+          <a:solidFill>
+            <a:srgbClr val="990011"/>
+          </a:solidFill>
+          <a:ln>
+            <a:noFill/>
+          </a:ln>
+          <a:effectLst/>
+        </p:spPr>
+        <p:style>
+          <a:lnRef idx="1">
+            <a:schemeClr val="accent1"/>
+          </a:lnRef>
+          <a:fillRef idx="3">
+            <a:schemeClr val="accent1"/>
+          </a:fillRef>
+          <a:effectRef idx="2">
+            <a:schemeClr val="accent1"/>
+          </a:effectRef>
+          <a:fontRef idx="minor">
+            <a:schemeClr val="lt1"/>
+          </a:fontRef>
+        </p:style>
+        <p:txBody>
+          <a:bodyPr rtlCol="0" anchor="ctr"/>
+          <a:lstStyle/>
+          <a:p>
+            <a:pPr algn="ctr"/>
+          </a:p>
+        </p:txBody>
+      </p:sp>
+      <p:sp>
+        <p:nvSpPr>
+          <p:cNvPr id="35" name="TextBox 34"/>
+          <p:cNvSpPr txBox="1"/>
+          <p:nvPr/>
+        </p:nvSpPr>
+        <p:spPr>
+          <a:xfrm>
+            <a:off x="4720457" y="4748549"/>
+            <a:ext cx="2286000" cy="291904"/>
+          </a:xfrm>
+          <a:prstGeom prst="rect">
+            <a:avLst/>
+          </a:prstGeom>
+          <a:noFill/>
+        </p:spPr>
+        <p:txBody>
+          <a:bodyPr wrap="square" lIns="0" rIns="0" tIns="0" bIns="0">
+            <a:spAutoFit/>
+          </a:bodyPr>
+          <a:lstStyle/>
+          <a:p>
+            <a:r>
+              <a:rPr sz="900" b="0">
+                <a:solidFill>
+                  <a:srgbClr val="6B7082"/>
+                </a:solidFill>
+                <a:latin typeface="Helvetica Neue"/>
+              </a:rPr>
+              <a:t>7,750 views · 15 posts</a:t>
+            </a:r>
+          </a:p>
+        </p:txBody>
+      </p:sp>
+      <p:sp>
+        <p:nvSpPr>
+          <p:cNvPr id="36" name="TextBox 35"/>
+          <p:cNvSpPr txBox="1"/>
+          <p:nvPr/>
+        </p:nvSpPr>
+        <p:spPr>
+          <a:xfrm>
+            <a:off x="731520" y="5040454"/>
+            <a:ext cx="3200400" cy="291904"/>
+          </a:xfrm>
+          <a:prstGeom prst="rect">
+            <a:avLst/>
+          </a:prstGeom>
+          <a:noFill/>
+        </p:spPr>
+        <p:txBody>
+          <a:bodyPr wrap="square" lIns="0" rIns="0" tIns="0" bIns="0">
+            <a:spAutoFit/>
+          </a:bodyPr>
+          <a:lstStyle/>
+          <a:p>
+            <a:r>
+              <a:rPr sz="1100" b="1">
+                <a:solidFill>
+                  <a:srgbClr val="141833"/>
+                </a:solidFill>
+                <a:latin typeface="Helvetica Neue"/>
+              </a:rPr>
+              <a:t>Political Individual Highlights</a:t>
+            </a:r>
+          </a:p>
+        </p:txBody>
+      </p:sp>
+      <p:sp>
+        <p:nvSpPr>
+          <p:cNvPr id="37" name="Rectangle 36"/>
+          <p:cNvSpPr/>
+          <p:nvPr/>
+        </p:nvSpPr>
+        <p:spPr>
+          <a:xfrm>
+            <a:off x="4114800" y="5104110"/>
+            <a:ext cx="424047" cy="128016"/>
+          </a:xfrm>
+          <a:prstGeom prst="rect">
+            <a:avLst/>
+          </a:prstGeom>
+          <a:solidFill>
+            <a:srgbClr val="2E86AB"/>
+          </a:solidFill>
+          <a:ln>
+            <a:noFill/>
+          </a:ln>
+          <a:effectLst/>
+        </p:spPr>
+        <p:style>
+          <a:lnRef idx="1">
+            <a:schemeClr val="accent1"/>
+          </a:lnRef>
+          <a:fillRef idx="3">
+            <a:schemeClr val="accent1"/>
+          </a:fillRef>
+          <a:effectRef idx="2">
+            <a:schemeClr val="accent1"/>
+          </a:effectRef>
+          <a:fontRef idx="minor">
+            <a:schemeClr val="lt1"/>
+          </a:fontRef>
+        </p:style>
+        <p:txBody>
+          <a:bodyPr rtlCol="0" anchor="ctr"/>
+          <a:lstStyle/>
+          <a:p>
+            <a:pPr algn="ctr"/>
+          </a:p>
+        </p:txBody>
+      </p:sp>
+      <p:sp>
+        <p:nvSpPr>
+          <p:cNvPr id="38" name="TextBox 37"/>
+          <p:cNvSpPr txBox="1"/>
+          <p:nvPr/>
+        </p:nvSpPr>
+        <p:spPr>
+          <a:xfrm>
+            <a:off x="4630287" y="5040454"/>
+            <a:ext cx="2286000" cy="291904"/>
+          </a:xfrm>
+          <a:prstGeom prst="rect">
+            <a:avLst/>
+          </a:prstGeom>
+          <a:noFill/>
+        </p:spPr>
+        <p:txBody>
+          <a:bodyPr wrap="square" lIns="0" rIns="0" tIns="0" bIns="0">
+            <a:spAutoFit/>
+          </a:bodyPr>
+          <a:lstStyle/>
+          <a:p>
+            <a:r>
+              <a:rPr sz="900" b="0">
+                <a:solidFill>
+                  <a:srgbClr val="6B7082"/>
+                </a:solidFill>
+                <a:latin typeface="Helvetica Neue"/>
+              </a:rPr>
+              <a:t>6,391 views · 11 posts</a:t>
+            </a:r>
+          </a:p>
+        </p:txBody>
+      </p:sp>
+      <p:sp>
+        <p:nvSpPr>
+          <p:cNvPr id="39" name="TextBox 38"/>
+          <p:cNvSpPr txBox="1"/>
+          <p:nvPr/>
+        </p:nvSpPr>
+        <p:spPr>
+          <a:xfrm>
+            <a:off x="731520" y="5332358"/>
+            <a:ext cx="3200400" cy="291904"/>
+          </a:xfrm>
+          <a:prstGeom prst="rect">
+            <a:avLst/>
+          </a:prstGeom>
+          <a:noFill/>
+        </p:spPr>
+        <p:txBody>
+          <a:bodyPr wrap="square" lIns="0" rIns="0" tIns="0" bIns="0">
+            <a:spAutoFit/>
+          </a:bodyPr>
+          <a:lstStyle/>
+          <a:p>
+            <a:r>
+              <a:rPr sz="1100" b="1">
+                <a:solidFill>
+                  <a:srgbClr val="141833"/>
+                </a:solidFill>
+                <a:latin typeface="Helvetica Neue"/>
+              </a:rPr>
+              <a:t>Legislation &amp; Policy Watch</a:t>
+            </a:r>
+          </a:p>
+        </p:txBody>
+      </p:sp>
+      <p:sp>
+        <p:nvSpPr>
+          <p:cNvPr id="40" name="Rectangle 39"/>
+          <p:cNvSpPr/>
+          <p:nvPr/>
+        </p:nvSpPr>
+        <p:spPr>
+          <a:xfrm>
+            <a:off x="4114800" y="5396015"/>
+            <a:ext cx="410843" cy="128016"/>
           </a:xfrm>
           <a:prstGeom prst="rect">
             <a:avLst/>
@@ -17047,573 +17607,13 @@
       </p:sp>
       <p:sp>
         <p:nvSpPr>
-          <p:cNvPr id="26" name="TextBox 25"/>
-          <p:cNvSpPr txBox="1"/>
-          <p:nvPr/>
-        </p:nvSpPr>
-        <p:spPr>
-          <a:xfrm>
-            <a:off x="7296311" y="3872835"/>
-            <a:ext cx="2286000" cy="291904"/>
-          </a:xfrm>
-          <a:prstGeom prst="rect">
-            <a:avLst/>
-          </a:prstGeom>
-          <a:noFill/>
-        </p:spPr>
-        <p:txBody>
-          <a:bodyPr wrap="square" lIns="0" rIns="0" tIns="0" bIns="0">
-            <a:spAutoFit/>
-          </a:bodyPr>
-          <a:lstStyle/>
-          <a:p>
-            <a:r>
-              <a:rPr sz="900" b="0">
-                <a:solidFill>
-                  <a:srgbClr val="6B7082"/>
-                </a:solidFill>
-                <a:latin typeface="Helvetica Neue"/>
-              </a:rPr>
-              <a:t>46,544 views · 76 posts</a:t>
-            </a:r>
-          </a:p>
-        </p:txBody>
-      </p:sp>
-      <p:sp>
-        <p:nvSpPr>
-          <p:cNvPr id="27" name="TextBox 26"/>
-          <p:cNvSpPr txBox="1"/>
-          <p:nvPr/>
-        </p:nvSpPr>
-        <p:spPr>
-          <a:xfrm>
-            <a:off x="731520" y="4164740"/>
-            <a:ext cx="3200400" cy="291904"/>
-          </a:xfrm>
-          <a:prstGeom prst="rect">
-            <a:avLst/>
-          </a:prstGeom>
-          <a:noFill/>
-        </p:spPr>
-        <p:txBody>
-          <a:bodyPr wrap="square" lIns="0" rIns="0" tIns="0" bIns="0">
-            <a:spAutoFit/>
-          </a:bodyPr>
-          <a:lstStyle/>
-          <a:p>
-            <a:r>
-              <a:rPr sz="1100" b="1">
-                <a:solidFill>
-                  <a:srgbClr val="141833"/>
-                </a:solidFill>
-                <a:latin typeface="Helvetica Neue"/>
-              </a:rPr>
-              <a:t>Community &amp; Culture</a:t>
-            </a:r>
-          </a:p>
-        </p:txBody>
-      </p:sp>
-      <p:sp>
-        <p:nvSpPr>
-          <p:cNvPr id="28" name="Rectangle 27"/>
-          <p:cNvSpPr/>
-          <p:nvPr/>
-        </p:nvSpPr>
-        <p:spPr>
-          <a:xfrm>
-            <a:off x="4114800" y="4228396"/>
-            <a:ext cx="2669821" cy="128016"/>
-          </a:xfrm>
-          <a:prstGeom prst="rect">
-            <a:avLst/>
-          </a:prstGeom>
-          <a:solidFill>
-            <a:srgbClr val="141833"/>
-          </a:solidFill>
-          <a:ln>
-            <a:noFill/>
-          </a:ln>
-          <a:effectLst/>
-        </p:spPr>
-        <p:style>
-          <a:lnRef idx="1">
-            <a:schemeClr val="accent1"/>
-          </a:lnRef>
-          <a:fillRef idx="3">
-            <a:schemeClr val="accent1"/>
-          </a:fillRef>
-          <a:effectRef idx="2">
-            <a:schemeClr val="accent1"/>
-          </a:effectRef>
-          <a:fontRef idx="minor">
-            <a:schemeClr val="lt1"/>
-          </a:fontRef>
-        </p:style>
-        <p:txBody>
-          <a:bodyPr rtlCol="0" anchor="ctr"/>
-          <a:lstStyle/>
-          <a:p>
-            <a:pPr algn="ctr"/>
-          </a:p>
-        </p:txBody>
-      </p:sp>
-      <p:sp>
-        <p:nvSpPr>
-          <p:cNvPr id="29" name="TextBox 28"/>
-          <p:cNvSpPr txBox="1"/>
-          <p:nvPr/>
-        </p:nvSpPr>
-        <p:spPr>
-          <a:xfrm>
-            <a:off x="6876061" y="4164740"/>
-            <a:ext cx="2286000" cy="291904"/>
-          </a:xfrm>
-          <a:prstGeom prst="rect">
-            <a:avLst/>
-          </a:prstGeom>
-          <a:noFill/>
-        </p:spPr>
-        <p:txBody>
-          <a:bodyPr wrap="square" lIns="0" rIns="0" tIns="0" bIns="0">
-            <a:spAutoFit/>
-          </a:bodyPr>
-          <a:lstStyle/>
-          <a:p>
-            <a:r>
-              <a:rPr sz="900" b="0">
-                <a:solidFill>
-                  <a:srgbClr val="6B7082"/>
-                </a:solidFill>
-                <a:latin typeface="Helvetica Neue"/>
-              </a:rPr>
-              <a:t>40,214 views · 52 posts</a:t>
-            </a:r>
-          </a:p>
-        </p:txBody>
-      </p:sp>
-      <p:sp>
-        <p:nvSpPr>
-          <p:cNvPr id="30" name="TextBox 29"/>
-          <p:cNvSpPr txBox="1"/>
-          <p:nvPr/>
-        </p:nvSpPr>
-        <p:spPr>
-          <a:xfrm>
-            <a:off x="731520" y="4456644"/>
-            <a:ext cx="3200400" cy="291904"/>
-          </a:xfrm>
-          <a:prstGeom prst="rect">
-            <a:avLst/>
-          </a:prstGeom>
-          <a:noFill/>
-        </p:spPr>
-        <p:txBody>
-          <a:bodyPr wrap="square" lIns="0" rIns="0" tIns="0" bIns="0">
-            <a:spAutoFit/>
-          </a:bodyPr>
-          <a:lstStyle/>
-          <a:p>
-            <a:r>
-              <a:rPr sz="1100" b="1">
-                <a:solidFill>
-                  <a:srgbClr val="141833"/>
-                </a:solidFill>
-                <a:latin typeface="Helvetica Neue"/>
-              </a:rPr>
-              <a:t>Resident Highlights</a:t>
-            </a:r>
-          </a:p>
-        </p:txBody>
-      </p:sp>
-      <p:sp>
-        <p:nvSpPr>
-          <p:cNvPr id="31" name="Rectangle 30"/>
-          <p:cNvSpPr/>
-          <p:nvPr/>
-        </p:nvSpPr>
-        <p:spPr>
-          <a:xfrm>
-            <a:off x="4114800" y="4520301"/>
-            <a:ext cx="546525" cy="128016"/>
-          </a:xfrm>
-          <a:prstGeom prst="rect">
-            <a:avLst/>
-          </a:prstGeom>
-          <a:solidFill>
-            <a:srgbClr val="1B7A43"/>
-          </a:solidFill>
-          <a:ln>
-            <a:noFill/>
-          </a:ln>
-          <a:effectLst/>
-        </p:spPr>
-        <p:style>
-          <a:lnRef idx="1">
-            <a:schemeClr val="accent1"/>
-          </a:lnRef>
-          <a:fillRef idx="3">
-            <a:schemeClr val="accent1"/>
-          </a:fillRef>
-          <a:effectRef idx="2">
-            <a:schemeClr val="accent1"/>
-          </a:effectRef>
-          <a:fontRef idx="minor">
-            <a:schemeClr val="lt1"/>
-          </a:fontRef>
-        </p:style>
-        <p:txBody>
-          <a:bodyPr rtlCol="0" anchor="ctr"/>
-          <a:lstStyle/>
-          <a:p>
-            <a:pPr algn="ctr"/>
-          </a:p>
-        </p:txBody>
-      </p:sp>
-      <p:sp>
-        <p:nvSpPr>
-          <p:cNvPr id="32" name="TextBox 31"/>
-          <p:cNvSpPr txBox="1"/>
-          <p:nvPr/>
-        </p:nvSpPr>
-        <p:spPr>
-          <a:xfrm>
-            <a:off x="4752765" y="4456644"/>
-            <a:ext cx="2286000" cy="291904"/>
-          </a:xfrm>
-          <a:prstGeom prst="rect">
-            <a:avLst/>
-          </a:prstGeom>
-          <a:noFill/>
-        </p:spPr>
-        <p:txBody>
-          <a:bodyPr wrap="square" lIns="0" rIns="0" tIns="0" bIns="0">
-            <a:spAutoFit/>
-          </a:bodyPr>
-          <a:lstStyle/>
-          <a:p>
-            <a:r>
-              <a:rPr sz="900" b="0">
-                <a:solidFill>
-                  <a:srgbClr val="6B7082"/>
-                </a:solidFill>
-                <a:latin typeface="Helvetica Neue"/>
-              </a:rPr>
-              <a:t>8,232 views · 8 posts</a:t>
-            </a:r>
-          </a:p>
-        </p:txBody>
-      </p:sp>
-      <p:sp>
-        <p:nvSpPr>
-          <p:cNvPr id="33" name="TextBox 32"/>
-          <p:cNvSpPr txBox="1"/>
-          <p:nvPr/>
-        </p:nvSpPr>
-        <p:spPr>
-          <a:xfrm>
-            <a:off x="731520" y="4748549"/>
-            <a:ext cx="3200400" cy="291904"/>
-          </a:xfrm>
-          <a:prstGeom prst="rect">
-            <a:avLst/>
-          </a:prstGeom>
-          <a:noFill/>
-        </p:spPr>
-        <p:txBody>
-          <a:bodyPr wrap="square" lIns="0" rIns="0" tIns="0" bIns="0">
-            <a:spAutoFit/>
-          </a:bodyPr>
-          <a:lstStyle/>
-          <a:p>
-            <a:r>
-              <a:rPr sz="1100" b="1">
-                <a:solidFill>
-                  <a:srgbClr val="141833"/>
-                </a:solidFill>
-                <a:latin typeface="Helvetica Neue"/>
-              </a:rPr>
-              <a:t>American Pride</a:t>
-            </a:r>
-          </a:p>
-        </p:txBody>
-      </p:sp>
-      <p:sp>
-        <p:nvSpPr>
-          <p:cNvPr id="34" name="Rectangle 33"/>
-          <p:cNvSpPr/>
-          <p:nvPr/>
-        </p:nvSpPr>
-        <p:spPr>
-          <a:xfrm>
-            <a:off x="4114800" y="4812205"/>
-            <a:ext cx="513994" cy="128016"/>
-          </a:xfrm>
-          <a:prstGeom prst="rect">
-            <a:avLst/>
-          </a:prstGeom>
-          <a:solidFill>
-            <a:srgbClr val="990011"/>
-          </a:solidFill>
-          <a:ln>
-            <a:noFill/>
-          </a:ln>
-          <a:effectLst/>
-        </p:spPr>
-        <p:style>
-          <a:lnRef idx="1">
-            <a:schemeClr val="accent1"/>
-          </a:lnRef>
-          <a:fillRef idx="3">
-            <a:schemeClr val="accent1"/>
-          </a:fillRef>
-          <a:effectRef idx="2">
-            <a:schemeClr val="accent1"/>
-          </a:effectRef>
-          <a:fontRef idx="minor">
-            <a:schemeClr val="lt1"/>
-          </a:fontRef>
-        </p:style>
-        <p:txBody>
-          <a:bodyPr rtlCol="0" anchor="ctr"/>
-          <a:lstStyle/>
-          <a:p>
-            <a:pPr algn="ctr"/>
-          </a:p>
-        </p:txBody>
-      </p:sp>
-      <p:sp>
-        <p:nvSpPr>
-          <p:cNvPr id="35" name="TextBox 34"/>
-          <p:cNvSpPr txBox="1"/>
-          <p:nvPr/>
-        </p:nvSpPr>
-        <p:spPr>
-          <a:xfrm>
-            <a:off x="4720234" y="4748549"/>
-            <a:ext cx="2286000" cy="291904"/>
-          </a:xfrm>
-          <a:prstGeom prst="rect">
-            <a:avLst/>
-          </a:prstGeom>
-          <a:noFill/>
-        </p:spPr>
-        <p:txBody>
-          <a:bodyPr wrap="square" lIns="0" rIns="0" tIns="0" bIns="0">
-            <a:spAutoFit/>
-          </a:bodyPr>
-          <a:lstStyle/>
-          <a:p>
-            <a:r>
-              <a:rPr sz="900" b="0">
-                <a:solidFill>
-                  <a:srgbClr val="6B7082"/>
-                </a:solidFill>
-                <a:latin typeface="Helvetica Neue"/>
-              </a:rPr>
-              <a:t>7,742 views · 15 posts</a:t>
-            </a:r>
-          </a:p>
-        </p:txBody>
-      </p:sp>
-      <p:sp>
-        <p:nvSpPr>
-          <p:cNvPr id="36" name="TextBox 35"/>
-          <p:cNvSpPr txBox="1"/>
-          <p:nvPr/>
-        </p:nvSpPr>
-        <p:spPr>
-          <a:xfrm>
-            <a:off x="731520" y="5040454"/>
-            <a:ext cx="3200400" cy="291904"/>
-          </a:xfrm>
-          <a:prstGeom prst="rect">
-            <a:avLst/>
-          </a:prstGeom>
-          <a:noFill/>
-        </p:spPr>
-        <p:txBody>
-          <a:bodyPr wrap="square" lIns="0" rIns="0" tIns="0" bIns="0">
-            <a:spAutoFit/>
-          </a:bodyPr>
-          <a:lstStyle/>
-          <a:p>
-            <a:r>
-              <a:rPr sz="1100" b="1">
-                <a:solidFill>
-                  <a:srgbClr val="141833"/>
-                </a:solidFill>
-                <a:latin typeface="Helvetica Neue"/>
-              </a:rPr>
-              <a:t>Political Individual Highlights</a:t>
-            </a:r>
-          </a:p>
-        </p:txBody>
-      </p:sp>
-      <p:sp>
-        <p:nvSpPr>
-          <p:cNvPr id="37" name="Rectangle 36"/>
-          <p:cNvSpPr/>
-          <p:nvPr/>
-        </p:nvSpPr>
-        <p:spPr>
-          <a:xfrm>
-            <a:off x="4114800" y="5104110"/>
-            <a:ext cx="417794" cy="128016"/>
-          </a:xfrm>
-          <a:prstGeom prst="rect">
-            <a:avLst/>
-          </a:prstGeom>
-          <a:solidFill>
-            <a:srgbClr val="2E86AB"/>
-          </a:solidFill>
-          <a:ln>
-            <a:noFill/>
-          </a:ln>
-          <a:effectLst/>
-        </p:spPr>
-        <p:style>
-          <a:lnRef idx="1">
-            <a:schemeClr val="accent1"/>
-          </a:lnRef>
-          <a:fillRef idx="3">
-            <a:schemeClr val="accent1"/>
-          </a:fillRef>
-          <a:effectRef idx="2">
-            <a:schemeClr val="accent1"/>
-          </a:effectRef>
-          <a:fontRef idx="minor">
-            <a:schemeClr val="lt1"/>
-          </a:fontRef>
-        </p:style>
-        <p:txBody>
-          <a:bodyPr rtlCol="0" anchor="ctr"/>
-          <a:lstStyle/>
-          <a:p>
-            <a:pPr algn="ctr"/>
-          </a:p>
-        </p:txBody>
-      </p:sp>
-      <p:sp>
-        <p:nvSpPr>
-          <p:cNvPr id="38" name="TextBox 37"/>
-          <p:cNvSpPr txBox="1"/>
-          <p:nvPr/>
-        </p:nvSpPr>
-        <p:spPr>
-          <a:xfrm>
-            <a:off x="4624034" y="5040454"/>
-            <a:ext cx="2286000" cy="291904"/>
-          </a:xfrm>
-          <a:prstGeom prst="rect">
-            <a:avLst/>
-          </a:prstGeom>
-          <a:noFill/>
-        </p:spPr>
-        <p:txBody>
-          <a:bodyPr wrap="square" lIns="0" rIns="0" tIns="0" bIns="0">
-            <a:spAutoFit/>
-          </a:bodyPr>
-          <a:lstStyle/>
-          <a:p>
-            <a:r>
-              <a:rPr sz="900" b="0">
-                <a:solidFill>
-                  <a:srgbClr val="6B7082"/>
-                </a:solidFill>
-                <a:latin typeface="Helvetica Neue"/>
-              </a:rPr>
-              <a:t>6,293 views · 9 posts</a:t>
-            </a:r>
-          </a:p>
-        </p:txBody>
-      </p:sp>
-      <p:sp>
-        <p:nvSpPr>
-          <p:cNvPr id="39" name="TextBox 38"/>
-          <p:cNvSpPr txBox="1"/>
-          <p:nvPr/>
-        </p:nvSpPr>
-        <p:spPr>
-          <a:xfrm>
-            <a:off x="731520" y="5332358"/>
-            <a:ext cx="3200400" cy="291904"/>
-          </a:xfrm>
-          <a:prstGeom prst="rect">
-            <a:avLst/>
-          </a:prstGeom>
-          <a:noFill/>
-        </p:spPr>
-        <p:txBody>
-          <a:bodyPr wrap="square" lIns="0" rIns="0" tIns="0" bIns="0">
-            <a:spAutoFit/>
-          </a:bodyPr>
-          <a:lstStyle/>
-          <a:p>
-            <a:r>
-              <a:rPr sz="1100" b="1">
-                <a:solidFill>
-                  <a:srgbClr val="141833"/>
-                </a:solidFill>
-                <a:latin typeface="Helvetica Neue"/>
-              </a:rPr>
-              <a:t>Legislation &amp; Policy Watch</a:t>
-            </a:r>
-          </a:p>
-        </p:txBody>
-      </p:sp>
-      <p:sp>
-        <p:nvSpPr>
-          <p:cNvPr id="40" name="Rectangle 39"/>
-          <p:cNvSpPr/>
-          <p:nvPr/>
-        </p:nvSpPr>
-        <p:spPr>
-          <a:xfrm>
-            <a:off x="4114800" y="5396015"/>
-            <a:ext cx="411088" cy="128016"/>
-          </a:xfrm>
-          <a:prstGeom prst="rect">
-            <a:avLst/>
-          </a:prstGeom>
-          <a:solidFill>
-            <a:srgbClr val="2F3C7E"/>
-          </a:solidFill>
-          <a:ln>
-            <a:noFill/>
-          </a:ln>
-          <a:effectLst/>
-        </p:spPr>
-        <p:style>
-          <a:lnRef idx="1">
-            <a:schemeClr val="accent1"/>
-          </a:lnRef>
-          <a:fillRef idx="3">
-            <a:schemeClr val="accent1"/>
-          </a:fillRef>
-          <a:effectRef idx="2">
-            <a:schemeClr val="accent1"/>
-          </a:effectRef>
-          <a:fontRef idx="minor">
-            <a:schemeClr val="lt1"/>
-          </a:fontRef>
-        </p:style>
-        <p:txBody>
-          <a:bodyPr rtlCol="0" anchor="ctr"/>
-          <a:lstStyle/>
-          <a:p>
-            <a:pPr algn="ctr"/>
-          </a:p>
-        </p:txBody>
-      </p:sp>
-      <p:sp>
-        <p:nvSpPr>
           <p:cNvPr id="41" name="TextBox 40"/>
           <p:cNvSpPr txBox="1"/>
           <p:nvPr/>
         </p:nvSpPr>
         <p:spPr>
           <a:xfrm>
-            <a:off x="4617328" y="5332358"/>
+            <a:off x="4617083" y="5332358"/>
             <a:ext cx="2286000" cy="291904"/>
           </a:xfrm>
           <a:prstGeom prst="rect">
@@ -17682,7 +17682,7 @@
         <p:spPr>
           <a:xfrm>
             <a:off x="4114800" y="5687919"/>
-            <a:ext cx="73759" cy="128016"/>
+            <a:ext cx="73715" cy="128016"/>
           </a:xfrm>
           <a:prstGeom prst="rect">
             <a:avLst/>
@@ -17725,7 +17725,7 @@
         </p:nvSpPr>
         <p:spPr>
           <a:xfrm>
-            <a:off x="4279999" y="5624263"/>
+            <a:off x="4279955" y="5624263"/>
             <a:ext cx="2286000" cy="291904"/>
           </a:xfrm>
           <a:prstGeom prst="rect">
@@ -18342,7 +18342,7 @@
                 </a:solidFill>
                 <a:latin typeface="Georgia"/>
               </a:rPr>
-              <a:t>93,657</a:t>
+              <a:t>93,713</a:t>
             </a:r>
           </a:p>
         </p:txBody>
@@ -18376,7 +18376,7 @@
                 </a:solidFill>
                 <a:latin typeface="Helvetica Neue"/>
               </a:rPr>
-              <a:t>61 posts · 3,030 likes</a:t>
+              <a:t>61 posts · 3,031 likes</a:t>
             </a:r>
           </a:p>
         </p:txBody>
@@ -18410,7 +18410,7 @@
                 </a:solidFill>
                 <a:latin typeface="Helvetica Neue"/>
               </a:rPr>
-              <a:t>1,535 average views per post</a:t>
+              <a:t>1,536 average views per post</a:t>
             </a:r>
           </a:p>
         </p:txBody>
@@ -19378,7 +19378,7 @@
                 </a:solidFill>
                 <a:latin typeface="Georgia"/>
               </a:rPr>
-              <a:t>79,856</a:t>
+              <a:t>79,857</a:t>
             </a:r>
           </a:p>
         </p:txBody>
@@ -20190,7 +20190,7 @@
                 </a:solidFill>
                 <a:latin typeface="Georgia"/>
               </a:rPr>
-              <a:t>Military Service</a:t>
+              <a:t>FIFA / World Cup</a:t>
             </a:r>
           </a:p>
         </p:txBody>
@@ -20224,7 +20224,7 @@
                 </a:solidFill>
                 <a:latin typeface="Helvetica Neue"/>
               </a:rPr>
-              <a:t>Army/JROTC/veteran interviews — the human side of military service (NOT policy — that's Legislation Watch).</a:t>
+              <a:t>Sports commentary — split between celebration and critique.</a:t>
             </a:r>
           </a:p>
         </p:txBody>
@@ -20254,11 +20254,11 @@
             <a:r>
               <a:rPr sz="900" b="1">
                 <a:solidFill>
-                  <a:srgbClr val="C9A227"/>
-                </a:solidFill>
-                <a:latin typeface="Helvetica Neue"/>
-              </a:rPr>
-              <a:t>AUDIENCE (theoretical): Traditional / patriotic · Middle (40-55) + Older (55+), veterans + families</a:t>
+                  <a:srgbClr val="6B7082"/>
+                </a:solidFill>
+                <a:latin typeface="Helvetica Neue"/>
+              </a:rPr>
+              <a:t>AUDIENCE (theoretical): Sports commentary · Young-Middle (25-45), sports fans</a:t>
             </a:r>
           </a:p>
         </p:txBody>
@@ -20322,7 +20322,7 @@
             <a:avLst/>
           </a:prstGeom>
           <a:solidFill>
-            <a:srgbClr val="C9A227"/>
+            <a:srgbClr val="6B7082"/>
           </a:solidFill>
           <a:ln>
             <a:noFill/>
@@ -20376,7 +20376,7 @@
             <a:r>
               <a:rPr sz="1100" b="1">
                 <a:solidFill>
-                  <a:srgbClr val="C9A227"/>
+                  <a:srgbClr val="6B7082"/>
                 </a:solidFill>
                 <a:latin typeface="Helvetica Neue"/>
               </a:rPr>
@@ -20414,7 +20414,7 @@
                 </a:solidFill>
                 <a:latin typeface="Georgia"/>
               </a:rPr>
-              <a:t>62,534</a:t>
+              <a:t>62,595</a:t>
             </a:r>
           </a:p>
         </p:txBody>
@@ -20448,7 +20448,7 @@
                 </a:solidFill>
                 <a:latin typeface="Helvetica Neue"/>
               </a:rPr>
-              <a:t>20 posts · 3,174 likes</a:t>
+              <a:t>24 posts · 1,462 likes</a:t>
             </a:r>
           </a:p>
         </p:txBody>
@@ -20482,7 +20482,7 @@
                 </a:solidFill>
                 <a:latin typeface="Helvetica Neue"/>
               </a:rPr>
-              <a:t>3,127 average views per post</a:t>
+              <a:t>2,608 average views per post</a:t>
             </a:r>
           </a:p>
         </p:txBody>
@@ -20512,7 +20512,7 @@
             <a:r>
               <a:rPr sz="1100" b="1">
                 <a:solidFill>
-                  <a:srgbClr val="C9A227"/>
+                  <a:srgbClr val="6B7082"/>
                 </a:solidFill>
                 <a:latin typeface="Helvetica Neue"/>
               </a:rPr>
@@ -20580,7 +20580,7 @@
             <a:avLst/>
           </a:prstGeom>
           <a:solidFill>
-            <a:srgbClr val="C9A227"/>
+            <a:srgbClr val="6B7082"/>
           </a:solidFill>
           <a:ln>
             <a:noFill/>
@@ -20634,11 +20634,11 @@
             <a:r>
               <a:rPr sz="1000" b="1">
                 <a:solidFill>
-                  <a:srgbClr val="C9A227"/>
-                </a:solidFill>
-                <a:latin typeface="Helvetica Neue"/>
-              </a:rPr>
-              <a:t>#1  ·  TT  ·  37,900 views</a:t>
+                  <a:srgbClr val="6B7082"/>
+                </a:solidFill>
+                <a:latin typeface="Helvetica Neue"/>
+              </a:rPr>
+              <a:t>#1  ·  TT  ·  27,400 views</a:t>
             </a:r>
           </a:p>
         </p:txBody>
@@ -20672,7 +20672,7 @@
                 </a:solidFill>
                 <a:latin typeface="Helvetica Neue"/>
               </a:rPr>
-              <a:t>Combat jobs aren't for everyone. See how your MOS determines deployment likelihood and wha</a:t>
+              <a:t>Watch party in Stonewood Mall! Over 25,000 people showed up for this epic event. Cost $300</a:t>
             </a:r>
           </a:p>
         </p:txBody>
@@ -20736,7 +20736,7 @@
             <a:avLst/>
           </a:prstGeom>
           <a:solidFill>
-            <a:srgbClr val="C9A227"/>
+            <a:srgbClr val="6B7082"/>
           </a:solidFill>
           <a:ln>
             <a:noFill/>
@@ -20790,11 +20790,11 @@
             <a:r>
               <a:rPr sz="1000" b="1">
                 <a:solidFill>
-                  <a:srgbClr val="C9A227"/>
-                </a:solidFill>
-                <a:latin typeface="Helvetica Neue"/>
-              </a:rPr>
-              <a:t>#2  ·  IG  ·  5,139 views</a:t>
+                  <a:srgbClr val="6B7082"/>
+                </a:solidFill>
+                <a:latin typeface="Helvetica Neue"/>
+              </a:rPr>
+              <a:t>#2  ·  IG  ·  7,180 views</a:t>
             </a:r>
           </a:p>
         </p:txBody>
@@ -20828,7 +20828,7 @@
                 </a:solidFill>
                 <a:latin typeface="Helvetica Neue"/>
               </a:rPr>
-              <a:t>Not everyone deployed sees combat, even with 20 years in. Your MOS matters. Logistics migh</a:t>
+              <a:t>25,000+ people gathered for a watch party at Stonewood Mall! Despite the $300k cost, it wa</a:t>
             </a:r>
           </a:p>
         </p:txBody>
@@ -20892,7 +20892,7 @@
             <a:avLst/>
           </a:prstGeom>
           <a:solidFill>
-            <a:srgbClr val="C9A227"/>
+            <a:srgbClr val="6B7082"/>
           </a:solidFill>
           <a:ln>
             <a:noFill/>
@@ -20946,11 +20946,11 @@
             <a:r>
               <a:rPr sz="1000" b="1">
                 <a:solidFill>
-                  <a:srgbClr val="C9A227"/>
-                </a:solidFill>
-                <a:latin typeface="Helvetica Neue"/>
-              </a:rPr>
-              <a:t>#3  ·  IG  ·  4,043 views</a:t>
+                  <a:srgbClr val="6B7082"/>
+                </a:solidFill>
+                <a:latin typeface="Helvetica Neue"/>
+              </a:rPr>
+              <a:t>#3  ·  FB  ·  6,355 views</a:t>
             </a:r>
           </a:p>
         </p:txBody>
@@ -20984,7 +20984,7 @@
                 </a:solidFill>
                 <a:latin typeface="Helvetica Neue"/>
               </a:rPr>
-              <a:t>Dreamed of college, but the cost was a barrier. Joined the Army, and they paid for everyth</a:t>
+              <a:t>Over 25,000 people gathered at Stonewood Mall for a massive watch party. Despite the $300,</a:t>
             </a:r>
           </a:p>
         </p:txBody>
@@ -21058,7 +21058,7 @@
             <a:r>
               <a:rPr sz="1000" b="1">
                 <a:solidFill>
-                  <a:srgbClr val="C9A227"/>
+                  <a:srgbClr val="6B7082"/>
                 </a:solidFill>
                 <a:latin typeface="Helvetica Neue"/>
               </a:rPr>
@@ -21096,7 +21096,7 @@
                 </a:solidFill>
                 <a:latin typeface="Helvetica Neue"/>
               </a:rPr>
-              <a:t>Strong performer. Keep investing — Military Service is a proven driver of reach.</a:t>
+              <a:t>Solid mid-tier. Worth continued investment. Test scaling to see if it holds.</a:t>
             </a:r>
           </a:p>
         </p:txBody>
@@ -21226,7 +21226,7 @@
                 </a:solidFill>
                 <a:latin typeface="Georgia"/>
               </a:rPr>
-              <a:t>FIFA / World Cup</a:t>
+              <a:t>Military Service</a:t>
             </a:r>
           </a:p>
         </p:txBody>
@@ -21260,7 +21260,7 @@
                 </a:solidFill>
                 <a:latin typeface="Helvetica Neue"/>
               </a:rPr>
-              <a:t>Sports commentary — split between celebration and critique.</a:t>
+              <a:t>Army/JROTC/veteran interviews — the human side of military service (NOT policy — that's Legislation Watch).</a:t>
             </a:r>
           </a:p>
         </p:txBody>
@@ -21290,11 +21290,11 @@
             <a:r>
               <a:rPr sz="900" b="1">
                 <a:solidFill>
-                  <a:srgbClr val="6B7082"/>
-                </a:solidFill>
-                <a:latin typeface="Helvetica Neue"/>
-              </a:rPr>
-              <a:t>AUDIENCE (theoretical): Sports commentary · Young-Middle (25-45), sports fans</a:t>
+                  <a:srgbClr val="C9A227"/>
+                </a:solidFill>
+                <a:latin typeface="Helvetica Neue"/>
+              </a:rPr>
+              <a:t>AUDIENCE (theoretical): Traditional / patriotic · Middle (40-55) + Older (55+), veterans + families</a:t>
             </a:r>
           </a:p>
         </p:txBody>
@@ -21358,7 +21358,7 @@
             <a:avLst/>
           </a:prstGeom>
           <a:solidFill>
-            <a:srgbClr val="6B7082"/>
+            <a:srgbClr val="C9A227"/>
           </a:solidFill>
           <a:ln>
             <a:noFill/>
@@ -21412,7 +21412,7 @@
             <a:r>
               <a:rPr sz="1100" b="1">
                 <a:solidFill>
-                  <a:srgbClr val="6B7082"/>
+                  <a:srgbClr val="C9A227"/>
                 </a:solidFill>
                 <a:latin typeface="Helvetica Neue"/>
               </a:rPr>
@@ -21450,7 +21450,7 @@
                 </a:solidFill>
                 <a:latin typeface="Georgia"/>
               </a:rPr>
-              <a:t>61,201</a:t>
+              <a:t>62,534</a:t>
             </a:r>
           </a:p>
         </p:txBody>
@@ -21484,7 +21484,7 @@
                 </a:solidFill>
                 <a:latin typeface="Helvetica Neue"/>
               </a:rPr>
-              <a:t>21 posts · 1,445 likes</a:t>
+              <a:t>20 posts · 3,174 likes</a:t>
             </a:r>
           </a:p>
         </p:txBody>
@@ -21518,7 +21518,7 @@
                 </a:solidFill>
                 <a:latin typeface="Helvetica Neue"/>
               </a:rPr>
-              <a:t>2,914 average views per post</a:t>
+              <a:t>3,127 average views per post</a:t>
             </a:r>
           </a:p>
         </p:txBody>
@@ -21548,7 +21548,7 @@
             <a:r>
               <a:rPr sz="1100" b="1">
                 <a:solidFill>
-                  <a:srgbClr val="6B7082"/>
+                  <a:srgbClr val="C9A227"/>
                 </a:solidFill>
                 <a:latin typeface="Helvetica Neue"/>
               </a:rPr>
@@ -21616,7 +21616,7 @@
             <a:avLst/>
           </a:prstGeom>
           <a:solidFill>
-            <a:srgbClr val="6B7082"/>
+            <a:srgbClr val="C9A227"/>
           </a:solidFill>
           <a:ln>
             <a:noFill/>
@@ -21670,11 +21670,11 @@
             <a:r>
               <a:rPr sz="1000" b="1">
                 <a:solidFill>
-                  <a:srgbClr val="6B7082"/>
-                </a:solidFill>
-                <a:latin typeface="Helvetica Neue"/>
-              </a:rPr>
-              <a:t>#1  ·  TT  ·  27,400 views</a:t>
+                  <a:srgbClr val="C9A227"/>
+                </a:solidFill>
+                <a:latin typeface="Helvetica Neue"/>
+              </a:rPr>
+              <a:t>#1  ·  TT  ·  37,900 views</a:t>
             </a:r>
           </a:p>
         </p:txBody>
@@ -21708,7 +21708,7 @@
                 </a:solidFill>
                 <a:latin typeface="Helvetica Neue"/>
               </a:rPr>
-              <a:t>Watch party in Stonewood Mall! Over 25,000 people showed up for this epic event. Cost $300</a:t>
+              <a:t>Combat jobs aren't for everyone. See how your MOS determines deployment likelihood and wha</a:t>
             </a:r>
           </a:p>
         </p:txBody>
@@ -21772,7 +21772,7 @@
             <a:avLst/>
           </a:prstGeom>
           <a:solidFill>
-            <a:srgbClr val="6B7082"/>
+            <a:srgbClr val="C9A227"/>
           </a:solidFill>
           <a:ln>
             <a:noFill/>
@@ -21826,11 +21826,11 @@
             <a:r>
               <a:rPr sz="1000" b="1">
                 <a:solidFill>
-                  <a:srgbClr val="6B7082"/>
-                </a:solidFill>
-                <a:latin typeface="Helvetica Neue"/>
-              </a:rPr>
-              <a:t>#2  ·  IG  ·  7,180 views</a:t>
+                  <a:srgbClr val="C9A227"/>
+                </a:solidFill>
+                <a:latin typeface="Helvetica Neue"/>
+              </a:rPr>
+              <a:t>#2  ·  IG  ·  5,139 views</a:t>
             </a:r>
           </a:p>
         </p:txBody>
@@ -21864,7 +21864,7 @@
                 </a:solidFill>
                 <a:latin typeface="Helvetica Neue"/>
               </a:rPr>
-              <a:t>25,000+ people gathered for a watch party at Stonewood Mall! Despite the $300k cost, it wa</a:t>
+              <a:t>Not everyone deployed sees combat, even with 20 years in. Your MOS matters. Logistics migh</a:t>
             </a:r>
           </a:p>
         </p:txBody>
@@ -21928,7 +21928,7 @@
             <a:avLst/>
           </a:prstGeom>
           <a:solidFill>
-            <a:srgbClr val="6B7082"/>
+            <a:srgbClr val="C9A227"/>
           </a:solidFill>
           <a:ln>
             <a:noFill/>
@@ -21982,11 +21982,11 @@
             <a:r>
               <a:rPr sz="1000" b="1">
                 <a:solidFill>
-                  <a:srgbClr val="6B7082"/>
-                </a:solidFill>
-                <a:latin typeface="Helvetica Neue"/>
-              </a:rPr>
-              <a:t>#3  ·  FB  ·  6,355 views</a:t>
+                  <a:srgbClr val="C9A227"/>
+                </a:solidFill>
+                <a:latin typeface="Helvetica Neue"/>
+              </a:rPr>
+              <a:t>#3  ·  IG  ·  4,043 views</a:t>
             </a:r>
           </a:p>
         </p:txBody>
@@ -22020,7 +22020,7 @@
                 </a:solidFill>
                 <a:latin typeface="Helvetica Neue"/>
               </a:rPr>
-              <a:t>Over 25,000 people gathered at Stonewood Mall for a massive watch party. Despite the $300,</a:t>
+              <a:t>Dreamed of college, but the cost was a barrier. Joined the Army, and they paid for everyth</a:t>
             </a:r>
           </a:p>
         </p:txBody>
@@ -22094,7 +22094,7 @@
             <a:r>
               <a:rPr sz="1000" b="1">
                 <a:solidFill>
-                  <a:srgbClr val="6B7082"/>
+                  <a:srgbClr val="C9A227"/>
                 </a:solidFill>
                 <a:latin typeface="Helvetica Neue"/>
               </a:rPr>
@@ -22132,7 +22132,7 @@
                 </a:solidFill>
                 <a:latin typeface="Helvetica Neue"/>
               </a:rPr>
-              <a:t>Solid mid-tier. Worth continued investment. Test scaling to see if it holds.</a:t>
+              <a:t>Strong performer. Keep investing — Military Service is a proven driver of reach.</a:t>
             </a:r>
           </a:p>
         </p:txBody>

--- a/SPONSOR_CONTENT_REPORT.pptx
+++ b/SPONSOR_CONTENT_REPORT.pptx
@@ -3327,7 +3327,7 @@
                 </a:solidFill>
                 <a:latin typeface="Helvetica Neue"/>
               </a:rPr>
-              <a:t>Reporting window: Jun 8 → 2026-09-09</a:t>
+              <a:t>Reporting window: Jun 8 → 2026-09-11</a:t>
             </a:r>
           </a:p>
         </p:txBody>
@@ -3783,7 +3783,7 @@
                 </a:solidFill>
                 <a:latin typeface="Georgia"/>
               </a:rPr>
-              <a:t>8,235</a:t>
+              <a:t>8,236</a:t>
             </a:r>
           </a:p>
         </p:txBody>
@@ -3851,7 +3851,7 @@
                 </a:solidFill>
                 <a:latin typeface="Helvetica Neue"/>
               </a:rPr>
-              <a:t>1,029 average views per post</a:t>
+              <a:t>1,030 average views per post</a:t>
             </a:r>
           </a:p>
         </p:txBody>
@@ -4949,7 +4949,7 @@
                 </a:solidFill>
                 <a:latin typeface="Helvetica Neue"/>
               </a:rPr>
-              <a:t>47,704 views · 79 posts · 604 avg</a:t>
+              <a:t>48,421 views · 79 posts · 613 avg</a:t>
             </a:r>
           </a:p>
         </p:txBody>
@@ -5031,7 +5031,7 @@
         <p:spPr>
           <a:xfrm>
             <a:off x="4206240" y="2720339"/>
-            <a:ext cx="5087479" cy="274320"/>
+            <a:ext cx="5078950" cy="274320"/>
           </a:xfrm>
           <a:prstGeom prst="rect">
             <a:avLst/>
@@ -5074,7 +5074,7 @@
         </p:nvSpPr>
         <p:spPr>
           <a:xfrm>
-            <a:off x="9385159" y="2651759"/>
+            <a:off x="9376630" y="2651759"/>
             <a:ext cx="2286000" cy="251460"/>
           </a:xfrm>
           <a:prstGeom prst="rect">
@@ -5095,7 +5095,7 @@
                 </a:solidFill>
                 <a:latin typeface="Helvetica Neue"/>
               </a:rPr>
-              <a:t>40,214 views · 52 posts · 773 avg</a:t>
+              <a:t>40,750 views · 54 posts · 755 avg</a:t>
             </a:r>
           </a:p>
         </p:txBody>
@@ -5108,7 +5108,7 @@
         </p:nvSpPr>
         <p:spPr>
           <a:xfrm>
-            <a:off x="9385159" y="2857499"/>
+            <a:off x="9376630" y="2857499"/>
             <a:ext cx="4572000" cy="251460"/>
           </a:xfrm>
           <a:prstGeom prst="rect">
@@ -5163,7 +5163,7 @@
                 </a:solidFill>
                 <a:latin typeface="Helvetica Neue"/>
               </a:rPr>
-              <a:t>American Pride</a:t>
+              <a:t>Political Individual Highlights</a:t>
             </a:r>
           </a:p>
         </p:txBody>
@@ -5177,7 +5177,153 @@
         <p:spPr>
           <a:xfrm>
             <a:off x="4206240" y="3223260"/>
-            <a:ext cx="980453" cy="274320"/>
+            <a:ext cx="1566186" cy="274320"/>
+          </a:xfrm>
+          <a:prstGeom prst="rect">
+            <a:avLst/>
+          </a:prstGeom>
+          <a:solidFill>
+            <a:srgbClr val="2E86AB"/>
+          </a:solidFill>
+          <a:ln>
+            <a:noFill/>
+          </a:ln>
+          <a:effectLst/>
+        </p:spPr>
+        <p:style>
+          <a:lnRef idx="1">
+            <a:schemeClr val="accent1"/>
+          </a:lnRef>
+          <a:fillRef idx="3">
+            <a:schemeClr val="accent1"/>
+          </a:fillRef>
+          <a:effectRef idx="2">
+            <a:schemeClr val="accent1"/>
+          </a:effectRef>
+          <a:fontRef idx="minor">
+            <a:schemeClr val="lt1"/>
+          </a:fontRef>
+        </p:style>
+        <p:txBody>
+          <a:bodyPr rtlCol="0" anchor="ctr"/>
+          <a:lstStyle/>
+          <a:p>
+            <a:pPr algn="ctr"/>
+          </a:p>
+        </p:txBody>
+      </p:sp>
+      <p:sp>
+        <p:nvSpPr>
+          <p:cNvPr id="16" name="TextBox 15"/>
+          <p:cNvSpPr txBox="1"/>
+          <p:nvPr/>
+        </p:nvSpPr>
+        <p:spPr>
+          <a:xfrm>
+            <a:off x="5863866" y="3154679"/>
+            <a:ext cx="2286000" cy="251460"/>
+          </a:xfrm>
+          <a:prstGeom prst="rect">
+            <a:avLst/>
+          </a:prstGeom>
+          <a:noFill/>
+        </p:spPr>
+        <p:txBody>
+          <a:bodyPr wrap="square" lIns="0" rIns="0" tIns="0" bIns="0">
+            <a:spAutoFit/>
+          </a:bodyPr>
+          <a:lstStyle/>
+          <a:p>
+            <a:r>
+              <a:rPr sz="900" b="0">
+                <a:solidFill>
+                  <a:srgbClr val="6B7082"/>
+                </a:solidFill>
+                <a:latin typeface="Helvetica Neue"/>
+              </a:rPr>
+              <a:t>12,566 views · 22 posts · 571 avg</a:t>
+            </a:r>
+          </a:p>
+        </p:txBody>
+      </p:sp>
+      <p:sp>
+        <p:nvSpPr>
+          <p:cNvPr id="17" name="TextBox 16"/>
+          <p:cNvSpPr txBox="1"/>
+          <p:nvPr/>
+        </p:nvSpPr>
+        <p:spPr>
+          <a:xfrm>
+            <a:off x="5863866" y="3360420"/>
+            <a:ext cx="4572000" cy="251460"/>
+          </a:xfrm>
+          <a:prstGeom prst="rect">
+            <a:avLst/>
+          </a:prstGeom>
+          <a:noFill/>
+        </p:spPr>
+        <p:txBody>
+          <a:bodyPr wrap="square" lIns="0" rIns="0" tIns="0" bIns="0">
+            <a:spAutoFit/>
+          </a:bodyPr>
+          <a:lstStyle/>
+          <a:p>
+            <a:r>
+              <a:rPr sz="800" b="0">
+                <a:solidFill>
+                  <a:srgbClr val="6B7082"/>
+                </a:solidFill>
+                <a:latin typeface="Helvetica Neue"/>
+              </a:rPr>
+              <a:t>Personal profile · Broad (voters, campaign-season readers)</a:t>
+            </a:r>
+          </a:p>
+        </p:txBody>
+      </p:sp>
+      <p:sp>
+        <p:nvSpPr>
+          <p:cNvPr id="18" name="TextBox 17"/>
+          <p:cNvSpPr txBox="1"/>
+          <p:nvPr/>
+        </p:nvSpPr>
+        <p:spPr>
+          <a:xfrm>
+            <a:off x="731520" y="3657600"/>
+            <a:ext cx="3200400" cy="502920"/>
+          </a:xfrm>
+          <a:prstGeom prst="rect">
+            <a:avLst/>
+          </a:prstGeom>
+          <a:noFill/>
+        </p:spPr>
+        <p:txBody>
+          <a:bodyPr wrap="square" lIns="0" rIns="0" tIns="0" bIns="0">
+            <a:spAutoFit/>
+          </a:bodyPr>
+          <a:lstStyle/>
+          <a:p>
+            <a:r>
+              <a:rPr sz="1200" b="1">
+                <a:solidFill>
+                  <a:srgbClr val="141833"/>
+                </a:solidFill>
+                <a:latin typeface="Helvetica Neue"/>
+              </a:rPr>
+              <a:t>American Pride</a:t>
+            </a:r>
+          </a:p>
+        </p:txBody>
+      </p:sp>
+      <p:sp>
+        <p:nvSpPr>
+          <p:cNvPr id="19" name="Rectangle 18"/>
+          <p:cNvSpPr/>
+          <p:nvPr/>
+        </p:nvSpPr>
+        <p:spPr>
+          <a:xfrm>
+            <a:off x="4206240" y="3726180"/>
+            <a:ext cx="966060" cy="274320"/>
           </a:xfrm>
           <a:prstGeom prst="rect">
             <a:avLst/>
@@ -5214,13 +5360,13 @@
       </p:sp>
       <p:sp>
         <p:nvSpPr>
-          <p:cNvPr id="16" name="TextBox 15"/>
-          <p:cNvSpPr txBox="1"/>
-          <p:nvPr/>
-        </p:nvSpPr>
-        <p:spPr>
-          <a:xfrm>
-            <a:off x="5278133" y="3154679"/>
+          <p:cNvPr id="20" name="TextBox 19"/>
+          <p:cNvSpPr txBox="1"/>
+          <p:nvPr/>
+        </p:nvSpPr>
+        <p:spPr>
+          <a:xfrm>
+            <a:off x="5263740" y="3657600"/>
             <a:ext cx="2286000" cy="251460"/>
           </a:xfrm>
           <a:prstGeom prst="rect">
@@ -5241,20 +5387,20 @@
                 </a:solidFill>
                 <a:latin typeface="Helvetica Neue"/>
               </a:rPr>
-              <a:t>7,750 views · 15 posts · 517 avg</a:t>
-            </a:r>
-          </a:p>
-        </p:txBody>
-      </p:sp>
-      <p:sp>
-        <p:nvSpPr>
-          <p:cNvPr id="17" name="TextBox 16"/>
-          <p:cNvSpPr txBox="1"/>
-          <p:nvPr/>
-        </p:nvSpPr>
-        <p:spPr>
-          <a:xfrm>
-            <a:off x="5278133" y="3360420"/>
+              <a:t>7,751 views · 15 posts · 517 avg</a:t>
+            </a:r>
+          </a:p>
+        </p:txBody>
+      </p:sp>
+      <p:sp>
+        <p:nvSpPr>
+          <p:cNvPr id="21" name="TextBox 20"/>
+          <p:cNvSpPr txBox="1"/>
+          <p:nvPr/>
+        </p:nvSpPr>
+        <p:spPr>
+          <a:xfrm>
+            <a:off x="5263740" y="3863340"/>
             <a:ext cx="4572000" cy="251460"/>
           </a:xfrm>
           <a:prstGeom prst="rect">
@@ -5276,152 +5422,6 @@
                 <a:latin typeface="Helvetica Neue"/>
               </a:rPr>
               <a:t>Traditional / patriotic · Older (55+), values-driven</a:t>
-            </a:r>
-          </a:p>
-        </p:txBody>
-      </p:sp>
-      <p:sp>
-        <p:nvSpPr>
-          <p:cNvPr id="18" name="TextBox 17"/>
-          <p:cNvSpPr txBox="1"/>
-          <p:nvPr/>
-        </p:nvSpPr>
-        <p:spPr>
-          <a:xfrm>
-            <a:off x="731520" y="3657600"/>
-            <a:ext cx="3200400" cy="502920"/>
-          </a:xfrm>
-          <a:prstGeom prst="rect">
-            <a:avLst/>
-          </a:prstGeom>
-          <a:noFill/>
-        </p:spPr>
-        <p:txBody>
-          <a:bodyPr wrap="square" lIns="0" rIns="0" tIns="0" bIns="0">
-            <a:spAutoFit/>
-          </a:bodyPr>
-          <a:lstStyle/>
-          <a:p>
-            <a:r>
-              <a:rPr sz="1200" b="1">
-                <a:solidFill>
-                  <a:srgbClr val="141833"/>
-                </a:solidFill>
-                <a:latin typeface="Helvetica Neue"/>
-              </a:rPr>
-              <a:t>Political Individual Highlights</a:t>
-            </a:r>
-          </a:p>
-        </p:txBody>
-      </p:sp>
-      <p:sp>
-        <p:nvSpPr>
-          <p:cNvPr id="19" name="Rectangle 18"/>
-          <p:cNvSpPr/>
-          <p:nvPr/>
-        </p:nvSpPr>
-        <p:spPr>
-          <a:xfrm>
-            <a:off x="4206240" y="3726180"/>
-            <a:ext cx="808526" cy="274320"/>
-          </a:xfrm>
-          <a:prstGeom prst="rect">
-            <a:avLst/>
-          </a:prstGeom>
-          <a:solidFill>
-            <a:srgbClr val="2E86AB"/>
-          </a:solidFill>
-          <a:ln>
-            <a:noFill/>
-          </a:ln>
-          <a:effectLst/>
-        </p:spPr>
-        <p:style>
-          <a:lnRef idx="1">
-            <a:schemeClr val="accent1"/>
-          </a:lnRef>
-          <a:fillRef idx="3">
-            <a:schemeClr val="accent1"/>
-          </a:fillRef>
-          <a:effectRef idx="2">
-            <a:schemeClr val="accent1"/>
-          </a:effectRef>
-          <a:fontRef idx="minor">
-            <a:schemeClr val="lt1"/>
-          </a:fontRef>
-        </p:style>
-        <p:txBody>
-          <a:bodyPr rtlCol="0" anchor="ctr"/>
-          <a:lstStyle/>
-          <a:p>
-            <a:pPr algn="ctr"/>
-          </a:p>
-        </p:txBody>
-      </p:sp>
-      <p:sp>
-        <p:nvSpPr>
-          <p:cNvPr id="20" name="TextBox 19"/>
-          <p:cNvSpPr txBox="1"/>
-          <p:nvPr/>
-        </p:nvSpPr>
-        <p:spPr>
-          <a:xfrm>
-            <a:off x="5106206" y="3657600"/>
-            <a:ext cx="2286000" cy="251460"/>
-          </a:xfrm>
-          <a:prstGeom prst="rect">
-            <a:avLst/>
-          </a:prstGeom>
-          <a:noFill/>
-        </p:spPr>
-        <p:txBody>
-          <a:bodyPr wrap="square" lIns="0" rIns="0" tIns="0" bIns="0">
-            <a:spAutoFit/>
-          </a:bodyPr>
-          <a:lstStyle/>
-          <a:p>
-            <a:r>
-              <a:rPr sz="900" b="0">
-                <a:solidFill>
-                  <a:srgbClr val="6B7082"/>
-                </a:solidFill>
-                <a:latin typeface="Helvetica Neue"/>
-              </a:rPr>
-              <a:t>6,391 views · 11 posts · 581 avg</a:t>
-            </a:r>
-          </a:p>
-        </p:txBody>
-      </p:sp>
-      <p:sp>
-        <p:nvSpPr>
-          <p:cNvPr id="21" name="TextBox 20"/>
-          <p:cNvSpPr txBox="1"/>
-          <p:nvPr/>
-        </p:nvSpPr>
-        <p:spPr>
-          <a:xfrm>
-            <a:off x="5106206" y="3863340"/>
-            <a:ext cx="4572000" cy="251460"/>
-          </a:xfrm>
-          <a:prstGeom prst="rect">
-            <a:avLst/>
-          </a:prstGeom>
-          <a:noFill/>
-        </p:spPr>
-        <p:txBody>
-          <a:bodyPr wrap="square" lIns="0" rIns="0" tIns="0" bIns="0">
-            <a:spAutoFit/>
-          </a:bodyPr>
-          <a:lstStyle/>
-          <a:p>
-            <a:r>
-              <a:rPr sz="800" b="0">
-                <a:solidFill>
-                  <a:srgbClr val="6B7082"/>
-                </a:solidFill>
-                <a:latin typeface="Helvetica Neue"/>
-              </a:rPr>
-              <a:t>Personal profile · Broad (voters, campaign-season readers)</a:t>
             </a:r>
           </a:p>
         </p:txBody>
@@ -5469,7 +5469,7 @@
         <p:spPr>
           <a:xfrm>
             <a:off x="4206240" y="4229100"/>
-            <a:ext cx="783350" cy="274320"/>
+            <a:ext cx="771751" cy="274320"/>
           </a:xfrm>
           <a:prstGeom prst="rect">
             <a:avLst/>
@@ -5512,7 +5512,7 @@
         </p:nvSpPr>
         <p:spPr>
           <a:xfrm>
-            <a:off x="5081030" y="4160520"/>
+            <a:off x="5069431" y="4160520"/>
             <a:ext cx="2286000" cy="251460"/>
           </a:xfrm>
           <a:prstGeom prst="rect">
@@ -5546,7 +5546,7 @@
         </p:nvSpPr>
         <p:spPr>
           <a:xfrm>
-            <a:off x="5081030" y="4366260"/>
+            <a:off x="5069431" y="4366260"/>
             <a:ext cx="4572000" cy="251460"/>
           </a:xfrm>
           <a:prstGeom prst="rect">
@@ -5955,7 +5955,7 @@
                 </a:solidFill>
                 <a:latin typeface="Georgia"/>
               </a:rPr>
-              <a:t>47,704</a:t>
+              <a:t>48,421</a:t>
             </a:r>
           </a:p>
         </p:txBody>
@@ -5989,7 +5989,7 @@
                 </a:solidFill>
                 <a:latin typeface="Helvetica Neue"/>
               </a:rPr>
-              <a:t>79 posts · 1,279 likes</a:t>
+              <a:t>79 posts · 1,316 likes</a:t>
             </a:r>
           </a:p>
         </p:txBody>
@@ -6023,7 +6023,7 @@
                 </a:solidFill>
                 <a:latin typeface="Helvetica Neue"/>
               </a:rPr>
-              <a:t>604 average views per post</a:t>
+              <a:t>613 average views per post</a:t>
             </a:r>
           </a:p>
         </p:txBody>
@@ -6335,7 +6335,7 @@
                 </a:solidFill>
                 <a:latin typeface="Helvetica Neue"/>
               </a:rPr>
-              <a:t>#2  ·  IG  ·  3,922 views</a:t>
+              <a:t>#2  ·  IG  ·  3,944 views</a:t>
             </a:r>
           </a:p>
         </p:txBody>
@@ -6991,7 +6991,7 @@
                 </a:solidFill>
                 <a:latin typeface="Georgia"/>
               </a:rPr>
-              <a:t>40,214</a:t>
+              <a:t>40,750</a:t>
             </a:r>
           </a:p>
         </p:txBody>
@@ -7025,7 +7025,7 @@
                 </a:solidFill>
                 <a:latin typeface="Helvetica Neue"/>
               </a:rPr>
-              <a:t>52 posts · 824 likes</a:t>
+              <a:t>54 posts · 834 likes</a:t>
             </a:r>
           </a:p>
         </p:txBody>
@@ -7059,7 +7059,7 @@
                 </a:solidFill>
                 <a:latin typeface="Helvetica Neue"/>
               </a:rPr>
-              <a:t>773 average views per post</a:t>
+              <a:t>755 average views per post</a:t>
             </a:r>
           </a:p>
         </p:txBody>
@@ -7803,7 +7803,7 @@
                 </a:solidFill>
                 <a:latin typeface="Georgia"/>
               </a:rPr>
-              <a:t>American Pride</a:t>
+              <a:t>Political Individual Highlights</a:t>
             </a:r>
           </a:p>
         </p:txBody>
@@ -7837,7 +7837,7 @@
                 </a:solidFill>
                 <a:latin typeface="Helvetica Neue"/>
               </a:rPr>
-              <a:t>Patriotic content + historical/analytical (1968, forefathers, unity language).</a:t>
+              <a:t>Candidate/elected personality profiles — Carrie Uva, Hector Sosa. Not scandal-driven.</a:t>
             </a:r>
           </a:p>
         </p:txBody>
@@ -7867,11 +7867,11 @@
             <a:r>
               <a:rPr sz="900" b="1">
                 <a:solidFill>
-                  <a:srgbClr val="990011"/>
-                </a:solidFill>
-                <a:latin typeface="Helvetica Neue"/>
-              </a:rPr>
-              <a:t>AUDIENCE (theoretical): Traditional / patriotic · Older (55+), values-driven</a:t>
+                  <a:srgbClr val="2E86AB"/>
+                </a:solidFill>
+                <a:latin typeface="Helvetica Neue"/>
+              </a:rPr>
+              <a:t>AUDIENCE (theoretical): Personal profile · Broad (voters, campaign-season readers)</a:t>
             </a:r>
           </a:p>
         </p:txBody>
@@ -7935,7 +7935,7 @@
             <a:avLst/>
           </a:prstGeom>
           <a:solidFill>
-            <a:srgbClr val="990011"/>
+            <a:srgbClr val="2E86AB"/>
           </a:solidFill>
           <a:ln>
             <a:noFill/>
@@ -7989,7 +7989,7 @@
             <a:r>
               <a:rPr sz="1100" b="1">
                 <a:solidFill>
-                  <a:srgbClr val="990011"/>
+                  <a:srgbClr val="2E86AB"/>
                 </a:solidFill>
                 <a:latin typeface="Helvetica Neue"/>
               </a:rPr>
@@ -8027,7 +8027,7 @@
                 </a:solidFill>
                 <a:latin typeface="Georgia"/>
               </a:rPr>
-              <a:t>7,750</a:t>
+              <a:t>12,566</a:t>
             </a:r>
           </a:p>
         </p:txBody>
@@ -8061,7 +8061,7 @@
                 </a:solidFill>
                 <a:latin typeface="Helvetica Neue"/>
               </a:rPr>
-              <a:t>15 posts · 113 likes</a:t>
+              <a:t>22 posts · 361 likes</a:t>
             </a:r>
           </a:p>
         </p:txBody>
@@ -8095,7 +8095,7 @@
                 </a:solidFill>
                 <a:latin typeface="Helvetica Neue"/>
               </a:rPr>
-              <a:t>517 average views per post</a:t>
+              <a:t>571 average views per post</a:t>
             </a:r>
           </a:p>
         </p:txBody>
@@ -8125,7 +8125,7 @@
             <a:r>
               <a:rPr sz="1100" b="1">
                 <a:solidFill>
-                  <a:srgbClr val="990011"/>
+                  <a:srgbClr val="2E86AB"/>
                 </a:solidFill>
                 <a:latin typeface="Helvetica Neue"/>
               </a:rPr>
@@ -8193,7 +8193,7 @@
             <a:avLst/>
           </a:prstGeom>
           <a:solidFill>
-            <a:srgbClr val="990011"/>
+            <a:srgbClr val="2E86AB"/>
           </a:solidFill>
           <a:ln>
             <a:noFill/>
@@ -8247,11 +8247,11 @@
             <a:r>
               <a:rPr sz="1000" b="1">
                 <a:solidFill>
-                  <a:srgbClr val="990011"/>
-                </a:solidFill>
-                <a:latin typeface="Helvetica Neue"/>
-              </a:rPr>
-              <a:t>#1  ·  TT  ·  1,098 views</a:t>
+                  <a:srgbClr val="2E86AB"/>
+                </a:solidFill>
+                <a:latin typeface="Helvetica Neue"/>
+              </a:rPr>
+              <a:t>#1  ·  FB  ·  2,253 views</a:t>
             </a:r>
           </a:p>
         </p:txBody>
@@ -8285,7 +8285,7 @@
                 </a:solidFill>
                 <a:latin typeface="Helvetica Neue"/>
               </a:rPr>
-              <a:t>Embarrassed to be American? Pride in this country is essential, espec...</a:t>
+              <a:t>The Newsom administration and Rob Bonta's lawsuit against the federal government has been </a:t>
             </a:r>
           </a:p>
         </p:txBody>
@@ -8349,7 +8349,7 @@
             <a:avLst/>
           </a:prstGeom>
           <a:solidFill>
-            <a:srgbClr val="990011"/>
+            <a:srgbClr val="2E86AB"/>
           </a:solidFill>
           <a:ln>
             <a:noFill/>
@@ -8403,11 +8403,11 @@
             <a:r>
               <a:rPr sz="1000" b="1">
                 <a:solidFill>
-                  <a:srgbClr val="990011"/>
-                </a:solidFill>
-                <a:latin typeface="Helvetica Neue"/>
-              </a:rPr>
-              <a:t>#2  ·  FB  ·  797 views</a:t>
+                  <a:srgbClr val="2E86AB"/>
+                </a:solidFill>
+                <a:latin typeface="Helvetica Neue"/>
+              </a:rPr>
+              <a:t>#2  ·  FB  ·  1,353 views</a:t>
             </a:r>
           </a:p>
         </p:txBody>
@@ -8441,7 +8441,7 @@
                 </a:solidFill>
                 <a:latin typeface="Helvetica Neue"/>
               </a:rPr>
-              <a:t>The World Cup is a massive moneymaker for FIFA, projected to generate $11 billion in profi</a:t>
+              <a:t>Don't be fooled by simple comparisons. Carrie Uva, a lifelong Democrat, has earned endorse</a:t>
             </a:r>
           </a:p>
         </p:txBody>
@@ -8505,7 +8505,7 @@
             <a:avLst/>
           </a:prstGeom>
           <a:solidFill>
-            <a:srgbClr val="990011"/>
+            <a:srgbClr val="2E86AB"/>
           </a:solidFill>
           <a:ln>
             <a:noFill/>
@@ -8559,11 +8559,11 @@
             <a:r>
               <a:rPr sz="1000" b="1">
                 <a:solidFill>
-                  <a:srgbClr val="990011"/>
-                </a:solidFill>
-                <a:latin typeface="Helvetica Neue"/>
-              </a:rPr>
-              <a:t>#3  ·  IG  ·  726 views</a:t>
+                  <a:srgbClr val="2E86AB"/>
+                </a:solidFill>
+                <a:latin typeface="Helvetica Neue"/>
+              </a:rPr>
+              <a:t>#3  ·  FB  ·  1,253 views</a:t>
             </a:r>
           </a:p>
         </p:txBody>
@@ -8597,7 +8597,7 @@
                 </a:solidFill>
                 <a:latin typeface="Helvetica Neue"/>
               </a:rPr>
-              <a:t>1968: A year of stark divisions. Hippie or not? For government or against? Revolution or s</a:t>
+              <a:t>Meet Carrie Uva, an exceptional candidate with a proven track record. From Planning Commis</a:t>
             </a:r>
           </a:p>
         </p:txBody>
@@ -8671,7 +8671,7 @@
             <a:r>
               <a:rPr sz="1000" b="1">
                 <a:solidFill>
-                  <a:srgbClr val="990011"/>
+                  <a:srgbClr val="2E86AB"/>
                 </a:solidFill>
                 <a:latin typeface="Helvetica Neue"/>
               </a:rPr>
@@ -8839,7 +8839,7 @@
                 </a:solidFill>
                 <a:latin typeface="Georgia"/>
               </a:rPr>
-              <a:t>Political Individual Highlights</a:t>
+              <a:t>American Pride</a:t>
             </a:r>
           </a:p>
         </p:txBody>
@@ -8873,7 +8873,7 @@
                 </a:solidFill>
                 <a:latin typeface="Helvetica Neue"/>
               </a:rPr>
-              <a:t>Candidate/elected personality profiles — Carrie Uva, Hector Sosa. Not scandal-driven.</a:t>
+              <a:t>Patriotic content + historical/analytical (1968, forefathers, unity language).</a:t>
             </a:r>
           </a:p>
         </p:txBody>
@@ -8903,11 +8903,11 @@
             <a:r>
               <a:rPr sz="900" b="1">
                 <a:solidFill>
-                  <a:srgbClr val="2E86AB"/>
-                </a:solidFill>
-                <a:latin typeface="Helvetica Neue"/>
-              </a:rPr>
-              <a:t>AUDIENCE (theoretical): Personal profile · Broad (voters, campaign-season readers)</a:t>
+                  <a:srgbClr val="990011"/>
+                </a:solidFill>
+                <a:latin typeface="Helvetica Neue"/>
+              </a:rPr>
+              <a:t>AUDIENCE (theoretical): Traditional / patriotic · Older (55+), values-driven</a:t>
             </a:r>
           </a:p>
         </p:txBody>
@@ -8971,7 +8971,7 @@
             <a:avLst/>
           </a:prstGeom>
           <a:solidFill>
-            <a:srgbClr val="2E86AB"/>
+            <a:srgbClr val="990011"/>
           </a:solidFill>
           <a:ln>
             <a:noFill/>
@@ -9025,7 +9025,7 @@
             <a:r>
               <a:rPr sz="1100" b="1">
                 <a:solidFill>
-                  <a:srgbClr val="2E86AB"/>
+                  <a:srgbClr val="990011"/>
                 </a:solidFill>
                 <a:latin typeface="Helvetica Neue"/>
               </a:rPr>
@@ -9063,7 +9063,7 @@
                 </a:solidFill>
                 <a:latin typeface="Georgia"/>
               </a:rPr>
-              <a:t>6,391</a:t>
+              <a:t>7,751</a:t>
             </a:r>
           </a:p>
         </p:txBody>
@@ -9097,7 +9097,7 @@
                 </a:solidFill>
                 <a:latin typeface="Helvetica Neue"/>
               </a:rPr>
-              <a:t>11 posts · 220 likes</a:t>
+              <a:t>15 posts · 113 likes</a:t>
             </a:r>
           </a:p>
         </p:txBody>
@@ -9131,7 +9131,7 @@
                 </a:solidFill>
                 <a:latin typeface="Helvetica Neue"/>
               </a:rPr>
-              <a:t>581 average views per post</a:t>
+              <a:t>517 average views per post</a:t>
             </a:r>
           </a:p>
         </p:txBody>
@@ -9161,7 +9161,7 @@
             <a:r>
               <a:rPr sz="1100" b="1">
                 <a:solidFill>
-                  <a:srgbClr val="2E86AB"/>
+                  <a:srgbClr val="990011"/>
                 </a:solidFill>
                 <a:latin typeface="Helvetica Neue"/>
               </a:rPr>
@@ -9229,7 +9229,7 @@
             <a:avLst/>
           </a:prstGeom>
           <a:solidFill>
-            <a:srgbClr val="2E86AB"/>
+            <a:srgbClr val="990011"/>
           </a:solidFill>
           <a:ln>
             <a:noFill/>
@@ -9283,11 +9283,11 @@
             <a:r>
               <a:rPr sz="1000" b="1">
                 <a:solidFill>
-                  <a:srgbClr val="2E86AB"/>
-                </a:solidFill>
-                <a:latin typeface="Helvetica Neue"/>
-              </a:rPr>
-              <a:t>#1  ·  FB  ·  2,251 views</a:t>
+                  <a:srgbClr val="990011"/>
+                </a:solidFill>
+                <a:latin typeface="Helvetica Neue"/>
+              </a:rPr>
+              <a:t>#1  ·  TT  ·  1,098 views</a:t>
             </a:r>
           </a:p>
         </p:txBody>
@@ -9321,7 +9321,7 @@
                 </a:solidFill>
                 <a:latin typeface="Helvetica Neue"/>
               </a:rPr>
-              <a:t>The Newsom administration and Rob Bonta's lawsuit against the federal government has been </a:t>
+              <a:t>Embarrassed to be American? Pride in this country is essential, espec...</a:t>
             </a:r>
           </a:p>
         </p:txBody>
@@ -9385,7 +9385,7 @@
             <a:avLst/>
           </a:prstGeom>
           <a:solidFill>
-            <a:srgbClr val="2E86AB"/>
+            <a:srgbClr val="990011"/>
           </a:solidFill>
           <a:ln>
             <a:noFill/>
@@ -9439,11 +9439,11 @@
             <a:r>
               <a:rPr sz="1000" b="1">
                 <a:solidFill>
-                  <a:srgbClr val="2E86AB"/>
-                </a:solidFill>
-                <a:latin typeface="Helvetica Neue"/>
-              </a:rPr>
-              <a:t>#2  ·  FB  ·  965 views</a:t>
+                  <a:srgbClr val="990011"/>
+                </a:solidFill>
+                <a:latin typeface="Helvetica Neue"/>
+              </a:rPr>
+              <a:t>#2  ·  FB  ·  797 views</a:t>
             </a:r>
           </a:p>
         </p:txBody>
@@ -9477,7 +9477,7 @@
                 </a:solidFill>
                 <a:latin typeface="Helvetica Neue"/>
               </a:rPr>
-              <a:t>Carrie's reputation for helping seniors with wills and trusts is outstanding. Many speak o</a:t>
+              <a:t>The World Cup is a massive moneymaker for FIFA, projected to generate $11 billion in profi</a:t>
             </a:r>
           </a:p>
         </p:txBody>
@@ -9541,7 +9541,7 @@
             <a:avLst/>
           </a:prstGeom>
           <a:solidFill>
-            <a:srgbClr val="2E86AB"/>
+            <a:srgbClr val="990011"/>
           </a:solidFill>
           <a:ln>
             <a:noFill/>
@@ -9595,11 +9595,11 @@
             <a:r>
               <a:rPr sz="1000" b="1">
                 <a:solidFill>
-                  <a:srgbClr val="2E86AB"/>
-                </a:solidFill>
-                <a:latin typeface="Helvetica Neue"/>
-              </a:rPr>
-              <a:t>#3  ·  IG  ·  802 views</a:t>
+                  <a:srgbClr val="990011"/>
+                </a:solidFill>
+                <a:latin typeface="Helvetica Neue"/>
+              </a:rPr>
+              <a:t>#3  ·  IG  ·  726 views</a:t>
             </a:r>
           </a:p>
         </p:txBody>
@@ -9633,7 +9633,7 @@
                 </a:solidFill>
                 <a:latin typeface="Helvetica Neue"/>
               </a:rPr>
-              <a:t>Carrie, you're known for helping seniors with wills and trusts. It's more than a business;</a:t>
+              <a:t>1968: A year of stark divisions. Hippie or not? For government or against? Revolution or s</a:t>
             </a:r>
           </a:p>
         </p:txBody>
@@ -9707,7 +9707,7 @@
             <a:r>
               <a:rPr sz="1000" b="1">
                 <a:solidFill>
-                  <a:srgbClr val="2E86AB"/>
+                  <a:srgbClr val="990011"/>
                 </a:solidFill>
                 <a:latin typeface="Helvetica Neue"/>
               </a:rPr>
@@ -11495,7 +11495,7 @@
                 </a:solidFill>
                 <a:latin typeface="Georgia"/>
               </a:rPr>
-              <a:t>93,713 views</a:t>
+              <a:t>93,759 views</a:t>
             </a:r>
           </a:p>
         </p:txBody>
@@ -11529,7 +11529,7 @@
                 </a:solidFill>
                 <a:latin typeface="Helvetica Neue"/>
               </a:rPr>
-              <a:t>61 posts · 1,536 avg views/post</a:t>
+              <a:t>61 posts · 1,537 avg views/post</a:t>
             </a:r>
           </a:p>
         </p:txBody>
@@ -14191,7 +14191,7 @@
                 </a:solidFill>
                 <a:latin typeface="Helvetica Neue"/>
               </a:rPr>
-              <a:t>2,420 avg views/post   ·   33 posts   ·   79,857 total</a:t>
+              <a:t>2,420 avg views/post   ·   33 posts   ·   79,858 total</a:t>
             </a:r>
           </a:p>
         </p:txBody>
@@ -14483,7 +14483,7 @@
                 </a:solidFill>
                 <a:latin typeface="Helvetica Neue"/>
               </a:rPr>
-              <a:t>1,251 avg views/post   ·   163 posts   ·   203,980 total</a:t>
+              <a:t>1,197 avg views/post   ·   176 posts   ·   210,739 total</a:t>
             </a:r>
           </a:p>
         </p:txBody>
@@ -16402,7 +16402,7 @@
                 </a:solidFill>
                 <a:latin typeface="Helvetica Neue"/>
               </a:rPr>
-              <a:t>93,713 views · 61 posts</a:t>
+              <a:t>93,759 views · 61 posts</a:t>
             </a:r>
           </a:p>
         </p:txBody>
@@ -16450,7 +16450,7 @@
         <p:spPr>
           <a:xfrm>
             <a:off x="4114800" y="2476968"/>
-            <a:ext cx="5298565" cy="128016"/>
+            <a:ext cx="5296031" cy="128016"/>
           </a:xfrm>
           <a:prstGeom prst="rect">
             <a:avLst/>
@@ -16493,7 +16493,7 @@
         </p:nvSpPr>
         <p:spPr>
           <a:xfrm>
-            <a:off x="9504805" y="2413312"/>
+            <a:off x="9502271" y="2413312"/>
             <a:ext cx="2286000" cy="291904"/>
           </a:xfrm>
           <a:prstGeom prst="rect">
@@ -16514,7 +16514,7 @@
                 </a:solidFill>
                 <a:latin typeface="Helvetica Neue"/>
               </a:rPr>
-              <a:t>79,857 views · 33 posts</a:t>
+              <a:t>79,858 views · 33 posts</a:t>
             </a:r>
           </a:p>
         </p:txBody>
@@ -16562,7 +16562,7 @@
         <p:spPr>
           <a:xfrm>
             <a:off x="4114800" y="2768873"/>
-            <a:ext cx="4847446" cy="128016"/>
+            <a:ext cx="4919875" cy="128016"/>
           </a:xfrm>
           <a:prstGeom prst="rect">
             <a:avLst/>
@@ -16605,7 +16605,7 @@
         </p:nvSpPr>
         <p:spPr>
           <a:xfrm>
-            <a:off x="9053686" y="2705217"/>
+            <a:off x="9126115" y="2705217"/>
             <a:ext cx="2286000" cy="291904"/>
           </a:xfrm>
           <a:prstGeom prst="rect">
@@ -16626,7 +16626,7 @@
                 </a:solidFill>
                 <a:latin typeface="Helvetica Neue"/>
               </a:rPr>
-              <a:t>73,058 views · 139 posts</a:t>
+              <a:t>74,186 views · 140 posts</a:t>
             </a:r>
           </a:p>
         </p:txBody>
@@ -16674,7 +16674,7 @@
         <p:spPr>
           <a:xfrm>
             <a:off x="4114800" y="3060778"/>
-            <a:ext cx="4153219" cy="128016"/>
+            <a:ext cx="4159273" cy="128016"/>
           </a:xfrm>
           <a:prstGeom prst="rect">
             <a:avLst/>
@@ -16717,7 +16717,7 @@
         </p:nvSpPr>
         <p:spPr>
           <a:xfrm>
-            <a:off x="8359459" y="2997121"/>
+            <a:off x="8365513" y="2997121"/>
             <a:ext cx="2286000" cy="291904"/>
           </a:xfrm>
           <a:prstGeom prst="rect">
@@ -16738,7 +16738,7 @@
                 </a:solidFill>
                 <a:latin typeface="Helvetica Neue"/>
               </a:rPr>
-              <a:t>62,595 views · 24 posts</a:t>
+              <a:t>62,717 views · 24 posts</a:t>
             </a:r>
           </a:p>
         </p:txBody>
@@ -16786,7 +16786,7 @@
         <p:spPr>
           <a:xfrm>
             <a:off x="4114800" y="3352682"/>
-            <a:ext cx="4149172" cy="128016"/>
+            <a:ext cx="4147136" cy="128016"/>
           </a:xfrm>
           <a:prstGeom prst="rect">
             <a:avLst/>
@@ -16829,7 +16829,7 @@
         </p:nvSpPr>
         <p:spPr>
           <a:xfrm>
-            <a:off x="8355412" y="3289026"/>
+            <a:off x="8353376" y="3289026"/>
             <a:ext cx="2286000" cy="291904"/>
           </a:xfrm>
           <a:prstGeom prst="rect">
@@ -16898,7 +16898,7 @@
         <p:spPr>
           <a:xfrm>
             <a:off x="4114800" y="3644587"/>
-            <a:ext cx="3165192" cy="128016"/>
+            <a:ext cx="3211189" cy="128016"/>
           </a:xfrm>
           <a:prstGeom prst="rect">
             <a:avLst/>
@@ -16941,7 +16941,7 @@
         </p:nvSpPr>
         <p:spPr>
           <a:xfrm>
-            <a:off x="7371432" y="3580931"/>
+            <a:off x="7417429" y="3580931"/>
             <a:ext cx="2286000" cy="291904"/>
           </a:xfrm>
           <a:prstGeom prst="rect">
@@ -16962,7 +16962,7 @@
                 </a:solidFill>
                 <a:latin typeface="Helvetica Neue"/>
               </a:rPr>
-              <a:t>47,704 views · 79 posts</a:t>
+              <a:t>48,421 views · 79 posts</a:t>
             </a:r>
           </a:p>
         </p:txBody>
@@ -17010,7 +17010,7 @@
         <p:spPr>
           <a:xfrm>
             <a:off x="4114800" y="3936491"/>
-            <a:ext cx="3163400" cy="128016"/>
+            <a:ext cx="3161848" cy="128016"/>
           </a:xfrm>
           <a:prstGeom prst="rect">
             <a:avLst/>
@@ -17053,7 +17053,7 @@
         </p:nvSpPr>
         <p:spPr>
           <a:xfrm>
-            <a:off x="7369640" y="3872835"/>
+            <a:off x="7368088" y="3872835"/>
             <a:ext cx="2286000" cy="291904"/>
           </a:xfrm>
           <a:prstGeom prst="rect">
@@ -17122,7 +17122,7 @@
         <p:spPr>
           <a:xfrm>
             <a:off x="4114800" y="4228396"/>
-            <a:ext cx="2668225" cy="128016"/>
+            <a:ext cx="2702463" cy="128016"/>
           </a:xfrm>
           <a:prstGeom prst="rect">
             <a:avLst/>
@@ -17165,7 +17165,7 @@
         </p:nvSpPr>
         <p:spPr>
           <a:xfrm>
-            <a:off x="6874465" y="4164740"/>
+            <a:off x="6908703" y="4164740"/>
             <a:ext cx="2286000" cy="291904"/>
           </a:xfrm>
           <a:prstGeom prst="rect">
@@ -17186,7 +17186,7 @@
                 </a:solidFill>
                 <a:latin typeface="Helvetica Neue"/>
               </a:rPr>
-              <a:t>40,214 views · 52 posts</a:t>
+              <a:t>40,750 views · 54 posts</a:t>
             </a:r>
           </a:p>
         </p:txBody>
@@ -17220,7 +17220,7 @@
                 </a:solidFill>
                 <a:latin typeface="Helvetica Neue"/>
               </a:rPr>
-              <a:t>Resident Highlights</a:t>
+              <a:t>Political Individual Highlights</a:t>
             </a:r>
           </a:p>
         </p:txBody>
@@ -17234,7 +17234,119 @@
         <p:spPr>
           <a:xfrm>
             <a:off x="4114800" y="4520301"/>
-            <a:ext cx="546397" cy="128016"/>
+            <a:ext cx="833353" cy="128016"/>
+          </a:xfrm>
+          <a:prstGeom prst="rect">
+            <a:avLst/>
+          </a:prstGeom>
+          <a:solidFill>
+            <a:srgbClr val="2E86AB"/>
+          </a:solidFill>
+          <a:ln>
+            <a:noFill/>
+          </a:ln>
+          <a:effectLst/>
+        </p:spPr>
+        <p:style>
+          <a:lnRef idx="1">
+            <a:schemeClr val="accent1"/>
+          </a:lnRef>
+          <a:fillRef idx="3">
+            <a:schemeClr val="accent1"/>
+          </a:fillRef>
+          <a:effectRef idx="2">
+            <a:schemeClr val="accent1"/>
+          </a:effectRef>
+          <a:fontRef idx="minor">
+            <a:schemeClr val="lt1"/>
+          </a:fontRef>
+        </p:style>
+        <p:txBody>
+          <a:bodyPr rtlCol="0" anchor="ctr"/>
+          <a:lstStyle/>
+          <a:p>
+            <a:pPr algn="ctr"/>
+          </a:p>
+        </p:txBody>
+      </p:sp>
+      <p:sp>
+        <p:nvSpPr>
+          <p:cNvPr id="32" name="TextBox 31"/>
+          <p:cNvSpPr txBox="1"/>
+          <p:nvPr/>
+        </p:nvSpPr>
+        <p:spPr>
+          <a:xfrm>
+            <a:off x="5039593" y="4456644"/>
+            <a:ext cx="2286000" cy="291904"/>
+          </a:xfrm>
+          <a:prstGeom prst="rect">
+            <a:avLst/>
+          </a:prstGeom>
+          <a:noFill/>
+        </p:spPr>
+        <p:txBody>
+          <a:bodyPr wrap="square" lIns="0" rIns="0" tIns="0" bIns="0">
+            <a:spAutoFit/>
+          </a:bodyPr>
+          <a:lstStyle/>
+          <a:p>
+            <a:r>
+              <a:rPr sz="900" b="0">
+                <a:solidFill>
+                  <a:srgbClr val="6B7082"/>
+                </a:solidFill>
+                <a:latin typeface="Helvetica Neue"/>
+              </a:rPr>
+              <a:t>12,566 views · 22 posts</a:t>
+            </a:r>
+          </a:p>
+        </p:txBody>
+      </p:sp>
+      <p:sp>
+        <p:nvSpPr>
+          <p:cNvPr id="33" name="TextBox 32"/>
+          <p:cNvSpPr txBox="1"/>
+          <p:nvPr/>
+        </p:nvSpPr>
+        <p:spPr>
+          <a:xfrm>
+            <a:off x="731520" y="4748549"/>
+            <a:ext cx="3200400" cy="291904"/>
+          </a:xfrm>
+          <a:prstGeom prst="rect">
+            <a:avLst/>
+          </a:prstGeom>
+          <a:noFill/>
+        </p:spPr>
+        <p:txBody>
+          <a:bodyPr wrap="square" lIns="0" rIns="0" tIns="0" bIns="0">
+            <a:spAutoFit/>
+          </a:bodyPr>
+          <a:lstStyle/>
+          <a:p>
+            <a:r>
+              <a:rPr sz="1100" b="1">
+                <a:solidFill>
+                  <a:srgbClr val="141833"/>
+                </a:solidFill>
+                <a:latin typeface="Helvetica Neue"/>
+              </a:rPr>
+              <a:t>Resident Highlights</a:t>
+            </a:r>
+          </a:p>
+        </p:txBody>
+      </p:sp>
+      <p:sp>
+        <p:nvSpPr>
+          <p:cNvPr id="34" name="Rectangle 33"/>
+          <p:cNvSpPr/>
+          <p:nvPr/>
+        </p:nvSpPr>
+        <p:spPr>
+          <a:xfrm>
+            <a:off x="4114800" y="4812205"/>
+            <a:ext cx="546195" cy="128016"/>
           </a:xfrm>
           <a:prstGeom prst="rect">
             <a:avLst/>
@@ -17271,13 +17383,13 @@
       </p:sp>
       <p:sp>
         <p:nvSpPr>
-          <p:cNvPr id="32" name="TextBox 31"/>
-          <p:cNvSpPr txBox="1"/>
-          <p:nvPr/>
-        </p:nvSpPr>
-        <p:spPr>
-          <a:xfrm>
-            <a:off x="4752637" y="4456644"/>
+          <p:cNvPr id="35" name="TextBox 34"/>
+          <p:cNvSpPr txBox="1"/>
+          <p:nvPr/>
+        </p:nvSpPr>
+        <p:spPr>
+          <a:xfrm>
+            <a:off x="4752435" y="4748549"/>
             <a:ext cx="2286000" cy="291904"/>
           </a:xfrm>
           <a:prstGeom prst="rect">
@@ -17298,20 +17410,20 @@
                 </a:solidFill>
                 <a:latin typeface="Helvetica Neue"/>
               </a:rPr>
-              <a:t>8,235 views · 8 posts</a:t>
-            </a:r>
-          </a:p>
-        </p:txBody>
-      </p:sp>
-      <p:sp>
-        <p:nvSpPr>
-          <p:cNvPr id="33" name="TextBox 32"/>
-          <p:cNvSpPr txBox="1"/>
-          <p:nvPr/>
-        </p:nvSpPr>
-        <p:spPr>
-          <a:xfrm>
-            <a:off x="731520" y="4748549"/>
+              <a:t>8,236 views · 8 posts</a:t>
+            </a:r>
+          </a:p>
+        </p:txBody>
+      </p:sp>
+      <p:sp>
+        <p:nvSpPr>
+          <p:cNvPr id="36" name="TextBox 35"/>
+          <p:cNvSpPr txBox="1"/>
+          <p:nvPr/>
+        </p:nvSpPr>
+        <p:spPr>
+          <a:xfrm>
+            <a:off x="731520" y="5040454"/>
             <a:ext cx="3200400" cy="291904"/>
           </a:xfrm>
           <a:prstGeom prst="rect">
@@ -17339,14 +17451,14 @@
       </p:sp>
       <p:sp>
         <p:nvSpPr>
-          <p:cNvPr id="34" name="Rectangle 33"/>
+          <p:cNvPr id="37" name="Rectangle 36"/>
           <p:cNvSpPr/>
           <p:nvPr/>
         </p:nvSpPr>
         <p:spPr>
           <a:xfrm>
-            <a:off x="4114800" y="4812205"/>
-            <a:ext cx="514217" cy="128016"/>
+            <a:off x="4114800" y="5104110"/>
+            <a:ext cx="514031" cy="128016"/>
           </a:xfrm>
           <a:prstGeom prst="rect">
             <a:avLst/>
@@ -17383,13 +17495,13 @@
       </p:sp>
       <p:sp>
         <p:nvSpPr>
-          <p:cNvPr id="35" name="TextBox 34"/>
-          <p:cNvSpPr txBox="1"/>
-          <p:nvPr/>
-        </p:nvSpPr>
-        <p:spPr>
-          <a:xfrm>
-            <a:off x="4720457" y="4748549"/>
+          <p:cNvPr id="38" name="TextBox 37"/>
+          <p:cNvSpPr txBox="1"/>
+          <p:nvPr/>
+        </p:nvSpPr>
+        <p:spPr>
+          <a:xfrm>
+            <a:off x="4720271" y="5040454"/>
             <a:ext cx="2286000" cy="291904"/>
           </a:xfrm>
           <a:prstGeom prst="rect">
@@ -17410,119 +17522,7 @@
                 </a:solidFill>
                 <a:latin typeface="Helvetica Neue"/>
               </a:rPr>
-              <a:t>7,750 views · 15 posts</a:t>
-            </a:r>
-          </a:p>
-        </p:txBody>
-      </p:sp>
-      <p:sp>
-        <p:nvSpPr>
-          <p:cNvPr id="36" name="TextBox 35"/>
-          <p:cNvSpPr txBox="1"/>
-          <p:nvPr/>
-        </p:nvSpPr>
-        <p:spPr>
-          <a:xfrm>
-            <a:off x="731520" y="5040454"/>
-            <a:ext cx="3200400" cy="291904"/>
-          </a:xfrm>
-          <a:prstGeom prst="rect">
-            <a:avLst/>
-          </a:prstGeom>
-          <a:noFill/>
-        </p:spPr>
-        <p:txBody>
-          <a:bodyPr wrap="square" lIns="0" rIns="0" tIns="0" bIns="0">
-            <a:spAutoFit/>
-          </a:bodyPr>
-          <a:lstStyle/>
-          <a:p>
-            <a:r>
-              <a:rPr sz="1100" b="1">
-                <a:solidFill>
-                  <a:srgbClr val="141833"/>
-                </a:solidFill>
-                <a:latin typeface="Helvetica Neue"/>
-              </a:rPr>
-              <a:t>Political Individual Highlights</a:t>
-            </a:r>
-          </a:p>
-        </p:txBody>
-      </p:sp>
-      <p:sp>
-        <p:nvSpPr>
-          <p:cNvPr id="37" name="Rectangle 36"/>
-          <p:cNvSpPr/>
-          <p:nvPr/>
-        </p:nvSpPr>
-        <p:spPr>
-          <a:xfrm>
-            <a:off x="4114800" y="5104110"/>
-            <a:ext cx="424047" cy="128016"/>
-          </a:xfrm>
-          <a:prstGeom prst="rect">
-            <a:avLst/>
-          </a:prstGeom>
-          <a:solidFill>
-            <a:srgbClr val="2E86AB"/>
-          </a:solidFill>
-          <a:ln>
-            <a:noFill/>
-          </a:ln>
-          <a:effectLst/>
-        </p:spPr>
-        <p:style>
-          <a:lnRef idx="1">
-            <a:schemeClr val="accent1"/>
-          </a:lnRef>
-          <a:fillRef idx="3">
-            <a:schemeClr val="accent1"/>
-          </a:fillRef>
-          <a:effectRef idx="2">
-            <a:schemeClr val="accent1"/>
-          </a:effectRef>
-          <a:fontRef idx="minor">
-            <a:schemeClr val="lt1"/>
-          </a:fontRef>
-        </p:style>
-        <p:txBody>
-          <a:bodyPr rtlCol="0" anchor="ctr"/>
-          <a:lstStyle/>
-          <a:p>
-            <a:pPr algn="ctr"/>
-          </a:p>
-        </p:txBody>
-      </p:sp>
-      <p:sp>
-        <p:nvSpPr>
-          <p:cNvPr id="38" name="TextBox 37"/>
-          <p:cNvSpPr txBox="1"/>
-          <p:nvPr/>
-        </p:nvSpPr>
-        <p:spPr>
-          <a:xfrm>
-            <a:off x="4630287" y="5040454"/>
-            <a:ext cx="2286000" cy="291904"/>
-          </a:xfrm>
-          <a:prstGeom prst="rect">
-            <a:avLst/>
-          </a:prstGeom>
-          <a:noFill/>
-        </p:spPr>
-        <p:txBody>
-          <a:bodyPr wrap="square" lIns="0" rIns="0" tIns="0" bIns="0">
-            <a:spAutoFit/>
-          </a:bodyPr>
-          <a:lstStyle/>
-          <a:p>
-            <a:r>
-              <a:rPr sz="900" b="0">
-                <a:solidFill>
-                  <a:srgbClr val="6B7082"/>
-                </a:solidFill>
-                <a:latin typeface="Helvetica Neue"/>
-              </a:rPr>
-              <a:t>6,391 views · 11 posts</a:t>
+              <a:t>7,751 views · 15 posts</a:t>
             </a:r>
           </a:p>
         </p:txBody>
@@ -17570,7 +17570,7 @@
         <p:spPr>
           <a:xfrm>
             <a:off x="4114800" y="5396015"/>
-            <a:ext cx="410843" cy="128016"/>
+            <a:ext cx="410641" cy="128016"/>
           </a:xfrm>
           <a:prstGeom prst="rect">
             <a:avLst/>
@@ -17613,7 +17613,7 @@
         </p:nvSpPr>
         <p:spPr>
           <a:xfrm>
-            <a:off x="4617083" y="5332358"/>
+            <a:off x="4616881" y="5332358"/>
             <a:ext cx="2286000" cy="291904"/>
           </a:xfrm>
           <a:prstGeom prst="rect">
@@ -17682,7 +17682,7 @@
         <p:spPr>
           <a:xfrm>
             <a:off x="4114800" y="5687919"/>
-            <a:ext cx="73715" cy="128016"/>
+            <a:ext cx="73679" cy="128016"/>
           </a:xfrm>
           <a:prstGeom prst="rect">
             <a:avLst/>
@@ -17725,7 +17725,7 @@
         </p:nvSpPr>
         <p:spPr>
           <a:xfrm>
-            <a:off x="4279955" y="5624263"/>
+            <a:off x="4279919" y="5624263"/>
             <a:ext cx="2286000" cy="291904"/>
           </a:xfrm>
           <a:prstGeom prst="rect">
@@ -18342,7 +18342,7 @@
                 </a:solidFill>
                 <a:latin typeface="Georgia"/>
               </a:rPr>
-              <a:t>93,713</a:t>
+              <a:t>93,759</a:t>
             </a:r>
           </a:p>
         </p:txBody>
@@ -18376,7 +18376,7 @@
                 </a:solidFill>
                 <a:latin typeface="Helvetica Neue"/>
               </a:rPr>
-              <a:t>61 posts · 3,031 likes</a:t>
+              <a:t>61 posts · 3,032 likes</a:t>
             </a:r>
           </a:p>
         </p:txBody>
@@ -18410,7 +18410,7 @@
                 </a:solidFill>
                 <a:latin typeface="Helvetica Neue"/>
               </a:rPr>
-              <a:t>1,536 average views per post</a:t>
+              <a:t>1,537 average views per post</a:t>
             </a:r>
           </a:p>
         </p:txBody>
@@ -19378,7 +19378,7 @@
                 </a:solidFill>
                 <a:latin typeface="Georgia"/>
               </a:rPr>
-              <a:t>79,857</a:t>
+              <a:t>79,858</a:t>
             </a:r>
           </a:p>
         </p:txBody>
@@ -20414,7 +20414,7 @@
                 </a:solidFill>
                 <a:latin typeface="Georgia"/>
               </a:rPr>
-              <a:t>62,595</a:t>
+              <a:t>62,717</a:t>
             </a:r>
           </a:p>
         </p:txBody>
@@ -20448,7 +20448,7 @@
                 </a:solidFill>
                 <a:latin typeface="Helvetica Neue"/>
               </a:rPr>
-              <a:t>24 posts · 1,462 likes</a:t>
+              <a:t>24 posts · 1,465 likes</a:t>
             </a:r>
           </a:p>
         </p:txBody>
@@ -20482,7 +20482,7 @@
                 </a:solidFill>
                 <a:latin typeface="Helvetica Neue"/>
               </a:rPr>
-              <a:t>2,608 average views per post</a:t>
+              <a:t>2,613 average views per post</a:t>
             </a:r>
           </a:p>
         </p:txBody>

--- a/SPONSOR_CONTENT_REPORT.pptx
+++ b/SPONSOR_CONTENT_REPORT.pptx
@@ -3327,7 +3327,7 @@
                 </a:solidFill>
                 <a:latin typeface="Helvetica Neue"/>
               </a:rPr>
-              <a:t>Reporting window: Jun 8 → 2026-09-11</a:t>
+              <a:t>Reporting window: Jun 8 → 2026-09-14</a:t>
             </a:r>
           </a:p>
         </p:txBody>
@@ -3783,7 +3783,7 @@
                 </a:solidFill>
                 <a:latin typeface="Georgia"/>
               </a:rPr>
-              <a:t>8,236</a:t>
+              <a:t>8,249</a:t>
             </a:r>
           </a:p>
         </p:txBody>
@@ -3817,7 +3817,7 @@
                 </a:solidFill>
                 <a:latin typeface="Helvetica Neue"/>
               </a:rPr>
-              <a:t>8 posts · 140 likes</a:t>
+              <a:t>8 posts · 141 likes</a:t>
             </a:r>
           </a:p>
         </p:txBody>
@@ -3851,7 +3851,7 @@
                 </a:solidFill>
                 <a:latin typeface="Helvetica Neue"/>
               </a:rPr>
-              <a:t>1,030 average views per post</a:t>
+              <a:t>1,031 average views per post</a:t>
             </a:r>
           </a:p>
         </p:txBody>
@@ -4949,7 +4949,7 @@
                 </a:solidFill>
                 <a:latin typeface="Helvetica Neue"/>
               </a:rPr>
-              <a:t>48,421 views · 79 posts · 613 avg</a:t>
+              <a:t>62,111 views · 83 posts · 748 avg</a:t>
             </a:r>
           </a:p>
         </p:txBody>
@@ -5031,7 +5031,7 @@
         <p:spPr>
           <a:xfrm>
             <a:off x="4206240" y="2720339"/>
-            <a:ext cx="5078950" cy="274320"/>
+            <a:ext cx="4004477" cy="274320"/>
           </a:xfrm>
           <a:prstGeom prst="rect">
             <a:avLst/>
@@ -5074,7 +5074,7 @@
         </p:nvSpPr>
         <p:spPr>
           <a:xfrm>
-            <a:off x="9376630" y="2651759"/>
+            <a:off x="8302157" y="2651759"/>
             <a:ext cx="2286000" cy="251460"/>
           </a:xfrm>
           <a:prstGeom prst="rect">
@@ -5095,7 +5095,7 @@
                 </a:solidFill>
                 <a:latin typeface="Helvetica Neue"/>
               </a:rPr>
-              <a:t>40,750 views · 54 posts · 755 avg</a:t>
+              <a:t>41,213 views · 54 posts · 763 avg</a:t>
             </a:r>
           </a:p>
         </p:txBody>
@@ -5108,7 +5108,7 @@
         </p:nvSpPr>
         <p:spPr>
           <a:xfrm>
-            <a:off x="9376630" y="2857499"/>
+            <a:off x="8302157" y="2857499"/>
             <a:ext cx="4572000" cy="251460"/>
           </a:xfrm>
           <a:prstGeom prst="rect">
@@ -5177,7 +5177,7 @@
         <p:spPr>
           <a:xfrm>
             <a:off x="4206240" y="3223260"/>
-            <a:ext cx="1566186" cy="274320"/>
+            <a:ext cx="1534824" cy="274320"/>
           </a:xfrm>
           <a:prstGeom prst="rect">
             <a:avLst/>
@@ -5220,7 +5220,7 @@
         </p:nvSpPr>
         <p:spPr>
           <a:xfrm>
-            <a:off x="5863866" y="3154679"/>
+            <a:off x="5832504" y="3154679"/>
             <a:ext cx="2286000" cy="251460"/>
           </a:xfrm>
           <a:prstGeom prst="rect">
@@ -5241,7 +5241,7 @@
                 </a:solidFill>
                 <a:latin typeface="Helvetica Neue"/>
               </a:rPr>
-              <a:t>12,566 views · 22 posts · 571 avg</a:t>
+              <a:t>15,796 views · 22 posts · 718 avg</a:t>
             </a:r>
           </a:p>
         </p:txBody>
@@ -5254,7 +5254,7 @@
         </p:nvSpPr>
         <p:spPr>
           <a:xfrm>
-            <a:off x="5863866" y="3360420"/>
+            <a:off x="5832504" y="3360420"/>
             <a:ext cx="4572000" cy="251460"/>
           </a:xfrm>
           <a:prstGeom prst="rect">
@@ -5323,7 +5323,7 @@
         <p:spPr>
           <a:xfrm>
             <a:off x="4206240" y="3726180"/>
-            <a:ext cx="966060" cy="274320"/>
+            <a:ext cx="754489" cy="274320"/>
           </a:xfrm>
           <a:prstGeom prst="rect">
             <a:avLst/>
@@ -5366,7 +5366,7 @@
         </p:nvSpPr>
         <p:spPr>
           <a:xfrm>
-            <a:off x="5263740" y="3657600"/>
+            <a:off x="5052169" y="3657600"/>
             <a:ext cx="2286000" cy="251460"/>
           </a:xfrm>
           <a:prstGeom prst="rect">
@@ -5387,7 +5387,7 @@
                 </a:solidFill>
                 <a:latin typeface="Helvetica Neue"/>
               </a:rPr>
-              <a:t>7,751 views · 15 posts · 517 avg</a:t>
+              <a:t>7,765 views · 15 posts · 518 avg</a:t>
             </a:r>
           </a:p>
         </p:txBody>
@@ -5400,7 +5400,7 @@
         </p:nvSpPr>
         <p:spPr>
           <a:xfrm>
-            <a:off x="5263740" y="3863340"/>
+            <a:off x="5052169" y="3863340"/>
             <a:ext cx="4572000" cy="251460"/>
           </a:xfrm>
           <a:prstGeom prst="rect">
@@ -5469,7 +5469,7 @@
         <p:spPr>
           <a:xfrm>
             <a:off x="4206240" y="4229100"/>
-            <a:ext cx="771751" cy="274320"/>
+            <a:ext cx="601648" cy="274320"/>
           </a:xfrm>
           <a:prstGeom prst="rect">
             <a:avLst/>
@@ -5512,7 +5512,7 @@
         </p:nvSpPr>
         <p:spPr>
           <a:xfrm>
-            <a:off x="5069431" y="4160520"/>
+            <a:off x="4899328" y="4160520"/>
             <a:ext cx="2286000" cy="251460"/>
           </a:xfrm>
           <a:prstGeom prst="rect">
@@ -5546,7 +5546,7 @@
         </p:nvSpPr>
         <p:spPr>
           <a:xfrm>
-            <a:off x="5069431" y="4366260"/>
+            <a:off x="4899328" y="4366260"/>
             <a:ext cx="4572000" cy="251460"/>
           </a:xfrm>
           <a:prstGeom prst="rect">
@@ -5955,7 +5955,7 @@
                 </a:solidFill>
                 <a:latin typeface="Georgia"/>
               </a:rPr>
-              <a:t>48,421</a:t>
+              <a:t>62,111</a:t>
             </a:r>
           </a:p>
         </p:txBody>
@@ -5989,7 +5989,7 @@
                 </a:solidFill>
                 <a:latin typeface="Helvetica Neue"/>
               </a:rPr>
-              <a:t>79 posts · 1,316 likes</a:t>
+              <a:t>83 posts · 1,410 likes</a:t>
             </a:r>
           </a:p>
         </p:txBody>
@@ -6023,7 +6023,7 @@
                 </a:solidFill>
                 <a:latin typeface="Helvetica Neue"/>
               </a:rPr>
-              <a:t>613 average views per post</a:t>
+              <a:t>748 average views per post</a:t>
             </a:r>
           </a:p>
         </p:txBody>
@@ -6179,7 +6179,7 @@
                 </a:solidFill>
                 <a:latin typeface="Helvetica Neue"/>
               </a:rPr>
-              <a:t>#1  ·  FB  ·  5,812 views</a:t>
+              <a:t>#1  ·  FB  ·  10,067 views</a:t>
             </a:r>
           </a:p>
         </p:txBody>
@@ -6213,7 +6213,7 @@
                 </a:solidFill>
                 <a:latin typeface="Helvetica Neue"/>
               </a:rPr>
-              <a:t>Tensions flared at the city council meeting as a woman repeatedly defied the mayor's reque</a:t>
+              <a:t>Chaos erupted at a council meeting when Ms. Rivera began screaming, refusing to calm down </a:t>
             </a:r>
           </a:p>
         </p:txBody>
@@ -6335,7 +6335,7 @@
                 </a:solidFill>
                 <a:latin typeface="Helvetica Neue"/>
               </a:rPr>
-              <a:t>#2  ·  IG  ·  3,944 views</a:t>
+              <a:t>#2  ·  FB  ·  5,812 views</a:t>
             </a:r>
           </a:p>
         </p:txBody>
@@ -6369,7 +6369,7 @@
                 </a:solidFill>
                 <a:latin typeface="Helvetica Neue"/>
               </a:rPr>
-              <a:t>A candidate's DSA membership raises questions about their loyalties. Pledging to 'co-gover</a:t>
+              <a:t>Tensions flared at the city council meeting as a woman repeatedly defied the mayor's reque</a:t>
             </a:r>
           </a:p>
         </p:txBody>
@@ -6491,7 +6491,7 @@
                 </a:solidFill>
                 <a:latin typeface="Helvetica Neue"/>
               </a:rPr>
-              <a:t>#3  ·  IG  ·  3,200 views</a:t>
+              <a:t>#3  ·  IG  ·  4,032 views</a:t>
             </a:r>
           </a:p>
         </p:txBody>
@@ -6525,7 +6525,7 @@
                 </a:solidFill>
                 <a:latin typeface="Helvetica Neue"/>
               </a:rPr>
-              <a:t>Lifelong Democrat, moderate. Focused on helping Downey, not politics. Endorsed by both par</a:t>
+              <a:t>A candidate's DSA membership raises questions about their loyalties. Pledging to 'co-gover</a:t>
             </a:r>
           </a:p>
         </p:txBody>
@@ -6991,7 +6991,7 @@
                 </a:solidFill>
                 <a:latin typeface="Georgia"/>
               </a:rPr>
-              <a:t>40,750</a:t>
+              <a:t>41,213</a:t>
             </a:r>
           </a:p>
         </p:txBody>
@@ -7025,7 +7025,7 @@
                 </a:solidFill>
                 <a:latin typeface="Helvetica Neue"/>
               </a:rPr>
-              <a:t>54 posts · 834 likes</a:t>
+              <a:t>54 posts · 841 likes</a:t>
             </a:r>
           </a:p>
         </p:txBody>
@@ -7059,7 +7059,7 @@
                 </a:solidFill>
                 <a:latin typeface="Helvetica Neue"/>
               </a:rPr>
-              <a:t>755 average views per post</a:t>
+              <a:t>763 average views per post</a:t>
             </a:r>
           </a:p>
         </p:txBody>
@@ -8027,7 +8027,7 @@
                 </a:solidFill>
                 <a:latin typeface="Georgia"/>
               </a:rPr>
-              <a:t>12,566</a:t>
+              <a:t>15,796</a:t>
             </a:r>
           </a:p>
         </p:txBody>
@@ -8061,7 +8061,7 @@
                 </a:solidFill>
                 <a:latin typeface="Helvetica Neue"/>
               </a:rPr>
-              <a:t>22 posts · 361 likes</a:t>
+              <a:t>22 posts · 410 likes</a:t>
             </a:r>
           </a:p>
         </p:txBody>
@@ -8095,7 +8095,7 @@
                 </a:solidFill>
                 <a:latin typeface="Helvetica Neue"/>
               </a:rPr>
-              <a:t>571 average views per post</a:t>
+              <a:t>718 average views per post</a:t>
             </a:r>
           </a:p>
         </p:txBody>
@@ -8251,7 +8251,7 @@
                 </a:solidFill>
                 <a:latin typeface="Helvetica Neue"/>
               </a:rPr>
-              <a:t>#1  ·  FB  ·  2,253 views</a:t>
+              <a:t>#1  ·  FB  ·  2,640 views</a:t>
             </a:r>
           </a:p>
         </p:txBody>
@@ -8285,7 +8285,7 @@
                 </a:solidFill>
                 <a:latin typeface="Helvetica Neue"/>
               </a:rPr>
-              <a:t>The Newsom administration and Rob Bonta's lawsuit against the federal government has been </a:t>
+              <a:t>Don't be fooled by simple comparisons. Carrie Uva, a lifelong Democrat, has earned endorse</a:t>
             </a:r>
           </a:p>
         </p:txBody>
@@ -8407,7 +8407,7 @@
                 </a:solidFill>
                 <a:latin typeface="Helvetica Neue"/>
               </a:rPr>
-              <a:t>#2  ·  FB  ·  1,353 views</a:t>
+              <a:t>#2  ·  FB  ·  2,253 views</a:t>
             </a:r>
           </a:p>
         </p:txBody>
@@ -8441,7 +8441,7 @@
                 </a:solidFill>
                 <a:latin typeface="Helvetica Neue"/>
               </a:rPr>
-              <a:t>Don't be fooled by simple comparisons. Carrie Uva, a lifelong Democrat, has earned endorse</a:t>
+              <a:t>The Newsom administration and Rob Bonta's lawsuit against the federal government has been </a:t>
             </a:r>
           </a:p>
         </p:txBody>
@@ -8563,7 +8563,7 @@
                 </a:solidFill>
                 <a:latin typeface="Helvetica Neue"/>
               </a:rPr>
-              <a:t>#3  ·  FB  ·  1,253 views</a:t>
+              <a:t>#3  ·  FB  ·  1,498 views</a:t>
             </a:r>
           </a:p>
         </p:txBody>
@@ -9063,7 +9063,7 @@
                 </a:solidFill>
                 <a:latin typeface="Georgia"/>
               </a:rPr>
-              <a:t>7,751</a:t>
+              <a:t>7,765</a:t>
             </a:r>
           </a:p>
         </p:txBody>
@@ -9131,7 +9131,7 @@
                 </a:solidFill>
                 <a:latin typeface="Helvetica Neue"/>
               </a:rPr>
-              <a:t>517 average views per post</a:t>
+              <a:t>518 average views per post</a:t>
             </a:r>
           </a:p>
         </p:txBody>
@@ -11169,7 +11169,7 @@
                 </a:solidFill>
                 <a:latin typeface="Helvetica Neue"/>
               </a:rPr>
-              <a:t>16 posts · 2,980 avg views/post</a:t>
+              <a:t>18 posts · 2,649 avg views/post</a:t>
             </a:r>
           </a:p>
         </p:txBody>
@@ -11495,7 +11495,7 @@
                 </a:solidFill>
                 <a:latin typeface="Georgia"/>
               </a:rPr>
-              <a:t>93,759 views</a:t>
+              <a:t>93,782 views</a:t>
             </a:r>
           </a:p>
         </p:txBody>
@@ -11855,7 +11855,7 @@
                 </a:solidFill>
                 <a:latin typeface="Georgia"/>
               </a:rPr>
-              <a:t>62,534 views</a:t>
+              <a:t>62,535 views</a:t>
             </a:r>
           </a:p>
         </p:txBody>
@@ -11889,7 +11889,7 @@
                 </a:solidFill>
                 <a:latin typeface="Helvetica Neue"/>
               </a:rPr>
-              <a:t>20 posts · 3,127 avg views/post</a:t>
+              <a:t>22 posts · 2,842 avg views/post</a:t>
             </a:r>
           </a:p>
         </p:txBody>
@@ -14191,7 +14191,7 @@
                 </a:solidFill>
                 <a:latin typeface="Helvetica Neue"/>
               </a:rPr>
-              <a:t>2,420 avg views/post   ·   33 posts   ·   79,858 total</a:t>
+              <a:t>2,556 avg views/post   ·   34 posts   ·   86,914 total</a:t>
             </a:r>
           </a:p>
         </p:txBody>
@@ -14483,7 +14483,7 @@
                 </a:solidFill>
                 <a:latin typeface="Helvetica Neue"/>
               </a:rPr>
-              <a:t>1,197 avg views/post   ·   176 posts   ·   210,739 total</a:t>
+              <a:t>1,205 avg views/post   ·   178 posts   ·   214,482 total</a:t>
             </a:r>
           </a:p>
         </p:txBody>
@@ -16402,7 +16402,7 @@
                 </a:solidFill>
                 <a:latin typeface="Helvetica Neue"/>
               </a:rPr>
-              <a:t>93,759 views · 61 posts</a:t>
+              <a:t>93,782 views · 61 posts</a:t>
             </a:r>
           </a:p>
         </p:txBody>
@@ -16450,7 +16450,7 @@
         <p:spPr>
           <a:xfrm>
             <a:off x="4114800" y="2476968"/>
-            <a:ext cx="5296031" cy="128016"/>
+            <a:ext cx="5762558" cy="128016"/>
           </a:xfrm>
           <a:prstGeom prst="rect">
             <a:avLst/>
@@ -16493,7 +16493,7 @@
         </p:nvSpPr>
         <p:spPr>
           <a:xfrm>
-            <a:off x="9502271" y="2413312"/>
+            <a:off x="9968798" y="2413312"/>
             <a:ext cx="2286000" cy="291904"/>
           </a:xfrm>
           <a:prstGeom prst="rect">
@@ -16514,7 +16514,7 @@
                 </a:solidFill>
                 <a:latin typeface="Helvetica Neue"/>
               </a:rPr>
-              <a:t>79,858 views · 33 posts</a:t>
+              <a:t>86,914 views · 34 posts</a:t>
             </a:r>
           </a:p>
         </p:txBody>
@@ -16562,7 +16562,7 @@
         <p:spPr>
           <a:xfrm>
             <a:off x="4114800" y="2768873"/>
-            <a:ext cx="4919875" cy="128016"/>
+            <a:ext cx="5108955" cy="128016"/>
           </a:xfrm>
           <a:prstGeom prst="rect">
             <a:avLst/>
@@ -16605,7 +16605,7 @@
         </p:nvSpPr>
         <p:spPr>
           <a:xfrm>
-            <a:off x="9126115" y="2705217"/>
+            <a:off x="9315195" y="2705217"/>
             <a:ext cx="2286000" cy="291904"/>
           </a:xfrm>
           <a:prstGeom prst="rect">
@@ -16626,7 +16626,7 @@
                 </a:solidFill>
                 <a:latin typeface="Helvetica Neue"/>
               </a:rPr>
-              <a:t>74,186 views · 140 posts</a:t>
+              <a:t>77,056 views · 141 posts</a:t>
             </a:r>
           </a:p>
         </p:txBody>
@@ -16674,7 +16674,7 @@
         <p:spPr>
           <a:xfrm>
             <a:off x="4114800" y="3060778"/>
-            <a:ext cx="4159273" cy="128016"/>
+            <a:ext cx="4167402" cy="128016"/>
           </a:xfrm>
           <a:prstGeom prst="rect">
             <a:avLst/>
@@ -16717,7 +16717,7 @@
         </p:nvSpPr>
         <p:spPr>
           <a:xfrm>
-            <a:off x="8365513" y="2997121"/>
+            <a:off x="8373642" y="2997121"/>
             <a:ext cx="2286000" cy="291904"/>
           </a:xfrm>
           <a:prstGeom prst="rect">
@@ -16738,7 +16738,7 @@
                 </a:solidFill>
                 <a:latin typeface="Helvetica Neue"/>
               </a:rPr>
-              <a:t>62,717 views · 24 posts</a:t>
+              <a:t>62,855 views · 24 posts</a:t>
             </a:r>
           </a:p>
         </p:txBody>
@@ -16786,7 +16786,7 @@
         <p:spPr>
           <a:xfrm>
             <a:off x="4114800" y="3352682"/>
-            <a:ext cx="4147136" cy="128016"/>
+            <a:ext cx="4146186" cy="128016"/>
           </a:xfrm>
           <a:prstGeom prst="rect">
             <a:avLst/>
@@ -16829,7 +16829,7 @@
         </p:nvSpPr>
         <p:spPr>
           <a:xfrm>
-            <a:off x="8353376" y="3289026"/>
+            <a:off x="8352426" y="3289026"/>
             <a:ext cx="2286000" cy="291904"/>
           </a:xfrm>
           <a:prstGeom prst="rect">
@@ -16850,7 +16850,7 @@
                 </a:solidFill>
                 <a:latin typeface="Helvetica Neue"/>
               </a:rPr>
-              <a:t>62,534 views · 20 posts</a:t>
+              <a:t>62,535 views · 22 posts</a:t>
             </a:r>
           </a:p>
         </p:txBody>
@@ -16898,7 +16898,7 @@
         <p:spPr>
           <a:xfrm>
             <a:off x="4114800" y="3644587"/>
-            <a:ext cx="3211189" cy="128016"/>
+            <a:ext cx="4118074" cy="128016"/>
           </a:xfrm>
           <a:prstGeom prst="rect">
             <a:avLst/>
@@ -16941,7 +16941,7 @@
         </p:nvSpPr>
         <p:spPr>
           <a:xfrm>
-            <a:off x="7417429" y="3580931"/>
+            <a:off x="8324314" y="3580931"/>
             <a:ext cx="2286000" cy="291904"/>
           </a:xfrm>
           <a:prstGeom prst="rect">
@@ -16962,7 +16962,7 @@
                 </a:solidFill>
                 <a:latin typeface="Helvetica Neue"/>
               </a:rPr>
-              <a:t>48,421 views · 79 posts</a:t>
+              <a:t>62,111 views · 83 posts</a:t>
             </a:r>
           </a:p>
         </p:txBody>
@@ -17010,7 +17010,7 @@
         <p:spPr>
           <a:xfrm>
             <a:off x="4114800" y="3936491"/>
-            <a:ext cx="3161848" cy="128016"/>
+            <a:ext cx="3161073" cy="128016"/>
           </a:xfrm>
           <a:prstGeom prst="rect">
             <a:avLst/>
@@ -17053,7 +17053,7 @@
         </p:nvSpPr>
         <p:spPr>
           <a:xfrm>
-            <a:off x="7368088" y="3872835"/>
+            <a:off x="7367313" y="3872835"/>
             <a:ext cx="2286000" cy="291904"/>
           </a:xfrm>
           <a:prstGeom prst="rect">
@@ -17074,7 +17074,7 @@
                 </a:solidFill>
                 <a:latin typeface="Helvetica Neue"/>
               </a:rPr>
-              <a:t>47,677 views · 16 posts</a:t>
+              <a:t>47,677 views · 18 posts</a:t>
             </a:r>
           </a:p>
         </p:txBody>
@@ -17122,7 +17122,7 @@
         <p:spPr>
           <a:xfrm>
             <a:off x="4114800" y="4228396"/>
-            <a:ext cx="2702463" cy="128016"/>
+            <a:ext cx="2732498" cy="128016"/>
           </a:xfrm>
           <a:prstGeom prst="rect">
             <a:avLst/>
@@ -17165,7 +17165,7 @@
         </p:nvSpPr>
         <p:spPr>
           <a:xfrm>
-            <a:off x="6908703" y="4164740"/>
+            <a:off x="6938738" y="4164740"/>
             <a:ext cx="2286000" cy="291904"/>
           </a:xfrm>
           <a:prstGeom prst="rect">
@@ -17186,7 +17186,7 @@
                 </a:solidFill>
                 <a:latin typeface="Helvetica Neue"/>
               </a:rPr>
-              <a:t>40,750 views · 54 posts</a:t>
+              <a:t>41,213 views · 54 posts</a:t>
             </a:r>
           </a:p>
         </p:txBody>
@@ -17234,7 +17234,7 @@
         <p:spPr>
           <a:xfrm>
             <a:off x="4114800" y="4520301"/>
-            <a:ext cx="833353" cy="128016"/>
+            <a:ext cx="1047304" cy="128016"/>
           </a:xfrm>
           <a:prstGeom prst="rect">
             <a:avLst/>
@@ -17277,7 +17277,7 @@
         </p:nvSpPr>
         <p:spPr>
           <a:xfrm>
-            <a:off x="5039593" y="4456644"/>
+            <a:off x="5253544" y="4456644"/>
             <a:ext cx="2286000" cy="291904"/>
           </a:xfrm>
           <a:prstGeom prst="rect">
@@ -17298,7 +17298,7 @@
                 </a:solidFill>
                 <a:latin typeface="Helvetica Neue"/>
               </a:rPr>
-              <a:t>12,566 views · 22 posts</a:t>
+              <a:t>15,796 views · 22 posts</a:t>
             </a:r>
           </a:p>
         </p:txBody>
@@ -17346,7 +17346,7 @@
         <p:spPr>
           <a:xfrm>
             <a:off x="4114800" y="4812205"/>
-            <a:ext cx="546195" cy="128016"/>
+            <a:ext cx="546923" cy="128016"/>
           </a:xfrm>
           <a:prstGeom prst="rect">
             <a:avLst/>
@@ -17389,7 +17389,7 @@
         </p:nvSpPr>
         <p:spPr>
           <a:xfrm>
-            <a:off x="4752435" y="4748549"/>
+            <a:off x="4753163" y="4748549"/>
             <a:ext cx="2286000" cy="291904"/>
           </a:xfrm>
           <a:prstGeom prst="rect">
@@ -17410,7 +17410,7 @@
                 </a:solidFill>
                 <a:latin typeface="Helvetica Neue"/>
               </a:rPr>
-              <a:t>8,236 views · 8 posts</a:t>
+              <a:t>8,249 views · 8 posts</a:t>
             </a:r>
           </a:p>
         </p:txBody>
@@ -17458,7 +17458,7 @@
         <p:spPr>
           <a:xfrm>
             <a:off x="4114800" y="5104110"/>
-            <a:ext cx="514031" cy="128016"/>
+            <a:ext cx="514833" cy="128016"/>
           </a:xfrm>
           <a:prstGeom prst="rect">
             <a:avLst/>
@@ -17501,7 +17501,7 @@
         </p:nvSpPr>
         <p:spPr>
           <a:xfrm>
-            <a:off x="4720271" y="5040454"/>
+            <a:off x="4721073" y="5040454"/>
             <a:ext cx="2286000" cy="291904"/>
           </a:xfrm>
           <a:prstGeom prst="rect">
@@ -17522,7 +17522,7 @@
                 </a:solidFill>
                 <a:latin typeface="Helvetica Neue"/>
               </a:rPr>
-              <a:t>7,751 views · 15 posts</a:t>
+              <a:t>7,765 views · 15 posts</a:t>
             </a:r>
           </a:p>
         </p:txBody>
@@ -17570,7 +17570,7 @@
         <p:spPr>
           <a:xfrm>
             <a:off x="4114800" y="5396015"/>
-            <a:ext cx="410641" cy="128016"/>
+            <a:ext cx="410541" cy="128016"/>
           </a:xfrm>
           <a:prstGeom prst="rect">
             <a:avLst/>
@@ -17613,7 +17613,7 @@
         </p:nvSpPr>
         <p:spPr>
           <a:xfrm>
-            <a:off x="4616881" y="5332358"/>
+            <a:off x="4616781" y="5332358"/>
             <a:ext cx="2286000" cy="291904"/>
           </a:xfrm>
           <a:prstGeom prst="rect">
@@ -17682,7 +17682,7 @@
         <p:spPr>
           <a:xfrm>
             <a:off x="4114800" y="5687919"/>
-            <a:ext cx="73679" cy="128016"/>
+            <a:ext cx="73661" cy="128016"/>
           </a:xfrm>
           <a:prstGeom prst="rect">
             <a:avLst/>
@@ -17725,7 +17725,7 @@
         </p:nvSpPr>
         <p:spPr>
           <a:xfrm>
-            <a:off x="4279919" y="5624263"/>
+            <a:off x="4279901" y="5624263"/>
             <a:ext cx="2286000" cy="291904"/>
           </a:xfrm>
           <a:prstGeom prst="rect">
@@ -18342,7 +18342,7 @@
                 </a:solidFill>
                 <a:latin typeface="Georgia"/>
               </a:rPr>
-              <a:t>93,759</a:t>
+              <a:t>93,782</a:t>
             </a:r>
           </a:p>
         </p:txBody>
@@ -18376,7 +18376,7 @@
                 </a:solidFill>
                 <a:latin typeface="Helvetica Neue"/>
               </a:rPr>
-              <a:t>61 posts · 3,032 likes</a:t>
+              <a:t>61 posts · 3,033 likes</a:t>
             </a:r>
           </a:p>
         </p:txBody>
@@ -19378,7 +19378,7 @@
                 </a:solidFill>
                 <a:latin typeface="Georgia"/>
               </a:rPr>
-              <a:t>79,858</a:t>
+              <a:t>86,914</a:t>
             </a:r>
           </a:p>
         </p:txBody>
@@ -19412,7 +19412,7 @@
                 </a:solidFill>
                 <a:latin typeface="Helvetica Neue"/>
               </a:rPr>
-              <a:t>33 posts · 1,886 likes</a:t>
+              <a:t>34 posts · 1,986 likes</a:t>
             </a:r>
           </a:p>
         </p:txBody>
@@ -19446,7 +19446,7 @@
                 </a:solidFill>
                 <a:latin typeface="Helvetica Neue"/>
               </a:rPr>
-              <a:t>2,420 average views per post</a:t>
+              <a:t>2,556 average views per post</a:t>
             </a:r>
           </a:p>
         </p:txBody>
@@ -19758,7 +19758,7 @@
                 </a:solidFill>
                 <a:latin typeface="Helvetica Neue"/>
               </a:rPr>
-              <a:t>#2  ·  IG  ·  7,031 views</a:t>
+              <a:t>#2  ·  IG  ·  7,051 views</a:t>
             </a:r>
           </a:p>
         </p:txBody>
@@ -19792,7 +19792,7 @@
                 </a:solidFill>
                 <a:latin typeface="Helvetica Neue"/>
               </a:rPr>
-              <a:t>A woman's outburst at a city council meeting, repeatedly warned by the mayor, led to her f</a:t>
+              <a:t>Chaos erupted! Lissette Rivera refused to calm down, escalating until she was escorted out</a:t>
             </a:r>
           </a:p>
         </p:txBody>
@@ -19914,7 +19914,7 @@
                 </a:solidFill>
                 <a:latin typeface="Helvetica Neue"/>
               </a:rPr>
-              <a:t>#3  ·  FB  ·  6,363 views</a:t>
+              <a:t>#3  ·  IG  ·  7,031 views</a:t>
             </a:r>
           </a:p>
         </p:txBody>
@@ -19948,7 +19948,7 @@
                 </a:solidFill>
                 <a:latin typeface="Helvetica Neue"/>
               </a:rPr>
-              <a:t>After admitting 'I messed up,' a city councilman's inappropriate conduct is under scrutiny</a:t>
+              <a:t>A woman's outburst at a city council meeting, repeatedly warned by the mayor, led to her f</a:t>
             </a:r>
           </a:p>
         </p:txBody>
@@ -20414,7 +20414,7 @@
                 </a:solidFill>
                 <a:latin typeface="Georgia"/>
               </a:rPr>
-              <a:t>62,717</a:t>
+              <a:t>62,855</a:t>
             </a:r>
           </a:p>
         </p:txBody>
@@ -20482,7 +20482,7 @@
                 </a:solidFill>
                 <a:latin typeface="Helvetica Neue"/>
               </a:rPr>
-              <a:t>2,613 average views per post</a:t>
+              <a:t>2,619 average views per post</a:t>
             </a:r>
           </a:p>
         </p:txBody>
@@ -21450,7 +21450,7 @@
                 </a:solidFill>
                 <a:latin typeface="Georgia"/>
               </a:rPr>
-              <a:t>62,534</a:t>
+              <a:t>62,535</a:t>
             </a:r>
           </a:p>
         </p:txBody>
@@ -21484,7 +21484,7 @@
                 </a:solidFill>
                 <a:latin typeface="Helvetica Neue"/>
               </a:rPr>
-              <a:t>20 posts · 3,174 likes</a:t>
+              <a:t>22 posts · 3,195 likes</a:t>
             </a:r>
           </a:p>
         </p:txBody>
@@ -21518,7 +21518,7 @@
                 </a:solidFill>
                 <a:latin typeface="Helvetica Neue"/>
               </a:rPr>
-              <a:t>3,127 average views per post</a:t>
+              <a:t>2,842 average views per post</a:t>
             </a:r>
           </a:p>
         </p:txBody>
@@ -22132,7 +22132,7 @@
                 </a:solidFill>
                 <a:latin typeface="Helvetica Neue"/>
               </a:rPr>
-              <a:t>Strong performer. Keep investing — Military Service is a proven driver of reach.</a:t>
+              <a:t>Solid mid-tier. Worth continued investment. Test scaling to see if it holds.</a:t>
             </a:r>
           </a:p>
         </p:txBody>
@@ -22520,7 +22520,7 @@
                 </a:solidFill>
                 <a:latin typeface="Helvetica Neue"/>
               </a:rPr>
-              <a:t>16 posts · 2,841 likes</a:t>
+              <a:t>18 posts · 2,912 likes</a:t>
             </a:r>
           </a:p>
         </p:txBody>
@@ -22554,7 +22554,7 @@
                 </a:solidFill>
                 <a:latin typeface="Helvetica Neue"/>
               </a:rPr>
-              <a:t>2,980 average views per post</a:t>
+              <a:t>2,649 average views per post</a:t>
             </a:r>
           </a:p>
         </p:txBody>

--- a/SPONSOR_CONTENT_REPORT.pptx
+++ b/SPONSOR_CONTENT_REPORT.pptx
@@ -3327,7 +3327,7 @@
                 </a:solidFill>
                 <a:latin typeface="Helvetica Neue"/>
               </a:rPr>
-              <a:t>Reporting window: Jun 8 → 2026-09-14</a:t>
+              <a:t>Reporting window: Jun 8 → 2026-09-16</a:t>
             </a:r>
           </a:p>
         </p:txBody>
@@ -3559,7 +3559,7 @@
                 </a:solidFill>
                 <a:latin typeface="Georgia"/>
               </a:rPr>
-              <a:t>Resident Highlights</a:t>
+              <a:t>Downtown Development</a:t>
             </a:r>
           </a:p>
         </p:txBody>
@@ -3593,7 +3593,7 @@
                 </a:solidFill>
                 <a:latin typeface="Helvetica Neue"/>
               </a:rPr>
-              <a:t>Non-political citizen profiles — small business owners, community members. Granata, Gately, the deacon.</a:t>
+              <a:t>Physical growth of Downey — Round One, Fun Box, Stonewood, YMCA, new businesses opening.</a:t>
             </a:r>
           </a:p>
         </p:txBody>
@@ -3623,11 +3623,11 @@
             <a:r>
               <a:rPr sz="900" b="1">
                 <a:solidFill>
-                  <a:srgbClr val="1B7A43"/>
-                </a:solidFill>
-                <a:latin typeface="Helvetica Neue"/>
-              </a:rPr>
-              <a:t>AUDIENCE (theoretical): Human interest · Broad, community-connected</a:t>
+                  <a:srgbClr val="C9A227"/>
+                </a:solidFill>
+                <a:latin typeface="Helvetica Neue"/>
+              </a:rPr>
+              <a:t>AUDIENCE (theoretical): Local civic pride · Downey residents 30+</a:t>
             </a:r>
           </a:p>
         </p:txBody>
@@ -3691,7 +3691,7 @@
             <a:avLst/>
           </a:prstGeom>
           <a:solidFill>
-            <a:srgbClr val="1B7A43"/>
+            <a:srgbClr val="C9A227"/>
           </a:solidFill>
           <a:ln>
             <a:noFill/>
@@ -3745,7 +3745,7 @@
             <a:r>
               <a:rPr sz="1100" b="1">
                 <a:solidFill>
-                  <a:srgbClr val="1B7A43"/>
+                  <a:srgbClr val="C9A227"/>
                 </a:solidFill>
                 <a:latin typeface="Helvetica Neue"/>
               </a:rPr>
@@ -3783,7 +3783,7 @@
                 </a:solidFill>
                 <a:latin typeface="Georgia"/>
               </a:rPr>
-              <a:t>8,249</a:t>
+              <a:t>47,677</a:t>
             </a:r>
           </a:p>
         </p:txBody>
@@ -3817,7 +3817,7 @@
                 </a:solidFill>
                 <a:latin typeface="Helvetica Neue"/>
               </a:rPr>
-              <a:t>8 posts · 141 likes</a:t>
+              <a:t>18 posts · 2,930 likes</a:t>
             </a:r>
           </a:p>
         </p:txBody>
@@ -3851,7 +3851,7 @@
                 </a:solidFill>
                 <a:latin typeface="Helvetica Neue"/>
               </a:rPr>
-              <a:t>1,031 average views per post</a:t>
+              <a:t>2,649 average views per post</a:t>
             </a:r>
           </a:p>
         </p:txBody>
@@ -3881,7 +3881,7 @@
             <a:r>
               <a:rPr sz="1100" b="1">
                 <a:solidFill>
-                  <a:srgbClr val="1B7A43"/>
+                  <a:srgbClr val="C9A227"/>
                 </a:solidFill>
                 <a:latin typeface="Helvetica Neue"/>
               </a:rPr>
@@ -3949,7 +3949,7 @@
             <a:avLst/>
           </a:prstGeom>
           <a:solidFill>
-            <a:srgbClr val="1B7A43"/>
+            <a:srgbClr val="C9A227"/>
           </a:solidFill>
           <a:ln>
             <a:noFill/>
@@ -4003,11 +4003,11 @@
             <a:r>
               <a:rPr sz="1000" b="1">
                 <a:solidFill>
-                  <a:srgbClr val="1B7A43"/>
-                </a:solidFill>
-                <a:latin typeface="Helvetica Neue"/>
-              </a:rPr>
-              <a:t>#1  ·  IG  ·  3,551 views</a:t>
+                  <a:srgbClr val="C9A227"/>
+                </a:solidFill>
+                <a:latin typeface="Helvetica Neue"/>
+              </a:rPr>
+              <a:t>#1  ·  TT  ·  29,200 views</a:t>
             </a:r>
           </a:p>
         </p:txBody>
@@ -4041,7 +4041,7 @@
                 </a:solidFill>
                 <a:latin typeface="Helvetica Neue"/>
               </a:rPr>
-              <a:t>Almost ran over a family. I got the license plate, checked on them. Turns out he's a Catho</a:t>
+              <a:t>Get ready! Round One is taking over the old Sears at Stonewood Mall. This massive 150,000 </a:t>
             </a:r>
           </a:p>
         </p:txBody>
@@ -4105,7 +4105,7 @@
             <a:avLst/>
           </a:prstGeom>
           <a:solidFill>
-            <a:srgbClr val="1B7A43"/>
+            <a:srgbClr val="C9A227"/>
           </a:solidFill>
           <a:ln>
             <a:noFill/>
@@ -4159,11 +4159,11 @@
             <a:r>
               <a:rPr sz="1000" b="1">
                 <a:solidFill>
-                  <a:srgbClr val="1B7A43"/>
-                </a:solidFill>
-                <a:latin typeface="Helvetica Neue"/>
-              </a:rPr>
-              <a:t>#2  ·  FB  ·  2,491 views</a:t>
+                  <a:srgbClr val="C9A227"/>
+                </a:solidFill>
+                <a:latin typeface="Helvetica Neue"/>
+              </a:rPr>
+              <a:t>#2  ·  IG  ·  4,455 views</a:t>
             </a:r>
           </a:p>
         </p:txBody>
@@ -4197,7 +4197,7 @@
                 </a:solidFill>
                 <a:latin typeface="Helvetica Neue"/>
               </a:rPr>
-              <a:t>A terrifying moment outside City Hall as a car nearly hits a family. A witness captured th</a:t>
+              <a:t>Round One is coming to Stonewood Mall, transforming the old Sears space! Get ready for a m</a:t>
             </a:r>
           </a:p>
         </p:txBody>
@@ -4261,7 +4261,7 @@
             <a:avLst/>
           </a:prstGeom>
           <a:solidFill>
-            <a:srgbClr val="1B7A43"/>
+            <a:srgbClr val="C9A227"/>
           </a:solidFill>
           <a:ln>
             <a:noFill/>
@@ -4315,11 +4315,11 @@
             <a:r>
               <a:rPr sz="1000" b="1">
                 <a:solidFill>
-                  <a:srgbClr val="1B7A43"/>
-                </a:solidFill>
-                <a:latin typeface="Helvetica Neue"/>
-              </a:rPr>
-              <a:t>#3  ·  FB  ·  812 views</a:t>
+                  <a:srgbClr val="C9A227"/>
+                </a:solidFill>
+                <a:latin typeface="Helvetica Neue"/>
+              </a:rPr>
+              <a:t>#3  ·  IG  ·  2,390 views</a:t>
             </a:r>
           </a:p>
         </p:txBody>
@@ -4353,7 +4353,7 @@
                 </a:solidFill>
                 <a:latin typeface="Helvetica Neue"/>
               </a:rPr>
-              <a:t>Running a restaurant means the show must go on, even when things are falling apart. Unlike</a:t>
+              <a:t>20 years later, this letter still resonates. It sparked the Downtown Improvement Associati</a:t>
             </a:r>
           </a:p>
         </p:txBody>
@@ -4427,7 +4427,7 @@
             <a:r>
               <a:rPr sz="1000" b="1">
                 <a:solidFill>
-                  <a:srgbClr val="1B7A43"/>
+                  <a:srgbClr val="C9A227"/>
                 </a:solidFill>
                 <a:latin typeface="Helvetica Neue"/>
               </a:rPr>
@@ -4503,7 +4503,7 @@
             <a:avLst/>
           </a:prstGeom>
           <a:solidFill>
-            <a:srgbClr val="141833"/>
+            <a:srgbClr val="FCF6F5"/>
           </a:solidFill>
           <a:ln>
             <a:noFill/>
@@ -4534,14 +4534,194 @@
       </p:sp>
       <p:sp>
         <p:nvSpPr>
-          <p:cNvPr id="3" name="Rectangle 2"/>
+          <p:cNvPr id="3" name="TextBox 2"/>
+          <p:cNvSpPr txBox="1"/>
+          <p:nvPr/>
+        </p:nvSpPr>
+        <p:spPr>
+          <a:xfrm>
+            <a:off x="731520" y="457200"/>
+            <a:ext cx="10698480" cy="365760"/>
+          </a:xfrm>
+          <a:prstGeom prst="rect">
+            <a:avLst/>
+          </a:prstGeom>
+          <a:noFill/>
+        </p:spPr>
+        <p:txBody>
+          <a:bodyPr wrap="square" lIns="0" rIns="0" tIns="0" bIns="0">
+            <a:spAutoFit/>
+          </a:bodyPr>
+          <a:lstStyle/>
+          <a:p>
+            <a:r>
+              <a:rPr sz="1200" b="1">
+                <a:solidFill>
+                  <a:srgbClr val="990011"/>
+                </a:solidFill>
+                <a:latin typeface="Helvetica Neue"/>
+              </a:rPr>
+              <a:t>CATEGORY DEEP-DIVE</a:t>
+            </a:r>
+          </a:p>
+        </p:txBody>
+      </p:sp>
+      <p:sp>
+        <p:nvSpPr>
+          <p:cNvPr id="4" name="TextBox 3"/>
+          <p:cNvSpPr txBox="1"/>
+          <p:nvPr/>
+        </p:nvSpPr>
+        <p:spPr>
+          <a:xfrm>
+            <a:off x="731520" y="822960"/>
+            <a:ext cx="10698480" cy="822960"/>
+          </a:xfrm>
+          <a:prstGeom prst="rect">
+            <a:avLst/>
+          </a:prstGeom>
+          <a:noFill/>
+        </p:spPr>
+        <p:txBody>
+          <a:bodyPr wrap="square" lIns="0" rIns="0" tIns="0" bIns="0">
+            <a:spAutoFit/>
+          </a:bodyPr>
+          <a:lstStyle/>
+          <a:p>
+            <a:r>
+              <a:rPr sz="3000" b="1">
+                <a:solidFill>
+                  <a:srgbClr val="2F3C7E"/>
+                </a:solidFill>
+                <a:latin typeface="Georgia"/>
+              </a:rPr>
+              <a:t>Political Individual Highlights</a:t>
+            </a:r>
+          </a:p>
+        </p:txBody>
+      </p:sp>
+      <p:sp>
+        <p:nvSpPr>
+          <p:cNvPr id="5" name="TextBox 4"/>
+          <p:cNvSpPr txBox="1"/>
+          <p:nvPr/>
+        </p:nvSpPr>
+        <p:spPr>
+          <a:xfrm>
+            <a:off x="731520" y="1600200"/>
+            <a:ext cx="10698480" cy="365760"/>
+          </a:xfrm>
+          <a:prstGeom prst="rect">
+            <a:avLst/>
+          </a:prstGeom>
+          <a:noFill/>
+        </p:spPr>
+        <p:txBody>
+          <a:bodyPr wrap="square" lIns="0" rIns="0" tIns="0" bIns="0">
+            <a:spAutoFit/>
+          </a:bodyPr>
+          <a:lstStyle/>
+          <a:p>
+            <a:r>
+              <a:rPr sz="1200" b="0">
+                <a:solidFill>
+                  <a:srgbClr val="6B7082"/>
+                </a:solidFill>
+                <a:latin typeface="Helvetica Neue"/>
+              </a:rPr>
+              <a:t>Candidate/elected personality profiles — Carrie Uva, Hector Sosa. Not scandal-driven.</a:t>
+            </a:r>
+          </a:p>
+        </p:txBody>
+      </p:sp>
+      <p:sp>
+        <p:nvSpPr>
+          <p:cNvPr id="6" name="TextBox 5"/>
+          <p:cNvSpPr txBox="1"/>
+          <p:nvPr/>
+        </p:nvSpPr>
+        <p:spPr>
+          <a:xfrm>
+            <a:off x="731520" y="1691640"/>
+            <a:ext cx="10698480" cy="274320"/>
+          </a:xfrm>
+          <a:prstGeom prst="rect">
+            <a:avLst/>
+          </a:prstGeom>
+          <a:noFill/>
+        </p:spPr>
+        <p:txBody>
+          <a:bodyPr wrap="square" lIns="0" rIns="0" tIns="0" bIns="0">
+            <a:spAutoFit/>
+          </a:bodyPr>
+          <a:lstStyle/>
+          <a:p>
+            <a:r>
+              <a:rPr sz="900" b="1">
+                <a:solidFill>
+                  <a:srgbClr val="2E86AB"/>
+                </a:solidFill>
+                <a:latin typeface="Helvetica Neue"/>
+              </a:rPr>
+              <a:t>AUDIENCE (theoretical): Personal profile · Broad (voters, campaign-season readers)</a:t>
+            </a:r>
+          </a:p>
+        </p:txBody>
+      </p:sp>
+      <p:sp>
+        <p:nvSpPr>
+          <p:cNvPr id="7" name="Rectangle 6"/>
           <p:cNvSpPr/>
           <p:nvPr/>
         </p:nvSpPr>
         <p:spPr>
           <a:xfrm>
-            <a:off x="0" y="0"/>
-            <a:ext cx="411480" cy="6858000"/>
+            <a:off x="731520" y="2194560"/>
+            <a:ext cx="5029200" cy="3200400"/>
+          </a:xfrm>
+          <a:prstGeom prst="rect">
+            <a:avLst/>
+          </a:prstGeom>
+          <a:solidFill>
+            <a:srgbClr val="FFFFFF"/>
+          </a:solidFill>
+          <a:ln>
+            <a:noFill/>
+          </a:ln>
+          <a:effectLst/>
+        </p:spPr>
+        <p:style>
+          <a:lnRef idx="1">
+            <a:schemeClr val="accent1"/>
+          </a:lnRef>
+          <a:fillRef idx="3">
+            <a:schemeClr val="accent1"/>
+          </a:fillRef>
+          <a:effectRef idx="2">
+            <a:schemeClr val="accent1"/>
+          </a:effectRef>
+          <a:fontRef idx="minor">
+            <a:schemeClr val="lt1"/>
+          </a:fontRef>
+        </p:style>
+        <p:txBody>
+          <a:bodyPr rtlCol="0" anchor="ctr"/>
+          <a:lstStyle/>
+          <a:p>
+            <a:pPr algn="ctr"/>
+          </a:p>
+        </p:txBody>
+      </p:sp>
+      <p:sp>
+        <p:nvSpPr>
+          <p:cNvPr id="8" name="Rectangle 7"/>
+          <p:cNvSpPr/>
+          <p:nvPr/>
+        </p:nvSpPr>
+        <p:spPr>
+          <a:xfrm>
+            <a:off x="731520" y="2194560"/>
+            <a:ext cx="91440" cy="3200400"/>
           </a:xfrm>
           <a:prstGeom prst="rect">
             <a:avLst/>
@@ -4578,102 +4758,750 @@
       </p:sp>
       <p:sp>
         <p:nvSpPr>
-          <p:cNvPr id="4" name="TextBox 3"/>
-          <p:cNvSpPr txBox="1"/>
-          <p:nvPr/>
-        </p:nvSpPr>
-        <p:spPr>
-          <a:xfrm>
-            <a:off x="914400" y="2377440"/>
-            <a:ext cx="10058400" cy="457200"/>
-          </a:xfrm>
-          <a:prstGeom prst="rect">
-            <a:avLst/>
-          </a:prstGeom>
-          <a:noFill/>
-        </p:spPr>
-        <p:txBody>
-          <a:bodyPr wrap="square" lIns="0" rIns="0" tIns="0" bIns="0">
-            <a:spAutoFit/>
-          </a:bodyPr>
-          <a:lstStyle/>
-          <a:p>
-            <a:r>
-              <a:rPr sz="1600" b="1">
+          <p:cNvPr id="9" name="TextBox 8"/>
+          <p:cNvSpPr txBox="1"/>
+          <p:nvPr/>
+        </p:nvSpPr>
+        <p:spPr>
+          <a:xfrm>
+            <a:off x="960120" y="2377440"/>
+            <a:ext cx="4572000" cy="365760"/>
+          </a:xfrm>
+          <a:prstGeom prst="rect">
+            <a:avLst/>
+          </a:prstGeom>
+          <a:noFill/>
+        </p:spPr>
+        <p:txBody>
+          <a:bodyPr wrap="square" lIns="0" rIns="0" tIns="0" bIns="0">
+            <a:spAutoFit/>
+          </a:bodyPr>
+          <a:lstStyle/>
+          <a:p>
+            <a:r>
+              <a:rPr sz="1100" b="1">
                 <a:solidFill>
                   <a:srgbClr val="2E86AB"/>
                 </a:solidFill>
                 <a:latin typeface="Helvetica Neue"/>
               </a:rPr>
-              <a:t>SECTION 2 OF 2</a:t>
-            </a:r>
-          </a:p>
-        </p:txBody>
-      </p:sp>
-      <p:sp>
-        <p:nvSpPr>
-          <p:cNvPr id="5" name="TextBox 4"/>
-          <p:cNvSpPr txBox="1"/>
-          <p:nvPr/>
-        </p:nvSpPr>
-        <p:spPr>
-          <a:xfrm>
-            <a:off x="914400" y="2834640"/>
-            <a:ext cx="10058400" cy="1371600"/>
-          </a:xfrm>
-          <a:prstGeom prst="rect">
-            <a:avLst/>
-          </a:prstGeom>
-          <a:noFill/>
-        </p:spPr>
-        <p:txBody>
-          <a:bodyPr wrap="square" lIns="0" rIns="0" tIns="0" bIns="0">
-            <a:spAutoFit/>
-          </a:bodyPr>
-          <a:lstStyle/>
-          <a:p>
-            <a:r>
-              <a:rPr sz="6400" b="1">
-                <a:solidFill>
-                  <a:srgbClr val="FFFFFF"/>
+              <a:t>TOTAL VIEWS</a:t>
+            </a:r>
+          </a:p>
+        </p:txBody>
+      </p:sp>
+      <p:sp>
+        <p:nvSpPr>
+          <p:cNvPr id="10" name="TextBox 9"/>
+          <p:cNvSpPr txBox="1"/>
+          <p:nvPr/>
+        </p:nvSpPr>
+        <p:spPr>
+          <a:xfrm>
+            <a:off x="960120" y="2697480"/>
+            <a:ext cx="4572000" cy="1097280"/>
+          </a:xfrm>
+          <a:prstGeom prst="rect">
+            <a:avLst/>
+          </a:prstGeom>
+          <a:noFill/>
+        </p:spPr>
+        <p:txBody>
+          <a:bodyPr wrap="square" lIns="0" rIns="0" tIns="0" bIns="0">
+            <a:spAutoFit/>
+          </a:bodyPr>
+          <a:lstStyle/>
+          <a:p>
+            <a:r>
+              <a:rPr sz="5400" b="1">
+                <a:solidFill>
+                  <a:srgbClr val="2F3C7E"/>
                 </a:solidFill>
                 <a:latin typeface="Georgia"/>
               </a:rPr>
-              <a:t>Worth watching</a:t>
-            </a:r>
-          </a:p>
-        </p:txBody>
-      </p:sp>
-      <p:sp>
-        <p:nvSpPr>
-          <p:cNvPr id="6" name="TextBox 5"/>
-          <p:cNvSpPr txBox="1"/>
-          <p:nvPr/>
-        </p:nvSpPr>
-        <p:spPr>
-          <a:xfrm>
-            <a:off x="914400" y="4206240"/>
-            <a:ext cx="10058400" cy="548640"/>
-          </a:xfrm>
-          <a:prstGeom prst="rect">
-            <a:avLst/>
-          </a:prstGeom>
-          <a:noFill/>
-        </p:spPr>
-        <p:txBody>
-          <a:bodyPr wrap="square" lIns="0" rIns="0" tIns="0" bIns="0">
-            <a:spAutoFit/>
-          </a:bodyPr>
-          <a:lstStyle/>
-          <a:p>
-            <a:r>
-              <a:rPr sz="1800" b="0">
+              <a:t>22,666</a:t>
+            </a:r>
+          </a:p>
+        </p:txBody>
+      </p:sp>
+      <p:sp>
+        <p:nvSpPr>
+          <p:cNvPr id="11" name="TextBox 10"/>
+          <p:cNvSpPr txBox="1"/>
+          <p:nvPr/>
+        </p:nvSpPr>
+        <p:spPr>
+          <a:xfrm>
+            <a:off x="960120" y="3840480"/>
+            <a:ext cx="4572000" cy="365760"/>
+          </a:xfrm>
+          <a:prstGeom prst="rect">
+            <a:avLst/>
+          </a:prstGeom>
+          <a:noFill/>
+        </p:spPr>
+        <p:txBody>
+          <a:bodyPr wrap="square" lIns="0" rIns="0" tIns="0" bIns="0">
+            <a:spAutoFit/>
+          </a:bodyPr>
+          <a:lstStyle/>
+          <a:p>
+            <a:r>
+              <a:rPr sz="1300" b="1">
+                <a:solidFill>
+                  <a:srgbClr val="141833"/>
+                </a:solidFill>
+                <a:latin typeface="Helvetica Neue"/>
+              </a:rPr>
+              <a:t>27 posts · 536 likes</a:t>
+            </a:r>
+          </a:p>
+        </p:txBody>
+      </p:sp>
+      <p:sp>
+        <p:nvSpPr>
+          <p:cNvPr id="12" name="TextBox 11"/>
+          <p:cNvSpPr txBox="1"/>
+          <p:nvPr/>
+        </p:nvSpPr>
+        <p:spPr>
+          <a:xfrm>
+            <a:off x="960120" y="4206240"/>
+            <a:ext cx="4572000" cy="365760"/>
+          </a:xfrm>
+          <a:prstGeom prst="rect">
+            <a:avLst/>
+          </a:prstGeom>
+          <a:noFill/>
+        </p:spPr>
+        <p:txBody>
+          <a:bodyPr wrap="square" lIns="0" rIns="0" tIns="0" bIns="0">
+            <a:spAutoFit/>
+          </a:bodyPr>
+          <a:lstStyle/>
+          <a:p>
+            <a:r>
+              <a:rPr sz="1300" b="0">
+                <a:solidFill>
+                  <a:srgbClr val="6B7082"/>
+                </a:solidFill>
+                <a:latin typeface="Helvetica Neue"/>
+              </a:rPr>
+              <a:t>839 average views per post</a:t>
+            </a:r>
+          </a:p>
+        </p:txBody>
+      </p:sp>
+      <p:sp>
+        <p:nvSpPr>
+          <p:cNvPr id="13" name="TextBox 12"/>
+          <p:cNvSpPr txBox="1"/>
+          <p:nvPr/>
+        </p:nvSpPr>
+        <p:spPr>
+          <a:xfrm>
+            <a:off x="6126480" y="2194560"/>
+            <a:ext cx="5486400" cy="274320"/>
+          </a:xfrm>
+          <a:prstGeom prst="rect">
+            <a:avLst/>
+          </a:prstGeom>
+          <a:noFill/>
+        </p:spPr>
+        <p:txBody>
+          <a:bodyPr wrap="square" lIns="0" rIns="0" tIns="0" bIns="0">
+            <a:spAutoFit/>
+          </a:bodyPr>
+          <a:lstStyle/>
+          <a:p>
+            <a:r>
+              <a:rPr sz="1100" b="1">
+                <a:solidFill>
+                  <a:srgbClr val="2E86AB"/>
+                </a:solidFill>
+                <a:latin typeface="Helvetica Neue"/>
+              </a:rPr>
+              <a:t>TOP 3 IN THIS CATEGORY</a:t>
+            </a:r>
+          </a:p>
+        </p:txBody>
+      </p:sp>
+      <p:sp>
+        <p:nvSpPr>
+          <p:cNvPr id="14" name="Rectangle 13"/>
+          <p:cNvSpPr/>
+          <p:nvPr/>
+        </p:nvSpPr>
+        <p:spPr>
+          <a:xfrm>
+            <a:off x="6126480" y="2560320"/>
+            <a:ext cx="5303520" cy="822960"/>
+          </a:xfrm>
+          <a:prstGeom prst="rect">
+            <a:avLst/>
+          </a:prstGeom>
+          <a:solidFill>
+            <a:srgbClr val="FFFFFF"/>
+          </a:solidFill>
+          <a:ln>
+            <a:noFill/>
+          </a:ln>
+          <a:effectLst/>
+        </p:spPr>
+        <p:style>
+          <a:lnRef idx="1">
+            <a:schemeClr val="accent1"/>
+          </a:lnRef>
+          <a:fillRef idx="3">
+            <a:schemeClr val="accent1"/>
+          </a:fillRef>
+          <a:effectRef idx="2">
+            <a:schemeClr val="accent1"/>
+          </a:effectRef>
+          <a:fontRef idx="minor">
+            <a:schemeClr val="lt1"/>
+          </a:fontRef>
+        </p:style>
+        <p:txBody>
+          <a:bodyPr rtlCol="0" anchor="ctr"/>
+          <a:lstStyle/>
+          <a:p>
+            <a:pPr algn="ctr"/>
+          </a:p>
+        </p:txBody>
+      </p:sp>
+      <p:sp>
+        <p:nvSpPr>
+          <p:cNvPr id="15" name="Rectangle 14"/>
+          <p:cNvSpPr/>
+          <p:nvPr/>
+        </p:nvSpPr>
+        <p:spPr>
+          <a:xfrm>
+            <a:off x="6126480" y="2560320"/>
+            <a:ext cx="54864" cy="822960"/>
+          </a:xfrm>
+          <a:prstGeom prst="rect">
+            <a:avLst/>
+          </a:prstGeom>
+          <a:solidFill>
+            <a:srgbClr val="2E86AB"/>
+          </a:solidFill>
+          <a:ln>
+            <a:noFill/>
+          </a:ln>
+          <a:effectLst/>
+        </p:spPr>
+        <p:style>
+          <a:lnRef idx="1">
+            <a:schemeClr val="accent1"/>
+          </a:lnRef>
+          <a:fillRef idx="3">
+            <a:schemeClr val="accent1"/>
+          </a:fillRef>
+          <a:effectRef idx="2">
+            <a:schemeClr val="accent1"/>
+          </a:effectRef>
+          <a:fontRef idx="minor">
+            <a:schemeClr val="lt1"/>
+          </a:fontRef>
+        </p:style>
+        <p:txBody>
+          <a:bodyPr rtlCol="0" anchor="ctr"/>
+          <a:lstStyle/>
+          <a:p>
+            <a:pPr algn="ctr"/>
+          </a:p>
+        </p:txBody>
+      </p:sp>
+      <p:sp>
+        <p:nvSpPr>
+          <p:cNvPr id="16" name="TextBox 15"/>
+          <p:cNvSpPr txBox="1"/>
+          <p:nvPr/>
+        </p:nvSpPr>
+        <p:spPr>
+          <a:xfrm>
+            <a:off x="6309360" y="2651760"/>
+            <a:ext cx="5029200" cy="320040"/>
+          </a:xfrm>
+          <a:prstGeom prst="rect">
+            <a:avLst/>
+          </a:prstGeom>
+          <a:noFill/>
+        </p:spPr>
+        <p:txBody>
+          <a:bodyPr wrap="square" lIns="0" rIns="0" tIns="0" bIns="0">
+            <a:spAutoFit/>
+          </a:bodyPr>
+          <a:lstStyle/>
+          <a:p>
+            <a:r>
+              <a:rPr sz="1000" b="1">
+                <a:solidFill>
+                  <a:srgbClr val="2E86AB"/>
+                </a:solidFill>
+                <a:latin typeface="Helvetica Neue"/>
+              </a:rPr>
+              <a:t>#1  ·  FB  ·  2,885 views</a:t>
+            </a:r>
+          </a:p>
+        </p:txBody>
+      </p:sp>
+      <p:sp>
+        <p:nvSpPr>
+          <p:cNvPr id="17" name="TextBox 16"/>
+          <p:cNvSpPr txBox="1"/>
+          <p:nvPr/>
+        </p:nvSpPr>
+        <p:spPr>
+          <a:xfrm>
+            <a:off x="6309360" y="2944368"/>
+            <a:ext cx="5029200" cy="411480"/>
+          </a:xfrm>
+          <a:prstGeom prst="rect">
+            <a:avLst/>
+          </a:prstGeom>
+          <a:noFill/>
+        </p:spPr>
+        <p:txBody>
+          <a:bodyPr wrap="square" lIns="0" rIns="0" tIns="0" bIns="0">
+            <a:spAutoFit/>
+          </a:bodyPr>
+          <a:lstStyle/>
+          <a:p>
+            <a:r>
+              <a:rPr sz="1000" b="0">
+                <a:solidFill>
+                  <a:srgbClr val="141833"/>
+                </a:solidFill>
+                <a:latin typeface="Helvetica Neue"/>
+              </a:rPr>
+              <a:t>Don't be fooled by simple comparisons. Carrie Uva, a lifelong Democrat, has earned endorse</a:t>
+            </a:r>
+          </a:p>
+        </p:txBody>
+      </p:sp>
+      <p:sp>
+        <p:nvSpPr>
+          <p:cNvPr id="18" name="Rectangle 17"/>
+          <p:cNvSpPr/>
+          <p:nvPr/>
+        </p:nvSpPr>
+        <p:spPr>
+          <a:xfrm>
+            <a:off x="6126480" y="3474720"/>
+            <a:ext cx="5303520" cy="822960"/>
+          </a:xfrm>
+          <a:prstGeom prst="rect">
+            <a:avLst/>
+          </a:prstGeom>
+          <a:solidFill>
+            <a:srgbClr val="FFFFFF"/>
+          </a:solidFill>
+          <a:ln>
+            <a:noFill/>
+          </a:ln>
+          <a:effectLst/>
+        </p:spPr>
+        <p:style>
+          <a:lnRef idx="1">
+            <a:schemeClr val="accent1"/>
+          </a:lnRef>
+          <a:fillRef idx="3">
+            <a:schemeClr val="accent1"/>
+          </a:fillRef>
+          <a:effectRef idx="2">
+            <a:schemeClr val="accent1"/>
+          </a:effectRef>
+          <a:fontRef idx="minor">
+            <a:schemeClr val="lt1"/>
+          </a:fontRef>
+        </p:style>
+        <p:txBody>
+          <a:bodyPr rtlCol="0" anchor="ctr"/>
+          <a:lstStyle/>
+          <a:p>
+            <a:pPr algn="ctr"/>
+          </a:p>
+        </p:txBody>
+      </p:sp>
+      <p:sp>
+        <p:nvSpPr>
+          <p:cNvPr id="19" name="Rectangle 18"/>
+          <p:cNvSpPr/>
+          <p:nvPr/>
+        </p:nvSpPr>
+        <p:spPr>
+          <a:xfrm>
+            <a:off x="6126480" y="3474720"/>
+            <a:ext cx="54864" cy="822960"/>
+          </a:xfrm>
+          <a:prstGeom prst="rect">
+            <a:avLst/>
+          </a:prstGeom>
+          <a:solidFill>
+            <a:srgbClr val="2E86AB"/>
+          </a:solidFill>
+          <a:ln>
+            <a:noFill/>
+          </a:ln>
+          <a:effectLst/>
+        </p:spPr>
+        <p:style>
+          <a:lnRef idx="1">
+            <a:schemeClr val="accent1"/>
+          </a:lnRef>
+          <a:fillRef idx="3">
+            <a:schemeClr val="accent1"/>
+          </a:fillRef>
+          <a:effectRef idx="2">
+            <a:schemeClr val="accent1"/>
+          </a:effectRef>
+          <a:fontRef idx="minor">
+            <a:schemeClr val="lt1"/>
+          </a:fontRef>
+        </p:style>
+        <p:txBody>
+          <a:bodyPr rtlCol="0" anchor="ctr"/>
+          <a:lstStyle/>
+          <a:p>
+            <a:pPr algn="ctr"/>
+          </a:p>
+        </p:txBody>
+      </p:sp>
+      <p:sp>
+        <p:nvSpPr>
+          <p:cNvPr id="20" name="TextBox 19"/>
+          <p:cNvSpPr txBox="1"/>
+          <p:nvPr/>
+        </p:nvSpPr>
+        <p:spPr>
+          <a:xfrm>
+            <a:off x="6309360" y="3566160"/>
+            <a:ext cx="5029200" cy="320040"/>
+          </a:xfrm>
+          <a:prstGeom prst="rect">
+            <a:avLst/>
+          </a:prstGeom>
+          <a:noFill/>
+        </p:spPr>
+        <p:txBody>
+          <a:bodyPr wrap="square" lIns="0" rIns="0" tIns="0" bIns="0">
+            <a:spAutoFit/>
+          </a:bodyPr>
+          <a:lstStyle/>
+          <a:p>
+            <a:r>
+              <a:rPr sz="1000" b="1">
+                <a:solidFill>
+                  <a:srgbClr val="2E86AB"/>
+                </a:solidFill>
+                <a:latin typeface="Helvetica Neue"/>
+              </a:rPr>
+              <a:t>#2  ·  FB  ·  2,564 views</a:t>
+            </a:r>
+          </a:p>
+        </p:txBody>
+      </p:sp>
+      <p:sp>
+        <p:nvSpPr>
+          <p:cNvPr id="21" name="TextBox 20"/>
+          <p:cNvSpPr txBox="1"/>
+          <p:nvPr/>
+        </p:nvSpPr>
+        <p:spPr>
+          <a:xfrm>
+            <a:off x="6309360" y="3858768"/>
+            <a:ext cx="5029200" cy="411480"/>
+          </a:xfrm>
+          <a:prstGeom prst="rect">
+            <a:avLst/>
+          </a:prstGeom>
+          <a:noFill/>
+        </p:spPr>
+        <p:txBody>
+          <a:bodyPr wrap="square" lIns="0" rIns="0" tIns="0" bIns="0">
+            <a:spAutoFit/>
+          </a:bodyPr>
+          <a:lstStyle/>
+          <a:p>
+            <a:r>
+              <a:rPr sz="1000" b="0">
+                <a:solidFill>
+                  <a:srgbClr val="141833"/>
+                </a:solidFill>
+                <a:latin typeface="Helvetica Neue"/>
+              </a:rPr>
+              <a:t>With a clear choice for Downey, Hector Sosa stands out. His campaign kickoff event was a t</a:t>
+            </a:r>
+          </a:p>
+        </p:txBody>
+      </p:sp>
+      <p:sp>
+        <p:nvSpPr>
+          <p:cNvPr id="22" name="Rectangle 21"/>
+          <p:cNvSpPr/>
+          <p:nvPr/>
+        </p:nvSpPr>
+        <p:spPr>
+          <a:xfrm>
+            <a:off x="6126480" y="4389120"/>
+            <a:ext cx="5303520" cy="822960"/>
+          </a:xfrm>
+          <a:prstGeom prst="rect">
+            <a:avLst/>
+          </a:prstGeom>
+          <a:solidFill>
+            <a:srgbClr val="FFFFFF"/>
+          </a:solidFill>
+          <a:ln>
+            <a:noFill/>
+          </a:ln>
+          <a:effectLst/>
+        </p:spPr>
+        <p:style>
+          <a:lnRef idx="1">
+            <a:schemeClr val="accent1"/>
+          </a:lnRef>
+          <a:fillRef idx="3">
+            <a:schemeClr val="accent1"/>
+          </a:fillRef>
+          <a:effectRef idx="2">
+            <a:schemeClr val="accent1"/>
+          </a:effectRef>
+          <a:fontRef idx="minor">
+            <a:schemeClr val="lt1"/>
+          </a:fontRef>
+        </p:style>
+        <p:txBody>
+          <a:bodyPr rtlCol="0" anchor="ctr"/>
+          <a:lstStyle/>
+          <a:p>
+            <a:pPr algn="ctr"/>
+          </a:p>
+        </p:txBody>
+      </p:sp>
+      <p:sp>
+        <p:nvSpPr>
+          <p:cNvPr id="23" name="Rectangle 22"/>
+          <p:cNvSpPr/>
+          <p:nvPr/>
+        </p:nvSpPr>
+        <p:spPr>
+          <a:xfrm>
+            <a:off x="6126480" y="4389120"/>
+            <a:ext cx="54864" cy="822960"/>
+          </a:xfrm>
+          <a:prstGeom prst="rect">
+            <a:avLst/>
+          </a:prstGeom>
+          <a:solidFill>
+            <a:srgbClr val="2E86AB"/>
+          </a:solidFill>
+          <a:ln>
+            <a:noFill/>
+          </a:ln>
+          <a:effectLst/>
+        </p:spPr>
+        <p:style>
+          <a:lnRef idx="1">
+            <a:schemeClr val="accent1"/>
+          </a:lnRef>
+          <a:fillRef idx="3">
+            <a:schemeClr val="accent1"/>
+          </a:fillRef>
+          <a:effectRef idx="2">
+            <a:schemeClr val="accent1"/>
+          </a:effectRef>
+          <a:fontRef idx="minor">
+            <a:schemeClr val="lt1"/>
+          </a:fontRef>
+        </p:style>
+        <p:txBody>
+          <a:bodyPr rtlCol="0" anchor="ctr"/>
+          <a:lstStyle/>
+          <a:p>
+            <a:pPr algn="ctr"/>
+          </a:p>
+        </p:txBody>
+      </p:sp>
+      <p:sp>
+        <p:nvSpPr>
+          <p:cNvPr id="24" name="TextBox 23"/>
+          <p:cNvSpPr txBox="1"/>
+          <p:nvPr/>
+        </p:nvSpPr>
+        <p:spPr>
+          <a:xfrm>
+            <a:off x="6309360" y="4480559"/>
+            <a:ext cx="5029200" cy="320040"/>
+          </a:xfrm>
+          <a:prstGeom prst="rect">
+            <a:avLst/>
+          </a:prstGeom>
+          <a:noFill/>
+        </p:spPr>
+        <p:txBody>
+          <a:bodyPr wrap="square" lIns="0" rIns="0" tIns="0" bIns="0">
+            <a:spAutoFit/>
+          </a:bodyPr>
+          <a:lstStyle/>
+          <a:p>
+            <a:r>
+              <a:rPr sz="1000" b="1">
+                <a:solidFill>
+                  <a:srgbClr val="2E86AB"/>
+                </a:solidFill>
+                <a:latin typeface="Helvetica Neue"/>
+              </a:rPr>
+              <a:t>#3  ·  FB  ·  2,253 views</a:t>
+            </a:r>
+          </a:p>
+        </p:txBody>
+      </p:sp>
+      <p:sp>
+        <p:nvSpPr>
+          <p:cNvPr id="25" name="TextBox 24"/>
+          <p:cNvSpPr txBox="1"/>
+          <p:nvPr/>
+        </p:nvSpPr>
+        <p:spPr>
+          <a:xfrm>
+            <a:off x="6309360" y="4773168"/>
+            <a:ext cx="5029200" cy="411480"/>
+          </a:xfrm>
+          <a:prstGeom prst="rect">
+            <a:avLst/>
+          </a:prstGeom>
+          <a:noFill/>
+        </p:spPr>
+        <p:txBody>
+          <a:bodyPr wrap="square" lIns="0" rIns="0" tIns="0" bIns="0">
+            <a:spAutoFit/>
+          </a:bodyPr>
+          <a:lstStyle/>
+          <a:p>
+            <a:r>
+              <a:rPr sz="1000" b="0">
+                <a:solidFill>
+                  <a:srgbClr val="141833"/>
+                </a:solidFill>
+                <a:latin typeface="Helvetica Neue"/>
+              </a:rPr>
+              <a:t>The Newsom administration and Rob Bonta's lawsuit against the federal government has been </a:t>
+            </a:r>
+          </a:p>
+        </p:txBody>
+      </p:sp>
+      <p:sp>
+        <p:nvSpPr>
+          <p:cNvPr id="26" name="Rectangle 25"/>
+          <p:cNvSpPr/>
+          <p:nvPr/>
+        </p:nvSpPr>
+        <p:spPr>
+          <a:xfrm>
+            <a:off x="731520" y="5623560"/>
+            <a:ext cx="10698480" cy="731520"/>
+          </a:xfrm>
+          <a:prstGeom prst="rect">
+            <a:avLst/>
+          </a:prstGeom>
+          <a:solidFill>
+            <a:srgbClr val="141833"/>
+          </a:solidFill>
+          <a:ln>
+            <a:noFill/>
+          </a:ln>
+          <a:effectLst/>
+        </p:spPr>
+        <p:style>
+          <a:lnRef idx="1">
+            <a:schemeClr val="accent1"/>
+          </a:lnRef>
+          <a:fillRef idx="3">
+            <a:schemeClr val="accent1"/>
+          </a:fillRef>
+          <a:effectRef idx="2">
+            <a:schemeClr val="accent1"/>
+          </a:effectRef>
+          <a:fontRef idx="minor">
+            <a:schemeClr val="lt1"/>
+          </a:fontRef>
+        </p:style>
+        <p:txBody>
+          <a:bodyPr rtlCol="0" anchor="ctr"/>
+          <a:lstStyle/>
+          <a:p>
+            <a:pPr algn="ctr"/>
+          </a:p>
+        </p:txBody>
+      </p:sp>
+      <p:sp>
+        <p:nvSpPr>
+          <p:cNvPr id="27" name="TextBox 26"/>
+          <p:cNvSpPr txBox="1"/>
+          <p:nvPr/>
+        </p:nvSpPr>
+        <p:spPr>
+          <a:xfrm>
+            <a:off x="914400" y="5715000"/>
+            <a:ext cx="2743200" cy="274320"/>
+          </a:xfrm>
+          <a:prstGeom prst="rect">
+            <a:avLst/>
+          </a:prstGeom>
+          <a:noFill/>
+        </p:spPr>
+        <p:txBody>
+          <a:bodyPr wrap="square" lIns="0" rIns="0" tIns="0" bIns="0">
+            <a:spAutoFit/>
+          </a:bodyPr>
+          <a:lstStyle/>
+          <a:p>
+            <a:r>
+              <a:rPr sz="1000" b="1">
+                <a:solidFill>
+                  <a:srgbClr val="2E86AB"/>
+                </a:solidFill>
+                <a:latin typeface="Helvetica Neue"/>
+              </a:rPr>
+              <a:t>RECOMMENDATION</a:t>
+            </a:r>
+          </a:p>
+        </p:txBody>
+      </p:sp>
+      <p:sp>
+        <p:nvSpPr>
+          <p:cNvPr id="28" name="TextBox 27"/>
+          <p:cNvSpPr txBox="1"/>
+          <p:nvPr/>
+        </p:nvSpPr>
+        <p:spPr>
+          <a:xfrm>
+            <a:off x="914400" y="5943600"/>
+            <a:ext cx="10515600" cy="365760"/>
+          </a:xfrm>
+          <a:prstGeom prst="rect">
+            <a:avLst/>
+          </a:prstGeom>
+          <a:noFill/>
+        </p:spPr>
+        <p:txBody>
+          <a:bodyPr wrap="square" lIns="0" rIns="0" tIns="0" bIns="0">
+            <a:spAutoFit/>
+          </a:bodyPr>
+          <a:lstStyle/>
+          <a:p>
+            <a:r>
+              <a:rPr sz="1300" b="1">
                 <a:solidFill>
                   <a:srgbClr val="FCF6F5"/>
                 </a:solidFill>
                 <a:latin typeface="Helvetica Neue"/>
               </a:rPr>
-              <a:t>5 smaller lanes still building audience. Real potential, low volume — don't retire prematurely.</a:t>
+              <a:t>Modest reach. Fine as filler between heavy hitters, not a headline lane.</a:t>
             </a:r>
           </a:p>
         </p:txBody>
@@ -4769,7 +5597,7 @@
                 </a:solidFill>
                 <a:latin typeface="Helvetica Neue"/>
               </a:rPr>
-              <a:t>WORTH WATCHING</a:t>
+              <a:t>CATEGORY DEEP-DIVE</a:t>
             </a:r>
           </a:p>
         </p:txBody>
@@ -4803,7 +5631,7 @@
                 </a:solidFill>
                 <a:latin typeface="Georgia"/>
               </a:rPr>
-              <a:t>Small lanes that could develop into something</a:t>
+              <a:t>Resident Highlights</a:t>
             </a:r>
           </a:p>
         </p:txBody>
@@ -4837,7 +5665,7 @@
                 </a:solidFill>
                 <a:latin typeface="Helvetica Neue"/>
               </a:rPr>
-              <a:t>Low volume today, but real audience potential. Don't kill these before they get their shot.</a:t>
+              <a:t>Non-political citizen profiles — small business owners, community members. Granata, Gately, the deacon.</a:t>
             </a:r>
           </a:p>
         </p:txBody>
@@ -4850,28 +5678,28 @@
         </p:nvSpPr>
         <p:spPr>
           <a:xfrm>
-            <a:off x="731520" y="2148839"/>
-            <a:ext cx="3200400" cy="502920"/>
-          </a:xfrm>
-          <a:prstGeom prst="rect">
-            <a:avLst/>
-          </a:prstGeom>
-          <a:noFill/>
-        </p:spPr>
-        <p:txBody>
-          <a:bodyPr wrap="square" lIns="0" rIns="0" tIns="0" bIns="0">
-            <a:spAutoFit/>
-          </a:bodyPr>
-          <a:lstStyle/>
-          <a:p>
-            <a:r>
-              <a:rPr sz="1200" b="1">
-                <a:solidFill>
-                  <a:srgbClr val="141833"/>
-                </a:solidFill>
-                <a:latin typeface="Helvetica Neue"/>
-              </a:rPr>
-              <a:t>Elections &amp; Judicial</a:t>
+            <a:off x="731520" y="1691640"/>
+            <a:ext cx="10698480" cy="274320"/>
+          </a:xfrm>
+          <a:prstGeom prst="rect">
+            <a:avLst/>
+          </a:prstGeom>
+          <a:noFill/>
+        </p:spPr>
+        <p:txBody>
+          <a:bodyPr wrap="square" lIns="0" rIns="0" tIns="0" bIns="0">
+            <a:spAutoFit/>
+          </a:bodyPr>
+          <a:lstStyle/>
+          <a:p>
+            <a:r>
+              <a:rPr sz="900" b="1">
+                <a:solidFill>
+                  <a:srgbClr val="1B7A43"/>
+                </a:solidFill>
+                <a:latin typeface="Helvetica Neue"/>
+              </a:rPr>
+              <a:t>AUDIENCE (theoretical): Human interest · Broad, community-connected</a:t>
             </a:r>
           </a:p>
         </p:txBody>
@@ -4884,14 +5712,14 @@
         </p:nvSpPr>
         <p:spPr>
           <a:xfrm>
-            <a:off x="4206240" y="2217420"/>
-            <a:ext cx="6035040" cy="274320"/>
+            <a:off x="731520" y="2194560"/>
+            <a:ext cx="5029200" cy="3200400"/>
           </a:xfrm>
           <a:prstGeom prst="rect">
             <a:avLst/>
           </a:prstGeom>
           <a:solidFill>
-            <a:srgbClr val="2F3C7E"/>
+            <a:srgbClr val="FFFFFF"/>
           </a:solidFill>
           <a:ln>
             <a:noFill/>
@@ -4922,116 +5750,696 @@
       </p:sp>
       <p:sp>
         <p:nvSpPr>
-          <p:cNvPr id="8" name="TextBox 7"/>
-          <p:cNvSpPr txBox="1"/>
-          <p:nvPr/>
-        </p:nvSpPr>
-        <p:spPr>
-          <a:xfrm>
-            <a:off x="10332719" y="2148839"/>
-            <a:ext cx="2286000" cy="251460"/>
-          </a:xfrm>
-          <a:prstGeom prst="rect">
-            <a:avLst/>
-          </a:prstGeom>
-          <a:noFill/>
-        </p:spPr>
-        <p:txBody>
-          <a:bodyPr wrap="square" lIns="0" rIns="0" tIns="0" bIns="0">
-            <a:spAutoFit/>
-          </a:bodyPr>
-          <a:lstStyle/>
-          <a:p>
-            <a:r>
-              <a:rPr sz="900" b="0">
+          <p:cNvPr id="8" name="Rectangle 7"/>
+          <p:cNvSpPr/>
+          <p:nvPr/>
+        </p:nvSpPr>
+        <p:spPr>
+          <a:xfrm>
+            <a:off x="731520" y="2194560"/>
+            <a:ext cx="91440" cy="3200400"/>
+          </a:xfrm>
+          <a:prstGeom prst="rect">
+            <a:avLst/>
+          </a:prstGeom>
+          <a:solidFill>
+            <a:srgbClr val="1B7A43"/>
+          </a:solidFill>
+          <a:ln>
+            <a:noFill/>
+          </a:ln>
+          <a:effectLst/>
+        </p:spPr>
+        <p:style>
+          <a:lnRef idx="1">
+            <a:schemeClr val="accent1"/>
+          </a:lnRef>
+          <a:fillRef idx="3">
+            <a:schemeClr val="accent1"/>
+          </a:fillRef>
+          <a:effectRef idx="2">
+            <a:schemeClr val="accent1"/>
+          </a:effectRef>
+          <a:fontRef idx="minor">
+            <a:schemeClr val="lt1"/>
+          </a:fontRef>
+        </p:style>
+        <p:txBody>
+          <a:bodyPr rtlCol="0" anchor="ctr"/>
+          <a:lstStyle/>
+          <a:p>
+            <a:pPr algn="ctr"/>
+          </a:p>
+        </p:txBody>
+      </p:sp>
+      <p:sp>
+        <p:nvSpPr>
+          <p:cNvPr id="9" name="TextBox 8"/>
+          <p:cNvSpPr txBox="1"/>
+          <p:nvPr/>
+        </p:nvSpPr>
+        <p:spPr>
+          <a:xfrm>
+            <a:off x="960120" y="2377440"/>
+            <a:ext cx="4572000" cy="365760"/>
+          </a:xfrm>
+          <a:prstGeom prst="rect">
+            <a:avLst/>
+          </a:prstGeom>
+          <a:noFill/>
+        </p:spPr>
+        <p:txBody>
+          <a:bodyPr wrap="square" lIns="0" rIns="0" tIns="0" bIns="0">
+            <a:spAutoFit/>
+          </a:bodyPr>
+          <a:lstStyle/>
+          <a:p>
+            <a:r>
+              <a:rPr sz="1100" b="1">
+                <a:solidFill>
+                  <a:srgbClr val="1B7A43"/>
+                </a:solidFill>
+                <a:latin typeface="Helvetica Neue"/>
+              </a:rPr>
+              <a:t>TOTAL VIEWS</a:t>
+            </a:r>
+          </a:p>
+        </p:txBody>
+      </p:sp>
+      <p:sp>
+        <p:nvSpPr>
+          <p:cNvPr id="10" name="TextBox 9"/>
+          <p:cNvSpPr txBox="1"/>
+          <p:nvPr/>
+        </p:nvSpPr>
+        <p:spPr>
+          <a:xfrm>
+            <a:off x="960120" y="2697480"/>
+            <a:ext cx="4572000" cy="1097280"/>
+          </a:xfrm>
+          <a:prstGeom prst="rect">
+            <a:avLst/>
+          </a:prstGeom>
+          <a:noFill/>
+        </p:spPr>
+        <p:txBody>
+          <a:bodyPr wrap="square" lIns="0" rIns="0" tIns="0" bIns="0">
+            <a:spAutoFit/>
+          </a:bodyPr>
+          <a:lstStyle/>
+          <a:p>
+            <a:r>
+              <a:rPr sz="5400" b="1">
+                <a:solidFill>
+                  <a:srgbClr val="2F3C7E"/>
+                </a:solidFill>
+                <a:latin typeface="Georgia"/>
+              </a:rPr>
+              <a:t>8,249</a:t>
+            </a:r>
+          </a:p>
+        </p:txBody>
+      </p:sp>
+      <p:sp>
+        <p:nvSpPr>
+          <p:cNvPr id="11" name="TextBox 10"/>
+          <p:cNvSpPr txBox="1"/>
+          <p:nvPr/>
+        </p:nvSpPr>
+        <p:spPr>
+          <a:xfrm>
+            <a:off x="960120" y="3840480"/>
+            <a:ext cx="4572000" cy="365760"/>
+          </a:xfrm>
+          <a:prstGeom prst="rect">
+            <a:avLst/>
+          </a:prstGeom>
+          <a:noFill/>
+        </p:spPr>
+        <p:txBody>
+          <a:bodyPr wrap="square" lIns="0" rIns="0" tIns="0" bIns="0">
+            <a:spAutoFit/>
+          </a:bodyPr>
+          <a:lstStyle/>
+          <a:p>
+            <a:r>
+              <a:rPr sz="1300" b="1">
+                <a:solidFill>
+                  <a:srgbClr val="141833"/>
+                </a:solidFill>
+                <a:latin typeface="Helvetica Neue"/>
+              </a:rPr>
+              <a:t>8 posts · 141 likes</a:t>
+            </a:r>
+          </a:p>
+        </p:txBody>
+      </p:sp>
+      <p:sp>
+        <p:nvSpPr>
+          <p:cNvPr id="12" name="TextBox 11"/>
+          <p:cNvSpPr txBox="1"/>
+          <p:nvPr/>
+        </p:nvSpPr>
+        <p:spPr>
+          <a:xfrm>
+            <a:off x="960120" y="4206240"/>
+            <a:ext cx="4572000" cy="365760"/>
+          </a:xfrm>
+          <a:prstGeom prst="rect">
+            <a:avLst/>
+          </a:prstGeom>
+          <a:noFill/>
+        </p:spPr>
+        <p:txBody>
+          <a:bodyPr wrap="square" lIns="0" rIns="0" tIns="0" bIns="0">
+            <a:spAutoFit/>
+          </a:bodyPr>
+          <a:lstStyle/>
+          <a:p>
+            <a:r>
+              <a:rPr sz="1300" b="0">
                 <a:solidFill>
                   <a:srgbClr val="6B7082"/>
                 </a:solidFill>
                 <a:latin typeface="Helvetica Neue"/>
               </a:rPr>
-              <a:t>62,111 views · 83 posts · 748 avg</a:t>
-            </a:r>
-          </a:p>
-        </p:txBody>
-      </p:sp>
-      <p:sp>
-        <p:nvSpPr>
-          <p:cNvPr id="9" name="TextBox 8"/>
-          <p:cNvSpPr txBox="1"/>
-          <p:nvPr/>
-        </p:nvSpPr>
-        <p:spPr>
-          <a:xfrm>
-            <a:off x="10332719" y="2354579"/>
-            <a:ext cx="4572000" cy="251460"/>
-          </a:xfrm>
-          <a:prstGeom prst="rect">
-            <a:avLst/>
-          </a:prstGeom>
-          <a:noFill/>
-        </p:spPr>
-        <p:txBody>
-          <a:bodyPr wrap="square" lIns="0" rIns="0" tIns="0" bIns="0">
-            <a:spAutoFit/>
-          </a:bodyPr>
-          <a:lstStyle/>
-          <a:p>
-            <a:r>
-              <a:rPr sz="800" b="0">
-                <a:solidFill>
-                  <a:srgbClr val="6B7082"/>
-                </a:solidFill>
-                <a:latin typeface="Helvetica Neue"/>
-              </a:rPr>
-              <a:t>Slow-burn policy · Middle (40-55) + Older (55+) engaged voters</a:t>
-            </a:r>
-          </a:p>
-        </p:txBody>
-      </p:sp>
-      <p:sp>
-        <p:nvSpPr>
-          <p:cNvPr id="10" name="TextBox 9"/>
-          <p:cNvSpPr txBox="1"/>
-          <p:nvPr/>
-        </p:nvSpPr>
-        <p:spPr>
-          <a:xfrm>
-            <a:off x="731520" y="2651759"/>
-            <a:ext cx="3200400" cy="502920"/>
-          </a:xfrm>
-          <a:prstGeom prst="rect">
-            <a:avLst/>
-          </a:prstGeom>
-          <a:noFill/>
-        </p:spPr>
-        <p:txBody>
-          <a:bodyPr wrap="square" lIns="0" rIns="0" tIns="0" bIns="0">
-            <a:spAutoFit/>
-          </a:bodyPr>
-          <a:lstStyle/>
-          <a:p>
-            <a:r>
-              <a:rPr sz="1200" b="1">
+              <a:t>1,031 average views per post</a:t>
+            </a:r>
+          </a:p>
+        </p:txBody>
+      </p:sp>
+      <p:sp>
+        <p:nvSpPr>
+          <p:cNvPr id="13" name="TextBox 12"/>
+          <p:cNvSpPr txBox="1"/>
+          <p:nvPr/>
+        </p:nvSpPr>
+        <p:spPr>
+          <a:xfrm>
+            <a:off x="6126480" y="2194560"/>
+            <a:ext cx="5486400" cy="274320"/>
+          </a:xfrm>
+          <a:prstGeom prst="rect">
+            <a:avLst/>
+          </a:prstGeom>
+          <a:noFill/>
+        </p:spPr>
+        <p:txBody>
+          <a:bodyPr wrap="square" lIns="0" rIns="0" tIns="0" bIns="0">
+            <a:spAutoFit/>
+          </a:bodyPr>
+          <a:lstStyle/>
+          <a:p>
+            <a:r>
+              <a:rPr sz="1100" b="1">
+                <a:solidFill>
+                  <a:srgbClr val="1B7A43"/>
+                </a:solidFill>
+                <a:latin typeface="Helvetica Neue"/>
+              </a:rPr>
+              <a:t>TOP 3 IN THIS CATEGORY</a:t>
+            </a:r>
+          </a:p>
+        </p:txBody>
+      </p:sp>
+      <p:sp>
+        <p:nvSpPr>
+          <p:cNvPr id="14" name="Rectangle 13"/>
+          <p:cNvSpPr/>
+          <p:nvPr/>
+        </p:nvSpPr>
+        <p:spPr>
+          <a:xfrm>
+            <a:off x="6126480" y="2560320"/>
+            <a:ext cx="5303520" cy="822960"/>
+          </a:xfrm>
+          <a:prstGeom prst="rect">
+            <a:avLst/>
+          </a:prstGeom>
+          <a:solidFill>
+            <a:srgbClr val="FFFFFF"/>
+          </a:solidFill>
+          <a:ln>
+            <a:noFill/>
+          </a:ln>
+          <a:effectLst/>
+        </p:spPr>
+        <p:style>
+          <a:lnRef idx="1">
+            <a:schemeClr val="accent1"/>
+          </a:lnRef>
+          <a:fillRef idx="3">
+            <a:schemeClr val="accent1"/>
+          </a:fillRef>
+          <a:effectRef idx="2">
+            <a:schemeClr val="accent1"/>
+          </a:effectRef>
+          <a:fontRef idx="minor">
+            <a:schemeClr val="lt1"/>
+          </a:fontRef>
+        </p:style>
+        <p:txBody>
+          <a:bodyPr rtlCol="0" anchor="ctr"/>
+          <a:lstStyle/>
+          <a:p>
+            <a:pPr algn="ctr"/>
+          </a:p>
+        </p:txBody>
+      </p:sp>
+      <p:sp>
+        <p:nvSpPr>
+          <p:cNvPr id="15" name="Rectangle 14"/>
+          <p:cNvSpPr/>
+          <p:nvPr/>
+        </p:nvSpPr>
+        <p:spPr>
+          <a:xfrm>
+            <a:off x="6126480" y="2560320"/>
+            <a:ext cx="54864" cy="822960"/>
+          </a:xfrm>
+          <a:prstGeom prst="rect">
+            <a:avLst/>
+          </a:prstGeom>
+          <a:solidFill>
+            <a:srgbClr val="1B7A43"/>
+          </a:solidFill>
+          <a:ln>
+            <a:noFill/>
+          </a:ln>
+          <a:effectLst/>
+        </p:spPr>
+        <p:style>
+          <a:lnRef idx="1">
+            <a:schemeClr val="accent1"/>
+          </a:lnRef>
+          <a:fillRef idx="3">
+            <a:schemeClr val="accent1"/>
+          </a:fillRef>
+          <a:effectRef idx="2">
+            <a:schemeClr val="accent1"/>
+          </a:effectRef>
+          <a:fontRef idx="minor">
+            <a:schemeClr val="lt1"/>
+          </a:fontRef>
+        </p:style>
+        <p:txBody>
+          <a:bodyPr rtlCol="0" anchor="ctr"/>
+          <a:lstStyle/>
+          <a:p>
+            <a:pPr algn="ctr"/>
+          </a:p>
+        </p:txBody>
+      </p:sp>
+      <p:sp>
+        <p:nvSpPr>
+          <p:cNvPr id="16" name="TextBox 15"/>
+          <p:cNvSpPr txBox="1"/>
+          <p:nvPr/>
+        </p:nvSpPr>
+        <p:spPr>
+          <a:xfrm>
+            <a:off x="6309360" y="2651760"/>
+            <a:ext cx="5029200" cy="320040"/>
+          </a:xfrm>
+          <a:prstGeom prst="rect">
+            <a:avLst/>
+          </a:prstGeom>
+          <a:noFill/>
+        </p:spPr>
+        <p:txBody>
+          <a:bodyPr wrap="square" lIns="0" rIns="0" tIns="0" bIns="0">
+            <a:spAutoFit/>
+          </a:bodyPr>
+          <a:lstStyle/>
+          <a:p>
+            <a:r>
+              <a:rPr sz="1000" b="1">
+                <a:solidFill>
+                  <a:srgbClr val="1B7A43"/>
+                </a:solidFill>
+                <a:latin typeface="Helvetica Neue"/>
+              </a:rPr>
+              <a:t>#1  ·  IG  ·  3,551 views</a:t>
+            </a:r>
+          </a:p>
+        </p:txBody>
+      </p:sp>
+      <p:sp>
+        <p:nvSpPr>
+          <p:cNvPr id="17" name="TextBox 16"/>
+          <p:cNvSpPr txBox="1"/>
+          <p:nvPr/>
+        </p:nvSpPr>
+        <p:spPr>
+          <a:xfrm>
+            <a:off x="6309360" y="2944368"/>
+            <a:ext cx="5029200" cy="411480"/>
+          </a:xfrm>
+          <a:prstGeom prst="rect">
+            <a:avLst/>
+          </a:prstGeom>
+          <a:noFill/>
+        </p:spPr>
+        <p:txBody>
+          <a:bodyPr wrap="square" lIns="0" rIns="0" tIns="0" bIns="0">
+            <a:spAutoFit/>
+          </a:bodyPr>
+          <a:lstStyle/>
+          <a:p>
+            <a:r>
+              <a:rPr sz="1000" b="0">
                 <a:solidFill>
                   <a:srgbClr val="141833"/>
                 </a:solidFill>
                 <a:latin typeface="Helvetica Neue"/>
               </a:rPr>
-              <a:t>Community &amp; Culture</a:t>
-            </a:r>
-          </a:p>
-        </p:txBody>
-      </p:sp>
-      <p:sp>
-        <p:nvSpPr>
-          <p:cNvPr id="11" name="Rectangle 10"/>
+              <a:t>Almost ran over a family. I got the license plate, checked on them. Turns out he's a Catho</a:t>
+            </a:r>
+          </a:p>
+        </p:txBody>
+      </p:sp>
+      <p:sp>
+        <p:nvSpPr>
+          <p:cNvPr id="18" name="Rectangle 17"/>
           <p:cNvSpPr/>
           <p:nvPr/>
         </p:nvSpPr>
         <p:spPr>
           <a:xfrm>
-            <a:off x="4206240" y="2720339"/>
-            <a:ext cx="4004477" cy="274320"/>
+            <a:off x="6126480" y="3474720"/>
+            <a:ext cx="5303520" cy="822960"/>
+          </a:xfrm>
+          <a:prstGeom prst="rect">
+            <a:avLst/>
+          </a:prstGeom>
+          <a:solidFill>
+            <a:srgbClr val="FFFFFF"/>
+          </a:solidFill>
+          <a:ln>
+            <a:noFill/>
+          </a:ln>
+          <a:effectLst/>
+        </p:spPr>
+        <p:style>
+          <a:lnRef idx="1">
+            <a:schemeClr val="accent1"/>
+          </a:lnRef>
+          <a:fillRef idx="3">
+            <a:schemeClr val="accent1"/>
+          </a:fillRef>
+          <a:effectRef idx="2">
+            <a:schemeClr val="accent1"/>
+          </a:effectRef>
+          <a:fontRef idx="minor">
+            <a:schemeClr val="lt1"/>
+          </a:fontRef>
+        </p:style>
+        <p:txBody>
+          <a:bodyPr rtlCol="0" anchor="ctr"/>
+          <a:lstStyle/>
+          <a:p>
+            <a:pPr algn="ctr"/>
+          </a:p>
+        </p:txBody>
+      </p:sp>
+      <p:sp>
+        <p:nvSpPr>
+          <p:cNvPr id="19" name="Rectangle 18"/>
+          <p:cNvSpPr/>
+          <p:nvPr/>
+        </p:nvSpPr>
+        <p:spPr>
+          <a:xfrm>
+            <a:off x="6126480" y="3474720"/>
+            <a:ext cx="54864" cy="822960"/>
+          </a:xfrm>
+          <a:prstGeom prst="rect">
+            <a:avLst/>
+          </a:prstGeom>
+          <a:solidFill>
+            <a:srgbClr val="1B7A43"/>
+          </a:solidFill>
+          <a:ln>
+            <a:noFill/>
+          </a:ln>
+          <a:effectLst/>
+        </p:spPr>
+        <p:style>
+          <a:lnRef idx="1">
+            <a:schemeClr val="accent1"/>
+          </a:lnRef>
+          <a:fillRef idx="3">
+            <a:schemeClr val="accent1"/>
+          </a:fillRef>
+          <a:effectRef idx="2">
+            <a:schemeClr val="accent1"/>
+          </a:effectRef>
+          <a:fontRef idx="minor">
+            <a:schemeClr val="lt1"/>
+          </a:fontRef>
+        </p:style>
+        <p:txBody>
+          <a:bodyPr rtlCol="0" anchor="ctr"/>
+          <a:lstStyle/>
+          <a:p>
+            <a:pPr algn="ctr"/>
+          </a:p>
+        </p:txBody>
+      </p:sp>
+      <p:sp>
+        <p:nvSpPr>
+          <p:cNvPr id="20" name="TextBox 19"/>
+          <p:cNvSpPr txBox="1"/>
+          <p:nvPr/>
+        </p:nvSpPr>
+        <p:spPr>
+          <a:xfrm>
+            <a:off x="6309360" y="3566160"/>
+            <a:ext cx="5029200" cy="320040"/>
+          </a:xfrm>
+          <a:prstGeom prst="rect">
+            <a:avLst/>
+          </a:prstGeom>
+          <a:noFill/>
+        </p:spPr>
+        <p:txBody>
+          <a:bodyPr wrap="square" lIns="0" rIns="0" tIns="0" bIns="0">
+            <a:spAutoFit/>
+          </a:bodyPr>
+          <a:lstStyle/>
+          <a:p>
+            <a:r>
+              <a:rPr sz="1000" b="1">
+                <a:solidFill>
+                  <a:srgbClr val="1B7A43"/>
+                </a:solidFill>
+                <a:latin typeface="Helvetica Neue"/>
+              </a:rPr>
+              <a:t>#2  ·  FB  ·  2,491 views</a:t>
+            </a:r>
+          </a:p>
+        </p:txBody>
+      </p:sp>
+      <p:sp>
+        <p:nvSpPr>
+          <p:cNvPr id="21" name="TextBox 20"/>
+          <p:cNvSpPr txBox="1"/>
+          <p:nvPr/>
+        </p:nvSpPr>
+        <p:spPr>
+          <a:xfrm>
+            <a:off x="6309360" y="3858768"/>
+            <a:ext cx="5029200" cy="411480"/>
+          </a:xfrm>
+          <a:prstGeom prst="rect">
+            <a:avLst/>
+          </a:prstGeom>
+          <a:noFill/>
+        </p:spPr>
+        <p:txBody>
+          <a:bodyPr wrap="square" lIns="0" rIns="0" tIns="0" bIns="0">
+            <a:spAutoFit/>
+          </a:bodyPr>
+          <a:lstStyle/>
+          <a:p>
+            <a:r>
+              <a:rPr sz="1000" b="0">
+                <a:solidFill>
+                  <a:srgbClr val="141833"/>
+                </a:solidFill>
+                <a:latin typeface="Helvetica Neue"/>
+              </a:rPr>
+              <a:t>A terrifying moment outside City Hall as a car nearly hits a family. A witness captured th</a:t>
+            </a:r>
+          </a:p>
+        </p:txBody>
+      </p:sp>
+      <p:sp>
+        <p:nvSpPr>
+          <p:cNvPr id="22" name="Rectangle 21"/>
+          <p:cNvSpPr/>
+          <p:nvPr/>
+        </p:nvSpPr>
+        <p:spPr>
+          <a:xfrm>
+            <a:off x="6126480" y="4389120"/>
+            <a:ext cx="5303520" cy="822960"/>
+          </a:xfrm>
+          <a:prstGeom prst="rect">
+            <a:avLst/>
+          </a:prstGeom>
+          <a:solidFill>
+            <a:srgbClr val="FFFFFF"/>
+          </a:solidFill>
+          <a:ln>
+            <a:noFill/>
+          </a:ln>
+          <a:effectLst/>
+        </p:spPr>
+        <p:style>
+          <a:lnRef idx="1">
+            <a:schemeClr val="accent1"/>
+          </a:lnRef>
+          <a:fillRef idx="3">
+            <a:schemeClr val="accent1"/>
+          </a:fillRef>
+          <a:effectRef idx="2">
+            <a:schemeClr val="accent1"/>
+          </a:effectRef>
+          <a:fontRef idx="minor">
+            <a:schemeClr val="lt1"/>
+          </a:fontRef>
+        </p:style>
+        <p:txBody>
+          <a:bodyPr rtlCol="0" anchor="ctr"/>
+          <a:lstStyle/>
+          <a:p>
+            <a:pPr algn="ctr"/>
+          </a:p>
+        </p:txBody>
+      </p:sp>
+      <p:sp>
+        <p:nvSpPr>
+          <p:cNvPr id="23" name="Rectangle 22"/>
+          <p:cNvSpPr/>
+          <p:nvPr/>
+        </p:nvSpPr>
+        <p:spPr>
+          <a:xfrm>
+            <a:off x="6126480" y="4389120"/>
+            <a:ext cx="54864" cy="822960"/>
+          </a:xfrm>
+          <a:prstGeom prst="rect">
+            <a:avLst/>
+          </a:prstGeom>
+          <a:solidFill>
+            <a:srgbClr val="1B7A43"/>
+          </a:solidFill>
+          <a:ln>
+            <a:noFill/>
+          </a:ln>
+          <a:effectLst/>
+        </p:spPr>
+        <p:style>
+          <a:lnRef idx="1">
+            <a:schemeClr val="accent1"/>
+          </a:lnRef>
+          <a:fillRef idx="3">
+            <a:schemeClr val="accent1"/>
+          </a:fillRef>
+          <a:effectRef idx="2">
+            <a:schemeClr val="accent1"/>
+          </a:effectRef>
+          <a:fontRef idx="minor">
+            <a:schemeClr val="lt1"/>
+          </a:fontRef>
+        </p:style>
+        <p:txBody>
+          <a:bodyPr rtlCol="0" anchor="ctr"/>
+          <a:lstStyle/>
+          <a:p>
+            <a:pPr algn="ctr"/>
+          </a:p>
+        </p:txBody>
+      </p:sp>
+      <p:sp>
+        <p:nvSpPr>
+          <p:cNvPr id="24" name="TextBox 23"/>
+          <p:cNvSpPr txBox="1"/>
+          <p:nvPr/>
+        </p:nvSpPr>
+        <p:spPr>
+          <a:xfrm>
+            <a:off x="6309360" y="4480559"/>
+            <a:ext cx="5029200" cy="320040"/>
+          </a:xfrm>
+          <a:prstGeom prst="rect">
+            <a:avLst/>
+          </a:prstGeom>
+          <a:noFill/>
+        </p:spPr>
+        <p:txBody>
+          <a:bodyPr wrap="square" lIns="0" rIns="0" tIns="0" bIns="0">
+            <a:spAutoFit/>
+          </a:bodyPr>
+          <a:lstStyle/>
+          <a:p>
+            <a:r>
+              <a:rPr sz="1000" b="1">
+                <a:solidFill>
+                  <a:srgbClr val="1B7A43"/>
+                </a:solidFill>
+                <a:latin typeface="Helvetica Neue"/>
+              </a:rPr>
+              <a:t>#3  ·  FB  ·  812 views</a:t>
+            </a:r>
+          </a:p>
+        </p:txBody>
+      </p:sp>
+      <p:sp>
+        <p:nvSpPr>
+          <p:cNvPr id="25" name="TextBox 24"/>
+          <p:cNvSpPr txBox="1"/>
+          <p:nvPr/>
+        </p:nvSpPr>
+        <p:spPr>
+          <a:xfrm>
+            <a:off x="6309360" y="4773168"/>
+            <a:ext cx="5029200" cy="411480"/>
+          </a:xfrm>
+          <a:prstGeom prst="rect">
+            <a:avLst/>
+          </a:prstGeom>
+          <a:noFill/>
+        </p:spPr>
+        <p:txBody>
+          <a:bodyPr wrap="square" lIns="0" rIns="0" tIns="0" bIns="0">
+            <a:spAutoFit/>
+          </a:bodyPr>
+          <a:lstStyle/>
+          <a:p>
+            <a:r>
+              <a:rPr sz="1000" b="0">
+                <a:solidFill>
+                  <a:srgbClr val="141833"/>
+                </a:solidFill>
+                <a:latin typeface="Helvetica Neue"/>
+              </a:rPr>
+              <a:t>Running a restaurant means the show must go on, even when things are falling apart. Unlike</a:t>
+            </a:r>
+          </a:p>
+        </p:txBody>
+      </p:sp>
+      <p:sp>
+        <p:nvSpPr>
+          <p:cNvPr id="26" name="Rectangle 25"/>
+          <p:cNvSpPr/>
+          <p:nvPr/>
+        </p:nvSpPr>
+        <p:spPr>
+          <a:xfrm>
+            <a:off x="731520" y="5623560"/>
+            <a:ext cx="10698480" cy="731520"/>
           </a:xfrm>
           <a:prstGeom prst="rect">
             <a:avLst/>
@@ -5068,540 +6476,68 @@
       </p:sp>
       <p:sp>
         <p:nvSpPr>
-          <p:cNvPr id="12" name="TextBox 11"/>
-          <p:cNvSpPr txBox="1"/>
-          <p:nvPr/>
-        </p:nvSpPr>
-        <p:spPr>
-          <a:xfrm>
-            <a:off x="8302157" y="2651759"/>
-            <a:ext cx="2286000" cy="251460"/>
-          </a:xfrm>
-          <a:prstGeom prst="rect">
-            <a:avLst/>
-          </a:prstGeom>
-          <a:noFill/>
-        </p:spPr>
-        <p:txBody>
-          <a:bodyPr wrap="square" lIns="0" rIns="0" tIns="0" bIns="0">
-            <a:spAutoFit/>
-          </a:bodyPr>
-          <a:lstStyle/>
-          <a:p>
-            <a:r>
-              <a:rPr sz="900" b="0">
-                <a:solidFill>
-                  <a:srgbClr val="6B7082"/>
-                </a:solidFill>
-                <a:latin typeface="Helvetica Neue"/>
-              </a:rPr>
-              <a:t>41,213 views · 54 posts · 763 avg</a:t>
-            </a:r>
-          </a:p>
-        </p:txBody>
-      </p:sp>
-      <p:sp>
-        <p:nvSpPr>
-          <p:cNvPr id="13" name="TextBox 12"/>
-          <p:cNvSpPr txBox="1"/>
-          <p:nvPr/>
-        </p:nvSpPr>
-        <p:spPr>
-          <a:xfrm>
-            <a:off x="8302157" y="2857499"/>
-            <a:ext cx="4572000" cy="251460"/>
-          </a:xfrm>
-          <a:prstGeom prst="rect">
-            <a:avLst/>
-          </a:prstGeom>
-          <a:noFill/>
-        </p:spPr>
-        <p:txBody>
-          <a:bodyPr wrap="square" lIns="0" rIns="0" tIns="0" bIns="0">
-            <a:spAutoFit/>
-          </a:bodyPr>
-          <a:lstStyle/>
-          <a:p>
-            <a:r>
-              <a:rPr sz="800" b="0">
-                <a:solidFill>
-                  <a:srgbClr val="6B7082"/>
-                </a:solidFill>
-                <a:latin typeface="Helvetica Neue"/>
-              </a:rPr>
-              <a:t>Local color · Broad, 30+</a:t>
-            </a:r>
-          </a:p>
-        </p:txBody>
-      </p:sp>
-      <p:sp>
-        <p:nvSpPr>
-          <p:cNvPr id="14" name="TextBox 13"/>
-          <p:cNvSpPr txBox="1"/>
-          <p:nvPr/>
-        </p:nvSpPr>
-        <p:spPr>
-          <a:xfrm>
-            <a:off x="731520" y="3154679"/>
-            <a:ext cx="3200400" cy="502920"/>
-          </a:xfrm>
-          <a:prstGeom prst="rect">
-            <a:avLst/>
-          </a:prstGeom>
-          <a:noFill/>
-        </p:spPr>
-        <p:txBody>
-          <a:bodyPr wrap="square" lIns="0" rIns="0" tIns="0" bIns="0">
-            <a:spAutoFit/>
-          </a:bodyPr>
-          <a:lstStyle/>
-          <a:p>
-            <a:r>
-              <a:rPr sz="1200" b="1">
-                <a:solidFill>
-                  <a:srgbClr val="141833"/>
-                </a:solidFill>
-                <a:latin typeface="Helvetica Neue"/>
-              </a:rPr>
-              <a:t>Political Individual Highlights</a:t>
-            </a:r>
-          </a:p>
-        </p:txBody>
-      </p:sp>
-      <p:sp>
-        <p:nvSpPr>
-          <p:cNvPr id="15" name="Rectangle 14"/>
-          <p:cNvSpPr/>
-          <p:nvPr/>
-        </p:nvSpPr>
-        <p:spPr>
-          <a:xfrm>
-            <a:off x="4206240" y="3223260"/>
-            <a:ext cx="1534824" cy="274320"/>
-          </a:xfrm>
-          <a:prstGeom prst="rect">
-            <a:avLst/>
-          </a:prstGeom>
-          <a:solidFill>
-            <a:srgbClr val="2E86AB"/>
-          </a:solidFill>
-          <a:ln>
-            <a:noFill/>
-          </a:ln>
-          <a:effectLst/>
-        </p:spPr>
-        <p:style>
-          <a:lnRef idx="1">
-            <a:schemeClr val="accent1"/>
-          </a:lnRef>
-          <a:fillRef idx="3">
-            <a:schemeClr val="accent1"/>
-          </a:fillRef>
-          <a:effectRef idx="2">
-            <a:schemeClr val="accent1"/>
-          </a:effectRef>
-          <a:fontRef idx="minor">
-            <a:schemeClr val="lt1"/>
-          </a:fontRef>
-        </p:style>
-        <p:txBody>
-          <a:bodyPr rtlCol="0" anchor="ctr"/>
-          <a:lstStyle/>
-          <a:p>
-            <a:pPr algn="ctr"/>
-          </a:p>
-        </p:txBody>
-      </p:sp>
-      <p:sp>
-        <p:nvSpPr>
-          <p:cNvPr id="16" name="TextBox 15"/>
-          <p:cNvSpPr txBox="1"/>
-          <p:nvPr/>
-        </p:nvSpPr>
-        <p:spPr>
-          <a:xfrm>
-            <a:off x="5832504" y="3154679"/>
-            <a:ext cx="2286000" cy="251460"/>
-          </a:xfrm>
-          <a:prstGeom prst="rect">
-            <a:avLst/>
-          </a:prstGeom>
-          <a:noFill/>
-        </p:spPr>
-        <p:txBody>
-          <a:bodyPr wrap="square" lIns="0" rIns="0" tIns="0" bIns="0">
-            <a:spAutoFit/>
-          </a:bodyPr>
-          <a:lstStyle/>
-          <a:p>
-            <a:r>
-              <a:rPr sz="900" b="0">
-                <a:solidFill>
-                  <a:srgbClr val="6B7082"/>
-                </a:solidFill>
-                <a:latin typeface="Helvetica Neue"/>
-              </a:rPr>
-              <a:t>15,796 views · 22 posts · 718 avg</a:t>
-            </a:r>
-          </a:p>
-        </p:txBody>
-      </p:sp>
-      <p:sp>
-        <p:nvSpPr>
-          <p:cNvPr id="17" name="TextBox 16"/>
-          <p:cNvSpPr txBox="1"/>
-          <p:nvPr/>
-        </p:nvSpPr>
-        <p:spPr>
-          <a:xfrm>
-            <a:off x="5832504" y="3360420"/>
-            <a:ext cx="4572000" cy="251460"/>
-          </a:xfrm>
-          <a:prstGeom prst="rect">
-            <a:avLst/>
-          </a:prstGeom>
-          <a:noFill/>
-        </p:spPr>
-        <p:txBody>
-          <a:bodyPr wrap="square" lIns="0" rIns="0" tIns="0" bIns="0">
-            <a:spAutoFit/>
-          </a:bodyPr>
-          <a:lstStyle/>
-          <a:p>
-            <a:r>
-              <a:rPr sz="800" b="0">
-                <a:solidFill>
-                  <a:srgbClr val="6B7082"/>
-                </a:solidFill>
-                <a:latin typeface="Helvetica Neue"/>
-              </a:rPr>
-              <a:t>Personal profile · Broad (voters, campaign-season readers)</a:t>
-            </a:r>
-          </a:p>
-        </p:txBody>
-      </p:sp>
-      <p:sp>
-        <p:nvSpPr>
-          <p:cNvPr id="18" name="TextBox 17"/>
-          <p:cNvSpPr txBox="1"/>
-          <p:nvPr/>
-        </p:nvSpPr>
-        <p:spPr>
-          <a:xfrm>
-            <a:off x="731520" y="3657600"/>
-            <a:ext cx="3200400" cy="502920"/>
-          </a:xfrm>
-          <a:prstGeom prst="rect">
-            <a:avLst/>
-          </a:prstGeom>
-          <a:noFill/>
-        </p:spPr>
-        <p:txBody>
-          <a:bodyPr wrap="square" lIns="0" rIns="0" tIns="0" bIns="0">
-            <a:spAutoFit/>
-          </a:bodyPr>
-          <a:lstStyle/>
-          <a:p>
-            <a:r>
-              <a:rPr sz="1200" b="1">
-                <a:solidFill>
-                  <a:srgbClr val="141833"/>
-                </a:solidFill>
-                <a:latin typeface="Helvetica Neue"/>
-              </a:rPr>
-              <a:t>American Pride</a:t>
-            </a:r>
-          </a:p>
-        </p:txBody>
-      </p:sp>
-      <p:sp>
-        <p:nvSpPr>
-          <p:cNvPr id="19" name="Rectangle 18"/>
-          <p:cNvSpPr/>
-          <p:nvPr/>
-        </p:nvSpPr>
-        <p:spPr>
-          <a:xfrm>
-            <a:off x="4206240" y="3726180"/>
-            <a:ext cx="754489" cy="274320"/>
-          </a:xfrm>
-          <a:prstGeom prst="rect">
-            <a:avLst/>
-          </a:prstGeom>
-          <a:solidFill>
-            <a:srgbClr val="990011"/>
-          </a:solidFill>
-          <a:ln>
-            <a:noFill/>
-          </a:ln>
-          <a:effectLst/>
-        </p:spPr>
-        <p:style>
-          <a:lnRef idx="1">
-            <a:schemeClr val="accent1"/>
-          </a:lnRef>
-          <a:fillRef idx="3">
-            <a:schemeClr val="accent1"/>
-          </a:fillRef>
-          <a:effectRef idx="2">
-            <a:schemeClr val="accent1"/>
-          </a:effectRef>
-          <a:fontRef idx="minor">
-            <a:schemeClr val="lt1"/>
-          </a:fontRef>
-        </p:style>
-        <p:txBody>
-          <a:bodyPr rtlCol="0" anchor="ctr"/>
-          <a:lstStyle/>
-          <a:p>
-            <a:pPr algn="ctr"/>
-          </a:p>
-        </p:txBody>
-      </p:sp>
-      <p:sp>
-        <p:nvSpPr>
-          <p:cNvPr id="20" name="TextBox 19"/>
-          <p:cNvSpPr txBox="1"/>
-          <p:nvPr/>
-        </p:nvSpPr>
-        <p:spPr>
-          <a:xfrm>
-            <a:off x="5052169" y="3657600"/>
-            <a:ext cx="2286000" cy="251460"/>
-          </a:xfrm>
-          <a:prstGeom prst="rect">
-            <a:avLst/>
-          </a:prstGeom>
-          <a:noFill/>
-        </p:spPr>
-        <p:txBody>
-          <a:bodyPr wrap="square" lIns="0" rIns="0" tIns="0" bIns="0">
-            <a:spAutoFit/>
-          </a:bodyPr>
-          <a:lstStyle/>
-          <a:p>
-            <a:r>
-              <a:rPr sz="900" b="0">
-                <a:solidFill>
-                  <a:srgbClr val="6B7082"/>
-                </a:solidFill>
-                <a:latin typeface="Helvetica Neue"/>
-              </a:rPr>
-              <a:t>7,765 views · 15 posts · 518 avg</a:t>
-            </a:r>
-          </a:p>
-        </p:txBody>
-      </p:sp>
-      <p:sp>
-        <p:nvSpPr>
-          <p:cNvPr id="21" name="TextBox 20"/>
-          <p:cNvSpPr txBox="1"/>
-          <p:nvPr/>
-        </p:nvSpPr>
-        <p:spPr>
-          <a:xfrm>
-            <a:off x="5052169" y="3863340"/>
-            <a:ext cx="4572000" cy="251460"/>
-          </a:xfrm>
-          <a:prstGeom prst="rect">
-            <a:avLst/>
-          </a:prstGeom>
-          <a:noFill/>
-        </p:spPr>
-        <p:txBody>
-          <a:bodyPr wrap="square" lIns="0" rIns="0" tIns="0" bIns="0">
-            <a:spAutoFit/>
-          </a:bodyPr>
-          <a:lstStyle/>
-          <a:p>
-            <a:r>
-              <a:rPr sz="800" b="0">
-                <a:solidFill>
-                  <a:srgbClr val="6B7082"/>
-                </a:solidFill>
-                <a:latin typeface="Helvetica Neue"/>
-              </a:rPr>
-              <a:t>Traditional / patriotic · Older (55+), values-driven</a:t>
-            </a:r>
-          </a:p>
-        </p:txBody>
-      </p:sp>
-      <p:sp>
-        <p:nvSpPr>
-          <p:cNvPr id="22" name="TextBox 21"/>
-          <p:cNvSpPr txBox="1"/>
-          <p:nvPr/>
-        </p:nvSpPr>
-        <p:spPr>
-          <a:xfrm>
-            <a:off x="731520" y="4160520"/>
-            <a:ext cx="3200400" cy="502920"/>
-          </a:xfrm>
-          <a:prstGeom prst="rect">
-            <a:avLst/>
-          </a:prstGeom>
-          <a:noFill/>
-        </p:spPr>
-        <p:txBody>
-          <a:bodyPr wrap="square" lIns="0" rIns="0" tIns="0" bIns="0">
-            <a:spAutoFit/>
-          </a:bodyPr>
-          <a:lstStyle/>
-          <a:p>
-            <a:r>
-              <a:rPr sz="1200" b="1">
-                <a:solidFill>
-                  <a:srgbClr val="141833"/>
-                </a:solidFill>
-                <a:latin typeface="Helvetica Neue"/>
-              </a:rPr>
-              <a:t>Legislation &amp; Policy Watch</a:t>
-            </a:r>
-          </a:p>
-        </p:txBody>
-      </p:sp>
-      <p:sp>
-        <p:nvSpPr>
-          <p:cNvPr id="23" name="Rectangle 22"/>
-          <p:cNvSpPr/>
-          <p:nvPr/>
-        </p:nvSpPr>
-        <p:spPr>
-          <a:xfrm>
-            <a:off x="4206240" y="4229100"/>
-            <a:ext cx="601648" cy="274320"/>
-          </a:xfrm>
-          <a:prstGeom prst="rect">
-            <a:avLst/>
-          </a:prstGeom>
-          <a:solidFill>
-            <a:srgbClr val="2F3C7E"/>
-          </a:solidFill>
-          <a:ln>
-            <a:noFill/>
-          </a:ln>
-          <a:effectLst/>
-        </p:spPr>
-        <p:style>
-          <a:lnRef idx="1">
-            <a:schemeClr val="accent1"/>
-          </a:lnRef>
-          <a:fillRef idx="3">
-            <a:schemeClr val="accent1"/>
-          </a:fillRef>
-          <a:effectRef idx="2">
-            <a:schemeClr val="accent1"/>
-          </a:effectRef>
-          <a:fontRef idx="minor">
-            <a:schemeClr val="lt1"/>
-          </a:fontRef>
-        </p:style>
-        <p:txBody>
-          <a:bodyPr rtlCol="0" anchor="ctr"/>
-          <a:lstStyle/>
-          <a:p>
-            <a:pPr algn="ctr"/>
-          </a:p>
-        </p:txBody>
-      </p:sp>
-      <p:sp>
-        <p:nvSpPr>
-          <p:cNvPr id="24" name="TextBox 23"/>
-          <p:cNvSpPr txBox="1"/>
-          <p:nvPr/>
-        </p:nvSpPr>
-        <p:spPr>
-          <a:xfrm>
-            <a:off x="4899328" y="4160520"/>
-            <a:ext cx="2286000" cy="251460"/>
-          </a:xfrm>
-          <a:prstGeom prst="rect">
-            <a:avLst/>
-          </a:prstGeom>
-          <a:noFill/>
-        </p:spPr>
-        <p:txBody>
-          <a:bodyPr wrap="square" lIns="0" rIns="0" tIns="0" bIns="0">
-            <a:spAutoFit/>
-          </a:bodyPr>
-          <a:lstStyle/>
-          <a:p>
-            <a:r>
-              <a:rPr sz="900" b="0">
-                <a:solidFill>
-                  <a:srgbClr val="6B7082"/>
-                </a:solidFill>
-                <a:latin typeface="Helvetica Neue"/>
-              </a:rPr>
-              <a:t>6,192 views · 13 posts · 476 avg</a:t>
-            </a:r>
-          </a:p>
-        </p:txBody>
-      </p:sp>
-      <p:sp>
-        <p:nvSpPr>
-          <p:cNvPr id="25" name="TextBox 24"/>
-          <p:cNvSpPr txBox="1"/>
-          <p:nvPr/>
-        </p:nvSpPr>
-        <p:spPr>
-          <a:xfrm>
-            <a:off x="4899328" y="4366260"/>
-            <a:ext cx="4572000" cy="251460"/>
-          </a:xfrm>
-          <a:prstGeom prst="rect">
-            <a:avLst/>
-          </a:prstGeom>
-          <a:noFill/>
-        </p:spPr>
-        <p:txBody>
-          <a:bodyPr wrap="square" lIns="0" rIns="0" tIns="0" bIns="0">
-            <a:spAutoFit/>
-          </a:bodyPr>
-          <a:lstStyle/>
-          <a:p>
-            <a:r>
-              <a:rPr sz="800" b="0">
-                <a:solidFill>
-                  <a:srgbClr val="6B7082"/>
-                </a:solidFill>
-                <a:latin typeface="Helvetica Neue"/>
-              </a:rPr>
-              <a:t>Slow-burn policy · Older (55+), civic-engaged</a:t>
-            </a:r>
-          </a:p>
-        </p:txBody>
-      </p:sp>
-      <p:sp>
-        <p:nvSpPr>
-          <p:cNvPr id="26" name="TextBox 25"/>
-          <p:cNvSpPr txBox="1"/>
-          <p:nvPr/>
-        </p:nvSpPr>
-        <p:spPr>
-          <a:xfrm>
-            <a:off x="731520" y="6263640"/>
-            <a:ext cx="10698480" cy="457200"/>
-          </a:xfrm>
-          <a:prstGeom prst="rect">
-            <a:avLst/>
-          </a:prstGeom>
-          <a:noFill/>
-        </p:spPr>
-        <p:txBody>
-          <a:bodyPr wrap="square" lIns="0" rIns="0" tIns="0" bIns="0">
-            <a:spAutoFit/>
-          </a:bodyPr>
-          <a:lstStyle/>
-          <a:p>
-            <a:r>
-              <a:rPr sz="1200" b="1">
-                <a:solidFill>
-                  <a:srgbClr val="141833"/>
-                </a:solidFill>
-                <a:latin typeface="Helvetica Neue"/>
-              </a:rPr>
-              <a:t>Don't retire these based on volume alone — small consistent posting builds audience over months, not weeks.</a:t>
+          <p:cNvPr id="27" name="TextBox 26"/>
+          <p:cNvSpPr txBox="1"/>
+          <p:nvPr/>
+        </p:nvSpPr>
+        <p:spPr>
+          <a:xfrm>
+            <a:off x="914400" y="5715000"/>
+            <a:ext cx="2743200" cy="274320"/>
+          </a:xfrm>
+          <a:prstGeom prst="rect">
+            <a:avLst/>
+          </a:prstGeom>
+          <a:noFill/>
+        </p:spPr>
+        <p:txBody>
+          <a:bodyPr wrap="square" lIns="0" rIns="0" tIns="0" bIns="0">
+            <a:spAutoFit/>
+          </a:bodyPr>
+          <a:lstStyle/>
+          <a:p>
+            <a:r>
+              <a:rPr sz="1000" b="1">
+                <a:solidFill>
+                  <a:srgbClr val="1B7A43"/>
+                </a:solidFill>
+                <a:latin typeface="Helvetica Neue"/>
+              </a:rPr>
+              <a:t>RECOMMENDATION</a:t>
+            </a:r>
+          </a:p>
+        </p:txBody>
+      </p:sp>
+      <p:sp>
+        <p:nvSpPr>
+          <p:cNvPr id="28" name="TextBox 27"/>
+          <p:cNvSpPr txBox="1"/>
+          <p:nvPr/>
+        </p:nvSpPr>
+        <p:spPr>
+          <a:xfrm>
+            <a:off x="914400" y="5943600"/>
+            <a:ext cx="10515600" cy="365760"/>
+          </a:xfrm>
+          <a:prstGeom prst="rect">
+            <a:avLst/>
+          </a:prstGeom>
+          <a:noFill/>
+        </p:spPr>
+        <p:txBody>
+          <a:bodyPr wrap="square" lIns="0" rIns="0" tIns="0" bIns="0">
+            <a:spAutoFit/>
+          </a:bodyPr>
+          <a:lstStyle/>
+          <a:p>
+            <a:r>
+              <a:rPr sz="1300" b="1">
+                <a:solidFill>
+                  <a:srgbClr val="FCF6F5"/>
+                </a:solidFill>
+                <a:latin typeface="Helvetica Neue"/>
+              </a:rPr>
+              <a:t>Solid mid-tier. Worth continued investment. Test scaling to see if it holds.</a:t>
             </a:r>
           </a:p>
         </p:txBody>
@@ -5639,912 +6575,6 @@
             <a:avLst/>
           </a:prstGeom>
           <a:solidFill>
-            <a:srgbClr val="FCF6F5"/>
-          </a:solidFill>
-          <a:ln>
-            <a:noFill/>
-          </a:ln>
-          <a:effectLst/>
-        </p:spPr>
-        <p:style>
-          <a:lnRef idx="1">
-            <a:schemeClr val="accent1"/>
-          </a:lnRef>
-          <a:fillRef idx="3">
-            <a:schemeClr val="accent1"/>
-          </a:fillRef>
-          <a:effectRef idx="2">
-            <a:schemeClr val="accent1"/>
-          </a:effectRef>
-          <a:fontRef idx="minor">
-            <a:schemeClr val="lt1"/>
-          </a:fontRef>
-        </p:style>
-        <p:txBody>
-          <a:bodyPr rtlCol="0" anchor="ctr"/>
-          <a:lstStyle/>
-          <a:p>
-            <a:pPr algn="ctr"/>
-          </a:p>
-        </p:txBody>
-      </p:sp>
-      <p:sp>
-        <p:nvSpPr>
-          <p:cNvPr id="3" name="TextBox 2"/>
-          <p:cNvSpPr txBox="1"/>
-          <p:nvPr/>
-        </p:nvSpPr>
-        <p:spPr>
-          <a:xfrm>
-            <a:off x="731520" y="457200"/>
-            <a:ext cx="10698480" cy="365760"/>
-          </a:xfrm>
-          <a:prstGeom prst="rect">
-            <a:avLst/>
-          </a:prstGeom>
-          <a:noFill/>
-        </p:spPr>
-        <p:txBody>
-          <a:bodyPr wrap="square" lIns="0" rIns="0" tIns="0" bIns="0">
-            <a:spAutoFit/>
-          </a:bodyPr>
-          <a:lstStyle/>
-          <a:p>
-            <a:r>
-              <a:rPr sz="1200" b="1">
-                <a:solidFill>
-                  <a:srgbClr val="990011"/>
-                </a:solidFill>
-                <a:latin typeface="Helvetica Neue"/>
-              </a:rPr>
-              <a:t>CATEGORY DEEP-DIVE</a:t>
-            </a:r>
-          </a:p>
-        </p:txBody>
-      </p:sp>
-      <p:sp>
-        <p:nvSpPr>
-          <p:cNvPr id="4" name="TextBox 3"/>
-          <p:cNvSpPr txBox="1"/>
-          <p:nvPr/>
-        </p:nvSpPr>
-        <p:spPr>
-          <a:xfrm>
-            <a:off x="731520" y="822960"/>
-            <a:ext cx="10698480" cy="822960"/>
-          </a:xfrm>
-          <a:prstGeom prst="rect">
-            <a:avLst/>
-          </a:prstGeom>
-          <a:noFill/>
-        </p:spPr>
-        <p:txBody>
-          <a:bodyPr wrap="square" lIns="0" rIns="0" tIns="0" bIns="0">
-            <a:spAutoFit/>
-          </a:bodyPr>
-          <a:lstStyle/>
-          <a:p>
-            <a:r>
-              <a:rPr sz="3000" b="1">
-                <a:solidFill>
-                  <a:srgbClr val="2F3C7E"/>
-                </a:solidFill>
-                <a:latin typeface="Georgia"/>
-              </a:rPr>
-              <a:t>Elections &amp; Judicial</a:t>
-            </a:r>
-          </a:p>
-        </p:txBody>
-      </p:sp>
-      <p:sp>
-        <p:nvSpPr>
-          <p:cNvPr id="5" name="TextBox 4"/>
-          <p:cNvSpPr txBox="1"/>
-          <p:nvPr/>
-        </p:nvSpPr>
-        <p:spPr>
-          <a:xfrm>
-            <a:off x="731520" y="1600200"/>
-            <a:ext cx="10698480" cy="365760"/>
-          </a:xfrm>
-          <a:prstGeom prst="rect">
-            <a:avLst/>
-          </a:prstGeom>
-          <a:noFill/>
-        </p:spPr>
-        <p:txBody>
-          <a:bodyPr wrap="square" lIns="0" rIns="0" tIns="0" bIns="0">
-            <a:spAutoFit/>
-          </a:bodyPr>
-          <a:lstStyle/>
-          <a:p>
-            <a:r>
-              <a:rPr sz="1200" b="0">
-                <a:solidFill>
-                  <a:srgbClr val="6B7082"/>
-                </a:solidFill>
-                <a:latin typeface="Helvetica Neue"/>
-              </a:rPr>
-              <a:t>Coverage of campaigns, courts, and local government.</a:t>
-            </a:r>
-          </a:p>
-        </p:txBody>
-      </p:sp>
-      <p:sp>
-        <p:nvSpPr>
-          <p:cNvPr id="6" name="TextBox 5"/>
-          <p:cNvSpPr txBox="1"/>
-          <p:nvPr/>
-        </p:nvSpPr>
-        <p:spPr>
-          <a:xfrm>
-            <a:off x="731520" y="1691640"/>
-            <a:ext cx="10698480" cy="274320"/>
-          </a:xfrm>
-          <a:prstGeom prst="rect">
-            <a:avLst/>
-          </a:prstGeom>
-          <a:noFill/>
-        </p:spPr>
-        <p:txBody>
-          <a:bodyPr wrap="square" lIns="0" rIns="0" tIns="0" bIns="0">
-            <a:spAutoFit/>
-          </a:bodyPr>
-          <a:lstStyle/>
-          <a:p>
-            <a:r>
-              <a:rPr sz="900" b="1">
-                <a:solidFill>
-                  <a:srgbClr val="2F3C7E"/>
-                </a:solidFill>
-                <a:latin typeface="Helvetica Neue"/>
-              </a:rPr>
-              <a:t>AUDIENCE (theoretical): Slow-burn policy · Middle (40-55) + Older (55+) engaged voters</a:t>
-            </a:r>
-          </a:p>
-        </p:txBody>
-      </p:sp>
-      <p:sp>
-        <p:nvSpPr>
-          <p:cNvPr id="7" name="Rectangle 6"/>
-          <p:cNvSpPr/>
-          <p:nvPr/>
-        </p:nvSpPr>
-        <p:spPr>
-          <a:xfrm>
-            <a:off x="731520" y="2194560"/>
-            <a:ext cx="5029200" cy="3200400"/>
-          </a:xfrm>
-          <a:prstGeom prst="rect">
-            <a:avLst/>
-          </a:prstGeom>
-          <a:solidFill>
-            <a:srgbClr val="FFFFFF"/>
-          </a:solidFill>
-          <a:ln>
-            <a:noFill/>
-          </a:ln>
-          <a:effectLst/>
-        </p:spPr>
-        <p:style>
-          <a:lnRef idx="1">
-            <a:schemeClr val="accent1"/>
-          </a:lnRef>
-          <a:fillRef idx="3">
-            <a:schemeClr val="accent1"/>
-          </a:fillRef>
-          <a:effectRef idx="2">
-            <a:schemeClr val="accent1"/>
-          </a:effectRef>
-          <a:fontRef idx="minor">
-            <a:schemeClr val="lt1"/>
-          </a:fontRef>
-        </p:style>
-        <p:txBody>
-          <a:bodyPr rtlCol="0" anchor="ctr"/>
-          <a:lstStyle/>
-          <a:p>
-            <a:pPr algn="ctr"/>
-          </a:p>
-        </p:txBody>
-      </p:sp>
-      <p:sp>
-        <p:nvSpPr>
-          <p:cNvPr id="8" name="Rectangle 7"/>
-          <p:cNvSpPr/>
-          <p:nvPr/>
-        </p:nvSpPr>
-        <p:spPr>
-          <a:xfrm>
-            <a:off x="731520" y="2194560"/>
-            <a:ext cx="91440" cy="3200400"/>
-          </a:xfrm>
-          <a:prstGeom prst="rect">
-            <a:avLst/>
-          </a:prstGeom>
-          <a:solidFill>
-            <a:srgbClr val="2F3C7E"/>
-          </a:solidFill>
-          <a:ln>
-            <a:noFill/>
-          </a:ln>
-          <a:effectLst/>
-        </p:spPr>
-        <p:style>
-          <a:lnRef idx="1">
-            <a:schemeClr val="accent1"/>
-          </a:lnRef>
-          <a:fillRef idx="3">
-            <a:schemeClr val="accent1"/>
-          </a:fillRef>
-          <a:effectRef idx="2">
-            <a:schemeClr val="accent1"/>
-          </a:effectRef>
-          <a:fontRef idx="minor">
-            <a:schemeClr val="lt1"/>
-          </a:fontRef>
-        </p:style>
-        <p:txBody>
-          <a:bodyPr rtlCol="0" anchor="ctr"/>
-          <a:lstStyle/>
-          <a:p>
-            <a:pPr algn="ctr"/>
-          </a:p>
-        </p:txBody>
-      </p:sp>
-      <p:sp>
-        <p:nvSpPr>
-          <p:cNvPr id="9" name="TextBox 8"/>
-          <p:cNvSpPr txBox="1"/>
-          <p:nvPr/>
-        </p:nvSpPr>
-        <p:spPr>
-          <a:xfrm>
-            <a:off x="960120" y="2377440"/>
-            <a:ext cx="4572000" cy="365760"/>
-          </a:xfrm>
-          <a:prstGeom prst="rect">
-            <a:avLst/>
-          </a:prstGeom>
-          <a:noFill/>
-        </p:spPr>
-        <p:txBody>
-          <a:bodyPr wrap="square" lIns="0" rIns="0" tIns="0" bIns="0">
-            <a:spAutoFit/>
-          </a:bodyPr>
-          <a:lstStyle/>
-          <a:p>
-            <a:r>
-              <a:rPr sz="1100" b="1">
-                <a:solidFill>
-                  <a:srgbClr val="2F3C7E"/>
-                </a:solidFill>
-                <a:latin typeface="Helvetica Neue"/>
-              </a:rPr>
-              <a:t>TOTAL VIEWS</a:t>
-            </a:r>
-          </a:p>
-        </p:txBody>
-      </p:sp>
-      <p:sp>
-        <p:nvSpPr>
-          <p:cNvPr id="10" name="TextBox 9"/>
-          <p:cNvSpPr txBox="1"/>
-          <p:nvPr/>
-        </p:nvSpPr>
-        <p:spPr>
-          <a:xfrm>
-            <a:off x="960120" y="2697480"/>
-            <a:ext cx="4572000" cy="1097280"/>
-          </a:xfrm>
-          <a:prstGeom prst="rect">
-            <a:avLst/>
-          </a:prstGeom>
-          <a:noFill/>
-        </p:spPr>
-        <p:txBody>
-          <a:bodyPr wrap="square" lIns="0" rIns="0" tIns="0" bIns="0">
-            <a:spAutoFit/>
-          </a:bodyPr>
-          <a:lstStyle/>
-          <a:p>
-            <a:r>
-              <a:rPr sz="5400" b="1">
-                <a:solidFill>
-                  <a:srgbClr val="2F3C7E"/>
-                </a:solidFill>
-                <a:latin typeface="Georgia"/>
-              </a:rPr>
-              <a:t>62,111</a:t>
-            </a:r>
-          </a:p>
-        </p:txBody>
-      </p:sp>
-      <p:sp>
-        <p:nvSpPr>
-          <p:cNvPr id="11" name="TextBox 10"/>
-          <p:cNvSpPr txBox="1"/>
-          <p:nvPr/>
-        </p:nvSpPr>
-        <p:spPr>
-          <a:xfrm>
-            <a:off x="960120" y="3840480"/>
-            <a:ext cx="4572000" cy="365760"/>
-          </a:xfrm>
-          <a:prstGeom prst="rect">
-            <a:avLst/>
-          </a:prstGeom>
-          <a:noFill/>
-        </p:spPr>
-        <p:txBody>
-          <a:bodyPr wrap="square" lIns="0" rIns="0" tIns="0" bIns="0">
-            <a:spAutoFit/>
-          </a:bodyPr>
-          <a:lstStyle/>
-          <a:p>
-            <a:r>
-              <a:rPr sz="1300" b="1">
-                <a:solidFill>
-                  <a:srgbClr val="141833"/>
-                </a:solidFill>
-                <a:latin typeface="Helvetica Neue"/>
-              </a:rPr>
-              <a:t>83 posts · 1,410 likes</a:t>
-            </a:r>
-          </a:p>
-        </p:txBody>
-      </p:sp>
-      <p:sp>
-        <p:nvSpPr>
-          <p:cNvPr id="12" name="TextBox 11"/>
-          <p:cNvSpPr txBox="1"/>
-          <p:nvPr/>
-        </p:nvSpPr>
-        <p:spPr>
-          <a:xfrm>
-            <a:off x="960120" y="4206240"/>
-            <a:ext cx="4572000" cy="365760"/>
-          </a:xfrm>
-          <a:prstGeom prst="rect">
-            <a:avLst/>
-          </a:prstGeom>
-          <a:noFill/>
-        </p:spPr>
-        <p:txBody>
-          <a:bodyPr wrap="square" lIns="0" rIns="0" tIns="0" bIns="0">
-            <a:spAutoFit/>
-          </a:bodyPr>
-          <a:lstStyle/>
-          <a:p>
-            <a:r>
-              <a:rPr sz="1300" b="0">
-                <a:solidFill>
-                  <a:srgbClr val="6B7082"/>
-                </a:solidFill>
-                <a:latin typeface="Helvetica Neue"/>
-              </a:rPr>
-              <a:t>748 average views per post</a:t>
-            </a:r>
-          </a:p>
-        </p:txBody>
-      </p:sp>
-      <p:sp>
-        <p:nvSpPr>
-          <p:cNvPr id="13" name="TextBox 12"/>
-          <p:cNvSpPr txBox="1"/>
-          <p:nvPr/>
-        </p:nvSpPr>
-        <p:spPr>
-          <a:xfrm>
-            <a:off x="6126480" y="2194560"/>
-            <a:ext cx="5486400" cy="274320"/>
-          </a:xfrm>
-          <a:prstGeom prst="rect">
-            <a:avLst/>
-          </a:prstGeom>
-          <a:noFill/>
-        </p:spPr>
-        <p:txBody>
-          <a:bodyPr wrap="square" lIns="0" rIns="0" tIns="0" bIns="0">
-            <a:spAutoFit/>
-          </a:bodyPr>
-          <a:lstStyle/>
-          <a:p>
-            <a:r>
-              <a:rPr sz="1100" b="1">
-                <a:solidFill>
-                  <a:srgbClr val="2F3C7E"/>
-                </a:solidFill>
-                <a:latin typeface="Helvetica Neue"/>
-              </a:rPr>
-              <a:t>TOP 3 IN THIS CATEGORY</a:t>
-            </a:r>
-          </a:p>
-        </p:txBody>
-      </p:sp>
-      <p:sp>
-        <p:nvSpPr>
-          <p:cNvPr id="14" name="Rectangle 13"/>
-          <p:cNvSpPr/>
-          <p:nvPr/>
-        </p:nvSpPr>
-        <p:spPr>
-          <a:xfrm>
-            <a:off x="6126480" y="2560320"/>
-            <a:ext cx="5303520" cy="822960"/>
-          </a:xfrm>
-          <a:prstGeom prst="rect">
-            <a:avLst/>
-          </a:prstGeom>
-          <a:solidFill>
-            <a:srgbClr val="FFFFFF"/>
-          </a:solidFill>
-          <a:ln>
-            <a:noFill/>
-          </a:ln>
-          <a:effectLst/>
-        </p:spPr>
-        <p:style>
-          <a:lnRef idx="1">
-            <a:schemeClr val="accent1"/>
-          </a:lnRef>
-          <a:fillRef idx="3">
-            <a:schemeClr val="accent1"/>
-          </a:fillRef>
-          <a:effectRef idx="2">
-            <a:schemeClr val="accent1"/>
-          </a:effectRef>
-          <a:fontRef idx="minor">
-            <a:schemeClr val="lt1"/>
-          </a:fontRef>
-        </p:style>
-        <p:txBody>
-          <a:bodyPr rtlCol="0" anchor="ctr"/>
-          <a:lstStyle/>
-          <a:p>
-            <a:pPr algn="ctr"/>
-          </a:p>
-        </p:txBody>
-      </p:sp>
-      <p:sp>
-        <p:nvSpPr>
-          <p:cNvPr id="15" name="Rectangle 14"/>
-          <p:cNvSpPr/>
-          <p:nvPr/>
-        </p:nvSpPr>
-        <p:spPr>
-          <a:xfrm>
-            <a:off x="6126480" y="2560320"/>
-            <a:ext cx="54864" cy="822960"/>
-          </a:xfrm>
-          <a:prstGeom prst="rect">
-            <a:avLst/>
-          </a:prstGeom>
-          <a:solidFill>
-            <a:srgbClr val="2F3C7E"/>
-          </a:solidFill>
-          <a:ln>
-            <a:noFill/>
-          </a:ln>
-          <a:effectLst/>
-        </p:spPr>
-        <p:style>
-          <a:lnRef idx="1">
-            <a:schemeClr val="accent1"/>
-          </a:lnRef>
-          <a:fillRef idx="3">
-            <a:schemeClr val="accent1"/>
-          </a:fillRef>
-          <a:effectRef idx="2">
-            <a:schemeClr val="accent1"/>
-          </a:effectRef>
-          <a:fontRef idx="minor">
-            <a:schemeClr val="lt1"/>
-          </a:fontRef>
-        </p:style>
-        <p:txBody>
-          <a:bodyPr rtlCol="0" anchor="ctr"/>
-          <a:lstStyle/>
-          <a:p>
-            <a:pPr algn="ctr"/>
-          </a:p>
-        </p:txBody>
-      </p:sp>
-      <p:sp>
-        <p:nvSpPr>
-          <p:cNvPr id="16" name="TextBox 15"/>
-          <p:cNvSpPr txBox="1"/>
-          <p:nvPr/>
-        </p:nvSpPr>
-        <p:spPr>
-          <a:xfrm>
-            <a:off x="6309360" y="2651760"/>
-            <a:ext cx="5029200" cy="320040"/>
-          </a:xfrm>
-          <a:prstGeom prst="rect">
-            <a:avLst/>
-          </a:prstGeom>
-          <a:noFill/>
-        </p:spPr>
-        <p:txBody>
-          <a:bodyPr wrap="square" lIns="0" rIns="0" tIns="0" bIns="0">
-            <a:spAutoFit/>
-          </a:bodyPr>
-          <a:lstStyle/>
-          <a:p>
-            <a:r>
-              <a:rPr sz="1000" b="1">
-                <a:solidFill>
-                  <a:srgbClr val="2F3C7E"/>
-                </a:solidFill>
-                <a:latin typeface="Helvetica Neue"/>
-              </a:rPr>
-              <a:t>#1  ·  FB  ·  10,067 views</a:t>
-            </a:r>
-          </a:p>
-        </p:txBody>
-      </p:sp>
-      <p:sp>
-        <p:nvSpPr>
-          <p:cNvPr id="17" name="TextBox 16"/>
-          <p:cNvSpPr txBox="1"/>
-          <p:nvPr/>
-        </p:nvSpPr>
-        <p:spPr>
-          <a:xfrm>
-            <a:off x="6309360" y="2944368"/>
-            <a:ext cx="5029200" cy="411480"/>
-          </a:xfrm>
-          <a:prstGeom prst="rect">
-            <a:avLst/>
-          </a:prstGeom>
-          <a:noFill/>
-        </p:spPr>
-        <p:txBody>
-          <a:bodyPr wrap="square" lIns="0" rIns="0" tIns="0" bIns="0">
-            <a:spAutoFit/>
-          </a:bodyPr>
-          <a:lstStyle/>
-          <a:p>
-            <a:r>
-              <a:rPr sz="1000" b="0">
-                <a:solidFill>
-                  <a:srgbClr val="141833"/>
-                </a:solidFill>
-                <a:latin typeface="Helvetica Neue"/>
-              </a:rPr>
-              <a:t>Chaos erupted at a council meeting when Ms. Rivera began screaming, refusing to calm down </a:t>
-            </a:r>
-          </a:p>
-        </p:txBody>
-      </p:sp>
-      <p:sp>
-        <p:nvSpPr>
-          <p:cNvPr id="18" name="Rectangle 17"/>
-          <p:cNvSpPr/>
-          <p:nvPr/>
-        </p:nvSpPr>
-        <p:spPr>
-          <a:xfrm>
-            <a:off x="6126480" y="3474720"/>
-            <a:ext cx="5303520" cy="822960"/>
-          </a:xfrm>
-          <a:prstGeom prst="rect">
-            <a:avLst/>
-          </a:prstGeom>
-          <a:solidFill>
-            <a:srgbClr val="FFFFFF"/>
-          </a:solidFill>
-          <a:ln>
-            <a:noFill/>
-          </a:ln>
-          <a:effectLst/>
-        </p:spPr>
-        <p:style>
-          <a:lnRef idx="1">
-            <a:schemeClr val="accent1"/>
-          </a:lnRef>
-          <a:fillRef idx="3">
-            <a:schemeClr val="accent1"/>
-          </a:fillRef>
-          <a:effectRef idx="2">
-            <a:schemeClr val="accent1"/>
-          </a:effectRef>
-          <a:fontRef idx="minor">
-            <a:schemeClr val="lt1"/>
-          </a:fontRef>
-        </p:style>
-        <p:txBody>
-          <a:bodyPr rtlCol="0" anchor="ctr"/>
-          <a:lstStyle/>
-          <a:p>
-            <a:pPr algn="ctr"/>
-          </a:p>
-        </p:txBody>
-      </p:sp>
-      <p:sp>
-        <p:nvSpPr>
-          <p:cNvPr id="19" name="Rectangle 18"/>
-          <p:cNvSpPr/>
-          <p:nvPr/>
-        </p:nvSpPr>
-        <p:spPr>
-          <a:xfrm>
-            <a:off x="6126480" y="3474720"/>
-            <a:ext cx="54864" cy="822960"/>
-          </a:xfrm>
-          <a:prstGeom prst="rect">
-            <a:avLst/>
-          </a:prstGeom>
-          <a:solidFill>
-            <a:srgbClr val="2F3C7E"/>
-          </a:solidFill>
-          <a:ln>
-            <a:noFill/>
-          </a:ln>
-          <a:effectLst/>
-        </p:spPr>
-        <p:style>
-          <a:lnRef idx="1">
-            <a:schemeClr val="accent1"/>
-          </a:lnRef>
-          <a:fillRef idx="3">
-            <a:schemeClr val="accent1"/>
-          </a:fillRef>
-          <a:effectRef idx="2">
-            <a:schemeClr val="accent1"/>
-          </a:effectRef>
-          <a:fontRef idx="minor">
-            <a:schemeClr val="lt1"/>
-          </a:fontRef>
-        </p:style>
-        <p:txBody>
-          <a:bodyPr rtlCol="0" anchor="ctr"/>
-          <a:lstStyle/>
-          <a:p>
-            <a:pPr algn="ctr"/>
-          </a:p>
-        </p:txBody>
-      </p:sp>
-      <p:sp>
-        <p:nvSpPr>
-          <p:cNvPr id="20" name="TextBox 19"/>
-          <p:cNvSpPr txBox="1"/>
-          <p:nvPr/>
-        </p:nvSpPr>
-        <p:spPr>
-          <a:xfrm>
-            <a:off x="6309360" y="3566160"/>
-            <a:ext cx="5029200" cy="320040"/>
-          </a:xfrm>
-          <a:prstGeom prst="rect">
-            <a:avLst/>
-          </a:prstGeom>
-          <a:noFill/>
-        </p:spPr>
-        <p:txBody>
-          <a:bodyPr wrap="square" lIns="0" rIns="0" tIns="0" bIns="0">
-            <a:spAutoFit/>
-          </a:bodyPr>
-          <a:lstStyle/>
-          <a:p>
-            <a:r>
-              <a:rPr sz="1000" b="1">
-                <a:solidFill>
-                  <a:srgbClr val="2F3C7E"/>
-                </a:solidFill>
-                <a:latin typeface="Helvetica Neue"/>
-              </a:rPr>
-              <a:t>#2  ·  FB  ·  5,812 views</a:t>
-            </a:r>
-          </a:p>
-        </p:txBody>
-      </p:sp>
-      <p:sp>
-        <p:nvSpPr>
-          <p:cNvPr id="21" name="TextBox 20"/>
-          <p:cNvSpPr txBox="1"/>
-          <p:nvPr/>
-        </p:nvSpPr>
-        <p:spPr>
-          <a:xfrm>
-            <a:off x="6309360" y="3858768"/>
-            <a:ext cx="5029200" cy="411480"/>
-          </a:xfrm>
-          <a:prstGeom prst="rect">
-            <a:avLst/>
-          </a:prstGeom>
-          <a:noFill/>
-        </p:spPr>
-        <p:txBody>
-          <a:bodyPr wrap="square" lIns="0" rIns="0" tIns="0" bIns="0">
-            <a:spAutoFit/>
-          </a:bodyPr>
-          <a:lstStyle/>
-          <a:p>
-            <a:r>
-              <a:rPr sz="1000" b="0">
-                <a:solidFill>
-                  <a:srgbClr val="141833"/>
-                </a:solidFill>
-                <a:latin typeface="Helvetica Neue"/>
-              </a:rPr>
-              <a:t>Tensions flared at the city council meeting as a woman repeatedly defied the mayor's reque</a:t>
-            </a:r>
-          </a:p>
-        </p:txBody>
-      </p:sp>
-      <p:sp>
-        <p:nvSpPr>
-          <p:cNvPr id="22" name="Rectangle 21"/>
-          <p:cNvSpPr/>
-          <p:nvPr/>
-        </p:nvSpPr>
-        <p:spPr>
-          <a:xfrm>
-            <a:off x="6126480" y="4389120"/>
-            <a:ext cx="5303520" cy="822960"/>
-          </a:xfrm>
-          <a:prstGeom prst="rect">
-            <a:avLst/>
-          </a:prstGeom>
-          <a:solidFill>
-            <a:srgbClr val="FFFFFF"/>
-          </a:solidFill>
-          <a:ln>
-            <a:noFill/>
-          </a:ln>
-          <a:effectLst/>
-        </p:spPr>
-        <p:style>
-          <a:lnRef idx="1">
-            <a:schemeClr val="accent1"/>
-          </a:lnRef>
-          <a:fillRef idx="3">
-            <a:schemeClr val="accent1"/>
-          </a:fillRef>
-          <a:effectRef idx="2">
-            <a:schemeClr val="accent1"/>
-          </a:effectRef>
-          <a:fontRef idx="minor">
-            <a:schemeClr val="lt1"/>
-          </a:fontRef>
-        </p:style>
-        <p:txBody>
-          <a:bodyPr rtlCol="0" anchor="ctr"/>
-          <a:lstStyle/>
-          <a:p>
-            <a:pPr algn="ctr"/>
-          </a:p>
-        </p:txBody>
-      </p:sp>
-      <p:sp>
-        <p:nvSpPr>
-          <p:cNvPr id="23" name="Rectangle 22"/>
-          <p:cNvSpPr/>
-          <p:nvPr/>
-        </p:nvSpPr>
-        <p:spPr>
-          <a:xfrm>
-            <a:off x="6126480" y="4389120"/>
-            <a:ext cx="54864" cy="822960"/>
-          </a:xfrm>
-          <a:prstGeom prst="rect">
-            <a:avLst/>
-          </a:prstGeom>
-          <a:solidFill>
-            <a:srgbClr val="2F3C7E"/>
-          </a:solidFill>
-          <a:ln>
-            <a:noFill/>
-          </a:ln>
-          <a:effectLst/>
-        </p:spPr>
-        <p:style>
-          <a:lnRef idx="1">
-            <a:schemeClr val="accent1"/>
-          </a:lnRef>
-          <a:fillRef idx="3">
-            <a:schemeClr val="accent1"/>
-          </a:fillRef>
-          <a:effectRef idx="2">
-            <a:schemeClr val="accent1"/>
-          </a:effectRef>
-          <a:fontRef idx="minor">
-            <a:schemeClr val="lt1"/>
-          </a:fontRef>
-        </p:style>
-        <p:txBody>
-          <a:bodyPr rtlCol="0" anchor="ctr"/>
-          <a:lstStyle/>
-          <a:p>
-            <a:pPr algn="ctr"/>
-          </a:p>
-        </p:txBody>
-      </p:sp>
-      <p:sp>
-        <p:nvSpPr>
-          <p:cNvPr id="24" name="TextBox 23"/>
-          <p:cNvSpPr txBox="1"/>
-          <p:nvPr/>
-        </p:nvSpPr>
-        <p:spPr>
-          <a:xfrm>
-            <a:off x="6309360" y="4480559"/>
-            <a:ext cx="5029200" cy="320040"/>
-          </a:xfrm>
-          <a:prstGeom prst="rect">
-            <a:avLst/>
-          </a:prstGeom>
-          <a:noFill/>
-        </p:spPr>
-        <p:txBody>
-          <a:bodyPr wrap="square" lIns="0" rIns="0" tIns="0" bIns="0">
-            <a:spAutoFit/>
-          </a:bodyPr>
-          <a:lstStyle/>
-          <a:p>
-            <a:r>
-              <a:rPr sz="1000" b="1">
-                <a:solidFill>
-                  <a:srgbClr val="2F3C7E"/>
-                </a:solidFill>
-                <a:latin typeface="Helvetica Neue"/>
-              </a:rPr>
-              <a:t>#3  ·  IG  ·  4,032 views</a:t>
-            </a:r>
-          </a:p>
-        </p:txBody>
-      </p:sp>
-      <p:sp>
-        <p:nvSpPr>
-          <p:cNvPr id="25" name="TextBox 24"/>
-          <p:cNvSpPr txBox="1"/>
-          <p:nvPr/>
-        </p:nvSpPr>
-        <p:spPr>
-          <a:xfrm>
-            <a:off x="6309360" y="4773168"/>
-            <a:ext cx="5029200" cy="411480"/>
-          </a:xfrm>
-          <a:prstGeom prst="rect">
-            <a:avLst/>
-          </a:prstGeom>
-          <a:noFill/>
-        </p:spPr>
-        <p:txBody>
-          <a:bodyPr wrap="square" lIns="0" rIns="0" tIns="0" bIns="0">
-            <a:spAutoFit/>
-          </a:bodyPr>
-          <a:lstStyle/>
-          <a:p>
-            <a:r>
-              <a:rPr sz="1000" b="0">
-                <a:solidFill>
-                  <a:srgbClr val="141833"/>
-                </a:solidFill>
-                <a:latin typeface="Helvetica Neue"/>
-              </a:rPr>
-              <a:t>A candidate's DSA membership raises questions about their loyalties. Pledging to 'co-gover</a:t>
-            </a:r>
-          </a:p>
-        </p:txBody>
-      </p:sp>
-      <p:sp>
-        <p:nvSpPr>
-          <p:cNvPr id="26" name="Rectangle 25"/>
-          <p:cNvSpPr/>
-          <p:nvPr/>
-        </p:nvSpPr>
-        <p:spPr>
-          <a:xfrm>
-            <a:off x="731520" y="5623560"/>
-            <a:ext cx="10698480" cy="731520"/>
-          </a:xfrm>
-          <a:prstGeom prst="rect">
-            <a:avLst/>
-          </a:prstGeom>
-          <a:solidFill>
             <a:srgbClr val="141833"/>
           </a:solidFill>
           <a:ln>
@@ -6576,68 +6606,146 @@
       </p:sp>
       <p:sp>
         <p:nvSpPr>
-          <p:cNvPr id="27" name="TextBox 26"/>
-          <p:cNvSpPr txBox="1"/>
-          <p:nvPr/>
-        </p:nvSpPr>
-        <p:spPr>
-          <a:xfrm>
-            <a:off x="914400" y="5715000"/>
-            <a:ext cx="2743200" cy="274320"/>
-          </a:xfrm>
-          <a:prstGeom prst="rect">
-            <a:avLst/>
-          </a:prstGeom>
-          <a:noFill/>
-        </p:spPr>
-        <p:txBody>
-          <a:bodyPr wrap="square" lIns="0" rIns="0" tIns="0" bIns="0">
-            <a:spAutoFit/>
-          </a:bodyPr>
-          <a:lstStyle/>
-          <a:p>
-            <a:r>
-              <a:rPr sz="1000" b="1">
-                <a:solidFill>
-                  <a:srgbClr val="2F3C7E"/>
-                </a:solidFill>
-                <a:latin typeface="Helvetica Neue"/>
-              </a:rPr>
-              <a:t>RECOMMENDATION</a:t>
-            </a:r>
-          </a:p>
-        </p:txBody>
-      </p:sp>
-      <p:sp>
-        <p:nvSpPr>
-          <p:cNvPr id="28" name="TextBox 27"/>
-          <p:cNvSpPr txBox="1"/>
-          <p:nvPr/>
-        </p:nvSpPr>
-        <p:spPr>
-          <a:xfrm>
-            <a:off x="914400" y="5943600"/>
-            <a:ext cx="10515600" cy="365760"/>
-          </a:xfrm>
-          <a:prstGeom prst="rect">
-            <a:avLst/>
-          </a:prstGeom>
-          <a:noFill/>
-        </p:spPr>
-        <p:txBody>
-          <a:bodyPr wrap="square" lIns="0" rIns="0" tIns="0" bIns="0">
-            <a:spAutoFit/>
-          </a:bodyPr>
-          <a:lstStyle/>
-          <a:p>
-            <a:r>
-              <a:rPr sz="1300" b="1">
+          <p:cNvPr id="3" name="Rectangle 2"/>
+          <p:cNvSpPr/>
+          <p:nvPr/>
+        </p:nvSpPr>
+        <p:spPr>
+          <a:xfrm>
+            <a:off x="0" y="0"/>
+            <a:ext cx="411480" cy="6858000"/>
+          </a:xfrm>
+          <a:prstGeom prst="rect">
+            <a:avLst/>
+          </a:prstGeom>
+          <a:solidFill>
+            <a:srgbClr val="2E86AB"/>
+          </a:solidFill>
+          <a:ln>
+            <a:noFill/>
+          </a:ln>
+          <a:effectLst/>
+        </p:spPr>
+        <p:style>
+          <a:lnRef idx="1">
+            <a:schemeClr val="accent1"/>
+          </a:lnRef>
+          <a:fillRef idx="3">
+            <a:schemeClr val="accent1"/>
+          </a:fillRef>
+          <a:effectRef idx="2">
+            <a:schemeClr val="accent1"/>
+          </a:effectRef>
+          <a:fontRef idx="minor">
+            <a:schemeClr val="lt1"/>
+          </a:fontRef>
+        </p:style>
+        <p:txBody>
+          <a:bodyPr rtlCol="0" anchor="ctr"/>
+          <a:lstStyle/>
+          <a:p>
+            <a:pPr algn="ctr"/>
+          </a:p>
+        </p:txBody>
+      </p:sp>
+      <p:sp>
+        <p:nvSpPr>
+          <p:cNvPr id="4" name="TextBox 3"/>
+          <p:cNvSpPr txBox="1"/>
+          <p:nvPr/>
+        </p:nvSpPr>
+        <p:spPr>
+          <a:xfrm>
+            <a:off x="914400" y="2377440"/>
+            <a:ext cx="10058400" cy="457200"/>
+          </a:xfrm>
+          <a:prstGeom prst="rect">
+            <a:avLst/>
+          </a:prstGeom>
+          <a:noFill/>
+        </p:spPr>
+        <p:txBody>
+          <a:bodyPr wrap="square" lIns="0" rIns="0" tIns="0" bIns="0">
+            <a:spAutoFit/>
+          </a:bodyPr>
+          <a:lstStyle/>
+          <a:p>
+            <a:r>
+              <a:rPr sz="1600" b="1">
+                <a:solidFill>
+                  <a:srgbClr val="2E86AB"/>
+                </a:solidFill>
+                <a:latin typeface="Helvetica Neue"/>
+              </a:rPr>
+              <a:t>SECTION 2 OF 2</a:t>
+            </a:r>
+          </a:p>
+        </p:txBody>
+      </p:sp>
+      <p:sp>
+        <p:nvSpPr>
+          <p:cNvPr id="5" name="TextBox 4"/>
+          <p:cNvSpPr txBox="1"/>
+          <p:nvPr/>
+        </p:nvSpPr>
+        <p:spPr>
+          <a:xfrm>
+            <a:off x="914400" y="2834640"/>
+            <a:ext cx="10058400" cy="1371600"/>
+          </a:xfrm>
+          <a:prstGeom prst="rect">
+            <a:avLst/>
+          </a:prstGeom>
+          <a:noFill/>
+        </p:spPr>
+        <p:txBody>
+          <a:bodyPr wrap="square" lIns="0" rIns="0" tIns="0" bIns="0">
+            <a:spAutoFit/>
+          </a:bodyPr>
+          <a:lstStyle/>
+          <a:p>
+            <a:r>
+              <a:rPr sz="6400" b="1">
+                <a:solidFill>
+                  <a:srgbClr val="FFFFFF"/>
+                </a:solidFill>
+                <a:latin typeface="Georgia"/>
+              </a:rPr>
+              <a:t>Worth watching</a:t>
+            </a:r>
+          </a:p>
+        </p:txBody>
+      </p:sp>
+      <p:sp>
+        <p:nvSpPr>
+          <p:cNvPr id="6" name="TextBox 5"/>
+          <p:cNvSpPr txBox="1"/>
+          <p:nvPr/>
+        </p:nvSpPr>
+        <p:spPr>
+          <a:xfrm>
+            <a:off x="914400" y="4206240"/>
+            <a:ext cx="10058400" cy="548640"/>
+          </a:xfrm>
+          <a:prstGeom prst="rect">
+            <a:avLst/>
+          </a:prstGeom>
+          <a:noFill/>
+        </p:spPr>
+        <p:txBody>
+          <a:bodyPr wrap="square" lIns="0" rIns="0" tIns="0" bIns="0">
+            <a:spAutoFit/>
+          </a:bodyPr>
+          <a:lstStyle/>
+          <a:p>
+            <a:r>
+              <a:rPr sz="1800" b="0">
                 <a:solidFill>
                   <a:srgbClr val="FCF6F5"/>
                 </a:solidFill>
                 <a:latin typeface="Helvetica Neue"/>
               </a:rPr>
-              <a:t>Modest reach. Fine as filler between heavy hitters, not a headline lane.</a:t>
+              <a:t>3 smaller lanes still building audience. Real potential, low volume — don't retire prematurely.</a:t>
             </a:r>
           </a:p>
         </p:txBody>
@@ -6733,7 +6841,7 @@
                 </a:solidFill>
                 <a:latin typeface="Helvetica Neue"/>
               </a:rPr>
-              <a:t>CATEGORY DEEP-DIVE</a:t>
+              <a:t>WORTH WATCHING</a:t>
             </a:r>
           </a:p>
         </p:txBody>
@@ -6767,7 +6875,7 @@
                 </a:solidFill>
                 <a:latin typeface="Georgia"/>
               </a:rPr>
-              <a:t>Community &amp; Culture</a:t>
+              <a:t>Small lanes that could develop into something</a:t>
             </a:r>
           </a:p>
         </p:txBody>
@@ -6801,7 +6909,7 @@
                 </a:solidFill>
                 <a:latin typeface="Helvetica Neue"/>
               </a:rPr>
-              <a:t>Local color, events, pageantry, personal growth, city life.</a:t>
+              <a:t>Low volume today, but real audience potential. Don't kill these before they get their shot.</a:t>
             </a:r>
           </a:p>
         </p:txBody>
@@ -6814,28 +6922,28 @@
         </p:nvSpPr>
         <p:spPr>
           <a:xfrm>
-            <a:off x="731520" y="1691640"/>
-            <a:ext cx="10698480" cy="274320"/>
-          </a:xfrm>
-          <a:prstGeom prst="rect">
-            <a:avLst/>
-          </a:prstGeom>
-          <a:noFill/>
-        </p:spPr>
-        <p:txBody>
-          <a:bodyPr wrap="square" lIns="0" rIns="0" tIns="0" bIns="0">
-            <a:spAutoFit/>
-          </a:bodyPr>
-          <a:lstStyle/>
-          <a:p>
-            <a:r>
-              <a:rPr sz="900" b="1">
+            <a:off x="731520" y="2148839"/>
+            <a:ext cx="3200400" cy="502920"/>
+          </a:xfrm>
+          <a:prstGeom prst="rect">
+            <a:avLst/>
+          </a:prstGeom>
+          <a:noFill/>
+        </p:spPr>
+        <p:txBody>
+          <a:bodyPr wrap="square" lIns="0" rIns="0" tIns="0" bIns="0">
+            <a:spAutoFit/>
+          </a:bodyPr>
+          <a:lstStyle/>
+          <a:p>
+            <a:r>
+              <a:rPr sz="1200" b="1">
                 <a:solidFill>
                   <a:srgbClr val="141833"/>
                 </a:solidFill>
                 <a:latin typeface="Helvetica Neue"/>
               </a:rPr>
-              <a:t>AUDIENCE (theoretical): Local color · Broad, 30+</a:t>
+              <a:t>Elections &amp; Judicial</a:t>
             </a:r>
           </a:p>
         </p:txBody>
@@ -6848,14 +6956,14 @@
         </p:nvSpPr>
         <p:spPr>
           <a:xfrm>
-            <a:off x="731520" y="2194560"/>
-            <a:ext cx="5029200" cy="3200400"/>
+            <a:off x="4206240" y="2217420"/>
+            <a:ext cx="6035040" cy="274320"/>
           </a:xfrm>
           <a:prstGeom prst="rect">
             <a:avLst/>
           </a:prstGeom>
           <a:solidFill>
-            <a:srgbClr val="FFFFFF"/>
+            <a:srgbClr val="2F3C7E"/>
           </a:solidFill>
           <a:ln>
             <a:noFill/>
@@ -6886,20 +6994,122 @@
       </p:sp>
       <p:sp>
         <p:nvSpPr>
-          <p:cNvPr id="8" name="Rectangle 7"/>
+          <p:cNvPr id="8" name="TextBox 7"/>
+          <p:cNvSpPr txBox="1"/>
+          <p:nvPr/>
+        </p:nvSpPr>
+        <p:spPr>
+          <a:xfrm>
+            <a:off x="10332719" y="2148839"/>
+            <a:ext cx="2286000" cy="251460"/>
+          </a:xfrm>
+          <a:prstGeom prst="rect">
+            <a:avLst/>
+          </a:prstGeom>
+          <a:noFill/>
+        </p:spPr>
+        <p:txBody>
+          <a:bodyPr wrap="square" lIns="0" rIns="0" tIns="0" bIns="0">
+            <a:spAutoFit/>
+          </a:bodyPr>
+          <a:lstStyle/>
+          <a:p>
+            <a:r>
+              <a:rPr sz="900" b="0">
+                <a:solidFill>
+                  <a:srgbClr val="6B7082"/>
+                </a:solidFill>
+                <a:latin typeface="Helvetica Neue"/>
+              </a:rPr>
+              <a:t>63,582 views · 83 posts · 766 avg</a:t>
+            </a:r>
+          </a:p>
+        </p:txBody>
+      </p:sp>
+      <p:sp>
+        <p:nvSpPr>
+          <p:cNvPr id="9" name="TextBox 8"/>
+          <p:cNvSpPr txBox="1"/>
+          <p:nvPr/>
+        </p:nvSpPr>
+        <p:spPr>
+          <a:xfrm>
+            <a:off x="10332719" y="2354579"/>
+            <a:ext cx="4572000" cy="251460"/>
+          </a:xfrm>
+          <a:prstGeom prst="rect">
+            <a:avLst/>
+          </a:prstGeom>
+          <a:noFill/>
+        </p:spPr>
+        <p:txBody>
+          <a:bodyPr wrap="square" lIns="0" rIns="0" tIns="0" bIns="0">
+            <a:spAutoFit/>
+          </a:bodyPr>
+          <a:lstStyle/>
+          <a:p>
+            <a:r>
+              <a:rPr sz="800" b="0">
+                <a:solidFill>
+                  <a:srgbClr val="6B7082"/>
+                </a:solidFill>
+                <a:latin typeface="Helvetica Neue"/>
+              </a:rPr>
+              <a:t>Slow-burn policy · Middle (40-55) + Older (55+) engaged voters</a:t>
+            </a:r>
+          </a:p>
+        </p:txBody>
+      </p:sp>
+      <p:sp>
+        <p:nvSpPr>
+          <p:cNvPr id="10" name="TextBox 9"/>
+          <p:cNvSpPr txBox="1"/>
+          <p:nvPr/>
+        </p:nvSpPr>
+        <p:spPr>
+          <a:xfrm>
+            <a:off x="731520" y="2651759"/>
+            <a:ext cx="3200400" cy="502920"/>
+          </a:xfrm>
+          <a:prstGeom prst="rect">
+            <a:avLst/>
+          </a:prstGeom>
+          <a:noFill/>
+        </p:spPr>
+        <p:txBody>
+          <a:bodyPr wrap="square" lIns="0" rIns="0" tIns="0" bIns="0">
+            <a:spAutoFit/>
+          </a:bodyPr>
+          <a:lstStyle/>
+          <a:p>
+            <a:r>
+              <a:rPr sz="1200" b="1">
+                <a:solidFill>
+                  <a:srgbClr val="141833"/>
+                </a:solidFill>
+                <a:latin typeface="Helvetica Neue"/>
+              </a:rPr>
+              <a:t>American Pride</a:t>
+            </a:r>
+          </a:p>
+        </p:txBody>
+      </p:sp>
+      <p:sp>
+        <p:nvSpPr>
+          <p:cNvPr id="11" name="Rectangle 10"/>
           <p:cNvSpPr/>
           <p:nvPr/>
         </p:nvSpPr>
         <p:spPr>
           <a:xfrm>
-            <a:off x="731520" y="2194560"/>
-            <a:ext cx="91440" cy="3200400"/>
+            <a:off x="4206240" y="2720339"/>
+            <a:ext cx="737413" cy="274320"/>
           </a:xfrm>
           <a:prstGeom prst="rect">
             <a:avLst/>
           </a:prstGeom>
           <a:solidFill>
-            <a:srgbClr val="141833"/>
+            <a:srgbClr val="990011"/>
           </a:solidFill>
           <a:ln>
             <a:noFill/>
@@ -6930,190 +7140,122 @@
       </p:sp>
       <p:sp>
         <p:nvSpPr>
-          <p:cNvPr id="9" name="TextBox 8"/>
-          <p:cNvSpPr txBox="1"/>
-          <p:nvPr/>
-        </p:nvSpPr>
-        <p:spPr>
-          <a:xfrm>
-            <a:off x="960120" y="2377440"/>
-            <a:ext cx="4572000" cy="365760"/>
-          </a:xfrm>
-          <a:prstGeom prst="rect">
-            <a:avLst/>
-          </a:prstGeom>
-          <a:noFill/>
-        </p:spPr>
-        <p:txBody>
-          <a:bodyPr wrap="square" lIns="0" rIns="0" tIns="0" bIns="0">
-            <a:spAutoFit/>
-          </a:bodyPr>
-          <a:lstStyle/>
-          <a:p>
-            <a:r>
-              <a:rPr sz="1100" b="1">
+          <p:cNvPr id="12" name="TextBox 11"/>
+          <p:cNvSpPr txBox="1"/>
+          <p:nvPr/>
+        </p:nvSpPr>
+        <p:spPr>
+          <a:xfrm>
+            <a:off x="5035093" y="2651759"/>
+            <a:ext cx="2286000" cy="251460"/>
+          </a:xfrm>
+          <a:prstGeom prst="rect">
+            <a:avLst/>
+          </a:prstGeom>
+          <a:noFill/>
+        </p:spPr>
+        <p:txBody>
+          <a:bodyPr wrap="square" lIns="0" rIns="0" tIns="0" bIns="0">
+            <a:spAutoFit/>
+          </a:bodyPr>
+          <a:lstStyle/>
+          <a:p>
+            <a:r>
+              <a:rPr sz="900" b="0">
+                <a:solidFill>
+                  <a:srgbClr val="6B7082"/>
+                </a:solidFill>
+                <a:latin typeface="Helvetica Neue"/>
+              </a:rPr>
+              <a:t>7,769 views · 15 posts · 518 avg</a:t>
+            </a:r>
+          </a:p>
+        </p:txBody>
+      </p:sp>
+      <p:sp>
+        <p:nvSpPr>
+          <p:cNvPr id="13" name="TextBox 12"/>
+          <p:cNvSpPr txBox="1"/>
+          <p:nvPr/>
+        </p:nvSpPr>
+        <p:spPr>
+          <a:xfrm>
+            <a:off x="5035093" y="2857499"/>
+            <a:ext cx="4572000" cy="251460"/>
+          </a:xfrm>
+          <a:prstGeom prst="rect">
+            <a:avLst/>
+          </a:prstGeom>
+          <a:noFill/>
+        </p:spPr>
+        <p:txBody>
+          <a:bodyPr wrap="square" lIns="0" rIns="0" tIns="0" bIns="0">
+            <a:spAutoFit/>
+          </a:bodyPr>
+          <a:lstStyle/>
+          <a:p>
+            <a:r>
+              <a:rPr sz="800" b="0">
+                <a:solidFill>
+                  <a:srgbClr val="6B7082"/>
+                </a:solidFill>
+                <a:latin typeface="Helvetica Neue"/>
+              </a:rPr>
+              <a:t>Traditional / patriotic · Older (55+), values-driven</a:t>
+            </a:r>
+          </a:p>
+        </p:txBody>
+      </p:sp>
+      <p:sp>
+        <p:nvSpPr>
+          <p:cNvPr id="14" name="TextBox 13"/>
+          <p:cNvSpPr txBox="1"/>
+          <p:nvPr/>
+        </p:nvSpPr>
+        <p:spPr>
+          <a:xfrm>
+            <a:off x="731520" y="3154679"/>
+            <a:ext cx="3200400" cy="502920"/>
+          </a:xfrm>
+          <a:prstGeom prst="rect">
+            <a:avLst/>
+          </a:prstGeom>
+          <a:noFill/>
+        </p:spPr>
+        <p:txBody>
+          <a:bodyPr wrap="square" lIns="0" rIns="0" tIns="0" bIns="0">
+            <a:spAutoFit/>
+          </a:bodyPr>
+          <a:lstStyle/>
+          <a:p>
+            <a:r>
+              <a:rPr sz="1200" b="1">
                 <a:solidFill>
                   <a:srgbClr val="141833"/>
                 </a:solidFill>
                 <a:latin typeface="Helvetica Neue"/>
               </a:rPr>
-              <a:t>TOTAL VIEWS</a:t>
-            </a:r>
-          </a:p>
-        </p:txBody>
-      </p:sp>
-      <p:sp>
-        <p:nvSpPr>
-          <p:cNvPr id="10" name="TextBox 9"/>
-          <p:cNvSpPr txBox="1"/>
-          <p:nvPr/>
-        </p:nvSpPr>
-        <p:spPr>
-          <a:xfrm>
-            <a:off x="960120" y="2697480"/>
-            <a:ext cx="4572000" cy="1097280"/>
-          </a:xfrm>
-          <a:prstGeom prst="rect">
-            <a:avLst/>
-          </a:prstGeom>
-          <a:noFill/>
-        </p:spPr>
-        <p:txBody>
-          <a:bodyPr wrap="square" lIns="0" rIns="0" tIns="0" bIns="0">
-            <a:spAutoFit/>
-          </a:bodyPr>
-          <a:lstStyle/>
-          <a:p>
-            <a:r>
-              <a:rPr sz="5400" b="1">
-                <a:solidFill>
-                  <a:srgbClr val="2F3C7E"/>
-                </a:solidFill>
-                <a:latin typeface="Georgia"/>
-              </a:rPr>
-              <a:t>41,213</a:t>
-            </a:r>
-          </a:p>
-        </p:txBody>
-      </p:sp>
-      <p:sp>
-        <p:nvSpPr>
-          <p:cNvPr id="11" name="TextBox 10"/>
-          <p:cNvSpPr txBox="1"/>
-          <p:nvPr/>
-        </p:nvSpPr>
-        <p:spPr>
-          <a:xfrm>
-            <a:off x="960120" y="3840480"/>
-            <a:ext cx="4572000" cy="365760"/>
-          </a:xfrm>
-          <a:prstGeom prst="rect">
-            <a:avLst/>
-          </a:prstGeom>
-          <a:noFill/>
-        </p:spPr>
-        <p:txBody>
-          <a:bodyPr wrap="square" lIns="0" rIns="0" tIns="0" bIns="0">
-            <a:spAutoFit/>
-          </a:bodyPr>
-          <a:lstStyle/>
-          <a:p>
-            <a:r>
-              <a:rPr sz="1300" b="1">
-                <a:solidFill>
-                  <a:srgbClr val="141833"/>
-                </a:solidFill>
-                <a:latin typeface="Helvetica Neue"/>
-              </a:rPr>
-              <a:t>54 posts · 841 likes</a:t>
-            </a:r>
-          </a:p>
-        </p:txBody>
-      </p:sp>
-      <p:sp>
-        <p:nvSpPr>
-          <p:cNvPr id="12" name="TextBox 11"/>
-          <p:cNvSpPr txBox="1"/>
-          <p:nvPr/>
-        </p:nvSpPr>
-        <p:spPr>
-          <a:xfrm>
-            <a:off x="960120" y="4206240"/>
-            <a:ext cx="4572000" cy="365760"/>
-          </a:xfrm>
-          <a:prstGeom prst="rect">
-            <a:avLst/>
-          </a:prstGeom>
-          <a:noFill/>
-        </p:spPr>
-        <p:txBody>
-          <a:bodyPr wrap="square" lIns="0" rIns="0" tIns="0" bIns="0">
-            <a:spAutoFit/>
-          </a:bodyPr>
-          <a:lstStyle/>
-          <a:p>
-            <a:r>
-              <a:rPr sz="1300" b="0">
-                <a:solidFill>
-                  <a:srgbClr val="6B7082"/>
-                </a:solidFill>
-                <a:latin typeface="Helvetica Neue"/>
-              </a:rPr>
-              <a:t>763 average views per post</a:t>
-            </a:r>
-          </a:p>
-        </p:txBody>
-      </p:sp>
-      <p:sp>
-        <p:nvSpPr>
-          <p:cNvPr id="13" name="TextBox 12"/>
-          <p:cNvSpPr txBox="1"/>
-          <p:nvPr/>
-        </p:nvSpPr>
-        <p:spPr>
-          <a:xfrm>
-            <a:off x="6126480" y="2194560"/>
-            <a:ext cx="5486400" cy="274320"/>
-          </a:xfrm>
-          <a:prstGeom prst="rect">
-            <a:avLst/>
-          </a:prstGeom>
-          <a:noFill/>
-        </p:spPr>
-        <p:txBody>
-          <a:bodyPr wrap="square" lIns="0" rIns="0" tIns="0" bIns="0">
-            <a:spAutoFit/>
-          </a:bodyPr>
-          <a:lstStyle/>
-          <a:p>
-            <a:r>
-              <a:rPr sz="1100" b="1">
-                <a:solidFill>
-                  <a:srgbClr val="141833"/>
-                </a:solidFill>
-                <a:latin typeface="Helvetica Neue"/>
-              </a:rPr>
-              <a:t>TOP 3 IN THIS CATEGORY</a:t>
-            </a:r>
-          </a:p>
-        </p:txBody>
-      </p:sp>
-      <p:sp>
-        <p:nvSpPr>
-          <p:cNvPr id="14" name="Rectangle 13"/>
+              <a:t>Legislation &amp; Policy Watch</a:t>
+            </a:r>
+          </a:p>
+        </p:txBody>
+      </p:sp>
+      <p:sp>
+        <p:nvSpPr>
+          <p:cNvPr id="15" name="Rectangle 14"/>
           <p:cNvSpPr/>
           <p:nvPr/>
         </p:nvSpPr>
         <p:spPr>
           <a:xfrm>
-            <a:off x="6126480" y="2560320"/>
-            <a:ext cx="5303520" cy="822960"/>
+            <a:off x="4206240" y="3223260"/>
+            <a:ext cx="587728" cy="274320"/>
           </a:xfrm>
           <a:prstGeom prst="rect">
             <a:avLst/>
           </a:prstGeom>
           <a:solidFill>
-            <a:srgbClr val="FFFFFF"/>
+            <a:srgbClr val="2F3C7E"/>
           </a:solidFill>
           <a:ln>
             <a:noFill/>
@@ -7144,536 +7286,102 @@
       </p:sp>
       <p:sp>
         <p:nvSpPr>
-          <p:cNvPr id="15" name="Rectangle 14"/>
-          <p:cNvSpPr/>
-          <p:nvPr/>
-        </p:nvSpPr>
-        <p:spPr>
-          <a:xfrm>
-            <a:off x="6126480" y="2560320"/>
-            <a:ext cx="54864" cy="822960"/>
-          </a:xfrm>
-          <a:prstGeom prst="rect">
-            <a:avLst/>
-          </a:prstGeom>
-          <a:solidFill>
-            <a:srgbClr val="141833"/>
-          </a:solidFill>
-          <a:ln>
-            <a:noFill/>
-          </a:ln>
-          <a:effectLst/>
-        </p:spPr>
-        <p:style>
-          <a:lnRef idx="1">
-            <a:schemeClr val="accent1"/>
-          </a:lnRef>
-          <a:fillRef idx="3">
-            <a:schemeClr val="accent1"/>
-          </a:fillRef>
-          <a:effectRef idx="2">
-            <a:schemeClr val="accent1"/>
-          </a:effectRef>
-          <a:fontRef idx="minor">
-            <a:schemeClr val="lt1"/>
-          </a:fontRef>
-        </p:style>
-        <p:txBody>
-          <a:bodyPr rtlCol="0" anchor="ctr"/>
-          <a:lstStyle/>
-          <a:p>
-            <a:pPr algn="ctr"/>
-          </a:p>
-        </p:txBody>
-      </p:sp>
-      <p:sp>
-        <p:nvSpPr>
           <p:cNvPr id="16" name="TextBox 15"/>
           <p:cNvSpPr txBox="1"/>
           <p:nvPr/>
         </p:nvSpPr>
         <p:spPr>
           <a:xfrm>
-            <a:off x="6309360" y="2651760"/>
-            <a:ext cx="5029200" cy="320040"/>
-          </a:xfrm>
-          <a:prstGeom prst="rect">
-            <a:avLst/>
-          </a:prstGeom>
-          <a:noFill/>
-        </p:spPr>
-        <p:txBody>
-          <a:bodyPr wrap="square" lIns="0" rIns="0" tIns="0" bIns="0">
-            <a:spAutoFit/>
-          </a:bodyPr>
-          <a:lstStyle/>
-          <a:p>
-            <a:r>
-              <a:rPr sz="1000" b="1">
+            <a:off x="4885408" y="3154679"/>
+            <a:ext cx="2286000" cy="251460"/>
+          </a:xfrm>
+          <a:prstGeom prst="rect">
+            <a:avLst/>
+          </a:prstGeom>
+          <a:noFill/>
+        </p:spPr>
+        <p:txBody>
+          <a:bodyPr wrap="square" lIns="0" rIns="0" tIns="0" bIns="0">
+            <a:spAutoFit/>
+          </a:bodyPr>
+          <a:lstStyle/>
+          <a:p>
+            <a:r>
+              <a:rPr sz="900" b="0">
+                <a:solidFill>
+                  <a:srgbClr val="6B7082"/>
+                </a:solidFill>
+                <a:latin typeface="Helvetica Neue"/>
+              </a:rPr>
+              <a:t>6,192 views · 13 posts · 476 avg</a:t>
+            </a:r>
+          </a:p>
+        </p:txBody>
+      </p:sp>
+      <p:sp>
+        <p:nvSpPr>
+          <p:cNvPr id="17" name="TextBox 16"/>
+          <p:cNvSpPr txBox="1"/>
+          <p:nvPr/>
+        </p:nvSpPr>
+        <p:spPr>
+          <a:xfrm>
+            <a:off x="4885408" y="3360420"/>
+            <a:ext cx="4572000" cy="251460"/>
+          </a:xfrm>
+          <a:prstGeom prst="rect">
+            <a:avLst/>
+          </a:prstGeom>
+          <a:noFill/>
+        </p:spPr>
+        <p:txBody>
+          <a:bodyPr wrap="square" lIns="0" rIns="0" tIns="0" bIns="0">
+            <a:spAutoFit/>
+          </a:bodyPr>
+          <a:lstStyle/>
+          <a:p>
+            <a:r>
+              <a:rPr sz="800" b="0">
+                <a:solidFill>
+                  <a:srgbClr val="6B7082"/>
+                </a:solidFill>
+                <a:latin typeface="Helvetica Neue"/>
+              </a:rPr>
+              <a:t>Slow-burn policy · Older (55+), civic-engaged</a:t>
+            </a:r>
+          </a:p>
+        </p:txBody>
+      </p:sp>
+      <p:sp>
+        <p:nvSpPr>
+          <p:cNvPr id="18" name="TextBox 17"/>
+          <p:cNvSpPr txBox="1"/>
+          <p:nvPr/>
+        </p:nvSpPr>
+        <p:spPr>
+          <a:xfrm>
+            <a:off x="731520" y="6263640"/>
+            <a:ext cx="10698480" cy="457200"/>
+          </a:xfrm>
+          <a:prstGeom prst="rect">
+            <a:avLst/>
+          </a:prstGeom>
+          <a:noFill/>
+        </p:spPr>
+        <p:txBody>
+          <a:bodyPr wrap="square" lIns="0" rIns="0" tIns="0" bIns="0">
+            <a:spAutoFit/>
+          </a:bodyPr>
+          <a:lstStyle/>
+          <a:p>
+            <a:r>
+              <a:rPr sz="1200" b="1">
                 <a:solidFill>
                   <a:srgbClr val="141833"/>
                 </a:solidFill>
                 <a:latin typeface="Helvetica Neue"/>
               </a:rPr>
-              <a:t>#1  ·  TT  ·  3,520 views</a:t>
-            </a:r>
-          </a:p>
-        </p:txBody>
-      </p:sp>
-      <p:sp>
-        <p:nvSpPr>
-          <p:cNvPr id="17" name="TextBox 16"/>
-          <p:cNvSpPr txBox="1"/>
-          <p:nvPr/>
-        </p:nvSpPr>
-        <p:spPr>
-          <a:xfrm>
-            <a:off x="6309360" y="2944368"/>
-            <a:ext cx="5029200" cy="411480"/>
-          </a:xfrm>
-          <a:prstGeom prst="rect">
-            <a:avLst/>
-          </a:prstGeom>
-          <a:noFill/>
-        </p:spPr>
-        <p:txBody>
-          <a:bodyPr wrap="square" lIns="0" rIns="0" tIns="0" bIns="0">
-            <a:spAutoFit/>
-          </a:bodyPr>
-          <a:lstStyle/>
-          <a:p>
-            <a:r>
-              <a:rPr sz="1000" b="0">
-                <a:solidFill>
-                  <a:srgbClr val="141833"/>
-                </a:solidFill>
-                <a:latin typeface="Helvetica Neue"/>
-              </a:rPr>
-              <a:t>Downey is a built-out city, but Sacramento requires us to build 6,100 new homes. Local off</a:t>
-            </a:r>
-          </a:p>
-        </p:txBody>
-      </p:sp>
-      <p:sp>
-        <p:nvSpPr>
-          <p:cNvPr id="18" name="Rectangle 17"/>
-          <p:cNvSpPr/>
-          <p:nvPr/>
-        </p:nvSpPr>
-        <p:spPr>
-          <a:xfrm>
-            <a:off x="6126480" y="3474720"/>
-            <a:ext cx="5303520" cy="822960"/>
-          </a:xfrm>
-          <a:prstGeom prst="rect">
-            <a:avLst/>
-          </a:prstGeom>
-          <a:solidFill>
-            <a:srgbClr val="FFFFFF"/>
-          </a:solidFill>
-          <a:ln>
-            <a:noFill/>
-          </a:ln>
-          <a:effectLst/>
-        </p:spPr>
-        <p:style>
-          <a:lnRef idx="1">
-            <a:schemeClr val="accent1"/>
-          </a:lnRef>
-          <a:fillRef idx="3">
-            <a:schemeClr val="accent1"/>
-          </a:fillRef>
-          <a:effectRef idx="2">
-            <a:schemeClr val="accent1"/>
-          </a:effectRef>
-          <a:fontRef idx="minor">
-            <a:schemeClr val="lt1"/>
-          </a:fontRef>
-        </p:style>
-        <p:txBody>
-          <a:bodyPr rtlCol="0" anchor="ctr"/>
-          <a:lstStyle/>
-          <a:p>
-            <a:pPr algn="ctr"/>
-          </a:p>
-        </p:txBody>
-      </p:sp>
-      <p:sp>
-        <p:nvSpPr>
-          <p:cNvPr id="19" name="Rectangle 18"/>
-          <p:cNvSpPr/>
-          <p:nvPr/>
-        </p:nvSpPr>
-        <p:spPr>
-          <a:xfrm>
-            <a:off x="6126480" y="3474720"/>
-            <a:ext cx="54864" cy="822960"/>
-          </a:xfrm>
-          <a:prstGeom prst="rect">
-            <a:avLst/>
-          </a:prstGeom>
-          <a:solidFill>
-            <a:srgbClr val="141833"/>
-          </a:solidFill>
-          <a:ln>
-            <a:noFill/>
-          </a:ln>
-          <a:effectLst/>
-        </p:spPr>
-        <p:style>
-          <a:lnRef idx="1">
-            <a:schemeClr val="accent1"/>
-          </a:lnRef>
-          <a:fillRef idx="3">
-            <a:schemeClr val="accent1"/>
-          </a:fillRef>
-          <a:effectRef idx="2">
-            <a:schemeClr val="accent1"/>
-          </a:effectRef>
-          <a:fontRef idx="minor">
-            <a:schemeClr val="lt1"/>
-          </a:fontRef>
-        </p:style>
-        <p:txBody>
-          <a:bodyPr rtlCol="0" anchor="ctr"/>
-          <a:lstStyle/>
-          <a:p>
-            <a:pPr algn="ctr"/>
-          </a:p>
-        </p:txBody>
-      </p:sp>
-      <p:sp>
-        <p:nvSpPr>
-          <p:cNvPr id="20" name="TextBox 19"/>
-          <p:cNvSpPr txBox="1"/>
-          <p:nvPr/>
-        </p:nvSpPr>
-        <p:spPr>
-          <a:xfrm>
-            <a:off x="6309360" y="3566160"/>
-            <a:ext cx="5029200" cy="320040"/>
-          </a:xfrm>
-          <a:prstGeom prst="rect">
-            <a:avLst/>
-          </a:prstGeom>
-          <a:noFill/>
-        </p:spPr>
-        <p:txBody>
-          <a:bodyPr wrap="square" lIns="0" rIns="0" tIns="0" bIns="0">
-            <a:spAutoFit/>
-          </a:bodyPr>
-          <a:lstStyle/>
-          <a:p>
-            <a:r>
-              <a:rPr sz="1000" b="1">
-                <a:solidFill>
-                  <a:srgbClr val="141833"/>
-                </a:solidFill>
-                <a:latin typeface="Helvetica Neue"/>
-              </a:rPr>
-              <a:t>#2  ·  IG  ·  2,848 views</a:t>
-            </a:r>
-          </a:p>
-        </p:txBody>
-      </p:sp>
-      <p:sp>
-        <p:nvSpPr>
-          <p:cNvPr id="21" name="TextBox 20"/>
-          <p:cNvSpPr txBox="1"/>
-          <p:nvPr/>
-        </p:nvSpPr>
-        <p:spPr>
-          <a:xfrm>
-            <a:off x="6309360" y="3858768"/>
-            <a:ext cx="5029200" cy="411480"/>
-          </a:xfrm>
-          <a:prstGeom prst="rect">
-            <a:avLst/>
-          </a:prstGeom>
-          <a:noFill/>
-        </p:spPr>
-        <p:txBody>
-          <a:bodyPr wrap="square" lIns="0" rIns="0" tIns="0" bIns="0">
-            <a:spAutoFit/>
-          </a:bodyPr>
-          <a:lstStyle/>
-          <a:p>
-            <a:r>
-              <a:rPr sz="1000" b="0">
-                <a:solidFill>
-                  <a:srgbClr val="141833"/>
-                </a:solidFill>
-                <a:latin typeface="Helvetica Neue"/>
-              </a:rPr>
-              <a:t>Responded to your yapping, Downey! This one's to answer the last two shows. Wouldn't have </a:t>
-            </a:r>
-          </a:p>
-        </p:txBody>
-      </p:sp>
-      <p:sp>
-        <p:nvSpPr>
-          <p:cNvPr id="22" name="Rectangle 21"/>
-          <p:cNvSpPr/>
-          <p:nvPr/>
-        </p:nvSpPr>
-        <p:spPr>
-          <a:xfrm>
-            <a:off x="6126480" y="4389120"/>
-            <a:ext cx="5303520" cy="822960"/>
-          </a:xfrm>
-          <a:prstGeom prst="rect">
-            <a:avLst/>
-          </a:prstGeom>
-          <a:solidFill>
-            <a:srgbClr val="FFFFFF"/>
-          </a:solidFill>
-          <a:ln>
-            <a:noFill/>
-          </a:ln>
-          <a:effectLst/>
-        </p:spPr>
-        <p:style>
-          <a:lnRef idx="1">
-            <a:schemeClr val="accent1"/>
-          </a:lnRef>
-          <a:fillRef idx="3">
-            <a:schemeClr val="accent1"/>
-          </a:fillRef>
-          <a:effectRef idx="2">
-            <a:schemeClr val="accent1"/>
-          </a:effectRef>
-          <a:fontRef idx="minor">
-            <a:schemeClr val="lt1"/>
-          </a:fontRef>
-        </p:style>
-        <p:txBody>
-          <a:bodyPr rtlCol="0" anchor="ctr"/>
-          <a:lstStyle/>
-          <a:p>
-            <a:pPr algn="ctr"/>
-          </a:p>
-        </p:txBody>
-      </p:sp>
-      <p:sp>
-        <p:nvSpPr>
-          <p:cNvPr id="23" name="Rectangle 22"/>
-          <p:cNvSpPr/>
-          <p:nvPr/>
-        </p:nvSpPr>
-        <p:spPr>
-          <a:xfrm>
-            <a:off x="6126480" y="4389120"/>
-            <a:ext cx="54864" cy="822960"/>
-          </a:xfrm>
-          <a:prstGeom prst="rect">
-            <a:avLst/>
-          </a:prstGeom>
-          <a:solidFill>
-            <a:srgbClr val="141833"/>
-          </a:solidFill>
-          <a:ln>
-            <a:noFill/>
-          </a:ln>
-          <a:effectLst/>
-        </p:spPr>
-        <p:style>
-          <a:lnRef idx="1">
-            <a:schemeClr val="accent1"/>
-          </a:lnRef>
-          <a:fillRef idx="3">
-            <a:schemeClr val="accent1"/>
-          </a:fillRef>
-          <a:effectRef idx="2">
-            <a:schemeClr val="accent1"/>
-          </a:effectRef>
-          <a:fontRef idx="minor">
-            <a:schemeClr val="lt1"/>
-          </a:fontRef>
-        </p:style>
-        <p:txBody>
-          <a:bodyPr rtlCol="0" anchor="ctr"/>
-          <a:lstStyle/>
-          <a:p>
-            <a:pPr algn="ctr"/>
-          </a:p>
-        </p:txBody>
-      </p:sp>
-      <p:sp>
-        <p:nvSpPr>
-          <p:cNvPr id="24" name="TextBox 23"/>
-          <p:cNvSpPr txBox="1"/>
-          <p:nvPr/>
-        </p:nvSpPr>
-        <p:spPr>
-          <a:xfrm>
-            <a:off x="6309360" y="4480559"/>
-            <a:ext cx="5029200" cy="320040"/>
-          </a:xfrm>
-          <a:prstGeom prst="rect">
-            <a:avLst/>
-          </a:prstGeom>
-          <a:noFill/>
-        </p:spPr>
-        <p:txBody>
-          <a:bodyPr wrap="square" lIns="0" rIns="0" tIns="0" bIns="0">
-            <a:spAutoFit/>
-          </a:bodyPr>
-          <a:lstStyle/>
-          <a:p>
-            <a:r>
-              <a:rPr sz="1000" b="1">
-                <a:solidFill>
-                  <a:srgbClr val="141833"/>
-                </a:solidFill>
-                <a:latin typeface="Helvetica Neue"/>
-              </a:rPr>
-              <a:t>#3  ·  FB  ·  2,225 views</a:t>
-            </a:r>
-          </a:p>
-        </p:txBody>
-      </p:sp>
-      <p:sp>
-        <p:nvSpPr>
-          <p:cNvPr id="25" name="TextBox 24"/>
-          <p:cNvSpPr txBox="1"/>
-          <p:nvPr/>
-        </p:nvSpPr>
-        <p:spPr>
-          <a:xfrm>
-            <a:off x="6309360" y="4773168"/>
-            <a:ext cx="5029200" cy="411480"/>
-          </a:xfrm>
-          <a:prstGeom prst="rect">
-            <a:avLst/>
-          </a:prstGeom>
-          <a:noFill/>
-        </p:spPr>
-        <p:txBody>
-          <a:bodyPr wrap="square" lIns="0" rIns="0" tIns="0" bIns="0">
-            <a:spAutoFit/>
-          </a:bodyPr>
-          <a:lstStyle/>
-          <a:p>
-            <a:r>
-              <a:rPr sz="1000" b="0">
-                <a:solidFill>
-                  <a:srgbClr val="141833"/>
-                </a:solidFill>
-                <a:latin typeface="Helvetica Neue"/>
-              </a:rPr>
-              <a:t>A proposed 145-unit residential condominium project on 6.1 acres is raising concerns among</a:t>
-            </a:r>
-          </a:p>
-        </p:txBody>
-      </p:sp>
-      <p:sp>
-        <p:nvSpPr>
-          <p:cNvPr id="26" name="Rectangle 25"/>
-          <p:cNvSpPr/>
-          <p:nvPr/>
-        </p:nvSpPr>
-        <p:spPr>
-          <a:xfrm>
-            <a:off x="731520" y="5623560"/>
-            <a:ext cx="10698480" cy="731520"/>
-          </a:xfrm>
-          <a:prstGeom prst="rect">
-            <a:avLst/>
-          </a:prstGeom>
-          <a:solidFill>
-            <a:srgbClr val="141833"/>
-          </a:solidFill>
-          <a:ln>
-            <a:noFill/>
-          </a:ln>
-          <a:effectLst/>
-        </p:spPr>
-        <p:style>
-          <a:lnRef idx="1">
-            <a:schemeClr val="accent1"/>
-          </a:lnRef>
-          <a:fillRef idx="3">
-            <a:schemeClr val="accent1"/>
-          </a:fillRef>
-          <a:effectRef idx="2">
-            <a:schemeClr val="accent1"/>
-          </a:effectRef>
-          <a:fontRef idx="minor">
-            <a:schemeClr val="lt1"/>
-          </a:fontRef>
-        </p:style>
-        <p:txBody>
-          <a:bodyPr rtlCol="0" anchor="ctr"/>
-          <a:lstStyle/>
-          <a:p>
-            <a:pPr algn="ctr"/>
-          </a:p>
-        </p:txBody>
-      </p:sp>
-      <p:sp>
-        <p:nvSpPr>
-          <p:cNvPr id="27" name="TextBox 26"/>
-          <p:cNvSpPr txBox="1"/>
-          <p:nvPr/>
-        </p:nvSpPr>
-        <p:spPr>
-          <a:xfrm>
-            <a:off x="914400" y="5715000"/>
-            <a:ext cx="2743200" cy="274320"/>
-          </a:xfrm>
-          <a:prstGeom prst="rect">
-            <a:avLst/>
-          </a:prstGeom>
-          <a:noFill/>
-        </p:spPr>
-        <p:txBody>
-          <a:bodyPr wrap="square" lIns="0" rIns="0" tIns="0" bIns="0">
-            <a:spAutoFit/>
-          </a:bodyPr>
-          <a:lstStyle/>
-          <a:p>
-            <a:r>
-              <a:rPr sz="1000" b="1">
-                <a:solidFill>
-                  <a:srgbClr val="141833"/>
-                </a:solidFill>
-                <a:latin typeface="Helvetica Neue"/>
-              </a:rPr>
-              <a:t>RECOMMENDATION</a:t>
-            </a:r>
-          </a:p>
-        </p:txBody>
-      </p:sp>
-      <p:sp>
-        <p:nvSpPr>
-          <p:cNvPr id="28" name="TextBox 27"/>
-          <p:cNvSpPr txBox="1"/>
-          <p:nvPr/>
-        </p:nvSpPr>
-        <p:spPr>
-          <a:xfrm>
-            <a:off x="914400" y="5943600"/>
-            <a:ext cx="10515600" cy="365760"/>
-          </a:xfrm>
-          <a:prstGeom prst="rect">
-            <a:avLst/>
-          </a:prstGeom>
-          <a:noFill/>
-        </p:spPr>
-        <p:txBody>
-          <a:bodyPr wrap="square" lIns="0" rIns="0" tIns="0" bIns="0">
-            <a:spAutoFit/>
-          </a:bodyPr>
-          <a:lstStyle/>
-          <a:p>
-            <a:r>
-              <a:rPr sz="1300" b="1">
-                <a:solidFill>
-                  <a:srgbClr val="FCF6F5"/>
-                </a:solidFill>
-                <a:latin typeface="Helvetica Neue"/>
-              </a:rPr>
-              <a:t>Modest reach. Fine as filler between heavy hitters, not a headline lane.</a:t>
+              <a:t>Don't retire these based on volume alone — small consistent posting builds audience over months, not weeks.</a:t>
             </a:r>
           </a:p>
         </p:txBody>
@@ -7803,7 +7511,7 @@
                 </a:solidFill>
                 <a:latin typeface="Georgia"/>
               </a:rPr>
-              <a:t>Political Individual Highlights</a:t>
+              <a:t>Elections &amp; Judicial</a:t>
             </a:r>
           </a:p>
         </p:txBody>
@@ -7837,7 +7545,7 @@
                 </a:solidFill>
                 <a:latin typeface="Helvetica Neue"/>
               </a:rPr>
-              <a:t>Candidate/elected personality profiles — Carrie Uva, Hector Sosa. Not scandal-driven.</a:t>
+              <a:t>Coverage of campaigns, courts, and local government.</a:t>
             </a:r>
           </a:p>
         </p:txBody>
@@ -7867,11 +7575,11 @@
             <a:r>
               <a:rPr sz="900" b="1">
                 <a:solidFill>
-                  <a:srgbClr val="2E86AB"/>
-                </a:solidFill>
-                <a:latin typeface="Helvetica Neue"/>
-              </a:rPr>
-              <a:t>AUDIENCE (theoretical): Personal profile · Broad (voters, campaign-season readers)</a:t>
+                  <a:srgbClr val="2F3C7E"/>
+                </a:solidFill>
+                <a:latin typeface="Helvetica Neue"/>
+              </a:rPr>
+              <a:t>AUDIENCE (theoretical): Slow-burn policy · Middle (40-55) + Older (55+) engaged voters</a:t>
             </a:r>
           </a:p>
         </p:txBody>
@@ -7935,7 +7643,7 @@
             <a:avLst/>
           </a:prstGeom>
           <a:solidFill>
-            <a:srgbClr val="2E86AB"/>
+            <a:srgbClr val="2F3C7E"/>
           </a:solidFill>
           <a:ln>
             <a:noFill/>
@@ -7989,7 +7697,7 @@
             <a:r>
               <a:rPr sz="1100" b="1">
                 <a:solidFill>
-                  <a:srgbClr val="2E86AB"/>
+                  <a:srgbClr val="2F3C7E"/>
                 </a:solidFill>
                 <a:latin typeface="Helvetica Neue"/>
               </a:rPr>
@@ -8027,7 +7735,7 @@
                 </a:solidFill>
                 <a:latin typeface="Georgia"/>
               </a:rPr>
-              <a:t>15,796</a:t>
+              <a:t>63,582</a:t>
             </a:r>
           </a:p>
         </p:txBody>
@@ -8061,7 +7769,7 @@
                 </a:solidFill>
                 <a:latin typeface="Helvetica Neue"/>
               </a:rPr>
-              <a:t>22 posts · 410 likes</a:t>
+              <a:t>83 posts · 1,428 likes</a:t>
             </a:r>
           </a:p>
         </p:txBody>
@@ -8095,7 +7803,7 @@
                 </a:solidFill>
                 <a:latin typeface="Helvetica Neue"/>
               </a:rPr>
-              <a:t>718 average views per post</a:t>
+              <a:t>766 average views per post</a:t>
             </a:r>
           </a:p>
         </p:txBody>
@@ -8125,7 +7833,7 @@
             <a:r>
               <a:rPr sz="1100" b="1">
                 <a:solidFill>
-                  <a:srgbClr val="2E86AB"/>
+                  <a:srgbClr val="2F3C7E"/>
                 </a:solidFill>
                 <a:latin typeface="Helvetica Neue"/>
               </a:rPr>
@@ -8193,7 +7901,7 @@
             <a:avLst/>
           </a:prstGeom>
           <a:solidFill>
-            <a:srgbClr val="2E86AB"/>
+            <a:srgbClr val="2F3C7E"/>
           </a:solidFill>
           <a:ln>
             <a:noFill/>
@@ -8247,11 +7955,11 @@
             <a:r>
               <a:rPr sz="1000" b="1">
                 <a:solidFill>
-                  <a:srgbClr val="2E86AB"/>
-                </a:solidFill>
-                <a:latin typeface="Helvetica Neue"/>
-              </a:rPr>
-              <a:t>#1  ·  FB  ·  2,640 views</a:t>
+                  <a:srgbClr val="2F3C7E"/>
+                </a:solidFill>
+                <a:latin typeface="Helvetica Neue"/>
+              </a:rPr>
+              <a:t>#1  ·  FB  ·  10,958 views</a:t>
             </a:r>
           </a:p>
         </p:txBody>
@@ -8285,7 +7993,7 @@
                 </a:solidFill>
                 <a:latin typeface="Helvetica Neue"/>
               </a:rPr>
-              <a:t>Don't be fooled by simple comparisons. Carrie Uva, a lifelong Democrat, has earned endorse</a:t>
+              <a:t>Chaos erupted at a council meeting when Ms. Rivera began screaming, refusing to calm down </a:t>
             </a:r>
           </a:p>
         </p:txBody>
@@ -8349,7 +8057,7 @@
             <a:avLst/>
           </a:prstGeom>
           <a:solidFill>
-            <a:srgbClr val="2E86AB"/>
+            <a:srgbClr val="2F3C7E"/>
           </a:solidFill>
           <a:ln>
             <a:noFill/>
@@ -8403,11 +8111,11 @@
             <a:r>
               <a:rPr sz="1000" b="1">
                 <a:solidFill>
-                  <a:srgbClr val="2E86AB"/>
-                </a:solidFill>
-                <a:latin typeface="Helvetica Neue"/>
-              </a:rPr>
-              <a:t>#2  ·  FB  ·  2,253 views</a:t>
+                  <a:srgbClr val="2F3C7E"/>
+                </a:solidFill>
+                <a:latin typeface="Helvetica Neue"/>
+              </a:rPr>
+              <a:t>#2  ·  FB  ·  5,812 views</a:t>
             </a:r>
           </a:p>
         </p:txBody>
@@ -8441,7 +8149,7 @@
                 </a:solidFill>
                 <a:latin typeface="Helvetica Neue"/>
               </a:rPr>
-              <a:t>The Newsom administration and Rob Bonta's lawsuit against the federal government has been </a:t>
+              <a:t>Tensions flared at the city council meeting as a woman repeatedly defied the mayor's reque</a:t>
             </a:r>
           </a:p>
         </p:txBody>
@@ -8505,7 +8213,7 @@
             <a:avLst/>
           </a:prstGeom>
           <a:solidFill>
-            <a:srgbClr val="2E86AB"/>
+            <a:srgbClr val="2F3C7E"/>
           </a:solidFill>
           <a:ln>
             <a:noFill/>
@@ -8559,11 +8267,11 @@
             <a:r>
               <a:rPr sz="1000" b="1">
                 <a:solidFill>
-                  <a:srgbClr val="2E86AB"/>
-                </a:solidFill>
-                <a:latin typeface="Helvetica Neue"/>
-              </a:rPr>
-              <a:t>#3  ·  FB  ·  1,498 views</a:t>
+                  <a:srgbClr val="2F3C7E"/>
+                </a:solidFill>
+                <a:latin typeface="Helvetica Neue"/>
+              </a:rPr>
+              <a:t>#3  ·  IG  ·  4,046 views</a:t>
             </a:r>
           </a:p>
         </p:txBody>
@@ -8597,7 +8305,7 @@
                 </a:solidFill>
                 <a:latin typeface="Helvetica Neue"/>
               </a:rPr>
-              <a:t>Meet Carrie Uva, an exceptional candidate with a proven track record. From Planning Commis</a:t>
+              <a:t>A candidate's DSA membership raises questions about their loyalties. Pledging to 'co-gover</a:t>
             </a:r>
           </a:p>
         </p:txBody>
@@ -8671,7 +8379,7 @@
             <a:r>
               <a:rPr sz="1000" b="1">
                 <a:solidFill>
-                  <a:srgbClr val="2E86AB"/>
+                  <a:srgbClr val="2F3C7E"/>
                 </a:solidFill>
                 <a:latin typeface="Helvetica Neue"/>
               </a:rPr>
@@ -9063,7 +8771,7 @@
                 </a:solidFill>
                 <a:latin typeface="Georgia"/>
               </a:rPr>
-              <a:t>7,765</a:t>
+              <a:t>7,769</a:t>
             </a:r>
           </a:p>
         </p:txBody>
@@ -11495,7 +11203,7 @@
                 </a:solidFill>
                 <a:latin typeface="Georgia"/>
               </a:rPr>
-              <a:t>93,782 views</a:t>
+              <a:t>93,789 views</a:t>
             </a:r>
           </a:p>
         </p:txBody>
@@ -11529,7 +11237,7 @@
                 </a:solidFill>
                 <a:latin typeface="Helvetica Neue"/>
               </a:rPr>
-              <a:t>61 posts · 1,537 avg views/post</a:t>
+              <a:t>61 posts · 1,538 avg views/post</a:t>
             </a:r>
           </a:p>
         </p:txBody>
@@ -11855,7 +11563,7 @@
                 </a:solidFill>
                 <a:latin typeface="Georgia"/>
               </a:rPr>
-              <a:t>62,535 views</a:t>
+              <a:t>62,536 views</a:t>
             </a:r>
           </a:p>
         </p:txBody>
@@ -11889,7 +11597,7 @@
                 </a:solidFill>
                 <a:latin typeface="Helvetica Neue"/>
               </a:rPr>
-              <a:t>22 posts · 2,842 avg views/post</a:t>
+              <a:t>22 posts · 2,843 avg views/post</a:t>
             </a:r>
           </a:p>
         </p:txBody>
@@ -14191,7 +13899,7 @@
                 </a:solidFill>
                 <a:latin typeface="Helvetica Neue"/>
               </a:rPr>
-              <a:t>2,556 avg views/post   ·   34 posts   ·   86,914 total</a:t>
+              <a:t>2,570 avg views/post   ·   34 posts   ·   87,386 total</a:t>
             </a:r>
           </a:p>
         </p:txBody>
@@ -14483,7 +14191,7 @@
                 </a:solidFill>
                 <a:latin typeface="Helvetica Neue"/>
               </a:rPr>
-              <a:t>1,205 avg views/post   ·   178 posts   ·   214,482 total</a:t>
+              <a:t>1,235 avg views/post   ·   185 posts   ·   228,531 total</a:t>
             </a:r>
           </a:p>
         </p:txBody>
@@ -16402,7 +16110,7 @@
                 </a:solidFill>
                 <a:latin typeface="Helvetica Neue"/>
               </a:rPr>
-              <a:t>93,782 views · 61 posts</a:t>
+              <a:t>93,789 views · 61 posts</a:t>
             </a:r>
           </a:p>
         </p:txBody>
@@ -16450,7 +16158,7 @@
         <p:spPr>
           <a:xfrm>
             <a:off x="4114800" y="2476968"/>
-            <a:ext cx="5762558" cy="128016"/>
+            <a:ext cx="5793420" cy="128016"/>
           </a:xfrm>
           <a:prstGeom prst="rect">
             <a:avLst/>
@@ -16493,7 +16201,7 @@
         </p:nvSpPr>
         <p:spPr>
           <a:xfrm>
-            <a:off x="9968798" y="2413312"/>
+            <a:off x="9999660" y="2413312"/>
             <a:ext cx="2286000" cy="291904"/>
           </a:xfrm>
           <a:prstGeom prst="rect">
@@ -16514,7 +16222,7 @@
                 </a:solidFill>
                 <a:latin typeface="Helvetica Neue"/>
               </a:rPr>
-              <a:t>86,914 views · 34 posts</a:t>
+              <a:t>87,386 views · 34 posts</a:t>
             </a:r>
           </a:p>
         </p:txBody>
@@ -16562,7 +16270,7 @@
         <p:spPr>
           <a:xfrm>
             <a:off x="4114800" y="2768873"/>
-            <a:ext cx="5108955" cy="128016"/>
+            <a:ext cx="5330933" cy="128016"/>
           </a:xfrm>
           <a:prstGeom prst="rect">
             <a:avLst/>
@@ -16605,7 +16313,7 @@
         </p:nvSpPr>
         <p:spPr>
           <a:xfrm>
-            <a:off x="9315195" y="2705217"/>
+            <a:off x="9537173" y="2705217"/>
             <a:ext cx="2286000" cy="291904"/>
           </a:xfrm>
           <a:prstGeom prst="rect">
@@ -16626,7 +16334,7 @@
                 </a:solidFill>
                 <a:latin typeface="Helvetica Neue"/>
               </a:rPr>
-              <a:t>77,056 views · 141 posts</a:t>
+              <a:t>80,410 views · 147 posts</a:t>
             </a:r>
           </a:p>
         </p:txBody>
@@ -16660,7 +16368,7 @@
                 </a:solidFill>
                 <a:latin typeface="Helvetica Neue"/>
               </a:rPr>
-              <a:t>FIFA / World Cup</a:t>
+              <a:t>Elections &amp; Judicial</a:t>
             </a:r>
           </a:p>
         </p:txBody>
@@ -16674,7 +16382,119 @@
         <p:spPr>
           <a:xfrm>
             <a:off x="4114800" y="3060778"/>
-            <a:ext cx="4167402" cy="128016"/>
+            <a:ext cx="4215289" cy="128016"/>
+          </a:xfrm>
+          <a:prstGeom prst="rect">
+            <a:avLst/>
+          </a:prstGeom>
+          <a:solidFill>
+            <a:srgbClr val="2F3C7E"/>
+          </a:solidFill>
+          <a:ln>
+            <a:noFill/>
+          </a:ln>
+          <a:effectLst/>
+        </p:spPr>
+        <p:style>
+          <a:lnRef idx="1">
+            <a:schemeClr val="accent1"/>
+          </a:lnRef>
+          <a:fillRef idx="3">
+            <a:schemeClr val="accent1"/>
+          </a:fillRef>
+          <a:effectRef idx="2">
+            <a:schemeClr val="accent1"/>
+          </a:effectRef>
+          <a:fontRef idx="minor">
+            <a:schemeClr val="lt1"/>
+          </a:fontRef>
+        </p:style>
+        <p:txBody>
+          <a:bodyPr rtlCol="0" anchor="ctr"/>
+          <a:lstStyle/>
+          <a:p>
+            <a:pPr algn="ctr"/>
+          </a:p>
+        </p:txBody>
+      </p:sp>
+      <p:sp>
+        <p:nvSpPr>
+          <p:cNvPr id="17" name="TextBox 16"/>
+          <p:cNvSpPr txBox="1"/>
+          <p:nvPr/>
+        </p:nvSpPr>
+        <p:spPr>
+          <a:xfrm>
+            <a:off x="8421529" y="2997121"/>
+            <a:ext cx="2286000" cy="291904"/>
+          </a:xfrm>
+          <a:prstGeom prst="rect">
+            <a:avLst/>
+          </a:prstGeom>
+          <a:noFill/>
+        </p:spPr>
+        <p:txBody>
+          <a:bodyPr wrap="square" lIns="0" rIns="0" tIns="0" bIns="0">
+            <a:spAutoFit/>
+          </a:bodyPr>
+          <a:lstStyle/>
+          <a:p>
+            <a:r>
+              <a:rPr sz="900" b="0">
+                <a:solidFill>
+                  <a:srgbClr val="6B7082"/>
+                </a:solidFill>
+                <a:latin typeface="Helvetica Neue"/>
+              </a:rPr>
+              <a:t>63,582 views · 83 posts</a:t>
+            </a:r>
+          </a:p>
+        </p:txBody>
+      </p:sp>
+      <p:sp>
+        <p:nvSpPr>
+          <p:cNvPr id="18" name="TextBox 17"/>
+          <p:cNvSpPr txBox="1"/>
+          <p:nvPr/>
+        </p:nvSpPr>
+        <p:spPr>
+          <a:xfrm>
+            <a:off x="731520" y="3289026"/>
+            <a:ext cx="3200400" cy="291904"/>
+          </a:xfrm>
+          <a:prstGeom prst="rect">
+            <a:avLst/>
+          </a:prstGeom>
+          <a:noFill/>
+        </p:spPr>
+        <p:txBody>
+          <a:bodyPr wrap="square" lIns="0" rIns="0" tIns="0" bIns="0">
+            <a:spAutoFit/>
+          </a:bodyPr>
+          <a:lstStyle/>
+          <a:p>
+            <a:r>
+              <a:rPr sz="1100" b="1">
+                <a:solidFill>
+                  <a:srgbClr val="141833"/>
+                </a:solidFill>
+                <a:latin typeface="Helvetica Neue"/>
+              </a:rPr>
+              <a:t>FIFA / World Cup</a:t>
+            </a:r>
+          </a:p>
+        </p:txBody>
+      </p:sp>
+      <p:sp>
+        <p:nvSpPr>
+          <p:cNvPr id="19" name="Rectangle 18"/>
+          <p:cNvSpPr/>
+          <p:nvPr/>
+        </p:nvSpPr>
+        <p:spPr>
+          <a:xfrm>
+            <a:off x="4114800" y="3352682"/>
+            <a:ext cx="4170936" cy="128016"/>
           </a:xfrm>
           <a:prstGeom prst="rect">
             <a:avLst/>
@@ -16711,13 +16531,13 @@
       </p:sp>
       <p:sp>
         <p:nvSpPr>
-          <p:cNvPr id="17" name="TextBox 16"/>
-          <p:cNvSpPr txBox="1"/>
-          <p:nvPr/>
-        </p:nvSpPr>
-        <p:spPr>
-          <a:xfrm>
-            <a:off x="8373642" y="2997121"/>
+          <p:cNvPr id="20" name="TextBox 19"/>
+          <p:cNvSpPr txBox="1"/>
+          <p:nvPr/>
+        </p:nvSpPr>
+        <p:spPr>
+          <a:xfrm>
+            <a:off x="8377176" y="3289026"/>
             <a:ext cx="2286000" cy="291904"/>
           </a:xfrm>
           <a:prstGeom prst="rect">
@@ -16738,20 +16558,20 @@
                 </a:solidFill>
                 <a:latin typeface="Helvetica Neue"/>
               </a:rPr>
-              <a:t>62,855 views · 24 posts</a:t>
-            </a:r>
-          </a:p>
-        </p:txBody>
-      </p:sp>
-      <p:sp>
-        <p:nvSpPr>
-          <p:cNvPr id="18" name="TextBox 17"/>
-          <p:cNvSpPr txBox="1"/>
-          <p:nvPr/>
-        </p:nvSpPr>
-        <p:spPr>
-          <a:xfrm>
-            <a:off x="731520" y="3289026"/>
+              <a:t>62,913 views · 24 posts</a:t>
+            </a:r>
+          </a:p>
+        </p:txBody>
+      </p:sp>
+      <p:sp>
+        <p:nvSpPr>
+          <p:cNvPr id="21" name="TextBox 20"/>
+          <p:cNvSpPr txBox="1"/>
+          <p:nvPr/>
+        </p:nvSpPr>
+        <p:spPr>
+          <a:xfrm>
+            <a:off x="731520" y="3580931"/>
             <a:ext cx="3200400" cy="291904"/>
           </a:xfrm>
           <a:prstGeom prst="rect">
@@ -16779,14 +16599,14 @@
       </p:sp>
       <p:sp>
         <p:nvSpPr>
-          <p:cNvPr id="19" name="Rectangle 18"/>
+          <p:cNvPr id="22" name="Rectangle 21"/>
           <p:cNvSpPr/>
           <p:nvPr/>
         </p:nvSpPr>
         <p:spPr>
           <a:xfrm>
-            <a:off x="4114800" y="3352682"/>
-            <a:ext cx="4146186" cy="128016"/>
+            <a:off x="4114800" y="3644587"/>
+            <a:ext cx="4145942" cy="128016"/>
           </a:xfrm>
           <a:prstGeom prst="rect">
             <a:avLst/>
@@ -16823,13 +16643,13 @@
       </p:sp>
       <p:sp>
         <p:nvSpPr>
-          <p:cNvPr id="20" name="TextBox 19"/>
-          <p:cNvSpPr txBox="1"/>
-          <p:nvPr/>
-        </p:nvSpPr>
-        <p:spPr>
-          <a:xfrm>
-            <a:off x="8352426" y="3289026"/>
+          <p:cNvPr id="23" name="TextBox 22"/>
+          <p:cNvSpPr txBox="1"/>
+          <p:nvPr/>
+        </p:nvSpPr>
+        <p:spPr>
+          <a:xfrm>
+            <a:off x="8352182" y="3580931"/>
             <a:ext cx="2286000" cy="291904"/>
           </a:xfrm>
           <a:prstGeom prst="rect">
@@ -16850,20 +16670,20 @@
                 </a:solidFill>
                 <a:latin typeface="Helvetica Neue"/>
               </a:rPr>
-              <a:t>62,535 views · 22 posts</a:t>
-            </a:r>
-          </a:p>
-        </p:txBody>
-      </p:sp>
-      <p:sp>
-        <p:nvSpPr>
-          <p:cNvPr id="21" name="TextBox 20"/>
-          <p:cNvSpPr txBox="1"/>
-          <p:nvPr/>
-        </p:nvSpPr>
-        <p:spPr>
-          <a:xfrm>
-            <a:off x="731520" y="3580931"/>
+              <a:t>62,536 views · 22 posts</a:t>
+            </a:r>
+          </a:p>
+        </p:txBody>
+      </p:sp>
+      <p:sp>
+        <p:nvSpPr>
+          <p:cNvPr id="24" name="TextBox 23"/>
+          <p:cNvSpPr txBox="1"/>
+          <p:nvPr/>
+        </p:nvSpPr>
+        <p:spPr>
+          <a:xfrm>
+            <a:off x="731520" y="3872835"/>
             <a:ext cx="3200400" cy="291904"/>
           </a:xfrm>
           <a:prstGeom prst="rect">
@@ -16884,21 +16704,581 @@
                 </a:solidFill>
                 <a:latin typeface="Helvetica Neue"/>
               </a:rPr>
-              <a:t>Elections &amp; Judicial</a:t>
-            </a:r>
-          </a:p>
-        </p:txBody>
-      </p:sp>
-      <p:sp>
-        <p:nvSpPr>
-          <p:cNvPr id="22" name="Rectangle 21"/>
+              <a:t>Community &amp; Culture</a:t>
+            </a:r>
+          </a:p>
+        </p:txBody>
+      </p:sp>
+      <p:sp>
+        <p:nvSpPr>
+          <p:cNvPr id="25" name="Rectangle 24"/>
           <p:cNvSpPr/>
           <p:nvPr/>
         </p:nvSpPr>
         <p:spPr>
           <a:xfrm>
-            <a:off x="4114800" y="3644587"/>
-            <a:ext cx="4118074" cy="128016"/>
+            <a:off x="4114800" y="3936491"/>
+            <a:ext cx="3207510" cy="128016"/>
+          </a:xfrm>
+          <a:prstGeom prst="rect">
+            <a:avLst/>
+          </a:prstGeom>
+          <a:solidFill>
+            <a:srgbClr val="141833"/>
+          </a:solidFill>
+          <a:ln>
+            <a:noFill/>
+          </a:ln>
+          <a:effectLst/>
+        </p:spPr>
+        <p:style>
+          <a:lnRef idx="1">
+            <a:schemeClr val="accent1"/>
+          </a:lnRef>
+          <a:fillRef idx="3">
+            <a:schemeClr val="accent1"/>
+          </a:fillRef>
+          <a:effectRef idx="2">
+            <a:schemeClr val="accent1"/>
+          </a:effectRef>
+          <a:fontRef idx="minor">
+            <a:schemeClr val="lt1"/>
+          </a:fontRef>
+        </p:style>
+        <p:txBody>
+          <a:bodyPr rtlCol="0" anchor="ctr"/>
+          <a:lstStyle/>
+          <a:p>
+            <a:pPr algn="ctr"/>
+          </a:p>
+        </p:txBody>
+      </p:sp>
+      <p:sp>
+        <p:nvSpPr>
+          <p:cNvPr id="26" name="TextBox 25"/>
+          <p:cNvSpPr txBox="1"/>
+          <p:nvPr/>
+        </p:nvSpPr>
+        <p:spPr>
+          <a:xfrm>
+            <a:off x="7413750" y="3872835"/>
+            <a:ext cx="2286000" cy="291904"/>
+          </a:xfrm>
+          <a:prstGeom prst="rect">
+            <a:avLst/>
+          </a:prstGeom>
+          <a:noFill/>
+        </p:spPr>
+        <p:txBody>
+          <a:bodyPr wrap="square" lIns="0" rIns="0" tIns="0" bIns="0">
+            <a:spAutoFit/>
+          </a:bodyPr>
+          <a:lstStyle/>
+          <a:p>
+            <a:r>
+              <a:rPr sz="900" b="0">
+                <a:solidFill>
+                  <a:srgbClr val="6B7082"/>
+                </a:solidFill>
+                <a:latin typeface="Helvetica Neue"/>
+              </a:rPr>
+              <a:t>48,381 views · 56 posts</a:t>
+            </a:r>
+          </a:p>
+        </p:txBody>
+      </p:sp>
+      <p:sp>
+        <p:nvSpPr>
+          <p:cNvPr id="27" name="TextBox 26"/>
+          <p:cNvSpPr txBox="1"/>
+          <p:nvPr/>
+        </p:nvSpPr>
+        <p:spPr>
+          <a:xfrm>
+            <a:off x="731520" y="4164740"/>
+            <a:ext cx="3200400" cy="291904"/>
+          </a:xfrm>
+          <a:prstGeom prst="rect">
+            <a:avLst/>
+          </a:prstGeom>
+          <a:noFill/>
+        </p:spPr>
+        <p:txBody>
+          <a:bodyPr wrap="square" lIns="0" rIns="0" tIns="0" bIns="0">
+            <a:spAutoFit/>
+          </a:bodyPr>
+          <a:lstStyle/>
+          <a:p>
+            <a:r>
+              <a:rPr sz="1100" b="1">
+                <a:solidFill>
+                  <a:srgbClr val="141833"/>
+                </a:solidFill>
+                <a:latin typeface="Helvetica Neue"/>
+              </a:rPr>
+              <a:t>Downtown Development</a:t>
+            </a:r>
+          </a:p>
+        </p:txBody>
+      </p:sp>
+      <p:sp>
+        <p:nvSpPr>
+          <p:cNvPr id="28" name="Rectangle 27"/>
+          <p:cNvSpPr/>
+          <p:nvPr/>
+        </p:nvSpPr>
+        <p:spPr>
+          <a:xfrm>
+            <a:off x="4114800" y="4228396"/>
+            <a:ext cx="3160837" cy="128016"/>
+          </a:xfrm>
+          <a:prstGeom prst="rect">
+            <a:avLst/>
+          </a:prstGeom>
+          <a:solidFill>
+            <a:srgbClr val="C9A227"/>
+          </a:solidFill>
+          <a:ln>
+            <a:noFill/>
+          </a:ln>
+          <a:effectLst/>
+        </p:spPr>
+        <p:style>
+          <a:lnRef idx="1">
+            <a:schemeClr val="accent1"/>
+          </a:lnRef>
+          <a:fillRef idx="3">
+            <a:schemeClr val="accent1"/>
+          </a:fillRef>
+          <a:effectRef idx="2">
+            <a:schemeClr val="accent1"/>
+          </a:effectRef>
+          <a:fontRef idx="minor">
+            <a:schemeClr val="lt1"/>
+          </a:fontRef>
+        </p:style>
+        <p:txBody>
+          <a:bodyPr rtlCol="0" anchor="ctr"/>
+          <a:lstStyle/>
+          <a:p>
+            <a:pPr algn="ctr"/>
+          </a:p>
+        </p:txBody>
+      </p:sp>
+      <p:sp>
+        <p:nvSpPr>
+          <p:cNvPr id="29" name="TextBox 28"/>
+          <p:cNvSpPr txBox="1"/>
+          <p:nvPr/>
+        </p:nvSpPr>
+        <p:spPr>
+          <a:xfrm>
+            <a:off x="7367077" y="4164740"/>
+            <a:ext cx="2286000" cy="291904"/>
+          </a:xfrm>
+          <a:prstGeom prst="rect">
+            <a:avLst/>
+          </a:prstGeom>
+          <a:noFill/>
+        </p:spPr>
+        <p:txBody>
+          <a:bodyPr wrap="square" lIns="0" rIns="0" tIns="0" bIns="0">
+            <a:spAutoFit/>
+          </a:bodyPr>
+          <a:lstStyle/>
+          <a:p>
+            <a:r>
+              <a:rPr sz="900" b="0">
+                <a:solidFill>
+                  <a:srgbClr val="6B7082"/>
+                </a:solidFill>
+                <a:latin typeface="Helvetica Neue"/>
+              </a:rPr>
+              <a:t>47,677 views · 18 posts</a:t>
+            </a:r>
+          </a:p>
+        </p:txBody>
+      </p:sp>
+      <p:sp>
+        <p:nvSpPr>
+          <p:cNvPr id="30" name="TextBox 29"/>
+          <p:cNvSpPr txBox="1"/>
+          <p:nvPr/>
+        </p:nvSpPr>
+        <p:spPr>
+          <a:xfrm>
+            <a:off x="731520" y="4456644"/>
+            <a:ext cx="3200400" cy="291904"/>
+          </a:xfrm>
+          <a:prstGeom prst="rect">
+            <a:avLst/>
+          </a:prstGeom>
+          <a:noFill/>
+        </p:spPr>
+        <p:txBody>
+          <a:bodyPr wrap="square" lIns="0" rIns="0" tIns="0" bIns="0">
+            <a:spAutoFit/>
+          </a:bodyPr>
+          <a:lstStyle/>
+          <a:p>
+            <a:r>
+              <a:rPr sz="1100" b="1">
+                <a:solidFill>
+                  <a:srgbClr val="141833"/>
+                </a:solidFill>
+                <a:latin typeface="Helvetica Neue"/>
+              </a:rPr>
+              <a:t>Political Individual Highlights</a:t>
+            </a:r>
+          </a:p>
+        </p:txBody>
+      </p:sp>
+      <p:sp>
+        <p:nvSpPr>
+          <p:cNvPr id="31" name="Rectangle 30"/>
+          <p:cNvSpPr/>
+          <p:nvPr/>
+        </p:nvSpPr>
+        <p:spPr>
+          <a:xfrm>
+            <a:off x="4114800" y="4520301"/>
+            <a:ext cx="1502685" cy="128016"/>
+          </a:xfrm>
+          <a:prstGeom prst="rect">
+            <a:avLst/>
+          </a:prstGeom>
+          <a:solidFill>
+            <a:srgbClr val="2E86AB"/>
+          </a:solidFill>
+          <a:ln>
+            <a:noFill/>
+          </a:ln>
+          <a:effectLst/>
+        </p:spPr>
+        <p:style>
+          <a:lnRef idx="1">
+            <a:schemeClr val="accent1"/>
+          </a:lnRef>
+          <a:fillRef idx="3">
+            <a:schemeClr val="accent1"/>
+          </a:fillRef>
+          <a:effectRef idx="2">
+            <a:schemeClr val="accent1"/>
+          </a:effectRef>
+          <a:fontRef idx="minor">
+            <a:schemeClr val="lt1"/>
+          </a:fontRef>
+        </p:style>
+        <p:txBody>
+          <a:bodyPr rtlCol="0" anchor="ctr"/>
+          <a:lstStyle/>
+          <a:p>
+            <a:pPr algn="ctr"/>
+          </a:p>
+        </p:txBody>
+      </p:sp>
+      <p:sp>
+        <p:nvSpPr>
+          <p:cNvPr id="32" name="TextBox 31"/>
+          <p:cNvSpPr txBox="1"/>
+          <p:nvPr/>
+        </p:nvSpPr>
+        <p:spPr>
+          <a:xfrm>
+            <a:off x="5708925" y="4456644"/>
+            <a:ext cx="2286000" cy="291904"/>
+          </a:xfrm>
+          <a:prstGeom prst="rect">
+            <a:avLst/>
+          </a:prstGeom>
+          <a:noFill/>
+        </p:spPr>
+        <p:txBody>
+          <a:bodyPr wrap="square" lIns="0" rIns="0" tIns="0" bIns="0">
+            <a:spAutoFit/>
+          </a:bodyPr>
+          <a:lstStyle/>
+          <a:p>
+            <a:r>
+              <a:rPr sz="900" b="0">
+                <a:solidFill>
+                  <a:srgbClr val="6B7082"/>
+                </a:solidFill>
+                <a:latin typeface="Helvetica Neue"/>
+              </a:rPr>
+              <a:t>22,666 views · 27 posts</a:t>
+            </a:r>
+          </a:p>
+        </p:txBody>
+      </p:sp>
+      <p:sp>
+        <p:nvSpPr>
+          <p:cNvPr id="33" name="TextBox 32"/>
+          <p:cNvSpPr txBox="1"/>
+          <p:nvPr/>
+        </p:nvSpPr>
+        <p:spPr>
+          <a:xfrm>
+            <a:off x="731520" y="4748549"/>
+            <a:ext cx="3200400" cy="291904"/>
+          </a:xfrm>
+          <a:prstGeom prst="rect">
+            <a:avLst/>
+          </a:prstGeom>
+          <a:noFill/>
+        </p:spPr>
+        <p:txBody>
+          <a:bodyPr wrap="square" lIns="0" rIns="0" tIns="0" bIns="0">
+            <a:spAutoFit/>
+          </a:bodyPr>
+          <a:lstStyle/>
+          <a:p>
+            <a:r>
+              <a:rPr sz="1100" b="1">
+                <a:solidFill>
+                  <a:srgbClr val="141833"/>
+                </a:solidFill>
+                <a:latin typeface="Helvetica Neue"/>
+              </a:rPr>
+              <a:t>Resident Highlights</a:t>
+            </a:r>
+          </a:p>
+        </p:txBody>
+      </p:sp>
+      <p:sp>
+        <p:nvSpPr>
+          <p:cNvPr id="34" name="Rectangle 33"/>
+          <p:cNvSpPr/>
+          <p:nvPr/>
+        </p:nvSpPr>
+        <p:spPr>
+          <a:xfrm>
+            <a:off x="4114800" y="4812205"/>
+            <a:ext cx="546883" cy="128016"/>
+          </a:xfrm>
+          <a:prstGeom prst="rect">
+            <a:avLst/>
+          </a:prstGeom>
+          <a:solidFill>
+            <a:srgbClr val="1B7A43"/>
+          </a:solidFill>
+          <a:ln>
+            <a:noFill/>
+          </a:ln>
+          <a:effectLst/>
+        </p:spPr>
+        <p:style>
+          <a:lnRef idx="1">
+            <a:schemeClr val="accent1"/>
+          </a:lnRef>
+          <a:fillRef idx="3">
+            <a:schemeClr val="accent1"/>
+          </a:fillRef>
+          <a:effectRef idx="2">
+            <a:schemeClr val="accent1"/>
+          </a:effectRef>
+          <a:fontRef idx="minor">
+            <a:schemeClr val="lt1"/>
+          </a:fontRef>
+        </p:style>
+        <p:txBody>
+          <a:bodyPr rtlCol="0" anchor="ctr"/>
+          <a:lstStyle/>
+          <a:p>
+            <a:pPr algn="ctr"/>
+          </a:p>
+        </p:txBody>
+      </p:sp>
+      <p:sp>
+        <p:nvSpPr>
+          <p:cNvPr id="35" name="TextBox 34"/>
+          <p:cNvSpPr txBox="1"/>
+          <p:nvPr/>
+        </p:nvSpPr>
+        <p:spPr>
+          <a:xfrm>
+            <a:off x="4753123" y="4748549"/>
+            <a:ext cx="2286000" cy="291904"/>
+          </a:xfrm>
+          <a:prstGeom prst="rect">
+            <a:avLst/>
+          </a:prstGeom>
+          <a:noFill/>
+        </p:spPr>
+        <p:txBody>
+          <a:bodyPr wrap="square" lIns="0" rIns="0" tIns="0" bIns="0">
+            <a:spAutoFit/>
+          </a:bodyPr>
+          <a:lstStyle/>
+          <a:p>
+            <a:r>
+              <a:rPr sz="900" b="0">
+                <a:solidFill>
+                  <a:srgbClr val="6B7082"/>
+                </a:solidFill>
+                <a:latin typeface="Helvetica Neue"/>
+              </a:rPr>
+              <a:t>8,249 views · 8 posts</a:t>
+            </a:r>
+          </a:p>
+        </p:txBody>
+      </p:sp>
+      <p:sp>
+        <p:nvSpPr>
+          <p:cNvPr id="36" name="TextBox 35"/>
+          <p:cNvSpPr txBox="1"/>
+          <p:nvPr/>
+        </p:nvSpPr>
+        <p:spPr>
+          <a:xfrm>
+            <a:off x="731520" y="5040454"/>
+            <a:ext cx="3200400" cy="291904"/>
+          </a:xfrm>
+          <a:prstGeom prst="rect">
+            <a:avLst/>
+          </a:prstGeom>
+          <a:noFill/>
+        </p:spPr>
+        <p:txBody>
+          <a:bodyPr wrap="square" lIns="0" rIns="0" tIns="0" bIns="0">
+            <a:spAutoFit/>
+          </a:bodyPr>
+          <a:lstStyle/>
+          <a:p>
+            <a:r>
+              <a:rPr sz="1100" b="1">
+                <a:solidFill>
+                  <a:srgbClr val="141833"/>
+                </a:solidFill>
+                <a:latin typeface="Helvetica Neue"/>
+              </a:rPr>
+              <a:t>American Pride</a:t>
+            </a:r>
+          </a:p>
+        </p:txBody>
+      </p:sp>
+      <p:sp>
+        <p:nvSpPr>
+          <p:cNvPr id="37" name="Rectangle 36"/>
+          <p:cNvSpPr/>
+          <p:nvPr/>
+        </p:nvSpPr>
+        <p:spPr>
+          <a:xfrm>
+            <a:off x="4114800" y="5104110"/>
+            <a:ext cx="515060" cy="128016"/>
+          </a:xfrm>
+          <a:prstGeom prst="rect">
+            <a:avLst/>
+          </a:prstGeom>
+          <a:solidFill>
+            <a:srgbClr val="990011"/>
+          </a:solidFill>
+          <a:ln>
+            <a:noFill/>
+          </a:ln>
+          <a:effectLst/>
+        </p:spPr>
+        <p:style>
+          <a:lnRef idx="1">
+            <a:schemeClr val="accent1"/>
+          </a:lnRef>
+          <a:fillRef idx="3">
+            <a:schemeClr val="accent1"/>
+          </a:fillRef>
+          <a:effectRef idx="2">
+            <a:schemeClr val="accent1"/>
+          </a:effectRef>
+          <a:fontRef idx="minor">
+            <a:schemeClr val="lt1"/>
+          </a:fontRef>
+        </p:style>
+        <p:txBody>
+          <a:bodyPr rtlCol="0" anchor="ctr"/>
+          <a:lstStyle/>
+          <a:p>
+            <a:pPr algn="ctr"/>
+          </a:p>
+        </p:txBody>
+      </p:sp>
+      <p:sp>
+        <p:nvSpPr>
+          <p:cNvPr id="38" name="TextBox 37"/>
+          <p:cNvSpPr txBox="1"/>
+          <p:nvPr/>
+        </p:nvSpPr>
+        <p:spPr>
+          <a:xfrm>
+            <a:off x="4721300" y="5040454"/>
+            <a:ext cx="2286000" cy="291904"/>
+          </a:xfrm>
+          <a:prstGeom prst="rect">
+            <a:avLst/>
+          </a:prstGeom>
+          <a:noFill/>
+        </p:spPr>
+        <p:txBody>
+          <a:bodyPr wrap="square" lIns="0" rIns="0" tIns="0" bIns="0">
+            <a:spAutoFit/>
+          </a:bodyPr>
+          <a:lstStyle/>
+          <a:p>
+            <a:r>
+              <a:rPr sz="900" b="0">
+                <a:solidFill>
+                  <a:srgbClr val="6B7082"/>
+                </a:solidFill>
+                <a:latin typeface="Helvetica Neue"/>
+              </a:rPr>
+              <a:t>7,769 views · 15 posts</a:t>
+            </a:r>
+          </a:p>
+        </p:txBody>
+      </p:sp>
+      <p:sp>
+        <p:nvSpPr>
+          <p:cNvPr id="39" name="TextBox 38"/>
+          <p:cNvSpPr txBox="1"/>
+          <p:nvPr/>
+        </p:nvSpPr>
+        <p:spPr>
+          <a:xfrm>
+            <a:off x="731520" y="5332358"/>
+            <a:ext cx="3200400" cy="291904"/>
+          </a:xfrm>
+          <a:prstGeom prst="rect">
+            <a:avLst/>
+          </a:prstGeom>
+          <a:noFill/>
+        </p:spPr>
+        <p:txBody>
+          <a:bodyPr wrap="square" lIns="0" rIns="0" tIns="0" bIns="0">
+            <a:spAutoFit/>
+          </a:bodyPr>
+          <a:lstStyle/>
+          <a:p>
+            <a:r>
+              <a:rPr sz="1100" b="1">
+                <a:solidFill>
+                  <a:srgbClr val="141833"/>
+                </a:solidFill>
+                <a:latin typeface="Helvetica Neue"/>
+              </a:rPr>
+              <a:t>Legislation &amp; Policy Watch</a:t>
+            </a:r>
+          </a:p>
+        </p:txBody>
+      </p:sp>
+      <p:sp>
+        <p:nvSpPr>
+          <p:cNvPr id="40" name="Rectangle 39"/>
+          <p:cNvSpPr/>
+          <p:nvPr/>
+        </p:nvSpPr>
+        <p:spPr>
+          <a:xfrm>
+            <a:off x="4114800" y="5396015"/>
+            <a:ext cx="410510" cy="128016"/>
           </a:xfrm>
           <a:prstGeom prst="rect">
             <a:avLst/>
@@ -16935,685 +17315,13 @@
       </p:sp>
       <p:sp>
         <p:nvSpPr>
-          <p:cNvPr id="23" name="TextBox 22"/>
-          <p:cNvSpPr txBox="1"/>
-          <p:nvPr/>
-        </p:nvSpPr>
-        <p:spPr>
-          <a:xfrm>
-            <a:off x="8324314" y="3580931"/>
-            <a:ext cx="2286000" cy="291904"/>
-          </a:xfrm>
-          <a:prstGeom prst="rect">
-            <a:avLst/>
-          </a:prstGeom>
-          <a:noFill/>
-        </p:spPr>
-        <p:txBody>
-          <a:bodyPr wrap="square" lIns="0" rIns="0" tIns="0" bIns="0">
-            <a:spAutoFit/>
-          </a:bodyPr>
-          <a:lstStyle/>
-          <a:p>
-            <a:r>
-              <a:rPr sz="900" b="0">
-                <a:solidFill>
-                  <a:srgbClr val="6B7082"/>
-                </a:solidFill>
-                <a:latin typeface="Helvetica Neue"/>
-              </a:rPr>
-              <a:t>62,111 views · 83 posts</a:t>
-            </a:r>
-          </a:p>
-        </p:txBody>
-      </p:sp>
-      <p:sp>
-        <p:nvSpPr>
-          <p:cNvPr id="24" name="TextBox 23"/>
-          <p:cNvSpPr txBox="1"/>
-          <p:nvPr/>
-        </p:nvSpPr>
-        <p:spPr>
-          <a:xfrm>
-            <a:off x="731520" y="3872835"/>
-            <a:ext cx="3200400" cy="291904"/>
-          </a:xfrm>
-          <a:prstGeom prst="rect">
-            <a:avLst/>
-          </a:prstGeom>
-          <a:noFill/>
-        </p:spPr>
-        <p:txBody>
-          <a:bodyPr wrap="square" lIns="0" rIns="0" tIns="0" bIns="0">
-            <a:spAutoFit/>
-          </a:bodyPr>
-          <a:lstStyle/>
-          <a:p>
-            <a:r>
-              <a:rPr sz="1100" b="1">
-                <a:solidFill>
-                  <a:srgbClr val="141833"/>
-                </a:solidFill>
-                <a:latin typeface="Helvetica Neue"/>
-              </a:rPr>
-              <a:t>Downtown Development</a:t>
-            </a:r>
-          </a:p>
-        </p:txBody>
-      </p:sp>
-      <p:sp>
-        <p:nvSpPr>
-          <p:cNvPr id="25" name="Rectangle 24"/>
-          <p:cNvSpPr/>
-          <p:nvPr/>
-        </p:nvSpPr>
-        <p:spPr>
-          <a:xfrm>
-            <a:off x="4114800" y="3936491"/>
-            <a:ext cx="3161073" cy="128016"/>
-          </a:xfrm>
-          <a:prstGeom prst="rect">
-            <a:avLst/>
-          </a:prstGeom>
-          <a:solidFill>
-            <a:srgbClr val="C9A227"/>
-          </a:solidFill>
-          <a:ln>
-            <a:noFill/>
-          </a:ln>
-          <a:effectLst/>
-        </p:spPr>
-        <p:style>
-          <a:lnRef idx="1">
-            <a:schemeClr val="accent1"/>
-          </a:lnRef>
-          <a:fillRef idx="3">
-            <a:schemeClr val="accent1"/>
-          </a:fillRef>
-          <a:effectRef idx="2">
-            <a:schemeClr val="accent1"/>
-          </a:effectRef>
-          <a:fontRef idx="minor">
-            <a:schemeClr val="lt1"/>
-          </a:fontRef>
-        </p:style>
-        <p:txBody>
-          <a:bodyPr rtlCol="0" anchor="ctr"/>
-          <a:lstStyle/>
-          <a:p>
-            <a:pPr algn="ctr"/>
-          </a:p>
-        </p:txBody>
-      </p:sp>
-      <p:sp>
-        <p:nvSpPr>
-          <p:cNvPr id="26" name="TextBox 25"/>
-          <p:cNvSpPr txBox="1"/>
-          <p:nvPr/>
-        </p:nvSpPr>
-        <p:spPr>
-          <a:xfrm>
-            <a:off x="7367313" y="3872835"/>
-            <a:ext cx="2286000" cy="291904"/>
-          </a:xfrm>
-          <a:prstGeom prst="rect">
-            <a:avLst/>
-          </a:prstGeom>
-          <a:noFill/>
-        </p:spPr>
-        <p:txBody>
-          <a:bodyPr wrap="square" lIns="0" rIns="0" tIns="0" bIns="0">
-            <a:spAutoFit/>
-          </a:bodyPr>
-          <a:lstStyle/>
-          <a:p>
-            <a:r>
-              <a:rPr sz="900" b="0">
-                <a:solidFill>
-                  <a:srgbClr val="6B7082"/>
-                </a:solidFill>
-                <a:latin typeface="Helvetica Neue"/>
-              </a:rPr>
-              <a:t>47,677 views · 18 posts</a:t>
-            </a:r>
-          </a:p>
-        </p:txBody>
-      </p:sp>
-      <p:sp>
-        <p:nvSpPr>
-          <p:cNvPr id="27" name="TextBox 26"/>
-          <p:cNvSpPr txBox="1"/>
-          <p:nvPr/>
-        </p:nvSpPr>
-        <p:spPr>
-          <a:xfrm>
-            <a:off x="731520" y="4164740"/>
-            <a:ext cx="3200400" cy="291904"/>
-          </a:xfrm>
-          <a:prstGeom prst="rect">
-            <a:avLst/>
-          </a:prstGeom>
-          <a:noFill/>
-        </p:spPr>
-        <p:txBody>
-          <a:bodyPr wrap="square" lIns="0" rIns="0" tIns="0" bIns="0">
-            <a:spAutoFit/>
-          </a:bodyPr>
-          <a:lstStyle/>
-          <a:p>
-            <a:r>
-              <a:rPr sz="1100" b="1">
-                <a:solidFill>
-                  <a:srgbClr val="141833"/>
-                </a:solidFill>
-                <a:latin typeface="Helvetica Neue"/>
-              </a:rPr>
-              <a:t>Community &amp; Culture</a:t>
-            </a:r>
-          </a:p>
-        </p:txBody>
-      </p:sp>
-      <p:sp>
-        <p:nvSpPr>
-          <p:cNvPr id="28" name="Rectangle 27"/>
-          <p:cNvSpPr/>
-          <p:nvPr/>
-        </p:nvSpPr>
-        <p:spPr>
-          <a:xfrm>
-            <a:off x="4114800" y="4228396"/>
-            <a:ext cx="2732498" cy="128016"/>
-          </a:xfrm>
-          <a:prstGeom prst="rect">
-            <a:avLst/>
-          </a:prstGeom>
-          <a:solidFill>
-            <a:srgbClr val="141833"/>
-          </a:solidFill>
-          <a:ln>
-            <a:noFill/>
-          </a:ln>
-          <a:effectLst/>
-        </p:spPr>
-        <p:style>
-          <a:lnRef idx="1">
-            <a:schemeClr val="accent1"/>
-          </a:lnRef>
-          <a:fillRef idx="3">
-            <a:schemeClr val="accent1"/>
-          </a:fillRef>
-          <a:effectRef idx="2">
-            <a:schemeClr val="accent1"/>
-          </a:effectRef>
-          <a:fontRef idx="minor">
-            <a:schemeClr val="lt1"/>
-          </a:fontRef>
-        </p:style>
-        <p:txBody>
-          <a:bodyPr rtlCol="0" anchor="ctr"/>
-          <a:lstStyle/>
-          <a:p>
-            <a:pPr algn="ctr"/>
-          </a:p>
-        </p:txBody>
-      </p:sp>
-      <p:sp>
-        <p:nvSpPr>
-          <p:cNvPr id="29" name="TextBox 28"/>
-          <p:cNvSpPr txBox="1"/>
-          <p:nvPr/>
-        </p:nvSpPr>
-        <p:spPr>
-          <a:xfrm>
-            <a:off x="6938738" y="4164740"/>
-            <a:ext cx="2286000" cy="291904"/>
-          </a:xfrm>
-          <a:prstGeom prst="rect">
-            <a:avLst/>
-          </a:prstGeom>
-          <a:noFill/>
-        </p:spPr>
-        <p:txBody>
-          <a:bodyPr wrap="square" lIns="0" rIns="0" tIns="0" bIns="0">
-            <a:spAutoFit/>
-          </a:bodyPr>
-          <a:lstStyle/>
-          <a:p>
-            <a:r>
-              <a:rPr sz="900" b="0">
-                <a:solidFill>
-                  <a:srgbClr val="6B7082"/>
-                </a:solidFill>
-                <a:latin typeface="Helvetica Neue"/>
-              </a:rPr>
-              <a:t>41,213 views · 54 posts</a:t>
-            </a:r>
-          </a:p>
-        </p:txBody>
-      </p:sp>
-      <p:sp>
-        <p:nvSpPr>
-          <p:cNvPr id="30" name="TextBox 29"/>
-          <p:cNvSpPr txBox="1"/>
-          <p:nvPr/>
-        </p:nvSpPr>
-        <p:spPr>
-          <a:xfrm>
-            <a:off x="731520" y="4456644"/>
-            <a:ext cx="3200400" cy="291904"/>
-          </a:xfrm>
-          <a:prstGeom prst="rect">
-            <a:avLst/>
-          </a:prstGeom>
-          <a:noFill/>
-        </p:spPr>
-        <p:txBody>
-          <a:bodyPr wrap="square" lIns="0" rIns="0" tIns="0" bIns="0">
-            <a:spAutoFit/>
-          </a:bodyPr>
-          <a:lstStyle/>
-          <a:p>
-            <a:r>
-              <a:rPr sz="1100" b="1">
-                <a:solidFill>
-                  <a:srgbClr val="141833"/>
-                </a:solidFill>
-                <a:latin typeface="Helvetica Neue"/>
-              </a:rPr>
-              <a:t>Political Individual Highlights</a:t>
-            </a:r>
-          </a:p>
-        </p:txBody>
-      </p:sp>
-      <p:sp>
-        <p:nvSpPr>
-          <p:cNvPr id="31" name="Rectangle 30"/>
-          <p:cNvSpPr/>
-          <p:nvPr/>
-        </p:nvSpPr>
-        <p:spPr>
-          <a:xfrm>
-            <a:off x="4114800" y="4520301"/>
-            <a:ext cx="1047304" cy="128016"/>
-          </a:xfrm>
-          <a:prstGeom prst="rect">
-            <a:avLst/>
-          </a:prstGeom>
-          <a:solidFill>
-            <a:srgbClr val="2E86AB"/>
-          </a:solidFill>
-          <a:ln>
-            <a:noFill/>
-          </a:ln>
-          <a:effectLst/>
-        </p:spPr>
-        <p:style>
-          <a:lnRef idx="1">
-            <a:schemeClr val="accent1"/>
-          </a:lnRef>
-          <a:fillRef idx="3">
-            <a:schemeClr val="accent1"/>
-          </a:fillRef>
-          <a:effectRef idx="2">
-            <a:schemeClr val="accent1"/>
-          </a:effectRef>
-          <a:fontRef idx="minor">
-            <a:schemeClr val="lt1"/>
-          </a:fontRef>
-        </p:style>
-        <p:txBody>
-          <a:bodyPr rtlCol="0" anchor="ctr"/>
-          <a:lstStyle/>
-          <a:p>
-            <a:pPr algn="ctr"/>
-          </a:p>
-        </p:txBody>
-      </p:sp>
-      <p:sp>
-        <p:nvSpPr>
-          <p:cNvPr id="32" name="TextBox 31"/>
-          <p:cNvSpPr txBox="1"/>
-          <p:nvPr/>
-        </p:nvSpPr>
-        <p:spPr>
-          <a:xfrm>
-            <a:off x="5253544" y="4456644"/>
-            <a:ext cx="2286000" cy="291904"/>
-          </a:xfrm>
-          <a:prstGeom prst="rect">
-            <a:avLst/>
-          </a:prstGeom>
-          <a:noFill/>
-        </p:spPr>
-        <p:txBody>
-          <a:bodyPr wrap="square" lIns="0" rIns="0" tIns="0" bIns="0">
-            <a:spAutoFit/>
-          </a:bodyPr>
-          <a:lstStyle/>
-          <a:p>
-            <a:r>
-              <a:rPr sz="900" b="0">
-                <a:solidFill>
-                  <a:srgbClr val="6B7082"/>
-                </a:solidFill>
-                <a:latin typeface="Helvetica Neue"/>
-              </a:rPr>
-              <a:t>15,796 views · 22 posts</a:t>
-            </a:r>
-          </a:p>
-        </p:txBody>
-      </p:sp>
-      <p:sp>
-        <p:nvSpPr>
-          <p:cNvPr id="33" name="TextBox 32"/>
-          <p:cNvSpPr txBox="1"/>
-          <p:nvPr/>
-        </p:nvSpPr>
-        <p:spPr>
-          <a:xfrm>
-            <a:off x="731520" y="4748549"/>
-            <a:ext cx="3200400" cy="291904"/>
-          </a:xfrm>
-          <a:prstGeom prst="rect">
-            <a:avLst/>
-          </a:prstGeom>
-          <a:noFill/>
-        </p:spPr>
-        <p:txBody>
-          <a:bodyPr wrap="square" lIns="0" rIns="0" tIns="0" bIns="0">
-            <a:spAutoFit/>
-          </a:bodyPr>
-          <a:lstStyle/>
-          <a:p>
-            <a:r>
-              <a:rPr sz="1100" b="1">
-                <a:solidFill>
-                  <a:srgbClr val="141833"/>
-                </a:solidFill>
-                <a:latin typeface="Helvetica Neue"/>
-              </a:rPr>
-              <a:t>Resident Highlights</a:t>
-            </a:r>
-          </a:p>
-        </p:txBody>
-      </p:sp>
-      <p:sp>
-        <p:nvSpPr>
-          <p:cNvPr id="34" name="Rectangle 33"/>
-          <p:cNvSpPr/>
-          <p:nvPr/>
-        </p:nvSpPr>
-        <p:spPr>
-          <a:xfrm>
-            <a:off x="4114800" y="4812205"/>
-            <a:ext cx="546923" cy="128016"/>
-          </a:xfrm>
-          <a:prstGeom prst="rect">
-            <a:avLst/>
-          </a:prstGeom>
-          <a:solidFill>
-            <a:srgbClr val="1B7A43"/>
-          </a:solidFill>
-          <a:ln>
-            <a:noFill/>
-          </a:ln>
-          <a:effectLst/>
-        </p:spPr>
-        <p:style>
-          <a:lnRef idx="1">
-            <a:schemeClr val="accent1"/>
-          </a:lnRef>
-          <a:fillRef idx="3">
-            <a:schemeClr val="accent1"/>
-          </a:fillRef>
-          <a:effectRef idx="2">
-            <a:schemeClr val="accent1"/>
-          </a:effectRef>
-          <a:fontRef idx="minor">
-            <a:schemeClr val="lt1"/>
-          </a:fontRef>
-        </p:style>
-        <p:txBody>
-          <a:bodyPr rtlCol="0" anchor="ctr"/>
-          <a:lstStyle/>
-          <a:p>
-            <a:pPr algn="ctr"/>
-          </a:p>
-        </p:txBody>
-      </p:sp>
-      <p:sp>
-        <p:nvSpPr>
-          <p:cNvPr id="35" name="TextBox 34"/>
-          <p:cNvSpPr txBox="1"/>
-          <p:nvPr/>
-        </p:nvSpPr>
-        <p:spPr>
-          <a:xfrm>
-            <a:off x="4753163" y="4748549"/>
-            <a:ext cx="2286000" cy="291904"/>
-          </a:xfrm>
-          <a:prstGeom prst="rect">
-            <a:avLst/>
-          </a:prstGeom>
-          <a:noFill/>
-        </p:spPr>
-        <p:txBody>
-          <a:bodyPr wrap="square" lIns="0" rIns="0" tIns="0" bIns="0">
-            <a:spAutoFit/>
-          </a:bodyPr>
-          <a:lstStyle/>
-          <a:p>
-            <a:r>
-              <a:rPr sz="900" b="0">
-                <a:solidFill>
-                  <a:srgbClr val="6B7082"/>
-                </a:solidFill>
-                <a:latin typeface="Helvetica Neue"/>
-              </a:rPr>
-              <a:t>8,249 views · 8 posts</a:t>
-            </a:r>
-          </a:p>
-        </p:txBody>
-      </p:sp>
-      <p:sp>
-        <p:nvSpPr>
-          <p:cNvPr id="36" name="TextBox 35"/>
-          <p:cNvSpPr txBox="1"/>
-          <p:nvPr/>
-        </p:nvSpPr>
-        <p:spPr>
-          <a:xfrm>
-            <a:off x="731520" y="5040454"/>
-            <a:ext cx="3200400" cy="291904"/>
-          </a:xfrm>
-          <a:prstGeom prst="rect">
-            <a:avLst/>
-          </a:prstGeom>
-          <a:noFill/>
-        </p:spPr>
-        <p:txBody>
-          <a:bodyPr wrap="square" lIns="0" rIns="0" tIns="0" bIns="0">
-            <a:spAutoFit/>
-          </a:bodyPr>
-          <a:lstStyle/>
-          <a:p>
-            <a:r>
-              <a:rPr sz="1100" b="1">
-                <a:solidFill>
-                  <a:srgbClr val="141833"/>
-                </a:solidFill>
-                <a:latin typeface="Helvetica Neue"/>
-              </a:rPr>
-              <a:t>American Pride</a:t>
-            </a:r>
-          </a:p>
-        </p:txBody>
-      </p:sp>
-      <p:sp>
-        <p:nvSpPr>
-          <p:cNvPr id="37" name="Rectangle 36"/>
-          <p:cNvSpPr/>
-          <p:nvPr/>
-        </p:nvSpPr>
-        <p:spPr>
-          <a:xfrm>
-            <a:off x="4114800" y="5104110"/>
-            <a:ext cx="514833" cy="128016"/>
-          </a:xfrm>
-          <a:prstGeom prst="rect">
-            <a:avLst/>
-          </a:prstGeom>
-          <a:solidFill>
-            <a:srgbClr val="990011"/>
-          </a:solidFill>
-          <a:ln>
-            <a:noFill/>
-          </a:ln>
-          <a:effectLst/>
-        </p:spPr>
-        <p:style>
-          <a:lnRef idx="1">
-            <a:schemeClr val="accent1"/>
-          </a:lnRef>
-          <a:fillRef idx="3">
-            <a:schemeClr val="accent1"/>
-          </a:fillRef>
-          <a:effectRef idx="2">
-            <a:schemeClr val="accent1"/>
-          </a:effectRef>
-          <a:fontRef idx="minor">
-            <a:schemeClr val="lt1"/>
-          </a:fontRef>
-        </p:style>
-        <p:txBody>
-          <a:bodyPr rtlCol="0" anchor="ctr"/>
-          <a:lstStyle/>
-          <a:p>
-            <a:pPr algn="ctr"/>
-          </a:p>
-        </p:txBody>
-      </p:sp>
-      <p:sp>
-        <p:nvSpPr>
-          <p:cNvPr id="38" name="TextBox 37"/>
-          <p:cNvSpPr txBox="1"/>
-          <p:nvPr/>
-        </p:nvSpPr>
-        <p:spPr>
-          <a:xfrm>
-            <a:off x="4721073" y="5040454"/>
-            <a:ext cx="2286000" cy="291904"/>
-          </a:xfrm>
-          <a:prstGeom prst="rect">
-            <a:avLst/>
-          </a:prstGeom>
-          <a:noFill/>
-        </p:spPr>
-        <p:txBody>
-          <a:bodyPr wrap="square" lIns="0" rIns="0" tIns="0" bIns="0">
-            <a:spAutoFit/>
-          </a:bodyPr>
-          <a:lstStyle/>
-          <a:p>
-            <a:r>
-              <a:rPr sz="900" b="0">
-                <a:solidFill>
-                  <a:srgbClr val="6B7082"/>
-                </a:solidFill>
-                <a:latin typeface="Helvetica Neue"/>
-              </a:rPr>
-              <a:t>7,765 views · 15 posts</a:t>
-            </a:r>
-          </a:p>
-        </p:txBody>
-      </p:sp>
-      <p:sp>
-        <p:nvSpPr>
-          <p:cNvPr id="39" name="TextBox 38"/>
-          <p:cNvSpPr txBox="1"/>
-          <p:nvPr/>
-        </p:nvSpPr>
-        <p:spPr>
-          <a:xfrm>
-            <a:off x="731520" y="5332358"/>
-            <a:ext cx="3200400" cy="291904"/>
-          </a:xfrm>
-          <a:prstGeom prst="rect">
-            <a:avLst/>
-          </a:prstGeom>
-          <a:noFill/>
-        </p:spPr>
-        <p:txBody>
-          <a:bodyPr wrap="square" lIns="0" rIns="0" tIns="0" bIns="0">
-            <a:spAutoFit/>
-          </a:bodyPr>
-          <a:lstStyle/>
-          <a:p>
-            <a:r>
-              <a:rPr sz="1100" b="1">
-                <a:solidFill>
-                  <a:srgbClr val="141833"/>
-                </a:solidFill>
-                <a:latin typeface="Helvetica Neue"/>
-              </a:rPr>
-              <a:t>Legislation &amp; Policy Watch</a:t>
-            </a:r>
-          </a:p>
-        </p:txBody>
-      </p:sp>
-      <p:sp>
-        <p:nvSpPr>
-          <p:cNvPr id="40" name="Rectangle 39"/>
-          <p:cNvSpPr/>
-          <p:nvPr/>
-        </p:nvSpPr>
-        <p:spPr>
-          <a:xfrm>
-            <a:off x="4114800" y="5396015"/>
-            <a:ext cx="410541" cy="128016"/>
-          </a:xfrm>
-          <a:prstGeom prst="rect">
-            <a:avLst/>
-          </a:prstGeom>
-          <a:solidFill>
-            <a:srgbClr val="2F3C7E"/>
-          </a:solidFill>
-          <a:ln>
-            <a:noFill/>
-          </a:ln>
-          <a:effectLst/>
-        </p:spPr>
-        <p:style>
-          <a:lnRef idx="1">
-            <a:schemeClr val="accent1"/>
-          </a:lnRef>
-          <a:fillRef idx="3">
-            <a:schemeClr val="accent1"/>
-          </a:fillRef>
-          <a:effectRef idx="2">
-            <a:schemeClr val="accent1"/>
-          </a:effectRef>
-          <a:fontRef idx="minor">
-            <a:schemeClr val="lt1"/>
-          </a:fontRef>
-        </p:style>
-        <p:txBody>
-          <a:bodyPr rtlCol="0" anchor="ctr"/>
-          <a:lstStyle/>
-          <a:p>
-            <a:pPr algn="ctr"/>
-          </a:p>
-        </p:txBody>
-      </p:sp>
-      <p:sp>
-        <p:nvSpPr>
           <p:cNvPr id="41" name="TextBox 40"/>
           <p:cNvSpPr txBox="1"/>
           <p:nvPr/>
         </p:nvSpPr>
         <p:spPr>
           <a:xfrm>
-            <a:off x="4616781" y="5332358"/>
+            <a:off x="4616750" y="5332358"/>
             <a:ext cx="2286000" cy="291904"/>
           </a:xfrm>
           <a:prstGeom prst="rect">
@@ -17682,7 +17390,7 @@
         <p:spPr>
           <a:xfrm>
             <a:off x="4114800" y="5687919"/>
-            <a:ext cx="73661" cy="128016"/>
+            <a:ext cx="73655" cy="128016"/>
           </a:xfrm>
           <a:prstGeom prst="rect">
             <a:avLst/>
@@ -17725,7 +17433,7 @@
         </p:nvSpPr>
         <p:spPr>
           <a:xfrm>
-            <a:off x="4279901" y="5624263"/>
+            <a:off x="4279895" y="5624263"/>
             <a:ext cx="2286000" cy="291904"/>
           </a:xfrm>
           <a:prstGeom prst="rect">
@@ -17988,7 +17696,7 @@
                 </a:solidFill>
                 <a:latin typeface="Helvetica Neue"/>
               </a:rPr>
-              <a:t>6 categories driving the bulk of your reach. Each averages 800+ views per post — proven audience.</a:t>
+              <a:t>8 categories driving the bulk of your reach. Each averages 800+ views per post — proven audience.</a:t>
             </a:r>
           </a:p>
         </p:txBody>
@@ -18342,7 +18050,7 @@
                 </a:solidFill>
                 <a:latin typeface="Georgia"/>
               </a:rPr>
-              <a:t>93,782</a:t>
+              <a:t>93,789</a:t>
             </a:r>
           </a:p>
         </p:txBody>
@@ -18410,7 +18118,7 @@
                 </a:solidFill>
                 <a:latin typeface="Helvetica Neue"/>
               </a:rPr>
-              <a:t>1,537 average views per post</a:t>
+              <a:t>1,538 average views per post</a:t>
             </a:r>
           </a:p>
         </p:txBody>
@@ -19378,7 +19086,7 @@
                 </a:solidFill>
                 <a:latin typeface="Georgia"/>
               </a:rPr>
-              <a:t>86,914</a:t>
+              <a:t>87,386</a:t>
             </a:r>
           </a:p>
         </p:txBody>
@@ -19412,7 +19120,7 @@
                 </a:solidFill>
                 <a:latin typeface="Helvetica Neue"/>
               </a:rPr>
-              <a:t>34 posts · 1,986 likes</a:t>
+              <a:t>34 posts · 1,992 likes</a:t>
             </a:r>
           </a:p>
         </p:txBody>
@@ -19446,7 +19154,7 @@
                 </a:solidFill>
                 <a:latin typeface="Helvetica Neue"/>
               </a:rPr>
-              <a:t>2,556 average views per post</a:t>
+              <a:t>2,570 average views per post</a:t>
             </a:r>
           </a:p>
         </p:txBody>
@@ -19758,7 +19466,7 @@
                 </a:solidFill>
                 <a:latin typeface="Helvetica Neue"/>
               </a:rPr>
-              <a:t>#2  ·  IG  ·  7,051 views</a:t>
+              <a:t>#2  ·  IG  ·  7,523 views</a:t>
             </a:r>
           </a:p>
         </p:txBody>
@@ -20414,7 +20122,7 @@
                 </a:solidFill>
                 <a:latin typeface="Georgia"/>
               </a:rPr>
-              <a:t>62,855</a:t>
+              <a:t>62,913</a:t>
             </a:r>
           </a:p>
         </p:txBody>
@@ -20448,7 +20156,7 @@
                 </a:solidFill>
                 <a:latin typeface="Helvetica Neue"/>
               </a:rPr>
-              <a:t>24 posts · 1,465 likes</a:t>
+              <a:t>24 posts · 1,466 likes</a:t>
             </a:r>
           </a:p>
         </p:txBody>
@@ -20482,7 +20190,7 @@
                 </a:solidFill>
                 <a:latin typeface="Helvetica Neue"/>
               </a:rPr>
-              <a:t>2,619 average views per post</a:t>
+              <a:t>2,621 average views per post</a:t>
             </a:r>
           </a:p>
         </p:txBody>
@@ -21450,7 +21158,7 @@
                 </a:solidFill>
                 <a:latin typeface="Georgia"/>
               </a:rPr>
-              <a:t>62,535</a:t>
+              <a:t>62,536</a:t>
             </a:r>
           </a:p>
         </p:txBody>
@@ -21484,7 +21192,7 @@
                 </a:solidFill>
                 <a:latin typeface="Helvetica Neue"/>
               </a:rPr>
-              <a:t>22 posts · 3,195 likes</a:t>
+              <a:t>22 posts · 3,198 likes</a:t>
             </a:r>
           </a:p>
         </p:txBody>
@@ -21518,7 +21226,7 @@
                 </a:solidFill>
                 <a:latin typeface="Helvetica Neue"/>
               </a:rPr>
-              <a:t>2,842 average views per post</a:t>
+              <a:t>2,843 average views per post</a:t>
             </a:r>
           </a:p>
         </p:txBody>
@@ -22262,7 +21970,7 @@
                 </a:solidFill>
                 <a:latin typeface="Georgia"/>
               </a:rPr>
-              <a:t>Downtown Development</a:t>
+              <a:t>Community &amp; Culture</a:t>
             </a:r>
           </a:p>
         </p:txBody>
@@ -22296,7 +22004,7 @@
                 </a:solidFill>
                 <a:latin typeface="Helvetica Neue"/>
               </a:rPr>
-              <a:t>Physical growth of Downey — Round One, Fun Box, Stonewood, YMCA, new businesses opening.</a:t>
+              <a:t>Local color, events, pageantry, personal growth, city life.</a:t>
             </a:r>
           </a:p>
         </p:txBody>
@@ -22326,11 +22034,11 @@
             <a:r>
               <a:rPr sz="900" b="1">
                 <a:solidFill>
-                  <a:srgbClr val="C9A227"/>
-                </a:solidFill>
-                <a:latin typeface="Helvetica Neue"/>
-              </a:rPr>
-              <a:t>AUDIENCE (theoretical): Local civic pride · Downey residents 30+</a:t>
+                  <a:srgbClr val="141833"/>
+                </a:solidFill>
+                <a:latin typeface="Helvetica Neue"/>
+              </a:rPr>
+              <a:t>AUDIENCE (theoretical): Local color · Broad, 30+</a:t>
             </a:r>
           </a:p>
         </p:txBody>
@@ -22394,7 +22102,7 @@
             <a:avLst/>
           </a:prstGeom>
           <a:solidFill>
-            <a:srgbClr val="C9A227"/>
+            <a:srgbClr val="141833"/>
           </a:solidFill>
           <a:ln>
             <a:noFill/>
@@ -22448,7 +22156,7 @@
             <a:r>
               <a:rPr sz="1100" b="1">
                 <a:solidFill>
-                  <a:srgbClr val="C9A227"/>
+                  <a:srgbClr val="141833"/>
                 </a:solidFill>
                 <a:latin typeface="Helvetica Neue"/>
               </a:rPr>
@@ -22486,7 +22194,7 @@
                 </a:solidFill>
                 <a:latin typeface="Georgia"/>
               </a:rPr>
-              <a:t>47,677</a:t>
+              <a:t>48,381</a:t>
             </a:r>
           </a:p>
         </p:txBody>
@@ -22520,7 +22228,7 @@
                 </a:solidFill>
                 <a:latin typeface="Helvetica Neue"/>
               </a:rPr>
-              <a:t>18 posts · 2,912 likes</a:t>
+              <a:t>56 posts · 958 likes</a:t>
             </a:r>
           </a:p>
         </p:txBody>
@@ -22554,7 +22262,7 @@
                 </a:solidFill>
                 <a:latin typeface="Helvetica Neue"/>
               </a:rPr>
-              <a:t>2,649 average views per post</a:t>
+              <a:t>864 average views per post</a:t>
             </a:r>
           </a:p>
         </p:txBody>
@@ -22584,7 +22292,7 @@
             <a:r>
               <a:rPr sz="1100" b="1">
                 <a:solidFill>
-                  <a:srgbClr val="C9A227"/>
+                  <a:srgbClr val="141833"/>
                 </a:solidFill>
                 <a:latin typeface="Helvetica Neue"/>
               </a:rPr>
@@ -22652,7 +22360,7 @@
             <a:avLst/>
           </a:prstGeom>
           <a:solidFill>
-            <a:srgbClr val="C9A227"/>
+            <a:srgbClr val="141833"/>
           </a:solidFill>
           <a:ln>
             <a:noFill/>
@@ -22706,11 +22414,11 @@
             <a:r>
               <a:rPr sz="1000" b="1">
                 <a:solidFill>
-                  <a:srgbClr val="C9A227"/>
-                </a:solidFill>
-                <a:latin typeface="Helvetica Neue"/>
-              </a:rPr>
-              <a:t>#1  ·  TT  ·  29,200 views</a:t>
+                  <a:srgbClr val="141833"/>
+                </a:solidFill>
+                <a:latin typeface="Helvetica Neue"/>
+              </a:rPr>
+              <a:t>#1  ·  IG  ·  3,679 views</a:t>
             </a:r>
           </a:p>
         </p:txBody>
@@ -22744,7 +22452,7 @@
                 </a:solidFill>
                 <a:latin typeface="Helvetica Neue"/>
               </a:rPr>
-              <a:t>Get ready! Round One is taking over the old Sears at Stonewood Mall. This massive 150,000 </a:t>
+              <a:t>Following an outburst, she was removed as a Chamber of Commerce ambassador and rejected fo</a:t>
             </a:r>
           </a:p>
         </p:txBody>
@@ -22808,7 +22516,7 @@
             <a:avLst/>
           </a:prstGeom>
           <a:solidFill>
-            <a:srgbClr val="C9A227"/>
+            <a:srgbClr val="141833"/>
           </a:solidFill>
           <a:ln>
             <a:noFill/>
@@ -22862,11 +22570,11 @@
             <a:r>
               <a:rPr sz="1000" b="1">
                 <a:solidFill>
-                  <a:srgbClr val="C9A227"/>
-                </a:solidFill>
-                <a:latin typeface="Helvetica Neue"/>
-              </a:rPr>
-              <a:t>#2  ·  IG  ·  4,455 views</a:t>
+                  <a:srgbClr val="141833"/>
+                </a:solidFill>
+                <a:latin typeface="Helvetica Neue"/>
+              </a:rPr>
+              <a:t>#2  ·  TT  ·  3,520 views</a:t>
             </a:r>
           </a:p>
         </p:txBody>
@@ -22900,7 +22608,7 @@
                 </a:solidFill>
                 <a:latin typeface="Helvetica Neue"/>
               </a:rPr>
-              <a:t>Round One is coming to Stonewood Mall, transforming the old Sears space! Get ready for a m</a:t>
+              <a:t>Downey is a built-out city, but Sacramento requires us to build 6,100 new homes. Local off</a:t>
             </a:r>
           </a:p>
         </p:txBody>
@@ -22964,7 +22672,7 @@
             <a:avLst/>
           </a:prstGeom>
           <a:solidFill>
-            <a:srgbClr val="C9A227"/>
+            <a:srgbClr val="141833"/>
           </a:solidFill>
           <a:ln>
             <a:noFill/>
@@ -23018,11 +22726,11 @@
             <a:r>
               <a:rPr sz="1000" b="1">
                 <a:solidFill>
-                  <a:srgbClr val="C9A227"/>
-                </a:solidFill>
-                <a:latin typeface="Helvetica Neue"/>
-              </a:rPr>
-              <a:t>#3  ·  IG  ·  2,390 views</a:t>
+                  <a:srgbClr val="141833"/>
+                </a:solidFill>
+                <a:latin typeface="Helvetica Neue"/>
+              </a:rPr>
+              <a:t>#3  ·  FB  ·  3,380 views</a:t>
             </a:r>
           </a:p>
         </p:txBody>
@@ -23056,7 +22764,7 @@
                 </a:solidFill>
                 <a:latin typeface="Helvetica Neue"/>
               </a:rPr>
-              <a:t>20 years later, this letter still resonates. It sparked the Downtown Improvement Associati</a:t>
+              <a:t>An emotional response to a Charlie Kirk &amp; LGBQT comment raises questions about a leader's </a:t>
             </a:r>
           </a:p>
         </p:txBody>
@@ -23130,7 +22838,7 @@
             <a:r>
               <a:rPr sz="1000" b="1">
                 <a:solidFill>
-                  <a:srgbClr val="C9A227"/>
+                  <a:srgbClr val="141833"/>
                 </a:solidFill>
                 <a:latin typeface="Helvetica Neue"/>
               </a:rPr>
@@ -23168,7 +22876,7 @@
                 </a:solidFill>
                 <a:latin typeface="Helvetica Neue"/>
               </a:rPr>
-              <a:t>Solid mid-tier. Worth continued investment. Test scaling to see if it holds.</a:t>
+              <a:t>Modest reach. Fine as filler between heavy hitters, not a headline lane.</a:t>
             </a:r>
           </a:p>
         </p:txBody>

--- a/SPONSOR_CONTENT_REPORT.pptx
+++ b/SPONSOR_CONTENT_REPORT.pptx
@@ -3327,7 +3327,7 @@
                 </a:solidFill>
                 <a:latin typeface="Helvetica Neue"/>
               </a:rPr>
-              <a:t>Reporting window: Jun 8 → 2026-09-16</a:t>
+              <a:t>Reporting window: Jun 8 → 2026-09-18</a:t>
             </a:r>
           </a:p>
         </p:txBody>
@@ -3817,7 +3817,7 @@
                 </a:solidFill>
                 <a:latin typeface="Helvetica Neue"/>
               </a:rPr>
-              <a:t>18 posts · 2,930 likes</a:t>
+              <a:t>18 posts · 2,940 likes</a:t>
             </a:r>
           </a:p>
         </p:txBody>
@@ -4819,7 +4819,7 @@
                 </a:solidFill>
                 <a:latin typeface="Georgia"/>
               </a:rPr>
-              <a:t>22,666</a:t>
+              <a:t>24,825</a:t>
             </a:r>
           </a:p>
         </p:txBody>
@@ -4853,7 +4853,7 @@
                 </a:solidFill>
                 <a:latin typeface="Helvetica Neue"/>
               </a:rPr>
-              <a:t>27 posts · 536 likes</a:t>
+              <a:t>28 posts · 583 likes</a:t>
             </a:r>
           </a:p>
         </p:txBody>
@@ -4887,7 +4887,7 @@
                 </a:solidFill>
                 <a:latin typeface="Helvetica Neue"/>
               </a:rPr>
-              <a:t>839 average views per post</a:t>
+              <a:t>887 average views per post</a:t>
             </a:r>
           </a:p>
         </p:txBody>
@@ -5043,7 +5043,7 @@
                 </a:solidFill>
                 <a:latin typeface="Helvetica Neue"/>
               </a:rPr>
-              <a:t>#1  ·  FB  ·  2,885 views</a:t>
+              <a:t>#1  ·  FB  ·  3,303 views</a:t>
             </a:r>
           </a:p>
         </p:txBody>
@@ -5077,7 +5077,7 @@
                 </a:solidFill>
                 <a:latin typeface="Helvetica Neue"/>
               </a:rPr>
-              <a:t>Don't be fooled by simple comparisons. Carrie Uva, a lifelong Democrat, has earned endorse</a:t>
+              <a:t>With a clear choice for Downey, Hector Sosa stands out. His campaign kickoff event was a t</a:t>
             </a:r>
           </a:p>
         </p:txBody>
@@ -5199,7 +5199,7 @@
                 </a:solidFill>
                 <a:latin typeface="Helvetica Neue"/>
               </a:rPr>
-              <a:t>#2  ·  FB  ·  2,564 views</a:t>
+              <a:t>#2  ·  FB  ·  2,999 views</a:t>
             </a:r>
           </a:p>
         </p:txBody>
@@ -5233,7 +5233,7 @@
                 </a:solidFill>
                 <a:latin typeface="Helvetica Neue"/>
               </a:rPr>
-              <a:t>With a clear choice for Downey, Hector Sosa stands out. His campaign kickoff event was a t</a:t>
+              <a:t>Don't be fooled by simple comparisons. Carrie Uva, a lifelong Democrat, has earned endorse</a:t>
             </a:r>
           </a:p>
         </p:txBody>
@@ -7021,7 +7021,7 @@
                 </a:solidFill>
                 <a:latin typeface="Helvetica Neue"/>
               </a:rPr>
-              <a:t>63,582 views · 83 posts · 766 avg</a:t>
+              <a:t>68,374 views · 88 posts · 777 avg</a:t>
             </a:r>
           </a:p>
         </p:txBody>
@@ -7103,7 +7103,7 @@
         <p:spPr>
           <a:xfrm>
             <a:off x="4206240" y="2720339"/>
-            <a:ext cx="737413" cy="274320"/>
+            <a:ext cx="685731" cy="274320"/>
           </a:xfrm>
           <a:prstGeom prst="rect">
             <a:avLst/>
@@ -7146,7 +7146,7 @@
         </p:nvSpPr>
         <p:spPr>
           <a:xfrm>
-            <a:off x="5035093" y="2651759"/>
+            <a:off x="4983411" y="2651759"/>
             <a:ext cx="2286000" cy="251460"/>
           </a:xfrm>
           <a:prstGeom prst="rect">
@@ -7180,7 +7180,7 @@
         </p:nvSpPr>
         <p:spPr>
           <a:xfrm>
-            <a:off x="5035093" y="2857499"/>
+            <a:off x="4983411" y="2857499"/>
             <a:ext cx="4572000" cy="251460"/>
           </a:xfrm>
           <a:prstGeom prst="rect">
@@ -7249,7 +7249,7 @@
         <p:spPr>
           <a:xfrm>
             <a:off x="4206240" y="3223260"/>
-            <a:ext cx="587728" cy="274320"/>
+            <a:ext cx="546537" cy="274320"/>
           </a:xfrm>
           <a:prstGeom prst="rect">
             <a:avLst/>
@@ -7292,7 +7292,7 @@
         </p:nvSpPr>
         <p:spPr>
           <a:xfrm>
-            <a:off x="4885408" y="3154679"/>
+            <a:off x="4844217" y="3154679"/>
             <a:ext cx="2286000" cy="251460"/>
           </a:xfrm>
           <a:prstGeom prst="rect">
@@ -7326,7 +7326,7 @@
         </p:nvSpPr>
         <p:spPr>
           <a:xfrm>
-            <a:off x="4885408" y="3360420"/>
+            <a:off x="4844217" y="3360420"/>
             <a:ext cx="4572000" cy="251460"/>
           </a:xfrm>
           <a:prstGeom prst="rect">
@@ -7735,7 +7735,7 @@
                 </a:solidFill>
                 <a:latin typeface="Georgia"/>
               </a:rPr>
-              <a:t>63,582</a:t>
+              <a:t>68,374</a:t>
             </a:r>
           </a:p>
         </p:txBody>
@@ -7769,7 +7769,7 @@
                 </a:solidFill>
                 <a:latin typeface="Helvetica Neue"/>
               </a:rPr>
-              <a:t>83 posts · 1,428 likes</a:t>
+              <a:t>88 posts · 1,505 likes</a:t>
             </a:r>
           </a:p>
         </p:txBody>
@@ -7803,7 +7803,7 @@
                 </a:solidFill>
                 <a:latin typeface="Helvetica Neue"/>
               </a:rPr>
-              <a:t>766 average views per post</a:t>
+              <a:t>777 average views per post</a:t>
             </a:r>
           </a:p>
         </p:txBody>
@@ -7959,7 +7959,7 @@
                 </a:solidFill>
                 <a:latin typeface="Helvetica Neue"/>
               </a:rPr>
-              <a:t>#1  ·  FB  ·  10,958 views</a:t>
+              <a:t>#1  ·  FB  ·  11,517 views</a:t>
             </a:r>
           </a:p>
         </p:txBody>
@@ -11203,7 +11203,7 @@
                 </a:solidFill>
                 <a:latin typeface="Georgia"/>
               </a:rPr>
-              <a:t>93,789 views</a:t>
+              <a:t>93,797 views</a:t>
             </a:r>
           </a:p>
         </p:txBody>
@@ -13899,7 +13899,7 @@
                 </a:solidFill>
                 <a:latin typeface="Helvetica Neue"/>
               </a:rPr>
-              <a:t>2,570 avg views/post   ·   34 posts   ·   87,386 total</a:t>
+              <a:t>2,573 avg views/post   ·   34 posts   ·   87,475 total</a:t>
             </a:r>
           </a:p>
         </p:txBody>
@@ -14191,7 +14191,7 @@
                 </a:solidFill>
                 <a:latin typeface="Helvetica Neue"/>
               </a:rPr>
-              <a:t>1,235 avg views/post   ·   185 posts   ·   228,531 total</a:t>
+              <a:t>1,245 avg views/post   ·   186 posts   ·   231,632 total</a:t>
             </a:r>
           </a:p>
         </p:txBody>
@@ -16110,7 +16110,7 @@
                 </a:solidFill>
                 <a:latin typeface="Helvetica Neue"/>
               </a:rPr>
-              <a:t>93,789 views · 61 posts</a:t>
+              <a:t>93,797 views · 61 posts</a:t>
             </a:r>
           </a:p>
         </p:txBody>
@@ -16158,7 +16158,7 @@
         <p:spPr>
           <a:xfrm>
             <a:off x="4114800" y="2476968"/>
-            <a:ext cx="5793420" cy="128016"/>
+            <a:ext cx="5798826" cy="128016"/>
           </a:xfrm>
           <a:prstGeom prst="rect">
             <a:avLst/>
@@ -16201,7 +16201,7 @@
         </p:nvSpPr>
         <p:spPr>
           <a:xfrm>
-            <a:off x="9999660" y="2413312"/>
+            <a:off x="10005066" y="2413312"/>
             <a:ext cx="2286000" cy="291904"/>
           </a:xfrm>
           <a:prstGeom prst="rect">
@@ -16222,7 +16222,7 @@
                 </a:solidFill>
                 <a:latin typeface="Helvetica Neue"/>
               </a:rPr>
-              <a:t>87,386 views · 34 posts</a:t>
+              <a:t>87,475 views · 34 posts</a:t>
             </a:r>
           </a:p>
         </p:txBody>
@@ -16270,7 +16270,7 @@
         <p:spPr>
           <a:xfrm>
             <a:off x="4114800" y="2768873"/>
-            <a:ext cx="5330933" cy="128016"/>
+            <a:ext cx="5767802" cy="128016"/>
           </a:xfrm>
           <a:prstGeom prst="rect">
             <a:avLst/>
@@ -16313,7 +16313,7 @@
         </p:nvSpPr>
         <p:spPr>
           <a:xfrm>
-            <a:off x="9537173" y="2705217"/>
+            <a:off x="9974042" y="2705217"/>
             <a:ext cx="2286000" cy="291904"/>
           </a:xfrm>
           <a:prstGeom prst="rect">
@@ -16334,7 +16334,7 @@
                 </a:solidFill>
                 <a:latin typeface="Helvetica Neue"/>
               </a:rPr>
-              <a:t>80,410 views · 147 posts</a:t>
+              <a:t>87,007 views · 154 posts</a:t>
             </a:r>
           </a:p>
         </p:txBody>
@@ -16382,7 +16382,7 @@
         <p:spPr>
           <a:xfrm>
             <a:off x="4114800" y="3060778"/>
-            <a:ext cx="4215289" cy="128016"/>
+            <a:ext cx="4532597" cy="128016"/>
           </a:xfrm>
           <a:prstGeom prst="rect">
             <a:avLst/>
@@ -16425,7 +16425,7 @@
         </p:nvSpPr>
         <p:spPr>
           <a:xfrm>
-            <a:off x="8421529" y="2997121"/>
+            <a:off x="8738837" y="2997121"/>
             <a:ext cx="2286000" cy="291904"/>
           </a:xfrm>
           <a:prstGeom prst="rect">
@@ -16446,7 +16446,7 @@
                 </a:solidFill>
                 <a:latin typeface="Helvetica Neue"/>
               </a:rPr>
-              <a:t>63,582 views · 83 posts</a:t>
+              <a:t>68,374 views · 88 posts</a:t>
             </a:r>
           </a:p>
         </p:txBody>
@@ -16494,7 +16494,7 @@
         <p:spPr>
           <a:xfrm>
             <a:off x="4114800" y="3352682"/>
-            <a:ext cx="4170936" cy="128016"/>
+            <a:ext cx="4172503" cy="128016"/>
           </a:xfrm>
           <a:prstGeom prst="rect">
             <a:avLst/>
@@ -16537,7 +16537,7 @@
         </p:nvSpPr>
         <p:spPr>
           <a:xfrm>
-            <a:off x="8377176" y="3289026"/>
+            <a:off x="8378743" y="3289026"/>
             <a:ext cx="2286000" cy="291904"/>
           </a:xfrm>
           <a:prstGeom prst="rect">
@@ -16558,7 +16558,7 @@
                 </a:solidFill>
                 <a:latin typeface="Helvetica Neue"/>
               </a:rPr>
-              <a:t>62,913 views · 24 posts</a:t>
+              <a:t>62,942 views · 24 posts</a:t>
             </a:r>
           </a:p>
         </p:txBody>
@@ -16606,7 +16606,7 @@
         <p:spPr>
           <a:xfrm>
             <a:off x="4114800" y="3644587"/>
-            <a:ext cx="4145942" cy="128016"/>
+            <a:ext cx="4145589" cy="128016"/>
           </a:xfrm>
           <a:prstGeom prst="rect">
             <a:avLst/>
@@ -16649,7 +16649,7 @@
         </p:nvSpPr>
         <p:spPr>
           <a:xfrm>
-            <a:off x="8352182" y="3580931"/>
+            <a:off x="8351829" y="3580931"/>
             <a:ext cx="2286000" cy="291904"/>
           </a:xfrm>
           <a:prstGeom prst="rect">
@@ -16718,7 +16718,7 @@
         <p:spPr>
           <a:xfrm>
             <a:off x="4114800" y="3936491"/>
-            <a:ext cx="3207510" cy="128016"/>
+            <a:ext cx="3269152" cy="128016"/>
           </a:xfrm>
           <a:prstGeom prst="rect">
             <a:avLst/>
@@ -16761,7 +16761,7 @@
         </p:nvSpPr>
         <p:spPr>
           <a:xfrm>
-            <a:off x="7413750" y="3872835"/>
+            <a:off x="7475392" y="3872835"/>
             <a:ext cx="2286000" cy="291904"/>
           </a:xfrm>
           <a:prstGeom prst="rect">
@@ -16782,7 +16782,7 @@
                 </a:solidFill>
                 <a:latin typeface="Helvetica Neue"/>
               </a:rPr>
-              <a:t>48,381 views · 56 posts</a:t>
+              <a:t>49,315 views · 56 posts</a:t>
             </a:r>
           </a:p>
         </p:txBody>
@@ -16830,7 +16830,7 @@
         <p:spPr>
           <a:xfrm>
             <a:off x="4114800" y="4228396"/>
-            <a:ext cx="3160837" cy="128016"/>
+            <a:ext cx="3160567" cy="128016"/>
           </a:xfrm>
           <a:prstGeom prst="rect">
             <a:avLst/>
@@ -16873,7 +16873,7 @@
         </p:nvSpPr>
         <p:spPr>
           <a:xfrm>
-            <a:off x="7367077" y="4164740"/>
+            <a:off x="7366807" y="4164740"/>
             <a:ext cx="2286000" cy="291904"/>
           </a:xfrm>
           <a:prstGeom prst="rect">
@@ -16942,7 +16942,7 @@
         <p:spPr>
           <a:xfrm>
             <a:off x="4114800" y="4520301"/>
-            <a:ext cx="1502685" cy="128016"/>
+            <a:ext cx="1645680" cy="128016"/>
           </a:xfrm>
           <a:prstGeom prst="rect">
             <a:avLst/>
@@ -16985,7 +16985,7 @@
         </p:nvSpPr>
         <p:spPr>
           <a:xfrm>
-            <a:off x="5708925" y="4456644"/>
+            <a:off x="5851920" y="4456644"/>
             <a:ext cx="2286000" cy="291904"/>
           </a:xfrm>
           <a:prstGeom prst="rect">
@@ -17006,7 +17006,7 @@
                 </a:solidFill>
                 <a:latin typeface="Helvetica Neue"/>
               </a:rPr>
-              <a:t>22,666 views · 27 posts</a:t>
+              <a:t>24,825 views · 28 posts</a:t>
             </a:r>
           </a:p>
         </p:txBody>
@@ -17054,7 +17054,7 @@
         <p:spPr>
           <a:xfrm>
             <a:off x="4114800" y="4812205"/>
-            <a:ext cx="546883" cy="128016"/>
+            <a:ext cx="546836" cy="128016"/>
           </a:xfrm>
           <a:prstGeom prst="rect">
             <a:avLst/>
@@ -17097,7 +17097,7 @@
         </p:nvSpPr>
         <p:spPr>
           <a:xfrm>
-            <a:off x="4753123" y="4748549"/>
+            <a:off x="4753076" y="4748549"/>
             <a:ext cx="2286000" cy="291904"/>
           </a:xfrm>
           <a:prstGeom prst="rect">
@@ -17166,7 +17166,7 @@
         <p:spPr>
           <a:xfrm>
             <a:off x="4114800" y="5104110"/>
-            <a:ext cx="515060" cy="128016"/>
+            <a:ext cx="515016" cy="128016"/>
           </a:xfrm>
           <a:prstGeom prst="rect">
             <a:avLst/>
@@ -17209,7 +17209,7 @@
         </p:nvSpPr>
         <p:spPr>
           <a:xfrm>
-            <a:off x="4721300" y="5040454"/>
+            <a:off x="4721256" y="5040454"/>
             <a:ext cx="2286000" cy="291904"/>
           </a:xfrm>
           <a:prstGeom prst="rect">
@@ -17278,7 +17278,7 @@
         <p:spPr>
           <a:xfrm>
             <a:off x="4114800" y="5396015"/>
-            <a:ext cx="410510" cy="128016"/>
+            <a:ext cx="410475" cy="128016"/>
           </a:xfrm>
           <a:prstGeom prst="rect">
             <a:avLst/>
@@ -17321,7 +17321,7 @@
         </p:nvSpPr>
         <p:spPr>
           <a:xfrm>
-            <a:off x="4616750" y="5332358"/>
+            <a:off x="4616715" y="5332358"/>
             <a:ext cx="2286000" cy="291904"/>
           </a:xfrm>
           <a:prstGeom prst="rect">
@@ -17390,7 +17390,7 @@
         <p:spPr>
           <a:xfrm>
             <a:off x="4114800" y="5687919"/>
-            <a:ext cx="73655" cy="128016"/>
+            <a:ext cx="73649" cy="128016"/>
           </a:xfrm>
           <a:prstGeom prst="rect">
             <a:avLst/>
@@ -17433,7 +17433,7 @@
         </p:nvSpPr>
         <p:spPr>
           <a:xfrm>
-            <a:off x="4279895" y="5624263"/>
+            <a:off x="4279889" y="5624263"/>
             <a:ext cx="2286000" cy="291904"/>
           </a:xfrm>
           <a:prstGeom prst="rect">
@@ -18050,7 +18050,7 @@
                 </a:solidFill>
                 <a:latin typeface="Georgia"/>
               </a:rPr>
-              <a:t>93,789</a:t>
+              <a:t>93,797</a:t>
             </a:r>
           </a:p>
         </p:txBody>
@@ -19086,7 +19086,7 @@
                 </a:solidFill>
                 <a:latin typeface="Georgia"/>
               </a:rPr>
-              <a:t>87,386</a:t>
+              <a:t>87,475</a:t>
             </a:r>
           </a:p>
         </p:txBody>
@@ -19120,7 +19120,7 @@
                 </a:solidFill>
                 <a:latin typeface="Helvetica Neue"/>
               </a:rPr>
-              <a:t>34 posts · 1,992 likes</a:t>
+              <a:t>34 posts · 1,994 likes</a:t>
             </a:r>
           </a:p>
         </p:txBody>
@@ -19154,7 +19154,7 @@
                 </a:solidFill>
                 <a:latin typeface="Helvetica Neue"/>
               </a:rPr>
-              <a:t>2,570 average views per post</a:t>
+              <a:t>2,573 average views per post</a:t>
             </a:r>
           </a:p>
         </p:txBody>
@@ -19466,7 +19466,7 @@
                 </a:solidFill>
                 <a:latin typeface="Helvetica Neue"/>
               </a:rPr>
-              <a:t>#2  ·  IG  ·  7,523 views</a:t>
+              <a:t>#2  ·  IG  ·  7,612 views</a:t>
             </a:r>
           </a:p>
         </p:txBody>
@@ -20122,7 +20122,7 @@
                 </a:solidFill>
                 <a:latin typeface="Georgia"/>
               </a:rPr>
-              <a:t>62,913</a:t>
+              <a:t>62,942</a:t>
             </a:r>
           </a:p>
         </p:txBody>
@@ -20190,7 +20190,7 @@
                 </a:solidFill>
                 <a:latin typeface="Helvetica Neue"/>
               </a:rPr>
-              <a:t>2,621 average views per post</a:t>
+              <a:t>2,623 average views per post</a:t>
             </a:r>
           </a:p>
         </p:txBody>
@@ -22194,7 +22194,7 @@
                 </a:solidFill>
                 <a:latin typeface="Georgia"/>
               </a:rPr>
-              <a:t>48,381</a:t>
+              <a:t>49,315</a:t>
             </a:r>
           </a:p>
         </p:txBody>
@@ -22228,7 +22228,7 @@
                 </a:solidFill>
                 <a:latin typeface="Helvetica Neue"/>
               </a:rPr>
-              <a:t>56 posts · 958 likes</a:t>
+              <a:t>56 posts · 968 likes</a:t>
             </a:r>
           </a:p>
         </p:txBody>
@@ -22262,7 +22262,7 @@
                 </a:solidFill>
                 <a:latin typeface="Helvetica Neue"/>
               </a:rPr>
-              <a:t>864 average views per post</a:t>
+              <a:t>881 average views per post</a:t>
             </a:r>
           </a:p>
         </p:txBody>
@@ -22418,7 +22418,7 @@
                 </a:solidFill>
                 <a:latin typeface="Helvetica Neue"/>
               </a:rPr>
-              <a:t>#1  ·  IG  ·  3,679 views</a:t>
+              <a:t>#1  ·  FB  ·  4,164 views</a:t>
             </a:r>
           </a:p>
         </p:txBody>
@@ -22452,7 +22452,7 @@
                 </a:solidFill>
                 <a:latin typeface="Helvetica Neue"/>
               </a:rPr>
-              <a:t>Following an outburst, she was removed as a Chamber of Commerce ambassador and rejected fo</a:t>
+              <a:t>An emotional response to a Charlie Kirk &amp; LGBQT comment raises questions about a leader's </a:t>
             </a:r>
           </a:p>
         </p:txBody>
@@ -22574,7 +22574,7 @@
                 </a:solidFill>
                 <a:latin typeface="Helvetica Neue"/>
               </a:rPr>
-              <a:t>#2  ·  TT  ·  3,520 views</a:t>
+              <a:t>#2  ·  IG  ·  3,793 views</a:t>
             </a:r>
           </a:p>
         </p:txBody>
@@ -22608,7 +22608,7 @@
                 </a:solidFill>
                 <a:latin typeface="Helvetica Neue"/>
               </a:rPr>
-              <a:t>Downey is a built-out city, but Sacramento requires us to build 6,100 new homes. Local off</a:t>
+              <a:t>Following an outburst, she was removed as a Chamber of Commerce ambassador and rejected fo</a:t>
             </a:r>
           </a:p>
         </p:txBody>
@@ -22730,7 +22730,7 @@
                 </a:solidFill>
                 <a:latin typeface="Helvetica Neue"/>
               </a:rPr>
-              <a:t>#3  ·  FB  ·  3,380 views</a:t>
+              <a:t>#3  ·  TT  ·  3,520 views</a:t>
             </a:r>
           </a:p>
         </p:txBody>
@@ -22764,7 +22764,7 @@
                 </a:solidFill>
                 <a:latin typeface="Helvetica Neue"/>
               </a:rPr>
-              <a:t>An emotional response to a Charlie Kirk &amp; LGBQT comment raises questions about a leader's </a:t>
+              <a:t>Downey is a built-out city, but Sacramento requires us to build 6,100 new homes. Local off</a:t>
             </a:r>
           </a:p>
         </p:txBody>

--- a/SPONSOR_CONTENT_REPORT.pptx
+++ b/SPONSOR_CONTENT_REPORT.pptx
@@ -3327,7 +3327,7 @@
                 </a:solidFill>
                 <a:latin typeface="Helvetica Neue"/>
               </a:rPr>
-              <a:t>Reporting window: Jun 8 → 2026-09-18</a:t>
+              <a:t>Reporting window: Jun 8 → 2026-09-21</a:t>
             </a:r>
           </a:p>
         </p:txBody>
@@ -3817,7 +3817,7 @@
                 </a:solidFill>
                 <a:latin typeface="Helvetica Neue"/>
               </a:rPr>
-              <a:t>18 posts · 2,940 likes</a:t>
+              <a:t>18 posts · 2,941 likes</a:t>
             </a:r>
           </a:p>
         </p:txBody>
@@ -4819,7 +4819,7 @@
                 </a:solidFill>
                 <a:latin typeface="Georgia"/>
               </a:rPr>
-              <a:t>24,825</a:t>
+              <a:t>26,654</a:t>
             </a:r>
           </a:p>
         </p:txBody>
@@ -4853,7 +4853,7 @@
                 </a:solidFill>
                 <a:latin typeface="Helvetica Neue"/>
               </a:rPr>
-              <a:t>28 posts · 583 likes</a:t>
+              <a:t>30 posts · 602 likes</a:t>
             </a:r>
           </a:p>
         </p:txBody>
@@ -4887,7 +4887,7 @@
                 </a:solidFill>
                 <a:latin typeface="Helvetica Neue"/>
               </a:rPr>
-              <a:t>887 average views per post</a:t>
+              <a:t>888 average views per post</a:t>
             </a:r>
           </a:p>
         </p:txBody>
@@ -5043,7 +5043,7 @@
                 </a:solidFill>
                 <a:latin typeface="Helvetica Neue"/>
               </a:rPr>
-              <a:t>#1  ·  FB  ·  3,303 views</a:t>
+              <a:t>#1  ·  FB  ·  4,027 views</a:t>
             </a:r>
           </a:p>
         </p:txBody>
@@ -5199,7 +5199,7 @@
                 </a:solidFill>
                 <a:latin typeface="Helvetica Neue"/>
               </a:rPr>
-              <a:t>#2  ·  FB  ·  2,999 views</a:t>
+              <a:t>#2  ·  FB  ·  3,034 views</a:t>
             </a:r>
           </a:p>
         </p:txBody>
@@ -5855,7 +5855,7 @@
                 </a:solidFill>
                 <a:latin typeface="Georgia"/>
               </a:rPr>
-              <a:t>8,249</a:t>
+              <a:t>8,250</a:t>
             </a:r>
           </a:p>
         </p:txBody>
@@ -7021,7 +7021,7 @@
                 </a:solidFill>
                 <a:latin typeface="Helvetica Neue"/>
               </a:rPr>
-              <a:t>68,374 views · 88 posts · 777 avg</a:t>
+              <a:t>70,647 views · 89 posts · 794 avg</a:t>
             </a:r>
           </a:p>
         </p:txBody>
@@ -7103,7 +7103,7 @@
         <p:spPr>
           <a:xfrm>
             <a:off x="4206240" y="2720339"/>
-            <a:ext cx="685731" cy="274320"/>
+            <a:ext cx="663669" cy="274320"/>
           </a:xfrm>
           <a:prstGeom prst="rect">
             <a:avLst/>
@@ -7146,7 +7146,7 @@
         </p:nvSpPr>
         <p:spPr>
           <a:xfrm>
-            <a:off x="4983411" y="2651759"/>
+            <a:off x="4961349" y="2651759"/>
             <a:ext cx="2286000" cy="251460"/>
           </a:xfrm>
           <a:prstGeom prst="rect">
@@ -7180,7 +7180,7 @@
         </p:nvSpPr>
         <p:spPr>
           <a:xfrm>
-            <a:off x="4983411" y="2857499"/>
+            <a:off x="4961349" y="2857499"/>
             <a:ext cx="4572000" cy="251460"/>
           </a:xfrm>
           <a:prstGeom prst="rect">
@@ -7249,7 +7249,7 @@
         <p:spPr>
           <a:xfrm>
             <a:off x="4206240" y="3223260"/>
-            <a:ext cx="546537" cy="274320"/>
+            <a:ext cx="528953" cy="274320"/>
           </a:xfrm>
           <a:prstGeom prst="rect">
             <a:avLst/>
@@ -7292,7 +7292,7 @@
         </p:nvSpPr>
         <p:spPr>
           <a:xfrm>
-            <a:off x="4844217" y="3154679"/>
+            <a:off x="4826633" y="3154679"/>
             <a:ext cx="2286000" cy="251460"/>
           </a:xfrm>
           <a:prstGeom prst="rect">
@@ -7326,7 +7326,7 @@
         </p:nvSpPr>
         <p:spPr>
           <a:xfrm>
-            <a:off x="4844217" y="3360420"/>
+            <a:off x="4826633" y="3360420"/>
             <a:ext cx="4572000" cy="251460"/>
           </a:xfrm>
           <a:prstGeom prst="rect">
@@ -7735,7 +7735,7 @@
                 </a:solidFill>
                 <a:latin typeface="Georgia"/>
               </a:rPr>
-              <a:t>68,374</a:t>
+              <a:t>70,647</a:t>
             </a:r>
           </a:p>
         </p:txBody>
@@ -7769,7 +7769,7 @@
                 </a:solidFill>
                 <a:latin typeface="Helvetica Neue"/>
               </a:rPr>
-              <a:t>88 posts · 1,505 likes</a:t>
+              <a:t>89 posts · 1,535 likes</a:t>
             </a:r>
           </a:p>
         </p:txBody>
@@ -7803,7 +7803,7 @@
                 </a:solidFill>
                 <a:latin typeface="Helvetica Neue"/>
               </a:rPr>
-              <a:t>777 average views per post</a:t>
+              <a:t>794 average views per post</a:t>
             </a:r>
           </a:p>
         </p:txBody>
@@ -7959,7 +7959,7 @@
                 </a:solidFill>
                 <a:latin typeface="Helvetica Neue"/>
               </a:rPr>
-              <a:t>#1  ·  FB  ·  11,517 views</a:t>
+              <a:t>#1  ·  FB  ·  11,662 views</a:t>
             </a:r>
           </a:p>
         </p:txBody>
@@ -11203,7 +11203,7 @@
                 </a:solidFill>
                 <a:latin typeface="Georgia"/>
               </a:rPr>
-              <a:t>93,797 views</a:t>
+              <a:t>93,815 views</a:t>
             </a:r>
           </a:p>
         </p:txBody>
@@ -13899,7 +13899,7 @@
                 </a:solidFill>
                 <a:latin typeface="Helvetica Neue"/>
               </a:rPr>
-              <a:t>2,573 avg views/post   ·   34 posts   ·   87,475 total</a:t>
+              <a:t>2,575 avg views/post   ·   34 posts   ·   87,538 total</a:t>
             </a:r>
           </a:p>
         </p:txBody>
@@ -14191,7 +14191,7 @@
                 </a:solidFill>
                 <a:latin typeface="Helvetica Neue"/>
               </a:rPr>
-              <a:t>1,245 avg views/post   ·   186 posts   ·   231,632 total</a:t>
+              <a:t>1,243 avg views/post   ·   189 posts   ·   234,977 total</a:t>
             </a:r>
           </a:p>
         </p:txBody>
@@ -16110,7 +16110,7 @@
                 </a:solidFill>
                 <a:latin typeface="Helvetica Neue"/>
               </a:rPr>
-              <a:t>93,797 views · 61 posts</a:t>
+              <a:t>93,815 views · 61 posts</a:t>
             </a:r>
           </a:p>
         </p:txBody>
@@ -16144,7 +16144,7 @@
                 </a:solidFill>
                 <a:latin typeface="Helvetica Neue"/>
               </a:rPr>
-              <a:t>Truth &amp; Scandal Reporting</a:t>
+              <a:t>Other / Uncategorized</a:t>
             </a:r>
           </a:p>
         </p:txBody>
@@ -16158,7 +16158,119 @@
         <p:spPr>
           <a:xfrm>
             <a:off x="4114800" y="2476968"/>
-            <a:ext cx="5798826" cy="128016"/>
+            <a:ext cx="5965465" cy="128016"/>
+          </a:xfrm>
+          <a:prstGeom prst="rect">
+            <a:avLst/>
+          </a:prstGeom>
+          <a:solidFill>
+            <a:srgbClr val="6B7082"/>
+          </a:solidFill>
+          <a:ln>
+            <a:noFill/>
+          </a:ln>
+          <a:effectLst/>
+        </p:spPr>
+        <p:style>
+          <a:lnRef idx="1">
+            <a:schemeClr val="accent1"/>
+          </a:lnRef>
+          <a:fillRef idx="3">
+            <a:schemeClr val="accent1"/>
+          </a:fillRef>
+          <a:effectRef idx="2">
+            <a:schemeClr val="accent1"/>
+          </a:effectRef>
+          <a:fontRef idx="minor">
+            <a:schemeClr val="lt1"/>
+          </a:fontRef>
+        </p:style>
+        <p:txBody>
+          <a:bodyPr rtlCol="0" anchor="ctr"/>
+          <a:lstStyle/>
+          <a:p>
+            <a:pPr algn="ctr"/>
+          </a:p>
+        </p:txBody>
+      </p:sp>
+      <p:sp>
+        <p:nvSpPr>
+          <p:cNvPr id="11" name="TextBox 10"/>
+          <p:cNvSpPr txBox="1"/>
+          <p:nvPr/>
+        </p:nvSpPr>
+        <p:spPr>
+          <a:xfrm>
+            <a:off x="10171705" y="2413312"/>
+            <a:ext cx="2286000" cy="291904"/>
+          </a:xfrm>
+          <a:prstGeom prst="rect">
+            <a:avLst/>
+          </a:prstGeom>
+          <a:noFill/>
+        </p:spPr>
+        <p:txBody>
+          <a:bodyPr wrap="square" lIns="0" rIns="0" tIns="0" bIns="0">
+            <a:spAutoFit/>
+          </a:bodyPr>
+          <a:lstStyle/>
+          <a:p>
+            <a:r>
+              <a:rPr sz="900" b="0">
+                <a:solidFill>
+                  <a:srgbClr val="6B7082"/>
+                </a:solidFill>
+                <a:latin typeface="Helvetica Neue"/>
+              </a:rPr>
+              <a:t>90,006 views · 156 posts</a:t>
+            </a:r>
+          </a:p>
+        </p:txBody>
+      </p:sp>
+      <p:sp>
+        <p:nvSpPr>
+          <p:cNvPr id="12" name="TextBox 11"/>
+          <p:cNvSpPr txBox="1"/>
+          <p:nvPr/>
+        </p:nvSpPr>
+        <p:spPr>
+          <a:xfrm>
+            <a:off x="731520" y="2705217"/>
+            <a:ext cx="3200400" cy="291904"/>
+          </a:xfrm>
+          <a:prstGeom prst="rect">
+            <a:avLst/>
+          </a:prstGeom>
+          <a:noFill/>
+        </p:spPr>
+        <p:txBody>
+          <a:bodyPr wrap="square" lIns="0" rIns="0" tIns="0" bIns="0">
+            <a:spAutoFit/>
+          </a:bodyPr>
+          <a:lstStyle/>
+          <a:p>
+            <a:r>
+              <a:rPr sz="1100" b="1">
+                <a:solidFill>
+                  <a:srgbClr val="141833"/>
+                </a:solidFill>
+                <a:latin typeface="Helvetica Neue"/>
+              </a:rPr>
+              <a:t>Truth &amp; Scandal Reporting</a:t>
+            </a:r>
+          </a:p>
+        </p:txBody>
+      </p:sp>
+      <p:sp>
+        <p:nvSpPr>
+          <p:cNvPr id="13" name="Rectangle 12"/>
+          <p:cNvSpPr/>
+          <p:nvPr/>
+        </p:nvSpPr>
+        <p:spPr>
+          <a:xfrm>
+            <a:off x="4114800" y="2768873"/>
+            <a:ext cx="5801889" cy="128016"/>
           </a:xfrm>
           <a:prstGeom prst="rect">
             <a:avLst/>
@@ -16195,13 +16307,13 @@
       </p:sp>
       <p:sp>
         <p:nvSpPr>
-          <p:cNvPr id="11" name="TextBox 10"/>
-          <p:cNvSpPr txBox="1"/>
-          <p:nvPr/>
-        </p:nvSpPr>
-        <p:spPr>
-          <a:xfrm>
-            <a:off x="10005066" y="2413312"/>
+          <p:cNvPr id="14" name="TextBox 13"/>
+          <p:cNvSpPr txBox="1"/>
+          <p:nvPr/>
+        </p:nvSpPr>
+        <p:spPr>
+          <a:xfrm>
+            <a:off x="10008129" y="2705217"/>
             <a:ext cx="2286000" cy="291904"/>
           </a:xfrm>
           <a:prstGeom prst="rect">
@@ -16222,20 +16334,20 @@
                 </a:solidFill>
                 <a:latin typeface="Helvetica Neue"/>
               </a:rPr>
-              <a:t>87,475 views · 34 posts</a:t>
-            </a:r>
-          </a:p>
-        </p:txBody>
-      </p:sp>
-      <p:sp>
-        <p:nvSpPr>
-          <p:cNvPr id="12" name="TextBox 11"/>
-          <p:cNvSpPr txBox="1"/>
-          <p:nvPr/>
-        </p:nvSpPr>
-        <p:spPr>
-          <a:xfrm>
-            <a:off x="731520" y="2705217"/>
+              <a:t>87,538 views · 34 posts</a:t>
+            </a:r>
+          </a:p>
+        </p:txBody>
+      </p:sp>
+      <p:sp>
+        <p:nvSpPr>
+          <p:cNvPr id="15" name="TextBox 14"/>
+          <p:cNvSpPr txBox="1"/>
+          <p:nvPr/>
+        </p:nvSpPr>
+        <p:spPr>
+          <a:xfrm>
+            <a:off x="731520" y="2997121"/>
             <a:ext cx="3200400" cy="291904"/>
           </a:xfrm>
           <a:prstGeom prst="rect">
@@ -16256,21 +16368,133 @@
                 </a:solidFill>
                 <a:latin typeface="Helvetica Neue"/>
               </a:rPr>
-              <a:t>Other / Uncategorized</a:t>
-            </a:r>
-          </a:p>
-        </p:txBody>
-      </p:sp>
-      <p:sp>
-        <p:nvSpPr>
-          <p:cNvPr id="13" name="Rectangle 12"/>
+              <a:t>Elections &amp; Judicial</a:t>
+            </a:r>
+          </a:p>
+        </p:txBody>
+      </p:sp>
+      <p:sp>
+        <p:nvSpPr>
+          <p:cNvPr id="16" name="Rectangle 15"/>
           <p:cNvSpPr/>
           <p:nvPr/>
         </p:nvSpPr>
         <p:spPr>
           <a:xfrm>
-            <a:off x="4114800" y="2768873"/>
-            <a:ext cx="5767802" cy="128016"/>
+            <a:off x="4114800" y="3060778"/>
+            <a:ext cx="4682379" cy="128016"/>
+          </a:xfrm>
+          <a:prstGeom prst="rect">
+            <a:avLst/>
+          </a:prstGeom>
+          <a:solidFill>
+            <a:srgbClr val="2F3C7E"/>
+          </a:solidFill>
+          <a:ln>
+            <a:noFill/>
+          </a:ln>
+          <a:effectLst/>
+        </p:spPr>
+        <p:style>
+          <a:lnRef idx="1">
+            <a:schemeClr val="accent1"/>
+          </a:lnRef>
+          <a:fillRef idx="3">
+            <a:schemeClr val="accent1"/>
+          </a:fillRef>
+          <a:effectRef idx="2">
+            <a:schemeClr val="accent1"/>
+          </a:effectRef>
+          <a:fontRef idx="minor">
+            <a:schemeClr val="lt1"/>
+          </a:fontRef>
+        </p:style>
+        <p:txBody>
+          <a:bodyPr rtlCol="0" anchor="ctr"/>
+          <a:lstStyle/>
+          <a:p>
+            <a:pPr algn="ctr"/>
+          </a:p>
+        </p:txBody>
+      </p:sp>
+      <p:sp>
+        <p:nvSpPr>
+          <p:cNvPr id="17" name="TextBox 16"/>
+          <p:cNvSpPr txBox="1"/>
+          <p:nvPr/>
+        </p:nvSpPr>
+        <p:spPr>
+          <a:xfrm>
+            <a:off x="8888619" y="2997121"/>
+            <a:ext cx="2286000" cy="291904"/>
+          </a:xfrm>
+          <a:prstGeom prst="rect">
+            <a:avLst/>
+          </a:prstGeom>
+          <a:noFill/>
+        </p:spPr>
+        <p:txBody>
+          <a:bodyPr wrap="square" lIns="0" rIns="0" tIns="0" bIns="0">
+            <a:spAutoFit/>
+          </a:bodyPr>
+          <a:lstStyle/>
+          <a:p>
+            <a:r>
+              <a:rPr sz="900" b="0">
+                <a:solidFill>
+                  <a:srgbClr val="6B7082"/>
+                </a:solidFill>
+                <a:latin typeface="Helvetica Neue"/>
+              </a:rPr>
+              <a:t>70,647 views · 89 posts</a:t>
+            </a:r>
+          </a:p>
+        </p:txBody>
+      </p:sp>
+      <p:sp>
+        <p:nvSpPr>
+          <p:cNvPr id="18" name="TextBox 17"/>
+          <p:cNvSpPr txBox="1"/>
+          <p:nvPr/>
+        </p:nvSpPr>
+        <p:spPr>
+          <a:xfrm>
+            <a:off x="731520" y="3289026"/>
+            <a:ext cx="3200400" cy="291904"/>
+          </a:xfrm>
+          <a:prstGeom prst="rect">
+            <a:avLst/>
+          </a:prstGeom>
+          <a:noFill/>
+        </p:spPr>
+        <p:txBody>
+          <a:bodyPr wrap="square" lIns="0" rIns="0" tIns="0" bIns="0">
+            <a:spAutoFit/>
+          </a:bodyPr>
+          <a:lstStyle/>
+          <a:p>
+            <a:r>
+              <a:rPr sz="1100" b="1">
+                <a:solidFill>
+                  <a:srgbClr val="141833"/>
+                </a:solidFill>
+                <a:latin typeface="Helvetica Neue"/>
+              </a:rPr>
+              <a:t>FIFA / World Cup</a:t>
+            </a:r>
+          </a:p>
+        </p:txBody>
+      </p:sp>
+      <p:sp>
+        <p:nvSpPr>
+          <p:cNvPr id="19" name="Rectangle 18"/>
+          <p:cNvSpPr/>
+          <p:nvPr/>
+        </p:nvSpPr>
+        <p:spPr>
+          <a:xfrm>
+            <a:off x="4114800" y="3352682"/>
+            <a:ext cx="4203781" cy="128016"/>
           </a:xfrm>
           <a:prstGeom prst="rect">
             <a:avLst/>
@@ -16307,13 +16531,13 @@
       </p:sp>
       <p:sp>
         <p:nvSpPr>
-          <p:cNvPr id="14" name="TextBox 13"/>
-          <p:cNvSpPr txBox="1"/>
-          <p:nvPr/>
-        </p:nvSpPr>
-        <p:spPr>
-          <a:xfrm>
-            <a:off x="9974042" y="2705217"/>
+          <p:cNvPr id="20" name="TextBox 19"/>
+          <p:cNvSpPr txBox="1"/>
+          <p:nvPr/>
+        </p:nvSpPr>
+        <p:spPr>
+          <a:xfrm>
+            <a:off x="8410021" y="3289026"/>
             <a:ext cx="2286000" cy="291904"/>
           </a:xfrm>
           <a:prstGeom prst="rect">
@@ -16334,20 +16558,20 @@
                 </a:solidFill>
                 <a:latin typeface="Helvetica Neue"/>
               </a:rPr>
-              <a:t>87,007 views · 154 posts</a:t>
-            </a:r>
-          </a:p>
-        </p:txBody>
-      </p:sp>
-      <p:sp>
-        <p:nvSpPr>
-          <p:cNvPr id="15" name="TextBox 14"/>
-          <p:cNvSpPr txBox="1"/>
-          <p:nvPr/>
-        </p:nvSpPr>
-        <p:spPr>
-          <a:xfrm>
-            <a:off x="731520" y="2997121"/>
+              <a:t>63,426 views · 25 posts</a:t>
+            </a:r>
+          </a:p>
+        </p:txBody>
+      </p:sp>
+      <p:sp>
+        <p:nvSpPr>
+          <p:cNvPr id="21" name="TextBox 20"/>
+          <p:cNvSpPr txBox="1"/>
+          <p:nvPr/>
+        </p:nvSpPr>
+        <p:spPr>
+          <a:xfrm>
+            <a:off x="731520" y="3580931"/>
             <a:ext cx="3200400" cy="291904"/>
           </a:xfrm>
           <a:prstGeom prst="rect">
@@ -16368,21 +16592,693 @@
                 </a:solidFill>
                 <a:latin typeface="Helvetica Neue"/>
               </a:rPr>
-              <a:t>Elections &amp; Judicial</a:t>
-            </a:r>
-          </a:p>
-        </p:txBody>
-      </p:sp>
-      <p:sp>
-        <p:nvSpPr>
-          <p:cNvPr id="16" name="Rectangle 15"/>
+              <a:t>Military Service</a:t>
+            </a:r>
+          </a:p>
+        </p:txBody>
+      </p:sp>
+      <p:sp>
+        <p:nvSpPr>
+          <p:cNvPr id="22" name="Rectangle 21"/>
           <p:cNvSpPr/>
           <p:nvPr/>
         </p:nvSpPr>
         <p:spPr>
           <a:xfrm>
-            <a:off x="4114800" y="3060778"/>
-            <a:ext cx="4532597" cy="128016"/>
+            <a:off x="4114800" y="3644587"/>
+            <a:ext cx="4144793" cy="128016"/>
+          </a:xfrm>
+          <a:prstGeom prst="rect">
+            <a:avLst/>
+          </a:prstGeom>
+          <a:solidFill>
+            <a:srgbClr val="C9A227"/>
+          </a:solidFill>
+          <a:ln>
+            <a:noFill/>
+          </a:ln>
+          <a:effectLst/>
+        </p:spPr>
+        <p:style>
+          <a:lnRef idx="1">
+            <a:schemeClr val="accent1"/>
+          </a:lnRef>
+          <a:fillRef idx="3">
+            <a:schemeClr val="accent1"/>
+          </a:fillRef>
+          <a:effectRef idx="2">
+            <a:schemeClr val="accent1"/>
+          </a:effectRef>
+          <a:fontRef idx="minor">
+            <a:schemeClr val="lt1"/>
+          </a:fontRef>
+        </p:style>
+        <p:txBody>
+          <a:bodyPr rtlCol="0" anchor="ctr"/>
+          <a:lstStyle/>
+          <a:p>
+            <a:pPr algn="ctr"/>
+          </a:p>
+        </p:txBody>
+      </p:sp>
+      <p:sp>
+        <p:nvSpPr>
+          <p:cNvPr id="23" name="TextBox 22"/>
+          <p:cNvSpPr txBox="1"/>
+          <p:nvPr/>
+        </p:nvSpPr>
+        <p:spPr>
+          <a:xfrm>
+            <a:off x="8351033" y="3580931"/>
+            <a:ext cx="2286000" cy="291904"/>
+          </a:xfrm>
+          <a:prstGeom prst="rect">
+            <a:avLst/>
+          </a:prstGeom>
+          <a:noFill/>
+        </p:spPr>
+        <p:txBody>
+          <a:bodyPr wrap="square" lIns="0" rIns="0" tIns="0" bIns="0">
+            <a:spAutoFit/>
+          </a:bodyPr>
+          <a:lstStyle/>
+          <a:p>
+            <a:r>
+              <a:rPr sz="900" b="0">
+                <a:solidFill>
+                  <a:srgbClr val="6B7082"/>
+                </a:solidFill>
+                <a:latin typeface="Helvetica Neue"/>
+              </a:rPr>
+              <a:t>62,536 views · 22 posts</a:t>
+            </a:r>
+          </a:p>
+        </p:txBody>
+      </p:sp>
+      <p:sp>
+        <p:nvSpPr>
+          <p:cNvPr id="24" name="TextBox 23"/>
+          <p:cNvSpPr txBox="1"/>
+          <p:nvPr/>
+        </p:nvSpPr>
+        <p:spPr>
+          <a:xfrm>
+            <a:off x="731520" y="3872835"/>
+            <a:ext cx="3200400" cy="291904"/>
+          </a:xfrm>
+          <a:prstGeom prst="rect">
+            <a:avLst/>
+          </a:prstGeom>
+          <a:noFill/>
+        </p:spPr>
+        <p:txBody>
+          <a:bodyPr wrap="square" lIns="0" rIns="0" tIns="0" bIns="0">
+            <a:spAutoFit/>
+          </a:bodyPr>
+          <a:lstStyle/>
+          <a:p>
+            <a:r>
+              <a:rPr sz="1100" b="1">
+                <a:solidFill>
+                  <a:srgbClr val="141833"/>
+                </a:solidFill>
+                <a:latin typeface="Helvetica Neue"/>
+              </a:rPr>
+              <a:t>Community &amp; Culture</a:t>
+            </a:r>
+          </a:p>
+        </p:txBody>
+      </p:sp>
+      <p:sp>
+        <p:nvSpPr>
+          <p:cNvPr id="25" name="Rectangle 24"/>
+          <p:cNvSpPr/>
+          <p:nvPr/>
+        </p:nvSpPr>
+        <p:spPr>
+          <a:xfrm>
+            <a:off x="4114800" y="3936491"/>
+            <a:ext cx="3367744" cy="128016"/>
+          </a:xfrm>
+          <a:prstGeom prst="rect">
+            <a:avLst/>
+          </a:prstGeom>
+          <a:solidFill>
+            <a:srgbClr val="141833"/>
+          </a:solidFill>
+          <a:ln>
+            <a:noFill/>
+          </a:ln>
+          <a:effectLst/>
+        </p:spPr>
+        <p:style>
+          <a:lnRef idx="1">
+            <a:schemeClr val="accent1"/>
+          </a:lnRef>
+          <a:fillRef idx="3">
+            <a:schemeClr val="accent1"/>
+          </a:fillRef>
+          <a:effectRef idx="2">
+            <a:schemeClr val="accent1"/>
+          </a:effectRef>
+          <a:fontRef idx="minor">
+            <a:schemeClr val="lt1"/>
+          </a:fontRef>
+        </p:style>
+        <p:txBody>
+          <a:bodyPr rtlCol="0" anchor="ctr"/>
+          <a:lstStyle/>
+          <a:p>
+            <a:pPr algn="ctr"/>
+          </a:p>
+        </p:txBody>
+      </p:sp>
+      <p:sp>
+        <p:nvSpPr>
+          <p:cNvPr id="26" name="TextBox 25"/>
+          <p:cNvSpPr txBox="1"/>
+          <p:nvPr/>
+        </p:nvSpPr>
+        <p:spPr>
+          <a:xfrm>
+            <a:off x="7573984" y="3872835"/>
+            <a:ext cx="2286000" cy="291904"/>
+          </a:xfrm>
+          <a:prstGeom prst="rect">
+            <a:avLst/>
+          </a:prstGeom>
+          <a:noFill/>
+        </p:spPr>
+        <p:txBody>
+          <a:bodyPr wrap="square" lIns="0" rIns="0" tIns="0" bIns="0">
+            <a:spAutoFit/>
+          </a:bodyPr>
+          <a:lstStyle/>
+          <a:p>
+            <a:r>
+              <a:rPr sz="900" b="0">
+                <a:solidFill>
+                  <a:srgbClr val="6B7082"/>
+                </a:solidFill>
+                <a:latin typeface="Helvetica Neue"/>
+              </a:rPr>
+              <a:t>50,812 views · 57 posts</a:t>
+            </a:r>
+          </a:p>
+        </p:txBody>
+      </p:sp>
+      <p:sp>
+        <p:nvSpPr>
+          <p:cNvPr id="27" name="TextBox 26"/>
+          <p:cNvSpPr txBox="1"/>
+          <p:nvPr/>
+        </p:nvSpPr>
+        <p:spPr>
+          <a:xfrm>
+            <a:off x="731520" y="4164740"/>
+            <a:ext cx="3200400" cy="291904"/>
+          </a:xfrm>
+          <a:prstGeom prst="rect">
+            <a:avLst/>
+          </a:prstGeom>
+          <a:noFill/>
+        </p:spPr>
+        <p:txBody>
+          <a:bodyPr wrap="square" lIns="0" rIns="0" tIns="0" bIns="0">
+            <a:spAutoFit/>
+          </a:bodyPr>
+          <a:lstStyle/>
+          <a:p>
+            <a:r>
+              <a:rPr sz="1100" b="1">
+                <a:solidFill>
+                  <a:srgbClr val="141833"/>
+                </a:solidFill>
+                <a:latin typeface="Helvetica Neue"/>
+              </a:rPr>
+              <a:t>Downtown Development</a:t>
+            </a:r>
+          </a:p>
+        </p:txBody>
+      </p:sp>
+      <p:sp>
+        <p:nvSpPr>
+          <p:cNvPr id="28" name="Rectangle 27"/>
+          <p:cNvSpPr/>
+          <p:nvPr/>
+        </p:nvSpPr>
+        <p:spPr>
+          <a:xfrm>
+            <a:off x="4114800" y="4228396"/>
+            <a:ext cx="3159961" cy="128016"/>
+          </a:xfrm>
+          <a:prstGeom prst="rect">
+            <a:avLst/>
+          </a:prstGeom>
+          <a:solidFill>
+            <a:srgbClr val="C9A227"/>
+          </a:solidFill>
+          <a:ln>
+            <a:noFill/>
+          </a:ln>
+          <a:effectLst/>
+        </p:spPr>
+        <p:style>
+          <a:lnRef idx="1">
+            <a:schemeClr val="accent1"/>
+          </a:lnRef>
+          <a:fillRef idx="3">
+            <a:schemeClr val="accent1"/>
+          </a:fillRef>
+          <a:effectRef idx="2">
+            <a:schemeClr val="accent1"/>
+          </a:effectRef>
+          <a:fontRef idx="minor">
+            <a:schemeClr val="lt1"/>
+          </a:fontRef>
+        </p:style>
+        <p:txBody>
+          <a:bodyPr rtlCol="0" anchor="ctr"/>
+          <a:lstStyle/>
+          <a:p>
+            <a:pPr algn="ctr"/>
+          </a:p>
+        </p:txBody>
+      </p:sp>
+      <p:sp>
+        <p:nvSpPr>
+          <p:cNvPr id="29" name="TextBox 28"/>
+          <p:cNvSpPr txBox="1"/>
+          <p:nvPr/>
+        </p:nvSpPr>
+        <p:spPr>
+          <a:xfrm>
+            <a:off x="7366201" y="4164740"/>
+            <a:ext cx="2286000" cy="291904"/>
+          </a:xfrm>
+          <a:prstGeom prst="rect">
+            <a:avLst/>
+          </a:prstGeom>
+          <a:noFill/>
+        </p:spPr>
+        <p:txBody>
+          <a:bodyPr wrap="square" lIns="0" rIns="0" tIns="0" bIns="0">
+            <a:spAutoFit/>
+          </a:bodyPr>
+          <a:lstStyle/>
+          <a:p>
+            <a:r>
+              <a:rPr sz="900" b="0">
+                <a:solidFill>
+                  <a:srgbClr val="6B7082"/>
+                </a:solidFill>
+                <a:latin typeface="Helvetica Neue"/>
+              </a:rPr>
+              <a:t>47,677 views · 18 posts</a:t>
+            </a:r>
+          </a:p>
+        </p:txBody>
+      </p:sp>
+      <p:sp>
+        <p:nvSpPr>
+          <p:cNvPr id="30" name="TextBox 29"/>
+          <p:cNvSpPr txBox="1"/>
+          <p:nvPr/>
+        </p:nvSpPr>
+        <p:spPr>
+          <a:xfrm>
+            <a:off x="731520" y="4456644"/>
+            <a:ext cx="3200400" cy="291904"/>
+          </a:xfrm>
+          <a:prstGeom prst="rect">
+            <a:avLst/>
+          </a:prstGeom>
+          <a:noFill/>
+        </p:spPr>
+        <p:txBody>
+          <a:bodyPr wrap="square" lIns="0" rIns="0" tIns="0" bIns="0">
+            <a:spAutoFit/>
+          </a:bodyPr>
+          <a:lstStyle/>
+          <a:p>
+            <a:r>
+              <a:rPr sz="1100" b="1">
+                <a:solidFill>
+                  <a:srgbClr val="141833"/>
+                </a:solidFill>
+                <a:latin typeface="Helvetica Neue"/>
+              </a:rPr>
+              <a:t>Political Individual Highlights</a:t>
+            </a:r>
+          </a:p>
+        </p:txBody>
+      </p:sp>
+      <p:sp>
+        <p:nvSpPr>
+          <p:cNvPr id="31" name="Rectangle 30"/>
+          <p:cNvSpPr/>
+          <p:nvPr/>
+        </p:nvSpPr>
+        <p:spPr>
+          <a:xfrm>
+            <a:off x="4114800" y="4520301"/>
+            <a:ext cx="1766587" cy="128016"/>
+          </a:xfrm>
+          <a:prstGeom prst="rect">
+            <a:avLst/>
+          </a:prstGeom>
+          <a:solidFill>
+            <a:srgbClr val="2E86AB"/>
+          </a:solidFill>
+          <a:ln>
+            <a:noFill/>
+          </a:ln>
+          <a:effectLst/>
+        </p:spPr>
+        <p:style>
+          <a:lnRef idx="1">
+            <a:schemeClr val="accent1"/>
+          </a:lnRef>
+          <a:fillRef idx="3">
+            <a:schemeClr val="accent1"/>
+          </a:fillRef>
+          <a:effectRef idx="2">
+            <a:schemeClr val="accent1"/>
+          </a:effectRef>
+          <a:fontRef idx="minor">
+            <a:schemeClr val="lt1"/>
+          </a:fontRef>
+        </p:style>
+        <p:txBody>
+          <a:bodyPr rtlCol="0" anchor="ctr"/>
+          <a:lstStyle/>
+          <a:p>
+            <a:pPr algn="ctr"/>
+          </a:p>
+        </p:txBody>
+      </p:sp>
+      <p:sp>
+        <p:nvSpPr>
+          <p:cNvPr id="32" name="TextBox 31"/>
+          <p:cNvSpPr txBox="1"/>
+          <p:nvPr/>
+        </p:nvSpPr>
+        <p:spPr>
+          <a:xfrm>
+            <a:off x="5972827" y="4456644"/>
+            <a:ext cx="2286000" cy="291904"/>
+          </a:xfrm>
+          <a:prstGeom prst="rect">
+            <a:avLst/>
+          </a:prstGeom>
+          <a:noFill/>
+        </p:spPr>
+        <p:txBody>
+          <a:bodyPr wrap="square" lIns="0" rIns="0" tIns="0" bIns="0">
+            <a:spAutoFit/>
+          </a:bodyPr>
+          <a:lstStyle/>
+          <a:p>
+            <a:r>
+              <a:rPr sz="900" b="0">
+                <a:solidFill>
+                  <a:srgbClr val="6B7082"/>
+                </a:solidFill>
+                <a:latin typeface="Helvetica Neue"/>
+              </a:rPr>
+              <a:t>26,654 views · 30 posts</a:t>
+            </a:r>
+          </a:p>
+        </p:txBody>
+      </p:sp>
+      <p:sp>
+        <p:nvSpPr>
+          <p:cNvPr id="33" name="TextBox 32"/>
+          <p:cNvSpPr txBox="1"/>
+          <p:nvPr/>
+        </p:nvSpPr>
+        <p:spPr>
+          <a:xfrm>
+            <a:off x="731520" y="4748549"/>
+            <a:ext cx="3200400" cy="291904"/>
+          </a:xfrm>
+          <a:prstGeom prst="rect">
+            <a:avLst/>
+          </a:prstGeom>
+          <a:noFill/>
+        </p:spPr>
+        <p:txBody>
+          <a:bodyPr wrap="square" lIns="0" rIns="0" tIns="0" bIns="0">
+            <a:spAutoFit/>
+          </a:bodyPr>
+          <a:lstStyle/>
+          <a:p>
+            <a:r>
+              <a:rPr sz="1100" b="1">
+                <a:solidFill>
+                  <a:srgbClr val="141833"/>
+                </a:solidFill>
+                <a:latin typeface="Helvetica Neue"/>
+              </a:rPr>
+              <a:t>Resident Highlights</a:t>
+            </a:r>
+          </a:p>
+        </p:txBody>
+      </p:sp>
+      <p:sp>
+        <p:nvSpPr>
+          <p:cNvPr id="34" name="Rectangle 33"/>
+          <p:cNvSpPr/>
+          <p:nvPr/>
+        </p:nvSpPr>
+        <p:spPr>
+          <a:xfrm>
+            <a:off x="4114800" y="4812205"/>
+            <a:ext cx="546797" cy="128016"/>
+          </a:xfrm>
+          <a:prstGeom prst="rect">
+            <a:avLst/>
+          </a:prstGeom>
+          <a:solidFill>
+            <a:srgbClr val="1B7A43"/>
+          </a:solidFill>
+          <a:ln>
+            <a:noFill/>
+          </a:ln>
+          <a:effectLst/>
+        </p:spPr>
+        <p:style>
+          <a:lnRef idx="1">
+            <a:schemeClr val="accent1"/>
+          </a:lnRef>
+          <a:fillRef idx="3">
+            <a:schemeClr val="accent1"/>
+          </a:fillRef>
+          <a:effectRef idx="2">
+            <a:schemeClr val="accent1"/>
+          </a:effectRef>
+          <a:fontRef idx="minor">
+            <a:schemeClr val="lt1"/>
+          </a:fontRef>
+        </p:style>
+        <p:txBody>
+          <a:bodyPr rtlCol="0" anchor="ctr"/>
+          <a:lstStyle/>
+          <a:p>
+            <a:pPr algn="ctr"/>
+          </a:p>
+        </p:txBody>
+      </p:sp>
+      <p:sp>
+        <p:nvSpPr>
+          <p:cNvPr id="35" name="TextBox 34"/>
+          <p:cNvSpPr txBox="1"/>
+          <p:nvPr/>
+        </p:nvSpPr>
+        <p:spPr>
+          <a:xfrm>
+            <a:off x="4753037" y="4748549"/>
+            <a:ext cx="2286000" cy="291904"/>
+          </a:xfrm>
+          <a:prstGeom prst="rect">
+            <a:avLst/>
+          </a:prstGeom>
+          <a:noFill/>
+        </p:spPr>
+        <p:txBody>
+          <a:bodyPr wrap="square" lIns="0" rIns="0" tIns="0" bIns="0">
+            <a:spAutoFit/>
+          </a:bodyPr>
+          <a:lstStyle/>
+          <a:p>
+            <a:r>
+              <a:rPr sz="900" b="0">
+                <a:solidFill>
+                  <a:srgbClr val="6B7082"/>
+                </a:solidFill>
+                <a:latin typeface="Helvetica Neue"/>
+              </a:rPr>
+              <a:t>8,250 views · 8 posts</a:t>
+            </a:r>
+          </a:p>
+        </p:txBody>
+      </p:sp>
+      <p:sp>
+        <p:nvSpPr>
+          <p:cNvPr id="36" name="TextBox 35"/>
+          <p:cNvSpPr txBox="1"/>
+          <p:nvPr/>
+        </p:nvSpPr>
+        <p:spPr>
+          <a:xfrm>
+            <a:off x="731520" y="5040454"/>
+            <a:ext cx="3200400" cy="291904"/>
+          </a:xfrm>
+          <a:prstGeom prst="rect">
+            <a:avLst/>
+          </a:prstGeom>
+          <a:noFill/>
+        </p:spPr>
+        <p:txBody>
+          <a:bodyPr wrap="square" lIns="0" rIns="0" tIns="0" bIns="0">
+            <a:spAutoFit/>
+          </a:bodyPr>
+          <a:lstStyle/>
+          <a:p>
+            <a:r>
+              <a:rPr sz="1100" b="1">
+                <a:solidFill>
+                  <a:srgbClr val="141833"/>
+                </a:solidFill>
+                <a:latin typeface="Helvetica Neue"/>
+              </a:rPr>
+              <a:t>American Pride</a:t>
+            </a:r>
+          </a:p>
+        </p:txBody>
+      </p:sp>
+      <p:sp>
+        <p:nvSpPr>
+          <p:cNvPr id="37" name="Rectangle 36"/>
+          <p:cNvSpPr/>
+          <p:nvPr/>
+        </p:nvSpPr>
+        <p:spPr>
+          <a:xfrm>
+            <a:off x="4114800" y="5104110"/>
+            <a:ext cx="514917" cy="128016"/>
+          </a:xfrm>
+          <a:prstGeom prst="rect">
+            <a:avLst/>
+          </a:prstGeom>
+          <a:solidFill>
+            <a:srgbClr val="990011"/>
+          </a:solidFill>
+          <a:ln>
+            <a:noFill/>
+          </a:ln>
+          <a:effectLst/>
+        </p:spPr>
+        <p:style>
+          <a:lnRef idx="1">
+            <a:schemeClr val="accent1"/>
+          </a:lnRef>
+          <a:fillRef idx="3">
+            <a:schemeClr val="accent1"/>
+          </a:fillRef>
+          <a:effectRef idx="2">
+            <a:schemeClr val="accent1"/>
+          </a:effectRef>
+          <a:fontRef idx="minor">
+            <a:schemeClr val="lt1"/>
+          </a:fontRef>
+        </p:style>
+        <p:txBody>
+          <a:bodyPr rtlCol="0" anchor="ctr"/>
+          <a:lstStyle/>
+          <a:p>
+            <a:pPr algn="ctr"/>
+          </a:p>
+        </p:txBody>
+      </p:sp>
+      <p:sp>
+        <p:nvSpPr>
+          <p:cNvPr id="38" name="TextBox 37"/>
+          <p:cNvSpPr txBox="1"/>
+          <p:nvPr/>
+        </p:nvSpPr>
+        <p:spPr>
+          <a:xfrm>
+            <a:off x="4721157" y="5040454"/>
+            <a:ext cx="2286000" cy="291904"/>
+          </a:xfrm>
+          <a:prstGeom prst="rect">
+            <a:avLst/>
+          </a:prstGeom>
+          <a:noFill/>
+        </p:spPr>
+        <p:txBody>
+          <a:bodyPr wrap="square" lIns="0" rIns="0" tIns="0" bIns="0">
+            <a:spAutoFit/>
+          </a:bodyPr>
+          <a:lstStyle/>
+          <a:p>
+            <a:r>
+              <a:rPr sz="900" b="0">
+                <a:solidFill>
+                  <a:srgbClr val="6B7082"/>
+                </a:solidFill>
+                <a:latin typeface="Helvetica Neue"/>
+              </a:rPr>
+              <a:t>7,769 views · 15 posts</a:t>
+            </a:r>
+          </a:p>
+        </p:txBody>
+      </p:sp>
+      <p:sp>
+        <p:nvSpPr>
+          <p:cNvPr id="39" name="TextBox 38"/>
+          <p:cNvSpPr txBox="1"/>
+          <p:nvPr/>
+        </p:nvSpPr>
+        <p:spPr>
+          <a:xfrm>
+            <a:off x="731520" y="5332358"/>
+            <a:ext cx="3200400" cy="291904"/>
+          </a:xfrm>
+          <a:prstGeom prst="rect">
+            <a:avLst/>
+          </a:prstGeom>
+          <a:noFill/>
+        </p:spPr>
+        <p:txBody>
+          <a:bodyPr wrap="square" lIns="0" rIns="0" tIns="0" bIns="0">
+            <a:spAutoFit/>
+          </a:bodyPr>
+          <a:lstStyle/>
+          <a:p>
+            <a:r>
+              <a:rPr sz="1100" b="1">
+                <a:solidFill>
+                  <a:srgbClr val="141833"/>
+                </a:solidFill>
+                <a:latin typeface="Helvetica Neue"/>
+              </a:rPr>
+              <a:t>Legislation &amp; Policy Watch</a:t>
+            </a:r>
+          </a:p>
+        </p:txBody>
+      </p:sp>
+      <p:sp>
+        <p:nvSpPr>
+          <p:cNvPr id="40" name="Rectangle 39"/>
+          <p:cNvSpPr/>
+          <p:nvPr/>
+        </p:nvSpPr>
+        <p:spPr>
+          <a:xfrm>
+            <a:off x="4114800" y="5396015"/>
+            <a:ext cx="410396" cy="128016"/>
           </a:xfrm>
           <a:prstGeom prst="rect">
             <a:avLst/>
@@ -16419,909 +17315,13 @@
       </p:sp>
       <p:sp>
         <p:nvSpPr>
-          <p:cNvPr id="17" name="TextBox 16"/>
-          <p:cNvSpPr txBox="1"/>
-          <p:nvPr/>
-        </p:nvSpPr>
-        <p:spPr>
-          <a:xfrm>
-            <a:off x="8738837" y="2997121"/>
-            <a:ext cx="2286000" cy="291904"/>
-          </a:xfrm>
-          <a:prstGeom prst="rect">
-            <a:avLst/>
-          </a:prstGeom>
-          <a:noFill/>
-        </p:spPr>
-        <p:txBody>
-          <a:bodyPr wrap="square" lIns="0" rIns="0" tIns="0" bIns="0">
-            <a:spAutoFit/>
-          </a:bodyPr>
-          <a:lstStyle/>
-          <a:p>
-            <a:r>
-              <a:rPr sz="900" b="0">
-                <a:solidFill>
-                  <a:srgbClr val="6B7082"/>
-                </a:solidFill>
-                <a:latin typeface="Helvetica Neue"/>
-              </a:rPr>
-              <a:t>68,374 views · 88 posts</a:t>
-            </a:r>
-          </a:p>
-        </p:txBody>
-      </p:sp>
-      <p:sp>
-        <p:nvSpPr>
-          <p:cNvPr id="18" name="TextBox 17"/>
-          <p:cNvSpPr txBox="1"/>
-          <p:nvPr/>
-        </p:nvSpPr>
-        <p:spPr>
-          <a:xfrm>
-            <a:off x="731520" y="3289026"/>
-            <a:ext cx="3200400" cy="291904"/>
-          </a:xfrm>
-          <a:prstGeom prst="rect">
-            <a:avLst/>
-          </a:prstGeom>
-          <a:noFill/>
-        </p:spPr>
-        <p:txBody>
-          <a:bodyPr wrap="square" lIns="0" rIns="0" tIns="0" bIns="0">
-            <a:spAutoFit/>
-          </a:bodyPr>
-          <a:lstStyle/>
-          <a:p>
-            <a:r>
-              <a:rPr sz="1100" b="1">
-                <a:solidFill>
-                  <a:srgbClr val="141833"/>
-                </a:solidFill>
-                <a:latin typeface="Helvetica Neue"/>
-              </a:rPr>
-              <a:t>FIFA / World Cup</a:t>
-            </a:r>
-          </a:p>
-        </p:txBody>
-      </p:sp>
-      <p:sp>
-        <p:nvSpPr>
-          <p:cNvPr id="19" name="Rectangle 18"/>
-          <p:cNvSpPr/>
-          <p:nvPr/>
-        </p:nvSpPr>
-        <p:spPr>
-          <a:xfrm>
-            <a:off x="4114800" y="3352682"/>
-            <a:ext cx="4172503" cy="128016"/>
-          </a:xfrm>
-          <a:prstGeom prst="rect">
-            <a:avLst/>
-          </a:prstGeom>
-          <a:solidFill>
-            <a:srgbClr val="6B7082"/>
-          </a:solidFill>
-          <a:ln>
-            <a:noFill/>
-          </a:ln>
-          <a:effectLst/>
-        </p:spPr>
-        <p:style>
-          <a:lnRef idx="1">
-            <a:schemeClr val="accent1"/>
-          </a:lnRef>
-          <a:fillRef idx="3">
-            <a:schemeClr val="accent1"/>
-          </a:fillRef>
-          <a:effectRef idx="2">
-            <a:schemeClr val="accent1"/>
-          </a:effectRef>
-          <a:fontRef idx="minor">
-            <a:schemeClr val="lt1"/>
-          </a:fontRef>
-        </p:style>
-        <p:txBody>
-          <a:bodyPr rtlCol="0" anchor="ctr"/>
-          <a:lstStyle/>
-          <a:p>
-            <a:pPr algn="ctr"/>
-          </a:p>
-        </p:txBody>
-      </p:sp>
-      <p:sp>
-        <p:nvSpPr>
-          <p:cNvPr id="20" name="TextBox 19"/>
-          <p:cNvSpPr txBox="1"/>
-          <p:nvPr/>
-        </p:nvSpPr>
-        <p:spPr>
-          <a:xfrm>
-            <a:off x="8378743" y="3289026"/>
-            <a:ext cx="2286000" cy="291904"/>
-          </a:xfrm>
-          <a:prstGeom prst="rect">
-            <a:avLst/>
-          </a:prstGeom>
-          <a:noFill/>
-        </p:spPr>
-        <p:txBody>
-          <a:bodyPr wrap="square" lIns="0" rIns="0" tIns="0" bIns="0">
-            <a:spAutoFit/>
-          </a:bodyPr>
-          <a:lstStyle/>
-          <a:p>
-            <a:r>
-              <a:rPr sz="900" b="0">
-                <a:solidFill>
-                  <a:srgbClr val="6B7082"/>
-                </a:solidFill>
-                <a:latin typeface="Helvetica Neue"/>
-              </a:rPr>
-              <a:t>62,942 views · 24 posts</a:t>
-            </a:r>
-          </a:p>
-        </p:txBody>
-      </p:sp>
-      <p:sp>
-        <p:nvSpPr>
-          <p:cNvPr id="21" name="TextBox 20"/>
-          <p:cNvSpPr txBox="1"/>
-          <p:nvPr/>
-        </p:nvSpPr>
-        <p:spPr>
-          <a:xfrm>
-            <a:off x="731520" y="3580931"/>
-            <a:ext cx="3200400" cy="291904"/>
-          </a:xfrm>
-          <a:prstGeom prst="rect">
-            <a:avLst/>
-          </a:prstGeom>
-          <a:noFill/>
-        </p:spPr>
-        <p:txBody>
-          <a:bodyPr wrap="square" lIns="0" rIns="0" tIns="0" bIns="0">
-            <a:spAutoFit/>
-          </a:bodyPr>
-          <a:lstStyle/>
-          <a:p>
-            <a:r>
-              <a:rPr sz="1100" b="1">
-                <a:solidFill>
-                  <a:srgbClr val="141833"/>
-                </a:solidFill>
-                <a:latin typeface="Helvetica Neue"/>
-              </a:rPr>
-              <a:t>Military Service</a:t>
-            </a:r>
-          </a:p>
-        </p:txBody>
-      </p:sp>
-      <p:sp>
-        <p:nvSpPr>
-          <p:cNvPr id="22" name="Rectangle 21"/>
-          <p:cNvSpPr/>
-          <p:nvPr/>
-        </p:nvSpPr>
-        <p:spPr>
-          <a:xfrm>
-            <a:off x="4114800" y="3644587"/>
-            <a:ext cx="4145589" cy="128016"/>
-          </a:xfrm>
-          <a:prstGeom prst="rect">
-            <a:avLst/>
-          </a:prstGeom>
-          <a:solidFill>
-            <a:srgbClr val="C9A227"/>
-          </a:solidFill>
-          <a:ln>
-            <a:noFill/>
-          </a:ln>
-          <a:effectLst/>
-        </p:spPr>
-        <p:style>
-          <a:lnRef idx="1">
-            <a:schemeClr val="accent1"/>
-          </a:lnRef>
-          <a:fillRef idx="3">
-            <a:schemeClr val="accent1"/>
-          </a:fillRef>
-          <a:effectRef idx="2">
-            <a:schemeClr val="accent1"/>
-          </a:effectRef>
-          <a:fontRef idx="minor">
-            <a:schemeClr val="lt1"/>
-          </a:fontRef>
-        </p:style>
-        <p:txBody>
-          <a:bodyPr rtlCol="0" anchor="ctr"/>
-          <a:lstStyle/>
-          <a:p>
-            <a:pPr algn="ctr"/>
-          </a:p>
-        </p:txBody>
-      </p:sp>
-      <p:sp>
-        <p:nvSpPr>
-          <p:cNvPr id="23" name="TextBox 22"/>
-          <p:cNvSpPr txBox="1"/>
-          <p:nvPr/>
-        </p:nvSpPr>
-        <p:spPr>
-          <a:xfrm>
-            <a:off x="8351829" y="3580931"/>
-            <a:ext cx="2286000" cy="291904"/>
-          </a:xfrm>
-          <a:prstGeom prst="rect">
-            <a:avLst/>
-          </a:prstGeom>
-          <a:noFill/>
-        </p:spPr>
-        <p:txBody>
-          <a:bodyPr wrap="square" lIns="0" rIns="0" tIns="0" bIns="0">
-            <a:spAutoFit/>
-          </a:bodyPr>
-          <a:lstStyle/>
-          <a:p>
-            <a:r>
-              <a:rPr sz="900" b="0">
-                <a:solidFill>
-                  <a:srgbClr val="6B7082"/>
-                </a:solidFill>
-                <a:latin typeface="Helvetica Neue"/>
-              </a:rPr>
-              <a:t>62,536 views · 22 posts</a:t>
-            </a:r>
-          </a:p>
-        </p:txBody>
-      </p:sp>
-      <p:sp>
-        <p:nvSpPr>
-          <p:cNvPr id="24" name="TextBox 23"/>
-          <p:cNvSpPr txBox="1"/>
-          <p:nvPr/>
-        </p:nvSpPr>
-        <p:spPr>
-          <a:xfrm>
-            <a:off x="731520" y="3872835"/>
-            <a:ext cx="3200400" cy="291904"/>
-          </a:xfrm>
-          <a:prstGeom prst="rect">
-            <a:avLst/>
-          </a:prstGeom>
-          <a:noFill/>
-        </p:spPr>
-        <p:txBody>
-          <a:bodyPr wrap="square" lIns="0" rIns="0" tIns="0" bIns="0">
-            <a:spAutoFit/>
-          </a:bodyPr>
-          <a:lstStyle/>
-          <a:p>
-            <a:r>
-              <a:rPr sz="1100" b="1">
-                <a:solidFill>
-                  <a:srgbClr val="141833"/>
-                </a:solidFill>
-                <a:latin typeface="Helvetica Neue"/>
-              </a:rPr>
-              <a:t>Community &amp; Culture</a:t>
-            </a:r>
-          </a:p>
-        </p:txBody>
-      </p:sp>
-      <p:sp>
-        <p:nvSpPr>
-          <p:cNvPr id="25" name="Rectangle 24"/>
-          <p:cNvSpPr/>
-          <p:nvPr/>
-        </p:nvSpPr>
-        <p:spPr>
-          <a:xfrm>
-            <a:off x="4114800" y="3936491"/>
-            <a:ext cx="3269152" cy="128016"/>
-          </a:xfrm>
-          <a:prstGeom prst="rect">
-            <a:avLst/>
-          </a:prstGeom>
-          <a:solidFill>
-            <a:srgbClr val="141833"/>
-          </a:solidFill>
-          <a:ln>
-            <a:noFill/>
-          </a:ln>
-          <a:effectLst/>
-        </p:spPr>
-        <p:style>
-          <a:lnRef idx="1">
-            <a:schemeClr val="accent1"/>
-          </a:lnRef>
-          <a:fillRef idx="3">
-            <a:schemeClr val="accent1"/>
-          </a:fillRef>
-          <a:effectRef idx="2">
-            <a:schemeClr val="accent1"/>
-          </a:effectRef>
-          <a:fontRef idx="minor">
-            <a:schemeClr val="lt1"/>
-          </a:fontRef>
-        </p:style>
-        <p:txBody>
-          <a:bodyPr rtlCol="0" anchor="ctr"/>
-          <a:lstStyle/>
-          <a:p>
-            <a:pPr algn="ctr"/>
-          </a:p>
-        </p:txBody>
-      </p:sp>
-      <p:sp>
-        <p:nvSpPr>
-          <p:cNvPr id="26" name="TextBox 25"/>
-          <p:cNvSpPr txBox="1"/>
-          <p:nvPr/>
-        </p:nvSpPr>
-        <p:spPr>
-          <a:xfrm>
-            <a:off x="7475392" y="3872835"/>
-            <a:ext cx="2286000" cy="291904"/>
-          </a:xfrm>
-          <a:prstGeom prst="rect">
-            <a:avLst/>
-          </a:prstGeom>
-          <a:noFill/>
-        </p:spPr>
-        <p:txBody>
-          <a:bodyPr wrap="square" lIns="0" rIns="0" tIns="0" bIns="0">
-            <a:spAutoFit/>
-          </a:bodyPr>
-          <a:lstStyle/>
-          <a:p>
-            <a:r>
-              <a:rPr sz="900" b="0">
-                <a:solidFill>
-                  <a:srgbClr val="6B7082"/>
-                </a:solidFill>
-                <a:latin typeface="Helvetica Neue"/>
-              </a:rPr>
-              <a:t>49,315 views · 56 posts</a:t>
-            </a:r>
-          </a:p>
-        </p:txBody>
-      </p:sp>
-      <p:sp>
-        <p:nvSpPr>
-          <p:cNvPr id="27" name="TextBox 26"/>
-          <p:cNvSpPr txBox="1"/>
-          <p:nvPr/>
-        </p:nvSpPr>
-        <p:spPr>
-          <a:xfrm>
-            <a:off x="731520" y="4164740"/>
-            <a:ext cx="3200400" cy="291904"/>
-          </a:xfrm>
-          <a:prstGeom prst="rect">
-            <a:avLst/>
-          </a:prstGeom>
-          <a:noFill/>
-        </p:spPr>
-        <p:txBody>
-          <a:bodyPr wrap="square" lIns="0" rIns="0" tIns="0" bIns="0">
-            <a:spAutoFit/>
-          </a:bodyPr>
-          <a:lstStyle/>
-          <a:p>
-            <a:r>
-              <a:rPr sz="1100" b="1">
-                <a:solidFill>
-                  <a:srgbClr val="141833"/>
-                </a:solidFill>
-                <a:latin typeface="Helvetica Neue"/>
-              </a:rPr>
-              <a:t>Downtown Development</a:t>
-            </a:r>
-          </a:p>
-        </p:txBody>
-      </p:sp>
-      <p:sp>
-        <p:nvSpPr>
-          <p:cNvPr id="28" name="Rectangle 27"/>
-          <p:cNvSpPr/>
-          <p:nvPr/>
-        </p:nvSpPr>
-        <p:spPr>
-          <a:xfrm>
-            <a:off x="4114800" y="4228396"/>
-            <a:ext cx="3160567" cy="128016"/>
-          </a:xfrm>
-          <a:prstGeom prst="rect">
-            <a:avLst/>
-          </a:prstGeom>
-          <a:solidFill>
-            <a:srgbClr val="C9A227"/>
-          </a:solidFill>
-          <a:ln>
-            <a:noFill/>
-          </a:ln>
-          <a:effectLst/>
-        </p:spPr>
-        <p:style>
-          <a:lnRef idx="1">
-            <a:schemeClr val="accent1"/>
-          </a:lnRef>
-          <a:fillRef idx="3">
-            <a:schemeClr val="accent1"/>
-          </a:fillRef>
-          <a:effectRef idx="2">
-            <a:schemeClr val="accent1"/>
-          </a:effectRef>
-          <a:fontRef idx="minor">
-            <a:schemeClr val="lt1"/>
-          </a:fontRef>
-        </p:style>
-        <p:txBody>
-          <a:bodyPr rtlCol="0" anchor="ctr"/>
-          <a:lstStyle/>
-          <a:p>
-            <a:pPr algn="ctr"/>
-          </a:p>
-        </p:txBody>
-      </p:sp>
-      <p:sp>
-        <p:nvSpPr>
-          <p:cNvPr id="29" name="TextBox 28"/>
-          <p:cNvSpPr txBox="1"/>
-          <p:nvPr/>
-        </p:nvSpPr>
-        <p:spPr>
-          <a:xfrm>
-            <a:off x="7366807" y="4164740"/>
-            <a:ext cx="2286000" cy="291904"/>
-          </a:xfrm>
-          <a:prstGeom prst="rect">
-            <a:avLst/>
-          </a:prstGeom>
-          <a:noFill/>
-        </p:spPr>
-        <p:txBody>
-          <a:bodyPr wrap="square" lIns="0" rIns="0" tIns="0" bIns="0">
-            <a:spAutoFit/>
-          </a:bodyPr>
-          <a:lstStyle/>
-          <a:p>
-            <a:r>
-              <a:rPr sz="900" b="0">
-                <a:solidFill>
-                  <a:srgbClr val="6B7082"/>
-                </a:solidFill>
-                <a:latin typeface="Helvetica Neue"/>
-              </a:rPr>
-              <a:t>47,677 views · 18 posts</a:t>
-            </a:r>
-          </a:p>
-        </p:txBody>
-      </p:sp>
-      <p:sp>
-        <p:nvSpPr>
-          <p:cNvPr id="30" name="TextBox 29"/>
-          <p:cNvSpPr txBox="1"/>
-          <p:nvPr/>
-        </p:nvSpPr>
-        <p:spPr>
-          <a:xfrm>
-            <a:off x="731520" y="4456644"/>
-            <a:ext cx="3200400" cy="291904"/>
-          </a:xfrm>
-          <a:prstGeom prst="rect">
-            <a:avLst/>
-          </a:prstGeom>
-          <a:noFill/>
-        </p:spPr>
-        <p:txBody>
-          <a:bodyPr wrap="square" lIns="0" rIns="0" tIns="0" bIns="0">
-            <a:spAutoFit/>
-          </a:bodyPr>
-          <a:lstStyle/>
-          <a:p>
-            <a:r>
-              <a:rPr sz="1100" b="1">
-                <a:solidFill>
-                  <a:srgbClr val="141833"/>
-                </a:solidFill>
-                <a:latin typeface="Helvetica Neue"/>
-              </a:rPr>
-              <a:t>Political Individual Highlights</a:t>
-            </a:r>
-          </a:p>
-        </p:txBody>
-      </p:sp>
-      <p:sp>
-        <p:nvSpPr>
-          <p:cNvPr id="31" name="Rectangle 30"/>
-          <p:cNvSpPr/>
-          <p:nvPr/>
-        </p:nvSpPr>
-        <p:spPr>
-          <a:xfrm>
-            <a:off x="4114800" y="4520301"/>
-            <a:ext cx="1645680" cy="128016"/>
-          </a:xfrm>
-          <a:prstGeom prst="rect">
-            <a:avLst/>
-          </a:prstGeom>
-          <a:solidFill>
-            <a:srgbClr val="2E86AB"/>
-          </a:solidFill>
-          <a:ln>
-            <a:noFill/>
-          </a:ln>
-          <a:effectLst/>
-        </p:spPr>
-        <p:style>
-          <a:lnRef idx="1">
-            <a:schemeClr val="accent1"/>
-          </a:lnRef>
-          <a:fillRef idx="3">
-            <a:schemeClr val="accent1"/>
-          </a:fillRef>
-          <a:effectRef idx="2">
-            <a:schemeClr val="accent1"/>
-          </a:effectRef>
-          <a:fontRef idx="minor">
-            <a:schemeClr val="lt1"/>
-          </a:fontRef>
-        </p:style>
-        <p:txBody>
-          <a:bodyPr rtlCol="0" anchor="ctr"/>
-          <a:lstStyle/>
-          <a:p>
-            <a:pPr algn="ctr"/>
-          </a:p>
-        </p:txBody>
-      </p:sp>
-      <p:sp>
-        <p:nvSpPr>
-          <p:cNvPr id="32" name="TextBox 31"/>
-          <p:cNvSpPr txBox="1"/>
-          <p:nvPr/>
-        </p:nvSpPr>
-        <p:spPr>
-          <a:xfrm>
-            <a:off x="5851920" y="4456644"/>
-            <a:ext cx="2286000" cy="291904"/>
-          </a:xfrm>
-          <a:prstGeom prst="rect">
-            <a:avLst/>
-          </a:prstGeom>
-          <a:noFill/>
-        </p:spPr>
-        <p:txBody>
-          <a:bodyPr wrap="square" lIns="0" rIns="0" tIns="0" bIns="0">
-            <a:spAutoFit/>
-          </a:bodyPr>
-          <a:lstStyle/>
-          <a:p>
-            <a:r>
-              <a:rPr sz="900" b="0">
-                <a:solidFill>
-                  <a:srgbClr val="6B7082"/>
-                </a:solidFill>
-                <a:latin typeface="Helvetica Neue"/>
-              </a:rPr>
-              <a:t>24,825 views · 28 posts</a:t>
-            </a:r>
-          </a:p>
-        </p:txBody>
-      </p:sp>
-      <p:sp>
-        <p:nvSpPr>
-          <p:cNvPr id="33" name="TextBox 32"/>
-          <p:cNvSpPr txBox="1"/>
-          <p:nvPr/>
-        </p:nvSpPr>
-        <p:spPr>
-          <a:xfrm>
-            <a:off x="731520" y="4748549"/>
-            <a:ext cx="3200400" cy="291904"/>
-          </a:xfrm>
-          <a:prstGeom prst="rect">
-            <a:avLst/>
-          </a:prstGeom>
-          <a:noFill/>
-        </p:spPr>
-        <p:txBody>
-          <a:bodyPr wrap="square" lIns="0" rIns="0" tIns="0" bIns="0">
-            <a:spAutoFit/>
-          </a:bodyPr>
-          <a:lstStyle/>
-          <a:p>
-            <a:r>
-              <a:rPr sz="1100" b="1">
-                <a:solidFill>
-                  <a:srgbClr val="141833"/>
-                </a:solidFill>
-                <a:latin typeface="Helvetica Neue"/>
-              </a:rPr>
-              <a:t>Resident Highlights</a:t>
-            </a:r>
-          </a:p>
-        </p:txBody>
-      </p:sp>
-      <p:sp>
-        <p:nvSpPr>
-          <p:cNvPr id="34" name="Rectangle 33"/>
-          <p:cNvSpPr/>
-          <p:nvPr/>
-        </p:nvSpPr>
-        <p:spPr>
-          <a:xfrm>
-            <a:off x="4114800" y="4812205"/>
-            <a:ext cx="546836" cy="128016"/>
-          </a:xfrm>
-          <a:prstGeom prst="rect">
-            <a:avLst/>
-          </a:prstGeom>
-          <a:solidFill>
-            <a:srgbClr val="1B7A43"/>
-          </a:solidFill>
-          <a:ln>
-            <a:noFill/>
-          </a:ln>
-          <a:effectLst/>
-        </p:spPr>
-        <p:style>
-          <a:lnRef idx="1">
-            <a:schemeClr val="accent1"/>
-          </a:lnRef>
-          <a:fillRef idx="3">
-            <a:schemeClr val="accent1"/>
-          </a:fillRef>
-          <a:effectRef idx="2">
-            <a:schemeClr val="accent1"/>
-          </a:effectRef>
-          <a:fontRef idx="minor">
-            <a:schemeClr val="lt1"/>
-          </a:fontRef>
-        </p:style>
-        <p:txBody>
-          <a:bodyPr rtlCol="0" anchor="ctr"/>
-          <a:lstStyle/>
-          <a:p>
-            <a:pPr algn="ctr"/>
-          </a:p>
-        </p:txBody>
-      </p:sp>
-      <p:sp>
-        <p:nvSpPr>
-          <p:cNvPr id="35" name="TextBox 34"/>
-          <p:cNvSpPr txBox="1"/>
-          <p:nvPr/>
-        </p:nvSpPr>
-        <p:spPr>
-          <a:xfrm>
-            <a:off x="4753076" y="4748549"/>
-            <a:ext cx="2286000" cy="291904"/>
-          </a:xfrm>
-          <a:prstGeom prst="rect">
-            <a:avLst/>
-          </a:prstGeom>
-          <a:noFill/>
-        </p:spPr>
-        <p:txBody>
-          <a:bodyPr wrap="square" lIns="0" rIns="0" tIns="0" bIns="0">
-            <a:spAutoFit/>
-          </a:bodyPr>
-          <a:lstStyle/>
-          <a:p>
-            <a:r>
-              <a:rPr sz="900" b="0">
-                <a:solidFill>
-                  <a:srgbClr val="6B7082"/>
-                </a:solidFill>
-                <a:latin typeface="Helvetica Neue"/>
-              </a:rPr>
-              <a:t>8,249 views · 8 posts</a:t>
-            </a:r>
-          </a:p>
-        </p:txBody>
-      </p:sp>
-      <p:sp>
-        <p:nvSpPr>
-          <p:cNvPr id="36" name="TextBox 35"/>
-          <p:cNvSpPr txBox="1"/>
-          <p:nvPr/>
-        </p:nvSpPr>
-        <p:spPr>
-          <a:xfrm>
-            <a:off x="731520" y="5040454"/>
-            <a:ext cx="3200400" cy="291904"/>
-          </a:xfrm>
-          <a:prstGeom prst="rect">
-            <a:avLst/>
-          </a:prstGeom>
-          <a:noFill/>
-        </p:spPr>
-        <p:txBody>
-          <a:bodyPr wrap="square" lIns="0" rIns="0" tIns="0" bIns="0">
-            <a:spAutoFit/>
-          </a:bodyPr>
-          <a:lstStyle/>
-          <a:p>
-            <a:r>
-              <a:rPr sz="1100" b="1">
-                <a:solidFill>
-                  <a:srgbClr val="141833"/>
-                </a:solidFill>
-                <a:latin typeface="Helvetica Neue"/>
-              </a:rPr>
-              <a:t>American Pride</a:t>
-            </a:r>
-          </a:p>
-        </p:txBody>
-      </p:sp>
-      <p:sp>
-        <p:nvSpPr>
-          <p:cNvPr id="37" name="Rectangle 36"/>
-          <p:cNvSpPr/>
-          <p:nvPr/>
-        </p:nvSpPr>
-        <p:spPr>
-          <a:xfrm>
-            <a:off x="4114800" y="5104110"/>
-            <a:ext cx="515016" cy="128016"/>
-          </a:xfrm>
-          <a:prstGeom prst="rect">
-            <a:avLst/>
-          </a:prstGeom>
-          <a:solidFill>
-            <a:srgbClr val="990011"/>
-          </a:solidFill>
-          <a:ln>
-            <a:noFill/>
-          </a:ln>
-          <a:effectLst/>
-        </p:spPr>
-        <p:style>
-          <a:lnRef idx="1">
-            <a:schemeClr val="accent1"/>
-          </a:lnRef>
-          <a:fillRef idx="3">
-            <a:schemeClr val="accent1"/>
-          </a:fillRef>
-          <a:effectRef idx="2">
-            <a:schemeClr val="accent1"/>
-          </a:effectRef>
-          <a:fontRef idx="minor">
-            <a:schemeClr val="lt1"/>
-          </a:fontRef>
-        </p:style>
-        <p:txBody>
-          <a:bodyPr rtlCol="0" anchor="ctr"/>
-          <a:lstStyle/>
-          <a:p>
-            <a:pPr algn="ctr"/>
-          </a:p>
-        </p:txBody>
-      </p:sp>
-      <p:sp>
-        <p:nvSpPr>
-          <p:cNvPr id="38" name="TextBox 37"/>
-          <p:cNvSpPr txBox="1"/>
-          <p:nvPr/>
-        </p:nvSpPr>
-        <p:spPr>
-          <a:xfrm>
-            <a:off x="4721256" y="5040454"/>
-            <a:ext cx="2286000" cy="291904"/>
-          </a:xfrm>
-          <a:prstGeom prst="rect">
-            <a:avLst/>
-          </a:prstGeom>
-          <a:noFill/>
-        </p:spPr>
-        <p:txBody>
-          <a:bodyPr wrap="square" lIns="0" rIns="0" tIns="0" bIns="0">
-            <a:spAutoFit/>
-          </a:bodyPr>
-          <a:lstStyle/>
-          <a:p>
-            <a:r>
-              <a:rPr sz="900" b="0">
-                <a:solidFill>
-                  <a:srgbClr val="6B7082"/>
-                </a:solidFill>
-                <a:latin typeface="Helvetica Neue"/>
-              </a:rPr>
-              <a:t>7,769 views · 15 posts</a:t>
-            </a:r>
-          </a:p>
-        </p:txBody>
-      </p:sp>
-      <p:sp>
-        <p:nvSpPr>
-          <p:cNvPr id="39" name="TextBox 38"/>
-          <p:cNvSpPr txBox="1"/>
-          <p:nvPr/>
-        </p:nvSpPr>
-        <p:spPr>
-          <a:xfrm>
-            <a:off x="731520" y="5332358"/>
-            <a:ext cx="3200400" cy="291904"/>
-          </a:xfrm>
-          <a:prstGeom prst="rect">
-            <a:avLst/>
-          </a:prstGeom>
-          <a:noFill/>
-        </p:spPr>
-        <p:txBody>
-          <a:bodyPr wrap="square" lIns="0" rIns="0" tIns="0" bIns="0">
-            <a:spAutoFit/>
-          </a:bodyPr>
-          <a:lstStyle/>
-          <a:p>
-            <a:r>
-              <a:rPr sz="1100" b="1">
-                <a:solidFill>
-                  <a:srgbClr val="141833"/>
-                </a:solidFill>
-                <a:latin typeface="Helvetica Neue"/>
-              </a:rPr>
-              <a:t>Legislation &amp; Policy Watch</a:t>
-            </a:r>
-          </a:p>
-        </p:txBody>
-      </p:sp>
-      <p:sp>
-        <p:nvSpPr>
-          <p:cNvPr id="40" name="Rectangle 39"/>
-          <p:cNvSpPr/>
-          <p:nvPr/>
-        </p:nvSpPr>
-        <p:spPr>
-          <a:xfrm>
-            <a:off x="4114800" y="5396015"/>
-            <a:ext cx="410475" cy="128016"/>
-          </a:xfrm>
-          <a:prstGeom prst="rect">
-            <a:avLst/>
-          </a:prstGeom>
-          <a:solidFill>
-            <a:srgbClr val="2F3C7E"/>
-          </a:solidFill>
-          <a:ln>
-            <a:noFill/>
-          </a:ln>
-          <a:effectLst/>
-        </p:spPr>
-        <p:style>
-          <a:lnRef idx="1">
-            <a:schemeClr val="accent1"/>
-          </a:lnRef>
-          <a:fillRef idx="3">
-            <a:schemeClr val="accent1"/>
-          </a:fillRef>
-          <a:effectRef idx="2">
-            <a:schemeClr val="accent1"/>
-          </a:effectRef>
-          <a:fontRef idx="minor">
-            <a:schemeClr val="lt1"/>
-          </a:fontRef>
-        </p:style>
-        <p:txBody>
-          <a:bodyPr rtlCol="0" anchor="ctr"/>
-          <a:lstStyle/>
-          <a:p>
-            <a:pPr algn="ctr"/>
-          </a:p>
-        </p:txBody>
-      </p:sp>
-      <p:sp>
-        <p:nvSpPr>
           <p:cNvPr id="41" name="TextBox 40"/>
           <p:cNvSpPr txBox="1"/>
           <p:nvPr/>
         </p:nvSpPr>
         <p:spPr>
           <a:xfrm>
-            <a:off x="4616715" y="5332358"/>
+            <a:off x="4616636" y="5332358"/>
             <a:ext cx="2286000" cy="291904"/>
           </a:xfrm>
           <a:prstGeom prst="rect">
@@ -17390,7 +17390,7 @@
         <p:spPr>
           <a:xfrm>
             <a:off x="4114800" y="5687919"/>
-            <a:ext cx="73649" cy="128016"/>
+            <a:ext cx="73635" cy="128016"/>
           </a:xfrm>
           <a:prstGeom prst="rect">
             <a:avLst/>
@@ -17433,7 +17433,7 @@
         </p:nvSpPr>
         <p:spPr>
           <a:xfrm>
-            <a:off x="4279889" y="5624263"/>
+            <a:off x="4279875" y="5624263"/>
             <a:ext cx="2286000" cy="291904"/>
           </a:xfrm>
           <a:prstGeom prst="rect">
@@ -18050,7 +18050,7 @@
                 </a:solidFill>
                 <a:latin typeface="Georgia"/>
               </a:rPr>
-              <a:t>93,797</a:t>
+              <a:t>93,815</a:t>
             </a:r>
           </a:p>
         </p:txBody>
@@ -19086,7 +19086,7 @@
                 </a:solidFill>
                 <a:latin typeface="Georgia"/>
               </a:rPr>
-              <a:t>87,475</a:t>
+              <a:t>87,538</a:t>
             </a:r>
           </a:p>
         </p:txBody>
@@ -19154,7 +19154,7 @@
                 </a:solidFill>
                 <a:latin typeface="Helvetica Neue"/>
               </a:rPr>
-              <a:t>2,573 average views per post</a:t>
+              <a:t>2,575 average views per post</a:t>
             </a:r>
           </a:p>
         </p:txBody>
@@ -19466,7 +19466,7 @@
                 </a:solidFill>
                 <a:latin typeface="Helvetica Neue"/>
               </a:rPr>
-              <a:t>#2  ·  IG  ·  7,612 views</a:t>
+              <a:t>#2  ·  IG  ·  7,673 views</a:t>
             </a:r>
           </a:p>
         </p:txBody>
@@ -20122,7 +20122,7 @@
                 </a:solidFill>
                 <a:latin typeface="Georgia"/>
               </a:rPr>
-              <a:t>62,942</a:t>
+              <a:t>63,426</a:t>
             </a:r>
           </a:p>
         </p:txBody>
@@ -20156,7 +20156,7 @@
                 </a:solidFill>
                 <a:latin typeface="Helvetica Neue"/>
               </a:rPr>
-              <a:t>24 posts · 1,466 likes</a:t>
+              <a:t>25 posts · 1,478 likes</a:t>
             </a:r>
           </a:p>
         </p:txBody>
@@ -20190,7 +20190,7 @@
                 </a:solidFill>
                 <a:latin typeface="Helvetica Neue"/>
               </a:rPr>
-              <a:t>2,623 average views per post</a:t>
+              <a:t>2,537 average views per post</a:t>
             </a:r>
           </a:p>
         </p:txBody>
@@ -21192,7 +21192,7 @@
                 </a:solidFill>
                 <a:latin typeface="Helvetica Neue"/>
               </a:rPr>
-              <a:t>22 posts · 3,198 likes</a:t>
+              <a:t>22 posts · 3,199 likes</a:t>
             </a:r>
           </a:p>
         </p:txBody>
@@ -22194,7 +22194,7 @@
                 </a:solidFill>
                 <a:latin typeface="Georgia"/>
               </a:rPr>
-              <a:t>49,315</a:t>
+              <a:t>50,812</a:t>
             </a:r>
           </a:p>
         </p:txBody>
@@ -22228,7 +22228,7 @@
                 </a:solidFill>
                 <a:latin typeface="Helvetica Neue"/>
               </a:rPr>
-              <a:t>56 posts · 968 likes</a:t>
+              <a:t>57 posts · 993 likes</a:t>
             </a:r>
           </a:p>
         </p:txBody>
@@ -22262,7 +22262,7 @@
                 </a:solidFill>
                 <a:latin typeface="Helvetica Neue"/>
               </a:rPr>
-              <a:t>881 average views per post</a:t>
+              <a:t>891 average views per post</a:t>
             </a:r>
           </a:p>
         </p:txBody>
@@ -22418,7 +22418,7 @@
                 </a:solidFill>
                 <a:latin typeface="Helvetica Neue"/>
               </a:rPr>
-              <a:t>#1  ·  FB  ·  4,164 views</a:t>
+              <a:t>#1  ·  FB  ·  4,522 views</a:t>
             </a:r>
           </a:p>
         </p:txBody>
@@ -22574,7 +22574,7 @@
                 </a:solidFill>
                 <a:latin typeface="Helvetica Neue"/>
               </a:rPr>
-              <a:t>#2  ·  IG  ·  3,793 views</a:t>
+              <a:t>#2  ·  IG  ·  3,873 views</a:t>
             </a:r>
           </a:p>
         </p:txBody>

--- a/SPONSOR_CONTENT_REPORT.pptx
+++ b/SPONSOR_CONTENT_REPORT.pptx
@@ -3327,7 +3327,7 @@
                 </a:solidFill>
                 <a:latin typeface="Helvetica Neue"/>
               </a:rPr>
-              <a:t>Reporting window: Jun 8 → 2026-09-21</a:t>
+              <a:t>Reporting window: Jun 8 → 2026-09-23</a:t>
             </a:r>
           </a:p>
         </p:txBody>
@@ -3559,7 +3559,7 @@
                 </a:solidFill>
                 <a:latin typeface="Georgia"/>
               </a:rPr>
-              <a:t>Downtown Development</a:t>
+              <a:t>Community &amp; Culture</a:t>
             </a:r>
           </a:p>
         </p:txBody>
@@ -3593,7 +3593,7 @@
                 </a:solidFill>
                 <a:latin typeface="Helvetica Neue"/>
               </a:rPr>
-              <a:t>Physical growth of Downey — Round One, Fun Box, Stonewood, YMCA, new businesses opening.</a:t>
+              <a:t>Local color, events, pageantry, personal growth, city life.</a:t>
             </a:r>
           </a:p>
         </p:txBody>
@@ -3623,11 +3623,11 @@
             <a:r>
               <a:rPr sz="900" b="1">
                 <a:solidFill>
-                  <a:srgbClr val="C9A227"/>
-                </a:solidFill>
-                <a:latin typeface="Helvetica Neue"/>
-              </a:rPr>
-              <a:t>AUDIENCE (theoretical): Local civic pride · Downey residents 30+</a:t>
+                  <a:srgbClr val="141833"/>
+                </a:solidFill>
+                <a:latin typeface="Helvetica Neue"/>
+              </a:rPr>
+              <a:t>AUDIENCE (theoretical): Local color · Broad, 30+</a:t>
             </a:r>
           </a:p>
         </p:txBody>
@@ -3691,7 +3691,7 @@
             <a:avLst/>
           </a:prstGeom>
           <a:solidFill>
-            <a:srgbClr val="C9A227"/>
+            <a:srgbClr val="141833"/>
           </a:solidFill>
           <a:ln>
             <a:noFill/>
@@ -3745,7 +3745,7 @@
             <a:r>
               <a:rPr sz="1100" b="1">
                 <a:solidFill>
-                  <a:srgbClr val="C9A227"/>
+                  <a:srgbClr val="141833"/>
                 </a:solidFill>
                 <a:latin typeface="Helvetica Neue"/>
               </a:rPr>
@@ -3783,7 +3783,7 @@
                 </a:solidFill>
                 <a:latin typeface="Georgia"/>
               </a:rPr>
-              <a:t>47,677</a:t>
+              <a:t>51,044</a:t>
             </a:r>
           </a:p>
         </p:txBody>
@@ -3817,7 +3817,7 @@
                 </a:solidFill>
                 <a:latin typeface="Helvetica Neue"/>
               </a:rPr>
-              <a:t>18 posts · 2,941 likes</a:t>
+              <a:t>57 posts · 1,002 likes</a:t>
             </a:r>
           </a:p>
         </p:txBody>
@@ -3851,7 +3851,7 @@
                 </a:solidFill>
                 <a:latin typeface="Helvetica Neue"/>
               </a:rPr>
-              <a:t>2,649 average views per post</a:t>
+              <a:t>896 average views per post</a:t>
             </a:r>
           </a:p>
         </p:txBody>
@@ -3881,7 +3881,7 @@
             <a:r>
               <a:rPr sz="1100" b="1">
                 <a:solidFill>
-                  <a:srgbClr val="C9A227"/>
+                  <a:srgbClr val="141833"/>
                 </a:solidFill>
                 <a:latin typeface="Helvetica Neue"/>
               </a:rPr>
@@ -3949,7 +3949,7 @@
             <a:avLst/>
           </a:prstGeom>
           <a:solidFill>
-            <a:srgbClr val="C9A227"/>
+            <a:srgbClr val="141833"/>
           </a:solidFill>
           <a:ln>
             <a:noFill/>
@@ -4003,11 +4003,11 @@
             <a:r>
               <a:rPr sz="1000" b="1">
                 <a:solidFill>
-                  <a:srgbClr val="C9A227"/>
-                </a:solidFill>
-                <a:latin typeface="Helvetica Neue"/>
-              </a:rPr>
-              <a:t>#1  ·  TT  ·  29,200 views</a:t>
+                  <a:srgbClr val="141833"/>
+                </a:solidFill>
+                <a:latin typeface="Helvetica Neue"/>
+              </a:rPr>
+              <a:t>#1  ·  FB  ·  4,630 views</a:t>
             </a:r>
           </a:p>
         </p:txBody>
@@ -4041,7 +4041,7 @@
                 </a:solidFill>
                 <a:latin typeface="Helvetica Neue"/>
               </a:rPr>
-              <a:t>Get ready! Round One is taking over the old Sears at Stonewood Mall. This massive 150,000 </a:t>
+              <a:t>An emotional response to a Charlie Kirk &amp; LGBQT comment raises questions about a leader's </a:t>
             </a:r>
           </a:p>
         </p:txBody>
@@ -4105,7 +4105,7 @@
             <a:avLst/>
           </a:prstGeom>
           <a:solidFill>
-            <a:srgbClr val="C9A227"/>
+            <a:srgbClr val="141833"/>
           </a:solidFill>
           <a:ln>
             <a:noFill/>
@@ -4159,11 +4159,11 @@
             <a:r>
               <a:rPr sz="1000" b="1">
                 <a:solidFill>
-                  <a:srgbClr val="C9A227"/>
-                </a:solidFill>
-                <a:latin typeface="Helvetica Neue"/>
-              </a:rPr>
-              <a:t>#2  ·  IG  ·  4,455 views</a:t>
+                  <a:srgbClr val="141833"/>
+                </a:solidFill>
+                <a:latin typeface="Helvetica Neue"/>
+              </a:rPr>
+              <a:t>#2  ·  IG  ·  3,894 views</a:t>
             </a:r>
           </a:p>
         </p:txBody>
@@ -4197,7 +4197,7 @@
                 </a:solidFill>
                 <a:latin typeface="Helvetica Neue"/>
               </a:rPr>
-              <a:t>Round One is coming to Stonewood Mall, transforming the old Sears space! Get ready for a m</a:t>
+              <a:t>Following an outburst, she was removed as a Chamber of Commerce ambassador and rejected fo</a:t>
             </a:r>
           </a:p>
         </p:txBody>
@@ -4261,7 +4261,7 @@
             <a:avLst/>
           </a:prstGeom>
           <a:solidFill>
-            <a:srgbClr val="C9A227"/>
+            <a:srgbClr val="141833"/>
           </a:solidFill>
           <a:ln>
             <a:noFill/>
@@ -4315,11 +4315,11 @@
             <a:r>
               <a:rPr sz="1000" b="1">
                 <a:solidFill>
-                  <a:srgbClr val="C9A227"/>
-                </a:solidFill>
-                <a:latin typeface="Helvetica Neue"/>
-              </a:rPr>
-              <a:t>#3  ·  IG  ·  2,390 views</a:t>
+                  <a:srgbClr val="141833"/>
+                </a:solidFill>
+                <a:latin typeface="Helvetica Neue"/>
+              </a:rPr>
+              <a:t>#3  ·  TT  ·  3,520 views</a:t>
             </a:r>
           </a:p>
         </p:txBody>
@@ -4353,7 +4353,7 @@
                 </a:solidFill>
                 <a:latin typeface="Helvetica Neue"/>
               </a:rPr>
-              <a:t>20 years later, this letter still resonates. It sparked the Downtown Improvement Associati</a:t>
+              <a:t>Downey is a built-out city, but Sacramento requires us to build 6,100 new homes. Local off</a:t>
             </a:r>
           </a:p>
         </p:txBody>
@@ -4427,7 +4427,7 @@
             <a:r>
               <a:rPr sz="1000" b="1">
                 <a:solidFill>
-                  <a:srgbClr val="C9A227"/>
+                  <a:srgbClr val="141833"/>
                 </a:solidFill>
                 <a:latin typeface="Helvetica Neue"/>
               </a:rPr>
@@ -4465,7 +4465,7 @@
                 </a:solidFill>
                 <a:latin typeface="Helvetica Neue"/>
               </a:rPr>
-              <a:t>Solid mid-tier. Worth continued investment. Test scaling to see if it holds.</a:t>
+              <a:t>Modest reach. Fine as filler between heavy hitters, not a headline lane.</a:t>
             </a:r>
           </a:p>
         </p:txBody>
@@ -4595,7 +4595,7 @@
                 </a:solidFill>
                 <a:latin typeface="Georgia"/>
               </a:rPr>
-              <a:t>Political Individual Highlights</a:t>
+              <a:t>Downtown Development</a:t>
             </a:r>
           </a:p>
         </p:txBody>
@@ -4629,7 +4629,7 @@
                 </a:solidFill>
                 <a:latin typeface="Helvetica Neue"/>
               </a:rPr>
-              <a:t>Candidate/elected personality profiles — Carrie Uva, Hector Sosa. Not scandal-driven.</a:t>
+              <a:t>Physical growth of Downey — Round One, Fun Box, Stonewood, YMCA, new businesses opening.</a:t>
             </a:r>
           </a:p>
         </p:txBody>
@@ -4659,11 +4659,11 @@
             <a:r>
               <a:rPr sz="900" b="1">
                 <a:solidFill>
-                  <a:srgbClr val="2E86AB"/>
-                </a:solidFill>
-                <a:latin typeface="Helvetica Neue"/>
-              </a:rPr>
-              <a:t>AUDIENCE (theoretical): Personal profile · Broad (voters, campaign-season readers)</a:t>
+                  <a:srgbClr val="C9A227"/>
+                </a:solidFill>
+                <a:latin typeface="Helvetica Neue"/>
+              </a:rPr>
+              <a:t>AUDIENCE (theoretical): Local civic pride · Downey residents 30+</a:t>
             </a:r>
           </a:p>
         </p:txBody>
@@ -4727,7 +4727,7 @@
             <a:avLst/>
           </a:prstGeom>
           <a:solidFill>
-            <a:srgbClr val="2E86AB"/>
+            <a:srgbClr val="C9A227"/>
           </a:solidFill>
           <a:ln>
             <a:noFill/>
@@ -4781,7 +4781,7 @@
             <a:r>
               <a:rPr sz="1100" b="1">
                 <a:solidFill>
-                  <a:srgbClr val="2E86AB"/>
+                  <a:srgbClr val="C9A227"/>
                 </a:solidFill>
                 <a:latin typeface="Helvetica Neue"/>
               </a:rPr>
@@ -4819,7 +4819,7 @@
                 </a:solidFill>
                 <a:latin typeface="Georgia"/>
               </a:rPr>
-              <a:t>26,654</a:t>
+              <a:t>47,677</a:t>
             </a:r>
           </a:p>
         </p:txBody>
@@ -4853,7 +4853,7 @@
                 </a:solidFill>
                 <a:latin typeface="Helvetica Neue"/>
               </a:rPr>
-              <a:t>30 posts · 602 likes</a:t>
+              <a:t>18 posts · 2,941 likes</a:t>
             </a:r>
           </a:p>
         </p:txBody>
@@ -4887,7 +4887,7 @@
                 </a:solidFill>
                 <a:latin typeface="Helvetica Neue"/>
               </a:rPr>
-              <a:t>888 average views per post</a:t>
+              <a:t>2,649 average views per post</a:t>
             </a:r>
           </a:p>
         </p:txBody>
@@ -4917,7 +4917,7 @@
             <a:r>
               <a:rPr sz="1100" b="1">
                 <a:solidFill>
-                  <a:srgbClr val="2E86AB"/>
+                  <a:srgbClr val="C9A227"/>
                 </a:solidFill>
                 <a:latin typeface="Helvetica Neue"/>
               </a:rPr>
@@ -4985,7 +4985,7 @@
             <a:avLst/>
           </a:prstGeom>
           <a:solidFill>
-            <a:srgbClr val="2E86AB"/>
+            <a:srgbClr val="C9A227"/>
           </a:solidFill>
           <a:ln>
             <a:noFill/>
@@ -5039,11 +5039,11 @@
             <a:r>
               <a:rPr sz="1000" b="1">
                 <a:solidFill>
-                  <a:srgbClr val="2E86AB"/>
-                </a:solidFill>
-                <a:latin typeface="Helvetica Neue"/>
-              </a:rPr>
-              <a:t>#1  ·  FB  ·  4,027 views</a:t>
+                  <a:srgbClr val="C9A227"/>
+                </a:solidFill>
+                <a:latin typeface="Helvetica Neue"/>
+              </a:rPr>
+              <a:t>#1  ·  TT  ·  29,200 views</a:t>
             </a:r>
           </a:p>
         </p:txBody>
@@ -5077,7 +5077,7 @@
                 </a:solidFill>
                 <a:latin typeface="Helvetica Neue"/>
               </a:rPr>
-              <a:t>With a clear choice for Downey, Hector Sosa stands out. His campaign kickoff event was a t</a:t>
+              <a:t>Get ready! Round One is taking over the old Sears at Stonewood Mall. This massive 150,000 </a:t>
             </a:r>
           </a:p>
         </p:txBody>
@@ -5141,7 +5141,7 @@
             <a:avLst/>
           </a:prstGeom>
           <a:solidFill>
-            <a:srgbClr val="2E86AB"/>
+            <a:srgbClr val="C9A227"/>
           </a:solidFill>
           <a:ln>
             <a:noFill/>
@@ -5195,11 +5195,11 @@
             <a:r>
               <a:rPr sz="1000" b="1">
                 <a:solidFill>
-                  <a:srgbClr val="2E86AB"/>
-                </a:solidFill>
-                <a:latin typeface="Helvetica Neue"/>
-              </a:rPr>
-              <a:t>#2  ·  FB  ·  3,034 views</a:t>
+                  <a:srgbClr val="C9A227"/>
+                </a:solidFill>
+                <a:latin typeface="Helvetica Neue"/>
+              </a:rPr>
+              <a:t>#2  ·  IG  ·  4,455 views</a:t>
             </a:r>
           </a:p>
         </p:txBody>
@@ -5233,7 +5233,7 @@
                 </a:solidFill>
                 <a:latin typeface="Helvetica Neue"/>
               </a:rPr>
-              <a:t>Don't be fooled by simple comparisons. Carrie Uva, a lifelong Democrat, has earned endorse</a:t>
+              <a:t>Round One is coming to Stonewood Mall, transforming the old Sears space! Get ready for a m</a:t>
             </a:r>
           </a:p>
         </p:txBody>
@@ -5297,7 +5297,7 @@
             <a:avLst/>
           </a:prstGeom>
           <a:solidFill>
-            <a:srgbClr val="2E86AB"/>
+            <a:srgbClr val="C9A227"/>
           </a:solidFill>
           <a:ln>
             <a:noFill/>
@@ -5351,11 +5351,11 @@
             <a:r>
               <a:rPr sz="1000" b="1">
                 <a:solidFill>
-                  <a:srgbClr val="2E86AB"/>
-                </a:solidFill>
-                <a:latin typeface="Helvetica Neue"/>
-              </a:rPr>
-              <a:t>#3  ·  FB  ·  2,253 views</a:t>
+                  <a:srgbClr val="C9A227"/>
+                </a:solidFill>
+                <a:latin typeface="Helvetica Neue"/>
+              </a:rPr>
+              <a:t>#3  ·  IG  ·  2,390 views</a:t>
             </a:r>
           </a:p>
         </p:txBody>
@@ -5389,7 +5389,7 @@
                 </a:solidFill>
                 <a:latin typeface="Helvetica Neue"/>
               </a:rPr>
-              <a:t>The Newsom administration and Rob Bonta's lawsuit against the federal government has been </a:t>
+              <a:t>20 years later, this letter still resonates. It sparked the Downtown Improvement Associati</a:t>
             </a:r>
           </a:p>
         </p:txBody>
@@ -5463,7 +5463,7 @@
             <a:r>
               <a:rPr sz="1000" b="1">
                 <a:solidFill>
-                  <a:srgbClr val="2E86AB"/>
+                  <a:srgbClr val="C9A227"/>
                 </a:solidFill>
                 <a:latin typeface="Helvetica Neue"/>
               </a:rPr>
@@ -5501,7 +5501,7 @@
                 </a:solidFill>
                 <a:latin typeface="Helvetica Neue"/>
               </a:rPr>
-              <a:t>Modest reach. Fine as filler between heavy hitters, not a headline lane.</a:t>
+              <a:t>Solid mid-tier. Worth continued investment. Test scaling to see if it holds.</a:t>
             </a:r>
           </a:p>
         </p:txBody>
@@ -5631,7 +5631,7 @@
                 </a:solidFill>
                 <a:latin typeface="Georgia"/>
               </a:rPr>
-              <a:t>Resident Highlights</a:t>
+              <a:t>Political Individual Highlights</a:t>
             </a:r>
           </a:p>
         </p:txBody>
@@ -5665,7 +5665,7 @@
                 </a:solidFill>
                 <a:latin typeface="Helvetica Neue"/>
               </a:rPr>
-              <a:t>Non-political citizen profiles — small business owners, community members. Granata, Gately, the deacon.</a:t>
+              <a:t>Candidate/elected personality profiles — Carrie Uva, Hector Sosa. Not scandal-driven.</a:t>
             </a:r>
           </a:p>
         </p:txBody>
@@ -5695,11 +5695,11 @@
             <a:r>
               <a:rPr sz="900" b="1">
                 <a:solidFill>
-                  <a:srgbClr val="1B7A43"/>
-                </a:solidFill>
-                <a:latin typeface="Helvetica Neue"/>
-              </a:rPr>
-              <a:t>AUDIENCE (theoretical): Human interest · Broad, community-connected</a:t>
+                  <a:srgbClr val="2E86AB"/>
+                </a:solidFill>
+                <a:latin typeface="Helvetica Neue"/>
+              </a:rPr>
+              <a:t>AUDIENCE (theoretical): Personal profile · Broad (voters, campaign-season readers)</a:t>
             </a:r>
           </a:p>
         </p:txBody>
@@ -5763,7 +5763,7 @@
             <a:avLst/>
           </a:prstGeom>
           <a:solidFill>
-            <a:srgbClr val="1B7A43"/>
+            <a:srgbClr val="2E86AB"/>
           </a:solidFill>
           <a:ln>
             <a:noFill/>
@@ -5817,7 +5817,7 @@
             <a:r>
               <a:rPr sz="1100" b="1">
                 <a:solidFill>
-                  <a:srgbClr val="1B7A43"/>
+                  <a:srgbClr val="2E86AB"/>
                 </a:solidFill>
                 <a:latin typeface="Helvetica Neue"/>
               </a:rPr>
@@ -5855,7 +5855,7 @@
                 </a:solidFill>
                 <a:latin typeface="Georgia"/>
               </a:rPr>
-              <a:t>8,250</a:t>
+              <a:t>27,369</a:t>
             </a:r>
           </a:p>
         </p:txBody>
@@ -5889,7 +5889,7 @@
                 </a:solidFill>
                 <a:latin typeface="Helvetica Neue"/>
               </a:rPr>
-              <a:t>8 posts · 141 likes</a:t>
+              <a:t>30 posts · 609 likes</a:t>
             </a:r>
           </a:p>
         </p:txBody>
@@ -5923,7 +5923,7 @@
                 </a:solidFill>
                 <a:latin typeface="Helvetica Neue"/>
               </a:rPr>
-              <a:t>1,031 average views per post</a:t>
+              <a:t>912 average views per post</a:t>
             </a:r>
           </a:p>
         </p:txBody>
@@ -5953,7 +5953,7 @@
             <a:r>
               <a:rPr sz="1100" b="1">
                 <a:solidFill>
-                  <a:srgbClr val="1B7A43"/>
+                  <a:srgbClr val="2E86AB"/>
                 </a:solidFill>
                 <a:latin typeface="Helvetica Neue"/>
               </a:rPr>
@@ -6021,7 +6021,7 @@
             <a:avLst/>
           </a:prstGeom>
           <a:solidFill>
-            <a:srgbClr val="1B7A43"/>
+            <a:srgbClr val="2E86AB"/>
           </a:solidFill>
           <a:ln>
             <a:noFill/>
@@ -6075,11 +6075,11 @@
             <a:r>
               <a:rPr sz="1000" b="1">
                 <a:solidFill>
-                  <a:srgbClr val="1B7A43"/>
-                </a:solidFill>
-                <a:latin typeface="Helvetica Neue"/>
-              </a:rPr>
-              <a:t>#1  ·  IG  ·  3,551 views</a:t>
+                  <a:srgbClr val="2E86AB"/>
+                </a:solidFill>
+                <a:latin typeface="Helvetica Neue"/>
+              </a:rPr>
+              <a:t>#1  ·  FB  ·  4,232 views</a:t>
             </a:r>
           </a:p>
         </p:txBody>
@@ -6113,7 +6113,7 @@
                 </a:solidFill>
                 <a:latin typeface="Helvetica Neue"/>
               </a:rPr>
-              <a:t>Almost ran over a family. I got the license plate, checked on them. Turns out he's a Catho</a:t>
+              <a:t>With a clear choice for Downey, Hector Sosa stands out. His campaign kickoff event was a t</a:t>
             </a:r>
           </a:p>
         </p:txBody>
@@ -6177,7 +6177,7 @@
             <a:avLst/>
           </a:prstGeom>
           <a:solidFill>
-            <a:srgbClr val="1B7A43"/>
+            <a:srgbClr val="2E86AB"/>
           </a:solidFill>
           <a:ln>
             <a:noFill/>
@@ -6231,11 +6231,11 @@
             <a:r>
               <a:rPr sz="1000" b="1">
                 <a:solidFill>
-                  <a:srgbClr val="1B7A43"/>
-                </a:solidFill>
-                <a:latin typeface="Helvetica Neue"/>
-              </a:rPr>
-              <a:t>#2  ·  FB  ·  2,491 views</a:t>
+                  <a:srgbClr val="2E86AB"/>
+                </a:solidFill>
+                <a:latin typeface="Helvetica Neue"/>
+              </a:rPr>
+              <a:t>#2  ·  FB  ·  3,042 views</a:t>
             </a:r>
           </a:p>
         </p:txBody>
@@ -6269,7 +6269,7 @@
                 </a:solidFill>
                 <a:latin typeface="Helvetica Neue"/>
               </a:rPr>
-              <a:t>A terrifying moment outside City Hall as a car nearly hits a family. A witness captured th</a:t>
+              <a:t>Don't be fooled by simple comparisons. Carrie Uva, a lifelong Democrat, has earned endorse</a:t>
             </a:r>
           </a:p>
         </p:txBody>
@@ -6333,7 +6333,7 @@
             <a:avLst/>
           </a:prstGeom>
           <a:solidFill>
-            <a:srgbClr val="1B7A43"/>
+            <a:srgbClr val="2E86AB"/>
           </a:solidFill>
           <a:ln>
             <a:noFill/>
@@ -6387,11 +6387,11 @@
             <a:r>
               <a:rPr sz="1000" b="1">
                 <a:solidFill>
-                  <a:srgbClr val="1B7A43"/>
-                </a:solidFill>
-                <a:latin typeface="Helvetica Neue"/>
-              </a:rPr>
-              <a:t>#3  ·  FB  ·  812 views</a:t>
+                  <a:srgbClr val="2E86AB"/>
+                </a:solidFill>
+                <a:latin typeface="Helvetica Neue"/>
+              </a:rPr>
+              <a:t>#3  ·  FB  ·  2,253 views</a:t>
             </a:r>
           </a:p>
         </p:txBody>
@@ -6425,7 +6425,7 @@
                 </a:solidFill>
                 <a:latin typeface="Helvetica Neue"/>
               </a:rPr>
-              <a:t>Running a restaurant means the show must go on, even when things are falling apart. Unlike</a:t>
+              <a:t>The Newsom administration and Rob Bonta's lawsuit against the federal government has been </a:t>
             </a:r>
           </a:p>
         </p:txBody>
@@ -6499,7 +6499,7 @@
             <a:r>
               <a:rPr sz="1000" b="1">
                 <a:solidFill>
-                  <a:srgbClr val="1B7A43"/>
+                  <a:srgbClr val="2E86AB"/>
                 </a:solidFill>
                 <a:latin typeface="Helvetica Neue"/>
               </a:rPr>
@@ -6537,7 +6537,7 @@
                 </a:solidFill>
                 <a:latin typeface="Helvetica Neue"/>
               </a:rPr>
-              <a:t>Solid mid-tier. Worth continued investment. Test scaling to see if it holds.</a:t>
+              <a:t>Modest reach. Fine as filler between heavy hitters, not a headline lane.</a:t>
             </a:r>
           </a:p>
         </p:txBody>
@@ -6575,6 +6575,912 @@
             <a:avLst/>
           </a:prstGeom>
           <a:solidFill>
+            <a:srgbClr val="FCF6F5"/>
+          </a:solidFill>
+          <a:ln>
+            <a:noFill/>
+          </a:ln>
+          <a:effectLst/>
+        </p:spPr>
+        <p:style>
+          <a:lnRef idx="1">
+            <a:schemeClr val="accent1"/>
+          </a:lnRef>
+          <a:fillRef idx="3">
+            <a:schemeClr val="accent1"/>
+          </a:fillRef>
+          <a:effectRef idx="2">
+            <a:schemeClr val="accent1"/>
+          </a:effectRef>
+          <a:fontRef idx="minor">
+            <a:schemeClr val="lt1"/>
+          </a:fontRef>
+        </p:style>
+        <p:txBody>
+          <a:bodyPr rtlCol="0" anchor="ctr"/>
+          <a:lstStyle/>
+          <a:p>
+            <a:pPr algn="ctr"/>
+          </a:p>
+        </p:txBody>
+      </p:sp>
+      <p:sp>
+        <p:nvSpPr>
+          <p:cNvPr id="3" name="TextBox 2"/>
+          <p:cNvSpPr txBox="1"/>
+          <p:nvPr/>
+        </p:nvSpPr>
+        <p:spPr>
+          <a:xfrm>
+            <a:off x="731520" y="457200"/>
+            <a:ext cx="10698480" cy="365760"/>
+          </a:xfrm>
+          <a:prstGeom prst="rect">
+            <a:avLst/>
+          </a:prstGeom>
+          <a:noFill/>
+        </p:spPr>
+        <p:txBody>
+          <a:bodyPr wrap="square" lIns="0" rIns="0" tIns="0" bIns="0">
+            <a:spAutoFit/>
+          </a:bodyPr>
+          <a:lstStyle/>
+          <a:p>
+            <a:r>
+              <a:rPr sz="1200" b="1">
+                <a:solidFill>
+                  <a:srgbClr val="990011"/>
+                </a:solidFill>
+                <a:latin typeface="Helvetica Neue"/>
+              </a:rPr>
+              <a:t>CATEGORY DEEP-DIVE</a:t>
+            </a:r>
+          </a:p>
+        </p:txBody>
+      </p:sp>
+      <p:sp>
+        <p:nvSpPr>
+          <p:cNvPr id="4" name="TextBox 3"/>
+          <p:cNvSpPr txBox="1"/>
+          <p:nvPr/>
+        </p:nvSpPr>
+        <p:spPr>
+          <a:xfrm>
+            <a:off x="731520" y="822960"/>
+            <a:ext cx="10698480" cy="822960"/>
+          </a:xfrm>
+          <a:prstGeom prst="rect">
+            <a:avLst/>
+          </a:prstGeom>
+          <a:noFill/>
+        </p:spPr>
+        <p:txBody>
+          <a:bodyPr wrap="square" lIns="0" rIns="0" tIns="0" bIns="0">
+            <a:spAutoFit/>
+          </a:bodyPr>
+          <a:lstStyle/>
+          <a:p>
+            <a:r>
+              <a:rPr sz="3000" b="1">
+                <a:solidFill>
+                  <a:srgbClr val="2F3C7E"/>
+                </a:solidFill>
+                <a:latin typeface="Georgia"/>
+              </a:rPr>
+              <a:t>Resident Highlights</a:t>
+            </a:r>
+          </a:p>
+        </p:txBody>
+      </p:sp>
+      <p:sp>
+        <p:nvSpPr>
+          <p:cNvPr id="5" name="TextBox 4"/>
+          <p:cNvSpPr txBox="1"/>
+          <p:nvPr/>
+        </p:nvSpPr>
+        <p:spPr>
+          <a:xfrm>
+            <a:off x="731520" y="1600200"/>
+            <a:ext cx="10698480" cy="365760"/>
+          </a:xfrm>
+          <a:prstGeom prst="rect">
+            <a:avLst/>
+          </a:prstGeom>
+          <a:noFill/>
+        </p:spPr>
+        <p:txBody>
+          <a:bodyPr wrap="square" lIns="0" rIns="0" tIns="0" bIns="0">
+            <a:spAutoFit/>
+          </a:bodyPr>
+          <a:lstStyle/>
+          <a:p>
+            <a:r>
+              <a:rPr sz="1200" b="0">
+                <a:solidFill>
+                  <a:srgbClr val="6B7082"/>
+                </a:solidFill>
+                <a:latin typeface="Helvetica Neue"/>
+              </a:rPr>
+              <a:t>Non-political citizen profiles — small business owners, community members. Granata, Gately, the deacon.</a:t>
+            </a:r>
+          </a:p>
+        </p:txBody>
+      </p:sp>
+      <p:sp>
+        <p:nvSpPr>
+          <p:cNvPr id="6" name="TextBox 5"/>
+          <p:cNvSpPr txBox="1"/>
+          <p:nvPr/>
+        </p:nvSpPr>
+        <p:spPr>
+          <a:xfrm>
+            <a:off x="731520" y="1691640"/>
+            <a:ext cx="10698480" cy="274320"/>
+          </a:xfrm>
+          <a:prstGeom prst="rect">
+            <a:avLst/>
+          </a:prstGeom>
+          <a:noFill/>
+        </p:spPr>
+        <p:txBody>
+          <a:bodyPr wrap="square" lIns="0" rIns="0" tIns="0" bIns="0">
+            <a:spAutoFit/>
+          </a:bodyPr>
+          <a:lstStyle/>
+          <a:p>
+            <a:r>
+              <a:rPr sz="900" b="1">
+                <a:solidFill>
+                  <a:srgbClr val="1B7A43"/>
+                </a:solidFill>
+                <a:latin typeface="Helvetica Neue"/>
+              </a:rPr>
+              <a:t>AUDIENCE (theoretical): Human interest · Broad, community-connected</a:t>
+            </a:r>
+          </a:p>
+        </p:txBody>
+      </p:sp>
+      <p:sp>
+        <p:nvSpPr>
+          <p:cNvPr id="7" name="Rectangle 6"/>
+          <p:cNvSpPr/>
+          <p:nvPr/>
+        </p:nvSpPr>
+        <p:spPr>
+          <a:xfrm>
+            <a:off x="731520" y="2194560"/>
+            <a:ext cx="5029200" cy="3200400"/>
+          </a:xfrm>
+          <a:prstGeom prst="rect">
+            <a:avLst/>
+          </a:prstGeom>
+          <a:solidFill>
+            <a:srgbClr val="FFFFFF"/>
+          </a:solidFill>
+          <a:ln>
+            <a:noFill/>
+          </a:ln>
+          <a:effectLst/>
+        </p:spPr>
+        <p:style>
+          <a:lnRef idx="1">
+            <a:schemeClr val="accent1"/>
+          </a:lnRef>
+          <a:fillRef idx="3">
+            <a:schemeClr val="accent1"/>
+          </a:fillRef>
+          <a:effectRef idx="2">
+            <a:schemeClr val="accent1"/>
+          </a:effectRef>
+          <a:fontRef idx="minor">
+            <a:schemeClr val="lt1"/>
+          </a:fontRef>
+        </p:style>
+        <p:txBody>
+          <a:bodyPr rtlCol="0" anchor="ctr"/>
+          <a:lstStyle/>
+          <a:p>
+            <a:pPr algn="ctr"/>
+          </a:p>
+        </p:txBody>
+      </p:sp>
+      <p:sp>
+        <p:nvSpPr>
+          <p:cNvPr id="8" name="Rectangle 7"/>
+          <p:cNvSpPr/>
+          <p:nvPr/>
+        </p:nvSpPr>
+        <p:spPr>
+          <a:xfrm>
+            <a:off x="731520" y="2194560"/>
+            <a:ext cx="91440" cy="3200400"/>
+          </a:xfrm>
+          <a:prstGeom prst="rect">
+            <a:avLst/>
+          </a:prstGeom>
+          <a:solidFill>
+            <a:srgbClr val="1B7A43"/>
+          </a:solidFill>
+          <a:ln>
+            <a:noFill/>
+          </a:ln>
+          <a:effectLst/>
+        </p:spPr>
+        <p:style>
+          <a:lnRef idx="1">
+            <a:schemeClr val="accent1"/>
+          </a:lnRef>
+          <a:fillRef idx="3">
+            <a:schemeClr val="accent1"/>
+          </a:fillRef>
+          <a:effectRef idx="2">
+            <a:schemeClr val="accent1"/>
+          </a:effectRef>
+          <a:fontRef idx="minor">
+            <a:schemeClr val="lt1"/>
+          </a:fontRef>
+        </p:style>
+        <p:txBody>
+          <a:bodyPr rtlCol="0" anchor="ctr"/>
+          <a:lstStyle/>
+          <a:p>
+            <a:pPr algn="ctr"/>
+          </a:p>
+        </p:txBody>
+      </p:sp>
+      <p:sp>
+        <p:nvSpPr>
+          <p:cNvPr id="9" name="TextBox 8"/>
+          <p:cNvSpPr txBox="1"/>
+          <p:nvPr/>
+        </p:nvSpPr>
+        <p:spPr>
+          <a:xfrm>
+            <a:off x="960120" y="2377440"/>
+            <a:ext cx="4572000" cy="365760"/>
+          </a:xfrm>
+          <a:prstGeom prst="rect">
+            <a:avLst/>
+          </a:prstGeom>
+          <a:noFill/>
+        </p:spPr>
+        <p:txBody>
+          <a:bodyPr wrap="square" lIns="0" rIns="0" tIns="0" bIns="0">
+            <a:spAutoFit/>
+          </a:bodyPr>
+          <a:lstStyle/>
+          <a:p>
+            <a:r>
+              <a:rPr sz="1100" b="1">
+                <a:solidFill>
+                  <a:srgbClr val="1B7A43"/>
+                </a:solidFill>
+                <a:latin typeface="Helvetica Neue"/>
+              </a:rPr>
+              <a:t>TOTAL VIEWS</a:t>
+            </a:r>
+          </a:p>
+        </p:txBody>
+      </p:sp>
+      <p:sp>
+        <p:nvSpPr>
+          <p:cNvPr id="10" name="TextBox 9"/>
+          <p:cNvSpPr txBox="1"/>
+          <p:nvPr/>
+        </p:nvSpPr>
+        <p:spPr>
+          <a:xfrm>
+            <a:off x="960120" y="2697480"/>
+            <a:ext cx="4572000" cy="1097280"/>
+          </a:xfrm>
+          <a:prstGeom prst="rect">
+            <a:avLst/>
+          </a:prstGeom>
+          <a:noFill/>
+        </p:spPr>
+        <p:txBody>
+          <a:bodyPr wrap="square" lIns="0" rIns="0" tIns="0" bIns="0">
+            <a:spAutoFit/>
+          </a:bodyPr>
+          <a:lstStyle/>
+          <a:p>
+            <a:r>
+              <a:rPr sz="5400" b="1">
+                <a:solidFill>
+                  <a:srgbClr val="2F3C7E"/>
+                </a:solidFill>
+                <a:latin typeface="Georgia"/>
+              </a:rPr>
+              <a:t>8,251</a:t>
+            </a:r>
+          </a:p>
+        </p:txBody>
+      </p:sp>
+      <p:sp>
+        <p:nvSpPr>
+          <p:cNvPr id="11" name="TextBox 10"/>
+          <p:cNvSpPr txBox="1"/>
+          <p:nvPr/>
+        </p:nvSpPr>
+        <p:spPr>
+          <a:xfrm>
+            <a:off x="960120" y="3840480"/>
+            <a:ext cx="4572000" cy="365760"/>
+          </a:xfrm>
+          <a:prstGeom prst="rect">
+            <a:avLst/>
+          </a:prstGeom>
+          <a:noFill/>
+        </p:spPr>
+        <p:txBody>
+          <a:bodyPr wrap="square" lIns="0" rIns="0" tIns="0" bIns="0">
+            <a:spAutoFit/>
+          </a:bodyPr>
+          <a:lstStyle/>
+          <a:p>
+            <a:r>
+              <a:rPr sz="1300" b="1">
+                <a:solidFill>
+                  <a:srgbClr val="141833"/>
+                </a:solidFill>
+                <a:latin typeface="Helvetica Neue"/>
+              </a:rPr>
+              <a:t>8 posts · 141 likes</a:t>
+            </a:r>
+          </a:p>
+        </p:txBody>
+      </p:sp>
+      <p:sp>
+        <p:nvSpPr>
+          <p:cNvPr id="12" name="TextBox 11"/>
+          <p:cNvSpPr txBox="1"/>
+          <p:nvPr/>
+        </p:nvSpPr>
+        <p:spPr>
+          <a:xfrm>
+            <a:off x="960120" y="4206240"/>
+            <a:ext cx="4572000" cy="365760"/>
+          </a:xfrm>
+          <a:prstGeom prst="rect">
+            <a:avLst/>
+          </a:prstGeom>
+          <a:noFill/>
+        </p:spPr>
+        <p:txBody>
+          <a:bodyPr wrap="square" lIns="0" rIns="0" tIns="0" bIns="0">
+            <a:spAutoFit/>
+          </a:bodyPr>
+          <a:lstStyle/>
+          <a:p>
+            <a:r>
+              <a:rPr sz="1300" b="0">
+                <a:solidFill>
+                  <a:srgbClr val="6B7082"/>
+                </a:solidFill>
+                <a:latin typeface="Helvetica Neue"/>
+              </a:rPr>
+              <a:t>1,031 average views per post</a:t>
+            </a:r>
+          </a:p>
+        </p:txBody>
+      </p:sp>
+      <p:sp>
+        <p:nvSpPr>
+          <p:cNvPr id="13" name="TextBox 12"/>
+          <p:cNvSpPr txBox="1"/>
+          <p:nvPr/>
+        </p:nvSpPr>
+        <p:spPr>
+          <a:xfrm>
+            <a:off x="6126480" y="2194560"/>
+            <a:ext cx="5486400" cy="274320"/>
+          </a:xfrm>
+          <a:prstGeom prst="rect">
+            <a:avLst/>
+          </a:prstGeom>
+          <a:noFill/>
+        </p:spPr>
+        <p:txBody>
+          <a:bodyPr wrap="square" lIns="0" rIns="0" tIns="0" bIns="0">
+            <a:spAutoFit/>
+          </a:bodyPr>
+          <a:lstStyle/>
+          <a:p>
+            <a:r>
+              <a:rPr sz="1100" b="1">
+                <a:solidFill>
+                  <a:srgbClr val="1B7A43"/>
+                </a:solidFill>
+                <a:latin typeface="Helvetica Neue"/>
+              </a:rPr>
+              <a:t>TOP 3 IN THIS CATEGORY</a:t>
+            </a:r>
+          </a:p>
+        </p:txBody>
+      </p:sp>
+      <p:sp>
+        <p:nvSpPr>
+          <p:cNvPr id="14" name="Rectangle 13"/>
+          <p:cNvSpPr/>
+          <p:nvPr/>
+        </p:nvSpPr>
+        <p:spPr>
+          <a:xfrm>
+            <a:off x="6126480" y="2560320"/>
+            <a:ext cx="5303520" cy="822960"/>
+          </a:xfrm>
+          <a:prstGeom prst="rect">
+            <a:avLst/>
+          </a:prstGeom>
+          <a:solidFill>
+            <a:srgbClr val="FFFFFF"/>
+          </a:solidFill>
+          <a:ln>
+            <a:noFill/>
+          </a:ln>
+          <a:effectLst/>
+        </p:spPr>
+        <p:style>
+          <a:lnRef idx="1">
+            <a:schemeClr val="accent1"/>
+          </a:lnRef>
+          <a:fillRef idx="3">
+            <a:schemeClr val="accent1"/>
+          </a:fillRef>
+          <a:effectRef idx="2">
+            <a:schemeClr val="accent1"/>
+          </a:effectRef>
+          <a:fontRef idx="minor">
+            <a:schemeClr val="lt1"/>
+          </a:fontRef>
+        </p:style>
+        <p:txBody>
+          <a:bodyPr rtlCol="0" anchor="ctr"/>
+          <a:lstStyle/>
+          <a:p>
+            <a:pPr algn="ctr"/>
+          </a:p>
+        </p:txBody>
+      </p:sp>
+      <p:sp>
+        <p:nvSpPr>
+          <p:cNvPr id="15" name="Rectangle 14"/>
+          <p:cNvSpPr/>
+          <p:nvPr/>
+        </p:nvSpPr>
+        <p:spPr>
+          <a:xfrm>
+            <a:off x="6126480" y="2560320"/>
+            <a:ext cx="54864" cy="822960"/>
+          </a:xfrm>
+          <a:prstGeom prst="rect">
+            <a:avLst/>
+          </a:prstGeom>
+          <a:solidFill>
+            <a:srgbClr val="1B7A43"/>
+          </a:solidFill>
+          <a:ln>
+            <a:noFill/>
+          </a:ln>
+          <a:effectLst/>
+        </p:spPr>
+        <p:style>
+          <a:lnRef idx="1">
+            <a:schemeClr val="accent1"/>
+          </a:lnRef>
+          <a:fillRef idx="3">
+            <a:schemeClr val="accent1"/>
+          </a:fillRef>
+          <a:effectRef idx="2">
+            <a:schemeClr val="accent1"/>
+          </a:effectRef>
+          <a:fontRef idx="minor">
+            <a:schemeClr val="lt1"/>
+          </a:fontRef>
+        </p:style>
+        <p:txBody>
+          <a:bodyPr rtlCol="0" anchor="ctr"/>
+          <a:lstStyle/>
+          <a:p>
+            <a:pPr algn="ctr"/>
+          </a:p>
+        </p:txBody>
+      </p:sp>
+      <p:sp>
+        <p:nvSpPr>
+          <p:cNvPr id="16" name="TextBox 15"/>
+          <p:cNvSpPr txBox="1"/>
+          <p:nvPr/>
+        </p:nvSpPr>
+        <p:spPr>
+          <a:xfrm>
+            <a:off x="6309360" y="2651760"/>
+            <a:ext cx="5029200" cy="320040"/>
+          </a:xfrm>
+          <a:prstGeom prst="rect">
+            <a:avLst/>
+          </a:prstGeom>
+          <a:noFill/>
+        </p:spPr>
+        <p:txBody>
+          <a:bodyPr wrap="square" lIns="0" rIns="0" tIns="0" bIns="0">
+            <a:spAutoFit/>
+          </a:bodyPr>
+          <a:lstStyle/>
+          <a:p>
+            <a:r>
+              <a:rPr sz="1000" b="1">
+                <a:solidFill>
+                  <a:srgbClr val="1B7A43"/>
+                </a:solidFill>
+                <a:latin typeface="Helvetica Neue"/>
+              </a:rPr>
+              <a:t>#1  ·  IG  ·  3,551 views</a:t>
+            </a:r>
+          </a:p>
+        </p:txBody>
+      </p:sp>
+      <p:sp>
+        <p:nvSpPr>
+          <p:cNvPr id="17" name="TextBox 16"/>
+          <p:cNvSpPr txBox="1"/>
+          <p:nvPr/>
+        </p:nvSpPr>
+        <p:spPr>
+          <a:xfrm>
+            <a:off x="6309360" y="2944368"/>
+            <a:ext cx="5029200" cy="411480"/>
+          </a:xfrm>
+          <a:prstGeom prst="rect">
+            <a:avLst/>
+          </a:prstGeom>
+          <a:noFill/>
+        </p:spPr>
+        <p:txBody>
+          <a:bodyPr wrap="square" lIns="0" rIns="0" tIns="0" bIns="0">
+            <a:spAutoFit/>
+          </a:bodyPr>
+          <a:lstStyle/>
+          <a:p>
+            <a:r>
+              <a:rPr sz="1000" b="0">
+                <a:solidFill>
+                  <a:srgbClr val="141833"/>
+                </a:solidFill>
+                <a:latin typeface="Helvetica Neue"/>
+              </a:rPr>
+              <a:t>Almost ran over a family. I got the license plate, checked on them. Turns out he's a Catho</a:t>
+            </a:r>
+          </a:p>
+        </p:txBody>
+      </p:sp>
+      <p:sp>
+        <p:nvSpPr>
+          <p:cNvPr id="18" name="Rectangle 17"/>
+          <p:cNvSpPr/>
+          <p:nvPr/>
+        </p:nvSpPr>
+        <p:spPr>
+          <a:xfrm>
+            <a:off x="6126480" y="3474720"/>
+            <a:ext cx="5303520" cy="822960"/>
+          </a:xfrm>
+          <a:prstGeom prst="rect">
+            <a:avLst/>
+          </a:prstGeom>
+          <a:solidFill>
+            <a:srgbClr val="FFFFFF"/>
+          </a:solidFill>
+          <a:ln>
+            <a:noFill/>
+          </a:ln>
+          <a:effectLst/>
+        </p:spPr>
+        <p:style>
+          <a:lnRef idx="1">
+            <a:schemeClr val="accent1"/>
+          </a:lnRef>
+          <a:fillRef idx="3">
+            <a:schemeClr val="accent1"/>
+          </a:fillRef>
+          <a:effectRef idx="2">
+            <a:schemeClr val="accent1"/>
+          </a:effectRef>
+          <a:fontRef idx="minor">
+            <a:schemeClr val="lt1"/>
+          </a:fontRef>
+        </p:style>
+        <p:txBody>
+          <a:bodyPr rtlCol="0" anchor="ctr"/>
+          <a:lstStyle/>
+          <a:p>
+            <a:pPr algn="ctr"/>
+          </a:p>
+        </p:txBody>
+      </p:sp>
+      <p:sp>
+        <p:nvSpPr>
+          <p:cNvPr id="19" name="Rectangle 18"/>
+          <p:cNvSpPr/>
+          <p:nvPr/>
+        </p:nvSpPr>
+        <p:spPr>
+          <a:xfrm>
+            <a:off x="6126480" y="3474720"/>
+            <a:ext cx="54864" cy="822960"/>
+          </a:xfrm>
+          <a:prstGeom prst="rect">
+            <a:avLst/>
+          </a:prstGeom>
+          <a:solidFill>
+            <a:srgbClr val="1B7A43"/>
+          </a:solidFill>
+          <a:ln>
+            <a:noFill/>
+          </a:ln>
+          <a:effectLst/>
+        </p:spPr>
+        <p:style>
+          <a:lnRef idx="1">
+            <a:schemeClr val="accent1"/>
+          </a:lnRef>
+          <a:fillRef idx="3">
+            <a:schemeClr val="accent1"/>
+          </a:fillRef>
+          <a:effectRef idx="2">
+            <a:schemeClr val="accent1"/>
+          </a:effectRef>
+          <a:fontRef idx="minor">
+            <a:schemeClr val="lt1"/>
+          </a:fontRef>
+        </p:style>
+        <p:txBody>
+          <a:bodyPr rtlCol="0" anchor="ctr"/>
+          <a:lstStyle/>
+          <a:p>
+            <a:pPr algn="ctr"/>
+          </a:p>
+        </p:txBody>
+      </p:sp>
+      <p:sp>
+        <p:nvSpPr>
+          <p:cNvPr id="20" name="TextBox 19"/>
+          <p:cNvSpPr txBox="1"/>
+          <p:nvPr/>
+        </p:nvSpPr>
+        <p:spPr>
+          <a:xfrm>
+            <a:off x="6309360" y="3566160"/>
+            <a:ext cx="5029200" cy="320040"/>
+          </a:xfrm>
+          <a:prstGeom prst="rect">
+            <a:avLst/>
+          </a:prstGeom>
+          <a:noFill/>
+        </p:spPr>
+        <p:txBody>
+          <a:bodyPr wrap="square" lIns="0" rIns="0" tIns="0" bIns="0">
+            <a:spAutoFit/>
+          </a:bodyPr>
+          <a:lstStyle/>
+          <a:p>
+            <a:r>
+              <a:rPr sz="1000" b="1">
+                <a:solidFill>
+                  <a:srgbClr val="1B7A43"/>
+                </a:solidFill>
+                <a:latin typeface="Helvetica Neue"/>
+              </a:rPr>
+              <a:t>#2  ·  FB  ·  2,491 views</a:t>
+            </a:r>
+          </a:p>
+        </p:txBody>
+      </p:sp>
+      <p:sp>
+        <p:nvSpPr>
+          <p:cNvPr id="21" name="TextBox 20"/>
+          <p:cNvSpPr txBox="1"/>
+          <p:nvPr/>
+        </p:nvSpPr>
+        <p:spPr>
+          <a:xfrm>
+            <a:off x="6309360" y="3858768"/>
+            <a:ext cx="5029200" cy="411480"/>
+          </a:xfrm>
+          <a:prstGeom prst="rect">
+            <a:avLst/>
+          </a:prstGeom>
+          <a:noFill/>
+        </p:spPr>
+        <p:txBody>
+          <a:bodyPr wrap="square" lIns="0" rIns="0" tIns="0" bIns="0">
+            <a:spAutoFit/>
+          </a:bodyPr>
+          <a:lstStyle/>
+          <a:p>
+            <a:r>
+              <a:rPr sz="1000" b="0">
+                <a:solidFill>
+                  <a:srgbClr val="141833"/>
+                </a:solidFill>
+                <a:latin typeface="Helvetica Neue"/>
+              </a:rPr>
+              <a:t>A terrifying moment outside City Hall as a car nearly hits a family. A witness captured th</a:t>
+            </a:r>
+          </a:p>
+        </p:txBody>
+      </p:sp>
+      <p:sp>
+        <p:nvSpPr>
+          <p:cNvPr id="22" name="Rectangle 21"/>
+          <p:cNvSpPr/>
+          <p:nvPr/>
+        </p:nvSpPr>
+        <p:spPr>
+          <a:xfrm>
+            <a:off x="6126480" y="4389120"/>
+            <a:ext cx="5303520" cy="822960"/>
+          </a:xfrm>
+          <a:prstGeom prst="rect">
+            <a:avLst/>
+          </a:prstGeom>
+          <a:solidFill>
+            <a:srgbClr val="FFFFFF"/>
+          </a:solidFill>
+          <a:ln>
+            <a:noFill/>
+          </a:ln>
+          <a:effectLst/>
+        </p:spPr>
+        <p:style>
+          <a:lnRef idx="1">
+            <a:schemeClr val="accent1"/>
+          </a:lnRef>
+          <a:fillRef idx="3">
+            <a:schemeClr val="accent1"/>
+          </a:fillRef>
+          <a:effectRef idx="2">
+            <a:schemeClr val="accent1"/>
+          </a:effectRef>
+          <a:fontRef idx="minor">
+            <a:schemeClr val="lt1"/>
+          </a:fontRef>
+        </p:style>
+        <p:txBody>
+          <a:bodyPr rtlCol="0" anchor="ctr"/>
+          <a:lstStyle/>
+          <a:p>
+            <a:pPr algn="ctr"/>
+          </a:p>
+        </p:txBody>
+      </p:sp>
+      <p:sp>
+        <p:nvSpPr>
+          <p:cNvPr id="23" name="Rectangle 22"/>
+          <p:cNvSpPr/>
+          <p:nvPr/>
+        </p:nvSpPr>
+        <p:spPr>
+          <a:xfrm>
+            <a:off x="6126480" y="4389120"/>
+            <a:ext cx="54864" cy="822960"/>
+          </a:xfrm>
+          <a:prstGeom prst="rect">
+            <a:avLst/>
+          </a:prstGeom>
+          <a:solidFill>
+            <a:srgbClr val="1B7A43"/>
+          </a:solidFill>
+          <a:ln>
+            <a:noFill/>
+          </a:ln>
+          <a:effectLst/>
+        </p:spPr>
+        <p:style>
+          <a:lnRef idx="1">
+            <a:schemeClr val="accent1"/>
+          </a:lnRef>
+          <a:fillRef idx="3">
+            <a:schemeClr val="accent1"/>
+          </a:fillRef>
+          <a:effectRef idx="2">
+            <a:schemeClr val="accent1"/>
+          </a:effectRef>
+          <a:fontRef idx="minor">
+            <a:schemeClr val="lt1"/>
+          </a:fontRef>
+        </p:style>
+        <p:txBody>
+          <a:bodyPr rtlCol="0" anchor="ctr"/>
+          <a:lstStyle/>
+          <a:p>
+            <a:pPr algn="ctr"/>
+          </a:p>
+        </p:txBody>
+      </p:sp>
+      <p:sp>
+        <p:nvSpPr>
+          <p:cNvPr id="24" name="TextBox 23"/>
+          <p:cNvSpPr txBox="1"/>
+          <p:nvPr/>
+        </p:nvSpPr>
+        <p:spPr>
+          <a:xfrm>
+            <a:off x="6309360" y="4480559"/>
+            <a:ext cx="5029200" cy="320040"/>
+          </a:xfrm>
+          <a:prstGeom prst="rect">
+            <a:avLst/>
+          </a:prstGeom>
+          <a:noFill/>
+        </p:spPr>
+        <p:txBody>
+          <a:bodyPr wrap="square" lIns="0" rIns="0" tIns="0" bIns="0">
+            <a:spAutoFit/>
+          </a:bodyPr>
+          <a:lstStyle/>
+          <a:p>
+            <a:r>
+              <a:rPr sz="1000" b="1">
+                <a:solidFill>
+                  <a:srgbClr val="1B7A43"/>
+                </a:solidFill>
+                <a:latin typeface="Helvetica Neue"/>
+              </a:rPr>
+              <a:t>#3  ·  FB  ·  812 views</a:t>
+            </a:r>
+          </a:p>
+        </p:txBody>
+      </p:sp>
+      <p:sp>
+        <p:nvSpPr>
+          <p:cNvPr id="25" name="TextBox 24"/>
+          <p:cNvSpPr txBox="1"/>
+          <p:nvPr/>
+        </p:nvSpPr>
+        <p:spPr>
+          <a:xfrm>
+            <a:off x="6309360" y="4773168"/>
+            <a:ext cx="5029200" cy="411480"/>
+          </a:xfrm>
+          <a:prstGeom prst="rect">
+            <a:avLst/>
+          </a:prstGeom>
+          <a:noFill/>
+        </p:spPr>
+        <p:txBody>
+          <a:bodyPr wrap="square" lIns="0" rIns="0" tIns="0" bIns="0">
+            <a:spAutoFit/>
+          </a:bodyPr>
+          <a:lstStyle/>
+          <a:p>
+            <a:r>
+              <a:rPr sz="1000" b="0">
+                <a:solidFill>
+                  <a:srgbClr val="141833"/>
+                </a:solidFill>
+                <a:latin typeface="Helvetica Neue"/>
+              </a:rPr>
+              <a:t>Running a restaurant means the show must go on, even when things are falling apart. Unlike</a:t>
+            </a:r>
+          </a:p>
+        </p:txBody>
+      </p:sp>
+      <p:sp>
+        <p:nvSpPr>
+          <p:cNvPr id="26" name="Rectangle 25"/>
+          <p:cNvSpPr/>
+          <p:nvPr/>
+        </p:nvSpPr>
+        <p:spPr>
+          <a:xfrm>
+            <a:off x="731520" y="5623560"/>
+            <a:ext cx="10698480" cy="731520"/>
+          </a:xfrm>
+          <a:prstGeom prst="rect">
+            <a:avLst/>
+          </a:prstGeom>
+          <a:solidFill>
             <a:srgbClr val="141833"/>
           </a:solidFill>
           <a:ln>
@@ -6606,146 +7512,68 @@
       </p:sp>
       <p:sp>
         <p:nvSpPr>
-          <p:cNvPr id="3" name="Rectangle 2"/>
-          <p:cNvSpPr/>
-          <p:nvPr/>
-        </p:nvSpPr>
-        <p:spPr>
-          <a:xfrm>
-            <a:off x="0" y="0"/>
-            <a:ext cx="411480" cy="6858000"/>
-          </a:xfrm>
-          <a:prstGeom prst="rect">
-            <a:avLst/>
-          </a:prstGeom>
-          <a:solidFill>
-            <a:srgbClr val="2E86AB"/>
-          </a:solidFill>
-          <a:ln>
-            <a:noFill/>
-          </a:ln>
-          <a:effectLst/>
-        </p:spPr>
-        <p:style>
-          <a:lnRef idx="1">
-            <a:schemeClr val="accent1"/>
-          </a:lnRef>
-          <a:fillRef idx="3">
-            <a:schemeClr val="accent1"/>
-          </a:fillRef>
-          <a:effectRef idx="2">
-            <a:schemeClr val="accent1"/>
-          </a:effectRef>
-          <a:fontRef idx="minor">
-            <a:schemeClr val="lt1"/>
-          </a:fontRef>
-        </p:style>
-        <p:txBody>
-          <a:bodyPr rtlCol="0" anchor="ctr"/>
-          <a:lstStyle/>
-          <a:p>
-            <a:pPr algn="ctr"/>
-          </a:p>
-        </p:txBody>
-      </p:sp>
-      <p:sp>
-        <p:nvSpPr>
-          <p:cNvPr id="4" name="TextBox 3"/>
-          <p:cNvSpPr txBox="1"/>
-          <p:nvPr/>
-        </p:nvSpPr>
-        <p:spPr>
-          <a:xfrm>
-            <a:off x="914400" y="2377440"/>
-            <a:ext cx="10058400" cy="457200"/>
-          </a:xfrm>
-          <a:prstGeom prst="rect">
-            <a:avLst/>
-          </a:prstGeom>
-          <a:noFill/>
-        </p:spPr>
-        <p:txBody>
-          <a:bodyPr wrap="square" lIns="0" rIns="0" tIns="0" bIns="0">
-            <a:spAutoFit/>
-          </a:bodyPr>
-          <a:lstStyle/>
-          <a:p>
-            <a:r>
-              <a:rPr sz="1600" b="1">
-                <a:solidFill>
-                  <a:srgbClr val="2E86AB"/>
-                </a:solidFill>
-                <a:latin typeface="Helvetica Neue"/>
-              </a:rPr>
-              <a:t>SECTION 2 OF 2</a:t>
-            </a:r>
-          </a:p>
-        </p:txBody>
-      </p:sp>
-      <p:sp>
-        <p:nvSpPr>
-          <p:cNvPr id="5" name="TextBox 4"/>
-          <p:cNvSpPr txBox="1"/>
-          <p:nvPr/>
-        </p:nvSpPr>
-        <p:spPr>
-          <a:xfrm>
-            <a:off x="914400" y="2834640"/>
-            <a:ext cx="10058400" cy="1371600"/>
-          </a:xfrm>
-          <a:prstGeom prst="rect">
-            <a:avLst/>
-          </a:prstGeom>
-          <a:noFill/>
-        </p:spPr>
-        <p:txBody>
-          <a:bodyPr wrap="square" lIns="0" rIns="0" tIns="0" bIns="0">
-            <a:spAutoFit/>
-          </a:bodyPr>
-          <a:lstStyle/>
-          <a:p>
-            <a:r>
-              <a:rPr sz="6400" b="1">
-                <a:solidFill>
-                  <a:srgbClr val="FFFFFF"/>
-                </a:solidFill>
-                <a:latin typeface="Georgia"/>
-              </a:rPr>
-              <a:t>Worth watching</a:t>
-            </a:r>
-          </a:p>
-        </p:txBody>
-      </p:sp>
-      <p:sp>
-        <p:nvSpPr>
-          <p:cNvPr id="6" name="TextBox 5"/>
-          <p:cNvSpPr txBox="1"/>
-          <p:nvPr/>
-        </p:nvSpPr>
-        <p:spPr>
-          <a:xfrm>
-            <a:off x="914400" y="4206240"/>
-            <a:ext cx="10058400" cy="548640"/>
-          </a:xfrm>
-          <a:prstGeom prst="rect">
-            <a:avLst/>
-          </a:prstGeom>
-          <a:noFill/>
-        </p:spPr>
-        <p:txBody>
-          <a:bodyPr wrap="square" lIns="0" rIns="0" tIns="0" bIns="0">
-            <a:spAutoFit/>
-          </a:bodyPr>
-          <a:lstStyle/>
-          <a:p>
-            <a:r>
-              <a:rPr sz="1800" b="0">
+          <p:cNvPr id="27" name="TextBox 26"/>
+          <p:cNvSpPr txBox="1"/>
+          <p:nvPr/>
+        </p:nvSpPr>
+        <p:spPr>
+          <a:xfrm>
+            <a:off x="914400" y="5715000"/>
+            <a:ext cx="2743200" cy="274320"/>
+          </a:xfrm>
+          <a:prstGeom prst="rect">
+            <a:avLst/>
+          </a:prstGeom>
+          <a:noFill/>
+        </p:spPr>
+        <p:txBody>
+          <a:bodyPr wrap="square" lIns="0" rIns="0" tIns="0" bIns="0">
+            <a:spAutoFit/>
+          </a:bodyPr>
+          <a:lstStyle/>
+          <a:p>
+            <a:r>
+              <a:rPr sz="1000" b="1">
+                <a:solidFill>
+                  <a:srgbClr val="1B7A43"/>
+                </a:solidFill>
+                <a:latin typeface="Helvetica Neue"/>
+              </a:rPr>
+              <a:t>RECOMMENDATION</a:t>
+            </a:r>
+          </a:p>
+        </p:txBody>
+      </p:sp>
+      <p:sp>
+        <p:nvSpPr>
+          <p:cNvPr id="28" name="TextBox 27"/>
+          <p:cNvSpPr txBox="1"/>
+          <p:nvPr/>
+        </p:nvSpPr>
+        <p:spPr>
+          <a:xfrm>
+            <a:off x="914400" y="5943600"/>
+            <a:ext cx="10515600" cy="365760"/>
+          </a:xfrm>
+          <a:prstGeom prst="rect">
+            <a:avLst/>
+          </a:prstGeom>
+          <a:noFill/>
+        </p:spPr>
+        <p:txBody>
+          <a:bodyPr wrap="square" lIns="0" rIns="0" tIns="0" bIns="0">
+            <a:spAutoFit/>
+          </a:bodyPr>
+          <a:lstStyle/>
+          <a:p>
+            <a:r>
+              <a:rPr sz="1300" b="1">
                 <a:solidFill>
                   <a:srgbClr val="FCF6F5"/>
                 </a:solidFill>
                 <a:latin typeface="Helvetica Neue"/>
               </a:rPr>
-              <a:t>3 smaller lanes still building audience. Real potential, low volume — don't retire prematurely.</a:t>
+              <a:t>Solid mid-tier. Worth continued investment. Test scaling to see if it holds.</a:t>
             </a:r>
           </a:p>
         </p:txBody>
@@ -6783,7 +7611,7 @@
             <a:avLst/>
           </a:prstGeom>
           <a:solidFill>
-            <a:srgbClr val="FCF6F5"/>
+            <a:srgbClr val="141833"/>
           </a:solidFill>
           <a:ln>
             <a:noFill/>
@@ -6814,156 +7642,20 @@
       </p:sp>
       <p:sp>
         <p:nvSpPr>
-          <p:cNvPr id="3" name="TextBox 2"/>
-          <p:cNvSpPr txBox="1"/>
-          <p:nvPr/>
-        </p:nvSpPr>
-        <p:spPr>
-          <a:xfrm>
-            <a:off x="731520" y="457200"/>
-            <a:ext cx="10698480" cy="365760"/>
-          </a:xfrm>
-          <a:prstGeom prst="rect">
-            <a:avLst/>
-          </a:prstGeom>
-          <a:noFill/>
-        </p:spPr>
-        <p:txBody>
-          <a:bodyPr wrap="square" lIns="0" rIns="0" tIns="0" bIns="0">
-            <a:spAutoFit/>
-          </a:bodyPr>
-          <a:lstStyle/>
-          <a:p>
-            <a:r>
-              <a:rPr sz="1200" b="1">
-                <a:solidFill>
-                  <a:srgbClr val="990011"/>
-                </a:solidFill>
-                <a:latin typeface="Helvetica Neue"/>
-              </a:rPr>
-              <a:t>WORTH WATCHING</a:t>
-            </a:r>
-          </a:p>
-        </p:txBody>
-      </p:sp>
-      <p:sp>
-        <p:nvSpPr>
-          <p:cNvPr id="4" name="TextBox 3"/>
-          <p:cNvSpPr txBox="1"/>
-          <p:nvPr/>
-        </p:nvSpPr>
-        <p:spPr>
-          <a:xfrm>
-            <a:off x="731520" y="822960"/>
-            <a:ext cx="10698480" cy="822960"/>
-          </a:xfrm>
-          <a:prstGeom prst="rect">
-            <a:avLst/>
-          </a:prstGeom>
-          <a:noFill/>
-        </p:spPr>
-        <p:txBody>
-          <a:bodyPr wrap="square" lIns="0" rIns="0" tIns="0" bIns="0">
-            <a:spAutoFit/>
-          </a:bodyPr>
-          <a:lstStyle/>
-          <a:p>
-            <a:r>
-              <a:rPr sz="3000" b="1">
-                <a:solidFill>
-                  <a:srgbClr val="2F3C7E"/>
-                </a:solidFill>
-                <a:latin typeface="Georgia"/>
-              </a:rPr>
-              <a:t>Small lanes that could develop into something</a:t>
-            </a:r>
-          </a:p>
-        </p:txBody>
-      </p:sp>
-      <p:sp>
-        <p:nvSpPr>
-          <p:cNvPr id="5" name="TextBox 4"/>
-          <p:cNvSpPr txBox="1"/>
-          <p:nvPr/>
-        </p:nvSpPr>
-        <p:spPr>
-          <a:xfrm>
-            <a:off x="731520" y="1600200"/>
-            <a:ext cx="10698480" cy="365760"/>
-          </a:xfrm>
-          <a:prstGeom prst="rect">
-            <a:avLst/>
-          </a:prstGeom>
-          <a:noFill/>
-        </p:spPr>
-        <p:txBody>
-          <a:bodyPr wrap="square" lIns="0" rIns="0" tIns="0" bIns="0">
-            <a:spAutoFit/>
-          </a:bodyPr>
-          <a:lstStyle/>
-          <a:p>
-            <a:r>
-              <a:rPr sz="1200" b="0">
-                <a:solidFill>
-                  <a:srgbClr val="6B7082"/>
-                </a:solidFill>
-                <a:latin typeface="Helvetica Neue"/>
-              </a:rPr>
-              <a:t>Low volume today, but real audience potential. Don't kill these before they get their shot.</a:t>
-            </a:r>
-          </a:p>
-        </p:txBody>
-      </p:sp>
-      <p:sp>
-        <p:nvSpPr>
-          <p:cNvPr id="6" name="TextBox 5"/>
-          <p:cNvSpPr txBox="1"/>
-          <p:nvPr/>
-        </p:nvSpPr>
-        <p:spPr>
-          <a:xfrm>
-            <a:off x="731520" y="2148839"/>
-            <a:ext cx="3200400" cy="502920"/>
-          </a:xfrm>
-          <a:prstGeom prst="rect">
-            <a:avLst/>
-          </a:prstGeom>
-          <a:noFill/>
-        </p:spPr>
-        <p:txBody>
-          <a:bodyPr wrap="square" lIns="0" rIns="0" tIns="0" bIns="0">
-            <a:spAutoFit/>
-          </a:bodyPr>
-          <a:lstStyle/>
-          <a:p>
-            <a:r>
-              <a:rPr sz="1200" b="1">
-                <a:solidFill>
-                  <a:srgbClr val="141833"/>
-                </a:solidFill>
-                <a:latin typeface="Helvetica Neue"/>
-              </a:rPr>
-              <a:t>Elections &amp; Judicial</a:t>
-            </a:r>
-          </a:p>
-        </p:txBody>
-      </p:sp>
-      <p:sp>
-        <p:nvSpPr>
-          <p:cNvPr id="7" name="Rectangle 6"/>
+          <p:cNvPr id="3" name="Rectangle 2"/>
           <p:cNvSpPr/>
           <p:nvPr/>
         </p:nvSpPr>
         <p:spPr>
           <a:xfrm>
-            <a:off x="4206240" y="2217420"/>
-            <a:ext cx="6035040" cy="274320"/>
+            <a:off x="0" y="0"/>
+            <a:ext cx="411480" cy="6858000"/>
           </a:xfrm>
           <a:prstGeom prst="rect">
             <a:avLst/>
           </a:prstGeom>
           <a:solidFill>
-            <a:srgbClr val="2F3C7E"/>
+            <a:srgbClr val="2E86AB"/>
           </a:solidFill>
           <a:ln>
             <a:noFill/>
@@ -6994,394 +7686,102 @@
       </p:sp>
       <p:sp>
         <p:nvSpPr>
-          <p:cNvPr id="8" name="TextBox 7"/>
-          <p:cNvSpPr txBox="1"/>
-          <p:nvPr/>
-        </p:nvSpPr>
-        <p:spPr>
-          <a:xfrm>
-            <a:off x="10332719" y="2148839"/>
-            <a:ext cx="2286000" cy="251460"/>
-          </a:xfrm>
-          <a:prstGeom prst="rect">
-            <a:avLst/>
-          </a:prstGeom>
-          <a:noFill/>
-        </p:spPr>
-        <p:txBody>
-          <a:bodyPr wrap="square" lIns="0" rIns="0" tIns="0" bIns="0">
-            <a:spAutoFit/>
-          </a:bodyPr>
-          <a:lstStyle/>
-          <a:p>
-            <a:r>
-              <a:rPr sz="900" b="0">
-                <a:solidFill>
-                  <a:srgbClr val="6B7082"/>
-                </a:solidFill>
-                <a:latin typeface="Helvetica Neue"/>
-              </a:rPr>
-              <a:t>70,647 views · 89 posts · 794 avg</a:t>
-            </a:r>
-          </a:p>
-        </p:txBody>
-      </p:sp>
-      <p:sp>
-        <p:nvSpPr>
-          <p:cNvPr id="9" name="TextBox 8"/>
-          <p:cNvSpPr txBox="1"/>
-          <p:nvPr/>
-        </p:nvSpPr>
-        <p:spPr>
-          <a:xfrm>
-            <a:off x="10332719" y="2354579"/>
-            <a:ext cx="4572000" cy="251460"/>
-          </a:xfrm>
-          <a:prstGeom prst="rect">
-            <a:avLst/>
-          </a:prstGeom>
-          <a:noFill/>
-        </p:spPr>
-        <p:txBody>
-          <a:bodyPr wrap="square" lIns="0" rIns="0" tIns="0" bIns="0">
-            <a:spAutoFit/>
-          </a:bodyPr>
-          <a:lstStyle/>
-          <a:p>
-            <a:r>
-              <a:rPr sz="800" b="0">
-                <a:solidFill>
-                  <a:srgbClr val="6B7082"/>
-                </a:solidFill>
-                <a:latin typeface="Helvetica Neue"/>
-              </a:rPr>
-              <a:t>Slow-burn policy · Middle (40-55) + Older (55+) engaged voters</a:t>
-            </a:r>
-          </a:p>
-        </p:txBody>
-      </p:sp>
-      <p:sp>
-        <p:nvSpPr>
-          <p:cNvPr id="10" name="TextBox 9"/>
-          <p:cNvSpPr txBox="1"/>
-          <p:nvPr/>
-        </p:nvSpPr>
-        <p:spPr>
-          <a:xfrm>
-            <a:off x="731520" y="2651759"/>
-            <a:ext cx="3200400" cy="502920"/>
-          </a:xfrm>
-          <a:prstGeom prst="rect">
-            <a:avLst/>
-          </a:prstGeom>
-          <a:noFill/>
-        </p:spPr>
-        <p:txBody>
-          <a:bodyPr wrap="square" lIns="0" rIns="0" tIns="0" bIns="0">
-            <a:spAutoFit/>
-          </a:bodyPr>
-          <a:lstStyle/>
-          <a:p>
-            <a:r>
-              <a:rPr sz="1200" b="1">
-                <a:solidFill>
-                  <a:srgbClr val="141833"/>
-                </a:solidFill>
-                <a:latin typeface="Helvetica Neue"/>
-              </a:rPr>
-              <a:t>American Pride</a:t>
-            </a:r>
-          </a:p>
-        </p:txBody>
-      </p:sp>
-      <p:sp>
-        <p:nvSpPr>
-          <p:cNvPr id="11" name="Rectangle 10"/>
-          <p:cNvSpPr/>
-          <p:nvPr/>
-        </p:nvSpPr>
-        <p:spPr>
-          <a:xfrm>
-            <a:off x="4206240" y="2720339"/>
-            <a:ext cx="663669" cy="274320"/>
-          </a:xfrm>
-          <a:prstGeom prst="rect">
-            <a:avLst/>
-          </a:prstGeom>
-          <a:solidFill>
-            <a:srgbClr val="990011"/>
-          </a:solidFill>
-          <a:ln>
-            <a:noFill/>
-          </a:ln>
-          <a:effectLst/>
-        </p:spPr>
-        <p:style>
-          <a:lnRef idx="1">
-            <a:schemeClr val="accent1"/>
-          </a:lnRef>
-          <a:fillRef idx="3">
-            <a:schemeClr val="accent1"/>
-          </a:fillRef>
-          <a:effectRef idx="2">
-            <a:schemeClr val="accent1"/>
-          </a:effectRef>
-          <a:fontRef idx="minor">
-            <a:schemeClr val="lt1"/>
-          </a:fontRef>
-        </p:style>
-        <p:txBody>
-          <a:bodyPr rtlCol="0" anchor="ctr"/>
-          <a:lstStyle/>
-          <a:p>
-            <a:pPr algn="ctr"/>
-          </a:p>
-        </p:txBody>
-      </p:sp>
-      <p:sp>
-        <p:nvSpPr>
-          <p:cNvPr id="12" name="TextBox 11"/>
-          <p:cNvSpPr txBox="1"/>
-          <p:nvPr/>
-        </p:nvSpPr>
-        <p:spPr>
-          <a:xfrm>
-            <a:off x="4961349" y="2651759"/>
-            <a:ext cx="2286000" cy="251460"/>
-          </a:xfrm>
-          <a:prstGeom prst="rect">
-            <a:avLst/>
-          </a:prstGeom>
-          <a:noFill/>
-        </p:spPr>
-        <p:txBody>
-          <a:bodyPr wrap="square" lIns="0" rIns="0" tIns="0" bIns="0">
-            <a:spAutoFit/>
-          </a:bodyPr>
-          <a:lstStyle/>
-          <a:p>
-            <a:r>
-              <a:rPr sz="900" b="0">
-                <a:solidFill>
-                  <a:srgbClr val="6B7082"/>
-                </a:solidFill>
-                <a:latin typeface="Helvetica Neue"/>
-              </a:rPr>
-              <a:t>7,769 views · 15 posts · 518 avg</a:t>
-            </a:r>
-          </a:p>
-        </p:txBody>
-      </p:sp>
-      <p:sp>
-        <p:nvSpPr>
-          <p:cNvPr id="13" name="TextBox 12"/>
-          <p:cNvSpPr txBox="1"/>
-          <p:nvPr/>
-        </p:nvSpPr>
-        <p:spPr>
-          <a:xfrm>
-            <a:off x="4961349" y="2857499"/>
-            <a:ext cx="4572000" cy="251460"/>
-          </a:xfrm>
-          <a:prstGeom prst="rect">
-            <a:avLst/>
-          </a:prstGeom>
-          <a:noFill/>
-        </p:spPr>
-        <p:txBody>
-          <a:bodyPr wrap="square" lIns="0" rIns="0" tIns="0" bIns="0">
-            <a:spAutoFit/>
-          </a:bodyPr>
-          <a:lstStyle/>
-          <a:p>
-            <a:r>
-              <a:rPr sz="800" b="0">
-                <a:solidFill>
-                  <a:srgbClr val="6B7082"/>
-                </a:solidFill>
-                <a:latin typeface="Helvetica Neue"/>
-              </a:rPr>
-              <a:t>Traditional / patriotic · Older (55+), values-driven</a:t>
-            </a:r>
-          </a:p>
-        </p:txBody>
-      </p:sp>
-      <p:sp>
-        <p:nvSpPr>
-          <p:cNvPr id="14" name="TextBox 13"/>
-          <p:cNvSpPr txBox="1"/>
-          <p:nvPr/>
-        </p:nvSpPr>
-        <p:spPr>
-          <a:xfrm>
-            <a:off x="731520" y="3154679"/>
-            <a:ext cx="3200400" cy="502920"/>
-          </a:xfrm>
-          <a:prstGeom prst="rect">
-            <a:avLst/>
-          </a:prstGeom>
-          <a:noFill/>
-        </p:spPr>
-        <p:txBody>
-          <a:bodyPr wrap="square" lIns="0" rIns="0" tIns="0" bIns="0">
-            <a:spAutoFit/>
-          </a:bodyPr>
-          <a:lstStyle/>
-          <a:p>
-            <a:r>
-              <a:rPr sz="1200" b="1">
-                <a:solidFill>
-                  <a:srgbClr val="141833"/>
-                </a:solidFill>
-                <a:latin typeface="Helvetica Neue"/>
-              </a:rPr>
-              <a:t>Legislation &amp; Policy Watch</a:t>
-            </a:r>
-          </a:p>
-        </p:txBody>
-      </p:sp>
-      <p:sp>
-        <p:nvSpPr>
-          <p:cNvPr id="15" name="Rectangle 14"/>
-          <p:cNvSpPr/>
-          <p:nvPr/>
-        </p:nvSpPr>
-        <p:spPr>
-          <a:xfrm>
-            <a:off x="4206240" y="3223260"/>
-            <a:ext cx="528953" cy="274320"/>
-          </a:xfrm>
-          <a:prstGeom prst="rect">
-            <a:avLst/>
-          </a:prstGeom>
-          <a:solidFill>
-            <a:srgbClr val="2F3C7E"/>
-          </a:solidFill>
-          <a:ln>
-            <a:noFill/>
-          </a:ln>
-          <a:effectLst/>
-        </p:spPr>
-        <p:style>
-          <a:lnRef idx="1">
-            <a:schemeClr val="accent1"/>
-          </a:lnRef>
-          <a:fillRef idx="3">
-            <a:schemeClr val="accent1"/>
-          </a:fillRef>
-          <a:effectRef idx="2">
-            <a:schemeClr val="accent1"/>
-          </a:effectRef>
-          <a:fontRef idx="minor">
-            <a:schemeClr val="lt1"/>
-          </a:fontRef>
-        </p:style>
-        <p:txBody>
-          <a:bodyPr rtlCol="0" anchor="ctr"/>
-          <a:lstStyle/>
-          <a:p>
-            <a:pPr algn="ctr"/>
-          </a:p>
-        </p:txBody>
-      </p:sp>
-      <p:sp>
-        <p:nvSpPr>
-          <p:cNvPr id="16" name="TextBox 15"/>
-          <p:cNvSpPr txBox="1"/>
-          <p:nvPr/>
-        </p:nvSpPr>
-        <p:spPr>
-          <a:xfrm>
-            <a:off x="4826633" y="3154679"/>
-            <a:ext cx="2286000" cy="251460"/>
-          </a:xfrm>
-          <a:prstGeom prst="rect">
-            <a:avLst/>
-          </a:prstGeom>
-          <a:noFill/>
-        </p:spPr>
-        <p:txBody>
-          <a:bodyPr wrap="square" lIns="0" rIns="0" tIns="0" bIns="0">
-            <a:spAutoFit/>
-          </a:bodyPr>
-          <a:lstStyle/>
-          <a:p>
-            <a:r>
-              <a:rPr sz="900" b="0">
-                <a:solidFill>
-                  <a:srgbClr val="6B7082"/>
-                </a:solidFill>
-                <a:latin typeface="Helvetica Neue"/>
-              </a:rPr>
-              <a:t>6,192 views · 13 posts · 476 avg</a:t>
-            </a:r>
-          </a:p>
-        </p:txBody>
-      </p:sp>
-      <p:sp>
-        <p:nvSpPr>
-          <p:cNvPr id="17" name="TextBox 16"/>
-          <p:cNvSpPr txBox="1"/>
-          <p:nvPr/>
-        </p:nvSpPr>
-        <p:spPr>
-          <a:xfrm>
-            <a:off x="4826633" y="3360420"/>
-            <a:ext cx="4572000" cy="251460"/>
-          </a:xfrm>
-          <a:prstGeom prst="rect">
-            <a:avLst/>
-          </a:prstGeom>
-          <a:noFill/>
-        </p:spPr>
-        <p:txBody>
-          <a:bodyPr wrap="square" lIns="0" rIns="0" tIns="0" bIns="0">
-            <a:spAutoFit/>
-          </a:bodyPr>
-          <a:lstStyle/>
-          <a:p>
-            <a:r>
-              <a:rPr sz="800" b="0">
-                <a:solidFill>
-                  <a:srgbClr val="6B7082"/>
-                </a:solidFill>
-                <a:latin typeface="Helvetica Neue"/>
-              </a:rPr>
-              <a:t>Slow-burn policy · Older (55+), civic-engaged</a:t>
-            </a:r>
-          </a:p>
-        </p:txBody>
-      </p:sp>
-      <p:sp>
-        <p:nvSpPr>
-          <p:cNvPr id="18" name="TextBox 17"/>
-          <p:cNvSpPr txBox="1"/>
-          <p:nvPr/>
-        </p:nvSpPr>
-        <p:spPr>
-          <a:xfrm>
-            <a:off x="731520" y="6263640"/>
-            <a:ext cx="10698480" cy="457200"/>
-          </a:xfrm>
-          <a:prstGeom prst="rect">
-            <a:avLst/>
-          </a:prstGeom>
-          <a:noFill/>
-        </p:spPr>
-        <p:txBody>
-          <a:bodyPr wrap="square" lIns="0" rIns="0" tIns="0" bIns="0">
-            <a:spAutoFit/>
-          </a:bodyPr>
-          <a:lstStyle/>
-          <a:p>
-            <a:r>
-              <a:rPr sz="1200" b="1">
-                <a:solidFill>
-                  <a:srgbClr val="141833"/>
-                </a:solidFill>
-                <a:latin typeface="Helvetica Neue"/>
-              </a:rPr>
-              <a:t>Don't retire these based on volume alone — small consistent posting builds audience over months, not weeks.</a:t>
+          <p:cNvPr id="4" name="TextBox 3"/>
+          <p:cNvSpPr txBox="1"/>
+          <p:nvPr/>
+        </p:nvSpPr>
+        <p:spPr>
+          <a:xfrm>
+            <a:off x="914400" y="2377440"/>
+            <a:ext cx="10058400" cy="457200"/>
+          </a:xfrm>
+          <a:prstGeom prst="rect">
+            <a:avLst/>
+          </a:prstGeom>
+          <a:noFill/>
+        </p:spPr>
+        <p:txBody>
+          <a:bodyPr wrap="square" lIns="0" rIns="0" tIns="0" bIns="0">
+            <a:spAutoFit/>
+          </a:bodyPr>
+          <a:lstStyle/>
+          <a:p>
+            <a:r>
+              <a:rPr sz="1600" b="1">
+                <a:solidFill>
+                  <a:srgbClr val="2E86AB"/>
+                </a:solidFill>
+                <a:latin typeface="Helvetica Neue"/>
+              </a:rPr>
+              <a:t>SECTION 2 OF 2</a:t>
+            </a:r>
+          </a:p>
+        </p:txBody>
+      </p:sp>
+      <p:sp>
+        <p:nvSpPr>
+          <p:cNvPr id="5" name="TextBox 4"/>
+          <p:cNvSpPr txBox="1"/>
+          <p:nvPr/>
+        </p:nvSpPr>
+        <p:spPr>
+          <a:xfrm>
+            <a:off x="914400" y="2834640"/>
+            <a:ext cx="10058400" cy="1371600"/>
+          </a:xfrm>
+          <a:prstGeom prst="rect">
+            <a:avLst/>
+          </a:prstGeom>
+          <a:noFill/>
+        </p:spPr>
+        <p:txBody>
+          <a:bodyPr wrap="square" lIns="0" rIns="0" tIns="0" bIns="0">
+            <a:spAutoFit/>
+          </a:bodyPr>
+          <a:lstStyle/>
+          <a:p>
+            <a:r>
+              <a:rPr sz="6400" b="1">
+                <a:solidFill>
+                  <a:srgbClr val="FFFFFF"/>
+                </a:solidFill>
+                <a:latin typeface="Georgia"/>
+              </a:rPr>
+              <a:t>Worth watching</a:t>
+            </a:r>
+          </a:p>
+        </p:txBody>
+      </p:sp>
+      <p:sp>
+        <p:nvSpPr>
+          <p:cNvPr id="6" name="TextBox 5"/>
+          <p:cNvSpPr txBox="1"/>
+          <p:nvPr/>
+        </p:nvSpPr>
+        <p:spPr>
+          <a:xfrm>
+            <a:off x="914400" y="4206240"/>
+            <a:ext cx="10058400" cy="548640"/>
+          </a:xfrm>
+          <a:prstGeom prst="rect">
+            <a:avLst/>
+          </a:prstGeom>
+          <a:noFill/>
+        </p:spPr>
+        <p:txBody>
+          <a:bodyPr wrap="square" lIns="0" rIns="0" tIns="0" bIns="0">
+            <a:spAutoFit/>
+          </a:bodyPr>
+          <a:lstStyle/>
+          <a:p>
+            <a:r>
+              <a:rPr sz="1800" b="0">
+                <a:solidFill>
+                  <a:srgbClr val="FCF6F5"/>
+                </a:solidFill>
+                <a:latin typeface="Helvetica Neue"/>
+              </a:rPr>
+              <a:t>2 smaller lanes still building audience. Real potential, low volume — don't retire prematurely.</a:t>
             </a:r>
           </a:p>
         </p:txBody>
@@ -7477,7 +7877,7 @@
                 </a:solidFill>
                 <a:latin typeface="Helvetica Neue"/>
               </a:rPr>
-              <a:t>CATEGORY DEEP-DIVE</a:t>
+              <a:t>WORTH WATCHING</a:t>
             </a:r>
           </a:p>
         </p:txBody>
@@ -7511,7 +7911,7 @@
                 </a:solidFill>
                 <a:latin typeface="Georgia"/>
               </a:rPr>
-              <a:t>Elections &amp; Judicial</a:t>
+              <a:t>Small lanes that could develop into something</a:t>
             </a:r>
           </a:p>
         </p:txBody>
@@ -7545,7 +7945,7 @@
                 </a:solidFill>
                 <a:latin typeface="Helvetica Neue"/>
               </a:rPr>
-              <a:t>Coverage of campaigns, courts, and local government.</a:t>
+              <a:t>Low volume today, but real audience potential. Don't kill these before they get their shot.</a:t>
             </a:r>
           </a:p>
         </p:txBody>
@@ -7558,28 +7958,28 @@
         </p:nvSpPr>
         <p:spPr>
           <a:xfrm>
-            <a:off x="731520" y="1691640"/>
-            <a:ext cx="10698480" cy="274320"/>
-          </a:xfrm>
-          <a:prstGeom prst="rect">
-            <a:avLst/>
-          </a:prstGeom>
-          <a:noFill/>
-        </p:spPr>
-        <p:txBody>
-          <a:bodyPr wrap="square" lIns="0" rIns="0" tIns="0" bIns="0">
-            <a:spAutoFit/>
-          </a:bodyPr>
-          <a:lstStyle/>
-          <a:p>
-            <a:r>
-              <a:rPr sz="900" b="1">
-                <a:solidFill>
-                  <a:srgbClr val="2F3C7E"/>
-                </a:solidFill>
-                <a:latin typeface="Helvetica Neue"/>
-              </a:rPr>
-              <a:t>AUDIENCE (theoretical): Slow-burn policy · Middle (40-55) + Older (55+) engaged voters</a:t>
+            <a:off x="731520" y="2148839"/>
+            <a:ext cx="3200400" cy="502920"/>
+          </a:xfrm>
+          <a:prstGeom prst="rect">
+            <a:avLst/>
+          </a:prstGeom>
+          <a:noFill/>
+        </p:spPr>
+        <p:txBody>
+          <a:bodyPr wrap="square" lIns="0" rIns="0" tIns="0" bIns="0">
+            <a:spAutoFit/>
+          </a:bodyPr>
+          <a:lstStyle/>
+          <a:p>
+            <a:r>
+              <a:rPr sz="1200" b="1">
+                <a:solidFill>
+                  <a:srgbClr val="141833"/>
+                </a:solidFill>
+                <a:latin typeface="Helvetica Neue"/>
+              </a:rPr>
+              <a:t>American Pride</a:t>
             </a:r>
           </a:p>
         </p:txBody>
@@ -7592,14 +7992,14 @@
         </p:nvSpPr>
         <p:spPr>
           <a:xfrm>
-            <a:off x="731520" y="2194560"/>
-            <a:ext cx="5029200" cy="3200400"/>
+            <a:off x="4206240" y="2217420"/>
+            <a:ext cx="6035040" cy="274320"/>
           </a:xfrm>
           <a:prstGeom prst="rect">
             <a:avLst/>
           </a:prstGeom>
           <a:solidFill>
-            <a:srgbClr val="FFFFFF"/>
+            <a:srgbClr val="990011"/>
           </a:solidFill>
           <a:ln>
             <a:noFill/>
@@ -7630,14 +8030,116 @@
       </p:sp>
       <p:sp>
         <p:nvSpPr>
-          <p:cNvPr id="8" name="Rectangle 7"/>
+          <p:cNvPr id="8" name="TextBox 7"/>
+          <p:cNvSpPr txBox="1"/>
+          <p:nvPr/>
+        </p:nvSpPr>
+        <p:spPr>
+          <a:xfrm>
+            <a:off x="10332719" y="2148839"/>
+            <a:ext cx="2286000" cy="251460"/>
+          </a:xfrm>
+          <a:prstGeom prst="rect">
+            <a:avLst/>
+          </a:prstGeom>
+          <a:noFill/>
+        </p:spPr>
+        <p:txBody>
+          <a:bodyPr wrap="square" lIns="0" rIns="0" tIns="0" bIns="0">
+            <a:spAutoFit/>
+          </a:bodyPr>
+          <a:lstStyle/>
+          <a:p>
+            <a:r>
+              <a:rPr sz="900" b="0">
+                <a:solidFill>
+                  <a:srgbClr val="6B7082"/>
+                </a:solidFill>
+                <a:latin typeface="Helvetica Neue"/>
+              </a:rPr>
+              <a:t>7,769 views · 15 posts · 518 avg</a:t>
+            </a:r>
+          </a:p>
+        </p:txBody>
+      </p:sp>
+      <p:sp>
+        <p:nvSpPr>
+          <p:cNvPr id="9" name="TextBox 8"/>
+          <p:cNvSpPr txBox="1"/>
+          <p:nvPr/>
+        </p:nvSpPr>
+        <p:spPr>
+          <a:xfrm>
+            <a:off x="10332719" y="2354579"/>
+            <a:ext cx="4572000" cy="251460"/>
+          </a:xfrm>
+          <a:prstGeom prst="rect">
+            <a:avLst/>
+          </a:prstGeom>
+          <a:noFill/>
+        </p:spPr>
+        <p:txBody>
+          <a:bodyPr wrap="square" lIns="0" rIns="0" tIns="0" bIns="0">
+            <a:spAutoFit/>
+          </a:bodyPr>
+          <a:lstStyle/>
+          <a:p>
+            <a:r>
+              <a:rPr sz="800" b="0">
+                <a:solidFill>
+                  <a:srgbClr val="6B7082"/>
+                </a:solidFill>
+                <a:latin typeface="Helvetica Neue"/>
+              </a:rPr>
+              <a:t>Traditional / patriotic · Older (55+), values-driven</a:t>
+            </a:r>
+          </a:p>
+        </p:txBody>
+      </p:sp>
+      <p:sp>
+        <p:nvSpPr>
+          <p:cNvPr id="10" name="TextBox 9"/>
+          <p:cNvSpPr txBox="1"/>
+          <p:nvPr/>
+        </p:nvSpPr>
+        <p:spPr>
+          <a:xfrm>
+            <a:off x="731520" y="2651759"/>
+            <a:ext cx="3200400" cy="502920"/>
+          </a:xfrm>
+          <a:prstGeom prst="rect">
+            <a:avLst/>
+          </a:prstGeom>
+          <a:noFill/>
+        </p:spPr>
+        <p:txBody>
+          <a:bodyPr wrap="square" lIns="0" rIns="0" tIns="0" bIns="0">
+            <a:spAutoFit/>
+          </a:bodyPr>
+          <a:lstStyle/>
+          <a:p>
+            <a:r>
+              <a:rPr sz="1200" b="1">
+                <a:solidFill>
+                  <a:srgbClr val="141833"/>
+                </a:solidFill>
+                <a:latin typeface="Helvetica Neue"/>
+              </a:rPr>
+              <a:t>Legislation &amp; Policy Watch</a:t>
+            </a:r>
+          </a:p>
+        </p:txBody>
+      </p:sp>
+      <p:sp>
+        <p:nvSpPr>
+          <p:cNvPr id="11" name="Rectangle 10"/>
           <p:cNvSpPr/>
           <p:nvPr/>
         </p:nvSpPr>
         <p:spPr>
           <a:xfrm>
-            <a:off x="731520" y="2194560"/>
-            <a:ext cx="91440" cy="3200400"/>
+            <a:off x="4206240" y="2720339"/>
+            <a:ext cx="4810009" cy="274320"/>
           </a:xfrm>
           <a:prstGeom prst="rect">
             <a:avLst/>
@@ -7674,750 +8176,102 @@
       </p:sp>
       <p:sp>
         <p:nvSpPr>
-          <p:cNvPr id="9" name="TextBox 8"/>
-          <p:cNvSpPr txBox="1"/>
-          <p:nvPr/>
-        </p:nvSpPr>
-        <p:spPr>
-          <a:xfrm>
-            <a:off x="960120" y="2377440"/>
-            <a:ext cx="4572000" cy="365760"/>
-          </a:xfrm>
-          <a:prstGeom prst="rect">
-            <a:avLst/>
-          </a:prstGeom>
-          <a:noFill/>
-        </p:spPr>
-        <p:txBody>
-          <a:bodyPr wrap="square" lIns="0" rIns="0" tIns="0" bIns="0">
-            <a:spAutoFit/>
-          </a:bodyPr>
-          <a:lstStyle/>
-          <a:p>
-            <a:r>
-              <a:rPr sz="1100" b="1">
-                <a:solidFill>
-                  <a:srgbClr val="2F3C7E"/>
-                </a:solidFill>
-                <a:latin typeface="Helvetica Neue"/>
-              </a:rPr>
-              <a:t>TOTAL VIEWS</a:t>
-            </a:r>
-          </a:p>
-        </p:txBody>
-      </p:sp>
-      <p:sp>
-        <p:nvSpPr>
-          <p:cNvPr id="10" name="TextBox 9"/>
-          <p:cNvSpPr txBox="1"/>
-          <p:nvPr/>
-        </p:nvSpPr>
-        <p:spPr>
-          <a:xfrm>
-            <a:off x="960120" y="2697480"/>
-            <a:ext cx="4572000" cy="1097280"/>
-          </a:xfrm>
-          <a:prstGeom prst="rect">
-            <a:avLst/>
-          </a:prstGeom>
-          <a:noFill/>
-        </p:spPr>
-        <p:txBody>
-          <a:bodyPr wrap="square" lIns="0" rIns="0" tIns="0" bIns="0">
-            <a:spAutoFit/>
-          </a:bodyPr>
-          <a:lstStyle/>
-          <a:p>
-            <a:r>
-              <a:rPr sz="5400" b="1">
-                <a:solidFill>
-                  <a:srgbClr val="2F3C7E"/>
-                </a:solidFill>
-                <a:latin typeface="Georgia"/>
-              </a:rPr>
-              <a:t>70,647</a:t>
-            </a:r>
-          </a:p>
-        </p:txBody>
-      </p:sp>
-      <p:sp>
-        <p:nvSpPr>
-          <p:cNvPr id="11" name="TextBox 10"/>
-          <p:cNvSpPr txBox="1"/>
-          <p:nvPr/>
-        </p:nvSpPr>
-        <p:spPr>
-          <a:xfrm>
-            <a:off x="960120" y="3840480"/>
-            <a:ext cx="4572000" cy="365760"/>
-          </a:xfrm>
-          <a:prstGeom prst="rect">
-            <a:avLst/>
-          </a:prstGeom>
-          <a:noFill/>
-        </p:spPr>
-        <p:txBody>
-          <a:bodyPr wrap="square" lIns="0" rIns="0" tIns="0" bIns="0">
-            <a:spAutoFit/>
-          </a:bodyPr>
-          <a:lstStyle/>
-          <a:p>
-            <a:r>
-              <a:rPr sz="1300" b="1">
+          <p:cNvPr id="12" name="TextBox 11"/>
+          <p:cNvSpPr txBox="1"/>
+          <p:nvPr/>
+        </p:nvSpPr>
+        <p:spPr>
+          <a:xfrm>
+            <a:off x="9107689" y="2651759"/>
+            <a:ext cx="2286000" cy="251460"/>
+          </a:xfrm>
+          <a:prstGeom prst="rect">
+            <a:avLst/>
+          </a:prstGeom>
+          <a:noFill/>
+        </p:spPr>
+        <p:txBody>
+          <a:bodyPr wrap="square" lIns="0" rIns="0" tIns="0" bIns="0">
+            <a:spAutoFit/>
+          </a:bodyPr>
+          <a:lstStyle/>
+          <a:p>
+            <a:r>
+              <a:rPr sz="900" b="0">
+                <a:solidFill>
+                  <a:srgbClr val="6B7082"/>
+                </a:solidFill>
+                <a:latin typeface="Helvetica Neue"/>
+              </a:rPr>
+              <a:t>6,192 views · 13 posts · 476 avg</a:t>
+            </a:r>
+          </a:p>
+        </p:txBody>
+      </p:sp>
+      <p:sp>
+        <p:nvSpPr>
+          <p:cNvPr id="13" name="TextBox 12"/>
+          <p:cNvSpPr txBox="1"/>
+          <p:nvPr/>
+        </p:nvSpPr>
+        <p:spPr>
+          <a:xfrm>
+            <a:off x="9107689" y="2857499"/>
+            <a:ext cx="4572000" cy="251460"/>
+          </a:xfrm>
+          <a:prstGeom prst="rect">
+            <a:avLst/>
+          </a:prstGeom>
+          <a:noFill/>
+        </p:spPr>
+        <p:txBody>
+          <a:bodyPr wrap="square" lIns="0" rIns="0" tIns="0" bIns="0">
+            <a:spAutoFit/>
+          </a:bodyPr>
+          <a:lstStyle/>
+          <a:p>
+            <a:r>
+              <a:rPr sz="800" b="0">
+                <a:solidFill>
+                  <a:srgbClr val="6B7082"/>
+                </a:solidFill>
+                <a:latin typeface="Helvetica Neue"/>
+              </a:rPr>
+              <a:t>Slow-burn policy · Older (55+), civic-engaged</a:t>
+            </a:r>
+          </a:p>
+        </p:txBody>
+      </p:sp>
+      <p:sp>
+        <p:nvSpPr>
+          <p:cNvPr id="14" name="TextBox 13"/>
+          <p:cNvSpPr txBox="1"/>
+          <p:nvPr/>
+        </p:nvSpPr>
+        <p:spPr>
+          <a:xfrm>
+            <a:off x="731520" y="6263640"/>
+            <a:ext cx="10698480" cy="457200"/>
+          </a:xfrm>
+          <a:prstGeom prst="rect">
+            <a:avLst/>
+          </a:prstGeom>
+          <a:noFill/>
+        </p:spPr>
+        <p:txBody>
+          <a:bodyPr wrap="square" lIns="0" rIns="0" tIns="0" bIns="0">
+            <a:spAutoFit/>
+          </a:bodyPr>
+          <a:lstStyle/>
+          <a:p>
+            <a:r>
+              <a:rPr sz="1200" b="1">
                 <a:solidFill>
                   <a:srgbClr val="141833"/>
                 </a:solidFill>
                 <a:latin typeface="Helvetica Neue"/>
               </a:rPr>
-              <a:t>89 posts · 1,535 likes</a:t>
-            </a:r>
-          </a:p>
-        </p:txBody>
-      </p:sp>
-      <p:sp>
-        <p:nvSpPr>
-          <p:cNvPr id="12" name="TextBox 11"/>
-          <p:cNvSpPr txBox="1"/>
-          <p:nvPr/>
-        </p:nvSpPr>
-        <p:spPr>
-          <a:xfrm>
-            <a:off x="960120" y="4206240"/>
-            <a:ext cx="4572000" cy="365760"/>
-          </a:xfrm>
-          <a:prstGeom prst="rect">
-            <a:avLst/>
-          </a:prstGeom>
-          <a:noFill/>
-        </p:spPr>
-        <p:txBody>
-          <a:bodyPr wrap="square" lIns="0" rIns="0" tIns="0" bIns="0">
-            <a:spAutoFit/>
-          </a:bodyPr>
-          <a:lstStyle/>
-          <a:p>
-            <a:r>
-              <a:rPr sz="1300" b="0">
-                <a:solidFill>
-                  <a:srgbClr val="6B7082"/>
-                </a:solidFill>
-                <a:latin typeface="Helvetica Neue"/>
-              </a:rPr>
-              <a:t>794 average views per post</a:t>
-            </a:r>
-          </a:p>
-        </p:txBody>
-      </p:sp>
-      <p:sp>
-        <p:nvSpPr>
-          <p:cNvPr id="13" name="TextBox 12"/>
-          <p:cNvSpPr txBox="1"/>
-          <p:nvPr/>
-        </p:nvSpPr>
-        <p:spPr>
-          <a:xfrm>
-            <a:off x="6126480" y="2194560"/>
-            <a:ext cx="5486400" cy="274320"/>
-          </a:xfrm>
-          <a:prstGeom prst="rect">
-            <a:avLst/>
-          </a:prstGeom>
-          <a:noFill/>
-        </p:spPr>
-        <p:txBody>
-          <a:bodyPr wrap="square" lIns="0" rIns="0" tIns="0" bIns="0">
-            <a:spAutoFit/>
-          </a:bodyPr>
-          <a:lstStyle/>
-          <a:p>
-            <a:r>
-              <a:rPr sz="1100" b="1">
-                <a:solidFill>
-                  <a:srgbClr val="2F3C7E"/>
-                </a:solidFill>
-                <a:latin typeface="Helvetica Neue"/>
-              </a:rPr>
-              <a:t>TOP 3 IN THIS CATEGORY</a:t>
-            </a:r>
-          </a:p>
-        </p:txBody>
-      </p:sp>
-      <p:sp>
-        <p:nvSpPr>
-          <p:cNvPr id="14" name="Rectangle 13"/>
-          <p:cNvSpPr/>
-          <p:nvPr/>
-        </p:nvSpPr>
-        <p:spPr>
-          <a:xfrm>
-            <a:off x="6126480" y="2560320"/>
-            <a:ext cx="5303520" cy="822960"/>
-          </a:xfrm>
-          <a:prstGeom prst="rect">
-            <a:avLst/>
-          </a:prstGeom>
-          <a:solidFill>
-            <a:srgbClr val="FFFFFF"/>
-          </a:solidFill>
-          <a:ln>
-            <a:noFill/>
-          </a:ln>
-          <a:effectLst/>
-        </p:spPr>
-        <p:style>
-          <a:lnRef idx="1">
-            <a:schemeClr val="accent1"/>
-          </a:lnRef>
-          <a:fillRef idx="3">
-            <a:schemeClr val="accent1"/>
-          </a:fillRef>
-          <a:effectRef idx="2">
-            <a:schemeClr val="accent1"/>
-          </a:effectRef>
-          <a:fontRef idx="minor">
-            <a:schemeClr val="lt1"/>
-          </a:fontRef>
-        </p:style>
-        <p:txBody>
-          <a:bodyPr rtlCol="0" anchor="ctr"/>
-          <a:lstStyle/>
-          <a:p>
-            <a:pPr algn="ctr"/>
-          </a:p>
-        </p:txBody>
-      </p:sp>
-      <p:sp>
-        <p:nvSpPr>
-          <p:cNvPr id="15" name="Rectangle 14"/>
-          <p:cNvSpPr/>
-          <p:nvPr/>
-        </p:nvSpPr>
-        <p:spPr>
-          <a:xfrm>
-            <a:off x="6126480" y="2560320"/>
-            <a:ext cx="54864" cy="822960"/>
-          </a:xfrm>
-          <a:prstGeom prst="rect">
-            <a:avLst/>
-          </a:prstGeom>
-          <a:solidFill>
-            <a:srgbClr val="2F3C7E"/>
-          </a:solidFill>
-          <a:ln>
-            <a:noFill/>
-          </a:ln>
-          <a:effectLst/>
-        </p:spPr>
-        <p:style>
-          <a:lnRef idx="1">
-            <a:schemeClr val="accent1"/>
-          </a:lnRef>
-          <a:fillRef idx="3">
-            <a:schemeClr val="accent1"/>
-          </a:fillRef>
-          <a:effectRef idx="2">
-            <a:schemeClr val="accent1"/>
-          </a:effectRef>
-          <a:fontRef idx="minor">
-            <a:schemeClr val="lt1"/>
-          </a:fontRef>
-        </p:style>
-        <p:txBody>
-          <a:bodyPr rtlCol="0" anchor="ctr"/>
-          <a:lstStyle/>
-          <a:p>
-            <a:pPr algn="ctr"/>
-          </a:p>
-        </p:txBody>
-      </p:sp>
-      <p:sp>
-        <p:nvSpPr>
-          <p:cNvPr id="16" name="TextBox 15"/>
-          <p:cNvSpPr txBox="1"/>
-          <p:nvPr/>
-        </p:nvSpPr>
-        <p:spPr>
-          <a:xfrm>
-            <a:off x="6309360" y="2651760"/>
-            <a:ext cx="5029200" cy="320040"/>
-          </a:xfrm>
-          <a:prstGeom prst="rect">
-            <a:avLst/>
-          </a:prstGeom>
-          <a:noFill/>
-        </p:spPr>
-        <p:txBody>
-          <a:bodyPr wrap="square" lIns="0" rIns="0" tIns="0" bIns="0">
-            <a:spAutoFit/>
-          </a:bodyPr>
-          <a:lstStyle/>
-          <a:p>
-            <a:r>
-              <a:rPr sz="1000" b="1">
-                <a:solidFill>
-                  <a:srgbClr val="2F3C7E"/>
-                </a:solidFill>
-                <a:latin typeface="Helvetica Neue"/>
-              </a:rPr>
-              <a:t>#1  ·  FB  ·  11,662 views</a:t>
-            </a:r>
-          </a:p>
-        </p:txBody>
-      </p:sp>
-      <p:sp>
-        <p:nvSpPr>
-          <p:cNvPr id="17" name="TextBox 16"/>
-          <p:cNvSpPr txBox="1"/>
-          <p:nvPr/>
-        </p:nvSpPr>
-        <p:spPr>
-          <a:xfrm>
-            <a:off x="6309360" y="2944368"/>
-            <a:ext cx="5029200" cy="411480"/>
-          </a:xfrm>
-          <a:prstGeom prst="rect">
-            <a:avLst/>
-          </a:prstGeom>
-          <a:noFill/>
-        </p:spPr>
-        <p:txBody>
-          <a:bodyPr wrap="square" lIns="0" rIns="0" tIns="0" bIns="0">
-            <a:spAutoFit/>
-          </a:bodyPr>
-          <a:lstStyle/>
-          <a:p>
-            <a:r>
-              <a:rPr sz="1000" b="0">
-                <a:solidFill>
-                  <a:srgbClr val="141833"/>
-                </a:solidFill>
-                <a:latin typeface="Helvetica Neue"/>
-              </a:rPr>
-              <a:t>Chaos erupted at a council meeting when Ms. Rivera began screaming, refusing to calm down </a:t>
-            </a:r>
-          </a:p>
-        </p:txBody>
-      </p:sp>
-      <p:sp>
-        <p:nvSpPr>
-          <p:cNvPr id="18" name="Rectangle 17"/>
-          <p:cNvSpPr/>
-          <p:nvPr/>
-        </p:nvSpPr>
-        <p:spPr>
-          <a:xfrm>
-            <a:off x="6126480" y="3474720"/>
-            <a:ext cx="5303520" cy="822960"/>
-          </a:xfrm>
-          <a:prstGeom prst="rect">
-            <a:avLst/>
-          </a:prstGeom>
-          <a:solidFill>
-            <a:srgbClr val="FFFFFF"/>
-          </a:solidFill>
-          <a:ln>
-            <a:noFill/>
-          </a:ln>
-          <a:effectLst/>
-        </p:spPr>
-        <p:style>
-          <a:lnRef idx="1">
-            <a:schemeClr val="accent1"/>
-          </a:lnRef>
-          <a:fillRef idx="3">
-            <a:schemeClr val="accent1"/>
-          </a:fillRef>
-          <a:effectRef idx="2">
-            <a:schemeClr val="accent1"/>
-          </a:effectRef>
-          <a:fontRef idx="minor">
-            <a:schemeClr val="lt1"/>
-          </a:fontRef>
-        </p:style>
-        <p:txBody>
-          <a:bodyPr rtlCol="0" anchor="ctr"/>
-          <a:lstStyle/>
-          <a:p>
-            <a:pPr algn="ctr"/>
-          </a:p>
-        </p:txBody>
-      </p:sp>
-      <p:sp>
-        <p:nvSpPr>
-          <p:cNvPr id="19" name="Rectangle 18"/>
-          <p:cNvSpPr/>
-          <p:nvPr/>
-        </p:nvSpPr>
-        <p:spPr>
-          <a:xfrm>
-            <a:off x="6126480" y="3474720"/>
-            <a:ext cx="54864" cy="822960"/>
-          </a:xfrm>
-          <a:prstGeom prst="rect">
-            <a:avLst/>
-          </a:prstGeom>
-          <a:solidFill>
-            <a:srgbClr val="2F3C7E"/>
-          </a:solidFill>
-          <a:ln>
-            <a:noFill/>
-          </a:ln>
-          <a:effectLst/>
-        </p:spPr>
-        <p:style>
-          <a:lnRef idx="1">
-            <a:schemeClr val="accent1"/>
-          </a:lnRef>
-          <a:fillRef idx="3">
-            <a:schemeClr val="accent1"/>
-          </a:fillRef>
-          <a:effectRef idx="2">
-            <a:schemeClr val="accent1"/>
-          </a:effectRef>
-          <a:fontRef idx="minor">
-            <a:schemeClr val="lt1"/>
-          </a:fontRef>
-        </p:style>
-        <p:txBody>
-          <a:bodyPr rtlCol="0" anchor="ctr"/>
-          <a:lstStyle/>
-          <a:p>
-            <a:pPr algn="ctr"/>
-          </a:p>
-        </p:txBody>
-      </p:sp>
-      <p:sp>
-        <p:nvSpPr>
-          <p:cNvPr id="20" name="TextBox 19"/>
-          <p:cNvSpPr txBox="1"/>
-          <p:nvPr/>
-        </p:nvSpPr>
-        <p:spPr>
-          <a:xfrm>
-            <a:off x="6309360" y="3566160"/>
-            <a:ext cx="5029200" cy="320040"/>
-          </a:xfrm>
-          <a:prstGeom prst="rect">
-            <a:avLst/>
-          </a:prstGeom>
-          <a:noFill/>
-        </p:spPr>
-        <p:txBody>
-          <a:bodyPr wrap="square" lIns="0" rIns="0" tIns="0" bIns="0">
-            <a:spAutoFit/>
-          </a:bodyPr>
-          <a:lstStyle/>
-          <a:p>
-            <a:r>
-              <a:rPr sz="1000" b="1">
-                <a:solidFill>
-                  <a:srgbClr val="2F3C7E"/>
-                </a:solidFill>
-                <a:latin typeface="Helvetica Neue"/>
-              </a:rPr>
-              <a:t>#2  ·  FB  ·  5,812 views</a:t>
-            </a:r>
-          </a:p>
-        </p:txBody>
-      </p:sp>
-      <p:sp>
-        <p:nvSpPr>
-          <p:cNvPr id="21" name="TextBox 20"/>
-          <p:cNvSpPr txBox="1"/>
-          <p:nvPr/>
-        </p:nvSpPr>
-        <p:spPr>
-          <a:xfrm>
-            <a:off x="6309360" y="3858768"/>
-            <a:ext cx="5029200" cy="411480"/>
-          </a:xfrm>
-          <a:prstGeom prst="rect">
-            <a:avLst/>
-          </a:prstGeom>
-          <a:noFill/>
-        </p:spPr>
-        <p:txBody>
-          <a:bodyPr wrap="square" lIns="0" rIns="0" tIns="0" bIns="0">
-            <a:spAutoFit/>
-          </a:bodyPr>
-          <a:lstStyle/>
-          <a:p>
-            <a:r>
-              <a:rPr sz="1000" b="0">
-                <a:solidFill>
-                  <a:srgbClr val="141833"/>
-                </a:solidFill>
-                <a:latin typeface="Helvetica Neue"/>
-              </a:rPr>
-              <a:t>Tensions flared at the city council meeting as a woman repeatedly defied the mayor's reque</a:t>
-            </a:r>
-          </a:p>
-        </p:txBody>
-      </p:sp>
-      <p:sp>
-        <p:nvSpPr>
-          <p:cNvPr id="22" name="Rectangle 21"/>
-          <p:cNvSpPr/>
-          <p:nvPr/>
-        </p:nvSpPr>
-        <p:spPr>
-          <a:xfrm>
-            <a:off x="6126480" y="4389120"/>
-            <a:ext cx="5303520" cy="822960"/>
-          </a:xfrm>
-          <a:prstGeom prst="rect">
-            <a:avLst/>
-          </a:prstGeom>
-          <a:solidFill>
-            <a:srgbClr val="FFFFFF"/>
-          </a:solidFill>
-          <a:ln>
-            <a:noFill/>
-          </a:ln>
-          <a:effectLst/>
-        </p:spPr>
-        <p:style>
-          <a:lnRef idx="1">
-            <a:schemeClr val="accent1"/>
-          </a:lnRef>
-          <a:fillRef idx="3">
-            <a:schemeClr val="accent1"/>
-          </a:fillRef>
-          <a:effectRef idx="2">
-            <a:schemeClr val="accent1"/>
-          </a:effectRef>
-          <a:fontRef idx="minor">
-            <a:schemeClr val="lt1"/>
-          </a:fontRef>
-        </p:style>
-        <p:txBody>
-          <a:bodyPr rtlCol="0" anchor="ctr"/>
-          <a:lstStyle/>
-          <a:p>
-            <a:pPr algn="ctr"/>
-          </a:p>
-        </p:txBody>
-      </p:sp>
-      <p:sp>
-        <p:nvSpPr>
-          <p:cNvPr id="23" name="Rectangle 22"/>
-          <p:cNvSpPr/>
-          <p:nvPr/>
-        </p:nvSpPr>
-        <p:spPr>
-          <a:xfrm>
-            <a:off x="6126480" y="4389120"/>
-            <a:ext cx="54864" cy="822960"/>
-          </a:xfrm>
-          <a:prstGeom prst="rect">
-            <a:avLst/>
-          </a:prstGeom>
-          <a:solidFill>
-            <a:srgbClr val="2F3C7E"/>
-          </a:solidFill>
-          <a:ln>
-            <a:noFill/>
-          </a:ln>
-          <a:effectLst/>
-        </p:spPr>
-        <p:style>
-          <a:lnRef idx="1">
-            <a:schemeClr val="accent1"/>
-          </a:lnRef>
-          <a:fillRef idx="3">
-            <a:schemeClr val="accent1"/>
-          </a:fillRef>
-          <a:effectRef idx="2">
-            <a:schemeClr val="accent1"/>
-          </a:effectRef>
-          <a:fontRef idx="minor">
-            <a:schemeClr val="lt1"/>
-          </a:fontRef>
-        </p:style>
-        <p:txBody>
-          <a:bodyPr rtlCol="0" anchor="ctr"/>
-          <a:lstStyle/>
-          <a:p>
-            <a:pPr algn="ctr"/>
-          </a:p>
-        </p:txBody>
-      </p:sp>
-      <p:sp>
-        <p:nvSpPr>
-          <p:cNvPr id="24" name="TextBox 23"/>
-          <p:cNvSpPr txBox="1"/>
-          <p:nvPr/>
-        </p:nvSpPr>
-        <p:spPr>
-          <a:xfrm>
-            <a:off x="6309360" y="4480559"/>
-            <a:ext cx="5029200" cy="320040"/>
-          </a:xfrm>
-          <a:prstGeom prst="rect">
-            <a:avLst/>
-          </a:prstGeom>
-          <a:noFill/>
-        </p:spPr>
-        <p:txBody>
-          <a:bodyPr wrap="square" lIns="0" rIns="0" tIns="0" bIns="0">
-            <a:spAutoFit/>
-          </a:bodyPr>
-          <a:lstStyle/>
-          <a:p>
-            <a:r>
-              <a:rPr sz="1000" b="1">
-                <a:solidFill>
-                  <a:srgbClr val="2F3C7E"/>
-                </a:solidFill>
-                <a:latin typeface="Helvetica Neue"/>
-              </a:rPr>
-              <a:t>#3  ·  IG  ·  4,046 views</a:t>
-            </a:r>
-          </a:p>
-        </p:txBody>
-      </p:sp>
-      <p:sp>
-        <p:nvSpPr>
-          <p:cNvPr id="25" name="TextBox 24"/>
-          <p:cNvSpPr txBox="1"/>
-          <p:nvPr/>
-        </p:nvSpPr>
-        <p:spPr>
-          <a:xfrm>
-            <a:off x="6309360" y="4773168"/>
-            <a:ext cx="5029200" cy="411480"/>
-          </a:xfrm>
-          <a:prstGeom prst="rect">
-            <a:avLst/>
-          </a:prstGeom>
-          <a:noFill/>
-        </p:spPr>
-        <p:txBody>
-          <a:bodyPr wrap="square" lIns="0" rIns="0" tIns="0" bIns="0">
-            <a:spAutoFit/>
-          </a:bodyPr>
-          <a:lstStyle/>
-          <a:p>
-            <a:r>
-              <a:rPr sz="1000" b="0">
-                <a:solidFill>
-                  <a:srgbClr val="141833"/>
-                </a:solidFill>
-                <a:latin typeface="Helvetica Neue"/>
-              </a:rPr>
-              <a:t>A candidate's DSA membership raises questions about their loyalties. Pledging to 'co-gover</a:t>
-            </a:r>
-          </a:p>
-        </p:txBody>
-      </p:sp>
-      <p:sp>
-        <p:nvSpPr>
-          <p:cNvPr id="26" name="Rectangle 25"/>
-          <p:cNvSpPr/>
-          <p:nvPr/>
-        </p:nvSpPr>
-        <p:spPr>
-          <a:xfrm>
-            <a:off x="731520" y="5623560"/>
-            <a:ext cx="10698480" cy="731520"/>
-          </a:xfrm>
-          <a:prstGeom prst="rect">
-            <a:avLst/>
-          </a:prstGeom>
-          <a:solidFill>
-            <a:srgbClr val="141833"/>
-          </a:solidFill>
-          <a:ln>
-            <a:noFill/>
-          </a:ln>
-          <a:effectLst/>
-        </p:spPr>
-        <p:style>
-          <a:lnRef idx="1">
-            <a:schemeClr val="accent1"/>
-          </a:lnRef>
-          <a:fillRef idx="3">
-            <a:schemeClr val="accent1"/>
-          </a:fillRef>
-          <a:effectRef idx="2">
-            <a:schemeClr val="accent1"/>
-          </a:effectRef>
-          <a:fontRef idx="minor">
-            <a:schemeClr val="lt1"/>
-          </a:fontRef>
-        </p:style>
-        <p:txBody>
-          <a:bodyPr rtlCol="0" anchor="ctr"/>
-          <a:lstStyle/>
-          <a:p>
-            <a:pPr algn="ctr"/>
-          </a:p>
-        </p:txBody>
-      </p:sp>
-      <p:sp>
-        <p:nvSpPr>
-          <p:cNvPr id="27" name="TextBox 26"/>
-          <p:cNvSpPr txBox="1"/>
-          <p:nvPr/>
-        </p:nvSpPr>
-        <p:spPr>
-          <a:xfrm>
-            <a:off x="914400" y="5715000"/>
-            <a:ext cx="2743200" cy="274320"/>
-          </a:xfrm>
-          <a:prstGeom prst="rect">
-            <a:avLst/>
-          </a:prstGeom>
-          <a:noFill/>
-        </p:spPr>
-        <p:txBody>
-          <a:bodyPr wrap="square" lIns="0" rIns="0" tIns="0" bIns="0">
-            <a:spAutoFit/>
-          </a:bodyPr>
-          <a:lstStyle/>
-          <a:p>
-            <a:r>
-              <a:rPr sz="1000" b="1">
-                <a:solidFill>
-                  <a:srgbClr val="2F3C7E"/>
-                </a:solidFill>
-                <a:latin typeface="Helvetica Neue"/>
-              </a:rPr>
-              <a:t>RECOMMENDATION</a:t>
-            </a:r>
-          </a:p>
-        </p:txBody>
-      </p:sp>
-      <p:sp>
-        <p:nvSpPr>
-          <p:cNvPr id="28" name="TextBox 27"/>
-          <p:cNvSpPr txBox="1"/>
-          <p:nvPr/>
-        </p:nvSpPr>
-        <p:spPr>
-          <a:xfrm>
-            <a:off x="914400" y="5943600"/>
-            <a:ext cx="10515600" cy="365760"/>
-          </a:xfrm>
-          <a:prstGeom prst="rect">
-            <a:avLst/>
-          </a:prstGeom>
-          <a:noFill/>
-        </p:spPr>
-        <p:txBody>
-          <a:bodyPr wrap="square" lIns="0" rIns="0" tIns="0" bIns="0">
-            <a:spAutoFit/>
-          </a:bodyPr>
-          <a:lstStyle/>
-          <a:p>
-            <a:r>
-              <a:rPr sz="1300" b="1">
-                <a:solidFill>
-                  <a:srgbClr val="FCF6F5"/>
-                </a:solidFill>
-                <a:latin typeface="Helvetica Neue"/>
-              </a:rPr>
-              <a:t>Modest reach. Fine as filler between heavy hitters, not a headline lane.</a:t>
+              <a:t>Don't retire these based on volume alone — small consistent posting builds audience over months, not weeks.</a:t>
             </a:r>
           </a:p>
         </p:txBody>
@@ -11203,7 +11057,7 @@
                 </a:solidFill>
                 <a:latin typeface="Georgia"/>
               </a:rPr>
-              <a:t>93,815 views</a:t>
+              <a:t>93,817 views</a:t>
             </a:r>
           </a:p>
         </p:txBody>
@@ -13899,7 +13753,7 @@
                 </a:solidFill>
                 <a:latin typeface="Helvetica Neue"/>
               </a:rPr>
-              <a:t>2,575 avg views/post   ·   34 posts   ·   87,538 total</a:t>
+              <a:t>2,576 avg views/post   ·   34 posts   ·   87,569 total</a:t>
             </a:r>
           </a:p>
         </p:txBody>
@@ -14191,7 +14045,7 @@
                 </a:solidFill>
                 <a:latin typeface="Helvetica Neue"/>
               </a:rPr>
-              <a:t>1,243 avg views/post   ·   189 posts   ·   234,977 total</a:t>
+              <a:t>1,248 avg views/post   ·   189 posts   ·   235,927 total</a:t>
             </a:r>
           </a:p>
         </p:txBody>
@@ -16110,7 +15964,7 @@
                 </a:solidFill>
                 <a:latin typeface="Helvetica Neue"/>
               </a:rPr>
-              <a:t>93,815 views · 61 posts</a:t>
+              <a:t>93,817 views · 61 posts</a:t>
             </a:r>
           </a:p>
         </p:txBody>
@@ -16158,7 +16012,7 @@
         <p:spPr>
           <a:xfrm>
             <a:off x="4114800" y="2476968"/>
-            <a:ext cx="5965465" cy="128016"/>
+            <a:ext cx="6026843" cy="128016"/>
           </a:xfrm>
           <a:prstGeom prst="rect">
             <a:avLst/>
@@ -16201,7 +16055,7 @@
         </p:nvSpPr>
         <p:spPr>
           <a:xfrm>
-            <a:off x="10171705" y="2413312"/>
+            <a:off x="10233083" y="2413312"/>
             <a:ext cx="2286000" cy="291904"/>
           </a:xfrm>
           <a:prstGeom prst="rect">
@@ -16222,7 +16076,7 @@
                 </a:solidFill>
                 <a:latin typeface="Helvetica Neue"/>
               </a:rPr>
-              <a:t>90,006 views · 156 posts</a:t>
+              <a:t>90,934 views · 158 posts</a:t>
             </a:r>
           </a:p>
         </p:txBody>
@@ -16270,7 +16124,7 @@
         <p:spPr>
           <a:xfrm>
             <a:off x="4114800" y="2768873"/>
-            <a:ext cx="5801889" cy="128016"/>
+            <a:ext cx="5803820" cy="128016"/>
           </a:xfrm>
           <a:prstGeom prst="rect">
             <a:avLst/>
@@ -16313,7 +16167,7 @@
         </p:nvSpPr>
         <p:spPr>
           <a:xfrm>
-            <a:off x="10008129" y="2705217"/>
+            <a:off x="10010060" y="2705217"/>
             <a:ext cx="2286000" cy="291904"/>
           </a:xfrm>
           <a:prstGeom prst="rect">
@@ -16334,7 +16188,7 @@
                 </a:solidFill>
                 <a:latin typeface="Helvetica Neue"/>
               </a:rPr>
-              <a:t>87,538 views · 34 posts</a:t>
+              <a:t>87,569 views · 34 posts</a:t>
             </a:r>
           </a:p>
         </p:txBody>
@@ -16382,7 +16236,7 @@
         <p:spPr>
           <a:xfrm>
             <a:off x="4114800" y="3060778"/>
-            <a:ext cx="4682379" cy="128016"/>
+            <a:ext cx="4724232" cy="128016"/>
           </a:xfrm>
           <a:prstGeom prst="rect">
             <a:avLst/>
@@ -16425,7 +16279,7 @@
         </p:nvSpPr>
         <p:spPr>
           <a:xfrm>
-            <a:off x="8888619" y="2997121"/>
+            <a:off x="8930472" y="2997121"/>
             <a:ext cx="2286000" cy="291904"/>
           </a:xfrm>
           <a:prstGeom prst="rect">
@@ -16446,7 +16300,7 @@
                 </a:solidFill>
                 <a:latin typeface="Helvetica Neue"/>
               </a:rPr>
-              <a:t>70,647 views · 89 posts</a:t>
+              <a:t>71,280 views · 89 posts</a:t>
             </a:r>
           </a:p>
         </p:txBody>
@@ -16494,7 +16348,7 @@
         <p:spPr>
           <a:xfrm>
             <a:off x="4114800" y="3352682"/>
-            <a:ext cx="4203781" cy="128016"/>
+            <a:ext cx="4209723" cy="128016"/>
           </a:xfrm>
           <a:prstGeom prst="rect">
             <a:avLst/>
@@ -16537,7 +16391,7 @@
         </p:nvSpPr>
         <p:spPr>
           <a:xfrm>
-            <a:off x="8410021" y="3289026"/>
+            <a:off x="8415963" y="3289026"/>
             <a:ext cx="2286000" cy="291904"/>
           </a:xfrm>
           <a:prstGeom prst="rect">
@@ -16558,7 +16412,7 @@
                 </a:solidFill>
                 <a:latin typeface="Helvetica Neue"/>
               </a:rPr>
-              <a:t>63,426 views · 25 posts</a:t>
+              <a:t>63,517 views · 25 posts</a:t>
             </a:r>
           </a:p>
         </p:txBody>
@@ -16606,7 +16460,7 @@
         <p:spPr>
           <a:xfrm>
             <a:off x="4114800" y="3644587"/>
-            <a:ext cx="4144793" cy="128016"/>
+            <a:ext cx="4144705" cy="128016"/>
           </a:xfrm>
           <a:prstGeom prst="rect">
             <a:avLst/>
@@ -16649,7 +16503,7 @@
         </p:nvSpPr>
         <p:spPr>
           <a:xfrm>
-            <a:off x="8351033" y="3580931"/>
+            <a:off x="8350945" y="3580931"/>
             <a:ext cx="2286000" cy="291904"/>
           </a:xfrm>
           <a:prstGeom prst="rect">
@@ -16718,7 +16572,7 @@
         <p:spPr>
           <a:xfrm>
             <a:off x="4114800" y="3936491"/>
-            <a:ext cx="3367744" cy="128016"/>
+            <a:ext cx="3383049" cy="128016"/>
           </a:xfrm>
           <a:prstGeom prst="rect">
             <a:avLst/>
@@ -16761,7 +16615,7 @@
         </p:nvSpPr>
         <p:spPr>
           <a:xfrm>
-            <a:off x="7573984" y="3872835"/>
+            <a:off x="7589289" y="3872835"/>
             <a:ext cx="2286000" cy="291904"/>
           </a:xfrm>
           <a:prstGeom prst="rect">
@@ -16782,7 +16636,7 @@
                 </a:solidFill>
                 <a:latin typeface="Helvetica Neue"/>
               </a:rPr>
-              <a:t>50,812 views · 57 posts</a:t>
+              <a:t>51,044 views · 57 posts</a:t>
             </a:r>
           </a:p>
         </p:txBody>
@@ -16830,7 +16684,7 @@
         <p:spPr>
           <a:xfrm>
             <a:off x="4114800" y="4228396"/>
-            <a:ext cx="3159961" cy="128016"/>
+            <a:ext cx="3159893" cy="128016"/>
           </a:xfrm>
           <a:prstGeom prst="rect">
             <a:avLst/>
@@ -16873,7 +16727,7 @@
         </p:nvSpPr>
         <p:spPr>
           <a:xfrm>
-            <a:off x="7366201" y="4164740"/>
+            <a:off x="7366133" y="4164740"/>
             <a:ext cx="2286000" cy="291904"/>
           </a:xfrm>
           <a:prstGeom prst="rect">
@@ -16942,7 +16796,7 @@
         <p:spPr>
           <a:xfrm>
             <a:off x="4114800" y="4520301"/>
-            <a:ext cx="1766587" cy="128016"/>
+            <a:ext cx="1813938" cy="128016"/>
           </a:xfrm>
           <a:prstGeom prst="rect">
             <a:avLst/>
@@ -16985,7 +16839,7 @@
         </p:nvSpPr>
         <p:spPr>
           <a:xfrm>
-            <a:off x="5972827" y="4456644"/>
+            <a:off x="6020178" y="4456644"/>
             <a:ext cx="2286000" cy="291904"/>
           </a:xfrm>
           <a:prstGeom prst="rect">
@@ -17006,7 +16860,7 @@
                 </a:solidFill>
                 <a:latin typeface="Helvetica Neue"/>
               </a:rPr>
-              <a:t>26,654 views · 30 posts</a:t>
+              <a:t>27,369 views · 30 posts</a:t>
             </a:r>
           </a:p>
         </p:txBody>
@@ -17054,7 +16908,7 @@
         <p:spPr>
           <a:xfrm>
             <a:off x="4114800" y="4812205"/>
-            <a:ext cx="546797" cy="128016"/>
+            <a:ext cx="546852" cy="128016"/>
           </a:xfrm>
           <a:prstGeom prst="rect">
             <a:avLst/>
@@ -17097,7 +16951,7 @@
         </p:nvSpPr>
         <p:spPr>
           <a:xfrm>
-            <a:off x="4753037" y="4748549"/>
+            <a:off x="4753092" y="4748549"/>
             <a:ext cx="2286000" cy="291904"/>
           </a:xfrm>
           <a:prstGeom prst="rect">
@@ -17118,7 +16972,7 @@
                 </a:solidFill>
                 <a:latin typeface="Helvetica Neue"/>
               </a:rPr>
-              <a:t>8,250 views · 8 posts</a:t>
+              <a:t>8,251 views · 8 posts</a:t>
             </a:r>
           </a:p>
         </p:txBody>
@@ -17166,7 +17020,7 @@
         <p:spPr>
           <a:xfrm>
             <a:off x="4114800" y="5104110"/>
-            <a:ext cx="514917" cy="128016"/>
+            <a:ext cx="514906" cy="128016"/>
           </a:xfrm>
           <a:prstGeom prst="rect">
             <a:avLst/>
@@ -17209,7 +17063,7 @@
         </p:nvSpPr>
         <p:spPr>
           <a:xfrm>
-            <a:off x="4721157" y="5040454"/>
+            <a:off x="4721146" y="5040454"/>
             <a:ext cx="2286000" cy="291904"/>
           </a:xfrm>
           <a:prstGeom prst="rect">
@@ -17278,7 +17132,7 @@
         <p:spPr>
           <a:xfrm>
             <a:off x="4114800" y="5396015"/>
-            <a:ext cx="410396" cy="128016"/>
+            <a:ext cx="410387" cy="128016"/>
           </a:xfrm>
           <a:prstGeom prst="rect">
             <a:avLst/>
@@ -17321,7 +17175,7 @@
         </p:nvSpPr>
         <p:spPr>
           <a:xfrm>
-            <a:off x="4616636" y="5332358"/>
+            <a:off x="4616627" y="5332358"/>
             <a:ext cx="2286000" cy="291904"/>
           </a:xfrm>
           <a:prstGeom prst="rect">
@@ -17390,7 +17244,7 @@
         <p:spPr>
           <a:xfrm>
             <a:off x="4114800" y="5687919"/>
-            <a:ext cx="73635" cy="128016"/>
+            <a:ext cx="73633" cy="128016"/>
           </a:xfrm>
           <a:prstGeom prst="rect">
             <a:avLst/>
@@ -17433,7 +17287,7 @@
         </p:nvSpPr>
         <p:spPr>
           <a:xfrm>
-            <a:off x="4279875" y="5624263"/>
+            <a:off x="4279873" y="5624263"/>
             <a:ext cx="2286000" cy="291904"/>
           </a:xfrm>
           <a:prstGeom prst="rect">
@@ -17696,7 +17550,7 @@
                 </a:solidFill>
                 <a:latin typeface="Helvetica Neue"/>
               </a:rPr>
-              <a:t>8 categories driving the bulk of your reach. Each averages 800+ views per post — proven audience.</a:t>
+              <a:t>9 categories driving the bulk of your reach. Each averages 800+ views per post — proven audience.</a:t>
             </a:r>
           </a:p>
         </p:txBody>
@@ -18050,7 +17904,7 @@
                 </a:solidFill>
                 <a:latin typeface="Georgia"/>
               </a:rPr>
-              <a:t>93,815</a:t>
+              <a:t>93,817</a:t>
             </a:r>
           </a:p>
         </p:txBody>
@@ -19086,7 +18940,7 @@
                 </a:solidFill>
                 <a:latin typeface="Georgia"/>
               </a:rPr>
-              <a:t>87,538</a:t>
+              <a:t>87,569</a:t>
             </a:r>
           </a:p>
         </p:txBody>
@@ -19120,7 +18974,7 @@
                 </a:solidFill>
                 <a:latin typeface="Helvetica Neue"/>
               </a:rPr>
-              <a:t>34 posts · 1,994 likes</a:t>
+              <a:t>34 posts · 1,995 likes</a:t>
             </a:r>
           </a:p>
         </p:txBody>
@@ -19154,7 +19008,7 @@
                 </a:solidFill>
                 <a:latin typeface="Helvetica Neue"/>
               </a:rPr>
-              <a:t>2,575 average views per post</a:t>
+              <a:t>2,576 average views per post</a:t>
             </a:r>
           </a:p>
         </p:txBody>
@@ -19466,7 +19320,7 @@
                 </a:solidFill>
                 <a:latin typeface="Helvetica Neue"/>
               </a:rPr>
-              <a:t>#2  ·  IG  ·  7,673 views</a:t>
+              <a:t>#2  ·  IG  ·  7,704 views</a:t>
             </a:r>
           </a:p>
         </p:txBody>
@@ -19898,7 +19752,7 @@
                 </a:solidFill>
                 <a:latin typeface="Georgia"/>
               </a:rPr>
-              <a:t>FIFA / World Cup</a:t>
+              <a:t>Elections &amp; Judicial</a:t>
             </a:r>
           </a:p>
         </p:txBody>
@@ -19932,7 +19786,7 @@
                 </a:solidFill>
                 <a:latin typeface="Helvetica Neue"/>
               </a:rPr>
-              <a:t>Sports commentary — split between celebration and critique.</a:t>
+              <a:t>Coverage of campaigns, courts, and local government.</a:t>
             </a:r>
           </a:p>
         </p:txBody>
@@ -19962,11 +19816,11 @@
             <a:r>
               <a:rPr sz="900" b="1">
                 <a:solidFill>
-                  <a:srgbClr val="6B7082"/>
-                </a:solidFill>
-                <a:latin typeface="Helvetica Neue"/>
-              </a:rPr>
-              <a:t>AUDIENCE (theoretical): Sports commentary · Young-Middle (25-45), sports fans</a:t>
+                  <a:srgbClr val="2F3C7E"/>
+                </a:solidFill>
+                <a:latin typeface="Helvetica Neue"/>
+              </a:rPr>
+              <a:t>AUDIENCE (theoretical): Slow-burn policy · Middle (40-55) + Older (55+) engaged voters</a:t>
             </a:r>
           </a:p>
         </p:txBody>
@@ -20030,7 +19884,7 @@
             <a:avLst/>
           </a:prstGeom>
           <a:solidFill>
-            <a:srgbClr val="6B7082"/>
+            <a:srgbClr val="2F3C7E"/>
           </a:solidFill>
           <a:ln>
             <a:noFill/>
@@ -20084,7 +19938,7 @@
             <a:r>
               <a:rPr sz="1100" b="1">
                 <a:solidFill>
-                  <a:srgbClr val="6B7082"/>
+                  <a:srgbClr val="2F3C7E"/>
                 </a:solidFill>
                 <a:latin typeface="Helvetica Neue"/>
               </a:rPr>
@@ -20122,7 +19976,7 @@
                 </a:solidFill>
                 <a:latin typeface="Georgia"/>
               </a:rPr>
-              <a:t>63,426</a:t>
+              <a:t>71,280</a:t>
             </a:r>
           </a:p>
         </p:txBody>
@@ -20156,7 +20010,7 @@
                 </a:solidFill>
                 <a:latin typeface="Helvetica Neue"/>
               </a:rPr>
-              <a:t>25 posts · 1,478 likes</a:t>
+              <a:t>89 posts · 1,540 likes</a:t>
             </a:r>
           </a:p>
         </p:txBody>
@@ -20190,7 +20044,7 @@
                 </a:solidFill>
                 <a:latin typeface="Helvetica Neue"/>
               </a:rPr>
-              <a:t>2,537 average views per post</a:t>
+              <a:t>801 average views per post</a:t>
             </a:r>
           </a:p>
         </p:txBody>
@@ -20220,7 +20074,7 @@
             <a:r>
               <a:rPr sz="1100" b="1">
                 <a:solidFill>
-                  <a:srgbClr val="6B7082"/>
+                  <a:srgbClr val="2F3C7E"/>
                 </a:solidFill>
                 <a:latin typeface="Helvetica Neue"/>
               </a:rPr>
@@ -20288,7 +20142,7 @@
             <a:avLst/>
           </a:prstGeom>
           <a:solidFill>
-            <a:srgbClr val="6B7082"/>
+            <a:srgbClr val="2F3C7E"/>
           </a:solidFill>
           <a:ln>
             <a:noFill/>
@@ -20342,11 +20196,11 @@
             <a:r>
               <a:rPr sz="1000" b="1">
                 <a:solidFill>
-                  <a:srgbClr val="6B7082"/>
-                </a:solidFill>
-                <a:latin typeface="Helvetica Neue"/>
-              </a:rPr>
-              <a:t>#1  ·  TT  ·  27,400 views</a:t>
+                  <a:srgbClr val="2F3C7E"/>
+                </a:solidFill>
+                <a:latin typeface="Helvetica Neue"/>
+              </a:rPr>
+              <a:t>#1  ·  FB  ·  11,710 views</a:t>
             </a:r>
           </a:p>
         </p:txBody>
@@ -20380,7 +20234,7 @@
                 </a:solidFill>
                 <a:latin typeface="Helvetica Neue"/>
               </a:rPr>
-              <a:t>Watch party in Stonewood Mall! Over 25,000 people showed up for this epic event. Cost $300</a:t>
+              <a:t>Chaos erupted at a council meeting when Ms. Rivera began screaming, refusing to calm down </a:t>
             </a:r>
           </a:p>
         </p:txBody>
@@ -20444,7 +20298,7 @@
             <a:avLst/>
           </a:prstGeom>
           <a:solidFill>
-            <a:srgbClr val="6B7082"/>
+            <a:srgbClr val="2F3C7E"/>
           </a:solidFill>
           <a:ln>
             <a:noFill/>
@@ -20498,11 +20352,11 @@
             <a:r>
               <a:rPr sz="1000" b="1">
                 <a:solidFill>
-                  <a:srgbClr val="6B7082"/>
-                </a:solidFill>
-                <a:latin typeface="Helvetica Neue"/>
-              </a:rPr>
-              <a:t>#2  ·  IG  ·  7,180 views</a:t>
+                  <a:srgbClr val="2F3C7E"/>
+                </a:solidFill>
+                <a:latin typeface="Helvetica Neue"/>
+              </a:rPr>
+              <a:t>#2  ·  FB  ·  5,812 views</a:t>
             </a:r>
           </a:p>
         </p:txBody>
@@ -20536,7 +20390,7 @@
                 </a:solidFill>
                 <a:latin typeface="Helvetica Neue"/>
               </a:rPr>
-              <a:t>25,000+ people gathered for a watch party at Stonewood Mall! Despite the $300k cost, it wa</a:t>
+              <a:t>Tensions flared at the city council meeting as a woman repeatedly defied the mayor's reque</a:t>
             </a:r>
           </a:p>
         </p:txBody>
@@ -20600,7 +20454,7 @@
             <a:avLst/>
           </a:prstGeom>
           <a:solidFill>
-            <a:srgbClr val="6B7082"/>
+            <a:srgbClr val="2F3C7E"/>
           </a:solidFill>
           <a:ln>
             <a:noFill/>
@@ -20654,11 +20508,11 @@
             <a:r>
               <a:rPr sz="1000" b="1">
                 <a:solidFill>
-                  <a:srgbClr val="6B7082"/>
-                </a:solidFill>
-                <a:latin typeface="Helvetica Neue"/>
-              </a:rPr>
-              <a:t>#3  ·  FB  ·  6,355 views</a:t>
+                  <a:srgbClr val="2F3C7E"/>
+                </a:solidFill>
+                <a:latin typeface="Helvetica Neue"/>
+              </a:rPr>
+              <a:t>#3  ·  IG  ·  4,046 views</a:t>
             </a:r>
           </a:p>
         </p:txBody>
@@ -20692,7 +20546,7 @@
                 </a:solidFill>
                 <a:latin typeface="Helvetica Neue"/>
               </a:rPr>
-              <a:t>Over 25,000 people gathered at Stonewood Mall for a massive watch party. Despite the $300,</a:t>
+              <a:t>A candidate's DSA membership raises questions about their loyalties. Pledging to 'co-gover</a:t>
             </a:r>
           </a:p>
         </p:txBody>
@@ -20766,7 +20620,7 @@
             <a:r>
               <a:rPr sz="1000" b="1">
                 <a:solidFill>
-                  <a:srgbClr val="6B7082"/>
+                  <a:srgbClr val="2F3C7E"/>
                 </a:solidFill>
                 <a:latin typeface="Helvetica Neue"/>
               </a:rPr>
@@ -20804,7 +20658,7 @@
                 </a:solidFill>
                 <a:latin typeface="Helvetica Neue"/>
               </a:rPr>
-              <a:t>Solid mid-tier. Worth continued investment. Test scaling to see if it holds.</a:t>
+              <a:t>Modest reach. Fine as filler between heavy hitters, not a headline lane.</a:t>
             </a:r>
           </a:p>
         </p:txBody>
@@ -20934,7 +20788,7 @@
                 </a:solidFill>
                 <a:latin typeface="Georgia"/>
               </a:rPr>
-              <a:t>Military Service</a:t>
+              <a:t>FIFA / World Cup</a:t>
             </a:r>
           </a:p>
         </p:txBody>
@@ -20968,7 +20822,7 @@
                 </a:solidFill>
                 <a:latin typeface="Helvetica Neue"/>
               </a:rPr>
-              <a:t>Army/JROTC/veteran interviews — the human side of military service (NOT policy — that's Legislation Watch).</a:t>
+              <a:t>Sports commentary — split between celebration and critique.</a:t>
             </a:r>
           </a:p>
         </p:txBody>
@@ -20998,11 +20852,11 @@
             <a:r>
               <a:rPr sz="900" b="1">
                 <a:solidFill>
-                  <a:srgbClr val="C9A227"/>
-                </a:solidFill>
-                <a:latin typeface="Helvetica Neue"/>
-              </a:rPr>
-              <a:t>AUDIENCE (theoretical): Traditional / patriotic · Middle (40-55) + Older (55+), veterans + families</a:t>
+                  <a:srgbClr val="6B7082"/>
+                </a:solidFill>
+                <a:latin typeface="Helvetica Neue"/>
+              </a:rPr>
+              <a:t>AUDIENCE (theoretical): Sports commentary · Young-Middle (25-45), sports fans</a:t>
             </a:r>
           </a:p>
         </p:txBody>
@@ -21066,7 +20920,7 @@
             <a:avLst/>
           </a:prstGeom>
           <a:solidFill>
-            <a:srgbClr val="C9A227"/>
+            <a:srgbClr val="6B7082"/>
           </a:solidFill>
           <a:ln>
             <a:noFill/>
@@ -21120,7 +20974,7 @@
             <a:r>
               <a:rPr sz="1100" b="1">
                 <a:solidFill>
-                  <a:srgbClr val="C9A227"/>
+                  <a:srgbClr val="6B7082"/>
                 </a:solidFill>
                 <a:latin typeface="Helvetica Neue"/>
               </a:rPr>
@@ -21158,7 +21012,7 @@
                 </a:solidFill>
                 <a:latin typeface="Georgia"/>
               </a:rPr>
-              <a:t>62,536</a:t>
+              <a:t>63,517</a:t>
             </a:r>
           </a:p>
         </p:txBody>
@@ -21192,7 +21046,7 @@
                 </a:solidFill>
                 <a:latin typeface="Helvetica Neue"/>
               </a:rPr>
-              <a:t>22 posts · 3,199 likes</a:t>
+              <a:t>25 posts · 1,479 likes</a:t>
             </a:r>
           </a:p>
         </p:txBody>
@@ -21226,7 +21080,7 @@
                 </a:solidFill>
                 <a:latin typeface="Helvetica Neue"/>
               </a:rPr>
-              <a:t>2,843 average views per post</a:t>
+              <a:t>2,541 average views per post</a:t>
             </a:r>
           </a:p>
         </p:txBody>
@@ -21256,7 +21110,7 @@
             <a:r>
               <a:rPr sz="1100" b="1">
                 <a:solidFill>
-                  <a:srgbClr val="C9A227"/>
+                  <a:srgbClr val="6B7082"/>
                 </a:solidFill>
                 <a:latin typeface="Helvetica Neue"/>
               </a:rPr>
@@ -21324,7 +21178,7 @@
             <a:avLst/>
           </a:prstGeom>
           <a:solidFill>
-            <a:srgbClr val="C9A227"/>
+            <a:srgbClr val="6B7082"/>
           </a:solidFill>
           <a:ln>
             <a:noFill/>
@@ -21378,11 +21232,11 @@
             <a:r>
               <a:rPr sz="1000" b="1">
                 <a:solidFill>
-                  <a:srgbClr val="C9A227"/>
-                </a:solidFill>
-                <a:latin typeface="Helvetica Neue"/>
-              </a:rPr>
-              <a:t>#1  ·  TT  ·  37,900 views</a:t>
+                  <a:srgbClr val="6B7082"/>
+                </a:solidFill>
+                <a:latin typeface="Helvetica Neue"/>
+              </a:rPr>
+              <a:t>#1  ·  TT  ·  27,400 views</a:t>
             </a:r>
           </a:p>
         </p:txBody>
@@ -21416,7 +21270,7 @@
                 </a:solidFill>
                 <a:latin typeface="Helvetica Neue"/>
               </a:rPr>
-              <a:t>Combat jobs aren't for everyone. See how your MOS determines deployment likelihood and wha</a:t>
+              <a:t>Watch party in Stonewood Mall! Over 25,000 people showed up for this epic event. Cost $300</a:t>
             </a:r>
           </a:p>
         </p:txBody>
@@ -21480,7 +21334,7 @@
             <a:avLst/>
           </a:prstGeom>
           <a:solidFill>
-            <a:srgbClr val="C9A227"/>
+            <a:srgbClr val="6B7082"/>
           </a:solidFill>
           <a:ln>
             <a:noFill/>
@@ -21534,11 +21388,11 @@
             <a:r>
               <a:rPr sz="1000" b="1">
                 <a:solidFill>
-                  <a:srgbClr val="C9A227"/>
-                </a:solidFill>
-                <a:latin typeface="Helvetica Neue"/>
-              </a:rPr>
-              <a:t>#2  ·  IG  ·  5,139 views</a:t>
+                  <a:srgbClr val="6B7082"/>
+                </a:solidFill>
+                <a:latin typeface="Helvetica Neue"/>
+              </a:rPr>
+              <a:t>#2  ·  IG  ·  7,180 views</a:t>
             </a:r>
           </a:p>
         </p:txBody>
@@ -21572,7 +21426,7 @@
                 </a:solidFill>
                 <a:latin typeface="Helvetica Neue"/>
               </a:rPr>
-              <a:t>Not everyone deployed sees combat, even with 20 years in. Your MOS matters. Logistics migh</a:t>
+              <a:t>25,000+ people gathered for a watch party at Stonewood Mall! Despite the $300k cost, it wa</a:t>
             </a:r>
           </a:p>
         </p:txBody>
@@ -21636,7 +21490,7 @@
             <a:avLst/>
           </a:prstGeom>
           <a:solidFill>
-            <a:srgbClr val="C9A227"/>
+            <a:srgbClr val="6B7082"/>
           </a:solidFill>
           <a:ln>
             <a:noFill/>
@@ -21690,11 +21544,11 @@
             <a:r>
               <a:rPr sz="1000" b="1">
                 <a:solidFill>
-                  <a:srgbClr val="C9A227"/>
-                </a:solidFill>
-                <a:latin typeface="Helvetica Neue"/>
-              </a:rPr>
-              <a:t>#3  ·  IG  ·  4,043 views</a:t>
+                  <a:srgbClr val="6B7082"/>
+                </a:solidFill>
+                <a:latin typeface="Helvetica Neue"/>
+              </a:rPr>
+              <a:t>#3  ·  FB  ·  6,355 views</a:t>
             </a:r>
           </a:p>
         </p:txBody>
@@ -21728,7 +21582,7 @@
                 </a:solidFill>
                 <a:latin typeface="Helvetica Neue"/>
               </a:rPr>
-              <a:t>Dreamed of college, but the cost was a barrier. Joined the Army, and they paid for everyth</a:t>
+              <a:t>Over 25,000 people gathered at Stonewood Mall for a massive watch party. Despite the $300,</a:t>
             </a:r>
           </a:p>
         </p:txBody>
@@ -21802,7 +21656,7 @@
             <a:r>
               <a:rPr sz="1000" b="1">
                 <a:solidFill>
-                  <a:srgbClr val="C9A227"/>
+                  <a:srgbClr val="6B7082"/>
                 </a:solidFill>
                 <a:latin typeface="Helvetica Neue"/>
               </a:rPr>
@@ -21970,7 +21824,7 @@
                 </a:solidFill>
                 <a:latin typeface="Georgia"/>
               </a:rPr>
-              <a:t>Community &amp; Culture</a:t>
+              <a:t>Military Service</a:t>
             </a:r>
           </a:p>
         </p:txBody>
@@ -22004,7 +21858,7 @@
                 </a:solidFill>
                 <a:latin typeface="Helvetica Neue"/>
               </a:rPr>
-              <a:t>Local color, events, pageantry, personal growth, city life.</a:t>
+              <a:t>Army/JROTC/veteran interviews — the human side of military service (NOT policy — that's Legislation Watch).</a:t>
             </a:r>
           </a:p>
         </p:txBody>
@@ -22034,11 +21888,11 @@
             <a:r>
               <a:rPr sz="900" b="1">
                 <a:solidFill>
-                  <a:srgbClr val="141833"/>
-                </a:solidFill>
-                <a:latin typeface="Helvetica Neue"/>
-              </a:rPr>
-              <a:t>AUDIENCE (theoretical): Local color · Broad, 30+</a:t>
+                  <a:srgbClr val="C9A227"/>
+                </a:solidFill>
+                <a:latin typeface="Helvetica Neue"/>
+              </a:rPr>
+              <a:t>AUDIENCE (theoretical): Traditional / patriotic · Middle (40-55) + Older (55+), veterans + families</a:t>
             </a:r>
           </a:p>
         </p:txBody>
@@ -22102,7 +21956,7 @@
             <a:avLst/>
           </a:prstGeom>
           <a:solidFill>
-            <a:srgbClr val="141833"/>
+            <a:srgbClr val="C9A227"/>
           </a:solidFill>
           <a:ln>
             <a:noFill/>
@@ -22156,7 +22010,7 @@
             <a:r>
               <a:rPr sz="1100" b="1">
                 <a:solidFill>
-                  <a:srgbClr val="141833"/>
+                  <a:srgbClr val="C9A227"/>
                 </a:solidFill>
                 <a:latin typeface="Helvetica Neue"/>
               </a:rPr>
@@ -22194,7 +22048,7 @@
                 </a:solidFill>
                 <a:latin typeface="Georgia"/>
               </a:rPr>
-              <a:t>50,812</a:t>
+              <a:t>62,536</a:t>
             </a:r>
           </a:p>
         </p:txBody>
@@ -22228,7 +22082,7 @@
                 </a:solidFill>
                 <a:latin typeface="Helvetica Neue"/>
               </a:rPr>
-              <a:t>57 posts · 993 likes</a:t>
+              <a:t>22 posts · 3,199 likes</a:t>
             </a:r>
           </a:p>
         </p:txBody>
@@ -22262,7 +22116,7 @@
                 </a:solidFill>
                 <a:latin typeface="Helvetica Neue"/>
               </a:rPr>
-              <a:t>891 average views per post</a:t>
+              <a:t>2,843 average views per post</a:t>
             </a:r>
           </a:p>
         </p:txBody>
@@ -22292,7 +22146,7 @@
             <a:r>
               <a:rPr sz="1100" b="1">
                 <a:solidFill>
-                  <a:srgbClr val="141833"/>
+                  <a:srgbClr val="C9A227"/>
                 </a:solidFill>
                 <a:latin typeface="Helvetica Neue"/>
               </a:rPr>
@@ -22360,7 +22214,7 @@
             <a:avLst/>
           </a:prstGeom>
           <a:solidFill>
-            <a:srgbClr val="141833"/>
+            <a:srgbClr val="C9A227"/>
           </a:solidFill>
           <a:ln>
             <a:noFill/>
@@ -22414,11 +22268,11 @@
             <a:r>
               <a:rPr sz="1000" b="1">
                 <a:solidFill>
-                  <a:srgbClr val="141833"/>
-                </a:solidFill>
-                <a:latin typeface="Helvetica Neue"/>
-              </a:rPr>
-              <a:t>#1  ·  FB  ·  4,522 views</a:t>
+                  <a:srgbClr val="C9A227"/>
+                </a:solidFill>
+                <a:latin typeface="Helvetica Neue"/>
+              </a:rPr>
+              <a:t>#1  ·  TT  ·  37,900 views</a:t>
             </a:r>
           </a:p>
         </p:txBody>
@@ -22452,7 +22306,7 @@
                 </a:solidFill>
                 <a:latin typeface="Helvetica Neue"/>
               </a:rPr>
-              <a:t>An emotional response to a Charlie Kirk &amp; LGBQT comment raises questions about a leader's </a:t>
+              <a:t>Combat jobs aren't for everyone. See how your MOS determines deployment likelihood and wha</a:t>
             </a:r>
           </a:p>
         </p:txBody>
@@ -22516,7 +22370,7 @@
             <a:avLst/>
           </a:prstGeom>
           <a:solidFill>
-            <a:srgbClr val="141833"/>
+            <a:srgbClr val="C9A227"/>
           </a:solidFill>
           <a:ln>
             <a:noFill/>
@@ -22570,11 +22424,11 @@
             <a:r>
               <a:rPr sz="1000" b="1">
                 <a:solidFill>
-                  <a:srgbClr val="141833"/>
-                </a:solidFill>
-                <a:latin typeface="Helvetica Neue"/>
-              </a:rPr>
-              <a:t>#2  ·  IG  ·  3,873 views</a:t>
+                  <a:srgbClr val="C9A227"/>
+                </a:solidFill>
+                <a:latin typeface="Helvetica Neue"/>
+              </a:rPr>
+              <a:t>#2  ·  IG  ·  5,139 views</a:t>
             </a:r>
           </a:p>
         </p:txBody>
@@ -22608,7 +22462,7 @@
                 </a:solidFill>
                 <a:latin typeface="Helvetica Neue"/>
               </a:rPr>
-              <a:t>Following an outburst, she was removed as a Chamber of Commerce ambassador and rejected fo</a:t>
+              <a:t>Not everyone deployed sees combat, even with 20 years in. Your MOS matters. Logistics migh</a:t>
             </a:r>
           </a:p>
         </p:txBody>
@@ -22672,7 +22526,7 @@
             <a:avLst/>
           </a:prstGeom>
           <a:solidFill>
-            <a:srgbClr val="141833"/>
+            <a:srgbClr val="C9A227"/>
           </a:solidFill>
           <a:ln>
             <a:noFill/>
@@ -22726,11 +22580,11 @@
             <a:r>
               <a:rPr sz="1000" b="1">
                 <a:solidFill>
-                  <a:srgbClr val="141833"/>
-                </a:solidFill>
-                <a:latin typeface="Helvetica Neue"/>
-              </a:rPr>
-              <a:t>#3  ·  TT  ·  3,520 views</a:t>
+                  <a:srgbClr val="C9A227"/>
+                </a:solidFill>
+                <a:latin typeface="Helvetica Neue"/>
+              </a:rPr>
+              <a:t>#3  ·  IG  ·  4,043 views</a:t>
             </a:r>
           </a:p>
         </p:txBody>
@@ -22764,7 +22618,7 @@
                 </a:solidFill>
                 <a:latin typeface="Helvetica Neue"/>
               </a:rPr>
-              <a:t>Downey is a built-out city, but Sacramento requires us to build 6,100 new homes. Local off</a:t>
+              <a:t>Dreamed of college, but the cost was a barrier. Joined the Army, and they paid for everyth</a:t>
             </a:r>
           </a:p>
         </p:txBody>
@@ -22838,7 +22692,7 @@
             <a:r>
               <a:rPr sz="1000" b="1">
                 <a:solidFill>
-                  <a:srgbClr val="141833"/>
+                  <a:srgbClr val="C9A227"/>
                 </a:solidFill>
                 <a:latin typeface="Helvetica Neue"/>
               </a:rPr>
@@ -22876,7 +22730,7 @@
                 </a:solidFill>
                 <a:latin typeface="Helvetica Neue"/>
               </a:rPr>
-              <a:t>Modest reach. Fine as filler between heavy hitters, not a headline lane.</a:t>
+              <a:t>Solid mid-tier. Worth continued investment. Test scaling to see if it holds.</a:t>
             </a:r>
           </a:p>
         </p:txBody>

--- a/SPONSOR_CONTENT_REPORT.pptx
+++ b/SPONSOR_CONTENT_REPORT.pptx
@@ -3327,7 +3327,7 @@
                 </a:solidFill>
                 <a:latin typeface="Helvetica Neue"/>
               </a:rPr>
-              <a:t>Reporting window: Jun 8 → 2026-09-23</a:t>
+              <a:t>Reporting window: Jun 8 → 2026-09-25</a:t>
             </a:r>
           </a:p>
         </p:txBody>
@@ -3783,7 +3783,7 @@
                 </a:solidFill>
                 <a:latin typeface="Georgia"/>
               </a:rPr>
-              <a:t>51,044</a:t>
+              <a:t>51,104</a:t>
             </a:r>
           </a:p>
         </p:txBody>
@@ -3817,7 +3817,7 @@
                 </a:solidFill>
                 <a:latin typeface="Helvetica Neue"/>
               </a:rPr>
-              <a:t>57 posts · 1,002 likes</a:t>
+              <a:t>57 posts · 1,003 likes</a:t>
             </a:r>
           </a:p>
         </p:txBody>
@@ -3851,7 +3851,7 @@
                 </a:solidFill>
                 <a:latin typeface="Helvetica Neue"/>
               </a:rPr>
-              <a:t>896 average views per post</a:t>
+              <a:t>897 average views per post</a:t>
             </a:r>
           </a:p>
         </p:txBody>
@@ -4007,7 +4007,7 @@
                 </a:solidFill>
                 <a:latin typeface="Helvetica Neue"/>
               </a:rPr>
-              <a:t>#1  ·  FB  ·  4,630 views</a:t>
+              <a:t>#1  ·  FB  ·  4,638 views</a:t>
             </a:r>
           </a:p>
         </p:txBody>
@@ -4163,7 +4163,7 @@
                 </a:solidFill>
                 <a:latin typeface="Helvetica Neue"/>
               </a:rPr>
-              <a:t>#2  ·  IG  ·  3,894 views</a:t>
+              <a:t>#2  ·  IG  ·  3,910 views</a:t>
             </a:r>
           </a:p>
         </p:txBody>
@@ -5855,7 +5855,7 @@
                 </a:solidFill>
                 <a:latin typeface="Georgia"/>
               </a:rPr>
-              <a:t>27,369</a:t>
+              <a:t>27,522</a:t>
             </a:r>
           </a:p>
         </p:txBody>
@@ -5889,7 +5889,7 @@
                 </a:solidFill>
                 <a:latin typeface="Helvetica Neue"/>
               </a:rPr>
-              <a:t>30 posts · 609 likes</a:t>
+              <a:t>30 posts · 610 likes</a:t>
             </a:r>
           </a:p>
         </p:txBody>
@@ -5923,7 +5923,7 @@
                 </a:solidFill>
                 <a:latin typeface="Helvetica Neue"/>
               </a:rPr>
-              <a:t>912 average views per post</a:t>
+              <a:t>917 average views per post</a:t>
             </a:r>
           </a:p>
         </p:txBody>
@@ -6079,7 +6079,7 @@
                 </a:solidFill>
                 <a:latin typeface="Helvetica Neue"/>
               </a:rPr>
-              <a:t>#1  ·  FB  ·  4,232 views</a:t>
+              <a:t>#1  ·  FB  ·  4,236 views</a:t>
             </a:r>
           </a:p>
         </p:txBody>
@@ -6235,7 +6235,7 @@
                 </a:solidFill>
                 <a:latin typeface="Helvetica Neue"/>
               </a:rPr>
-              <a:t>#2  ·  FB  ·  3,042 views</a:t>
+              <a:t>#2  ·  FB  ·  3,050 views</a:t>
             </a:r>
           </a:p>
         </p:txBody>
@@ -13753,7 +13753,7 @@
                 </a:solidFill>
                 <a:latin typeface="Helvetica Neue"/>
               </a:rPr>
-              <a:t>2,576 avg views/post   ·   34 posts   ·   87,569 total</a:t>
+              <a:t>2,576 avg views/post   ·   34 posts   ·   87,593 total</a:t>
             </a:r>
           </a:p>
         </p:txBody>
@@ -14045,7 +14045,7 @@
                 </a:solidFill>
                 <a:latin typeface="Helvetica Neue"/>
               </a:rPr>
-              <a:t>1,248 avg views/post   ·   189 posts   ·   235,927 total</a:t>
+              <a:t>1,249 avg views/post   ·   189 posts   ·   236,140 total</a:t>
             </a:r>
           </a:p>
         </p:txBody>
@@ -16012,7 +16012,7 @@
         <p:spPr>
           <a:xfrm>
             <a:off x="4114800" y="2476968"/>
-            <a:ext cx="6026843" cy="128016"/>
+            <a:ext cx="6051233" cy="128016"/>
           </a:xfrm>
           <a:prstGeom prst="rect">
             <a:avLst/>
@@ -16055,7 +16055,7 @@
         </p:nvSpPr>
         <p:spPr>
           <a:xfrm>
-            <a:off x="10233083" y="2413312"/>
+            <a:off x="10257473" y="2413312"/>
             <a:ext cx="2286000" cy="291904"/>
           </a:xfrm>
           <a:prstGeom prst="rect">
@@ -16076,7 +16076,7 @@
                 </a:solidFill>
                 <a:latin typeface="Helvetica Neue"/>
               </a:rPr>
-              <a:t>90,934 views · 158 posts</a:t>
+              <a:t>91,302 views · 158 posts</a:t>
             </a:r>
           </a:p>
         </p:txBody>
@@ -16124,7 +16124,7 @@
         <p:spPr>
           <a:xfrm>
             <a:off x="4114800" y="2768873"/>
-            <a:ext cx="5803820" cy="128016"/>
+            <a:ext cx="5805411" cy="128016"/>
           </a:xfrm>
           <a:prstGeom prst="rect">
             <a:avLst/>
@@ -16167,7 +16167,7 @@
         </p:nvSpPr>
         <p:spPr>
           <a:xfrm>
-            <a:off x="10010060" y="2705217"/>
+            <a:off x="10011651" y="2705217"/>
             <a:ext cx="2286000" cy="291904"/>
           </a:xfrm>
           <a:prstGeom prst="rect">
@@ -16188,7 +16188,7 @@
                 </a:solidFill>
                 <a:latin typeface="Helvetica Neue"/>
               </a:rPr>
-              <a:t>87,569 views · 34 posts</a:t>
+              <a:t>87,593 views · 34 posts</a:t>
             </a:r>
           </a:p>
         </p:txBody>
@@ -16236,7 +16236,7 @@
         <p:spPr>
           <a:xfrm>
             <a:off x="4114800" y="3060778"/>
-            <a:ext cx="4724232" cy="128016"/>
+            <a:ext cx="4745242" cy="128016"/>
           </a:xfrm>
           <a:prstGeom prst="rect">
             <a:avLst/>
@@ -16279,7 +16279,7 @@
         </p:nvSpPr>
         <p:spPr>
           <a:xfrm>
-            <a:off x="8930472" y="2997121"/>
+            <a:off x="8951482" y="2997121"/>
             <a:ext cx="2286000" cy="291904"/>
           </a:xfrm>
           <a:prstGeom prst="rect">
@@ -16300,7 +16300,7 @@
                 </a:solidFill>
                 <a:latin typeface="Helvetica Neue"/>
               </a:rPr>
-              <a:t>71,280 views · 89 posts</a:t>
+              <a:t>71,597 views · 89 posts</a:t>
             </a:r>
           </a:p>
         </p:txBody>
@@ -16348,7 +16348,7 @@
         <p:spPr>
           <a:xfrm>
             <a:off x="4114800" y="3352682"/>
-            <a:ext cx="4209723" cy="128016"/>
+            <a:ext cx="4211181" cy="128016"/>
           </a:xfrm>
           <a:prstGeom prst="rect">
             <a:avLst/>
@@ -16391,7 +16391,7 @@
         </p:nvSpPr>
         <p:spPr>
           <a:xfrm>
-            <a:off x="8415963" y="3289026"/>
+            <a:off x="8417421" y="3289026"/>
             <a:ext cx="2286000" cy="291904"/>
           </a:xfrm>
           <a:prstGeom prst="rect">
@@ -16412,7 +16412,7 @@
                 </a:solidFill>
                 <a:latin typeface="Helvetica Neue"/>
               </a:rPr>
-              <a:t>63,517 views · 25 posts</a:t>
+              <a:t>63,539 views · 25 posts</a:t>
             </a:r>
           </a:p>
         </p:txBody>
@@ -16572,7 +16572,7 @@
         <p:spPr>
           <a:xfrm>
             <a:off x="4114800" y="3936491"/>
-            <a:ext cx="3383049" cy="128016"/>
+            <a:ext cx="3387025" cy="128016"/>
           </a:xfrm>
           <a:prstGeom prst="rect">
             <a:avLst/>
@@ -16615,7 +16615,7 @@
         </p:nvSpPr>
         <p:spPr>
           <a:xfrm>
-            <a:off x="7589289" y="3872835"/>
+            <a:off x="7593265" y="3872835"/>
             <a:ext cx="2286000" cy="291904"/>
           </a:xfrm>
           <a:prstGeom prst="rect">
@@ -16636,7 +16636,7 @@
                 </a:solidFill>
                 <a:latin typeface="Helvetica Neue"/>
               </a:rPr>
-              <a:t>51,044 views · 57 posts</a:t>
+              <a:t>51,104 views · 57 posts</a:t>
             </a:r>
           </a:p>
         </p:txBody>
@@ -16796,7 +16796,7 @@
         <p:spPr>
           <a:xfrm>
             <a:off x="4114800" y="4520301"/>
-            <a:ext cx="1813938" cy="128016"/>
+            <a:ext cx="1824078" cy="128016"/>
           </a:xfrm>
           <a:prstGeom prst="rect">
             <a:avLst/>
@@ -16839,7 +16839,7 @@
         </p:nvSpPr>
         <p:spPr>
           <a:xfrm>
-            <a:off x="6020178" y="4456644"/>
+            <a:off x="6030318" y="4456644"/>
             <a:ext cx="2286000" cy="291904"/>
           </a:xfrm>
           <a:prstGeom prst="rect">
@@ -16860,7 +16860,7 @@
                 </a:solidFill>
                 <a:latin typeface="Helvetica Neue"/>
               </a:rPr>
-              <a:t>27,369 views · 30 posts</a:t>
+              <a:t>27,522 views · 30 posts</a:t>
             </a:r>
           </a:p>
         </p:txBody>
@@ -18940,7 +18940,7 @@
                 </a:solidFill>
                 <a:latin typeface="Georgia"/>
               </a:rPr>
-              <a:t>87,569</a:t>
+              <a:t>87,593</a:t>
             </a:r>
           </a:p>
         </p:txBody>
@@ -19320,7 +19320,7 @@
                 </a:solidFill>
                 <a:latin typeface="Helvetica Neue"/>
               </a:rPr>
-              <a:t>#2  ·  IG  ·  7,704 views</a:t>
+              <a:t>#2  ·  IG  ·  7,728 views</a:t>
             </a:r>
           </a:p>
         </p:txBody>
@@ -19976,7 +19976,7 @@
                 </a:solidFill>
                 <a:latin typeface="Georgia"/>
               </a:rPr>
-              <a:t>71,280</a:t>
+              <a:t>71,597</a:t>
             </a:r>
           </a:p>
         </p:txBody>
@@ -20010,7 +20010,7 @@
                 </a:solidFill>
                 <a:latin typeface="Helvetica Neue"/>
               </a:rPr>
-              <a:t>89 posts · 1,540 likes</a:t>
+              <a:t>89 posts · 1,543 likes</a:t>
             </a:r>
           </a:p>
         </p:txBody>
@@ -20044,7 +20044,7 @@
                 </a:solidFill>
                 <a:latin typeface="Helvetica Neue"/>
               </a:rPr>
-              <a:t>801 average views per post</a:t>
+              <a:t>804 average views per post</a:t>
             </a:r>
           </a:p>
         </p:txBody>
@@ -20200,7 +20200,7 @@
                 </a:solidFill>
                 <a:latin typeface="Helvetica Neue"/>
               </a:rPr>
-              <a:t>#1  ·  FB  ·  11,710 views</a:t>
+              <a:t>#1  ·  FB  ·  11,780 views</a:t>
             </a:r>
           </a:p>
         </p:txBody>
@@ -21012,7 +21012,7 @@
                 </a:solidFill>
                 <a:latin typeface="Georgia"/>
               </a:rPr>
-              <a:t>63,517</a:t>
+              <a:t>63,539</a:t>
             </a:r>
           </a:p>
         </p:txBody>
@@ -21080,7 +21080,7 @@
                 </a:solidFill>
                 <a:latin typeface="Helvetica Neue"/>
               </a:rPr>
-              <a:t>2,541 average views per post</a:t>
+              <a:t>2,542 average views per post</a:t>
             </a:r>
           </a:p>
         </p:txBody>
@@ -22082,7 +22082,7 @@
                 </a:solidFill>
                 <a:latin typeface="Helvetica Neue"/>
               </a:rPr>
-              <a:t>22 posts · 3,199 likes</a:t>
+              <a:t>22 posts · 3,200 likes</a:t>
             </a:r>
           </a:p>
         </p:txBody>

--- a/SPONSOR_CONTENT_REPORT.pptx
+++ b/SPONSOR_CONTENT_REPORT.pptx
@@ -3327,7 +3327,7 @@
                 </a:solidFill>
                 <a:latin typeface="Helvetica Neue"/>
               </a:rPr>
-              <a:t>Reporting window: Jun 8 → 2026-09-25</a:t>
+              <a:t>Reporting window: Jun 8 → 2026-09-28</a:t>
             </a:r>
           </a:p>
         </p:txBody>
@@ -3783,7 +3783,7 @@
                 </a:solidFill>
                 <a:latin typeface="Georgia"/>
               </a:rPr>
-              <a:t>51,104</a:t>
+              <a:t>51,188</a:t>
             </a:r>
           </a:p>
         </p:txBody>
@@ -3817,7 +3817,7 @@
                 </a:solidFill>
                 <a:latin typeface="Helvetica Neue"/>
               </a:rPr>
-              <a:t>57 posts · 1,003 likes</a:t>
+              <a:t>57 posts · 1,004 likes</a:t>
             </a:r>
           </a:p>
         </p:txBody>
@@ -3851,7 +3851,7 @@
                 </a:solidFill>
                 <a:latin typeface="Helvetica Neue"/>
               </a:rPr>
-              <a:t>897 average views per post</a:t>
+              <a:t>898 average views per post</a:t>
             </a:r>
           </a:p>
         </p:txBody>
@@ -4007,7 +4007,7 @@
                 </a:solidFill>
                 <a:latin typeface="Helvetica Neue"/>
               </a:rPr>
-              <a:t>#1  ·  FB  ·  4,638 views</a:t>
+              <a:t>#1  ·  FB  ·  4,653 views</a:t>
             </a:r>
           </a:p>
         </p:txBody>
@@ -4163,7 +4163,7 @@
                 </a:solidFill>
                 <a:latin typeface="Helvetica Neue"/>
               </a:rPr>
-              <a:t>#2  ·  IG  ·  3,910 views</a:t>
+              <a:t>#2  ·  IG  ·  3,941 views</a:t>
             </a:r>
           </a:p>
         </p:txBody>
@@ -5855,7 +5855,7 @@
                 </a:solidFill>
                 <a:latin typeface="Georgia"/>
               </a:rPr>
-              <a:t>27,522</a:t>
+              <a:t>27,763</a:t>
             </a:r>
           </a:p>
         </p:txBody>
@@ -5889,7 +5889,7 @@
                 </a:solidFill>
                 <a:latin typeface="Helvetica Neue"/>
               </a:rPr>
-              <a:t>30 posts · 610 likes</a:t>
+              <a:t>30 posts · 616 likes</a:t>
             </a:r>
           </a:p>
         </p:txBody>
@@ -5923,7 +5923,7 @@
                 </a:solidFill>
                 <a:latin typeface="Helvetica Neue"/>
               </a:rPr>
-              <a:t>917 average views per post</a:t>
+              <a:t>925 average views per post</a:t>
             </a:r>
           </a:p>
         </p:txBody>
@@ -6079,7 +6079,7 @@
                 </a:solidFill>
                 <a:latin typeface="Helvetica Neue"/>
               </a:rPr>
-              <a:t>#1  ·  FB  ·  4,236 views</a:t>
+              <a:t>#1  ·  FB  ·  4,262 views</a:t>
             </a:r>
           </a:p>
         </p:txBody>
@@ -6235,7 +6235,7 @@
                 </a:solidFill>
                 <a:latin typeface="Helvetica Neue"/>
               </a:rPr>
-              <a:t>#2  ·  FB  ·  3,050 views</a:t>
+              <a:t>#2  ·  FB  ·  3,053 views</a:t>
             </a:r>
           </a:p>
         </p:txBody>
@@ -13753,7 +13753,7 @@
                 </a:solidFill>
                 <a:latin typeface="Helvetica Neue"/>
               </a:rPr>
-              <a:t>2,576 avg views/post   ·   34 posts   ·   87,593 total</a:t>
+              <a:t>2,577 avg views/post   ·   34 posts   ·   87,606 total</a:t>
             </a:r>
           </a:p>
         </p:txBody>
@@ -14045,7 +14045,7 @@
                 </a:solidFill>
                 <a:latin typeface="Helvetica Neue"/>
               </a:rPr>
-              <a:t>1,249 avg views/post   ·   189 posts   ·   236,140 total</a:t>
+              <a:t>1,251 avg views/post   ·   189 posts   ·   236,465 total</a:t>
             </a:r>
           </a:p>
         </p:txBody>
@@ -16012,7 +16012,7 @@
         <p:spPr>
           <a:xfrm>
             <a:off x="4114800" y="2476968"/>
-            <a:ext cx="6051233" cy="128016"/>
+            <a:ext cx="6078870" cy="128016"/>
           </a:xfrm>
           <a:prstGeom prst="rect">
             <a:avLst/>
@@ -16055,7 +16055,7 @@
         </p:nvSpPr>
         <p:spPr>
           <a:xfrm>
-            <a:off x="10257473" y="2413312"/>
+            <a:off x="10285110" y="2413312"/>
             <a:ext cx="2286000" cy="291904"/>
           </a:xfrm>
           <a:prstGeom prst="rect">
@@ -16076,7 +16076,7 @@
                 </a:solidFill>
                 <a:latin typeface="Helvetica Neue"/>
               </a:rPr>
-              <a:t>91,302 views · 158 posts</a:t>
+              <a:t>91,719 views · 158 posts</a:t>
             </a:r>
           </a:p>
         </p:txBody>
@@ -16124,7 +16124,7 @@
         <p:spPr>
           <a:xfrm>
             <a:off x="4114800" y="2768873"/>
-            <a:ext cx="5805411" cy="128016"/>
+            <a:ext cx="5806272" cy="128016"/>
           </a:xfrm>
           <a:prstGeom prst="rect">
             <a:avLst/>
@@ -16167,7 +16167,7 @@
         </p:nvSpPr>
         <p:spPr>
           <a:xfrm>
-            <a:off x="10011651" y="2705217"/>
+            <a:off x="10012512" y="2705217"/>
             <a:ext cx="2286000" cy="291904"/>
           </a:xfrm>
           <a:prstGeom prst="rect">
@@ -16188,7 +16188,7 @@
                 </a:solidFill>
                 <a:latin typeface="Helvetica Neue"/>
               </a:rPr>
-              <a:t>87,593 views · 34 posts</a:t>
+              <a:t>87,606 views · 34 posts</a:t>
             </a:r>
           </a:p>
         </p:txBody>
@@ -16236,7 +16236,7 @@
         <p:spPr>
           <a:xfrm>
             <a:off x="4114800" y="3060778"/>
-            <a:ext cx="4745242" cy="128016"/>
+            <a:ext cx="4757371" cy="128016"/>
           </a:xfrm>
           <a:prstGeom prst="rect">
             <a:avLst/>
@@ -16279,7 +16279,7 @@
         </p:nvSpPr>
         <p:spPr>
           <a:xfrm>
-            <a:off x="8951482" y="2997121"/>
+            <a:off x="8963611" y="2997121"/>
             <a:ext cx="2286000" cy="291904"/>
           </a:xfrm>
           <a:prstGeom prst="rect">
@@ -16300,7 +16300,7 @@
                 </a:solidFill>
                 <a:latin typeface="Helvetica Neue"/>
               </a:rPr>
-              <a:t>71,597 views · 89 posts</a:t>
+              <a:t>71,780 views · 89 posts</a:t>
             </a:r>
           </a:p>
         </p:txBody>
@@ -16348,7 +16348,7 @@
         <p:spPr>
           <a:xfrm>
             <a:off x="4114800" y="3352682"/>
-            <a:ext cx="4211181" cy="128016"/>
+            <a:ext cx="4213037" cy="128016"/>
           </a:xfrm>
           <a:prstGeom prst="rect">
             <a:avLst/>
@@ -16391,7 +16391,7 @@
         </p:nvSpPr>
         <p:spPr>
           <a:xfrm>
-            <a:off x="8417421" y="3289026"/>
+            <a:off x="8419277" y="3289026"/>
             <a:ext cx="2286000" cy="291904"/>
           </a:xfrm>
           <a:prstGeom prst="rect">
@@ -16412,7 +16412,7 @@
                 </a:solidFill>
                 <a:latin typeface="Helvetica Neue"/>
               </a:rPr>
-              <a:t>63,539 views · 25 posts</a:t>
+              <a:t>63,567 views · 25 posts</a:t>
             </a:r>
           </a:p>
         </p:txBody>
@@ -16572,7 +16572,7 @@
         <p:spPr>
           <a:xfrm>
             <a:off x="4114800" y="3936491"/>
-            <a:ext cx="3387025" cy="128016"/>
+            <a:ext cx="3392592" cy="128016"/>
           </a:xfrm>
           <a:prstGeom prst="rect">
             <a:avLst/>
@@ -16615,7 +16615,7 @@
         </p:nvSpPr>
         <p:spPr>
           <a:xfrm>
-            <a:off x="7593265" y="3872835"/>
+            <a:off x="7598832" y="3872835"/>
             <a:ext cx="2286000" cy="291904"/>
           </a:xfrm>
           <a:prstGeom prst="rect">
@@ -16636,7 +16636,7 @@
                 </a:solidFill>
                 <a:latin typeface="Helvetica Neue"/>
               </a:rPr>
-              <a:t>51,104 views · 57 posts</a:t>
+              <a:t>51,188 views · 57 posts</a:t>
             </a:r>
           </a:p>
         </p:txBody>
@@ -16796,7 +16796,7 @@
         <p:spPr>
           <a:xfrm>
             <a:off x="4114800" y="4520301"/>
-            <a:ext cx="1824078" cy="128016"/>
+            <a:ext cx="1840051" cy="128016"/>
           </a:xfrm>
           <a:prstGeom prst="rect">
             <a:avLst/>
@@ -16839,7 +16839,7 @@
         </p:nvSpPr>
         <p:spPr>
           <a:xfrm>
-            <a:off x="6030318" y="4456644"/>
+            <a:off x="6046291" y="4456644"/>
             <a:ext cx="2286000" cy="291904"/>
           </a:xfrm>
           <a:prstGeom prst="rect">
@@ -16860,7 +16860,7 @@
                 </a:solidFill>
                 <a:latin typeface="Helvetica Neue"/>
               </a:rPr>
-              <a:t>27,522 views · 30 posts</a:t>
+              <a:t>27,763 views · 30 posts</a:t>
             </a:r>
           </a:p>
         </p:txBody>
@@ -18940,7 +18940,7 @@
                 </a:solidFill>
                 <a:latin typeface="Georgia"/>
               </a:rPr>
-              <a:t>87,593</a:t>
+              <a:t>87,606</a:t>
             </a:r>
           </a:p>
         </p:txBody>
@@ -19008,7 +19008,7 @@
                 </a:solidFill>
                 <a:latin typeface="Helvetica Neue"/>
               </a:rPr>
-              <a:t>2,576 average views per post</a:t>
+              <a:t>2,577 average views per post</a:t>
             </a:r>
           </a:p>
         </p:txBody>
@@ -19320,7 +19320,7 @@
                 </a:solidFill>
                 <a:latin typeface="Helvetica Neue"/>
               </a:rPr>
-              <a:t>#2  ·  IG  ·  7,728 views</a:t>
+              <a:t>#2  ·  IG  ·  7,738 views</a:t>
             </a:r>
           </a:p>
         </p:txBody>
@@ -19976,7 +19976,7 @@
                 </a:solidFill>
                 <a:latin typeface="Georgia"/>
               </a:rPr>
-              <a:t>71,597</a:t>
+              <a:t>71,780</a:t>
             </a:r>
           </a:p>
         </p:txBody>
@@ -20010,7 +20010,7 @@
                 </a:solidFill>
                 <a:latin typeface="Helvetica Neue"/>
               </a:rPr>
-              <a:t>89 posts · 1,543 likes</a:t>
+              <a:t>89 posts · 1,548 likes</a:t>
             </a:r>
           </a:p>
         </p:txBody>
@@ -20044,7 +20044,7 @@
                 </a:solidFill>
                 <a:latin typeface="Helvetica Neue"/>
               </a:rPr>
-              <a:t>804 average views per post</a:t>
+              <a:t>807 average views per post</a:t>
             </a:r>
           </a:p>
         </p:txBody>
@@ -20200,7 +20200,7 @@
                 </a:solidFill>
                 <a:latin typeface="Helvetica Neue"/>
               </a:rPr>
-              <a:t>#1  ·  FB  ·  11,780 views</a:t>
+              <a:t>#1  ·  FB  ·  11,811 views</a:t>
             </a:r>
           </a:p>
         </p:txBody>
@@ -21012,7 +21012,7 @@
                 </a:solidFill>
                 <a:latin typeface="Georgia"/>
               </a:rPr>
-              <a:t>63,539</a:t>
+              <a:t>63,567</a:t>
             </a:r>
           </a:p>
         </p:txBody>
@@ -21080,7 +21080,7 @@
                 </a:solidFill>
                 <a:latin typeface="Helvetica Neue"/>
               </a:rPr>
-              <a:t>2,542 average views per post</a:t>
+              <a:t>2,543 average views per post</a:t>
             </a:r>
           </a:p>
         </p:txBody>
@@ -22082,7 +22082,7 @@
                 </a:solidFill>
                 <a:latin typeface="Helvetica Neue"/>
               </a:rPr>
-              <a:t>22 posts · 3,200 likes</a:t>
+              <a:t>22 posts · 3,201 likes</a:t>
             </a:r>
           </a:p>
         </p:txBody>

--- a/SPONSOR_CONTENT_REPORT.pptx
+++ b/SPONSOR_CONTENT_REPORT.pptx
@@ -3327,7 +3327,7 @@
                 </a:solidFill>
                 <a:latin typeface="Helvetica Neue"/>
               </a:rPr>
-              <a:t>Reporting window: Jun 8 → 2026-09-28</a:t>
+              <a:t>Reporting window: Jun 8 → 2026-10-02</a:t>
             </a:r>
           </a:p>
         </p:txBody>
@@ -3559,7 +3559,7 @@
                 </a:solidFill>
                 <a:latin typeface="Georgia"/>
               </a:rPr>
-              <a:t>Community &amp; Culture</a:t>
+              <a:t>Downtown Development</a:t>
             </a:r>
           </a:p>
         </p:txBody>
@@ -3593,7 +3593,7 @@
                 </a:solidFill>
                 <a:latin typeface="Helvetica Neue"/>
               </a:rPr>
-              <a:t>Local color, events, pageantry, personal growth, city life.</a:t>
+              <a:t>Physical growth of Downey — Round One, Fun Box, Stonewood, YMCA, new businesses opening.</a:t>
             </a:r>
           </a:p>
         </p:txBody>
@@ -3623,11 +3623,11 @@
             <a:r>
               <a:rPr sz="900" b="1">
                 <a:solidFill>
-                  <a:srgbClr val="141833"/>
-                </a:solidFill>
-                <a:latin typeface="Helvetica Neue"/>
-              </a:rPr>
-              <a:t>AUDIENCE (theoretical): Local color · Broad, 30+</a:t>
+                  <a:srgbClr val="C9A227"/>
+                </a:solidFill>
+                <a:latin typeface="Helvetica Neue"/>
+              </a:rPr>
+              <a:t>AUDIENCE (theoretical): Local civic pride · Downey residents 30+</a:t>
             </a:r>
           </a:p>
         </p:txBody>
@@ -3691,7 +3691,7 @@
             <a:avLst/>
           </a:prstGeom>
           <a:solidFill>
-            <a:srgbClr val="141833"/>
+            <a:srgbClr val="C9A227"/>
           </a:solidFill>
           <a:ln>
             <a:noFill/>
@@ -3745,7 +3745,7 @@
             <a:r>
               <a:rPr sz="1100" b="1">
                 <a:solidFill>
-                  <a:srgbClr val="141833"/>
+                  <a:srgbClr val="C9A227"/>
                 </a:solidFill>
                 <a:latin typeface="Helvetica Neue"/>
               </a:rPr>
@@ -3783,7 +3783,7 @@
                 </a:solidFill>
                 <a:latin typeface="Georgia"/>
               </a:rPr>
-              <a:t>51,188</a:t>
+              <a:t>47,677</a:t>
             </a:r>
           </a:p>
         </p:txBody>
@@ -3817,7 +3817,7 @@
                 </a:solidFill>
                 <a:latin typeface="Helvetica Neue"/>
               </a:rPr>
-              <a:t>57 posts · 1,004 likes</a:t>
+              <a:t>18 posts · 2,941 likes</a:t>
             </a:r>
           </a:p>
         </p:txBody>
@@ -3851,7 +3851,7 @@
                 </a:solidFill>
                 <a:latin typeface="Helvetica Neue"/>
               </a:rPr>
-              <a:t>898 average views per post</a:t>
+              <a:t>2,649 average views per post</a:t>
             </a:r>
           </a:p>
         </p:txBody>
@@ -3881,7 +3881,7 @@
             <a:r>
               <a:rPr sz="1100" b="1">
                 <a:solidFill>
-                  <a:srgbClr val="141833"/>
+                  <a:srgbClr val="C9A227"/>
                 </a:solidFill>
                 <a:latin typeface="Helvetica Neue"/>
               </a:rPr>
@@ -3949,7 +3949,7 @@
             <a:avLst/>
           </a:prstGeom>
           <a:solidFill>
-            <a:srgbClr val="141833"/>
+            <a:srgbClr val="C9A227"/>
           </a:solidFill>
           <a:ln>
             <a:noFill/>
@@ -4003,11 +4003,11 @@
             <a:r>
               <a:rPr sz="1000" b="1">
                 <a:solidFill>
-                  <a:srgbClr val="141833"/>
-                </a:solidFill>
-                <a:latin typeface="Helvetica Neue"/>
-              </a:rPr>
-              <a:t>#1  ·  FB  ·  4,653 views</a:t>
+                  <a:srgbClr val="C9A227"/>
+                </a:solidFill>
+                <a:latin typeface="Helvetica Neue"/>
+              </a:rPr>
+              <a:t>#1  ·  TT  ·  29,200 views</a:t>
             </a:r>
           </a:p>
         </p:txBody>
@@ -4041,7 +4041,7 @@
                 </a:solidFill>
                 <a:latin typeface="Helvetica Neue"/>
               </a:rPr>
-              <a:t>An emotional response to a Charlie Kirk &amp; LGBQT comment raises questions about a leader's </a:t>
+              <a:t>Get ready! Round One is taking over the old Sears at Stonewood Mall. This massive 150,000 </a:t>
             </a:r>
           </a:p>
         </p:txBody>
@@ -4105,7 +4105,7 @@
             <a:avLst/>
           </a:prstGeom>
           <a:solidFill>
-            <a:srgbClr val="141833"/>
+            <a:srgbClr val="C9A227"/>
           </a:solidFill>
           <a:ln>
             <a:noFill/>
@@ -4159,11 +4159,11 @@
             <a:r>
               <a:rPr sz="1000" b="1">
                 <a:solidFill>
-                  <a:srgbClr val="141833"/>
-                </a:solidFill>
-                <a:latin typeface="Helvetica Neue"/>
-              </a:rPr>
-              <a:t>#2  ·  IG  ·  3,941 views</a:t>
+                  <a:srgbClr val="C9A227"/>
+                </a:solidFill>
+                <a:latin typeface="Helvetica Neue"/>
+              </a:rPr>
+              <a:t>#2  ·  IG  ·  4,455 views</a:t>
             </a:r>
           </a:p>
         </p:txBody>
@@ -4197,7 +4197,7 @@
                 </a:solidFill>
                 <a:latin typeface="Helvetica Neue"/>
               </a:rPr>
-              <a:t>Following an outburst, she was removed as a Chamber of Commerce ambassador and rejected fo</a:t>
+              <a:t>Round One is coming to Stonewood Mall, transforming the old Sears space! Get ready for a m</a:t>
             </a:r>
           </a:p>
         </p:txBody>
@@ -4261,7 +4261,7 @@
             <a:avLst/>
           </a:prstGeom>
           <a:solidFill>
-            <a:srgbClr val="141833"/>
+            <a:srgbClr val="C9A227"/>
           </a:solidFill>
           <a:ln>
             <a:noFill/>
@@ -4315,11 +4315,11 @@
             <a:r>
               <a:rPr sz="1000" b="1">
                 <a:solidFill>
-                  <a:srgbClr val="141833"/>
-                </a:solidFill>
-                <a:latin typeface="Helvetica Neue"/>
-              </a:rPr>
-              <a:t>#3  ·  TT  ·  3,520 views</a:t>
+                  <a:srgbClr val="C9A227"/>
+                </a:solidFill>
+                <a:latin typeface="Helvetica Neue"/>
+              </a:rPr>
+              <a:t>#3  ·  IG  ·  2,390 views</a:t>
             </a:r>
           </a:p>
         </p:txBody>
@@ -4353,7 +4353,7 @@
                 </a:solidFill>
                 <a:latin typeface="Helvetica Neue"/>
               </a:rPr>
-              <a:t>Downey is a built-out city, but Sacramento requires us to build 6,100 new homes. Local off</a:t>
+              <a:t>20 years later, this letter still resonates. It sparked the Downtown Improvement Associati</a:t>
             </a:r>
           </a:p>
         </p:txBody>
@@ -4427,7 +4427,7 @@
             <a:r>
               <a:rPr sz="1000" b="1">
                 <a:solidFill>
-                  <a:srgbClr val="141833"/>
+                  <a:srgbClr val="C9A227"/>
                 </a:solidFill>
                 <a:latin typeface="Helvetica Neue"/>
               </a:rPr>
@@ -4465,7 +4465,7 @@
                 </a:solidFill>
                 <a:latin typeface="Helvetica Neue"/>
               </a:rPr>
-              <a:t>Modest reach. Fine as filler between heavy hitters, not a headline lane.</a:t>
+              <a:t>Solid mid-tier. Worth continued investment. Test scaling to see if it holds.</a:t>
             </a:r>
           </a:p>
         </p:txBody>
@@ -4595,7 +4595,7 @@
                 </a:solidFill>
                 <a:latin typeface="Georgia"/>
               </a:rPr>
-              <a:t>Downtown Development</a:t>
+              <a:t>Political Individual Highlights</a:t>
             </a:r>
           </a:p>
         </p:txBody>
@@ -4629,7 +4629,7 @@
                 </a:solidFill>
                 <a:latin typeface="Helvetica Neue"/>
               </a:rPr>
-              <a:t>Physical growth of Downey — Round One, Fun Box, Stonewood, YMCA, new businesses opening.</a:t>
+              <a:t>Candidate/elected personality profiles — Carrie Uva, Hector Sosa. Not scandal-driven.</a:t>
             </a:r>
           </a:p>
         </p:txBody>
@@ -4659,11 +4659,11 @@
             <a:r>
               <a:rPr sz="900" b="1">
                 <a:solidFill>
-                  <a:srgbClr val="C9A227"/>
-                </a:solidFill>
-                <a:latin typeface="Helvetica Neue"/>
-              </a:rPr>
-              <a:t>AUDIENCE (theoretical): Local civic pride · Downey residents 30+</a:t>
+                  <a:srgbClr val="2E86AB"/>
+                </a:solidFill>
+                <a:latin typeface="Helvetica Neue"/>
+              </a:rPr>
+              <a:t>AUDIENCE (theoretical): Personal profile · Broad (voters, campaign-season readers)</a:t>
             </a:r>
           </a:p>
         </p:txBody>
@@ -4727,7 +4727,7 @@
             <a:avLst/>
           </a:prstGeom>
           <a:solidFill>
-            <a:srgbClr val="C9A227"/>
+            <a:srgbClr val="2E86AB"/>
           </a:solidFill>
           <a:ln>
             <a:noFill/>
@@ -4781,7 +4781,7 @@
             <a:r>
               <a:rPr sz="1100" b="1">
                 <a:solidFill>
-                  <a:srgbClr val="C9A227"/>
+                  <a:srgbClr val="2E86AB"/>
                 </a:solidFill>
                 <a:latin typeface="Helvetica Neue"/>
               </a:rPr>
@@ -4819,7 +4819,7 @@
                 </a:solidFill>
                 <a:latin typeface="Georgia"/>
               </a:rPr>
-              <a:t>47,677</a:t>
+              <a:t>28,047</a:t>
             </a:r>
           </a:p>
         </p:txBody>
@@ -4853,7 +4853,7 @@
                 </a:solidFill>
                 <a:latin typeface="Helvetica Neue"/>
               </a:rPr>
-              <a:t>18 posts · 2,941 likes</a:t>
+              <a:t>30 posts · 619 likes</a:t>
             </a:r>
           </a:p>
         </p:txBody>
@@ -4887,7 +4887,7 @@
                 </a:solidFill>
                 <a:latin typeface="Helvetica Neue"/>
               </a:rPr>
-              <a:t>2,649 average views per post</a:t>
+              <a:t>935 average views per post</a:t>
             </a:r>
           </a:p>
         </p:txBody>
@@ -4917,7 +4917,7 @@
             <a:r>
               <a:rPr sz="1100" b="1">
                 <a:solidFill>
-                  <a:srgbClr val="C9A227"/>
+                  <a:srgbClr val="2E86AB"/>
                 </a:solidFill>
                 <a:latin typeface="Helvetica Neue"/>
               </a:rPr>
@@ -4985,7 +4985,7 @@
             <a:avLst/>
           </a:prstGeom>
           <a:solidFill>
-            <a:srgbClr val="C9A227"/>
+            <a:srgbClr val="2E86AB"/>
           </a:solidFill>
           <a:ln>
             <a:noFill/>
@@ -5039,11 +5039,11 @@
             <a:r>
               <a:rPr sz="1000" b="1">
                 <a:solidFill>
-                  <a:srgbClr val="C9A227"/>
-                </a:solidFill>
-                <a:latin typeface="Helvetica Neue"/>
-              </a:rPr>
-              <a:t>#1  ·  TT  ·  29,200 views</a:t>
+                  <a:srgbClr val="2E86AB"/>
+                </a:solidFill>
+                <a:latin typeface="Helvetica Neue"/>
+              </a:rPr>
+              <a:t>#1  ·  FB  ·  4,278 views</a:t>
             </a:r>
           </a:p>
         </p:txBody>
@@ -5077,7 +5077,7 @@
                 </a:solidFill>
                 <a:latin typeface="Helvetica Neue"/>
               </a:rPr>
-              <a:t>Get ready! Round One is taking over the old Sears at Stonewood Mall. This massive 150,000 </a:t>
+              <a:t>With a clear choice for Downey, Hector Sosa stands out. His campaign kickoff event was a t</a:t>
             </a:r>
           </a:p>
         </p:txBody>
@@ -5141,7 +5141,7 @@
             <a:avLst/>
           </a:prstGeom>
           <a:solidFill>
-            <a:srgbClr val="C9A227"/>
+            <a:srgbClr val="2E86AB"/>
           </a:solidFill>
           <a:ln>
             <a:noFill/>
@@ -5195,11 +5195,11 @@
             <a:r>
               <a:rPr sz="1000" b="1">
                 <a:solidFill>
-                  <a:srgbClr val="C9A227"/>
-                </a:solidFill>
-                <a:latin typeface="Helvetica Neue"/>
-              </a:rPr>
-              <a:t>#2  ·  IG  ·  4,455 views</a:t>
+                  <a:srgbClr val="2E86AB"/>
+                </a:solidFill>
+                <a:latin typeface="Helvetica Neue"/>
+              </a:rPr>
+              <a:t>#2  ·  FB  ·  3,053 views</a:t>
             </a:r>
           </a:p>
         </p:txBody>
@@ -5233,7 +5233,7 @@
                 </a:solidFill>
                 <a:latin typeface="Helvetica Neue"/>
               </a:rPr>
-              <a:t>Round One is coming to Stonewood Mall, transforming the old Sears space! Get ready for a m</a:t>
+              <a:t>Don't be fooled by simple comparisons. Carrie Uva, a lifelong Democrat, has earned endorse</a:t>
             </a:r>
           </a:p>
         </p:txBody>
@@ -5297,7 +5297,7 @@
             <a:avLst/>
           </a:prstGeom>
           <a:solidFill>
-            <a:srgbClr val="C9A227"/>
+            <a:srgbClr val="2E86AB"/>
           </a:solidFill>
           <a:ln>
             <a:noFill/>
@@ -5351,11 +5351,11 @@
             <a:r>
               <a:rPr sz="1000" b="1">
                 <a:solidFill>
-                  <a:srgbClr val="C9A227"/>
-                </a:solidFill>
-                <a:latin typeface="Helvetica Neue"/>
-              </a:rPr>
-              <a:t>#3  ·  IG  ·  2,390 views</a:t>
+                  <a:srgbClr val="2E86AB"/>
+                </a:solidFill>
+                <a:latin typeface="Helvetica Neue"/>
+              </a:rPr>
+              <a:t>#3  ·  FB  ·  2,253 views</a:t>
             </a:r>
           </a:p>
         </p:txBody>
@@ -5389,7 +5389,7 @@
                 </a:solidFill>
                 <a:latin typeface="Helvetica Neue"/>
               </a:rPr>
-              <a:t>20 years later, this letter still resonates. It sparked the Downtown Improvement Associati</a:t>
+              <a:t>The Newsom administration and Rob Bonta's lawsuit against the federal government has been </a:t>
             </a:r>
           </a:p>
         </p:txBody>
@@ -5463,7 +5463,7 @@
             <a:r>
               <a:rPr sz="1000" b="1">
                 <a:solidFill>
-                  <a:srgbClr val="C9A227"/>
+                  <a:srgbClr val="2E86AB"/>
                 </a:solidFill>
                 <a:latin typeface="Helvetica Neue"/>
               </a:rPr>
@@ -5501,7 +5501,7 @@
                 </a:solidFill>
                 <a:latin typeface="Helvetica Neue"/>
               </a:rPr>
-              <a:t>Solid mid-tier. Worth continued investment. Test scaling to see if it holds.</a:t>
+              <a:t>Modest reach. Fine as filler between heavy hitters, not a headline lane.</a:t>
             </a:r>
           </a:p>
         </p:txBody>
@@ -5631,7 +5631,7 @@
                 </a:solidFill>
                 <a:latin typeface="Georgia"/>
               </a:rPr>
-              <a:t>Political Individual Highlights</a:t>
+              <a:t>Resident Highlights</a:t>
             </a:r>
           </a:p>
         </p:txBody>
@@ -5665,7 +5665,7 @@
                 </a:solidFill>
                 <a:latin typeface="Helvetica Neue"/>
               </a:rPr>
-              <a:t>Candidate/elected personality profiles — Carrie Uva, Hector Sosa. Not scandal-driven.</a:t>
+              <a:t>Non-political citizen profiles — small business owners, community members. Granata, Gately, the deacon.</a:t>
             </a:r>
           </a:p>
         </p:txBody>
@@ -5695,11 +5695,11 @@
             <a:r>
               <a:rPr sz="900" b="1">
                 <a:solidFill>
-                  <a:srgbClr val="2E86AB"/>
-                </a:solidFill>
-                <a:latin typeface="Helvetica Neue"/>
-              </a:rPr>
-              <a:t>AUDIENCE (theoretical): Personal profile · Broad (voters, campaign-season readers)</a:t>
+                  <a:srgbClr val="1B7A43"/>
+                </a:solidFill>
+                <a:latin typeface="Helvetica Neue"/>
+              </a:rPr>
+              <a:t>AUDIENCE (theoretical): Human interest · Broad, community-connected</a:t>
             </a:r>
           </a:p>
         </p:txBody>
@@ -5763,7 +5763,7 @@
             <a:avLst/>
           </a:prstGeom>
           <a:solidFill>
-            <a:srgbClr val="2E86AB"/>
+            <a:srgbClr val="1B7A43"/>
           </a:solidFill>
           <a:ln>
             <a:noFill/>
@@ -5817,7 +5817,7 @@
             <a:r>
               <a:rPr sz="1100" b="1">
                 <a:solidFill>
-                  <a:srgbClr val="2E86AB"/>
+                  <a:srgbClr val="1B7A43"/>
                 </a:solidFill>
                 <a:latin typeface="Helvetica Neue"/>
               </a:rPr>
@@ -5855,7 +5855,7 @@
                 </a:solidFill>
                 <a:latin typeface="Georgia"/>
               </a:rPr>
-              <a:t>27,763</a:t>
+              <a:t>8,253</a:t>
             </a:r>
           </a:p>
         </p:txBody>
@@ -5889,7 +5889,7 @@
                 </a:solidFill>
                 <a:latin typeface="Helvetica Neue"/>
               </a:rPr>
-              <a:t>30 posts · 616 likes</a:t>
+              <a:t>8 posts · 141 likes</a:t>
             </a:r>
           </a:p>
         </p:txBody>
@@ -5923,7 +5923,7 @@
                 </a:solidFill>
                 <a:latin typeface="Helvetica Neue"/>
               </a:rPr>
-              <a:t>925 average views per post</a:t>
+              <a:t>1,032 average views per post</a:t>
             </a:r>
           </a:p>
         </p:txBody>
@@ -5953,7 +5953,7 @@
             <a:r>
               <a:rPr sz="1100" b="1">
                 <a:solidFill>
-                  <a:srgbClr val="2E86AB"/>
+                  <a:srgbClr val="1B7A43"/>
                 </a:solidFill>
                 <a:latin typeface="Helvetica Neue"/>
               </a:rPr>
@@ -6021,7 +6021,7 @@
             <a:avLst/>
           </a:prstGeom>
           <a:solidFill>
-            <a:srgbClr val="2E86AB"/>
+            <a:srgbClr val="1B7A43"/>
           </a:solidFill>
           <a:ln>
             <a:noFill/>
@@ -6075,11 +6075,11 @@
             <a:r>
               <a:rPr sz="1000" b="1">
                 <a:solidFill>
-                  <a:srgbClr val="2E86AB"/>
-                </a:solidFill>
-                <a:latin typeface="Helvetica Neue"/>
-              </a:rPr>
-              <a:t>#1  ·  FB  ·  4,262 views</a:t>
+                  <a:srgbClr val="1B7A43"/>
+                </a:solidFill>
+                <a:latin typeface="Helvetica Neue"/>
+              </a:rPr>
+              <a:t>#1  ·  IG  ·  3,551 views</a:t>
             </a:r>
           </a:p>
         </p:txBody>
@@ -6113,7 +6113,7 @@
                 </a:solidFill>
                 <a:latin typeface="Helvetica Neue"/>
               </a:rPr>
-              <a:t>With a clear choice for Downey, Hector Sosa stands out. His campaign kickoff event was a t</a:t>
+              <a:t>Almost ran over a family. I got the license plate, checked on them. Turns out he's a Catho</a:t>
             </a:r>
           </a:p>
         </p:txBody>
@@ -6177,7 +6177,7 @@
             <a:avLst/>
           </a:prstGeom>
           <a:solidFill>
-            <a:srgbClr val="2E86AB"/>
+            <a:srgbClr val="1B7A43"/>
           </a:solidFill>
           <a:ln>
             <a:noFill/>
@@ -6231,11 +6231,11 @@
             <a:r>
               <a:rPr sz="1000" b="1">
                 <a:solidFill>
-                  <a:srgbClr val="2E86AB"/>
-                </a:solidFill>
-                <a:latin typeface="Helvetica Neue"/>
-              </a:rPr>
-              <a:t>#2  ·  FB  ·  3,053 views</a:t>
+                  <a:srgbClr val="1B7A43"/>
+                </a:solidFill>
+                <a:latin typeface="Helvetica Neue"/>
+              </a:rPr>
+              <a:t>#2  ·  FB  ·  2,491 views</a:t>
             </a:r>
           </a:p>
         </p:txBody>
@@ -6269,7 +6269,7 @@
                 </a:solidFill>
                 <a:latin typeface="Helvetica Neue"/>
               </a:rPr>
-              <a:t>Don't be fooled by simple comparisons. Carrie Uva, a lifelong Democrat, has earned endorse</a:t>
+              <a:t>A terrifying moment outside City Hall as a car nearly hits a family. A witness captured th</a:t>
             </a:r>
           </a:p>
         </p:txBody>
@@ -6333,7 +6333,7 @@
             <a:avLst/>
           </a:prstGeom>
           <a:solidFill>
-            <a:srgbClr val="2E86AB"/>
+            <a:srgbClr val="1B7A43"/>
           </a:solidFill>
           <a:ln>
             <a:noFill/>
@@ -6387,11 +6387,11 @@
             <a:r>
               <a:rPr sz="1000" b="1">
                 <a:solidFill>
-                  <a:srgbClr val="2E86AB"/>
-                </a:solidFill>
-                <a:latin typeface="Helvetica Neue"/>
-              </a:rPr>
-              <a:t>#3  ·  FB  ·  2,253 views</a:t>
+                  <a:srgbClr val="1B7A43"/>
+                </a:solidFill>
+                <a:latin typeface="Helvetica Neue"/>
+              </a:rPr>
+              <a:t>#3  ·  FB  ·  812 views</a:t>
             </a:r>
           </a:p>
         </p:txBody>
@@ -6425,7 +6425,7 @@
                 </a:solidFill>
                 <a:latin typeface="Helvetica Neue"/>
               </a:rPr>
-              <a:t>The Newsom administration and Rob Bonta's lawsuit against the federal government has been </a:t>
+              <a:t>Running a restaurant means the show must go on, even when things are falling apart. Unlike</a:t>
             </a:r>
           </a:p>
         </p:txBody>
@@ -6499,7 +6499,7 @@
             <a:r>
               <a:rPr sz="1000" b="1">
                 <a:solidFill>
-                  <a:srgbClr val="2E86AB"/>
+                  <a:srgbClr val="1B7A43"/>
                 </a:solidFill>
                 <a:latin typeface="Helvetica Neue"/>
               </a:rPr>
@@ -6537,7 +6537,7 @@
                 </a:solidFill>
                 <a:latin typeface="Helvetica Neue"/>
               </a:rPr>
-              <a:t>Modest reach. Fine as filler between heavy hitters, not a headline lane.</a:t>
+              <a:t>Solid mid-tier. Worth continued investment. Test scaling to see if it holds.</a:t>
             </a:r>
           </a:p>
         </p:txBody>
@@ -6575,912 +6575,6 @@
             <a:avLst/>
           </a:prstGeom>
           <a:solidFill>
-            <a:srgbClr val="FCF6F5"/>
-          </a:solidFill>
-          <a:ln>
-            <a:noFill/>
-          </a:ln>
-          <a:effectLst/>
-        </p:spPr>
-        <p:style>
-          <a:lnRef idx="1">
-            <a:schemeClr val="accent1"/>
-          </a:lnRef>
-          <a:fillRef idx="3">
-            <a:schemeClr val="accent1"/>
-          </a:fillRef>
-          <a:effectRef idx="2">
-            <a:schemeClr val="accent1"/>
-          </a:effectRef>
-          <a:fontRef idx="minor">
-            <a:schemeClr val="lt1"/>
-          </a:fontRef>
-        </p:style>
-        <p:txBody>
-          <a:bodyPr rtlCol="0" anchor="ctr"/>
-          <a:lstStyle/>
-          <a:p>
-            <a:pPr algn="ctr"/>
-          </a:p>
-        </p:txBody>
-      </p:sp>
-      <p:sp>
-        <p:nvSpPr>
-          <p:cNvPr id="3" name="TextBox 2"/>
-          <p:cNvSpPr txBox="1"/>
-          <p:nvPr/>
-        </p:nvSpPr>
-        <p:spPr>
-          <a:xfrm>
-            <a:off x="731520" y="457200"/>
-            <a:ext cx="10698480" cy="365760"/>
-          </a:xfrm>
-          <a:prstGeom prst="rect">
-            <a:avLst/>
-          </a:prstGeom>
-          <a:noFill/>
-        </p:spPr>
-        <p:txBody>
-          <a:bodyPr wrap="square" lIns="0" rIns="0" tIns="0" bIns="0">
-            <a:spAutoFit/>
-          </a:bodyPr>
-          <a:lstStyle/>
-          <a:p>
-            <a:r>
-              <a:rPr sz="1200" b="1">
-                <a:solidFill>
-                  <a:srgbClr val="990011"/>
-                </a:solidFill>
-                <a:latin typeface="Helvetica Neue"/>
-              </a:rPr>
-              <a:t>CATEGORY DEEP-DIVE</a:t>
-            </a:r>
-          </a:p>
-        </p:txBody>
-      </p:sp>
-      <p:sp>
-        <p:nvSpPr>
-          <p:cNvPr id="4" name="TextBox 3"/>
-          <p:cNvSpPr txBox="1"/>
-          <p:nvPr/>
-        </p:nvSpPr>
-        <p:spPr>
-          <a:xfrm>
-            <a:off x="731520" y="822960"/>
-            <a:ext cx="10698480" cy="822960"/>
-          </a:xfrm>
-          <a:prstGeom prst="rect">
-            <a:avLst/>
-          </a:prstGeom>
-          <a:noFill/>
-        </p:spPr>
-        <p:txBody>
-          <a:bodyPr wrap="square" lIns="0" rIns="0" tIns="0" bIns="0">
-            <a:spAutoFit/>
-          </a:bodyPr>
-          <a:lstStyle/>
-          <a:p>
-            <a:r>
-              <a:rPr sz="3000" b="1">
-                <a:solidFill>
-                  <a:srgbClr val="2F3C7E"/>
-                </a:solidFill>
-                <a:latin typeface="Georgia"/>
-              </a:rPr>
-              <a:t>Resident Highlights</a:t>
-            </a:r>
-          </a:p>
-        </p:txBody>
-      </p:sp>
-      <p:sp>
-        <p:nvSpPr>
-          <p:cNvPr id="5" name="TextBox 4"/>
-          <p:cNvSpPr txBox="1"/>
-          <p:nvPr/>
-        </p:nvSpPr>
-        <p:spPr>
-          <a:xfrm>
-            <a:off x="731520" y="1600200"/>
-            <a:ext cx="10698480" cy="365760"/>
-          </a:xfrm>
-          <a:prstGeom prst="rect">
-            <a:avLst/>
-          </a:prstGeom>
-          <a:noFill/>
-        </p:spPr>
-        <p:txBody>
-          <a:bodyPr wrap="square" lIns="0" rIns="0" tIns="0" bIns="0">
-            <a:spAutoFit/>
-          </a:bodyPr>
-          <a:lstStyle/>
-          <a:p>
-            <a:r>
-              <a:rPr sz="1200" b="0">
-                <a:solidFill>
-                  <a:srgbClr val="6B7082"/>
-                </a:solidFill>
-                <a:latin typeface="Helvetica Neue"/>
-              </a:rPr>
-              <a:t>Non-political citizen profiles — small business owners, community members. Granata, Gately, the deacon.</a:t>
-            </a:r>
-          </a:p>
-        </p:txBody>
-      </p:sp>
-      <p:sp>
-        <p:nvSpPr>
-          <p:cNvPr id="6" name="TextBox 5"/>
-          <p:cNvSpPr txBox="1"/>
-          <p:nvPr/>
-        </p:nvSpPr>
-        <p:spPr>
-          <a:xfrm>
-            <a:off x="731520" y="1691640"/>
-            <a:ext cx="10698480" cy="274320"/>
-          </a:xfrm>
-          <a:prstGeom prst="rect">
-            <a:avLst/>
-          </a:prstGeom>
-          <a:noFill/>
-        </p:spPr>
-        <p:txBody>
-          <a:bodyPr wrap="square" lIns="0" rIns="0" tIns="0" bIns="0">
-            <a:spAutoFit/>
-          </a:bodyPr>
-          <a:lstStyle/>
-          <a:p>
-            <a:r>
-              <a:rPr sz="900" b="1">
-                <a:solidFill>
-                  <a:srgbClr val="1B7A43"/>
-                </a:solidFill>
-                <a:latin typeface="Helvetica Neue"/>
-              </a:rPr>
-              <a:t>AUDIENCE (theoretical): Human interest · Broad, community-connected</a:t>
-            </a:r>
-          </a:p>
-        </p:txBody>
-      </p:sp>
-      <p:sp>
-        <p:nvSpPr>
-          <p:cNvPr id="7" name="Rectangle 6"/>
-          <p:cNvSpPr/>
-          <p:nvPr/>
-        </p:nvSpPr>
-        <p:spPr>
-          <a:xfrm>
-            <a:off x="731520" y="2194560"/>
-            <a:ext cx="5029200" cy="3200400"/>
-          </a:xfrm>
-          <a:prstGeom prst="rect">
-            <a:avLst/>
-          </a:prstGeom>
-          <a:solidFill>
-            <a:srgbClr val="FFFFFF"/>
-          </a:solidFill>
-          <a:ln>
-            <a:noFill/>
-          </a:ln>
-          <a:effectLst/>
-        </p:spPr>
-        <p:style>
-          <a:lnRef idx="1">
-            <a:schemeClr val="accent1"/>
-          </a:lnRef>
-          <a:fillRef idx="3">
-            <a:schemeClr val="accent1"/>
-          </a:fillRef>
-          <a:effectRef idx="2">
-            <a:schemeClr val="accent1"/>
-          </a:effectRef>
-          <a:fontRef idx="minor">
-            <a:schemeClr val="lt1"/>
-          </a:fontRef>
-        </p:style>
-        <p:txBody>
-          <a:bodyPr rtlCol="0" anchor="ctr"/>
-          <a:lstStyle/>
-          <a:p>
-            <a:pPr algn="ctr"/>
-          </a:p>
-        </p:txBody>
-      </p:sp>
-      <p:sp>
-        <p:nvSpPr>
-          <p:cNvPr id="8" name="Rectangle 7"/>
-          <p:cNvSpPr/>
-          <p:nvPr/>
-        </p:nvSpPr>
-        <p:spPr>
-          <a:xfrm>
-            <a:off x="731520" y="2194560"/>
-            <a:ext cx="91440" cy="3200400"/>
-          </a:xfrm>
-          <a:prstGeom prst="rect">
-            <a:avLst/>
-          </a:prstGeom>
-          <a:solidFill>
-            <a:srgbClr val="1B7A43"/>
-          </a:solidFill>
-          <a:ln>
-            <a:noFill/>
-          </a:ln>
-          <a:effectLst/>
-        </p:spPr>
-        <p:style>
-          <a:lnRef idx="1">
-            <a:schemeClr val="accent1"/>
-          </a:lnRef>
-          <a:fillRef idx="3">
-            <a:schemeClr val="accent1"/>
-          </a:fillRef>
-          <a:effectRef idx="2">
-            <a:schemeClr val="accent1"/>
-          </a:effectRef>
-          <a:fontRef idx="minor">
-            <a:schemeClr val="lt1"/>
-          </a:fontRef>
-        </p:style>
-        <p:txBody>
-          <a:bodyPr rtlCol="0" anchor="ctr"/>
-          <a:lstStyle/>
-          <a:p>
-            <a:pPr algn="ctr"/>
-          </a:p>
-        </p:txBody>
-      </p:sp>
-      <p:sp>
-        <p:nvSpPr>
-          <p:cNvPr id="9" name="TextBox 8"/>
-          <p:cNvSpPr txBox="1"/>
-          <p:nvPr/>
-        </p:nvSpPr>
-        <p:spPr>
-          <a:xfrm>
-            <a:off x="960120" y="2377440"/>
-            <a:ext cx="4572000" cy="365760"/>
-          </a:xfrm>
-          <a:prstGeom prst="rect">
-            <a:avLst/>
-          </a:prstGeom>
-          <a:noFill/>
-        </p:spPr>
-        <p:txBody>
-          <a:bodyPr wrap="square" lIns="0" rIns="0" tIns="0" bIns="0">
-            <a:spAutoFit/>
-          </a:bodyPr>
-          <a:lstStyle/>
-          <a:p>
-            <a:r>
-              <a:rPr sz="1100" b="1">
-                <a:solidFill>
-                  <a:srgbClr val="1B7A43"/>
-                </a:solidFill>
-                <a:latin typeface="Helvetica Neue"/>
-              </a:rPr>
-              <a:t>TOTAL VIEWS</a:t>
-            </a:r>
-          </a:p>
-        </p:txBody>
-      </p:sp>
-      <p:sp>
-        <p:nvSpPr>
-          <p:cNvPr id="10" name="TextBox 9"/>
-          <p:cNvSpPr txBox="1"/>
-          <p:nvPr/>
-        </p:nvSpPr>
-        <p:spPr>
-          <a:xfrm>
-            <a:off x="960120" y="2697480"/>
-            <a:ext cx="4572000" cy="1097280"/>
-          </a:xfrm>
-          <a:prstGeom prst="rect">
-            <a:avLst/>
-          </a:prstGeom>
-          <a:noFill/>
-        </p:spPr>
-        <p:txBody>
-          <a:bodyPr wrap="square" lIns="0" rIns="0" tIns="0" bIns="0">
-            <a:spAutoFit/>
-          </a:bodyPr>
-          <a:lstStyle/>
-          <a:p>
-            <a:r>
-              <a:rPr sz="5400" b="1">
-                <a:solidFill>
-                  <a:srgbClr val="2F3C7E"/>
-                </a:solidFill>
-                <a:latin typeface="Georgia"/>
-              </a:rPr>
-              <a:t>8,251</a:t>
-            </a:r>
-          </a:p>
-        </p:txBody>
-      </p:sp>
-      <p:sp>
-        <p:nvSpPr>
-          <p:cNvPr id="11" name="TextBox 10"/>
-          <p:cNvSpPr txBox="1"/>
-          <p:nvPr/>
-        </p:nvSpPr>
-        <p:spPr>
-          <a:xfrm>
-            <a:off x="960120" y="3840480"/>
-            <a:ext cx="4572000" cy="365760"/>
-          </a:xfrm>
-          <a:prstGeom prst="rect">
-            <a:avLst/>
-          </a:prstGeom>
-          <a:noFill/>
-        </p:spPr>
-        <p:txBody>
-          <a:bodyPr wrap="square" lIns="0" rIns="0" tIns="0" bIns="0">
-            <a:spAutoFit/>
-          </a:bodyPr>
-          <a:lstStyle/>
-          <a:p>
-            <a:r>
-              <a:rPr sz="1300" b="1">
-                <a:solidFill>
-                  <a:srgbClr val="141833"/>
-                </a:solidFill>
-                <a:latin typeface="Helvetica Neue"/>
-              </a:rPr>
-              <a:t>8 posts · 141 likes</a:t>
-            </a:r>
-          </a:p>
-        </p:txBody>
-      </p:sp>
-      <p:sp>
-        <p:nvSpPr>
-          <p:cNvPr id="12" name="TextBox 11"/>
-          <p:cNvSpPr txBox="1"/>
-          <p:nvPr/>
-        </p:nvSpPr>
-        <p:spPr>
-          <a:xfrm>
-            <a:off x="960120" y="4206240"/>
-            <a:ext cx="4572000" cy="365760"/>
-          </a:xfrm>
-          <a:prstGeom prst="rect">
-            <a:avLst/>
-          </a:prstGeom>
-          <a:noFill/>
-        </p:spPr>
-        <p:txBody>
-          <a:bodyPr wrap="square" lIns="0" rIns="0" tIns="0" bIns="0">
-            <a:spAutoFit/>
-          </a:bodyPr>
-          <a:lstStyle/>
-          <a:p>
-            <a:r>
-              <a:rPr sz="1300" b="0">
-                <a:solidFill>
-                  <a:srgbClr val="6B7082"/>
-                </a:solidFill>
-                <a:latin typeface="Helvetica Neue"/>
-              </a:rPr>
-              <a:t>1,031 average views per post</a:t>
-            </a:r>
-          </a:p>
-        </p:txBody>
-      </p:sp>
-      <p:sp>
-        <p:nvSpPr>
-          <p:cNvPr id="13" name="TextBox 12"/>
-          <p:cNvSpPr txBox="1"/>
-          <p:nvPr/>
-        </p:nvSpPr>
-        <p:spPr>
-          <a:xfrm>
-            <a:off x="6126480" y="2194560"/>
-            <a:ext cx="5486400" cy="274320"/>
-          </a:xfrm>
-          <a:prstGeom prst="rect">
-            <a:avLst/>
-          </a:prstGeom>
-          <a:noFill/>
-        </p:spPr>
-        <p:txBody>
-          <a:bodyPr wrap="square" lIns="0" rIns="0" tIns="0" bIns="0">
-            <a:spAutoFit/>
-          </a:bodyPr>
-          <a:lstStyle/>
-          <a:p>
-            <a:r>
-              <a:rPr sz="1100" b="1">
-                <a:solidFill>
-                  <a:srgbClr val="1B7A43"/>
-                </a:solidFill>
-                <a:latin typeface="Helvetica Neue"/>
-              </a:rPr>
-              <a:t>TOP 3 IN THIS CATEGORY</a:t>
-            </a:r>
-          </a:p>
-        </p:txBody>
-      </p:sp>
-      <p:sp>
-        <p:nvSpPr>
-          <p:cNvPr id="14" name="Rectangle 13"/>
-          <p:cNvSpPr/>
-          <p:nvPr/>
-        </p:nvSpPr>
-        <p:spPr>
-          <a:xfrm>
-            <a:off x="6126480" y="2560320"/>
-            <a:ext cx="5303520" cy="822960"/>
-          </a:xfrm>
-          <a:prstGeom prst="rect">
-            <a:avLst/>
-          </a:prstGeom>
-          <a:solidFill>
-            <a:srgbClr val="FFFFFF"/>
-          </a:solidFill>
-          <a:ln>
-            <a:noFill/>
-          </a:ln>
-          <a:effectLst/>
-        </p:spPr>
-        <p:style>
-          <a:lnRef idx="1">
-            <a:schemeClr val="accent1"/>
-          </a:lnRef>
-          <a:fillRef idx="3">
-            <a:schemeClr val="accent1"/>
-          </a:fillRef>
-          <a:effectRef idx="2">
-            <a:schemeClr val="accent1"/>
-          </a:effectRef>
-          <a:fontRef idx="minor">
-            <a:schemeClr val="lt1"/>
-          </a:fontRef>
-        </p:style>
-        <p:txBody>
-          <a:bodyPr rtlCol="0" anchor="ctr"/>
-          <a:lstStyle/>
-          <a:p>
-            <a:pPr algn="ctr"/>
-          </a:p>
-        </p:txBody>
-      </p:sp>
-      <p:sp>
-        <p:nvSpPr>
-          <p:cNvPr id="15" name="Rectangle 14"/>
-          <p:cNvSpPr/>
-          <p:nvPr/>
-        </p:nvSpPr>
-        <p:spPr>
-          <a:xfrm>
-            <a:off x="6126480" y="2560320"/>
-            <a:ext cx="54864" cy="822960"/>
-          </a:xfrm>
-          <a:prstGeom prst="rect">
-            <a:avLst/>
-          </a:prstGeom>
-          <a:solidFill>
-            <a:srgbClr val="1B7A43"/>
-          </a:solidFill>
-          <a:ln>
-            <a:noFill/>
-          </a:ln>
-          <a:effectLst/>
-        </p:spPr>
-        <p:style>
-          <a:lnRef idx="1">
-            <a:schemeClr val="accent1"/>
-          </a:lnRef>
-          <a:fillRef idx="3">
-            <a:schemeClr val="accent1"/>
-          </a:fillRef>
-          <a:effectRef idx="2">
-            <a:schemeClr val="accent1"/>
-          </a:effectRef>
-          <a:fontRef idx="minor">
-            <a:schemeClr val="lt1"/>
-          </a:fontRef>
-        </p:style>
-        <p:txBody>
-          <a:bodyPr rtlCol="0" anchor="ctr"/>
-          <a:lstStyle/>
-          <a:p>
-            <a:pPr algn="ctr"/>
-          </a:p>
-        </p:txBody>
-      </p:sp>
-      <p:sp>
-        <p:nvSpPr>
-          <p:cNvPr id="16" name="TextBox 15"/>
-          <p:cNvSpPr txBox="1"/>
-          <p:nvPr/>
-        </p:nvSpPr>
-        <p:spPr>
-          <a:xfrm>
-            <a:off x="6309360" y="2651760"/>
-            <a:ext cx="5029200" cy="320040"/>
-          </a:xfrm>
-          <a:prstGeom prst="rect">
-            <a:avLst/>
-          </a:prstGeom>
-          <a:noFill/>
-        </p:spPr>
-        <p:txBody>
-          <a:bodyPr wrap="square" lIns="0" rIns="0" tIns="0" bIns="0">
-            <a:spAutoFit/>
-          </a:bodyPr>
-          <a:lstStyle/>
-          <a:p>
-            <a:r>
-              <a:rPr sz="1000" b="1">
-                <a:solidFill>
-                  <a:srgbClr val="1B7A43"/>
-                </a:solidFill>
-                <a:latin typeface="Helvetica Neue"/>
-              </a:rPr>
-              <a:t>#1  ·  IG  ·  3,551 views</a:t>
-            </a:r>
-          </a:p>
-        </p:txBody>
-      </p:sp>
-      <p:sp>
-        <p:nvSpPr>
-          <p:cNvPr id="17" name="TextBox 16"/>
-          <p:cNvSpPr txBox="1"/>
-          <p:nvPr/>
-        </p:nvSpPr>
-        <p:spPr>
-          <a:xfrm>
-            <a:off x="6309360" y="2944368"/>
-            <a:ext cx="5029200" cy="411480"/>
-          </a:xfrm>
-          <a:prstGeom prst="rect">
-            <a:avLst/>
-          </a:prstGeom>
-          <a:noFill/>
-        </p:spPr>
-        <p:txBody>
-          <a:bodyPr wrap="square" lIns="0" rIns="0" tIns="0" bIns="0">
-            <a:spAutoFit/>
-          </a:bodyPr>
-          <a:lstStyle/>
-          <a:p>
-            <a:r>
-              <a:rPr sz="1000" b="0">
-                <a:solidFill>
-                  <a:srgbClr val="141833"/>
-                </a:solidFill>
-                <a:latin typeface="Helvetica Neue"/>
-              </a:rPr>
-              <a:t>Almost ran over a family. I got the license plate, checked on them. Turns out he's a Catho</a:t>
-            </a:r>
-          </a:p>
-        </p:txBody>
-      </p:sp>
-      <p:sp>
-        <p:nvSpPr>
-          <p:cNvPr id="18" name="Rectangle 17"/>
-          <p:cNvSpPr/>
-          <p:nvPr/>
-        </p:nvSpPr>
-        <p:spPr>
-          <a:xfrm>
-            <a:off x="6126480" y="3474720"/>
-            <a:ext cx="5303520" cy="822960"/>
-          </a:xfrm>
-          <a:prstGeom prst="rect">
-            <a:avLst/>
-          </a:prstGeom>
-          <a:solidFill>
-            <a:srgbClr val="FFFFFF"/>
-          </a:solidFill>
-          <a:ln>
-            <a:noFill/>
-          </a:ln>
-          <a:effectLst/>
-        </p:spPr>
-        <p:style>
-          <a:lnRef idx="1">
-            <a:schemeClr val="accent1"/>
-          </a:lnRef>
-          <a:fillRef idx="3">
-            <a:schemeClr val="accent1"/>
-          </a:fillRef>
-          <a:effectRef idx="2">
-            <a:schemeClr val="accent1"/>
-          </a:effectRef>
-          <a:fontRef idx="minor">
-            <a:schemeClr val="lt1"/>
-          </a:fontRef>
-        </p:style>
-        <p:txBody>
-          <a:bodyPr rtlCol="0" anchor="ctr"/>
-          <a:lstStyle/>
-          <a:p>
-            <a:pPr algn="ctr"/>
-          </a:p>
-        </p:txBody>
-      </p:sp>
-      <p:sp>
-        <p:nvSpPr>
-          <p:cNvPr id="19" name="Rectangle 18"/>
-          <p:cNvSpPr/>
-          <p:nvPr/>
-        </p:nvSpPr>
-        <p:spPr>
-          <a:xfrm>
-            <a:off x="6126480" y="3474720"/>
-            <a:ext cx="54864" cy="822960"/>
-          </a:xfrm>
-          <a:prstGeom prst="rect">
-            <a:avLst/>
-          </a:prstGeom>
-          <a:solidFill>
-            <a:srgbClr val="1B7A43"/>
-          </a:solidFill>
-          <a:ln>
-            <a:noFill/>
-          </a:ln>
-          <a:effectLst/>
-        </p:spPr>
-        <p:style>
-          <a:lnRef idx="1">
-            <a:schemeClr val="accent1"/>
-          </a:lnRef>
-          <a:fillRef idx="3">
-            <a:schemeClr val="accent1"/>
-          </a:fillRef>
-          <a:effectRef idx="2">
-            <a:schemeClr val="accent1"/>
-          </a:effectRef>
-          <a:fontRef idx="minor">
-            <a:schemeClr val="lt1"/>
-          </a:fontRef>
-        </p:style>
-        <p:txBody>
-          <a:bodyPr rtlCol="0" anchor="ctr"/>
-          <a:lstStyle/>
-          <a:p>
-            <a:pPr algn="ctr"/>
-          </a:p>
-        </p:txBody>
-      </p:sp>
-      <p:sp>
-        <p:nvSpPr>
-          <p:cNvPr id="20" name="TextBox 19"/>
-          <p:cNvSpPr txBox="1"/>
-          <p:nvPr/>
-        </p:nvSpPr>
-        <p:spPr>
-          <a:xfrm>
-            <a:off x="6309360" y="3566160"/>
-            <a:ext cx="5029200" cy="320040"/>
-          </a:xfrm>
-          <a:prstGeom prst="rect">
-            <a:avLst/>
-          </a:prstGeom>
-          <a:noFill/>
-        </p:spPr>
-        <p:txBody>
-          <a:bodyPr wrap="square" lIns="0" rIns="0" tIns="0" bIns="0">
-            <a:spAutoFit/>
-          </a:bodyPr>
-          <a:lstStyle/>
-          <a:p>
-            <a:r>
-              <a:rPr sz="1000" b="1">
-                <a:solidFill>
-                  <a:srgbClr val="1B7A43"/>
-                </a:solidFill>
-                <a:latin typeface="Helvetica Neue"/>
-              </a:rPr>
-              <a:t>#2  ·  FB  ·  2,491 views</a:t>
-            </a:r>
-          </a:p>
-        </p:txBody>
-      </p:sp>
-      <p:sp>
-        <p:nvSpPr>
-          <p:cNvPr id="21" name="TextBox 20"/>
-          <p:cNvSpPr txBox="1"/>
-          <p:nvPr/>
-        </p:nvSpPr>
-        <p:spPr>
-          <a:xfrm>
-            <a:off x="6309360" y="3858768"/>
-            <a:ext cx="5029200" cy="411480"/>
-          </a:xfrm>
-          <a:prstGeom prst="rect">
-            <a:avLst/>
-          </a:prstGeom>
-          <a:noFill/>
-        </p:spPr>
-        <p:txBody>
-          <a:bodyPr wrap="square" lIns="0" rIns="0" tIns="0" bIns="0">
-            <a:spAutoFit/>
-          </a:bodyPr>
-          <a:lstStyle/>
-          <a:p>
-            <a:r>
-              <a:rPr sz="1000" b="0">
-                <a:solidFill>
-                  <a:srgbClr val="141833"/>
-                </a:solidFill>
-                <a:latin typeface="Helvetica Neue"/>
-              </a:rPr>
-              <a:t>A terrifying moment outside City Hall as a car nearly hits a family. A witness captured th</a:t>
-            </a:r>
-          </a:p>
-        </p:txBody>
-      </p:sp>
-      <p:sp>
-        <p:nvSpPr>
-          <p:cNvPr id="22" name="Rectangle 21"/>
-          <p:cNvSpPr/>
-          <p:nvPr/>
-        </p:nvSpPr>
-        <p:spPr>
-          <a:xfrm>
-            <a:off x="6126480" y="4389120"/>
-            <a:ext cx="5303520" cy="822960"/>
-          </a:xfrm>
-          <a:prstGeom prst="rect">
-            <a:avLst/>
-          </a:prstGeom>
-          <a:solidFill>
-            <a:srgbClr val="FFFFFF"/>
-          </a:solidFill>
-          <a:ln>
-            <a:noFill/>
-          </a:ln>
-          <a:effectLst/>
-        </p:spPr>
-        <p:style>
-          <a:lnRef idx="1">
-            <a:schemeClr val="accent1"/>
-          </a:lnRef>
-          <a:fillRef idx="3">
-            <a:schemeClr val="accent1"/>
-          </a:fillRef>
-          <a:effectRef idx="2">
-            <a:schemeClr val="accent1"/>
-          </a:effectRef>
-          <a:fontRef idx="minor">
-            <a:schemeClr val="lt1"/>
-          </a:fontRef>
-        </p:style>
-        <p:txBody>
-          <a:bodyPr rtlCol="0" anchor="ctr"/>
-          <a:lstStyle/>
-          <a:p>
-            <a:pPr algn="ctr"/>
-          </a:p>
-        </p:txBody>
-      </p:sp>
-      <p:sp>
-        <p:nvSpPr>
-          <p:cNvPr id="23" name="Rectangle 22"/>
-          <p:cNvSpPr/>
-          <p:nvPr/>
-        </p:nvSpPr>
-        <p:spPr>
-          <a:xfrm>
-            <a:off x="6126480" y="4389120"/>
-            <a:ext cx="54864" cy="822960"/>
-          </a:xfrm>
-          <a:prstGeom prst="rect">
-            <a:avLst/>
-          </a:prstGeom>
-          <a:solidFill>
-            <a:srgbClr val="1B7A43"/>
-          </a:solidFill>
-          <a:ln>
-            <a:noFill/>
-          </a:ln>
-          <a:effectLst/>
-        </p:spPr>
-        <p:style>
-          <a:lnRef idx="1">
-            <a:schemeClr val="accent1"/>
-          </a:lnRef>
-          <a:fillRef idx="3">
-            <a:schemeClr val="accent1"/>
-          </a:fillRef>
-          <a:effectRef idx="2">
-            <a:schemeClr val="accent1"/>
-          </a:effectRef>
-          <a:fontRef idx="minor">
-            <a:schemeClr val="lt1"/>
-          </a:fontRef>
-        </p:style>
-        <p:txBody>
-          <a:bodyPr rtlCol="0" anchor="ctr"/>
-          <a:lstStyle/>
-          <a:p>
-            <a:pPr algn="ctr"/>
-          </a:p>
-        </p:txBody>
-      </p:sp>
-      <p:sp>
-        <p:nvSpPr>
-          <p:cNvPr id="24" name="TextBox 23"/>
-          <p:cNvSpPr txBox="1"/>
-          <p:nvPr/>
-        </p:nvSpPr>
-        <p:spPr>
-          <a:xfrm>
-            <a:off x="6309360" y="4480559"/>
-            <a:ext cx="5029200" cy="320040"/>
-          </a:xfrm>
-          <a:prstGeom prst="rect">
-            <a:avLst/>
-          </a:prstGeom>
-          <a:noFill/>
-        </p:spPr>
-        <p:txBody>
-          <a:bodyPr wrap="square" lIns="0" rIns="0" tIns="0" bIns="0">
-            <a:spAutoFit/>
-          </a:bodyPr>
-          <a:lstStyle/>
-          <a:p>
-            <a:r>
-              <a:rPr sz="1000" b="1">
-                <a:solidFill>
-                  <a:srgbClr val="1B7A43"/>
-                </a:solidFill>
-                <a:latin typeface="Helvetica Neue"/>
-              </a:rPr>
-              <a:t>#3  ·  FB  ·  812 views</a:t>
-            </a:r>
-          </a:p>
-        </p:txBody>
-      </p:sp>
-      <p:sp>
-        <p:nvSpPr>
-          <p:cNvPr id="25" name="TextBox 24"/>
-          <p:cNvSpPr txBox="1"/>
-          <p:nvPr/>
-        </p:nvSpPr>
-        <p:spPr>
-          <a:xfrm>
-            <a:off x="6309360" y="4773168"/>
-            <a:ext cx="5029200" cy="411480"/>
-          </a:xfrm>
-          <a:prstGeom prst="rect">
-            <a:avLst/>
-          </a:prstGeom>
-          <a:noFill/>
-        </p:spPr>
-        <p:txBody>
-          <a:bodyPr wrap="square" lIns="0" rIns="0" tIns="0" bIns="0">
-            <a:spAutoFit/>
-          </a:bodyPr>
-          <a:lstStyle/>
-          <a:p>
-            <a:r>
-              <a:rPr sz="1000" b="0">
-                <a:solidFill>
-                  <a:srgbClr val="141833"/>
-                </a:solidFill>
-                <a:latin typeface="Helvetica Neue"/>
-              </a:rPr>
-              <a:t>Running a restaurant means the show must go on, even when things are falling apart. Unlike</a:t>
-            </a:r>
-          </a:p>
-        </p:txBody>
-      </p:sp>
-      <p:sp>
-        <p:nvSpPr>
-          <p:cNvPr id="26" name="Rectangle 25"/>
-          <p:cNvSpPr/>
-          <p:nvPr/>
-        </p:nvSpPr>
-        <p:spPr>
-          <a:xfrm>
-            <a:off x="731520" y="5623560"/>
-            <a:ext cx="10698480" cy="731520"/>
-          </a:xfrm>
-          <a:prstGeom prst="rect">
-            <a:avLst/>
-          </a:prstGeom>
-          <a:solidFill>
             <a:srgbClr val="141833"/>
           </a:solidFill>
           <a:ln>
@@ -7512,68 +6606,146 @@
       </p:sp>
       <p:sp>
         <p:nvSpPr>
-          <p:cNvPr id="27" name="TextBox 26"/>
-          <p:cNvSpPr txBox="1"/>
-          <p:nvPr/>
-        </p:nvSpPr>
-        <p:spPr>
-          <a:xfrm>
-            <a:off x="914400" y="5715000"/>
-            <a:ext cx="2743200" cy="274320"/>
-          </a:xfrm>
-          <a:prstGeom prst="rect">
-            <a:avLst/>
-          </a:prstGeom>
-          <a:noFill/>
-        </p:spPr>
-        <p:txBody>
-          <a:bodyPr wrap="square" lIns="0" rIns="0" tIns="0" bIns="0">
-            <a:spAutoFit/>
-          </a:bodyPr>
-          <a:lstStyle/>
-          <a:p>
-            <a:r>
-              <a:rPr sz="1000" b="1">
-                <a:solidFill>
-                  <a:srgbClr val="1B7A43"/>
-                </a:solidFill>
-                <a:latin typeface="Helvetica Neue"/>
-              </a:rPr>
-              <a:t>RECOMMENDATION</a:t>
-            </a:r>
-          </a:p>
-        </p:txBody>
-      </p:sp>
-      <p:sp>
-        <p:nvSpPr>
-          <p:cNvPr id="28" name="TextBox 27"/>
-          <p:cNvSpPr txBox="1"/>
-          <p:nvPr/>
-        </p:nvSpPr>
-        <p:spPr>
-          <a:xfrm>
-            <a:off x="914400" y="5943600"/>
-            <a:ext cx="10515600" cy="365760"/>
-          </a:xfrm>
-          <a:prstGeom prst="rect">
-            <a:avLst/>
-          </a:prstGeom>
-          <a:noFill/>
-        </p:spPr>
-        <p:txBody>
-          <a:bodyPr wrap="square" lIns="0" rIns="0" tIns="0" bIns="0">
-            <a:spAutoFit/>
-          </a:bodyPr>
-          <a:lstStyle/>
-          <a:p>
-            <a:r>
-              <a:rPr sz="1300" b="1">
+          <p:cNvPr id="3" name="Rectangle 2"/>
+          <p:cNvSpPr/>
+          <p:nvPr/>
+        </p:nvSpPr>
+        <p:spPr>
+          <a:xfrm>
+            <a:off x="0" y="0"/>
+            <a:ext cx="411480" cy="6858000"/>
+          </a:xfrm>
+          <a:prstGeom prst="rect">
+            <a:avLst/>
+          </a:prstGeom>
+          <a:solidFill>
+            <a:srgbClr val="2E86AB"/>
+          </a:solidFill>
+          <a:ln>
+            <a:noFill/>
+          </a:ln>
+          <a:effectLst/>
+        </p:spPr>
+        <p:style>
+          <a:lnRef idx="1">
+            <a:schemeClr val="accent1"/>
+          </a:lnRef>
+          <a:fillRef idx="3">
+            <a:schemeClr val="accent1"/>
+          </a:fillRef>
+          <a:effectRef idx="2">
+            <a:schemeClr val="accent1"/>
+          </a:effectRef>
+          <a:fontRef idx="minor">
+            <a:schemeClr val="lt1"/>
+          </a:fontRef>
+        </p:style>
+        <p:txBody>
+          <a:bodyPr rtlCol="0" anchor="ctr"/>
+          <a:lstStyle/>
+          <a:p>
+            <a:pPr algn="ctr"/>
+          </a:p>
+        </p:txBody>
+      </p:sp>
+      <p:sp>
+        <p:nvSpPr>
+          <p:cNvPr id="4" name="TextBox 3"/>
+          <p:cNvSpPr txBox="1"/>
+          <p:nvPr/>
+        </p:nvSpPr>
+        <p:spPr>
+          <a:xfrm>
+            <a:off x="914400" y="2377440"/>
+            <a:ext cx="10058400" cy="457200"/>
+          </a:xfrm>
+          <a:prstGeom prst="rect">
+            <a:avLst/>
+          </a:prstGeom>
+          <a:noFill/>
+        </p:spPr>
+        <p:txBody>
+          <a:bodyPr wrap="square" lIns="0" rIns="0" tIns="0" bIns="0">
+            <a:spAutoFit/>
+          </a:bodyPr>
+          <a:lstStyle/>
+          <a:p>
+            <a:r>
+              <a:rPr sz="1600" b="1">
+                <a:solidFill>
+                  <a:srgbClr val="2E86AB"/>
+                </a:solidFill>
+                <a:latin typeface="Helvetica Neue"/>
+              </a:rPr>
+              <a:t>SECTION 2 OF 2</a:t>
+            </a:r>
+          </a:p>
+        </p:txBody>
+      </p:sp>
+      <p:sp>
+        <p:nvSpPr>
+          <p:cNvPr id="5" name="TextBox 4"/>
+          <p:cNvSpPr txBox="1"/>
+          <p:nvPr/>
+        </p:nvSpPr>
+        <p:spPr>
+          <a:xfrm>
+            <a:off x="914400" y="2834640"/>
+            <a:ext cx="10058400" cy="1371600"/>
+          </a:xfrm>
+          <a:prstGeom prst="rect">
+            <a:avLst/>
+          </a:prstGeom>
+          <a:noFill/>
+        </p:spPr>
+        <p:txBody>
+          <a:bodyPr wrap="square" lIns="0" rIns="0" tIns="0" bIns="0">
+            <a:spAutoFit/>
+          </a:bodyPr>
+          <a:lstStyle/>
+          <a:p>
+            <a:r>
+              <a:rPr sz="6400" b="1">
+                <a:solidFill>
+                  <a:srgbClr val="FFFFFF"/>
+                </a:solidFill>
+                <a:latin typeface="Georgia"/>
+              </a:rPr>
+              <a:t>Worth watching</a:t>
+            </a:r>
+          </a:p>
+        </p:txBody>
+      </p:sp>
+      <p:sp>
+        <p:nvSpPr>
+          <p:cNvPr id="6" name="TextBox 5"/>
+          <p:cNvSpPr txBox="1"/>
+          <p:nvPr/>
+        </p:nvSpPr>
+        <p:spPr>
+          <a:xfrm>
+            <a:off x="914400" y="4206240"/>
+            <a:ext cx="10058400" cy="548640"/>
+          </a:xfrm>
+          <a:prstGeom prst="rect">
+            <a:avLst/>
+          </a:prstGeom>
+          <a:noFill/>
+        </p:spPr>
+        <p:txBody>
+          <a:bodyPr wrap="square" lIns="0" rIns="0" tIns="0" bIns="0">
+            <a:spAutoFit/>
+          </a:bodyPr>
+          <a:lstStyle/>
+          <a:p>
+            <a:r>
+              <a:rPr sz="1800" b="0">
                 <a:solidFill>
                   <a:srgbClr val="FCF6F5"/>
                 </a:solidFill>
                 <a:latin typeface="Helvetica Neue"/>
               </a:rPr>
-              <a:t>Solid mid-tier. Worth continued investment. Test scaling to see if it holds.</a:t>
+              <a:t>3 smaller lanes still building audience. Real potential, low volume — don't retire prematurely.</a:t>
             </a:r>
           </a:p>
         </p:txBody>
@@ -7611,7 +6783,7 @@
             <a:avLst/>
           </a:prstGeom>
           <a:solidFill>
-            <a:srgbClr val="141833"/>
+            <a:srgbClr val="FCF6F5"/>
           </a:solidFill>
           <a:ln>
             <a:noFill/>
@@ -7642,20 +6814,156 @@
       </p:sp>
       <p:sp>
         <p:nvSpPr>
-          <p:cNvPr id="3" name="Rectangle 2"/>
+          <p:cNvPr id="3" name="TextBox 2"/>
+          <p:cNvSpPr txBox="1"/>
+          <p:nvPr/>
+        </p:nvSpPr>
+        <p:spPr>
+          <a:xfrm>
+            <a:off x="731520" y="457200"/>
+            <a:ext cx="10698480" cy="365760"/>
+          </a:xfrm>
+          <a:prstGeom prst="rect">
+            <a:avLst/>
+          </a:prstGeom>
+          <a:noFill/>
+        </p:spPr>
+        <p:txBody>
+          <a:bodyPr wrap="square" lIns="0" rIns="0" tIns="0" bIns="0">
+            <a:spAutoFit/>
+          </a:bodyPr>
+          <a:lstStyle/>
+          <a:p>
+            <a:r>
+              <a:rPr sz="1200" b="1">
+                <a:solidFill>
+                  <a:srgbClr val="990011"/>
+                </a:solidFill>
+                <a:latin typeface="Helvetica Neue"/>
+              </a:rPr>
+              <a:t>WORTH WATCHING</a:t>
+            </a:r>
+          </a:p>
+        </p:txBody>
+      </p:sp>
+      <p:sp>
+        <p:nvSpPr>
+          <p:cNvPr id="4" name="TextBox 3"/>
+          <p:cNvSpPr txBox="1"/>
+          <p:nvPr/>
+        </p:nvSpPr>
+        <p:spPr>
+          <a:xfrm>
+            <a:off x="731520" y="822960"/>
+            <a:ext cx="10698480" cy="822960"/>
+          </a:xfrm>
+          <a:prstGeom prst="rect">
+            <a:avLst/>
+          </a:prstGeom>
+          <a:noFill/>
+        </p:spPr>
+        <p:txBody>
+          <a:bodyPr wrap="square" lIns="0" rIns="0" tIns="0" bIns="0">
+            <a:spAutoFit/>
+          </a:bodyPr>
+          <a:lstStyle/>
+          <a:p>
+            <a:r>
+              <a:rPr sz="3000" b="1">
+                <a:solidFill>
+                  <a:srgbClr val="2F3C7E"/>
+                </a:solidFill>
+                <a:latin typeface="Georgia"/>
+              </a:rPr>
+              <a:t>Small lanes that could develop into something</a:t>
+            </a:r>
+          </a:p>
+        </p:txBody>
+      </p:sp>
+      <p:sp>
+        <p:nvSpPr>
+          <p:cNvPr id="5" name="TextBox 4"/>
+          <p:cNvSpPr txBox="1"/>
+          <p:nvPr/>
+        </p:nvSpPr>
+        <p:spPr>
+          <a:xfrm>
+            <a:off x="731520" y="1600200"/>
+            <a:ext cx="10698480" cy="365760"/>
+          </a:xfrm>
+          <a:prstGeom prst="rect">
+            <a:avLst/>
+          </a:prstGeom>
+          <a:noFill/>
+        </p:spPr>
+        <p:txBody>
+          <a:bodyPr wrap="square" lIns="0" rIns="0" tIns="0" bIns="0">
+            <a:spAutoFit/>
+          </a:bodyPr>
+          <a:lstStyle/>
+          <a:p>
+            <a:r>
+              <a:rPr sz="1200" b="0">
+                <a:solidFill>
+                  <a:srgbClr val="6B7082"/>
+                </a:solidFill>
+                <a:latin typeface="Helvetica Neue"/>
+              </a:rPr>
+              <a:t>Low volume today, but real audience potential. Don't kill these before they get their shot.</a:t>
+            </a:r>
+          </a:p>
+        </p:txBody>
+      </p:sp>
+      <p:sp>
+        <p:nvSpPr>
+          <p:cNvPr id="6" name="TextBox 5"/>
+          <p:cNvSpPr txBox="1"/>
+          <p:nvPr/>
+        </p:nvSpPr>
+        <p:spPr>
+          <a:xfrm>
+            <a:off x="731520" y="2148839"/>
+            <a:ext cx="3200400" cy="502920"/>
+          </a:xfrm>
+          <a:prstGeom prst="rect">
+            <a:avLst/>
+          </a:prstGeom>
+          <a:noFill/>
+        </p:spPr>
+        <p:txBody>
+          <a:bodyPr wrap="square" lIns="0" rIns="0" tIns="0" bIns="0">
+            <a:spAutoFit/>
+          </a:bodyPr>
+          <a:lstStyle/>
+          <a:p>
+            <a:r>
+              <a:rPr sz="1200" b="1">
+                <a:solidFill>
+                  <a:srgbClr val="141833"/>
+                </a:solidFill>
+                <a:latin typeface="Helvetica Neue"/>
+              </a:rPr>
+              <a:t>Elections &amp; Judicial</a:t>
+            </a:r>
+          </a:p>
+        </p:txBody>
+      </p:sp>
+      <p:sp>
+        <p:nvSpPr>
+          <p:cNvPr id="7" name="Rectangle 6"/>
           <p:cNvSpPr/>
           <p:nvPr/>
         </p:nvSpPr>
         <p:spPr>
           <a:xfrm>
-            <a:off x="0" y="0"/>
-            <a:ext cx="411480" cy="6858000"/>
+            <a:off x="4206240" y="2217420"/>
+            <a:ext cx="6035040" cy="274320"/>
           </a:xfrm>
           <a:prstGeom prst="rect">
             <a:avLst/>
           </a:prstGeom>
           <a:solidFill>
-            <a:srgbClr val="2E86AB"/>
+            <a:srgbClr val="2F3C7E"/>
           </a:solidFill>
           <a:ln>
             <a:noFill/>
@@ -7686,102 +6994,394 @@
       </p:sp>
       <p:sp>
         <p:nvSpPr>
-          <p:cNvPr id="4" name="TextBox 3"/>
-          <p:cNvSpPr txBox="1"/>
-          <p:nvPr/>
-        </p:nvSpPr>
-        <p:spPr>
-          <a:xfrm>
-            <a:off x="914400" y="2377440"/>
-            <a:ext cx="10058400" cy="457200"/>
-          </a:xfrm>
-          <a:prstGeom prst="rect">
-            <a:avLst/>
-          </a:prstGeom>
-          <a:noFill/>
-        </p:spPr>
-        <p:txBody>
-          <a:bodyPr wrap="square" lIns="0" rIns="0" tIns="0" bIns="0">
-            <a:spAutoFit/>
-          </a:bodyPr>
-          <a:lstStyle/>
-          <a:p>
-            <a:r>
-              <a:rPr sz="1600" b="1">
-                <a:solidFill>
-                  <a:srgbClr val="2E86AB"/>
-                </a:solidFill>
-                <a:latin typeface="Helvetica Neue"/>
-              </a:rPr>
-              <a:t>SECTION 2 OF 2</a:t>
-            </a:r>
-          </a:p>
-        </p:txBody>
-      </p:sp>
-      <p:sp>
-        <p:nvSpPr>
-          <p:cNvPr id="5" name="TextBox 4"/>
-          <p:cNvSpPr txBox="1"/>
-          <p:nvPr/>
-        </p:nvSpPr>
-        <p:spPr>
-          <a:xfrm>
-            <a:off x="914400" y="2834640"/>
-            <a:ext cx="10058400" cy="1371600"/>
-          </a:xfrm>
-          <a:prstGeom prst="rect">
-            <a:avLst/>
-          </a:prstGeom>
-          <a:noFill/>
-        </p:spPr>
-        <p:txBody>
-          <a:bodyPr wrap="square" lIns="0" rIns="0" tIns="0" bIns="0">
-            <a:spAutoFit/>
-          </a:bodyPr>
-          <a:lstStyle/>
-          <a:p>
-            <a:r>
-              <a:rPr sz="6400" b="1">
-                <a:solidFill>
-                  <a:srgbClr val="FFFFFF"/>
-                </a:solidFill>
-                <a:latin typeface="Georgia"/>
-              </a:rPr>
-              <a:t>Worth watching</a:t>
-            </a:r>
-          </a:p>
-        </p:txBody>
-      </p:sp>
-      <p:sp>
-        <p:nvSpPr>
-          <p:cNvPr id="6" name="TextBox 5"/>
-          <p:cNvSpPr txBox="1"/>
-          <p:nvPr/>
-        </p:nvSpPr>
-        <p:spPr>
-          <a:xfrm>
-            <a:off x="914400" y="4206240"/>
-            <a:ext cx="10058400" cy="548640"/>
-          </a:xfrm>
-          <a:prstGeom prst="rect">
-            <a:avLst/>
-          </a:prstGeom>
-          <a:noFill/>
-        </p:spPr>
-        <p:txBody>
-          <a:bodyPr wrap="square" lIns="0" rIns="0" tIns="0" bIns="0">
-            <a:spAutoFit/>
-          </a:bodyPr>
-          <a:lstStyle/>
-          <a:p>
-            <a:r>
-              <a:rPr sz="1800" b="0">
-                <a:solidFill>
-                  <a:srgbClr val="FCF6F5"/>
-                </a:solidFill>
-                <a:latin typeface="Helvetica Neue"/>
-              </a:rPr>
-              <a:t>2 smaller lanes still building audience. Real potential, low volume — don't retire prematurely.</a:t>
+          <p:cNvPr id="8" name="TextBox 7"/>
+          <p:cNvSpPr txBox="1"/>
+          <p:nvPr/>
+        </p:nvSpPr>
+        <p:spPr>
+          <a:xfrm>
+            <a:off x="10332719" y="2148839"/>
+            <a:ext cx="2286000" cy="251460"/>
+          </a:xfrm>
+          <a:prstGeom prst="rect">
+            <a:avLst/>
+          </a:prstGeom>
+          <a:noFill/>
+        </p:spPr>
+        <p:txBody>
+          <a:bodyPr wrap="square" lIns="0" rIns="0" tIns="0" bIns="0">
+            <a:spAutoFit/>
+          </a:bodyPr>
+          <a:lstStyle/>
+          <a:p>
+            <a:r>
+              <a:rPr sz="900" b="0">
+                <a:solidFill>
+                  <a:srgbClr val="6B7082"/>
+                </a:solidFill>
+                <a:latin typeface="Helvetica Neue"/>
+              </a:rPr>
+              <a:t>72,107 views · 91 posts · 792 avg</a:t>
+            </a:r>
+          </a:p>
+        </p:txBody>
+      </p:sp>
+      <p:sp>
+        <p:nvSpPr>
+          <p:cNvPr id="9" name="TextBox 8"/>
+          <p:cNvSpPr txBox="1"/>
+          <p:nvPr/>
+        </p:nvSpPr>
+        <p:spPr>
+          <a:xfrm>
+            <a:off x="10332719" y="2354579"/>
+            <a:ext cx="4572000" cy="251460"/>
+          </a:xfrm>
+          <a:prstGeom prst="rect">
+            <a:avLst/>
+          </a:prstGeom>
+          <a:noFill/>
+        </p:spPr>
+        <p:txBody>
+          <a:bodyPr wrap="square" lIns="0" rIns="0" tIns="0" bIns="0">
+            <a:spAutoFit/>
+          </a:bodyPr>
+          <a:lstStyle/>
+          <a:p>
+            <a:r>
+              <a:rPr sz="800" b="0">
+                <a:solidFill>
+                  <a:srgbClr val="6B7082"/>
+                </a:solidFill>
+                <a:latin typeface="Helvetica Neue"/>
+              </a:rPr>
+              <a:t>Slow-burn policy · Middle (40-55) + Older (55+) engaged voters</a:t>
+            </a:r>
+          </a:p>
+        </p:txBody>
+      </p:sp>
+      <p:sp>
+        <p:nvSpPr>
+          <p:cNvPr id="10" name="TextBox 9"/>
+          <p:cNvSpPr txBox="1"/>
+          <p:nvPr/>
+        </p:nvSpPr>
+        <p:spPr>
+          <a:xfrm>
+            <a:off x="731520" y="2651759"/>
+            <a:ext cx="3200400" cy="502920"/>
+          </a:xfrm>
+          <a:prstGeom prst="rect">
+            <a:avLst/>
+          </a:prstGeom>
+          <a:noFill/>
+        </p:spPr>
+        <p:txBody>
+          <a:bodyPr wrap="square" lIns="0" rIns="0" tIns="0" bIns="0">
+            <a:spAutoFit/>
+          </a:bodyPr>
+          <a:lstStyle/>
+          <a:p>
+            <a:r>
+              <a:rPr sz="1200" b="1">
+                <a:solidFill>
+                  <a:srgbClr val="141833"/>
+                </a:solidFill>
+                <a:latin typeface="Helvetica Neue"/>
+              </a:rPr>
+              <a:t>American Pride</a:t>
+            </a:r>
+          </a:p>
+        </p:txBody>
+      </p:sp>
+      <p:sp>
+        <p:nvSpPr>
+          <p:cNvPr id="11" name="Rectangle 10"/>
+          <p:cNvSpPr/>
+          <p:nvPr/>
+        </p:nvSpPr>
+        <p:spPr>
+          <a:xfrm>
+            <a:off x="4206240" y="2720339"/>
+            <a:ext cx="650231" cy="274320"/>
+          </a:xfrm>
+          <a:prstGeom prst="rect">
+            <a:avLst/>
+          </a:prstGeom>
+          <a:solidFill>
+            <a:srgbClr val="990011"/>
+          </a:solidFill>
+          <a:ln>
+            <a:noFill/>
+          </a:ln>
+          <a:effectLst/>
+        </p:spPr>
+        <p:style>
+          <a:lnRef idx="1">
+            <a:schemeClr val="accent1"/>
+          </a:lnRef>
+          <a:fillRef idx="3">
+            <a:schemeClr val="accent1"/>
+          </a:fillRef>
+          <a:effectRef idx="2">
+            <a:schemeClr val="accent1"/>
+          </a:effectRef>
+          <a:fontRef idx="minor">
+            <a:schemeClr val="lt1"/>
+          </a:fontRef>
+        </p:style>
+        <p:txBody>
+          <a:bodyPr rtlCol="0" anchor="ctr"/>
+          <a:lstStyle/>
+          <a:p>
+            <a:pPr algn="ctr"/>
+          </a:p>
+        </p:txBody>
+      </p:sp>
+      <p:sp>
+        <p:nvSpPr>
+          <p:cNvPr id="12" name="TextBox 11"/>
+          <p:cNvSpPr txBox="1"/>
+          <p:nvPr/>
+        </p:nvSpPr>
+        <p:spPr>
+          <a:xfrm>
+            <a:off x="4947911" y="2651759"/>
+            <a:ext cx="2286000" cy="251460"/>
+          </a:xfrm>
+          <a:prstGeom prst="rect">
+            <a:avLst/>
+          </a:prstGeom>
+          <a:noFill/>
+        </p:spPr>
+        <p:txBody>
+          <a:bodyPr wrap="square" lIns="0" rIns="0" tIns="0" bIns="0">
+            <a:spAutoFit/>
+          </a:bodyPr>
+          <a:lstStyle/>
+          <a:p>
+            <a:r>
+              <a:rPr sz="900" b="0">
+                <a:solidFill>
+                  <a:srgbClr val="6B7082"/>
+                </a:solidFill>
+                <a:latin typeface="Helvetica Neue"/>
+              </a:rPr>
+              <a:t>7,769 views · 15 posts · 518 avg</a:t>
+            </a:r>
+          </a:p>
+        </p:txBody>
+      </p:sp>
+      <p:sp>
+        <p:nvSpPr>
+          <p:cNvPr id="13" name="TextBox 12"/>
+          <p:cNvSpPr txBox="1"/>
+          <p:nvPr/>
+        </p:nvSpPr>
+        <p:spPr>
+          <a:xfrm>
+            <a:off x="4947911" y="2857499"/>
+            <a:ext cx="4572000" cy="251460"/>
+          </a:xfrm>
+          <a:prstGeom prst="rect">
+            <a:avLst/>
+          </a:prstGeom>
+          <a:noFill/>
+        </p:spPr>
+        <p:txBody>
+          <a:bodyPr wrap="square" lIns="0" rIns="0" tIns="0" bIns="0">
+            <a:spAutoFit/>
+          </a:bodyPr>
+          <a:lstStyle/>
+          <a:p>
+            <a:r>
+              <a:rPr sz="800" b="0">
+                <a:solidFill>
+                  <a:srgbClr val="6B7082"/>
+                </a:solidFill>
+                <a:latin typeface="Helvetica Neue"/>
+              </a:rPr>
+              <a:t>Traditional / patriotic · Older (55+), values-driven</a:t>
+            </a:r>
+          </a:p>
+        </p:txBody>
+      </p:sp>
+      <p:sp>
+        <p:nvSpPr>
+          <p:cNvPr id="14" name="TextBox 13"/>
+          <p:cNvSpPr txBox="1"/>
+          <p:nvPr/>
+        </p:nvSpPr>
+        <p:spPr>
+          <a:xfrm>
+            <a:off x="731520" y="3154679"/>
+            <a:ext cx="3200400" cy="502920"/>
+          </a:xfrm>
+          <a:prstGeom prst="rect">
+            <a:avLst/>
+          </a:prstGeom>
+          <a:noFill/>
+        </p:spPr>
+        <p:txBody>
+          <a:bodyPr wrap="square" lIns="0" rIns="0" tIns="0" bIns="0">
+            <a:spAutoFit/>
+          </a:bodyPr>
+          <a:lstStyle/>
+          <a:p>
+            <a:r>
+              <a:rPr sz="1200" b="1">
+                <a:solidFill>
+                  <a:srgbClr val="141833"/>
+                </a:solidFill>
+                <a:latin typeface="Helvetica Neue"/>
+              </a:rPr>
+              <a:t>Legislation &amp; Policy Watch</a:t>
+            </a:r>
+          </a:p>
+        </p:txBody>
+      </p:sp>
+      <p:sp>
+        <p:nvSpPr>
+          <p:cNvPr id="15" name="Rectangle 14"/>
+          <p:cNvSpPr/>
+          <p:nvPr/>
+        </p:nvSpPr>
+        <p:spPr>
+          <a:xfrm>
+            <a:off x="4206240" y="3223260"/>
+            <a:ext cx="518243" cy="274320"/>
+          </a:xfrm>
+          <a:prstGeom prst="rect">
+            <a:avLst/>
+          </a:prstGeom>
+          <a:solidFill>
+            <a:srgbClr val="2F3C7E"/>
+          </a:solidFill>
+          <a:ln>
+            <a:noFill/>
+          </a:ln>
+          <a:effectLst/>
+        </p:spPr>
+        <p:style>
+          <a:lnRef idx="1">
+            <a:schemeClr val="accent1"/>
+          </a:lnRef>
+          <a:fillRef idx="3">
+            <a:schemeClr val="accent1"/>
+          </a:fillRef>
+          <a:effectRef idx="2">
+            <a:schemeClr val="accent1"/>
+          </a:effectRef>
+          <a:fontRef idx="minor">
+            <a:schemeClr val="lt1"/>
+          </a:fontRef>
+        </p:style>
+        <p:txBody>
+          <a:bodyPr rtlCol="0" anchor="ctr"/>
+          <a:lstStyle/>
+          <a:p>
+            <a:pPr algn="ctr"/>
+          </a:p>
+        </p:txBody>
+      </p:sp>
+      <p:sp>
+        <p:nvSpPr>
+          <p:cNvPr id="16" name="TextBox 15"/>
+          <p:cNvSpPr txBox="1"/>
+          <p:nvPr/>
+        </p:nvSpPr>
+        <p:spPr>
+          <a:xfrm>
+            <a:off x="4815923" y="3154679"/>
+            <a:ext cx="2286000" cy="251460"/>
+          </a:xfrm>
+          <a:prstGeom prst="rect">
+            <a:avLst/>
+          </a:prstGeom>
+          <a:noFill/>
+        </p:spPr>
+        <p:txBody>
+          <a:bodyPr wrap="square" lIns="0" rIns="0" tIns="0" bIns="0">
+            <a:spAutoFit/>
+          </a:bodyPr>
+          <a:lstStyle/>
+          <a:p>
+            <a:r>
+              <a:rPr sz="900" b="0">
+                <a:solidFill>
+                  <a:srgbClr val="6B7082"/>
+                </a:solidFill>
+                <a:latin typeface="Helvetica Neue"/>
+              </a:rPr>
+              <a:t>6,192 views · 13 posts · 476 avg</a:t>
+            </a:r>
+          </a:p>
+        </p:txBody>
+      </p:sp>
+      <p:sp>
+        <p:nvSpPr>
+          <p:cNvPr id="17" name="TextBox 16"/>
+          <p:cNvSpPr txBox="1"/>
+          <p:nvPr/>
+        </p:nvSpPr>
+        <p:spPr>
+          <a:xfrm>
+            <a:off x="4815923" y="3360420"/>
+            <a:ext cx="4572000" cy="251460"/>
+          </a:xfrm>
+          <a:prstGeom prst="rect">
+            <a:avLst/>
+          </a:prstGeom>
+          <a:noFill/>
+        </p:spPr>
+        <p:txBody>
+          <a:bodyPr wrap="square" lIns="0" rIns="0" tIns="0" bIns="0">
+            <a:spAutoFit/>
+          </a:bodyPr>
+          <a:lstStyle/>
+          <a:p>
+            <a:r>
+              <a:rPr sz="800" b="0">
+                <a:solidFill>
+                  <a:srgbClr val="6B7082"/>
+                </a:solidFill>
+                <a:latin typeface="Helvetica Neue"/>
+              </a:rPr>
+              <a:t>Slow-burn policy · Older (55+), civic-engaged</a:t>
+            </a:r>
+          </a:p>
+        </p:txBody>
+      </p:sp>
+      <p:sp>
+        <p:nvSpPr>
+          <p:cNvPr id="18" name="TextBox 17"/>
+          <p:cNvSpPr txBox="1"/>
+          <p:nvPr/>
+        </p:nvSpPr>
+        <p:spPr>
+          <a:xfrm>
+            <a:off x="731520" y="6263640"/>
+            <a:ext cx="10698480" cy="457200"/>
+          </a:xfrm>
+          <a:prstGeom prst="rect">
+            <a:avLst/>
+          </a:prstGeom>
+          <a:noFill/>
+        </p:spPr>
+        <p:txBody>
+          <a:bodyPr wrap="square" lIns="0" rIns="0" tIns="0" bIns="0">
+            <a:spAutoFit/>
+          </a:bodyPr>
+          <a:lstStyle/>
+          <a:p>
+            <a:r>
+              <a:rPr sz="1200" b="1">
+                <a:solidFill>
+                  <a:srgbClr val="141833"/>
+                </a:solidFill>
+                <a:latin typeface="Helvetica Neue"/>
+              </a:rPr>
+              <a:t>Don't retire these based on volume alone — small consistent posting builds audience over months, not weeks.</a:t>
             </a:r>
           </a:p>
         </p:txBody>
@@ -7877,7 +7477,7 @@
                 </a:solidFill>
                 <a:latin typeface="Helvetica Neue"/>
               </a:rPr>
-              <a:t>WORTH WATCHING</a:t>
+              <a:t>CATEGORY DEEP-DIVE</a:t>
             </a:r>
           </a:p>
         </p:txBody>
@@ -7911,7 +7511,7 @@
                 </a:solidFill>
                 <a:latin typeface="Georgia"/>
               </a:rPr>
-              <a:t>Small lanes that could develop into something</a:t>
+              <a:t>Elections &amp; Judicial</a:t>
             </a:r>
           </a:p>
         </p:txBody>
@@ -7945,7 +7545,7 @@
                 </a:solidFill>
                 <a:latin typeface="Helvetica Neue"/>
               </a:rPr>
-              <a:t>Low volume today, but real audience potential. Don't kill these before they get their shot.</a:t>
+              <a:t>Coverage of campaigns, courts, and local government.</a:t>
             </a:r>
           </a:p>
         </p:txBody>
@@ -7958,28 +7558,28 @@
         </p:nvSpPr>
         <p:spPr>
           <a:xfrm>
-            <a:off x="731520" y="2148839"/>
-            <a:ext cx="3200400" cy="502920"/>
-          </a:xfrm>
-          <a:prstGeom prst="rect">
-            <a:avLst/>
-          </a:prstGeom>
-          <a:noFill/>
-        </p:spPr>
-        <p:txBody>
-          <a:bodyPr wrap="square" lIns="0" rIns="0" tIns="0" bIns="0">
-            <a:spAutoFit/>
-          </a:bodyPr>
-          <a:lstStyle/>
-          <a:p>
-            <a:r>
-              <a:rPr sz="1200" b="1">
-                <a:solidFill>
-                  <a:srgbClr val="141833"/>
-                </a:solidFill>
-                <a:latin typeface="Helvetica Neue"/>
-              </a:rPr>
-              <a:t>American Pride</a:t>
+            <a:off x="731520" y="1691640"/>
+            <a:ext cx="10698480" cy="274320"/>
+          </a:xfrm>
+          <a:prstGeom prst="rect">
+            <a:avLst/>
+          </a:prstGeom>
+          <a:noFill/>
+        </p:spPr>
+        <p:txBody>
+          <a:bodyPr wrap="square" lIns="0" rIns="0" tIns="0" bIns="0">
+            <a:spAutoFit/>
+          </a:bodyPr>
+          <a:lstStyle/>
+          <a:p>
+            <a:r>
+              <a:rPr sz="900" b="1">
+                <a:solidFill>
+                  <a:srgbClr val="2F3C7E"/>
+                </a:solidFill>
+                <a:latin typeface="Helvetica Neue"/>
+              </a:rPr>
+              <a:t>AUDIENCE (theoretical): Slow-burn policy · Middle (40-55) + Older (55+) engaged voters</a:t>
             </a:r>
           </a:p>
         </p:txBody>
@@ -7992,14 +7592,14 @@
         </p:nvSpPr>
         <p:spPr>
           <a:xfrm>
-            <a:off x="4206240" y="2217420"/>
-            <a:ext cx="6035040" cy="274320"/>
+            <a:off x="731520" y="2194560"/>
+            <a:ext cx="5029200" cy="3200400"/>
           </a:xfrm>
           <a:prstGeom prst="rect">
             <a:avLst/>
           </a:prstGeom>
           <a:solidFill>
-            <a:srgbClr val="990011"/>
+            <a:srgbClr val="FFFFFF"/>
           </a:solidFill>
           <a:ln>
             <a:noFill/>
@@ -8030,116 +7630,14 @@
       </p:sp>
       <p:sp>
         <p:nvSpPr>
-          <p:cNvPr id="8" name="TextBox 7"/>
-          <p:cNvSpPr txBox="1"/>
-          <p:nvPr/>
-        </p:nvSpPr>
-        <p:spPr>
-          <a:xfrm>
-            <a:off x="10332719" y="2148839"/>
-            <a:ext cx="2286000" cy="251460"/>
-          </a:xfrm>
-          <a:prstGeom prst="rect">
-            <a:avLst/>
-          </a:prstGeom>
-          <a:noFill/>
-        </p:spPr>
-        <p:txBody>
-          <a:bodyPr wrap="square" lIns="0" rIns="0" tIns="0" bIns="0">
-            <a:spAutoFit/>
-          </a:bodyPr>
-          <a:lstStyle/>
-          <a:p>
-            <a:r>
-              <a:rPr sz="900" b="0">
-                <a:solidFill>
-                  <a:srgbClr val="6B7082"/>
-                </a:solidFill>
-                <a:latin typeface="Helvetica Neue"/>
-              </a:rPr>
-              <a:t>7,769 views · 15 posts · 518 avg</a:t>
-            </a:r>
-          </a:p>
-        </p:txBody>
-      </p:sp>
-      <p:sp>
-        <p:nvSpPr>
-          <p:cNvPr id="9" name="TextBox 8"/>
-          <p:cNvSpPr txBox="1"/>
-          <p:nvPr/>
-        </p:nvSpPr>
-        <p:spPr>
-          <a:xfrm>
-            <a:off x="10332719" y="2354579"/>
-            <a:ext cx="4572000" cy="251460"/>
-          </a:xfrm>
-          <a:prstGeom prst="rect">
-            <a:avLst/>
-          </a:prstGeom>
-          <a:noFill/>
-        </p:spPr>
-        <p:txBody>
-          <a:bodyPr wrap="square" lIns="0" rIns="0" tIns="0" bIns="0">
-            <a:spAutoFit/>
-          </a:bodyPr>
-          <a:lstStyle/>
-          <a:p>
-            <a:r>
-              <a:rPr sz="800" b="0">
-                <a:solidFill>
-                  <a:srgbClr val="6B7082"/>
-                </a:solidFill>
-                <a:latin typeface="Helvetica Neue"/>
-              </a:rPr>
-              <a:t>Traditional / patriotic · Older (55+), values-driven</a:t>
-            </a:r>
-          </a:p>
-        </p:txBody>
-      </p:sp>
-      <p:sp>
-        <p:nvSpPr>
-          <p:cNvPr id="10" name="TextBox 9"/>
-          <p:cNvSpPr txBox="1"/>
-          <p:nvPr/>
-        </p:nvSpPr>
-        <p:spPr>
-          <a:xfrm>
-            <a:off x="731520" y="2651759"/>
-            <a:ext cx="3200400" cy="502920"/>
-          </a:xfrm>
-          <a:prstGeom prst="rect">
-            <a:avLst/>
-          </a:prstGeom>
-          <a:noFill/>
-        </p:spPr>
-        <p:txBody>
-          <a:bodyPr wrap="square" lIns="0" rIns="0" tIns="0" bIns="0">
-            <a:spAutoFit/>
-          </a:bodyPr>
-          <a:lstStyle/>
-          <a:p>
-            <a:r>
-              <a:rPr sz="1200" b="1">
-                <a:solidFill>
-                  <a:srgbClr val="141833"/>
-                </a:solidFill>
-                <a:latin typeface="Helvetica Neue"/>
-              </a:rPr>
-              <a:t>Legislation &amp; Policy Watch</a:t>
-            </a:r>
-          </a:p>
-        </p:txBody>
-      </p:sp>
-      <p:sp>
-        <p:nvSpPr>
-          <p:cNvPr id="11" name="Rectangle 10"/>
+          <p:cNvPr id="8" name="Rectangle 7"/>
           <p:cNvSpPr/>
           <p:nvPr/>
         </p:nvSpPr>
         <p:spPr>
           <a:xfrm>
-            <a:off x="4206240" y="2720339"/>
-            <a:ext cx="4810009" cy="274320"/>
+            <a:off x="731520" y="2194560"/>
+            <a:ext cx="91440" cy="3200400"/>
           </a:xfrm>
           <a:prstGeom prst="rect">
             <a:avLst/>
@@ -8176,34 +7674,136 @@
       </p:sp>
       <p:sp>
         <p:nvSpPr>
+          <p:cNvPr id="9" name="TextBox 8"/>
+          <p:cNvSpPr txBox="1"/>
+          <p:nvPr/>
+        </p:nvSpPr>
+        <p:spPr>
+          <a:xfrm>
+            <a:off x="960120" y="2377440"/>
+            <a:ext cx="4572000" cy="365760"/>
+          </a:xfrm>
+          <a:prstGeom prst="rect">
+            <a:avLst/>
+          </a:prstGeom>
+          <a:noFill/>
+        </p:spPr>
+        <p:txBody>
+          <a:bodyPr wrap="square" lIns="0" rIns="0" tIns="0" bIns="0">
+            <a:spAutoFit/>
+          </a:bodyPr>
+          <a:lstStyle/>
+          <a:p>
+            <a:r>
+              <a:rPr sz="1100" b="1">
+                <a:solidFill>
+                  <a:srgbClr val="2F3C7E"/>
+                </a:solidFill>
+                <a:latin typeface="Helvetica Neue"/>
+              </a:rPr>
+              <a:t>TOTAL VIEWS</a:t>
+            </a:r>
+          </a:p>
+        </p:txBody>
+      </p:sp>
+      <p:sp>
+        <p:nvSpPr>
+          <p:cNvPr id="10" name="TextBox 9"/>
+          <p:cNvSpPr txBox="1"/>
+          <p:nvPr/>
+        </p:nvSpPr>
+        <p:spPr>
+          <a:xfrm>
+            <a:off x="960120" y="2697480"/>
+            <a:ext cx="4572000" cy="1097280"/>
+          </a:xfrm>
+          <a:prstGeom prst="rect">
+            <a:avLst/>
+          </a:prstGeom>
+          <a:noFill/>
+        </p:spPr>
+        <p:txBody>
+          <a:bodyPr wrap="square" lIns="0" rIns="0" tIns="0" bIns="0">
+            <a:spAutoFit/>
+          </a:bodyPr>
+          <a:lstStyle/>
+          <a:p>
+            <a:r>
+              <a:rPr sz="5400" b="1">
+                <a:solidFill>
+                  <a:srgbClr val="2F3C7E"/>
+                </a:solidFill>
+                <a:latin typeface="Georgia"/>
+              </a:rPr>
+              <a:t>72,107</a:t>
+            </a:r>
+          </a:p>
+        </p:txBody>
+      </p:sp>
+      <p:sp>
+        <p:nvSpPr>
+          <p:cNvPr id="11" name="TextBox 10"/>
+          <p:cNvSpPr txBox="1"/>
+          <p:nvPr/>
+        </p:nvSpPr>
+        <p:spPr>
+          <a:xfrm>
+            <a:off x="960120" y="3840480"/>
+            <a:ext cx="4572000" cy="365760"/>
+          </a:xfrm>
+          <a:prstGeom prst="rect">
+            <a:avLst/>
+          </a:prstGeom>
+          <a:noFill/>
+        </p:spPr>
+        <p:txBody>
+          <a:bodyPr wrap="square" lIns="0" rIns="0" tIns="0" bIns="0">
+            <a:spAutoFit/>
+          </a:bodyPr>
+          <a:lstStyle/>
+          <a:p>
+            <a:r>
+              <a:rPr sz="1300" b="1">
+                <a:solidFill>
+                  <a:srgbClr val="141833"/>
+                </a:solidFill>
+                <a:latin typeface="Helvetica Neue"/>
+              </a:rPr>
+              <a:t>91 posts · 1,590 likes</a:t>
+            </a:r>
+          </a:p>
+        </p:txBody>
+      </p:sp>
+      <p:sp>
+        <p:nvSpPr>
           <p:cNvPr id="12" name="TextBox 11"/>
           <p:cNvSpPr txBox="1"/>
           <p:nvPr/>
         </p:nvSpPr>
         <p:spPr>
           <a:xfrm>
-            <a:off x="9107689" y="2651759"/>
-            <a:ext cx="2286000" cy="251460"/>
-          </a:xfrm>
-          <a:prstGeom prst="rect">
-            <a:avLst/>
-          </a:prstGeom>
-          <a:noFill/>
-        </p:spPr>
-        <p:txBody>
-          <a:bodyPr wrap="square" lIns="0" rIns="0" tIns="0" bIns="0">
-            <a:spAutoFit/>
-          </a:bodyPr>
-          <a:lstStyle/>
-          <a:p>
-            <a:r>
-              <a:rPr sz="900" b="0">
+            <a:off x="960120" y="4206240"/>
+            <a:ext cx="4572000" cy="365760"/>
+          </a:xfrm>
+          <a:prstGeom prst="rect">
+            <a:avLst/>
+          </a:prstGeom>
+          <a:noFill/>
+        </p:spPr>
+        <p:txBody>
+          <a:bodyPr wrap="square" lIns="0" rIns="0" tIns="0" bIns="0">
+            <a:spAutoFit/>
+          </a:bodyPr>
+          <a:lstStyle/>
+          <a:p>
+            <a:r>
+              <a:rPr sz="1300" b="0">
                 <a:solidFill>
                   <a:srgbClr val="6B7082"/>
                 </a:solidFill>
                 <a:latin typeface="Helvetica Neue"/>
               </a:rPr>
-              <a:t>6,192 views · 13 posts · 476 avg</a:t>
+              <a:t>792 average views per post</a:t>
             </a:r>
           </a:p>
         </p:txBody>
@@ -8216,62 +7816,608 @@
         </p:nvSpPr>
         <p:spPr>
           <a:xfrm>
-            <a:off x="9107689" y="2857499"/>
-            <a:ext cx="4572000" cy="251460"/>
-          </a:xfrm>
-          <a:prstGeom prst="rect">
-            <a:avLst/>
-          </a:prstGeom>
-          <a:noFill/>
-        </p:spPr>
-        <p:txBody>
-          <a:bodyPr wrap="square" lIns="0" rIns="0" tIns="0" bIns="0">
-            <a:spAutoFit/>
-          </a:bodyPr>
-          <a:lstStyle/>
-          <a:p>
-            <a:r>
-              <a:rPr sz="800" b="0">
-                <a:solidFill>
-                  <a:srgbClr val="6B7082"/>
-                </a:solidFill>
-                <a:latin typeface="Helvetica Neue"/>
-              </a:rPr>
-              <a:t>Slow-burn policy · Older (55+), civic-engaged</a:t>
-            </a:r>
-          </a:p>
-        </p:txBody>
-      </p:sp>
-      <p:sp>
-        <p:nvSpPr>
-          <p:cNvPr id="14" name="TextBox 13"/>
-          <p:cNvSpPr txBox="1"/>
-          <p:nvPr/>
-        </p:nvSpPr>
-        <p:spPr>
-          <a:xfrm>
-            <a:off x="731520" y="6263640"/>
-            <a:ext cx="10698480" cy="457200"/>
-          </a:xfrm>
-          <a:prstGeom prst="rect">
-            <a:avLst/>
-          </a:prstGeom>
-          <a:noFill/>
-        </p:spPr>
-        <p:txBody>
-          <a:bodyPr wrap="square" lIns="0" rIns="0" tIns="0" bIns="0">
-            <a:spAutoFit/>
-          </a:bodyPr>
-          <a:lstStyle/>
-          <a:p>
-            <a:r>
-              <a:rPr sz="1200" b="1">
+            <a:off x="6126480" y="2194560"/>
+            <a:ext cx="5486400" cy="274320"/>
+          </a:xfrm>
+          <a:prstGeom prst="rect">
+            <a:avLst/>
+          </a:prstGeom>
+          <a:noFill/>
+        </p:spPr>
+        <p:txBody>
+          <a:bodyPr wrap="square" lIns="0" rIns="0" tIns="0" bIns="0">
+            <a:spAutoFit/>
+          </a:bodyPr>
+          <a:lstStyle/>
+          <a:p>
+            <a:r>
+              <a:rPr sz="1100" b="1">
+                <a:solidFill>
+                  <a:srgbClr val="2F3C7E"/>
+                </a:solidFill>
+                <a:latin typeface="Helvetica Neue"/>
+              </a:rPr>
+              <a:t>TOP 3 IN THIS CATEGORY</a:t>
+            </a:r>
+          </a:p>
+        </p:txBody>
+      </p:sp>
+      <p:sp>
+        <p:nvSpPr>
+          <p:cNvPr id="14" name="Rectangle 13"/>
+          <p:cNvSpPr/>
+          <p:nvPr/>
+        </p:nvSpPr>
+        <p:spPr>
+          <a:xfrm>
+            <a:off x="6126480" y="2560320"/>
+            <a:ext cx="5303520" cy="822960"/>
+          </a:xfrm>
+          <a:prstGeom prst="rect">
+            <a:avLst/>
+          </a:prstGeom>
+          <a:solidFill>
+            <a:srgbClr val="FFFFFF"/>
+          </a:solidFill>
+          <a:ln>
+            <a:noFill/>
+          </a:ln>
+          <a:effectLst/>
+        </p:spPr>
+        <p:style>
+          <a:lnRef idx="1">
+            <a:schemeClr val="accent1"/>
+          </a:lnRef>
+          <a:fillRef idx="3">
+            <a:schemeClr val="accent1"/>
+          </a:fillRef>
+          <a:effectRef idx="2">
+            <a:schemeClr val="accent1"/>
+          </a:effectRef>
+          <a:fontRef idx="minor">
+            <a:schemeClr val="lt1"/>
+          </a:fontRef>
+        </p:style>
+        <p:txBody>
+          <a:bodyPr rtlCol="0" anchor="ctr"/>
+          <a:lstStyle/>
+          <a:p>
+            <a:pPr algn="ctr"/>
+          </a:p>
+        </p:txBody>
+      </p:sp>
+      <p:sp>
+        <p:nvSpPr>
+          <p:cNvPr id="15" name="Rectangle 14"/>
+          <p:cNvSpPr/>
+          <p:nvPr/>
+        </p:nvSpPr>
+        <p:spPr>
+          <a:xfrm>
+            <a:off x="6126480" y="2560320"/>
+            <a:ext cx="54864" cy="822960"/>
+          </a:xfrm>
+          <a:prstGeom prst="rect">
+            <a:avLst/>
+          </a:prstGeom>
+          <a:solidFill>
+            <a:srgbClr val="2F3C7E"/>
+          </a:solidFill>
+          <a:ln>
+            <a:noFill/>
+          </a:ln>
+          <a:effectLst/>
+        </p:spPr>
+        <p:style>
+          <a:lnRef idx="1">
+            <a:schemeClr val="accent1"/>
+          </a:lnRef>
+          <a:fillRef idx="3">
+            <a:schemeClr val="accent1"/>
+          </a:fillRef>
+          <a:effectRef idx="2">
+            <a:schemeClr val="accent1"/>
+          </a:effectRef>
+          <a:fontRef idx="minor">
+            <a:schemeClr val="lt1"/>
+          </a:fontRef>
+        </p:style>
+        <p:txBody>
+          <a:bodyPr rtlCol="0" anchor="ctr"/>
+          <a:lstStyle/>
+          <a:p>
+            <a:pPr algn="ctr"/>
+          </a:p>
+        </p:txBody>
+      </p:sp>
+      <p:sp>
+        <p:nvSpPr>
+          <p:cNvPr id="16" name="TextBox 15"/>
+          <p:cNvSpPr txBox="1"/>
+          <p:nvPr/>
+        </p:nvSpPr>
+        <p:spPr>
+          <a:xfrm>
+            <a:off x="6309360" y="2651760"/>
+            <a:ext cx="5029200" cy="320040"/>
+          </a:xfrm>
+          <a:prstGeom prst="rect">
+            <a:avLst/>
+          </a:prstGeom>
+          <a:noFill/>
+        </p:spPr>
+        <p:txBody>
+          <a:bodyPr wrap="square" lIns="0" rIns="0" tIns="0" bIns="0">
+            <a:spAutoFit/>
+          </a:bodyPr>
+          <a:lstStyle/>
+          <a:p>
+            <a:r>
+              <a:rPr sz="1000" b="1">
+                <a:solidFill>
+                  <a:srgbClr val="2F3C7E"/>
+                </a:solidFill>
+                <a:latin typeface="Helvetica Neue"/>
+              </a:rPr>
+              <a:t>#1  ·  FB  ·  11,860 views</a:t>
+            </a:r>
+          </a:p>
+        </p:txBody>
+      </p:sp>
+      <p:sp>
+        <p:nvSpPr>
+          <p:cNvPr id="17" name="TextBox 16"/>
+          <p:cNvSpPr txBox="1"/>
+          <p:nvPr/>
+        </p:nvSpPr>
+        <p:spPr>
+          <a:xfrm>
+            <a:off x="6309360" y="2944368"/>
+            <a:ext cx="5029200" cy="411480"/>
+          </a:xfrm>
+          <a:prstGeom prst="rect">
+            <a:avLst/>
+          </a:prstGeom>
+          <a:noFill/>
+        </p:spPr>
+        <p:txBody>
+          <a:bodyPr wrap="square" lIns="0" rIns="0" tIns="0" bIns="0">
+            <a:spAutoFit/>
+          </a:bodyPr>
+          <a:lstStyle/>
+          <a:p>
+            <a:r>
+              <a:rPr sz="1000" b="0">
                 <a:solidFill>
                   <a:srgbClr val="141833"/>
                 </a:solidFill>
                 <a:latin typeface="Helvetica Neue"/>
               </a:rPr>
-              <a:t>Don't retire these based on volume alone — small consistent posting builds audience over months, not weeks.</a:t>
+              <a:t>Chaos erupted at a council meeting when Ms. Rivera began screaming, refusing to calm down </a:t>
+            </a:r>
+          </a:p>
+        </p:txBody>
+      </p:sp>
+      <p:sp>
+        <p:nvSpPr>
+          <p:cNvPr id="18" name="Rectangle 17"/>
+          <p:cNvSpPr/>
+          <p:nvPr/>
+        </p:nvSpPr>
+        <p:spPr>
+          <a:xfrm>
+            <a:off x="6126480" y="3474720"/>
+            <a:ext cx="5303520" cy="822960"/>
+          </a:xfrm>
+          <a:prstGeom prst="rect">
+            <a:avLst/>
+          </a:prstGeom>
+          <a:solidFill>
+            <a:srgbClr val="FFFFFF"/>
+          </a:solidFill>
+          <a:ln>
+            <a:noFill/>
+          </a:ln>
+          <a:effectLst/>
+        </p:spPr>
+        <p:style>
+          <a:lnRef idx="1">
+            <a:schemeClr val="accent1"/>
+          </a:lnRef>
+          <a:fillRef idx="3">
+            <a:schemeClr val="accent1"/>
+          </a:fillRef>
+          <a:effectRef idx="2">
+            <a:schemeClr val="accent1"/>
+          </a:effectRef>
+          <a:fontRef idx="minor">
+            <a:schemeClr val="lt1"/>
+          </a:fontRef>
+        </p:style>
+        <p:txBody>
+          <a:bodyPr rtlCol="0" anchor="ctr"/>
+          <a:lstStyle/>
+          <a:p>
+            <a:pPr algn="ctr"/>
+          </a:p>
+        </p:txBody>
+      </p:sp>
+      <p:sp>
+        <p:nvSpPr>
+          <p:cNvPr id="19" name="Rectangle 18"/>
+          <p:cNvSpPr/>
+          <p:nvPr/>
+        </p:nvSpPr>
+        <p:spPr>
+          <a:xfrm>
+            <a:off x="6126480" y="3474720"/>
+            <a:ext cx="54864" cy="822960"/>
+          </a:xfrm>
+          <a:prstGeom prst="rect">
+            <a:avLst/>
+          </a:prstGeom>
+          <a:solidFill>
+            <a:srgbClr val="2F3C7E"/>
+          </a:solidFill>
+          <a:ln>
+            <a:noFill/>
+          </a:ln>
+          <a:effectLst/>
+        </p:spPr>
+        <p:style>
+          <a:lnRef idx="1">
+            <a:schemeClr val="accent1"/>
+          </a:lnRef>
+          <a:fillRef idx="3">
+            <a:schemeClr val="accent1"/>
+          </a:fillRef>
+          <a:effectRef idx="2">
+            <a:schemeClr val="accent1"/>
+          </a:effectRef>
+          <a:fontRef idx="minor">
+            <a:schemeClr val="lt1"/>
+          </a:fontRef>
+        </p:style>
+        <p:txBody>
+          <a:bodyPr rtlCol="0" anchor="ctr"/>
+          <a:lstStyle/>
+          <a:p>
+            <a:pPr algn="ctr"/>
+          </a:p>
+        </p:txBody>
+      </p:sp>
+      <p:sp>
+        <p:nvSpPr>
+          <p:cNvPr id="20" name="TextBox 19"/>
+          <p:cNvSpPr txBox="1"/>
+          <p:nvPr/>
+        </p:nvSpPr>
+        <p:spPr>
+          <a:xfrm>
+            <a:off x="6309360" y="3566160"/>
+            <a:ext cx="5029200" cy="320040"/>
+          </a:xfrm>
+          <a:prstGeom prst="rect">
+            <a:avLst/>
+          </a:prstGeom>
+          <a:noFill/>
+        </p:spPr>
+        <p:txBody>
+          <a:bodyPr wrap="square" lIns="0" rIns="0" tIns="0" bIns="0">
+            <a:spAutoFit/>
+          </a:bodyPr>
+          <a:lstStyle/>
+          <a:p>
+            <a:r>
+              <a:rPr sz="1000" b="1">
+                <a:solidFill>
+                  <a:srgbClr val="2F3C7E"/>
+                </a:solidFill>
+                <a:latin typeface="Helvetica Neue"/>
+              </a:rPr>
+              <a:t>#2  ·  FB  ·  5,812 views</a:t>
+            </a:r>
+          </a:p>
+        </p:txBody>
+      </p:sp>
+      <p:sp>
+        <p:nvSpPr>
+          <p:cNvPr id="21" name="TextBox 20"/>
+          <p:cNvSpPr txBox="1"/>
+          <p:nvPr/>
+        </p:nvSpPr>
+        <p:spPr>
+          <a:xfrm>
+            <a:off x="6309360" y="3858768"/>
+            <a:ext cx="5029200" cy="411480"/>
+          </a:xfrm>
+          <a:prstGeom prst="rect">
+            <a:avLst/>
+          </a:prstGeom>
+          <a:noFill/>
+        </p:spPr>
+        <p:txBody>
+          <a:bodyPr wrap="square" lIns="0" rIns="0" tIns="0" bIns="0">
+            <a:spAutoFit/>
+          </a:bodyPr>
+          <a:lstStyle/>
+          <a:p>
+            <a:r>
+              <a:rPr sz="1000" b="0">
+                <a:solidFill>
+                  <a:srgbClr val="141833"/>
+                </a:solidFill>
+                <a:latin typeface="Helvetica Neue"/>
+              </a:rPr>
+              <a:t>Tensions flared at the city council meeting as a woman repeatedly defied the mayor's reque</a:t>
+            </a:r>
+          </a:p>
+        </p:txBody>
+      </p:sp>
+      <p:sp>
+        <p:nvSpPr>
+          <p:cNvPr id="22" name="Rectangle 21"/>
+          <p:cNvSpPr/>
+          <p:nvPr/>
+        </p:nvSpPr>
+        <p:spPr>
+          <a:xfrm>
+            <a:off x="6126480" y="4389120"/>
+            <a:ext cx="5303520" cy="822960"/>
+          </a:xfrm>
+          <a:prstGeom prst="rect">
+            <a:avLst/>
+          </a:prstGeom>
+          <a:solidFill>
+            <a:srgbClr val="FFFFFF"/>
+          </a:solidFill>
+          <a:ln>
+            <a:noFill/>
+          </a:ln>
+          <a:effectLst/>
+        </p:spPr>
+        <p:style>
+          <a:lnRef idx="1">
+            <a:schemeClr val="accent1"/>
+          </a:lnRef>
+          <a:fillRef idx="3">
+            <a:schemeClr val="accent1"/>
+          </a:fillRef>
+          <a:effectRef idx="2">
+            <a:schemeClr val="accent1"/>
+          </a:effectRef>
+          <a:fontRef idx="minor">
+            <a:schemeClr val="lt1"/>
+          </a:fontRef>
+        </p:style>
+        <p:txBody>
+          <a:bodyPr rtlCol="0" anchor="ctr"/>
+          <a:lstStyle/>
+          <a:p>
+            <a:pPr algn="ctr"/>
+          </a:p>
+        </p:txBody>
+      </p:sp>
+      <p:sp>
+        <p:nvSpPr>
+          <p:cNvPr id="23" name="Rectangle 22"/>
+          <p:cNvSpPr/>
+          <p:nvPr/>
+        </p:nvSpPr>
+        <p:spPr>
+          <a:xfrm>
+            <a:off x="6126480" y="4389120"/>
+            <a:ext cx="54864" cy="822960"/>
+          </a:xfrm>
+          <a:prstGeom prst="rect">
+            <a:avLst/>
+          </a:prstGeom>
+          <a:solidFill>
+            <a:srgbClr val="2F3C7E"/>
+          </a:solidFill>
+          <a:ln>
+            <a:noFill/>
+          </a:ln>
+          <a:effectLst/>
+        </p:spPr>
+        <p:style>
+          <a:lnRef idx="1">
+            <a:schemeClr val="accent1"/>
+          </a:lnRef>
+          <a:fillRef idx="3">
+            <a:schemeClr val="accent1"/>
+          </a:fillRef>
+          <a:effectRef idx="2">
+            <a:schemeClr val="accent1"/>
+          </a:effectRef>
+          <a:fontRef idx="minor">
+            <a:schemeClr val="lt1"/>
+          </a:fontRef>
+        </p:style>
+        <p:txBody>
+          <a:bodyPr rtlCol="0" anchor="ctr"/>
+          <a:lstStyle/>
+          <a:p>
+            <a:pPr algn="ctr"/>
+          </a:p>
+        </p:txBody>
+      </p:sp>
+      <p:sp>
+        <p:nvSpPr>
+          <p:cNvPr id="24" name="TextBox 23"/>
+          <p:cNvSpPr txBox="1"/>
+          <p:nvPr/>
+        </p:nvSpPr>
+        <p:spPr>
+          <a:xfrm>
+            <a:off x="6309360" y="4480559"/>
+            <a:ext cx="5029200" cy="320040"/>
+          </a:xfrm>
+          <a:prstGeom prst="rect">
+            <a:avLst/>
+          </a:prstGeom>
+          <a:noFill/>
+        </p:spPr>
+        <p:txBody>
+          <a:bodyPr wrap="square" lIns="0" rIns="0" tIns="0" bIns="0">
+            <a:spAutoFit/>
+          </a:bodyPr>
+          <a:lstStyle/>
+          <a:p>
+            <a:r>
+              <a:rPr sz="1000" b="1">
+                <a:solidFill>
+                  <a:srgbClr val="2F3C7E"/>
+                </a:solidFill>
+                <a:latin typeface="Helvetica Neue"/>
+              </a:rPr>
+              <a:t>#3  ·  IG  ·  4,046 views</a:t>
+            </a:r>
+          </a:p>
+        </p:txBody>
+      </p:sp>
+      <p:sp>
+        <p:nvSpPr>
+          <p:cNvPr id="25" name="TextBox 24"/>
+          <p:cNvSpPr txBox="1"/>
+          <p:nvPr/>
+        </p:nvSpPr>
+        <p:spPr>
+          <a:xfrm>
+            <a:off x="6309360" y="4773168"/>
+            <a:ext cx="5029200" cy="411480"/>
+          </a:xfrm>
+          <a:prstGeom prst="rect">
+            <a:avLst/>
+          </a:prstGeom>
+          <a:noFill/>
+        </p:spPr>
+        <p:txBody>
+          <a:bodyPr wrap="square" lIns="0" rIns="0" tIns="0" bIns="0">
+            <a:spAutoFit/>
+          </a:bodyPr>
+          <a:lstStyle/>
+          <a:p>
+            <a:r>
+              <a:rPr sz="1000" b="0">
+                <a:solidFill>
+                  <a:srgbClr val="141833"/>
+                </a:solidFill>
+                <a:latin typeface="Helvetica Neue"/>
+              </a:rPr>
+              <a:t>A candidate's DSA membership raises questions about their loyalties. Pledging to 'co-gover</a:t>
+            </a:r>
+          </a:p>
+        </p:txBody>
+      </p:sp>
+      <p:sp>
+        <p:nvSpPr>
+          <p:cNvPr id="26" name="Rectangle 25"/>
+          <p:cNvSpPr/>
+          <p:nvPr/>
+        </p:nvSpPr>
+        <p:spPr>
+          <a:xfrm>
+            <a:off x="731520" y="5623560"/>
+            <a:ext cx="10698480" cy="731520"/>
+          </a:xfrm>
+          <a:prstGeom prst="rect">
+            <a:avLst/>
+          </a:prstGeom>
+          <a:solidFill>
+            <a:srgbClr val="141833"/>
+          </a:solidFill>
+          <a:ln>
+            <a:noFill/>
+          </a:ln>
+          <a:effectLst/>
+        </p:spPr>
+        <p:style>
+          <a:lnRef idx="1">
+            <a:schemeClr val="accent1"/>
+          </a:lnRef>
+          <a:fillRef idx="3">
+            <a:schemeClr val="accent1"/>
+          </a:fillRef>
+          <a:effectRef idx="2">
+            <a:schemeClr val="accent1"/>
+          </a:effectRef>
+          <a:fontRef idx="minor">
+            <a:schemeClr val="lt1"/>
+          </a:fontRef>
+        </p:style>
+        <p:txBody>
+          <a:bodyPr rtlCol="0" anchor="ctr"/>
+          <a:lstStyle/>
+          <a:p>
+            <a:pPr algn="ctr"/>
+          </a:p>
+        </p:txBody>
+      </p:sp>
+      <p:sp>
+        <p:nvSpPr>
+          <p:cNvPr id="27" name="TextBox 26"/>
+          <p:cNvSpPr txBox="1"/>
+          <p:nvPr/>
+        </p:nvSpPr>
+        <p:spPr>
+          <a:xfrm>
+            <a:off x="914400" y="5715000"/>
+            <a:ext cx="2743200" cy="274320"/>
+          </a:xfrm>
+          <a:prstGeom prst="rect">
+            <a:avLst/>
+          </a:prstGeom>
+          <a:noFill/>
+        </p:spPr>
+        <p:txBody>
+          <a:bodyPr wrap="square" lIns="0" rIns="0" tIns="0" bIns="0">
+            <a:spAutoFit/>
+          </a:bodyPr>
+          <a:lstStyle/>
+          <a:p>
+            <a:r>
+              <a:rPr sz="1000" b="1">
+                <a:solidFill>
+                  <a:srgbClr val="2F3C7E"/>
+                </a:solidFill>
+                <a:latin typeface="Helvetica Neue"/>
+              </a:rPr>
+              <a:t>RECOMMENDATION</a:t>
+            </a:r>
+          </a:p>
+        </p:txBody>
+      </p:sp>
+      <p:sp>
+        <p:nvSpPr>
+          <p:cNvPr id="28" name="TextBox 27"/>
+          <p:cNvSpPr txBox="1"/>
+          <p:nvPr/>
+        </p:nvSpPr>
+        <p:spPr>
+          <a:xfrm>
+            <a:off x="914400" y="5943600"/>
+            <a:ext cx="10515600" cy="365760"/>
+          </a:xfrm>
+          <a:prstGeom prst="rect">
+            <a:avLst/>
+          </a:prstGeom>
+          <a:noFill/>
+        </p:spPr>
+        <p:txBody>
+          <a:bodyPr wrap="square" lIns="0" rIns="0" tIns="0" bIns="0">
+            <a:spAutoFit/>
+          </a:bodyPr>
+          <a:lstStyle/>
+          <a:p>
+            <a:r>
+              <a:rPr sz="1300" b="1">
+                <a:solidFill>
+                  <a:srgbClr val="FCF6F5"/>
+                </a:solidFill>
+                <a:latin typeface="Helvetica Neue"/>
+              </a:rPr>
+              <a:t>Modest reach. Fine as filler between heavy hitters, not a headline lane.</a:t>
             </a:r>
           </a:p>
         </p:txBody>
@@ -11057,7 +11203,7 @@
                 </a:solidFill>
                 <a:latin typeface="Georgia"/>
               </a:rPr>
-              <a:t>93,817 views</a:t>
+              <a:t>94,410 views</a:t>
             </a:r>
           </a:p>
         </p:txBody>
@@ -11091,7 +11237,7 @@
                 </a:solidFill>
                 <a:latin typeface="Helvetica Neue"/>
               </a:rPr>
-              <a:t>61 posts · 1,538 avg views/post</a:t>
+              <a:t>62 posts · 1,523 avg views/post</a:t>
             </a:r>
           </a:p>
         </p:txBody>
@@ -11417,7 +11563,7 @@
                 </a:solidFill>
                 <a:latin typeface="Georgia"/>
               </a:rPr>
-              <a:t>62,536 views</a:t>
+              <a:t>86,371 views</a:t>
             </a:r>
           </a:p>
         </p:txBody>
@@ -11451,7 +11597,7 @@
                 </a:solidFill>
                 <a:latin typeface="Helvetica Neue"/>
               </a:rPr>
-              <a:t>22 posts · 2,843 avg views/post</a:t>
+              <a:t>28 posts · 3,085 avg views/post</a:t>
             </a:r>
           </a:p>
         </p:txBody>
@@ -13753,7 +13899,7 @@
                 </a:solidFill>
                 <a:latin typeface="Helvetica Neue"/>
               </a:rPr>
-              <a:t>2,577 avg views/post   ·   34 posts   ·   87,606 total</a:t>
+              <a:t>2,520 avg views/post   ·   35 posts   ·   88,209 total</a:t>
             </a:r>
           </a:p>
         </p:txBody>
@@ -14045,7 +14191,7 @@
                 </a:solidFill>
                 <a:latin typeface="Helvetica Neue"/>
               </a:rPr>
-              <a:t>1,251 avg views/post   ·   189 posts   ·   236,465 total</a:t>
+              <a:t>1,247 avg views/post   ·   191 posts   ·   238,189 total</a:t>
             </a:r>
           </a:p>
         </p:txBody>
@@ -15886,7 +16032,7 @@
                 </a:solidFill>
                 <a:latin typeface="Helvetica Neue"/>
               </a:rPr>
-              <a:t>Food &amp; Local Flavor</a:t>
+              <a:t>Other / Uncategorized</a:t>
             </a:r>
           </a:p>
         </p:txBody>
@@ -15901,6 +16047,118 @@
           <a:xfrm>
             <a:off x="4114800" y="2185064"/>
             <a:ext cx="6217920" cy="128016"/>
+          </a:xfrm>
+          <a:prstGeom prst="rect">
+            <a:avLst/>
+          </a:prstGeom>
+          <a:solidFill>
+            <a:srgbClr val="6B7082"/>
+          </a:solidFill>
+          <a:ln>
+            <a:noFill/>
+          </a:ln>
+          <a:effectLst/>
+        </p:spPr>
+        <p:style>
+          <a:lnRef idx="1">
+            <a:schemeClr val="accent1"/>
+          </a:lnRef>
+          <a:fillRef idx="3">
+            <a:schemeClr val="accent1"/>
+          </a:fillRef>
+          <a:effectRef idx="2">
+            <a:schemeClr val="accent1"/>
+          </a:effectRef>
+          <a:fontRef idx="minor">
+            <a:schemeClr val="lt1"/>
+          </a:fontRef>
+        </p:style>
+        <p:txBody>
+          <a:bodyPr rtlCol="0" anchor="ctr"/>
+          <a:lstStyle/>
+          <a:p>
+            <a:pPr algn="ctr"/>
+          </a:p>
+        </p:txBody>
+      </p:sp>
+      <p:sp>
+        <p:nvSpPr>
+          <p:cNvPr id="8" name="TextBox 7"/>
+          <p:cNvSpPr txBox="1"/>
+          <p:nvPr/>
+        </p:nvSpPr>
+        <p:spPr>
+          <a:xfrm>
+            <a:off x="10424160" y="2121408"/>
+            <a:ext cx="2286000" cy="291904"/>
+          </a:xfrm>
+          <a:prstGeom prst="rect">
+            <a:avLst/>
+          </a:prstGeom>
+          <a:noFill/>
+        </p:spPr>
+        <p:txBody>
+          <a:bodyPr wrap="square" lIns="0" rIns="0" tIns="0" bIns="0">
+            <a:spAutoFit/>
+          </a:bodyPr>
+          <a:lstStyle/>
+          <a:p>
+            <a:r>
+              <a:rPr sz="900" b="0">
+                <a:solidFill>
+                  <a:srgbClr val="6B7082"/>
+                </a:solidFill>
+                <a:latin typeface="Helvetica Neue"/>
+              </a:rPr>
+              <a:t>250,607 views · 174 posts</a:t>
+            </a:r>
+          </a:p>
+        </p:txBody>
+      </p:sp>
+      <p:sp>
+        <p:nvSpPr>
+          <p:cNvPr id="9" name="TextBox 8"/>
+          <p:cNvSpPr txBox="1"/>
+          <p:nvPr/>
+        </p:nvSpPr>
+        <p:spPr>
+          <a:xfrm>
+            <a:off x="731520" y="2413312"/>
+            <a:ext cx="3200400" cy="291904"/>
+          </a:xfrm>
+          <a:prstGeom prst="rect">
+            <a:avLst/>
+          </a:prstGeom>
+          <a:noFill/>
+        </p:spPr>
+        <p:txBody>
+          <a:bodyPr wrap="square" lIns="0" rIns="0" tIns="0" bIns="0">
+            <a:spAutoFit/>
+          </a:bodyPr>
+          <a:lstStyle/>
+          <a:p>
+            <a:r>
+              <a:rPr sz="1100" b="1">
+                <a:solidFill>
+                  <a:srgbClr val="141833"/>
+                </a:solidFill>
+                <a:latin typeface="Helvetica Neue"/>
+              </a:rPr>
+              <a:t>Food &amp; Local Flavor</a:t>
+            </a:r>
+          </a:p>
+        </p:txBody>
+      </p:sp>
+      <p:sp>
+        <p:nvSpPr>
+          <p:cNvPr id="10" name="Rectangle 9"/>
+          <p:cNvSpPr/>
+          <p:nvPr/>
+        </p:nvSpPr>
+        <p:spPr>
+          <a:xfrm>
+            <a:off x="4114800" y="2476968"/>
+            <a:ext cx="2342447" cy="128016"/>
           </a:xfrm>
           <a:prstGeom prst="rect">
             <a:avLst/>
@@ -15937,13 +16195,13 @@
       </p:sp>
       <p:sp>
         <p:nvSpPr>
-          <p:cNvPr id="8" name="TextBox 7"/>
-          <p:cNvSpPr txBox="1"/>
-          <p:nvPr/>
-        </p:nvSpPr>
-        <p:spPr>
-          <a:xfrm>
-            <a:off x="10424160" y="2121408"/>
+          <p:cNvPr id="11" name="TextBox 10"/>
+          <p:cNvSpPr txBox="1"/>
+          <p:nvPr/>
+        </p:nvSpPr>
+        <p:spPr>
+          <a:xfrm>
+            <a:off x="6548687" y="2413312"/>
             <a:ext cx="2286000" cy="291904"/>
           </a:xfrm>
           <a:prstGeom prst="rect">
@@ -15964,20 +16222,20 @@
                 </a:solidFill>
                 <a:latin typeface="Helvetica Neue"/>
               </a:rPr>
-              <a:t>93,817 views · 61 posts</a:t>
-            </a:r>
-          </a:p>
-        </p:txBody>
-      </p:sp>
-      <p:sp>
-        <p:nvSpPr>
-          <p:cNvPr id="9" name="TextBox 8"/>
-          <p:cNvSpPr txBox="1"/>
-          <p:nvPr/>
-        </p:nvSpPr>
-        <p:spPr>
-          <a:xfrm>
-            <a:off x="731520" y="2413312"/>
+              <a:t>94,410 views · 62 posts</a:t>
+            </a:r>
+          </a:p>
+        </p:txBody>
+      </p:sp>
+      <p:sp>
+        <p:nvSpPr>
+          <p:cNvPr id="12" name="TextBox 11"/>
+          <p:cNvSpPr txBox="1"/>
+          <p:nvPr/>
+        </p:nvSpPr>
+        <p:spPr>
+          <a:xfrm>
+            <a:off x="731520" y="2705217"/>
             <a:ext cx="3200400" cy="291904"/>
           </a:xfrm>
           <a:prstGeom prst="rect">
@@ -15998,21 +16256,357 @@
                 </a:solidFill>
                 <a:latin typeface="Helvetica Neue"/>
               </a:rPr>
-              <a:t>Other / Uncategorized</a:t>
-            </a:r>
-          </a:p>
-        </p:txBody>
-      </p:sp>
-      <p:sp>
-        <p:nvSpPr>
-          <p:cNvPr id="10" name="Rectangle 9"/>
+              <a:t>Truth &amp; Scandal Reporting</a:t>
+            </a:r>
+          </a:p>
+        </p:txBody>
+      </p:sp>
+      <p:sp>
+        <p:nvSpPr>
+          <p:cNvPr id="13" name="Rectangle 12"/>
           <p:cNvSpPr/>
           <p:nvPr/>
         </p:nvSpPr>
         <p:spPr>
           <a:xfrm>
-            <a:off x="4114800" y="2476968"/>
-            <a:ext cx="6078870" cy="128016"/>
+            <a:off x="4114800" y="2768873"/>
+            <a:ext cx="2188592" cy="128016"/>
+          </a:xfrm>
+          <a:prstGeom prst="rect">
+            <a:avLst/>
+          </a:prstGeom>
+          <a:solidFill>
+            <a:srgbClr val="990011"/>
+          </a:solidFill>
+          <a:ln>
+            <a:noFill/>
+          </a:ln>
+          <a:effectLst/>
+        </p:spPr>
+        <p:style>
+          <a:lnRef idx="1">
+            <a:schemeClr val="accent1"/>
+          </a:lnRef>
+          <a:fillRef idx="3">
+            <a:schemeClr val="accent1"/>
+          </a:fillRef>
+          <a:effectRef idx="2">
+            <a:schemeClr val="accent1"/>
+          </a:effectRef>
+          <a:fontRef idx="minor">
+            <a:schemeClr val="lt1"/>
+          </a:fontRef>
+        </p:style>
+        <p:txBody>
+          <a:bodyPr rtlCol="0" anchor="ctr"/>
+          <a:lstStyle/>
+          <a:p>
+            <a:pPr algn="ctr"/>
+          </a:p>
+        </p:txBody>
+      </p:sp>
+      <p:sp>
+        <p:nvSpPr>
+          <p:cNvPr id="14" name="TextBox 13"/>
+          <p:cNvSpPr txBox="1"/>
+          <p:nvPr/>
+        </p:nvSpPr>
+        <p:spPr>
+          <a:xfrm>
+            <a:off x="6394832" y="2705217"/>
+            <a:ext cx="2286000" cy="291904"/>
+          </a:xfrm>
+          <a:prstGeom prst="rect">
+            <a:avLst/>
+          </a:prstGeom>
+          <a:noFill/>
+        </p:spPr>
+        <p:txBody>
+          <a:bodyPr wrap="square" lIns="0" rIns="0" tIns="0" bIns="0">
+            <a:spAutoFit/>
+          </a:bodyPr>
+          <a:lstStyle/>
+          <a:p>
+            <a:r>
+              <a:rPr sz="900" b="0">
+                <a:solidFill>
+                  <a:srgbClr val="6B7082"/>
+                </a:solidFill>
+                <a:latin typeface="Helvetica Neue"/>
+              </a:rPr>
+              <a:t>88,209 views · 35 posts</a:t>
+            </a:r>
+          </a:p>
+        </p:txBody>
+      </p:sp>
+      <p:sp>
+        <p:nvSpPr>
+          <p:cNvPr id="15" name="TextBox 14"/>
+          <p:cNvSpPr txBox="1"/>
+          <p:nvPr/>
+        </p:nvSpPr>
+        <p:spPr>
+          <a:xfrm>
+            <a:off x="731520" y="2997121"/>
+            <a:ext cx="3200400" cy="291904"/>
+          </a:xfrm>
+          <a:prstGeom prst="rect">
+            <a:avLst/>
+          </a:prstGeom>
+          <a:noFill/>
+        </p:spPr>
+        <p:txBody>
+          <a:bodyPr wrap="square" lIns="0" rIns="0" tIns="0" bIns="0">
+            <a:spAutoFit/>
+          </a:bodyPr>
+          <a:lstStyle/>
+          <a:p>
+            <a:r>
+              <a:rPr sz="1100" b="1">
+                <a:solidFill>
+                  <a:srgbClr val="141833"/>
+                </a:solidFill>
+                <a:latin typeface="Helvetica Neue"/>
+              </a:rPr>
+              <a:t>Military Service</a:t>
+            </a:r>
+          </a:p>
+        </p:txBody>
+      </p:sp>
+      <p:sp>
+        <p:nvSpPr>
+          <p:cNvPr id="16" name="Rectangle 15"/>
+          <p:cNvSpPr/>
+          <p:nvPr/>
+        </p:nvSpPr>
+        <p:spPr>
+          <a:xfrm>
+            <a:off x="4114800" y="3060778"/>
+            <a:ext cx="2142988" cy="128016"/>
+          </a:xfrm>
+          <a:prstGeom prst="rect">
+            <a:avLst/>
+          </a:prstGeom>
+          <a:solidFill>
+            <a:srgbClr val="C9A227"/>
+          </a:solidFill>
+          <a:ln>
+            <a:noFill/>
+          </a:ln>
+          <a:effectLst/>
+        </p:spPr>
+        <p:style>
+          <a:lnRef idx="1">
+            <a:schemeClr val="accent1"/>
+          </a:lnRef>
+          <a:fillRef idx="3">
+            <a:schemeClr val="accent1"/>
+          </a:fillRef>
+          <a:effectRef idx="2">
+            <a:schemeClr val="accent1"/>
+          </a:effectRef>
+          <a:fontRef idx="minor">
+            <a:schemeClr val="lt1"/>
+          </a:fontRef>
+        </p:style>
+        <p:txBody>
+          <a:bodyPr rtlCol="0" anchor="ctr"/>
+          <a:lstStyle/>
+          <a:p>
+            <a:pPr algn="ctr"/>
+          </a:p>
+        </p:txBody>
+      </p:sp>
+      <p:sp>
+        <p:nvSpPr>
+          <p:cNvPr id="17" name="TextBox 16"/>
+          <p:cNvSpPr txBox="1"/>
+          <p:nvPr/>
+        </p:nvSpPr>
+        <p:spPr>
+          <a:xfrm>
+            <a:off x="6349228" y="2997121"/>
+            <a:ext cx="2286000" cy="291904"/>
+          </a:xfrm>
+          <a:prstGeom prst="rect">
+            <a:avLst/>
+          </a:prstGeom>
+          <a:noFill/>
+        </p:spPr>
+        <p:txBody>
+          <a:bodyPr wrap="square" lIns="0" rIns="0" tIns="0" bIns="0">
+            <a:spAutoFit/>
+          </a:bodyPr>
+          <a:lstStyle/>
+          <a:p>
+            <a:r>
+              <a:rPr sz="900" b="0">
+                <a:solidFill>
+                  <a:srgbClr val="6B7082"/>
+                </a:solidFill>
+                <a:latin typeface="Helvetica Neue"/>
+              </a:rPr>
+              <a:t>86,371 views · 28 posts</a:t>
+            </a:r>
+          </a:p>
+        </p:txBody>
+      </p:sp>
+      <p:sp>
+        <p:nvSpPr>
+          <p:cNvPr id="18" name="TextBox 17"/>
+          <p:cNvSpPr txBox="1"/>
+          <p:nvPr/>
+        </p:nvSpPr>
+        <p:spPr>
+          <a:xfrm>
+            <a:off x="731520" y="3289026"/>
+            <a:ext cx="3200400" cy="291904"/>
+          </a:xfrm>
+          <a:prstGeom prst="rect">
+            <a:avLst/>
+          </a:prstGeom>
+          <a:noFill/>
+        </p:spPr>
+        <p:txBody>
+          <a:bodyPr wrap="square" lIns="0" rIns="0" tIns="0" bIns="0">
+            <a:spAutoFit/>
+          </a:bodyPr>
+          <a:lstStyle/>
+          <a:p>
+            <a:r>
+              <a:rPr sz="1100" b="1">
+                <a:solidFill>
+                  <a:srgbClr val="141833"/>
+                </a:solidFill>
+                <a:latin typeface="Helvetica Neue"/>
+              </a:rPr>
+              <a:t>Elections &amp; Judicial</a:t>
+            </a:r>
+          </a:p>
+        </p:txBody>
+      </p:sp>
+      <p:sp>
+        <p:nvSpPr>
+          <p:cNvPr id="19" name="Rectangle 18"/>
+          <p:cNvSpPr/>
+          <p:nvPr/>
+        </p:nvSpPr>
+        <p:spPr>
+          <a:xfrm>
+            <a:off x="4114800" y="3352682"/>
+            <a:ext cx="1789078" cy="128016"/>
+          </a:xfrm>
+          <a:prstGeom prst="rect">
+            <a:avLst/>
+          </a:prstGeom>
+          <a:solidFill>
+            <a:srgbClr val="2F3C7E"/>
+          </a:solidFill>
+          <a:ln>
+            <a:noFill/>
+          </a:ln>
+          <a:effectLst/>
+        </p:spPr>
+        <p:style>
+          <a:lnRef idx="1">
+            <a:schemeClr val="accent1"/>
+          </a:lnRef>
+          <a:fillRef idx="3">
+            <a:schemeClr val="accent1"/>
+          </a:fillRef>
+          <a:effectRef idx="2">
+            <a:schemeClr val="accent1"/>
+          </a:effectRef>
+          <a:fontRef idx="minor">
+            <a:schemeClr val="lt1"/>
+          </a:fontRef>
+        </p:style>
+        <p:txBody>
+          <a:bodyPr rtlCol="0" anchor="ctr"/>
+          <a:lstStyle/>
+          <a:p>
+            <a:pPr algn="ctr"/>
+          </a:p>
+        </p:txBody>
+      </p:sp>
+      <p:sp>
+        <p:nvSpPr>
+          <p:cNvPr id="20" name="TextBox 19"/>
+          <p:cNvSpPr txBox="1"/>
+          <p:nvPr/>
+        </p:nvSpPr>
+        <p:spPr>
+          <a:xfrm>
+            <a:off x="5995318" y="3289026"/>
+            <a:ext cx="2286000" cy="291904"/>
+          </a:xfrm>
+          <a:prstGeom prst="rect">
+            <a:avLst/>
+          </a:prstGeom>
+          <a:noFill/>
+        </p:spPr>
+        <p:txBody>
+          <a:bodyPr wrap="square" lIns="0" rIns="0" tIns="0" bIns="0">
+            <a:spAutoFit/>
+          </a:bodyPr>
+          <a:lstStyle/>
+          <a:p>
+            <a:r>
+              <a:rPr sz="900" b="0">
+                <a:solidFill>
+                  <a:srgbClr val="6B7082"/>
+                </a:solidFill>
+                <a:latin typeface="Helvetica Neue"/>
+              </a:rPr>
+              <a:t>72,107 views · 91 posts</a:t>
+            </a:r>
+          </a:p>
+        </p:txBody>
+      </p:sp>
+      <p:sp>
+        <p:nvSpPr>
+          <p:cNvPr id="21" name="TextBox 20"/>
+          <p:cNvSpPr txBox="1"/>
+          <p:nvPr/>
+        </p:nvSpPr>
+        <p:spPr>
+          <a:xfrm>
+            <a:off x="731520" y="3580931"/>
+            <a:ext cx="3200400" cy="291904"/>
+          </a:xfrm>
+          <a:prstGeom prst="rect">
+            <a:avLst/>
+          </a:prstGeom>
+          <a:noFill/>
+        </p:spPr>
+        <p:txBody>
+          <a:bodyPr wrap="square" lIns="0" rIns="0" tIns="0" bIns="0">
+            <a:spAutoFit/>
+          </a:bodyPr>
+          <a:lstStyle/>
+          <a:p>
+            <a:r>
+              <a:rPr sz="1100" b="1">
+                <a:solidFill>
+                  <a:srgbClr val="141833"/>
+                </a:solidFill>
+                <a:latin typeface="Helvetica Neue"/>
+              </a:rPr>
+              <a:t>FIFA / World Cup</a:t>
+            </a:r>
+          </a:p>
+        </p:txBody>
+      </p:sp>
+      <p:sp>
+        <p:nvSpPr>
+          <p:cNvPr id="22" name="Rectangle 21"/>
+          <p:cNvSpPr/>
+          <p:nvPr/>
+        </p:nvSpPr>
+        <p:spPr>
+          <a:xfrm>
+            <a:off x="4114800" y="3644587"/>
+            <a:ext cx="1581481" cy="128016"/>
           </a:xfrm>
           <a:prstGeom prst="rect">
             <a:avLst/>
@@ -16049,13 +16643,13 @@
       </p:sp>
       <p:sp>
         <p:nvSpPr>
-          <p:cNvPr id="11" name="TextBox 10"/>
-          <p:cNvSpPr txBox="1"/>
-          <p:nvPr/>
-        </p:nvSpPr>
-        <p:spPr>
-          <a:xfrm>
-            <a:off x="10285110" y="2413312"/>
+          <p:cNvPr id="23" name="TextBox 22"/>
+          <p:cNvSpPr txBox="1"/>
+          <p:nvPr/>
+        </p:nvSpPr>
+        <p:spPr>
+          <a:xfrm>
+            <a:off x="5787721" y="3580931"/>
             <a:ext cx="2286000" cy="291904"/>
           </a:xfrm>
           <a:prstGeom prst="rect">
@@ -16076,20 +16670,20 @@
                 </a:solidFill>
                 <a:latin typeface="Helvetica Neue"/>
               </a:rPr>
-              <a:t>91,719 views · 158 posts</a:t>
-            </a:r>
-          </a:p>
-        </p:txBody>
-      </p:sp>
-      <p:sp>
-        <p:nvSpPr>
-          <p:cNvPr id="12" name="TextBox 11"/>
-          <p:cNvSpPr txBox="1"/>
-          <p:nvPr/>
-        </p:nvSpPr>
-        <p:spPr>
-          <a:xfrm>
-            <a:off x="731520" y="2705217"/>
+              <a:t>63,740 views · 25 posts</a:t>
+            </a:r>
+          </a:p>
+        </p:txBody>
+      </p:sp>
+      <p:sp>
+        <p:nvSpPr>
+          <p:cNvPr id="24" name="TextBox 23"/>
+          <p:cNvSpPr txBox="1"/>
+          <p:nvPr/>
+        </p:nvSpPr>
+        <p:spPr>
+          <a:xfrm>
+            <a:off x="731520" y="3872835"/>
             <a:ext cx="3200400" cy="291904"/>
           </a:xfrm>
           <a:prstGeom prst="rect">
@@ -16110,21 +16704,469 @@
                 </a:solidFill>
                 <a:latin typeface="Helvetica Neue"/>
               </a:rPr>
-              <a:t>Truth &amp; Scandal Reporting</a:t>
-            </a:r>
-          </a:p>
-        </p:txBody>
-      </p:sp>
-      <p:sp>
-        <p:nvSpPr>
-          <p:cNvPr id="13" name="Rectangle 12"/>
+              <a:t>Community &amp; Culture</a:t>
+            </a:r>
+          </a:p>
+        </p:txBody>
+      </p:sp>
+      <p:sp>
+        <p:nvSpPr>
+          <p:cNvPr id="25" name="Rectangle 24"/>
           <p:cNvSpPr/>
           <p:nvPr/>
         </p:nvSpPr>
         <p:spPr>
           <a:xfrm>
-            <a:off x="4114800" y="2768873"/>
-            <a:ext cx="5806272" cy="128016"/>
+            <a:off x="4114800" y="3936491"/>
+            <a:ext cx="1291013" cy="128016"/>
+          </a:xfrm>
+          <a:prstGeom prst="rect">
+            <a:avLst/>
+          </a:prstGeom>
+          <a:solidFill>
+            <a:srgbClr val="141833"/>
+          </a:solidFill>
+          <a:ln>
+            <a:noFill/>
+          </a:ln>
+          <a:effectLst/>
+        </p:spPr>
+        <p:style>
+          <a:lnRef idx="1">
+            <a:schemeClr val="accent1"/>
+          </a:lnRef>
+          <a:fillRef idx="3">
+            <a:schemeClr val="accent1"/>
+          </a:fillRef>
+          <a:effectRef idx="2">
+            <a:schemeClr val="accent1"/>
+          </a:effectRef>
+          <a:fontRef idx="minor">
+            <a:schemeClr val="lt1"/>
+          </a:fontRef>
+        </p:style>
+        <p:txBody>
+          <a:bodyPr rtlCol="0" anchor="ctr"/>
+          <a:lstStyle/>
+          <a:p>
+            <a:pPr algn="ctr"/>
+          </a:p>
+        </p:txBody>
+      </p:sp>
+      <p:sp>
+        <p:nvSpPr>
+          <p:cNvPr id="26" name="TextBox 25"/>
+          <p:cNvSpPr txBox="1"/>
+          <p:nvPr/>
+        </p:nvSpPr>
+        <p:spPr>
+          <a:xfrm>
+            <a:off x="5497253" y="3872835"/>
+            <a:ext cx="2286000" cy="291904"/>
+          </a:xfrm>
+          <a:prstGeom prst="rect">
+            <a:avLst/>
+          </a:prstGeom>
+          <a:noFill/>
+        </p:spPr>
+        <p:txBody>
+          <a:bodyPr wrap="square" lIns="0" rIns="0" tIns="0" bIns="0">
+            <a:spAutoFit/>
+          </a:bodyPr>
+          <a:lstStyle/>
+          <a:p>
+            <a:r>
+              <a:rPr sz="900" b="0">
+                <a:solidFill>
+                  <a:srgbClr val="6B7082"/>
+                </a:solidFill>
+                <a:latin typeface="Helvetica Neue"/>
+              </a:rPr>
+              <a:t>52,033 views · 58 posts</a:t>
+            </a:r>
+          </a:p>
+        </p:txBody>
+      </p:sp>
+      <p:sp>
+        <p:nvSpPr>
+          <p:cNvPr id="27" name="TextBox 26"/>
+          <p:cNvSpPr txBox="1"/>
+          <p:nvPr/>
+        </p:nvSpPr>
+        <p:spPr>
+          <a:xfrm>
+            <a:off x="731520" y="4164740"/>
+            <a:ext cx="3200400" cy="291904"/>
+          </a:xfrm>
+          <a:prstGeom prst="rect">
+            <a:avLst/>
+          </a:prstGeom>
+          <a:noFill/>
+        </p:spPr>
+        <p:txBody>
+          <a:bodyPr wrap="square" lIns="0" rIns="0" tIns="0" bIns="0">
+            <a:spAutoFit/>
+          </a:bodyPr>
+          <a:lstStyle/>
+          <a:p>
+            <a:r>
+              <a:rPr sz="1100" b="1">
+                <a:solidFill>
+                  <a:srgbClr val="141833"/>
+                </a:solidFill>
+                <a:latin typeface="Helvetica Neue"/>
+              </a:rPr>
+              <a:t>Downtown Development</a:t>
+            </a:r>
+          </a:p>
+        </p:txBody>
+      </p:sp>
+      <p:sp>
+        <p:nvSpPr>
+          <p:cNvPr id="28" name="Rectangle 27"/>
+          <p:cNvSpPr/>
+          <p:nvPr/>
+        </p:nvSpPr>
+        <p:spPr>
+          <a:xfrm>
+            <a:off x="4114800" y="4228396"/>
+            <a:ext cx="1182934" cy="128016"/>
+          </a:xfrm>
+          <a:prstGeom prst="rect">
+            <a:avLst/>
+          </a:prstGeom>
+          <a:solidFill>
+            <a:srgbClr val="C9A227"/>
+          </a:solidFill>
+          <a:ln>
+            <a:noFill/>
+          </a:ln>
+          <a:effectLst/>
+        </p:spPr>
+        <p:style>
+          <a:lnRef idx="1">
+            <a:schemeClr val="accent1"/>
+          </a:lnRef>
+          <a:fillRef idx="3">
+            <a:schemeClr val="accent1"/>
+          </a:fillRef>
+          <a:effectRef idx="2">
+            <a:schemeClr val="accent1"/>
+          </a:effectRef>
+          <a:fontRef idx="minor">
+            <a:schemeClr val="lt1"/>
+          </a:fontRef>
+        </p:style>
+        <p:txBody>
+          <a:bodyPr rtlCol="0" anchor="ctr"/>
+          <a:lstStyle/>
+          <a:p>
+            <a:pPr algn="ctr"/>
+          </a:p>
+        </p:txBody>
+      </p:sp>
+      <p:sp>
+        <p:nvSpPr>
+          <p:cNvPr id="29" name="TextBox 28"/>
+          <p:cNvSpPr txBox="1"/>
+          <p:nvPr/>
+        </p:nvSpPr>
+        <p:spPr>
+          <a:xfrm>
+            <a:off x="5389174" y="4164740"/>
+            <a:ext cx="2286000" cy="291904"/>
+          </a:xfrm>
+          <a:prstGeom prst="rect">
+            <a:avLst/>
+          </a:prstGeom>
+          <a:noFill/>
+        </p:spPr>
+        <p:txBody>
+          <a:bodyPr wrap="square" lIns="0" rIns="0" tIns="0" bIns="0">
+            <a:spAutoFit/>
+          </a:bodyPr>
+          <a:lstStyle/>
+          <a:p>
+            <a:r>
+              <a:rPr sz="900" b="0">
+                <a:solidFill>
+                  <a:srgbClr val="6B7082"/>
+                </a:solidFill>
+                <a:latin typeface="Helvetica Neue"/>
+              </a:rPr>
+              <a:t>47,677 views · 18 posts</a:t>
+            </a:r>
+          </a:p>
+        </p:txBody>
+      </p:sp>
+      <p:sp>
+        <p:nvSpPr>
+          <p:cNvPr id="30" name="TextBox 29"/>
+          <p:cNvSpPr txBox="1"/>
+          <p:nvPr/>
+        </p:nvSpPr>
+        <p:spPr>
+          <a:xfrm>
+            <a:off x="731520" y="4456644"/>
+            <a:ext cx="3200400" cy="291904"/>
+          </a:xfrm>
+          <a:prstGeom prst="rect">
+            <a:avLst/>
+          </a:prstGeom>
+          <a:noFill/>
+        </p:spPr>
+        <p:txBody>
+          <a:bodyPr wrap="square" lIns="0" rIns="0" tIns="0" bIns="0">
+            <a:spAutoFit/>
+          </a:bodyPr>
+          <a:lstStyle/>
+          <a:p>
+            <a:r>
+              <a:rPr sz="1100" b="1">
+                <a:solidFill>
+                  <a:srgbClr val="141833"/>
+                </a:solidFill>
+                <a:latin typeface="Helvetica Neue"/>
+              </a:rPr>
+              <a:t>Political Individual Highlights</a:t>
+            </a:r>
+          </a:p>
+        </p:txBody>
+      </p:sp>
+      <p:sp>
+        <p:nvSpPr>
+          <p:cNvPr id="31" name="Rectangle 30"/>
+          <p:cNvSpPr/>
+          <p:nvPr/>
+        </p:nvSpPr>
+        <p:spPr>
+          <a:xfrm>
+            <a:off x="4114800" y="4520301"/>
+            <a:ext cx="695886" cy="128016"/>
+          </a:xfrm>
+          <a:prstGeom prst="rect">
+            <a:avLst/>
+          </a:prstGeom>
+          <a:solidFill>
+            <a:srgbClr val="2E86AB"/>
+          </a:solidFill>
+          <a:ln>
+            <a:noFill/>
+          </a:ln>
+          <a:effectLst/>
+        </p:spPr>
+        <p:style>
+          <a:lnRef idx="1">
+            <a:schemeClr val="accent1"/>
+          </a:lnRef>
+          <a:fillRef idx="3">
+            <a:schemeClr val="accent1"/>
+          </a:fillRef>
+          <a:effectRef idx="2">
+            <a:schemeClr val="accent1"/>
+          </a:effectRef>
+          <a:fontRef idx="minor">
+            <a:schemeClr val="lt1"/>
+          </a:fontRef>
+        </p:style>
+        <p:txBody>
+          <a:bodyPr rtlCol="0" anchor="ctr"/>
+          <a:lstStyle/>
+          <a:p>
+            <a:pPr algn="ctr"/>
+          </a:p>
+        </p:txBody>
+      </p:sp>
+      <p:sp>
+        <p:nvSpPr>
+          <p:cNvPr id="32" name="TextBox 31"/>
+          <p:cNvSpPr txBox="1"/>
+          <p:nvPr/>
+        </p:nvSpPr>
+        <p:spPr>
+          <a:xfrm>
+            <a:off x="4902126" y="4456644"/>
+            <a:ext cx="2286000" cy="291904"/>
+          </a:xfrm>
+          <a:prstGeom prst="rect">
+            <a:avLst/>
+          </a:prstGeom>
+          <a:noFill/>
+        </p:spPr>
+        <p:txBody>
+          <a:bodyPr wrap="square" lIns="0" rIns="0" tIns="0" bIns="0">
+            <a:spAutoFit/>
+          </a:bodyPr>
+          <a:lstStyle/>
+          <a:p>
+            <a:r>
+              <a:rPr sz="900" b="0">
+                <a:solidFill>
+                  <a:srgbClr val="6B7082"/>
+                </a:solidFill>
+                <a:latin typeface="Helvetica Neue"/>
+              </a:rPr>
+              <a:t>28,047 views · 30 posts</a:t>
+            </a:r>
+          </a:p>
+        </p:txBody>
+      </p:sp>
+      <p:sp>
+        <p:nvSpPr>
+          <p:cNvPr id="33" name="TextBox 32"/>
+          <p:cNvSpPr txBox="1"/>
+          <p:nvPr/>
+        </p:nvSpPr>
+        <p:spPr>
+          <a:xfrm>
+            <a:off x="731520" y="4748549"/>
+            <a:ext cx="3200400" cy="291904"/>
+          </a:xfrm>
+          <a:prstGeom prst="rect">
+            <a:avLst/>
+          </a:prstGeom>
+          <a:noFill/>
+        </p:spPr>
+        <p:txBody>
+          <a:bodyPr wrap="square" lIns="0" rIns="0" tIns="0" bIns="0">
+            <a:spAutoFit/>
+          </a:bodyPr>
+          <a:lstStyle/>
+          <a:p>
+            <a:r>
+              <a:rPr sz="1100" b="1">
+                <a:solidFill>
+                  <a:srgbClr val="141833"/>
+                </a:solidFill>
+                <a:latin typeface="Helvetica Neue"/>
+              </a:rPr>
+              <a:t>Resident Highlights</a:t>
+            </a:r>
+          </a:p>
+        </p:txBody>
+      </p:sp>
+      <p:sp>
+        <p:nvSpPr>
+          <p:cNvPr id="34" name="Rectangle 33"/>
+          <p:cNvSpPr/>
+          <p:nvPr/>
+        </p:nvSpPr>
+        <p:spPr>
+          <a:xfrm>
+            <a:off x="4114800" y="4812205"/>
+            <a:ext cx="204768" cy="128016"/>
+          </a:xfrm>
+          <a:prstGeom prst="rect">
+            <a:avLst/>
+          </a:prstGeom>
+          <a:solidFill>
+            <a:srgbClr val="1B7A43"/>
+          </a:solidFill>
+          <a:ln>
+            <a:noFill/>
+          </a:ln>
+          <a:effectLst/>
+        </p:spPr>
+        <p:style>
+          <a:lnRef idx="1">
+            <a:schemeClr val="accent1"/>
+          </a:lnRef>
+          <a:fillRef idx="3">
+            <a:schemeClr val="accent1"/>
+          </a:fillRef>
+          <a:effectRef idx="2">
+            <a:schemeClr val="accent1"/>
+          </a:effectRef>
+          <a:fontRef idx="minor">
+            <a:schemeClr val="lt1"/>
+          </a:fontRef>
+        </p:style>
+        <p:txBody>
+          <a:bodyPr rtlCol="0" anchor="ctr"/>
+          <a:lstStyle/>
+          <a:p>
+            <a:pPr algn="ctr"/>
+          </a:p>
+        </p:txBody>
+      </p:sp>
+      <p:sp>
+        <p:nvSpPr>
+          <p:cNvPr id="35" name="TextBox 34"/>
+          <p:cNvSpPr txBox="1"/>
+          <p:nvPr/>
+        </p:nvSpPr>
+        <p:spPr>
+          <a:xfrm>
+            <a:off x="4411008" y="4748549"/>
+            <a:ext cx="2286000" cy="291904"/>
+          </a:xfrm>
+          <a:prstGeom prst="rect">
+            <a:avLst/>
+          </a:prstGeom>
+          <a:noFill/>
+        </p:spPr>
+        <p:txBody>
+          <a:bodyPr wrap="square" lIns="0" rIns="0" tIns="0" bIns="0">
+            <a:spAutoFit/>
+          </a:bodyPr>
+          <a:lstStyle/>
+          <a:p>
+            <a:r>
+              <a:rPr sz="900" b="0">
+                <a:solidFill>
+                  <a:srgbClr val="6B7082"/>
+                </a:solidFill>
+                <a:latin typeface="Helvetica Neue"/>
+              </a:rPr>
+              <a:t>8,253 views · 8 posts</a:t>
+            </a:r>
+          </a:p>
+        </p:txBody>
+      </p:sp>
+      <p:sp>
+        <p:nvSpPr>
+          <p:cNvPr id="36" name="TextBox 35"/>
+          <p:cNvSpPr txBox="1"/>
+          <p:nvPr/>
+        </p:nvSpPr>
+        <p:spPr>
+          <a:xfrm>
+            <a:off x="731520" y="5040454"/>
+            <a:ext cx="3200400" cy="291904"/>
+          </a:xfrm>
+          <a:prstGeom prst="rect">
+            <a:avLst/>
+          </a:prstGeom>
+          <a:noFill/>
+        </p:spPr>
+        <p:txBody>
+          <a:bodyPr wrap="square" lIns="0" rIns="0" tIns="0" bIns="0">
+            <a:spAutoFit/>
+          </a:bodyPr>
+          <a:lstStyle/>
+          <a:p>
+            <a:r>
+              <a:rPr sz="1100" b="1">
+                <a:solidFill>
+                  <a:srgbClr val="141833"/>
+                </a:solidFill>
+                <a:latin typeface="Helvetica Neue"/>
+              </a:rPr>
+              <a:t>American Pride</a:t>
+            </a:r>
+          </a:p>
+        </p:txBody>
+      </p:sp>
+      <p:sp>
+        <p:nvSpPr>
+          <p:cNvPr id="37" name="Rectangle 36"/>
+          <p:cNvSpPr/>
+          <p:nvPr/>
+        </p:nvSpPr>
+        <p:spPr>
+          <a:xfrm>
+            <a:off x="4114800" y="5104110"/>
+            <a:ext cx="192760" cy="128016"/>
           </a:xfrm>
           <a:prstGeom prst="rect">
             <a:avLst/>
@@ -16161,13 +17203,13 @@
       </p:sp>
       <p:sp>
         <p:nvSpPr>
-          <p:cNvPr id="14" name="TextBox 13"/>
-          <p:cNvSpPr txBox="1"/>
-          <p:nvPr/>
-        </p:nvSpPr>
-        <p:spPr>
-          <a:xfrm>
-            <a:off x="10012512" y="2705217"/>
+          <p:cNvPr id="38" name="TextBox 37"/>
+          <p:cNvSpPr txBox="1"/>
+          <p:nvPr/>
+        </p:nvSpPr>
+        <p:spPr>
+          <a:xfrm>
+            <a:off x="4399000" y="5040454"/>
             <a:ext cx="2286000" cy="291904"/>
           </a:xfrm>
           <a:prstGeom prst="rect">
@@ -16188,20 +17230,20 @@
                 </a:solidFill>
                 <a:latin typeface="Helvetica Neue"/>
               </a:rPr>
-              <a:t>87,606 views · 34 posts</a:t>
-            </a:r>
-          </a:p>
-        </p:txBody>
-      </p:sp>
-      <p:sp>
-        <p:nvSpPr>
-          <p:cNvPr id="15" name="TextBox 14"/>
-          <p:cNvSpPr txBox="1"/>
-          <p:nvPr/>
-        </p:nvSpPr>
-        <p:spPr>
-          <a:xfrm>
-            <a:off x="731520" y="2997121"/>
+              <a:t>7,769 views · 15 posts</a:t>
+            </a:r>
+          </a:p>
+        </p:txBody>
+      </p:sp>
+      <p:sp>
+        <p:nvSpPr>
+          <p:cNvPr id="39" name="TextBox 38"/>
+          <p:cNvSpPr txBox="1"/>
+          <p:nvPr/>
+        </p:nvSpPr>
+        <p:spPr>
+          <a:xfrm>
+            <a:off x="731520" y="5332358"/>
             <a:ext cx="3200400" cy="291904"/>
           </a:xfrm>
           <a:prstGeom prst="rect">
@@ -16222,21 +17264,21 @@
                 </a:solidFill>
                 <a:latin typeface="Helvetica Neue"/>
               </a:rPr>
-              <a:t>Elections &amp; Judicial</a:t>
-            </a:r>
-          </a:p>
-        </p:txBody>
-      </p:sp>
-      <p:sp>
-        <p:nvSpPr>
-          <p:cNvPr id="16" name="Rectangle 15"/>
+              <a:t>Legislation &amp; Policy Watch</a:t>
+            </a:r>
+          </a:p>
+        </p:txBody>
+      </p:sp>
+      <p:sp>
+        <p:nvSpPr>
+          <p:cNvPr id="40" name="Rectangle 39"/>
           <p:cNvSpPr/>
           <p:nvPr/>
         </p:nvSpPr>
         <p:spPr>
           <a:xfrm>
-            <a:off x="4114800" y="3060778"/>
-            <a:ext cx="4757371" cy="128016"/>
+            <a:off x="4114800" y="5396015"/>
+            <a:ext cx="153632" cy="128016"/>
           </a:xfrm>
           <a:prstGeom prst="rect">
             <a:avLst/>
@@ -16273,909 +17315,13 @@
       </p:sp>
       <p:sp>
         <p:nvSpPr>
-          <p:cNvPr id="17" name="TextBox 16"/>
-          <p:cNvSpPr txBox="1"/>
-          <p:nvPr/>
-        </p:nvSpPr>
-        <p:spPr>
-          <a:xfrm>
-            <a:off x="8963611" y="2997121"/>
-            <a:ext cx="2286000" cy="291904"/>
-          </a:xfrm>
-          <a:prstGeom prst="rect">
-            <a:avLst/>
-          </a:prstGeom>
-          <a:noFill/>
-        </p:spPr>
-        <p:txBody>
-          <a:bodyPr wrap="square" lIns="0" rIns="0" tIns="0" bIns="0">
-            <a:spAutoFit/>
-          </a:bodyPr>
-          <a:lstStyle/>
-          <a:p>
-            <a:r>
-              <a:rPr sz="900" b="0">
-                <a:solidFill>
-                  <a:srgbClr val="6B7082"/>
-                </a:solidFill>
-                <a:latin typeface="Helvetica Neue"/>
-              </a:rPr>
-              <a:t>71,780 views · 89 posts</a:t>
-            </a:r>
-          </a:p>
-        </p:txBody>
-      </p:sp>
-      <p:sp>
-        <p:nvSpPr>
-          <p:cNvPr id="18" name="TextBox 17"/>
-          <p:cNvSpPr txBox="1"/>
-          <p:nvPr/>
-        </p:nvSpPr>
-        <p:spPr>
-          <a:xfrm>
-            <a:off x="731520" y="3289026"/>
-            <a:ext cx="3200400" cy="291904"/>
-          </a:xfrm>
-          <a:prstGeom prst="rect">
-            <a:avLst/>
-          </a:prstGeom>
-          <a:noFill/>
-        </p:spPr>
-        <p:txBody>
-          <a:bodyPr wrap="square" lIns="0" rIns="0" tIns="0" bIns="0">
-            <a:spAutoFit/>
-          </a:bodyPr>
-          <a:lstStyle/>
-          <a:p>
-            <a:r>
-              <a:rPr sz="1100" b="1">
-                <a:solidFill>
-                  <a:srgbClr val="141833"/>
-                </a:solidFill>
-                <a:latin typeface="Helvetica Neue"/>
-              </a:rPr>
-              <a:t>FIFA / World Cup</a:t>
-            </a:r>
-          </a:p>
-        </p:txBody>
-      </p:sp>
-      <p:sp>
-        <p:nvSpPr>
-          <p:cNvPr id="19" name="Rectangle 18"/>
-          <p:cNvSpPr/>
-          <p:nvPr/>
-        </p:nvSpPr>
-        <p:spPr>
-          <a:xfrm>
-            <a:off x="4114800" y="3352682"/>
-            <a:ext cx="4213037" cy="128016"/>
-          </a:xfrm>
-          <a:prstGeom prst="rect">
-            <a:avLst/>
-          </a:prstGeom>
-          <a:solidFill>
-            <a:srgbClr val="6B7082"/>
-          </a:solidFill>
-          <a:ln>
-            <a:noFill/>
-          </a:ln>
-          <a:effectLst/>
-        </p:spPr>
-        <p:style>
-          <a:lnRef idx="1">
-            <a:schemeClr val="accent1"/>
-          </a:lnRef>
-          <a:fillRef idx="3">
-            <a:schemeClr val="accent1"/>
-          </a:fillRef>
-          <a:effectRef idx="2">
-            <a:schemeClr val="accent1"/>
-          </a:effectRef>
-          <a:fontRef idx="minor">
-            <a:schemeClr val="lt1"/>
-          </a:fontRef>
-        </p:style>
-        <p:txBody>
-          <a:bodyPr rtlCol="0" anchor="ctr"/>
-          <a:lstStyle/>
-          <a:p>
-            <a:pPr algn="ctr"/>
-          </a:p>
-        </p:txBody>
-      </p:sp>
-      <p:sp>
-        <p:nvSpPr>
-          <p:cNvPr id="20" name="TextBox 19"/>
-          <p:cNvSpPr txBox="1"/>
-          <p:nvPr/>
-        </p:nvSpPr>
-        <p:spPr>
-          <a:xfrm>
-            <a:off x="8419277" y="3289026"/>
-            <a:ext cx="2286000" cy="291904"/>
-          </a:xfrm>
-          <a:prstGeom prst="rect">
-            <a:avLst/>
-          </a:prstGeom>
-          <a:noFill/>
-        </p:spPr>
-        <p:txBody>
-          <a:bodyPr wrap="square" lIns="0" rIns="0" tIns="0" bIns="0">
-            <a:spAutoFit/>
-          </a:bodyPr>
-          <a:lstStyle/>
-          <a:p>
-            <a:r>
-              <a:rPr sz="900" b="0">
-                <a:solidFill>
-                  <a:srgbClr val="6B7082"/>
-                </a:solidFill>
-                <a:latin typeface="Helvetica Neue"/>
-              </a:rPr>
-              <a:t>63,567 views · 25 posts</a:t>
-            </a:r>
-          </a:p>
-        </p:txBody>
-      </p:sp>
-      <p:sp>
-        <p:nvSpPr>
-          <p:cNvPr id="21" name="TextBox 20"/>
-          <p:cNvSpPr txBox="1"/>
-          <p:nvPr/>
-        </p:nvSpPr>
-        <p:spPr>
-          <a:xfrm>
-            <a:off x="731520" y="3580931"/>
-            <a:ext cx="3200400" cy="291904"/>
-          </a:xfrm>
-          <a:prstGeom prst="rect">
-            <a:avLst/>
-          </a:prstGeom>
-          <a:noFill/>
-        </p:spPr>
-        <p:txBody>
-          <a:bodyPr wrap="square" lIns="0" rIns="0" tIns="0" bIns="0">
-            <a:spAutoFit/>
-          </a:bodyPr>
-          <a:lstStyle/>
-          <a:p>
-            <a:r>
-              <a:rPr sz="1100" b="1">
-                <a:solidFill>
-                  <a:srgbClr val="141833"/>
-                </a:solidFill>
-                <a:latin typeface="Helvetica Neue"/>
-              </a:rPr>
-              <a:t>Military Service</a:t>
-            </a:r>
-          </a:p>
-        </p:txBody>
-      </p:sp>
-      <p:sp>
-        <p:nvSpPr>
-          <p:cNvPr id="22" name="Rectangle 21"/>
-          <p:cNvSpPr/>
-          <p:nvPr/>
-        </p:nvSpPr>
-        <p:spPr>
-          <a:xfrm>
-            <a:off x="4114800" y="3644587"/>
-            <a:ext cx="4144705" cy="128016"/>
-          </a:xfrm>
-          <a:prstGeom prst="rect">
-            <a:avLst/>
-          </a:prstGeom>
-          <a:solidFill>
-            <a:srgbClr val="C9A227"/>
-          </a:solidFill>
-          <a:ln>
-            <a:noFill/>
-          </a:ln>
-          <a:effectLst/>
-        </p:spPr>
-        <p:style>
-          <a:lnRef idx="1">
-            <a:schemeClr val="accent1"/>
-          </a:lnRef>
-          <a:fillRef idx="3">
-            <a:schemeClr val="accent1"/>
-          </a:fillRef>
-          <a:effectRef idx="2">
-            <a:schemeClr val="accent1"/>
-          </a:effectRef>
-          <a:fontRef idx="minor">
-            <a:schemeClr val="lt1"/>
-          </a:fontRef>
-        </p:style>
-        <p:txBody>
-          <a:bodyPr rtlCol="0" anchor="ctr"/>
-          <a:lstStyle/>
-          <a:p>
-            <a:pPr algn="ctr"/>
-          </a:p>
-        </p:txBody>
-      </p:sp>
-      <p:sp>
-        <p:nvSpPr>
-          <p:cNvPr id="23" name="TextBox 22"/>
-          <p:cNvSpPr txBox="1"/>
-          <p:nvPr/>
-        </p:nvSpPr>
-        <p:spPr>
-          <a:xfrm>
-            <a:off x="8350945" y="3580931"/>
-            <a:ext cx="2286000" cy="291904"/>
-          </a:xfrm>
-          <a:prstGeom prst="rect">
-            <a:avLst/>
-          </a:prstGeom>
-          <a:noFill/>
-        </p:spPr>
-        <p:txBody>
-          <a:bodyPr wrap="square" lIns="0" rIns="0" tIns="0" bIns="0">
-            <a:spAutoFit/>
-          </a:bodyPr>
-          <a:lstStyle/>
-          <a:p>
-            <a:r>
-              <a:rPr sz="900" b="0">
-                <a:solidFill>
-                  <a:srgbClr val="6B7082"/>
-                </a:solidFill>
-                <a:latin typeface="Helvetica Neue"/>
-              </a:rPr>
-              <a:t>62,536 views · 22 posts</a:t>
-            </a:r>
-          </a:p>
-        </p:txBody>
-      </p:sp>
-      <p:sp>
-        <p:nvSpPr>
-          <p:cNvPr id="24" name="TextBox 23"/>
-          <p:cNvSpPr txBox="1"/>
-          <p:nvPr/>
-        </p:nvSpPr>
-        <p:spPr>
-          <a:xfrm>
-            <a:off x="731520" y="3872835"/>
-            <a:ext cx="3200400" cy="291904"/>
-          </a:xfrm>
-          <a:prstGeom prst="rect">
-            <a:avLst/>
-          </a:prstGeom>
-          <a:noFill/>
-        </p:spPr>
-        <p:txBody>
-          <a:bodyPr wrap="square" lIns="0" rIns="0" tIns="0" bIns="0">
-            <a:spAutoFit/>
-          </a:bodyPr>
-          <a:lstStyle/>
-          <a:p>
-            <a:r>
-              <a:rPr sz="1100" b="1">
-                <a:solidFill>
-                  <a:srgbClr val="141833"/>
-                </a:solidFill>
-                <a:latin typeface="Helvetica Neue"/>
-              </a:rPr>
-              <a:t>Community &amp; Culture</a:t>
-            </a:r>
-          </a:p>
-        </p:txBody>
-      </p:sp>
-      <p:sp>
-        <p:nvSpPr>
-          <p:cNvPr id="25" name="Rectangle 24"/>
-          <p:cNvSpPr/>
-          <p:nvPr/>
-        </p:nvSpPr>
-        <p:spPr>
-          <a:xfrm>
-            <a:off x="4114800" y="3936491"/>
-            <a:ext cx="3392592" cy="128016"/>
-          </a:xfrm>
-          <a:prstGeom prst="rect">
-            <a:avLst/>
-          </a:prstGeom>
-          <a:solidFill>
-            <a:srgbClr val="141833"/>
-          </a:solidFill>
-          <a:ln>
-            <a:noFill/>
-          </a:ln>
-          <a:effectLst/>
-        </p:spPr>
-        <p:style>
-          <a:lnRef idx="1">
-            <a:schemeClr val="accent1"/>
-          </a:lnRef>
-          <a:fillRef idx="3">
-            <a:schemeClr val="accent1"/>
-          </a:fillRef>
-          <a:effectRef idx="2">
-            <a:schemeClr val="accent1"/>
-          </a:effectRef>
-          <a:fontRef idx="minor">
-            <a:schemeClr val="lt1"/>
-          </a:fontRef>
-        </p:style>
-        <p:txBody>
-          <a:bodyPr rtlCol="0" anchor="ctr"/>
-          <a:lstStyle/>
-          <a:p>
-            <a:pPr algn="ctr"/>
-          </a:p>
-        </p:txBody>
-      </p:sp>
-      <p:sp>
-        <p:nvSpPr>
-          <p:cNvPr id="26" name="TextBox 25"/>
-          <p:cNvSpPr txBox="1"/>
-          <p:nvPr/>
-        </p:nvSpPr>
-        <p:spPr>
-          <a:xfrm>
-            <a:off x="7598832" y="3872835"/>
-            <a:ext cx="2286000" cy="291904"/>
-          </a:xfrm>
-          <a:prstGeom prst="rect">
-            <a:avLst/>
-          </a:prstGeom>
-          <a:noFill/>
-        </p:spPr>
-        <p:txBody>
-          <a:bodyPr wrap="square" lIns="0" rIns="0" tIns="0" bIns="0">
-            <a:spAutoFit/>
-          </a:bodyPr>
-          <a:lstStyle/>
-          <a:p>
-            <a:r>
-              <a:rPr sz="900" b="0">
-                <a:solidFill>
-                  <a:srgbClr val="6B7082"/>
-                </a:solidFill>
-                <a:latin typeface="Helvetica Neue"/>
-              </a:rPr>
-              <a:t>51,188 views · 57 posts</a:t>
-            </a:r>
-          </a:p>
-        </p:txBody>
-      </p:sp>
-      <p:sp>
-        <p:nvSpPr>
-          <p:cNvPr id="27" name="TextBox 26"/>
-          <p:cNvSpPr txBox="1"/>
-          <p:nvPr/>
-        </p:nvSpPr>
-        <p:spPr>
-          <a:xfrm>
-            <a:off x="731520" y="4164740"/>
-            <a:ext cx="3200400" cy="291904"/>
-          </a:xfrm>
-          <a:prstGeom prst="rect">
-            <a:avLst/>
-          </a:prstGeom>
-          <a:noFill/>
-        </p:spPr>
-        <p:txBody>
-          <a:bodyPr wrap="square" lIns="0" rIns="0" tIns="0" bIns="0">
-            <a:spAutoFit/>
-          </a:bodyPr>
-          <a:lstStyle/>
-          <a:p>
-            <a:r>
-              <a:rPr sz="1100" b="1">
-                <a:solidFill>
-                  <a:srgbClr val="141833"/>
-                </a:solidFill>
-                <a:latin typeface="Helvetica Neue"/>
-              </a:rPr>
-              <a:t>Downtown Development</a:t>
-            </a:r>
-          </a:p>
-        </p:txBody>
-      </p:sp>
-      <p:sp>
-        <p:nvSpPr>
-          <p:cNvPr id="28" name="Rectangle 27"/>
-          <p:cNvSpPr/>
-          <p:nvPr/>
-        </p:nvSpPr>
-        <p:spPr>
-          <a:xfrm>
-            <a:off x="4114800" y="4228396"/>
-            <a:ext cx="3159893" cy="128016"/>
-          </a:xfrm>
-          <a:prstGeom prst="rect">
-            <a:avLst/>
-          </a:prstGeom>
-          <a:solidFill>
-            <a:srgbClr val="C9A227"/>
-          </a:solidFill>
-          <a:ln>
-            <a:noFill/>
-          </a:ln>
-          <a:effectLst/>
-        </p:spPr>
-        <p:style>
-          <a:lnRef idx="1">
-            <a:schemeClr val="accent1"/>
-          </a:lnRef>
-          <a:fillRef idx="3">
-            <a:schemeClr val="accent1"/>
-          </a:fillRef>
-          <a:effectRef idx="2">
-            <a:schemeClr val="accent1"/>
-          </a:effectRef>
-          <a:fontRef idx="minor">
-            <a:schemeClr val="lt1"/>
-          </a:fontRef>
-        </p:style>
-        <p:txBody>
-          <a:bodyPr rtlCol="0" anchor="ctr"/>
-          <a:lstStyle/>
-          <a:p>
-            <a:pPr algn="ctr"/>
-          </a:p>
-        </p:txBody>
-      </p:sp>
-      <p:sp>
-        <p:nvSpPr>
-          <p:cNvPr id="29" name="TextBox 28"/>
-          <p:cNvSpPr txBox="1"/>
-          <p:nvPr/>
-        </p:nvSpPr>
-        <p:spPr>
-          <a:xfrm>
-            <a:off x="7366133" y="4164740"/>
-            <a:ext cx="2286000" cy="291904"/>
-          </a:xfrm>
-          <a:prstGeom prst="rect">
-            <a:avLst/>
-          </a:prstGeom>
-          <a:noFill/>
-        </p:spPr>
-        <p:txBody>
-          <a:bodyPr wrap="square" lIns="0" rIns="0" tIns="0" bIns="0">
-            <a:spAutoFit/>
-          </a:bodyPr>
-          <a:lstStyle/>
-          <a:p>
-            <a:r>
-              <a:rPr sz="900" b="0">
-                <a:solidFill>
-                  <a:srgbClr val="6B7082"/>
-                </a:solidFill>
-                <a:latin typeface="Helvetica Neue"/>
-              </a:rPr>
-              <a:t>47,677 views · 18 posts</a:t>
-            </a:r>
-          </a:p>
-        </p:txBody>
-      </p:sp>
-      <p:sp>
-        <p:nvSpPr>
-          <p:cNvPr id="30" name="TextBox 29"/>
-          <p:cNvSpPr txBox="1"/>
-          <p:nvPr/>
-        </p:nvSpPr>
-        <p:spPr>
-          <a:xfrm>
-            <a:off x="731520" y="4456644"/>
-            <a:ext cx="3200400" cy="291904"/>
-          </a:xfrm>
-          <a:prstGeom prst="rect">
-            <a:avLst/>
-          </a:prstGeom>
-          <a:noFill/>
-        </p:spPr>
-        <p:txBody>
-          <a:bodyPr wrap="square" lIns="0" rIns="0" tIns="0" bIns="0">
-            <a:spAutoFit/>
-          </a:bodyPr>
-          <a:lstStyle/>
-          <a:p>
-            <a:r>
-              <a:rPr sz="1100" b="1">
-                <a:solidFill>
-                  <a:srgbClr val="141833"/>
-                </a:solidFill>
-                <a:latin typeface="Helvetica Neue"/>
-              </a:rPr>
-              <a:t>Political Individual Highlights</a:t>
-            </a:r>
-          </a:p>
-        </p:txBody>
-      </p:sp>
-      <p:sp>
-        <p:nvSpPr>
-          <p:cNvPr id="31" name="Rectangle 30"/>
-          <p:cNvSpPr/>
-          <p:nvPr/>
-        </p:nvSpPr>
-        <p:spPr>
-          <a:xfrm>
-            <a:off x="4114800" y="4520301"/>
-            <a:ext cx="1840051" cy="128016"/>
-          </a:xfrm>
-          <a:prstGeom prst="rect">
-            <a:avLst/>
-          </a:prstGeom>
-          <a:solidFill>
-            <a:srgbClr val="2E86AB"/>
-          </a:solidFill>
-          <a:ln>
-            <a:noFill/>
-          </a:ln>
-          <a:effectLst/>
-        </p:spPr>
-        <p:style>
-          <a:lnRef idx="1">
-            <a:schemeClr val="accent1"/>
-          </a:lnRef>
-          <a:fillRef idx="3">
-            <a:schemeClr val="accent1"/>
-          </a:fillRef>
-          <a:effectRef idx="2">
-            <a:schemeClr val="accent1"/>
-          </a:effectRef>
-          <a:fontRef idx="minor">
-            <a:schemeClr val="lt1"/>
-          </a:fontRef>
-        </p:style>
-        <p:txBody>
-          <a:bodyPr rtlCol="0" anchor="ctr"/>
-          <a:lstStyle/>
-          <a:p>
-            <a:pPr algn="ctr"/>
-          </a:p>
-        </p:txBody>
-      </p:sp>
-      <p:sp>
-        <p:nvSpPr>
-          <p:cNvPr id="32" name="TextBox 31"/>
-          <p:cNvSpPr txBox="1"/>
-          <p:nvPr/>
-        </p:nvSpPr>
-        <p:spPr>
-          <a:xfrm>
-            <a:off x="6046291" y="4456644"/>
-            <a:ext cx="2286000" cy="291904"/>
-          </a:xfrm>
-          <a:prstGeom prst="rect">
-            <a:avLst/>
-          </a:prstGeom>
-          <a:noFill/>
-        </p:spPr>
-        <p:txBody>
-          <a:bodyPr wrap="square" lIns="0" rIns="0" tIns="0" bIns="0">
-            <a:spAutoFit/>
-          </a:bodyPr>
-          <a:lstStyle/>
-          <a:p>
-            <a:r>
-              <a:rPr sz="900" b="0">
-                <a:solidFill>
-                  <a:srgbClr val="6B7082"/>
-                </a:solidFill>
-                <a:latin typeface="Helvetica Neue"/>
-              </a:rPr>
-              <a:t>27,763 views · 30 posts</a:t>
-            </a:r>
-          </a:p>
-        </p:txBody>
-      </p:sp>
-      <p:sp>
-        <p:nvSpPr>
-          <p:cNvPr id="33" name="TextBox 32"/>
-          <p:cNvSpPr txBox="1"/>
-          <p:nvPr/>
-        </p:nvSpPr>
-        <p:spPr>
-          <a:xfrm>
-            <a:off x="731520" y="4748549"/>
-            <a:ext cx="3200400" cy="291904"/>
-          </a:xfrm>
-          <a:prstGeom prst="rect">
-            <a:avLst/>
-          </a:prstGeom>
-          <a:noFill/>
-        </p:spPr>
-        <p:txBody>
-          <a:bodyPr wrap="square" lIns="0" rIns="0" tIns="0" bIns="0">
-            <a:spAutoFit/>
-          </a:bodyPr>
-          <a:lstStyle/>
-          <a:p>
-            <a:r>
-              <a:rPr sz="1100" b="1">
-                <a:solidFill>
-                  <a:srgbClr val="141833"/>
-                </a:solidFill>
-                <a:latin typeface="Helvetica Neue"/>
-              </a:rPr>
-              <a:t>Resident Highlights</a:t>
-            </a:r>
-          </a:p>
-        </p:txBody>
-      </p:sp>
-      <p:sp>
-        <p:nvSpPr>
-          <p:cNvPr id="34" name="Rectangle 33"/>
-          <p:cNvSpPr/>
-          <p:nvPr/>
-        </p:nvSpPr>
-        <p:spPr>
-          <a:xfrm>
-            <a:off x="4114800" y="4812205"/>
-            <a:ext cx="546852" cy="128016"/>
-          </a:xfrm>
-          <a:prstGeom prst="rect">
-            <a:avLst/>
-          </a:prstGeom>
-          <a:solidFill>
-            <a:srgbClr val="1B7A43"/>
-          </a:solidFill>
-          <a:ln>
-            <a:noFill/>
-          </a:ln>
-          <a:effectLst/>
-        </p:spPr>
-        <p:style>
-          <a:lnRef idx="1">
-            <a:schemeClr val="accent1"/>
-          </a:lnRef>
-          <a:fillRef idx="3">
-            <a:schemeClr val="accent1"/>
-          </a:fillRef>
-          <a:effectRef idx="2">
-            <a:schemeClr val="accent1"/>
-          </a:effectRef>
-          <a:fontRef idx="minor">
-            <a:schemeClr val="lt1"/>
-          </a:fontRef>
-        </p:style>
-        <p:txBody>
-          <a:bodyPr rtlCol="0" anchor="ctr"/>
-          <a:lstStyle/>
-          <a:p>
-            <a:pPr algn="ctr"/>
-          </a:p>
-        </p:txBody>
-      </p:sp>
-      <p:sp>
-        <p:nvSpPr>
-          <p:cNvPr id="35" name="TextBox 34"/>
-          <p:cNvSpPr txBox="1"/>
-          <p:nvPr/>
-        </p:nvSpPr>
-        <p:spPr>
-          <a:xfrm>
-            <a:off x="4753092" y="4748549"/>
-            <a:ext cx="2286000" cy="291904"/>
-          </a:xfrm>
-          <a:prstGeom prst="rect">
-            <a:avLst/>
-          </a:prstGeom>
-          <a:noFill/>
-        </p:spPr>
-        <p:txBody>
-          <a:bodyPr wrap="square" lIns="0" rIns="0" tIns="0" bIns="0">
-            <a:spAutoFit/>
-          </a:bodyPr>
-          <a:lstStyle/>
-          <a:p>
-            <a:r>
-              <a:rPr sz="900" b="0">
-                <a:solidFill>
-                  <a:srgbClr val="6B7082"/>
-                </a:solidFill>
-                <a:latin typeface="Helvetica Neue"/>
-              </a:rPr>
-              <a:t>8,251 views · 8 posts</a:t>
-            </a:r>
-          </a:p>
-        </p:txBody>
-      </p:sp>
-      <p:sp>
-        <p:nvSpPr>
-          <p:cNvPr id="36" name="TextBox 35"/>
-          <p:cNvSpPr txBox="1"/>
-          <p:nvPr/>
-        </p:nvSpPr>
-        <p:spPr>
-          <a:xfrm>
-            <a:off x="731520" y="5040454"/>
-            <a:ext cx="3200400" cy="291904"/>
-          </a:xfrm>
-          <a:prstGeom prst="rect">
-            <a:avLst/>
-          </a:prstGeom>
-          <a:noFill/>
-        </p:spPr>
-        <p:txBody>
-          <a:bodyPr wrap="square" lIns="0" rIns="0" tIns="0" bIns="0">
-            <a:spAutoFit/>
-          </a:bodyPr>
-          <a:lstStyle/>
-          <a:p>
-            <a:r>
-              <a:rPr sz="1100" b="1">
-                <a:solidFill>
-                  <a:srgbClr val="141833"/>
-                </a:solidFill>
-                <a:latin typeface="Helvetica Neue"/>
-              </a:rPr>
-              <a:t>American Pride</a:t>
-            </a:r>
-          </a:p>
-        </p:txBody>
-      </p:sp>
-      <p:sp>
-        <p:nvSpPr>
-          <p:cNvPr id="37" name="Rectangle 36"/>
-          <p:cNvSpPr/>
-          <p:nvPr/>
-        </p:nvSpPr>
-        <p:spPr>
-          <a:xfrm>
-            <a:off x="4114800" y="5104110"/>
-            <a:ext cx="514906" cy="128016"/>
-          </a:xfrm>
-          <a:prstGeom prst="rect">
-            <a:avLst/>
-          </a:prstGeom>
-          <a:solidFill>
-            <a:srgbClr val="990011"/>
-          </a:solidFill>
-          <a:ln>
-            <a:noFill/>
-          </a:ln>
-          <a:effectLst/>
-        </p:spPr>
-        <p:style>
-          <a:lnRef idx="1">
-            <a:schemeClr val="accent1"/>
-          </a:lnRef>
-          <a:fillRef idx="3">
-            <a:schemeClr val="accent1"/>
-          </a:fillRef>
-          <a:effectRef idx="2">
-            <a:schemeClr val="accent1"/>
-          </a:effectRef>
-          <a:fontRef idx="minor">
-            <a:schemeClr val="lt1"/>
-          </a:fontRef>
-        </p:style>
-        <p:txBody>
-          <a:bodyPr rtlCol="0" anchor="ctr"/>
-          <a:lstStyle/>
-          <a:p>
-            <a:pPr algn="ctr"/>
-          </a:p>
-        </p:txBody>
-      </p:sp>
-      <p:sp>
-        <p:nvSpPr>
-          <p:cNvPr id="38" name="TextBox 37"/>
-          <p:cNvSpPr txBox="1"/>
-          <p:nvPr/>
-        </p:nvSpPr>
-        <p:spPr>
-          <a:xfrm>
-            <a:off x="4721146" y="5040454"/>
-            <a:ext cx="2286000" cy="291904"/>
-          </a:xfrm>
-          <a:prstGeom prst="rect">
-            <a:avLst/>
-          </a:prstGeom>
-          <a:noFill/>
-        </p:spPr>
-        <p:txBody>
-          <a:bodyPr wrap="square" lIns="0" rIns="0" tIns="0" bIns="0">
-            <a:spAutoFit/>
-          </a:bodyPr>
-          <a:lstStyle/>
-          <a:p>
-            <a:r>
-              <a:rPr sz="900" b="0">
-                <a:solidFill>
-                  <a:srgbClr val="6B7082"/>
-                </a:solidFill>
-                <a:latin typeface="Helvetica Neue"/>
-              </a:rPr>
-              <a:t>7,769 views · 15 posts</a:t>
-            </a:r>
-          </a:p>
-        </p:txBody>
-      </p:sp>
-      <p:sp>
-        <p:nvSpPr>
-          <p:cNvPr id="39" name="TextBox 38"/>
-          <p:cNvSpPr txBox="1"/>
-          <p:nvPr/>
-        </p:nvSpPr>
-        <p:spPr>
-          <a:xfrm>
-            <a:off x="731520" y="5332358"/>
-            <a:ext cx="3200400" cy="291904"/>
-          </a:xfrm>
-          <a:prstGeom prst="rect">
-            <a:avLst/>
-          </a:prstGeom>
-          <a:noFill/>
-        </p:spPr>
-        <p:txBody>
-          <a:bodyPr wrap="square" lIns="0" rIns="0" tIns="0" bIns="0">
-            <a:spAutoFit/>
-          </a:bodyPr>
-          <a:lstStyle/>
-          <a:p>
-            <a:r>
-              <a:rPr sz="1100" b="1">
-                <a:solidFill>
-                  <a:srgbClr val="141833"/>
-                </a:solidFill>
-                <a:latin typeface="Helvetica Neue"/>
-              </a:rPr>
-              <a:t>Legislation &amp; Policy Watch</a:t>
-            </a:r>
-          </a:p>
-        </p:txBody>
-      </p:sp>
-      <p:sp>
-        <p:nvSpPr>
-          <p:cNvPr id="40" name="Rectangle 39"/>
-          <p:cNvSpPr/>
-          <p:nvPr/>
-        </p:nvSpPr>
-        <p:spPr>
-          <a:xfrm>
-            <a:off x="4114800" y="5396015"/>
-            <a:ext cx="410387" cy="128016"/>
-          </a:xfrm>
-          <a:prstGeom prst="rect">
-            <a:avLst/>
-          </a:prstGeom>
-          <a:solidFill>
-            <a:srgbClr val="2F3C7E"/>
-          </a:solidFill>
-          <a:ln>
-            <a:noFill/>
-          </a:ln>
-          <a:effectLst/>
-        </p:spPr>
-        <p:style>
-          <a:lnRef idx="1">
-            <a:schemeClr val="accent1"/>
-          </a:lnRef>
-          <a:fillRef idx="3">
-            <a:schemeClr val="accent1"/>
-          </a:fillRef>
-          <a:effectRef idx="2">
-            <a:schemeClr val="accent1"/>
-          </a:effectRef>
-          <a:fontRef idx="minor">
-            <a:schemeClr val="lt1"/>
-          </a:fontRef>
-        </p:style>
-        <p:txBody>
-          <a:bodyPr rtlCol="0" anchor="ctr"/>
-          <a:lstStyle/>
-          <a:p>
-            <a:pPr algn="ctr"/>
-          </a:p>
-        </p:txBody>
-      </p:sp>
-      <p:sp>
-        <p:nvSpPr>
           <p:cNvPr id="41" name="TextBox 40"/>
           <p:cNvSpPr txBox="1"/>
           <p:nvPr/>
         </p:nvSpPr>
         <p:spPr>
           <a:xfrm>
-            <a:off x="4616627" y="5332358"/>
+            <a:off x="4359872" y="5332358"/>
             <a:ext cx="2286000" cy="291904"/>
           </a:xfrm>
           <a:prstGeom prst="rect">
@@ -17244,7 +17390,7 @@
         <p:spPr>
           <a:xfrm>
             <a:off x="4114800" y="5687919"/>
-            <a:ext cx="73633" cy="128016"/>
+            <a:ext cx="45720" cy="128016"/>
           </a:xfrm>
           <a:prstGeom prst="rect">
             <a:avLst/>
@@ -17287,7 +17433,7 @@
         </p:nvSpPr>
         <p:spPr>
           <a:xfrm>
-            <a:off x="4279873" y="5624263"/>
+            <a:off x="4251959" y="5624263"/>
             <a:ext cx="2286000" cy="291904"/>
           </a:xfrm>
           <a:prstGeom prst="rect">
@@ -17550,7 +17696,7 @@
                 </a:solidFill>
                 <a:latin typeface="Helvetica Neue"/>
               </a:rPr>
-              <a:t>9 categories driving the bulk of your reach. Each averages 800+ views per post — proven audience.</a:t>
+              <a:t>8 categories driving the bulk of your reach. Each averages 800+ views per post — proven audience.</a:t>
             </a:r>
           </a:p>
         </p:txBody>
@@ -17904,7 +18050,7 @@
                 </a:solidFill>
                 <a:latin typeface="Georgia"/>
               </a:rPr>
-              <a:t>93,817</a:t>
+              <a:t>94,410</a:t>
             </a:r>
           </a:p>
         </p:txBody>
@@ -17938,7 +18084,7 @@
                 </a:solidFill>
                 <a:latin typeface="Helvetica Neue"/>
               </a:rPr>
-              <a:t>61 posts · 3,033 likes</a:t>
+              <a:t>62 posts · 3,041 likes</a:t>
             </a:r>
           </a:p>
         </p:txBody>
@@ -17972,7 +18118,7 @@
                 </a:solidFill>
                 <a:latin typeface="Helvetica Neue"/>
               </a:rPr>
-              <a:t>1,538 average views per post</a:t>
+              <a:t>1,523 average views per post</a:t>
             </a:r>
           </a:p>
         </p:txBody>
@@ -18940,7 +19086,7 @@
                 </a:solidFill>
                 <a:latin typeface="Georgia"/>
               </a:rPr>
-              <a:t>87,606</a:t>
+              <a:t>88,209</a:t>
             </a:r>
           </a:p>
         </p:txBody>
@@ -18974,7 +19120,7 @@
                 </a:solidFill>
                 <a:latin typeface="Helvetica Neue"/>
               </a:rPr>
-              <a:t>34 posts · 1,995 likes</a:t>
+              <a:t>35 posts · 2,000 likes</a:t>
             </a:r>
           </a:p>
         </p:txBody>
@@ -19008,7 +19154,7 @@
                 </a:solidFill>
                 <a:latin typeface="Helvetica Neue"/>
               </a:rPr>
-              <a:t>2,577 average views per post</a:t>
+              <a:t>2,520 average views per post</a:t>
             </a:r>
           </a:p>
         </p:txBody>
@@ -19320,7 +19466,7 @@
                 </a:solidFill>
                 <a:latin typeface="Helvetica Neue"/>
               </a:rPr>
-              <a:t>#2  ·  IG  ·  7,738 views</a:t>
+              <a:t>#2  ·  IG  ·  7,762 views</a:t>
             </a:r>
           </a:p>
         </p:txBody>
@@ -19752,7 +19898,7 @@
                 </a:solidFill>
                 <a:latin typeface="Georgia"/>
               </a:rPr>
-              <a:t>Elections &amp; Judicial</a:t>
+              <a:t>Military Service</a:t>
             </a:r>
           </a:p>
         </p:txBody>
@@ -19786,7 +19932,7 @@
                 </a:solidFill>
                 <a:latin typeface="Helvetica Neue"/>
               </a:rPr>
-              <a:t>Coverage of campaigns, courts, and local government.</a:t>
+              <a:t>Army/JROTC/veteran interviews — the human side of military service (NOT policy — that's Legislation Watch).</a:t>
             </a:r>
           </a:p>
         </p:txBody>
@@ -19816,11 +19962,11 @@
             <a:r>
               <a:rPr sz="900" b="1">
                 <a:solidFill>
-                  <a:srgbClr val="2F3C7E"/>
-                </a:solidFill>
-                <a:latin typeface="Helvetica Neue"/>
-              </a:rPr>
-              <a:t>AUDIENCE (theoretical): Slow-burn policy · Middle (40-55) + Older (55+) engaged voters</a:t>
+                  <a:srgbClr val="C9A227"/>
+                </a:solidFill>
+                <a:latin typeface="Helvetica Neue"/>
+              </a:rPr>
+              <a:t>AUDIENCE (theoretical): Traditional / patriotic · Middle (40-55) + Older (55+), veterans + families</a:t>
             </a:r>
           </a:p>
         </p:txBody>
@@ -19884,7 +20030,7 @@
             <a:avLst/>
           </a:prstGeom>
           <a:solidFill>
-            <a:srgbClr val="2F3C7E"/>
+            <a:srgbClr val="C9A227"/>
           </a:solidFill>
           <a:ln>
             <a:noFill/>
@@ -19938,7 +20084,7 @@
             <a:r>
               <a:rPr sz="1100" b="1">
                 <a:solidFill>
-                  <a:srgbClr val="2F3C7E"/>
+                  <a:srgbClr val="C9A227"/>
                 </a:solidFill>
                 <a:latin typeface="Helvetica Neue"/>
               </a:rPr>
@@ -19976,7 +20122,7 @@
                 </a:solidFill>
                 <a:latin typeface="Georgia"/>
               </a:rPr>
-              <a:t>71,780</a:t>
+              <a:t>86,371</a:t>
             </a:r>
           </a:p>
         </p:txBody>
@@ -20010,7 +20156,7 @@
                 </a:solidFill>
                 <a:latin typeface="Helvetica Neue"/>
               </a:rPr>
-              <a:t>89 posts · 1,548 likes</a:t>
+              <a:t>28 posts · 4,056 likes</a:t>
             </a:r>
           </a:p>
         </p:txBody>
@@ -20044,7 +20190,7 @@
                 </a:solidFill>
                 <a:latin typeface="Helvetica Neue"/>
               </a:rPr>
-              <a:t>807 average views per post</a:t>
+              <a:t>3,085 average views per post</a:t>
             </a:r>
           </a:p>
         </p:txBody>
@@ -20074,7 +20220,7 @@
             <a:r>
               <a:rPr sz="1100" b="1">
                 <a:solidFill>
-                  <a:srgbClr val="2F3C7E"/>
+                  <a:srgbClr val="C9A227"/>
                 </a:solidFill>
                 <a:latin typeface="Helvetica Neue"/>
               </a:rPr>
@@ -20142,7 +20288,7 @@
             <a:avLst/>
           </a:prstGeom>
           <a:solidFill>
-            <a:srgbClr val="2F3C7E"/>
+            <a:srgbClr val="C9A227"/>
           </a:solidFill>
           <a:ln>
             <a:noFill/>
@@ -20196,11 +20342,11 @@
             <a:r>
               <a:rPr sz="1000" b="1">
                 <a:solidFill>
-                  <a:srgbClr val="2F3C7E"/>
-                </a:solidFill>
-                <a:latin typeface="Helvetica Neue"/>
-              </a:rPr>
-              <a:t>#1  ·  FB  ·  11,811 views</a:t>
+                  <a:srgbClr val="C9A227"/>
+                </a:solidFill>
+                <a:latin typeface="Helvetica Neue"/>
+              </a:rPr>
+              <a:t>#1  ·  TT  ·  37,900 views</a:t>
             </a:r>
           </a:p>
         </p:txBody>
@@ -20234,7 +20380,7 @@
                 </a:solidFill>
                 <a:latin typeface="Helvetica Neue"/>
               </a:rPr>
-              <a:t>Chaos erupted at a council meeting when Ms. Rivera began screaming, refusing to calm down </a:t>
+              <a:t>Combat jobs aren't for everyone. See how your MOS determines deployment likelihood and wha</a:t>
             </a:r>
           </a:p>
         </p:txBody>
@@ -20298,7 +20444,7 @@
             <a:avLst/>
           </a:prstGeom>
           <a:solidFill>
-            <a:srgbClr val="2F3C7E"/>
+            <a:srgbClr val="C9A227"/>
           </a:solidFill>
           <a:ln>
             <a:noFill/>
@@ -20352,11 +20498,11 @@
             <a:r>
               <a:rPr sz="1000" b="1">
                 <a:solidFill>
-                  <a:srgbClr val="2F3C7E"/>
-                </a:solidFill>
-                <a:latin typeface="Helvetica Neue"/>
-              </a:rPr>
-              <a:t>#2  ·  FB  ·  5,812 views</a:t>
+                  <a:srgbClr val="C9A227"/>
+                </a:solidFill>
+                <a:latin typeface="Helvetica Neue"/>
+              </a:rPr>
+              <a:t>#2  ·  TT  ·  19,300 views</a:t>
             </a:r>
           </a:p>
         </p:txBody>
@@ -20390,7 +20536,7 @@
                 </a:solidFill>
                 <a:latin typeface="Helvetica Neue"/>
               </a:rPr>
-              <a:t>Tensions flared at the city council meeting as a woman repeatedly defied the mayor's reque</a:t>
+              <a:t>From Las Vegas to Battalion Commander: A journey fueled by college dreams and military opp</a:t>
             </a:r>
           </a:p>
         </p:txBody>
@@ -20454,7 +20600,7 @@
             <a:avLst/>
           </a:prstGeom>
           <a:solidFill>
-            <a:srgbClr val="2F3C7E"/>
+            <a:srgbClr val="C9A227"/>
           </a:solidFill>
           <a:ln>
             <a:noFill/>
@@ -20508,11 +20654,11 @@
             <a:r>
               <a:rPr sz="1000" b="1">
                 <a:solidFill>
-                  <a:srgbClr val="2F3C7E"/>
-                </a:solidFill>
-                <a:latin typeface="Helvetica Neue"/>
-              </a:rPr>
-              <a:t>#3  ·  IG  ·  4,046 views</a:t>
+                  <a:srgbClr val="C9A227"/>
+                </a:solidFill>
+                <a:latin typeface="Helvetica Neue"/>
+              </a:rPr>
+              <a:t>#3  ·  IG  ·  5,139 views</a:t>
             </a:r>
           </a:p>
         </p:txBody>
@@ -20546,7 +20692,7 @@
                 </a:solidFill>
                 <a:latin typeface="Helvetica Neue"/>
               </a:rPr>
-              <a:t>A candidate's DSA membership raises questions about their loyalties. Pledging to 'co-gover</a:t>
+              <a:t>Not everyone deployed sees combat, even with 20 years in. Your MOS matters. Logistics migh</a:t>
             </a:r>
           </a:p>
         </p:txBody>
@@ -20620,7 +20766,7 @@
             <a:r>
               <a:rPr sz="1000" b="1">
                 <a:solidFill>
-                  <a:srgbClr val="2F3C7E"/>
+                  <a:srgbClr val="C9A227"/>
                 </a:solidFill>
                 <a:latin typeface="Helvetica Neue"/>
               </a:rPr>
@@ -20658,7 +20804,7 @@
                 </a:solidFill>
                 <a:latin typeface="Helvetica Neue"/>
               </a:rPr>
-              <a:t>Modest reach. Fine as filler between heavy hitters, not a headline lane.</a:t>
+              <a:t>Strong performer. Keep investing — Military Service is a proven driver of reach.</a:t>
             </a:r>
           </a:p>
         </p:txBody>
@@ -21012,7 +21158,7 @@
                 </a:solidFill>
                 <a:latin typeface="Georgia"/>
               </a:rPr>
-              <a:t>63,567</a:t>
+              <a:t>63,740</a:t>
             </a:r>
           </a:p>
         </p:txBody>
@@ -21046,7 +21192,7 @@
                 </a:solidFill>
                 <a:latin typeface="Helvetica Neue"/>
               </a:rPr>
-              <a:t>25 posts · 1,479 likes</a:t>
+              <a:t>25 posts · 1,480 likes</a:t>
             </a:r>
           </a:p>
         </p:txBody>
@@ -21080,7 +21226,7 @@
                 </a:solidFill>
                 <a:latin typeface="Helvetica Neue"/>
               </a:rPr>
-              <a:t>2,543 average views per post</a:t>
+              <a:t>2,550 average views per post</a:t>
             </a:r>
           </a:p>
         </p:txBody>
@@ -21824,7 +21970,7 @@
                 </a:solidFill>
                 <a:latin typeface="Georgia"/>
               </a:rPr>
-              <a:t>Military Service</a:t>
+              <a:t>Community &amp; Culture</a:t>
             </a:r>
           </a:p>
         </p:txBody>
@@ -21858,7 +22004,7 @@
                 </a:solidFill>
                 <a:latin typeface="Helvetica Neue"/>
               </a:rPr>
-              <a:t>Army/JROTC/veteran interviews — the human side of military service (NOT policy — that's Legislation Watch).</a:t>
+              <a:t>Local color, events, pageantry, personal growth, city life.</a:t>
             </a:r>
           </a:p>
         </p:txBody>
@@ -21888,11 +22034,11 @@
             <a:r>
               <a:rPr sz="900" b="1">
                 <a:solidFill>
-                  <a:srgbClr val="C9A227"/>
-                </a:solidFill>
-                <a:latin typeface="Helvetica Neue"/>
-              </a:rPr>
-              <a:t>AUDIENCE (theoretical): Traditional / patriotic · Middle (40-55) + Older (55+), veterans + families</a:t>
+                  <a:srgbClr val="141833"/>
+                </a:solidFill>
+                <a:latin typeface="Helvetica Neue"/>
+              </a:rPr>
+              <a:t>AUDIENCE (theoretical): Local color · Broad, 30+</a:t>
             </a:r>
           </a:p>
         </p:txBody>
@@ -21956,7 +22102,7 @@
             <a:avLst/>
           </a:prstGeom>
           <a:solidFill>
-            <a:srgbClr val="C9A227"/>
+            <a:srgbClr val="141833"/>
           </a:solidFill>
           <a:ln>
             <a:noFill/>
@@ -22010,7 +22156,7 @@
             <a:r>
               <a:rPr sz="1100" b="1">
                 <a:solidFill>
-                  <a:srgbClr val="C9A227"/>
+                  <a:srgbClr val="141833"/>
                 </a:solidFill>
                 <a:latin typeface="Helvetica Neue"/>
               </a:rPr>
@@ -22048,7 +22194,7 @@
                 </a:solidFill>
                 <a:latin typeface="Georgia"/>
               </a:rPr>
-              <a:t>62,536</a:t>
+              <a:t>52,033</a:t>
             </a:r>
           </a:p>
         </p:txBody>
@@ -22082,7 +22228,7 @@
                 </a:solidFill>
                 <a:latin typeface="Helvetica Neue"/>
               </a:rPr>
-              <a:t>22 posts · 3,201 likes</a:t>
+              <a:t>58 posts · 1,013 likes</a:t>
             </a:r>
           </a:p>
         </p:txBody>
@@ -22116,7 +22262,7 @@
                 </a:solidFill>
                 <a:latin typeface="Helvetica Neue"/>
               </a:rPr>
-              <a:t>2,843 average views per post</a:t>
+              <a:t>897 average views per post</a:t>
             </a:r>
           </a:p>
         </p:txBody>
@@ -22146,7 +22292,7 @@
             <a:r>
               <a:rPr sz="1100" b="1">
                 <a:solidFill>
-                  <a:srgbClr val="C9A227"/>
+                  <a:srgbClr val="141833"/>
                 </a:solidFill>
                 <a:latin typeface="Helvetica Neue"/>
               </a:rPr>
@@ -22214,7 +22360,7 @@
             <a:avLst/>
           </a:prstGeom>
           <a:solidFill>
-            <a:srgbClr val="C9A227"/>
+            <a:srgbClr val="141833"/>
           </a:solidFill>
           <a:ln>
             <a:noFill/>
@@ -22268,11 +22414,11 @@
             <a:r>
               <a:rPr sz="1000" b="1">
                 <a:solidFill>
-                  <a:srgbClr val="C9A227"/>
-                </a:solidFill>
-                <a:latin typeface="Helvetica Neue"/>
-              </a:rPr>
-              <a:t>#1  ·  TT  ·  37,900 views</a:t>
+                  <a:srgbClr val="141833"/>
+                </a:solidFill>
+                <a:latin typeface="Helvetica Neue"/>
+              </a:rPr>
+              <a:t>#1  ·  FB  ·  4,676 views</a:t>
             </a:r>
           </a:p>
         </p:txBody>
@@ -22306,7 +22452,7 @@
                 </a:solidFill>
                 <a:latin typeface="Helvetica Neue"/>
               </a:rPr>
-              <a:t>Combat jobs aren't for everyone. See how your MOS determines deployment likelihood and wha</a:t>
+              <a:t>An emotional response to a Charlie Kirk &amp; LGBQT comment raises questions about a leader's </a:t>
             </a:r>
           </a:p>
         </p:txBody>
@@ -22370,7 +22516,7 @@
             <a:avLst/>
           </a:prstGeom>
           <a:solidFill>
-            <a:srgbClr val="C9A227"/>
+            <a:srgbClr val="141833"/>
           </a:solidFill>
           <a:ln>
             <a:noFill/>
@@ -22424,11 +22570,11 @@
             <a:r>
               <a:rPr sz="1000" b="1">
                 <a:solidFill>
-                  <a:srgbClr val="C9A227"/>
-                </a:solidFill>
-                <a:latin typeface="Helvetica Neue"/>
-              </a:rPr>
-              <a:t>#2  ·  IG  ·  5,139 views</a:t>
+                  <a:srgbClr val="141833"/>
+                </a:solidFill>
+                <a:latin typeface="Helvetica Neue"/>
+              </a:rPr>
+              <a:t>#2  ·  IG  ·  3,965 views</a:t>
             </a:r>
           </a:p>
         </p:txBody>
@@ -22462,7 +22608,7 @@
                 </a:solidFill>
                 <a:latin typeface="Helvetica Neue"/>
               </a:rPr>
-              <a:t>Not everyone deployed sees combat, even with 20 years in. Your MOS matters. Logistics migh</a:t>
+              <a:t>Following an outburst, she was removed as a Chamber of Commerce ambassador and rejected fo</a:t>
             </a:r>
           </a:p>
         </p:txBody>
@@ -22526,7 +22672,7 @@
             <a:avLst/>
           </a:prstGeom>
           <a:solidFill>
-            <a:srgbClr val="C9A227"/>
+            <a:srgbClr val="141833"/>
           </a:solidFill>
           <a:ln>
             <a:noFill/>
@@ -22580,11 +22726,11 @@
             <a:r>
               <a:rPr sz="1000" b="1">
                 <a:solidFill>
-                  <a:srgbClr val="C9A227"/>
-                </a:solidFill>
-                <a:latin typeface="Helvetica Neue"/>
-              </a:rPr>
-              <a:t>#3  ·  IG  ·  4,043 views</a:t>
+                  <a:srgbClr val="141833"/>
+                </a:solidFill>
+                <a:latin typeface="Helvetica Neue"/>
+              </a:rPr>
+              <a:t>#3  ·  TT  ·  3,520 views</a:t>
             </a:r>
           </a:p>
         </p:txBody>
@@ -22618,7 +22764,7 @@
                 </a:solidFill>
                 <a:latin typeface="Helvetica Neue"/>
               </a:rPr>
-              <a:t>Dreamed of college, but the cost was a barrier. Joined the Army, and they paid for everyth</a:t>
+              <a:t>Downey is a built-out city, but Sacramento requires us to build 6,100 new homes. Local off</a:t>
             </a:r>
           </a:p>
         </p:txBody>
@@ -22692,7 +22838,7 @@
             <a:r>
               <a:rPr sz="1000" b="1">
                 <a:solidFill>
-                  <a:srgbClr val="C9A227"/>
+                  <a:srgbClr val="141833"/>
                 </a:solidFill>
                 <a:latin typeface="Helvetica Neue"/>
               </a:rPr>
@@ -22730,7 +22876,7 @@
                 </a:solidFill>
                 <a:latin typeface="Helvetica Neue"/>
               </a:rPr>
-              <a:t>Solid mid-tier. Worth continued investment. Test scaling to see if it holds.</a:t>
+              <a:t>Modest reach. Fine as filler between heavy hitters, not a headline lane.</a:t>
             </a:r>
           </a:p>
         </p:txBody>

--- a/SPONSOR_CONTENT_REPORT.pptx
+++ b/SPONSOR_CONTENT_REPORT.pptx
@@ -3327,7 +3327,7 @@
                 </a:solidFill>
                 <a:latin typeface="Helvetica Neue"/>
               </a:rPr>
-              <a:t>Reporting window: Jun 8 → 2026-10-02</a:t>
+              <a:t>Reporting window: Jun 8 → 2026-10-09</a:t>
             </a:r>
           </a:p>
         </p:txBody>
@@ -3783,7 +3783,7 @@
                 </a:solidFill>
                 <a:latin typeface="Georgia"/>
               </a:rPr>
-              <a:t>47,677</a:t>
+              <a:t>51,024</a:t>
             </a:r>
           </a:p>
         </p:txBody>
@@ -3817,7 +3817,7 @@
                 </a:solidFill>
                 <a:latin typeface="Helvetica Neue"/>
               </a:rPr>
-              <a:t>18 posts · 2,941 likes</a:t>
+              <a:t>20 posts · 3,025 likes</a:t>
             </a:r>
           </a:p>
         </p:txBody>
@@ -3851,7 +3851,7 @@
                 </a:solidFill>
                 <a:latin typeface="Helvetica Neue"/>
               </a:rPr>
-              <a:t>2,649 average views per post</a:t>
+              <a:t>2,551 average views per post</a:t>
             </a:r>
           </a:p>
         </p:txBody>
@@ -4819,7 +4819,7 @@
                 </a:solidFill>
                 <a:latin typeface="Georgia"/>
               </a:rPr>
-              <a:t>28,047</a:t>
+              <a:t>28,967</a:t>
             </a:r>
           </a:p>
         </p:txBody>
@@ -4853,7 +4853,7 @@
                 </a:solidFill>
                 <a:latin typeface="Helvetica Neue"/>
               </a:rPr>
-              <a:t>30 posts · 619 likes</a:t>
+              <a:t>32 posts · 641 likes</a:t>
             </a:r>
           </a:p>
         </p:txBody>
@@ -4887,7 +4887,7 @@
                 </a:solidFill>
                 <a:latin typeface="Helvetica Neue"/>
               </a:rPr>
-              <a:t>935 average views per post</a:t>
+              <a:t>905 average views per post</a:t>
             </a:r>
           </a:p>
         </p:txBody>
@@ -5855,7 +5855,7 @@
                 </a:solidFill>
                 <a:latin typeface="Georgia"/>
               </a:rPr>
-              <a:t>8,253</a:t>
+              <a:t>8,255</a:t>
             </a:r>
           </a:p>
         </p:txBody>
@@ -7021,7 +7021,7 @@
                 </a:solidFill>
                 <a:latin typeface="Helvetica Neue"/>
               </a:rPr>
-              <a:t>72,107 views · 91 posts · 792 avg</a:t>
+              <a:t>73,709 views · 98 posts · 752 avg</a:t>
             </a:r>
           </a:p>
         </p:txBody>
@@ -7103,7 +7103,7 @@
         <p:spPr>
           <a:xfrm>
             <a:off x="4206240" y="2720339"/>
-            <a:ext cx="650231" cy="274320"/>
+            <a:ext cx="636099" cy="274320"/>
           </a:xfrm>
           <a:prstGeom prst="rect">
             <a:avLst/>
@@ -7146,7 +7146,7 @@
         </p:nvSpPr>
         <p:spPr>
           <a:xfrm>
-            <a:off x="4947911" y="2651759"/>
+            <a:off x="4933779" y="2651759"/>
             <a:ext cx="2286000" cy="251460"/>
           </a:xfrm>
           <a:prstGeom prst="rect">
@@ -7180,7 +7180,7 @@
         </p:nvSpPr>
         <p:spPr>
           <a:xfrm>
-            <a:off x="4947911" y="2857499"/>
+            <a:off x="4933779" y="2857499"/>
             <a:ext cx="4572000" cy="251460"/>
           </a:xfrm>
           <a:prstGeom prst="rect">
@@ -7249,7 +7249,7 @@
         <p:spPr>
           <a:xfrm>
             <a:off x="4206240" y="3223260"/>
-            <a:ext cx="518243" cy="274320"/>
+            <a:ext cx="506979" cy="274320"/>
           </a:xfrm>
           <a:prstGeom prst="rect">
             <a:avLst/>
@@ -7292,7 +7292,7 @@
         </p:nvSpPr>
         <p:spPr>
           <a:xfrm>
-            <a:off x="4815923" y="3154679"/>
+            <a:off x="4804659" y="3154679"/>
             <a:ext cx="2286000" cy="251460"/>
           </a:xfrm>
           <a:prstGeom prst="rect">
@@ -7326,7 +7326,7 @@
         </p:nvSpPr>
         <p:spPr>
           <a:xfrm>
-            <a:off x="4815923" y="3360420"/>
+            <a:off x="4804659" y="3360420"/>
             <a:ext cx="4572000" cy="251460"/>
           </a:xfrm>
           <a:prstGeom prst="rect">
@@ -7735,7 +7735,7 @@
                 </a:solidFill>
                 <a:latin typeface="Georgia"/>
               </a:rPr>
-              <a:t>72,107</a:t>
+              <a:t>73,709</a:t>
             </a:r>
           </a:p>
         </p:txBody>
@@ -7769,7 +7769,7 @@
                 </a:solidFill>
                 <a:latin typeface="Helvetica Neue"/>
               </a:rPr>
-              <a:t>91 posts · 1,590 likes</a:t>
+              <a:t>98 posts · 1,754 likes</a:t>
             </a:r>
           </a:p>
         </p:txBody>
@@ -7803,7 +7803,7 @@
                 </a:solidFill>
                 <a:latin typeface="Helvetica Neue"/>
               </a:rPr>
-              <a:t>792 average views per post</a:t>
+              <a:t>752 average views per post</a:t>
             </a:r>
           </a:p>
         </p:txBody>
@@ -10843,7 +10843,7 @@
                 </a:solidFill>
                 <a:latin typeface="Georgia"/>
               </a:rPr>
-              <a:t>47,677 views</a:t>
+              <a:t>51,024 views</a:t>
             </a:r>
           </a:p>
         </p:txBody>
@@ -10877,7 +10877,7 @@
                 </a:solidFill>
                 <a:latin typeface="Helvetica Neue"/>
               </a:rPr>
-              <a:t>18 posts · 2,649 avg views/post</a:t>
+              <a:t>20 posts · 2,551 avg views/post</a:t>
             </a:r>
           </a:p>
         </p:txBody>
@@ -11203,7 +11203,7 @@
                 </a:solidFill>
                 <a:latin typeface="Georgia"/>
               </a:rPr>
-              <a:t>94,410 views</a:t>
+              <a:t>99,197 views</a:t>
             </a:r>
           </a:p>
         </p:txBody>
@@ -11237,7 +11237,7 @@
                 </a:solidFill>
                 <a:latin typeface="Helvetica Neue"/>
               </a:rPr>
-              <a:t>62 posts · 1,523 avg views/post</a:t>
+              <a:t>63 posts · 1,575 avg views/post</a:t>
             </a:r>
           </a:p>
         </p:txBody>
@@ -11563,7 +11563,7 @@
                 </a:solidFill>
                 <a:latin typeface="Georgia"/>
               </a:rPr>
-              <a:t>86,371 views</a:t>
+              <a:t>92,638 views</a:t>
             </a:r>
           </a:p>
         </p:txBody>
@@ -11597,7 +11597,7 @@
                 </a:solidFill>
                 <a:latin typeface="Helvetica Neue"/>
               </a:rPr>
-              <a:t>28 posts · 3,085 avg views/post</a:t>
+              <a:t>34 posts · 2,725 avg views/post</a:t>
             </a:r>
           </a:p>
         </p:txBody>
@@ -13899,7 +13899,7 @@
                 </a:solidFill>
                 <a:latin typeface="Helvetica Neue"/>
               </a:rPr>
-              <a:t>2,520 avg views/post   ·   35 posts   ·   88,209 total</a:t>
+              <a:t>2,523 avg views/post   ·   35 posts   ·   88,312 total</a:t>
             </a:r>
           </a:p>
         </p:txBody>
@@ -14191,7 +14191,7 @@
                 </a:solidFill>
                 <a:latin typeface="Helvetica Neue"/>
               </a:rPr>
-              <a:t>1,247 avg views/post   ·   191 posts   ·   238,189 total</a:t>
+              <a:t>1,264 avg views/post   ·   200 posts   ·   252,755 total</a:t>
             </a:r>
           </a:p>
         </p:txBody>
@@ -16110,7 +16110,7 @@
                 </a:solidFill>
                 <a:latin typeface="Helvetica Neue"/>
               </a:rPr>
-              <a:t>250,607 views · 174 posts</a:t>
+              <a:t>280,258 views · 189 posts</a:t>
             </a:r>
           </a:p>
         </p:txBody>
@@ -16158,7 +16158,7 @@
         <p:spPr>
           <a:xfrm>
             <a:off x="4114800" y="2476968"/>
-            <a:ext cx="2342447" cy="128016"/>
+            <a:ext cx="2200825" cy="128016"/>
           </a:xfrm>
           <a:prstGeom prst="rect">
             <a:avLst/>
@@ -16201,7 +16201,7 @@
         </p:nvSpPr>
         <p:spPr>
           <a:xfrm>
-            <a:off x="6548687" y="2413312"/>
+            <a:off x="6407065" y="2413312"/>
             <a:ext cx="2286000" cy="291904"/>
           </a:xfrm>
           <a:prstGeom prst="rect">
@@ -16222,7 +16222,7 @@
                 </a:solidFill>
                 <a:latin typeface="Helvetica Neue"/>
               </a:rPr>
-              <a:t>94,410 views · 62 posts</a:t>
+              <a:t>99,197 views · 63 posts</a:t>
             </a:r>
           </a:p>
         </p:txBody>
@@ -16256,7 +16256,7 @@
                 </a:solidFill>
                 <a:latin typeface="Helvetica Neue"/>
               </a:rPr>
-              <a:t>Truth &amp; Scandal Reporting</a:t>
+              <a:t>Military Service</a:t>
             </a:r>
           </a:p>
         </p:txBody>
@@ -16270,7 +16270,119 @@
         <p:spPr>
           <a:xfrm>
             <a:off x="4114800" y="2768873"/>
-            <a:ext cx="2188592" cy="128016"/>
+            <a:ext cx="2055305" cy="128016"/>
+          </a:xfrm>
+          <a:prstGeom prst="rect">
+            <a:avLst/>
+          </a:prstGeom>
+          <a:solidFill>
+            <a:srgbClr val="C9A227"/>
+          </a:solidFill>
+          <a:ln>
+            <a:noFill/>
+          </a:ln>
+          <a:effectLst/>
+        </p:spPr>
+        <p:style>
+          <a:lnRef idx="1">
+            <a:schemeClr val="accent1"/>
+          </a:lnRef>
+          <a:fillRef idx="3">
+            <a:schemeClr val="accent1"/>
+          </a:fillRef>
+          <a:effectRef idx="2">
+            <a:schemeClr val="accent1"/>
+          </a:effectRef>
+          <a:fontRef idx="minor">
+            <a:schemeClr val="lt1"/>
+          </a:fontRef>
+        </p:style>
+        <p:txBody>
+          <a:bodyPr rtlCol="0" anchor="ctr"/>
+          <a:lstStyle/>
+          <a:p>
+            <a:pPr algn="ctr"/>
+          </a:p>
+        </p:txBody>
+      </p:sp>
+      <p:sp>
+        <p:nvSpPr>
+          <p:cNvPr id="14" name="TextBox 13"/>
+          <p:cNvSpPr txBox="1"/>
+          <p:nvPr/>
+        </p:nvSpPr>
+        <p:spPr>
+          <a:xfrm>
+            <a:off x="6261545" y="2705217"/>
+            <a:ext cx="2286000" cy="291904"/>
+          </a:xfrm>
+          <a:prstGeom prst="rect">
+            <a:avLst/>
+          </a:prstGeom>
+          <a:noFill/>
+        </p:spPr>
+        <p:txBody>
+          <a:bodyPr wrap="square" lIns="0" rIns="0" tIns="0" bIns="0">
+            <a:spAutoFit/>
+          </a:bodyPr>
+          <a:lstStyle/>
+          <a:p>
+            <a:r>
+              <a:rPr sz="900" b="0">
+                <a:solidFill>
+                  <a:srgbClr val="6B7082"/>
+                </a:solidFill>
+                <a:latin typeface="Helvetica Neue"/>
+              </a:rPr>
+              <a:t>92,638 views · 34 posts</a:t>
+            </a:r>
+          </a:p>
+        </p:txBody>
+      </p:sp>
+      <p:sp>
+        <p:nvSpPr>
+          <p:cNvPr id="15" name="TextBox 14"/>
+          <p:cNvSpPr txBox="1"/>
+          <p:nvPr/>
+        </p:nvSpPr>
+        <p:spPr>
+          <a:xfrm>
+            <a:off x="731520" y="2997121"/>
+            <a:ext cx="3200400" cy="291904"/>
+          </a:xfrm>
+          <a:prstGeom prst="rect">
+            <a:avLst/>
+          </a:prstGeom>
+          <a:noFill/>
+        </p:spPr>
+        <p:txBody>
+          <a:bodyPr wrap="square" lIns="0" rIns="0" tIns="0" bIns="0">
+            <a:spAutoFit/>
+          </a:bodyPr>
+          <a:lstStyle/>
+          <a:p>
+            <a:r>
+              <a:rPr sz="1100" b="1">
+                <a:solidFill>
+                  <a:srgbClr val="141833"/>
+                </a:solidFill>
+                <a:latin typeface="Helvetica Neue"/>
+              </a:rPr>
+              <a:t>Truth &amp; Scandal Reporting</a:t>
+            </a:r>
+          </a:p>
+        </p:txBody>
+      </p:sp>
+      <p:sp>
+        <p:nvSpPr>
+          <p:cNvPr id="16" name="Rectangle 15"/>
+          <p:cNvSpPr/>
+          <p:nvPr/>
+        </p:nvSpPr>
+        <p:spPr>
+          <a:xfrm>
+            <a:off x="4114800" y="3060778"/>
+            <a:ext cx="1959326" cy="128016"/>
           </a:xfrm>
           <a:prstGeom prst="rect">
             <a:avLst/>
@@ -16307,13 +16419,13 @@
       </p:sp>
       <p:sp>
         <p:nvSpPr>
-          <p:cNvPr id="14" name="TextBox 13"/>
-          <p:cNvSpPr txBox="1"/>
-          <p:nvPr/>
-        </p:nvSpPr>
-        <p:spPr>
-          <a:xfrm>
-            <a:off x="6394832" y="2705217"/>
+          <p:cNvPr id="17" name="TextBox 16"/>
+          <p:cNvSpPr txBox="1"/>
+          <p:nvPr/>
+        </p:nvSpPr>
+        <p:spPr>
+          <a:xfrm>
+            <a:off x="6165566" y="2997121"/>
             <a:ext cx="2286000" cy="291904"/>
           </a:xfrm>
           <a:prstGeom prst="rect">
@@ -16334,20 +16446,20 @@
                 </a:solidFill>
                 <a:latin typeface="Helvetica Neue"/>
               </a:rPr>
-              <a:t>88,209 views · 35 posts</a:t>
-            </a:r>
-          </a:p>
-        </p:txBody>
-      </p:sp>
-      <p:sp>
-        <p:nvSpPr>
-          <p:cNvPr id="15" name="TextBox 14"/>
-          <p:cNvSpPr txBox="1"/>
-          <p:nvPr/>
-        </p:nvSpPr>
-        <p:spPr>
-          <a:xfrm>
-            <a:off x="731520" y="2997121"/>
+              <a:t>88,312 views · 35 posts</a:t>
+            </a:r>
+          </a:p>
+        </p:txBody>
+      </p:sp>
+      <p:sp>
+        <p:nvSpPr>
+          <p:cNvPr id="18" name="TextBox 17"/>
+          <p:cNvSpPr txBox="1"/>
+          <p:nvPr/>
+        </p:nvSpPr>
+        <p:spPr>
+          <a:xfrm>
+            <a:off x="731520" y="3289026"/>
             <a:ext cx="3200400" cy="291904"/>
           </a:xfrm>
           <a:prstGeom prst="rect">
@@ -16368,21 +16480,357 @@
                 </a:solidFill>
                 <a:latin typeface="Helvetica Neue"/>
               </a:rPr>
-              <a:t>Military Service</a:t>
-            </a:r>
-          </a:p>
-        </p:txBody>
-      </p:sp>
-      <p:sp>
-        <p:nvSpPr>
-          <p:cNvPr id="16" name="Rectangle 15"/>
+              <a:t>Elections &amp; Judicial</a:t>
+            </a:r>
+          </a:p>
+        </p:txBody>
+      </p:sp>
+      <p:sp>
+        <p:nvSpPr>
+          <p:cNvPr id="19" name="Rectangle 18"/>
           <p:cNvSpPr/>
           <p:nvPr/>
         </p:nvSpPr>
         <p:spPr>
           <a:xfrm>
-            <a:off x="4114800" y="3060778"/>
-            <a:ext cx="2142988" cy="128016"/>
+            <a:off x="4114800" y="3352682"/>
+            <a:ext cx="1635338" cy="128016"/>
+          </a:xfrm>
+          <a:prstGeom prst="rect">
+            <a:avLst/>
+          </a:prstGeom>
+          <a:solidFill>
+            <a:srgbClr val="2F3C7E"/>
+          </a:solidFill>
+          <a:ln>
+            <a:noFill/>
+          </a:ln>
+          <a:effectLst/>
+        </p:spPr>
+        <p:style>
+          <a:lnRef idx="1">
+            <a:schemeClr val="accent1"/>
+          </a:lnRef>
+          <a:fillRef idx="3">
+            <a:schemeClr val="accent1"/>
+          </a:fillRef>
+          <a:effectRef idx="2">
+            <a:schemeClr val="accent1"/>
+          </a:effectRef>
+          <a:fontRef idx="minor">
+            <a:schemeClr val="lt1"/>
+          </a:fontRef>
+        </p:style>
+        <p:txBody>
+          <a:bodyPr rtlCol="0" anchor="ctr"/>
+          <a:lstStyle/>
+          <a:p>
+            <a:pPr algn="ctr"/>
+          </a:p>
+        </p:txBody>
+      </p:sp>
+      <p:sp>
+        <p:nvSpPr>
+          <p:cNvPr id="20" name="TextBox 19"/>
+          <p:cNvSpPr txBox="1"/>
+          <p:nvPr/>
+        </p:nvSpPr>
+        <p:spPr>
+          <a:xfrm>
+            <a:off x="5841578" y="3289026"/>
+            <a:ext cx="2286000" cy="291904"/>
+          </a:xfrm>
+          <a:prstGeom prst="rect">
+            <a:avLst/>
+          </a:prstGeom>
+          <a:noFill/>
+        </p:spPr>
+        <p:txBody>
+          <a:bodyPr wrap="square" lIns="0" rIns="0" tIns="0" bIns="0">
+            <a:spAutoFit/>
+          </a:bodyPr>
+          <a:lstStyle/>
+          <a:p>
+            <a:r>
+              <a:rPr sz="900" b="0">
+                <a:solidFill>
+                  <a:srgbClr val="6B7082"/>
+                </a:solidFill>
+                <a:latin typeface="Helvetica Neue"/>
+              </a:rPr>
+              <a:t>73,709 views · 98 posts</a:t>
+            </a:r>
+          </a:p>
+        </p:txBody>
+      </p:sp>
+      <p:sp>
+        <p:nvSpPr>
+          <p:cNvPr id="21" name="TextBox 20"/>
+          <p:cNvSpPr txBox="1"/>
+          <p:nvPr/>
+        </p:nvSpPr>
+        <p:spPr>
+          <a:xfrm>
+            <a:off x="731520" y="3580931"/>
+            <a:ext cx="3200400" cy="291904"/>
+          </a:xfrm>
+          <a:prstGeom prst="rect">
+            <a:avLst/>
+          </a:prstGeom>
+          <a:noFill/>
+        </p:spPr>
+        <p:txBody>
+          <a:bodyPr wrap="square" lIns="0" rIns="0" tIns="0" bIns="0">
+            <a:spAutoFit/>
+          </a:bodyPr>
+          <a:lstStyle/>
+          <a:p>
+            <a:r>
+              <a:rPr sz="1100" b="1">
+                <a:solidFill>
+                  <a:srgbClr val="141833"/>
+                </a:solidFill>
+                <a:latin typeface="Helvetica Neue"/>
+              </a:rPr>
+              <a:t>FIFA / World Cup</a:t>
+            </a:r>
+          </a:p>
+        </p:txBody>
+      </p:sp>
+      <p:sp>
+        <p:nvSpPr>
+          <p:cNvPr id="22" name="Rectangle 21"/>
+          <p:cNvSpPr/>
+          <p:nvPr/>
+        </p:nvSpPr>
+        <p:spPr>
+          <a:xfrm>
+            <a:off x="4114800" y="3644587"/>
+            <a:ext cx="1414960" cy="128016"/>
+          </a:xfrm>
+          <a:prstGeom prst="rect">
+            <a:avLst/>
+          </a:prstGeom>
+          <a:solidFill>
+            <a:srgbClr val="6B7082"/>
+          </a:solidFill>
+          <a:ln>
+            <a:noFill/>
+          </a:ln>
+          <a:effectLst/>
+        </p:spPr>
+        <p:style>
+          <a:lnRef idx="1">
+            <a:schemeClr val="accent1"/>
+          </a:lnRef>
+          <a:fillRef idx="3">
+            <a:schemeClr val="accent1"/>
+          </a:fillRef>
+          <a:effectRef idx="2">
+            <a:schemeClr val="accent1"/>
+          </a:effectRef>
+          <a:fontRef idx="minor">
+            <a:schemeClr val="lt1"/>
+          </a:fontRef>
+        </p:style>
+        <p:txBody>
+          <a:bodyPr rtlCol="0" anchor="ctr"/>
+          <a:lstStyle/>
+          <a:p>
+            <a:pPr algn="ctr"/>
+          </a:p>
+        </p:txBody>
+      </p:sp>
+      <p:sp>
+        <p:nvSpPr>
+          <p:cNvPr id="23" name="TextBox 22"/>
+          <p:cNvSpPr txBox="1"/>
+          <p:nvPr/>
+        </p:nvSpPr>
+        <p:spPr>
+          <a:xfrm>
+            <a:off x="5621200" y="3580931"/>
+            <a:ext cx="2286000" cy="291904"/>
+          </a:xfrm>
+          <a:prstGeom prst="rect">
+            <a:avLst/>
+          </a:prstGeom>
+          <a:noFill/>
+        </p:spPr>
+        <p:txBody>
+          <a:bodyPr wrap="square" lIns="0" rIns="0" tIns="0" bIns="0">
+            <a:spAutoFit/>
+          </a:bodyPr>
+          <a:lstStyle/>
+          <a:p>
+            <a:r>
+              <a:rPr sz="900" b="0">
+                <a:solidFill>
+                  <a:srgbClr val="6B7082"/>
+                </a:solidFill>
+                <a:latin typeface="Helvetica Neue"/>
+              </a:rPr>
+              <a:t>63,776 views · 25 posts</a:t>
+            </a:r>
+          </a:p>
+        </p:txBody>
+      </p:sp>
+      <p:sp>
+        <p:nvSpPr>
+          <p:cNvPr id="24" name="TextBox 23"/>
+          <p:cNvSpPr txBox="1"/>
+          <p:nvPr/>
+        </p:nvSpPr>
+        <p:spPr>
+          <a:xfrm>
+            <a:off x="731520" y="3872835"/>
+            <a:ext cx="3200400" cy="291904"/>
+          </a:xfrm>
+          <a:prstGeom prst="rect">
+            <a:avLst/>
+          </a:prstGeom>
+          <a:noFill/>
+        </p:spPr>
+        <p:txBody>
+          <a:bodyPr wrap="square" lIns="0" rIns="0" tIns="0" bIns="0">
+            <a:spAutoFit/>
+          </a:bodyPr>
+          <a:lstStyle/>
+          <a:p>
+            <a:r>
+              <a:rPr sz="1100" b="1">
+                <a:solidFill>
+                  <a:srgbClr val="141833"/>
+                </a:solidFill>
+                <a:latin typeface="Helvetica Neue"/>
+              </a:rPr>
+              <a:t>Community &amp; Culture</a:t>
+            </a:r>
+          </a:p>
+        </p:txBody>
+      </p:sp>
+      <p:sp>
+        <p:nvSpPr>
+          <p:cNvPr id="25" name="Rectangle 24"/>
+          <p:cNvSpPr/>
+          <p:nvPr/>
+        </p:nvSpPr>
+        <p:spPr>
+          <a:xfrm>
+            <a:off x="4114800" y="3936491"/>
+            <a:ext cx="1276672" cy="128016"/>
+          </a:xfrm>
+          <a:prstGeom prst="rect">
+            <a:avLst/>
+          </a:prstGeom>
+          <a:solidFill>
+            <a:srgbClr val="141833"/>
+          </a:solidFill>
+          <a:ln>
+            <a:noFill/>
+          </a:ln>
+          <a:effectLst/>
+        </p:spPr>
+        <p:style>
+          <a:lnRef idx="1">
+            <a:schemeClr val="accent1"/>
+          </a:lnRef>
+          <a:fillRef idx="3">
+            <a:schemeClr val="accent1"/>
+          </a:fillRef>
+          <a:effectRef idx="2">
+            <a:schemeClr val="accent1"/>
+          </a:effectRef>
+          <a:fontRef idx="minor">
+            <a:schemeClr val="lt1"/>
+          </a:fontRef>
+        </p:style>
+        <p:txBody>
+          <a:bodyPr rtlCol="0" anchor="ctr"/>
+          <a:lstStyle/>
+          <a:p>
+            <a:pPr algn="ctr"/>
+          </a:p>
+        </p:txBody>
+      </p:sp>
+      <p:sp>
+        <p:nvSpPr>
+          <p:cNvPr id="26" name="TextBox 25"/>
+          <p:cNvSpPr txBox="1"/>
+          <p:nvPr/>
+        </p:nvSpPr>
+        <p:spPr>
+          <a:xfrm>
+            <a:off x="5482912" y="3872835"/>
+            <a:ext cx="2286000" cy="291904"/>
+          </a:xfrm>
+          <a:prstGeom prst="rect">
+            <a:avLst/>
+          </a:prstGeom>
+          <a:noFill/>
+        </p:spPr>
+        <p:txBody>
+          <a:bodyPr wrap="square" lIns="0" rIns="0" tIns="0" bIns="0">
+            <a:spAutoFit/>
+          </a:bodyPr>
+          <a:lstStyle/>
+          <a:p>
+            <a:r>
+              <a:rPr sz="900" b="0">
+                <a:solidFill>
+                  <a:srgbClr val="6B7082"/>
+                </a:solidFill>
+                <a:latin typeface="Helvetica Neue"/>
+              </a:rPr>
+              <a:t>57,543 views · 62 posts</a:t>
+            </a:r>
+          </a:p>
+        </p:txBody>
+      </p:sp>
+      <p:sp>
+        <p:nvSpPr>
+          <p:cNvPr id="27" name="TextBox 26"/>
+          <p:cNvSpPr txBox="1"/>
+          <p:nvPr/>
+        </p:nvSpPr>
+        <p:spPr>
+          <a:xfrm>
+            <a:off x="731520" y="4164740"/>
+            <a:ext cx="3200400" cy="291904"/>
+          </a:xfrm>
+          <a:prstGeom prst="rect">
+            <a:avLst/>
+          </a:prstGeom>
+          <a:noFill/>
+        </p:spPr>
+        <p:txBody>
+          <a:bodyPr wrap="square" lIns="0" rIns="0" tIns="0" bIns="0">
+            <a:spAutoFit/>
+          </a:bodyPr>
+          <a:lstStyle/>
+          <a:p>
+            <a:r>
+              <a:rPr sz="1100" b="1">
+                <a:solidFill>
+                  <a:srgbClr val="141833"/>
+                </a:solidFill>
+                <a:latin typeface="Helvetica Neue"/>
+              </a:rPr>
+              <a:t>Downtown Development</a:t>
+            </a:r>
+          </a:p>
+        </p:txBody>
+      </p:sp>
+      <p:sp>
+        <p:nvSpPr>
+          <p:cNvPr id="28" name="Rectangle 27"/>
+          <p:cNvSpPr/>
+          <p:nvPr/>
+        </p:nvSpPr>
+        <p:spPr>
+          <a:xfrm>
+            <a:off x="4114800" y="4228396"/>
+            <a:ext cx="1132039" cy="128016"/>
           </a:xfrm>
           <a:prstGeom prst="rect">
             <a:avLst/>
@@ -16419,13 +16867,13 @@
       </p:sp>
       <p:sp>
         <p:nvSpPr>
-          <p:cNvPr id="17" name="TextBox 16"/>
-          <p:cNvSpPr txBox="1"/>
-          <p:nvPr/>
-        </p:nvSpPr>
-        <p:spPr>
-          <a:xfrm>
-            <a:off x="6349228" y="2997121"/>
+          <p:cNvPr id="29" name="TextBox 28"/>
+          <p:cNvSpPr txBox="1"/>
+          <p:nvPr/>
+        </p:nvSpPr>
+        <p:spPr>
+          <a:xfrm>
+            <a:off x="5338279" y="4164740"/>
             <a:ext cx="2286000" cy="291904"/>
           </a:xfrm>
           <a:prstGeom prst="rect">
@@ -16446,20 +16894,20 @@
                 </a:solidFill>
                 <a:latin typeface="Helvetica Neue"/>
               </a:rPr>
-              <a:t>86,371 views · 28 posts</a:t>
-            </a:r>
-          </a:p>
-        </p:txBody>
-      </p:sp>
-      <p:sp>
-        <p:nvSpPr>
-          <p:cNvPr id="18" name="TextBox 17"/>
-          <p:cNvSpPr txBox="1"/>
-          <p:nvPr/>
-        </p:nvSpPr>
-        <p:spPr>
-          <a:xfrm>
-            <a:off x="731520" y="3289026"/>
+              <a:t>51,024 views · 20 posts</a:t>
+            </a:r>
+          </a:p>
+        </p:txBody>
+      </p:sp>
+      <p:sp>
+        <p:nvSpPr>
+          <p:cNvPr id="30" name="TextBox 29"/>
+          <p:cNvSpPr txBox="1"/>
+          <p:nvPr/>
+        </p:nvSpPr>
+        <p:spPr>
+          <a:xfrm>
+            <a:off x="731520" y="4456644"/>
             <a:ext cx="3200400" cy="291904"/>
           </a:xfrm>
           <a:prstGeom prst="rect">
@@ -16480,21 +16928,357 @@
                 </a:solidFill>
                 <a:latin typeface="Helvetica Neue"/>
               </a:rPr>
-              <a:t>Elections &amp; Judicial</a:t>
-            </a:r>
-          </a:p>
-        </p:txBody>
-      </p:sp>
-      <p:sp>
-        <p:nvSpPr>
-          <p:cNvPr id="19" name="Rectangle 18"/>
+              <a:t>Political Individual Highlights</a:t>
+            </a:r>
+          </a:p>
+        </p:txBody>
+      </p:sp>
+      <p:sp>
+        <p:nvSpPr>
+          <p:cNvPr id="31" name="Rectangle 30"/>
           <p:cNvSpPr/>
           <p:nvPr/>
         </p:nvSpPr>
         <p:spPr>
           <a:xfrm>
-            <a:off x="4114800" y="3352682"/>
-            <a:ext cx="1789078" cy="128016"/>
+            <a:off x="4114800" y="4520301"/>
+            <a:ext cx="642673" cy="128016"/>
+          </a:xfrm>
+          <a:prstGeom prst="rect">
+            <a:avLst/>
+          </a:prstGeom>
+          <a:solidFill>
+            <a:srgbClr val="2E86AB"/>
+          </a:solidFill>
+          <a:ln>
+            <a:noFill/>
+          </a:ln>
+          <a:effectLst/>
+        </p:spPr>
+        <p:style>
+          <a:lnRef idx="1">
+            <a:schemeClr val="accent1"/>
+          </a:lnRef>
+          <a:fillRef idx="3">
+            <a:schemeClr val="accent1"/>
+          </a:fillRef>
+          <a:effectRef idx="2">
+            <a:schemeClr val="accent1"/>
+          </a:effectRef>
+          <a:fontRef idx="minor">
+            <a:schemeClr val="lt1"/>
+          </a:fontRef>
+        </p:style>
+        <p:txBody>
+          <a:bodyPr rtlCol="0" anchor="ctr"/>
+          <a:lstStyle/>
+          <a:p>
+            <a:pPr algn="ctr"/>
+          </a:p>
+        </p:txBody>
+      </p:sp>
+      <p:sp>
+        <p:nvSpPr>
+          <p:cNvPr id="32" name="TextBox 31"/>
+          <p:cNvSpPr txBox="1"/>
+          <p:nvPr/>
+        </p:nvSpPr>
+        <p:spPr>
+          <a:xfrm>
+            <a:off x="4848913" y="4456644"/>
+            <a:ext cx="2286000" cy="291904"/>
+          </a:xfrm>
+          <a:prstGeom prst="rect">
+            <a:avLst/>
+          </a:prstGeom>
+          <a:noFill/>
+        </p:spPr>
+        <p:txBody>
+          <a:bodyPr wrap="square" lIns="0" rIns="0" tIns="0" bIns="0">
+            <a:spAutoFit/>
+          </a:bodyPr>
+          <a:lstStyle/>
+          <a:p>
+            <a:r>
+              <a:rPr sz="900" b="0">
+                <a:solidFill>
+                  <a:srgbClr val="6B7082"/>
+                </a:solidFill>
+                <a:latin typeface="Helvetica Neue"/>
+              </a:rPr>
+              <a:t>28,967 views · 32 posts</a:t>
+            </a:r>
+          </a:p>
+        </p:txBody>
+      </p:sp>
+      <p:sp>
+        <p:nvSpPr>
+          <p:cNvPr id="33" name="TextBox 32"/>
+          <p:cNvSpPr txBox="1"/>
+          <p:nvPr/>
+        </p:nvSpPr>
+        <p:spPr>
+          <a:xfrm>
+            <a:off x="731520" y="4748549"/>
+            <a:ext cx="3200400" cy="291904"/>
+          </a:xfrm>
+          <a:prstGeom prst="rect">
+            <a:avLst/>
+          </a:prstGeom>
+          <a:noFill/>
+        </p:spPr>
+        <p:txBody>
+          <a:bodyPr wrap="square" lIns="0" rIns="0" tIns="0" bIns="0">
+            <a:spAutoFit/>
+          </a:bodyPr>
+          <a:lstStyle/>
+          <a:p>
+            <a:r>
+              <a:rPr sz="1100" b="1">
+                <a:solidFill>
+                  <a:srgbClr val="141833"/>
+                </a:solidFill>
+                <a:latin typeface="Helvetica Neue"/>
+              </a:rPr>
+              <a:t>Resident Highlights</a:t>
+            </a:r>
+          </a:p>
+        </p:txBody>
+      </p:sp>
+      <p:sp>
+        <p:nvSpPr>
+          <p:cNvPr id="34" name="Rectangle 33"/>
+          <p:cNvSpPr/>
+          <p:nvPr/>
+        </p:nvSpPr>
+        <p:spPr>
+          <a:xfrm>
+            <a:off x="4114800" y="4812205"/>
+            <a:ext cx="183148" cy="128016"/>
+          </a:xfrm>
+          <a:prstGeom prst="rect">
+            <a:avLst/>
+          </a:prstGeom>
+          <a:solidFill>
+            <a:srgbClr val="1B7A43"/>
+          </a:solidFill>
+          <a:ln>
+            <a:noFill/>
+          </a:ln>
+          <a:effectLst/>
+        </p:spPr>
+        <p:style>
+          <a:lnRef idx="1">
+            <a:schemeClr val="accent1"/>
+          </a:lnRef>
+          <a:fillRef idx="3">
+            <a:schemeClr val="accent1"/>
+          </a:fillRef>
+          <a:effectRef idx="2">
+            <a:schemeClr val="accent1"/>
+          </a:effectRef>
+          <a:fontRef idx="minor">
+            <a:schemeClr val="lt1"/>
+          </a:fontRef>
+        </p:style>
+        <p:txBody>
+          <a:bodyPr rtlCol="0" anchor="ctr"/>
+          <a:lstStyle/>
+          <a:p>
+            <a:pPr algn="ctr"/>
+          </a:p>
+        </p:txBody>
+      </p:sp>
+      <p:sp>
+        <p:nvSpPr>
+          <p:cNvPr id="35" name="TextBox 34"/>
+          <p:cNvSpPr txBox="1"/>
+          <p:nvPr/>
+        </p:nvSpPr>
+        <p:spPr>
+          <a:xfrm>
+            <a:off x="4389388" y="4748549"/>
+            <a:ext cx="2286000" cy="291904"/>
+          </a:xfrm>
+          <a:prstGeom prst="rect">
+            <a:avLst/>
+          </a:prstGeom>
+          <a:noFill/>
+        </p:spPr>
+        <p:txBody>
+          <a:bodyPr wrap="square" lIns="0" rIns="0" tIns="0" bIns="0">
+            <a:spAutoFit/>
+          </a:bodyPr>
+          <a:lstStyle/>
+          <a:p>
+            <a:r>
+              <a:rPr sz="900" b="0">
+                <a:solidFill>
+                  <a:srgbClr val="6B7082"/>
+                </a:solidFill>
+                <a:latin typeface="Helvetica Neue"/>
+              </a:rPr>
+              <a:t>8,255 views · 8 posts</a:t>
+            </a:r>
+          </a:p>
+        </p:txBody>
+      </p:sp>
+      <p:sp>
+        <p:nvSpPr>
+          <p:cNvPr id="36" name="TextBox 35"/>
+          <p:cNvSpPr txBox="1"/>
+          <p:nvPr/>
+        </p:nvSpPr>
+        <p:spPr>
+          <a:xfrm>
+            <a:off x="731520" y="5040454"/>
+            <a:ext cx="3200400" cy="291904"/>
+          </a:xfrm>
+          <a:prstGeom prst="rect">
+            <a:avLst/>
+          </a:prstGeom>
+          <a:noFill/>
+        </p:spPr>
+        <p:txBody>
+          <a:bodyPr wrap="square" lIns="0" rIns="0" tIns="0" bIns="0">
+            <a:spAutoFit/>
+          </a:bodyPr>
+          <a:lstStyle/>
+          <a:p>
+            <a:r>
+              <a:rPr sz="1100" b="1">
+                <a:solidFill>
+                  <a:srgbClr val="141833"/>
+                </a:solidFill>
+                <a:latin typeface="Helvetica Neue"/>
+              </a:rPr>
+              <a:t>American Pride</a:t>
+            </a:r>
+          </a:p>
+        </p:txBody>
+      </p:sp>
+      <p:sp>
+        <p:nvSpPr>
+          <p:cNvPr id="37" name="Rectangle 36"/>
+          <p:cNvSpPr/>
+          <p:nvPr/>
+        </p:nvSpPr>
+        <p:spPr>
+          <a:xfrm>
+            <a:off x="4114800" y="5104110"/>
+            <a:ext cx="172366" cy="128016"/>
+          </a:xfrm>
+          <a:prstGeom prst="rect">
+            <a:avLst/>
+          </a:prstGeom>
+          <a:solidFill>
+            <a:srgbClr val="990011"/>
+          </a:solidFill>
+          <a:ln>
+            <a:noFill/>
+          </a:ln>
+          <a:effectLst/>
+        </p:spPr>
+        <p:style>
+          <a:lnRef idx="1">
+            <a:schemeClr val="accent1"/>
+          </a:lnRef>
+          <a:fillRef idx="3">
+            <a:schemeClr val="accent1"/>
+          </a:fillRef>
+          <a:effectRef idx="2">
+            <a:schemeClr val="accent1"/>
+          </a:effectRef>
+          <a:fontRef idx="minor">
+            <a:schemeClr val="lt1"/>
+          </a:fontRef>
+        </p:style>
+        <p:txBody>
+          <a:bodyPr rtlCol="0" anchor="ctr"/>
+          <a:lstStyle/>
+          <a:p>
+            <a:pPr algn="ctr"/>
+          </a:p>
+        </p:txBody>
+      </p:sp>
+      <p:sp>
+        <p:nvSpPr>
+          <p:cNvPr id="38" name="TextBox 37"/>
+          <p:cNvSpPr txBox="1"/>
+          <p:nvPr/>
+        </p:nvSpPr>
+        <p:spPr>
+          <a:xfrm>
+            <a:off x="4378606" y="5040454"/>
+            <a:ext cx="2286000" cy="291904"/>
+          </a:xfrm>
+          <a:prstGeom prst="rect">
+            <a:avLst/>
+          </a:prstGeom>
+          <a:noFill/>
+        </p:spPr>
+        <p:txBody>
+          <a:bodyPr wrap="square" lIns="0" rIns="0" tIns="0" bIns="0">
+            <a:spAutoFit/>
+          </a:bodyPr>
+          <a:lstStyle/>
+          <a:p>
+            <a:r>
+              <a:rPr sz="900" b="0">
+                <a:solidFill>
+                  <a:srgbClr val="6B7082"/>
+                </a:solidFill>
+                <a:latin typeface="Helvetica Neue"/>
+              </a:rPr>
+              <a:t>7,769 views · 15 posts</a:t>
+            </a:r>
+          </a:p>
+        </p:txBody>
+      </p:sp>
+      <p:sp>
+        <p:nvSpPr>
+          <p:cNvPr id="39" name="TextBox 38"/>
+          <p:cNvSpPr txBox="1"/>
+          <p:nvPr/>
+        </p:nvSpPr>
+        <p:spPr>
+          <a:xfrm>
+            <a:off x="731520" y="5332358"/>
+            <a:ext cx="3200400" cy="291904"/>
+          </a:xfrm>
+          <a:prstGeom prst="rect">
+            <a:avLst/>
+          </a:prstGeom>
+          <a:noFill/>
+        </p:spPr>
+        <p:txBody>
+          <a:bodyPr wrap="square" lIns="0" rIns="0" tIns="0" bIns="0">
+            <a:spAutoFit/>
+          </a:bodyPr>
+          <a:lstStyle/>
+          <a:p>
+            <a:r>
+              <a:rPr sz="1100" b="1">
+                <a:solidFill>
+                  <a:srgbClr val="141833"/>
+                </a:solidFill>
+                <a:latin typeface="Helvetica Neue"/>
+              </a:rPr>
+              <a:t>Legislation &amp; Policy Watch</a:t>
+            </a:r>
+          </a:p>
+        </p:txBody>
+      </p:sp>
+      <p:sp>
+        <p:nvSpPr>
+          <p:cNvPr id="40" name="Rectangle 39"/>
+          <p:cNvSpPr/>
+          <p:nvPr/>
+        </p:nvSpPr>
+        <p:spPr>
+          <a:xfrm>
+            <a:off x="4114800" y="5396015"/>
+            <a:ext cx="137378" cy="128016"/>
           </a:xfrm>
           <a:prstGeom prst="rect">
             <a:avLst/>
@@ -16531,797 +17315,13 @@
       </p:sp>
       <p:sp>
         <p:nvSpPr>
-          <p:cNvPr id="20" name="TextBox 19"/>
-          <p:cNvSpPr txBox="1"/>
-          <p:nvPr/>
-        </p:nvSpPr>
-        <p:spPr>
-          <a:xfrm>
-            <a:off x="5995318" y="3289026"/>
-            <a:ext cx="2286000" cy="291904"/>
-          </a:xfrm>
-          <a:prstGeom prst="rect">
-            <a:avLst/>
-          </a:prstGeom>
-          <a:noFill/>
-        </p:spPr>
-        <p:txBody>
-          <a:bodyPr wrap="square" lIns="0" rIns="0" tIns="0" bIns="0">
-            <a:spAutoFit/>
-          </a:bodyPr>
-          <a:lstStyle/>
-          <a:p>
-            <a:r>
-              <a:rPr sz="900" b="0">
-                <a:solidFill>
-                  <a:srgbClr val="6B7082"/>
-                </a:solidFill>
-                <a:latin typeface="Helvetica Neue"/>
-              </a:rPr>
-              <a:t>72,107 views · 91 posts</a:t>
-            </a:r>
-          </a:p>
-        </p:txBody>
-      </p:sp>
-      <p:sp>
-        <p:nvSpPr>
-          <p:cNvPr id="21" name="TextBox 20"/>
-          <p:cNvSpPr txBox="1"/>
-          <p:nvPr/>
-        </p:nvSpPr>
-        <p:spPr>
-          <a:xfrm>
-            <a:off x="731520" y="3580931"/>
-            <a:ext cx="3200400" cy="291904"/>
-          </a:xfrm>
-          <a:prstGeom prst="rect">
-            <a:avLst/>
-          </a:prstGeom>
-          <a:noFill/>
-        </p:spPr>
-        <p:txBody>
-          <a:bodyPr wrap="square" lIns="0" rIns="0" tIns="0" bIns="0">
-            <a:spAutoFit/>
-          </a:bodyPr>
-          <a:lstStyle/>
-          <a:p>
-            <a:r>
-              <a:rPr sz="1100" b="1">
-                <a:solidFill>
-                  <a:srgbClr val="141833"/>
-                </a:solidFill>
-                <a:latin typeface="Helvetica Neue"/>
-              </a:rPr>
-              <a:t>FIFA / World Cup</a:t>
-            </a:r>
-          </a:p>
-        </p:txBody>
-      </p:sp>
-      <p:sp>
-        <p:nvSpPr>
-          <p:cNvPr id="22" name="Rectangle 21"/>
-          <p:cNvSpPr/>
-          <p:nvPr/>
-        </p:nvSpPr>
-        <p:spPr>
-          <a:xfrm>
-            <a:off x="4114800" y="3644587"/>
-            <a:ext cx="1581481" cy="128016"/>
-          </a:xfrm>
-          <a:prstGeom prst="rect">
-            <a:avLst/>
-          </a:prstGeom>
-          <a:solidFill>
-            <a:srgbClr val="6B7082"/>
-          </a:solidFill>
-          <a:ln>
-            <a:noFill/>
-          </a:ln>
-          <a:effectLst/>
-        </p:spPr>
-        <p:style>
-          <a:lnRef idx="1">
-            <a:schemeClr val="accent1"/>
-          </a:lnRef>
-          <a:fillRef idx="3">
-            <a:schemeClr val="accent1"/>
-          </a:fillRef>
-          <a:effectRef idx="2">
-            <a:schemeClr val="accent1"/>
-          </a:effectRef>
-          <a:fontRef idx="minor">
-            <a:schemeClr val="lt1"/>
-          </a:fontRef>
-        </p:style>
-        <p:txBody>
-          <a:bodyPr rtlCol="0" anchor="ctr"/>
-          <a:lstStyle/>
-          <a:p>
-            <a:pPr algn="ctr"/>
-          </a:p>
-        </p:txBody>
-      </p:sp>
-      <p:sp>
-        <p:nvSpPr>
-          <p:cNvPr id="23" name="TextBox 22"/>
-          <p:cNvSpPr txBox="1"/>
-          <p:nvPr/>
-        </p:nvSpPr>
-        <p:spPr>
-          <a:xfrm>
-            <a:off x="5787721" y="3580931"/>
-            <a:ext cx="2286000" cy="291904"/>
-          </a:xfrm>
-          <a:prstGeom prst="rect">
-            <a:avLst/>
-          </a:prstGeom>
-          <a:noFill/>
-        </p:spPr>
-        <p:txBody>
-          <a:bodyPr wrap="square" lIns="0" rIns="0" tIns="0" bIns="0">
-            <a:spAutoFit/>
-          </a:bodyPr>
-          <a:lstStyle/>
-          <a:p>
-            <a:r>
-              <a:rPr sz="900" b="0">
-                <a:solidFill>
-                  <a:srgbClr val="6B7082"/>
-                </a:solidFill>
-                <a:latin typeface="Helvetica Neue"/>
-              </a:rPr>
-              <a:t>63,740 views · 25 posts</a:t>
-            </a:r>
-          </a:p>
-        </p:txBody>
-      </p:sp>
-      <p:sp>
-        <p:nvSpPr>
-          <p:cNvPr id="24" name="TextBox 23"/>
-          <p:cNvSpPr txBox="1"/>
-          <p:nvPr/>
-        </p:nvSpPr>
-        <p:spPr>
-          <a:xfrm>
-            <a:off x="731520" y="3872835"/>
-            <a:ext cx="3200400" cy="291904"/>
-          </a:xfrm>
-          <a:prstGeom prst="rect">
-            <a:avLst/>
-          </a:prstGeom>
-          <a:noFill/>
-        </p:spPr>
-        <p:txBody>
-          <a:bodyPr wrap="square" lIns="0" rIns="0" tIns="0" bIns="0">
-            <a:spAutoFit/>
-          </a:bodyPr>
-          <a:lstStyle/>
-          <a:p>
-            <a:r>
-              <a:rPr sz="1100" b="1">
-                <a:solidFill>
-                  <a:srgbClr val="141833"/>
-                </a:solidFill>
-                <a:latin typeface="Helvetica Neue"/>
-              </a:rPr>
-              <a:t>Community &amp; Culture</a:t>
-            </a:r>
-          </a:p>
-        </p:txBody>
-      </p:sp>
-      <p:sp>
-        <p:nvSpPr>
-          <p:cNvPr id="25" name="Rectangle 24"/>
-          <p:cNvSpPr/>
-          <p:nvPr/>
-        </p:nvSpPr>
-        <p:spPr>
-          <a:xfrm>
-            <a:off x="4114800" y="3936491"/>
-            <a:ext cx="1291013" cy="128016"/>
-          </a:xfrm>
-          <a:prstGeom prst="rect">
-            <a:avLst/>
-          </a:prstGeom>
-          <a:solidFill>
-            <a:srgbClr val="141833"/>
-          </a:solidFill>
-          <a:ln>
-            <a:noFill/>
-          </a:ln>
-          <a:effectLst/>
-        </p:spPr>
-        <p:style>
-          <a:lnRef idx="1">
-            <a:schemeClr val="accent1"/>
-          </a:lnRef>
-          <a:fillRef idx="3">
-            <a:schemeClr val="accent1"/>
-          </a:fillRef>
-          <a:effectRef idx="2">
-            <a:schemeClr val="accent1"/>
-          </a:effectRef>
-          <a:fontRef idx="minor">
-            <a:schemeClr val="lt1"/>
-          </a:fontRef>
-        </p:style>
-        <p:txBody>
-          <a:bodyPr rtlCol="0" anchor="ctr"/>
-          <a:lstStyle/>
-          <a:p>
-            <a:pPr algn="ctr"/>
-          </a:p>
-        </p:txBody>
-      </p:sp>
-      <p:sp>
-        <p:nvSpPr>
-          <p:cNvPr id="26" name="TextBox 25"/>
-          <p:cNvSpPr txBox="1"/>
-          <p:nvPr/>
-        </p:nvSpPr>
-        <p:spPr>
-          <a:xfrm>
-            <a:off x="5497253" y="3872835"/>
-            <a:ext cx="2286000" cy="291904"/>
-          </a:xfrm>
-          <a:prstGeom prst="rect">
-            <a:avLst/>
-          </a:prstGeom>
-          <a:noFill/>
-        </p:spPr>
-        <p:txBody>
-          <a:bodyPr wrap="square" lIns="0" rIns="0" tIns="0" bIns="0">
-            <a:spAutoFit/>
-          </a:bodyPr>
-          <a:lstStyle/>
-          <a:p>
-            <a:r>
-              <a:rPr sz="900" b="0">
-                <a:solidFill>
-                  <a:srgbClr val="6B7082"/>
-                </a:solidFill>
-                <a:latin typeface="Helvetica Neue"/>
-              </a:rPr>
-              <a:t>52,033 views · 58 posts</a:t>
-            </a:r>
-          </a:p>
-        </p:txBody>
-      </p:sp>
-      <p:sp>
-        <p:nvSpPr>
-          <p:cNvPr id="27" name="TextBox 26"/>
-          <p:cNvSpPr txBox="1"/>
-          <p:nvPr/>
-        </p:nvSpPr>
-        <p:spPr>
-          <a:xfrm>
-            <a:off x="731520" y="4164740"/>
-            <a:ext cx="3200400" cy="291904"/>
-          </a:xfrm>
-          <a:prstGeom prst="rect">
-            <a:avLst/>
-          </a:prstGeom>
-          <a:noFill/>
-        </p:spPr>
-        <p:txBody>
-          <a:bodyPr wrap="square" lIns="0" rIns="0" tIns="0" bIns="0">
-            <a:spAutoFit/>
-          </a:bodyPr>
-          <a:lstStyle/>
-          <a:p>
-            <a:r>
-              <a:rPr sz="1100" b="1">
-                <a:solidFill>
-                  <a:srgbClr val="141833"/>
-                </a:solidFill>
-                <a:latin typeface="Helvetica Neue"/>
-              </a:rPr>
-              <a:t>Downtown Development</a:t>
-            </a:r>
-          </a:p>
-        </p:txBody>
-      </p:sp>
-      <p:sp>
-        <p:nvSpPr>
-          <p:cNvPr id="28" name="Rectangle 27"/>
-          <p:cNvSpPr/>
-          <p:nvPr/>
-        </p:nvSpPr>
-        <p:spPr>
-          <a:xfrm>
-            <a:off x="4114800" y="4228396"/>
-            <a:ext cx="1182934" cy="128016"/>
-          </a:xfrm>
-          <a:prstGeom prst="rect">
-            <a:avLst/>
-          </a:prstGeom>
-          <a:solidFill>
-            <a:srgbClr val="C9A227"/>
-          </a:solidFill>
-          <a:ln>
-            <a:noFill/>
-          </a:ln>
-          <a:effectLst/>
-        </p:spPr>
-        <p:style>
-          <a:lnRef idx="1">
-            <a:schemeClr val="accent1"/>
-          </a:lnRef>
-          <a:fillRef idx="3">
-            <a:schemeClr val="accent1"/>
-          </a:fillRef>
-          <a:effectRef idx="2">
-            <a:schemeClr val="accent1"/>
-          </a:effectRef>
-          <a:fontRef idx="minor">
-            <a:schemeClr val="lt1"/>
-          </a:fontRef>
-        </p:style>
-        <p:txBody>
-          <a:bodyPr rtlCol="0" anchor="ctr"/>
-          <a:lstStyle/>
-          <a:p>
-            <a:pPr algn="ctr"/>
-          </a:p>
-        </p:txBody>
-      </p:sp>
-      <p:sp>
-        <p:nvSpPr>
-          <p:cNvPr id="29" name="TextBox 28"/>
-          <p:cNvSpPr txBox="1"/>
-          <p:nvPr/>
-        </p:nvSpPr>
-        <p:spPr>
-          <a:xfrm>
-            <a:off x="5389174" y="4164740"/>
-            <a:ext cx="2286000" cy="291904"/>
-          </a:xfrm>
-          <a:prstGeom prst="rect">
-            <a:avLst/>
-          </a:prstGeom>
-          <a:noFill/>
-        </p:spPr>
-        <p:txBody>
-          <a:bodyPr wrap="square" lIns="0" rIns="0" tIns="0" bIns="0">
-            <a:spAutoFit/>
-          </a:bodyPr>
-          <a:lstStyle/>
-          <a:p>
-            <a:r>
-              <a:rPr sz="900" b="0">
-                <a:solidFill>
-                  <a:srgbClr val="6B7082"/>
-                </a:solidFill>
-                <a:latin typeface="Helvetica Neue"/>
-              </a:rPr>
-              <a:t>47,677 views · 18 posts</a:t>
-            </a:r>
-          </a:p>
-        </p:txBody>
-      </p:sp>
-      <p:sp>
-        <p:nvSpPr>
-          <p:cNvPr id="30" name="TextBox 29"/>
-          <p:cNvSpPr txBox="1"/>
-          <p:nvPr/>
-        </p:nvSpPr>
-        <p:spPr>
-          <a:xfrm>
-            <a:off x="731520" y="4456644"/>
-            <a:ext cx="3200400" cy="291904"/>
-          </a:xfrm>
-          <a:prstGeom prst="rect">
-            <a:avLst/>
-          </a:prstGeom>
-          <a:noFill/>
-        </p:spPr>
-        <p:txBody>
-          <a:bodyPr wrap="square" lIns="0" rIns="0" tIns="0" bIns="0">
-            <a:spAutoFit/>
-          </a:bodyPr>
-          <a:lstStyle/>
-          <a:p>
-            <a:r>
-              <a:rPr sz="1100" b="1">
-                <a:solidFill>
-                  <a:srgbClr val="141833"/>
-                </a:solidFill>
-                <a:latin typeface="Helvetica Neue"/>
-              </a:rPr>
-              <a:t>Political Individual Highlights</a:t>
-            </a:r>
-          </a:p>
-        </p:txBody>
-      </p:sp>
-      <p:sp>
-        <p:nvSpPr>
-          <p:cNvPr id="31" name="Rectangle 30"/>
-          <p:cNvSpPr/>
-          <p:nvPr/>
-        </p:nvSpPr>
-        <p:spPr>
-          <a:xfrm>
-            <a:off x="4114800" y="4520301"/>
-            <a:ext cx="695886" cy="128016"/>
-          </a:xfrm>
-          <a:prstGeom prst="rect">
-            <a:avLst/>
-          </a:prstGeom>
-          <a:solidFill>
-            <a:srgbClr val="2E86AB"/>
-          </a:solidFill>
-          <a:ln>
-            <a:noFill/>
-          </a:ln>
-          <a:effectLst/>
-        </p:spPr>
-        <p:style>
-          <a:lnRef idx="1">
-            <a:schemeClr val="accent1"/>
-          </a:lnRef>
-          <a:fillRef idx="3">
-            <a:schemeClr val="accent1"/>
-          </a:fillRef>
-          <a:effectRef idx="2">
-            <a:schemeClr val="accent1"/>
-          </a:effectRef>
-          <a:fontRef idx="minor">
-            <a:schemeClr val="lt1"/>
-          </a:fontRef>
-        </p:style>
-        <p:txBody>
-          <a:bodyPr rtlCol="0" anchor="ctr"/>
-          <a:lstStyle/>
-          <a:p>
-            <a:pPr algn="ctr"/>
-          </a:p>
-        </p:txBody>
-      </p:sp>
-      <p:sp>
-        <p:nvSpPr>
-          <p:cNvPr id="32" name="TextBox 31"/>
-          <p:cNvSpPr txBox="1"/>
-          <p:nvPr/>
-        </p:nvSpPr>
-        <p:spPr>
-          <a:xfrm>
-            <a:off x="4902126" y="4456644"/>
-            <a:ext cx="2286000" cy="291904"/>
-          </a:xfrm>
-          <a:prstGeom prst="rect">
-            <a:avLst/>
-          </a:prstGeom>
-          <a:noFill/>
-        </p:spPr>
-        <p:txBody>
-          <a:bodyPr wrap="square" lIns="0" rIns="0" tIns="0" bIns="0">
-            <a:spAutoFit/>
-          </a:bodyPr>
-          <a:lstStyle/>
-          <a:p>
-            <a:r>
-              <a:rPr sz="900" b="0">
-                <a:solidFill>
-                  <a:srgbClr val="6B7082"/>
-                </a:solidFill>
-                <a:latin typeface="Helvetica Neue"/>
-              </a:rPr>
-              <a:t>28,047 views · 30 posts</a:t>
-            </a:r>
-          </a:p>
-        </p:txBody>
-      </p:sp>
-      <p:sp>
-        <p:nvSpPr>
-          <p:cNvPr id="33" name="TextBox 32"/>
-          <p:cNvSpPr txBox="1"/>
-          <p:nvPr/>
-        </p:nvSpPr>
-        <p:spPr>
-          <a:xfrm>
-            <a:off x="731520" y="4748549"/>
-            <a:ext cx="3200400" cy="291904"/>
-          </a:xfrm>
-          <a:prstGeom prst="rect">
-            <a:avLst/>
-          </a:prstGeom>
-          <a:noFill/>
-        </p:spPr>
-        <p:txBody>
-          <a:bodyPr wrap="square" lIns="0" rIns="0" tIns="0" bIns="0">
-            <a:spAutoFit/>
-          </a:bodyPr>
-          <a:lstStyle/>
-          <a:p>
-            <a:r>
-              <a:rPr sz="1100" b="1">
-                <a:solidFill>
-                  <a:srgbClr val="141833"/>
-                </a:solidFill>
-                <a:latin typeface="Helvetica Neue"/>
-              </a:rPr>
-              <a:t>Resident Highlights</a:t>
-            </a:r>
-          </a:p>
-        </p:txBody>
-      </p:sp>
-      <p:sp>
-        <p:nvSpPr>
-          <p:cNvPr id="34" name="Rectangle 33"/>
-          <p:cNvSpPr/>
-          <p:nvPr/>
-        </p:nvSpPr>
-        <p:spPr>
-          <a:xfrm>
-            <a:off x="4114800" y="4812205"/>
-            <a:ext cx="204768" cy="128016"/>
-          </a:xfrm>
-          <a:prstGeom prst="rect">
-            <a:avLst/>
-          </a:prstGeom>
-          <a:solidFill>
-            <a:srgbClr val="1B7A43"/>
-          </a:solidFill>
-          <a:ln>
-            <a:noFill/>
-          </a:ln>
-          <a:effectLst/>
-        </p:spPr>
-        <p:style>
-          <a:lnRef idx="1">
-            <a:schemeClr val="accent1"/>
-          </a:lnRef>
-          <a:fillRef idx="3">
-            <a:schemeClr val="accent1"/>
-          </a:fillRef>
-          <a:effectRef idx="2">
-            <a:schemeClr val="accent1"/>
-          </a:effectRef>
-          <a:fontRef idx="minor">
-            <a:schemeClr val="lt1"/>
-          </a:fontRef>
-        </p:style>
-        <p:txBody>
-          <a:bodyPr rtlCol="0" anchor="ctr"/>
-          <a:lstStyle/>
-          <a:p>
-            <a:pPr algn="ctr"/>
-          </a:p>
-        </p:txBody>
-      </p:sp>
-      <p:sp>
-        <p:nvSpPr>
-          <p:cNvPr id="35" name="TextBox 34"/>
-          <p:cNvSpPr txBox="1"/>
-          <p:nvPr/>
-        </p:nvSpPr>
-        <p:spPr>
-          <a:xfrm>
-            <a:off x="4411008" y="4748549"/>
-            <a:ext cx="2286000" cy="291904"/>
-          </a:xfrm>
-          <a:prstGeom prst="rect">
-            <a:avLst/>
-          </a:prstGeom>
-          <a:noFill/>
-        </p:spPr>
-        <p:txBody>
-          <a:bodyPr wrap="square" lIns="0" rIns="0" tIns="0" bIns="0">
-            <a:spAutoFit/>
-          </a:bodyPr>
-          <a:lstStyle/>
-          <a:p>
-            <a:r>
-              <a:rPr sz="900" b="0">
-                <a:solidFill>
-                  <a:srgbClr val="6B7082"/>
-                </a:solidFill>
-                <a:latin typeface="Helvetica Neue"/>
-              </a:rPr>
-              <a:t>8,253 views · 8 posts</a:t>
-            </a:r>
-          </a:p>
-        </p:txBody>
-      </p:sp>
-      <p:sp>
-        <p:nvSpPr>
-          <p:cNvPr id="36" name="TextBox 35"/>
-          <p:cNvSpPr txBox="1"/>
-          <p:nvPr/>
-        </p:nvSpPr>
-        <p:spPr>
-          <a:xfrm>
-            <a:off x="731520" y="5040454"/>
-            <a:ext cx="3200400" cy="291904"/>
-          </a:xfrm>
-          <a:prstGeom prst="rect">
-            <a:avLst/>
-          </a:prstGeom>
-          <a:noFill/>
-        </p:spPr>
-        <p:txBody>
-          <a:bodyPr wrap="square" lIns="0" rIns="0" tIns="0" bIns="0">
-            <a:spAutoFit/>
-          </a:bodyPr>
-          <a:lstStyle/>
-          <a:p>
-            <a:r>
-              <a:rPr sz="1100" b="1">
-                <a:solidFill>
-                  <a:srgbClr val="141833"/>
-                </a:solidFill>
-                <a:latin typeface="Helvetica Neue"/>
-              </a:rPr>
-              <a:t>American Pride</a:t>
-            </a:r>
-          </a:p>
-        </p:txBody>
-      </p:sp>
-      <p:sp>
-        <p:nvSpPr>
-          <p:cNvPr id="37" name="Rectangle 36"/>
-          <p:cNvSpPr/>
-          <p:nvPr/>
-        </p:nvSpPr>
-        <p:spPr>
-          <a:xfrm>
-            <a:off x="4114800" y="5104110"/>
-            <a:ext cx="192760" cy="128016"/>
-          </a:xfrm>
-          <a:prstGeom prst="rect">
-            <a:avLst/>
-          </a:prstGeom>
-          <a:solidFill>
-            <a:srgbClr val="990011"/>
-          </a:solidFill>
-          <a:ln>
-            <a:noFill/>
-          </a:ln>
-          <a:effectLst/>
-        </p:spPr>
-        <p:style>
-          <a:lnRef idx="1">
-            <a:schemeClr val="accent1"/>
-          </a:lnRef>
-          <a:fillRef idx="3">
-            <a:schemeClr val="accent1"/>
-          </a:fillRef>
-          <a:effectRef idx="2">
-            <a:schemeClr val="accent1"/>
-          </a:effectRef>
-          <a:fontRef idx="minor">
-            <a:schemeClr val="lt1"/>
-          </a:fontRef>
-        </p:style>
-        <p:txBody>
-          <a:bodyPr rtlCol="0" anchor="ctr"/>
-          <a:lstStyle/>
-          <a:p>
-            <a:pPr algn="ctr"/>
-          </a:p>
-        </p:txBody>
-      </p:sp>
-      <p:sp>
-        <p:nvSpPr>
-          <p:cNvPr id="38" name="TextBox 37"/>
-          <p:cNvSpPr txBox="1"/>
-          <p:nvPr/>
-        </p:nvSpPr>
-        <p:spPr>
-          <a:xfrm>
-            <a:off x="4399000" y="5040454"/>
-            <a:ext cx="2286000" cy="291904"/>
-          </a:xfrm>
-          <a:prstGeom prst="rect">
-            <a:avLst/>
-          </a:prstGeom>
-          <a:noFill/>
-        </p:spPr>
-        <p:txBody>
-          <a:bodyPr wrap="square" lIns="0" rIns="0" tIns="0" bIns="0">
-            <a:spAutoFit/>
-          </a:bodyPr>
-          <a:lstStyle/>
-          <a:p>
-            <a:r>
-              <a:rPr sz="900" b="0">
-                <a:solidFill>
-                  <a:srgbClr val="6B7082"/>
-                </a:solidFill>
-                <a:latin typeface="Helvetica Neue"/>
-              </a:rPr>
-              <a:t>7,769 views · 15 posts</a:t>
-            </a:r>
-          </a:p>
-        </p:txBody>
-      </p:sp>
-      <p:sp>
-        <p:nvSpPr>
-          <p:cNvPr id="39" name="TextBox 38"/>
-          <p:cNvSpPr txBox="1"/>
-          <p:nvPr/>
-        </p:nvSpPr>
-        <p:spPr>
-          <a:xfrm>
-            <a:off x="731520" y="5332358"/>
-            <a:ext cx="3200400" cy="291904"/>
-          </a:xfrm>
-          <a:prstGeom prst="rect">
-            <a:avLst/>
-          </a:prstGeom>
-          <a:noFill/>
-        </p:spPr>
-        <p:txBody>
-          <a:bodyPr wrap="square" lIns="0" rIns="0" tIns="0" bIns="0">
-            <a:spAutoFit/>
-          </a:bodyPr>
-          <a:lstStyle/>
-          <a:p>
-            <a:r>
-              <a:rPr sz="1100" b="1">
-                <a:solidFill>
-                  <a:srgbClr val="141833"/>
-                </a:solidFill>
-                <a:latin typeface="Helvetica Neue"/>
-              </a:rPr>
-              <a:t>Legislation &amp; Policy Watch</a:t>
-            </a:r>
-          </a:p>
-        </p:txBody>
-      </p:sp>
-      <p:sp>
-        <p:nvSpPr>
-          <p:cNvPr id="40" name="Rectangle 39"/>
-          <p:cNvSpPr/>
-          <p:nvPr/>
-        </p:nvSpPr>
-        <p:spPr>
-          <a:xfrm>
-            <a:off x="4114800" y="5396015"/>
-            <a:ext cx="153632" cy="128016"/>
-          </a:xfrm>
-          <a:prstGeom prst="rect">
-            <a:avLst/>
-          </a:prstGeom>
-          <a:solidFill>
-            <a:srgbClr val="2F3C7E"/>
-          </a:solidFill>
-          <a:ln>
-            <a:noFill/>
-          </a:ln>
-          <a:effectLst/>
-        </p:spPr>
-        <p:style>
-          <a:lnRef idx="1">
-            <a:schemeClr val="accent1"/>
-          </a:lnRef>
-          <a:fillRef idx="3">
-            <a:schemeClr val="accent1"/>
-          </a:fillRef>
-          <a:effectRef idx="2">
-            <a:schemeClr val="accent1"/>
-          </a:effectRef>
-          <a:fontRef idx="minor">
-            <a:schemeClr val="lt1"/>
-          </a:fontRef>
-        </p:style>
-        <p:txBody>
-          <a:bodyPr rtlCol="0" anchor="ctr"/>
-          <a:lstStyle/>
-          <a:p>
-            <a:pPr algn="ctr"/>
-          </a:p>
-        </p:txBody>
-      </p:sp>
-      <p:sp>
-        <p:nvSpPr>
           <p:cNvPr id="41" name="TextBox 40"/>
           <p:cNvSpPr txBox="1"/>
           <p:nvPr/>
         </p:nvSpPr>
         <p:spPr>
           <a:xfrm>
-            <a:off x="4359872" y="5332358"/>
+            <a:off x="4343618" y="5332358"/>
             <a:ext cx="2286000" cy="291904"/>
           </a:xfrm>
           <a:prstGeom prst="rect">
@@ -18050,7 +18050,7 @@
                 </a:solidFill>
                 <a:latin typeface="Georgia"/>
               </a:rPr>
-              <a:t>94,410</a:t>
+              <a:t>99,197</a:t>
             </a:r>
           </a:p>
         </p:txBody>
@@ -18084,7 +18084,7 @@
                 </a:solidFill>
                 <a:latin typeface="Helvetica Neue"/>
               </a:rPr>
-              <a:t>62 posts · 3,041 likes</a:t>
+              <a:t>63 posts · 3,182 likes</a:t>
             </a:r>
           </a:p>
         </p:txBody>
@@ -18118,7 +18118,7 @@
                 </a:solidFill>
                 <a:latin typeface="Helvetica Neue"/>
               </a:rPr>
-              <a:t>1,523 average views per post</a:t>
+              <a:t>1,575 average views per post</a:t>
             </a:r>
           </a:p>
         </p:txBody>
@@ -18862,7 +18862,7 @@
                 </a:solidFill>
                 <a:latin typeface="Georgia"/>
               </a:rPr>
-              <a:t>Truth &amp; Scandal Reporting</a:t>
+              <a:t>Military Service</a:t>
             </a:r>
           </a:p>
         </p:txBody>
@@ -18896,7 +18896,7 @@
                 </a:solidFill>
                 <a:latin typeface="Helvetica Neue"/>
               </a:rPr>
-              <a:t>Investigative — the heat that drives peak reach.</a:t>
+              <a:t>Army/JROTC/veteran interviews — the human side of military service (NOT policy — that's Legislation Watch).</a:t>
             </a:r>
           </a:p>
         </p:txBody>
@@ -18926,11 +18926,11 @@
             <a:r>
               <a:rPr sz="900" b="1">
                 <a:solidFill>
-                  <a:srgbClr val="990011"/>
-                </a:solidFill>
-                <a:latin typeface="Helvetica Neue"/>
-              </a:rPr>
-              <a:t>AUDIENCE (theoretical): Cut-throat drama · punches hardest Young (18-40), broad appeal</a:t>
+                  <a:srgbClr val="C9A227"/>
+                </a:solidFill>
+                <a:latin typeface="Helvetica Neue"/>
+              </a:rPr>
+              <a:t>AUDIENCE (theoretical): Traditional / patriotic · Middle (40-55) + Older (55+), veterans + families</a:t>
             </a:r>
           </a:p>
         </p:txBody>
@@ -18994,7 +18994,7 @@
             <a:avLst/>
           </a:prstGeom>
           <a:solidFill>
-            <a:srgbClr val="990011"/>
+            <a:srgbClr val="C9A227"/>
           </a:solidFill>
           <a:ln>
             <a:noFill/>
@@ -19048,7 +19048,7 @@
             <a:r>
               <a:rPr sz="1100" b="1">
                 <a:solidFill>
-                  <a:srgbClr val="990011"/>
+                  <a:srgbClr val="C9A227"/>
                 </a:solidFill>
                 <a:latin typeface="Helvetica Neue"/>
               </a:rPr>
@@ -19086,7 +19086,7 @@
                 </a:solidFill>
                 <a:latin typeface="Georgia"/>
               </a:rPr>
-              <a:t>88,209</a:t>
+              <a:t>92,638</a:t>
             </a:r>
           </a:p>
         </p:txBody>
@@ -19120,7 +19120,7 @@
                 </a:solidFill>
                 <a:latin typeface="Helvetica Neue"/>
               </a:rPr>
-              <a:t>35 posts · 2,000 likes</a:t>
+              <a:t>34 posts · 4,210 likes</a:t>
             </a:r>
           </a:p>
         </p:txBody>
@@ -19154,7 +19154,7 @@
                 </a:solidFill>
                 <a:latin typeface="Helvetica Neue"/>
               </a:rPr>
-              <a:t>2,520 average views per post</a:t>
+              <a:t>2,725 average views per post</a:t>
             </a:r>
           </a:p>
         </p:txBody>
@@ -19184,7 +19184,7 @@
             <a:r>
               <a:rPr sz="1100" b="1">
                 <a:solidFill>
-                  <a:srgbClr val="990011"/>
+                  <a:srgbClr val="C9A227"/>
                 </a:solidFill>
                 <a:latin typeface="Helvetica Neue"/>
               </a:rPr>
@@ -19252,7 +19252,7 @@
             <a:avLst/>
           </a:prstGeom>
           <a:solidFill>
-            <a:srgbClr val="990011"/>
+            <a:srgbClr val="C9A227"/>
           </a:solidFill>
           <a:ln>
             <a:noFill/>
@@ -19306,11 +19306,11 @@
             <a:r>
               <a:rPr sz="1000" b="1">
                 <a:solidFill>
-                  <a:srgbClr val="990011"/>
-                </a:solidFill>
-                <a:latin typeface="Helvetica Neue"/>
-              </a:rPr>
-              <a:t>#1  ·  TT  ·  9,839 views</a:t>
+                  <a:srgbClr val="C9A227"/>
+                </a:solidFill>
+                <a:latin typeface="Helvetica Neue"/>
+              </a:rPr>
+              <a:t>#1  ·  TT  ·  37,900 views</a:t>
             </a:r>
           </a:p>
         </p:txBody>
@@ -19344,7 +19344,7 @@
                 </a:solidFill>
                 <a:latin typeface="Helvetica Neue"/>
               </a:rPr>
-              <a:t>Grew up in Huntington Park and still own property there. The city's o...</a:t>
+              <a:t>Combat jobs aren't for everyone. See how your MOS determines deployment likelihood and wha</a:t>
             </a:r>
           </a:p>
         </p:txBody>
@@ -19408,7 +19408,7 @@
             <a:avLst/>
           </a:prstGeom>
           <a:solidFill>
-            <a:srgbClr val="990011"/>
+            <a:srgbClr val="C9A227"/>
           </a:solidFill>
           <a:ln>
             <a:noFill/>
@@ -19462,11 +19462,11 @@
             <a:r>
               <a:rPr sz="1000" b="1">
                 <a:solidFill>
-                  <a:srgbClr val="990011"/>
-                </a:solidFill>
-                <a:latin typeface="Helvetica Neue"/>
-              </a:rPr>
-              <a:t>#2  ·  IG  ·  7,762 views</a:t>
+                  <a:srgbClr val="C9A227"/>
+                </a:solidFill>
+                <a:latin typeface="Helvetica Neue"/>
+              </a:rPr>
+              <a:t>#2  ·  TT  ·  21,500 views</a:t>
             </a:r>
           </a:p>
         </p:txBody>
@@ -19500,7 +19500,7 @@
                 </a:solidFill>
                 <a:latin typeface="Helvetica Neue"/>
               </a:rPr>
-              <a:t>Chaos erupted! Lissette Rivera refused to calm down, escalating until she was escorted out</a:t>
+              <a:t>From Las Vegas to Battalion Commander: A journey fueled by college dreams and military opp</a:t>
             </a:r>
           </a:p>
         </p:txBody>
@@ -19564,7 +19564,7 @@
             <a:avLst/>
           </a:prstGeom>
           <a:solidFill>
-            <a:srgbClr val="990011"/>
+            <a:srgbClr val="C9A227"/>
           </a:solidFill>
           <a:ln>
             <a:noFill/>
@@ -19618,11 +19618,11 @@
             <a:r>
               <a:rPr sz="1000" b="1">
                 <a:solidFill>
-                  <a:srgbClr val="990011"/>
-                </a:solidFill>
-                <a:latin typeface="Helvetica Neue"/>
-              </a:rPr>
-              <a:t>#3  ·  IG  ·  7,031 views</a:t>
+                  <a:srgbClr val="C9A227"/>
+                </a:solidFill>
+                <a:latin typeface="Helvetica Neue"/>
+              </a:rPr>
+              <a:t>#3  ·  IG  ·  5,139 views</a:t>
             </a:r>
           </a:p>
         </p:txBody>
@@ -19656,7 +19656,7 @@
                 </a:solidFill>
                 <a:latin typeface="Helvetica Neue"/>
               </a:rPr>
-              <a:t>A woman's outburst at a city council meeting, repeatedly warned by the mayor, led to her f</a:t>
+              <a:t>Not everyone deployed sees combat, even with 20 years in. Your MOS matters. Logistics migh</a:t>
             </a:r>
           </a:p>
         </p:txBody>
@@ -19730,7 +19730,7 @@
             <a:r>
               <a:rPr sz="1000" b="1">
                 <a:solidFill>
-                  <a:srgbClr val="990011"/>
+                  <a:srgbClr val="C9A227"/>
                 </a:solidFill>
                 <a:latin typeface="Helvetica Neue"/>
               </a:rPr>
@@ -19898,7 +19898,7 @@
                 </a:solidFill>
                 <a:latin typeface="Georgia"/>
               </a:rPr>
-              <a:t>Military Service</a:t>
+              <a:t>Truth &amp; Scandal Reporting</a:t>
             </a:r>
           </a:p>
         </p:txBody>
@@ -19932,7 +19932,7 @@
                 </a:solidFill>
                 <a:latin typeface="Helvetica Neue"/>
               </a:rPr>
-              <a:t>Army/JROTC/veteran interviews — the human side of military service (NOT policy — that's Legislation Watch).</a:t>
+              <a:t>Investigative — the heat that drives peak reach.</a:t>
             </a:r>
           </a:p>
         </p:txBody>
@@ -19962,11 +19962,11 @@
             <a:r>
               <a:rPr sz="900" b="1">
                 <a:solidFill>
-                  <a:srgbClr val="C9A227"/>
-                </a:solidFill>
-                <a:latin typeface="Helvetica Neue"/>
-              </a:rPr>
-              <a:t>AUDIENCE (theoretical): Traditional / patriotic · Middle (40-55) + Older (55+), veterans + families</a:t>
+                  <a:srgbClr val="990011"/>
+                </a:solidFill>
+                <a:latin typeface="Helvetica Neue"/>
+              </a:rPr>
+              <a:t>AUDIENCE (theoretical): Cut-throat drama · punches hardest Young (18-40), broad appeal</a:t>
             </a:r>
           </a:p>
         </p:txBody>
@@ -20030,7 +20030,7 @@
             <a:avLst/>
           </a:prstGeom>
           <a:solidFill>
-            <a:srgbClr val="C9A227"/>
+            <a:srgbClr val="990011"/>
           </a:solidFill>
           <a:ln>
             <a:noFill/>
@@ -20084,7 +20084,7 @@
             <a:r>
               <a:rPr sz="1100" b="1">
                 <a:solidFill>
-                  <a:srgbClr val="C9A227"/>
+                  <a:srgbClr val="990011"/>
                 </a:solidFill>
                 <a:latin typeface="Helvetica Neue"/>
               </a:rPr>
@@ -20122,7 +20122,7 @@
                 </a:solidFill>
                 <a:latin typeface="Georgia"/>
               </a:rPr>
-              <a:t>86,371</a:t>
+              <a:t>88,312</a:t>
             </a:r>
           </a:p>
         </p:txBody>
@@ -20156,7 +20156,7 @@
                 </a:solidFill>
                 <a:latin typeface="Helvetica Neue"/>
               </a:rPr>
-              <a:t>28 posts · 4,056 likes</a:t>
+              <a:t>35 posts · 2,002 likes</a:t>
             </a:r>
           </a:p>
         </p:txBody>
@@ -20190,7 +20190,7 @@
                 </a:solidFill>
                 <a:latin typeface="Helvetica Neue"/>
               </a:rPr>
-              <a:t>3,085 average views per post</a:t>
+              <a:t>2,523 average views per post</a:t>
             </a:r>
           </a:p>
         </p:txBody>
@@ -20220,7 +20220,7 @@
             <a:r>
               <a:rPr sz="1100" b="1">
                 <a:solidFill>
-                  <a:srgbClr val="C9A227"/>
+                  <a:srgbClr val="990011"/>
                 </a:solidFill>
                 <a:latin typeface="Helvetica Neue"/>
               </a:rPr>
@@ -20288,7 +20288,7 @@
             <a:avLst/>
           </a:prstGeom>
           <a:solidFill>
-            <a:srgbClr val="C9A227"/>
+            <a:srgbClr val="990011"/>
           </a:solidFill>
           <a:ln>
             <a:noFill/>
@@ -20342,11 +20342,11 @@
             <a:r>
               <a:rPr sz="1000" b="1">
                 <a:solidFill>
-                  <a:srgbClr val="C9A227"/>
-                </a:solidFill>
-                <a:latin typeface="Helvetica Neue"/>
-              </a:rPr>
-              <a:t>#1  ·  TT  ·  37,900 views</a:t>
+                  <a:srgbClr val="990011"/>
+                </a:solidFill>
+                <a:latin typeface="Helvetica Neue"/>
+              </a:rPr>
+              <a:t>#1  ·  TT  ·  9,839 views</a:t>
             </a:r>
           </a:p>
         </p:txBody>
@@ -20380,7 +20380,7 @@
                 </a:solidFill>
                 <a:latin typeface="Helvetica Neue"/>
               </a:rPr>
-              <a:t>Combat jobs aren't for everyone. See how your MOS determines deployment likelihood and wha</a:t>
+              <a:t>Grew up in Huntington Park and still own property there. The city's o...</a:t>
             </a:r>
           </a:p>
         </p:txBody>
@@ -20444,7 +20444,7 @@
             <a:avLst/>
           </a:prstGeom>
           <a:solidFill>
-            <a:srgbClr val="C9A227"/>
+            <a:srgbClr val="990011"/>
           </a:solidFill>
           <a:ln>
             <a:noFill/>
@@ -20498,11 +20498,11 @@
             <a:r>
               <a:rPr sz="1000" b="1">
                 <a:solidFill>
-                  <a:srgbClr val="C9A227"/>
-                </a:solidFill>
-                <a:latin typeface="Helvetica Neue"/>
-              </a:rPr>
-              <a:t>#2  ·  TT  ·  19,300 views</a:t>
+                  <a:srgbClr val="990011"/>
+                </a:solidFill>
+                <a:latin typeface="Helvetica Neue"/>
+              </a:rPr>
+              <a:t>#2  ·  IG  ·  7,762 views</a:t>
             </a:r>
           </a:p>
         </p:txBody>
@@ -20536,7 +20536,7 @@
                 </a:solidFill>
                 <a:latin typeface="Helvetica Neue"/>
               </a:rPr>
-              <a:t>From Las Vegas to Battalion Commander: A journey fueled by college dreams and military opp</a:t>
+              <a:t>Chaos erupted! Lissette Rivera refused to calm down, escalating until she was escorted out</a:t>
             </a:r>
           </a:p>
         </p:txBody>
@@ -20600,7 +20600,7 @@
             <a:avLst/>
           </a:prstGeom>
           <a:solidFill>
-            <a:srgbClr val="C9A227"/>
+            <a:srgbClr val="990011"/>
           </a:solidFill>
           <a:ln>
             <a:noFill/>
@@ -20654,11 +20654,11 @@
             <a:r>
               <a:rPr sz="1000" b="1">
                 <a:solidFill>
-                  <a:srgbClr val="C9A227"/>
-                </a:solidFill>
-                <a:latin typeface="Helvetica Neue"/>
-              </a:rPr>
-              <a:t>#3  ·  IG  ·  5,139 views</a:t>
+                  <a:srgbClr val="990011"/>
+                </a:solidFill>
+                <a:latin typeface="Helvetica Neue"/>
+              </a:rPr>
+              <a:t>#3  ·  IG  ·  7,031 views</a:t>
             </a:r>
           </a:p>
         </p:txBody>
@@ -20692,7 +20692,7 @@
                 </a:solidFill>
                 <a:latin typeface="Helvetica Neue"/>
               </a:rPr>
-              <a:t>Not everyone deployed sees combat, even with 20 years in. Your MOS matters. Logistics migh</a:t>
+              <a:t>A woman's outburst at a city council meeting, repeatedly warned by the mayor, led to her f</a:t>
             </a:r>
           </a:p>
         </p:txBody>
@@ -20766,7 +20766,7 @@
             <a:r>
               <a:rPr sz="1000" b="1">
                 <a:solidFill>
-                  <a:srgbClr val="C9A227"/>
+                  <a:srgbClr val="990011"/>
                 </a:solidFill>
                 <a:latin typeface="Helvetica Neue"/>
               </a:rPr>
@@ -20804,7 +20804,7 @@
                 </a:solidFill>
                 <a:latin typeface="Helvetica Neue"/>
               </a:rPr>
-              <a:t>Strong performer. Keep investing — Military Service is a proven driver of reach.</a:t>
+              <a:t>Solid mid-tier. Worth continued investment. Test scaling to see if it holds.</a:t>
             </a:r>
           </a:p>
         </p:txBody>
@@ -21158,7 +21158,7 @@
                 </a:solidFill>
                 <a:latin typeface="Georgia"/>
               </a:rPr>
-              <a:t>63,740</a:t>
+              <a:t>63,776</a:t>
             </a:r>
           </a:p>
         </p:txBody>
@@ -21226,7 +21226,7 @@
                 </a:solidFill>
                 <a:latin typeface="Helvetica Neue"/>
               </a:rPr>
-              <a:t>2,550 average views per post</a:t>
+              <a:t>2,551 average views per post</a:t>
             </a:r>
           </a:p>
         </p:txBody>
@@ -22194,7 +22194,7 @@
                 </a:solidFill>
                 <a:latin typeface="Georgia"/>
               </a:rPr>
-              <a:t>52,033</a:t>
+              <a:t>57,543</a:t>
             </a:r>
           </a:p>
         </p:txBody>
@@ -22228,7 +22228,7 @@
                 </a:solidFill>
                 <a:latin typeface="Helvetica Neue"/>
               </a:rPr>
-              <a:t>58 posts · 1,013 likes</a:t>
+              <a:t>62 posts · 1,164 likes</a:t>
             </a:r>
           </a:p>
         </p:txBody>
@@ -22262,7 +22262,7 @@
                 </a:solidFill>
                 <a:latin typeface="Helvetica Neue"/>
               </a:rPr>
-              <a:t>897 average views per post</a:t>
+              <a:t>928 average views per post</a:t>
             </a:r>
           </a:p>
         </p:txBody>

--- a/SPONSOR_CONTENT_REPORT.pptx
+++ b/SPONSOR_CONTENT_REPORT.pptx
@@ -3327,7 +3327,7 @@
                 </a:solidFill>
                 <a:latin typeface="Helvetica Neue"/>
               </a:rPr>
-              <a:t>Reporting window: Jun 8 → 2026-10-09</a:t>
+              <a:t>Reporting window: Jun 8 → 2026-10-14</a:t>
             </a:r>
           </a:p>
         </p:txBody>
@@ -3783,7 +3783,7 @@
                 </a:solidFill>
                 <a:latin typeface="Georgia"/>
               </a:rPr>
-              <a:t>51,024</a:t>
+              <a:t>51,568</a:t>
             </a:r>
           </a:p>
         </p:txBody>
@@ -3817,7 +3817,7 @@
                 </a:solidFill>
                 <a:latin typeface="Helvetica Neue"/>
               </a:rPr>
-              <a:t>20 posts · 3,025 likes</a:t>
+              <a:t>20 posts · 3,036 likes</a:t>
             </a:r>
           </a:p>
         </p:txBody>
@@ -3851,7 +3851,7 @@
                 </a:solidFill>
                 <a:latin typeface="Helvetica Neue"/>
               </a:rPr>
-              <a:t>2,551 average views per post</a:t>
+              <a:t>2,578 average views per post</a:t>
             </a:r>
           </a:p>
         </p:txBody>
@@ -4819,7 +4819,7 @@
                 </a:solidFill>
                 <a:latin typeface="Georgia"/>
               </a:rPr>
-              <a:t>28,967</a:t>
+              <a:t>29,743</a:t>
             </a:r>
           </a:p>
         </p:txBody>
@@ -4853,7 +4853,7 @@
                 </a:solidFill>
                 <a:latin typeface="Helvetica Neue"/>
               </a:rPr>
-              <a:t>32 posts · 641 likes</a:t>
+              <a:t>32 posts · 654 likes</a:t>
             </a:r>
           </a:p>
         </p:txBody>
@@ -4887,7 +4887,7 @@
                 </a:solidFill>
                 <a:latin typeface="Helvetica Neue"/>
               </a:rPr>
-              <a:t>905 average views per post</a:t>
+              <a:t>929 average views per post</a:t>
             </a:r>
           </a:p>
         </p:txBody>
@@ -7021,7 +7021,7 @@
                 </a:solidFill>
                 <a:latin typeface="Helvetica Neue"/>
               </a:rPr>
-              <a:t>73,709 views · 98 posts · 752 avg</a:t>
+              <a:t>77,700 views · 104 posts · 747 avg</a:t>
             </a:r>
           </a:p>
         </p:txBody>
@@ -7103,7 +7103,7 @@
         <p:spPr>
           <a:xfrm>
             <a:off x="4206240" y="2720339"/>
-            <a:ext cx="636099" cy="274320"/>
+            <a:ext cx="603426" cy="274320"/>
           </a:xfrm>
           <a:prstGeom prst="rect">
             <a:avLst/>
@@ -7146,7 +7146,7 @@
         </p:nvSpPr>
         <p:spPr>
           <a:xfrm>
-            <a:off x="4933779" y="2651759"/>
+            <a:off x="4901106" y="2651759"/>
             <a:ext cx="2286000" cy="251460"/>
           </a:xfrm>
           <a:prstGeom prst="rect">
@@ -7180,7 +7180,7 @@
         </p:nvSpPr>
         <p:spPr>
           <a:xfrm>
-            <a:off x="4933779" y="2857499"/>
+            <a:off x="4901106" y="2857499"/>
             <a:ext cx="4572000" cy="251460"/>
           </a:xfrm>
           <a:prstGeom prst="rect">
@@ -7249,7 +7249,7 @@
         <p:spPr>
           <a:xfrm>
             <a:off x="4206240" y="3223260"/>
-            <a:ext cx="506979" cy="274320"/>
+            <a:ext cx="480939" cy="274320"/>
           </a:xfrm>
           <a:prstGeom prst="rect">
             <a:avLst/>
@@ -7292,7 +7292,7 @@
         </p:nvSpPr>
         <p:spPr>
           <a:xfrm>
-            <a:off x="4804659" y="3154679"/>
+            <a:off x="4778619" y="3154679"/>
             <a:ext cx="2286000" cy="251460"/>
           </a:xfrm>
           <a:prstGeom prst="rect">
@@ -7326,7 +7326,7 @@
         </p:nvSpPr>
         <p:spPr>
           <a:xfrm>
-            <a:off x="4804659" y="3360420"/>
+            <a:off x="4778619" y="3360420"/>
             <a:ext cx="4572000" cy="251460"/>
           </a:xfrm>
           <a:prstGeom prst="rect">
@@ -7735,7 +7735,7 @@
                 </a:solidFill>
                 <a:latin typeface="Georgia"/>
               </a:rPr>
-              <a:t>73,709</a:t>
+              <a:t>77,700</a:t>
             </a:r>
           </a:p>
         </p:txBody>
@@ -7769,7 +7769,7 @@
                 </a:solidFill>
                 <a:latin typeface="Helvetica Neue"/>
               </a:rPr>
-              <a:t>98 posts · 1,754 likes</a:t>
+              <a:t>104 posts · 1,880 likes</a:t>
             </a:r>
           </a:p>
         </p:txBody>
@@ -7803,7 +7803,7 @@
                 </a:solidFill>
                 <a:latin typeface="Helvetica Neue"/>
               </a:rPr>
-              <a:t>752 average views per post</a:t>
+              <a:t>747 average views per post</a:t>
             </a:r>
           </a:p>
         </p:txBody>
@@ -10843,7 +10843,7 @@
                 </a:solidFill>
                 <a:latin typeface="Georgia"/>
               </a:rPr>
-              <a:t>51,024 views</a:t>
+              <a:t>51,568 views</a:t>
             </a:r>
           </a:p>
         </p:txBody>
@@ -10877,7 +10877,7 @@
                 </a:solidFill>
                 <a:latin typeface="Helvetica Neue"/>
               </a:rPr>
-              <a:t>20 posts · 2,551 avg views/post</a:t>
+              <a:t>20 posts · 2,578 avg views/post</a:t>
             </a:r>
           </a:p>
         </p:txBody>
@@ -11203,7 +11203,7 @@
                 </a:solidFill>
                 <a:latin typeface="Georgia"/>
               </a:rPr>
-              <a:t>99,197 views</a:t>
+              <a:t>100,080 views</a:t>
             </a:r>
           </a:p>
         </p:txBody>
@@ -11237,7 +11237,7 @@
                 </a:solidFill>
                 <a:latin typeface="Helvetica Neue"/>
               </a:rPr>
-              <a:t>63 posts · 1,575 avg views/post</a:t>
+              <a:t>63 posts · 1,589 avg views/post</a:t>
             </a:r>
           </a:p>
         </p:txBody>
@@ -11563,7 +11563,7 @@
                 </a:solidFill>
                 <a:latin typeface="Georgia"/>
               </a:rPr>
-              <a:t>92,638 views</a:t>
+              <a:t>101,142 views</a:t>
             </a:r>
           </a:p>
         </p:txBody>
@@ -11597,7 +11597,7 @@
                 </a:solidFill>
                 <a:latin typeface="Helvetica Neue"/>
               </a:rPr>
-              <a:t>34 posts · 2,725 avg views/post</a:t>
+              <a:t>43 posts · 2,352 avg views/post</a:t>
             </a:r>
           </a:p>
         </p:txBody>
@@ -13899,7 +13899,7 @@
                 </a:solidFill>
                 <a:latin typeface="Helvetica Neue"/>
               </a:rPr>
-              <a:t>2,523 avg views/post   ·   35 posts   ·   88,312 total</a:t>
+              <a:t>2,483 avg views/post   ·   36 posts   ·   89,392 total</a:t>
             </a:r>
           </a:p>
         </p:txBody>
@@ -14191,7 +14191,7 @@
                 </a:solidFill>
                 <a:latin typeface="Helvetica Neue"/>
               </a:rPr>
-              <a:t>1,264 avg views/post   ·   200 posts   ·   252,755 total</a:t>
+              <a:t>1,283 avg views/post   ·   207 posts   ·   265,632 total</a:t>
             </a:r>
           </a:p>
         </p:txBody>
@@ -16110,7 +16110,7 @@
                 </a:solidFill>
                 <a:latin typeface="Helvetica Neue"/>
               </a:rPr>
-              <a:t>280,258 views · 189 posts</a:t>
+              <a:t>285,293 views · 196 posts</a:t>
             </a:r>
           </a:p>
         </p:txBody>
@@ -16144,7 +16144,7 @@
                 </a:solidFill>
                 <a:latin typeface="Helvetica Neue"/>
               </a:rPr>
-              <a:t>Food &amp; Local Flavor</a:t>
+              <a:t>Military Service</a:t>
             </a:r>
           </a:p>
         </p:txBody>
@@ -16158,7 +16158,119 @@
         <p:spPr>
           <a:xfrm>
             <a:off x="4114800" y="2476968"/>
-            <a:ext cx="2200825" cy="128016"/>
+            <a:ext cx="2204375" cy="128016"/>
+          </a:xfrm>
+          <a:prstGeom prst="rect">
+            <a:avLst/>
+          </a:prstGeom>
+          <a:solidFill>
+            <a:srgbClr val="C9A227"/>
+          </a:solidFill>
+          <a:ln>
+            <a:noFill/>
+          </a:ln>
+          <a:effectLst/>
+        </p:spPr>
+        <p:style>
+          <a:lnRef idx="1">
+            <a:schemeClr val="accent1"/>
+          </a:lnRef>
+          <a:fillRef idx="3">
+            <a:schemeClr val="accent1"/>
+          </a:fillRef>
+          <a:effectRef idx="2">
+            <a:schemeClr val="accent1"/>
+          </a:effectRef>
+          <a:fontRef idx="minor">
+            <a:schemeClr val="lt1"/>
+          </a:fontRef>
+        </p:style>
+        <p:txBody>
+          <a:bodyPr rtlCol="0" anchor="ctr"/>
+          <a:lstStyle/>
+          <a:p>
+            <a:pPr algn="ctr"/>
+          </a:p>
+        </p:txBody>
+      </p:sp>
+      <p:sp>
+        <p:nvSpPr>
+          <p:cNvPr id="11" name="TextBox 10"/>
+          <p:cNvSpPr txBox="1"/>
+          <p:nvPr/>
+        </p:nvSpPr>
+        <p:spPr>
+          <a:xfrm>
+            <a:off x="6410615" y="2413312"/>
+            <a:ext cx="2286000" cy="291904"/>
+          </a:xfrm>
+          <a:prstGeom prst="rect">
+            <a:avLst/>
+          </a:prstGeom>
+          <a:noFill/>
+        </p:spPr>
+        <p:txBody>
+          <a:bodyPr wrap="square" lIns="0" rIns="0" tIns="0" bIns="0">
+            <a:spAutoFit/>
+          </a:bodyPr>
+          <a:lstStyle/>
+          <a:p>
+            <a:r>
+              <a:rPr sz="900" b="0">
+                <a:solidFill>
+                  <a:srgbClr val="6B7082"/>
+                </a:solidFill>
+                <a:latin typeface="Helvetica Neue"/>
+              </a:rPr>
+              <a:t>101,142 views · 43 posts</a:t>
+            </a:r>
+          </a:p>
+        </p:txBody>
+      </p:sp>
+      <p:sp>
+        <p:nvSpPr>
+          <p:cNvPr id="12" name="TextBox 11"/>
+          <p:cNvSpPr txBox="1"/>
+          <p:nvPr/>
+        </p:nvSpPr>
+        <p:spPr>
+          <a:xfrm>
+            <a:off x="731520" y="2705217"/>
+            <a:ext cx="3200400" cy="291904"/>
+          </a:xfrm>
+          <a:prstGeom prst="rect">
+            <a:avLst/>
+          </a:prstGeom>
+          <a:noFill/>
+        </p:spPr>
+        <p:txBody>
+          <a:bodyPr wrap="square" lIns="0" rIns="0" tIns="0" bIns="0">
+            <a:spAutoFit/>
+          </a:bodyPr>
+          <a:lstStyle/>
+          <a:p>
+            <a:r>
+              <a:rPr sz="1100" b="1">
+                <a:solidFill>
+                  <a:srgbClr val="141833"/>
+                </a:solidFill>
+                <a:latin typeface="Helvetica Neue"/>
+              </a:rPr>
+              <a:t>Food &amp; Local Flavor</a:t>
+            </a:r>
+          </a:p>
+        </p:txBody>
+      </p:sp>
+      <p:sp>
+        <p:nvSpPr>
+          <p:cNvPr id="13" name="Rectangle 12"/>
+          <p:cNvSpPr/>
+          <p:nvPr/>
+        </p:nvSpPr>
+        <p:spPr>
+          <a:xfrm>
+            <a:off x="4114800" y="2768873"/>
+            <a:ext cx="2181229" cy="128016"/>
           </a:xfrm>
           <a:prstGeom prst="rect">
             <a:avLst/>
@@ -16195,13 +16307,13 @@
       </p:sp>
       <p:sp>
         <p:nvSpPr>
-          <p:cNvPr id="11" name="TextBox 10"/>
-          <p:cNvSpPr txBox="1"/>
-          <p:nvPr/>
-        </p:nvSpPr>
-        <p:spPr>
-          <a:xfrm>
-            <a:off x="6407065" y="2413312"/>
+          <p:cNvPr id="14" name="TextBox 13"/>
+          <p:cNvSpPr txBox="1"/>
+          <p:nvPr/>
+        </p:nvSpPr>
+        <p:spPr>
+          <a:xfrm>
+            <a:off x="6387469" y="2705217"/>
             <a:ext cx="2286000" cy="291904"/>
           </a:xfrm>
           <a:prstGeom prst="rect">
@@ -16222,20 +16334,20 @@
                 </a:solidFill>
                 <a:latin typeface="Helvetica Neue"/>
               </a:rPr>
-              <a:t>99,197 views · 63 posts</a:t>
-            </a:r>
-          </a:p>
-        </p:txBody>
-      </p:sp>
-      <p:sp>
-        <p:nvSpPr>
-          <p:cNvPr id="12" name="TextBox 11"/>
-          <p:cNvSpPr txBox="1"/>
-          <p:nvPr/>
-        </p:nvSpPr>
-        <p:spPr>
-          <a:xfrm>
-            <a:off x="731520" y="2705217"/>
+              <a:t>100,080 views · 63 posts</a:t>
+            </a:r>
+          </a:p>
+        </p:txBody>
+      </p:sp>
+      <p:sp>
+        <p:nvSpPr>
+          <p:cNvPr id="15" name="TextBox 14"/>
+          <p:cNvSpPr txBox="1"/>
+          <p:nvPr/>
+        </p:nvSpPr>
+        <p:spPr>
+          <a:xfrm>
+            <a:off x="731520" y="2997121"/>
             <a:ext cx="3200400" cy="291904"/>
           </a:xfrm>
           <a:prstGeom prst="rect">
@@ -16256,21 +16368,469 @@
                 </a:solidFill>
                 <a:latin typeface="Helvetica Neue"/>
               </a:rPr>
-              <a:t>Military Service</a:t>
-            </a:r>
-          </a:p>
-        </p:txBody>
-      </p:sp>
-      <p:sp>
-        <p:nvSpPr>
-          <p:cNvPr id="13" name="Rectangle 12"/>
+              <a:t>Truth &amp; Scandal Reporting</a:t>
+            </a:r>
+          </a:p>
+        </p:txBody>
+      </p:sp>
+      <p:sp>
+        <p:nvSpPr>
+          <p:cNvPr id="16" name="Rectangle 15"/>
           <p:cNvSpPr/>
           <p:nvPr/>
         </p:nvSpPr>
         <p:spPr>
           <a:xfrm>
-            <a:off x="4114800" y="2768873"/>
-            <a:ext cx="2055305" cy="128016"/>
+            <a:off x="4114800" y="3060778"/>
+            <a:ext cx="1948285" cy="128016"/>
+          </a:xfrm>
+          <a:prstGeom prst="rect">
+            <a:avLst/>
+          </a:prstGeom>
+          <a:solidFill>
+            <a:srgbClr val="990011"/>
+          </a:solidFill>
+          <a:ln>
+            <a:noFill/>
+          </a:ln>
+          <a:effectLst/>
+        </p:spPr>
+        <p:style>
+          <a:lnRef idx="1">
+            <a:schemeClr val="accent1"/>
+          </a:lnRef>
+          <a:fillRef idx="3">
+            <a:schemeClr val="accent1"/>
+          </a:fillRef>
+          <a:effectRef idx="2">
+            <a:schemeClr val="accent1"/>
+          </a:effectRef>
+          <a:fontRef idx="minor">
+            <a:schemeClr val="lt1"/>
+          </a:fontRef>
+        </p:style>
+        <p:txBody>
+          <a:bodyPr rtlCol="0" anchor="ctr"/>
+          <a:lstStyle/>
+          <a:p>
+            <a:pPr algn="ctr"/>
+          </a:p>
+        </p:txBody>
+      </p:sp>
+      <p:sp>
+        <p:nvSpPr>
+          <p:cNvPr id="17" name="TextBox 16"/>
+          <p:cNvSpPr txBox="1"/>
+          <p:nvPr/>
+        </p:nvSpPr>
+        <p:spPr>
+          <a:xfrm>
+            <a:off x="6154525" y="2997121"/>
+            <a:ext cx="2286000" cy="291904"/>
+          </a:xfrm>
+          <a:prstGeom prst="rect">
+            <a:avLst/>
+          </a:prstGeom>
+          <a:noFill/>
+        </p:spPr>
+        <p:txBody>
+          <a:bodyPr wrap="square" lIns="0" rIns="0" tIns="0" bIns="0">
+            <a:spAutoFit/>
+          </a:bodyPr>
+          <a:lstStyle/>
+          <a:p>
+            <a:r>
+              <a:rPr sz="900" b="0">
+                <a:solidFill>
+                  <a:srgbClr val="6B7082"/>
+                </a:solidFill>
+                <a:latin typeface="Helvetica Neue"/>
+              </a:rPr>
+              <a:t>89,392 views · 36 posts</a:t>
+            </a:r>
+          </a:p>
+        </p:txBody>
+      </p:sp>
+      <p:sp>
+        <p:nvSpPr>
+          <p:cNvPr id="18" name="TextBox 17"/>
+          <p:cNvSpPr txBox="1"/>
+          <p:nvPr/>
+        </p:nvSpPr>
+        <p:spPr>
+          <a:xfrm>
+            <a:off x="731520" y="3289026"/>
+            <a:ext cx="3200400" cy="291904"/>
+          </a:xfrm>
+          <a:prstGeom prst="rect">
+            <a:avLst/>
+          </a:prstGeom>
+          <a:noFill/>
+        </p:spPr>
+        <p:txBody>
+          <a:bodyPr wrap="square" lIns="0" rIns="0" tIns="0" bIns="0">
+            <a:spAutoFit/>
+          </a:bodyPr>
+          <a:lstStyle/>
+          <a:p>
+            <a:r>
+              <a:rPr sz="1100" b="1">
+                <a:solidFill>
+                  <a:srgbClr val="141833"/>
+                </a:solidFill>
+                <a:latin typeface="Helvetica Neue"/>
+              </a:rPr>
+              <a:t>Elections &amp; Judicial</a:t>
+            </a:r>
+          </a:p>
+        </p:txBody>
+      </p:sp>
+      <p:sp>
+        <p:nvSpPr>
+          <p:cNvPr id="19" name="Rectangle 18"/>
+          <p:cNvSpPr/>
+          <p:nvPr/>
+        </p:nvSpPr>
+        <p:spPr>
+          <a:xfrm>
+            <a:off x="4114800" y="3352682"/>
+            <a:ext cx="1693460" cy="128016"/>
+          </a:xfrm>
+          <a:prstGeom prst="rect">
+            <a:avLst/>
+          </a:prstGeom>
+          <a:solidFill>
+            <a:srgbClr val="2F3C7E"/>
+          </a:solidFill>
+          <a:ln>
+            <a:noFill/>
+          </a:ln>
+          <a:effectLst/>
+        </p:spPr>
+        <p:style>
+          <a:lnRef idx="1">
+            <a:schemeClr val="accent1"/>
+          </a:lnRef>
+          <a:fillRef idx="3">
+            <a:schemeClr val="accent1"/>
+          </a:fillRef>
+          <a:effectRef idx="2">
+            <a:schemeClr val="accent1"/>
+          </a:effectRef>
+          <a:fontRef idx="minor">
+            <a:schemeClr val="lt1"/>
+          </a:fontRef>
+        </p:style>
+        <p:txBody>
+          <a:bodyPr rtlCol="0" anchor="ctr"/>
+          <a:lstStyle/>
+          <a:p>
+            <a:pPr algn="ctr"/>
+          </a:p>
+        </p:txBody>
+      </p:sp>
+      <p:sp>
+        <p:nvSpPr>
+          <p:cNvPr id="20" name="TextBox 19"/>
+          <p:cNvSpPr txBox="1"/>
+          <p:nvPr/>
+        </p:nvSpPr>
+        <p:spPr>
+          <a:xfrm>
+            <a:off x="5899700" y="3289026"/>
+            <a:ext cx="2286000" cy="291904"/>
+          </a:xfrm>
+          <a:prstGeom prst="rect">
+            <a:avLst/>
+          </a:prstGeom>
+          <a:noFill/>
+        </p:spPr>
+        <p:txBody>
+          <a:bodyPr wrap="square" lIns="0" rIns="0" tIns="0" bIns="0">
+            <a:spAutoFit/>
+          </a:bodyPr>
+          <a:lstStyle/>
+          <a:p>
+            <a:r>
+              <a:rPr sz="900" b="0">
+                <a:solidFill>
+                  <a:srgbClr val="6B7082"/>
+                </a:solidFill>
+                <a:latin typeface="Helvetica Neue"/>
+              </a:rPr>
+              <a:t>77,700 views · 104 posts</a:t>
+            </a:r>
+          </a:p>
+        </p:txBody>
+      </p:sp>
+      <p:sp>
+        <p:nvSpPr>
+          <p:cNvPr id="21" name="TextBox 20"/>
+          <p:cNvSpPr txBox="1"/>
+          <p:nvPr/>
+        </p:nvSpPr>
+        <p:spPr>
+          <a:xfrm>
+            <a:off x="731520" y="3580931"/>
+            <a:ext cx="3200400" cy="291904"/>
+          </a:xfrm>
+          <a:prstGeom prst="rect">
+            <a:avLst/>
+          </a:prstGeom>
+          <a:noFill/>
+        </p:spPr>
+        <p:txBody>
+          <a:bodyPr wrap="square" lIns="0" rIns="0" tIns="0" bIns="0">
+            <a:spAutoFit/>
+          </a:bodyPr>
+          <a:lstStyle/>
+          <a:p>
+            <a:r>
+              <a:rPr sz="1100" b="1">
+                <a:solidFill>
+                  <a:srgbClr val="141833"/>
+                </a:solidFill>
+                <a:latin typeface="Helvetica Neue"/>
+              </a:rPr>
+              <a:t>Community &amp; Culture</a:t>
+            </a:r>
+          </a:p>
+        </p:txBody>
+      </p:sp>
+      <p:sp>
+        <p:nvSpPr>
+          <p:cNvPr id="22" name="Rectangle 21"/>
+          <p:cNvSpPr/>
+          <p:nvPr/>
+        </p:nvSpPr>
+        <p:spPr>
+          <a:xfrm>
+            <a:off x="4114800" y="3644587"/>
+            <a:ext cx="1486779" cy="128016"/>
+          </a:xfrm>
+          <a:prstGeom prst="rect">
+            <a:avLst/>
+          </a:prstGeom>
+          <a:solidFill>
+            <a:srgbClr val="141833"/>
+          </a:solidFill>
+          <a:ln>
+            <a:noFill/>
+          </a:ln>
+          <a:effectLst/>
+        </p:spPr>
+        <p:style>
+          <a:lnRef idx="1">
+            <a:schemeClr val="accent1"/>
+          </a:lnRef>
+          <a:fillRef idx="3">
+            <a:schemeClr val="accent1"/>
+          </a:fillRef>
+          <a:effectRef idx="2">
+            <a:schemeClr val="accent1"/>
+          </a:effectRef>
+          <a:fontRef idx="minor">
+            <a:schemeClr val="lt1"/>
+          </a:fontRef>
+        </p:style>
+        <p:txBody>
+          <a:bodyPr rtlCol="0" anchor="ctr"/>
+          <a:lstStyle/>
+          <a:p>
+            <a:pPr algn="ctr"/>
+          </a:p>
+        </p:txBody>
+      </p:sp>
+      <p:sp>
+        <p:nvSpPr>
+          <p:cNvPr id="23" name="TextBox 22"/>
+          <p:cNvSpPr txBox="1"/>
+          <p:nvPr/>
+        </p:nvSpPr>
+        <p:spPr>
+          <a:xfrm>
+            <a:off x="5693019" y="3580931"/>
+            <a:ext cx="2286000" cy="291904"/>
+          </a:xfrm>
+          <a:prstGeom prst="rect">
+            <a:avLst/>
+          </a:prstGeom>
+          <a:noFill/>
+        </p:spPr>
+        <p:txBody>
+          <a:bodyPr wrap="square" lIns="0" rIns="0" tIns="0" bIns="0">
+            <a:spAutoFit/>
+          </a:bodyPr>
+          <a:lstStyle/>
+          <a:p>
+            <a:r>
+              <a:rPr sz="900" b="0">
+                <a:solidFill>
+                  <a:srgbClr val="6B7082"/>
+                </a:solidFill>
+                <a:latin typeface="Helvetica Neue"/>
+              </a:rPr>
+              <a:t>68,217 views · 69 posts</a:t>
+            </a:r>
+          </a:p>
+        </p:txBody>
+      </p:sp>
+      <p:sp>
+        <p:nvSpPr>
+          <p:cNvPr id="24" name="TextBox 23"/>
+          <p:cNvSpPr txBox="1"/>
+          <p:nvPr/>
+        </p:nvSpPr>
+        <p:spPr>
+          <a:xfrm>
+            <a:off x="731520" y="3872835"/>
+            <a:ext cx="3200400" cy="291904"/>
+          </a:xfrm>
+          <a:prstGeom prst="rect">
+            <a:avLst/>
+          </a:prstGeom>
+          <a:noFill/>
+        </p:spPr>
+        <p:txBody>
+          <a:bodyPr wrap="square" lIns="0" rIns="0" tIns="0" bIns="0">
+            <a:spAutoFit/>
+          </a:bodyPr>
+          <a:lstStyle/>
+          <a:p>
+            <a:r>
+              <a:rPr sz="1100" b="1">
+                <a:solidFill>
+                  <a:srgbClr val="141833"/>
+                </a:solidFill>
+                <a:latin typeface="Helvetica Neue"/>
+              </a:rPr>
+              <a:t>FIFA / World Cup</a:t>
+            </a:r>
+          </a:p>
+        </p:txBody>
+      </p:sp>
+      <p:sp>
+        <p:nvSpPr>
+          <p:cNvPr id="25" name="Rectangle 24"/>
+          <p:cNvSpPr/>
+          <p:nvPr/>
+        </p:nvSpPr>
+        <p:spPr>
+          <a:xfrm>
+            <a:off x="4114800" y="3936491"/>
+            <a:ext cx="1389988" cy="128016"/>
+          </a:xfrm>
+          <a:prstGeom prst="rect">
+            <a:avLst/>
+          </a:prstGeom>
+          <a:solidFill>
+            <a:srgbClr val="6B7082"/>
+          </a:solidFill>
+          <a:ln>
+            <a:noFill/>
+          </a:ln>
+          <a:effectLst/>
+        </p:spPr>
+        <p:style>
+          <a:lnRef idx="1">
+            <a:schemeClr val="accent1"/>
+          </a:lnRef>
+          <a:fillRef idx="3">
+            <a:schemeClr val="accent1"/>
+          </a:fillRef>
+          <a:effectRef idx="2">
+            <a:schemeClr val="accent1"/>
+          </a:effectRef>
+          <a:fontRef idx="minor">
+            <a:schemeClr val="lt1"/>
+          </a:fontRef>
+        </p:style>
+        <p:txBody>
+          <a:bodyPr rtlCol="0" anchor="ctr"/>
+          <a:lstStyle/>
+          <a:p>
+            <a:pPr algn="ctr"/>
+          </a:p>
+        </p:txBody>
+      </p:sp>
+      <p:sp>
+        <p:nvSpPr>
+          <p:cNvPr id="26" name="TextBox 25"/>
+          <p:cNvSpPr txBox="1"/>
+          <p:nvPr/>
+        </p:nvSpPr>
+        <p:spPr>
+          <a:xfrm>
+            <a:off x="5596228" y="3872835"/>
+            <a:ext cx="2286000" cy="291904"/>
+          </a:xfrm>
+          <a:prstGeom prst="rect">
+            <a:avLst/>
+          </a:prstGeom>
+          <a:noFill/>
+        </p:spPr>
+        <p:txBody>
+          <a:bodyPr wrap="square" lIns="0" rIns="0" tIns="0" bIns="0">
+            <a:spAutoFit/>
+          </a:bodyPr>
+          <a:lstStyle/>
+          <a:p>
+            <a:r>
+              <a:rPr sz="900" b="0">
+                <a:solidFill>
+                  <a:srgbClr val="6B7082"/>
+                </a:solidFill>
+                <a:latin typeface="Helvetica Neue"/>
+              </a:rPr>
+              <a:t>63,776 views · 25 posts</a:t>
+            </a:r>
+          </a:p>
+        </p:txBody>
+      </p:sp>
+      <p:sp>
+        <p:nvSpPr>
+          <p:cNvPr id="27" name="TextBox 26"/>
+          <p:cNvSpPr txBox="1"/>
+          <p:nvPr/>
+        </p:nvSpPr>
+        <p:spPr>
+          <a:xfrm>
+            <a:off x="731520" y="4164740"/>
+            <a:ext cx="3200400" cy="291904"/>
+          </a:xfrm>
+          <a:prstGeom prst="rect">
+            <a:avLst/>
+          </a:prstGeom>
+          <a:noFill/>
+        </p:spPr>
+        <p:txBody>
+          <a:bodyPr wrap="square" lIns="0" rIns="0" tIns="0" bIns="0">
+            <a:spAutoFit/>
+          </a:bodyPr>
+          <a:lstStyle/>
+          <a:p>
+            <a:r>
+              <a:rPr sz="1100" b="1">
+                <a:solidFill>
+                  <a:srgbClr val="141833"/>
+                </a:solidFill>
+                <a:latin typeface="Helvetica Neue"/>
+              </a:rPr>
+              <a:t>Downtown Development</a:t>
+            </a:r>
+          </a:p>
+        </p:txBody>
+      </p:sp>
+      <p:sp>
+        <p:nvSpPr>
+          <p:cNvPr id="28" name="Rectangle 27"/>
+          <p:cNvSpPr/>
+          <p:nvPr/>
+        </p:nvSpPr>
+        <p:spPr>
+          <a:xfrm>
+            <a:off x="4114800" y="4228396"/>
+            <a:ext cx="1123917" cy="128016"/>
           </a:xfrm>
           <a:prstGeom prst="rect">
             <a:avLst/>
@@ -16307,13 +16867,13 @@
       </p:sp>
       <p:sp>
         <p:nvSpPr>
-          <p:cNvPr id="14" name="TextBox 13"/>
-          <p:cNvSpPr txBox="1"/>
-          <p:nvPr/>
-        </p:nvSpPr>
-        <p:spPr>
-          <a:xfrm>
-            <a:off x="6261545" y="2705217"/>
+          <p:cNvPr id="29" name="TextBox 28"/>
+          <p:cNvSpPr txBox="1"/>
+          <p:nvPr/>
+        </p:nvSpPr>
+        <p:spPr>
+          <a:xfrm>
+            <a:off x="5330157" y="4164740"/>
             <a:ext cx="2286000" cy="291904"/>
           </a:xfrm>
           <a:prstGeom prst="rect">
@@ -16334,20 +16894,20 @@
                 </a:solidFill>
                 <a:latin typeface="Helvetica Neue"/>
               </a:rPr>
-              <a:t>92,638 views · 34 posts</a:t>
-            </a:r>
-          </a:p>
-        </p:txBody>
-      </p:sp>
-      <p:sp>
-        <p:nvSpPr>
-          <p:cNvPr id="15" name="TextBox 14"/>
-          <p:cNvSpPr txBox="1"/>
-          <p:nvPr/>
-        </p:nvSpPr>
-        <p:spPr>
-          <a:xfrm>
-            <a:off x="731520" y="2997121"/>
+              <a:t>51,568 views · 20 posts</a:t>
+            </a:r>
+          </a:p>
+        </p:txBody>
+      </p:sp>
+      <p:sp>
+        <p:nvSpPr>
+          <p:cNvPr id="30" name="TextBox 29"/>
+          <p:cNvSpPr txBox="1"/>
+          <p:nvPr/>
+        </p:nvSpPr>
+        <p:spPr>
+          <a:xfrm>
+            <a:off x="731520" y="4456644"/>
             <a:ext cx="3200400" cy="291904"/>
           </a:xfrm>
           <a:prstGeom prst="rect">
@@ -16368,21 +16928,245 @@
                 </a:solidFill>
                 <a:latin typeface="Helvetica Neue"/>
               </a:rPr>
-              <a:t>Truth &amp; Scandal Reporting</a:t>
-            </a:r>
-          </a:p>
-        </p:txBody>
-      </p:sp>
-      <p:sp>
-        <p:nvSpPr>
-          <p:cNvPr id="16" name="Rectangle 15"/>
+              <a:t>Political Individual Highlights</a:t>
+            </a:r>
+          </a:p>
+        </p:txBody>
+      </p:sp>
+      <p:sp>
+        <p:nvSpPr>
+          <p:cNvPr id="31" name="Rectangle 30"/>
           <p:cNvSpPr/>
           <p:nvPr/>
         </p:nvSpPr>
         <p:spPr>
           <a:xfrm>
-            <a:off x="4114800" y="3060778"/>
-            <a:ext cx="1959326" cy="128016"/>
+            <a:off x="4114800" y="4520301"/>
+            <a:ext cx="648244" cy="128016"/>
+          </a:xfrm>
+          <a:prstGeom prst="rect">
+            <a:avLst/>
+          </a:prstGeom>
+          <a:solidFill>
+            <a:srgbClr val="2E86AB"/>
+          </a:solidFill>
+          <a:ln>
+            <a:noFill/>
+          </a:ln>
+          <a:effectLst/>
+        </p:spPr>
+        <p:style>
+          <a:lnRef idx="1">
+            <a:schemeClr val="accent1"/>
+          </a:lnRef>
+          <a:fillRef idx="3">
+            <a:schemeClr val="accent1"/>
+          </a:fillRef>
+          <a:effectRef idx="2">
+            <a:schemeClr val="accent1"/>
+          </a:effectRef>
+          <a:fontRef idx="minor">
+            <a:schemeClr val="lt1"/>
+          </a:fontRef>
+        </p:style>
+        <p:txBody>
+          <a:bodyPr rtlCol="0" anchor="ctr"/>
+          <a:lstStyle/>
+          <a:p>
+            <a:pPr algn="ctr"/>
+          </a:p>
+        </p:txBody>
+      </p:sp>
+      <p:sp>
+        <p:nvSpPr>
+          <p:cNvPr id="32" name="TextBox 31"/>
+          <p:cNvSpPr txBox="1"/>
+          <p:nvPr/>
+        </p:nvSpPr>
+        <p:spPr>
+          <a:xfrm>
+            <a:off x="4854484" y="4456644"/>
+            <a:ext cx="2286000" cy="291904"/>
+          </a:xfrm>
+          <a:prstGeom prst="rect">
+            <a:avLst/>
+          </a:prstGeom>
+          <a:noFill/>
+        </p:spPr>
+        <p:txBody>
+          <a:bodyPr wrap="square" lIns="0" rIns="0" tIns="0" bIns="0">
+            <a:spAutoFit/>
+          </a:bodyPr>
+          <a:lstStyle/>
+          <a:p>
+            <a:r>
+              <a:rPr sz="900" b="0">
+                <a:solidFill>
+                  <a:srgbClr val="6B7082"/>
+                </a:solidFill>
+                <a:latin typeface="Helvetica Neue"/>
+              </a:rPr>
+              <a:t>29,743 views · 32 posts</a:t>
+            </a:r>
+          </a:p>
+        </p:txBody>
+      </p:sp>
+      <p:sp>
+        <p:nvSpPr>
+          <p:cNvPr id="33" name="TextBox 32"/>
+          <p:cNvSpPr txBox="1"/>
+          <p:nvPr/>
+        </p:nvSpPr>
+        <p:spPr>
+          <a:xfrm>
+            <a:off x="731520" y="4748549"/>
+            <a:ext cx="3200400" cy="291904"/>
+          </a:xfrm>
+          <a:prstGeom prst="rect">
+            <a:avLst/>
+          </a:prstGeom>
+          <a:noFill/>
+        </p:spPr>
+        <p:txBody>
+          <a:bodyPr wrap="square" lIns="0" rIns="0" tIns="0" bIns="0">
+            <a:spAutoFit/>
+          </a:bodyPr>
+          <a:lstStyle/>
+          <a:p>
+            <a:r>
+              <a:rPr sz="1100" b="1">
+                <a:solidFill>
+                  <a:srgbClr val="141833"/>
+                </a:solidFill>
+                <a:latin typeface="Helvetica Neue"/>
+              </a:rPr>
+              <a:t>Resident Highlights</a:t>
+            </a:r>
+          </a:p>
+        </p:txBody>
+      </p:sp>
+      <p:sp>
+        <p:nvSpPr>
+          <p:cNvPr id="34" name="Rectangle 33"/>
+          <p:cNvSpPr/>
+          <p:nvPr/>
+        </p:nvSpPr>
+        <p:spPr>
+          <a:xfrm>
+            <a:off x="4114800" y="4812205"/>
+            <a:ext cx="179916" cy="128016"/>
+          </a:xfrm>
+          <a:prstGeom prst="rect">
+            <a:avLst/>
+          </a:prstGeom>
+          <a:solidFill>
+            <a:srgbClr val="1B7A43"/>
+          </a:solidFill>
+          <a:ln>
+            <a:noFill/>
+          </a:ln>
+          <a:effectLst/>
+        </p:spPr>
+        <p:style>
+          <a:lnRef idx="1">
+            <a:schemeClr val="accent1"/>
+          </a:lnRef>
+          <a:fillRef idx="3">
+            <a:schemeClr val="accent1"/>
+          </a:fillRef>
+          <a:effectRef idx="2">
+            <a:schemeClr val="accent1"/>
+          </a:effectRef>
+          <a:fontRef idx="minor">
+            <a:schemeClr val="lt1"/>
+          </a:fontRef>
+        </p:style>
+        <p:txBody>
+          <a:bodyPr rtlCol="0" anchor="ctr"/>
+          <a:lstStyle/>
+          <a:p>
+            <a:pPr algn="ctr"/>
+          </a:p>
+        </p:txBody>
+      </p:sp>
+      <p:sp>
+        <p:nvSpPr>
+          <p:cNvPr id="35" name="TextBox 34"/>
+          <p:cNvSpPr txBox="1"/>
+          <p:nvPr/>
+        </p:nvSpPr>
+        <p:spPr>
+          <a:xfrm>
+            <a:off x="4386156" y="4748549"/>
+            <a:ext cx="2286000" cy="291904"/>
+          </a:xfrm>
+          <a:prstGeom prst="rect">
+            <a:avLst/>
+          </a:prstGeom>
+          <a:noFill/>
+        </p:spPr>
+        <p:txBody>
+          <a:bodyPr wrap="square" lIns="0" rIns="0" tIns="0" bIns="0">
+            <a:spAutoFit/>
+          </a:bodyPr>
+          <a:lstStyle/>
+          <a:p>
+            <a:r>
+              <a:rPr sz="900" b="0">
+                <a:solidFill>
+                  <a:srgbClr val="6B7082"/>
+                </a:solidFill>
+                <a:latin typeface="Helvetica Neue"/>
+              </a:rPr>
+              <a:t>8,255 views · 8 posts</a:t>
+            </a:r>
+          </a:p>
+        </p:txBody>
+      </p:sp>
+      <p:sp>
+        <p:nvSpPr>
+          <p:cNvPr id="36" name="TextBox 35"/>
+          <p:cNvSpPr txBox="1"/>
+          <p:nvPr/>
+        </p:nvSpPr>
+        <p:spPr>
+          <a:xfrm>
+            <a:off x="731520" y="5040454"/>
+            <a:ext cx="3200400" cy="291904"/>
+          </a:xfrm>
+          <a:prstGeom prst="rect">
+            <a:avLst/>
+          </a:prstGeom>
+          <a:noFill/>
+        </p:spPr>
+        <p:txBody>
+          <a:bodyPr wrap="square" lIns="0" rIns="0" tIns="0" bIns="0">
+            <a:spAutoFit/>
+          </a:bodyPr>
+          <a:lstStyle/>
+          <a:p>
+            <a:r>
+              <a:rPr sz="1100" b="1">
+                <a:solidFill>
+                  <a:srgbClr val="141833"/>
+                </a:solidFill>
+                <a:latin typeface="Helvetica Neue"/>
+              </a:rPr>
+              <a:t>American Pride</a:t>
+            </a:r>
+          </a:p>
+        </p:txBody>
+      </p:sp>
+      <p:sp>
+        <p:nvSpPr>
+          <p:cNvPr id="37" name="Rectangle 36"/>
+          <p:cNvSpPr/>
+          <p:nvPr/>
+        </p:nvSpPr>
+        <p:spPr>
+          <a:xfrm>
+            <a:off x="4114800" y="5104110"/>
+            <a:ext cx="169324" cy="128016"/>
           </a:xfrm>
           <a:prstGeom prst="rect">
             <a:avLst/>
@@ -16419,13 +17203,13 @@
       </p:sp>
       <p:sp>
         <p:nvSpPr>
-          <p:cNvPr id="17" name="TextBox 16"/>
-          <p:cNvSpPr txBox="1"/>
-          <p:nvPr/>
-        </p:nvSpPr>
-        <p:spPr>
-          <a:xfrm>
-            <a:off x="6165566" y="2997121"/>
+          <p:cNvPr id="38" name="TextBox 37"/>
+          <p:cNvSpPr txBox="1"/>
+          <p:nvPr/>
+        </p:nvSpPr>
+        <p:spPr>
+          <a:xfrm>
+            <a:off x="4375564" y="5040454"/>
             <a:ext cx="2286000" cy="291904"/>
           </a:xfrm>
           <a:prstGeom prst="rect">
@@ -16446,20 +17230,20 @@
                 </a:solidFill>
                 <a:latin typeface="Helvetica Neue"/>
               </a:rPr>
-              <a:t>88,312 views · 35 posts</a:t>
-            </a:r>
-          </a:p>
-        </p:txBody>
-      </p:sp>
-      <p:sp>
-        <p:nvSpPr>
-          <p:cNvPr id="18" name="TextBox 17"/>
-          <p:cNvSpPr txBox="1"/>
-          <p:nvPr/>
-        </p:nvSpPr>
-        <p:spPr>
-          <a:xfrm>
-            <a:off x="731520" y="3289026"/>
+              <a:t>7,769 views · 15 posts</a:t>
+            </a:r>
+          </a:p>
+        </p:txBody>
+      </p:sp>
+      <p:sp>
+        <p:nvSpPr>
+          <p:cNvPr id="39" name="TextBox 38"/>
+          <p:cNvSpPr txBox="1"/>
+          <p:nvPr/>
+        </p:nvSpPr>
+        <p:spPr>
+          <a:xfrm>
+            <a:off x="731520" y="5332358"/>
             <a:ext cx="3200400" cy="291904"/>
           </a:xfrm>
           <a:prstGeom prst="rect">
@@ -16480,21 +17264,21 @@
                 </a:solidFill>
                 <a:latin typeface="Helvetica Neue"/>
               </a:rPr>
-              <a:t>Elections &amp; Judicial</a:t>
-            </a:r>
-          </a:p>
-        </p:txBody>
-      </p:sp>
-      <p:sp>
-        <p:nvSpPr>
-          <p:cNvPr id="19" name="Rectangle 18"/>
+              <a:t>Legislation &amp; Policy Watch</a:t>
+            </a:r>
+          </a:p>
+        </p:txBody>
+      </p:sp>
+      <p:sp>
+        <p:nvSpPr>
+          <p:cNvPr id="40" name="Rectangle 39"/>
           <p:cNvSpPr/>
           <p:nvPr/>
         </p:nvSpPr>
         <p:spPr>
           <a:xfrm>
-            <a:off x="4114800" y="3352682"/>
-            <a:ext cx="1635338" cy="128016"/>
+            <a:off x="4114800" y="5396015"/>
+            <a:ext cx="134953" cy="128016"/>
           </a:xfrm>
           <a:prstGeom prst="rect">
             <a:avLst/>
@@ -16531,797 +17315,13 @@
       </p:sp>
       <p:sp>
         <p:nvSpPr>
-          <p:cNvPr id="20" name="TextBox 19"/>
-          <p:cNvSpPr txBox="1"/>
-          <p:nvPr/>
-        </p:nvSpPr>
-        <p:spPr>
-          <a:xfrm>
-            <a:off x="5841578" y="3289026"/>
-            <a:ext cx="2286000" cy="291904"/>
-          </a:xfrm>
-          <a:prstGeom prst="rect">
-            <a:avLst/>
-          </a:prstGeom>
-          <a:noFill/>
-        </p:spPr>
-        <p:txBody>
-          <a:bodyPr wrap="square" lIns="0" rIns="0" tIns="0" bIns="0">
-            <a:spAutoFit/>
-          </a:bodyPr>
-          <a:lstStyle/>
-          <a:p>
-            <a:r>
-              <a:rPr sz="900" b="0">
-                <a:solidFill>
-                  <a:srgbClr val="6B7082"/>
-                </a:solidFill>
-                <a:latin typeface="Helvetica Neue"/>
-              </a:rPr>
-              <a:t>73,709 views · 98 posts</a:t>
-            </a:r>
-          </a:p>
-        </p:txBody>
-      </p:sp>
-      <p:sp>
-        <p:nvSpPr>
-          <p:cNvPr id="21" name="TextBox 20"/>
-          <p:cNvSpPr txBox="1"/>
-          <p:nvPr/>
-        </p:nvSpPr>
-        <p:spPr>
-          <a:xfrm>
-            <a:off x="731520" y="3580931"/>
-            <a:ext cx="3200400" cy="291904"/>
-          </a:xfrm>
-          <a:prstGeom prst="rect">
-            <a:avLst/>
-          </a:prstGeom>
-          <a:noFill/>
-        </p:spPr>
-        <p:txBody>
-          <a:bodyPr wrap="square" lIns="0" rIns="0" tIns="0" bIns="0">
-            <a:spAutoFit/>
-          </a:bodyPr>
-          <a:lstStyle/>
-          <a:p>
-            <a:r>
-              <a:rPr sz="1100" b="1">
-                <a:solidFill>
-                  <a:srgbClr val="141833"/>
-                </a:solidFill>
-                <a:latin typeface="Helvetica Neue"/>
-              </a:rPr>
-              <a:t>FIFA / World Cup</a:t>
-            </a:r>
-          </a:p>
-        </p:txBody>
-      </p:sp>
-      <p:sp>
-        <p:nvSpPr>
-          <p:cNvPr id="22" name="Rectangle 21"/>
-          <p:cNvSpPr/>
-          <p:nvPr/>
-        </p:nvSpPr>
-        <p:spPr>
-          <a:xfrm>
-            <a:off x="4114800" y="3644587"/>
-            <a:ext cx="1414960" cy="128016"/>
-          </a:xfrm>
-          <a:prstGeom prst="rect">
-            <a:avLst/>
-          </a:prstGeom>
-          <a:solidFill>
-            <a:srgbClr val="6B7082"/>
-          </a:solidFill>
-          <a:ln>
-            <a:noFill/>
-          </a:ln>
-          <a:effectLst/>
-        </p:spPr>
-        <p:style>
-          <a:lnRef idx="1">
-            <a:schemeClr val="accent1"/>
-          </a:lnRef>
-          <a:fillRef idx="3">
-            <a:schemeClr val="accent1"/>
-          </a:fillRef>
-          <a:effectRef idx="2">
-            <a:schemeClr val="accent1"/>
-          </a:effectRef>
-          <a:fontRef idx="minor">
-            <a:schemeClr val="lt1"/>
-          </a:fontRef>
-        </p:style>
-        <p:txBody>
-          <a:bodyPr rtlCol="0" anchor="ctr"/>
-          <a:lstStyle/>
-          <a:p>
-            <a:pPr algn="ctr"/>
-          </a:p>
-        </p:txBody>
-      </p:sp>
-      <p:sp>
-        <p:nvSpPr>
-          <p:cNvPr id="23" name="TextBox 22"/>
-          <p:cNvSpPr txBox="1"/>
-          <p:nvPr/>
-        </p:nvSpPr>
-        <p:spPr>
-          <a:xfrm>
-            <a:off x="5621200" y="3580931"/>
-            <a:ext cx="2286000" cy="291904"/>
-          </a:xfrm>
-          <a:prstGeom prst="rect">
-            <a:avLst/>
-          </a:prstGeom>
-          <a:noFill/>
-        </p:spPr>
-        <p:txBody>
-          <a:bodyPr wrap="square" lIns="0" rIns="0" tIns="0" bIns="0">
-            <a:spAutoFit/>
-          </a:bodyPr>
-          <a:lstStyle/>
-          <a:p>
-            <a:r>
-              <a:rPr sz="900" b="0">
-                <a:solidFill>
-                  <a:srgbClr val="6B7082"/>
-                </a:solidFill>
-                <a:latin typeface="Helvetica Neue"/>
-              </a:rPr>
-              <a:t>63,776 views · 25 posts</a:t>
-            </a:r>
-          </a:p>
-        </p:txBody>
-      </p:sp>
-      <p:sp>
-        <p:nvSpPr>
-          <p:cNvPr id="24" name="TextBox 23"/>
-          <p:cNvSpPr txBox="1"/>
-          <p:nvPr/>
-        </p:nvSpPr>
-        <p:spPr>
-          <a:xfrm>
-            <a:off x="731520" y="3872835"/>
-            <a:ext cx="3200400" cy="291904"/>
-          </a:xfrm>
-          <a:prstGeom prst="rect">
-            <a:avLst/>
-          </a:prstGeom>
-          <a:noFill/>
-        </p:spPr>
-        <p:txBody>
-          <a:bodyPr wrap="square" lIns="0" rIns="0" tIns="0" bIns="0">
-            <a:spAutoFit/>
-          </a:bodyPr>
-          <a:lstStyle/>
-          <a:p>
-            <a:r>
-              <a:rPr sz="1100" b="1">
-                <a:solidFill>
-                  <a:srgbClr val="141833"/>
-                </a:solidFill>
-                <a:latin typeface="Helvetica Neue"/>
-              </a:rPr>
-              <a:t>Community &amp; Culture</a:t>
-            </a:r>
-          </a:p>
-        </p:txBody>
-      </p:sp>
-      <p:sp>
-        <p:nvSpPr>
-          <p:cNvPr id="25" name="Rectangle 24"/>
-          <p:cNvSpPr/>
-          <p:nvPr/>
-        </p:nvSpPr>
-        <p:spPr>
-          <a:xfrm>
-            <a:off x="4114800" y="3936491"/>
-            <a:ext cx="1276672" cy="128016"/>
-          </a:xfrm>
-          <a:prstGeom prst="rect">
-            <a:avLst/>
-          </a:prstGeom>
-          <a:solidFill>
-            <a:srgbClr val="141833"/>
-          </a:solidFill>
-          <a:ln>
-            <a:noFill/>
-          </a:ln>
-          <a:effectLst/>
-        </p:spPr>
-        <p:style>
-          <a:lnRef idx="1">
-            <a:schemeClr val="accent1"/>
-          </a:lnRef>
-          <a:fillRef idx="3">
-            <a:schemeClr val="accent1"/>
-          </a:fillRef>
-          <a:effectRef idx="2">
-            <a:schemeClr val="accent1"/>
-          </a:effectRef>
-          <a:fontRef idx="minor">
-            <a:schemeClr val="lt1"/>
-          </a:fontRef>
-        </p:style>
-        <p:txBody>
-          <a:bodyPr rtlCol="0" anchor="ctr"/>
-          <a:lstStyle/>
-          <a:p>
-            <a:pPr algn="ctr"/>
-          </a:p>
-        </p:txBody>
-      </p:sp>
-      <p:sp>
-        <p:nvSpPr>
-          <p:cNvPr id="26" name="TextBox 25"/>
-          <p:cNvSpPr txBox="1"/>
-          <p:nvPr/>
-        </p:nvSpPr>
-        <p:spPr>
-          <a:xfrm>
-            <a:off x="5482912" y="3872835"/>
-            <a:ext cx="2286000" cy="291904"/>
-          </a:xfrm>
-          <a:prstGeom prst="rect">
-            <a:avLst/>
-          </a:prstGeom>
-          <a:noFill/>
-        </p:spPr>
-        <p:txBody>
-          <a:bodyPr wrap="square" lIns="0" rIns="0" tIns="0" bIns="0">
-            <a:spAutoFit/>
-          </a:bodyPr>
-          <a:lstStyle/>
-          <a:p>
-            <a:r>
-              <a:rPr sz="900" b="0">
-                <a:solidFill>
-                  <a:srgbClr val="6B7082"/>
-                </a:solidFill>
-                <a:latin typeface="Helvetica Neue"/>
-              </a:rPr>
-              <a:t>57,543 views · 62 posts</a:t>
-            </a:r>
-          </a:p>
-        </p:txBody>
-      </p:sp>
-      <p:sp>
-        <p:nvSpPr>
-          <p:cNvPr id="27" name="TextBox 26"/>
-          <p:cNvSpPr txBox="1"/>
-          <p:nvPr/>
-        </p:nvSpPr>
-        <p:spPr>
-          <a:xfrm>
-            <a:off x="731520" y="4164740"/>
-            <a:ext cx="3200400" cy="291904"/>
-          </a:xfrm>
-          <a:prstGeom prst="rect">
-            <a:avLst/>
-          </a:prstGeom>
-          <a:noFill/>
-        </p:spPr>
-        <p:txBody>
-          <a:bodyPr wrap="square" lIns="0" rIns="0" tIns="0" bIns="0">
-            <a:spAutoFit/>
-          </a:bodyPr>
-          <a:lstStyle/>
-          <a:p>
-            <a:r>
-              <a:rPr sz="1100" b="1">
-                <a:solidFill>
-                  <a:srgbClr val="141833"/>
-                </a:solidFill>
-                <a:latin typeface="Helvetica Neue"/>
-              </a:rPr>
-              <a:t>Downtown Development</a:t>
-            </a:r>
-          </a:p>
-        </p:txBody>
-      </p:sp>
-      <p:sp>
-        <p:nvSpPr>
-          <p:cNvPr id="28" name="Rectangle 27"/>
-          <p:cNvSpPr/>
-          <p:nvPr/>
-        </p:nvSpPr>
-        <p:spPr>
-          <a:xfrm>
-            <a:off x="4114800" y="4228396"/>
-            <a:ext cx="1132039" cy="128016"/>
-          </a:xfrm>
-          <a:prstGeom prst="rect">
-            <a:avLst/>
-          </a:prstGeom>
-          <a:solidFill>
-            <a:srgbClr val="C9A227"/>
-          </a:solidFill>
-          <a:ln>
-            <a:noFill/>
-          </a:ln>
-          <a:effectLst/>
-        </p:spPr>
-        <p:style>
-          <a:lnRef idx="1">
-            <a:schemeClr val="accent1"/>
-          </a:lnRef>
-          <a:fillRef idx="3">
-            <a:schemeClr val="accent1"/>
-          </a:fillRef>
-          <a:effectRef idx="2">
-            <a:schemeClr val="accent1"/>
-          </a:effectRef>
-          <a:fontRef idx="minor">
-            <a:schemeClr val="lt1"/>
-          </a:fontRef>
-        </p:style>
-        <p:txBody>
-          <a:bodyPr rtlCol="0" anchor="ctr"/>
-          <a:lstStyle/>
-          <a:p>
-            <a:pPr algn="ctr"/>
-          </a:p>
-        </p:txBody>
-      </p:sp>
-      <p:sp>
-        <p:nvSpPr>
-          <p:cNvPr id="29" name="TextBox 28"/>
-          <p:cNvSpPr txBox="1"/>
-          <p:nvPr/>
-        </p:nvSpPr>
-        <p:spPr>
-          <a:xfrm>
-            <a:off x="5338279" y="4164740"/>
-            <a:ext cx="2286000" cy="291904"/>
-          </a:xfrm>
-          <a:prstGeom prst="rect">
-            <a:avLst/>
-          </a:prstGeom>
-          <a:noFill/>
-        </p:spPr>
-        <p:txBody>
-          <a:bodyPr wrap="square" lIns="0" rIns="0" tIns="0" bIns="0">
-            <a:spAutoFit/>
-          </a:bodyPr>
-          <a:lstStyle/>
-          <a:p>
-            <a:r>
-              <a:rPr sz="900" b="0">
-                <a:solidFill>
-                  <a:srgbClr val="6B7082"/>
-                </a:solidFill>
-                <a:latin typeface="Helvetica Neue"/>
-              </a:rPr>
-              <a:t>51,024 views · 20 posts</a:t>
-            </a:r>
-          </a:p>
-        </p:txBody>
-      </p:sp>
-      <p:sp>
-        <p:nvSpPr>
-          <p:cNvPr id="30" name="TextBox 29"/>
-          <p:cNvSpPr txBox="1"/>
-          <p:nvPr/>
-        </p:nvSpPr>
-        <p:spPr>
-          <a:xfrm>
-            <a:off x="731520" y="4456644"/>
-            <a:ext cx="3200400" cy="291904"/>
-          </a:xfrm>
-          <a:prstGeom prst="rect">
-            <a:avLst/>
-          </a:prstGeom>
-          <a:noFill/>
-        </p:spPr>
-        <p:txBody>
-          <a:bodyPr wrap="square" lIns="0" rIns="0" tIns="0" bIns="0">
-            <a:spAutoFit/>
-          </a:bodyPr>
-          <a:lstStyle/>
-          <a:p>
-            <a:r>
-              <a:rPr sz="1100" b="1">
-                <a:solidFill>
-                  <a:srgbClr val="141833"/>
-                </a:solidFill>
-                <a:latin typeface="Helvetica Neue"/>
-              </a:rPr>
-              <a:t>Political Individual Highlights</a:t>
-            </a:r>
-          </a:p>
-        </p:txBody>
-      </p:sp>
-      <p:sp>
-        <p:nvSpPr>
-          <p:cNvPr id="31" name="Rectangle 30"/>
-          <p:cNvSpPr/>
-          <p:nvPr/>
-        </p:nvSpPr>
-        <p:spPr>
-          <a:xfrm>
-            <a:off x="4114800" y="4520301"/>
-            <a:ext cx="642673" cy="128016"/>
-          </a:xfrm>
-          <a:prstGeom prst="rect">
-            <a:avLst/>
-          </a:prstGeom>
-          <a:solidFill>
-            <a:srgbClr val="2E86AB"/>
-          </a:solidFill>
-          <a:ln>
-            <a:noFill/>
-          </a:ln>
-          <a:effectLst/>
-        </p:spPr>
-        <p:style>
-          <a:lnRef idx="1">
-            <a:schemeClr val="accent1"/>
-          </a:lnRef>
-          <a:fillRef idx="3">
-            <a:schemeClr val="accent1"/>
-          </a:fillRef>
-          <a:effectRef idx="2">
-            <a:schemeClr val="accent1"/>
-          </a:effectRef>
-          <a:fontRef idx="minor">
-            <a:schemeClr val="lt1"/>
-          </a:fontRef>
-        </p:style>
-        <p:txBody>
-          <a:bodyPr rtlCol="0" anchor="ctr"/>
-          <a:lstStyle/>
-          <a:p>
-            <a:pPr algn="ctr"/>
-          </a:p>
-        </p:txBody>
-      </p:sp>
-      <p:sp>
-        <p:nvSpPr>
-          <p:cNvPr id="32" name="TextBox 31"/>
-          <p:cNvSpPr txBox="1"/>
-          <p:nvPr/>
-        </p:nvSpPr>
-        <p:spPr>
-          <a:xfrm>
-            <a:off x="4848913" y="4456644"/>
-            <a:ext cx="2286000" cy="291904"/>
-          </a:xfrm>
-          <a:prstGeom prst="rect">
-            <a:avLst/>
-          </a:prstGeom>
-          <a:noFill/>
-        </p:spPr>
-        <p:txBody>
-          <a:bodyPr wrap="square" lIns="0" rIns="0" tIns="0" bIns="0">
-            <a:spAutoFit/>
-          </a:bodyPr>
-          <a:lstStyle/>
-          <a:p>
-            <a:r>
-              <a:rPr sz="900" b="0">
-                <a:solidFill>
-                  <a:srgbClr val="6B7082"/>
-                </a:solidFill>
-                <a:latin typeface="Helvetica Neue"/>
-              </a:rPr>
-              <a:t>28,967 views · 32 posts</a:t>
-            </a:r>
-          </a:p>
-        </p:txBody>
-      </p:sp>
-      <p:sp>
-        <p:nvSpPr>
-          <p:cNvPr id="33" name="TextBox 32"/>
-          <p:cNvSpPr txBox="1"/>
-          <p:nvPr/>
-        </p:nvSpPr>
-        <p:spPr>
-          <a:xfrm>
-            <a:off x="731520" y="4748549"/>
-            <a:ext cx="3200400" cy="291904"/>
-          </a:xfrm>
-          <a:prstGeom prst="rect">
-            <a:avLst/>
-          </a:prstGeom>
-          <a:noFill/>
-        </p:spPr>
-        <p:txBody>
-          <a:bodyPr wrap="square" lIns="0" rIns="0" tIns="0" bIns="0">
-            <a:spAutoFit/>
-          </a:bodyPr>
-          <a:lstStyle/>
-          <a:p>
-            <a:r>
-              <a:rPr sz="1100" b="1">
-                <a:solidFill>
-                  <a:srgbClr val="141833"/>
-                </a:solidFill>
-                <a:latin typeface="Helvetica Neue"/>
-              </a:rPr>
-              <a:t>Resident Highlights</a:t>
-            </a:r>
-          </a:p>
-        </p:txBody>
-      </p:sp>
-      <p:sp>
-        <p:nvSpPr>
-          <p:cNvPr id="34" name="Rectangle 33"/>
-          <p:cNvSpPr/>
-          <p:nvPr/>
-        </p:nvSpPr>
-        <p:spPr>
-          <a:xfrm>
-            <a:off x="4114800" y="4812205"/>
-            <a:ext cx="183148" cy="128016"/>
-          </a:xfrm>
-          <a:prstGeom prst="rect">
-            <a:avLst/>
-          </a:prstGeom>
-          <a:solidFill>
-            <a:srgbClr val="1B7A43"/>
-          </a:solidFill>
-          <a:ln>
-            <a:noFill/>
-          </a:ln>
-          <a:effectLst/>
-        </p:spPr>
-        <p:style>
-          <a:lnRef idx="1">
-            <a:schemeClr val="accent1"/>
-          </a:lnRef>
-          <a:fillRef idx="3">
-            <a:schemeClr val="accent1"/>
-          </a:fillRef>
-          <a:effectRef idx="2">
-            <a:schemeClr val="accent1"/>
-          </a:effectRef>
-          <a:fontRef idx="minor">
-            <a:schemeClr val="lt1"/>
-          </a:fontRef>
-        </p:style>
-        <p:txBody>
-          <a:bodyPr rtlCol="0" anchor="ctr"/>
-          <a:lstStyle/>
-          <a:p>
-            <a:pPr algn="ctr"/>
-          </a:p>
-        </p:txBody>
-      </p:sp>
-      <p:sp>
-        <p:nvSpPr>
-          <p:cNvPr id="35" name="TextBox 34"/>
-          <p:cNvSpPr txBox="1"/>
-          <p:nvPr/>
-        </p:nvSpPr>
-        <p:spPr>
-          <a:xfrm>
-            <a:off x="4389388" y="4748549"/>
-            <a:ext cx="2286000" cy="291904"/>
-          </a:xfrm>
-          <a:prstGeom prst="rect">
-            <a:avLst/>
-          </a:prstGeom>
-          <a:noFill/>
-        </p:spPr>
-        <p:txBody>
-          <a:bodyPr wrap="square" lIns="0" rIns="0" tIns="0" bIns="0">
-            <a:spAutoFit/>
-          </a:bodyPr>
-          <a:lstStyle/>
-          <a:p>
-            <a:r>
-              <a:rPr sz="900" b="0">
-                <a:solidFill>
-                  <a:srgbClr val="6B7082"/>
-                </a:solidFill>
-                <a:latin typeface="Helvetica Neue"/>
-              </a:rPr>
-              <a:t>8,255 views · 8 posts</a:t>
-            </a:r>
-          </a:p>
-        </p:txBody>
-      </p:sp>
-      <p:sp>
-        <p:nvSpPr>
-          <p:cNvPr id="36" name="TextBox 35"/>
-          <p:cNvSpPr txBox="1"/>
-          <p:nvPr/>
-        </p:nvSpPr>
-        <p:spPr>
-          <a:xfrm>
-            <a:off x="731520" y="5040454"/>
-            <a:ext cx="3200400" cy="291904"/>
-          </a:xfrm>
-          <a:prstGeom prst="rect">
-            <a:avLst/>
-          </a:prstGeom>
-          <a:noFill/>
-        </p:spPr>
-        <p:txBody>
-          <a:bodyPr wrap="square" lIns="0" rIns="0" tIns="0" bIns="0">
-            <a:spAutoFit/>
-          </a:bodyPr>
-          <a:lstStyle/>
-          <a:p>
-            <a:r>
-              <a:rPr sz="1100" b="1">
-                <a:solidFill>
-                  <a:srgbClr val="141833"/>
-                </a:solidFill>
-                <a:latin typeface="Helvetica Neue"/>
-              </a:rPr>
-              <a:t>American Pride</a:t>
-            </a:r>
-          </a:p>
-        </p:txBody>
-      </p:sp>
-      <p:sp>
-        <p:nvSpPr>
-          <p:cNvPr id="37" name="Rectangle 36"/>
-          <p:cNvSpPr/>
-          <p:nvPr/>
-        </p:nvSpPr>
-        <p:spPr>
-          <a:xfrm>
-            <a:off x="4114800" y="5104110"/>
-            <a:ext cx="172366" cy="128016"/>
-          </a:xfrm>
-          <a:prstGeom prst="rect">
-            <a:avLst/>
-          </a:prstGeom>
-          <a:solidFill>
-            <a:srgbClr val="990011"/>
-          </a:solidFill>
-          <a:ln>
-            <a:noFill/>
-          </a:ln>
-          <a:effectLst/>
-        </p:spPr>
-        <p:style>
-          <a:lnRef idx="1">
-            <a:schemeClr val="accent1"/>
-          </a:lnRef>
-          <a:fillRef idx="3">
-            <a:schemeClr val="accent1"/>
-          </a:fillRef>
-          <a:effectRef idx="2">
-            <a:schemeClr val="accent1"/>
-          </a:effectRef>
-          <a:fontRef idx="minor">
-            <a:schemeClr val="lt1"/>
-          </a:fontRef>
-        </p:style>
-        <p:txBody>
-          <a:bodyPr rtlCol="0" anchor="ctr"/>
-          <a:lstStyle/>
-          <a:p>
-            <a:pPr algn="ctr"/>
-          </a:p>
-        </p:txBody>
-      </p:sp>
-      <p:sp>
-        <p:nvSpPr>
-          <p:cNvPr id="38" name="TextBox 37"/>
-          <p:cNvSpPr txBox="1"/>
-          <p:nvPr/>
-        </p:nvSpPr>
-        <p:spPr>
-          <a:xfrm>
-            <a:off x="4378606" y="5040454"/>
-            <a:ext cx="2286000" cy="291904"/>
-          </a:xfrm>
-          <a:prstGeom prst="rect">
-            <a:avLst/>
-          </a:prstGeom>
-          <a:noFill/>
-        </p:spPr>
-        <p:txBody>
-          <a:bodyPr wrap="square" lIns="0" rIns="0" tIns="0" bIns="0">
-            <a:spAutoFit/>
-          </a:bodyPr>
-          <a:lstStyle/>
-          <a:p>
-            <a:r>
-              <a:rPr sz="900" b="0">
-                <a:solidFill>
-                  <a:srgbClr val="6B7082"/>
-                </a:solidFill>
-                <a:latin typeface="Helvetica Neue"/>
-              </a:rPr>
-              <a:t>7,769 views · 15 posts</a:t>
-            </a:r>
-          </a:p>
-        </p:txBody>
-      </p:sp>
-      <p:sp>
-        <p:nvSpPr>
-          <p:cNvPr id="39" name="TextBox 38"/>
-          <p:cNvSpPr txBox="1"/>
-          <p:nvPr/>
-        </p:nvSpPr>
-        <p:spPr>
-          <a:xfrm>
-            <a:off x="731520" y="5332358"/>
-            <a:ext cx="3200400" cy="291904"/>
-          </a:xfrm>
-          <a:prstGeom prst="rect">
-            <a:avLst/>
-          </a:prstGeom>
-          <a:noFill/>
-        </p:spPr>
-        <p:txBody>
-          <a:bodyPr wrap="square" lIns="0" rIns="0" tIns="0" bIns="0">
-            <a:spAutoFit/>
-          </a:bodyPr>
-          <a:lstStyle/>
-          <a:p>
-            <a:r>
-              <a:rPr sz="1100" b="1">
-                <a:solidFill>
-                  <a:srgbClr val="141833"/>
-                </a:solidFill>
-                <a:latin typeface="Helvetica Neue"/>
-              </a:rPr>
-              <a:t>Legislation &amp; Policy Watch</a:t>
-            </a:r>
-          </a:p>
-        </p:txBody>
-      </p:sp>
-      <p:sp>
-        <p:nvSpPr>
-          <p:cNvPr id="40" name="Rectangle 39"/>
-          <p:cNvSpPr/>
-          <p:nvPr/>
-        </p:nvSpPr>
-        <p:spPr>
-          <a:xfrm>
-            <a:off x="4114800" y="5396015"/>
-            <a:ext cx="137378" cy="128016"/>
-          </a:xfrm>
-          <a:prstGeom prst="rect">
-            <a:avLst/>
-          </a:prstGeom>
-          <a:solidFill>
-            <a:srgbClr val="2F3C7E"/>
-          </a:solidFill>
-          <a:ln>
-            <a:noFill/>
-          </a:ln>
-          <a:effectLst/>
-        </p:spPr>
-        <p:style>
-          <a:lnRef idx="1">
-            <a:schemeClr val="accent1"/>
-          </a:lnRef>
-          <a:fillRef idx="3">
-            <a:schemeClr val="accent1"/>
-          </a:fillRef>
-          <a:effectRef idx="2">
-            <a:schemeClr val="accent1"/>
-          </a:effectRef>
-          <a:fontRef idx="minor">
-            <a:schemeClr val="lt1"/>
-          </a:fontRef>
-        </p:style>
-        <p:txBody>
-          <a:bodyPr rtlCol="0" anchor="ctr"/>
-          <a:lstStyle/>
-          <a:p>
-            <a:pPr algn="ctr"/>
-          </a:p>
-        </p:txBody>
-      </p:sp>
-      <p:sp>
-        <p:nvSpPr>
           <p:cNvPr id="41" name="TextBox 40"/>
           <p:cNvSpPr txBox="1"/>
           <p:nvPr/>
         </p:nvSpPr>
         <p:spPr>
           <a:xfrm>
-            <a:off x="4343618" y="5332358"/>
+            <a:off x="4341193" y="5332358"/>
             <a:ext cx="2286000" cy="291904"/>
           </a:xfrm>
           <a:prstGeom prst="rect">
@@ -17826,7 +17826,7 @@
                 </a:solidFill>
                 <a:latin typeface="Georgia"/>
               </a:rPr>
-              <a:t>Food &amp; Local Flavor</a:t>
+              <a:t>Military Service</a:t>
             </a:r>
           </a:p>
         </p:txBody>
@@ -17860,7 +17860,7 @@
                 </a:solidFill>
                 <a:latin typeface="Helvetica Neue"/>
               </a:rPr>
-              <a:t>Restaurants, chefs, dining — the everyday Downey. Pop's Wings, Porto's, Gyu, etc.</a:t>
+              <a:t>Army/JROTC/veteran interviews — the human side of military service (NOT policy — that's Legislation Watch).</a:t>
             </a:r>
           </a:p>
         </p:txBody>
@@ -17890,11 +17890,11 @@
             <a:r>
               <a:rPr sz="900" b="1">
                 <a:solidFill>
-                  <a:srgbClr val="1B7A43"/>
-                </a:solidFill>
-                <a:latin typeface="Helvetica Neue"/>
-              </a:rPr>
-              <a:t>AUDIENCE (theoretical): Everyday appeal · Broad, skews Young (18-40) foodie</a:t>
+                  <a:srgbClr val="C9A227"/>
+                </a:solidFill>
+                <a:latin typeface="Helvetica Neue"/>
+              </a:rPr>
+              <a:t>AUDIENCE (theoretical): Traditional / patriotic · Middle (40-55) + Older (55+), veterans + families</a:t>
             </a:r>
           </a:p>
         </p:txBody>
@@ -17958,7 +17958,7 @@
             <a:avLst/>
           </a:prstGeom>
           <a:solidFill>
-            <a:srgbClr val="1B7A43"/>
+            <a:srgbClr val="C9A227"/>
           </a:solidFill>
           <a:ln>
             <a:noFill/>
@@ -18012,7 +18012,7 @@
             <a:r>
               <a:rPr sz="1100" b="1">
                 <a:solidFill>
-                  <a:srgbClr val="1B7A43"/>
+                  <a:srgbClr val="C9A227"/>
                 </a:solidFill>
                 <a:latin typeface="Helvetica Neue"/>
               </a:rPr>
@@ -18050,7 +18050,7 @@
                 </a:solidFill>
                 <a:latin typeface="Georgia"/>
               </a:rPr>
-              <a:t>99,197</a:t>
+              <a:t>101,142</a:t>
             </a:r>
           </a:p>
         </p:txBody>
@@ -18084,7 +18084,7 @@
                 </a:solidFill>
                 <a:latin typeface="Helvetica Neue"/>
               </a:rPr>
-              <a:t>63 posts · 3,182 likes</a:t>
+              <a:t>43 posts · 4,441 likes</a:t>
             </a:r>
           </a:p>
         </p:txBody>
@@ -18118,7 +18118,7 @@
                 </a:solidFill>
                 <a:latin typeface="Helvetica Neue"/>
               </a:rPr>
-              <a:t>1,575 average views per post</a:t>
+              <a:t>2,352 average views per post</a:t>
             </a:r>
           </a:p>
         </p:txBody>
@@ -18148,7 +18148,7 @@
             <a:r>
               <a:rPr sz="1100" b="1">
                 <a:solidFill>
-                  <a:srgbClr val="1B7A43"/>
+                  <a:srgbClr val="C9A227"/>
                 </a:solidFill>
                 <a:latin typeface="Helvetica Neue"/>
               </a:rPr>
@@ -18216,7 +18216,7 @@
             <a:avLst/>
           </a:prstGeom>
           <a:solidFill>
-            <a:srgbClr val="1B7A43"/>
+            <a:srgbClr val="C9A227"/>
           </a:solidFill>
           <a:ln>
             <a:noFill/>
@@ -18270,11 +18270,11 @@
             <a:r>
               <a:rPr sz="1000" b="1">
                 <a:solidFill>
-                  <a:srgbClr val="1B7A43"/>
-                </a:solidFill>
-                <a:latin typeface="Helvetica Neue"/>
-              </a:rPr>
-              <a:t>#1  ·  TT  ·  13,600 views</a:t>
+                  <a:srgbClr val="C9A227"/>
+                </a:solidFill>
+                <a:latin typeface="Helvetica Neue"/>
+              </a:rPr>
+              <a:t>#1  ·  TT  ·  37,900 views</a:t>
             </a:r>
           </a:p>
         </p:txBody>
@@ -18308,7 +18308,7 @@
                 </a:solidFill>
                 <a:latin typeface="Helvetica Neue"/>
               </a:rPr>
-              <a:t>Mama Lu's is coming to Downey! Asian community favorite, famous for their tenderloin. Get </a:t>
+              <a:t>Combat jobs aren't for everyone. See how your MOS determines deployment likelihood and wha</a:t>
             </a:r>
           </a:p>
         </p:txBody>
@@ -18372,7 +18372,7 @@
             <a:avLst/>
           </a:prstGeom>
           <a:solidFill>
-            <a:srgbClr val="1B7A43"/>
+            <a:srgbClr val="C9A227"/>
           </a:solidFill>
           <a:ln>
             <a:noFill/>
@@ -18426,11 +18426,11 @@
             <a:r>
               <a:rPr sz="1000" b="1">
                 <a:solidFill>
-                  <a:srgbClr val="1B7A43"/>
-                </a:solidFill>
-                <a:latin typeface="Helvetica Neue"/>
-              </a:rPr>
-              <a:t>#2  ·  TT  ·  8,352 views</a:t>
+                  <a:srgbClr val="C9A227"/>
+                </a:solidFill>
+                <a:latin typeface="Helvetica Neue"/>
+              </a:rPr>
+              <a:t>#2  ·  TT  ·  22,300 views</a:t>
             </a:r>
           </a:p>
         </p:txBody>
@@ -18464,7 +18464,7 @@
                 </a:solidFill>
                 <a:latin typeface="Helvetica Neue"/>
               </a:rPr>
-              <a:t>Pop's Wings just opened and it's a must-try! Their pastrami sandwich with sweet potato fri</a:t>
+              <a:t>From Las Vegas to Battalion Commander: A journey fueled by college dreams and military opp</a:t>
             </a:r>
           </a:p>
         </p:txBody>
@@ -18528,7 +18528,7 @@
             <a:avLst/>
           </a:prstGeom>
           <a:solidFill>
-            <a:srgbClr val="1B7A43"/>
+            <a:srgbClr val="C9A227"/>
           </a:solidFill>
           <a:ln>
             <a:noFill/>
@@ -18582,11 +18582,11 @@
             <a:r>
               <a:rPr sz="1000" b="1">
                 <a:solidFill>
-                  <a:srgbClr val="1B7A43"/>
-                </a:solidFill>
-                <a:latin typeface="Helvetica Neue"/>
-              </a:rPr>
-              <a:t>#3  ·  FB  ·  4,999 views</a:t>
+                  <a:srgbClr val="C9A227"/>
+                </a:solidFill>
+                <a:latin typeface="Helvetica Neue"/>
+              </a:rPr>
+              <a:t>#3  ·  IG  ·  5,139 views</a:t>
             </a:r>
           </a:p>
         </p:txBody>
@@ -18620,7 +18620,7 @@
                 </a:solidFill>
                 <a:latin typeface="Helvetica Neue"/>
               </a:rPr>
-              <a:t>Discover My Home, a beloved Chinese restaurant in Downey. Their Mongolian beef, dumplings,</a:t>
+              <a:t>Not everyone deployed sees combat, even with 20 years in. Your MOS matters. Logistics migh</a:t>
             </a:r>
           </a:p>
         </p:txBody>
@@ -18694,7 +18694,7 @@
             <a:r>
               <a:rPr sz="1000" b="1">
                 <a:solidFill>
-                  <a:srgbClr val="1B7A43"/>
+                  <a:srgbClr val="C9A227"/>
                 </a:solidFill>
                 <a:latin typeface="Helvetica Neue"/>
               </a:rPr>
@@ -18862,7 +18862,7 @@
                 </a:solidFill>
                 <a:latin typeface="Georgia"/>
               </a:rPr>
-              <a:t>Military Service</a:t>
+              <a:t>Food &amp; Local Flavor</a:t>
             </a:r>
           </a:p>
         </p:txBody>
@@ -18896,7 +18896,7 @@
                 </a:solidFill>
                 <a:latin typeface="Helvetica Neue"/>
               </a:rPr>
-              <a:t>Army/JROTC/veteran interviews — the human side of military service (NOT policy — that's Legislation Watch).</a:t>
+              <a:t>Restaurants, chefs, dining — the everyday Downey. Pop's Wings, Porto's, Gyu, etc.</a:t>
             </a:r>
           </a:p>
         </p:txBody>
@@ -18926,11 +18926,11 @@
             <a:r>
               <a:rPr sz="900" b="1">
                 <a:solidFill>
-                  <a:srgbClr val="C9A227"/>
-                </a:solidFill>
-                <a:latin typeface="Helvetica Neue"/>
-              </a:rPr>
-              <a:t>AUDIENCE (theoretical): Traditional / patriotic · Middle (40-55) + Older (55+), veterans + families</a:t>
+                  <a:srgbClr val="1B7A43"/>
+                </a:solidFill>
+                <a:latin typeface="Helvetica Neue"/>
+              </a:rPr>
+              <a:t>AUDIENCE (theoretical): Everyday appeal · Broad, skews Young (18-40) foodie</a:t>
             </a:r>
           </a:p>
         </p:txBody>
@@ -18994,7 +18994,7 @@
             <a:avLst/>
           </a:prstGeom>
           <a:solidFill>
-            <a:srgbClr val="C9A227"/>
+            <a:srgbClr val="1B7A43"/>
           </a:solidFill>
           <a:ln>
             <a:noFill/>
@@ -19048,7 +19048,7 @@
             <a:r>
               <a:rPr sz="1100" b="1">
                 <a:solidFill>
-                  <a:srgbClr val="C9A227"/>
+                  <a:srgbClr val="1B7A43"/>
                 </a:solidFill>
                 <a:latin typeface="Helvetica Neue"/>
               </a:rPr>
@@ -19086,7 +19086,7 @@
                 </a:solidFill>
                 <a:latin typeface="Georgia"/>
               </a:rPr>
-              <a:t>92,638</a:t>
+              <a:t>100,080</a:t>
             </a:r>
           </a:p>
         </p:txBody>
@@ -19120,7 +19120,7 @@
                 </a:solidFill>
                 <a:latin typeface="Helvetica Neue"/>
               </a:rPr>
-              <a:t>34 posts · 4,210 likes</a:t>
+              <a:t>63 posts · 3,210 likes</a:t>
             </a:r>
           </a:p>
         </p:txBody>
@@ -19154,7 +19154,7 @@
                 </a:solidFill>
                 <a:latin typeface="Helvetica Neue"/>
               </a:rPr>
-              <a:t>2,725 average views per post</a:t>
+              <a:t>1,589 average views per post</a:t>
             </a:r>
           </a:p>
         </p:txBody>
@@ -19184,7 +19184,7 @@
             <a:r>
               <a:rPr sz="1100" b="1">
                 <a:solidFill>
-                  <a:srgbClr val="C9A227"/>
+                  <a:srgbClr val="1B7A43"/>
                 </a:solidFill>
                 <a:latin typeface="Helvetica Neue"/>
               </a:rPr>
@@ -19252,7 +19252,7 @@
             <a:avLst/>
           </a:prstGeom>
           <a:solidFill>
-            <a:srgbClr val="C9A227"/>
+            <a:srgbClr val="1B7A43"/>
           </a:solidFill>
           <a:ln>
             <a:noFill/>
@@ -19306,11 +19306,11 @@
             <a:r>
               <a:rPr sz="1000" b="1">
                 <a:solidFill>
-                  <a:srgbClr val="C9A227"/>
-                </a:solidFill>
-                <a:latin typeface="Helvetica Neue"/>
-              </a:rPr>
-              <a:t>#1  ·  TT  ·  37,900 views</a:t>
+                  <a:srgbClr val="1B7A43"/>
+                </a:solidFill>
+                <a:latin typeface="Helvetica Neue"/>
+              </a:rPr>
+              <a:t>#1  ·  TT  ·  13,600 views</a:t>
             </a:r>
           </a:p>
         </p:txBody>
@@ -19344,7 +19344,7 @@
                 </a:solidFill>
                 <a:latin typeface="Helvetica Neue"/>
               </a:rPr>
-              <a:t>Combat jobs aren't for everyone. See how your MOS determines deployment likelihood and wha</a:t>
+              <a:t>Mama Lu's is coming to Downey! Asian community favorite, famous for their tenderloin. Get </a:t>
             </a:r>
           </a:p>
         </p:txBody>
@@ -19408,7 +19408,7 @@
             <a:avLst/>
           </a:prstGeom>
           <a:solidFill>
-            <a:srgbClr val="C9A227"/>
+            <a:srgbClr val="1B7A43"/>
           </a:solidFill>
           <a:ln>
             <a:noFill/>
@@ -19462,11 +19462,11 @@
             <a:r>
               <a:rPr sz="1000" b="1">
                 <a:solidFill>
-                  <a:srgbClr val="C9A227"/>
-                </a:solidFill>
-                <a:latin typeface="Helvetica Neue"/>
-              </a:rPr>
-              <a:t>#2  ·  TT  ·  21,500 views</a:t>
+                  <a:srgbClr val="1B7A43"/>
+                </a:solidFill>
+                <a:latin typeface="Helvetica Neue"/>
+              </a:rPr>
+              <a:t>#2  ·  TT  ·  8,352 views</a:t>
             </a:r>
           </a:p>
         </p:txBody>
@@ -19500,7 +19500,7 @@
                 </a:solidFill>
                 <a:latin typeface="Helvetica Neue"/>
               </a:rPr>
-              <a:t>From Las Vegas to Battalion Commander: A journey fueled by college dreams and military opp</a:t>
+              <a:t>Pop's Wings just opened and it's a must-try! Their pastrami sandwich with sweet potato fri</a:t>
             </a:r>
           </a:p>
         </p:txBody>
@@ -19564,7 +19564,7 @@
             <a:avLst/>
           </a:prstGeom>
           <a:solidFill>
-            <a:srgbClr val="C9A227"/>
+            <a:srgbClr val="1B7A43"/>
           </a:solidFill>
           <a:ln>
             <a:noFill/>
@@ -19618,11 +19618,11 @@
             <a:r>
               <a:rPr sz="1000" b="1">
                 <a:solidFill>
-                  <a:srgbClr val="C9A227"/>
-                </a:solidFill>
-                <a:latin typeface="Helvetica Neue"/>
-              </a:rPr>
-              <a:t>#3  ·  IG  ·  5,139 views</a:t>
+                  <a:srgbClr val="1B7A43"/>
+                </a:solidFill>
+                <a:latin typeface="Helvetica Neue"/>
+              </a:rPr>
+              <a:t>#3  ·  TT  ·  5,612 views</a:t>
             </a:r>
           </a:p>
         </p:txBody>
@@ -19656,7 +19656,7 @@
                 </a:solidFill>
                 <a:latin typeface="Helvetica Neue"/>
               </a:rPr>
-              <a:t>Not everyone deployed sees combat, even with 20 years in. Your MOS matters. Logistics migh</a:t>
+              <a:t>Downey residents want diverse dining and nightlife, but it needs to be responsible. Addres</a:t>
             </a:r>
           </a:p>
         </p:txBody>
@@ -19730,7 +19730,7 @@
             <a:r>
               <a:rPr sz="1000" b="1">
                 <a:solidFill>
-                  <a:srgbClr val="C9A227"/>
+                  <a:srgbClr val="1B7A43"/>
                 </a:solidFill>
                 <a:latin typeface="Helvetica Neue"/>
               </a:rPr>
@@ -20122,7 +20122,7 @@
                 </a:solidFill>
                 <a:latin typeface="Georgia"/>
               </a:rPr>
-              <a:t>88,312</a:t>
+              <a:t>89,392</a:t>
             </a:r>
           </a:p>
         </p:txBody>
@@ -20156,7 +20156,7 @@
                 </a:solidFill>
                 <a:latin typeface="Helvetica Neue"/>
               </a:rPr>
-              <a:t>35 posts · 2,002 likes</a:t>
+              <a:t>36 posts · 2,025 likes</a:t>
             </a:r>
           </a:p>
         </p:txBody>
@@ -20190,7 +20190,7 @@
                 </a:solidFill>
                 <a:latin typeface="Helvetica Neue"/>
               </a:rPr>
-              <a:t>2,523 average views per post</a:t>
+              <a:t>2,483 average views per post</a:t>
             </a:r>
           </a:p>
         </p:txBody>
@@ -20934,7 +20934,7 @@
                 </a:solidFill>
                 <a:latin typeface="Georgia"/>
               </a:rPr>
-              <a:t>FIFA / World Cup</a:t>
+              <a:t>Community &amp; Culture</a:t>
             </a:r>
           </a:p>
         </p:txBody>
@@ -20968,7 +20968,7 @@
                 </a:solidFill>
                 <a:latin typeface="Helvetica Neue"/>
               </a:rPr>
-              <a:t>Sports commentary — split between celebration and critique.</a:t>
+              <a:t>Local color, events, pageantry, personal growth, city life.</a:t>
             </a:r>
           </a:p>
         </p:txBody>
@@ -20998,11 +20998,11 @@
             <a:r>
               <a:rPr sz="900" b="1">
                 <a:solidFill>
-                  <a:srgbClr val="6B7082"/>
-                </a:solidFill>
-                <a:latin typeface="Helvetica Neue"/>
-              </a:rPr>
-              <a:t>AUDIENCE (theoretical): Sports commentary · Young-Middle (25-45), sports fans</a:t>
+                  <a:srgbClr val="141833"/>
+                </a:solidFill>
+                <a:latin typeface="Helvetica Neue"/>
+              </a:rPr>
+              <a:t>AUDIENCE (theoretical): Local color · Broad, 30+</a:t>
             </a:r>
           </a:p>
         </p:txBody>
@@ -21066,7 +21066,7 @@
             <a:avLst/>
           </a:prstGeom>
           <a:solidFill>
-            <a:srgbClr val="6B7082"/>
+            <a:srgbClr val="141833"/>
           </a:solidFill>
           <a:ln>
             <a:noFill/>
@@ -21120,7 +21120,7 @@
             <a:r>
               <a:rPr sz="1100" b="1">
                 <a:solidFill>
-                  <a:srgbClr val="6B7082"/>
+                  <a:srgbClr val="141833"/>
                 </a:solidFill>
                 <a:latin typeface="Helvetica Neue"/>
               </a:rPr>
@@ -21158,7 +21158,7 @@
                 </a:solidFill>
                 <a:latin typeface="Georgia"/>
               </a:rPr>
-              <a:t>63,776</a:t>
+              <a:t>68,217</a:t>
             </a:r>
           </a:p>
         </p:txBody>
@@ -21192,7 +21192,7 @@
                 </a:solidFill>
                 <a:latin typeface="Helvetica Neue"/>
               </a:rPr>
-              <a:t>25 posts · 1,480 likes</a:t>
+              <a:t>69 posts · 1,413 likes</a:t>
             </a:r>
           </a:p>
         </p:txBody>
@@ -21226,7 +21226,7 @@
                 </a:solidFill>
                 <a:latin typeface="Helvetica Neue"/>
               </a:rPr>
-              <a:t>2,551 average views per post</a:t>
+              <a:t>989 average views per post</a:t>
             </a:r>
           </a:p>
         </p:txBody>
@@ -21256,7 +21256,7 @@
             <a:r>
               <a:rPr sz="1100" b="1">
                 <a:solidFill>
-                  <a:srgbClr val="6B7082"/>
+                  <a:srgbClr val="141833"/>
                 </a:solidFill>
                 <a:latin typeface="Helvetica Neue"/>
               </a:rPr>
@@ -21324,7 +21324,7 @@
             <a:avLst/>
           </a:prstGeom>
           <a:solidFill>
-            <a:srgbClr val="6B7082"/>
+            <a:srgbClr val="141833"/>
           </a:solidFill>
           <a:ln>
             <a:noFill/>
@@ -21378,11 +21378,11 @@
             <a:r>
               <a:rPr sz="1000" b="1">
                 <a:solidFill>
-                  <a:srgbClr val="6B7082"/>
-                </a:solidFill>
-                <a:latin typeface="Helvetica Neue"/>
-              </a:rPr>
-              <a:t>#1  ·  TT  ·  27,400 views</a:t>
+                  <a:srgbClr val="141833"/>
+                </a:solidFill>
+                <a:latin typeface="Helvetica Neue"/>
+              </a:rPr>
+              <a:t>#1  ·  FB  ·  4,676 views</a:t>
             </a:r>
           </a:p>
         </p:txBody>
@@ -21416,7 +21416,7 @@
                 </a:solidFill>
                 <a:latin typeface="Helvetica Neue"/>
               </a:rPr>
-              <a:t>Watch party in Stonewood Mall! Over 25,000 people showed up for this epic event. Cost $300</a:t>
+              <a:t>An emotional response to a Charlie Kirk &amp; LGBQT comment raises questions about a leader's </a:t>
             </a:r>
           </a:p>
         </p:txBody>
@@ -21480,7 +21480,7 @@
             <a:avLst/>
           </a:prstGeom>
           <a:solidFill>
-            <a:srgbClr val="6B7082"/>
+            <a:srgbClr val="141833"/>
           </a:solidFill>
           <a:ln>
             <a:noFill/>
@@ -21534,11 +21534,11 @@
             <a:r>
               <a:rPr sz="1000" b="1">
                 <a:solidFill>
-                  <a:srgbClr val="6B7082"/>
-                </a:solidFill>
-                <a:latin typeface="Helvetica Neue"/>
-              </a:rPr>
-              <a:t>#2  ·  IG  ·  7,180 views</a:t>
+                  <a:srgbClr val="141833"/>
+                </a:solidFill>
+                <a:latin typeface="Helvetica Neue"/>
+              </a:rPr>
+              <a:t>#2  ·  IG  ·  3,965 views</a:t>
             </a:r>
           </a:p>
         </p:txBody>
@@ -21572,7 +21572,7 @@
                 </a:solidFill>
                 <a:latin typeface="Helvetica Neue"/>
               </a:rPr>
-              <a:t>25,000+ people gathered for a watch party at Stonewood Mall! Despite the $300k cost, it wa</a:t>
+              <a:t>Following an outburst, she was removed as a Chamber of Commerce ambassador and rejected fo</a:t>
             </a:r>
           </a:p>
         </p:txBody>
@@ -21636,7 +21636,7 @@
             <a:avLst/>
           </a:prstGeom>
           <a:solidFill>
-            <a:srgbClr val="6B7082"/>
+            <a:srgbClr val="141833"/>
           </a:solidFill>
           <a:ln>
             <a:noFill/>
@@ -21690,11 +21690,11 @@
             <a:r>
               <a:rPr sz="1000" b="1">
                 <a:solidFill>
-                  <a:srgbClr val="6B7082"/>
-                </a:solidFill>
-                <a:latin typeface="Helvetica Neue"/>
-              </a:rPr>
-              <a:t>#3  ·  FB  ·  6,355 views</a:t>
+                  <a:srgbClr val="141833"/>
+                </a:solidFill>
+                <a:latin typeface="Helvetica Neue"/>
+              </a:rPr>
+              <a:t>#3  ·  TT  ·  3,520 views</a:t>
             </a:r>
           </a:p>
         </p:txBody>
@@ -21728,7 +21728,7 @@
                 </a:solidFill>
                 <a:latin typeface="Helvetica Neue"/>
               </a:rPr>
-              <a:t>Over 25,000 people gathered at Stonewood Mall for a massive watch party. Despite the $300,</a:t>
+              <a:t>Downey is a built-out city, but Sacramento requires us to build 6,100 new homes. Local off</a:t>
             </a:r>
           </a:p>
         </p:txBody>
@@ -21802,7 +21802,7 @@
             <a:r>
               <a:rPr sz="1000" b="1">
                 <a:solidFill>
-                  <a:srgbClr val="6B7082"/>
+                  <a:srgbClr val="141833"/>
                 </a:solidFill>
                 <a:latin typeface="Helvetica Neue"/>
               </a:rPr>
@@ -21840,7 +21840,7 @@
                 </a:solidFill>
                 <a:latin typeface="Helvetica Neue"/>
               </a:rPr>
-              <a:t>Solid mid-tier. Worth continued investment. Test scaling to see if it holds.</a:t>
+              <a:t>Modest reach. Fine as filler between heavy hitters, not a headline lane.</a:t>
             </a:r>
           </a:p>
         </p:txBody>
@@ -21970,7 +21970,7 @@
                 </a:solidFill>
                 <a:latin typeface="Georgia"/>
               </a:rPr>
-              <a:t>Community &amp; Culture</a:t>
+              <a:t>FIFA / World Cup</a:t>
             </a:r>
           </a:p>
         </p:txBody>
@@ -22004,7 +22004,7 @@
                 </a:solidFill>
                 <a:latin typeface="Helvetica Neue"/>
               </a:rPr>
-              <a:t>Local color, events, pageantry, personal growth, city life.</a:t>
+              <a:t>Sports commentary — split between celebration and critique.</a:t>
             </a:r>
           </a:p>
         </p:txBody>
@@ -22034,11 +22034,11 @@
             <a:r>
               <a:rPr sz="900" b="1">
                 <a:solidFill>
-                  <a:srgbClr val="141833"/>
-                </a:solidFill>
-                <a:latin typeface="Helvetica Neue"/>
-              </a:rPr>
-              <a:t>AUDIENCE (theoretical): Local color · Broad, 30+</a:t>
+                  <a:srgbClr val="6B7082"/>
+                </a:solidFill>
+                <a:latin typeface="Helvetica Neue"/>
+              </a:rPr>
+              <a:t>AUDIENCE (theoretical): Sports commentary · Young-Middle (25-45), sports fans</a:t>
             </a:r>
           </a:p>
         </p:txBody>
@@ -22102,7 +22102,7 @@
             <a:avLst/>
           </a:prstGeom>
           <a:solidFill>
-            <a:srgbClr val="141833"/>
+            <a:srgbClr val="6B7082"/>
           </a:solidFill>
           <a:ln>
             <a:noFill/>
@@ -22156,7 +22156,7 @@
             <a:r>
               <a:rPr sz="1100" b="1">
                 <a:solidFill>
-                  <a:srgbClr val="141833"/>
+                  <a:srgbClr val="6B7082"/>
                 </a:solidFill>
                 <a:latin typeface="Helvetica Neue"/>
               </a:rPr>
@@ -22194,7 +22194,7 @@
                 </a:solidFill>
                 <a:latin typeface="Georgia"/>
               </a:rPr>
-              <a:t>57,543</a:t>
+              <a:t>63,776</a:t>
             </a:r>
           </a:p>
         </p:txBody>
@@ -22228,7 +22228,7 @@
                 </a:solidFill>
                 <a:latin typeface="Helvetica Neue"/>
               </a:rPr>
-              <a:t>62 posts · 1,164 likes</a:t>
+              <a:t>25 posts · 1,480 likes</a:t>
             </a:r>
           </a:p>
         </p:txBody>
@@ -22262,7 +22262,7 @@
                 </a:solidFill>
                 <a:latin typeface="Helvetica Neue"/>
               </a:rPr>
-              <a:t>928 average views per post</a:t>
+              <a:t>2,551 average views per post</a:t>
             </a:r>
           </a:p>
         </p:txBody>
@@ -22292,7 +22292,7 @@
             <a:r>
               <a:rPr sz="1100" b="1">
                 <a:solidFill>
-                  <a:srgbClr val="141833"/>
+                  <a:srgbClr val="6B7082"/>
                 </a:solidFill>
                 <a:latin typeface="Helvetica Neue"/>
               </a:rPr>
@@ -22360,7 +22360,7 @@
             <a:avLst/>
           </a:prstGeom>
           <a:solidFill>
-            <a:srgbClr val="141833"/>
+            <a:srgbClr val="6B7082"/>
           </a:solidFill>
           <a:ln>
             <a:noFill/>
@@ -22414,11 +22414,11 @@
             <a:r>
               <a:rPr sz="1000" b="1">
                 <a:solidFill>
-                  <a:srgbClr val="141833"/>
-                </a:solidFill>
-                <a:latin typeface="Helvetica Neue"/>
-              </a:rPr>
-              <a:t>#1  ·  FB  ·  4,676 views</a:t>
+                  <a:srgbClr val="6B7082"/>
+                </a:solidFill>
+                <a:latin typeface="Helvetica Neue"/>
+              </a:rPr>
+              <a:t>#1  ·  TT  ·  27,400 views</a:t>
             </a:r>
           </a:p>
         </p:txBody>
@@ -22452,7 +22452,7 @@
                 </a:solidFill>
                 <a:latin typeface="Helvetica Neue"/>
               </a:rPr>
-              <a:t>An emotional response to a Charlie Kirk &amp; LGBQT comment raises questions about a leader's </a:t>
+              <a:t>Watch party in Stonewood Mall! Over 25,000 people showed up for this epic event. Cost $300</a:t>
             </a:r>
           </a:p>
         </p:txBody>
@@ -22516,7 +22516,7 @@
             <a:avLst/>
           </a:prstGeom>
           <a:solidFill>
-            <a:srgbClr val="141833"/>
+            <a:srgbClr val="6B7082"/>
           </a:solidFill>
           <a:ln>
             <a:noFill/>
@@ -22570,11 +22570,11 @@
             <a:r>
               <a:rPr sz="1000" b="1">
                 <a:solidFill>
-                  <a:srgbClr val="141833"/>
-                </a:solidFill>
-                <a:latin typeface="Helvetica Neue"/>
-              </a:rPr>
-              <a:t>#2  ·  IG  ·  3,965 views</a:t>
+                  <a:srgbClr val="6B7082"/>
+                </a:solidFill>
+                <a:latin typeface="Helvetica Neue"/>
+              </a:rPr>
+              <a:t>#2  ·  IG  ·  7,180 views</a:t>
             </a:r>
           </a:p>
         </p:txBody>
@@ -22608,7 +22608,7 @@
                 </a:solidFill>
                 <a:latin typeface="Helvetica Neue"/>
               </a:rPr>
-              <a:t>Following an outburst, she was removed as a Chamber of Commerce ambassador and rejected fo</a:t>
+              <a:t>25,000+ people gathered for a watch party at Stonewood Mall! Despite the $300k cost, it wa</a:t>
             </a:r>
           </a:p>
         </p:txBody>
@@ -22672,7 +22672,7 @@
             <a:avLst/>
           </a:prstGeom>
           <a:solidFill>
-            <a:srgbClr val="141833"/>
+            <a:srgbClr val="6B7082"/>
           </a:solidFill>
           <a:ln>
             <a:noFill/>
@@ -22726,11 +22726,11 @@
             <a:r>
               <a:rPr sz="1000" b="1">
                 <a:solidFill>
-                  <a:srgbClr val="141833"/>
-                </a:solidFill>
-                <a:latin typeface="Helvetica Neue"/>
-              </a:rPr>
-              <a:t>#3  ·  TT  ·  3,520 views</a:t>
+                  <a:srgbClr val="6B7082"/>
+                </a:solidFill>
+                <a:latin typeface="Helvetica Neue"/>
+              </a:rPr>
+              <a:t>#3  ·  FB  ·  6,355 views</a:t>
             </a:r>
           </a:p>
         </p:txBody>
@@ -22764,7 +22764,7 @@
                 </a:solidFill>
                 <a:latin typeface="Helvetica Neue"/>
               </a:rPr>
-              <a:t>Downey is a built-out city, but Sacramento requires us to build 6,100 new homes. Local off</a:t>
+              <a:t>Over 25,000 people gathered at Stonewood Mall for a massive watch party. Despite the $300,</a:t>
             </a:r>
           </a:p>
         </p:txBody>
@@ -22838,7 +22838,7 @@
             <a:r>
               <a:rPr sz="1000" b="1">
                 <a:solidFill>
-                  <a:srgbClr val="141833"/>
+                  <a:srgbClr val="6B7082"/>
                 </a:solidFill>
                 <a:latin typeface="Helvetica Neue"/>
               </a:rPr>
@@ -22876,7 +22876,7 @@
                 </a:solidFill>
                 <a:latin typeface="Helvetica Neue"/>
               </a:rPr>
-              <a:t>Modest reach. Fine as filler between heavy hitters, not a headline lane.</a:t>
+              <a:t>Solid mid-tier. Worth continued investment. Test scaling to see if it holds.</a:t>
             </a:r>
           </a:p>
         </p:txBody>

--- a/SPONSOR_CONTENT_REPORT.pptx
+++ b/SPONSOR_CONTENT_REPORT.pptx
@@ -3327,7 +3327,7 @@
                 </a:solidFill>
                 <a:latin typeface="Helvetica Neue"/>
               </a:rPr>
-              <a:t>Reporting window: Jun 8 → 2026-10-14</a:t>
+              <a:t>Reporting window: Jun 8 → 2026-10-16</a:t>
             </a:r>
           </a:p>
         </p:txBody>
@@ -3783,7 +3783,7 @@
                 </a:solidFill>
                 <a:latin typeface="Georgia"/>
               </a:rPr>
-              <a:t>51,568</a:t>
+              <a:t>51,623</a:t>
             </a:r>
           </a:p>
         </p:txBody>
@@ -3817,7 +3817,7 @@
                 </a:solidFill>
                 <a:latin typeface="Helvetica Neue"/>
               </a:rPr>
-              <a:t>20 posts · 3,036 likes</a:t>
+              <a:t>20 posts · 3,038 likes</a:t>
             </a:r>
           </a:p>
         </p:txBody>
@@ -3851,7 +3851,7 @@
                 </a:solidFill>
                 <a:latin typeface="Helvetica Neue"/>
               </a:rPr>
-              <a:t>2,578 average views per post</a:t>
+              <a:t>2,581 average views per post</a:t>
             </a:r>
           </a:p>
         </p:txBody>
@@ -4819,7 +4819,7 @@
                 </a:solidFill>
                 <a:latin typeface="Georgia"/>
               </a:rPr>
-              <a:t>29,743</a:t>
+              <a:t>31,086</a:t>
             </a:r>
           </a:p>
         </p:txBody>
@@ -4853,7 +4853,7 @@
                 </a:solidFill>
                 <a:latin typeface="Helvetica Neue"/>
               </a:rPr>
-              <a:t>32 posts · 654 likes</a:t>
+              <a:t>34 posts · 687 likes</a:t>
             </a:r>
           </a:p>
         </p:txBody>
@@ -4887,7 +4887,7 @@
                 </a:solidFill>
                 <a:latin typeface="Helvetica Neue"/>
               </a:rPr>
-              <a:t>929 average views per post</a:t>
+              <a:t>914 average views per post</a:t>
             </a:r>
           </a:p>
         </p:txBody>
@@ -7021,7 +7021,7 @@
                 </a:solidFill>
                 <a:latin typeface="Helvetica Neue"/>
               </a:rPr>
-              <a:t>77,700 views · 104 posts · 747 avg</a:t>
+              <a:t>80,651 views · 109 posts · 740 avg</a:t>
             </a:r>
           </a:p>
         </p:txBody>
@@ -7103,7 +7103,7 @@
         <p:spPr>
           <a:xfrm>
             <a:off x="4206240" y="2720339"/>
-            <a:ext cx="603426" cy="274320"/>
+            <a:ext cx="581347" cy="274320"/>
           </a:xfrm>
           <a:prstGeom prst="rect">
             <a:avLst/>
@@ -7146,7 +7146,7 @@
         </p:nvSpPr>
         <p:spPr>
           <a:xfrm>
-            <a:off x="4901106" y="2651759"/>
+            <a:off x="4879027" y="2651759"/>
             <a:ext cx="2286000" cy="251460"/>
           </a:xfrm>
           <a:prstGeom prst="rect">
@@ -7180,7 +7180,7 @@
         </p:nvSpPr>
         <p:spPr>
           <a:xfrm>
-            <a:off x="4901106" y="2857499"/>
+            <a:off x="4879027" y="2857499"/>
             <a:ext cx="4572000" cy="251460"/>
           </a:xfrm>
           <a:prstGeom prst="rect">
@@ -7249,7 +7249,7 @@
         <p:spPr>
           <a:xfrm>
             <a:off x="4206240" y="3223260"/>
-            <a:ext cx="480939" cy="274320"/>
+            <a:ext cx="463341" cy="274320"/>
           </a:xfrm>
           <a:prstGeom prst="rect">
             <a:avLst/>
@@ -7292,7 +7292,7 @@
         </p:nvSpPr>
         <p:spPr>
           <a:xfrm>
-            <a:off x="4778619" y="3154679"/>
+            <a:off x="4761021" y="3154679"/>
             <a:ext cx="2286000" cy="251460"/>
           </a:xfrm>
           <a:prstGeom prst="rect">
@@ -7326,7 +7326,7 @@
         </p:nvSpPr>
         <p:spPr>
           <a:xfrm>
-            <a:off x="4778619" y="3360420"/>
+            <a:off x="4761021" y="3360420"/>
             <a:ext cx="4572000" cy="251460"/>
           </a:xfrm>
           <a:prstGeom prst="rect">
@@ -7735,7 +7735,7 @@
                 </a:solidFill>
                 <a:latin typeface="Georgia"/>
               </a:rPr>
-              <a:t>77,700</a:t>
+              <a:t>80,651</a:t>
             </a:r>
           </a:p>
         </p:txBody>
@@ -7769,7 +7769,7 @@
                 </a:solidFill>
                 <a:latin typeface="Helvetica Neue"/>
               </a:rPr>
-              <a:t>104 posts · 1,880 likes</a:t>
+              <a:t>109 posts · 1,949 likes</a:t>
             </a:r>
           </a:p>
         </p:txBody>
@@ -7803,7 +7803,7 @@
                 </a:solidFill>
                 <a:latin typeface="Helvetica Neue"/>
               </a:rPr>
-              <a:t>747 average views per post</a:t>
+              <a:t>740 average views per post</a:t>
             </a:r>
           </a:p>
         </p:txBody>
@@ -10843,7 +10843,7 @@
                 </a:solidFill>
                 <a:latin typeface="Georgia"/>
               </a:rPr>
-              <a:t>51,568 views</a:t>
+              <a:t>51,623 views</a:t>
             </a:r>
           </a:p>
         </p:txBody>
@@ -10877,7 +10877,7 @@
                 </a:solidFill>
                 <a:latin typeface="Helvetica Neue"/>
               </a:rPr>
-              <a:t>20 posts · 2,578 avg views/post</a:t>
+              <a:t>20 posts · 2,581 avg views/post</a:t>
             </a:r>
           </a:p>
         </p:txBody>
@@ -11203,7 +11203,7 @@
                 </a:solidFill>
                 <a:latin typeface="Georgia"/>
               </a:rPr>
-              <a:t>100,080 views</a:t>
+              <a:t>100,360 views</a:t>
             </a:r>
           </a:p>
         </p:txBody>
@@ -11237,7 +11237,7 @@
                 </a:solidFill>
                 <a:latin typeface="Helvetica Neue"/>
               </a:rPr>
-              <a:t>63 posts · 1,589 avg views/post</a:t>
+              <a:t>63 posts · 1,593 avg views/post</a:t>
             </a:r>
           </a:p>
         </p:txBody>
@@ -11563,7 +11563,7 @@
                 </a:solidFill>
                 <a:latin typeface="Georgia"/>
               </a:rPr>
-              <a:t>101,142 views</a:t>
+              <a:t>102,734 views</a:t>
             </a:r>
           </a:p>
         </p:txBody>
@@ -11597,7 +11597,7 @@
                 </a:solidFill>
                 <a:latin typeface="Helvetica Neue"/>
               </a:rPr>
-              <a:t>43 posts · 2,352 avg views/post</a:t>
+              <a:t>43 posts · 2,389 avg views/post</a:t>
             </a:r>
           </a:p>
         </p:txBody>
@@ -13899,7 +13899,7 @@
                 </a:solidFill>
                 <a:latin typeface="Helvetica Neue"/>
               </a:rPr>
-              <a:t>2,483 avg views/post   ·   36 posts   ·   89,392 total</a:t>
+              <a:t>2,485 avg views/post   ·   36 posts   ·   89,447 total</a:t>
             </a:r>
           </a:p>
         </p:txBody>
@@ -14191,7 +14191,7 @@
                 </a:solidFill>
                 <a:latin typeface="Helvetica Neue"/>
               </a:rPr>
-              <a:t>1,283 avg views/post   ·   207 posts   ·   265,632 total</a:t>
+              <a:t>1,298 avg views/post   ·   210 posts   ·   272,630 total</a:t>
             </a:r>
           </a:p>
         </p:txBody>
@@ -16110,7 +16110,7 @@
                 </a:solidFill>
                 <a:latin typeface="Helvetica Neue"/>
               </a:rPr>
-              <a:t>285,293 views · 196 posts</a:t>
+              <a:t>289,251 views · 203 posts</a:t>
             </a:r>
           </a:p>
         </p:txBody>
@@ -16158,7 +16158,7 @@
         <p:spPr>
           <a:xfrm>
             <a:off x="4114800" y="2476968"/>
-            <a:ext cx="2204375" cy="128016"/>
+            <a:ext cx="2208434" cy="128016"/>
           </a:xfrm>
           <a:prstGeom prst="rect">
             <a:avLst/>
@@ -16201,7 +16201,7 @@
         </p:nvSpPr>
         <p:spPr>
           <a:xfrm>
-            <a:off x="6410615" y="2413312"/>
+            <a:off x="6414674" y="2413312"/>
             <a:ext cx="2286000" cy="291904"/>
           </a:xfrm>
           <a:prstGeom prst="rect">
@@ -16222,7 +16222,7 @@
                 </a:solidFill>
                 <a:latin typeface="Helvetica Neue"/>
               </a:rPr>
-              <a:t>101,142 views · 43 posts</a:t>
+              <a:t>102,734 views · 43 posts</a:t>
             </a:r>
           </a:p>
         </p:txBody>
@@ -16270,7 +16270,7 @@
         <p:spPr>
           <a:xfrm>
             <a:off x="4114800" y="2768873"/>
-            <a:ext cx="2181229" cy="128016"/>
+            <a:ext cx="2157401" cy="128016"/>
           </a:xfrm>
           <a:prstGeom prst="rect">
             <a:avLst/>
@@ -16313,7 +16313,7 @@
         </p:nvSpPr>
         <p:spPr>
           <a:xfrm>
-            <a:off x="6387469" y="2705217"/>
+            <a:off x="6363641" y="2705217"/>
             <a:ext cx="2286000" cy="291904"/>
           </a:xfrm>
           <a:prstGeom prst="rect">
@@ -16334,7 +16334,7 @@
                 </a:solidFill>
                 <a:latin typeface="Helvetica Neue"/>
               </a:rPr>
-              <a:t>100,080 views · 63 posts</a:t>
+              <a:t>100,360 views · 63 posts</a:t>
             </a:r>
           </a:p>
         </p:txBody>
@@ -16382,7 +16382,7 @@
         <p:spPr>
           <a:xfrm>
             <a:off x="4114800" y="3060778"/>
-            <a:ext cx="1948285" cy="128016"/>
+            <a:ext cx="1922808" cy="128016"/>
           </a:xfrm>
           <a:prstGeom prst="rect">
             <a:avLst/>
@@ -16425,7 +16425,7 @@
         </p:nvSpPr>
         <p:spPr>
           <a:xfrm>
-            <a:off x="6154525" y="2997121"/>
+            <a:off x="6129048" y="2997121"/>
             <a:ext cx="2286000" cy="291904"/>
           </a:xfrm>
           <a:prstGeom prst="rect">
@@ -16446,7 +16446,7 @@
                 </a:solidFill>
                 <a:latin typeface="Helvetica Neue"/>
               </a:rPr>
-              <a:t>89,392 views · 36 posts</a:t>
+              <a:t>89,447 views · 36 posts</a:t>
             </a:r>
           </a:p>
         </p:txBody>
@@ -16494,7 +16494,7 @@
         <p:spPr>
           <a:xfrm>
             <a:off x="4114800" y="3352682"/>
-            <a:ext cx="1693460" cy="128016"/>
+            <a:ext cx="1733724" cy="128016"/>
           </a:xfrm>
           <a:prstGeom prst="rect">
             <a:avLst/>
@@ -16537,7 +16537,7 @@
         </p:nvSpPr>
         <p:spPr>
           <a:xfrm>
-            <a:off x="5899700" y="3289026"/>
+            <a:off x="5939964" y="3289026"/>
             <a:ext cx="2286000" cy="291904"/>
           </a:xfrm>
           <a:prstGeom prst="rect">
@@ -16558,7 +16558,7 @@
                 </a:solidFill>
                 <a:latin typeface="Helvetica Neue"/>
               </a:rPr>
-              <a:t>77,700 views · 104 posts</a:t>
+              <a:t>80,651 views · 109 posts</a:t>
             </a:r>
           </a:p>
         </p:txBody>
@@ -16606,7 +16606,7 @@
         <p:spPr>
           <a:xfrm>
             <a:off x="4114800" y="3644587"/>
-            <a:ext cx="1486779" cy="128016"/>
+            <a:ext cx="1580797" cy="128016"/>
           </a:xfrm>
           <a:prstGeom prst="rect">
             <a:avLst/>
@@ -16649,7 +16649,7 @@
         </p:nvSpPr>
         <p:spPr>
           <a:xfrm>
-            <a:off x="5693019" y="3580931"/>
+            <a:off x="5787037" y="3580931"/>
             <a:ext cx="2286000" cy="291904"/>
           </a:xfrm>
           <a:prstGeom prst="rect">
@@ -16670,7 +16670,7 @@
                 </a:solidFill>
                 <a:latin typeface="Helvetica Neue"/>
               </a:rPr>
-              <a:t>68,217 views · 69 posts</a:t>
+              <a:t>73,537 views · 70 posts</a:t>
             </a:r>
           </a:p>
         </p:txBody>
@@ -16718,7 +16718,7 @@
         <p:spPr>
           <a:xfrm>
             <a:off x="4114800" y="3936491"/>
-            <a:ext cx="1389988" cy="128016"/>
+            <a:ext cx="1370968" cy="128016"/>
           </a:xfrm>
           <a:prstGeom prst="rect">
             <a:avLst/>
@@ -16761,7 +16761,7 @@
         </p:nvSpPr>
         <p:spPr>
           <a:xfrm>
-            <a:off x="5596228" y="3872835"/>
+            <a:off x="5577208" y="3872835"/>
             <a:ext cx="2286000" cy="291904"/>
           </a:xfrm>
           <a:prstGeom prst="rect">
@@ -16830,7 +16830,7 @@
         <p:spPr>
           <a:xfrm>
             <a:off x="4114800" y="4228396"/>
-            <a:ext cx="1123917" cy="128016"/>
+            <a:ext cx="1109720" cy="128016"/>
           </a:xfrm>
           <a:prstGeom prst="rect">
             <a:avLst/>
@@ -16873,7 +16873,7 @@
         </p:nvSpPr>
         <p:spPr>
           <a:xfrm>
-            <a:off x="5330157" y="4164740"/>
+            <a:off x="5315960" y="4164740"/>
             <a:ext cx="2286000" cy="291904"/>
           </a:xfrm>
           <a:prstGeom prst="rect">
@@ -16894,7 +16894,7 @@
                 </a:solidFill>
                 <a:latin typeface="Helvetica Neue"/>
               </a:rPr>
-              <a:t>51,568 views · 20 posts</a:t>
+              <a:t>51,623 views · 20 posts</a:t>
             </a:r>
           </a:p>
         </p:txBody>
@@ -16942,7 +16942,7 @@
         <p:spPr>
           <a:xfrm>
             <a:off x="4114800" y="4520301"/>
-            <a:ext cx="648244" cy="128016"/>
+            <a:ext cx="668244" cy="128016"/>
           </a:xfrm>
           <a:prstGeom prst="rect">
             <a:avLst/>
@@ -16985,7 +16985,7 @@
         </p:nvSpPr>
         <p:spPr>
           <a:xfrm>
-            <a:off x="4854484" y="4456644"/>
+            <a:off x="4874484" y="4456644"/>
             <a:ext cx="2286000" cy="291904"/>
           </a:xfrm>
           <a:prstGeom prst="rect">
@@ -17006,7 +17006,7 @@
                 </a:solidFill>
                 <a:latin typeface="Helvetica Neue"/>
               </a:rPr>
-              <a:t>29,743 views · 32 posts</a:t>
+              <a:t>31,086 views · 34 posts</a:t>
             </a:r>
           </a:p>
         </p:txBody>
@@ -17054,7 +17054,7 @@
         <p:spPr>
           <a:xfrm>
             <a:off x="4114800" y="4812205"/>
-            <a:ext cx="179916" cy="128016"/>
+            <a:ext cx="177454" cy="128016"/>
           </a:xfrm>
           <a:prstGeom prst="rect">
             <a:avLst/>
@@ -17097,7 +17097,7 @@
         </p:nvSpPr>
         <p:spPr>
           <a:xfrm>
-            <a:off x="4386156" y="4748549"/>
+            <a:off x="4383694" y="4748549"/>
             <a:ext cx="2286000" cy="291904"/>
           </a:xfrm>
           <a:prstGeom prst="rect">
@@ -17166,7 +17166,7 @@
         <p:spPr>
           <a:xfrm>
             <a:off x="4114800" y="5104110"/>
-            <a:ext cx="169324" cy="128016"/>
+            <a:ext cx="167007" cy="128016"/>
           </a:xfrm>
           <a:prstGeom prst="rect">
             <a:avLst/>
@@ -17209,7 +17209,7 @@
         </p:nvSpPr>
         <p:spPr>
           <a:xfrm>
-            <a:off x="4375564" y="5040454"/>
+            <a:off x="4373247" y="5040454"/>
             <a:ext cx="2286000" cy="291904"/>
           </a:xfrm>
           <a:prstGeom prst="rect">
@@ -17278,7 +17278,7 @@
         <p:spPr>
           <a:xfrm>
             <a:off x="4114800" y="5396015"/>
-            <a:ext cx="134953" cy="128016"/>
+            <a:ext cx="133107" cy="128016"/>
           </a:xfrm>
           <a:prstGeom prst="rect">
             <a:avLst/>
@@ -17321,7 +17321,7 @@
         </p:nvSpPr>
         <p:spPr>
           <a:xfrm>
-            <a:off x="4341193" y="5332358"/>
+            <a:off x="4339347" y="5332358"/>
             <a:ext cx="2286000" cy="291904"/>
           </a:xfrm>
           <a:prstGeom prst="rect">
@@ -18050,7 +18050,7 @@
                 </a:solidFill>
                 <a:latin typeface="Georgia"/>
               </a:rPr>
-              <a:t>101,142</a:t>
+              <a:t>102,734</a:t>
             </a:r>
           </a:p>
         </p:txBody>
@@ -18084,7 +18084,7 @@
                 </a:solidFill>
                 <a:latin typeface="Helvetica Neue"/>
               </a:rPr>
-              <a:t>43 posts · 4,441 likes</a:t>
+              <a:t>43 posts · 4,490 likes</a:t>
             </a:r>
           </a:p>
         </p:txBody>
@@ -18118,7 +18118,7 @@
                 </a:solidFill>
                 <a:latin typeface="Helvetica Neue"/>
               </a:rPr>
-              <a:t>2,352 average views per post</a:t>
+              <a:t>2,389 average views per post</a:t>
             </a:r>
           </a:p>
         </p:txBody>
@@ -18430,7 +18430,7 @@
                 </a:solidFill>
                 <a:latin typeface="Helvetica Neue"/>
               </a:rPr>
-              <a:t>#2  ·  TT  ·  22,300 views</a:t>
+              <a:t>#2  ·  TT  ·  22,600 views</a:t>
             </a:r>
           </a:p>
         </p:txBody>
@@ -19086,7 +19086,7 @@
                 </a:solidFill>
                 <a:latin typeface="Georgia"/>
               </a:rPr>
-              <a:t>100,080</a:t>
+              <a:t>100,360</a:t>
             </a:r>
           </a:p>
         </p:txBody>
@@ -19120,7 +19120,7 @@
                 </a:solidFill>
                 <a:latin typeface="Helvetica Neue"/>
               </a:rPr>
-              <a:t>63 posts · 3,210 likes</a:t>
+              <a:t>63 posts · 3,220 likes</a:t>
             </a:r>
           </a:p>
         </p:txBody>
@@ -19154,7 +19154,7 @@
                 </a:solidFill>
                 <a:latin typeface="Helvetica Neue"/>
               </a:rPr>
-              <a:t>1,589 average views per post</a:t>
+              <a:t>1,593 average views per post</a:t>
             </a:r>
           </a:p>
         </p:txBody>
@@ -19622,7 +19622,7 @@
                 </a:solidFill>
                 <a:latin typeface="Helvetica Neue"/>
               </a:rPr>
-              <a:t>#3  ·  TT  ·  5,612 views</a:t>
+              <a:t>#3  ·  TT  ·  5,892 views</a:t>
             </a:r>
           </a:p>
         </p:txBody>
@@ -20122,7 +20122,7 @@
                 </a:solidFill>
                 <a:latin typeface="Georgia"/>
               </a:rPr>
-              <a:t>89,392</a:t>
+              <a:t>89,447</a:t>
             </a:r>
           </a:p>
         </p:txBody>
@@ -20156,7 +20156,7 @@
                 </a:solidFill>
                 <a:latin typeface="Helvetica Neue"/>
               </a:rPr>
-              <a:t>36 posts · 2,025 likes</a:t>
+              <a:t>36 posts · 2,027 likes</a:t>
             </a:r>
           </a:p>
         </p:txBody>
@@ -20190,7 +20190,7 @@
                 </a:solidFill>
                 <a:latin typeface="Helvetica Neue"/>
               </a:rPr>
-              <a:t>2,483 average views per post</a:t>
+              <a:t>2,485 average views per post</a:t>
             </a:r>
           </a:p>
         </p:txBody>
@@ -21158,7 +21158,7 @@
                 </a:solidFill>
                 <a:latin typeface="Georgia"/>
               </a:rPr>
-              <a:t>68,217</a:t>
+              <a:t>73,537</a:t>
             </a:r>
           </a:p>
         </p:txBody>
@@ -21192,7 +21192,7 @@
                 </a:solidFill>
                 <a:latin typeface="Helvetica Neue"/>
               </a:rPr>
-              <a:t>69 posts · 1,413 likes</a:t>
+              <a:t>70 posts · 1,457 likes</a:t>
             </a:r>
           </a:p>
         </p:txBody>
@@ -21226,7 +21226,7 @@
                 </a:solidFill>
                 <a:latin typeface="Helvetica Neue"/>
               </a:rPr>
-              <a:t>989 average views per post</a:t>
+              <a:t>1,051 average views per post</a:t>
             </a:r>
           </a:p>
         </p:txBody>
@@ -21382,7 +21382,7 @@
                 </a:solidFill>
                 <a:latin typeface="Helvetica Neue"/>
               </a:rPr>
-              <a:t>#1  ·  FB  ·  4,676 views</a:t>
+              <a:t>#1  ·  FB  ·  6,265 views</a:t>
             </a:r>
           </a:p>
         </p:txBody>
@@ -21416,7 +21416,7 @@
                 </a:solidFill>
                 <a:latin typeface="Helvetica Neue"/>
               </a:rPr>
-              <a:t>An emotional response to a Charlie Kirk &amp; LGBQT comment raises questions about a leader's </a:t>
+              <a:t>What kind of conduct should we expect from those seeking public office? During a Downey Ci</a:t>
             </a:r>
           </a:p>
         </p:txBody>
@@ -21538,7 +21538,7 @@
                 </a:solidFill>
                 <a:latin typeface="Helvetica Neue"/>
               </a:rPr>
-              <a:t>#2  ·  IG  ·  3,965 views</a:t>
+              <a:t>#2  ·  FB  ·  4,676 views</a:t>
             </a:r>
           </a:p>
         </p:txBody>
@@ -21572,7 +21572,7 @@
                 </a:solidFill>
                 <a:latin typeface="Helvetica Neue"/>
               </a:rPr>
-              <a:t>Following an outburst, she was removed as a Chamber of Commerce ambassador and rejected fo</a:t>
+              <a:t>An emotional response to a Charlie Kirk &amp; LGBQT comment raises questions about a leader's </a:t>
             </a:r>
           </a:p>
         </p:txBody>
@@ -21694,7 +21694,7 @@
                 </a:solidFill>
                 <a:latin typeface="Helvetica Neue"/>
               </a:rPr>
-              <a:t>#3  ·  TT  ·  3,520 views</a:t>
+              <a:t>#3  ·  IG  ·  3,965 views</a:t>
             </a:r>
           </a:p>
         </p:txBody>
@@ -21728,7 +21728,7 @@
                 </a:solidFill>
                 <a:latin typeface="Helvetica Neue"/>
               </a:rPr>
-              <a:t>Downey is a built-out city, but Sacramento requires us to build 6,100 new homes. Local off</a:t>
+              <a:t>Following an outburst, she was removed as a Chamber of Commerce ambassador and rejected fo</a:t>
             </a:r>
           </a:p>
         </p:txBody>
@@ -21840,7 +21840,7 @@
                 </a:solidFill>
                 <a:latin typeface="Helvetica Neue"/>
               </a:rPr>
-              <a:t>Modest reach. Fine as filler between heavy hitters, not a headline lane.</a:t>
+              <a:t>Solid mid-tier. Worth continued investment. Test scaling to see if it holds.</a:t>
             </a:r>
           </a:p>
         </p:txBody>

--- a/SPONSOR_CONTENT_REPORT.pptx
+++ b/SPONSOR_CONTENT_REPORT.pptx
@@ -3327,7 +3327,7 @@
                 </a:solidFill>
                 <a:latin typeface="Helvetica Neue"/>
               </a:rPr>
-              <a:t>Reporting window: Jun 8 → 2026-10-16</a:t>
+              <a:t>Reporting window: Jun 8 → 2026-10-23</a:t>
             </a:r>
           </a:p>
         </p:txBody>
@@ -3783,7 +3783,7 @@
                 </a:solidFill>
                 <a:latin typeface="Georgia"/>
               </a:rPr>
-              <a:t>51,623</a:t>
+              <a:t>51,710</a:t>
             </a:r>
           </a:p>
         </p:txBody>
@@ -3817,7 +3817,7 @@
                 </a:solidFill>
                 <a:latin typeface="Helvetica Neue"/>
               </a:rPr>
-              <a:t>20 posts · 3,038 likes</a:t>
+              <a:t>20 posts · 3,040 likes</a:t>
             </a:r>
           </a:p>
         </p:txBody>
@@ -3851,7 +3851,7 @@
                 </a:solidFill>
                 <a:latin typeface="Helvetica Neue"/>
               </a:rPr>
-              <a:t>2,581 average views per post</a:t>
+              <a:t>2,586 average views per post</a:t>
             </a:r>
           </a:p>
         </p:txBody>
@@ -4819,7 +4819,7 @@
                 </a:solidFill>
                 <a:latin typeface="Georgia"/>
               </a:rPr>
-              <a:t>31,086</a:t>
+              <a:t>35,227</a:t>
             </a:r>
           </a:p>
         </p:txBody>
@@ -4853,7 +4853,7 @@
                 </a:solidFill>
                 <a:latin typeface="Helvetica Neue"/>
               </a:rPr>
-              <a:t>34 posts · 687 likes</a:t>
+              <a:t>37 posts · 791 likes</a:t>
             </a:r>
           </a:p>
         </p:txBody>
@@ -4887,7 +4887,7 @@
                 </a:solidFill>
                 <a:latin typeface="Helvetica Neue"/>
               </a:rPr>
-              <a:t>914 average views per post</a:t>
+              <a:t>952 average views per post</a:t>
             </a:r>
           </a:p>
         </p:txBody>
@@ -5855,7 +5855,7 @@
                 </a:solidFill>
                 <a:latin typeface="Georgia"/>
               </a:rPr>
-              <a:t>8,255</a:t>
+              <a:t>8,258</a:t>
             </a:r>
           </a:p>
         </p:txBody>
@@ -7021,7 +7021,7 @@
                 </a:solidFill>
                 <a:latin typeface="Helvetica Neue"/>
               </a:rPr>
-              <a:t>80,651 views · 109 posts · 740 avg</a:t>
+              <a:t>82,746 views · 111 posts · 745 avg</a:t>
             </a:r>
           </a:p>
         </p:txBody>
@@ -7089,7 +7089,7 @@
                 </a:solidFill>
                 <a:latin typeface="Helvetica Neue"/>
               </a:rPr>
-              <a:t>American Pride</a:t>
+              <a:t>Legislation &amp; Policy Watch</a:t>
             </a:r>
           </a:p>
         </p:txBody>
@@ -7103,7 +7103,153 @@
         <p:spPr>
           <a:xfrm>
             <a:off x="4206240" y="2720339"/>
-            <a:ext cx="581347" cy="274320"/>
+            <a:ext cx="794475" cy="274320"/>
+          </a:xfrm>
+          <a:prstGeom prst="rect">
+            <a:avLst/>
+          </a:prstGeom>
+          <a:solidFill>
+            <a:srgbClr val="2F3C7E"/>
+          </a:solidFill>
+          <a:ln>
+            <a:noFill/>
+          </a:ln>
+          <a:effectLst/>
+        </p:spPr>
+        <p:style>
+          <a:lnRef idx="1">
+            <a:schemeClr val="accent1"/>
+          </a:lnRef>
+          <a:fillRef idx="3">
+            <a:schemeClr val="accent1"/>
+          </a:fillRef>
+          <a:effectRef idx="2">
+            <a:schemeClr val="accent1"/>
+          </a:effectRef>
+          <a:fontRef idx="minor">
+            <a:schemeClr val="lt1"/>
+          </a:fontRef>
+        </p:style>
+        <p:txBody>
+          <a:bodyPr rtlCol="0" anchor="ctr"/>
+          <a:lstStyle/>
+          <a:p>
+            <a:pPr algn="ctr"/>
+          </a:p>
+        </p:txBody>
+      </p:sp>
+      <p:sp>
+        <p:nvSpPr>
+          <p:cNvPr id="12" name="TextBox 11"/>
+          <p:cNvSpPr txBox="1"/>
+          <p:nvPr/>
+        </p:nvSpPr>
+        <p:spPr>
+          <a:xfrm>
+            <a:off x="5092155" y="2651759"/>
+            <a:ext cx="2286000" cy="251460"/>
+          </a:xfrm>
+          <a:prstGeom prst="rect">
+            <a:avLst/>
+          </a:prstGeom>
+          <a:noFill/>
+        </p:spPr>
+        <p:txBody>
+          <a:bodyPr wrap="square" lIns="0" rIns="0" tIns="0" bIns="0">
+            <a:spAutoFit/>
+          </a:bodyPr>
+          <a:lstStyle/>
+          <a:p>
+            <a:r>
+              <a:rPr sz="900" b="0">
+                <a:solidFill>
+                  <a:srgbClr val="6B7082"/>
+                </a:solidFill>
+                <a:latin typeface="Helvetica Neue"/>
+              </a:rPr>
+              <a:t>10,893 views · 25 posts · 436 avg</a:t>
+            </a:r>
+          </a:p>
+        </p:txBody>
+      </p:sp>
+      <p:sp>
+        <p:nvSpPr>
+          <p:cNvPr id="13" name="TextBox 12"/>
+          <p:cNvSpPr txBox="1"/>
+          <p:nvPr/>
+        </p:nvSpPr>
+        <p:spPr>
+          <a:xfrm>
+            <a:off x="5092155" y="2857499"/>
+            <a:ext cx="4572000" cy="251460"/>
+          </a:xfrm>
+          <a:prstGeom prst="rect">
+            <a:avLst/>
+          </a:prstGeom>
+          <a:noFill/>
+        </p:spPr>
+        <p:txBody>
+          <a:bodyPr wrap="square" lIns="0" rIns="0" tIns="0" bIns="0">
+            <a:spAutoFit/>
+          </a:bodyPr>
+          <a:lstStyle/>
+          <a:p>
+            <a:r>
+              <a:rPr sz="800" b="0">
+                <a:solidFill>
+                  <a:srgbClr val="6B7082"/>
+                </a:solidFill>
+                <a:latin typeface="Helvetica Neue"/>
+              </a:rPr>
+              <a:t>Slow-burn policy · Older (55+), civic-engaged</a:t>
+            </a:r>
+          </a:p>
+        </p:txBody>
+      </p:sp>
+      <p:sp>
+        <p:nvSpPr>
+          <p:cNvPr id="14" name="TextBox 13"/>
+          <p:cNvSpPr txBox="1"/>
+          <p:nvPr/>
+        </p:nvSpPr>
+        <p:spPr>
+          <a:xfrm>
+            <a:off x="731520" y="3154679"/>
+            <a:ext cx="3200400" cy="502920"/>
+          </a:xfrm>
+          <a:prstGeom prst="rect">
+            <a:avLst/>
+          </a:prstGeom>
+          <a:noFill/>
+        </p:spPr>
+        <p:txBody>
+          <a:bodyPr wrap="square" lIns="0" rIns="0" tIns="0" bIns="0">
+            <a:spAutoFit/>
+          </a:bodyPr>
+          <a:lstStyle/>
+          <a:p>
+            <a:r>
+              <a:rPr sz="1200" b="1">
+                <a:solidFill>
+                  <a:srgbClr val="141833"/>
+                </a:solidFill>
+                <a:latin typeface="Helvetica Neue"/>
+              </a:rPr>
+              <a:t>American Pride</a:t>
+            </a:r>
+          </a:p>
+        </p:txBody>
+      </p:sp>
+      <p:sp>
+        <p:nvSpPr>
+          <p:cNvPr id="15" name="Rectangle 14"/>
+          <p:cNvSpPr/>
+          <p:nvPr/>
+        </p:nvSpPr>
+        <p:spPr>
+          <a:xfrm>
+            <a:off x="4206240" y="3223260"/>
+            <a:ext cx="566628" cy="274320"/>
           </a:xfrm>
           <a:prstGeom prst="rect">
             <a:avLst/>
@@ -7140,13 +7286,13 @@
       </p:sp>
       <p:sp>
         <p:nvSpPr>
-          <p:cNvPr id="12" name="TextBox 11"/>
-          <p:cNvSpPr txBox="1"/>
-          <p:nvPr/>
-        </p:nvSpPr>
-        <p:spPr>
-          <a:xfrm>
-            <a:off x="4879027" y="2651759"/>
+          <p:cNvPr id="16" name="TextBox 15"/>
+          <p:cNvSpPr txBox="1"/>
+          <p:nvPr/>
+        </p:nvSpPr>
+        <p:spPr>
+          <a:xfrm>
+            <a:off x="4864308" y="3154679"/>
             <a:ext cx="2286000" cy="251460"/>
           </a:xfrm>
           <a:prstGeom prst="rect">
@@ -7174,13 +7320,13 @@
       </p:sp>
       <p:sp>
         <p:nvSpPr>
-          <p:cNvPr id="13" name="TextBox 12"/>
-          <p:cNvSpPr txBox="1"/>
-          <p:nvPr/>
-        </p:nvSpPr>
-        <p:spPr>
-          <a:xfrm>
-            <a:off x="4879027" y="2857499"/>
+          <p:cNvPr id="17" name="TextBox 16"/>
+          <p:cNvSpPr txBox="1"/>
+          <p:nvPr/>
+        </p:nvSpPr>
+        <p:spPr>
+          <a:xfrm>
+            <a:off x="4864308" y="3360420"/>
             <a:ext cx="4572000" cy="251460"/>
           </a:xfrm>
           <a:prstGeom prst="rect">
@@ -7202,152 +7348,6 @@
                 <a:latin typeface="Helvetica Neue"/>
               </a:rPr>
               <a:t>Traditional / patriotic · Older (55+), values-driven</a:t>
-            </a:r>
-          </a:p>
-        </p:txBody>
-      </p:sp>
-      <p:sp>
-        <p:nvSpPr>
-          <p:cNvPr id="14" name="TextBox 13"/>
-          <p:cNvSpPr txBox="1"/>
-          <p:nvPr/>
-        </p:nvSpPr>
-        <p:spPr>
-          <a:xfrm>
-            <a:off x="731520" y="3154679"/>
-            <a:ext cx="3200400" cy="502920"/>
-          </a:xfrm>
-          <a:prstGeom prst="rect">
-            <a:avLst/>
-          </a:prstGeom>
-          <a:noFill/>
-        </p:spPr>
-        <p:txBody>
-          <a:bodyPr wrap="square" lIns="0" rIns="0" tIns="0" bIns="0">
-            <a:spAutoFit/>
-          </a:bodyPr>
-          <a:lstStyle/>
-          <a:p>
-            <a:r>
-              <a:rPr sz="1200" b="1">
-                <a:solidFill>
-                  <a:srgbClr val="141833"/>
-                </a:solidFill>
-                <a:latin typeface="Helvetica Neue"/>
-              </a:rPr>
-              <a:t>Legislation &amp; Policy Watch</a:t>
-            </a:r>
-          </a:p>
-        </p:txBody>
-      </p:sp>
-      <p:sp>
-        <p:nvSpPr>
-          <p:cNvPr id="15" name="Rectangle 14"/>
-          <p:cNvSpPr/>
-          <p:nvPr/>
-        </p:nvSpPr>
-        <p:spPr>
-          <a:xfrm>
-            <a:off x="4206240" y="3223260"/>
-            <a:ext cx="463341" cy="274320"/>
-          </a:xfrm>
-          <a:prstGeom prst="rect">
-            <a:avLst/>
-          </a:prstGeom>
-          <a:solidFill>
-            <a:srgbClr val="2F3C7E"/>
-          </a:solidFill>
-          <a:ln>
-            <a:noFill/>
-          </a:ln>
-          <a:effectLst/>
-        </p:spPr>
-        <p:style>
-          <a:lnRef idx="1">
-            <a:schemeClr val="accent1"/>
-          </a:lnRef>
-          <a:fillRef idx="3">
-            <a:schemeClr val="accent1"/>
-          </a:fillRef>
-          <a:effectRef idx="2">
-            <a:schemeClr val="accent1"/>
-          </a:effectRef>
-          <a:fontRef idx="minor">
-            <a:schemeClr val="lt1"/>
-          </a:fontRef>
-        </p:style>
-        <p:txBody>
-          <a:bodyPr rtlCol="0" anchor="ctr"/>
-          <a:lstStyle/>
-          <a:p>
-            <a:pPr algn="ctr"/>
-          </a:p>
-        </p:txBody>
-      </p:sp>
-      <p:sp>
-        <p:nvSpPr>
-          <p:cNvPr id="16" name="TextBox 15"/>
-          <p:cNvSpPr txBox="1"/>
-          <p:nvPr/>
-        </p:nvSpPr>
-        <p:spPr>
-          <a:xfrm>
-            <a:off x="4761021" y="3154679"/>
-            <a:ext cx="2286000" cy="251460"/>
-          </a:xfrm>
-          <a:prstGeom prst="rect">
-            <a:avLst/>
-          </a:prstGeom>
-          <a:noFill/>
-        </p:spPr>
-        <p:txBody>
-          <a:bodyPr wrap="square" lIns="0" rIns="0" tIns="0" bIns="0">
-            <a:spAutoFit/>
-          </a:bodyPr>
-          <a:lstStyle/>
-          <a:p>
-            <a:r>
-              <a:rPr sz="900" b="0">
-                <a:solidFill>
-                  <a:srgbClr val="6B7082"/>
-                </a:solidFill>
-                <a:latin typeface="Helvetica Neue"/>
-              </a:rPr>
-              <a:t>6,192 views · 13 posts · 476 avg</a:t>
-            </a:r>
-          </a:p>
-        </p:txBody>
-      </p:sp>
-      <p:sp>
-        <p:nvSpPr>
-          <p:cNvPr id="17" name="TextBox 16"/>
-          <p:cNvSpPr txBox="1"/>
-          <p:nvPr/>
-        </p:nvSpPr>
-        <p:spPr>
-          <a:xfrm>
-            <a:off x="4761021" y="3360420"/>
-            <a:ext cx="4572000" cy="251460"/>
-          </a:xfrm>
-          <a:prstGeom prst="rect">
-            <a:avLst/>
-          </a:prstGeom>
-          <a:noFill/>
-        </p:spPr>
-        <p:txBody>
-          <a:bodyPr wrap="square" lIns="0" rIns="0" tIns="0" bIns="0">
-            <a:spAutoFit/>
-          </a:bodyPr>
-          <a:lstStyle/>
-          <a:p>
-            <a:r>
-              <a:rPr sz="800" b="0">
-                <a:solidFill>
-                  <a:srgbClr val="6B7082"/>
-                </a:solidFill>
-                <a:latin typeface="Helvetica Neue"/>
-              </a:rPr>
-              <a:t>Slow-burn policy · Older (55+), civic-engaged</a:t>
             </a:r>
           </a:p>
         </p:txBody>
@@ -7735,7 +7735,7 @@
                 </a:solidFill>
                 <a:latin typeface="Georgia"/>
               </a:rPr>
-              <a:t>80,651</a:t>
+              <a:t>82,746</a:t>
             </a:r>
           </a:p>
         </p:txBody>
@@ -7769,7 +7769,7 @@
                 </a:solidFill>
                 <a:latin typeface="Helvetica Neue"/>
               </a:rPr>
-              <a:t>109 posts · 1,949 likes</a:t>
+              <a:t>111 posts · 1,981 likes</a:t>
             </a:r>
           </a:p>
         </p:txBody>
@@ -7803,7 +7803,7 @@
                 </a:solidFill>
                 <a:latin typeface="Helvetica Neue"/>
               </a:rPr>
-              <a:t>740 average views per post</a:t>
+              <a:t>745 average views per post</a:t>
             </a:r>
           </a:p>
         </p:txBody>
@@ -8547,7 +8547,7 @@
                 </a:solidFill>
                 <a:latin typeface="Georgia"/>
               </a:rPr>
-              <a:t>American Pride</a:t>
+              <a:t>Legislation &amp; Policy Watch</a:t>
             </a:r>
           </a:p>
         </p:txBody>
@@ -8581,7 +8581,7 @@
                 </a:solidFill>
                 <a:latin typeface="Helvetica Neue"/>
               </a:rPr>
-              <a:t>Patriotic content + historical/analytical (1968, forefathers, unity language).</a:t>
+              <a:t>CA bills, propositions, HOA fights, wealth tax — policy commentary independent of candidates.</a:t>
             </a:r>
           </a:p>
         </p:txBody>
@@ -8611,11 +8611,11 @@
             <a:r>
               <a:rPr sz="900" b="1">
                 <a:solidFill>
-                  <a:srgbClr val="990011"/>
-                </a:solidFill>
-                <a:latin typeface="Helvetica Neue"/>
-              </a:rPr>
-              <a:t>AUDIENCE (theoretical): Traditional / patriotic · Older (55+), values-driven</a:t>
+                  <a:srgbClr val="2F3C7E"/>
+                </a:solidFill>
+                <a:latin typeface="Helvetica Neue"/>
+              </a:rPr>
+              <a:t>AUDIENCE (theoretical): Slow-burn policy · Older (55+), civic-engaged</a:t>
             </a:r>
           </a:p>
         </p:txBody>
@@ -8679,7 +8679,7 @@
             <a:avLst/>
           </a:prstGeom>
           <a:solidFill>
-            <a:srgbClr val="990011"/>
+            <a:srgbClr val="2F3C7E"/>
           </a:solidFill>
           <a:ln>
             <a:noFill/>
@@ -8733,7 +8733,7 @@
             <a:r>
               <a:rPr sz="1100" b="1">
                 <a:solidFill>
-                  <a:srgbClr val="990011"/>
+                  <a:srgbClr val="2F3C7E"/>
                 </a:solidFill>
                 <a:latin typeface="Helvetica Neue"/>
               </a:rPr>
@@ -8771,7 +8771,7 @@
                 </a:solidFill>
                 <a:latin typeface="Georgia"/>
               </a:rPr>
-              <a:t>7,769</a:t>
+              <a:t>10,893</a:t>
             </a:r>
           </a:p>
         </p:txBody>
@@ -8805,7 +8805,7 @@
                 </a:solidFill>
                 <a:latin typeface="Helvetica Neue"/>
               </a:rPr>
-              <a:t>15 posts · 113 likes</a:t>
+              <a:t>25 posts · 146 likes</a:t>
             </a:r>
           </a:p>
         </p:txBody>
@@ -8839,7 +8839,7 @@
                 </a:solidFill>
                 <a:latin typeface="Helvetica Neue"/>
               </a:rPr>
-              <a:t>518 average views per post</a:t>
+              <a:t>436 average views per post</a:t>
             </a:r>
           </a:p>
         </p:txBody>
@@ -8869,7 +8869,7 @@
             <a:r>
               <a:rPr sz="1100" b="1">
                 <a:solidFill>
-                  <a:srgbClr val="990011"/>
+                  <a:srgbClr val="2F3C7E"/>
                 </a:solidFill>
                 <a:latin typeface="Helvetica Neue"/>
               </a:rPr>
@@ -8937,7 +8937,7 @@
             <a:avLst/>
           </a:prstGeom>
           <a:solidFill>
-            <a:srgbClr val="990011"/>
+            <a:srgbClr val="2F3C7E"/>
           </a:solidFill>
           <a:ln>
             <a:noFill/>
@@ -8991,11 +8991,11 @@
             <a:r>
               <a:rPr sz="1000" b="1">
                 <a:solidFill>
-                  <a:srgbClr val="990011"/>
-                </a:solidFill>
-                <a:latin typeface="Helvetica Neue"/>
-              </a:rPr>
-              <a:t>#1  ·  TT  ·  1,098 views</a:t>
+                  <a:srgbClr val="2F3C7E"/>
+                </a:solidFill>
+                <a:latin typeface="Helvetica Neue"/>
+              </a:rPr>
+              <a:t>#1  ·  FB  ·  914 views</a:t>
             </a:r>
           </a:p>
         </p:txBody>
@@ -9029,7 +9029,7 @@
                 </a:solidFill>
                 <a:latin typeface="Helvetica Neue"/>
               </a:rPr>
-              <a:t>Embarrassed to be American? Pride in this country is essential, espec...</a:t>
+              <a:t>Prop 3 is presented as a temporary measure, but it's actually an extension of existing tax</a:t>
             </a:r>
           </a:p>
         </p:txBody>
@@ -9093,7 +9093,7 @@
             <a:avLst/>
           </a:prstGeom>
           <a:solidFill>
-            <a:srgbClr val="990011"/>
+            <a:srgbClr val="2F3C7E"/>
           </a:solidFill>
           <a:ln>
             <a:noFill/>
@@ -9147,11 +9147,11 @@
             <a:r>
               <a:rPr sz="1000" b="1">
                 <a:solidFill>
-                  <a:srgbClr val="990011"/>
-                </a:solidFill>
-                <a:latin typeface="Helvetica Neue"/>
-              </a:rPr>
-              <a:t>#2  ·  FB  ·  797 views</a:t>
+                  <a:srgbClr val="2F3C7E"/>
+                </a:solidFill>
+                <a:latin typeface="Helvetica Neue"/>
+              </a:rPr>
+              <a:t>#2  ·  FB  ·  726 views</a:t>
             </a:r>
           </a:p>
         </p:txBody>
@@ -9185,7 +9185,7 @@
                 </a:solidFill>
                 <a:latin typeface="Helvetica Neue"/>
               </a:rPr>
-              <a:t>The World Cup is a massive moneymaker for FIFA, projected to generate $11 billion in profi</a:t>
+              <a:t>Assembly Bill 1821 raises concerns about public records requests. While cities face costs </a:t>
             </a:r>
           </a:p>
         </p:txBody>
@@ -9249,7 +9249,7 @@
             <a:avLst/>
           </a:prstGeom>
           <a:solidFill>
-            <a:srgbClr val="990011"/>
+            <a:srgbClr val="2F3C7E"/>
           </a:solidFill>
           <a:ln>
             <a:noFill/>
@@ -9303,11 +9303,11 @@
             <a:r>
               <a:rPr sz="1000" b="1">
                 <a:solidFill>
-                  <a:srgbClr val="990011"/>
-                </a:solidFill>
-                <a:latin typeface="Helvetica Neue"/>
-              </a:rPr>
-              <a:t>#3  ·  IG  ·  726 views</a:t>
+                  <a:srgbClr val="2F3C7E"/>
+                </a:solidFill>
+                <a:latin typeface="Helvetica Neue"/>
+              </a:rPr>
+              <a:t>#3  ·  FB  ·  683 views</a:t>
             </a:r>
           </a:p>
         </p:txBody>
@@ -9341,7 +9341,7 @@
                 </a:solidFill>
                 <a:latin typeface="Helvetica Neue"/>
               </a:rPr>
-              <a:t>1968: A year of stark divisions. Hippie or not? For government or against? Revolution or s</a:t>
+              <a:t>Two significant legislative wins for HOAs and condo buyers. We successfully opposed a bill</a:t>
             </a:r>
           </a:p>
         </p:txBody>
@@ -9415,7 +9415,7 @@
             <a:r>
               <a:rPr sz="1000" b="1">
                 <a:solidFill>
-                  <a:srgbClr val="990011"/>
+                  <a:srgbClr val="2F3C7E"/>
                 </a:solidFill>
                 <a:latin typeface="Helvetica Neue"/>
               </a:rPr>
@@ -9583,7 +9583,7 @@
                 </a:solidFill>
                 <a:latin typeface="Georgia"/>
               </a:rPr>
-              <a:t>Legislation &amp; Policy Watch</a:t>
+              <a:t>American Pride</a:t>
             </a:r>
           </a:p>
         </p:txBody>
@@ -9617,7 +9617,7 @@
                 </a:solidFill>
                 <a:latin typeface="Helvetica Neue"/>
               </a:rPr>
-              <a:t>CA bills, propositions, HOA fights, wealth tax — policy commentary independent of candidates.</a:t>
+              <a:t>Patriotic content + historical/analytical (1968, forefathers, unity language).</a:t>
             </a:r>
           </a:p>
         </p:txBody>
@@ -9647,11 +9647,11 @@
             <a:r>
               <a:rPr sz="900" b="1">
                 <a:solidFill>
-                  <a:srgbClr val="2F3C7E"/>
-                </a:solidFill>
-                <a:latin typeface="Helvetica Neue"/>
-              </a:rPr>
-              <a:t>AUDIENCE (theoretical): Slow-burn policy · Older (55+), civic-engaged</a:t>
+                  <a:srgbClr val="990011"/>
+                </a:solidFill>
+                <a:latin typeface="Helvetica Neue"/>
+              </a:rPr>
+              <a:t>AUDIENCE (theoretical): Traditional / patriotic · Older (55+), values-driven</a:t>
             </a:r>
           </a:p>
         </p:txBody>
@@ -9715,7 +9715,7 @@
             <a:avLst/>
           </a:prstGeom>
           <a:solidFill>
-            <a:srgbClr val="2F3C7E"/>
+            <a:srgbClr val="990011"/>
           </a:solidFill>
           <a:ln>
             <a:noFill/>
@@ -9769,7 +9769,7 @@
             <a:r>
               <a:rPr sz="1100" b="1">
                 <a:solidFill>
-                  <a:srgbClr val="2F3C7E"/>
+                  <a:srgbClr val="990011"/>
                 </a:solidFill>
                 <a:latin typeface="Helvetica Neue"/>
               </a:rPr>
@@ -9807,7 +9807,7 @@
                 </a:solidFill>
                 <a:latin typeface="Georgia"/>
               </a:rPr>
-              <a:t>6,192</a:t>
+              <a:t>7,769</a:t>
             </a:r>
           </a:p>
         </p:txBody>
@@ -9841,7 +9841,7 @@
                 </a:solidFill>
                 <a:latin typeface="Helvetica Neue"/>
               </a:rPr>
-              <a:t>13 posts · 77 likes</a:t>
+              <a:t>15 posts · 113 likes</a:t>
             </a:r>
           </a:p>
         </p:txBody>
@@ -9875,7 +9875,7 @@
                 </a:solidFill>
                 <a:latin typeface="Helvetica Neue"/>
               </a:rPr>
-              <a:t>476 average views per post</a:t>
+              <a:t>518 average views per post</a:t>
             </a:r>
           </a:p>
         </p:txBody>
@@ -9905,7 +9905,7 @@
             <a:r>
               <a:rPr sz="1100" b="1">
                 <a:solidFill>
-                  <a:srgbClr val="2F3C7E"/>
+                  <a:srgbClr val="990011"/>
                 </a:solidFill>
                 <a:latin typeface="Helvetica Neue"/>
               </a:rPr>
@@ -9973,7 +9973,7 @@
             <a:avLst/>
           </a:prstGeom>
           <a:solidFill>
-            <a:srgbClr val="2F3C7E"/>
+            <a:srgbClr val="990011"/>
           </a:solidFill>
           <a:ln>
             <a:noFill/>
@@ -10027,11 +10027,11 @@
             <a:r>
               <a:rPr sz="1000" b="1">
                 <a:solidFill>
-                  <a:srgbClr val="2F3C7E"/>
-                </a:solidFill>
-                <a:latin typeface="Helvetica Neue"/>
-              </a:rPr>
-              <a:t>#1  ·  FB  ·  726 views</a:t>
+                  <a:srgbClr val="990011"/>
+                </a:solidFill>
+                <a:latin typeface="Helvetica Neue"/>
+              </a:rPr>
+              <a:t>#1  ·  TT  ·  1,098 views</a:t>
             </a:r>
           </a:p>
         </p:txBody>
@@ -10065,7 +10065,7 @@
                 </a:solidFill>
                 <a:latin typeface="Helvetica Neue"/>
               </a:rPr>
-              <a:t>Assembly Bill 1821 raises concerns about public records requests. While cities face costs </a:t>
+              <a:t>Embarrassed to be American? Pride in this country is essential, espec...</a:t>
             </a:r>
           </a:p>
         </p:txBody>
@@ -10129,7 +10129,7 @@
             <a:avLst/>
           </a:prstGeom>
           <a:solidFill>
-            <a:srgbClr val="2F3C7E"/>
+            <a:srgbClr val="990011"/>
           </a:solidFill>
           <a:ln>
             <a:noFill/>
@@ -10183,11 +10183,11 @@
             <a:r>
               <a:rPr sz="1000" b="1">
                 <a:solidFill>
-                  <a:srgbClr val="2F3C7E"/>
-                </a:solidFill>
-                <a:latin typeface="Helvetica Neue"/>
-              </a:rPr>
-              <a:t>#2  ·  FB  ·  683 views</a:t>
+                  <a:srgbClr val="990011"/>
+                </a:solidFill>
+                <a:latin typeface="Helvetica Neue"/>
+              </a:rPr>
+              <a:t>#2  ·  FB  ·  797 views</a:t>
             </a:r>
           </a:p>
         </p:txBody>
@@ -10221,7 +10221,7 @@
                 </a:solidFill>
                 <a:latin typeface="Helvetica Neue"/>
               </a:rPr>
-              <a:t>Two significant legislative wins for HOAs and condo buyers. We successfully opposed a bill</a:t>
+              <a:t>The World Cup is a massive moneymaker for FIFA, projected to generate $11 billion in profi</a:t>
             </a:r>
           </a:p>
         </p:txBody>
@@ -10285,7 +10285,7 @@
             <a:avLst/>
           </a:prstGeom>
           <a:solidFill>
-            <a:srgbClr val="2F3C7E"/>
+            <a:srgbClr val="990011"/>
           </a:solidFill>
           <a:ln>
             <a:noFill/>
@@ -10339,11 +10339,11 @@
             <a:r>
               <a:rPr sz="1000" b="1">
                 <a:solidFill>
-                  <a:srgbClr val="2F3C7E"/>
-                </a:solidFill>
-                <a:latin typeface="Helvetica Neue"/>
-              </a:rPr>
-              <a:t>#3  ·  IG  ·  665 views</a:t>
+                  <a:srgbClr val="990011"/>
+                </a:solidFill>
+                <a:latin typeface="Helvetica Neue"/>
+              </a:rPr>
+              <a:t>#3  ·  IG  ·  726 views</a:t>
             </a:r>
           </a:p>
         </p:txBody>
@@ -10377,7 +10377,7 @@
                 </a:solidFill>
                 <a:latin typeface="Helvetica Neue"/>
               </a:rPr>
-              <a:t>California's planning commission is in a bind. State laws like SB 9, AB 1893, and SB 79 ar</a:t>
+              <a:t>1968: A year of stark divisions. Hippie or not? For government or against? Revolution or s</a:t>
             </a:r>
           </a:p>
         </p:txBody>
@@ -10451,7 +10451,7 @@
             <a:r>
               <a:rPr sz="1000" b="1">
                 <a:solidFill>
-                  <a:srgbClr val="2F3C7E"/>
+                  <a:srgbClr val="990011"/>
                 </a:solidFill>
                 <a:latin typeface="Helvetica Neue"/>
               </a:rPr>
@@ -10843,7 +10843,7 @@
                 </a:solidFill>
                 <a:latin typeface="Georgia"/>
               </a:rPr>
-              <a:t>51,623 views</a:t>
+              <a:t>51,710 views</a:t>
             </a:r>
           </a:p>
         </p:txBody>
@@ -10877,7 +10877,7 @@
                 </a:solidFill>
                 <a:latin typeface="Helvetica Neue"/>
               </a:rPr>
-              <a:t>20 posts · 2,581 avg views/post</a:t>
+              <a:t>20 posts · 2,586 avg views/post</a:t>
             </a:r>
           </a:p>
         </p:txBody>
@@ -11203,7 +11203,7 @@
                 </a:solidFill>
                 <a:latin typeface="Georgia"/>
               </a:rPr>
-              <a:t>100,360 views</a:t>
+              <a:t>100,997 views</a:t>
             </a:r>
           </a:p>
         </p:txBody>
@@ -11237,7 +11237,7 @@
                 </a:solidFill>
                 <a:latin typeface="Helvetica Neue"/>
               </a:rPr>
-              <a:t>63 posts · 1,593 avg views/post</a:t>
+              <a:t>63 posts · 1,603 avg views/post</a:t>
             </a:r>
           </a:p>
         </p:txBody>
@@ -11563,7 +11563,7 @@
                 </a:solidFill>
                 <a:latin typeface="Georgia"/>
               </a:rPr>
-              <a:t>102,734 views</a:t>
+              <a:t>104,910 views</a:t>
             </a:r>
           </a:p>
         </p:txBody>
@@ -11597,7 +11597,7 @@
                 </a:solidFill>
                 <a:latin typeface="Helvetica Neue"/>
               </a:rPr>
-              <a:t>43 posts · 2,389 avg views/post</a:t>
+              <a:t>48 posts · 2,186 avg views/post</a:t>
             </a:r>
           </a:p>
         </p:txBody>
@@ -13899,7 +13899,7 @@
                 </a:solidFill>
                 <a:latin typeface="Helvetica Neue"/>
               </a:rPr>
-              <a:t>2,485 avg views/post   ·   36 posts   ·   89,447 total</a:t>
+              <a:t>2,487 avg views/post   ·   36 posts   ·   89,526 total</a:t>
             </a:r>
           </a:p>
         </p:txBody>
@@ -14191,7 +14191,7 @@
                 </a:solidFill>
                 <a:latin typeface="Helvetica Neue"/>
               </a:rPr>
-              <a:t>1,298 avg views/post   ·   210 posts   ·   272,630 total</a:t>
+              <a:t>1,306 avg views/post   ·   214 posts   ·   279,505 total</a:t>
             </a:r>
           </a:p>
         </p:txBody>
@@ -16110,7 +16110,7 @@
                 </a:solidFill>
                 <a:latin typeface="Helvetica Neue"/>
               </a:rPr>
-              <a:t>289,251 views · 203 posts</a:t>
+              <a:t>297,367 views · 214 posts</a:t>
             </a:r>
           </a:p>
         </p:txBody>
@@ -16158,7 +16158,7 @@
         <p:spPr>
           <a:xfrm>
             <a:off x="4114800" y="2476968"/>
-            <a:ext cx="2208434" cy="128016"/>
+            <a:ext cx="2193659" cy="128016"/>
           </a:xfrm>
           <a:prstGeom prst="rect">
             <a:avLst/>
@@ -16201,7 +16201,7 @@
         </p:nvSpPr>
         <p:spPr>
           <a:xfrm>
-            <a:off x="6414674" y="2413312"/>
+            <a:off x="6399899" y="2413312"/>
             <a:ext cx="2286000" cy="291904"/>
           </a:xfrm>
           <a:prstGeom prst="rect">
@@ -16222,7 +16222,7 @@
                 </a:solidFill>
                 <a:latin typeface="Helvetica Neue"/>
               </a:rPr>
-              <a:t>102,734 views · 43 posts</a:t>
+              <a:t>104,910 views · 48 posts</a:t>
             </a:r>
           </a:p>
         </p:txBody>
@@ -16270,7 +16270,7 @@
         <p:spPr>
           <a:xfrm>
             <a:off x="4114800" y="2768873"/>
-            <a:ext cx="2157401" cy="128016"/>
+            <a:ext cx="2111839" cy="128016"/>
           </a:xfrm>
           <a:prstGeom prst="rect">
             <a:avLst/>
@@ -16313,7 +16313,7 @@
         </p:nvSpPr>
         <p:spPr>
           <a:xfrm>
-            <a:off x="6363641" y="2705217"/>
+            <a:off x="6318079" y="2705217"/>
             <a:ext cx="2286000" cy="291904"/>
           </a:xfrm>
           <a:prstGeom prst="rect">
@@ -16334,7 +16334,7 @@
                 </a:solidFill>
                 <a:latin typeface="Helvetica Neue"/>
               </a:rPr>
-              <a:t>100,360 views · 63 posts</a:t>
+              <a:t>100,997 views · 63 posts</a:t>
             </a:r>
           </a:p>
         </p:txBody>
@@ -16382,7 +16382,7 @@
         <p:spPr>
           <a:xfrm>
             <a:off x="4114800" y="3060778"/>
-            <a:ext cx="1922808" cy="128016"/>
+            <a:ext cx="1871981" cy="128016"/>
           </a:xfrm>
           <a:prstGeom prst="rect">
             <a:avLst/>
@@ -16425,7 +16425,7 @@
         </p:nvSpPr>
         <p:spPr>
           <a:xfrm>
-            <a:off x="6129048" y="2997121"/>
+            <a:off x="6078221" y="2997121"/>
             <a:ext cx="2286000" cy="291904"/>
           </a:xfrm>
           <a:prstGeom prst="rect">
@@ -16446,7 +16446,7 @@
                 </a:solidFill>
                 <a:latin typeface="Helvetica Neue"/>
               </a:rPr>
-              <a:t>89,447 views · 36 posts</a:t>
+              <a:t>89,526 views · 36 posts</a:t>
             </a:r>
           </a:p>
         </p:txBody>
@@ -16494,7 +16494,7 @@
         <p:spPr>
           <a:xfrm>
             <a:off x="4114800" y="3352682"/>
-            <a:ext cx="1733724" cy="128016"/>
+            <a:ext cx="1730212" cy="128016"/>
           </a:xfrm>
           <a:prstGeom prst="rect">
             <a:avLst/>
@@ -16537,7 +16537,7 @@
         </p:nvSpPr>
         <p:spPr>
           <a:xfrm>
-            <a:off x="5939964" y="3289026"/>
+            <a:off x="5936452" y="3289026"/>
             <a:ext cx="2286000" cy="291904"/>
           </a:xfrm>
           <a:prstGeom prst="rect">
@@ -16558,7 +16558,7 @@
                 </a:solidFill>
                 <a:latin typeface="Helvetica Neue"/>
               </a:rPr>
-              <a:t>80,651 views · 109 posts</a:t>
+              <a:t>82,746 views · 111 posts</a:t>
             </a:r>
           </a:p>
         </p:txBody>
@@ -16606,7 +16606,7 @@
         <p:spPr>
           <a:xfrm>
             <a:off x="4114800" y="3644587"/>
-            <a:ext cx="1580797" cy="128016"/>
+            <a:ext cx="1579618" cy="128016"/>
           </a:xfrm>
           <a:prstGeom prst="rect">
             <a:avLst/>
@@ -16649,7 +16649,7 @@
         </p:nvSpPr>
         <p:spPr>
           <a:xfrm>
-            <a:off x="5787037" y="3580931"/>
+            <a:off x="5785858" y="3580931"/>
             <a:ext cx="2286000" cy="291904"/>
           </a:xfrm>
           <a:prstGeom prst="rect">
@@ -16670,7 +16670,7 @@
                 </a:solidFill>
                 <a:latin typeface="Helvetica Neue"/>
               </a:rPr>
-              <a:t>73,537 views · 70 posts</a:t>
+              <a:t>75,544 views · 71 posts</a:t>
             </a:r>
           </a:p>
         </p:txBody>
@@ -16718,7 +16718,7 @@
         <p:spPr>
           <a:xfrm>
             <a:off x="4114800" y="3936491"/>
-            <a:ext cx="1370968" cy="128016"/>
+            <a:ext cx="1345929" cy="128016"/>
           </a:xfrm>
           <a:prstGeom prst="rect">
             <a:avLst/>
@@ -16761,7 +16761,7 @@
         </p:nvSpPr>
         <p:spPr>
           <a:xfrm>
-            <a:off x="5577208" y="3872835"/>
+            <a:off x="5552169" y="3872835"/>
             <a:ext cx="2286000" cy="291904"/>
           </a:xfrm>
           <a:prstGeom prst="rect">
@@ -16782,7 +16782,7 @@
                 </a:solidFill>
                 <a:latin typeface="Helvetica Neue"/>
               </a:rPr>
-              <a:t>63,776 views · 25 posts</a:t>
+              <a:t>64,368 views · 27 posts</a:t>
             </a:r>
           </a:p>
         </p:txBody>
@@ -16830,7 +16830,7 @@
         <p:spPr>
           <a:xfrm>
             <a:off x="4114800" y="4228396"/>
-            <a:ext cx="1109720" cy="128016"/>
+            <a:ext cx="1081251" cy="128016"/>
           </a:xfrm>
           <a:prstGeom prst="rect">
             <a:avLst/>
@@ -16873,7 +16873,7 @@
         </p:nvSpPr>
         <p:spPr>
           <a:xfrm>
-            <a:off x="5315960" y="4164740"/>
+            <a:off x="5287491" y="4164740"/>
             <a:ext cx="2286000" cy="291904"/>
           </a:xfrm>
           <a:prstGeom prst="rect">
@@ -16894,7 +16894,7 @@
                 </a:solidFill>
                 <a:latin typeface="Helvetica Neue"/>
               </a:rPr>
-              <a:t>51,623 views · 20 posts</a:t>
+              <a:t>51,710 views · 20 posts</a:t>
             </a:r>
           </a:p>
         </p:txBody>
@@ -16942,7 +16942,7 @@
         <p:spPr>
           <a:xfrm>
             <a:off x="4114800" y="4520301"/>
-            <a:ext cx="668244" cy="128016"/>
+            <a:ext cx="736593" cy="128016"/>
           </a:xfrm>
           <a:prstGeom prst="rect">
             <a:avLst/>
@@ -16985,7 +16985,7 @@
         </p:nvSpPr>
         <p:spPr>
           <a:xfrm>
-            <a:off x="4874484" y="4456644"/>
+            <a:off x="4942833" y="4456644"/>
             <a:ext cx="2286000" cy="291904"/>
           </a:xfrm>
           <a:prstGeom prst="rect">
@@ -17006,7 +17006,7 @@
                 </a:solidFill>
                 <a:latin typeface="Helvetica Neue"/>
               </a:rPr>
-              <a:t>31,086 views · 34 posts</a:t>
+              <a:t>35,227 views · 37 posts</a:t>
             </a:r>
           </a:p>
         </p:txBody>
@@ -17040,7 +17040,7 @@
                 </a:solidFill>
                 <a:latin typeface="Helvetica Neue"/>
               </a:rPr>
-              <a:t>Resident Highlights</a:t>
+              <a:t>Legislation &amp; Policy Watch</a:t>
             </a:r>
           </a:p>
         </p:txBody>
@@ -17054,7 +17054,119 @@
         <p:spPr>
           <a:xfrm>
             <a:off x="4114800" y="4812205"/>
-            <a:ext cx="177454" cy="128016"/>
+            <a:ext cx="227771" cy="128016"/>
+          </a:xfrm>
+          <a:prstGeom prst="rect">
+            <a:avLst/>
+          </a:prstGeom>
+          <a:solidFill>
+            <a:srgbClr val="2F3C7E"/>
+          </a:solidFill>
+          <a:ln>
+            <a:noFill/>
+          </a:ln>
+          <a:effectLst/>
+        </p:spPr>
+        <p:style>
+          <a:lnRef idx="1">
+            <a:schemeClr val="accent1"/>
+          </a:lnRef>
+          <a:fillRef idx="3">
+            <a:schemeClr val="accent1"/>
+          </a:fillRef>
+          <a:effectRef idx="2">
+            <a:schemeClr val="accent1"/>
+          </a:effectRef>
+          <a:fontRef idx="minor">
+            <a:schemeClr val="lt1"/>
+          </a:fontRef>
+        </p:style>
+        <p:txBody>
+          <a:bodyPr rtlCol="0" anchor="ctr"/>
+          <a:lstStyle/>
+          <a:p>
+            <a:pPr algn="ctr"/>
+          </a:p>
+        </p:txBody>
+      </p:sp>
+      <p:sp>
+        <p:nvSpPr>
+          <p:cNvPr id="35" name="TextBox 34"/>
+          <p:cNvSpPr txBox="1"/>
+          <p:nvPr/>
+        </p:nvSpPr>
+        <p:spPr>
+          <a:xfrm>
+            <a:off x="4434011" y="4748549"/>
+            <a:ext cx="2286000" cy="291904"/>
+          </a:xfrm>
+          <a:prstGeom prst="rect">
+            <a:avLst/>
+          </a:prstGeom>
+          <a:noFill/>
+        </p:spPr>
+        <p:txBody>
+          <a:bodyPr wrap="square" lIns="0" rIns="0" tIns="0" bIns="0">
+            <a:spAutoFit/>
+          </a:bodyPr>
+          <a:lstStyle/>
+          <a:p>
+            <a:r>
+              <a:rPr sz="900" b="0">
+                <a:solidFill>
+                  <a:srgbClr val="6B7082"/>
+                </a:solidFill>
+                <a:latin typeface="Helvetica Neue"/>
+              </a:rPr>
+              <a:t>10,893 views · 25 posts</a:t>
+            </a:r>
+          </a:p>
+        </p:txBody>
+      </p:sp>
+      <p:sp>
+        <p:nvSpPr>
+          <p:cNvPr id="36" name="TextBox 35"/>
+          <p:cNvSpPr txBox="1"/>
+          <p:nvPr/>
+        </p:nvSpPr>
+        <p:spPr>
+          <a:xfrm>
+            <a:off x="731520" y="5040454"/>
+            <a:ext cx="3200400" cy="291904"/>
+          </a:xfrm>
+          <a:prstGeom prst="rect">
+            <a:avLst/>
+          </a:prstGeom>
+          <a:noFill/>
+        </p:spPr>
+        <p:txBody>
+          <a:bodyPr wrap="square" lIns="0" rIns="0" tIns="0" bIns="0">
+            <a:spAutoFit/>
+          </a:bodyPr>
+          <a:lstStyle/>
+          <a:p>
+            <a:r>
+              <a:rPr sz="1100" b="1">
+                <a:solidFill>
+                  <a:srgbClr val="141833"/>
+                </a:solidFill>
+                <a:latin typeface="Helvetica Neue"/>
+              </a:rPr>
+              <a:t>Resident Highlights</a:t>
+            </a:r>
+          </a:p>
+        </p:txBody>
+      </p:sp>
+      <p:sp>
+        <p:nvSpPr>
+          <p:cNvPr id="37" name="Rectangle 36"/>
+          <p:cNvSpPr/>
+          <p:nvPr/>
+        </p:nvSpPr>
+        <p:spPr>
+          <a:xfrm>
+            <a:off x="4114800" y="5104110"/>
+            <a:ext cx="172674" cy="128016"/>
           </a:xfrm>
           <a:prstGeom prst="rect">
             <a:avLst/>
@@ -17091,13 +17203,13 @@
       </p:sp>
       <p:sp>
         <p:nvSpPr>
-          <p:cNvPr id="35" name="TextBox 34"/>
-          <p:cNvSpPr txBox="1"/>
-          <p:nvPr/>
-        </p:nvSpPr>
-        <p:spPr>
-          <a:xfrm>
-            <a:off x="4383694" y="4748549"/>
+          <p:cNvPr id="38" name="TextBox 37"/>
+          <p:cNvSpPr txBox="1"/>
+          <p:nvPr/>
+        </p:nvSpPr>
+        <p:spPr>
+          <a:xfrm>
+            <a:off x="4378914" y="5040454"/>
             <a:ext cx="2286000" cy="291904"/>
           </a:xfrm>
           <a:prstGeom prst="rect">
@@ -17118,20 +17230,20 @@
                 </a:solidFill>
                 <a:latin typeface="Helvetica Neue"/>
               </a:rPr>
-              <a:t>8,255 views · 8 posts</a:t>
-            </a:r>
-          </a:p>
-        </p:txBody>
-      </p:sp>
-      <p:sp>
-        <p:nvSpPr>
-          <p:cNvPr id="36" name="TextBox 35"/>
-          <p:cNvSpPr txBox="1"/>
-          <p:nvPr/>
-        </p:nvSpPr>
-        <p:spPr>
-          <a:xfrm>
-            <a:off x="731520" y="5040454"/>
+              <a:t>8,258 views · 8 posts</a:t>
+            </a:r>
+          </a:p>
+        </p:txBody>
+      </p:sp>
+      <p:sp>
+        <p:nvSpPr>
+          <p:cNvPr id="39" name="TextBox 38"/>
+          <p:cNvSpPr txBox="1"/>
+          <p:nvPr/>
+        </p:nvSpPr>
+        <p:spPr>
+          <a:xfrm>
+            <a:off x="731520" y="5332358"/>
             <a:ext cx="3200400" cy="291904"/>
           </a:xfrm>
           <a:prstGeom prst="rect">
@@ -17159,14 +17271,14 @@
       </p:sp>
       <p:sp>
         <p:nvSpPr>
-          <p:cNvPr id="37" name="Rectangle 36"/>
+          <p:cNvPr id="40" name="Rectangle 39"/>
           <p:cNvSpPr/>
           <p:nvPr/>
         </p:nvSpPr>
         <p:spPr>
           <a:xfrm>
-            <a:off x="4114800" y="5104110"/>
-            <a:ext cx="167007" cy="128016"/>
+            <a:off x="4114800" y="5396015"/>
+            <a:ext cx="162449" cy="128016"/>
           </a:xfrm>
           <a:prstGeom prst="rect">
             <a:avLst/>
@@ -17203,13 +17315,13 @@
       </p:sp>
       <p:sp>
         <p:nvSpPr>
-          <p:cNvPr id="38" name="TextBox 37"/>
-          <p:cNvSpPr txBox="1"/>
-          <p:nvPr/>
-        </p:nvSpPr>
-        <p:spPr>
-          <a:xfrm>
-            <a:off x="4373247" y="5040454"/>
+          <p:cNvPr id="41" name="TextBox 40"/>
+          <p:cNvSpPr txBox="1"/>
+          <p:nvPr/>
+        </p:nvSpPr>
+        <p:spPr>
+          <a:xfrm>
+            <a:off x="4368689" y="5332358"/>
             <a:ext cx="2286000" cy="291904"/>
           </a:xfrm>
           <a:prstGeom prst="rect">
@@ -17231,118 +17343,6 @@
                 <a:latin typeface="Helvetica Neue"/>
               </a:rPr>
               <a:t>7,769 views · 15 posts</a:t>
-            </a:r>
-          </a:p>
-        </p:txBody>
-      </p:sp>
-      <p:sp>
-        <p:nvSpPr>
-          <p:cNvPr id="39" name="TextBox 38"/>
-          <p:cNvSpPr txBox="1"/>
-          <p:nvPr/>
-        </p:nvSpPr>
-        <p:spPr>
-          <a:xfrm>
-            <a:off x="731520" y="5332358"/>
-            <a:ext cx="3200400" cy="291904"/>
-          </a:xfrm>
-          <a:prstGeom prst="rect">
-            <a:avLst/>
-          </a:prstGeom>
-          <a:noFill/>
-        </p:spPr>
-        <p:txBody>
-          <a:bodyPr wrap="square" lIns="0" rIns="0" tIns="0" bIns="0">
-            <a:spAutoFit/>
-          </a:bodyPr>
-          <a:lstStyle/>
-          <a:p>
-            <a:r>
-              <a:rPr sz="1100" b="1">
-                <a:solidFill>
-                  <a:srgbClr val="141833"/>
-                </a:solidFill>
-                <a:latin typeface="Helvetica Neue"/>
-              </a:rPr>
-              <a:t>Legislation &amp; Policy Watch</a:t>
-            </a:r>
-          </a:p>
-        </p:txBody>
-      </p:sp>
-      <p:sp>
-        <p:nvSpPr>
-          <p:cNvPr id="40" name="Rectangle 39"/>
-          <p:cNvSpPr/>
-          <p:nvPr/>
-        </p:nvSpPr>
-        <p:spPr>
-          <a:xfrm>
-            <a:off x="4114800" y="5396015"/>
-            <a:ext cx="133107" cy="128016"/>
-          </a:xfrm>
-          <a:prstGeom prst="rect">
-            <a:avLst/>
-          </a:prstGeom>
-          <a:solidFill>
-            <a:srgbClr val="2F3C7E"/>
-          </a:solidFill>
-          <a:ln>
-            <a:noFill/>
-          </a:ln>
-          <a:effectLst/>
-        </p:spPr>
-        <p:style>
-          <a:lnRef idx="1">
-            <a:schemeClr val="accent1"/>
-          </a:lnRef>
-          <a:fillRef idx="3">
-            <a:schemeClr val="accent1"/>
-          </a:fillRef>
-          <a:effectRef idx="2">
-            <a:schemeClr val="accent1"/>
-          </a:effectRef>
-          <a:fontRef idx="minor">
-            <a:schemeClr val="lt1"/>
-          </a:fontRef>
-        </p:style>
-        <p:txBody>
-          <a:bodyPr rtlCol="0" anchor="ctr"/>
-          <a:lstStyle/>
-          <a:p>
-            <a:pPr algn="ctr"/>
-          </a:p>
-        </p:txBody>
-      </p:sp>
-      <p:sp>
-        <p:nvSpPr>
-          <p:cNvPr id="41" name="TextBox 40"/>
-          <p:cNvSpPr txBox="1"/>
-          <p:nvPr/>
-        </p:nvSpPr>
-        <p:spPr>
-          <a:xfrm>
-            <a:off x="4339347" y="5332358"/>
-            <a:ext cx="2286000" cy="291904"/>
-          </a:xfrm>
-          <a:prstGeom prst="rect">
-            <a:avLst/>
-          </a:prstGeom>
-          <a:noFill/>
-        </p:spPr>
-        <p:txBody>
-          <a:bodyPr wrap="square" lIns="0" rIns="0" tIns="0" bIns="0">
-            <a:spAutoFit/>
-          </a:bodyPr>
-          <a:lstStyle/>
-          <a:p>
-            <a:r>
-              <a:rPr sz="900" b="0">
-                <a:solidFill>
-                  <a:srgbClr val="6B7082"/>
-                </a:solidFill>
-                <a:latin typeface="Helvetica Neue"/>
-              </a:rPr>
-              <a:t>6,192 views · 13 posts</a:t>
             </a:r>
           </a:p>
         </p:txBody>
@@ -18050,7 +18050,7 @@
                 </a:solidFill>
                 <a:latin typeface="Georgia"/>
               </a:rPr>
-              <a:t>102,734</a:t>
+              <a:t>104,910</a:t>
             </a:r>
           </a:p>
         </p:txBody>
@@ -18084,7 +18084,7 @@
                 </a:solidFill>
                 <a:latin typeface="Helvetica Neue"/>
               </a:rPr>
-              <a:t>43 posts · 4,490 likes</a:t>
+              <a:t>48 posts · 4,541 likes</a:t>
             </a:r>
           </a:p>
         </p:txBody>
@@ -18118,7 +18118,7 @@
                 </a:solidFill>
                 <a:latin typeface="Helvetica Neue"/>
               </a:rPr>
-              <a:t>2,389 average views per post</a:t>
+              <a:t>2,186 average views per post</a:t>
             </a:r>
           </a:p>
         </p:txBody>
@@ -19086,7 +19086,7 @@
                 </a:solidFill>
                 <a:latin typeface="Georgia"/>
               </a:rPr>
-              <a:t>100,360</a:t>
+              <a:t>100,997</a:t>
             </a:r>
           </a:p>
         </p:txBody>
@@ -19120,7 +19120,7 @@
                 </a:solidFill>
                 <a:latin typeface="Helvetica Neue"/>
               </a:rPr>
-              <a:t>63 posts · 3,220 likes</a:t>
+              <a:t>63 posts · 3,242 likes</a:t>
             </a:r>
           </a:p>
         </p:txBody>
@@ -19154,7 +19154,7 @@
                 </a:solidFill>
                 <a:latin typeface="Helvetica Neue"/>
               </a:rPr>
-              <a:t>1,593 average views per post</a:t>
+              <a:t>1,603 average views per post</a:t>
             </a:r>
           </a:p>
         </p:txBody>
@@ -19622,7 +19622,7 @@
                 </a:solidFill>
                 <a:latin typeface="Helvetica Neue"/>
               </a:rPr>
-              <a:t>#3  ·  TT  ·  5,892 views</a:t>
+              <a:t>#3  ·  TT  ·  6,529 views</a:t>
             </a:r>
           </a:p>
         </p:txBody>
@@ -20122,7 +20122,7 @@
                 </a:solidFill>
                 <a:latin typeface="Georgia"/>
               </a:rPr>
-              <a:t>89,447</a:t>
+              <a:t>89,526</a:t>
             </a:r>
           </a:p>
         </p:txBody>
@@ -20156,7 +20156,7 @@
                 </a:solidFill>
                 <a:latin typeface="Helvetica Neue"/>
               </a:rPr>
-              <a:t>36 posts · 2,027 likes</a:t>
+              <a:t>36 posts · 2,028 likes</a:t>
             </a:r>
           </a:p>
         </p:txBody>
@@ -20190,7 +20190,7 @@
                 </a:solidFill>
                 <a:latin typeface="Helvetica Neue"/>
               </a:rPr>
-              <a:t>2,485 average views per post</a:t>
+              <a:t>2,487 average views per post</a:t>
             </a:r>
           </a:p>
         </p:txBody>
@@ -21158,7 +21158,7 @@
                 </a:solidFill>
                 <a:latin typeface="Georgia"/>
               </a:rPr>
-              <a:t>73,537</a:t>
+              <a:t>75,544</a:t>
             </a:r>
           </a:p>
         </p:txBody>
@@ -21192,7 +21192,7 @@
                 </a:solidFill>
                 <a:latin typeface="Helvetica Neue"/>
               </a:rPr>
-              <a:t>70 posts · 1,457 likes</a:t>
+              <a:t>71 posts · 1,513 likes</a:t>
             </a:r>
           </a:p>
         </p:txBody>
@@ -21226,7 +21226,7 @@
                 </a:solidFill>
                 <a:latin typeface="Helvetica Neue"/>
               </a:rPr>
-              <a:t>1,051 average views per post</a:t>
+              <a:t>1,064 average views per post</a:t>
             </a:r>
           </a:p>
         </p:txBody>
@@ -21382,7 +21382,7 @@
                 </a:solidFill>
                 <a:latin typeface="Helvetica Neue"/>
               </a:rPr>
-              <a:t>#1  ·  FB  ·  6,265 views</a:t>
+              <a:t>#1  ·  FB  ·  7,150 views</a:t>
             </a:r>
           </a:p>
         </p:txBody>
@@ -22194,7 +22194,7 @@
                 </a:solidFill>
                 <a:latin typeface="Georgia"/>
               </a:rPr>
-              <a:t>63,776</a:t>
+              <a:t>64,368</a:t>
             </a:r>
           </a:p>
         </p:txBody>
@@ -22228,7 +22228,7 @@
                 </a:solidFill>
                 <a:latin typeface="Helvetica Neue"/>
               </a:rPr>
-              <a:t>25 posts · 1,480 likes</a:t>
+              <a:t>27 posts · 1,489 likes</a:t>
             </a:r>
           </a:p>
         </p:txBody>
@@ -22262,7 +22262,7 @@
                 </a:solidFill>
                 <a:latin typeface="Helvetica Neue"/>
               </a:rPr>
-              <a:t>2,551 average views per post</a:t>
+              <a:t>2,384 average views per post</a:t>
             </a:r>
           </a:p>
         </p:txBody>

--- a/SPONSOR_CONTENT_REPORT.pptx
+++ b/SPONSOR_CONTENT_REPORT.pptx
@@ -4819,7 +4819,7 @@
                 </a:solidFill>
                 <a:latin typeface="Georgia"/>
               </a:rPr>
-              <a:t>35,227</a:t>
+              <a:t>35,229</a:t>
             </a:r>
           </a:p>
         </p:txBody>
@@ -7021,7 +7021,7 @@
                 </a:solidFill>
                 <a:latin typeface="Helvetica Neue"/>
               </a:rPr>
-              <a:t>82,746 views · 111 posts · 745 avg</a:t>
+              <a:t>82,747 views · 111 posts · 745 avg</a:t>
             </a:r>
           </a:p>
         </p:txBody>
@@ -7103,7 +7103,7 @@
         <p:spPr>
           <a:xfrm>
             <a:off x="4206240" y="2720339"/>
-            <a:ext cx="794475" cy="274320"/>
+            <a:ext cx="794466" cy="274320"/>
           </a:xfrm>
           <a:prstGeom prst="rect">
             <a:avLst/>
@@ -7146,7 +7146,7 @@
         </p:nvSpPr>
         <p:spPr>
           <a:xfrm>
-            <a:off x="5092155" y="2651759"/>
+            <a:off x="5092146" y="2651759"/>
             <a:ext cx="2286000" cy="251460"/>
           </a:xfrm>
           <a:prstGeom prst="rect">
@@ -7180,7 +7180,7 @@
         </p:nvSpPr>
         <p:spPr>
           <a:xfrm>
-            <a:off x="5092155" y="2857499"/>
+            <a:off x="5092146" y="2857499"/>
             <a:ext cx="4572000" cy="251460"/>
           </a:xfrm>
           <a:prstGeom prst="rect">
@@ -7249,7 +7249,7 @@
         <p:spPr>
           <a:xfrm>
             <a:off x="4206240" y="3223260"/>
-            <a:ext cx="566628" cy="274320"/>
+            <a:ext cx="566621" cy="274320"/>
           </a:xfrm>
           <a:prstGeom prst="rect">
             <a:avLst/>
@@ -7292,7 +7292,7 @@
         </p:nvSpPr>
         <p:spPr>
           <a:xfrm>
-            <a:off x="4864308" y="3154679"/>
+            <a:off x="4864301" y="3154679"/>
             <a:ext cx="2286000" cy="251460"/>
           </a:xfrm>
           <a:prstGeom prst="rect">
@@ -7326,7 +7326,7 @@
         </p:nvSpPr>
         <p:spPr>
           <a:xfrm>
-            <a:off x="4864308" y="3360420"/>
+            <a:off x="4864301" y="3360420"/>
             <a:ext cx="4572000" cy="251460"/>
           </a:xfrm>
           <a:prstGeom prst="rect">
@@ -7735,7 +7735,7 @@
                 </a:solidFill>
                 <a:latin typeface="Georgia"/>
               </a:rPr>
-              <a:t>82,746</a:t>
+              <a:t>82,747</a:t>
             </a:r>
           </a:p>
         </p:txBody>
@@ -11203,7 +11203,7 @@
                 </a:solidFill>
                 <a:latin typeface="Georgia"/>
               </a:rPr>
-              <a:t>100,997 views</a:t>
+              <a:t>100,998 views</a:t>
             </a:r>
           </a:p>
         </p:txBody>
@@ -14191,7 +14191,7 @@
                 </a:solidFill>
                 <a:latin typeface="Helvetica Neue"/>
               </a:rPr>
-              <a:t>1,306 avg views/post   ·   214 posts   ·   279,505 total</a:t>
+              <a:t>1,306 avg views/post   ·   214 posts   ·   279,509 total</a:t>
             </a:r>
           </a:p>
         </p:txBody>
@@ -16110,7 +16110,7 @@
                 </a:solidFill>
                 <a:latin typeface="Helvetica Neue"/>
               </a:rPr>
-              <a:t>297,367 views · 214 posts</a:t>
+              <a:t>297,372 views · 214 posts</a:t>
             </a:r>
           </a:p>
         </p:txBody>
@@ -16158,7 +16158,7 @@
         <p:spPr>
           <a:xfrm>
             <a:off x="4114800" y="2476968"/>
-            <a:ext cx="2193659" cy="128016"/>
+            <a:ext cx="2193622" cy="128016"/>
           </a:xfrm>
           <a:prstGeom prst="rect">
             <a:avLst/>
@@ -16201,7 +16201,7 @@
         </p:nvSpPr>
         <p:spPr>
           <a:xfrm>
-            <a:off x="6399899" y="2413312"/>
+            <a:off x="6399862" y="2413312"/>
             <a:ext cx="2286000" cy="291904"/>
           </a:xfrm>
           <a:prstGeom prst="rect">
@@ -16270,7 +16270,7 @@
         <p:spPr>
           <a:xfrm>
             <a:off x="4114800" y="2768873"/>
-            <a:ext cx="2111839" cy="128016"/>
+            <a:ext cx="2111824" cy="128016"/>
           </a:xfrm>
           <a:prstGeom prst="rect">
             <a:avLst/>
@@ -16313,7 +16313,7 @@
         </p:nvSpPr>
         <p:spPr>
           <a:xfrm>
-            <a:off x="6318079" y="2705217"/>
+            <a:off x="6318064" y="2705217"/>
             <a:ext cx="2286000" cy="291904"/>
           </a:xfrm>
           <a:prstGeom prst="rect">
@@ -16334,7 +16334,7 @@
                 </a:solidFill>
                 <a:latin typeface="Helvetica Neue"/>
               </a:rPr>
-              <a:t>100,997 views · 63 posts</a:t>
+              <a:t>100,998 views · 63 posts</a:t>
             </a:r>
           </a:p>
         </p:txBody>
@@ -16382,7 +16382,7 @@
         <p:spPr>
           <a:xfrm>
             <a:off x="4114800" y="3060778"/>
-            <a:ext cx="1871981" cy="128016"/>
+            <a:ext cx="1871949" cy="128016"/>
           </a:xfrm>
           <a:prstGeom prst="rect">
             <a:avLst/>
@@ -16425,7 +16425,7 @@
         </p:nvSpPr>
         <p:spPr>
           <a:xfrm>
-            <a:off x="6078221" y="2997121"/>
+            <a:off x="6078189" y="2997121"/>
             <a:ext cx="2286000" cy="291904"/>
           </a:xfrm>
           <a:prstGeom prst="rect">
@@ -16494,7 +16494,7 @@
         <p:spPr>
           <a:xfrm>
             <a:off x="4114800" y="3352682"/>
-            <a:ext cx="1730212" cy="128016"/>
+            <a:ext cx="1730204" cy="128016"/>
           </a:xfrm>
           <a:prstGeom prst="rect">
             <a:avLst/>
@@ -16537,7 +16537,7 @@
         </p:nvSpPr>
         <p:spPr>
           <a:xfrm>
-            <a:off x="5936452" y="3289026"/>
+            <a:off x="5936444" y="3289026"/>
             <a:ext cx="2286000" cy="291904"/>
           </a:xfrm>
           <a:prstGeom prst="rect">
@@ -16558,7 +16558,7 @@
                 </a:solidFill>
                 <a:latin typeface="Helvetica Neue"/>
               </a:rPr>
-              <a:t>82,746 views · 111 posts</a:t>
+              <a:t>82,747 views · 111 posts</a:t>
             </a:r>
           </a:p>
         </p:txBody>
@@ -16606,7 +16606,7 @@
         <p:spPr>
           <a:xfrm>
             <a:off x="4114800" y="3644587"/>
-            <a:ext cx="1579618" cy="128016"/>
+            <a:ext cx="1579613" cy="128016"/>
           </a:xfrm>
           <a:prstGeom prst="rect">
             <a:avLst/>
@@ -16649,7 +16649,7 @@
         </p:nvSpPr>
         <p:spPr>
           <a:xfrm>
-            <a:off x="5785858" y="3580931"/>
+            <a:off x="5785853" y="3580931"/>
             <a:ext cx="2286000" cy="291904"/>
           </a:xfrm>
           <a:prstGeom prst="rect">
@@ -16670,7 +16670,7 @@
                 </a:solidFill>
                 <a:latin typeface="Helvetica Neue"/>
               </a:rPr>
-              <a:t>75,544 views · 71 posts</a:t>
+              <a:t>75,545 views · 71 posts</a:t>
             </a:r>
           </a:p>
         </p:txBody>
@@ -16718,7 +16718,7 @@
         <p:spPr>
           <a:xfrm>
             <a:off x="4114800" y="3936491"/>
-            <a:ext cx="1345929" cy="128016"/>
+            <a:ext cx="1345907" cy="128016"/>
           </a:xfrm>
           <a:prstGeom prst="rect">
             <a:avLst/>
@@ -16761,7 +16761,7 @@
         </p:nvSpPr>
         <p:spPr>
           <a:xfrm>
-            <a:off x="5552169" y="3872835"/>
+            <a:off x="5552147" y="3872835"/>
             <a:ext cx="2286000" cy="291904"/>
           </a:xfrm>
           <a:prstGeom prst="rect">
@@ -16830,7 +16830,7 @@
         <p:spPr>
           <a:xfrm>
             <a:off x="4114800" y="4228396"/>
-            <a:ext cx="1081251" cy="128016"/>
+            <a:ext cx="1081233" cy="128016"/>
           </a:xfrm>
           <a:prstGeom prst="rect">
             <a:avLst/>
@@ -16873,7 +16873,7 @@
         </p:nvSpPr>
         <p:spPr>
           <a:xfrm>
-            <a:off x="5287491" y="4164740"/>
+            <a:off x="5287473" y="4164740"/>
             <a:ext cx="2286000" cy="291904"/>
           </a:xfrm>
           <a:prstGeom prst="rect">
@@ -16942,7 +16942,7 @@
         <p:spPr>
           <a:xfrm>
             <a:off x="4114800" y="4520301"/>
-            <a:ext cx="736593" cy="128016"/>
+            <a:ext cx="736623" cy="128016"/>
           </a:xfrm>
           <a:prstGeom prst="rect">
             <a:avLst/>
@@ -16985,7 +16985,7 @@
         </p:nvSpPr>
         <p:spPr>
           <a:xfrm>
-            <a:off x="4942833" y="4456644"/>
+            <a:off x="4942863" y="4456644"/>
             <a:ext cx="2286000" cy="291904"/>
           </a:xfrm>
           <a:prstGeom prst="rect">
@@ -17006,7 +17006,7 @@
                 </a:solidFill>
                 <a:latin typeface="Helvetica Neue"/>
               </a:rPr>
-              <a:t>35,227 views · 37 posts</a:t>
+              <a:t>35,229 views · 37 posts</a:t>
             </a:r>
           </a:p>
         </p:txBody>
@@ -17054,7 +17054,7 @@
         <p:spPr>
           <a:xfrm>
             <a:off x="4114800" y="4812205"/>
-            <a:ext cx="227771" cy="128016"/>
+            <a:ext cx="227767" cy="128016"/>
           </a:xfrm>
           <a:prstGeom prst="rect">
             <a:avLst/>
@@ -17097,7 +17097,7 @@
         </p:nvSpPr>
         <p:spPr>
           <a:xfrm>
-            <a:off x="4434011" y="4748549"/>
+            <a:off x="4434007" y="4748549"/>
             <a:ext cx="2286000" cy="291904"/>
           </a:xfrm>
           <a:prstGeom prst="rect">
@@ -17166,7 +17166,7 @@
         <p:spPr>
           <a:xfrm>
             <a:off x="4114800" y="5104110"/>
-            <a:ext cx="172674" cy="128016"/>
+            <a:ext cx="172671" cy="128016"/>
           </a:xfrm>
           <a:prstGeom prst="rect">
             <a:avLst/>
@@ -17209,7 +17209,7 @@
         </p:nvSpPr>
         <p:spPr>
           <a:xfrm>
-            <a:off x="4378914" y="5040454"/>
+            <a:off x="4378911" y="5040454"/>
             <a:ext cx="2286000" cy="291904"/>
           </a:xfrm>
           <a:prstGeom prst="rect">
@@ -17278,7 +17278,7 @@
         <p:spPr>
           <a:xfrm>
             <a:off x="4114800" y="5396015"/>
-            <a:ext cx="162449" cy="128016"/>
+            <a:ext cx="162446" cy="128016"/>
           </a:xfrm>
           <a:prstGeom prst="rect">
             <a:avLst/>
@@ -17321,7 +17321,7 @@
         </p:nvSpPr>
         <p:spPr>
           <a:xfrm>
-            <a:off x="4368689" y="5332358"/>
+            <a:off x="4368686" y="5332358"/>
             <a:ext cx="2286000" cy="291904"/>
           </a:xfrm>
           <a:prstGeom prst="rect">
@@ -19086,7 +19086,7 @@
                 </a:solidFill>
                 <a:latin typeface="Georgia"/>
               </a:rPr>
-              <a:t>100,997</a:t>
+              <a:t>100,998</a:t>
             </a:r>
           </a:p>
         </p:txBody>
@@ -19622,7 +19622,7 @@
                 </a:solidFill>
                 <a:latin typeface="Helvetica Neue"/>
               </a:rPr>
-              <a:t>#3  ·  TT  ·  6,529 views</a:t>
+              <a:t>#3  ·  TT  ·  6,530 views</a:t>
             </a:r>
           </a:p>
         </p:txBody>
@@ -21158,7 +21158,7 @@
                 </a:solidFill>
                 <a:latin typeface="Georgia"/>
               </a:rPr>
-              <a:t>75,544</a:t>
+              <a:t>75,545</a:t>
             </a:r>
           </a:p>
         </p:txBody>

--- a/SPONSOR_CONTENT_REPORT.pptx
+++ b/SPONSOR_CONTENT_REPORT.pptx
@@ -26,6 +26,8 @@
     <p:sldId id="274" r:id="rId25"/>
     <p:sldId id="275" r:id="rId26"/>
     <p:sldId id="276" r:id="rId27"/>
+    <p:sldId id="277" r:id="rId28"/>
+    <p:sldId id="278" r:id="rId29"/>
   </p:sldIdLst>
   <p:sldSz cx="12191695" cy="6858000" type="screen4x3"/>
   <p:notesSz cx="6858000" cy="9144000"/>
@@ -3559,7 +3561,7 @@
                 </a:solidFill>
                 <a:latin typeface="Georgia"/>
               </a:rPr>
-              <a:t>Downtown Development</a:t>
+              <a:t>City Hall &amp; Civic Issues</a:t>
             </a:r>
           </a:p>
         </p:txBody>
@@ -3593,7 +3595,7 @@
                 </a:solidFill>
                 <a:latin typeface="Helvetica Neue"/>
               </a:rPr>
-              <a:t>Physical growth of Downey — Round One, Fun Box, Stonewood, YMCA, new businesses opening.</a:t>
+              <a:t>Roads, stop signs, budgets, Planning Commission, downtown nightlife safety — how the city actually runs.</a:t>
             </a:r>
           </a:p>
         </p:txBody>
@@ -3623,11 +3625,11 @@
             <a:r>
               <a:rPr sz="900" b="1">
                 <a:solidFill>
-                  <a:srgbClr val="C9A227"/>
-                </a:solidFill>
-                <a:latin typeface="Helvetica Neue"/>
-              </a:rPr>
-              <a:t>AUDIENCE (theoretical): Local civic pride · Downey residents 30+</a:t>
+                  <a:srgbClr val="2F3C7E"/>
+                </a:solidFill>
+                <a:latin typeface="Helvetica Neue"/>
+              </a:rPr>
+              <a:t>AUDIENCE (theoretical): Practical local · Downey homeowners 30+</a:t>
             </a:r>
           </a:p>
         </p:txBody>
@@ -3691,7 +3693,7 @@
             <a:avLst/>
           </a:prstGeom>
           <a:solidFill>
-            <a:srgbClr val="C9A227"/>
+            <a:srgbClr val="2F3C7E"/>
           </a:solidFill>
           <a:ln>
             <a:noFill/>
@@ -3745,7 +3747,7 @@
             <a:r>
               <a:rPr sz="1100" b="1">
                 <a:solidFill>
-                  <a:srgbClr val="C9A227"/>
+                  <a:srgbClr val="2F3C7E"/>
                 </a:solidFill>
                 <a:latin typeface="Helvetica Neue"/>
               </a:rPr>
@@ -3783,7 +3785,7 @@
                 </a:solidFill>
                 <a:latin typeface="Georgia"/>
               </a:rPr>
-              <a:t>51,710</a:t>
+              <a:t>41,753</a:t>
             </a:r>
           </a:p>
         </p:txBody>
@@ -3817,7 +3819,7 @@
                 </a:solidFill>
                 <a:latin typeface="Helvetica Neue"/>
               </a:rPr>
-              <a:t>20 posts · 3,040 likes</a:t>
+              <a:t>49 posts · 727 likes</a:t>
             </a:r>
           </a:p>
         </p:txBody>
@@ -3851,7 +3853,7 @@
                 </a:solidFill>
                 <a:latin typeface="Helvetica Neue"/>
               </a:rPr>
-              <a:t>2,586 average views per post</a:t>
+              <a:t>852 average views per post</a:t>
             </a:r>
           </a:p>
         </p:txBody>
@@ -3881,7 +3883,7 @@
             <a:r>
               <a:rPr sz="1100" b="1">
                 <a:solidFill>
-                  <a:srgbClr val="C9A227"/>
+                  <a:srgbClr val="2F3C7E"/>
                 </a:solidFill>
                 <a:latin typeface="Helvetica Neue"/>
               </a:rPr>
@@ -3949,7 +3951,7 @@
             <a:avLst/>
           </a:prstGeom>
           <a:solidFill>
-            <a:srgbClr val="C9A227"/>
+            <a:srgbClr val="2F3C7E"/>
           </a:solidFill>
           <a:ln>
             <a:noFill/>
@@ -4003,11 +4005,11 @@
             <a:r>
               <a:rPr sz="1000" b="1">
                 <a:solidFill>
-                  <a:srgbClr val="C9A227"/>
-                </a:solidFill>
-                <a:latin typeface="Helvetica Neue"/>
-              </a:rPr>
-              <a:t>#1  ·  TT  ·  29,200 views</a:t>
+                  <a:srgbClr val="2F3C7E"/>
+                </a:solidFill>
+                <a:latin typeface="Helvetica Neue"/>
+              </a:rPr>
+              <a:t>#1  ·  FB  ·  2,829 views</a:t>
             </a:r>
           </a:p>
         </p:txBody>
@@ -4041,7 +4043,7 @@
                 </a:solidFill>
                 <a:latin typeface="Helvetica Neue"/>
               </a:rPr>
-              <a:t>Get ready! Round One is taking over the old Sears at Stonewood Mall. This massive 150,000 </a:t>
+              <a:t>Is bottle service at nightclubs contributing to late-night street fights? We're seeing a p</a:t>
             </a:r>
           </a:p>
         </p:txBody>
@@ -4105,7 +4107,7 @@
             <a:avLst/>
           </a:prstGeom>
           <a:solidFill>
-            <a:srgbClr val="C9A227"/>
+            <a:srgbClr val="2F3C7E"/>
           </a:solidFill>
           <a:ln>
             <a:noFill/>
@@ -4159,11 +4161,11 @@
             <a:r>
               <a:rPr sz="1000" b="1">
                 <a:solidFill>
-                  <a:srgbClr val="C9A227"/>
-                </a:solidFill>
-                <a:latin typeface="Helvetica Neue"/>
-              </a:rPr>
-              <a:t>#2  ·  IG  ·  4,455 views</a:t>
+                  <a:srgbClr val="2F3C7E"/>
+                </a:solidFill>
+                <a:latin typeface="Helvetica Neue"/>
+              </a:rPr>
+              <a:t>#2  ·  IG  ·  1,921 views</a:t>
             </a:r>
           </a:p>
         </p:txBody>
@@ -4197,7 +4199,7 @@
                 </a:solidFill>
                 <a:latin typeface="Helvetica Neue"/>
               </a:rPr>
-              <a:t>Round One is coming to Stonewood Mall, transforming the old Sears space! Get ready for a m</a:t>
+              <a:t>Downtown is a concern, with businesses struggling from late-night chaos. Solutions are bei</a:t>
             </a:r>
           </a:p>
         </p:txBody>
@@ -4261,7 +4263,7 @@
             <a:avLst/>
           </a:prstGeom>
           <a:solidFill>
-            <a:srgbClr val="C9A227"/>
+            <a:srgbClr val="2F3C7E"/>
           </a:solidFill>
           <a:ln>
             <a:noFill/>
@@ -4315,11 +4317,11 @@
             <a:r>
               <a:rPr sz="1000" b="1">
                 <a:solidFill>
-                  <a:srgbClr val="C9A227"/>
-                </a:solidFill>
-                <a:latin typeface="Helvetica Neue"/>
-              </a:rPr>
-              <a:t>#3  ·  IG  ·  2,390 views</a:t>
+                  <a:srgbClr val="2F3C7E"/>
+                </a:solidFill>
+                <a:latin typeface="Helvetica Neue"/>
+              </a:rPr>
+              <a:t>#3  ·  TT  ·  1,745 views</a:t>
             </a:r>
           </a:p>
         </p:txBody>
@@ -4353,7 +4355,7 @@
                 </a:solidFill>
                 <a:latin typeface="Helvetica Neue"/>
               </a:rPr>
-              <a:t>20 years later, this letter still resonates. It sparked the Downtown Improvement Associati</a:t>
+              <a:t>Bottle service gone wrong: Fights erupting on the streets after clubs close. It's a danger</a:t>
             </a:r>
           </a:p>
         </p:txBody>
@@ -4427,7 +4429,7 @@
             <a:r>
               <a:rPr sz="1000" b="1">
                 <a:solidFill>
-                  <a:srgbClr val="C9A227"/>
+                  <a:srgbClr val="2F3C7E"/>
                 </a:solidFill>
                 <a:latin typeface="Helvetica Neue"/>
               </a:rPr>
@@ -4465,7 +4467,7 @@
                 </a:solidFill>
                 <a:latin typeface="Helvetica Neue"/>
               </a:rPr>
-              <a:t>Solid mid-tier. Worth continued investment. Test scaling to see if it holds.</a:t>
+              <a:t>Modest reach. Fine as filler between heavy hitters, not a headline lane.</a:t>
             </a:r>
           </a:p>
         </p:txBody>
@@ -5855,7 +5857,7 @@
                 </a:solidFill>
                 <a:latin typeface="Georgia"/>
               </a:rPr>
-              <a:t>8,258</a:t>
+              <a:t>11,741</a:t>
             </a:r>
           </a:p>
         </p:txBody>
@@ -5889,7 +5891,7 @@
                 </a:solidFill>
                 <a:latin typeface="Helvetica Neue"/>
               </a:rPr>
-              <a:t>8 posts · 141 likes</a:t>
+              <a:t>13 posts · 270 likes</a:t>
             </a:r>
           </a:p>
         </p:txBody>
@@ -5923,7 +5925,7 @@
                 </a:solidFill>
                 <a:latin typeface="Helvetica Neue"/>
               </a:rPr>
-              <a:t>1,032 average views per post</a:t>
+              <a:t>903 average views per post</a:t>
             </a:r>
           </a:p>
         </p:txBody>
@@ -6391,7 +6393,7 @@
                 </a:solidFill>
                 <a:latin typeface="Helvetica Neue"/>
               </a:rPr>
-              <a:t>#3  ·  FB  ·  812 views</a:t>
+              <a:t>#3  ·  IG  ·  1,235 views</a:t>
             </a:r>
           </a:p>
         </p:txBody>
@@ -6425,7 +6427,7 @@
                 </a:solidFill>
                 <a:latin typeface="Helvetica Neue"/>
               </a:rPr>
-              <a:t>Running a restaurant means the show must go on, even when things are falling apart. Unlike</a:t>
+              <a:t>Three boys, 6, 5, and 4. They're a handful, but you can still serve and have babies. So th</a:t>
             </a:r>
           </a:p>
         </p:txBody>
@@ -6537,7 +6539,7 @@
                 </a:solidFill>
                 <a:latin typeface="Helvetica Neue"/>
               </a:rPr>
-              <a:t>Solid mid-tier. Worth continued investment. Test scaling to see if it holds.</a:t>
+              <a:t>Modest reach. Fine as filler between heavy hitters, not a headline lane.</a:t>
             </a:r>
           </a:p>
         </p:txBody>
@@ -6745,7 +6747,7 @@
                 </a:solidFill>
                 <a:latin typeface="Helvetica Neue"/>
               </a:rPr>
-              <a:t>3 smaller lanes still building audience. Real potential, low volume — don't retire prematurely.</a:t>
+              <a:t>5 smaller lanes still building audience. Real potential, low volume — don't retire prematurely.</a:t>
             </a:r>
           </a:p>
         </p:txBody>
@@ -7021,7 +7023,7 @@
                 </a:solidFill>
                 <a:latin typeface="Helvetica Neue"/>
               </a:rPr>
-              <a:t>82,747 views · 111 posts · 745 avg</a:t>
+              <a:t>97,693 views · 146 posts · 669 avg</a:t>
             </a:r>
           </a:p>
         </p:txBody>
@@ -7103,7 +7105,7 @@
         <p:spPr>
           <a:xfrm>
             <a:off x="4206240" y="2720339"/>
-            <a:ext cx="794466" cy="274320"/>
+            <a:ext cx="1217040" cy="274320"/>
           </a:xfrm>
           <a:prstGeom prst="rect">
             <a:avLst/>
@@ -7146,7 +7148,7 @@
         </p:nvSpPr>
         <p:spPr>
           <a:xfrm>
-            <a:off x="5092146" y="2651759"/>
+            <a:off x="5514720" y="2651759"/>
             <a:ext cx="2286000" cy="251460"/>
           </a:xfrm>
           <a:prstGeom prst="rect">
@@ -7167,7 +7169,7 @@
                 </a:solidFill>
                 <a:latin typeface="Helvetica Neue"/>
               </a:rPr>
-              <a:t>10,893 views · 25 posts · 436 avg</a:t>
+              <a:t>19,701 views · 42 posts · 469 avg</a:t>
             </a:r>
           </a:p>
         </p:txBody>
@@ -7180,7 +7182,7 @@
         </p:nvSpPr>
         <p:spPr>
           <a:xfrm>
-            <a:off x="5092146" y="2857499"/>
+            <a:off x="5514720" y="2857499"/>
             <a:ext cx="4572000" cy="251460"/>
           </a:xfrm>
           <a:prstGeom prst="rect">
@@ -7249,7 +7251,7 @@
         <p:spPr>
           <a:xfrm>
             <a:off x="4206240" y="3223260"/>
-            <a:ext cx="566621" cy="274320"/>
+            <a:ext cx="479934" cy="274320"/>
           </a:xfrm>
           <a:prstGeom prst="rect">
             <a:avLst/>
@@ -7292,7 +7294,7 @@
         </p:nvSpPr>
         <p:spPr>
           <a:xfrm>
-            <a:off x="4864301" y="3154679"/>
+            <a:off x="4777614" y="3154679"/>
             <a:ext cx="2286000" cy="251460"/>
           </a:xfrm>
           <a:prstGeom prst="rect">
@@ -7326,7 +7328,7 @@
         </p:nvSpPr>
         <p:spPr>
           <a:xfrm>
-            <a:off x="4864301" y="3360420"/>
+            <a:off x="4777614" y="3360420"/>
             <a:ext cx="4572000" cy="251460"/>
           </a:xfrm>
           <a:prstGeom prst="rect">
@@ -7355,6 +7357,298 @@
       <p:sp>
         <p:nvSpPr>
           <p:cNvPr id="18" name="TextBox 17"/>
+          <p:cNvSpPr txBox="1"/>
+          <p:nvPr/>
+        </p:nvSpPr>
+        <p:spPr>
+          <a:xfrm>
+            <a:off x="731520" y="3657600"/>
+            <a:ext cx="3200400" cy="502920"/>
+          </a:xfrm>
+          <a:prstGeom prst="rect">
+            <a:avLst/>
+          </a:prstGeom>
+          <a:noFill/>
+        </p:spPr>
+        <p:txBody>
+          <a:bodyPr wrap="square" lIns="0" rIns="0" tIns="0" bIns="0">
+            <a:spAutoFit/>
+          </a:bodyPr>
+          <a:lstStyle/>
+          <a:p>
+            <a:r>
+              <a:rPr sz="1200" b="1">
+                <a:solidFill>
+                  <a:srgbClr val="141833"/>
+                </a:solidFill>
+                <a:latin typeface="Helvetica Neue"/>
+              </a:rPr>
+              <a:t>Leadership &amp; Life Lessons</a:t>
+            </a:r>
+          </a:p>
+        </p:txBody>
+      </p:sp>
+      <p:sp>
+        <p:nvSpPr>
+          <p:cNvPr id="19" name="Rectangle 18"/>
+          <p:cNvSpPr/>
+          <p:nvPr/>
+        </p:nvSpPr>
+        <p:spPr>
+          <a:xfrm>
+            <a:off x="4206240" y="3726180"/>
+            <a:ext cx="373742" cy="274320"/>
+          </a:xfrm>
+          <a:prstGeom prst="rect">
+            <a:avLst/>
+          </a:prstGeom>
+          <a:solidFill>
+            <a:srgbClr val="2E86AB"/>
+          </a:solidFill>
+          <a:ln>
+            <a:noFill/>
+          </a:ln>
+          <a:effectLst/>
+        </p:spPr>
+        <p:style>
+          <a:lnRef idx="1">
+            <a:schemeClr val="accent1"/>
+          </a:lnRef>
+          <a:fillRef idx="3">
+            <a:schemeClr val="accent1"/>
+          </a:fillRef>
+          <a:effectRef idx="2">
+            <a:schemeClr val="accent1"/>
+          </a:effectRef>
+          <a:fontRef idx="minor">
+            <a:schemeClr val="lt1"/>
+          </a:fontRef>
+        </p:style>
+        <p:txBody>
+          <a:bodyPr rtlCol="0" anchor="ctr"/>
+          <a:lstStyle/>
+          <a:p>
+            <a:pPr algn="ctr"/>
+          </a:p>
+        </p:txBody>
+      </p:sp>
+      <p:sp>
+        <p:nvSpPr>
+          <p:cNvPr id="20" name="TextBox 19"/>
+          <p:cNvSpPr txBox="1"/>
+          <p:nvPr/>
+        </p:nvSpPr>
+        <p:spPr>
+          <a:xfrm>
+            <a:off x="4671422" y="3657600"/>
+            <a:ext cx="2286000" cy="251460"/>
+          </a:xfrm>
+          <a:prstGeom prst="rect">
+            <a:avLst/>
+          </a:prstGeom>
+          <a:noFill/>
+        </p:spPr>
+        <p:txBody>
+          <a:bodyPr wrap="square" lIns="0" rIns="0" tIns="0" bIns="0">
+            <a:spAutoFit/>
+          </a:bodyPr>
+          <a:lstStyle/>
+          <a:p>
+            <a:r>
+              <a:rPr sz="900" b="0">
+                <a:solidFill>
+                  <a:srgbClr val="6B7082"/>
+                </a:solidFill>
+                <a:latin typeface="Helvetica Neue"/>
+              </a:rPr>
+              <a:t>6,050 views · 21 posts · 288 avg</a:t>
+            </a:r>
+          </a:p>
+        </p:txBody>
+      </p:sp>
+      <p:sp>
+        <p:nvSpPr>
+          <p:cNvPr id="21" name="TextBox 20"/>
+          <p:cNvSpPr txBox="1"/>
+          <p:nvPr/>
+        </p:nvSpPr>
+        <p:spPr>
+          <a:xfrm>
+            <a:off x="4671422" y="3863340"/>
+            <a:ext cx="4572000" cy="251460"/>
+          </a:xfrm>
+          <a:prstGeom prst="rect">
+            <a:avLst/>
+          </a:prstGeom>
+          <a:noFill/>
+        </p:spPr>
+        <p:txBody>
+          <a:bodyPr wrap="square" lIns="0" rIns="0" tIns="0" bIns="0">
+            <a:spAutoFit/>
+          </a:bodyPr>
+          <a:lstStyle/>
+          <a:p>
+            <a:r>
+              <a:rPr sz="800" b="0">
+                <a:solidFill>
+                  <a:srgbClr val="6B7082"/>
+                </a:solidFill>
+                <a:latin typeface="Helvetica Neue"/>
+              </a:rPr>
+              <a:t>Self-improvement · Young-Middle (25-45), professionals</a:t>
+            </a:r>
+          </a:p>
+        </p:txBody>
+      </p:sp>
+      <p:sp>
+        <p:nvSpPr>
+          <p:cNvPr id="22" name="TextBox 21"/>
+          <p:cNvSpPr txBox="1"/>
+          <p:nvPr/>
+        </p:nvSpPr>
+        <p:spPr>
+          <a:xfrm>
+            <a:off x="731520" y="4160520"/>
+            <a:ext cx="3200400" cy="502920"/>
+          </a:xfrm>
+          <a:prstGeom prst="rect">
+            <a:avLst/>
+          </a:prstGeom>
+          <a:noFill/>
+        </p:spPr>
+        <p:txBody>
+          <a:bodyPr wrap="square" lIns="0" rIns="0" tIns="0" bIns="0">
+            <a:spAutoFit/>
+          </a:bodyPr>
+          <a:lstStyle/>
+          <a:p>
+            <a:r>
+              <a:rPr sz="1200" b="1">
+                <a:solidFill>
+                  <a:srgbClr val="141833"/>
+                </a:solidFill>
+                <a:latin typeface="Helvetica Neue"/>
+              </a:rPr>
+              <a:t>Brand Growth Content</a:t>
+            </a:r>
+          </a:p>
+        </p:txBody>
+      </p:sp>
+      <p:sp>
+        <p:nvSpPr>
+          <p:cNvPr id="23" name="Rectangle 22"/>
+          <p:cNvSpPr/>
+          <p:nvPr/>
+        </p:nvSpPr>
+        <p:spPr>
+          <a:xfrm>
+            <a:off x="4206240" y="4229100"/>
+            <a:ext cx="136771" cy="274320"/>
+          </a:xfrm>
+          <a:prstGeom prst="rect">
+            <a:avLst/>
+          </a:prstGeom>
+          <a:solidFill>
+            <a:srgbClr val="E87E8F"/>
+          </a:solidFill>
+          <a:ln>
+            <a:noFill/>
+          </a:ln>
+          <a:effectLst/>
+        </p:spPr>
+        <p:style>
+          <a:lnRef idx="1">
+            <a:schemeClr val="accent1"/>
+          </a:lnRef>
+          <a:fillRef idx="3">
+            <a:schemeClr val="accent1"/>
+          </a:fillRef>
+          <a:effectRef idx="2">
+            <a:schemeClr val="accent1"/>
+          </a:effectRef>
+          <a:fontRef idx="minor">
+            <a:schemeClr val="lt1"/>
+          </a:fontRef>
+        </p:style>
+        <p:txBody>
+          <a:bodyPr rtlCol="0" anchor="ctr"/>
+          <a:lstStyle/>
+          <a:p>
+            <a:pPr algn="ctr"/>
+          </a:p>
+        </p:txBody>
+      </p:sp>
+      <p:sp>
+        <p:nvSpPr>
+          <p:cNvPr id="24" name="TextBox 23"/>
+          <p:cNvSpPr txBox="1"/>
+          <p:nvPr/>
+        </p:nvSpPr>
+        <p:spPr>
+          <a:xfrm>
+            <a:off x="4434451" y="4160520"/>
+            <a:ext cx="2286000" cy="251460"/>
+          </a:xfrm>
+          <a:prstGeom prst="rect">
+            <a:avLst/>
+          </a:prstGeom>
+          <a:noFill/>
+        </p:spPr>
+        <p:txBody>
+          <a:bodyPr wrap="square" lIns="0" rIns="0" tIns="0" bIns="0">
+            <a:spAutoFit/>
+          </a:bodyPr>
+          <a:lstStyle/>
+          <a:p>
+            <a:r>
+              <a:rPr sz="900" b="0">
+                <a:solidFill>
+                  <a:srgbClr val="6B7082"/>
+                </a:solidFill>
+                <a:latin typeface="Helvetica Neue"/>
+              </a:rPr>
+              <a:t>2,214 views · 4 posts · 554 avg</a:t>
+            </a:r>
+          </a:p>
+        </p:txBody>
+      </p:sp>
+      <p:sp>
+        <p:nvSpPr>
+          <p:cNvPr id="25" name="TextBox 24"/>
+          <p:cNvSpPr txBox="1"/>
+          <p:nvPr/>
+        </p:nvSpPr>
+        <p:spPr>
+          <a:xfrm>
+            <a:off x="4434451" y="4366260"/>
+            <a:ext cx="4572000" cy="251460"/>
+          </a:xfrm>
+          <a:prstGeom prst="rect">
+            <a:avLst/>
+          </a:prstGeom>
+          <a:noFill/>
+        </p:spPr>
+        <p:txBody>
+          <a:bodyPr wrap="square" lIns="0" rIns="0" tIns="0" bIns="0">
+            <a:spAutoFit/>
+          </a:bodyPr>
+          <a:lstStyle/>
+          <a:p>
+            <a:r>
+              <a:rPr sz="800" b="0">
+                <a:solidFill>
+                  <a:srgbClr val="6B7082"/>
+                </a:solidFill>
+                <a:latin typeface="Helvetica Neue"/>
+              </a:rPr>
+              <a:t>Insider / meta · Existing followers only (echo chamber — can't scale)</a:t>
+            </a:r>
+          </a:p>
+        </p:txBody>
+      </p:sp>
+      <p:sp>
+        <p:nvSpPr>
+          <p:cNvPr id="26" name="TextBox 25"/>
           <p:cNvSpPr txBox="1"/>
           <p:nvPr/>
         </p:nvSpPr>
@@ -7735,7 +8029,7 @@
                 </a:solidFill>
                 <a:latin typeface="Georgia"/>
               </a:rPr>
-              <a:t>82,747</a:t>
+              <a:t>97,693</a:t>
             </a:r>
           </a:p>
         </p:txBody>
@@ -7769,7 +8063,7 @@
                 </a:solidFill>
                 <a:latin typeface="Helvetica Neue"/>
               </a:rPr>
-              <a:t>111 posts · 1,981 likes</a:t>
+              <a:t>146 posts · 2,580 likes</a:t>
             </a:r>
           </a:p>
         </p:txBody>
@@ -7803,7 +8097,7 @@
                 </a:solidFill>
                 <a:latin typeface="Helvetica Neue"/>
               </a:rPr>
-              <a:t>745 average views per post</a:t>
+              <a:t>669 average views per post</a:t>
             </a:r>
           </a:p>
         </p:txBody>
@@ -8581,7 +8875,7 @@
                 </a:solidFill>
                 <a:latin typeface="Helvetica Neue"/>
               </a:rPr>
-              <a:t>CA bills, propositions, HOA fights, wealth tax — policy commentary independent of candidates.</a:t>
+              <a:t>CA bills, propositions, HOA fights, wealth tax, high-speed rail, homelessness — state-level policy commentary.</a:t>
             </a:r>
           </a:p>
         </p:txBody>
@@ -8771,7 +9065,7 @@
                 </a:solidFill>
                 <a:latin typeface="Georgia"/>
               </a:rPr>
-              <a:t>10,893</a:t>
+              <a:t>19,701</a:t>
             </a:r>
           </a:p>
         </p:txBody>
@@ -8805,7 +9099,7 @@
                 </a:solidFill>
                 <a:latin typeface="Helvetica Neue"/>
               </a:rPr>
-              <a:t>25 posts · 146 likes</a:t>
+              <a:t>42 posts · 421 likes</a:t>
             </a:r>
           </a:p>
         </p:txBody>
@@ -8839,7 +9133,7 @@
                 </a:solidFill>
                 <a:latin typeface="Helvetica Neue"/>
               </a:rPr>
-              <a:t>436 average views per post</a:t>
+              <a:t>469 average views per post</a:t>
             </a:r>
           </a:p>
         </p:txBody>
@@ -8995,7 +9289,7 @@
                 </a:solidFill>
                 <a:latin typeface="Helvetica Neue"/>
               </a:rPr>
-              <a:t>#1  ·  FB  ·  914 views</a:t>
+              <a:t>#1  ·  IG  ·  1,437 views</a:t>
             </a:r>
           </a:p>
         </p:txBody>
@@ -9029,7 +9323,7 @@
                 </a:solidFill>
                 <a:latin typeface="Helvetica Neue"/>
               </a:rPr>
-              <a:t>Prop 3 is presented as a temporary measure, but it's actually an extension of existing tax</a:t>
+              <a:t>5 to 7 people die on LA streets daily. Years of this, yet no urgency. A complete failure o</a:t>
             </a:r>
           </a:p>
         </p:txBody>
@@ -9151,7 +9445,7 @@
                 </a:solidFill>
                 <a:latin typeface="Helvetica Neue"/>
               </a:rPr>
-              <a:t>#2  ·  FB  ·  726 views</a:t>
+              <a:t>#2  ·  FB  ·  1,106 views</a:t>
             </a:r>
           </a:p>
         </p:txBody>
@@ -9185,7 +9479,7 @@
                 </a:solidFill>
                 <a:latin typeface="Helvetica Neue"/>
               </a:rPr>
-              <a:t>Assembly Bill 1821 raises concerns about public records requests. While cities face costs </a:t>
+              <a:t>An astonishing 5 to 7 people die homeless on Los Angeles streets every single day. This ha</a:t>
             </a:r>
           </a:p>
         </p:txBody>
@@ -9307,7 +9601,7 @@
                 </a:solidFill>
                 <a:latin typeface="Helvetica Neue"/>
               </a:rPr>
-              <a:t>#3  ·  FB  ·  683 views</a:t>
+              <a:t>#3  ·  FB  ·  914 views</a:t>
             </a:r>
           </a:p>
         </p:txBody>
@@ -9341,7 +9635,7 @@
                 </a:solidFill>
                 <a:latin typeface="Helvetica Neue"/>
               </a:rPr>
-              <a:t>Two significant legislative wins for HOAs and condo buyers. We successfully opposed a bill</a:t>
+              <a:t>Prop 3 is presented as a temporary measure, but it's actually an extension of existing tax</a:t>
             </a:r>
           </a:p>
         </p:txBody>
@@ -10585,7 +10879,7 @@
                 </a:solidFill>
                 <a:latin typeface="Helvetica Neue"/>
               </a:rPr>
-              <a:t>THE ASK</a:t>
+              <a:t>CATEGORY DEEP-DIVE</a:t>
             </a:r>
           </a:p>
         </p:txBody>
@@ -10619,7 +10913,7 @@
                 </a:solidFill>
                 <a:latin typeface="Georgia"/>
               </a:rPr>
-              <a:t>Where we recommend leaning in next</a:t>
+              <a:t>Leadership &amp; Life Lessons</a:t>
             </a:r>
           </a:p>
         </p:txBody>
@@ -10653,21 +10947,55 @@
                 </a:solidFill>
                 <a:latin typeface="Helvetica Neue"/>
               </a:rPr>
-              <a:t>Three lanes that have proven reach + audience fit. Small bets get compound returns here.</a:t>
-            </a:r>
-          </a:p>
-        </p:txBody>
-      </p:sp>
-      <p:sp>
-        <p:nvSpPr>
-          <p:cNvPr id="6" name="Rectangle 5"/>
+              <a:t>Hiring, leadership, empathy, entrepreneurship — advice-style clips.</a:t>
+            </a:r>
+          </a:p>
+        </p:txBody>
+      </p:sp>
+      <p:sp>
+        <p:nvSpPr>
+          <p:cNvPr id="6" name="TextBox 5"/>
+          <p:cNvSpPr txBox="1"/>
+          <p:nvPr/>
+        </p:nvSpPr>
+        <p:spPr>
+          <a:xfrm>
+            <a:off x="731520" y="1691640"/>
+            <a:ext cx="10698480" cy="274320"/>
+          </a:xfrm>
+          <a:prstGeom prst="rect">
+            <a:avLst/>
+          </a:prstGeom>
+          <a:noFill/>
+        </p:spPr>
+        <p:txBody>
+          <a:bodyPr wrap="square" lIns="0" rIns="0" tIns="0" bIns="0">
+            <a:spAutoFit/>
+          </a:bodyPr>
+          <a:lstStyle/>
+          <a:p>
+            <a:r>
+              <a:rPr sz="900" b="1">
+                <a:solidFill>
+                  <a:srgbClr val="2E86AB"/>
+                </a:solidFill>
+                <a:latin typeface="Helvetica Neue"/>
+              </a:rPr>
+              <a:t>AUDIENCE (theoretical): Self-improvement · Young-Middle (25-45), professionals</a:t>
+            </a:r>
+          </a:p>
+        </p:txBody>
+      </p:sp>
+      <p:sp>
+        <p:nvSpPr>
+          <p:cNvPr id="7" name="Rectangle 6"/>
           <p:cNvSpPr/>
           <p:nvPr/>
         </p:nvSpPr>
         <p:spPr>
           <a:xfrm>
-            <a:off x="563727" y="1965960"/>
-            <a:ext cx="3566160" cy="3566160"/>
+            <a:off x="731520" y="2194560"/>
+            <a:ext cx="5029200" cy="3200400"/>
           </a:xfrm>
           <a:prstGeom prst="rect">
             <a:avLst/>
@@ -10704,20 +11032,20 @@
       </p:sp>
       <p:sp>
         <p:nvSpPr>
-          <p:cNvPr id="7" name="Rectangle 6"/>
+          <p:cNvPr id="8" name="Rectangle 7"/>
           <p:cNvSpPr/>
           <p:nvPr/>
         </p:nvSpPr>
         <p:spPr>
           <a:xfrm>
-            <a:off x="563727" y="1965960"/>
-            <a:ext cx="91440" cy="3566160"/>
+            <a:off x="731520" y="2194560"/>
+            <a:ext cx="91440" cy="3200400"/>
           </a:xfrm>
           <a:prstGeom prst="rect">
             <a:avLst/>
           </a:prstGeom>
           <a:solidFill>
-            <a:srgbClr val="C9A227"/>
+            <a:srgbClr val="2E86AB"/>
           </a:solidFill>
           <a:ln>
             <a:noFill/>
@@ -10748,170 +11076,136 @@
       </p:sp>
       <p:sp>
         <p:nvSpPr>
-          <p:cNvPr id="8" name="TextBox 7"/>
-          <p:cNvSpPr txBox="1"/>
-          <p:nvPr/>
-        </p:nvSpPr>
-        <p:spPr>
-          <a:xfrm>
-            <a:off x="838047" y="2194560"/>
-            <a:ext cx="3017520" cy="274320"/>
-          </a:xfrm>
-          <a:prstGeom prst="rect">
-            <a:avLst/>
-          </a:prstGeom>
-          <a:noFill/>
-        </p:spPr>
-        <p:txBody>
-          <a:bodyPr wrap="square" lIns="0" rIns="0" tIns="0" bIns="0">
-            <a:spAutoFit/>
-          </a:bodyPr>
-          <a:lstStyle/>
-          <a:p>
-            <a:r>
-              <a:rPr sz="1000" b="1">
-                <a:solidFill>
-                  <a:srgbClr val="C9A227"/>
-                </a:solidFill>
-                <a:latin typeface="Helvetica Neue"/>
-              </a:rPr>
-              <a:t>LEAN IN</a:t>
-            </a:r>
-          </a:p>
-        </p:txBody>
-      </p:sp>
-      <p:sp>
-        <p:nvSpPr>
           <p:cNvPr id="9" name="TextBox 8"/>
           <p:cNvSpPr txBox="1"/>
           <p:nvPr/>
         </p:nvSpPr>
         <p:spPr>
           <a:xfrm>
-            <a:off x="838047" y="2468880"/>
-            <a:ext cx="3017520" cy="457200"/>
-          </a:xfrm>
-          <a:prstGeom prst="rect">
-            <a:avLst/>
-          </a:prstGeom>
-          <a:noFill/>
-        </p:spPr>
-        <p:txBody>
-          <a:bodyPr wrap="square" lIns="0" rIns="0" tIns="0" bIns="0">
-            <a:spAutoFit/>
-          </a:bodyPr>
-          <a:lstStyle/>
-          <a:p>
-            <a:r>
-              <a:rPr sz="1600" b="1">
+            <a:off x="960120" y="2377440"/>
+            <a:ext cx="4572000" cy="365760"/>
+          </a:xfrm>
+          <a:prstGeom prst="rect">
+            <a:avLst/>
+          </a:prstGeom>
+          <a:noFill/>
+        </p:spPr>
+        <p:txBody>
+          <a:bodyPr wrap="square" lIns="0" rIns="0" tIns="0" bIns="0">
+            <a:spAutoFit/>
+          </a:bodyPr>
+          <a:lstStyle/>
+          <a:p>
+            <a:r>
+              <a:rPr sz="1100" b="1">
+                <a:solidFill>
+                  <a:srgbClr val="2E86AB"/>
+                </a:solidFill>
+                <a:latin typeface="Helvetica Neue"/>
+              </a:rPr>
+              <a:t>TOTAL VIEWS</a:t>
+            </a:r>
+          </a:p>
+        </p:txBody>
+      </p:sp>
+      <p:sp>
+        <p:nvSpPr>
+          <p:cNvPr id="10" name="TextBox 9"/>
+          <p:cNvSpPr txBox="1"/>
+          <p:nvPr/>
+        </p:nvSpPr>
+        <p:spPr>
+          <a:xfrm>
+            <a:off x="960120" y="2697480"/>
+            <a:ext cx="4572000" cy="1097280"/>
+          </a:xfrm>
+          <a:prstGeom prst="rect">
+            <a:avLst/>
+          </a:prstGeom>
+          <a:noFill/>
+        </p:spPr>
+        <p:txBody>
+          <a:bodyPr wrap="square" lIns="0" rIns="0" tIns="0" bIns="0">
+            <a:spAutoFit/>
+          </a:bodyPr>
+          <a:lstStyle/>
+          <a:p>
+            <a:r>
+              <a:rPr sz="5400" b="1">
                 <a:solidFill>
                   <a:srgbClr val="2F3C7E"/>
                 </a:solidFill>
                 <a:latin typeface="Georgia"/>
               </a:rPr>
-              <a:t>Downtown Development</a:t>
-            </a:r>
-          </a:p>
-        </p:txBody>
-      </p:sp>
-      <p:sp>
-        <p:nvSpPr>
-          <p:cNvPr id="10" name="TextBox 9"/>
-          <p:cNvSpPr txBox="1"/>
-          <p:nvPr/>
-        </p:nvSpPr>
-        <p:spPr>
-          <a:xfrm>
-            <a:off x="838047" y="3017520"/>
-            <a:ext cx="3017520" cy="365760"/>
-          </a:xfrm>
-          <a:prstGeom prst="rect">
-            <a:avLst/>
-          </a:prstGeom>
-          <a:noFill/>
-        </p:spPr>
-        <p:txBody>
-          <a:bodyPr wrap="square" lIns="0" rIns="0" tIns="0" bIns="0">
-            <a:spAutoFit/>
-          </a:bodyPr>
-          <a:lstStyle/>
-          <a:p>
-            <a:r>
-              <a:rPr sz="2600" b="1">
+              <a:t>6,050</a:t>
+            </a:r>
+          </a:p>
+        </p:txBody>
+      </p:sp>
+      <p:sp>
+        <p:nvSpPr>
+          <p:cNvPr id="11" name="TextBox 10"/>
+          <p:cNvSpPr txBox="1"/>
+          <p:nvPr/>
+        </p:nvSpPr>
+        <p:spPr>
+          <a:xfrm>
+            <a:off x="960120" y="3840480"/>
+            <a:ext cx="4572000" cy="365760"/>
+          </a:xfrm>
+          <a:prstGeom prst="rect">
+            <a:avLst/>
+          </a:prstGeom>
+          <a:noFill/>
+        </p:spPr>
+        <p:txBody>
+          <a:bodyPr wrap="square" lIns="0" rIns="0" tIns="0" bIns="0">
+            <a:spAutoFit/>
+          </a:bodyPr>
+          <a:lstStyle/>
+          <a:p>
+            <a:r>
+              <a:rPr sz="1300" b="1">
                 <a:solidFill>
                   <a:srgbClr val="141833"/>
                 </a:solidFill>
-                <a:latin typeface="Georgia"/>
-              </a:rPr>
-              <a:t>51,710 views</a:t>
-            </a:r>
-          </a:p>
-        </p:txBody>
-      </p:sp>
-      <p:sp>
-        <p:nvSpPr>
-          <p:cNvPr id="11" name="TextBox 10"/>
-          <p:cNvSpPr txBox="1"/>
-          <p:nvPr/>
-        </p:nvSpPr>
-        <p:spPr>
-          <a:xfrm>
-            <a:off x="838047" y="3383280"/>
-            <a:ext cx="3017520" cy="274320"/>
-          </a:xfrm>
-          <a:prstGeom prst="rect">
-            <a:avLst/>
-          </a:prstGeom>
-          <a:noFill/>
-        </p:spPr>
-        <p:txBody>
-          <a:bodyPr wrap="square" lIns="0" rIns="0" tIns="0" bIns="0">
-            <a:spAutoFit/>
-          </a:bodyPr>
-          <a:lstStyle/>
-          <a:p>
-            <a:r>
-              <a:rPr sz="1000" b="0">
+                <a:latin typeface="Helvetica Neue"/>
+              </a:rPr>
+              <a:t>21 posts · 102 likes</a:t>
+            </a:r>
+          </a:p>
+        </p:txBody>
+      </p:sp>
+      <p:sp>
+        <p:nvSpPr>
+          <p:cNvPr id="12" name="TextBox 11"/>
+          <p:cNvSpPr txBox="1"/>
+          <p:nvPr/>
+        </p:nvSpPr>
+        <p:spPr>
+          <a:xfrm>
+            <a:off x="960120" y="4206240"/>
+            <a:ext cx="4572000" cy="365760"/>
+          </a:xfrm>
+          <a:prstGeom prst="rect">
+            <a:avLst/>
+          </a:prstGeom>
+          <a:noFill/>
+        </p:spPr>
+        <p:txBody>
+          <a:bodyPr wrap="square" lIns="0" rIns="0" tIns="0" bIns="0">
+            <a:spAutoFit/>
+          </a:bodyPr>
+          <a:lstStyle/>
+          <a:p>
+            <a:r>
+              <a:rPr sz="1300" b="0">
                 <a:solidFill>
                   <a:srgbClr val="6B7082"/>
                 </a:solidFill>
                 <a:latin typeface="Helvetica Neue"/>
               </a:rPr>
-              <a:t>20 posts · 2,586 avg views/post</a:t>
-            </a:r>
-          </a:p>
-        </p:txBody>
-      </p:sp>
-      <p:sp>
-        <p:nvSpPr>
-          <p:cNvPr id="12" name="TextBox 11"/>
-          <p:cNvSpPr txBox="1"/>
-          <p:nvPr/>
-        </p:nvSpPr>
-        <p:spPr>
-          <a:xfrm>
-            <a:off x="838047" y="3840479"/>
-            <a:ext cx="3017520" cy="274320"/>
-          </a:xfrm>
-          <a:prstGeom prst="rect">
-            <a:avLst/>
-          </a:prstGeom>
-          <a:noFill/>
-        </p:spPr>
-        <p:txBody>
-          <a:bodyPr wrap="square" lIns="0" rIns="0" tIns="0" bIns="0">
-            <a:spAutoFit/>
-          </a:bodyPr>
-          <a:lstStyle/>
-          <a:p>
-            <a:r>
-              <a:rPr sz="900" b="1">
-                <a:solidFill>
-                  <a:srgbClr val="C9A227"/>
-                </a:solidFill>
-                <a:latin typeface="Helvetica Neue"/>
-              </a:rPr>
-              <a:t>AUDIENCE</a:t>
+              <a:t>288 average views per post</a:t>
             </a:r>
           </a:p>
         </p:txBody>
@@ -10924,110 +11218,42 @@
         </p:nvSpPr>
         <p:spPr>
           <a:xfrm>
-            <a:off x="838047" y="4069079"/>
-            <a:ext cx="3017520" cy="457200"/>
-          </a:xfrm>
-          <a:prstGeom prst="rect">
-            <a:avLst/>
-          </a:prstGeom>
-          <a:noFill/>
-        </p:spPr>
-        <p:txBody>
-          <a:bodyPr wrap="square" lIns="0" rIns="0" tIns="0" bIns="0">
-            <a:spAutoFit/>
-          </a:bodyPr>
-          <a:lstStyle/>
-          <a:p>
-            <a:r>
-              <a:rPr sz="1000" b="0">
-                <a:solidFill>
-                  <a:srgbClr val="141833"/>
-                </a:solidFill>
-                <a:latin typeface="Helvetica Neue"/>
-              </a:rPr>
-              <a:t>Local civic pride · Downey residents 30+</a:t>
-            </a:r>
-          </a:p>
-        </p:txBody>
-      </p:sp>
-      <p:sp>
-        <p:nvSpPr>
-          <p:cNvPr id="14" name="TextBox 13"/>
-          <p:cNvSpPr txBox="1"/>
-          <p:nvPr/>
-        </p:nvSpPr>
-        <p:spPr>
-          <a:xfrm>
-            <a:off x="838047" y="4617720"/>
-            <a:ext cx="3017520" cy="274320"/>
-          </a:xfrm>
-          <a:prstGeom prst="rect">
-            <a:avLst/>
-          </a:prstGeom>
-          <a:noFill/>
-        </p:spPr>
-        <p:txBody>
-          <a:bodyPr wrap="square" lIns="0" rIns="0" tIns="0" bIns="0">
-            <a:spAutoFit/>
-          </a:bodyPr>
-          <a:lstStyle/>
-          <a:p>
-            <a:r>
-              <a:rPr sz="900" b="1">
-                <a:solidFill>
-                  <a:srgbClr val="C9A227"/>
-                </a:solidFill>
-                <a:latin typeface="Helvetica Neue"/>
-              </a:rPr>
-              <a:t>WHY NOW</a:t>
-            </a:r>
-          </a:p>
-        </p:txBody>
-      </p:sp>
-      <p:sp>
-        <p:nvSpPr>
-          <p:cNvPr id="15" name="TextBox 14"/>
-          <p:cNvSpPr txBox="1"/>
-          <p:nvPr/>
-        </p:nvSpPr>
-        <p:spPr>
-          <a:xfrm>
-            <a:off x="838047" y="4846320"/>
-            <a:ext cx="3017520" cy="640080"/>
-          </a:xfrm>
-          <a:prstGeom prst="rect">
-            <a:avLst/>
-          </a:prstGeom>
-          <a:noFill/>
-        </p:spPr>
-        <p:txBody>
-          <a:bodyPr wrap="square" lIns="0" rIns="0" tIns="0" bIns="0">
-            <a:spAutoFit/>
-          </a:bodyPr>
-          <a:lstStyle/>
-          <a:p>
-            <a:r>
-              <a:rPr sz="1000" b="0">
-                <a:solidFill>
-                  <a:srgbClr val="141833"/>
-                </a:solidFill>
-                <a:latin typeface="Helvetica Neue"/>
-              </a:rPr>
-              <a:t>Round One + Fun Box + Stonewood expansion = concrete stories in-hand. Downey residents share these hard.</a:t>
-            </a:r>
-          </a:p>
-        </p:txBody>
-      </p:sp>
-      <p:sp>
-        <p:nvSpPr>
-          <p:cNvPr id="16" name="Rectangle 15"/>
+            <a:off x="6126480" y="2194560"/>
+            <a:ext cx="5486400" cy="274320"/>
+          </a:xfrm>
+          <a:prstGeom prst="rect">
+            <a:avLst/>
+          </a:prstGeom>
+          <a:noFill/>
+        </p:spPr>
+        <p:txBody>
+          <a:bodyPr wrap="square" lIns="0" rIns="0" tIns="0" bIns="0">
+            <a:spAutoFit/>
+          </a:bodyPr>
+          <a:lstStyle/>
+          <a:p>
+            <a:r>
+              <a:rPr sz="1100" b="1">
+                <a:solidFill>
+                  <a:srgbClr val="2E86AB"/>
+                </a:solidFill>
+                <a:latin typeface="Helvetica Neue"/>
+              </a:rPr>
+              <a:t>TOP 3 IN THIS CATEGORY</a:t>
+            </a:r>
+          </a:p>
+        </p:txBody>
+      </p:sp>
+      <p:sp>
+        <p:nvSpPr>
+          <p:cNvPr id="14" name="Rectangle 13"/>
           <p:cNvSpPr/>
           <p:nvPr/>
         </p:nvSpPr>
         <p:spPr>
           <a:xfrm>
-            <a:off x="4312767" y="1965960"/>
-            <a:ext cx="3566160" cy="3566160"/>
+            <a:off x="6126480" y="2560320"/>
+            <a:ext cx="5303520" cy="822960"/>
           </a:xfrm>
           <a:prstGeom prst="rect">
             <a:avLst/>
@@ -11064,20 +11290,20 @@
       </p:sp>
       <p:sp>
         <p:nvSpPr>
-          <p:cNvPr id="17" name="Rectangle 16"/>
+          <p:cNvPr id="15" name="Rectangle 14"/>
           <p:cNvSpPr/>
           <p:nvPr/>
         </p:nvSpPr>
         <p:spPr>
           <a:xfrm>
-            <a:off x="4312767" y="1965960"/>
-            <a:ext cx="91440" cy="3566160"/>
+            <a:off x="6126480" y="2560320"/>
+            <a:ext cx="54864" cy="822960"/>
           </a:xfrm>
           <a:prstGeom prst="rect">
             <a:avLst/>
           </a:prstGeom>
           <a:solidFill>
-            <a:srgbClr val="1B7A43"/>
+            <a:srgbClr val="2E86AB"/>
           </a:solidFill>
           <a:ln>
             <a:noFill/>
@@ -11108,14 +11334,14 @@
       </p:sp>
       <p:sp>
         <p:nvSpPr>
-          <p:cNvPr id="18" name="TextBox 17"/>
-          <p:cNvSpPr txBox="1"/>
-          <p:nvPr/>
-        </p:nvSpPr>
-        <p:spPr>
-          <a:xfrm>
-            <a:off x="4587087" y="2194560"/>
-            <a:ext cx="3017520" cy="274320"/>
+          <p:cNvPr id="16" name="TextBox 15"/>
+          <p:cNvSpPr txBox="1"/>
+          <p:nvPr/>
+        </p:nvSpPr>
+        <p:spPr>
+          <a:xfrm>
+            <a:off x="6309360" y="2651760"/>
+            <a:ext cx="5029200" cy="320040"/>
           </a:xfrm>
           <a:prstGeom prst="rect">
             <a:avLst/>
@@ -11131,263 +11357,59 @@
             <a:r>
               <a:rPr sz="1000" b="1">
                 <a:solidFill>
-                  <a:srgbClr val="1B7A43"/>
-                </a:solidFill>
-                <a:latin typeface="Helvetica Neue"/>
-              </a:rPr>
-              <a:t>LEAN IN</a:t>
-            </a:r>
-          </a:p>
-        </p:txBody>
-      </p:sp>
-      <p:sp>
-        <p:nvSpPr>
-          <p:cNvPr id="19" name="TextBox 18"/>
-          <p:cNvSpPr txBox="1"/>
-          <p:nvPr/>
-        </p:nvSpPr>
-        <p:spPr>
-          <a:xfrm>
-            <a:off x="4587087" y="2468880"/>
-            <a:ext cx="3017520" cy="457200"/>
-          </a:xfrm>
-          <a:prstGeom prst="rect">
-            <a:avLst/>
-          </a:prstGeom>
-          <a:noFill/>
-        </p:spPr>
-        <p:txBody>
-          <a:bodyPr wrap="square" lIns="0" rIns="0" tIns="0" bIns="0">
-            <a:spAutoFit/>
-          </a:bodyPr>
-          <a:lstStyle/>
-          <a:p>
-            <a:r>
-              <a:rPr sz="1600" b="1">
-                <a:solidFill>
-                  <a:srgbClr val="2F3C7E"/>
-                </a:solidFill>
-                <a:latin typeface="Georgia"/>
-              </a:rPr>
-              <a:t>Food &amp; Local Flavor</a:t>
-            </a:r>
-          </a:p>
-        </p:txBody>
-      </p:sp>
-      <p:sp>
-        <p:nvSpPr>
-          <p:cNvPr id="20" name="TextBox 19"/>
-          <p:cNvSpPr txBox="1"/>
-          <p:nvPr/>
-        </p:nvSpPr>
-        <p:spPr>
-          <a:xfrm>
-            <a:off x="4587087" y="3017520"/>
-            <a:ext cx="3017520" cy="365760"/>
-          </a:xfrm>
-          <a:prstGeom prst="rect">
-            <a:avLst/>
-          </a:prstGeom>
-          <a:noFill/>
-        </p:spPr>
-        <p:txBody>
-          <a:bodyPr wrap="square" lIns="0" rIns="0" tIns="0" bIns="0">
-            <a:spAutoFit/>
-          </a:bodyPr>
-          <a:lstStyle/>
-          <a:p>
-            <a:r>
-              <a:rPr sz="2600" b="1">
+                  <a:srgbClr val="2E86AB"/>
+                </a:solidFill>
+                <a:latin typeface="Helvetica Neue"/>
+              </a:rPr>
+              <a:t>#1  ·  FB  ·  790 views</a:t>
+            </a:r>
+          </a:p>
+        </p:txBody>
+      </p:sp>
+      <p:sp>
+        <p:nvSpPr>
+          <p:cNvPr id="17" name="TextBox 16"/>
+          <p:cNvSpPr txBox="1"/>
+          <p:nvPr/>
+        </p:nvSpPr>
+        <p:spPr>
+          <a:xfrm>
+            <a:off x="6309360" y="2944368"/>
+            <a:ext cx="5029200" cy="411480"/>
+          </a:xfrm>
+          <a:prstGeom prst="rect">
+            <a:avLst/>
+          </a:prstGeom>
+          <a:noFill/>
+        </p:spPr>
+        <p:txBody>
+          <a:bodyPr wrap="square" lIns="0" rIns="0" tIns="0" bIns="0">
+            <a:spAutoFit/>
+          </a:bodyPr>
+          <a:lstStyle/>
+          <a:p>
+            <a:r>
+              <a:rPr sz="1000" b="0">
                 <a:solidFill>
                   <a:srgbClr val="141833"/>
                 </a:solidFill>
-                <a:latin typeface="Georgia"/>
-              </a:rPr>
-              <a:t>100,998 views</a:t>
-            </a:r>
-          </a:p>
-        </p:txBody>
-      </p:sp>
-      <p:sp>
-        <p:nvSpPr>
-          <p:cNvPr id="21" name="TextBox 20"/>
-          <p:cNvSpPr txBox="1"/>
-          <p:nvPr/>
-        </p:nvSpPr>
-        <p:spPr>
-          <a:xfrm>
-            <a:off x="4587087" y="3383280"/>
-            <a:ext cx="3017520" cy="274320"/>
-          </a:xfrm>
-          <a:prstGeom prst="rect">
-            <a:avLst/>
-          </a:prstGeom>
-          <a:noFill/>
-        </p:spPr>
-        <p:txBody>
-          <a:bodyPr wrap="square" lIns="0" rIns="0" tIns="0" bIns="0">
-            <a:spAutoFit/>
-          </a:bodyPr>
-          <a:lstStyle/>
-          <a:p>
-            <a:r>
-              <a:rPr sz="1000" b="0">
-                <a:solidFill>
-                  <a:srgbClr val="6B7082"/>
-                </a:solidFill>
-                <a:latin typeface="Helvetica Neue"/>
-              </a:rPr>
-              <a:t>63 posts · 1,603 avg views/post</a:t>
-            </a:r>
-          </a:p>
-        </p:txBody>
-      </p:sp>
-      <p:sp>
-        <p:nvSpPr>
-          <p:cNvPr id="22" name="TextBox 21"/>
-          <p:cNvSpPr txBox="1"/>
-          <p:nvPr/>
-        </p:nvSpPr>
-        <p:spPr>
-          <a:xfrm>
-            <a:off x="4587087" y="3840479"/>
-            <a:ext cx="3017520" cy="274320"/>
-          </a:xfrm>
-          <a:prstGeom prst="rect">
-            <a:avLst/>
-          </a:prstGeom>
-          <a:noFill/>
-        </p:spPr>
-        <p:txBody>
-          <a:bodyPr wrap="square" lIns="0" rIns="0" tIns="0" bIns="0">
-            <a:spAutoFit/>
-          </a:bodyPr>
-          <a:lstStyle/>
-          <a:p>
-            <a:r>
-              <a:rPr sz="900" b="1">
-                <a:solidFill>
-                  <a:srgbClr val="1B7A43"/>
-                </a:solidFill>
-                <a:latin typeface="Helvetica Neue"/>
-              </a:rPr>
-              <a:t>AUDIENCE</a:t>
-            </a:r>
-          </a:p>
-        </p:txBody>
-      </p:sp>
-      <p:sp>
-        <p:nvSpPr>
-          <p:cNvPr id="23" name="TextBox 22"/>
-          <p:cNvSpPr txBox="1"/>
-          <p:nvPr/>
-        </p:nvSpPr>
-        <p:spPr>
-          <a:xfrm>
-            <a:off x="4587087" y="4069079"/>
-            <a:ext cx="3017520" cy="457200"/>
-          </a:xfrm>
-          <a:prstGeom prst="rect">
-            <a:avLst/>
-          </a:prstGeom>
-          <a:noFill/>
-        </p:spPr>
-        <p:txBody>
-          <a:bodyPr wrap="square" lIns="0" rIns="0" tIns="0" bIns="0">
-            <a:spAutoFit/>
-          </a:bodyPr>
-          <a:lstStyle/>
-          <a:p>
-            <a:r>
-              <a:rPr sz="1000" b="0">
-                <a:solidFill>
-                  <a:srgbClr val="141833"/>
-                </a:solidFill>
-                <a:latin typeface="Helvetica Neue"/>
-              </a:rPr>
-              <a:t>Everyday appeal · Broad, skews Young (18-40) foodie</a:t>
-            </a:r>
-          </a:p>
-        </p:txBody>
-      </p:sp>
-      <p:sp>
-        <p:nvSpPr>
-          <p:cNvPr id="24" name="TextBox 23"/>
-          <p:cNvSpPr txBox="1"/>
-          <p:nvPr/>
-        </p:nvSpPr>
-        <p:spPr>
-          <a:xfrm>
-            <a:off x="4587087" y="4617720"/>
-            <a:ext cx="3017520" cy="274320"/>
-          </a:xfrm>
-          <a:prstGeom prst="rect">
-            <a:avLst/>
-          </a:prstGeom>
-          <a:noFill/>
-        </p:spPr>
-        <p:txBody>
-          <a:bodyPr wrap="square" lIns="0" rIns="0" tIns="0" bIns="0">
-            <a:spAutoFit/>
-          </a:bodyPr>
-          <a:lstStyle/>
-          <a:p>
-            <a:r>
-              <a:rPr sz="900" b="1">
-                <a:solidFill>
-                  <a:srgbClr val="1B7A43"/>
-                </a:solidFill>
-                <a:latin typeface="Helvetica Neue"/>
-              </a:rPr>
-              <a:t>WHY NOW</a:t>
-            </a:r>
-          </a:p>
-        </p:txBody>
-      </p:sp>
-      <p:sp>
-        <p:nvSpPr>
-          <p:cNvPr id="25" name="TextBox 24"/>
-          <p:cNvSpPr txBox="1"/>
-          <p:nvPr/>
-        </p:nvSpPr>
-        <p:spPr>
-          <a:xfrm>
-            <a:off x="4587087" y="4846320"/>
-            <a:ext cx="3017520" cy="640080"/>
-          </a:xfrm>
-          <a:prstGeom prst="rect">
-            <a:avLst/>
-          </a:prstGeom>
-          <a:noFill/>
-        </p:spPr>
-        <p:txBody>
-          <a:bodyPr wrap="square" lIns="0" rIns="0" tIns="0" bIns="0">
-            <a:spAutoFit/>
-          </a:bodyPr>
-          <a:lstStyle/>
-          <a:p>
-            <a:r>
-              <a:rPr sz="1000" b="0">
-                <a:solidFill>
-                  <a:srgbClr val="141833"/>
-                </a:solidFill>
-                <a:latin typeface="Helvetica Neue"/>
-              </a:rPr>
-              <a:t>Pop's Wings alone did 7.7k views. Downey is food-curious. Easy content to produce, high engagement.</a:t>
-            </a:r>
-          </a:p>
-        </p:txBody>
-      </p:sp>
-      <p:sp>
-        <p:nvSpPr>
-          <p:cNvPr id="26" name="Rectangle 25"/>
+                <a:latin typeface="Helvetica Neue"/>
+              </a:rPr>
+              <a:t>Building a successful team means more than just hiring. It's about putting the right peopl</a:t>
+            </a:r>
+          </a:p>
+        </p:txBody>
+      </p:sp>
+      <p:sp>
+        <p:nvSpPr>
+          <p:cNvPr id="18" name="Rectangle 17"/>
           <p:cNvSpPr/>
           <p:nvPr/>
         </p:nvSpPr>
         <p:spPr>
           <a:xfrm>
-            <a:off x="8061807" y="1965960"/>
-            <a:ext cx="3566160" cy="3566160"/>
+            <a:off x="6126480" y="3474720"/>
+            <a:ext cx="5303520" cy="822960"/>
           </a:xfrm>
           <a:prstGeom prst="rect">
             <a:avLst/>
@@ -11424,20 +11446,20 @@
       </p:sp>
       <p:sp>
         <p:nvSpPr>
-          <p:cNvPr id="27" name="Rectangle 26"/>
+          <p:cNvPr id="19" name="Rectangle 18"/>
           <p:cNvSpPr/>
           <p:nvPr/>
         </p:nvSpPr>
         <p:spPr>
           <a:xfrm>
-            <a:off x="8061807" y="1965960"/>
-            <a:ext cx="91440" cy="3566160"/>
+            <a:off x="6126480" y="3474720"/>
+            <a:ext cx="54864" cy="822960"/>
           </a:xfrm>
           <a:prstGeom prst="rect">
             <a:avLst/>
           </a:prstGeom>
           <a:solidFill>
-            <a:srgbClr val="C9A227"/>
+            <a:srgbClr val="2E86AB"/>
           </a:solidFill>
           <a:ln>
             <a:noFill/>
@@ -11468,14 +11490,14 @@
       </p:sp>
       <p:sp>
         <p:nvSpPr>
-          <p:cNvPr id="28" name="TextBox 27"/>
-          <p:cNvSpPr txBox="1"/>
-          <p:nvPr/>
-        </p:nvSpPr>
-        <p:spPr>
-          <a:xfrm>
-            <a:off x="8336127" y="2194560"/>
-            <a:ext cx="3017520" cy="274320"/>
+          <p:cNvPr id="20" name="TextBox 19"/>
+          <p:cNvSpPr txBox="1"/>
+          <p:nvPr/>
+        </p:nvSpPr>
+        <p:spPr>
+          <a:xfrm>
+            <a:off x="6309360" y="3566160"/>
+            <a:ext cx="5029200" cy="320040"/>
           </a:xfrm>
           <a:prstGeom prst="rect">
             <a:avLst/>
@@ -11491,93 +11513,181 @@
             <a:r>
               <a:rPr sz="1000" b="1">
                 <a:solidFill>
-                  <a:srgbClr val="C9A227"/>
-                </a:solidFill>
-                <a:latin typeface="Helvetica Neue"/>
-              </a:rPr>
-              <a:t>LEAN IN</a:t>
-            </a:r>
-          </a:p>
-        </p:txBody>
-      </p:sp>
-      <p:sp>
-        <p:nvSpPr>
-          <p:cNvPr id="29" name="TextBox 28"/>
-          <p:cNvSpPr txBox="1"/>
-          <p:nvPr/>
-        </p:nvSpPr>
-        <p:spPr>
-          <a:xfrm>
-            <a:off x="8336127" y="2468880"/>
-            <a:ext cx="3017520" cy="457200"/>
-          </a:xfrm>
-          <a:prstGeom prst="rect">
-            <a:avLst/>
-          </a:prstGeom>
-          <a:noFill/>
-        </p:spPr>
-        <p:txBody>
-          <a:bodyPr wrap="square" lIns="0" rIns="0" tIns="0" bIns="0">
-            <a:spAutoFit/>
-          </a:bodyPr>
-          <a:lstStyle/>
-          <a:p>
-            <a:r>
-              <a:rPr sz="1600" b="1">
-                <a:solidFill>
-                  <a:srgbClr val="2F3C7E"/>
-                </a:solidFill>
-                <a:latin typeface="Georgia"/>
-              </a:rPr>
-              <a:t>Military Service</a:t>
-            </a:r>
-          </a:p>
-        </p:txBody>
-      </p:sp>
-      <p:sp>
-        <p:nvSpPr>
-          <p:cNvPr id="30" name="TextBox 29"/>
-          <p:cNvSpPr txBox="1"/>
-          <p:nvPr/>
-        </p:nvSpPr>
-        <p:spPr>
-          <a:xfrm>
-            <a:off x="8336127" y="3017520"/>
-            <a:ext cx="3017520" cy="365760"/>
-          </a:xfrm>
-          <a:prstGeom prst="rect">
-            <a:avLst/>
-          </a:prstGeom>
-          <a:noFill/>
-        </p:spPr>
-        <p:txBody>
-          <a:bodyPr wrap="square" lIns="0" rIns="0" tIns="0" bIns="0">
-            <a:spAutoFit/>
-          </a:bodyPr>
-          <a:lstStyle/>
-          <a:p>
-            <a:r>
-              <a:rPr sz="2600" b="1">
+                  <a:srgbClr val="2E86AB"/>
+                </a:solidFill>
+                <a:latin typeface="Helvetica Neue"/>
+              </a:rPr>
+              <a:t>#2  ·  IG  ·  592 views</a:t>
+            </a:r>
+          </a:p>
+        </p:txBody>
+      </p:sp>
+      <p:sp>
+        <p:nvSpPr>
+          <p:cNvPr id="21" name="TextBox 20"/>
+          <p:cNvSpPr txBox="1"/>
+          <p:nvPr/>
+        </p:nvSpPr>
+        <p:spPr>
+          <a:xfrm>
+            <a:off x="6309360" y="3858768"/>
+            <a:ext cx="5029200" cy="411480"/>
+          </a:xfrm>
+          <a:prstGeom prst="rect">
+            <a:avLst/>
+          </a:prstGeom>
+          <a:noFill/>
+        </p:spPr>
+        <p:txBody>
+          <a:bodyPr wrap="square" lIns="0" rIns="0" tIns="0" bIns="0">
+            <a:spAutoFit/>
+          </a:bodyPr>
+          <a:lstStyle/>
+          <a:p>
+            <a:r>
+              <a:rPr sz="1000" b="0">
                 <a:solidFill>
                   <a:srgbClr val="141833"/>
                 </a:solidFill>
-                <a:latin typeface="Georgia"/>
-              </a:rPr>
-              <a:t>104,910 views</a:t>
-            </a:r>
-          </a:p>
-        </p:txBody>
-      </p:sp>
-      <p:sp>
-        <p:nvSpPr>
-          <p:cNvPr id="31" name="TextBox 30"/>
-          <p:cNvSpPr txBox="1"/>
-          <p:nvPr/>
-        </p:nvSpPr>
-        <p:spPr>
-          <a:xfrm>
-            <a:off x="8336127" y="3383280"/>
-            <a:ext cx="3017520" cy="274320"/>
+                <a:latin typeface="Helvetica Neue"/>
+              </a:rPr>
+              <a:t>Young entrepreneurs, listen up! Athletes dream big, but have a backup plan. Become a busin</a:t>
+            </a:r>
+          </a:p>
+        </p:txBody>
+      </p:sp>
+      <p:sp>
+        <p:nvSpPr>
+          <p:cNvPr id="22" name="Rectangle 21"/>
+          <p:cNvSpPr/>
+          <p:nvPr/>
+        </p:nvSpPr>
+        <p:spPr>
+          <a:xfrm>
+            <a:off x="6126480" y="4389120"/>
+            <a:ext cx="5303520" cy="822960"/>
+          </a:xfrm>
+          <a:prstGeom prst="rect">
+            <a:avLst/>
+          </a:prstGeom>
+          <a:solidFill>
+            <a:srgbClr val="FFFFFF"/>
+          </a:solidFill>
+          <a:ln>
+            <a:noFill/>
+          </a:ln>
+          <a:effectLst/>
+        </p:spPr>
+        <p:style>
+          <a:lnRef idx="1">
+            <a:schemeClr val="accent1"/>
+          </a:lnRef>
+          <a:fillRef idx="3">
+            <a:schemeClr val="accent1"/>
+          </a:fillRef>
+          <a:effectRef idx="2">
+            <a:schemeClr val="accent1"/>
+          </a:effectRef>
+          <a:fontRef idx="minor">
+            <a:schemeClr val="lt1"/>
+          </a:fontRef>
+        </p:style>
+        <p:txBody>
+          <a:bodyPr rtlCol="0" anchor="ctr"/>
+          <a:lstStyle/>
+          <a:p>
+            <a:pPr algn="ctr"/>
+          </a:p>
+        </p:txBody>
+      </p:sp>
+      <p:sp>
+        <p:nvSpPr>
+          <p:cNvPr id="23" name="Rectangle 22"/>
+          <p:cNvSpPr/>
+          <p:nvPr/>
+        </p:nvSpPr>
+        <p:spPr>
+          <a:xfrm>
+            <a:off x="6126480" y="4389120"/>
+            <a:ext cx="54864" cy="822960"/>
+          </a:xfrm>
+          <a:prstGeom prst="rect">
+            <a:avLst/>
+          </a:prstGeom>
+          <a:solidFill>
+            <a:srgbClr val="2E86AB"/>
+          </a:solidFill>
+          <a:ln>
+            <a:noFill/>
+          </a:ln>
+          <a:effectLst/>
+        </p:spPr>
+        <p:style>
+          <a:lnRef idx="1">
+            <a:schemeClr val="accent1"/>
+          </a:lnRef>
+          <a:fillRef idx="3">
+            <a:schemeClr val="accent1"/>
+          </a:fillRef>
+          <a:effectRef idx="2">
+            <a:schemeClr val="accent1"/>
+          </a:effectRef>
+          <a:fontRef idx="minor">
+            <a:schemeClr val="lt1"/>
+          </a:fontRef>
+        </p:style>
+        <p:txBody>
+          <a:bodyPr rtlCol="0" anchor="ctr"/>
+          <a:lstStyle/>
+          <a:p>
+            <a:pPr algn="ctr"/>
+          </a:p>
+        </p:txBody>
+      </p:sp>
+      <p:sp>
+        <p:nvSpPr>
+          <p:cNvPr id="24" name="TextBox 23"/>
+          <p:cNvSpPr txBox="1"/>
+          <p:nvPr/>
+        </p:nvSpPr>
+        <p:spPr>
+          <a:xfrm>
+            <a:off x="6309360" y="4480559"/>
+            <a:ext cx="5029200" cy="320040"/>
+          </a:xfrm>
+          <a:prstGeom prst="rect">
+            <a:avLst/>
+          </a:prstGeom>
+          <a:noFill/>
+        </p:spPr>
+        <p:txBody>
+          <a:bodyPr wrap="square" lIns="0" rIns="0" tIns="0" bIns="0">
+            <a:spAutoFit/>
+          </a:bodyPr>
+          <a:lstStyle/>
+          <a:p>
+            <a:r>
+              <a:rPr sz="1000" b="1">
+                <a:solidFill>
+                  <a:srgbClr val="2E86AB"/>
+                </a:solidFill>
+                <a:latin typeface="Helvetica Neue"/>
+              </a:rPr>
+              <a:t>#3  ·  IG  ·  581 views</a:t>
+            </a:r>
+          </a:p>
+        </p:txBody>
+      </p:sp>
+      <p:sp>
+        <p:nvSpPr>
+          <p:cNvPr id="25" name="TextBox 24"/>
+          <p:cNvSpPr txBox="1"/>
+          <p:nvPr/>
+        </p:nvSpPr>
+        <p:spPr>
+          <a:xfrm>
+            <a:off x="6309360" y="4773168"/>
+            <a:ext cx="5029200" cy="411480"/>
           </a:xfrm>
           <a:prstGeom prst="rect">
             <a:avLst/>
@@ -11593,161 +11703,25 @@
             <a:r>
               <a:rPr sz="1000" b="0">
                 <a:solidFill>
-                  <a:srgbClr val="6B7082"/>
-                </a:solidFill>
-                <a:latin typeface="Helvetica Neue"/>
-              </a:rPr>
-              <a:t>48 posts · 2,186 avg views/post</a:t>
-            </a:r>
-          </a:p>
-        </p:txBody>
-      </p:sp>
-      <p:sp>
-        <p:nvSpPr>
-          <p:cNvPr id="32" name="TextBox 31"/>
-          <p:cNvSpPr txBox="1"/>
-          <p:nvPr/>
-        </p:nvSpPr>
-        <p:spPr>
-          <a:xfrm>
-            <a:off x="8336127" y="3840479"/>
-            <a:ext cx="3017520" cy="274320"/>
-          </a:xfrm>
-          <a:prstGeom prst="rect">
-            <a:avLst/>
-          </a:prstGeom>
-          <a:noFill/>
-        </p:spPr>
-        <p:txBody>
-          <a:bodyPr wrap="square" lIns="0" rIns="0" tIns="0" bIns="0">
-            <a:spAutoFit/>
-          </a:bodyPr>
-          <a:lstStyle/>
-          <a:p>
-            <a:r>
-              <a:rPr sz="900" b="1">
-                <a:solidFill>
-                  <a:srgbClr val="C9A227"/>
-                </a:solidFill>
-                <a:latin typeface="Helvetica Neue"/>
-              </a:rPr>
-              <a:t>AUDIENCE</a:t>
-            </a:r>
-          </a:p>
-        </p:txBody>
-      </p:sp>
-      <p:sp>
-        <p:nvSpPr>
-          <p:cNvPr id="33" name="TextBox 32"/>
-          <p:cNvSpPr txBox="1"/>
-          <p:nvPr/>
-        </p:nvSpPr>
-        <p:spPr>
-          <a:xfrm>
-            <a:off x="8336127" y="4069079"/>
-            <a:ext cx="3017520" cy="457200"/>
-          </a:xfrm>
-          <a:prstGeom prst="rect">
-            <a:avLst/>
-          </a:prstGeom>
-          <a:noFill/>
-        </p:spPr>
-        <p:txBody>
-          <a:bodyPr wrap="square" lIns="0" rIns="0" tIns="0" bIns="0">
-            <a:spAutoFit/>
-          </a:bodyPr>
-          <a:lstStyle/>
-          <a:p>
-            <a:r>
-              <a:rPr sz="1000" b="0">
-                <a:solidFill>
                   <a:srgbClr val="141833"/>
                 </a:solidFill>
                 <a:latin typeface="Helvetica Neue"/>
               </a:rPr>
-              <a:t>Traditional / patriotic · Middle (40-55) + Older (55+), veterans + families</a:t>
-            </a:r>
-          </a:p>
-        </p:txBody>
-      </p:sp>
-      <p:sp>
-        <p:nvSpPr>
-          <p:cNvPr id="34" name="TextBox 33"/>
-          <p:cNvSpPr txBox="1"/>
-          <p:nvPr/>
-        </p:nvSpPr>
-        <p:spPr>
-          <a:xfrm>
-            <a:off x="8336127" y="4617720"/>
-            <a:ext cx="3017520" cy="274320"/>
-          </a:xfrm>
-          <a:prstGeom prst="rect">
-            <a:avLst/>
-          </a:prstGeom>
-          <a:noFill/>
-        </p:spPr>
-        <p:txBody>
-          <a:bodyPr wrap="square" lIns="0" rIns="0" tIns="0" bIns="0">
-            <a:spAutoFit/>
-          </a:bodyPr>
-          <a:lstStyle/>
-          <a:p>
-            <a:r>
-              <a:rPr sz="900" b="1">
-                <a:solidFill>
-                  <a:srgbClr val="C9A227"/>
-                </a:solidFill>
-                <a:latin typeface="Helvetica Neue"/>
-              </a:rPr>
-              <a:t>WHY NOW</a:t>
-            </a:r>
-          </a:p>
-        </p:txBody>
-      </p:sp>
-      <p:sp>
-        <p:nvSpPr>
-          <p:cNvPr id="35" name="TextBox 34"/>
-          <p:cNvSpPr txBox="1"/>
-          <p:nvPr/>
-        </p:nvSpPr>
-        <p:spPr>
-          <a:xfrm>
-            <a:off x="8336127" y="4846320"/>
-            <a:ext cx="3017520" cy="640080"/>
-          </a:xfrm>
-          <a:prstGeom prst="rect">
-            <a:avLst/>
-          </a:prstGeom>
-          <a:noFill/>
-        </p:spPr>
-        <p:txBody>
-          <a:bodyPr wrap="square" lIns="0" rIns="0" tIns="0" bIns="0">
-            <a:spAutoFit/>
-          </a:bodyPr>
-          <a:lstStyle/>
-          <a:p>
-            <a:r>
-              <a:rPr sz="1000" b="0">
-                <a:solidFill>
-                  <a:srgbClr val="141833"/>
-                </a:solidFill>
-                <a:latin typeface="Helvetica Neue"/>
-              </a:rPr>
-              <a:t>13 posts already at 2,930 avg — punches above weight. Underserved audience with high emotional pull.</a:t>
-            </a:r>
-          </a:p>
-        </p:txBody>
-      </p:sp>
-      <p:sp>
-        <p:nvSpPr>
-          <p:cNvPr id="36" name="Rectangle 35"/>
+              <a:t>Get the right people on your bus, and the wrong people off. Ensure everyone's in the right</a:t>
+            </a:r>
+          </a:p>
+        </p:txBody>
+      </p:sp>
+      <p:sp>
+        <p:nvSpPr>
+          <p:cNvPr id="26" name="Rectangle 25"/>
           <p:cNvSpPr/>
           <p:nvPr/>
         </p:nvSpPr>
         <p:spPr>
           <a:xfrm>
-            <a:off x="731520" y="5806440"/>
-            <a:ext cx="10698480" cy="777240"/>
+            <a:off x="731520" y="5623560"/>
+            <a:ext cx="10698480" cy="731520"/>
           </a:xfrm>
           <a:prstGeom prst="rect">
             <a:avLst/>
@@ -11784,14 +11758,14 @@
       </p:sp>
       <p:sp>
         <p:nvSpPr>
-          <p:cNvPr id="37" name="TextBox 36"/>
-          <p:cNvSpPr txBox="1"/>
-          <p:nvPr/>
-        </p:nvSpPr>
-        <p:spPr>
-          <a:xfrm>
-            <a:off x="914400" y="5897880"/>
-            <a:ext cx="7315200" cy="274320"/>
+          <p:cNvPr id="27" name="TextBox 26"/>
+          <p:cNvSpPr txBox="1"/>
+          <p:nvPr/>
+        </p:nvSpPr>
+        <p:spPr>
+          <a:xfrm>
+            <a:off x="914400" y="5715000"/>
+            <a:ext cx="2743200" cy="274320"/>
           </a:xfrm>
           <a:prstGeom prst="rect">
             <a:avLst/>
@@ -11807,45 +11781,45 @@
             <a:r>
               <a:rPr sz="1000" b="1">
                 <a:solidFill>
-                  <a:srgbClr val="C9A227"/>
-                </a:solidFill>
-                <a:latin typeface="Helvetica Neue"/>
-              </a:rPr>
-              <a:t>THE COMPOUNDING BET</a:t>
-            </a:r>
-          </a:p>
-        </p:txBody>
-      </p:sp>
-      <p:sp>
-        <p:nvSpPr>
-          <p:cNvPr id="38" name="TextBox 37"/>
-          <p:cNvSpPr txBox="1"/>
-          <p:nvPr/>
-        </p:nvSpPr>
-        <p:spPr>
-          <a:xfrm>
-            <a:off x="914400" y="6172200"/>
-            <a:ext cx="10515600" cy="411480"/>
-          </a:xfrm>
-          <a:prstGeom prst="rect">
-            <a:avLst/>
-          </a:prstGeom>
-          <a:noFill/>
-        </p:spPr>
-        <p:txBody>
-          <a:bodyPr wrap="square" lIns="0" rIns="0" tIns="0" bIns="0">
-            <a:spAutoFit/>
-          </a:bodyPr>
-          <a:lstStyle/>
-          <a:p>
-            <a:r>
-              <a:rPr sz="1100" b="1">
+                  <a:srgbClr val="2E86AB"/>
+                </a:solidFill>
+                <a:latin typeface="Helvetica Neue"/>
+              </a:rPr>
+              <a:t>RECOMMENDATION</a:t>
+            </a:r>
+          </a:p>
+        </p:txBody>
+      </p:sp>
+      <p:sp>
+        <p:nvSpPr>
+          <p:cNvPr id="28" name="TextBox 27"/>
+          <p:cNvSpPr txBox="1"/>
+          <p:nvPr/>
+        </p:nvSpPr>
+        <p:spPr>
+          <a:xfrm>
+            <a:off x="914400" y="5943600"/>
+            <a:ext cx="10515600" cy="365760"/>
+          </a:xfrm>
+          <a:prstGeom prst="rect">
+            <a:avLst/>
+          </a:prstGeom>
+          <a:noFill/>
+        </p:spPr>
+        <p:txBody>
+          <a:bodyPr wrap="square" lIns="0" rIns="0" tIns="0" bIns="0">
+            <a:spAutoFit/>
+          </a:bodyPr>
+          <a:lstStyle/>
+          <a:p>
+            <a:r>
+              <a:rPr sz="1300" b="1">
                 <a:solidFill>
                   <a:srgbClr val="FCF6F5"/>
                 </a:solidFill>
                 <a:latin typeface="Helvetica Neue"/>
               </a:rPr>
-              <a:t>These three lanes serve different audiences (18-40 foodie · 30+ residents · 40+ veterans). Investing in all three widens the audience without diluting any one lane.</a:t>
+              <a:t>Underperforming. Either the format needs work — or the audience isn't there for it. Discuss with editor before more spend.</a:t>
             </a:r>
           </a:p>
         </p:txBody>
@@ -11941,7 +11915,7 @@
                 </a:solidFill>
                 <a:latin typeface="Helvetica Neue"/>
               </a:rPr>
-              <a:t>STRATEGIC CONTEXT</a:t>
+              <a:t>CATEGORY DEEP-DIVE</a:t>
             </a:r>
           </a:p>
         </p:txBody>
@@ -11975,7 +11949,7 @@
                 </a:solidFill>
                 <a:latin typeface="Georgia"/>
               </a:rPr>
-              <a:t>Why we still cover the lower-view lanes</a:t>
+              <a:t>Brand Growth Content</a:t>
             </a:r>
           </a:p>
         </p:txBody>
@@ -12009,21 +11983,55 @@
                 </a:solidFill>
                 <a:latin typeface="Helvetica Neue"/>
               </a:rPr>
-              <a:t>Not every category needs to top the leaderboard. Here's why the quieter buckets earn their spend.</a:t>
-            </a:r>
-          </a:p>
-        </p:txBody>
-      </p:sp>
-      <p:sp>
-        <p:nvSpPr>
-          <p:cNvPr id="6" name="Rectangle 5"/>
+              <a:t>Self-referential updates — 'our growth is exponential' style posts.</a:t>
+            </a:r>
+          </a:p>
+        </p:txBody>
+      </p:sp>
+      <p:sp>
+        <p:nvSpPr>
+          <p:cNvPr id="6" name="TextBox 5"/>
+          <p:cNvSpPr txBox="1"/>
+          <p:nvPr/>
+        </p:nvSpPr>
+        <p:spPr>
+          <a:xfrm>
+            <a:off x="731520" y="1691640"/>
+            <a:ext cx="10698480" cy="274320"/>
+          </a:xfrm>
+          <a:prstGeom prst="rect">
+            <a:avLst/>
+          </a:prstGeom>
+          <a:noFill/>
+        </p:spPr>
+        <p:txBody>
+          <a:bodyPr wrap="square" lIns="0" rIns="0" tIns="0" bIns="0">
+            <a:spAutoFit/>
+          </a:bodyPr>
+          <a:lstStyle/>
+          <a:p>
+            <a:r>
+              <a:rPr sz="900" b="1">
+                <a:solidFill>
+                  <a:srgbClr val="E87E8F"/>
+                </a:solidFill>
+                <a:latin typeface="Helvetica Neue"/>
+              </a:rPr>
+              <a:t>AUDIENCE (theoretical): Insider / meta · Existing followers only (echo chamber — can't scale)</a:t>
+            </a:r>
+          </a:p>
+        </p:txBody>
+      </p:sp>
+      <p:sp>
+        <p:nvSpPr>
+          <p:cNvPr id="7" name="Rectangle 6"/>
           <p:cNvSpPr/>
           <p:nvPr/>
         </p:nvSpPr>
         <p:spPr>
           <a:xfrm>
-            <a:off x="563727" y="2194560"/>
-            <a:ext cx="3566160" cy="3291840"/>
+            <a:off x="731520" y="2194560"/>
+            <a:ext cx="5029200" cy="3200400"/>
           </a:xfrm>
           <a:prstGeom prst="rect">
             <a:avLst/>
@@ -12060,20 +12068,20 @@
       </p:sp>
       <p:sp>
         <p:nvSpPr>
-          <p:cNvPr id="7" name="Rectangle 6"/>
+          <p:cNvPr id="8" name="Rectangle 7"/>
           <p:cNvSpPr/>
           <p:nvPr/>
         </p:nvSpPr>
         <p:spPr>
           <a:xfrm>
-            <a:off x="563727" y="2194560"/>
-            <a:ext cx="91440" cy="3291840"/>
+            <a:off x="731520" y="2194560"/>
+            <a:ext cx="91440" cy="3200400"/>
           </a:xfrm>
           <a:prstGeom prst="rect">
             <a:avLst/>
           </a:prstGeom>
           <a:solidFill>
-            <a:srgbClr val="1B7A43"/>
+            <a:srgbClr val="E87E8F"/>
           </a:solidFill>
           <a:ln>
             <a:noFill/>
@@ -12104,82 +12112,82 @@
       </p:sp>
       <p:sp>
         <p:nvSpPr>
-          <p:cNvPr id="8" name="TextBox 7"/>
-          <p:cNvSpPr txBox="1"/>
-          <p:nvPr/>
-        </p:nvSpPr>
-        <p:spPr>
-          <a:xfrm>
-            <a:off x="838047" y="2423160"/>
-            <a:ext cx="3017520" cy="365760"/>
-          </a:xfrm>
-          <a:prstGeom prst="rect">
-            <a:avLst/>
-          </a:prstGeom>
-          <a:noFill/>
-        </p:spPr>
-        <p:txBody>
-          <a:bodyPr wrap="square" lIns="0" rIns="0" tIns="0" bIns="0">
-            <a:spAutoFit/>
-          </a:bodyPr>
-          <a:lstStyle/>
-          <a:p>
-            <a:r>
-              <a:rPr sz="1000" b="1">
-                <a:solidFill>
-                  <a:srgbClr val="1B7A43"/>
-                </a:solidFill>
-                <a:latin typeface="Helvetica Neue"/>
-              </a:rPr>
-              <a:t>REASON 1</a:t>
-            </a:r>
-          </a:p>
-        </p:txBody>
-      </p:sp>
-      <p:sp>
-        <p:nvSpPr>
           <p:cNvPr id="9" name="TextBox 8"/>
           <p:cNvSpPr txBox="1"/>
           <p:nvPr/>
         </p:nvSpPr>
         <p:spPr>
           <a:xfrm>
-            <a:off x="838047" y="2743200"/>
-            <a:ext cx="3017520" cy="457200"/>
-          </a:xfrm>
-          <a:prstGeom prst="rect">
-            <a:avLst/>
-          </a:prstGeom>
-          <a:noFill/>
-        </p:spPr>
-        <p:txBody>
-          <a:bodyPr wrap="square" lIns="0" rIns="0" tIns="0" bIns="0">
-            <a:spAutoFit/>
-          </a:bodyPr>
-          <a:lstStyle/>
-          <a:p>
-            <a:r>
-              <a:rPr sz="1400" b="1">
+            <a:off x="960120" y="2377440"/>
+            <a:ext cx="4572000" cy="365760"/>
+          </a:xfrm>
+          <a:prstGeom prst="rect">
+            <a:avLst/>
+          </a:prstGeom>
+          <a:noFill/>
+        </p:spPr>
+        <p:txBody>
+          <a:bodyPr wrap="square" lIns="0" rIns="0" tIns="0" bIns="0">
+            <a:spAutoFit/>
+          </a:bodyPr>
+          <a:lstStyle/>
+          <a:p>
+            <a:r>
+              <a:rPr sz="1100" b="1">
+                <a:solidFill>
+                  <a:srgbClr val="E87E8F"/>
+                </a:solidFill>
+                <a:latin typeface="Helvetica Neue"/>
+              </a:rPr>
+              <a:t>TOTAL VIEWS</a:t>
+            </a:r>
+          </a:p>
+        </p:txBody>
+      </p:sp>
+      <p:sp>
+        <p:nvSpPr>
+          <p:cNvPr id="10" name="TextBox 9"/>
+          <p:cNvSpPr txBox="1"/>
+          <p:nvPr/>
+        </p:nvSpPr>
+        <p:spPr>
+          <a:xfrm>
+            <a:off x="960120" y="2697480"/>
+            <a:ext cx="4572000" cy="1097280"/>
+          </a:xfrm>
+          <a:prstGeom prst="rect">
+            <a:avLst/>
+          </a:prstGeom>
+          <a:noFill/>
+        </p:spPr>
+        <p:txBody>
+          <a:bodyPr wrap="square" lIns="0" rIns="0" tIns="0" bIns="0">
+            <a:spAutoFit/>
+          </a:bodyPr>
+          <a:lstStyle/>
+          <a:p>
+            <a:r>
+              <a:rPr sz="5400" b="1">
                 <a:solidFill>
                   <a:srgbClr val="2F3C7E"/>
                 </a:solidFill>
                 <a:latin typeface="Georgia"/>
               </a:rPr>
-              <a:t>NEW AUDIENCE ACQUISITION</a:t>
-            </a:r>
-          </a:p>
-        </p:txBody>
-      </p:sp>
-      <p:sp>
-        <p:nvSpPr>
-          <p:cNvPr id="10" name="TextBox 9"/>
-          <p:cNvSpPr txBox="1"/>
-          <p:nvPr/>
-        </p:nvSpPr>
-        <p:spPr>
-          <a:xfrm>
-            <a:off x="838047" y="3291839"/>
-            <a:ext cx="3017520" cy="548640"/>
+              <a:t>2,214</a:t>
+            </a:r>
+          </a:p>
+        </p:txBody>
+      </p:sp>
+      <p:sp>
+        <p:nvSpPr>
+          <p:cNvPr id="11" name="TextBox 10"/>
+          <p:cNvSpPr txBox="1"/>
+          <p:nvPr/>
+        </p:nvSpPr>
+        <p:spPr>
+          <a:xfrm>
+            <a:off x="960120" y="3840480"/>
+            <a:ext cx="4572000" cy="365760"/>
           </a:xfrm>
           <a:prstGeom prst="rect">
             <a:avLst/>
@@ -12199,55 +12207,89 @@
                 </a:solidFill>
                 <a:latin typeface="Helvetica Neue"/>
               </a:rPr>
-              <a:t>Scandal brings viewers. Positive content KEEPS them.</a:t>
-            </a:r>
-          </a:p>
-        </p:txBody>
-      </p:sp>
-      <p:sp>
-        <p:nvSpPr>
-          <p:cNvPr id="11" name="TextBox 10"/>
-          <p:cNvSpPr txBox="1"/>
-          <p:nvPr/>
-        </p:nvSpPr>
-        <p:spPr>
-          <a:xfrm>
-            <a:off x="838047" y="3931920"/>
-            <a:ext cx="3017520" cy="1463040"/>
-          </a:xfrm>
-          <a:prstGeom prst="rect">
-            <a:avLst/>
-          </a:prstGeom>
-          <a:noFill/>
-        </p:spPr>
-        <p:txBody>
-          <a:bodyPr wrap="square" lIns="0" rIns="0" tIns="0" bIns="0">
-            <a:spAutoFit/>
-          </a:bodyPr>
-          <a:lstStyle/>
-          <a:p>
-            <a:r>
-              <a:rPr sz="1000" b="0">
+              <a:t>4 posts · 34 likes</a:t>
+            </a:r>
+          </a:p>
+        </p:txBody>
+      </p:sp>
+      <p:sp>
+        <p:nvSpPr>
+          <p:cNvPr id="12" name="TextBox 11"/>
+          <p:cNvSpPr txBox="1"/>
+          <p:nvPr/>
+        </p:nvSpPr>
+        <p:spPr>
+          <a:xfrm>
+            <a:off x="960120" y="4206240"/>
+            <a:ext cx="4572000" cy="365760"/>
+          </a:xfrm>
+          <a:prstGeom prst="rect">
+            <a:avLst/>
+          </a:prstGeom>
+          <a:noFill/>
+        </p:spPr>
+        <p:txBody>
+          <a:bodyPr wrap="square" lIns="0" rIns="0" tIns="0" bIns="0">
+            <a:spAutoFit/>
+          </a:bodyPr>
+          <a:lstStyle/>
+          <a:p>
+            <a:r>
+              <a:rPr sz="1300" b="0">
                 <a:solidFill>
                   <a:srgbClr val="6B7082"/>
                 </a:solidFill>
                 <a:latin typeface="Helvetica Neue"/>
               </a:rPr>
-              <a:t>Without community coverage, viewers churn after 3-4 controversy spikes. They came for drama, they leave because they don't feel connection to Downey itself.</a:t>
-            </a:r>
-          </a:p>
-        </p:txBody>
-      </p:sp>
-      <p:sp>
-        <p:nvSpPr>
-          <p:cNvPr id="12" name="Rectangle 11"/>
+              <a:t>554 average views per post</a:t>
+            </a:r>
+          </a:p>
+        </p:txBody>
+      </p:sp>
+      <p:sp>
+        <p:nvSpPr>
+          <p:cNvPr id="13" name="TextBox 12"/>
+          <p:cNvSpPr txBox="1"/>
+          <p:nvPr/>
+        </p:nvSpPr>
+        <p:spPr>
+          <a:xfrm>
+            <a:off x="6126480" y="2194560"/>
+            <a:ext cx="5486400" cy="274320"/>
+          </a:xfrm>
+          <a:prstGeom prst="rect">
+            <a:avLst/>
+          </a:prstGeom>
+          <a:noFill/>
+        </p:spPr>
+        <p:txBody>
+          <a:bodyPr wrap="square" lIns="0" rIns="0" tIns="0" bIns="0">
+            <a:spAutoFit/>
+          </a:bodyPr>
+          <a:lstStyle/>
+          <a:p>
+            <a:r>
+              <a:rPr sz="1100" b="1">
+                <a:solidFill>
+                  <a:srgbClr val="E87E8F"/>
+                </a:solidFill>
+                <a:latin typeface="Helvetica Neue"/>
+              </a:rPr>
+              <a:t>TOP 3 IN THIS CATEGORY</a:t>
+            </a:r>
+          </a:p>
+        </p:txBody>
+      </p:sp>
+      <p:sp>
+        <p:nvSpPr>
+          <p:cNvPr id="14" name="Rectangle 13"/>
           <p:cNvSpPr/>
           <p:nvPr/>
         </p:nvSpPr>
         <p:spPr>
           <a:xfrm>
-            <a:off x="4312767" y="2194560"/>
-            <a:ext cx="3566160" cy="3291840"/>
+            <a:off x="6126480" y="2560320"/>
+            <a:ext cx="5303520" cy="822960"/>
           </a:xfrm>
           <a:prstGeom prst="rect">
             <a:avLst/>
@@ -12284,20 +12326,20 @@
       </p:sp>
       <p:sp>
         <p:nvSpPr>
-          <p:cNvPr id="13" name="Rectangle 12"/>
+          <p:cNvPr id="15" name="Rectangle 14"/>
           <p:cNvSpPr/>
           <p:nvPr/>
         </p:nvSpPr>
         <p:spPr>
           <a:xfrm>
-            <a:off x="4312767" y="2194560"/>
-            <a:ext cx="91440" cy="3291840"/>
+            <a:off x="6126480" y="2560320"/>
+            <a:ext cx="54864" cy="822960"/>
           </a:xfrm>
           <a:prstGeom prst="rect">
             <a:avLst/>
           </a:prstGeom>
           <a:solidFill>
-            <a:srgbClr val="C9A227"/>
+            <a:srgbClr val="E87E8F"/>
           </a:solidFill>
           <a:ln>
             <a:noFill/>
@@ -12328,14 +12370,14 @@
       </p:sp>
       <p:sp>
         <p:nvSpPr>
-          <p:cNvPr id="14" name="TextBox 13"/>
-          <p:cNvSpPr txBox="1"/>
-          <p:nvPr/>
-        </p:nvSpPr>
-        <p:spPr>
-          <a:xfrm>
-            <a:off x="4587087" y="2423160"/>
-            <a:ext cx="3017520" cy="365760"/>
+          <p:cNvPr id="16" name="TextBox 15"/>
+          <p:cNvSpPr txBox="1"/>
+          <p:nvPr/>
+        </p:nvSpPr>
+        <p:spPr>
+          <a:xfrm>
+            <a:off x="6309360" y="2651760"/>
+            <a:ext cx="5029200" cy="320040"/>
           </a:xfrm>
           <a:prstGeom prst="rect">
             <a:avLst/>
@@ -12351,113 +12393,45 @@
             <a:r>
               <a:rPr sz="1000" b="1">
                 <a:solidFill>
-                  <a:srgbClr val="C9A227"/>
-                </a:solidFill>
-                <a:latin typeface="Helvetica Neue"/>
-              </a:rPr>
-              <a:t>REASON 2</a:t>
-            </a:r>
-          </a:p>
-        </p:txBody>
-      </p:sp>
-      <p:sp>
-        <p:nvSpPr>
-          <p:cNvPr id="15" name="TextBox 14"/>
-          <p:cNvSpPr txBox="1"/>
-          <p:nvPr/>
-        </p:nvSpPr>
-        <p:spPr>
-          <a:xfrm>
-            <a:off x="4587087" y="2743200"/>
-            <a:ext cx="3017520" cy="457200"/>
-          </a:xfrm>
-          <a:prstGeom prst="rect">
-            <a:avLst/>
-          </a:prstGeom>
-          <a:noFill/>
-        </p:spPr>
-        <p:txBody>
-          <a:bodyPr wrap="square" lIns="0" rIns="0" tIns="0" bIns="0">
-            <a:spAutoFit/>
-          </a:bodyPr>
-          <a:lstStyle/>
-          <a:p>
-            <a:r>
-              <a:rPr sz="1400" b="1">
-                <a:solidFill>
-                  <a:srgbClr val="2F3C7E"/>
-                </a:solidFill>
-                <a:latin typeface="Georgia"/>
-              </a:rPr>
-              <a:t>EDITORIAL CREDIBILITY</a:t>
-            </a:r>
-          </a:p>
-        </p:txBody>
-      </p:sp>
-      <p:sp>
-        <p:nvSpPr>
-          <p:cNvPr id="16" name="TextBox 15"/>
-          <p:cNvSpPr txBox="1"/>
-          <p:nvPr/>
-        </p:nvSpPr>
-        <p:spPr>
-          <a:xfrm>
-            <a:off x="4587087" y="3291839"/>
-            <a:ext cx="3017520" cy="548640"/>
-          </a:xfrm>
-          <a:prstGeom prst="rect">
-            <a:avLst/>
-          </a:prstGeom>
-          <a:noFill/>
-        </p:spPr>
-        <p:txBody>
-          <a:bodyPr wrap="square" lIns="0" rIns="0" tIns="0" bIns="0">
-            <a:spAutoFit/>
-          </a:bodyPr>
-          <a:lstStyle/>
-          <a:p>
-            <a:r>
-              <a:rPr sz="1300" b="1">
+                  <a:srgbClr val="E87E8F"/>
+                </a:solidFill>
+                <a:latin typeface="Helvetica Neue"/>
+              </a:rPr>
+              <a:t>#1  ·  FB  ·  1,101 views</a:t>
+            </a:r>
+          </a:p>
+        </p:txBody>
+      </p:sp>
+      <p:sp>
+        <p:nvSpPr>
+          <p:cNvPr id="17" name="TextBox 16"/>
+          <p:cNvSpPr txBox="1"/>
+          <p:nvPr/>
+        </p:nvSpPr>
+        <p:spPr>
+          <a:xfrm>
+            <a:off x="6309360" y="2944368"/>
+            <a:ext cx="5029200" cy="411480"/>
+          </a:xfrm>
+          <a:prstGeom prst="rect">
+            <a:avLst/>
+          </a:prstGeom>
+          <a:noFill/>
+        </p:spPr>
+        <p:txBody>
+          <a:bodyPr wrap="square" lIns="0" rIns="0" tIns="0" bIns="0">
+            <a:spAutoFit/>
+          </a:bodyPr>
+          <a:lstStyle/>
+          <a:p>
+            <a:r>
+              <a:rPr sz="1000" b="0">
                 <a:solidFill>
                   <a:srgbClr val="141833"/>
                 </a:solidFill>
                 <a:latin typeface="Helvetica Neue"/>
               </a:rPr>
-              <a:t>A show that only reports negatives becomes a hit piece.</a:t>
-            </a:r>
-          </a:p>
-        </p:txBody>
-      </p:sp>
-      <p:sp>
-        <p:nvSpPr>
-          <p:cNvPr id="17" name="TextBox 16"/>
-          <p:cNvSpPr txBox="1"/>
-          <p:nvPr/>
-        </p:nvSpPr>
-        <p:spPr>
-          <a:xfrm>
-            <a:off x="4587087" y="3931920"/>
-            <a:ext cx="3017520" cy="1463040"/>
-          </a:xfrm>
-          <a:prstGeom prst="rect">
-            <a:avLst/>
-          </a:prstGeom>
-          <a:noFill/>
-        </p:spPr>
-        <p:txBody>
-          <a:bodyPr wrap="square" lIns="0" rIns="0" tIns="0" bIns="0">
-            <a:spAutoFit/>
-          </a:bodyPr>
-          <a:lstStyle/>
-          <a:p>
-            <a:r>
-              <a:rPr sz="1000" b="0">
-                <a:solidFill>
-                  <a:srgbClr val="6B7082"/>
-                </a:solidFill>
-                <a:latin typeface="Helvetica Neue"/>
-              </a:rPr>
-              <a:t>Sponsors don't want to attach to a hit piece. Positive coverage — resident highlights, downtown growth, community wins — proves objectivity. That's what makes sponsorship durable.</a:t>
+              <a:t>We're building this show for you! Your questions and suggestions directly influence what w</a:t>
             </a:r>
           </a:p>
         </p:txBody>
@@ -12470,8 +12444,8 @@
         </p:nvSpPr>
         <p:spPr>
           <a:xfrm>
-            <a:off x="8061807" y="2194560"/>
-            <a:ext cx="3566160" cy="3291840"/>
+            <a:off x="6126480" y="3474720"/>
+            <a:ext cx="5303520" cy="822960"/>
           </a:xfrm>
           <a:prstGeom prst="rect">
             <a:avLst/>
@@ -12514,14 +12488,14 @@
         </p:nvSpPr>
         <p:spPr>
           <a:xfrm>
-            <a:off x="8061807" y="2194560"/>
-            <a:ext cx="91440" cy="3291840"/>
+            <a:off x="6126480" y="3474720"/>
+            <a:ext cx="54864" cy="822960"/>
           </a:xfrm>
           <a:prstGeom prst="rect">
             <a:avLst/>
           </a:prstGeom>
           <a:solidFill>
-            <a:srgbClr val="2E86AB"/>
+            <a:srgbClr val="E87E8F"/>
           </a:solidFill>
           <a:ln>
             <a:noFill/>
@@ -12558,8 +12532,8 @@
         </p:nvSpPr>
         <p:spPr>
           <a:xfrm>
-            <a:off x="8336127" y="2423160"/>
-            <a:ext cx="3017520" cy="365760"/>
+            <a:off x="6309360" y="3566160"/>
+            <a:ext cx="5029200" cy="320040"/>
           </a:xfrm>
           <a:prstGeom prst="rect">
             <a:avLst/>
@@ -12575,11 +12549,11 @@
             <a:r>
               <a:rPr sz="1000" b="1">
                 <a:solidFill>
-                  <a:srgbClr val="2E86AB"/>
-                </a:solidFill>
-                <a:latin typeface="Helvetica Neue"/>
-              </a:rPr>
-              <a:t>REASON 3</a:t>
+                  <a:srgbClr val="E87E8F"/>
+                </a:solidFill>
+                <a:latin typeface="Helvetica Neue"/>
+              </a:rPr>
+              <a:t>#2  ·  FB  ·  699 views</a:t>
             </a:r>
           </a:p>
         </p:txBody>
@@ -12592,42 +12566,276 @@
         </p:nvSpPr>
         <p:spPr>
           <a:xfrm>
-            <a:off x="8336127" y="2743200"/>
-            <a:ext cx="3017520" cy="457200"/>
-          </a:xfrm>
-          <a:prstGeom prst="rect">
-            <a:avLst/>
-          </a:prstGeom>
-          <a:noFill/>
-        </p:spPr>
-        <p:txBody>
-          <a:bodyPr wrap="square" lIns="0" rIns="0" tIns="0" bIns="0">
-            <a:spAutoFit/>
-          </a:bodyPr>
-          <a:lstStyle/>
-          <a:p>
-            <a:r>
-              <a:rPr sz="1400" b="1">
-                <a:solidFill>
-                  <a:srgbClr val="2F3C7E"/>
-                </a:solidFill>
-                <a:latin typeface="Georgia"/>
-              </a:rPr>
-              <a:t>ALGORITHMIC HEALTH</a:t>
-            </a:r>
-          </a:p>
-        </p:txBody>
-      </p:sp>
-      <p:sp>
-        <p:nvSpPr>
-          <p:cNvPr id="22" name="TextBox 21"/>
-          <p:cNvSpPr txBox="1"/>
-          <p:nvPr/>
-        </p:nvSpPr>
-        <p:spPr>
-          <a:xfrm>
-            <a:off x="8336127" y="3291839"/>
-            <a:ext cx="3017520" cy="548640"/>
+            <a:off x="6309360" y="3858768"/>
+            <a:ext cx="5029200" cy="411480"/>
+          </a:xfrm>
+          <a:prstGeom prst="rect">
+            <a:avLst/>
+          </a:prstGeom>
+          <a:noFill/>
+        </p:spPr>
+        <p:txBody>
+          <a:bodyPr wrap="square" lIns="0" rIns="0" tIns="0" bIns="0">
+            <a:spAutoFit/>
+          </a:bodyPr>
+          <a:lstStyle/>
+          <a:p>
+            <a:r>
+              <a:rPr sz="1000" b="0">
+                <a:solidFill>
+                  <a:srgbClr val="141833"/>
+                </a:solidFill>
+                <a:latin typeface="Helvetica Neue"/>
+              </a:rPr>
+              <a:t>We're seeing exponential growth across our social platforms, with over 100k views combined</a:t>
+            </a:r>
+          </a:p>
+        </p:txBody>
+      </p:sp>
+      <p:sp>
+        <p:nvSpPr>
+          <p:cNvPr id="22" name="Rectangle 21"/>
+          <p:cNvSpPr/>
+          <p:nvPr/>
+        </p:nvSpPr>
+        <p:spPr>
+          <a:xfrm>
+            <a:off x="6126480" y="4389120"/>
+            <a:ext cx="5303520" cy="822960"/>
+          </a:xfrm>
+          <a:prstGeom prst="rect">
+            <a:avLst/>
+          </a:prstGeom>
+          <a:solidFill>
+            <a:srgbClr val="FFFFFF"/>
+          </a:solidFill>
+          <a:ln>
+            <a:noFill/>
+          </a:ln>
+          <a:effectLst/>
+        </p:spPr>
+        <p:style>
+          <a:lnRef idx="1">
+            <a:schemeClr val="accent1"/>
+          </a:lnRef>
+          <a:fillRef idx="3">
+            <a:schemeClr val="accent1"/>
+          </a:fillRef>
+          <a:effectRef idx="2">
+            <a:schemeClr val="accent1"/>
+          </a:effectRef>
+          <a:fontRef idx="minor">
+            <a:schemeClr val="lt1"/>
+          </a:fontRef>
+        </p:style>
+        <p:txBody>
+          <a:bodyPr rtlCol="0" anchor="ctr"/>
+          <a:lstStyle/>
+          <a:p>
+            <a:pPr algn="ctr"/>
+          </a:p>
+        </p:txBody>
+      </p:sp>
+      <p:sp>
+        <p:nvSpPr>
+          <p:cNvPr id="23" name="Rectangle 22"/>
+          <p:cNvSpPr/>
+          <p:nvPr/>
+        </p:nvSpPr>
+        <p:spPr>
+          <a:xfrm>
+            <a:off x="6126480" y="4389120"/>
+            <a:ext cx="54864" cy="822960"/>
+          </a:xfrm>
+          <a:prstGeom prst="rect">
+            <a:avLst/>
+          </a:prstGeom>
+          <a:solidFill>
+            <a:srgbClr val="E87E8F"/>
+          </a:solidFill>
+          <a:ln>
+            <a:noFill/>
+          </a:ln>
+          <a:effectLst/>
+        </p:spPr>
+        <p:style>
+          <a:lnRef idx="1">
+            <a:schemeClr val="accent1"/>
+          </a:lnRef>
+          <a:fillRef idx="3">
+            <a:schemeClr val="accent1"/>
+          </a:fillRef>
+          <a:effectRef idx="2">
+            <a:schemeClr val="accent1"/>
+          </a:effectRef>
+          <a:fontRef idx="minor">
+            <a:schemeClr val="lt1"/>
+          </a:fontRef>
+        </p:style>
+        <p:txBody>
+          <a:bodyPr rtlCol="0" anchor="ctr"/>
+          <a:lstStyle/>
+          <a:p>
+            <a:pPr algn="ctr"/>
+          </a:p>
+        </p:txBody>
+      </p:sp>
+      <p:sp>
+        <p:nvSpPr>
+          <p:cNvPr id="24" name="TextBox 23"/>
+          <p:cNvSpPr txBox="1"/>
+          <p:nvPr/>
+        </p:nvSpPr>
+        <p:spPr>
+          <a:xfrm>
+            <a:off x="6309360" y="4480559"/>
+            <a:ext cx="5029200" cy="320040"/>
+          </a:xfrm>
+          <a:prstGeom prst="rect">
+            <a:avLst/>
+          </a:prstGeom>
+          <a:noFill/>
+        </p:spPr>
+        <p:txBody>
+          <a:bodyPr wrap="square" lIns="0" rIns="0" tIns="0" bIns="0">
+            <a:spAutoFit/>
+          </a:bodyPr>
+          <a:lstStyle/>
+          <a:p>
+            <a:r>
+              <a:rPr sz="1000" b="1">
+                <a:solidFill>
+                  <a:srgbClr val="E87E8F"/>
+                </a:solidFill>
+                <a:latin typeface="Helvetica Neue"/>
+              </a:rPr>
+              <a:t>#3  ·  TT  ·  412 views</a:t>
+            </a:r>
+          </a:p>
+        </p:txBody>
+      </p:sp>
+      <p:sp>
+        <p:nvSpPr>
+          <p:cNvPr id="25" name="TextBox 24"/>
+          <p:cNvSpPr txBox="1"/>
+          <p:nvPr/>
+        </p:nvSpPr>
+        <p:spPr>
+          <a:xfrm>
+            <a:off x="6309360" y="4773168"/>
+            <a:ext cx="5029200" cy="411480"/>
+          </a:xfrm>
+          <a:prstGeom prst="rect">
+            <a:avLst/>
+          </a:prstGeom>
+          <a:noFill/>
+        </p:spPr>
+        <p:txBody>
+          <a:bodyPr wrap="square" lIns="0" rIns="0" tIns="0" bIns="0">
+            <a:spAutoFit/>
+          </a:bodyPr>
+          <a:lstStyle/>
+          <a:p>
+            <a:r>
+              <a:rPr sz="1000" b="0">
+                <a:solidFill>
+                  <a:srgbClr val="141833"/>
+                </a:solidFill>
+                <a:latin typeface="Helvetica Neue"/>
+              </a:rPr>
+              <a:t>Social media growth is exponential! Over 100k views total, with 54k+ on one platform alone</a:t>
+            </a:r>
+          </a:p>
+        </p:txBody>
+      </p:sp>
+      <p:sp>
+        <p:nvSpPr>
+          <p:cNvPr id="26" name="Rectangle 25"/>
+          <p:cNvSpPr/>
+          <p:nvPr/>
+        </p:nvSpPr>
+        <p:spPr>
+          <a:xfrm>
+            <a:off x="731520" y="5623560"/>
+            <a:ext cx="10698480" cy="731520"/>
+          </a:xfrm>
+          <a:prstGeom prst="rect">
+            <a:avLst/>
+          </a:prstGeom>
+          <a:solidFill>
+            <a:srgbClr val="141833"/>
+          </a:solidFill>
+          <a:ln>
+            <a:noFill/>
+          </a:ln>
+          <a:effectLst/>
+        </p:spPr>
+        <p:style>
+          <a:lnRef idx="1">
+            <a:schemeClr val="accent1"/>
+          </a:lnRef>
+          <a:fillRef idx="3">
+            <a:schemeClr val="accent1"/>
+          </a:fillRef>
+          <a:effectRef idx="2">
+            <a:schemeClr val="accent1"/>
+          </a:effectRef>
+          <a:fontRef idx="minor">
+            <a:schemeClr val="lt1"/>
+          </a:fontRef>
+        </p:style>
+        <p:txBody>
+          <a:bodyPr rtlCol="0" anchor="ctr"/>
+          <a:lstStyle/>
+          <a:p>
+            <a:pPr algn="ctr"/>
+          </a:p>
+        </p:txBody>
+      </p:sp>
+      <p:sp>
+        <p:nvSpPr>
+          <p:cNvPr id="27" name="TextBox 26"/>
+          <p:cNvSpPr txBox="1"/>
+          <p:nvPr/>
+        </p:nvSpPr>
+        <p:spPr>
+          <a:xfrm>
+            <a:off x="914400" y="5715000"/>
+            <a:ext cx="2743200" cy="274320"/>
+          </a:xfrm>
+          <a:prstGeom prst="rect">
+            <a:avLst/>
+          </a:prstGeom>
+          <a:noFill/>
+        </p:spPr>
+        <p:txBody>
+          <a:bodyPr wrap="square" lIns="0" rIns="0" tIns="0" bIns="0">
+            <a:spAutoFit/>
+          </a:bodyPr>
+          <a:lstStyle/>
+          <a:p>
+            <a:r>
+              <a:rPr sz="1000" b="1">
+                <a:solidFill>
+                  <a:srgbClr val="E87E8F"/>
+                </a:solidFill>
+                <a:latin typeface="Helvetica Neue"/>
+              </a:rPr>
+              <a:t>RECOMMENDATION</a:t>
+            </a:r>
+          </a:p>
+        </p:txBody>
+      </p:sp>
+      <p:sp>
+        <p:nvSpPr>
+          <p:cNvPr id="28" name="TextBox 27"/>
+          <p:cNvSpPr txBox="1"/>
+          <p:nvPr/>
+        </p:nvSpPr>
+        <p:spPr>
+          <a:xfrm>
+            <a:off x="914400" y="5943600"/>
+            <a:ext cx="10515600" cy="365760"/>
           </a:xfrm>
           <a:prstGeom prst="rect">
             <a:avLst/>
@@ -12643,79 +12851,11 @@
             <a:r>
               <a:rPr sz="1300" b="1">
                 <a:solidFill>
-                  <a:srgbClr val="141833"/>
-                </a:solidFill>
-                <a:latin typeface="Helvetica Neue"/>
-              </a:rPr>
-              <a:t>Platforms punish single-topic accounts.</a:t>
-            </a:r>
-          </a:p>
-        </p:txBody>
-      </p:sp>
-      <p:sp>
-        <p:nvSpPr>
-          <p:cNvPr id="23" name="TextBox 22"/>
-          <p:cNvSpPr txBox="1"/>
-          <p:nvPr/>
-        </p:nvSpPr>
-        <p:spPr>
-          <a:xfrm>
-            <a:off x="8336127" y="3931920"/>
-            <a:ext cx="3017520" cy="1463040"/>
-          </a:xfrm>
-          <a:prstGeom prst="rect">
-            <a:avLst/>
-          </a:prstGeom>
-          <a:noFill/>
-        </p:spPr>
-        <p:txBody>
-          <a:bodyPr wrap="square" lIns="0" rIns="0" tIns="0" bIns="0">
-            <a:spAutoFit/>
-          </a:bodyPr>
-          <a:lstStyle/>
-          <a:p>
-            <a:r>
-              <a:rPr sz="1000" b="0">
-                <a:solidFill>
-                  <a:srgbClr val="6B7082"/>
-                </a:solidFill>
-                <a:latin typeface="Helvetica Neue"/>
-              </a:rPr>
-              <a:t>Instagram, TikTok, and YouTube increasingly penalize accounts that push one theme. A mixed content diet earns more consistent reach across ALL posts, including the scandal ones. Diversification pays.</a:t>
-            </a:r>
-          </a:p>
-        </p:txBody>
-      </p:sp>
-      <p:sp>
-        <p:nvSpPr>
-          <p:cNvPr id="24" name="TextBox 23"/>
-          <p:cNvSpPr txBox="1"/>
-          <p:nvPr/>
-        </p:nvSpPr>
-        <p:spPr>
-          <a:xfrm>
-            <a:off x="731520" y="6263640"/>
-            <a:ext cx="10698480" cy="457200"/>
-          </a:xfrm>
-          <a:prstGeom prst="rect">
-            <a:avLst/>
-          </a:prstGeom>
-          <a:noFill/>
-        </p:spPr>
-        <p:txBody>
-          <a:bodyPr wrap="square" lIns="0" rIns="0" tIns="0" bIns="0">
-            <a:spAutoFit/>
-          </a:bodyPr>
-          <a:lstStyle/>
-          <a:p>
-            <a:r>
-              <a:rPr sz="1200" b="1">
-                <a:solidFill>
-                  <a:srgbClr val="141833"/>
-                </a:solidFill>
-                <a:latin typeface="Helvetica Neue"/>
-              </a:rPr>
-              <a:t>Low-view lanes aren't dead weight. They're the connective tissue that turns viral reach into a durable audience.</a:t>
+                  <a:srgbClr val="FCF6F5"/>
+                </a:solidFill>
+                <a:latin typeface="Helvetica Neue"/>
+              </a:rPr>
+              <a:t>Modest reach. Fine as filler between heavy hitters, not a headline lane.</a:t>
             </a:r>
           </a:p>
         </p:txBody>
@@ -13641,7 +13781,7 @@
                 </a:solidFill>
                 <a:latin typeface="Helvetica Neue"/>
               </a:rPr>
-              <a:t>THE HONEST TRADEOFF</a:t>
+              <a:t>THE ASK</a:t>
             </a:r>
           </a:p>
         </p:txBody>
@@ -13675,7 +13815,7 @@
                 </a:solidFill>
                 <a:latin typeface="Georgia"/>
               </a:rPr>
-              <a:t>Reach vs. depth — what each side actually buys</a:t>
+              <a:t>Where we recommend leaning in next</a:t>
             </a:r>
           </a:p>
         </p:txBody>
@@ -13709,7 +13849,7 @@
                 </a:solidFill>
                 <a:latin typeface="Helvetica Neue"/>
               </a:rPr>
-              <a:t>This isn't a Downey problem. It's how every social platform works. The question is the RATIO, not the choice.</a:t>
+              <a:t>Three lanes that have proven reach + audience fit. Small bets get compound returns here.</a:t>
             </a:r>
           </a:p>
         </p:txBody>
@@ -13722,8 +13862,8 @@
         </p:nvSpPr>
         <p:spPr>
           <a:xfrm>
-            <a:off x="563727" y="2103120"/>
-            <a:ext cx="5303520" cy="3657600"/>
+            <a:off x="563727" y="1965960"/>
+            <a:ext cx="3566160" cy="3566160"/>
           </a:xfrm>
           <a:prstGeom prst="rect">
             <a:avLst/>
@@ -13766,14 +13906,14 @@
         </p:nvSpPr>
         <p:spPr>
           <a:xfrm>
-            <a:off x="563727" y="2103120"/>
-            <a:ext cx="91440" cy="3657600"/>
+            <a:off x="563727" y="1965960"/>
+            <a:ext cx="91440" cy="3566160"/>
           </a:xfrm>
           <a:prstGeom prst="rect">
             <a:avLst/>
           </a:prstGeom>
           <a:solidFill>
-            <a:srgbClr val="990011"/>
+            <a:srgbClr val="C9A227"/>
           </a:solidFill>
           <a:ln>
             <a:noFill/>
@@ -13810,28 +13950,28 @@
         </p:nvSpPr>
         <p:spPr>
           <a:xfrm>
-            <a:off x="838047" y="2286000"/>
-            <a:ext cx="4754880" cy="365760"/>
-          </a:xfrm>
-          <a:prstGeom prst="rect">
-            <a:avLst/>
-          </a:prstGeom>
-          <a:noFill/>
-        </p:spPr>
-        <p:txBody>
-          <a:bodyPr wrap="square" lIns="0" rIns="0" tIns="0" bIns="0">
-            <a:spAutoFit/>
-          </a:bodyPr>
-          <a:lstStyle/>
-          <a:p>
-            <a:r>
-              <a:rPr sz="1100" b="1">
-                <a:solidFill>
-                  <a:srgbClr val="990011"/>
-                </a:solidFill>
-                <a:latin typeface="Helvetica Neue"/>
-              </a:rPr>
-              <a:t>WHAT EARNS EYEBALLS</a:t>
+            <a:off x="838047" y="2194560"/>
+            <a:ext cx="3017520" cy="274320"/>
+          </a:xfrm>
+          <a:prstGeom prst="rect">
+            <a:avLst/>
+          </a:prstGeom>
+          <a:noFill/>
+        </p:spPr>
+        <p:txBody>
+          <a:bodyPr wrap="square" lIns="0" rIns="0" tIns="0" bIns="0">
+            <a:spAutoFit/>
+          </a:bodyPr>
+          <a:lstStyle/>
+          <a:p>
+            <a:r>
+              <a:rPr sz="1000" b="1">
+                <a:solidFill>
+                  <a:srgbClr val="C9A227"/>
+                </a:solidFill>
+                <a:latin typeface="Helvetica Neue"/>
+              </a:rPr>
+              <a:t>LEAN IN</a:t>
             </a:r>
           </a:p>
         </p:txBody>
@@ -13844,28 +13984,28 @@
         </p:nvSpPr>
         <p:spPr>
           <a:xfrm>
-            <a:off x="838047" y="2651760"/>
-            <a:ext cx="4754880" cy="457200"/>
-          </a:xfrm>
-          <a:prstGeom prst="rect">
-            <a:avLst/>
-          </a:prstGeom>
-          <a:noFill/>
-        </p:spPr>
-        <p:txBody>
-          <a:bodyPr wrap="square" lIns="0" rIns="0" tIns="0" bIns="0">
-            <a:spAutoFit/>
-          </a:bodyPr>
-          <a:lstStyle/>
-          <a:p>
-            <a:r>
-              <a:rPr sz="2000" b="1">
+            <a:off x="838047" y="2468880"/>
+            <a:ext cx="3017520" cy="457200"/>
+          </a:xfrm>
+          <a:prstGeom prst="rect">
+            <a:avLst/>
+          </a:prstGeom>
+          <a:noFill/>
+        </p:spPr>
+        <p:txBody>
+          <a:bodyPr wrap="square" lIns="0" rIns="0" tIns="0" bIns="0">
+            <a:spAutoFit/>
+          </a:bodyPr>
+          <a:lstStyle/>
+          <a:p>
+            <a:r>
+              <a:rPr sz="1600" b="1">
                 <a:solidFill>
                   <a:srgbClr val="2F3C7E"/>
                 </a:solidFill>
                 <a:latin typeface="Georgia"/>
               </a:rPr>
-              <a:t>Truth &amp; Scandal</a:t>
+              <a:t>Downtown Development</a:t>
             </a:r>
           </a:p>
         </p:txBody>
@@ -13878,28 +14018,28 @@
         </p:nvSpPr>
         <p:spPr>
           <a:xfrm>
-            <a:off x="838047" y="3154679"/>
-            <a:ext cx="4754880" cy="365760"/>
-          </a:xfrm>
-          <a:prstGeom prst="rect">
-            <a:avLst/>
-          </a:prstGeom>
-          <a:noFill/>
-        </p:spPr>
-        <p:txBody>
-          <a:bodyPr wrap="square" lIns="0" rIns="0" tIns="0" bIns="0">
-            <a:spAutoFit/>
-          </a:bodyPr>
-          <a:lstStyle/>
-          <a:p>
-            <a:r>
-              <a:rPr sz="1100" b="1">
+            <a:off x="838047" y="3017520"/>
+            <a:ext cx="3017520" cy="365760"/>
+          </a:xfrm>
+          <a:prstGeom prst="rect">
+            <a:avLst/>
+          </a:prstGeom>
+          <a:noFill/>
+        </p:spPr>
+        <p:txBody>
+          <a:bodyPr wrap="square" lIns="0" rIns="0" tIns="0" bIns="0">
+            <a:spAutoFit/>
+          </a:bodyPr>
+          <a:lstStyle/>
+          <a:p>
+            <a:r>
+              <a:rPr sz="2600" b="1">
                 <a:solidFill>
                   <a:srgbClr val="141833"/>
                 </a:solidFill>
-                <a:latin typeface="Helvetica Neue"/>
-              </a:rPr>
-              <a:t>2,487 avg views/post   ·   36 posts   ·   89,526 total</a:t>
+                <a:latin typeface="Georgia"/>
+              </a:rPr>
+              <a:t>51,710 views</a:t>
             </a:r>
           </a:p>
         </p:txBody>
@@ -13912,8 +14052,42 @@
         </p:nvSpPr>
         <p:spPr>
           <a:xfrm>
-            <a:off x="838047" y="3611879"/>
-            <a:ext cx="4754880" cy="320040"/>
+            <a:off x="838047" y="3383280"/>
+            <a:ext cx="3017520" cy="274320"/>
+          </a:xfrm>
+          <a:prstGeom prst="rect">
+            <a:avLst/>
+          </a:prstGeom>
+          <a:noFill/>
+        </p:spPr>
+        <p:txBody>
+          <a:bodyPr wrap="square" lIns="0" rIns="0" tIns="0" bIns="0">
+            <a:spAutoFit/>
+          </a:bodyPr>
+          <a:lstStyle/>
+          <a:p>
+            <a:r>
+              <a:rPr sz="1000" b="0">
+                <a:solidFill>
+                  <a:srgbClr val="6B7082"/>
+                </a:solidFill>
+                <a:latin typeface="Helvetica Neue"/>
+              </a:rPr>
+              <a:t>20 posts · 2,586 avg views/post</a:t>
+            </a:r>
+          </a:p>
+        </p:txBody>
+      </p:sp>
+      <p:sp>
+        <p:nvSpPr>
+          <p:cNvPr id="12" name="TextBox 11"/>
+          <p:cNvSpPr txBox="1"/>
+          <p:nvPr/>
+        </p:nvSpPr>
+        <p:spPr>
+          <a:xfrm>
+            <a:off x="838047" y="3840479"/>
+            <a:ext cx="3017520" cy="274320"/>
           </a:xfrm>
           <a:prstGeom prst="rect">
             <a:avLst/>
@@ -13929,25 +14103,25 @@
             <a:r>
               <a:rPr sz="900" b="1">
                 <a:solidFill>
-                  <a:srgbClr val="990011"/>
-                </a:solidFill>
-                <a:latin typeface="Helvetica Neue"/>
-              </a:rPr>
-              <a:t>TOP POST</a:t>
-            </a:r>
-          </a:p>
-        </p:txBody>
-      </p:sp>
-      <p:sp>
-        <p:nvSpPr>
-          <p:cNvPr id="12" name="TextBox 11"/>
-          <p:cNvSpPr txBox="1"/>
-          <p:nvPr/>
-        </p:nvSpPr>
-        <p:spPr>
-          <a:xfrm>
-            <a:off x="838047" y="3931920"/>
-            <a:ext cx="4754880" cy="548640"/>
+                  <a:srgbClr val="C9A227"/>
+                </a:solidFill>
+                <a:latin typeface="Helvetica Neue"/>
+              </a:rPr>
+              <a:t>AUDIENCE</a:t>
+            </a:r>
+          </a:p>
+        </p:txBody>
+      </p:sp>
+      <p:sp>
+        <p:nvSpPr>
+          <p:cNvPr id="13" name="TextBox 12"/>
+          <p:cNvSpPr txBox="1"/>
+          <p:nvPr/>
+        </p:nvSpPr>
+        <p:spPr>
+          <a:xfrm>
+            <a:off x="838047" y="4069079"/>
+            <a:ext cx="3017520" cy="457200"/>
           </a:xfrm>
           <a:prstGeom prst="rect">
             <a:avLst/>
@@ -13967,21 +14141,55 @@
                 </a:solidFill>
                 <a:latin typeface="Helvetica Neue"/>
               </a:rPr>
-              <a:t>9,839 views — Grew up in Huntington Park and still own property there. The city's o.</a:t>
-            </a:r>
-          </a:p>
-        </p:txBody>
-      </p:sp>
-      <p:sp>
-        <p:nvSpPr>
-          <p:cNvPr id="13" name="TextBox 12"/>
-          <p:cNvSpPr txBox="1"/>
-          <p:nvPr/>
-        </p:nvSpPr>
-        <p:spPr>
-          <a:xfrm>
-            <a:off x="838047" y="4663440"/>
-            <a:ext cx="4754880" cy="1005840"/>
+              <a:t>Local civic pride · Downey residents 30+</a:t>
+            </a:r>
+          </a:p>
+        </p:txBody>
+      </p:sp>
+      <p:sp>
+        <p:nvSpPr>
+          <p:cNvPr id="14" name="TextBox 13"/>
+          <p:cNvSpPr txBox="1"/>
+          <p:nvPr/>
+        </p:nvSpPr>
+        <p:spPr>
+          <a:xfrm>
+            <a:off x="838047" y="4617720"/>
+            <a:ext cx="3017520" cy="274320"/>
+          </a:xfrm>
+          <a:prstGeom prst="rect">
+            <a:avLst/>
+          </a:prstGeom>
+          <a:noFill/>
+        </p:spPr>
+        <p:txBody>
+          <a:bodyPr wrap="square" lIns="0" rIns="0" tIns="0" bIns="0">
+            <a:spAutoFit/>
+          </a:bodyPr>
+          <a:lstStyle/>
+          <a:p>
+            <a:r>
+              <a:rPr sz="900" b="1">
+                <a:solidFill>
+                  <a:srgbClr val="C9A227"/>
+                </a:solidFill>
+                <a:latin typeface="Helvetica Neue"/>
+              </a:rPr>
+              <a:t>WHY NOW</a:t>
+            </a:r>
+          </a:p>
+        </p:txBody>
+      </p:sp>
+      <p:sp>
+        <p:nvSpPr>
+          <p:cNvPr id="15" name="TextBox 14"/>
+          <p:cNvSpPr txBox="1"/>
+          <p:nvPr/>
+        </p:nvSpPr>
+        <p:spPr>
+          <a:xfrm>
+            <a:off x="838047" y="4846320"/>
+            <a:ext cx="3017520" cy="640080"/>
           </a:xfrm>
           <a:prstGeom prst="rect">
             <a:avLst/>
@@ -13997,25 +14205,25 @@
             <a:r>
               <a:rPr sz="1000" b="0">
                 <a:solidFill>
-                  <a:srgbClr val="6B7082"/>
-                </a:solidFill>
-                <a:latin typeface="Helvetica Neue"/>
-              </a:rPr>
-              <a:t>Every scandal post averages 3-5× the reach of positive posts. This is the platform algorithm, not Downey. Outrage drives comments, comments drive reach, reach drives new followers.</a:t>
-            </a:r>
-          </a:p>
-        </p:txBody>
-      </p:sp>
-      <p:sp>
-        <p:nvSpPr>
-          <p:cNvPr id="14" name="Rectangle 13"/>
+                  <a:srgbClr val="141833"/>
+                </a:solidFill>
+                <a:latin typeface="Helvetica Neue"/>
+              </a:rPr>
+              <a:t>Round One + Fun Box + Stonewood expansion = concrete stories in-hand. Downey residents share these hard.</a:t>
+            </a:r>
+          </a:p>
+        </p:txBody>
+      </p:sp>
+      <p:sp>
+        <p:nvSpPr>
+          <p:cNvPr id="16" name="Rectangle 15"/>
           <p:cNvSpPr/>
           <p:nvPr/>
         </p:nvSpPr>
         <p:spPr>
           <a:xfrm>
-            <a:off x="6324447" y="2103120"/>
-            <a:ext cx="5303520" cy="3657600"/>
+            <a:off x="8061807" y="1965960"/>
+            <a:ext cx="3566160" cy="3566160"/>
           </a:xfrm>
           <a:prstGeom prst="rect">
             <a:avLst/>
@@ -14052,20 +14260,20 @@
       </p:sp>
       <p:sp>
         <p:nvSpPr>
-          <p:cNvPr id="15" name="Rectangle 14"/>
+          <p:cNvPr id="17" name="Rectangle 16"/>
           <p:cNvSpPr/>
           <p:nvPr/>
         </p:nvSpPr>
         <p:spPr>
           <a:xfrm>
-            <a:off x="6324447" y="2103120"/>
-            <a:ext cx="91440" cy="3657600"/>
+            <a:off x="8061807" y="1965960"/>
+            <a:ext cx="91440" cy="3566160"/>
           </a:xfrm>
           <a:prstGeom prst="rect">
             <a:avLst/>
           </a:prstGeom>
           <a:solidFill>
-            <a:srgbClr val="2E86AB"/>
+            <a:srgbClr val="C9A227"/>
           </a:solidFill>
           <a:ln>
             <a:noFill/>
@@ -14096,116 +14304,150 @@
       </p:sp>
       <p:sp>
         <p:nvSpPr>
-          <p:cNvPr id="16" name="TextBox 15"/>
-          <p:cNvSpPr txBox="1"/>
-          <p:nvPr/>
-        </p:nvSpPr>
-        <p:spPr>
-          <a:xfrm>
-            <a:off x="6598767" y="2286000"/>
-            <a:ext cx="4754880" cy="365760"/>
-          </a:xfrm>
-          <a:prstGeom prst="rect">
-            <a:avLst/>
-          </a:prstGeom>
-          <a:noFill/>
-        </p:spPr>
-        <p:txBody>
-          <a:bodyPr wrap="square" lIns="0" rIns="0" tIns="0" bIns="0">
-            <a:spAutoFit/>
-          </a:bodyPr>
-          <a:lstStyle/>
-          <a:p>
-            <a:r>
-              <a:rPr sz="1100" b="1">
-                <a:solidFill>
-                  <a:srgbClr val="2E86AB"/>
-                </a:solidFill>
-                <a:latin typeface="Helvetica Neue"/>
-              </a:rPr>
-              <a:t>WHAT EARNS LOYALTY</a:t>
-            </a:r>
-          </a:p>
-        </p:txBody>
-      </p:sp>
-      <p:sp>
-        <p:nvSpPr>
-          <p:cNvPr id="17" name="TextBox 16"/>
-          <p:cNvSpPr txBox="1"/>
-          <p:nvPr/>
-        </p:nvSpPr>
-        <p:spPr>
-          <a:xfrm>
-            <a:off x="6598767" y="2651760"/>
-            <a:ext cx="4754880" cy="457200"/>
-          </a:xfrm>
-          <a:prstGeom prst="rect">
-            <a:avLst/>
-          </a:prstGeom>
-          <a:noFill/>
-        </p:spPr>
-        <p:txBody>
-          <a:bodyPr wrap="square" lIns="0" rIns="0" tIns="0" bIns="0">
-            <a:spAutoFit/>
-          </a:bodyPr>
-          <a:lstStyle/>
-          <a:p>
-            <a:r>
-              <a:rPr sz="2000" b="1">
+          <p:cNvPr id="18" name="TextBox 17"/>
+          <p:cNvSpPr txBox="1"/>
+          <p:nvPr/>
+        </p:nvSpPr>
+        <p:spPr>
+          <a:xfrm>
+            <a:off x="8336127" y="2194560"/>
+            <a:ext cx="3017520" cy="274320"/>
+          </a:xfrm>
+          <a:prstGeom prst="rect">
+            <a:avLst/>
+          </a:prstGeom>
+          <a:noFill/>
+        </p:spPr>
+        <p:txBody>
+          <a:bodyPr wrap="square" lIns="0" rIns="0" tIns="0" bIns="0">
+            <a:spAutoFit/>
+          </a:bodyPr>
+          <a:lstStyle/>
+          <a:p>
+            <a:r>
+              <a:rPr sz="1000" b="1">
+                <a:solidFill>
+                  <a:srgbClr val="C9A227"/>
+                </a:solidFill>
+                <a:latin typeface="Helvetica Neue"/>
+              </a:rPr>
+              <a:t>LEAN IN</a:t>
+            </a:r>
+          </a:p>
+        </p:txBody>
+      </p:sp>
+      <p:sp>
+        <p:nvSpPr>
+          <p:cNvPr id="19" name="TextBox 18"/>
+          <p:cNvSpPr txBox="1"/>
+          <p:nvPr/>
+        </p:nvSpPr>
+        <p:spPr>
+          <a:xfrm>
+            <a:off x="8336127" y="2468880"/>
+            <a:ext cx="3017520" cy="457200"/>
+          </a:xfrm>
+          <a:prstGeom prst="rect">
+            <a:avLst/>
+          </a:prstGeom>
+          <a:noFill/>
+        </p:spPr>
+        <p:txBody>
+          <a:bodyPr wrap="square" lIns="0" rIns="0" tIns="0" bIns="0">
+            <a:spAutoFit/>
+          </a:bodyPr>
+          <a:lstStyle/>
+          <a:p>
+            <a:r>
+              <a:rPr sz="1600" b="1">
                 <a:solidFill>
                   <a:srgbClr val="2F3C7E"/>
                 </a:solidFill>
                 <a:latin typeface="Georgia"/>
               </a:rPr>
-              <a:t>Everything else</a:t>
-            </a:r>
-          </a:p>
-        </p:txBody>
-      </p:sp>
-      <p:sp>
-        <p:nvSpPr>
-          <p:cNvPr id="18" name="TextBox 17"/>
-          <p:cNvSpPr txBox="1"/>
-          <p:nvPr/>
-        </p:nvSpPr>
-        <p:spPr>
-          <a:xfrm>
-            <a:off x="6598767" y="3154679"/>
-            <a:ext cx="4754880" cy="365760"/>
-          </a:xfrm>
-          <a:prstGeom prst="rect">
-            <a:avLst/>
-          </a:prstGeom>
-          <a:noFill/>
-        </p:spPr>
-        <p:txBody>
-          <a:bodyPr wrap="square" lIns="0" rIns="0" tIns="0" bIns="0">
-            <a:spAutoFit/>
-          </a:bodyPr>
-          <a:lstStyle/>
-          <a:p>
-            <a:r>
-              <a:rPr sz="1100" b="1">
+              <a:t>Military Service</a:t>
+            </a:r>
+          </a:p>
+        </p:txBody>
+      </p:sp>
+      <p:sp>
+        <p:nvSpPr>
+          <p:cNvPr id="20" name="TextBox 19"/>
+          <p:cNvSpPr txBox="1"/>
+          <p:nvPr/>
+        </p:nvSpPr>
+        <p:spPr>
+          <a:xfrm>
+            <a:off x="8336127" y="3017520"/>
+            <a:ext cx="3017520" cy="365760"/>
+          </a:xfrm>
+          <a:prstGeom prst="rect">
+            <a:avLst/>
+          </a:prstGeom>
+          <a:noFill/>
+        </p:spPr>
+        <p:txBody>
+          <a:bodyPr wrap="square" lIns="0" rIns="0" tIns="0" bIns="0">
+            <a:spAutoFit/>
+          </a:bodyPr>
+          <a:lstStyle/>
+          <a:p>
+            <a:r>
+              <a:rPr sz="2600" b="1">
                 <a:solidFill>
                   <a:srgbClr val="141833"/>
                 </a:solidFill>
-                <a:latin typeface="Helvetica Neue"/>
-              </a:rPr>
-              <a:t>1,306 avg views/post   ·   214 posts   ·   279,509 total</a:t>
-            </a:r>
-          </a:p>
-        </p:txBody>
-      </p:sp>
-      <p:sp>
-        <p:nvSpPr>
-          <p:cNvPr id="19" name="TextBox 18"/>
-          <p:cNvSpPr txBox="1"/>
-          <p:nvPr/>
-        </p:nvSpPr>
-        <p:spPr>
-          <a:xfrm>
-            <a:off x="6598767" y="3611879"/>
-            <a:ext cx="4754880" cy="320040"/>
+                <a:latin typeface="Georgia"/>
+              </a:rPr>
+              <a:t>286,423 views</a:t>
+            </a:r>
+          </a:p>
+        </p:txBody>
+      </p:sp>
+      <p:sp>
+        <p:nvSpPr>
+          <p:cNvPr id="21" name="TextBox 20"/>
+          <p:cNvSpPr txBox="1"/>
+          <p:nvPr/>
+        </p:nvSpPr>
+        <p:spPr>
+          <a:xfrm>
+            <a:off x="8336127" y="3383280"/>
+            <a:ext cx="3017520" cy="274320"/>
+          </a:xfrm>
+          <a:prstGeom prst="rect">
+            <a:avLst/>
+          </a:prstGeom>
+          <a:noFill/>
+        </p:spPr>
+        <p:txBody>
+          <a:bodyPr wrap="square" lIns="0" rIns="0" tIns="0" bIns="0">
+            <a:spAutoFit/>
+          </a:bodyPr>
+          <a:lstStyle/>
+          <a:p>
+            <a:r>
+              <a:rPr sz="1000" b="0">
+                <a:solidFill>
+                  <a:srgbClr val="6B7082"/>
+                </a:solidFill>
+                <a:latin typeface="Helvetica Neue"/>
+              </a:rPr>
+              <a:t>69 posts · 4,151 avg views/post</a:t>
+            </a:r>
+          </a:p>
+        </p:txBody>
+      </p:sp>
+      <p:sp>
+        <p:nvSpPr>
+          <p:cNvPr id="22" name="TextBox 21"/>
+          <p:cNvSpPr txBox="1"/>
+          <p:nvPr/>
+        </p:nvSpPr>
+        <p:spPr>
+          <a:xfrm>
+            <a:off x="8336127" y="3840479"/>
+            <a:ext cx="3017520" cy="274320"/>
           </a:xfrm>
           <a:prstGeom prst="rect">
             <a:avLst/>
@@ -14221,25 +14463,25 @@
             <a:r>
               <a:rPr sz="900" b="1">
                 <a:solidFill>
-                  <a:srgbClr val="2E86AB"/>
-                </a:solidFill>
-                <a:latin typeface="Helvetica Neue"/>
-              </a:rPr>
-              <a:t>TOP POST</a:t>
-            </a:r>
-          </a:p>
-        </p:txBody>
-      </p:sp>
-      <p:sp>
-        <p:nvSpPr>
-          <p:cNvPr id="20" name="TextBox 19"/>
-          <p:cNvSpPr txBox="1"/>
-          <p:nvPr/>
-        </p:nvSpPr>
-        <p:spPr>
-          <a:xfrm>
-            <a:off x="6598767" y="3931920"/>
-            <a:ext cx="4754880" cy="548640"/>
+                  <a:srgbClr val="C9A227"/>
+                </a:solidFill>
+                <a:latin typeface="Helvetica Neue"/>
+              </a:rPr>
+              <a:t>AUDIENCE</a:t>
+            </a:r>
+          </a:p>
+        </p:txBody>
+      </p:sp>
+      <p:sp>
+        <p:nvSpPr>
+          <p:cNvPr id="23" name="TextBox 22"/>
+          <p:cNvSpPr txBox="1"/>
+          <p:nvPr/>
+        </p:nvSpPr>
+        <p:spPr>
+          <a:xfrm>
+            <a:off x="8336127" y="4069079"/>
+            <a:ext cx="3017520" cy="457200"/>
           </a:xfrm>
           <a:prstGeom prst="rect">
             <a:avLst/>
@@ -14259,21 +14501,55 @@
                 </a:solidFill>
                 <a:latin typeface="Helvetica Neue"/>
               </a:rPr>
-              <a:t>29,200 views — Get ready! Round One is taking over the old Sears at Stonewood Mall. T</a:t>
-            </a:r>
-          </a:p>
-        </p:txBody>
-      </p:sp>
-      <p:sp>
-        <p:nvSpPr>
-          <p:cNvPr id="21" name="TextBox 20"/>
-          <p:cNvSpPr txBox="1"/>
-          <p:nvPr/>
-        </p:nvSpPr>
-        <p:spPr>
-          <a:xfrm>
-            <a:off x="6598767" y="4663440"/>
-            <a:ext cx="4754880" cy="1005840"/>
+              <a:t>Traditional / patriotic · Middle (40-55) + Older (55+), veterans + families</a:t>
+            </a:r>
+          </a:p>
+        </p:txBody>
+      </p:sp>
+      <p:sp>
+        <p:nvSpPr>
+          <p:cNvPr id="24" name="TextBox 23"/>
+          <p:cNvSpPr txBox="1"/>
+          <p:nvPr/>
+        </p:nvSpPr>
+        <p:spPr>
+          <a:xfrm>
+            <a:off x="8336127" y="4617720"/>
+            <a:ext cx="3017520" cy="274320"/>
+          </a:xfrm>
+          <a:prstGeom prst="rect">
+            <a:avLst/>
+          </a:prstGeom>
+          <a:noFill/>
+        </p:spPr>
+        <p:txBody>
+          <a:bodyPr wrap="square" lIns="0" rIns="0" tIns="0" bIns="0">
+            <a:spAutoFit/>
+          </a:bodyPr>
+          <a:lstStyle/>
+          <a:p>
+            <a:r>
+              <a:rPr sz="900" b="1">
+                <a:solidFill>
+                  <a:srgbClr val="C9A227"/>
+                </a:solidFill>
+                <a:latin typeface="Helvetica Neue"/>
+              </a:rPr>
+              <a:t>WHY NOW</a:t>
+            </a:r>
+          </a:p>
+        </p:txBody>
+      </p:sp>
+      <p:sp>
+        <p:nvSpPr>
+          <p:cNvPr id="25" name="TextBox 24"/>
+          <p:cNvSpPr txBox="1"/>
+          <p:nvPr/>
+        </p:nvSpPr>
+        <p:spPr>
+          <a:xfrm>
+            <a:off x="8336127" y="4846320"/>
+            <a:ext cx="3017520" cy="640080"/>
           </a:xfrm>
           <a:prstGeom prst="rect">
             <a:avLst/>
@@ -14289,25 +14565,25 @@
             <a:r>
               <a:rPr sz="1000" b="0">
                 <a:solidFill>
-                  <a:srgbClr val="6B7082"/>
-                </a:solidFill>
-                <a:latin typeface="Helvetica Neue"/>
-              </a:rPr>
-              <a:t>Positive posts get fewer views per post — but they turn viewers into subscribers. Loyalty compounds. It's slower, but it's the audience the sponsor's brand actually attaches to.</a:t>
-            </a:r>
-          </a:p>
-        </p:txBody>
-      </p:sp>
-      <p:sp>
-        <p:nvSpPr>
-          <p:cNvPr id="22" name="Rectangle 21"/>
+                  <a:srgbClr val="141833"/>
+                </a:solidFill>
+                <a:latin typeface="Helvetica Neue"/>
+              </a:rPr>
+              <a:t>13 posts already at 2,930 avg — punches above weight. Underserved audience with high emotional pull.</a:t>
+            </a:r>
+          </a:p>
+        </p:txBody>
+      </p:sp>
+      <p:sp>
+        <p:nvSpPr>
+          <p:cNvPr id="26" name="Rectangle 25"/>
           <p:cNvSpPr/>
           <p:nvPr/>
         </p:nvSpPr>
         <p:spPr>
           <a:xfrm>
-            <a:off x="731520" y="5989320"/>
-            <a:ext cx="10698480" cy="548640"/>
+            <a:off x="731520" y="5806440"/>
+            <a:ext cx="10698480" cy="777240"/>
           </a:xfrm>
           <a:prstGeom prst="rect">
             <a:avLst/>
@@ -14344,34 +14620,68 @@
       </p:sp>
       <p:sp>
         <p:nvSpPr>
-          <p:cNvPr id="23" name="TextBox 22"/>
-          <p:cNvSpPr txBox="1"/>
-          <p:nvPr/>
-        </p:nvSpPr>
-        <p:spPr>
-          <a:xfrm>
-            <a:off x="914400" y="6126480"/>
-            <a:ext cx="10515600" cy="365760"/>
-          </a:xfrm>
-          <a:prstGeom prst="rect">
-            <a:avLst/>
-          </a:prstGeom>
-          <a:noFill/>
-        </p:spPr>
-        <p:txBody>
-          <a:bodyPr wrap="square" lIns="0" rIns="0" tIns="0" bIns="0">
-            <a:spAutoFit/>
-          </a:bodyPr>
-          <a:lstStyle/>
-          <a:p>
-            <a:r>
-              <a:rPr sz="1300" b="1">
+          <p:cNvPr id="27" name="TextBox 26"/>
+          <p:cNvSpPr txBox="1"/>
+          <p:nvPr/>
+        </p:nvSpPr>
+        <p:spPr>
+          <a:xfrm>
+            <a:off x="914400" y="5897880"/>
+            <a:ext cx="7315200" cy="274320"/>
+          </a:xfrm>
+          <a:prstGeom prst="rect">
+            <a:avLst/>
+          </a:prstGeom>
+          <a:noFill/>
+        </p:spPr>
+        <p:txBody>
+          <a:bodyPr wrap="square" lIns="0" rIns="0" tIns="0" bIns="0">
+            <a:spAutoFit/>
+          </a:bodyPr>
+          <a:lstStyle/>
+          <a:p>
+            <a:r>
+              <a:rPr sz="1000" b="1">
+                <a:solidFill>
+                  <a:srgbClr val="C9A227"/>
+                </a:solidFill>
+                <a:latin typeface="Helvetica Neue"/>
+              </a:rPr>
+              <a:t>THE COMPOUNDING BET</a:t>
+            </a:r>
+          </a:p>
+        </p:txBody>
+      </p:sp>
+      <p:sp>
+        <p:nvSpPr>
+          <p:cNvPr id="28" name="TextBox 27"/>
+          <p:cNvSpPr txBox="1"/>
+          <p:nvPr/>
+        </p:nvSpPr>
+        <p:spPr>
+          <a:xfrm>
+            <a:off x="914400" y="6172200"/>
+            <a:ext cx="10515600" cy="411480"/>
+          </a:xfrm>
+          <a:prstGeom prst="rect">
+            <a:avLst/>
+          </a:prstGeom>
+          <a:noFill/>
+        </p:spPr>
+        <p:txBody>
+          <a:bodyPr wrap="square" lIns="0" rIns="0" tIns="0" bIns="0">
+            <a:spAutoFit/>
+          </a:bodyPr>
+          <a:lstStyle/>
+          <a:p>
+            <a:r>
+              <a:rPr sz="1100" b="1">
                 <a:solidFill>
                   <a:srgbClr val="FCF6F5"/>
                 </a:solidFill>
                 <a:latin typeface="Helvetica Neue"/>
               </a:rPr>
-              <a:t>Both matter. The real question isn't which lane wins — it's the RATIO between them.</a:t>
+              <a:t>These three lanes serve different audiences (18-40 foodie · 30+ residents · 40+ veterans). Investing in all three widens the audience without diluting any one lane.</a:t>
             </a:r>
           </a:p>
         </p:txBody>
@@ -14467,6 +14777,1702 @@
                 </a:solidFill>
                 <a:latin typeface="Helvetica Neue"/>
               </a:rPr>
+              <a:t>STRATEGIC CONTEXT</a:t>
+            </a:r>
+          </a:p>
+        </p:txBody>
+      </p:sp>
+      <p:sp>
+        <p:nvSpPr>
+          <p:cNvPr id="4" name="TextBox 3"/>
+          <p:cNvSpPr txBox="1"/>
+          <p:nvPr/>
+        </p:nvSpPr>
+        <p:spPr>
+          <a:xfrm>
+            <a:off x="731520" y="822960"/>
+            <a:ext cx="10698480" cy="822960"/>
+          </a:xfrm>
+          <a:prstGeom prst="rect">
+            <a:avLst/>
+          </a:prstGeom>
+          <a:noFill/>
+        </p:spPr>
+        <p:txBody>
+          <a:bodyPr wrap="square" lIns="0" rIns="0" tIns="0" bIns="0">
+            <a:spAutoFit/>
+          </a:bodyPr>
+          <a:lstStyle/>
+          <a:p>
+            <a:r>
+              <a:rPr sz="3000" b="1">
+                <a:solidFill>
+                  <a:srgbClr val="2F3C7E"/>
+                </a:solidFill>
+                <a:latin typeface="Georgia"/>
+              </a:rPr>
+              <a:t>Why we still cover the lower-view lanes</a:t>
+            </a:r>
+          </a:p>
+        </p:txBody>
+      </p:sp>
+      <p:sp>
+        <p:nvSpPr>
+          <p:cNvPr id="5" name="TextBox 4"/>
+          <p:cNvSpPr txBox="1"/>
+          <p:nvPr/>
+        </p:nvSpPr>
+        <p:spPr>
+          <a:xfrm>
+            <a:off x="731520" y="1600200"/>
+            <a:ext cx="10698480" cy="365760"/>
+          </a:xfrm>
+          <a:prstGeom prst="rect">
+            <a:avLst/>
+          </a:prstGeom>
+          <a:noFill/>
+        </p:spPr>
+        <p:txBody>
+          <a:bodyPr wrap="square" lIns="0" rIns="0" tIns="0" bIns="0">
+            <a:spAutoFit/>
+          </a:bodyPr>
+          <a:lstStyle/>
+          <a:p>
+            <a:r>
+              <a:rPr sz="1200" b="0">
+                <a:solidFill>
+                  <a:srgbClr val="6B7082"/>
+                </a:solidFill>
+                <a:latin typeface="Helvetica Neue"/>
+              </a:rPr>
+              <a:t>Not every category needs to top the leaderboard. Here's why the quieter buckets earn their spend.</a:t>
+            </a:r>
+          </a:p>
+        </p:txBody>
+      </p:sp>
+      <p:sp>
+        <p:nvSpPr>
+          <p:cNvPr id="6" name="Rectangle 5"/>
+          <p:cNvSpPr/>
+          <p:nvPr/>
+        </p:nvSpPr>
+        <p:spPr>
+          <a:xfrm>
+            <a:off x="563727" y="2194560"/>
+            <a:ext cx="3566160" cy="3291840"/>
+          </a:xfrm>
+          <a:prstGeom prst="rect">
+            <a:avLst/>
+          </a:prstGeom>
+          <a:solidFill>
+            <a:srgbClr val="FFFFFF"/>
+          </a:solidFill>
+          <a:ln>
+            <a:noFill/>
+          </a:ln>
+          <a:effectLst/>
+        </p:spPr>
+        <p:style>
+          <a:lnRef idx="1">
+            <a:schemeClr val="accent1"/>
+          </a:lnRef>
+          <a:fillRef idx="3">
+            <a:schemeClr val="accent1"/>
+          </a:fillRef>
+          <a:effectRef idx="2">
+            <a:schemeClr val="accent1"/>
+          </a:effectRef>
+          <a:fontRef idx="minor">
+            <a:schemeClr val="lt1"/>
+          </a:fontRef>
+        </p:style>
+        <p:txBody>
+          <a:bodyPr rtlCol="0" anchor="ctr"/>
+          <a:lstStyle/>
+          <a:p>
+            <a:pPr algn="ctr"/>
+          </a:p>
+        </p:txBody>
+      </p:sp>
+      <p:sp>
+        <p:nvSpPr>
+          <p:cNvPr id="7" name="Rectangle 6"/>
+          <p:cNvSpPr/>
+          <p:nvPr/>
+        </p:nvSpPr>
+        <p:spPr>
+          <a:xfrm>
+            <a:off x="563727" y="2194560"/>
+            <a:ext cx="91440" cy="3291840"/>
+          </a:xfrm>
+          <a:prstGeom prst="rect">
+            <a:avLst/>
+          </a:prstGeom>
+          <a:solidFill>
+            <a:srgbClr val="1B7A43"/>
+          </a:solidFill>
+          <a:ln>
+            <a:noFill/>
+          </a:ln>
+          <a:effectLst/>
+        </p:spPr>
+        <p:style>
+          <a:lnRef idx="1">
+            <a:schemeClr val="accent1"/>
+          </a:lnRef>
+          <a:fillRef idx="3">
+            <a:schemeClr val="accent1"/>
+          </a:fillRef>
+          <a:effectRef idx="2">
+            <a:schemeClr val="accent1"/>
+          </a:effectRef>
+          <a:fontRef idx="minor">
+            <a:schemeClr val="lt1"/>
+          </a:fontRef>
+        </p:style>
+        <p:txBody>
+          <a:bodyPr rtlCol="0" anchor="ctr"/>
+          <a:lstStyle/>
+          <a:p>
+            <a:pPr algn="ctr"/>
+          </a:p>
+        </p:txBody>
+      </p:sp>
+      <p:sp>
+        <p:nvSpPr>
+          <p:cNvPr id="8" name="TextBox 7"/>
+          <p:cNvSpPr txBox="1"/>
+          <p:nvPr/>
+        </p:nvSpPr>
+        <p:spPr>
+          <a:xfrm>
+            <a:off x="838047" y="2423160"/>
+            <a:ext cx="3017520" cy="365760"/>
+          </a:xfrm>
+          <a:prstGeom prst="rect">
+            <a:avLst/>
+          </a:prstGeom>
+          <a:noFill/>
+        </p:spPr>
+        <p:txBody>
+          <a:bodyPr wrap="square" lIns="0" rIns="0" tIns="0" bIns="0">
+            <a:spAutoFit/>
+          </a:bodyPr>
+          <a:lstStyle/>
+          <a:p>
+            <a:r>
+              <a:rPr sz="1000" b="1">
+                <a:solidFill>
+                  <a:srgbClr val="1B7A43"/>
+                </a:solidFill>
+                <a:latin typeface="Helvetica Neue"/>
+              </a:rPr>
+              <a:t>REASON 1</a:t>
+            </a:r>
+          </a:p>
+        </p:txBody>
+      </p:sp>
+      <p:sp>
+        <p:nvSpPr>
+          <p:cNvPr id="9" name="TextBox 8"/>
+          <p:cNvSpPr txBox="1"/>
+          <p:nvPr/>
+        </p:nvSpPr>
+        <p:spPr>
+          <a:xfrm>
+            <a:off x="838047" y="2743200"/>
+            <a:ext cx="3017520" cy="457200"/>
+          </a:xfrm>
+          <a:prstGeom prst="rect">
+            <a:avLst/>
+          </a:prstGeom>
+          <a:noFill/>
+        </p:spPr>
+        <p:txBody>
+          <a:bodyPr wrap="square" lIns="0" rIns="0" tIns="0" bIns="0">
+            <a:spAutoFit/>
+          </a:bodyPr>
+          <a:lstStyle/>
+          <a:p>
+            <a:r>
+              <a:rPr sz="1400" b="1">
+                <a:solidFill>
+                  <a:srgbClr val="2F3C7E"/>
+                </a:solidFill>
+                <a:latin typeface="Georgia"/>
+              </a:rPr>
+              <a:t>NEW AUDIENCE ACQUISITION</a:t>
+            </a:r>
+          </a:p>
+        </p:txBody>
+      </p:sp>
+      <p:sp>
+        <p:nvSpPr>
+          <p:cNvPr id="10" name="TextBox 9"/>
+          <p:cNvSpPr txBox="1"/>
+          <p:nvPr/>
+        </p:nvSpPr>
+        <p:spPr>
+          <a:xfrm>
+            <a:off x="838047" y="3291839"/>
+            <a:ext cx="3017520" cy="548640"/>
+          </a:xfrm>
+          <a:prstGeom prst="rect">
+            <a:avLst/>
+          </a:prstGeom>
+          <a:noFill/>
+        </p:spPr>
+        <p:txBody>
+          <a:bodyPr wrap="square" lIns="0" rIns="0" tIns="0" bIns="0">
+            <a:spAutoFit/>
+          </a:bodyPr>
+          <a:lstStyle/>
+          <a:p>
+            <a:r>
+              <a:rPr sz="1300" b="1">
+                <a:solidFill>
+                  <a:srgbClr val="141833"/>
+                </a:solidFill>
+                <a:latin typeface="Helvetica Neue"/>
+              </a:rPr>
+              <a:t>Scandal brings viewers. Positive content KEEPS them.</a:t>
+            </a:r>
+          </a:p>
+        </p:txBody>
+      </p:sp>
+      <p:sp>
+        <p:nvSpPr>
+          <p:cNvPr id="11" name="TextBox 10"/>
+          <p:cNvSpPr txBox="1"/>
+          <p:nvPr/>
+        </p:nvSpPr>
+        <p:spPr>
+          <a:xfrm>
+            <a:off x="838047" y="3931920"/>
+            <a:ext cx="3017520" cy="1463040"/>
+          </a:xfrm>
+          <a:prstGeom prst="rect">
+            <a:avLst/>
+          </a:prstGeom>
+          <a:noFill/>
+        </p:spPr>
+        <p:txBody>
+          <a:bodyPr wrap="square" lIns="0" rIns="0" tIns="0" bIns="0">
+            <a:spAutoFit/>
+          </a:bodyPr>
+          <a:lstStyle/>
+          <a:p>
+            <a:r>
+              <a:rPr sz="1000" b="0">
+                <a:solidFill>
+                  <a:srgbClr val="6B7082"/>
+                </a:solidFill>
+                <a:latin typeface="Helvetica Neue"/>
+              </a:rPr>
+              <a:t>Without community coverage, viewers churn after 3-4 controversy spikes. They came for drama, they leave because they don't feel connection to Downey itself.</a:t>
+            </a:r>
+          </a:p>
+        </p:txBody>
+      </p:sp>
+      <p:sp>
+        <p:nvSpPr>
+          <p:cNvPr id="12" name="Rectangle 11"/>
+          <p:cNvSpPr/>
+          <p:nvPr/>
+        </p:nvSpPr>
+        <p:spPr>
+          <a:xfrm>
+            <a:off x="4312767" y="2194560"/>
+            <a:ext cx="3566160" cy="3291840"/>
+          </a:xfrm>
+          <a:prstGeom prst="rect">
+            <a:avLst/>
+          </a:prstGeom>
+          <a:solidFill>
+            <a:srgbClr val="FFFFFF"/>
+          </a:solidFill>
+          <a:ln>
+            <a:noFill/>
+          </a:ln>
+          <a:effectLst/>
+        </p:spPr>
+        <p:style>
+          <a:lnRef idx="1">
+            <a:schemeClr val="accent1"/>
+          </a:lnRef>
+          <a:fillRef idx="3">
+            <a:schemeClr val="accent1"/>
+          </a:fillRef>
+          <a:effectRef idx="2">
+            <a:schemeClr val="accent1"/>
+          </a:effectRef>
+          <a:fontRef idx="minor">
+            <a:schemeClr val="lt1"/>
+          </a:fontRef>
+        </p:style>
+        <p:txBody>
+          <a:bodyPr rtlCol="0" anchor="ctr"/>
+          <a:lstStyle/>
+          <a:p>
+            <a:pPr algn="ctr"/>
+          </a:p>
+        </p:txBody>
+      </p:sp>
+      <p:sp>
+        <p:nvSpPr>
+          <p:cNvPr id="13" name="Rectangle 12"/>
+          <p:cNvSpPr/>
+          <p:nvPr/>
+        </p:nvSpPr>
+        <p:spPr>
+          <a:xfrm>
+            <a:off x="4312767" y="2194560"/>
+            <a:ext cx="91440" cy="3291840"/>
+          </a:xfrm>
+          <a:prstGeom prst="rect">
+            <a:avLst/>
+          </a:prstGeom>
+          <a:solidFill>
+            <a:srgbClr val="C9A227"/>
+          </a:solidFill>
+          <a:ln>
+            <a:noFill/>
+          </a:ln>
+          <a:effectLst/>
+        </p:spPr>
+        <p:style>
+          <a:lnRef idx="1">
+            <a:schemeClr val="accent1"/>
+          </a:lnRef>
+          <a:fillRef idx="3">
+            <a:schemeClr val="accent1"/>
+          </a:fillRef>
+          <a:effectRef idx="2">
+            <a:schemeClr val="accent1"/>
+          </a:effectRef>
+          <a:fontRef idx="minor">
+            <a:schemeClr val="lt1"/>
+          </a:fontRef>
+        </p:style>
+        <p:txBody>
+          <a:bodyPr rtlCol="0" anchor="ctr"/>
+          <a:lstStyle/>
+          <a:p>
+            <a:pPr algn="ctr"/>
+          </a:p>
+        </p:txBody>
+      </p:sp>
+      <p:sp>
+        <p:nvSpPr>
+          <p:cNvPr id="14" name="TextBox 13"/>
+          <p:cNvSpPr txBox="1"/>
+          <p:nvPr/>
+        </p:nvSpPr>
+        <p:spPr>
+          <a:xfrm>
+            <a:off x="4587087" y="2423160"/>
+            <a:ext cx="3017520" cy="365760"/>
+          </a:xfrm>
+          <a:prstGeom prst="rect">
+            <a:avLst/>
+          </a:prstGeom>
+          <a:noFill/>
+        </p:spPr>
+        <p:txBody>
+          <a:bodyPr wrap="square" lIns="0" rIns="0" tIns="0" bIns="0">
+            <a:spAutoFit/>
+          </a:bodyPr>
+          <a:lstStyle/>
+          <a:p>
+            <a:r>
+              <a:rPr sz="1000" b="1">
+                <a:solidFill>
+                  <a:srgbClr val="C9A227"/>
+                </a:solidFill>
+                <a:latin typeface="Helvetica Neue"/>
+              </a:rPr>
+              <a:t>REASON 2</a:t>
+            </a:r>
+          </a:p>
+        </p:txBody>
+      </p:sp>
+      <p:sp>
+        <p:nvSpPr>
+          <p:cNvPr id="15" name="TextBox 14"/>
+          <p:cNvSpPr txBox="1"/>
+          <p:nvPr/>
+        </p:nvSpPr>
+        <p:spPr>
+          <a:xfrm>
+            <a:off x="4587087" y="2743200"/>
+            <a:ext cx="3017520" cy="457200"/>
+          </a:xfrm>
+          <a:prstGeom prst="rect">
+            <a:avLst/>
+          </a:prstGeom>
+          <a:noFill/>
+        </p:spPr>
+        <p:txBody>
+          <a:bodyPr wrap="square" lIns="0" rIns="0" tIns="0" bIns="0">
+            <a:spAutoFit/>
+          </a:bodyPr>
+          <a:lstStyle/>
+          <a:p>
+            <a:r>
+              <a:rPr sz="1400" b="1">
+                <a:solidFill>
+                  <a:srgbClr val="2F3C7E"/>
+                </a:solidFill>
+                <a:latin typeface="Georgia"/>
+              </a:rPr>
+              <a:t>EDITORIAL CREDIBILITY</a:t>
+            </a:r>
+          </a:p>
+        </p:txBody>
+      </p:sp>
+      <p:sp>
+        <p:nvSpPr>
+          <p:cNvPr id="16" name="TextBox 15"/>
+          <p:cNvSpPr txBox="1"/>
+          <p:nvPr/>
+        </p:nvSpPr>
+        <p:spPr>
+          <a:xfrm>
+            <a:off x="4587087" y="3291839"/>
+            <a:ext cx="3017520" cy="548640"/>
+          </a:xfrm>
+          <a:prstGeom prst="rect">
+            <a:avLst/>
+          </a:prstGeom>
+          <a:noFill/>
+        </p:spPr>
+        <p:txBody>
+          <a:bodyPr wrap="square" lIns="0" rIns="0" tIns="0" bIns="0">
+            <a:spAutoFit/>
+          </a:bodyPr>
+          <a:lstStyle/>
+          <a:p>
+            <a:r>
+              <a:rPr sz="1300" b="1">
+                <a:solidFill>
+                  <a:srgbClr val="141833"/>
+                </a:solidFill>
+                <a:latin typeface="Helvetica Neue"/>
+              </a:rPr>
+              <a:t>A show that only reports negatives becomes a hit piece.</a:t>
+            </a:r>
+          </a:p>
+        </p:txBody>
+      </p:sp>
+      <p:sp>
+        <p:nvSpPr>
+          <p:cNvPr id="17" name="TextBox 16"/>
+          <p:cNvSpPr txBox="1"/>
+          <p:nvPr/>
+        </p:nvSpPr>
+        <p:spPr>
+          <a:xfrm>
+            <a:off x="4587087" y="3931920"/>
+            <a:ext cx="3017520" cy="1463040"/>
+          </a:xfrm>
+          <a:prstGeom prst="rect">
+            <a:avLst/>
+          </a:prstGeom>
+          <a:noFill/>
+        </p:spPr>
+        <p:txBody>
+          <a:bodyPr wrap="square" lIns="0" rIns="0" tIns="0" bIns="0">
+            <a:spAutoFit/>
+          </a:bodyPr>
+          <a:lstStyle/>
+          <a:p>
+            <a:r>
+              <a:rPr sz="1000" b="0">
+                <a:solidFill>
+                  <a:srgbClr val="6B7082"/>
+                </a:solidFill>
+                <a:latin typeface="Helvetica Neue"/>
+              </a:rPr>
+              <a:t>Sponsors don't want to attach to a hit piece. Positive coverage — resident highlights, downtown growth, community wins — proves objectivity. That's what makes sponsorship durable.</a:t>
+            </a:r>
+          </a:p>
+        </p:txBody>
+      </p:sp>
+      <p:sp>
+        <p:nvSpPr>
+          <p:cNvPr id="18" name="Rectangle 17"/>
+          <p:cNvSpPr/>
+          <p:nvPr/>
+        </p:nvSpPr>
+        <p:spPr>
+          <a:xfrm>
+            <a:off x="8061807" y="2194560"/>
+            <a:ext cx="3566160" cy="3291840"/>
+          </a:xfrm>
+          <a:prstGeom prst="rect">
+            <a:avLst/>
+          </a:prstGeom>
+          <a:solidFill>
+            <a:srgbClr val="FFFFFF"/>
+          </a:solidFill>
+          <a:ln>
+            <a:noFill/>
+          </a:ln>
+          <a:effectLst/>
+        </p:spPr>
+        <p:style>
+          <a:lnRef idx="1">
+            <a:schemeClr val="accent1"/>
+          </a:lnRef>
+          <a:fillRef idx="3">
+            <a:schemeClr val="accent1"/>
+          </a:fillRef>
+          <a:effectRef idx="2">
+            <a:schemeClr val="accent1"/>
+          </a:effectRef>
+          <a:fontRef idx="minor">
+            <a:schemeClr val="lt1"/>
+          </a:fontRef>
+        </p:style>
+        <p:txBody>
+          <a:bodyPr rtlCol="0" anchor="ctr"/>
+          <a:lstStyle/>
+          <a:p>
+            <a:pPr algn="ctr"/>
+          </a:p>
+        </p:txBody>
+      </p:sp>
+      <p:sp>
+        <p:nvSpPr>
+          <p:cNvPr id="19" name="Rectangle 18"/>
+          <p:cNvSpPr/>
+          <p:nvPr/>
+        </p:nvSpPr>
+        <p:spPr>
+          <a:xfrm>
+            <a:off x="8061807" y="2194560"/>
+            <a:ext cx="91440" cy="3291840"/>
+          </a:xfrm>
+          <a:prstGeom prst="rect">
+            <a:avLst/>
+          </a:prstGeom>
+          <a:solidFill>
+            <a:srgbClr val="2E86AB"/>
+          </a:solidFill>
+          <a:ln>
+            <a:noFill/>
+          </a:ln>
+          <a:effectLst/>
+        </p:spPr>
+        <p:style>
+          <a:lnRef idx="1">
+            <a:schemeClr val="accent1"/>
+          </a:lnRef>
+          <a:fillRef idx="3">
+            <a:schemeClr val="accent1"/>
+          </a:fillRef>
+          <a:effectRef idx="2">
+            <a:schemeClr val="accent1"/>
+          </a:effectRef>
+          <a:fontRef idx="minor">
+            <a:schemeClr val="lt1"/>
+          </a:fontRef>
+        </p:style>
+        <p:txBody>
+          <a:bodyPr rtlCol="0" anchor="ctr"/>
+          <a:lstStyle/>
+          <a:p>
+            <a:pPr algn="ctr"/>
+          </a:p>
+        </p:txBody>
+      </p:sp>
+      <p:sp>
+        <p:nvSpPr>
+          <p:cNvPr id="20" name="TextBox 19"/>
+          <p:cNvSpPr txBox="1"/>
+          <p:nvPr/>
+        </p:nvSpPr>
+        <p:spPr>
+          <a:xfrm>
+            <a:off x="8336127" y="2423160"/>
+            <a:ext cx="3017520" cy="365760"/>
+          </a:xfrm>
+          <a:prstGeom prst="rect">
+            <a:avLst/>
+          </a:prstGeom>
+          <a:noFill/>
+        </p:spPr>
+        <p:txBody>
+          <a:bodyPr wrap="square" lIns="0" rIns="0" tIns="0" bIns="0">
+            <a:spAutoFit/>
+          </a:bodyPr>
+          <a:lstStyle/>
+          <a:p>
+            <a:r>
+              <a:rPr sz="1000" b="1">
+                <a:solidFill>
+                  <a:srgbClr val="2E86AB"/>
+                </a:solidFill>
+                <a:latin typeface="Helvetica Neue"/>
+              </a:rPr>
+              <a:t>REASON 3</a:t>
+            </a:r>
+          </a:p>
+        </p:txBody>
+      </p:sp>
+      <p:sp>
+        <p:nvSpPr>
+          <p:cNvPr id="21" name="TextBox 20"/>
+          <p:cNvSpPr txBox="1"/>
+          <p:nvPr/>
+        </p:nvSpPr>
+        <p:spPr>
+          <a:xfrm>
+            <a:off x="8336127" y="2743200"/>
+            <a:ext cx="3017520" cy="457200"/>
+          </a:xfrm>
+          <a:prstGeom prst="rect">
+            <a:avLst/>
+          </a:prstGeom>
+          <a:noFill/>
+        </p:spPr>
+        <p:txBody>
+          <a:bodyPr wrap="square" lIns="0" rIns="0" tIns="0" bIns="0">
+            <a:spAutoFit/>
+          </a:bodyPr>
+          <a:lstStyle/>
+          <a:p>
+            <a:r>
+              <a:rPr sz="1400" b="1">
+                <a:solidFill>
+                  <a:srgbClr val="2F3C7E"/>
+                </a:solidFill>
+                <a:latin typeface="Georgia"/>
+              </a:rPr>
+              <a:t>ALGORITHMIC HEALTH</a:t>
+            </a:r>
+          </a:p>
+        </p:txBody>
+      </p:sp>
+      <p:sp>
+        <p:nvSpPr>
+          <p:cNvPr id="22" name="TextBox 21"/>
+          <p:cNvSpPr txBox="1"/>
+          <p:nvPr/>
+        </p:nvSpPr>
+        <p:spPr>
+          <a:xfrm>
+            <a:off x="8336127" y="3291839"/>
+            <a:ext cx="3017520" cy="548640"/>
+          </a:xfrm>
+          <a:prstGeom prst="rect">
+            <a:avLst/>
+          </a:prstGeom>
+          <a:noFill/>
+        </p:spPr>
+        <p:txBody>
+          <a:bodyPr wrap="square" lIns="0" rIns="0" tIns="0" bIns="0">
+            <a:spAutoFit/>
+          </a:bodyPr>
+          <a:lstStyle/>
+          <a:p>
+            <a:r>
+              <a:rPr sz="1300" b="1">
+                <a:solidFill>
+                  <a:srgbClr val="141833"/>
+                </a:solidFill>
+                <a:latin typeface="Helvetica Neue"/>
+              </a:rPr>
+              <a:t>Platforms punish single-topic accounts.</a:t>
+            </a:r>
+          </a:p>
+        </p:txBody>
+      </p:sp>
+      <p:sp>
+        <p:nvSpPr>
+          <p:cNvPr id="23" name="TextBox 22"/>
+          <p:cNvSpPr txBox="1"/>
+          <p:nvPr/>
+        </p:nvSpPr>
+        <p:spPr>
+          <a:xfrm>
+            <a:off x="8336127" y="3931920"/>
+            <a:ext cx="3017520" cy="1463040"/>
+          </a:xfrm>
+          <a:prstGeom prst="rect">
+            <a:avLst/>
+          </a:prstGeom>
+          <a:noFill/>
+        </p:spPr>
+        <p:txBody>
+          <a:bodyPr wrap="square" lIns="0" rIns="0" tIns="0" bIns="0">
+            <a:spAutoFit/>
+          </a:bodyPr>
+          <a:lstStyle/>
+          <a:p>
+            <a:r>
+              <a:rPr sz="1000" b="0">
+                <a:solidFill>
+                  <a:srgbClr val="6B7082"/>
+                </a:solidFill>
+                <a:latin typeface="Helvetica Neue"/>
+              </a:rPr>
+              <a:t>Instagram, TikTok, and YouTube increasingly penalize accounts that push one theme. A mixed content diet earns more consistent reach across ALL posts, including the scandal ones. Diversification pays.</a:t>
+            </a:r>
+          </a:p>
+        </p:txBody>
+      </p:sp>
+      <p:sp>
+        <p:nvSpPr>
+          <p:cNvPr id="24" name="TextBox 23"/>
+          <p:cNvSpPr txBox="1"/>
+          <p:nvPr/>
+        </p:nvSpPr>
+        <p:spPr>
+          <a:xfrm>
+            <a:off x="731520" y="6263640"/>
+            <a:ext cx="10698480" cy="457200"/>
+          </a:xfrm>
+          <a:prstGeom prst="rect">
+            <a:avLst/>
+          </a:prstGeom>
+          <a:noFill/>
+        </p:spPr>
+        <p:txBody>
+          <a:bodyPr wrap="square" lIns="0" rIns="0" tIns="0" bIns="0">
+            <a:spAutoFit/>
+          </a:bodyPr>
+          <a:lstStyle/>
+          <a:p>
+            <a:r>
+              <a:rPr sz="1200" b="1">
+                <a:solidFill>
+                  <a:srgbClr val="141833"/>
+                </a:solidFill>
+                <a:latin typeface="Helvetica Neue"/>
+              </a:rPr>
+              <a:t>Low-view lanes aren't dead weight. They're the connective tissue that turns viral reach into a durable audience.</a:t>
+            </a:r>
+          </a:p>
+        </p:txBody>
+      </p:sp>
+    </p:spTree>
+  </p:cSld>
+  <p:clrMapOvr>
+    <a:masterClrMapping/>
+  </p:clrMapOvr>
+</p:sld>
+</file>
+
+<file path=ppt/slides/slide22.xml><?xml version="1.0" encoding="utf-8"?>
+<p:sld xmlns:a="http://schemas.openxmlformats.org/drawingml/2006/main" xmlns:p="http://schemas.openxmlformats.org/presentationml/2006/main" xmlns:r="http://schemas.openxmlformats.org/officeDocument/2006/relationships">
+  <p:cSld>
+    <p:spTree>
+      <p:nvGrpSpPr>
+        <p:cNvPr id="1" name=""/>
+        <p:cNvGrpSpPr/>
+        <p:nvPr/>
+      </p:nvGrpSpPr>
+      <p:grpSpPr/>
+      <p:sp>
+        <p:nvSpPr>
+          <p:cNvPr id="2" name="Rectangle 1"/>
+          <p:cNvSpPr/>
+          <p:nvPr/>
+        </p:nvSpPr>
+        <p:spPr>
+          <a:xfrm>
+            <a:off x="0" y="0"/>
+            <a:ext cx="12191695" cy="6858000"/>
+          </a:xfrm>
+          <a:prstGeom prst="rect">
+            <a:avLst/>
+          </a:prstGeom>
+          <a:solidFill>
+            <a:srgbClr val="FCF6F5"/>
+          </a:solidFill>
+          <a:ln>
+            <a:noFill/>
+          </a:ln>
+          <a:effectLst/>
+        </p:spPr>
+        <p:style>
+          <a:lnRef idx="1">
+            <a:schemeClr val="accent1"/>
+          </a:lnRef>
+          <a:fillRef idx="3">
+            <a:schemeClr val="accent1"/>
+          </a:fillRef>
+          <a:effectRef idx="2">
+            <a:schemeClr val="accent1"/>
+          </a:effectRef>
+          <a:fontRef idx="minor">
+            <a:schemeClr val="lt1"/>
+          </a:fontRef>
+        </p:style>
+        <p:txBody>
+          <a:bodyPr rtlCol="0" anchor="ctr"/>
+          <a:lstStyle/>
+          <a:p>
+            <a:pPr algn="ctr"/>
+          </a:p>
+        </p:txBody>
+      </p:sp>
+      <p:sp>
+        <p:nvSpPr>
+          <p:cNvPr id="3" name="TextBox 2"/>
+          <p:cNvSpPr txBox="1"/>
+          <p:nvPr/>
+        </p:nvSpPr>
+        <p:spPr>
+          <a:xfrm>
+            <a:off x="731520" y="457200"/>
+            <a:ext cx="10698480" cy="365760"/>
+          </a:xfrm>
+          <a:prstGeom prst="rect">
+            <a:avLst/>
+          </a:prstGeom>
+          <a:noFill/>
+        </p:spPr>
+        <p:txBody>
+          <a:bodyPr wrap="square" lIns="0" rIns="0" tIns="0" bIns="0">
+            <a:spAutoFit/>
+          </a:bodyPr>
+          <a:lstStyle/>
+          <a:p>
+            <a:r>
+              <a:rPr sz="1200" b="1">
+                <a:solidFill>
+                  <a:srgbClr val="990011"/>
+                </a:solidFill>
+                <a:latin typeface="Helvetica Neue"/>
+              </a:rPr>
+              <a:t>THE HONEST TRADEOFF</a:t>
+            </a:r>
+          </a:p>
+        </p:txBody>
+      </p:sp>
+      <p:sp>
+        <p:nvSpPr>
+          <p:cNvPr id="4" name="TextBox 3"/>
+          <p:cNvSpPr txBox="1"/>
+          <p:nvPr/>
+        </p:nvSpPr>
+        <p:spPr>
+          <a:xfrm>
+            <a:off x="731520" y="822960"/>
+            <a:ext cx="10698480" cy="822960"/>
+          </a:xfrm>
+          <a:prstGeom prst="rect">
+            <a:avLst/>
+          </a:prstGeom>
+          <a:noFill/>
+        </p:spPr>
+        <p:txBody>
+          <a:bodyPr wrap="square" lIns="0" rIns="0" tIns="0" bIns="0">
+            <a:spAutoFit/>
+          </a:bodyPr>
+          <a:lstStyle/>
+          <a:p>
+            <a:r>
+              <a:rPr sz="3000" b="1">
+                <a:solidFill>
+                  <a:srgbClr val="2F3C7E"/>
+                </a:solidFill>
+                <a:latin typeface="Georgia"/>
+              </a:rPr>
+              <a:t>Reach vs. depth — what each side actually buys</a:t>
+            </a:r>
+          </a:p>
+        </p:txBody>
+      </p:sp>
+      <p:sp>
+        <p:nvSpPr>
+          <p:cNvPr id="5" name="TextBox 4"/>
+          <p:cNvSpPr txBox="1"/>
+          <p:nvPr/>
+        </p:nvSpPr>
+        <p:spPr>
+          <a:xfrm>
+            <a:off x="731520" y="1600200"/>
+            <a:ext cx="10698480" cy="365760"/>
+          </a:xfrm>
+          <a:prstGeom prst="rect">
+            <a:avLst/>
+          </a:prstGeom>
+          <a:noFill/>
+        </p:spPr>
+        <p:txBody>
+          <a:bodyPr wrap="square" lIns="0" rIns="0" tIns="0" bIns="0">
+            <a:spAutoFit/>
+          </a:bodyPr>
+          <a:lstStyle/>
+          <a:p>
+            <a:r>
+              <a:rPr sz="1200" b="0">
+                <a:solidFill>
+                  <a:srgbClr val="6B7082"/>
+                </a:solidFill>
+                <a:latin typeface="Helvetica Neue"/>
+              </a:rPr>
+              <a:t>This isn't a Downey problem. It's how every social platform works. The question is the RATIO, not the choice.</a:t>
+            </a:r>
+          </a:p>
+        </p:txBody>
+      </p:sp>
+      <p:sp>
+        <p:nvSpPr>
+          <p:cNvPr id="6" name="Rectangle 5"/>
+          <p:cNvSpPr/>
+          <p:nvPr/>
+        </p:nvSpPr>
+        <p:spPr>
+          <a:xfrm>
+            <a:off x="563727" y="2103120"/>
+            <a:ext cx="5303520" cy="3657600"/>
+          </a:xfrm>
+          <a:prstGeom prst="rect">
+            <a:avLst/>
+          </a:prstGeom>
+          <a:solidFill>
+            <a:srgbClr val="FFFFFF"/>
+          </a:solidFill>
+          <a:ln>
+            <a:noFill/>
+          </a:ln>
+          <a:effectLst/>
+        </p:spPr>
+        <p:style>
+          <a:lnRef idx="1">
+            <a:schemeClr val="accent1"/>
+          </a:lnRef>
+          <a:fillRef idx="3">
+            <a:schemeClr val="accent1"/>
+          </a:fillRef>
+          <a:effectRef idx="2">
+            <a:schemeClr val="accent1"/>
+          </a:effectRef>
+          <a:fontRef idx="minor">
+            <a:schemeClr val="lt1"/>
+          </a:fontRef>
+        </p:style>
+        <p:txBody>
+          <a:bodyPr rtlCol="0" anchor="ctr"/>
+          <a:lstStyle/>
+          <a:p>
+            <a:pPr algn="ctr"/>
+          </a:p>
+        </p:txBody>
+      </p:sp>
+      <p:sp>
+        <p:nvSpPr>
+          <p:cNvPr id="7" name="Rectangle 6"/>
+          <p:cNvSpPr/>
+          <p:nvPr/>
+        </p:nvSpPr>
+        <p:spPr>
+          <a:xfrm>
+            <a:off x="563727" y="2103120"/>
+            <a:ext cx="91440" cy="3657600"/>
+          </a:xfrm>
+          <a:prstGeom prst="rect">
+            <a:avLst/>
+          </a:prstGeom>
+          <a:solidFill>
+            <a:srgbClr val="990011"/>
+          </a:solidFill>
+          <a:ln>
+            <a:noFill/>
+          </a:ln>
+          <a:effectLst/>
+        </p:spPr>
+        <p:style>
+          <a:lnRef idx="1">
+            <a:schemeClr val="accent1"/>
+          </a:lnRef>
+          <a:fillRef idx="3">
+            <a:schemeClr val="accent1"/>
+          </a:fillRef>
+          <a:effectRef idx="2">
+            <a:schemeClr val="accent1"/>
+          </a:effectRef>
+          <a:fontRef idx="minor">
+            <a:schemeClr val="lt1"/>
+          </a:fontRef>
+        </p:style>
+        <p:txBody>
+          <a:bodyPr rtlCol="0" anchor="ctr"/>
+          <a:lstStyle/>
+          <a:p>
+            <a:pPr algn="ctr"/>
+          </a:p>
+        </p:txBody>
+      </p:sp>
+      <p:sp>
+        <p:nvSpPr>
+          <p:cNvPr id="8" name="TextBox 7"/>
+          <p:cNvSpPr txBox="1"/>
+          <p:nvPr/>
+        </p:nvSpPr>
+        <p:spPr>
+          <a:xfrm>
+            <a:off x="838047" y="2286000"/>
+            <a:ext cx="4754880" cy="365760"/>
+          </a:xfrm>
+          <a:prstGeom prst="rect">
+            <a:avLst/>
+          </a:prstGeom>
+          <a:noFill/>
+        </p:spPr>
+        <p:txBody>
+          <a:bodyPr wrap="square" lIns="0" rIns="0" tIns="0" bIns="0">
+            <a:spAutoFit/>
+          </a:bodyPr>
+          <a:lstStyle/>
+          <a:p>
+            <a:r>
+              <a:rPr sz="1100" b="1">
+                <a:solidFill>
+                  <a:srgbClr val="990011"/>
+                </a:solidFill>
+                <a:latin typeface="Helvetica Neue"/>
+              </a:rPr>
+              <a:t>WHAT EARNS EYEBALLS</a:t>
+            </a:r>
+          </a:p>
+        </p:txBody>
+      </p:sp>
+      <p:sp>
+        <p:nvSpPr>
+          <p:cNvPr id="9" name="TextBox 8"/>
+          <p:cNvSpPr txBox="1"/>
+          <p:nvPr/>
+        </p:nvSpPr>
+        <p:spPr>
+          <a:xfrm>
+            <a:off x="838047" y="2651760"/>
+            <a:ext cx="4754880" cy="457200"/>
+          </a:xfrm>
+          <a:prstGeom prst="rect">
+            <a:avLst/>
+          </a:prstGeom>
+          <a:noFill/>
+        </p:spPr>
+        <p:txBody>
+          <a:bodyPr wrap="square" lIns="0" rIns="0" tIns="0" bIns="0">
+            <a:spAutoFit/>
+          </a:bodyPr>
+          <a:lstStyle/>
+          <a:p>
+            <a:r>
+              <a:rPr sz="2000" b="1">
+                <a:solidFill>
+                  <a:srgbClr val="2F3C7E"/>
+                </a:solidFill>
+                <a:latin typeface="Georgia"/>
+              </a:rPr>
+              <a:t>Truth &amp; Scandal</a:t>
+            </a:r>
+          </a:p>
+        </p:txBody>
+      </p:sp>
+      <p:sp>
+        <p:nvSpPr>
+          <p:cNvPr id="10" name="TextBox 9"/>
+          <p:cNvSpPr txBox="1"/>
+          <p:nvPr/>
+        </p:nvSpPr>
+        <p:spPr>
+          <a:xfrm>
+            <a:off x="838047" y="3154679"/>
+            <a:ext cx="4754880" cy="365760"/>
+          </a:xfrm>
+          <a:prstGeom prst="rect">
+            <a:avLst/>
+          </a:prstGeom>
+          <a:noFill/>
+        </p:spPr>
+        <p:txBody>
+          <a:bodyPr wrap="square" lIns="0" rIns="0" tIns="0" bIns="0">
+            <a:spAutoFit/>
+          </a:bodyPr>
+          <a:lstStyle/>
+          <a:p>
+            <a:r>
+              <a:rPr sz="1100" b="1">
+                <a:solidFill>
+                  <a:srgbClr val="141833"/>
+                </a:solidFill>
+                <a:latin typeface="Helvetica Neue"/>
+              </a:rPr>
+              <a:t>2,088 avg views/post   ·   49 posts   ·   102,311 total</a:t>
+            </a:r>
+          </a:p>
+        </p:txBody>
+      </p:sp>
+      <p:sp>
+        <p:nvSpPr>
+          <p:cNvPr id="11" name="TextBox 10"/>
+          <p:cNvSpPr txBox="1"/>
+          <p:nvPr/>
+        </p:nvSpPr>
+        <p:spPr>
+          <a:xfrm>
+            <a:off x="838047" y="3611879"/>
+            <a:ext cx="4754880" cy="320040"/>
+          </a:xfrm>
+          <a:prstGeom prst="rect">
+            <a:avLst/>
+          </a:prstGeom>
+          <a:noFill/>
+        </p:spPr>
+        <p:txBody>
+          <a:bodyPr wrap="square" lIns="0" rIns="0" tIns="0" bIns="0">
+            <a:spAutoFit/>
+          </a:bodyPr>
+          <a:lstStyle/>
+          <a:p>
+            <a:r>
+              <a:rPr sz="900" b="1">
+                <a:solidFill>
+                  <a:srgbClr val="990011"/>
+                </a:solidFill>
+                <a:latin typeface="Helvetica Neue"/>
+              </a:rPr>
+              <a:t>TOP POST</a:t>
+            </a:r>
+          </a:p>
+        </p:txBody>
+      </p:sp>
+      <p:sp>
+        <p:nvSpPr>
+          <p:cNvPr id="12" name="TextBox 11"/>
+          <p:cNvSpPr txBox="1"/>
+          <p:nvPr/>
+        </p:nvSpPr>
+        <p:spPr>
+          <a:xfrm>
+            <a:off x="838047" y="3931920"/>
+            <a:ext cx="4754880" cy="548640"/>
+          </a:xfrm>
+          <a:prstGeom prst="rect">
+            <a:avLst/>
+          </a:prstGeom>
+          <a:noFill/>
+        </p:spPr>
+        <p:txBody>
+          <a:bodyPr wrap="square" lIns="0" rIns="0" tIns="0" bIns="0">
+            <a:spAutoFit/>
+          </a:bodyPr>
+          <a:lstStyle/>
+          <a:p>
+            <a:r>
+              <a:rPr sz="1000" b="0">
+                <a:solidFill>
+                  <a:srgbClr val="141833"/>
+                </a:solidFill>
+                <a:latin typeface="Helvetica Neue"/>
+              </a:rPr>
+              <a:t>9,839 views — Grew up in Huntington Park and still own property there. The city's o.</a:t>
+            </a:r>
+          </a:p>
+        </p:txBody>
+      </p:sp>
+      <p:sp>
+        <p:nvSpPr>
+          <p:cNvPr id="13" name="TextBox 12"/>
+          <p:cNvSpPr txBox="1"/>
+          <p:nvPr/>
+        </p:nvSpPr>
+        <p:spPr>
+          <a:xfrm>
+            <a:off x="838047" y="4663440"/>
+            <a:ext cx="4754880" cy="1005840"/>
+          </a:xfrm>
+          <a:prstGeom prst="rect">
+            <a:avLst/>
+          </a:prstGeom>
+          <a:noFill/>
+        </p:spPr>
+        <p:txBody>
+          <a:bodyPr wrap="square" lIns="0" rIns="0" tIns="0" bIns="0">
+            <a:spAutoFit/>
+          </a:bodyPr>
+          <a:lstStyle/>
+          <a:p>
+            <a:r>
+              <a:rPr sz="1000" b="0">
+                <a:solidFill>
+                  <a:srgbClr val="6B7082"/>
+                </a:solidFill>
+                <a:latin typeface="Helvetica Neue"/>
+              </a:rPr>
+              <a:t>Every scandal post averages 3-5× the reach of positive posts. This is the platform algorithm, not Downey. Outrage drives comments, comments drive reach, reach drives new followers.</a:t>
+            </a:r>
+          </a:p>
+        </p:txBody>
+      </p:sp>
+      <p:sp>
+        <p:nvSpPr>
+          <p:cNvPr id="14" name="Rectangle 13"/>
+          <p:cNvSpPr/>
+          <p:nvPr/>
+        </p:nvSpPr>
+        <p:spPr>
+          <a:xfrm>
+            <a:off x="6324447" y="2103120"/>
+            <a:ext cx="5303520" cy="3657600"/>
+          </a:xfrm>
+          <a:prstGeom prst="rect">
+            <a:avLst/>
+          </a:prstGeom>
+          <a:solidFill>
+            <a:srgbClr val="FFFFFF"/>
+          </a:solidFill>
+          <a:ln>
+            <a:noFill/>
+          </a:ln>
+          <a:effectLst/>
+        </p:spPr>
+        <p:style>
+          <a:lnRef idx="1">
+            <a:schemeClr val="accent1"/>
+          </a:lnRef>
+          <a:fillRef idx="3">
+            <a:schemeClr val="accent1"/>
+          </a:fillRef>
+          <a:effectRef idx="2">
+            <a:schemeClr val="accent1"/>
+          </a:effectRef>
+          <a:fontRef idx="minor">
+            <a:schemeClr val="lt1"/>
+          </a:fontRef>
+        </p:style>
+        <p:txBody>
+          <a:bodyPr rtlCol="0" anchor="ctr"/>
+          <a:lstStyle/>
+          <a:p>
+            <a:pPr algn="ctr"/>
+          </a:p>
+        </p:txBody>
+      </p:sp>
+      <p:sp>
+        <p:nvSpPr>
+          <p:cNvPr id="15" name="Rectangle 14"/>
+          <p:cNvSpPr/>
+          <p:nvPr/>
+        </p:nvSpPr>
+        <p:spPr>
+          <a:xfrm>
+            <a:off x="6324447" y="2103120"/>
+            <a:ext cx="91440" cy="3657600"/>
+          </a:xfrm>
+          <a:prstGeom prst="rect">
+            <a:avLst/>
+          </a:prstGeom>
+          <a:solidFill>
+            <a:srgbClr val="2E86AB"/>
+          </a:solidFill>
+          <a:ln>
+            <a:noFill/>
+          </a:ln>
+          <a:effectLst/>
+        </p:spPr>
+        <p:style>
+          <a:lnRef idx="1">
+            <a:schemeClr val="accent1"/>
+          </a:lnRef>
+          <a:fillRef idx="3">
+            <a:schemeClr val="accent1"/>
+          </a:fillRef>
+          <a:effectRef idx="2">
+            <a:schemeClr val="accent1"/>
+          </a:effectRef>
+          <a:fontRef idx="minor">
+            <a:schemeClr val="lt1"/>
+          </a:fontRef>
+        </p:style>
+        <p:txBody>
+          <a:bodyPr rtlCol="0" anchor="ctr"/>
+          <a:lstStyle/>
+          <a:p>
+            <a:pPr algn="ctr"/>
+          </a:p>
+        </p:txBody>
+      </p:sp>
+      <p:sp>
+        <p:nvSpPr>
+          <p:cNvPr id="16" name="TextBox 15"/>
+          <p:cNvSpPr txBox="1"/>
+          <p:nvPr/>
+        </p:nvSpPr>
+        <p:spPr>
+          <a:xfrm>
+            <a:off x="6598767" y="2286000"/>
+            <a:ext cx="4754880" cy="365760"/>
+          </a:xfrm>
+          <a:prstGeom prst="rect">
+            <a:avLst/>
+          </a:prstGeom>
+          <a:noFill/>
+        </p:spPr>
+        <p:txBody>
+          <a:bodyPr wrap="square" lIns="0" rIns="0" tIns="0" bIns="0">
+            <a:spAutoFit/>
+          </a:bodyPr>
+          <a:lstStyle/>
+          <a:p>
+            <a:r>
+              <a:rPr sz="1100" b="1">
+                <a:solidFill>
+                  <a:srgbClr val="2E86AB"/>
+                </a:solidFill>
+                <a:latin typeface="Helvetica Neue"/>
+              </a:rPr>
+              <a:t>WHAT EARNS LOYALTY</a:t>
+            </a:r>
+          </a:p>
+        </p:txBody>
+      </p:sp>
+      <p:sp>
+        <p:nvSpPr>
+          <p:cNvPr id="17" name="TextBox 16"/>
+          <p:cNvSpPr txBox="1"/>
+          <p:nvPr/>
+        </p:nvSpPr>
+        <p:spPr>
+          <a:xfrm>
+            <a:off x="6598767" y="2651760"/>
+            <a:ext cx="4754880" cy="457200"/>
+          </a:xfrm>
+          <a:prstGeom prst="rect">
+            <a:avLst/>
+          </a:prstGeom>
+          <a:noFill/>
+        </p:spPr>
+        <p:txBody>
+          <a:bodyPr wrap="square" lIns="0" rIns="0" tIns="0" bIns="0">
+            <a:spAutoFit/>
+          </a:bodyPr>
+          <a:lstStyle/>
+          <a:p>
+            <a:r>
+              <a:rPr sz="2000" b="1">
+                <a:solidFill>
+                  <a:srgbClr val="2F3C7E"/>
+                </a:solidFill>
+                <a:latin typeface="Georgia"/>
+              </a:rPr>
+              <a:t>Everything else</a:t>
+            </a:r>
+          </a:p>
+        </p:txBody>
+      </p:sp>
+      <p:sp>
+        <p:nvSpPr>
+          <p:cNvPr id="18" name="TextBox 17"/>
+          <p:cNvSpPr txBox="1"/>
+          <p:nvPr/>
+        </p:nvSpPr>
+        <p:spPr>
+          <a:xfrm>
+            <a:off x="6598767" y="3154679"/>
+            <a:ext cx="4754880" cy="365760"/>
+          </a:xfrm>
+          <a:prstGeom prst="rect">
+            <a:avLst/>
+          </a:prstGeom>
+          <a:noFill/>
+        </p:spPr>
+        <p:txBody>
+          <a:bodyPr wrap="square" lIns="0" rIns="0" tIns="0" bIns="0">
+            <a:spAutoFit/>
+          </a:bodyPr>
+          <a:lstStyle/>
+          <a:p>
+            <a:r>
+              <a:rPr sz="1100" b="1">
+                <a:solidFill>
+                  <a:srgbClr val="141833"/>
+                </a:solidFill>
+                <a:latin typeface="Helvetica Neue"/>
+              </a:rPr>
+              <a:t>1,295 avg views/post   ·   229 posts   ·   296,505 total</a:t>
+            </a:r>
+          </a:p>
+        </p:txBody>
+      </p:sp>
+      <p:sp>
+        <p:nvSpPr>
+          <p:cNvPr id="19" name="TextBox 18"/>
+          <p:cNvSpPr txBox="1"/>
+          <p:nvPr/>
+        </p:nvSpPr>
+        <p:spPr>
+          <a:xfrm>
+            <a:off x="6598767" y="3611879"/>
+            <a:ext cx="4754880" cy="320040"/>
+          </a:xfrm>
+          <a:prstGeom prst="rect">
+            <a:avLst/>
+          </a:prstGeom>
+          <a:noFill/>
+        </p:spPr>
+        <p:txBody>
+          <a:bodyPr wrap="square" lIns="0" rIns="0" tIns="0" bIns="0">
+            <a:spAutoFit/>
+          </a:bodyPr>
+          <a:lstStyle/>
+          <a:p>
+            <a:r>
+              <a:rPr sz="900" b="1">
+                <a:solidFill>
+                  <a:srgbClr val="2E86AB"/>
+                </a:solidFill>
+                <a:latin typeface="Helvetica Neue"/>
+              </a:rPr>
+              <a:t>TOP POST</a:t>
+            </a:r>
+          </a:p>
+        </p:txBody>
+      </p:sp>
+      <p:sp>
+        <p:nvSpPr>
+          <p:cNvPr id="20" name="TextBox 19"/>
+          <p:cNvSpPr txBox="1"/>
+          <p:nvPr/>
+        </p:nvSpPr>
+        <p:spPr>
+          <a:xfrm>
+            <a:off x="6598767" y="3931920"/>
+            <a:ext cx="4754880" cy="548640"/>
+          </a:xfrm>
+          <a:prstGeom prst="rect">
+            <a:avLst/>
+          </a:prstGeom>
+          <a:noFill/>
+        </p:spPr>
+        <p:txBody>
+          <a:bodyPr wrap="square" lIns="0" rIns="0" tIns="0" bIns="0">
+            <a:spAutoFit/>
+          </a:bodyPr>
+          <a:lstStyle/>
+          <a:p>
+            <a:r>
+              <a:rPr sz="1000" b="0">
+                <a:solidFill>
+                  <a:srgbClr val="141833"/>
+                </a:solidFill>
+                <a:latin typeface="Helvetica Neue"/>
+              </a:rPr>
+              <a:t>29,200 views — Get ready! Round One is taking over the old Sears at Stonewood Mall. T</a:t>
+            </a:r>
+          </a:p>
+        </p:txBody>
+      </p:sp>
+      <p:sp>
+        <p:nvSpPr>
+          <p:cNvPr id="21" name="TextBox 20"/>
+          <p:cNvSpPr txBox="1"/>
+          <p:nvPr/>
+        </p:nvSpPr>
+        <p:spPr>
+          <a:xfrm>
+            <a:off x="6598767" y="4663440"/>
+            <a:ext cx="4754880" cy="1005840"/>
+          </a:xfrm>
+          <a:prstGeom prst="rect">
+            <a:avLst/>
+          </a:prstGeom>
+          <a:noFill/>
+        </p:spPr>
+        <p:txBody>
+          <a:bodyPr wrap="square" lIns="0" rIns="0" tIns="0" bIns="0">
+            <a:spAutoFit/>
+          </a:bodyPr>
+          <a:lstStyle/>
+          <a:p>
+            <a:r>
+              <a:rPr sz="1000" b="0">
+                <a:solidFill>
+                  <a:srgbClr val="6B7082"/>
+                </a:solidFill>
+                <a:latin typeface="Helvetica Neue"/>
+              </a:rPr>
+              <a:t>Positive posts get fewer views per post — but they turn viewers into subscribers. Loyalty compounds. It's slower, but it's the audience the sponsor's brand actually attaches to.</a:t>
+            </a:r>
+          </a:p>
+        </p:txBody>
+      </p:sp>
+      <p:sp>
+        <p:nvSpPr>
+          <p:cNvPr id="22" name="Rectangle 21"/>
+          <p:cNvSpPr/>
+          <p:nvPr/>
+        </p:nvSpPr>
+        <p:spPr>
+          <a:xfrm>
+            <a:off x="731520" y="5989320"/>
+            <a:ext cx="10698480" cy="548640"/>
+          </a:xfrm>
+          <a:prstGeom prst="rect">
+            <a:avLst/>
+          </a:prstGeom>
+          <a:solidFill>
+            <a:srgbClr val="141833"/>
+          </a:solidFill>
+          <a:ln>
+            <a:noFill/>
+          </a:ln>
+          <a:effectLst/>
+        </p:spPr>
+        <p:style>
+          <a:lnRef idx="1">
+            <a:schemeClr val="accent1"/>
+          </a:lnRef>
+          <a:fillRef idx="3">
+            <a:schemeClr val="accent1"/>
+          </a:fillRef>
+          <a:effectRef idx="2">
+            <a:schemeClr val="accent1"/>
+          </a:effectRef>
+          <a:fontRef idx="minor">
+            <a:schemeClr val="lt1"/>
+          </a:fontRef>
+        </p:style>
+        <p:txBody>
+          <a:bodyPr rtlCol="0" anchor="ctr"/>
+          <a:lstStyle/>
+          <a:p>
+            <a:pPr algn="ctr"/>
+          </a:p>
+        </p:txBody>
+      </p:sp>
+      <p:sp>
+        <p:nvSpPr>
+          <p:cNvPr id="23" name="TextBox 22"/>
+          <p:cNvSpPr txBox="1"/>
+          <p:nvPr/>
+        </p:nvSpPr>
+        <p:spPr>
+          <a:xfrm>
+            <a:off x="914400" y="6126480"/>
+            <a:ext cx="10515600" cy="365760"/>
+          </a:xfrm>
+          <a:prstGeom prst="rect">
+            <a:avLst/>
+          </a:prstGeom>
+          <a:noFill/>
+        </p:spPr>
+        <p:txBody>
+          <a:bodyPr wrap="square" lIns="0" rIns="0" tIns="0" bIns="0">
+            <a:spAutoFit/>
+          </a:bodyPr>
+          <a:lstStyle/>
+          <a:p>
+            <a:r>
+              <a:rPr sz="1300" b="1">
+                <a:solidFill>
+                  <a:srgbClr val="FCF6F5"/>
+                </a:solidFill>
+                <a:latin typeface="Helvetica Neue"/>
+              </a:rPr>
+              <a:t>Both matter. The real question isn't which lane wins — it's the RATIO between them.</a:t>
+            </a:r>
+          </a:p>
+        </p:txBody>
+      </p:sp>
+    </p:spTree>
+  </p:cSld>
+  <p:clrMapOvr>
+    <a:masterClrMapping/>
+  </p:clrMapOvr>
+</p:sld>
+</file>
+
+<file path=ppt/slides/slide23.xml><?xml version="1.0" encoding="utf-8"?>
+<p:sld xmlns:a="http://schemas.openxmlformats.org/drawingml/2006/main" xmlns:p="http://schemas.openxmlformats.org/presentationml/2006/main" xmlns:r="http://schemas.openxmlformats.org/officeDocument/2006/relationships">
+  <p:cSld>
+    <p:spTree>
+      <p:nvGrpSpPr>
+        <p:cNvPr id="1" name=""/>
+        <p:cNvGrpSpPr/>
+        <p:nvPr/>
+      </p:nvGrpSpPr>
+      <p:grpSpPr/>
+      <p:sp>
+        <p:nvSpPr>
+          <p:cNvPr id="2" name="Rectangle 1"/>
+          <p:cNvSpPr/>
+          <p:nvPr/>
+        </p:nvSpPr>
+        <p:spPr>
+          <a:xfrm>
+            <a:off x="0" y="0"/>
+            <a:ext cx="12191695" cy="6858000"/>
+          </a:xfrm>
+          <a:prstGeom prst="rect">
+            <a:avLst/>
+          </a:prstGeom>
+          <a:solidFill>
+            <a:srgbClr val="FCF6F5"/>
+          </a:solidFill>
+          <a:ln>
+            <a:noFill/>
+          </a:ln>
+          <a:effectLst/>
+        </p:spPr>
+        <p:style>
+          <a:lnRef idx="1">
+            <a:schemeClr val="accent1"/>
+          </a:lnRef>
+          <a:fillRef idx="3">
+            <a:schemeClr val="accent1"/>
+          </a:fillRef>
+          <a:effectRef idx="2">
+            <a:schemeClr val="accent1"/>
+          </a:effectRef>
+          <a:fontRef idx="minor">
+            <a:schemeClr val="lt1"/>
+          </a:fontRef>
+        </p:style>
+        <p:txBody>
+          <a:bodyPr rtlCol="0" anchor="ctr"/>
+          <a:lstStyle/>
+          <a:p>
+            <a:pPr algn="ctr"/>
+          </a:p>
+        </p:txBody>
+      </p:sp>
+      <p:sp>
+        <p:nvSpPr>
+          <p:cNvPr id="3" name="TextBox 2"/>
+          <p:cNvSpPr txBox="1"/>
+          <p:nvPr/>
+        </p:nvSpPr>
+        <p:spPr>
+          <a:xfrm>
+            <a:off x="731520" y="457200"/>
+            <a:ext cx="10698480" cy="365760"/>
+          </a:xfrm>
+          <a:prstGeom prst="rect">
+            <a:avLst/>
+          </a:prstGeom>
+          <a:noFill/>
+        </p:spPr>
+        <p:txBody>
+          <a:bodyPr wrap="square" lIns="0" rIns="0" tIns="0" bIns="0">
+            <a:spAutoFit/>
+          </a:bodyPr>
+          <a:lstStyle/>
+          <a:p>
+            <a:r>
+              <a:rPr sz="1200" b="1">
+                <a:solidFill>
+                  <a:srgbClr val="990011"/>
+                </a:solidFill>
+                <a:latin typeface="Helvetica Neue"/>
+              </a:rPr>
               <a:t>THREE DIRECTIONS</a:t>
             </a:r>
           </a:p>
@@ -16012,7 +18018,7 @@
         <p:spPr>
           <a:xfrm>
             <a:off x="731520" y="2121408"/>
-            <a:ext cx="3200400" cy="291904"/>
+            <a:ext cx="3200400" cy="271054"/>
           </a:xfrm>
           <a:prstGeom prst="rect">
             <a:avLst/>
@@ -16032,7 +18038,7 @@
                 </a:solidFill>
                 <a:latin typeface="Helvetica Neue"/>
               </a:rPr>
-              <a:t>Other / Uncategorized</a:t>
+              <a:t>Military Service</a:t>
             </a:r>
           </a:p>
         </p:txBody>
@@ -16045,8 +18051,344 @@
         </p:nvSpPr>
         <p:spPr>
           <a:xfrm>
-            <a:off x="4114800" y="2185064"/>
+            <a:off x="4114800" y="2174639"/>
             <a:ext cx="6217920" cy="128016"/>
+          </a:xfrm>
+          <a:prstGeom prst="rect">
+            <a:avLst/>
+          </a:prstGeom>
+          <a:solidFill>
+            <a:srgbClr val="C9A227"/>
+          </a:solidFill>
+          <a:ln>
+            <a:noFill/>
+          </a:ln>
+          <a:effectLst/>
+        </p:spPr>
+        <p:style>
+          <a:lnRef idx="1">
+            <a:schemeClr val="accent1"/>
+          </a:lnRef>
+          <a:fillRef idx="3">
+            <a:schemeClr val="accent1"/>
+          </a:fillRef>
+          <a:effectRef idx="2">
+            <a:schemeClr val="accent1"/>
+          </a:effectRef>
+          <a:fontRef idx="minor">
+            <a:schemeClr val="lt1"/>
+          </a:fontRef>
+        </p:style>
+        <p:txBody>
+          <a:bodyPr rtlCol="0" anchor="ctr"/>
+          <a:lstStyle/>
+          <a:p>
+            <a:pPr algn="ctr"/>
+          </a:p>
+        </p:txBody>
+      </p:sp>
+      <p:sp>
+        <p:nvSpPr>
+          <p:cNvPr id="8" name="TextBox 7"/>
+          <p:cNvSpPr txBox="1"/>
+          <p:nvPr/>
+        </p:nvSpPr>
+        <p:spPr>
+          <a:xfrm>
+            <a:off x="10424160" y="2121408"/>
+            <a:ext cx="2286000" cy="271054"/>
+          </a:xfrm>
+          <a:prstGeom prst="rect">
+            <a:avLst/>
+          </a:prstGeom>
+          <a:noFill/>
+        </p:spPr>
+        <p:txBody>
+          <a:bodyPr wrap="square" lIns="0" rIns="0" tIns="0" bIns="0">
+            <a:spAutoFit/>
+          </a:bodyPr>
+          <a:lstStyle/>
+          <a:p>
+            <a:r>
+              <a:rPr sz="900" b="0">
+                <a:solidFill>
+                  <a:srgbClr val="6B7082"/>
+                </a:solidFill>
+                <a:latin typeface="Helvetica Neue"/>
+              </a:rPr>
+              <a:t>286,423 views · 69 posts</a:t>
+            </a:r>
+          </a:p>
+        </p:txBody>
+      </p:sp>
+      <p:sp>
+        <p:nvSpPr>
+          <p:cNvPr id="9" name="TextBox 8"/>
+          <p:cNvSpPr txBox="1"/>
+          <p:nvPr/>
+        </p:nvSpPr>
+        <p:spPr>
+          <a:xfrm>
+            <a:off x="731520" y="2392462"/>
+            <a:ext cx="3200400" cy="271054"/>
+          </a:xfrm>
+          <a:prstGeom prst="rect">
+            <a:avLst/>
+          </a:prstGeom>
+          <a:noFill/>
+        </p:spPr>
+        <p:txBody>
+          <a:bodyPr wrap="square" lIns="0" rIns="0" tIns="0" bIns="0">
+            <a:spAutoFit/>
+          </a:bodyPr>
+          <a:lstStyle/>
+          <a:p>
+            <a:r>
+              <a:rPr sz="1100" b="1">
+                <a:solidFill>
+                  <a:srgbClr val="141833"/>
+                </a:solidFill>
+                <a:latin typeface="Helvetica Neue"/>
+              </a:rPr>
+              <a:t>Truth &amp; Scandal Reporting</a:t>
+            </a:r>
+          </a:p>
+        </p:txBody>
+      </p:sp>
+      <p:sp>
+        <p:nvSpPr>
+          <p:cNvPr id="10" name="Rectangle 9"/>
+          <p:cNvSpPr/>
+          <p:nvPr/>
+        </p:nvSpPr>
+        <p:spPr>
+          <a:xfrm>
+            <a:off x="4114800" y="2445693"/>
+            <a:ext cx="2221056" cy="128016"/>
+          </a:xfrm>
+          <a:prstGeom prst="rect">
+            <a:avLst/>
+          </a:prstGeom>
+          <a:solidFill>
+            <a:srgbClr val="990011"/>
+          </a:solidFill>
+          <a:ln>
+            <a:noFill/>
+          </a:ln>
+          <a:effectLst/>
+        </p:spPr>
+        <p:style>
+          <a:lnRef idx="1">
+            <a:schemeClr val="accent1"/>
+          </a:lnRef>
+          <a:fillRef idx="3">
+            <a:schemeClr val="accent1"/>
+          </a:fillRef>
+          <a:effectRef idx="2">
+            <a:schemeClr val="accent1"/>
+          </a:effectRef>
+          <a:fontRef idx="minor">
+            <a:schemeClr val="lt1"/>
+          </a:fontRef>
+        </p:style>
+        <p:txBody>
+          <a:bodyPr rtlCol="0" anchor="ctr"/>
+          <a:lstStyle/>
+          <a:p>
+            <a:pPr algn="ctr"/>
+          </a:p>
+        </p:txBody>
+      </p:sp>
+      <p:sp>
+        <p:nvSpPr>
+          <p:cNvPr id="11" name="TextBox 10"/>
+          <p:cNvSpPr txBox="1"/>
+          <p:nvPr/>
+        </p:nvSpPr>
+        <p:spPr>
+          <a:xfrm>
+            <a:off x="6427296" y="2392462"/>
+            <a:ext cx="2286000" cy="271054"/>
+          </a:xfrm>
+          <a:prstGeom prst="rect">
+            <a:avLst/>
+          </a:prstGeom>
+          <a:noFill/>
+        </p:spPr>
+        <p:txBody>
+          <a:bodyPr wrap="square" lIns="0" rIns="0" tIns="0" bIns="0">
+            <a:spAutoFit/>
+          </a:bodyPr>
+          <a:lstStyle/>
+          <a:p>
+            <a:r>
+              <a:rPr sz="900" b="0">
+                <a:solidFill>
+                  <a:srgbClr val="6B7082"/>
+                </a:solidFill>
+                <a:latin typeface="Helvetica Neue"/>
+              </a:rPr>
+              <a:t>102,311 views · 49 posts</a:t>
+            </a:r>
+          </a:p>
+        </p:txBody>
+      </p:sp>
+      <p:sp>
+        <p:nvSpPr>
+          <p:cNvPr id="12" name="TextBox 11"/>
+          <p:cNvSpPr txBox="1"/>
+          <p:nvPr/>
+        </p:nvSpPr>
+        <p:spPr>
+          <a:xfrm>
+            <a:off x="731520" y="2663516"/>
+            <a:ext cx="3200400" cy="271054"/>
+          </a:xfrm>
+          <a:prstGeom prst="rect">
+            <a:avLst/>
+          </a:prstGeom>
+          <a:noFill/>
+        </p:spPr>
+        <p:txBody>
+          <a:bodyPr wrap="square" lIns="0" rIns="0" tIns="0" bIns="0">
+            <a:spAutoFit/>
+          </a:bodyPr>
+          <a:lstStyle/>
+          <a:p>
+            <a:r>
+              <a:rPr sz="1100" b="1">
+                <a:solidFill>
+                  <a:srgbClr val="141833"/>
+                </a:solidFill>
+                <a:latin typeface="Helvetica Neue"/>
+              </a:rPr>
+              <a:t>Elections &amp; Judicial</a:t>
+            </a:r>
+          </a:p>
+        </p:txBody>
+      </p:sp>
+      <p:sp>
+        <p:nvSpPr>
+          <p:cNvPr id="13" name="Rectangle 12"/>
+          <p:cNvSpPr/>
+          <p:nvPr/>
+        </p:nvSpPr>
+        <p:spPr>
+          <a:xfrm>
+            <a:off x="4114800" y="2716747"/>
+            <a:ext cx="2120804" cy="128016"/>
+          </a:xfrm>
+          <a:prstGeom prst="rect">
+            <a:avLst/>
+          </a:prstGeom>
+          <a:solidFill>
+            <a:srgbClr val="2F3C7E"/>
+          </a:solidFill>
+          <a:ln>
+            <a:noFill/>
+          </a:ln>
+          <a:effectLst/>
+        </p:spPr>
+        <p:style>
+          <a:lnRef idx="1">
+            <a:schemeClr val="accent1"/>
+          </a:lnRef>
+          <a:fillRef idx="3">
+            <a:schemeClr val="accent1"/>
+          </a:fillRef>
+          <a:effectRef idx="2">
+            <a:schemeClr val="accent1"/>
+          </a:effectRef>
+          <a:fontRef idx="minor">
+            <a:schemeClr val="lt1"/>
+          </a:fontRef>
+        </p:style>
+        <p:txBody>
+          <a:bodyPr rtlCol="0" anchor="ctr"/>
+          <a:lstStyle/>
+          <a:p>
+            <a:pPr algn="ctr"/>
+          </a:p>
+        </p:txBody>
+      </p:sp>
+      <p:sp>
+        <p:nvSpPr>
+          <p:cNvPr id="14" name="TextBox 13"/>
+          <p:cNvSpPr txBox="1"/>
+          <p:nvPr/>
+        </p:nvSpPr>
+        <p:spPr>
+          <a:xfrm>
+            <a:off x="6327044" y="2663516"/>
+            <a:ext cx="2286000" cy="271054"/>
+          </a:xfrm>
+          <a:prstGeom prst="rect">
+            <a:avLst/>
+          </a:prstGeom>
+          <a:noFill/>
+        </p:spPr>
+        <p:txBody>
+          <a:bodyPr wrap="square" lIns="0" rIns="0" tIns="0" bIns="0">
+            <a:spAutoFit/>
+          </a:bodyPr>
+          <a:lstStyle/>
+          <a:p>
+            <a:r>
+              <a:rPr sz="900" b="0">
+                <a:solidFill>
+                  <a:srgbClr val="6B7082"/>
+                </a:solidFill>
+                <a:latin typeface="Helvetica Neue"/>
+              </a:rPr>
+              <a:t>97,693 views · 146 posts</a:t>
+            </a:r>
+          </a:p>
+        </p:txBody>
+      </p:sp>
+      <p:sp>
+        <p:nvSpPr>
+          <p:cNvPr id="15" name="TextBox 14"/>
+          <p:cNvSpPr txBox="1"/>
+          <p:nvPr/>
+        </p:nvSpPr>
+        <p:spPr>
+          <a:xfrm>
+            <a:off x="731520" y="2934570"/>
+            <a:ext cx="3200400" cy="271054"/>
+          </a:xfrm>
+          <a:prstGeom prst="rect">
+            <a:avLst/>
+          </a:prstGeom>
+          <a:noFill/>
+        </p:spPr>
+        <p:txBody>
+          <a:bodyPr wrap="square" lIns="0" rIns="0" tIns="0" bIns="0">
+            <a:spAutoFit/>
+          </a:bodyPr>
+          <a:lstStyle/>
+          <a:p>
+            <a:r>
+              <a:rPr sz="1100" b="1">
+                <a:solidFill>
+                  <a:srgbClr val="141833"/>
+                </a:solidFill>
+                <a:latin typeface="Helvetica Neue"/>
+              </a:rPr>
+              <a:t>Sports (FIFA, UCLA, Rams/NFL)</a:t>
+            </a:r>
+          </a:p>
+        </p:txBody>
+      </p:sp>
+      <p:sp>
+        <p:nvSpPr>
+          <p:cNvPr id="16" name="Rectangle 15"/>
+          <p:cNvSpPr/>
+          <p:nvPr/>
+        </p:nvSpPr>
+        <p:spPr>
+          <a:xfrm>
+            <a:off x="4114800" y="2987801"/>
+            <a:ext cx="1660489" cy="128016"/>
           </a:xfrm>
           <a:prstGeom prst="rect">
             <a:avLst/>
@@ -16083,14 +18425,14 @@
       </p:sp>
       <p:sp>
         <p:nvSpPr>
-          <p:cNvPr id="8" name="TextBox 7"/>
-          <p:cNvSpPr txBox="1"/>
-          <p:nvPr/>
-        </p:nvSpPr>
-        <p:spPr>
-          <a:xfrm>
-            <a:off x="10424160" y="2121408"/>
-            <a:ext cx="2286000" cy="291904"/>
+          <p:cNvPr id="17" name="TextBox 16"/>
+          <p:cNvSpPr txBox="1"/>
+          <p:nvPr/>
+        </p:nvSpPr>
+        <p:spPr>
+          <a:xfrm>
+            <a:off x="5866729" y="2934570"/>
+            <a:ext cx="2286000" cy="271054"/>
           </a:xfrm>
           <a:prstGeom prst="rect">
             <a:avLst/>
@@ -16110,21 +18452,21 @@
                 </a:solidFill>
                 <a:latin typeface="Helvetica Neue"/>
               </a:rPr>
-              <a:t>297,372 views · 214 posts</a:t>
-            </a:r>
-          </a:p>
-        </p:txBody>
-      </p:sp>
-      <p:sp>
-        <p:nvSpPr>
-          <p:cNvPr id="9" name="TextBox 8"/>
-          <p:cNvSpPr txBox="1"/>
-          <p:nvPr/>
-        </p:nvSpPr>
-        <p:spPr>
-          <a:xfrm>
-            <a:off x="731520" y="2413312"/>
-            <a:ext cx="3200400" cy="291904"/>
+              <a:t>76,489 views · 43 posts</a:t>
+            </a:r>
+          </a:p>
+        </p:txBody>
+      </p:sp>
+      <p:sp>
+        <p:nvSpPr>
+          <p:cNvPr id="18" name="TextBox 17"/>
+          <p:cNvSpPr txBox="1"/>
+          <p:nvPr/>
+        </p:nvSpPr>
+        <p:spPr>
+          <a:xfrm>
+            <a:off x="731520" y="3205625"/>
+            <a:ext cx="3200400" cy="271054"/>
           </a:xfrm>
           <a:prstGeom prst="rect">
             <a:avLst/>
@@ -16144,21 +18486,133 @@
                 </a:solidFill>
                 <a:latin typeface="Helvetica Neue"/>
               </a:rPr>
-              <a:t>Military Service</a:t>
-            </a:r>
-          </a:p>
-        </p:txBody>
-      </p:sp>
-      <p:sp>
-        <p:nvSpPr>
-          <p:cNvPr id="10" name="Rectangle 9"/>
+              <a:t>Community &amp; Culture</a:t>
+            </a:r>
+          </a:p>
+        </p:txBody>
+      </p:sp>
+      <p:sp>
+        <p:nvSpPr>
+          <p:cNvPr id="19" name="Rectangle 18"/>
           <p:cNvSpPr/>
           <p:nvPr/>
         </p:nvSpPr>
         <p:spPr>
           <a:xfrm>
-            <a:off x="4114800" y="2476968"/>
-            <a:ext cx="2193622" cy="128016"/>
+            <a:off x="4114800" y="3258856"/>
+            <a:ext cx="1639996" cy="128016"/>
+          </a:xfrm>
+          <a:prstGeom prst="rect">
+            <a:avLst/>
+          </a:prstGeom>
+          <a:solidFill>
+            <a:srgbClr val="141833"/>
+          </a:solidFill>
+          <a:ln>
+            <a:noFill/>
+          </a:ln>
+          <a:effectLst/>
+        </p:spPr>
+        <p:style>
+          <a:lnRef idx="1">
+            <a:schemeClr val="accent1"/>
+          </a:lnRef>
+          <a:fillRef idx="3">
+            <a:schemeClr val="accent1"/>
+          </a:fillRef>
+          <a:effectRef idx="2">
+            <a:schemeClr val="accent1"/>
+          </a:effectRef>
+          <a:fontRef idx="minor">
+            <a:schemeClr val="lt1"/>
+          </a:fontRef>
+        </p:style>
+        <p:txBody>
+          <a:bodyPr rtlCol="0" anchor="ctr"/>
+          <a:lstStyle/>
+          <a:p>
+            <a:pPr algn="ctr"/>
+          </a:p>
+        </p:txBody>
+      </p:sp>
+      <p:sp>
+        <p:nvSpPr>
+          <p:cNvPr id="20" name="TextBox 19"/>
+          <p:cNvSpPr txBox="1"/>
+          <p:nvPr/>
+        </p:nvSpPr>
+        <p:spPr>
+          <a:xfrm>
+            <a:off x="5846236" y="3205625"/>
+            <a:ext cx="2286000" cy="271054"/>
+          </a:xfrm>
+          <a:prstGeom prst="rect">
+            <a:avLst/>
+          </a:prstGeom>
+          <a:noFill/>
+        </p:spPr>
+        <p:txBody>
+          <a:bodyPr wrap="square" lIns="0" rIns="0" tIns="0" bIns="0">
+            <a:spAutoFit/>
+          </a:bodyPr>
+          <a:lstStyle/>
+          <a:p>
+            <a:r>
+              <a:rPr sz="900" b="0">
+                <a:solidFill>
+                  <a:srgbClr val="6B7082"/>
+                </a:solidFill>
+                <a:latin typeface="Helvetica Neue"/>
+              </a:rPr>
+              <a:t>75,545 views · 71 posts</a:t>
+            </a:r>
+          </a:p>
+        </p:txBody>
+      </p:sp>
+      <p:sp>
+        <p:nvSpPr>
+          <p:cNvPr id="21" name="TextBox 20"/>
+          <p:cNvSpPr txBox="1"/>
+          <p:nvPr/>
+        </p:nvSpPr>
+        <p:spPr>
+          <a:xfrm>
+            <a:off x="731520" y="3476679"/>
+            <a:ext cx="3200400" cy="271054"/>
+          </a:xfrm>
+          <a:prstGeom prst="rect">
+            <a:avLst/>
+          </a:prstGeom>
+          <a:noFill/>
+        </p:spPr>
+        <p:txBody>
+          <a:bodyPr wrap="square" lIns="0" rIns="0" tIns="0" bIns="0">
+            <a:spAutoFit/>
+          </a:bodyPr>
+          <a:lstStyle/>
+          <a:p>
+            <a:r>
+              <a:rPr sz="1100" b="1">
+                <a:solidFill>
+                  <a:srgbClr val="141833"/>
+                </a:solidFill>
+                <a:latin typeface="Helvetica Neue"/>
+              </a:rPr>
+              <a:t>Downtown Development</a:t>
+            </a:r>
+          </a:p>
+        </p:txBody>
+      </p:sp>
+      <p:sp>
+        <p:nvSpPr>
+          <p:cNvPr id="22" name="Rectangle 21"/>
+          <p:cNvSpPr/>
+          <p:nvPr/>
+        </p:nvSpPr>
+        <p:spPr>
+          <a:xfrm>
+            <a:off x="4114800" y="3529910"/>
+            <a:ext cx="1122565" cy="128016"/>
           </a:xfrm>
           <a:prstGeom prst="rect">
             <a:avLst/>
@@ -16195,14 +18649,14 @@
       </p:sp>
       <p:sp>
         <p:nvSpPr>
-          <p:cNvPr id="11" name="TextBox 10"/>
-          <p:cNvSpPr txBox="1"/>
-          <p:nvPr/>
-        </p:nvSpPr>
-        <p:spPr>
-          <a:xfrm>
-            <a:off x="6399862" y="2413312"/>
-            <a:ext cx="2286000" cy="291904"/>
+          <p:cNvPr id="23" name="TextBox 22"/>
+          <p:cNvSpPr txBox="1"/>
+          <p:nvPr/>
+        </p:nvSpPr>
+        <p:spPr>
+          <a:xfrm>
+            <a:off x="5328805" y="3476679"/>
+            <a:ext cx="2286000" cy="271054"/>
           </a:xfrm>
           <a:prstGeom prst="rect">
             <a:avLst/>
@@ -16222,21 +18676,21 @@
                 </a:solidFill>
                 <a:latin typeface="Helvetica Neue"/>
               </a:rPr>
-              <a:t>104,910 views · 48 posts</a:t>
-            </a:r>
-          </a:p>
-        </p:txBody>
-      </p:sp>
-      <p:sp>
-        <p:nvSpPr>
-          <p:cNvPr id="12" name="TextBox 11"/>
-          <p:cNvSpPr txBox="1"/>
-          <p:nvPr/>
-        </p:nvSpPr>
-        <p:spPr>
-          <a:xfrm>
-            <a:off x="731520" y="2705217"/>
-            <a:ext cx="3200400" cy="291904"/>
+              <a:t>51,710 views · 20 posts</a:t>
+            </a:r>
+          </a:p>
+        </p:txBody>
+      </p:sp>
+      <p:sp>
+        <p:nvSpPr>
+          <p:cNvPr id="24" name="TextBox 23"/>
+          <p:cNvSpPr txBox="1"/>
+          <p:nvPr/>
+        </p:nvSpPr>
+        <p:spPr>
+          <a:xfrm>
+            <a:off x="731520" y="3747733"/>
+            <a:ext cx="3200400" cy="271054"/>
           </a:xfrm>
           <a:prstGeom prst="rect">
             <a:avLst/>
@@ -16256,21 +18710,357 @@
                 </a:solidFill>
                 <a:latin typeface="Helvetica Neue"/>
               </a:rPr>
-              <a:t>Food &amp; Local Flavor</a:t>
-            </a:r>
-          </a:p>
-        </p:txBody>
-      </p:sp>
-      <p:sp>
-        <p:nvSpPr>
-          <p:cNvPr id="13" name="Rectangle 12"/>
+              <a:t>City Hall &amp; Civic Issues</a:t>
+            </a:r>
+          </a:p>
+        </p:txBody>
+      </p:sp>
+      <p:sp>
+        <p:nvSpPr>
+          <p:cNvPr id="25" name="Rectangle 24"/>
           <p:cNvSpPr/>
           <p:nvPr/>
         </p:nvSpPr>
         <p:spPr>
           <a:xfrm>
-            <a:off x="4114800" y="2768873"/>
-            <a:ext cx="2111824" cy="128016"/>
+            <a:off x="4114800" y="3800964"/>
+            <a:ext cx="906410" cy="128016"/>
+          </a:xfrm>
+          <a:prstGeom prst="rect">
+            <a:avLst/>
+          </a:prstGeom>
+          <a:solidFill>
+            <a:srgbClr val="2F3C7E"/>
+          </a:solidFill>
+          <a:ln>
+            <a:noFill/>
+          </a:ln>
+          <a:effectLst/>
+        </p:spPr>
+        <p:style>
+          <a:lnRef idx="1">
+            <a:schemeClr val="accent1"/>
+          </a:lnRef>
+          <a:fillRef idx="3">
+            <a:schemeClr val="accent1"/>
+          </a:fillRef>
+          <a:effectRef idx="2">
+            <a:schemeClr val="accent1"/>
+          </a:effectRef>
+          <a:fontRef idx="minor">
+            <a:schemeClr val="lt1"/>
+          </a:fontRef>
+        </p:style>
+        <p:txBody>
+          <a:bodyPr rtlCol="0" anchor="ctr"/>
+          <a:lstStyle/>
+          <a:p>
+            <a:pPr algn="ctr"/>
+          </a:p>
+        </p:txBody>
+      </p:sp>
+      <p:sp>
+        <p:nvSpPr>
+          <p:cNvPr id="26" name="TextBox 25"/>
+          <p:cNvSpPr txBox="1"/>
+          <p:nvPr/>
+        </p:nvSpPr>
+        <p:spPr>
+          <a:xfrm>
+            <a:off x="5112650" y="3747733"/>
+            <a:ext cx="2286000" cy="271054"/>
+          </a:xfrm>
+          <a:prstGeom prst="rect">
+            <a:avLst/>
+          </a:prstGeom>
+          <a:noFill/>
+        </p:spPr>
+        <p:txBody>
+          <a:bodyPr wrap="square" lIns="0" rIns="0" tIns="0" bIns="0">
+            <a:spAutoFit/>
+          </a:bodyPr>
+          <a:lstStyle/>
+          <a:p>
+            <a:r>
+              <a:rPr sz="900" b="0">
+                <a:solidFill>
+                  <a:srgbClr val="6B7082"/>
+                </a:solidFill>
+                <a:latin typeface="Helvetica Neue"/>
+              </a:rPr>
+              <a:t>41,753 views · 49 posts</a:t>
+            </a:r>
+          </a:p>
+        </p:txBody>
+      </p:sp>
+      <p:sp>
+        <p:nvSpPr>
+          <p:cNvPr id="27" name="TextBox 26"/>
+          <p:cNvSpPr txBox="1"/>
+          <p:nvPr/>
+        </p:nvSpPr>
+        <p:spPr>
+          <a:xfrm>
+            <a:off x="731520" y="4018787"/>
+            <a:ext cx="3200400" cy="271054"/>
+          </a:xfrm>
+          <a:prstGeom prst="rect">
+            <a:avLst/>
+          </a:prstGeom>
+          <a:noFill/>
+        </p:spPr>
+        <p:txBody>
+          <a:bodyPr wrap="square" lIns="0" rIns="0" tIns="0" bIns="0">
+            <a:spAutoFit/>
+          </a:bodyPr>
+          <a:lstStyle/>
+          <a:p>
+            <a:r>
+              <a:rPr sz="1100" b="1">
+                <a:solidFill>
+                  <a:srgbClr val="141833"/>
+                </a:solidFill>
+                <a:latin typeface="Helvetica Neue"/>
+              </a:rPr>
+              <a:t>Political Individual Highlights</a:t>
+            </a:r>
+          </a:p>
+        </p:txBody>
+      </p:sp>
+      <p:sp>
+        <p:nvSpPr>
+          <p:cNvPr id="28" name="Rectangle 27"/>
+          <p:cNvSpPr/>
+          <p:nvPr/>
+        </p:nvSpPr>
+        <p:spPr>
+          <a:xfrm>
+            <a:off x="4114800" y="4072019"/>
+            <a:ext cx="764781" cy="128016"/>
+          </a:xfrm>
+          <a:prstGeom prst="rect">
+            <a:avLst/>
+          </a:prstGeom>
+          <a:solidFill>
+            <a:srgbClr val="2E86AB"/>
+          </a:solidFill>
+          <a:ln>
+            <a:noFill/>
+          </a:ln>
+          <a:effectLst/>
+        </p:spPr>
+        <p:style>
+          <a:lnRef idx="1">
+            <a:schemeClr val="accent1"/>
+          </a:lnRef>
+          <a:fillRef idx="3">
+            <a:schemeClr val="accent1"/>
+          </a:fillRef>
+          <a:effectRef idx="2">
+            <a:schemeClr val="accent1"/>
+          </a:effectRef>
+          <a:fontRef idx="minor">
+            <a:schemeClr val="lt1"/>
+          </a:fontRef>
+        </p:style>
+        <p:txBody>
+          <a:bodyPr rtlCol="0" anchor="ctr"/>
+          <a:lstStyle/>
+          <a:p>
+            <a:pPr algn="ctr"/>
+          </a:p>
+        </p:txBody>
+      </p:sp>
+      <p:sp>
+        <p:nvSpPr>
+          <p:cNvPr id="29" name="TextBox 28"/>
+          <p:cNvSpPr txBox="1"/>
+          <p:nvPr/>
+        </p:nvSpPr>
+        <p:spPr>
+          <a:xfrm>
+            <a:off x="4971021" y="4018787"/>
+            <a:ext cx="2286000" cy="271054"/>
+          </a:xfrm>
+          <a:prstGeom prst="rect">
+            <a:avLst/>
+          </a:prstGeom>
+          <a:noFill/>
+        </p:spPr>
+        <p:txBody>
+          <a:bodyPr wrap="square" lIns="0" rIns="0" tIns="0" bIns="0">
+            <a:spAutoFit/>
+          </a:bodyPr>
+          <a:lstStyle/>
+          <a:p>
+            <a:r>
+              <a:rPr sz="900" b="0">
+                <a:solidFill>
+                  <a:srgbClr val="6B7082"/>
+                </a:solidFill>
+                <a:latin typeface="Helvetica Neue"/>
+              </a:rPr>
+              <a:t>35,229 views · 37 posts</a:t>
+            </a:r>
+          </a:p>
+        </p:txBody>
+      </p:sp>
+      <p:sp>
+        <p:nvSpPr>
+          <p:cNvPr id="30" name="TextBox 29"/>
+          <p:cNvSpPr txBox="1"/>
+          <p:nvPr/>
+        </p:nvSpPr>
+        <p:spPr>
+          <a:xfrm>
+            <a:off x="731520" y="4289842"/>
+            <a:ext cx="3200400" cy="271054"/>
+          </a:xfrm>
+          <a:prstGeom prst="rect">
+            <a:avLst/>
+          </a:prstGeom>
+          <a:noFill/>
+        </p:spPr>
+        <p:txBody>
+          <a:bodyPr wrap="square" lIns="0" rIns="0" tIns="0" bIns="0">
+            <a:spAutoFit/>
+          </a:bodyPr>
+          <a:lstStyle/>
+          <a:p>
+            <a:r>
+              <a:rPr sz="1100" b="1">
+                <a:solidFill>
+                  <a:srgbClr val="141833"/>
+                </a:solidFill>
+                <a:latin typeface="Helvetica Neue"/>
+              </a:rPr>
+              <a:t>Legislation &amp; Policy Watch</a:t>
+            </a:r>
+          </a:p>
+        </p:txBody>
+      </p:sp>
+      <p:sp>
+        <p:nvSpPr>
+          <p:cNvPr id="31" name="Rectangle 30"/>
+          <p:cNvSpPr/>
+          <p:nvPr/>
+        </p:nvSpPr>
+        <p:spPr>
+          <a:xfrm>
+            <a:off x="4114800" y="4343073"/>
+            <a:ext cx="427686" cy="128016"/>
+          </a:xfrm>
+          <a:prstGeom prst="rect">
+            <a:avLst/>
+          </a:prstGeom>
+          <a:solidFill>
+            <a:srgbClr val="2F3C7E"/>
+          </a:solidFill>
+          <a:ln>
+            <a:noFill/>
+          </a:ln>
+          <a:effectLst/>
+        </p:spPr>
+        <p:style>
+          <a:lnRef idx="1">
+            <a:schemeClr val="accent1"/>
+          </a:lnRef>
+          <a:fillRef idx="3">
+            <a:schemeClr val="accent1"/>
+          </a:fillRef>
+          <a:effectRef idx="2">
+            <a:schemeClr val="accent1"/>
+          </a:effectRef>
+          <a:fontRef idx="minor">
+            <a:schemeClr val="lt1"/>
+          </a:fontRef>
+        </p:style>
+        <p:txBody>
+          <a:bodyPr rtlCol="0" anchor="ctr"/>
+          <a:lstStyle/>
+          <a:p>
+            <a:pPr algn="ctr"/>
+          </a:p>
+        </p:txBody>
+      </p:sp>
+      <p:sp>
+        <p:nvSpPr>
+          <p:cNvPr id="32" name="TextBox 31"/>
+          <p:cNvSpPr txBox="1"/>
+          <p:nvPr/>
+        </p:nvSpPr>
+        <p:spPr>
+          <a:xfrm>
+            <a:off x="4633926" y="4289842"/>
+            <a:ext cx="2286000" cy="271054"/>
+          </a:xfrm>
+          <a:prstGeom prst="rect">
+            <a:avLst/>
+          </a:prstGeom>
+          <a:noFill/>
+        </p:spPr>
+        <p:txBody>
+          <a:bodyPr wrap="square" lIns="0" rIns="0" tIns="0" bIns="0">
+            <a:spAutoFit/>
+          </a:bodyPr>
+          <a:lstStyle/>
+          <a:p>
+            <a:r>
+              <a:rPr sz="900" b="0">
+                <a:solidFill>
+                  <a:srgbClr val="6B7082"/>
+                </a:solidFill>
+                <a:latin typeface="Helvetica Neue"/>
+              </a:rPr>
+              <a:t>19,701 views · 42 posts</a:t>
+            </a:r>
+          </a:p>
+        </p:txBody>
+      </p:sp>
+      <p:sp>
+        <p:nvSpPr>
+          <p:cNvPr id="33" name="TextBox 32"/>
+          <p:cNvSpPr txBox="1"/>
+          <p:nvPr/>
+        </p:nvSpPr>
+        <p:spPr>
+          <a:xfrm>
+            <a:off x="731520" y="4560896"/>
+            <a:ext cx="3200400" cy="271054"/>
+          </a:xfrm>
+          <a:prstGeom prst="rect">
+            <a:avLst/>
+          </a:prstGeom>
+          <a:noFill/>
+        </p:spPr>
+        <p:txBody>
+          <a:bodyPr wrap="square" lIns="0" rIns="0" tIns="0" bIns="0">
+            <a:spAutoFit/>
+          </a:bodyPr>
+          <a:lstStyle/>
+          <a:p>
+            <a:r>
+              <a:rPr sz="1100" b="1">
+                <a:solidFill>
+                  <a:srgbClr val="141833"/>
+                </a:solidFill>
+                <a:latin typeface="Helvetica Neue"/>
+              </a:rPr>
+              <a:t>Resident Highlights</a:t>
+            </a:r>
+          </a:p>
+        </p:txBody>
+      </p:sp>
+      <p:sp>
+        <p:nvSpPr>
+          <p:cNvPr id="34" name="Rectangle 33"/>
+          <p:cNvSpPr/>
+          <p:nvPr/>
+        </p:nvSpPr>
+        <p:spPr>
+          <a:xfrm>
+            <a:off x="4114800" y="4614127"/>
+            <a:ext cx="254883" cy="128016"/>
           </a:xfrm>
           <a:prstGeom prst="rect">
             <a:avLst/>
@@ -16307,14 +19097,14 @@
       </p:sp>
       <p:sp>
         <p:nvSpPr>
-          <p:cNvPr id="14" name="TextBox 13"/>
-          <p:cNvSpPr txBox="1"/>
-          <p:nvPr/>
-        </p:nvSpPr>
-        <p:spPr>
-          <a:xfrm>
-            <a:off x="6318064" y="2705217"/>
-            <a:ext cx="2286000" cy="291904"/>
+          <p:cNvPr id="35" name="TextBox 34"/>
+          <p:cNvSpPr txBox="1"/>
+          <p:nvPr/>
+        </p:nvSpPr>
+        <p:spPr>
+          <a:xfrm>
+            <a:off x="4461123" y="4560896"/>
+            <a:ext cx="2286000" cy="271054"/>
           </a:xfrm>
           <a:prstGeom prst="rect">
             <a:avLst/>
@@ -16334,21 +19124,21 @@
                 </a:solidFill>
                 <a:latin typeface="Helvetica Neue"/>
               </a:rPr>
-              <a:t>100,998 views · 63 posts</a:t>
-            </a:r>
-          </a:p>
-        </p:txBody>
-      </p:sp>
-      <p:sp>
-        <p:nvSpPr>
-          <p:cNvPr id="15" name="TextBox 14"/>
-          <p:cNvSpPr txBox="1"/>
-          <p:nvPr/>
-        </p:nvSpPr>
-        <p:spPr>
-          <a:xfrm>
-            <a:off x="731520" y="2997121"/>
-            <a:ext cx="3200400" cy="291904"/>
+              <a:t>11,741 views · 13 posts</a:t>
+            </a:r>
+          </a:p>
+        </p:txBody>
+      </p:sp>
+      <p:sp>
+        <p:nvSpPr>
+          <p:cNvPr id="36" name="TextBox 35"/>
+          <p:cNvSpPr txBox="1"/>
+          <p:nvPr/>
+        </p:nvSpPr>
+        <p:spPr>
+          <a:xfrm>
+            <a:off x="731520" y="4831950"/>
+            <a:ext cx="3200400" cy="271054"/>
           </a:xfrm>
           <a:prstGeom prst="rect">
             <a:avLst/>
@@ -16368,21 +19158,21 @@
                 </a:solidFill>
                 <a:latin typeface="Helvetica Neue"/>
               </a:rPr>
-              <a:t>Truth &amp; Scandal Reporting</a:t>
-            </a:r>
-          </a:p>
-        </p:txBody>
-      </p:sp>
-      <p:sp>
-        <p:nvSpPr>
-          <p:cNvPr id="16" name="Rectangle 15"/>
+              <a:t>American Pride</a:t>
+            </a:r>
+          </a:p>
+        </p:txBody>
+      </p:sp>
+      <p:sp>
+        <p:nvSpPr>
+          <p:cNvPr id="37" name="Rectangle 36"/>
           <p:cNvSpPr/>
           <p:nvPr/>
         </p:nvSpPr>
         <p:spPr>
           <a:xfrm>
-            <a:off x="4114800" y="3060778"/>
-            <a:ext cx="1871949" cy="128016"/>
+            <a:off x="4114800" y="4885182"/>
+            <a:ext cx="168656" cy="128016"/>
           </a:xfrm>
           <a:prstGeom prst="rect">
             <a:avLst/>
@@ -16419,14 +19209,14 @@
       </p:sp>
       <p:sp>
         <p:nvSpPr>
-          <p:cNvPr id="17" name="TextBox 16"/>
-          <p:cNvSpPr txBox="1"/>
-          <p:nvPr/>
-        </p:nvSpPr>
-        <p:spPr>
-          <a:xfrm>
-            <a:off x="6078189" y="2997121"/>
-            <a:ext cx="2286000" cy="291904"/>
+          <p:cNvPr id="38" name="TextBox 37"/>
+          <p:cNvSpPr txBox="1"/>
+          <p:nvPr/>
+        </p:nvSpPr>
+        <p:spPr>
+          <a:xfrm>
+            <a:off x="4374896" y="4831950"/>
+            <a:ext cx="2286000" cy="271054"/>
           </a:xfrm>
           <a:prstGeom prst="rect">
             <a:avLst/>
@@ -16446,21 +19236,21 @@
                 </a:solidFill>
                 <a:latin typeface="Helvetica Neue"/>
               </a:rPr>
-              <a:t>89,526 views · 36 posts</a:t>
-            </a:r>
-          </a:p>
-        </p:txBody>
-      </p:sp>
-      <p:sp>
-        <p:nvSpPr>
-          <p:cNvPr id="18" name="TextBox 17"/>
-          <p:cNvSpPr txBox="1"/>
-          <p:nvPr/>
-        </p:nvSpPr>
-        <p:spPr>
-          <a:xfrm>
-            <a:off x="731520" y="3289026"/>
-            <a:ext cx="3200400" cy="291904"/>
+              <a:t>7,769 views · 15 posts</a:t>
+            </a:r>
+          </a:p>
+        </p:txBody>
+      </p:sp>
+      <p:sp>
+        <p:nvSpPr>
+          <p:cNvPr id="39" name="TextBox 38"/>
+          <p:cNvSpPr txBox="1"/>
+          <p:nvPr/>
+        </p:nvSpPr>
+        <p:spPr>
+          <a:xfrm>
+            <a:off x="731520" y="5103005"/>
+            <a:ext cx="3200400" cy="271054"/>
           </a:xfrm>
           <a:prstGeom prst="rect">
             <a:avLst/>
@@ -16480,27 +19270,27 @@
                 </a:solidFill>
                 <a:latin typeface="Helvetica Neue"/>
               </a:rPr>
-              <a:t>Elections &amp; Judicial</a:t>
-            </a:r>
-          </a:p>
-        </p:txBody>
-      </p:sp>
-      <p:sp>
-        <p:nvSpPr>
-          <p:cNvPr id="19" name="Rectangle 18"/>
+              <a:t>Leadership &amp; Life Lessons</a:t>
+            </a:r>
+          </a:p>
+        </p:txBody>
+      </p:sp>
+      <p:sp>
+        <p:nvSpPr>
+          <p:cNvPr id="40" name="Rectangle 39"/>
           <p:cNvSpPr/>
           <p:nvPr/>
         </p:nvSpPr>
         <p:spPr>
           <a:xfrm>
-            <a:off x="4114800" y="3352682"/>
-            <a:ext cx="1730204" cy="128016"/>
+            <a:off x="4114800" y="5156236"/>
+            <a:ext cx="131338" cy="128016"/>
           </a:xfrm>
           <a:prstGeom prst="rect">
             <a:avLst/>
           </a:prstGeom>
           <a:solidFill>
-            <a:srgbClr val="2F3C7E"/>
+            <a:srgbClr val="2E86AB"/>
           </a:solidFill>
           <a:ln>
             <a:noFill/>
@@ -16531,14 +19321,14 @@
       </p:sp>
       <p:sp>
         <p:nvSpPr>
-          <p:cNvPr id="20" name="TextBox 19"/>
-          <p:cNvSpPr txBox="1"/>
-          <p:nvPr/>
-        </p:nvSpPr>
-        <p:spPr>
-          <a:xfrm>
-            <a:off x="5936444" y="3289026"/>
-            <a:ext cx="2286000" cy="291904"/>
+          <p:cNvPr id="41" name="TextBox 40"/>
+          <p:cNvSpPr txBox="1"/>
+          <p:nvPr/>
+        </p:nvSpPr>
+        <p:spPr>
+          <a:xfrm>
+            <a:off x="4337578" y="5103005"/>
+            <a:ext cx="2286000" cy="271054"/>
           </a:xfrm>
           <a:prstGeom prst="rect">
             <a:avLst/>
@@ -16558,21 +19348,21 @@
                 </a:solidFill>
                 <a:latin typeface="Helvetica Neue"/>
               </a:rPr>
-              <a:t>82,747 views · 111 posts</a:t>
-            </a:r>
-          </a:p>
-        </p:txBody>
-      </p:sp>
-      <p:sp>
-        <p:nvSpPr>
-          <p:cNvPr id="21" name="TextBox 20"/>
-          <p:cNvSpPr txBox="1"/>
-          <p:nvPr/>
-        </p:nvSpPr>
-        <p:spPr>
-          <a:xfrm>
-            <a:off x="731520" y="3580931"/>
-            <a:ext cx="3200400" cy="291904"/>
+              <a:t>6,050 views · 21 posts</a:t>
+            </a:r>
+          </a:p>
+        </p:txBody>
+      </p:sp>
+      <p:sp>
+        <p:nvSpPr>
+          <p:cNvPr id="42" name="TextBox 41"/>
+          <p:cNvSpPr txBox="1"/>
+          <p:nvPr/>
+        </p:nvSpPr>
+        <p:spPr>
+          <a:xfrm>
+            <a:off x="731520" y="5374059"/>
+            <a:ext cx="3200400" cy="271054"/>
           </a:xfrm>
           <a:prstGeom prst="rect">
             <a:avLst/>
@@ -16592,27 +19382,27 @@
                 </a:solidFill>
                 <a:latin typeface="Helvetica Neue"/>
               </a:rPr>
-              <a:t>Community &amp; Culture</a:t>
-            </a:r>
-          </a:p>
-        </p:txBody>
-      </p:sp>
-      <p:sp>
-        <p:nvSpPr>
-          <p:cNvPr id="22" name="Rectangle 21"/>
+              <a:t>Brand Growth Content</a:t>
+            </a:r>
+          </a:p>
+        </p:txBody>
+      </p:sp>
+      <p:sp>
+        <p:nvSpPr>
+          <p:cNvPr id="43" name="Rectangle 42"/>
           <p:cNvSpPr/>
           <p:nvPr/>
         </p:nvSpPr>
         <p:spPr>
           <a:xfrm>
-            <a:off x="4114800" y="3644587"/>
-            <a:ext cx="1579613" cy="128016"/>
+            <a:off x="4114800" y="5427290"/>
+            <a:ext cx="48063" cy="128016"/>
           </a:xfrm>
           <a:prstGeom prst="rect">
             <a:avLst/>
           </a:prstGeom>
           <a:solidFill>
-            <a:srgbClr val="141833"/>
+            <a:srgbClr val="E87E8F"/>
           </a:solidFill>
           <a:ln>
             <a:noFill/>
@@ -16643,14 +19433,14 @@
       </p:sp>
       <p:sp>
         <p:nvSpPr>
-          <p:cNvPr id="23" name="TextBox 22"/>
-          <p:cNvSpPr txBox="1"/>
-          <p:nvPr/>
-        </p:nvSpPr>
-        <p:spPr>
-          <a:xfrm>
-            <a:off x="5785853" y="3580931"/>
-            <a:ext cx="2286000" cy="291904"/>
+          <p:cNvPr id="44" name="TextBox 43"/>
+          <p:cNvSpPr txBox="1"/>
+          <p:nvPr/>
+        </p:nvSpPr>
+        <p:spPr>
+          <a:xfrm>
+            <a:off x="4254303" y="5374059"/>
+            <a:ext cx="2286000" cy="271054"/>
           </a:xfrm>
           <a:prstGeom prst="rect">
             <a:avLst/>
@@ -16670,21 +19460,21 @@
                 </a:solidFill>
                 <a:latin typeface="Helvetica Neue"/>
               </a:rPr>
-              <a:t>75,545 views · 71 posts</a:t>
-            </a:r>
-          </a:p>
-        </p:txBody>
-      </p:sp>
-      <p:sp>
-        <p:nvSpPr>
-          <p:cNvPr id="24" name="TextBox 23"/>
-          <p:cNvSpPr txBox="1"/>
-          <p:nvPr/>
-        </p:nvSpPr>
-        <p:spPr>
-          <a:xfrm>
-            <a:off x="731520" y="3872835"/>
-            <a:ext cx="3200400" cy="291904"/>
+              <a:t>2,214 views · 4 posts</a:t>
+            </a:r>
+          </a:p>
+        </p:txBody>
+      </p:sp>
+      <p:sp>
+        <p:nvSpPr>
+          <p:cNvPr id="45" name="TextBox 44"/>
+          <p:cNvSpPr txBox="1"/>
+          <p:nvPr/>
+        </p:nvSpPr>
+        <p:spPr>
+          <a:xfrm>
+            <a:off x="731520" y="5645113"/>
+            <a:ext cx="3200400" cy="271054"/>
           </a:xfrm>
           <a:prstGeom prst="rect">
             <a:avLst/>
@@ -16704,21 +19494,21 @@
                 </a:solidFill>
                 <a:latin typeface="Helvetica Neue"/>
               </a:rPr>
-              <a:t>FIFA / World Cup</a:t>
-            </a:r>
-          </a:p>
-        </p:txBody>
-      </p:sp>
-      <p:sp>
-        <p:nvSpPr>
-          <p:cNvPr id="25" name="Rectangle 24"/>
+              <a:t>Other / Uncategorized</a:t>
+            </a:r>
+          </a:p>
+        </p:txBody>
+      </p:sp>
+      <p:sp>
+        <p:nvSpPr>
+          <p:cNvPr id="46" name="Rectangle 45"/>
           <p:cNvSpPr/>
           <p:nvPr/>
         </p:nvSpPr>
         <p:spPr>
           <a:xfrm>
-            <a:off x="4114800" y="3936491"/>
-            <a:ext cx="1345907" cy="128016"/>
+            <a:off x="4114800" y="5698344"/>
+            <a:ext cx="45720" cy="128016"/>
           </a:xfrm>
           <a:prstGeom prst="rect">
             <a:avLst/>
@@ -16755,14 +19545,14 @@
       </p:sp>
       <p:sp>
         <p:nvSpPr>
-          <p:cNvPr id="26" name="TextBox 25"/>
-          <p:cNvSpPr txBox="1"/>
-          <p:nvPr/>
-        </p:nvSpPr>
-        <p:spPr>
-          <a:xfrm>
-            <a:off x="5552147" y="3872835"/>
-            <a:ext cx="2286000" cy="291904"/>
+          <p:cNvPr id="47" name="TextBox 46"/>
+          <p:cNvSpPr txBox="1"/>
+          <p:nvPr/>
+        </p:nvSpPr>
+        <p:spPr>
+          <a:xfrm>
+            <a:off x="4251959" y="5645113"/>
+            <a:ext cx="2286000" cy="271054"/>
           </a:xfrm>
           <a:prstGeom prst="rect">
             <a:avLst/>
@@ -16782,686 +19572,14 @@
                 </a:solidFill>
                 <a:latin typeface="Helvetica Neue"/>
               </a:rPr>
-              <a:t>64,368 views · 27 posts</a:t>
-            </a:r>
-          </a:p>
-        </p:txBody>
-      </p:sp>
-      <p:sp>
-        <p:nvSpPr>
-          <p:cNvPr id="27" name="TextBox 26"/>
-          <p:cNvSpPr txBox="1"/>
-          <p:nvPr/>
-        </p:nvSpPr>
-        <p:spPr>
-          <a:xfrm>
-            <a:off x="731520" y="4164740"/>
-            <a:ext cx="3200400" cy="291904"/>
-          </a:xfrm>
-          <a:prstGeom prst="rect">
-            <a:avLst/>
-          </a:prstGeom>
-          <a:noFill/>
-        </p:spPr>
-        <p:txBody>
-          <a:bodyPr wrap="square" lIns="0" rIns="0" tIns="0" bIns="0">
-            <a:spAutoFit/>
-          </a:bodyPr>
-          <a:lstStyle/>
-          <a:p>
-            <a:r>
-              <a:rPr sz="1100" b="1">
-                <a:solidFill>
-                  <a:srgbClr val="141833"/>
-                </a:solidFill>
-                <a:latin typeface="Helvetica Neue"/>
-              </a:rPr>
-              <a:t>Downtown Development</a:t>
-            </a:r>
-          </a:p>
-        </p:txBody>
-      </p:sp>
-      <p:sp>
-        <p:nvSpPr>
-          <p:cNvPr id="28" name="Rectangle 27"/>
-          <p:cNvSpPr/>
-          <p:nvPr/>
-        </p:nvSpPr>
-        <p:spPr>
-          <a:xfrm>
-            <a:off x="4114800" y="4228396"/>
-            <a:ext cx="1081233" cy="128016"/>
-          </a:xfrm>
-          <a:prstGeom prst="rect">
-            <a:avLst/>
-          </a:prstGeom>
-          <a:solidFill>
-            <a:srgbClr val="C9A227"/>
-          </a:solidFill>
-          <a:ln>
-            <a:noFill/>
-          </a:ln>
-          <a:effectLst/>
-        </p:spPr>
-        <p:style>
-          <a:lnRef idx="1">
-            <a:schemeClr val="accent1"/>
-          </a:lnRef>
-          <a:fillRef idx="3">
-            <a:schemeClr val="accent1"/>
-          </a:fillRef>
-          <a:effectRef idx="2">
-            <a:schemeClr val="accent1"/>
-          </a:effectRef>
-          <a:fontRef idx="minor">
-            <a:schemeClr val="lt1"/>
-          </a:fontRef>
-        </p:style>
-        <p:txBody>
-          <a:bodyPr rtlCol="0" anchor="ctr"/>
-          <a:lstStyle/>
-          <a:p>
-            <a:pPr algn="ctr"/>
-          </a:p>
-        </p:txBody>
-      </p:sp>
-      <p:sp>
-        <p:nvSpPr>
-          <p:cNvPr id="29" name="TextBox 28"/>
-          <p:cNvSpPr txBox="1"/>
-          <p:nvPr/>
-        </p:nvSpPr>
-        <p:spPr>
-          <a:xfrm>
-            <a:off x="5287473" y="4164740"/>
-            <a:ext cx="2286000" cy="291904"/>
-          </a:xfrm>
-          <a:prstGeom prst="rect">
-            <a:avLst/>
-          </a:prstGeom>
-          <a:noFill/>
-        </p:spPr>
-        <p:txBody>
-          <a:bodyPr wrap="square" lIns="0" rIns="0" tIns="0" bIns="0">
-            <a:spAutoFit/>
-          </a:bodyPr>
-          <a:lstStyle/>
-          <a:p>
-            <a:r>
-              <a:rPr sz="900" b="0">
-                <a:solidFill>
-                  <a:srgbClr val="6B7082"/>
-                </a:solidFill>
-                <a:latin typeface="Helvetica Neue"/>
-              </a:rPr>
-              <a:t>51,710 views · 20 posts</a:t>
-            </a:r>
-          </a:p>
-        </p:txBody>
-      </p:sp>
-      <p:sp>
-        <p:nvSpPr>
-          <p:cNvPr id="30" name="TextBox 29"/>
-          <p:cNvSpPr txBox="1"/>
-          <p:nvPr/>
-        </p:nvSpPr>
-        <p:spPr>
-          <a:xfrm>
-            <a:off x="731520" y="4456644"/>
-            <a:ext cx="3200400" cy="291904"/>
-          </a:xfrm>
-          <a:prstGeom prst="rect">
-            <a:avLst/>
-          </a:prstGeom>
-          <a:noFill/>
-        </p:spPr>
-        <p:txBody>
-          <a:bodyPr wrap="square" lIns="0" rIns="0" tIns="0" bIns="0">
-            <a:spAutoFit/>
-          </a:bodyPr>
-          <a:lstStyle/>
-          <a:p>
-            <a:r>
-              <a:rPr sz="1100" b="1">
-                <a:solidFill>
-                  <a:srgbClr val="141833"/>
-                </a:solidFill>
-                <a:latin typeface="Helvetica Neue"/>
-              </a:rPr>
-              <a:t>Political Individual Highlights</a:t>
-            </a:r>
-          </a:p>
-        </p:txBody>
-      </p:sp>
-      <p:sp>
-        <p:nvSpPr>
-          <p:cNvPr id="31" name="Rectangle 30"/>
-          <p:cNvSpPr/>
-          <p:nvPr/>
-        </p:nvSpPr>
-        <p:spPr>
-          <a:xfrm>
-            <a:off x="4114800" y="4520301"/>
-            <a:ext cx="736623" cy="128016"/>
-          </a:xfrm>
-          <a:prstGeom prst="rect">
-            <a:avLst/>
-          </a:prstGeom>
-          <a:solidFill>
-            <a:srgbClr val="2E86AB"/>
-          </a:solidFill>
-          <a:ln>
-            <a:noFill/>
-          </a:ln>
-          <a:effectLst/>
-        </p:spPr>
-        <p:style>
-          <a:lnRef idx="1">
-            <a:schemeClr val="accent1"/>
-          </a:lnRef>
-          <a:fillRef idx="3">
-            <a:schemeClr val="accent1"/>
-          </a:fillRef>
-          <a:effectRef idx="2">
-            <a:schemeClr val="accent1"/>
-          </a:effectRef>
-          <a:fontRef idx="minor">
-            <a:schemeClr val="lt1"/>
-          </a:fontRef>
-        </p:style>
-        <p:txBody>
-          <a:bodyPr rtlCol="0" anchor="ctr"/>
-          <a:lstStyle/>
-          <a:p>
-            <a:pPr algn="ctr"/>
-          </a:p>
-        </p:txBody>
-      </p:sp>
-      <p:sp>
-        <p:nvSpPr>
-          <p:cNvPr id="32" name="TextBox 31"/>
-          <p:cNvSpPr txBox="1"/>
-          <p:nvPr/>
-        </p:nvSpPr>
-        <p:spPr>
-          <a:xfrm>
-            <a:off x="4942863" y="4456644"/>
-            <a:ext cx="2286000" cy="291904"/>
-          </a:xfrm>
-          <a:prstGeom prst="rect">
-            <a:avLst/>
-          </a:prstGeom>
-          <a:noFill/>
-        </p:spPr>
-        <p:txBody>
-          <a:bodyPr wrap="square" lIns="0" rIns="0" tIns="0" bIns="0">
-            <a:spAutoFit/>
-          </a:bodyPr>
-          <a:lstStyle/>
-          <a:p>
-            <a:r>
-              <a:rPr sz="900" b="0">
-                <a:solidFill>
-                  <a:srgbClr val="6B7082"/>
-                </a:solidFill>
-                <a:latin typeface="Helvetica Neue"/>
-              </a:rPr>
-              <a:t>35,229 views · 37 posts</a:t>
-            </a:r>
-          </a:p>
-        </p:txBody>
-      </p:sp>
-      <p:sp>
-        <p:nvSpPr>
-          <p:cNvPr id="33" name="TextBox 32"/>
-          <p:cNvSpPr txBox="1"/>
-          <p:nvPr/>
-        </p:nvSpPr>
-        <p:spPr>
-          <a:xfrm>
-            <a:off x="731520" y="4748549"/>
-            <a:ext cx="3200400" cy="291904"/>
-          </a:xfrm>
-          <a:prstGeom prst="rect">
-            <a:avLst/>
-          </a:prstGeom>
-          <a:noFill/>
-        </p:spPr>
-        <p:txBody>
-          <a:bodyPr wrap="square" lIns="0" rIns="0" tIns="0" bIns="0">
-            <a:spAutoFit/>
-          </a:bodyPr>
-          <a:lstStyle/>
-          <a:p>
-            <a:r>
-              <a:rPr sz="1100" b="1">
-                <a:solidFill>
-                  <a:srgbClr val="141833"/>
-                </a:solidFill>
-                <a:latin typeface="Helvetica Neue"/>
-              </a:rPr>
-              <a:t>Legislation &amp; Policy Watch</a:t>
-            </a:r>
-          </a:p>
-        </p:txBody>
-      </p:sp>
-      <p:sp>
-        <p:nvSpPr>
-          <p:cNvPr id="34" name="Rectangle 33"/>
-          <p:cNvSpPr/>
-          <p:nvPr/>
-        </p:nvSpPr>
-        <p:spPr>
-          <a:xfrm>
-            <a:off x="4114800" y="4812205"/>
-            <a:ext cx="227767" cy="128016"/>
-          </a:xfrm>
-          <a:prstGeom prst="rect">
-            <a:avLst/>
-          </a:prstGeom>
-          <a:solidFill>
-            <a:srgbClr val="2F3C7E"/>
-          </a:solidFill>
-          <a:ln>
-            <a:noFill/>
-          </a:ln>
-          <a:effectLst/>
-        </p:spPr>
-        <p:style>
-          <a:lnRef idx="1">
-            <a:schemeClr val="accent1"/>
-          </a:lnRef>
-          <a:fillRef idx="3">
-            <a:schemeClr val="accent1"/>
-          </a:fillRef>
-          <a:effectRef idx="2">
-            <a:schemeClr val="accent1"/>
-          </a:effectRef>
-          <a:fontRef idx="minor">
-            <a:schemeClr val="lt1"/>
-          </a:fontRef>
-        </p:style>
-        <p:txBody>
-          <a:bodyPr rtlCol="0" anchor="ctr"/>
-          <a:lstStyle/>
-          <a:p>
-            <a:pPr algn="ctr"/>
-          </a:p>
-        </p:txBody>
-      </p:sp>
-      <p:sp>
-        <p:nvSpPr>
-          <p:cNvPr id="35" name="TextBox 34"/>
-          <p:cNvSpPr txBox="1"/>
-          <p:nvPr/>
-        </p:nvSpPr>
-        <p:spPr>
-          <a:xfrm>
-            <a:off x="4434007" y="4748549"/>
-            <a:ext cx="2286000" cy="291904"/>
-          </a:xfrm>
-          <a:prstGeom prst="rect">
-            <a:avLst/>
-          </a:prstGeom>
-          <a:noFill/>
-        </p:spPr>
-        <p:txBody>
-          <a:bodyPr wrap="square" lIns="0" rIns="0" tIns="0" bIns="0">
-            <a:spAutoFit/>
-          </a:bodyPr>
-          <a:lstStyle/>
-          <a:p>
-            <a:r>
-              <a:rPr sz="900" b="0">
-                <a:solidFill>
-                  <a:srgbClr val="6B7082"/>
-                </a:solidFill>
-                <a:latin typeface="Helvetica Neue"/>
-              </a:rPr>
-              <a:t>10,893 views · 25 posts</a:t>
-            </a:r>
-          </a:p>
-        </p:txBody>
-      </p:sp>
-      <p:sp>
-        <p:nvSpPr>
-          <p:cNvPr id="36" name="TextBox 35"/>
-          <p:cNvSpPr txBox="1"/>
-          <p:nvPr/>
-        </p:nvSpPr>
-        <p:spPr>
-          <a:xfrm>
-            <a:off x="731520" y="5040454"/>
-            <a:ext cx="3200400" cy="291904"/>
-          </a:xfrm>
-          <a:prstGeom prst="rect">
-            <a:avLst/>
-          </a:prstGeom>
-          <a:noFill/>
-        </p:spPr>
-        <p:txBody>
-          <a:bodyPr wrap="square" lIns="0" rIns="0" tIns="0" bIns="0">
-            <a:spAutoFit/>
-          </a:bodyPr>
-          <a:lstStyle/>
-          <a:p>
-            <a:r>
-              <a:rPr sz="1100" b="1">
-                <a:solidFill>
-                  <a:srgbClr val="141833"/>
-                </a:solidFill>
-                <a:latin typeface="Helvetica Neue"/>
-              </a:rPr>
-              <a:t>Resident Highlights</a:t>
-            </a:r>
-          </a:p>
-        </p:txBody>
-      </p:sp>
-      <p:sp>
-        <p:nvSpPr>
-          <p:cNvPr id="37" name="Rectangle 36"/>
-          <p:cNvSpPr/>
-          <p:nvPr/>
-        </p:nvSpPr>
-        <p:spPr>
-          <a:xfrm>
-            <a:off x="4114800" y="5104110"/>
-            <a:ext cx="172671" cy="128016"/>
-          </a:xfrm>
-          <a:prstGeom prst="rect">
-            <a:avLst/>
-          </a:prstGeom>
-          <a:solidFill>
-            <a:srgbClr val="1B7A43"/>
-          </a:solidFill>
-          <a:ln>
-            <a:noFill/>
-          </a:ln>
-          <a:effectLst/>
-        </p:spPr>
-        <p:style>
-          <a:lnRef idx="1">
-            <a:schemeClr val="accent1"/>
-          </a:lnRef>
-          <a:fillRef idx="3">
-            <a:schemeClr val="accent1"/>
-          </a:fillRef>
-          <a:effectRef idx="2">
-            <a:schemeClr val="accent1"/>
-          </a:effectRef>
-          <a:fontRef idx="minor">
-            <a:schemeClr val="lt1"/>
-          </a:fontRef>
-        </p:style>
-        <p:txBody>
-          <a:bodyPr rtlCol="0" anchor="ctr"/>
-          <a:lstStyle/>
-          <a:p>
-            <a:pPr algn="ctr"/>
-          </a:p>
-        </p:txBody>
-      </p:sp>
-      <p:sp>
-        <p:nvSpPr>
-          <p:cNvPr id="38" name="TextBox 37"/>
-          <p:cNvSpPr txBox="1"/>
-          <p:nvPr/>
-        </p:nvSpPr>
-        <p:spPr>
-          <a:xfrm>
-            <a:off x="4378911" y="5040454"/>
-            <a:ext cx="2286000" cy="291904"/>
-          </a:xfrm>
-          <a:prstGeom prst="rect">
-            <a:avLst/>
-          </a:prstGeom>
-          <a:noFill/>
-        </p:spPr>
-        <p:txBody>
-          <a:bodyPr wrap="square" lIns="0" rIns="0" tIns="0" bIns="0">
-            <a:spAutoFit/>
-          </a:bodyPr>
-          <a:lstStyle/>
-          <a:p>
-            <a:r>
-              <a:rPr sz="900" b="0">
-                <a:solidFill>
-                  <a:srgbClr val="6B7082"/>
-                </a:solidFill>
-                <a:latin typeface="Helvetica Neue"/>
-              </a:rPr>
-              <a:t>8,258 views · 8 posts</a:t>
-            </a:r>
-          </a:p>
-        </p:txBody>
-      </p:sp>
-      <p:sp>
-        <p:nvSpPr>
-          <p:cNvPr id="39" name="TextBox 38"/>
-          <p:cNvSpPr txBox="1"/>
-          <p:nvPr/>
-        </p:nvSpPr>
-        <p:spPr>
-          <a:xfrm>
-            <a:off x="731520" y="5332358"/>
-            <a:ext cx="3200400" cy="291904"/>
-          </a:xfrm>
-          <a:prstGeom prst="rect">
-            <a:avLst/>
-          </a:prstGeom>
-          <a:noFill/>
-        </p:spPr>
-        <p:txBody>
-          <a:bodyPr wrap="square" lIns="0" rIns="0" tIns="0" bIns="0">
-            <a:spAutoFit/>
-          </a:bodyPr>
-          <a:lstStyle/>
-          <a:p>
-            <a:r>
-              <a:rPr sz="1100" b="1">
-                <a:solidFill>
-                  <a:srgbClr val="141833"/>
-                </a:solidFill>
-                <a:latin typeface="Helvetica Neue"/>
-              </a:rPr>
-              <a:t>American Pride</a:t>
-            </a:r>
-          </a:p>
-        </p:txBody>
-      </p:sp>
-      <p:sp>
-        <p:nvSpPr>
-          <p:cNvPr id="40" name="Rectangle 39"/>
-          <p:cNvSpPr/>
-          <p:nvPr/>
-        </p:nvSpPr>
-        <p:spPr>
-          <a:xfrm>
-            <a:off x="4114800" y="5396015"/>
-            <a:ext cx="162446" cy="128016"/>
-          </a:xfrm>
-          <a:prstGeom prst="rect">
-            <a:avLst/>
-          </a:prstGeom>
-          <a:solidFill>
-            <a:srgbClr val="990011"/>
-          </a:solidFill>
-          <a:ln>
-            <a:noFill/>
-          </a:ln>
-          <a:effectLst/>
-        </p:spPr>
-        <p:style>
-          <a:lnRef idx="1">
-            <a:schemeClr val="accent1"/>
-          </a:lnRef>
-          <a:fillRef idx="3">
-            <a:schemeClr val="accent1"/>
-          </a:fillRef>
-          <a:effectRef idx="2">
-            <a:schemeClr val="accent1"/>
-          </a:effectRef>
-          <a:fontRef idx="minor">
-            <a:schemeClr val="lt1"/>
-          </a:fontRef>
-        </p:style>
-        <p:txBody>
-          <a:bodyPr rtlCol="0" anchor="ctr"/>
-          <a:lstStyle/>
-          <a:p>
-            <a:pPr algn="ctr"/>
-          </a:p>
-        </p:txBody>
-      </p:sp>
-      <p:sp>
-        <p:nvSpPr>
-          <p:cNvPr id="41" name="TextBox 40"/>
-          <p:cNvSpPr txBox="1"/>
-          <p:nvPr/>
-        </p:nvSpPr>
-        <p:spPr>
-          <a:xfrm>
-            <a:off x="4368686" y="5332358"/>
-            <a:ext cx="2286000" cy="291904"/>
-          </a:xfrm>
-          <a:prstGeom prst="rect">
-            <a:avLst/>
-          </a:prstGeom>
-          <a:noFill/>
-        </p:spPr>
-        <p:txBody>
-          <a:bodyPr wrap="square" lIns="0" rIns="0" tIns="0" bIns="0">
-            <a:spAutoFit/>
-          </a:bodyPr>
-          <a:lstStyle/>
-          <a:p>
-            <a:r>
-              <a:rPr sz="900" b="0">
-                <a:solidFill>
-                  <a:srgbClr val="6B7082"/>
-                </a:solidFill>
-                <a:latin typeface="Helvetica Neue"/>
-              </a:rPr>
-              <a:t>7,769 views · 15 posts</a:t>
-            </a:r>
-          </a:p>
-        </p:txBody>
-      </p:sp>
-      <p:sp>
-        <p:nvSpPr>
-          <p:cNvPr id="42" name="TextBox 41"/>
-          <p:cNvSpPr txBox="1"/>
-          <p:nvPr/>
-        </p:nvSpPr>
-        <p:spPr>
-          <a:xfrm>
-            <a:off x="731520" y="5624263"/>
-            <a:ext cx="3200400" cy="291904"/>
-          </a:xfrm>
-          <a:prstGeom prst="rect">
-            <a:avLst/>
-          </a:prstGeom>
-          <a:noFill/>
-        </p:spPr>
-        <p:txBody>
-          <a:bodyPr wrap="square" lIns="0" rIns="0" tIns="0" bIns="0">
-            <a:spAutoFit/>
-          </a:bodyPr>
-          <a:lstStyle/>
-          <a:p>
-            <a:r>
-              <a:rPr sz="1100" b="1">
-                <a:solidFill>
-                  <a:srgbClr val="141833"/>
-                </a:solidFill>
-                <a:latin typeface="Helvetica Neue"/>
-              </a:rPr>
-              <a:t>Brand Growth Content</a:t>
-            </a:r>
-          </a:p>
-        </p:txBody>
-      </p:sp>
-      <p:sp>
-        <p:nvSpPr>
-          <p:cNvPr id="43" name="Rectangle 42"/>
-          <p:cNvSpPr/>
-          <p:nvPr/>
-        </p:nvSpPr>
-        <p:spPr>
-          <a:xfrm>
-            <a:off x="4114800" y="5687919"/>
-            <a:ext cx="45720" cy="128016"/>
-          </a:xfrm>
-          <a:prstGeom prst="rect">
-            <a:avLst/>
-          </a:prstGeom>
-          <a:solidFill>
-            <a:srgbClr val="E87E8F"/>
-          </a:solidFill>
-          <a:ln>
-            <a:noFill/>
-          </a:ln>
-          <a:effectLst/>
-        </p:spPr>
-        <p:style>
-          <a:lnRef idx="1">
-            <a:schemeClr val="accent1"/>
-          </a:lnRef>
-          <a:fillRef idx="3">
-            <a:schemeClr val="accent1"/>
-          </a:fillRef>
-          <a:effectRef idx="2">
-            <a:schemeClr val="accent1"/>
-          </a:effectRef>
-          <a:fontRef idx="minor">
-            <a:schemeClr val="lt1"/>
-          </a:fontRef>
-        </p:style>
-        <p:txBody>
-          <a:bodyPr rtlCol="0" anchor="ctr"/>
-          <a:lstStyle/>
-          <a:p>
-            <a:pPr algn="ctr"/>
-          </a:p>
-        </p:txBody>
-      </p:sp>
-      <p:sp>
-        <p:nvSpPr>
-          <p:cNvPr id="44" name="TextBox 43"/>
-          <p:cNvSpPr txBox="1"/>
-          <p:nvPr/>
-        </p:nvSpPr>
-        <p:spPr>
-          <a:xfrm>
-            <a:off x="4251959" y="5624263"/>
-            <a:ext cx="2286000" cy="291904"/>
-          </a:xfrm>
-          <a:prstGeom prst="rect">
-            <a:avLst/>
-          </a:prstGeom>
-          <a:noFill/>
-        </p:spPr>
-        <p:txBody>
-          <a:bodyPr wrap="square" lIns="0" rIns="0" tIns="0" bIns="0">
-            <a:spAutoFit/>
-          </a:bodyPr>
-          <a:lstStyle/>
-          <a:p>
-            <a:r>
-              <a:rPr sz="900" b="0">
-                <a:solidFill>
-                  <a:srgbClr val="6B7082"/>
-                </a:solidFill>
-                <a:latin typeface="Helvetica Neue"/>
-              </a:rPr>
-              <a:t>1,111 views · 2 posts</a:t>
-            </a:r>
-          </a:p>
-        </p:txBody>
-      </p:sp>
-      <p:sp>
-        <p:nvSpPr>
-          <p:cNvPr id="45" name="TextBox 44"/>
+              <a:t>1,297 views · 25 posts</a:t>
+            </a:r>
+          </a:p>
+        </p:txBody>
+      </p:sp>
+      <p:sp>
+        <p:nvSpPr>
+          <p:cNvPr id="48" name="TextBox 47"/>
           <p:cNvSpPr txBox="1"/>
           <p:nvPr/>
         </p:nvSpPr>
@@ -18050,7 +20168,7 @@
                 </a:solidFill>
                 <a:latin typeface="Georgia"/>
               </a:rPr>
-              <a:t>104,910</a:t>
+              <a:t>286,423</a:t>
             </a:r>
           </a:p>
         </p:txBody>
@@ -18084,7 +20202,7 @@
                 </a:solidFill>
                 <a:latin typeface="Helvetica Neue"/>
               </a:rPr>
-              <a:t>48 posts · 4,541 likes</a:t>
+              <a:t>69 posts · 9,877 likes</a:t>
             </a:r>
           </a:p>
         </p:txBody>
@@ -18118,7 +20236,7 @@
                 </a:solidFill>
                 <a:latin typeface="Helvetica Neue"/>
               </a:rPr>
-              <a:t>2,186 average views per post</a:t>
+              <a:t>4,151 average views per post</a:t>
             </a:r>
           </a:p>
         </p:txBody>
@@ -18274,7 +20392,7 @@
                 </a:solidFill>
                 <a:latin typeface="Helvetica Neue"/>
               </a:rPr>
-              <a:t>#1  ·  TT  ·  37,900 views</a:t>
+              <a:t>#1  ·  IG  ·  83,242 views</a:t>
             </a:r>
           </a:p>
         </p:txBody>
@@ -18308,7 +20426,7 @@
                 </a:solidFill>
                 <a:latin typeface="Helvetica Neue"/>
               </a:rPr>
-              <a:t>Combat jobs aren't for everyone. See how your MOS determines deployment likelihood and wha</a:t>
+              <a:t>Joined the National Guard for college tuition. Now a Battalion Commander after moving ever</a:t>
             </a:r>
           </a:p>
         </p:txBody>
@@ -18430,7 +20548,7 @@
                 </a:solidFill>
                 <a:latin typeface="Helvetica Neue"/>
               </a:rPr>
-              <a:t>#2  ·  TT  ·  22,600 views</a:t>
+              <a:t>#2  ·  IG  ·  82,151 views</a:t>
             </a:r>
           </a:p>
         </p:txBody>
@@ -18464,7 +20582,7 @@
                 </a:solidFill>
                 <a:latin typeface="Helvetica Neue"/>
               </a:rPr>
-              <a:t>From Las Vegas to Battalion Commander: A journey fueled by college dreams and military opp</a:t>
+              <a:t>Visa issues left me without a country to study in. Malaysia or Singapore were the options.</a:t>
             </a:r>
           </a:p>
         </p:txBody>
@@ -18586,7 +20704,7 @@
                 </a:solidFill>
                 <a:latin typeface="Helvetica Neue"/>
               </a:rPr>
-              <a:t>#3  ·  IG  ·  5,139 views</a:t>
+              <a:t>#3  ·  TT  ·  37,900 views</a:t>
             </a:r>
           </a:p>
         </p:txBody>
@@ -18620,7 +20738,7 @@
                 </a:solidFill>
                 <a:latin typeface="Helvetica Neue"/>
               </a:rPr>
-              <a:t>Not everyone deployed sees combat, even with 20 years in. Your MOS matters. Logistics migh</a:t>
+              <a:t>Combat jobs aren't for everyone. See how your MOS determines deployment likelihood and wha</a:t>
             </a:r>
           </a:p>
         </p:txBody>
@@ -18732,7 +20850,7 @@
                 </a:solidFill>
                 <a:latin typeface="Helvetica Neue"/>
               </a:rPr>
-              <a:t>Solid mid-tier. Worth continued investment. Test scaling to see if it holds.</a:t>
+              <a:t>Strong performer. Keep investing — Military Service is a proven driver of reach.</a:t>
             </a:r>
           </a:p>
         </p:txBody>
@@ -18862,7 +20980,7 @@
                 </a:solidFill>
                 <a:latin typeface="Georgia"/>
               </a:rPr>
-              <a:t>Food &amp; Local Flavor</a:t>
+              <a:t>Truth &amp; Scandal Reporting</a:t>
             </a:r>
           </a:p>
         </p:txBody>
@@ -18896,7 +21014,7 @@
                 </a:solidFill>
                 <a:latin typeface="Helvetica Neue"/>
               </a:rPr>
-              <a:t>Restaurants, chefs, dining — the everyday Downey. Pop's Wings, Porto's, Gyu, etc.</a:t>
+              <a:t>Investigative — the heat that drives peak reach.</a:t>
             </a:r>
           </a:p>
         </p:txBody>
@@ -18926,11 +21044,11 @@
             <a:r>
               <a:rPr sz="900" b="1">
                 <a:solidFill>
-                  <a:srgbClr val="1B7A43"/>
-                </a:solidFill>
-                <a:latin typeface="Helvetica Neue"/>
-              </a:rPr>
-              <a:t>AUDIENCE (theoretical): Everyday appeal · Broad, skews Young (18-40) foodie</a:t>
+                  <a:srgbClr val="990011"/>
+                </a:solidFill>
+                <a:latin typeface="Helvetica Neue"/>
+              </a:rPr>
+              <a:t>AUDIENCE (theoretical): Cut-throat drama · punches hardest Young (18-40), broad appeal</a:t>
             </a:r>
           </a:p>
         </p:txBody>
@@ -18994,7 +21112,7 @@
             <a:avLst/>
           </a:prstGeom>
           <a:solidFill>
-            <a:srgbClr val="1B7A43"/>
+            <a:srgbClr val="990011"/>
           </a:solidFill>
           <a:ln>
             <a:noFill/>
@@ -19048,7 +21166,7 @@
             <a:r>
               <a:rPr sz="1100" b="1">
                 <a:solidFill>
-                  <a:srgbClr val="1B7A43"/>
+                  <a:srgbClr val="990011"/>
                 </a:solidFill>
                 <a:latin typeface="Helvetica Neue"/>
               </a:rPr>
@@ -19086,7 +21204,7 @@
                 </a:solidFill>
                 <a:latin typeface="Georgia"/>
               </a:rPr>
-              <a:t>100,998</a:t>
+              <a:t>102,311</a:t>
             </a:r>
           </a:p>
         </p:txBody>
@@ -19120,7 +21238,7 @@
                 </a:solidFill>
                 <a:latin typeface="Helvetica Neue"/>
               </a:rPr>
-              <a:t>63 posts · 3,242 likes</a:t>
+              <a:t>49 posts · 2,196 likes</a:t>
             </a:r>
           </a:p>
         </p:txBody>
@@ -19154,7 +21272,7 @@
                 </a:solidFill>
                 <a:latin typeface="Helvetica Neue"/>
               </a:rPr>
-              <a:t>1,603 average views per post</a:t>
+              <a:t>2,088 average views per post</a:t>
             </a:r>
           </a:p>
         </p:txBody>
@@ -19184,7 +21302,7 @@
             <a:r>
               <a:rPr sz="1100" b="1">
                 <a:solidFill>
-                  <a:srgbClr val="1B7A43"/>
+                  <a:srgbClr val="990011"/>
                 </a:solidFill>
                 <a:latin typeface="Helvetica Neue"/>
               </a:rPr>
@@ -19252,7 +21370,7 @@
             <a:avLst/>
           </a:prstGeom>
           <a:solidFill>
-            <a:srgbClr val="1B7A43"/>
+            <a:srgbClr val="990011"/>
           </a:solidFill>
           <a:ln>
             <a:noFill/>
@@ -19306,11 +21424,11 @@
             <a:r>
               <a:rPr sz="1000" b="1">
                 <a:solidFill>
-                  <a:srgbClr val="1B7A43"/>
-                </a:solidFill>
-                <a:latin typeface="Helvetica Neue"/>
-              </a:rPr>
-              <a:t>#1  ·  TT  ·  13,600 views</a:t>
+                  <a:srgbClr val="990011"/>
+                </a:solidFill>
+                <a:latin typeface="Helvetica Neue"/>
+              </a:rPr>
+              <a:t>#1  ·  TT  ·  9,839 views</a:t>
             </a:r>
           </a:p>
         </p:txBody>
@@ -19344,7 +21462,7 @@
                 </a:solidFill>
                 <a:latin typeface="Helvetica Neue"/>
               </a:rPr>
-              <a:t>Mama Lu's is coming to Downey! Asian community favorite, famous for their tenderloin. Get </a:t>
+              <a:t>Grew up in Huntington Park and still own property there. The city's o...</a:t>
             </a:r>
           </a:p>
         </p:txBody>
@@ -19408,7 +21526,7 @@
             <a:avLst/>
           </a:prstGeom>
           <a:solidFill>
-            <a:srgbClr val="1B7A43"/>
+            <a:srgbClr val="990011"/>
           </a:solidFill>
           <a:ln>
             <a:noFill/>
@@ -19462,11 +21580,11 @@
             <a:r>
               <a:rPr sz="1000" b="1">
                 <a:solidFill>
-                  <a:srgbClr val="1B7A43"/>
-                </a:solidFill>
-                <a:latin typeface="Helvetica Neue"/>
-              </a:rPr>
-              <a:t>#2  ·  TT  ·  8,352 views</a:t>
+                  <a:srgbClr val="990011"/>
+                </a:solidFill>
+                <a:latin typeface="Helvetica Neue"/>
+              </a:rPr>
+              <a:t>#2  ·  IG  ·  7,762 views</a:t>
             </a:r>
           </a:p>
         </p:txBody>
@@ -19500,7 +21618,7 @@
                 </a:solidFill>
                 <a:latin typeface="Helvetica Neue"/>
               </a:rPr>
-              <a:t>Pop's Wings just opened and it's a must-try! Their pastrami sandwich with sweet potato fri</a:t>
+              <a:t>Chaos erupted! Lissette Rivera refused to calm down, escalating until she was escorted out</a:t>
             </a:r>
           </a:p>
         </p:txBody>
@@ -19564,7 +21682,7 @@
             <a:avLst/>
           </a:prstGeom>
           <a:solidFill>
-            <a:srgbClr val="1B7A43"/>
+            <a:srgbClr val="990011"/>
           </a:solidFill>
           <a:ln>
             <a:noFill/>
@@ -19618,11 +21736,11 @@
             <a:r>
               <a:rPr sz="1000" b="1">
                 <a:solidFill>
-                  <a:srgbClr val="1B7A43"/>
-                </a:solidFill>
-                <a:latin typeface="Helvetica Neue"/>
-              </a:rPr>
-              <a:t>#3  ·  TT  ·  6,530 views</a:t>
+                  <a:srgbClr val="990011"/>
+                </a:solidFill>
+                <a:latin typeface="Helvetica Neue"/>
+              </a:rPr>
+              <a:t>#3  ·  IG  ·  7,031 views</a:t>
             </a:r>
           </a:p>
         </p:txBody>
@@ -19656,7 +21774,7 @@
                 </a:solidFill>
                 <a:latin typeface="Helvetica Neue"/>
               </a:rPr>
-              <a:t>Downey residents want diverse dining and nightlife, but it needs to be responsible. Addres</a:t>
+              <a:t>A woman's outburst at a city council meeting, repeatedly warned by the mayor, led to her f</a:t>
             </a:r>
           </a:p>
         </p:txBody>
@@ -19730,7 +21848,7 @@
             <a:r>
               <a:rPr sz="1000" b="1">
                 <a:solidFill>
-                  <a:srgbClr val="1B7A43"/>
+                  <a:srgbClr val="990011"/>
                 </a:solidFill>
                 <a:latin typeface="Helvetica Neue"/>
               </a:rPr>
@@ -19898,7 +22016,7 @@
                 </a:solidFill>
                 <a:latin typeface="Georgia"/>
               </a:rPr>
-              <a:t>Truth &amp; Scandal Reporting</a:t>
+              <a:t>Sports (FIFA, UCLA, Rams/NFL)</a:t>
             </a:r>
           </a:p>
         </p:txBody>
@@ -19932,7 +22050,7 @@
                 </a:solidFill>
                 <a:latin typeface="Helvetica Neue"/>
               </a:rPr>
-              <a:t>Investigative — the heat that drives peak reach.</a:t>
+              <a:t>Sports commentary — World Cup, UCLA memories, Rams/NFL takes.</a:t>
             </a:r>
           </a:p>
         </p:txBody>
@@ -19962,11 +22080,11 @@
             <a:r>
               <a:rPr sz="900" b="1">
                 <a:solidFill>
-                  <a:srgbClr val="990011"/>
-                </a:solidFill>
-                <a:latin typeface="Helvetica Neue"/>
-              </a:rPr>
-              <a:t>AUDIENCE (theoretical): Cut-throat drama · punches hardest Young (18-40), broad appeal</a:t>
+                  <a:srgbClr val="6B7082"/>
+                </a:solidFill>
+                <a:latin typeface="Helvetica Neue"/>
+              </a:rPr>
+              <a:t>AUDIENCE (theoretical): Sports commentary · Young-Middle (25-45), sports fans</a:t>
             </a:r>
           </a:p>
         </p:txBody>
@@ -20030,7 +22148,7 @@
             <a:avLst/>
           </a:prstGeom>
           <a:solidFill>
-            <a:srgbClr val="990011"/>
+            <a:srgbClr val="6B7082"/>
           </a:solidFill>
           <a:ln>
             <a:noFill/>
@@ -20084,7 +22202,7 @@
             <a:r>
               <a:rPr sz="1100" b="1">
                 <a:solidFill>
-                  <a:srgbClr val="990011"/>
+                  <a:srgbClr val="6B7082"/>
                 </a:solidFill>
                 <a:latin typeface="Helvetica Neue"/>
               </a:rPr>
@@ -20122,7 +22240,7 @@
                 </a:solidFill>
                 <a:latin typeface="Georgia"/>
               </a:rPr>
-              <a:t>89,526</a:t>
+              <a:t>76,489</a:t>
             </a:r>
           </a:p>
         </p:txBody>
@@ -20156,7 +22274,7 @@
                 </a:solidFill>
                 <a:latin typeface="Helvetica Neue"/>
               </a:rPr>
-              <a:t>36 posts · 2,028 likes</a:t>
+              <a:t>43 posts · 1,776 likes</a:t>
             </a:r>
           </a:p>
         </p:txBody>
@@ -20190,7 +22308,7 @@
                 </a:solidFill>
                 <a:latin typeface="Helvetica Neue"/>
               </a:rPr>
-              <a:t>2,487 average views per post</a:t>
+              <a:t>1,779 average views per post</a:t>
             </a:r>
           </a:p>
         </p:txBody>
@@ -20220,7 +22338,7 @@
             <a:r>
               <a:rPr sz="1100" b="1">
                 <a:solidFill>
-                  <a:srgbClr val="990011"/>
+                  <a:srgbClr val="6B7082"/>
                 </a:solidFill>
                 <a:latin typeface="Helvetica Neue"/>
               </a:rPr>
@@ -20288,7 +22406,7 @@
             <a:avLst/>
           </a:prstGeom>
           <a:solidFill>
-            <a:srgbClr val="990011"/>
+            <a:srgbClr val="6B7082"/>
           </a:solidFill>
           <a:ln>
             <a:noFill/>
@@ -20342,11 +22460,11 @@
             <a:r>
               <a:rPr sz="1000" b="1">
                 <a:solidFill>
-                  <a:srgbClr val="990011"/>
-                </a:solidFill>
-                <a:latin typeface="Helvetica Neue"/>
-              </a:rPr>
-              <a:t>#1  ·  TT  ·  9,839 views</a:t>
+                  <a:srgbClr val="6B7082"/>
+                </a:solidFill>
+                <a:latin typeface="Helvetica Neue"/>
+              </a:rPr>
+              <a:t>#1  ·  TT  ·  27,400 views</a:t>
             </a:r>
           </a:p>
         </p:txBody>
@@ -20380,7 +22498,7 @@
                 </a:solidFill>
                 <a:latin typeface="Helvetica Neue"/>
               </a:rPr>
-              <a:t>Grew up in Huntington Park and still own property there. The city's o...</a:t>
+              <a:t>Watch party in Stonewood Mall! Over 25,000 people showed up for this epic event. Cost $300</a:t>
             </a:r>
           </a:p>
         </p:txBody>
@@ -20444,7 +22562,7 @@
             <a:avLst/>
           </a:prstGeom>
           <a:solidFill>
-            <a:srgbClr val="990011"/>
+            <a:srgbClr val="6B7082"/>
           </a:solidFill>
           <a:ln>
             <a:noFill/>
@@ -20498,11 +22616,11 @@
             <a:r>
               <a:rPr sz="1000" b="1">
                 <a:solidFill>
-                  <a:srgbClr val="990011"/>
-                </a:solidFill>
-                <a:latin typeface="Helvetica Neue"/>
-              </a:rPr>
-              <a:t>#2  ·  IG  ·  7,762 views</a:t>
+                  <a:srgbClr val="6B7082"/>
+                </a:solidFill>
+                <a:latin typeface="Helvetica Neue"/>
+              </a:rPr>
+              <a:t>#2  ·  IG  ·  7,180 views</a:t>
             </a:r>
           </a:p>
         </p:txBody>
@@ -20536,7 +22654,7 @@
                 </a:solidFill>
                 <a:latin typeface="Helvetica Neue"/>
               </a:rPr>
-              <a:t>Chaos erupted! Lissette Rivera refused to calm down, escalating until she was escorted out</a:t>
+              <a:t>25,000+ people gathered for a watch party at Stonewood Mall! Despite the $300k cost, it wa</a:t>
             </a:r>
           </a:p>
         </p:txBody>
@@ -20600,7 +22718,7 @@
             <a:avLst/>
           </a:prstGeom>
           <a:solidFill>
-            <a:srgbClr val="990011"/>
+            <a:srgbClr val="6B7082"/>
           </a:solidFill>
           <a:ln>
             <a:noFill/>
@@ -20654,11 +22772,11 @@
             <a:r>
               <a:rPr sz="1000" b="1">
                 <a:solidFill>
-                  <a:srgbClr val="990011"/>
-                </a:solidFill>
-                <a:latin typeface="Helvetica Neue"/>
-              </a:rPr>
-              <a:t>#3  ·  IG  ·  7,031 views</a:t>
+                  <a:srgbClr val="6B7082"/>
+                </a:solidFill>
+                <a:latin typeface="Helvetica Neue"/>
+              </a:rPr>
+              <a:t>#3  ·  FB  ·  6,355 views</a:t>
             </a:r>
           </a:p>
         </p:txBody>
@@ -20692,7 +22810,7 @@
                 </a:solidFill>
                 <a:latin typeface="Helvetica Neue"/>
               </a:rPr>
-              <a:t>A woman's outburst at a city council meeting, repeatedly warned by the mayor, led to her f</a:t>
+              <a:t>Over 25,000 people gathered at Stonewood Mall for a massive watch party. Despite the $300,</a:t>
             </a:r>
           </a:p>
         </p:txBody>
@@ -20766,7 +22884,7 @@
             <a:r>
               <a:rPr sz="1000" b="1">
                 <a:solidFill>
-                  <a:srgbClr val="990011"/>
+                  <a:srgbClr val="6B7082"/>
                 </a:solidFill>
                 <a:latin typeface="Helvetica Neue"/>
               </a:rPr>
@@ -21970,7 +24088,7 @@
                 </a:solidFill>
                 <a:latin typeface="Georgia"/>
               </a:rPr>
-              <a:t>FIFA / World Cup</a:t>
+              <a:t>Downtown Development</a:t>
             </a:r>
           </a:p>
         </p:txBody>
@@ -22004,7 +24122,7 @@
                 </a:solidFill>
                 <a:latin typeface="Helvetica Neue"/>
               </a:rPr>
-              <a:t>Sports commentary — split between celebration and critique.</a:t>
+              <a:t>Physical growth of Downey — Round One, Fun Box, Stonewood, YMCA, new businesses opening.</a:t>
             </a:r>
           </a:p>
         </p:txBody>
@@ -22034,11 +24152,11 @@
             <a:r>
               <a:rPr sz="900" b="1">
                 <a:solidFill>
-                  <a:srgbClr val="6B7082"/>
-                </a:solidFill>
-                <a:latin typeface="Helvetica Neue"/>
-              </a:rPr>
-              <a:t>AUDIENCE (theoretical): Sports commentary · Young-Middle (25-45), sports fans</a:t>
+                  <a:srgbClr val="C9A227"/>
+                </a:solidFill>
+                <a:latin typeface="Helvetica Neue"/>
+              </a:rPr>
+              <a:t>AUDIENCE (theoretical): Local civic pride · Downey residents 30+</a:t>
             </a:r>
           </a:p>
         </p:txBody>
@@ -22102,7 +24220,7 @@
             <a:avLst/>
           </a:prstGeom>
           <a:solidFill>
-            <a:srgbClr val="6B7082"/>
+            <a:srgbClr val="C9A227"/>
           </a:solidFill>
           <a:ln>
             <a:noFill/>
@@ -22156,7 +24274,7 @@
             <a:r>
               <a:rPr sz="1100" b="1">
                 <a:solidFill>
-                  <a:srgbClr val="6B7082"/>
+                  <a:srgbClr val="C9A227"/>
                 </a:solidFill>
                 <a:latin typeface="Helvetica Neue"/>
               </a:rPr>
@@ -22194,7 +24312,7 @@
                 </a:solidFill>
                 <a:latin typeface="Georgia"/>
               </a:rPr>
-              <a:t>64,368</a:t>
+              <a:t>51,710</a:t>
             </a:r>
           </a:p>
         </p:txBody>
@@ -22228,7 +24346,7 @@
                 </a:solidFill>
                 <a:latin typeface="Helvetica Neue"/>
               </a:rPr>
-              <a:t>27 posts · 1,489 likes</a:t>
+              <a:t>20 posts · 3,040 likes</a:t>
             </a:r>
           </a:p>
         </p:txBody>
@@ -22262,7 +24380,7 @@
                 </a:solidFill>
                 <a:latin typeface="Helvetica Neue"/>
               </a:rPr>
-              <a:t>2,384 average views per post</a:t>
+              <a:t>2,586 average views per post</a:t>
             </a:r>
           </a:p>
         </p:txBody>
@@ -22292,7 +24410,7 @@
             <a:r>
               <a:rPr sz="1100" b="1">
                 <a:solidFill>
-                  <a:srgbClr val="6B7082"/>
+                  <a:srgbClr val="C9A227"/>
                 </a:solidFill>
                 <a:latin typeface="Helvetica Neue"/>
               </a:rPr>
@@ -22360,7 +24478,7 @@
             <a:avLst/>
           </a:prstGeom>
           <a:solidFill>
-            <a:srgbClr val="6B7082"/>
+            <a:srgbClr val="C9A227"/>
           </a:solidFill>
           <a:ln>
             <a:noFill/>
@@ -22414,11 +24532,11 @@
             <a:r>
               <a:rPr sz="1000" b="1">
                 <a:solidFill>
-                  <a:srgbClr val="6B7082"/>
-                </a:solidFill>
-                <a:latin typeface="Helvetica Neue"/>
-              </a:rPr>
-              <a:t>#1  ·  TT  ·  27,400 views</a:t>
+                  <a:srgbClr val="C9A227"/>
+                </a:solidFill>
+                <a:latin typeface="Helvetica Neue"/>
+              </a:rPr>
+              <a:t>#1  ·  TT  ·  29,200 views</a:t>
             </a:r>
           </a:p>
         </p:txBody>
@@ -22452,7 +24570,7 @@
                 </a:solidFill>
                 <a:latin typeface="Helvetica Neue"/>
               </a:rPr>
-              <a:t>Watch party in Stonewood Mall! Over 25,000 people showed up for this epic event. Cost $300</a:t>
+              <a:t>Get ready! Round One is taking over the old Sears at Stonewood Mall. This massive 150,000 </a:t>
             </a:r>
           </a:p>
         </p:txBody>
@@ -22516,7 +24634,7 @@
             <a:avLst/>
           </a:prstGeom>
           <a:solidFill>
-            <a:srgbClr val="6B7082"/>
+            <a:srgbClr val="C9A227"/>
           </a:solidFill>
           <a:ln>
             <a:noFill/>
@@ -22570,11 +24688,11 @@
             <a:r>
               <a:rPr sz="1000" b="1">
                 <a:solidFill>
-                  <a:srgbClr val="6B7082"/>
-                </a:solidFill>
-                <a:latin typeface="Helvetica Neue"/>
-              </a:rPr>
-              <a:t>#2  ·  IG  ·  7,180 views</a:t>
+                  <a:srgbClr val="C9A227"/>
+                </a:solidFill>
+                <a:latin typeface="Helvetica Neue"/>
+              </a:rPr>
+              <a:t>#2  ·  IG  ·  4,455 views</a:t>
             </a:r>
           </a:p>
         </p:txBody>
@@ -22608,7 +24726,7 @@
                 </a:solidFill>
                 <a:latin typeface="Helvetica Neue"/>
               </a:rPr>
-              <a:t>25,000+ people gathered for a watch party at Stonewood Mall! Despite the $300k cost, it wa</a:t>
+              <a:t>Round One is coming to Stonewood Mall, transforming the old Sears space! Get ready for a m</a:t>
             </a:r>
           </a:p>
         </p:txBody>
@@ -22672,7 +24790,7 @@
             <a:avLst/>
           </a:prstGeom>
           <a:solidFill>
-            <a:srgbClr val="6B7082"/>
+            <a:srgbClr val="C9A227"/>
           </a:solidFill>
           <a:ln>
             <a:noFill/>
@@ -22726,11 +24844,11 @@
             <a:r>
               <a:rPr sz="1000" b="1">
                 <a:solidFill>
-                  <a:srgbClr val="6B7082"/>
-                </a:solidFill>
-                <a:latin typeface="Helvetica Neue"/>
-              </a:rPr>
-              <a:t>#3  ·  FB  ·  6,355 views</a:t>
+                  <a:srgbClr val="C9A227"/>
+                </a:solidFill>
+                <a:latin typeface="Helvetica Neue"/>
+              </a:rPr>
+              <a:t>#3  ·  IG  ·  2,390 views</a:t>
             </a:r>
           </a:p>
         </p:txBody>
@@ -22764,7 +24882,7 @@
                 </a:solidFill>
                 <a:latin typeface="Helvetica Neue"/>
               </a:rPr>
-              <a:t>Over 25,000 people gathered at Stonewood Mall for a massive watch party. Despite the $300,</a:t>
+              <a:t>20 years later, this letter still resonates. It sparked the Downtown Improvement Associati</a:t>
             </a:r>
           </a:p>
         </p:txBody>
@@ -22838,7 +24956,7 @@
             <a:r>
               <a:rPr sz="1000" b="1">
                 <a:solidFill>
-                  <a:srgbClr val="6B7082"/>
+                  <a:srgbClr val="C9A227"/>
                 </a:solidFill>
                 <a:latin typeface="Helvetica Neue"/>
               </a:rPr>

--- a/SPONSOR_CONTENT_REPORT.pptx
+++ b/SPONSOR_CONTENT_REPORT.pptx
@@ -3329,7 +3329,7 @@
                 </a:solidFill>
                 <a:latin typeface="Helvetica Neue"/>
               </a:rPr>
-              <a:t>Reporting window: Jun 8 → 2026-10-23</a:t>
+              <a:t>Reporting window: Jun 8 → 2026-10-30</a:t>
             </a:r>
           </a:p>
         </p:txBody>
@@ -3785,7 +3785,7 @@
                 </a:solidFill>
                 <a:latin typeface="Georgia"/>
               </a:rPr>
-              <a:t>41,753</a:t>
+              <a:t>41,843</a:t>
             </a:r>
           </a:p>
         </p:txBody>
@@ -3819,7 +3819,7 @@
                 </a:solidFill>
                 <a:latin typeface="Helvetica Neue"/>
               </a:rPr>
-              <a:t>49 posts · 727 likes</a:t>
+              <a:t>49 posts · 729 likes</a:t>
             </a:r>
           </a:p>
         </p:txBody>
@@ -3853,7 +3853,7 @@
                 </a:solidFill>
                 <a:latin typeface="Helvetica Neue"/>
               </a:rPr>
-              <a:t>852 average views per post</a:t>
+              <a:t>854 average views per post</a:t>
             </a:r>
           </a:p>
         </p:txBody>
@@ -4165,7 +4165,7 @@
                 </a:solidFill>
                 <a:latin typeface="Helvetica Neue"/>
               </a:rPr>
-              <a:t>#2  ·  IG  ·  1,921 views</a:t>
+              <a:t>#2  ·  IG  ·  1,974 views</a:t>
             </a:r>
           </a:p>
         </p:txBody>
@@ -4821,7 +4821,7 @@
                 </a:solidFill>
                 <a:latin typeface="Georgia"/>
               </a:rPr>
-              <a:t>35,229</a:t>
+              <a:t>35,663</a:t>
             </a:r>
           </a:p>
         </p:txBody>
@@ -4855,7 +4855,7 @@
                 </a:solidFill>
                 <a:latin typeface="Helvetica Neue"/>
               </a:rPr>
-              <a:t>37 posts · 791 likes</a:t>
+              <a:t>37 posts · 801 likes</a:t>
             </a:r>
           </a:p>
         </p:txBody>
@@ -4889,7 +4889,7 @@
                 </a:solidFill>
                 <a:latin typeface="Helvetica Neue"/>
               </a:rPr>
-              <a:t>952 average views per post</a:t>
+              <a:t>964 average views per post</a:t>
             </a:r>
           </a:p>
         </p:txBody>
@@ -5857,7 +5857,7 @@
                 </a:solidFill>
                 <a:latin typeface="Georgia"/>
               </a:rPr>
-              <a:t>11,741</a:t>
+              <a:t>11,768</a:t>
             </a:r>
           </a:p>
         </p:txBody>
@@ -5891,7 +5891,7 @@
                 </a:solidFill>
                 <a:latin typeface="Helvetica Neue"/>
               </a:rPr>
-              <a:t>13 posts · 270 likes</a:t>
+              <a:t>14 posts · 271 likes</a:t>
             </a:r>
           </a:p>
         </p:txBody>
@@ -5925,7 +5925,7 @@
                 </a:solidFill>
                 <a:latin typeface="Helvetica Neue"/>
               </a:rPr>
-              <a:t>903 average views per post</a:t>
+              <a:t>841 average views per post</a:t>
             </a:r>
           </a:p>
         </p:txBody>
@@ -7023,7 +7023,7 @@
                 </a:solidFill>
                 <a:latin typeface="Helvetica Neue"/>
               </a:rPr>
-              <a:t>97,693 views · 146 posts · 669 avg</a:t>
+              <a:t>110,525 views · 153 posts · 722 avg</a:t>
             </a:r>
           </a:p>
         </p:txBody>
@@ -7105,7 +7105,7 @@
         <p:spPr>
           <a:xfrm>
             <a:off x="4206240" y="2720339"/>
-            <a:ext cx="1217040" cy="274320"/>
+            <a:ext cx="1163489" cy="274320"/>
           </a:xfrm>
           <a:prstGeom prst="rect">
             <a:avLst/>
@@ -7148,7 +7148,7 @@
         </p:nvSpPr>
         <p:spPr>
           <a:xfrm>
-            <a:off x="5514720" y="2651759"/>
+            <a:off x="5461169" y="2651759"/>
             <a:ext cx="2286000" cy="251460"/>
           </a:xfrm>
           <a:prstGeom prst="rect">
@@ -7169,7 +7169,7 @@
                 </a:solidFill>
                 <a:latin typeface="Helvetica Neue"/>
               </a:rPr>
-              <a:t>19,701 views · 42 posts · 469 avg</a:t>
+              <a:t>21,308 views · 43 posts · 496 avg</a:t>
             </a:r>
           </a:p>
         </p:txBody>
@@ -7182,7 +7182,7 @@
         </p:nvSpPr>
         <p:spPr>
           <a:xfrm>
-            <a:off x="5514720" y="2857499"/>
+            <a:off x="5461169" y="2857499"/>
             <a:ext cx="4572000" cy="251460"/>
           </a:xfrm>
           <a:prstGeom prst="rect">
@@ -7251,7 +7251,7 @@
         <p:spPr>
           <a:xfrm>
             <a:off x="4206240" y="3223260"/>
-            <a:ext cx="479934" cy="274320"/>
+            <a:ext cx="475267" cy="274320"/>
           </a:xfrm>
           <a:prstGeom prst="rect">
             <a:avLst/>
@@ -7294,7 +7294,7 @@
         </p:nvSpPr>
         <p:spPr>
           <a:xfrm>
-            <a:off x="4777614" y="3154679"/>
+            <a:off x="4772947" y="3154679"/>
             <a:ext cx="2286000" cy="251460"/>
           </a:xfrm>
           <a:prstGeom prst="rect">
@@ -7315,7 +7315,7 @@
                 </a:solidFill>
                 <a:latin typeface="Helvetica Neue"/>
               </a:rPr>
-              <a:t>7,769 views · 15 posts · 518 avg</a:t>
+              <a:t>8,704 views · 16 posts · 544 avg</a:t>
             </a:r>
           </a:p>
         </p:txBody>
@@ -7328,7 +7328,7 @@
         </p:nvSpPr>
         <p:spPr>
           <a:xfrm>
-            <a:off x="4777614" y="3360420"/>
+            <a:off x="4772947" y="3360420"/>
             <a:ext cx="4572000" cy="251460"/>
           </a:xfrm>
           <a:prstGeom prst="rect">
@@ -7397,7 +7397,7 @@
         <p:spPr>
           <a:xfrm>
             <a:off x="4206240" y="3726180"/>
-            <a:ext cx="373742" cy="274320"/>
+            <a:ext cx="330350" cy="274320"/>
           </a:xfrm>
           <a:prstGeom prst="rect">
             <a:avLst/>
@@ -7440,7 +7440,7 @@
         </p:nvSpPr>
         <p:spPr>
           <a:xfrm>
-            <a:off x="4671422" y="3657600"/>
+            <a:off x="4628030" y="3657600"/>
             <a:ext cx="2286000" cy="251460"/>
           </a:xfrm>
           <a:prstGeom prst="rect">
@@ -7474,7 +7474,7 @@
         </p:nvSpPr>
         <p:spPr>
           <a:xfrm>
-            <a:off x="4671422" y="3863340"/>
+            <a:off x="4628030" y="3863340"/>
             <a:ext cx="4572000" cy="251460"/>
           </a:xfrm>
           <a:prstGeom prst="rect">
@@ -7543,7 +7543,7 @@
         <p:spPr>
           <a:xfrm>
             <a:off x="4206240" y="4229100"/>
-            <a:ext cx="136771" cy="274320"/>
+            <a:ext cx="120891" cy="274320"/>
           </a:xfrm>
           <a:prstGeom prst="rect">
             <a:avLst/>
@@ -7586,7 +7586,7 @@
         </p:nvSpPr>
         <p:spPr>
           <a:xfrm>
-            <a:off x="4434451" y="4160520"/>
+            <a:off x="4418571" y="4160520"/>
             <a:ext cx="2286000" cy="251460"/>
           </a:xfrm>
           <a:prstGeom prst="rect">
@@ -7620,7 +7620,7 @@
         </p:nvSpPr>
         <p:spPr>
           <a:xfrm>
-            <a:off x="4434451" y="4366260"/>
+            <a:off x="4418571" y="4366260"/>
             <a:ext cx="4572000" cy="251460"/>
           </a:xfrm>
           <a:prstGeom prst="rect">
@@ -8029,7 +8029,7 @@
                 </a:solidFill>
                 <a:latin typeface="Georgia"/>
               </a:rPr>
-              <a:t>97,693</a:t>
+              <a:t>110,525</a:t>
             </a:r>
           </a:p>
         </p:txBody>
@@ -8063,7 +8063,7 @@
                 </a:solidFill>
                 <a:latin typeface="Helvetica Neue"/>
               </a:rPr>
-              <a:t>146 posts · 2,580 likes</a:t>
+              <a:t>153 posts · 2,725 likes</a:t>
             </a:r>
           </a:p>
         </p:txBody>
@@ -8097,7 +8097,7 @@
                 </a:solidFill>
                 <a:latin typeface="Helvetica Neue"/>
               </a:rPr>
-              <a:t>669 average views per post</a:t>
+              <a:t>722 average views per post</a:t>
             </a:r>
           </a:p>
         </p:txBody>
@@ -8409,7 +8409,7 @@
                 </a:solidFill>
                 <a:latin typeface="Helvetica Neue"/>
               </a:rPr>
-              <a:t>#2  ·  FB  ·  5,812 views</a:t>
+              <a:t>#2  ·  IG  ·  10,974 views</a:t>
             </a:r>
           </a:p>
         </p:txBody>
@@ -8443,7 +8443,7 @@
                 </a:solidFill>
                 <a:latin typeface="Helvetica Neue"/>
               </a:rPr>
-              <a:t>Tensions flared at the city council meeting as a woman repeatedly defied the mayor's reque</a:t>
+              <a:t>Safer streets, reliable services, strong schools—better communities start with local actio</a:t>
             </a:r>
           </a:p>
         </p:txBody>
@@ -8565,7 +8565,7 @@
                 </a:solidFill>
                 <a:latin typeface="Helvetica Neue"/>
               </a:rPr>
-              <a:t>#3  ·  IG  ·  4,046 views</a:t>
+              <a:t>#3  ·  FB  ·  5,812 views</a:t>
             </a:r>
           </a:p>
         </p:txBody>
@@ -8599,7 +8599,7 @@
                 </a:solidFill>
                 <a:latin typeface="Helvetica Neue"/>
               </a:rPr>
-              <a:t>A candidate's DSA membership raises questions about their loyalties. Pledging to 'co-gover</a:t>
+              <a:t>Tensions flared at the city council meeting as a woman repeatedly defied the mayor's reque</a:t>
             </a:r>
           </a:p>
         </p:txBody>
@@ -9065,7 +9065,7 @@
                 </a:solidFill>
                 <a:latin typeface="Georgia"/>
               </a:rPr>
-              <a:t>19,701</a:t>
+              <a:t>21,308</a:t>
             </a:r>
           </a:p>
         </p:txBody>
@@ -9099,7 +9099,7 @@
                 </a:solidFill>
                 <a:latin typeface="Helvetica Neue"/>
               </a:rPr>
-              <a:t>42 posts · 421 likes</a:t>
+              <a:t>43 posts · 447 likes</a:t>
             </a:r>
           </a:p>
         </p:txBody>
@@ -9133,7 +9133,7 @@
                 </a:solidFill>
                 <a:latin typeface="Helvetica Neue"/>
               </a:rPr>
-              <a:t>469 average views per post</a:t>
+              <a:t>496 average views per post</a:t>
             </a:r>
           </a:p>
         </p:txBody>
@@ -9601,7 +9601,7 @@
                 </a:solidFill>
                 <a:latin typeface="Helvetica Neue"/>
               </a:rPr>
-              <a:t>#3  ·  FB  ·  914 views</a:t>
+              <a:t>#3  ·  FB  ·  934 views</a:t>
             </a:r>
           </a:p>
         </p:txBody>
@@ -10101,7 +10101,7 @@
                 </a:solidFill>
                 <a:latin typeface="Georgia"/>
               </a:rPr>
-              <a:t>7,769</a:t>
+              <a:t>8,704</a:t>
             </a:r>
           </a:p>
         </p:txBody>
@@ -10135,7 +10135,7 @@
                 </a:solidFill>
                 <a:latin typeface="Helvetica Neue"/>
               </a:rPr>
-              <a:t>15 posts · 113 likes</a:t>
+              <a:t>16 posts · 123 likes</a:t>
             </a:r>
           </a:p>
         </p:txBody>
@@ -10169,7 +10169,7 @@
                 </a:solidFill>
                 <a:latin typeface="Helvetica Neue"/>
               </a:rPr>
-              <a:t>518 average views per post</a:t>
+              <a:t>544 average views per post</a:t>
             </a:r>
           </a:p>
         </p:txBody>
@@ -10481,7 +10481,7 @@
                 </a:solidFill>
                 <a:latin typeface="Helvetica Neue"/>
               </a:rPr>
-              <a:t>#2  ·  FB  ·  797 views</a:t>
+              <a:t>#2  ·  FB  ·  935 views</a:t>
             </a:r>
           </a:p>
         </p:txBody>
@@ -10515,7 +10515,7 @@
                 </a:solidFill>
                 <a:latin typeface="Helvetica Neue"/>
               </a:rPr>
-              <a:t>The World Cup is a massive moneymaker for FIFA, projected to generate $11 billion in profi</a:t>
+              <a:t>A family’s hard work opened doors, from farming in Honduras and Mexico to building a busin</a:t>
             </a:r>
           </a:p>
         </p:txBody>
@@ -10637,7 +10637,7 @@
                 </a:solidFill>
                 <a:latin typeface="Helvetica Neue"/>
               </a:rPr>
-              <a:t>#3  ·  IG  ·  726 views</a:t>
+              <a:t>#3  ·  FB  ·  797 views</a:t>
             </a:r>
           </a:p>
         </p:txBody>
@@ -10671,7 +10671,7 @@
                 </a:solidFill>
                 <a:latin typeface="Helvetica Neue"/>
               </a:rPr>
-              <a:t>1968: A year of stark divisions. Hippie or not? For government or against? Revolution or s</a:t>
+              <a:t>The World Cup is a massive moneymaker for FIFA, projected to generate $11 billion in profi</a:t>
             </a:r>
           </a:p>
         </p:txBody>
@@ -14399,7 +14399,7 @@
                 </a:solidFill>
                 <a:latin typeface="Georgia"/>
               </a:rPr>
-              <a:t>286,423 views</a:t>
+              <a:t>286,593 views</a:t>
             </a:r>
           </a:p>
         </p:txBody>
@@ -14433,7 +14433,7 @@
                 </a:solidFill>
                 <a:latin typeface="Helvetica Neue"/>
               </a:rPr>
-              <a:t>69 posts · 4,151 avg views/post</a:t>
+              <a:t>69 posts · 4,154 avg views/post</a:t>
             </a:r>
           </a:p>
         </p:txBody>
@@ -15905,7 +15905,7 @@
                 </a:solidFill>
                 <a:latin typeface="Helvetica Neue"/>
               </a:rPr>
-              <a:t>2,088 avg views/post   ·   49 posts   ·   102,311 total</a:t>
+              <a:t>2,071 avg views/post   ·   51 posts   ·   105,618 total</a:t>
             </a:r>
           </a:p>
         </p:txBody>
@@ -16197,7 +16197,7 @@
                 </a:solidFill>
                 <a:latin typeface="Helvetica Neue"/>
               </a:rPr>
-              <a:t>1,295 avg views/post   ·   229 posts   ·   296,505 total</a:t>
+              <a:t>1,291 avg views/post   ·   231 posts   ·   298,210 total</a:t>
             </a:r>
           </a:p>
         </p:txBody>
@@ -18116,7 +18116,7 @@
                 </a:solidFill>
                 <a:latin typeface="Helvetica Neue"/>
               </a:rPr>
-              <a:t>286,423 views · 69 posts</a:t>
+              <a:t>286,593 views · 69 posts</a:t>
             </a:r>
           </a:p>
         </p:txBody>
@@ -18150,7 +18150,7 @@
                 </a:solidFill>
                 <a:latin typeface="Helvetica Neue"/>
               </a:rPr>
-              <a:t>Truth &amp; Scandal Reporting</a:t>
+              <a:t>Elections &amp; Judicial</a:t>
             </a:r>
           </a:p>
         </p:txBody>
@@ -18164,7 +18164,119 @@
         <p:spPr>
           <a:xfrm>
             <a:off x="4114800" y="2445693"/>
-            <a:ext cx="2221056" cy="128016"/>
+            <a:ext cx="2397949" cy="128016"/>
+          </a:xfrm>
+          <a:prstGeom prst="rect">
+            <a:avLst/>
+          </a:prstGeom>
+          <a:solidFill>
+            <a:srgbClr val="2F3C7E"/>
+          </a:solidFill>
+          <a:ln>
+            <a:noFill/>
+          </a:ln>
+          <a:effectLst/>
+        </p:spPr>
+        <p:style>
+          <a:lnRef idx="1">
+            <a:schemeClr val="accent1"/>
+          </a:lnRef>
+          <a:fillRef idx="3">
+            <a:schemeClr val="accent1"/>
+          </a:fillRef>
+          <a:effectRef idx="2">
+            <a:schemeClr val="accent1"/>
+          </a:effectRef>
+          <a:fontRef idx="minor">
+            <a:schemeClr val="lt1"/>
+          </a:fontRef>
+        </p:style>
+        <p:txBody>
+          <a:bodyPr rtlCol="0" anchor="ctr"/>
+          <a:lstStyle/>
+          <a:p>
+            <a:pPr algn="ctr"/>
+          </a:p>
+        </p:txBody>
+      </p:sp>
+      <p:sp>
+        <p:nvSpPr>
+          <p:cNvPr id="11" name="TextBox 10"/>
+          <p:cNvSpPr txBox="1"/>
+          <p:nvPr/>
+        </p:nvSpPr>
+        <p:spPr>
+          <a:xfrm>
+            <a:off x="6604189" y="2392462"/>
+            <a:ext cx="2286000" cy="271054"/>
+          </a:xfrm>
+          <a:prstGeom prst="rect">
+            <a:avLst/>
+          </a:prstGeom>
+          <a:noFill/>
+        </p:spPr>
+        <p:txBody>
+          <a:bodyPr wrap="square" lIns="0" rIns="0" tIns="0" bIns="0">
+            <a:spAutoFit/>
+          </a:bodyPr>
+          <a:lstStyle/>
+          <a:p>
+            <a:r>
+              <a:rPr sz="900" b="0">
+                <a:solidFill>
+                  <a:srgbClr val="6B7082"/>
+                </a:solidFill>
+                <a:latin typeface="Helvetica Neue"/>
+              </a:rPr>
+              <a:t>110,525 views · 153 posts</a:t>
+            </a:r>
+          </a:p>
+        </p:txBody>
+      </p:sp>
+      <p:sp>
+        <p:nvSpPr>
+          <p:cNvPr id="12" name="TextBox 11"/>
+          <p:cNvSpPr txBox="1"/>
+          <p:nvPr/>
+        </p:nvSpPr>
+        <p:spPr>
+          <a:xfrm>
+            <a:off x="731520" y="2663516"/>
+            <a:ext cx="3200400" cy="271054"/>
+          </a:xfrm>
+          <a:prstGeom prst="rect">
+            <a:avLst/>
+          </a:prstGeom>
+          <a:noFill/>
+        </p:spPr>
+        <p:txBody>
+          <a:bodyPr wrap="square" lIns="0" rIns="0" tIns="0" bIns="0">
+            <a:spAutoFit/>
+          </a:bodyPr>
+          <a:lstStyle/>
+          <a:p>
+            <a:r>
+              <a:rPr sz="1100" b="1">
+                <a:solidFill>
+                  <a:srgbClr val="141833"/>
+                </a:solidFill>
+                <a:latin typeface="Helvetica Neue"/>
+              </a:rPr>
+              <a:t>Truth &amp; Scandal Reporting</a:t>
+            </a:r>
+          </a:p>
+        </p:txBody>
+      </p:sp>
+      <p:sp>
+        <p:nvSpPr>
+          <p:cNvPr id="13" name="Rectangle 12"/>
+          <p:cNvSpPr/>
+          <p:nvPr/>
+        </p:nvSpPr>
+        <p:spPr>
+          <a:xfrm>
+            <a:off x="4114800" y="2716747"/>
+            <a:ext cx="2291487" cy="128016"/>
           </a:xfrm>
           <a:prstGeom prst="rect">
             <a:avLst/>
@@ -18201,13 +18313,13 @@
       </p:sp>
       <p:sp>
         <p:nvSpPr>
-          <p:cNvPr id="11" name="TextBox 10"/>
-          <p:cNvSpPr txBox="1"/>
-          <p:nvPr/>
-        </p:nvSpPr>
-        <p:spPr>
-          <a:xfrm>
-            <a:off x="6427296" y="2392462"/>
+          <p:cNvPr id="14" name="TextBox 13"/>
+          <p:cNvSpPr txBox="1"/>
+          <p:nvPr/>
+        </p:nvSpPr>
+        <p:spPr>
+          <a:xfrm>
+            <a:off x="6497727" y="2663516"/>
             <a:ext cx="2286000" cy="271054"/>
           </a:xfrm>
           <a:prstGeom prst="rect">
@@ -18228,20 +18340,20 @@
                 </a:solidFill>
                 <a:latin typeface="Helvetica Neue"/>
               </a:rPr>
-              <a:t>102,311 views · 49 posts</a:t>
-            </a:r>
-          </a:p>
-        </p:txBody>
-      </p:sp>
-      <p:sp>
-        <p:nvSpPr>
-          <p:cNvPr id="12" name="TextBox 11"/>
-          <p:cNvSpPr txBox="1"/>
-          <p:nvPr/>
-        </p:nvSpPr>
-        <p:spPr>
-          <a:xfrm>
-            <a:off x="731520" y="2663516"/>
+              <a:t>105,618 views · 51 posts</a:t>
+            </a:r>
+          </a:p>
+        </p:txBody>
+      </p:sp>
+      <p:sp>
+        <p:nvSpPr>
+          <p:cNvPr id="15" name="TextBox 14"/>
+          <p:cNvSpPr txBox="1"/>
+          <p:nvPr/>
+        </p:nvSpPr>
+        <p:spPr>
+          <a:xfrm>
+            <a:off x="731520" y="2934570"/>
             <a:ext cx="3200400" cy="271054"/>
           </a:xfrm>
           <a:prstGeom prst="rect">
@@ -18262,21 +18374,469 @@
                 </a:solidFill>
                 <a:latin typeface="Helvetica Neue"/>
               </a:rPr>
-              <a:t>Elections &amp; Judicial</a:t>
-            </a:r>
-          </a:p>
-        </p:txBody>
-      </p:sp>
-      <p:sp>
-        <p:nvSpPr>
-          <p:cNvPr id="13" name="Rectangle 12"/>
+              <a:t>Other / Uncategorized</a:t>
+            </a:r>
+          </a:p>
+        </p:txBody>
+      </p:sp>
+      <p:sp>
+        <p:nvSpPr>
+          <p:cNvPr id="16" name="Rectangle 15"/>
           <p:cNvSpPr/>
           <p:nvPr/>
         </p:nvSpPr>
         <p:spPr>
           <a:xfrm>
-            <a:off x="4114800" y="2716747"/>
-            <a:ext cx="2120804" cy="128016"/>
+            <a:off x="4114800" y="2987801"/>
+            <a:ext cx="1887920" cy="128016"/>
+          </a:xfrm>
+          <a:prstGeom prst="rect">
+            <a:avLst/>
+          </a:prstGeom>
+          <a:solidFill>
+            <a:srgbClr val="6B7082"/>
+          </a:solidFill>
+          <a:ln>
+            <a:noFill/>
+          </a:ln>
+          <a:effectLst/>
+        </p:spPr>
+        <p:style>
+          <a:lnRef idx="1">
+            <a:schemeClr val="accent1"/>
+          </a:lnRef>
+          <a:fillRef idx="3">
+            <a:schemeClr val="accent1"/>
+          </a:fillRef>
+          <a:effectRef idx="2">
+            <a:schemeClr val="accent1"/>
+          </a:effectRef>
+          <a:fontRef idx="minor">
+            <a:schemeClr val="lt1"/>
+          </a:fontRef>
+        </p:style>
+        <p:txBody>
+          <a:bodyPr rtlCol="0" anchor="ctr"/>
+          <a:lstStyle/>
+          <a:p>
+            <a:pPr algn="ctr"/>
+          </a:p>
+        </p:txBody>
+      </p:sp>
+      <p:sp>
+        <p:nvSpPr>
+          <p:cNvPr id="17" name="TextBox 16"/>
+          <p:cNvSpPr txBox="1"/>
+          <p:nvPr/>
+        </p:nvSpPr>
+        <p:spPr>
+          <a:xfrm>
+            <a:off x="6094160" y="2934570"/>
+            <a:ext cx="2286000" cy="271054"/>
+          </a:xfrm>
+          <a:prstGeom prst="rect">
+            <a:avLst/>
+          </a:prstGeom>
+          <a:noFill/>
+        </p:spPr>
+        <p:txBody>
+          <a:bodyPr wrap="square" lIns="0" rIns="0" tIns="0" bIns="0">
+            <a:spAutoFit/>
+          </a:bodyPr>
+          <a:lstStyle/>
+          <a:p>
+            <a:r>
+              <a:rPr sz="900" b="0">
+                <a:solidFill>
+                  <a:srgbClr val="6B7082"/>
+                </a:solidFill>
+                <a:latin typeface="Helvetica Neue"/>
+              </a:rPr>
+              <a:t>87,017 views · 47 posts</a:t>
+            </a:r>
+          </a:p>
+        </p:txBody>
+      </p:sp>
+      <p:sp>
+        <p:nvSpPr>
+          <p:cNvPr id="18" name="TextBox 17"/>
+          <p:cNvSpPr txBox="1"/>
+          <p:nvPr/>
+        </p:nvSpPr>
+        <p:spPr>
+          <a:xfrm>
+            <a:off x="731520" y="3205625"/>
+            <a:ext cx="3200400" cy="271054"/>
+          </a:xfrm>
+          <a:prstGeom prst="rect">
+            <a:avLst/>
+          </a:prstGeom>
+          <a:noFill/>
+        </p:spPr>
+        <p:txBody>
+          <a:bodyPr wrap="square" lIns="0" rIns="0" tIns="0" bIns="0">
+            <a:spAutoFit/>
+          </a:bodyPr>
+          <a:lstStyle/>
+          <a:p>
+            <a:r>
+              <a:rPr sz="1100" b="1">
+                <a:solidFill>
+                  <a:srgbClr val="141833"/>
+                </a:solidFill>
+                <a:latin typeface="Helvetica Neue"/>
+              </a:rPr>
+              <a:t>Sports (FIFA, UCLA, Rams/NFL)</a:t>
+            </a:r>
+          </a:p>
+        </p:txBody>
+      </p:sp>
+      <p:sp>
+        <p:nvSpPr>
+          <p:cNvPr id="19" name="Rectangle 18"/>
+          <p:cNvSpPr/>
+          <p:nvPr/>
+        </p:nvSpPr>
+        <p:spPr>
+          <a:xfrm>
+            <a:off x="4114800" y="3258856"/>
+            <a:ext cx="1662086" cy="128016"/>
+          </a:xfrm>
+          <a:prstGeom prst="rect">
+            <a:avLst/>
+          </a:prstGeom>
+          <a:solidFill>
+            <a:srgbClr val="6B7082"/>
+          </a:solidFill>
+          <a:ln>
+            <a:noFill/>
+          </a:ln>
+          <a:effectLst/>
+        </p:spPr>
+        <p:style>
+          <a:lnRef idx="1">
+            <a:schemeClr val="accent1"/>
+          </a:lnRef>
+          <a:fillRef idx="3">
+            <a:schemeClr val="accent1"/>
+          </a:fillRef>
+          <a:effectRef idx="2">
+            <a:schemeClr val="accent1"/>
+          </a:effectRef>
+          <a:fontRef idx="minor">
+            <a:schemeClr val="lt1"/>
+          </a:fontRef>
+        </p:style>
+        <p:txBody>
+          <a:bodyPr rtlCol="0" anchor="ctr"/>
+          <a:lstStyle/>
+          <a:p>
+            <a:pPr algn="ctr"/>
+          </a:p>
+        </p:txBody>
+      </p:sp>
+      <p:sp>
+        <p:nvSpPr>
+          <p:cNvPr id="20" name="TextBox 19"/>
+          <p:cNvSpPr txBox="1"/>
+          <p:nvPr/>
+        </p:nvSpPr>
+        <p:spPr>
+          <a:xfrm>
+            <a:off x="5868326" y="3205625"/>
+            <a:ext cx="2286000" cy="271054"/>
+          </a:xfrm>
+          <a:prstGeom prst="rect">
+            <a:avLst/>
+          </a:prstGeom>
+          <a:noFill/>
+        </p:spPr>
+        <p:txBody>
+          <a:bodyPr wrap="square" lIns="0" rIns="0" tIns="0" bIns="0">
+            <a:spAutoFit/>
+          </a:bodyPr>
+          <a:lstStyle/>
+          <a:p>
+            <a:r>
+              <a:rPr sz="900" b="0">
+                <a:solidFill>
+                  <a:srgbClr val="6B7082"/>
+                </a:solidFill>
+                <a:latin typeface="Helvetica Neue"/>
+              </a:rPr>
+              <a:t>76,608 views · 43 posts</a:t>
+            </a:r>
+          </a:p>
+        </p:txBody>
+      </p:sp>
+      <p:sp>
+        <p:nvSpPr>
+          <p:cNvPr id="21" name="TextBox 20"/>
+          <p:cNvSpPr txBox="1"/>
+          <p:nvPr/>
+        </p:nvSpPr>
+        <p:spPr>
+          <a:xfrm>
+            <a:off x="731520" y="3476679"/>
+            <a:ext cx="3200400" cy="271054"/>
+          </a:xfrm>
+          <a:prstGeom prst="rect">
+            <a:avLst/>
+          </a:prstGeom>
+          <a:noFill/>
+        </p:spPr>
+        <p:txBody>
+          <a:bodyPr wrap="square" lIns="0" rIns="0" tIns="0" bIns="0">
+            <a:spAutoFit/>
+          </a:bodyPr>
+          <a:lstStyle/>
+          <a:p>
+            <a:r>
+              <a:rPr sz="1100" b="1">
+                <a:solidFill>
+                  <a:srgbClr val="141833"/>
+                </a:solidFill>
+                <a:latin typeface="Helvetica Neue"/>
+              </a:rPr>
+              <a:t>Community &amp; Culture</a:t>
+            </a:r>
+          </a:p>
+        </p:txBody>
+      </p:sp>
+      <p:sp>
+        <p:nvSpPr>
+          <p:cNvPr id="22" name="Rectangle 21"/>
+          <p:cNvSpPr/>
+          <p:nvPr/>
+        </p:nvSpPr>
+        <p:spPr>
+          <a:xfrm>
+            <a:off x="4114800" y="3529910"/>
+            <a:ext cx="1645727" cy="128016"/>
+          </a:xfrm>
+          <a:prstGeom prst="rect">
+            <a:avLst/>
+          </a:prstGeom>
+          <a:solidFill>
+            <a:srgbClr val="141833"/>
+          </a:solidFill>
+          <a:ln>
+            <a:noFill/>
+          </a:ln>
+          <a:effectLst/>
+        </p:spPr>
+        <p:style>
+          <a:lnRef idx="1">
+            <a:schemeClr val="accent1"/>
+          </a:lnRef>
+          <a:fillRef idx="3">
+            <a:schemeClr val="accent1"/>
+          </a:fillRef>
+          <a:effectRef idx="2">
+            <a:schemeClr val="accent1"/>
+          </a:effectRef>
+          <a:fontRef idx="minor">
+            <a:schemeClr val="lt1"/>
+          </a:fontRef>
+        </p:style>
+        <p:txBody>
+          <a:bodyPr rtlCol="0" anchor="ctr"/>
+          <a:lstStyle/>
+          <a:p>
+            <a:pPr algn="ctr"/>
+          </a:p>
+        </p:txBody>
+      </p:sp>
+      <p:sp>
+        <p:nvSpPr>
+          <p:cNvPr id="23" name="TextBox 22"/>
+          <p:cNvSpPr txBox="1"/>
+          <p:nvPr/>
+        </p:nvSpPr>
+        <p:spPr>
+          <a:xfrm>
+            <a:off x="5851967" y="3476679"/>
+            <a:ext cx="2286000" cy="271054"/>
+          </a:xfrm>
+          <a:prstGeom prst="rect">
+            <a:avLst/>
+          </a:prstGeom>
+          <a:noFill/>
+        </p:spPr>
+        <p:txBody>
+          <a:bodyPr wrap="square" lIns="0" rIns="0" tIns="0" bIns="0">
+            <a:spAutoFit/>
+          </a:bodyPr>
+          <a:lstStyle/>
+          <a:p>
+            <a:r>
+              <a:rPr sz="900" b="0">
+                <a:solidFill>
+                  <a:srgbClr val="6B7082"/>
+                </a:solidFill>
+                <a:latin typeface="Helvetica Neue"/>
+              </a:rPr>
+              <a:t>75,854 views · 71 posts</a:t>
+            </a:r>
+          </a:p>
+        </p:txBody>
+      </p:sp>
+      <p:sp>
+        <p:nvSpPr>
+          <p:cNvPr id="24" name="TextBox 23"/>
+          <p:cNvSpPr txBox="1"/>
+          <p:nvPr/>
+        </p:nvSpPr>
+        <p:spPr>
+          <a:xfrm>
+            <a:off x="731520" y="3747733"/>
+            <a:ext cx="3200400" cy="271054"/>
+          </a:xfrm>
+          <a:prstGeom prst="rect">
+            <a:avLst/>
+          </a:prstGeom>
+          <a:noFill/>
+        </p:spPr>
+        <p:txBody>
+          <a:bodyPr wrap="square" lIns="0" rIns="0" tIns="0" bIns="0">
+            <a:spAutoFit/>
+          </a:bodyPr>
+          <a:lstStyle/>
+          <a:p>
+            <a:r>
+              <a:rPr sz="1100" b="1">
+                <a:solidFill>
+                  <a:srgbClr val="141833"/>
+                </a:solidFill>
+                <a:latin typeface="Helvetica Neue"/>
+              </a:rPr>
+              <a:t>Downtown Development</a:t>
+            </a:r>
+          </a:p>
+        </p:txBody>
+      </p:sp>
+      <p:sp>
+        <p:nvSpPr>
+          <p:cNvPr id="25" name="Rectangle 24"/>
+          <p:cNvSpPr/>
+          <p:nvPr/>
+        </p:nvSpPr>
+        <p:spPr>
+          <a:xfrm>
+            <a:off x="4114800" y="3800964"/>
+            <a:ext cx="1121899" cy="128016"/>
+          </a:xfrm>
+          <a:prstGeom prst="rect">
+            <a:avLst/>
+          </a:prstGeom>
+          <a:solidFill>
+            <a:srgbClr val="C9A227"/>
+          </a:solidFill>
+          <a:ln>
+            <a:noFill/>
+          </a:ln>
+          <a:effectLst/>
+        </p:spPr>
+        <p:style>
+          <a:lnRef idx="1">
+            <a:schemeClr val="accent1"/>
+          </a:lnRef>
+          <a:fillRef idx="3">
+            <a:schemeClr val="accent1"/>
+          </a:fillRef>
+          <a:effectRef idx="2">
+            <a:schemeClr val="accent1"/>
+          </a:effectRef>
+          <a:fontRef idx="minor">
+            <a:schemeClr val="lt1"/>
+          </a:fontRef>
+        </p:style>
+        <p:txBody>
+          <a:bodyPr rtlCol="0" anchor="ctr"/>
+          <a:lstStyle/>
+          <a:p>
+            <a:pPr algn="ctr"/>
+          </a:p>
+        </p:txBody>
+      </p:sp>
+      <p:sp>
+        <p:nvSpPr>
+          <p:cNvPr id="26" name="TextBox 25"/>
+          <p:cNvSpPr txBox="1"/>
+          <p:nvPr/>
+        </p:nvSpPr>
+        <p:spPr>
+          <a:xfrm>
+            <a:off x="5328139" y="3747733"/>
+            <a:ext cx="2286000" cy="271054"/>
+          </a:xfrm>
+          <a:prstGeom prst="rect">
+            <a:avLst/>
+          </a:prstGeom>
+          <a:noFill/>
+        </p:spPr>
+        <p:txBody>
+          <a:bodyPr wrap="square" lIns="0" rIns="0" tIns="0" bIns="0">
+            <a:spAutoFit/>
+          </a:bodyPr>
+          <a:lstStyle/>
+          <a:p>
+            <a:r>
+              <a:rPr sz="900" b="0">
+                <a:solidFill>
+                  <a:srgbClr val="6B7082"/>
+                </a:solidFill>
+                <a:latin typeface="Helvetica Neue"/>
+              </a:rPr>
+              <a:t>51,710 views · 20 posts</a:t>
+            </a:r>
+          </a:p>
+        </p:txBody>
+      </p:sp>
+      <p:sp>
+        <p:nvSpPr>
+          <p:cNvPr id="27" name="TextBox 26"/>
+          <p:cNvSpPr txBox="1"/>
+          <p:nvPr/>
+        </p:nvSpPr>
+        <p:spPr>
+          <a:xfrm>
+            <a:off x="731520" y="4018787"/>
+            <a:ext cx="3200400" cy="271054"/>
+          </a:xfrm>
+          <a:prstGeom prst="rect">
+            <a:avLst/>
+          </a:prstGeom>
+          <a:noFill/>
+        </p:spPr>
+        <p:txBody>
+          <a:bodyPr wrap="square" lIns="0" rIns="0" tIns="0" bIns="0">
+            <a:spAutoFit/>
+          </a:bodyPr>
+          <a:lstStyle/>
+          <a:p>
+            <a:r>
+              <a:rPr sz="1100" b="1">
+                <a:solidFill>
+                  <a:srgbClr val="141833"/>
+                </a:solidFill>
+                <a:latin typeface="Helvetica Neue"/>
+              </a:rPr>
+              <a:t>City Hall &amp; Civic Issues</a:t>
+            </a:r>
+          </a:p>
+        </p:txBody>
+      </p:sp>
+      <p:sp>
+        <p:nvSpPr>
+          <p:cNvPr id="28" name="Rectangle 27"/>
+          <p:cNvSpPr/>
+          <p:nvPr/>
+        </p:nvSpPr>
+        <p:spPr>
+          <a:xfrm>
+            <a:off x="4114800" y="4072019"/>
+            <a:ext cx="907825" cy="128016"/>
           </a:xfrm>
           <a:prstGeom prst="rect">
             <a:avLst/>
@@ -18313,13 +18873,13 @@
       </p:sp>
       <p:sp>
         <p:nvSpPr>
-          <p:cNvPr id="14" name="TextBox 13"/>
-          <p:cNvSpPr txBox="1"/>
-          <p:nvPr/>
-        </p:nvSpPr>
-        <p:spPr>
-          <a:xfrm>
-            <a:off x="6327044" y="2663516"/>
+          <p:cNvPr id="29" name="TextBox 28"/>
+          <p:cNvSpPr txBox="1"/>
+          <p:nvPr/>
+        </p:nvSpPr>
+        <p:spPr>
+          <a:xfrm>
+            <a:off x="5114065" y="4018787"/>
             <a:ext cx="2286000" cy="271054"/>
           </a:xfrm>
           <a:prstGeom prst="rect">
@@ -18340,20 +18900,20 @@
                 </a:solidFill>
                 <a:latin typeface="Helvetica Neue"/>
               </a:rPr>
-              <a:t>97,693 views · 146 posts</a:t>
-            </a:r>
-          </a:p>
-        </p:txBody>
-      </p:sp>
-      <p:sp>
-        <p:nvSpPr>
-          <p:cNvPr id="15" name="TextBox 14"/>
-          <p:cNvSpPr txBox="1"/>
-          <p:nvPr/>
-        </p:nvSpPr>
-        <p:spPr>
-          <a:xfrm>
-            <a:off x="731520" y="2934570"/>
+              <a:t>41,843 views · 49 posts</a:t>
+            </a:r>
+          </a:p>
+        </p:txBody>
+      </p:sp>
+      <p:sp>
+        <p:nvSpPr>
+          <p:cNvPr id="30" name="TextBox 29"/>
+          <p:cNvSpPr txBox="1"/>
+          <p:nvPr/>
+        </p:nvSpPr>
+        <p:spPr>
+          <a:xfrm>
+            <a:off x="731520" y="4289842"/>
             <a:ext cx="3200400" cy="271054"/>
           </a:xfrm>
           <a:prstGeom prst="rect">
@@ -18374,27 +18934,27 @@
                 </a:solidFill>
                 <a:latin typeface="Helvetica Neue"/>
               </a:rPr>
-              <a:t>Sports (FIFA, UCLA, Rams/NFL)</a:t>
-            </a:r>
-          </a:p>
-        </p:txBody>
-      </p:sp>
-      <p:sp>
-        <p:nvSpPr>
-          <p:cNvPr id="16" name="Rectangle 15"/>
+              <a:t>Political Individual Highlights</a:t>
+            </a:r>
+          </a:p>
+        </p:txBody>
+      </p:sp>
+      <p:sp>
+        <p:nvSpPr>
+          <p:cNvPr id="31" name="Rectangle 30"/>
           <p:cNvSpPr/>
           <p:nvPr/>
         </p:nvSpPr>
         <p:spPr>
           <a:xfrm>
-            <a:off x="4114800" y="2987801"/>
-            <a:ext cx="1660489" cy="128016"/>
+            <a:off x="4114800" y="4343073"/>
+            <a:ext cx="773744" cy="128016"/>
           </a:xfrm>
           <a:prstGeom prst="rect">
             <a:avLst/>
           </a:prstGeom>
           <a:solidFill>
-            <a:srgbClr val="6B7082"/>
+            <a:srgbClr val="2E86AB"/>
           </a:solidFill>
           <a:ln>
             <a:noFill/>
@@ -18425,13 +18985,13 @@
       </p:sp>
       <p:sp>
         <p:nvSpPr>
-          <p:cNvPr id="17" name="TextBox 16"/>
-          <p:cNvSpPr txBox="1"/>
-          <p:nvPr/>
-        </p:nvSpPr>
-        <p:spPr>
-          <a:xfrm>
-            <a:off x="5866729" y="2934570"/>
+          <p:cNvPr id="32" name="TextBox 31"/>
+          <p:cNvSpPr txBox="1"/>
+          <p:nvPr/>
+        </p:nvSpPr>
+        <p:spPr>
+          <a:xfrm>
+            <a:off x="4979984" y="4289842"/>
             <a:ext cx="2286000" cy="271054"/>
           </a:xfrm>
           <a:prstGeom prst="rect">
@@ -18452,20 +19012,20 @@
                 </a:solidFill>
                 <a:latin typeface="Helvetica Neue"/>
               </a:rPr>
-              <a:t>76,489 views · 43 posts</a:t>
-            </a:r>
-          </a:p>
-        </p:txBody>
-      </p:sp>
-      <p:sp>
-        <p:nvSpPr>
-          <p:cNvPr id="18" name="TextBox 17"/>
-          <p:cNvSpPr txBox="1"/>
-          <p:nvPr/>
-        </p:nvSpPr>
-        <p:spPr>
-          <a:xfrm>
-            <a:off x="731520" y="3205625"/>
+              <a:t>35,663 views · 37 posts</a:t>
+            </a:r>
+          </a:p>
+        </p:txBody>
+      </p:sp>
+      <p:sp>
+        <p:nvSpPr>
+          <p:cNvPr id="33" name="TextBox 32"/>
+          <p:cNvSpPr txBox="1"/>
+          <p:nvPr/>
+        </p:nvSpPr>
+        <p:spPr>
+          <a:xfrm>
+            <a:off x="731520" y="4560896"/>
             <a:ext cx="3200400" cy="271054"/>
           </a:xfrm>
           <a:prstGeom prst="rect">
@@ -18486,245 +19046,21 @@
                 </a:solidFill>
                 <a:latin typeface="Helvetica Neue"/>
               </a:rPr>
-              <a:t>Community &amp; Culture</a:t>
-            </a:r>
-          </a:p>
-        </p:txBody>
-      </p:sp>
-      <p:sp>
-        <p:nvSpPr>
-          <p:cNvPr id="19" name="Rectangle 18"/>
+              <a:t>Legislation &amp; Policy Watch</a:t>
+            </a:r>
+          </a:p>
+        </p:txBody>
+      </p:sp>
+      <p:sp>
+        <p:nvSpPr>
+          <p:cNvPr id="34" name="Rectangle 33"/>
           <p:cNvSpPr/>
           <p:nvPr/>
         </p:nvSpPr>
         <p:spPr>
           <a:xfrm>
-            <a:off x="4114800" y="3258856"/>
-            <a:ext cx="1639996" cy="128016"/>
-          </a:xfrm>
-          <a:prstGeom prst="rect">
-            <a:avLst/>
-          </a:prstGeom>
-          <a:solidFill>
-            <a:srgbClr val="141833"/>
-          </a:solidFill>
-          <a:ln>
-            <a:noFill/>
-          </a:ln>
-          <a:effectLst/>
-        </p:spPr>
-        <p:style>
-          <a:lnRef idx="1">
-            <a:schemeClr val="accent1"/>
-          </a:lnRef>
-          <a:fillRef idx="3">
-            <a:schemeClr val="accent1"/>
-          </a:fillRef>
-          <a:effectRef idx="2">
-            <a:schemeClr val="accent1"/>
-          </a:effectRef>
-          <a:fontRef idx="minor">
-            <a:schemeClr val="lt1"/>
-          </a:fontRef>
-        </p:style>
-        <p:txBody>
-          <a:bodyPr rtlCol="0" anchor="ctr"/>
-          <a:lstStyle/>
-          <a:p>
-            <a:pPr algn="ctr"/>
-          </a:p>
-        </p:txBody>
-      </p:sp>
-      <p:sp>
-        <p:nvSpPr>
-          <p:cNvPr id="20" name="TextBox 19"/>
-          <p:cNvSpPr txBox="1"/>
-          <p:nvPr/>
-        </p:nvSpPr>
-        <p:spPr>
-          <a:xfrm>
-            <a:off x="5846236" y="3205625"/>
-            <a:ext cx="2286000" cy="271054"/>
-          </a:xfrm>
-          <a:prstGeom prst="rect">
-            <a:avLst/>
-          </a:prstGeom>
-          <a:noFill/>
-        </p:spPr>
-        <p:txBody>
-          <a:bodyPr wrap="square" lIns="0" rIns="0" tIns="0" bIns="0">
-            <a:spAutoFit/>
-          </a:bodyPr>
-          <a:lstStyle/>
-          <a:p>
-            <a:r>
-              <a:rPr sz="900" b="0">
-                <a:solidFill>
-                  <a:srgbClr val="6B7082"/>
-                </a:solidFill>
-                <a:latin typeface="Helvetica Neue"/>
-              </a:rPr>
-              <a:t>75,545 views · 71 posts</a:t>
-            </a:r>
-          </a:p>
-        </p:txBody>
-      </p:sp>
-      <p:sp>
-        <p:nvSpPr>
-          <p:cNvPr id="21" name="TextBox 20"/>
-          <p:cNvSpPr txBox="1"/>
-          <p:nvPr/>
-        </p:nvSpPr>
-        <p:spPr>
-          <a:xfrm>
-            <a:off x="731520" y="3476679"/>
-            <a:ext cx="3200400" cy="271054"/>
-          </a:xfrm>
-          <a:prstGeom prst="rect">
-            <a:avLst/>
-          </a:prstGeom>
-          <a:noFill/>
-        </p:spPr>
-        <p:txBody>
-          <a:bodyPr wrap="square" lIns="0" rIns="0" tIns="0" bIns="0">
-            <a:spAutoFit/>
-          </a:bodyPr>
-          <a:lstStyle/>
-          <a:p>
-            <a:r>
-              <a:rPr sz="1100" b="1">
-                <a:solidFill>
-                  <a:srgbClr val="141833"/>
-                </a:solidFill>
-                <a:latin typeface="Helvetica Neue"/>
-              </a:rPr>
-              <a:t>Downtown Development</a:t>
-            </a:r>
-          </a:p>
-        </p:txBody>
-      </p:sp>
-      <p:sp>
-        <p:nvSpPr>
-          <p:cNvPr id="22" name="Rectangle 21"/>
-          <p:cNvSpPr/>
-          <p:nvPr/>
-        </p:nvSpPr>
-        <p:spPr>
-          <a:xfrm>
-            <a:off x="4114800" y="3529910"/>
-            <a:ext cx="1122565" cy="128016"/>
-          </a:xfrm>
-          <a:prstGeom prst="rect">
-            <a:avLst/>
-          </a:prstGeom>
-          <a:solidFill>
-            <a:srgbClr val="C9A227"/>
-          </a:solidFill>
-          <a:ln>
-            <a:noFill/>
-          </a:ln>
-          <a:effectLst/>
-        </p:spPr>
-        <p:style>
-          <a:lnRef idx="1">
-            <a:schemeClr val="accent1"/>
-          </a:lnRef>
-          <a:fillRef idx="3">
-            <a:schemeClr val="accent1"/>
-          </a:fillRef>
-          <a:effectRef idx="2">
-            <a:schemeClr val="accent1"/>
-          </a:effectRef>
-          <a:fontRef idx="minor">
-            <a:schemeClr val="lt1"/>
-          </a:fontRef>
-        </p:style>
-        <p:txBody>
-          <a:bodyPr rtlCol="0" anchor="ctr"/>
-          <a:lstStyle/>
-          <a:p>
-            <a:pPr algn="ctr"/>
-          </a:p>
-        </p:txBody>
-      </p:sp>
-      <p:sp>
-        <p:nvSpPr>
-          <p:cNvPr id="23" name="TextBox 22"/>
-          <p:cNvSpPr txBox="1"/>
-          <p:nvPr/>
-        </p:nvSpPr>
-        <p:spPr>
-          <a:xfrm>
-            <a:off x="5328805" y="3476679"/>
-            <a:ext cx="2286000" cy="271054"/>
-          </a:xfrm>
-          <a:prstGeom prst="rect">
-            <a:avLst/>
-          </a:prstGeom>
-          <a:noFill/>
-        </p:spPr>
-        <p:txBody>
-          <a:bodyPr wrap="square" lIns="0" rIns="0" tIns="0" bIns="0">
-            <a:spAutoFit/>
-          </a:bodyPr>
-          <a:lstStyle/>
-          <a:p>
-            <a:r>
-              <a:rPr sz="900" b="0">
-                <a:solidFill>
-                  <a:srgbClr val="6B7082"/>
-                </a:solidFill>
-                <a:latin typeface="Helvetica Neue"/>
-              </a:rPr>
-              <a:t>51,710 views · 20 posts</a:t>
-            </a:r>
-          </a:p>
-        </p:txBody>
-      </p:sp>
-      <p:sp>
-        <p:nvSpPr>
-          <p:cNvPr id="24" name="TextBox 23"/>
-          <p:cNvSpPr txBox="1"/>
-          <p:nvPr/>
-        </p:nvSpPr>
-        <p:spPr>
-          <a:xfrm>
-            <a:off x="731520" y="3747733"/>
-            <a:ext cx="3200400" cy="271054"/>
-          </a:xfrm>
-          <a:prstGeom prst="rect">
-            <a:avLst/>
-          </a:prstGeom>
-          <a:noFill/>
-        </p:spPr>
-        <p:txBody>
-          <a:bodyPr wrap="square" lIns="0" rIns="0" tIns="0" bIns="0">
-            <a:spAutoFit/>
-          </a:bodyPr>
-          <a:lstStyle/>
-          <a:p>
-            <a:r>
-              <a:rPr sz="1100" b="1">
-                <a:solidFill>
-                  <a:srgbClr val="141833"/>
-                </a:solidFill>
-                <a:latin typeface="Helvetica Neue"/>
-              </a:rPr>
-              <a:t>City Hall &amp; Civic Issues</a:t>
-            </a:r>
-          </a:p>
-        </p:txBody>
-      </p:sp>
-      <p:sp>
-        <p:nvSpPr>
-          <p:cNvPr id="25" name="Rectangle 24"/>
-          <p:cNvSpPr/>
-          <p:nvPr/>
-        </p:nvSpPr>
-        <p:spPr>
-          <a:xfrm>
-            <a:off x="4114800" y="3800964"/>
-            <a:ext cx="906410" cy="128016"/>
+            <a:off x="4114800" y="4614127"/>
+            <a:ext cx="462298" cy="128016"/>
           </a:xfrm>
           <a:prstGeom prst="rect">
             <a:avLst/>
@@ -18761,13 +19097,13 @@
       </p:sp>
       <p:sp>
         <p:nvSpPr>
-          <p:cNvPr id="26" name="TextBox 25"/>
-          <p:cNvSpPr txBox="1"/>
-          <p:nvPr/>
-        </p:nvSpPr>
-        <p:spPr>
-          <a:xfrm>
-            <a:off x="5112650" y="3747733"/>
+          <p:cNvPr id="35" name="TextBox 34"/>
+          <p:cNvSpPr txBox="1"/>
+          <p:nvPr/>
+        </p:nvSpPr>
+        <p:spPr>
+          <a:xfrm>
+            <a:off x="4668538" y="4560896"/>
             <a:ext cx="2286000" cy="271054"/>
           </a:xfrm>
           <a:prstGeom prst="rect">
@@ -18788,20 +19124,20 @@
                 </a:solidFill>
                 <a:latin typeface="Helvetica Neue"/>
               </a:rPr>
-              <a:t>41,753 views · 49 posts</a:t>
-            </a:r>
-          </a:p>
-        </p:txBody>
-      </p:sp>
-      <p:sp>
-        <p:nvSpPr>
-          <p:cNvPr id="27" name="TextBox 26"/>
-          <p:cNvSpPr txBox="1"/>
-          <p:nvPr/>
-        </p:nvSpPr>
-        <p:spPr>
-          <a:xfrm>
-            <a:off x="731520" y="4018787"/>
+              <a:t>21,308 views · 43 posts</a:t>
+            </a:r>
+          </a:p>
+        </p:txBody>
+      </p:sp>
+      <p:sp>
+        <p:nvSpPr>
+          <p:cNvPr id="36" name="TextBox 35"/>
+          <p:cNvSpPr txBox="1"/>
+          <p:nvPr/>
+        </p:nvSpPr>
+        <p:spPr>
+          <a:xfrm>
+            <a:off x="731520" y="4831950"/>
             <a:ext cx="3200400" cy="271054"/>
           </a:xfrm>
           <a:prstGeom prst="rect">
@@ -18822,21 +19158,245 @@
                 </a:solidFill>
                 <a:latin typeface="Helvetica Neue"/>
               </a:rPr>
-              <a:t>Political Individual Highlights</a:t>
-            </a:r>
-          </a:p>
-        </p:txBody>
-      </p:sp>
-      <p:sp>
-        <p:nvSpPr>
-          <p:cNvPr id="28" name="Rectangle 27"/>
+              <a:t>Resident Highlights</a:t>
+            </a:r>
+          </a:p>
+        </p:txBody>
+      </p:sp>
+      <p:sp>
+        <p:nvSpPr>
+          <p:cNvPr id="37" name="Rectangle 36"/>
           <p:cNvSpPr/>
           <p:nvPr/>
         </p:nvSpPr>
         <p:spPr>
           <a:xfrm>
-            <a:off x="4114800" y="4072019"/>
-            <a:ext cx="764781" cy="128016"/>
+            <a:off x="4114800" y="4885182"/>
+            <a:ext cx="255318" cy="128016"/>
+          </a:xfrm>
+          <a:prstGeom prst="rect">
+            <a:avLst/>
+          </a:prstGeom>
+          <a:solidFill>
+            <a:srgbClr val="1B7A43"/>
+          </a:solidFill>
+          <a:ln>
+            <a:noFill/>
+          </a:ln>
+          <a:effectLst/>
+        </p:spPr>
+        <p:style>
+          <a:lnRef idx="1">
+            <a:schemeClr val="accent1"/>
+          </a:lnRef>
+          <a:fillRef idx="3">
+            <a:schemeClr val="accent1"/>
+          </a:fillRef>
+          <a:effectRef idx="2">
+            <a:schemeClr val="accent1"/>
+          </a:effectRef>
+          <a:fontRef idx="minor">
+            <a:schemeClr val="lt1"/>
+          </a:fontRef>
+        </p:style>
+        <p:txBody>
+          <a:bodyPr rtlCol="0" anchor="ctr"/>
+          <a:lstStyle/>
+          <a:p>
+            <a:pPr algn="ctr"/>
+          </a:p>
+        </p:txBody>
+      </p:sp>
+      <p:sp>
+        <p:nvSpPr>
+          <p:cNvPr id="38" name="TextBox 37"/>
+          <p:cNvSpPr txBox="1"/>
+          <p:nvPr/>
+        </p:nvSpPr>
+        <p:spPr>
+          <a:xfrm>
+            <a:off x="4461558" y="4831950"/>
+            <a:ext cx="2286000" cy="271054"/>
+          </a:xfrm>
+          <a:prstGeom prst="rect">
+            <a:avLst/>
+          </a:prstGeom>
+          <a:noFill/>
+        </p:spPr>
+        <p:txBody>
+          <a:bodyPr wrap="square" lIns="0" rIns="0" tIns="0" bIns="0">
+            <a:spAutoFit/>
+          </a:bodyPr>
+          <a:lstStyle/>
+          <a:p>
+            <a:r>
+              <a:rPr sz="900" b="0">
+                <a:solidFill>
+                  <a:srgbClr val="6B7082"/>
+                </a:solidFill>
+                <a:latin typeface="Helvetica Neue"/>
+              </a:rPr>
+              <a:t>11,768 views · 14 posts</a:t>
+            </a:r>
+          </a:p>
+        </p:txBody>
+      </p:sp>
+      <p:sp>
+        <p:nvSpPr>
+          <p:cNvPr id="39" name="TextBox 38"/>
+          <p:cNvSpPr txBox="1"/>
+          <p:nvPr/>
+        </p:nvSpPr>
+        <p:spPr>
+          <a:xfrm>
+            <a:off x="731520" y="5103005"/>
+            <a:ext cx="3200400" cy="271054"/>
+          </a:xfrm>
+          <a:prstGeom prst="rect">
+            <a:avLst/>
+          </a:prstGeom>
+          <a:noFill/>
+        </p:spPr>
+        <p:txBody>
+          <a:bodyPr wrap="square" lIns="0" rIns="0" tIns="0" bIns="0">
+            <a:spAutoFit/>
+          </a:bodyPr>
+          <a:lstStyle/>
+          <a:p>
+            <a:r>
+              <a:rPr sz="1100" b="1">
+                <a:solidFill>
+                  <a:srgbClr val="141833"/>
+                </a:solidFill>
+                <a:latin typeface="Helvetica Neue"/>
+              </a:rPr>
+              <a:t>American Pride</a:t>
+            </a:r>
+          </a:p>
+        </p:txBody>
+      </p:sp>
+      <p:sp>
+        <p:nvSpPr>
+          <p:cNvPr id="40" name="Rectangle 39"/>
+          <p:cNvSpPr/>
+          <p:nvPr/>
+        </p:nvSpPr>
+        <p:spPr>
+          <a:xfrm>
+            <a:off x="4114800" y="5156236"/>
+            <a:ext cx="188841" cy="128016"/>
+          </a:xfrm>
+          <a:prstGeom prst="rect">
+            <a:avLst/>
+          </a:prstGeom>
+          <a:solidFill>
+            <a:srgbClr val="990011"/>
+          </a:solidFill>
+          <a:ln>
+            <a:noFill/>
+          </a:ln>
+          <a:effectLst/>
+        </p:spPr>
+        <p:style>
+          <a:lnRef idx="1">
+            <a:schemeClr val="accent1"/>
+          </a:lnRef>
+          <a:fillRef idx="3">
+            <a:schemeClr val="accent1"/>
+          </a:fillRef>
+          <a:effectRef idx="2">
+            <a:schemeClr val="accent1"/>
+          </a:effectRef>
+          <a:fontRef idx="minor">
+            <a:schemeClr val="lt1"/>
+          </a:fontRef>
+        </p:style>
+        <p:txBody>
+          <a:bodyPr rtlCol="0" anchor="ctr"/>
+          <a:lstStyle/>
+          <a:p>
+            <a:pPr algn="ctr"/>
+          </a:p>
+        </p:txBody>
+      </p:sp>
+      <p:sp>
+        <p:nvSpPr>
+          <p:cNvPr id="41" name="TextBox 40"/>
+          <p:cNvSpPr txBox="1"/>
+          <p:nvPr/>
+        </p:nvSpPr>
+        <p:spPr>
+          <a:xfrm>
+            <a:off x="4395081" y="5103005"/>
+            <a:ext cx="2286000" cy="271054"/>
+          </a:xfrm>
+          <a:prstGeom prst="rect">
+            <a:avLst/>
+          </a:prstGeom>
+          <a:noFill/>
+        </p:spPr>
+        <p:txBody>
+          <a:bodyPr wrap="square" lIns="0" rIns="0" tIns="0" bIns="0">
+            <a:spAutoFit/>
+          </a:bodyPr>
+          <a:lstStyle/>
+          <a:p>
+            <a:r>
+              <a:rPr sz="900" b="0">
+                <a:solidFill>
+                  <a:srgbClr val="6B7082"/>
+                </a:solidFill>
+                <a:latin typeface="Helvetica Neue"/>
+              </a:rPr>
+              <a:t>8,704 views · 16 posts</a:t>
+            </a:r>
+          </a:p>
+        </p:txBody>
+      </p:sp>
+      <p:sp>
+        <p:nvSpPr>
+          <p:cNvPr id="42" name="TextBox 41"/>
+          <p:cNvSpPr txBox="1"/>
+          <p:nvPr/>
+        </p:nvSpPr>
+        <p:spPr>
+          <a:xfrm>
+            <a:off x="731520" y="5374059"/>
+            <a:ext cx="3200400" cy="271054"/>
+          </a:xfrm>
+          <a:prstGeom prst="rect">
+            <a:avLst/>
+          </a:prstGeom>
+          <a:noFill/>
+        </p:spPr>
+        <p:txBody>
+          <a:bodyPr wrap="square" lIns="0" rIns="0" tIns="0" bIns="0">
+            <a:spAutoFit/>
+          </a:bodyPr>
+          <a:lstStyle/>
+          <a:p>
+            <a:r>
+              <a:rPr sz="1100" b="1">
+                <a:solidFill>
+                  <a:srgbClr val="141833"/>
+                </a:solidFill>
+                <a:latin typeface="Helvetica Neue"/>
+              </a:rPr>
+              <a:t>Leadership &amp; Life Lessons</a:t>
+            </a:r>
+          </a:p>
+        </p:txBody>
+      </p:sp>
+      <p:sp>
+        <p:nvSpPr>
+          <p:cNvPr id="43" name="Rectangle 42"/>
+          <p:cNvSpPr/>
+          <p:nvPr/>
+        </p:nvSpPr>
+        <p:spPr>
+          <a:xfrm>
+            <a:off x="4114800" y="5427290"/>
+            <a:ext cx="131260" cy="128016"/>
           </a:xfrm>
           <a:prstGeom prst="rect">
             <a:avLst/>
@@ -18873,13 +19433,13 @@
       </p:sp>
       <p:sp>
         <p:nvSpPr>
-          <p:cNvPr id="29" name="TextBox 28"/>
-          <p:cNvSpPr txBox="1"/>
-          <p:nvPr/>
-        </p:nvSpPr>
-        <p:spPr>
-          <a:xfrm>
-            <a:off x="4971021" y="4018787"/>
+          <p:cNvPr id="44" name="TextBox 43"/>
+          <p:cNvSpPr txBox="1"/>
+          <p:nvPr/>
+        </p:nvSpPr>
+        <p:spPr>
+          <a:xfrm>
+            <a:off x="4337500" y="5374059"/>
             <a:ext cx="2286000" cy="271054"/>
           </a:xfrm>
           <a:prstGeom prst="rect">
@@ -18900,20 +19460,20 @@
                 </a:solidFill>
                 <a:latin typeface="Helvetica Neue"/>
               </a:rPr>
-              <a:t>35,229 views · 37 posts</a:t>
-            </a:r>
-          </a:p>
-        </p:txBody>
-      </p:sp>
-      <p:sp>
-        <p:nvSpPr>
-          <p:cNvPr id="30" name="TextBox 29"/>
-          <p:cNvSpPr txBox="1"/>
-          <p:nvPr/>
-        </p:nvSpPr>
-        <p:spPr>
-          <a:xfrm>
-            <a:off x="731520" y="4289842"/>
+              <a:t>6,050 views · 21 posts</a:t>
+            </a:r>
+          </a:p>
+        </p:txBody>
+      </p:sp>
+      <p:sp>
+        <p:nvSpPr>
+          <p:cNvPr id="45" name="TextBox 44"/>
+          <p:cNvSpPr txBox="1"/>
+          <p:nvPr/>
+        </p:nvSpPr>
+        <p:spPr>
+          <a:xfrm>
+            <a:off x="731520" y="5645113"/>
             <a:ext cx="3200400" cy="271054"/>
           </a:xfrm>
           <a:prstGeom prst="rect">
@@ -18934,469 +19494,21 @@
                 </a:solidFill>
                 <a:latin typeface="Helvetica Neue"/>
               </a:rPr>
-              <a:t>Legislation &amp; Policy Watch</a:t>
-            </a:r>
-          </a:p>
-        </p:txBody>
-      </p:sp>
-      <p:sp>
-        <p:nvSpPr>
-          <p:cNvPr id="31" name="Rectangle 30"/>
+              <a:t>Brand Growth Content</a:t>
+            </a:r>
+          </a:p>
+        </p:txBody>
+      </p:sp>
+      <p:sp>
+        <p:nvSpPr>
+          <p:cNvPr id="46" name="Rectangle 45"/>
           <p:cNvSpPr/>
           <p:nvPr/>
         </p:nvSpPr>
         <p:spPr>
           <a:xfrm>
-            <a:off x="4114800" y="4343073"/>
-            <a:ext cx="427686" cy="128016"/>
-          </a:xfrm>
-          <a:prstGeom prst="rect">
-            <a:avLst/>
-          </a:prstGeom>
-          <a:solidFill>
-            <a:srgbClr val="2F3C7E"/>
-          </a:solidFill>
-          <a:ln>
-            <a:noFill/>
-          </a:ln>
-          <a:effectLst/>
-        </p:spPr>
-        <p:style>
-          <a:lnRef idx="1">
-            <a:schemeClr val="accent1"/>
-          </a:lnRef>
-          <a:fillRef idx="3">
-            <a:schemeClr val="accent1"/>
-          </a:fillRef>
-          <a:effectRef idx="2">
-            <a:schemeClr val="accent1"/>
-          </a:effectRef>
-          <a:fontRef idx="minor">
-            <a:schemeClr val="lt1"/>
-          </a:fontRef>
-        </p:style>
-        <p:txBody>
-          <a:bodyPr rtlCol="0" anchor="ctr"/>
-          <a:lstStyle/>
-          <a:p>
-            <a:pPr algn="ctr"/>
-          </a:p>
-        </p:txBody>
-      </p:sp>
-      <p:sp>
-        <p:nvSpPr>
-          <p:cNvPr id="32" name="TextBox 31"/>
-          <p:cNvSpPr txBox="1"/>
-          <p:nvPr/>
-        </p:nvSpPr>
-        <p:spPr>
-          <a:xfrm>
-            <a:off x="4633926" y="4289842"/>
-            <a:ext cx="2286000" cy="271054"/>
-          </a:xfrm>
-          <a:prstGeom prst="rect">
-            <a:avLst/>
-          </a:prstGeom>
-          <a:noFill/>
-        </p:spPr>
-        <p:txBody>
-          <a:bodyPr wrap="square" lIns="0" rIns="0" tIns="0" bIns="0">
-            <a:spAutoFit/>
-          </a:bodyPr>
-          <a:lstStyle/>
-          <a:p>
-            <a:r>
-              <a:rPr sz="900" b="0">
-                <a:solidFill>
-                  <a:srgbClr val="6B7082"/>
-                </a:solidFill>
-                <a:latin typeface="Helvetica Neue"/>
-              </a:rPr>
-              <a:t>19,701 views · 42 posts</a:t>
-            </a:r>
-          </a:p>
-        </p:txBody>
-      </p:sp>
-      <p:sp>
-        <p:nvSpPr>
-          <p:cNvPr id="33" name="TextBox 32"/>
-          <p:cNvSpPr txBox="1"/>
-          <p:nvPr/>
-        </p:nvSpPr>
-        <p:spPr>
-          <a:xfrm>
-            <a:off x="731520" y="4560896"/>
-            <a:ext cx="3200400" cy="271054"/>
-          </a:xfrm>
-          <a:prstGeom prst="rect">
-            <a:avLst/>
-          </a:prstGeom>
-          <a:noFill/>
-        </p:spPr>
-        <p:txBody>
-          <a:bodyPr wrap="square" lIns="0" rIns="0" tIns="0" bIns="0">
-            <a:spAutoFit/>
-          </a:bodyPr>
-          <a:lstStyle/>
-          <a:p>
-            <a:r>
-              <a:rPr sz="1100" b="1">
-                <a:solidFill>
-                  <a:srgbClr val="141833"/>
-                </a:solidFill>
-                <a:latin typeface="Helvetica Neue"/>
-              </a:rPr>
-              <a:t>Resident Highlights</a:t>
-            </a:r>
-          </a:p>
-        </p:txBody>
-      </p:sp>
-      <p:sp>
-        <p:nvSpPr>
-          <p:cNvPr id="34" name="Rectangle 33"/>
-          <p:cNvSpPr/>
-          <p:nvPr/>
-        </p:nvSpPr>
-        <p:spPr>
-          <a:xfrm>
-            <a:off x="4114800" y="4614127"/>
-            <a:ext cx="254883" cy="128016"/>
-          </a:xfrm>
-          <a:prstGeom prst="rect">
-            <a:avLst/>
-          </a:prstGeom>
-          <a:solidFill>
-            <a:srgbClr val="1B7A43"/>
-          </a:solidFill>
-          <a:ln>
-            <a:noFill/>
-          </a:ln>
-          <a:effectLst/>
-        </p:spPr>
-        <p:style>
-          <a:lnRef idx="1">
-            <a:schemeClr val="accent1"/>
-          </a:lnRef>
-          <a:fillRef idx="3">
-            <a:schemeClr val="accent1"/>
-          </a:fillRef>
-          <a:effectRef idx="2">
-            <a:schemeClr val="accent1"/>
-          </a:effectRef>
-          <a:fontRef idx="minor">
-            <a:schemeClr val="lt1"/>
-          </a:fontRef>
-        </p:style>
-        <p:txBody>
-          <a:bodyPr rtlCol="0" anchor="ctr"/>
-          <a:lstStyle/>
-          <a:p>
-            <a:pPr algn="ctr"/>
-          </a:p>
-        </p:txBody>
-      </p:sp>
-      <p:sp>
-        <p:nvSpPr>
-          <p:cNvPr id="35" name="TextBox 34"/>
-          <p:cNvSpPr txBox="1"/>
-          <p:nvPr/>
-        </p:nvSpPr>
-        <p:spPr>
-          <a:xfrm>
-            <a:off x="4461123" y="4560896"/>
-            <a:ext cx="2286000" cy="271054"/>
-          </a:xfrm>
-          <a:prstGeom prst="rect">
-            <a:avLst/>
-          </a:prstGeom>
-          <a:noFill/>
-        </p:spPr>
-        <p:txBody>
-          <a:bodyPr wrap="square" lIns="0" rIns="0" tIns="0" bIns="0">
-            <a:spAutoFit/>
-          </a:bodyPr>
-          <a:lstStyle/>
-          <a:p>
-            <a:r>
-              <a:rPr sz="900" b="0">
-                <a:solidFill>
-                  <a:srgbClr val="6B7082"/>
-                </a:solidFill>
-                <a:latin typeface="Helvetica Neue"/>
-              </a:rPr>
-              <a:t>11,741 views · 13 posts</a:t>
-            </a:r>
-          </a:p>
-        </p:txBody>
-      </p:sp>
-      <p:sp>
-        <p:nvSpPr>
-          <p:cNvPr id="36" name="TextBox 35"/>
-          <p:cNvSpPr txBox="1"/>
-          <p:nvPr/>
-        </p:nvSpPr>
-        <p:spPr>
-          <a:xfrm>
-            <a:off x="731520" y="4831950"/>
-            <a:ext cx="3200400" cy="271054"/>
-          </a:xfrm>
-          <a:prstGeom prst="rect">
-            <a:avLst/>
-          </a:prstGeom>
-          <a:noFill/>
-        </p:spPr>
-        <p:txBody>
-          <a:bodyPr wrap="square" lIns="0" rIns="0" tIns="0" bIns="0">
-            <a:spAutoFit/>
-          </a:bodyPr>
-          <a:lstStyle/>
-          <a:p>
-            <a:r>
-              <a:rPr sz="1100" b="1">
-                <a:solidFill>
-                  <a:srgbClr val="141833"/>
-                </a:solidFill>
-                <a:latin typeface="Helvetica Neue"/>
-              </a:rPr>
-              <a:t>American Pride</a:t>
-            </a:r>
-          </a:p>
-        </p:txBody>
-      </p:sp>
-      <p:sp>
-        <p:nvSpPr>
-          <p:cNvPr id="37" name="Rectangle 36"/>
-          <p:cNvSpPr/>
-          <p:nvPr/>
-        </p:nvSpPr>
-        <p:spPr>
-          <a:xfrm>
-            <a:off x="4114800" y="4885182"/>
-            <a:ext cx="168656" cy="128016"/>
-          </a:xfrm>
-          <a:prstGeom prst="rect">
-            <a:avLst/>
-          </a:prstGeom>
-          <a:solidFill>
-            <a:srgbClr val="990011"/>
-          </a:solidFill>
-          <a:ln>
-            <a:noFill/>
-          </a:ln>
-          <a:effectLst/>
-        </p:spPr>
-        <p:style>
-          <a:lnRef idx="1">
-            <a:schemeClr val="accent1"/>
-          </a:lnRef>
-          <a:fillRef idx="3">
-            <a:schemeClr val="accent1"/>
-          </a:fillRef>
-          <a:effectRef idx="2">
-            <a:schemeClr val="accent1"/>
-          </a:effectRef>
-          <a:fontRef idx="minor">
-            <a:schemeClr val="lt1"/>
-          </a:fontRef>
-        </p:style>
-        <p:txBody>
-          <a:bodyPr rtlCol="0" anchor="ctr"/>
-          <a:lstStyle/>
-          <a:p>
-            <a:pPr algn="ctr"/>
-          </a:p>
-        </p:txBody>
-      </p:sp>
-      <p:sp>
-        <p:nvSpPr>
-          <p:cNvPr id="38" name="TextBox 37"/>
-          <p:cNvSpPr txBox="1"/>
-          <p:nvPr/>
-        </p:nvSpPr>
-        <p:spPr>
-          <a:xfrm>
-            <a:off x="4374896" y="4831950"/>
-            <a:ext cx="2286000" cy="271054"/>
-          </a:xfrm>
-          <a:prstGeom prst="rect">
-            <a:avLst/>
-          </a:prstGeom>
-          <a:noFill/>
-        </p:spPr>
-        <p:txBody>
-          <a:bodyPr wrap="square" lIns="0" rIns="0" tIns="0" bIns="0">
-            <a:spAutoFit/>
-          </a:bodyPr>
-          <a:lstStyle/>
-          <a:p>
-            <a:r>
-              <a:rPr sz="900" b="0">
-                <a:solidFill>
-                  <a:srgbClr val="6B7082"/>
-                </a:solidFill>
-                <a:latin typeface="Helvetica Neue"/>
-              </a:rPr>
-              <a:t>7,769 views · 15 posts</a:t>
-            </a:r>
-          </a:p>
-        </p:txBody>
-      </p:sp>
-      <p:sp>
-        <p:nvSpPr>
-          <p:cNvPr id="39" name="TextBox 38"/>
-          <p:cNvSpPr txBox="1"/>
-          <p:nvPr/>
-        </p:nvSpPr>
-        <p:spPr>
-          <a:xfrm>
-            <a:off x="731520" y="5103005"/>
-            <a:ext cx="3200400" cy="271054"/>
-          </a:xfrm>
-          <a:prstGeom prst="rect">
-            <a:avLst/>
-          </a:prstGeom>
-          <a:noFill/>
-        </p:spPr>
-        <p:txBody>
-          <a:bodyPr wrap="square" lIns="0" rIns="0" tIns="0" bIns="0">
-            <a:spAutoFit/>
-          </a:bodyPr>
-          <a:lstStyle/>
-          <a:p>
-            <a:r>
-              <a:rPr sz="1100" b="1">
-                <a:solidFill>
-                  <a:srgbClr val="141833"/>
-                </a:solidFill>
-                <a:latin typeface="Helvetica Neue"/>
-              </a:rPr>
-              <a:t>Leadership &amp; Life Lessons</a:t>
-            </a:r>
-          </a:p>
-        </p:txBody>
-      </p:sp>
-      <p:sp>
-        <p:nvSpPr>
-          <p:cNvPr id="40" name="Rectangle 39"/>
-          <p:cNvSpPr/>
-          <p:nvPr/>
-        </p:nvSpPr>
-        <p:spPr>
-          <a:xfrm>
-            <a:off x="4114800" y="5156236"/>
-            <a:ext cx="131338" cy="128016"/>
-          </a:xfrm>
-          <a:prstGeom prst="rect">
-            <a:avLst/>
-          </a:prstGeom>
-          <a:solidFill>
-            <a:srgbClr val="2E86AB"/>
-          </a:solidFill>
-          <a:ln>
-            <a:noFill/>
-          </a:ln>
-          <a:effectLst/>
-        </p:spPr>
-        <p:style>
-          <a:lnRef idx="1">
-            <a:schemeClr val="accent1"/>
-          </a:lnRef>
-          <a:fillRef idx="3">
-            <a:schemeClr val="accent1"/>
-          </a:fillRef>
-          <a:effectRef idx="2">
-            <a:schemeClr val="accent1"/>
-          </a:effectRef>
-          <a:fontRef idx="minor">
-            <a:schemeClr val="lt1"/>
-          </a:fontRef>
-        </p:style>
-        <p:txBody>
-          <a:bodyPr rtlCol="0" anchor="ctr"/>
-          <a:lstStyle/>
-          <a:p>
-            <a:pPr algn="ctr"/>
-          </a:p>
-        </p:txBody>
-      </p:sp>
-      <p:sp>
-        <p:nvSpPr>
-          <p:cNvPr id="41" name="TextBox 40"/>
-          <p:cNvSpPr txBox="1"/>
-          <p:nvPr/>
-        </p:nvSpPr>
-        <p:spPr>
-          <a:xfrm>
-            <a:off x="4337578" y="5103005"/>
-            <a:ext cx="2286000" cy="271054"/>
-          </a:xfrm>
-          <a:prstGeom prst="rect">
-            <a:avLst/>
-          </a:prstGeom>
-          <a:noFill/>
-        </p:spPr>
-        <p:txBody>
-          <a:bodyPr wrap="square" lIns="0" rIns="0" tIns="0" bIns="0">
-            <a:spAutoFit/>
-          </a:bodyPr>
-          <a:lstStyle/>
-          <a:p>
-            <a:r>
-              <a:rPr sz="900" b="0">
-                <a:solidFill>
-                  <a:srgbClr val="6B7082"/>
-                </a:solidFill>
-                <a:latin typeface="Helvetica Neue"/>
-              </a:rPr>
-              <a:t>6,050 views · 21 posts</a:t>
-            </a:r>
-          </a:p>
-        </p:txBody>
-      </p:sp>
-      <p:sp>
-        <p:nvSpPr>
-          <p:cNvPr id="42" name="TextBox 41"/>
-          <p:cNvSpPr txBox="1"/>
-          <p:nvPr/>
-        </p:nvSpPr>
-        <p:spPr>
-          <a:xfrm>
-            <a:off x="731520" y="5374059"/>
-            <a:ext cx="3200400" cy="271054"/>
-          </a:xfrm>
-          <a:prstGeom prst="rect">
-            <a:avLst/>
-          </a:prstGeom>
-          <a:noFill/>
-        </p:spPr>
-        <p:txBody>
-          <a:bodyPr wrap="square" lIns="0" rIns="0" tIns="0" bIns="0">
-            <a:spAutoFit/>
-          </a:bodyPr>
-          <a:lstStyle/>
-          <a:p>
-            <a:r>
-              <a:rPr sz="1100" b="1">
-                <a:solidFill>
-                  <a:srgbClr val="141833"/>
-                </a:solidFill>
-                <a:latin typeface="Helvetica Neue"/>
-              </a:rPr>
-              <a:t>Brand Growth Content</a:t>
-            </a:r>
-          </a:p>
-        </p:txBody>
-      </p:sp>
-      <p:sp>
-        <p:nvSpPr>
-          <p:cNvPr id="43" name="Rectangle 42"/>
-          <p:cNvSpPr/>
-          <p:nvPr/>
-        </p:nvSpPr>
-        <p:spPr>
-          <a:xfrm>
-            <a:off x="4114800" y="5427290"/>
-            <a:ext cx="48063" cy="128016"/>
+            <a:off x="4114800" y="5698344"/>
+            <a:ext cx="48034" cy="128016"/>
           </a:xfrm>
           <a:prstGeom prst="rect">
             <a:avLst/>
@@ -19433,13 +19545,13 @@
       </p:sp>
       <p:sp>
         <p:nvSpPr>
-          <p:cNvPr id="44" name="TextBox 43"/>
-          <p:cNvSpPr txBox="1"/>
-          <p:nvPr/>
-        </p:nvSpPr>
-        <p:spPr>
-          <a:xfrm>
-            <a:off x="4254303" y="5374059"/>
+          <p:cNvPr id="47" name="TextBox 46"/>
+          <p:cNvSpPr txBox="1"/>
+          <p:nvPr/>
+        </p:nvSpPr>
+        <p:spPr>
+          <a:xfrm>
+            <a:off x="4254274" y="5645113"/>
             <a:ext cx="2286000" cy="271054"/>
           </a:xfrm>
           <a:prstGeom prst="rect">
@@ -19461,118 +19573,6 @@
                 <a:latin typeface="Helvetica Neue"/>
               </a:rPr>
               <a:t>2,214 views · 4 posts</a:t>
-            </a:r>
-          </a:p>
-        </p:txBody>
-      </p:sp>
-      <p:sp>
-        <p:nvSpPr>
-          <p:cNvPr id="45" name="TextBox 44"/>
-          <p:cNvSpPr txBox="1"/>
-          <p:nvPr/>
-        </p:nvSpPr>
-        <p:spPr>
-          <a:xfrm>
-            <a:off x="731520" y="5645113"/>
-            <a:ext cx="3200400" cy="271054"/>
-          </a:xfrm>
-          <a:prstGeom prst="rect">
-            <a:avLst/>
-          </a:prstGeom>
-          <a:noFill/>
-        </p:spPr>
-        <p:txBody>
-          <a:bodyPr wrap="square" lIns="0" rIns="0" tIns="0" bIns="0">
-            <a:spAutoFit/>
-          </a:bodyPr>
-          <a:lstStyle/>
-          <a:p>
-            <a:r>
-              <a:rPr sz="1100" b="1">
-                <a:solidFill>
-                  <a:srgbClr val="141833"/>
-                </a:solidFill>
-                <a:latin typeface="Helvetica Neue"/>
-              </a:rPr>
-              <a:t>Other / Uncategorized</a:t>
-            </a:r>
-          </a:p>
-        </p:txBody>
-      </p:sp>
-      <p:sp>
-        <p:nvSpPr>
-          <p:cNvPr id="46" name="Rectangle 45"/>
-          <p:cNvSpPr/>
-          <p:nvPr/>
-        </p:nvSpPr>
-        <p:spPr>
-          <a:xfrm>
-            <a:off x="4114800" y="5698344"/>
-            <a:ext cx="45720" cy="128016"/>
-          </a:xfrm>
-          <a:prstGeom prst="rect">
-            <a:avLst/>
-          </a:prstGeom>
-          <a:solidFill>
-            <a:srgbClr val="6B7082"/>
-          </a:solidFill>
-          <a:ln>
-            <a:noFill/>
-          </a:ln>
-          <a:effectLst/>
-        </p:spPr>
-        <p:style>
-          <a:lnRef idx="1">
-            <a:schemeClr val="accent1"/>
-          </a:lnRef>
-          <a:fillRef idx="3">
-            <a:schemeClr val="accent1"/>
-          </a:fillRef>
-          <a:effectRef idx="2">
-            <a:schemeClr val="accent1"/>
-          </a:effectRef>
-          <a:fontRef idx="minor">
-            <a:schemeClr val="lt1"/>
-          </a:fontRef>
-        </p:style>
-        <p:txBody>
-          <a:bodyPr rtlCol="0" anchor="ctr"/>
-          <a:lstStyle/>
-          <a:p>
-            <a:pPr algn="ctr"/>
-          </a:p>
-        </p:txBody>
-      </p:sp>
-      <p:sp>
-        <p:nvSpPr>
-          <p:cNvPr id="47" name="TextBox 46"/>
-          <p:cNvSpPr txBox="1"/>
-          <p:nvPr/>
-        </p:nvSpPr>
-        <p:spPr>
-          <a:xfrm>
-            <a:off x="4251959" y="5645113"/>
-            <a:ext cx="2286000" cy="271054"/>
-          </a:xfrm>
-          <a:prstGeom prst="rect">
-            <a:avLst/>
-          </a:prstGeom>
-          <a:noFill/>
-        </p:spPr>
-        <p:txBody>
-          <a:bodyPr wrap="square" lIns="0" rIns="0" tIns="0" bIns="0">
-            <a:spAutoFit/>
-          </a:bodyPr>
-          <a:lstStyle/>
-          <a:p>
-            <a:r>
-              <a:rPr sz="900" b="0">
-                <a:solidFill>
-                  <a:srgbClr val="6B7082"/>
-                </a:solidFill>
-                <a:latin typeface="Helvetica Neue"/>
-              </a:rPr>
-              <a:t>1,297 views · 25 posts</a:t>
             </a:r>
           </a:p>
         </p:txBody>
@@ -20168,7 +20168,7 @@
                 </a:solidFill>
                 <a:latin typeface="Georgia"/>
               </a:rPr>
-              <a:t>286,423</a:t>
+              <a:t>286,593</a:t>
             </a:r>
           </a:p>
         </p:txBody>
@@ -20202,7 +20202,7 @@
                 </a:solidFill>
                 <a:latin typeface="Helvetica Neue"/>
               </a:rPr>
-              <a:t>69 posts · 9,877 likes</a:t>
+              <a:t>69 posts · 9,880 likes</a:t>
             </a:r>
           </a:p>
         </p:txBody>
@@ -20236,7 +20236,7 @@
                 </a:solidFill>
                 <a:latin typeface="Helvetica Neue"/>
               </a:rPr>
-              <a:t>4,151 average views per post</a:t>
+              <a:t>4,154 average views per post</a:t>
             </a:r>
           </a:p>
         </p:txBody>
@@ -21204,7 +21204,7 @@
                 </a:solidFill>
                 <a:latin typeface="Georgia"/>
               </a:rPr>
-              <a:t>102,311</a:t>
+              <a:t>105,618</a:t>
             </a:r>
           </a:p>
         </p:txBody>
@@ -21238,7 +21238,7 @@
                 </a:solidFill>
                 <a:latin typeface="Helvetica Neue"/>
               </a:rPr>
-              <a:t>49 posts · 2,196 likes</a:t>
+              <a:t>51 posts · 2,281 likes</a:t>
             </a:r>
           </a:p>
         </p:txBody>
@@ -21272,7 +21272,7 @@
                 </a:solidFill>
                 <a:latin typeface="Helvetica Neue"/>
               </a:rPr>
-              <a:t>2,088 average views per post</a:t>
+              <a:t>2,071 average views per post</a:t>
             </a:r>
           </a:p>
         </p:txBody>
@@ -22240,7 +22240,7 @@
                 </a:solidFill>
                 <a:latin typeface="Georgia"/>
               </a:rPr>
-              <a:t>76,489</a:t>
+              <a:t>76,608</a:t>
             </a:r>
           </a:p>
         </p:txBody>
@@ -22274,7 +22274,7 @@
                 </a:solidFill>
                 <a:latin typeface="Helvetica Neue"/>
               </a:rPr>
-              <a:t>43 posts · 1,776 likes</a:t>
+              <a:t>43 posts · 1,779 likes</a:t>
             </a:r>
           </a:p>
         </p:txBody>
@@ -22308,7 +22308,7 @@
                 </a:solidFill>
                 <a:latin typeface="Helvetica Neue"/>
               </a:rPr>
-              <a:t>1,779 average views per post</a:t>
+              <a:t>1,782 average views per post</a:t>
             </a:r>
           </a:p>
         </p:txBody>
@@ -23276,7 +23276,7 @@
                 </a:solidFill>
                 <a:latin typeface="Georgia"/>
               </a:rPr>
-              <a:t>75,545</a:t>
+              <a:t>75,854</a:t>
             </a:r>
           </a:p>
         </p:txBody>
@@ -23310,7 +23310,7 @@
                 </a:solidFill>
                 <a:latin typeface="Helvetica Neue"/>
               </a:rPr>
-              <a:t>71 posts · 1,513 likes</a:t>
+              <a:t>71 posts · 1,529 likes</a:t>
             </a:r>
           </a:p>
         </p:txBody>
@@ -23344,7 +23344,7 @@
                 </a:solidFill>
                 <a:latin typeface="Helvetica Neue"/>
               </a:rPr>
-              <a:t>1,064 average views per post</a:t>
+              <a:t>1,068 average views per post</a:t>
             </a:r>
           </a:p>
         </p:txBody>
